--- a/docs/MSU-EVA-อบรมสายสนับสนุน-ฉบับวิทยากร.pptx
+++ b/docs/MSU-EVA-อบรมสายสนับสนุน-ฉบับวิทยากร.pptx
@@ -2,28 +2,28 @@
 <file path=ppt/presentation.xml><?xml version="1.0" encoding="utf-8"?>
 <p:presentation xmlns:p="http://schemas.openxmlformats.org/presentationml/2006/main">
   <p:sldMasterIdLst>
-    <p:sldMasterId xmlns:r="http://schemas.openxmlformats.org/officeDocument/2006/relationships" id="2147483648" r:id="R8d343b1b4d314c8e"/>
+    <p:sldMasterId xmlns:r="http://schemas.openxmlformats.org/officeDocument/2006/relationships" id="2147483648" r:id="R2caac8b7b0484f8b"/>
   </p:sldMasterIdLst>
   <p:notesMasterIdLst>
-    <p:notesMasterId xmlns:r="http://schemas.openxmlformats.org/officeDocument/2006/relationships" r:id="R3d23fc84fa574c16"/>
+    <p:notesMasterId xmlns:r="http://schemas.openxmlformats.org/officeDocument/2006/relationships" r:id="R7795cc0a2835467d"/>
   </p:notesMasterIdLst>
   <p:sldIdLst>
-    <p:sldId xmlns:r="http://schemas.openxmlformats.org/officeDocument/2006/relationships" id="256" r:id="Rbcb0553f3f904681"/>
-    <p:sldId xmlns:r="http://schemas.openxmlformats.org/officeDocument/2006/relationships" id="257" r:id="Ra44c353cc9c74710"/>
-    <p:sldId xmlns:r="http://schemas.openxmlformats.org/officeDocument/2006/relationships" id="258" r:id="R23a0143472ab4b51"/>
-    <p:sldId xmlns:r="http://schemas.openxmlformats.org/officeDocument/2006/relationships" id="259" r:id="Rebfa54f56fb54095"/>
-    <p:sldId xmlns:r="http://schemas.openxmlformats.org/officeDocument/2006/relationships" id="260" r:id="Rc133ae521ef64b7f"/>
-    <p:sldId xmlns:r="http://schemas.openxmlformats.org/officeDocument/2006/relationships" id="261" r:id="Rd1ee0935287543c2"/>
-    <p:sldId xmlns:r="http://schemas.openxmlformats.org/officeDocument/2006/relationships" id="262" r:id="Rc929c05e87f94bc1"/>
-    <p:sldId xmlns:r="http://schemas.openxmlformats.org/officeDocument/2006/relationships" id="263" r:id="R393b272e168d4727"/>
-    <p:sldId xmlns:r="http://schemas.openxmlformats.org/officeDocument/2006/relationships" id="264" r:id="R5151c48c91674b3a"/>
-    <p:sldId xmlns:r="http://schemas.openxmlformats.org/officeDocument/2006/relationships" id="265" r:id="Ree6c7cfd3dea4d15"/>
-    <p:sldId xmlns:r="http://schemas.openxmlformats.org/officeDocument/2006/relationships" id="266" r:id="R30e73642234644aa"/>
-    <p:sldId xmlns:r="http://schemas.openxmlformats.org/officeDocument/2006/relationships" id="267" r:id="Rad93a65407b34c44"/>
-    <p:sldId xmlns:r="http://schemas.openxmlformats.org/officeDocument/2006/relationships" id="268" r:id="R4197c0477bd047c9"/>
-    <p:sldId xmlns:r="http://schemas.openxmlformats.org/officeDocument/2006/relationships" id="269" r:id="R561dab17604f491d"/>
-    <p:sldId xmlns:r="http://schemas.openxmlformats.org/officeDocument/2006/relationships" id="270" r:id="Rd3084f76cada4d8d"/>
-    <p:sldId xmlns:r="http://schemas.openxmlformats.org/officeDocument/2006/relationships" id="271" r:id="R52ab1ca1d8f14d09"/>
+    <p:sldId xmlns:r="http://schemas.openxmlformats.org/officeDocument/2006/relationships" id="256" r:id="R9f9d290b8f6c4535"/>
+    <p:sldId xmlns:r="http://schemas.openxmlformats.org/officeDocument/2006/relationships" id="257" r:id="Ra6617fcdb7a84148"/>
+    <p:sldId xmlns:r="http://schemas.openxmlformats.org/officeDocument/2006/relationships" id="258" r:id="R3f2d5bc42a844298"/>
+    <p:sldId xmlns:r="http://schemas.openxmlformats.org/officeDocument/2006/relationships" id="259" r:id="Rd47c52411831481f"/>
+    <p:sldId xmlns:r="http://schemas.openxmlformats.org/officeDocument/2006/relationships" id="260" r:id="R361431550f0a4e1e"/>
+    <p:sldId xmlns:r="http://schemas.openxmlformats.org/officeDocument/2006/relationships" id="261" r:id="Re135891ea48e42d6"/>
+    <p:sldId xmlns:r="http://schemas.openxmlformats.org/officeDocument/2006/relationships" id="262" r:id="Rf0a5b9ccb9cc433a"/>
+    <p:sldId xmlns:r="http://schemas.openxmlformats.org/officeDocument/2006/relationships" id="263" r:id="Rc03a9c6ad5954f75"/>
+    <p:sldId xmlns:r="http://schemas.openxmlformats.org/officeDocument/2006/relationships" id="264" r:id="R2fb028bfdcee4e8e"/>
+    <p:sldId xmlns:r="http://schemas.openxmlformats.org/officeDocument/2006/relationships" id="265" r:id="Rdb92fd087eaa4327"/>
+    <p:sldId xmlns:r="http://schemas.openxmlformats.org/officeDocument/2006/relationships" id="266" r:id="R319e6f61d05148a1"/>
+    <p:sldId xmlns:r="http://schemas.openxmlformats.org/officeDocument/2006/relationships" id="267" r:id="R4eab60b2fda94c7c"/>
+    <p:sldId xmlns:r="http://schemas.openxmlformats.org/officeDocument/2006/relationships" id="268" r:id="Rcaee6477560842c8"/>
+    <p:sldId xmlns:r="http://schemas.openxmlformats.org/officeDocument/2006/relationships" id="269" r:id="R189d4b58a1194c66"/>
+    <p:sldId xmlns:r="http://schemas.openxmlformats.org/officeDocument/2006/relationships" id="270" r:id="R7679ad7aca7f4357"/>
+    <p:sldId xmlns:r="http://schemas.openxmlformats.org/officeDocument/2006/relationships" id="271" r:id="R26a83b5888184158"/>
   </p:sldIdLst>
   <p:sldSz cx="12192000" cy="6858000"/>
   <p:notesSz cx="6858000" cy="9144000"/>
@@ -1567,12 +1567,12 @@
           <a:lstStyle xmlns:a="http://schemas.openxmlformats.org/drawingml/2006/main"/>
           <a:p xmlns:a="http://schemas.openxmlformats.org/drawingml/2006/main">
             <a:r>
-              <a:t>[พูด] ก่อนเปิดงาน ให้ตรวจรอบประเมิน รายการที่ได้รับมอบหมาย และสถานะปัจจุบัน โดยเฉพาะผู้ที่มีหลายบทบาทต้องตรวจว่ากำลังใช้บัญชีและหน้าจอที่ถูกต้อง ต่อไปผมจะเปิดหนึ่งรายการให้ดู ทุกท่านยังไม่ต้องทำตาม ให้สังเกตว่าผมเริ่มจากตรงไหน เลือกกิจกรรมใด และตรวจสถานะอย่างไรก่อนกรอกข้อมูล</a:t>
-            </a:r>
-          </a:p>
-          <a:p xmlns:a="http://schemas.openxmlformats.org/drawingml/2006/main">
-            <a:r>
-              <a:t>[สาธิต] เปิดแดชบอร์ด ตรวจรอบประเมิน แล้วเปิดรายการสายสนับสนุนที่เตรียมไว้</a:t>
+              <a:t>[พูด] ก่อนเปิดงาน ให้ตรวจรอบประเมินที่ผู้ดูแลระบบกำหนด รายการที่ได้รับมอบหมาย และสถานะปัจจุบัน ผู้ใช้งานไม่ต้องเลือกรอบประเมินเอง หากข้อมูลไม่ถูกต้องให้แจ้งผู้ดูแลระบบ โดยเฉพาะผู้ที่มีหลายบทบาทต้องตรวจว่ากำลังใช้บัญชีและหน้าจอที่ถูกต้อง ต่อไปผมจะเปิดหนึ่งรายการให้ดู ทุกท่านยังไม่ต้องทำตาม ให้สังเกตว่าผมเริ่มจากตรงไหน เลือกกิจกรรมใด และตรวจสถานะอย่างไรก่อนกรอกข้อมูล</a:t>
+            </a:r>
+          </a:p>
+          <a:p xmlns:a="http://schemas.openxmlformats.org/drawingml/2006/main">
+            <a:r>
+              <a:t>[สาธิต] เปิดแดชบอร์ด ตรวจสอบรอบประเมินที่ได้รับมอบหมาย แล้วเปิดรายการสายสนับสนุนที่เตรียมไว้</a:t>
             </a:r>
           </a:p>
           <a:p xmlns:a="http://schemas.openxmlformats.org/drawingml/2006/main">
@@ -2030,7 +2030,7 @@
   </p:cSld>
   <p:clrMap bg1="lt1" tx1="dk1" bg2="lt2" tx2="dk2" accent1="accent1" accent2="accent2" accent3="accent3" accent4="accent4" accent5="accent5" accent6="accent6" hlink="hlink" folHlink="folHlink"/>
   <p:sldLayoutIdLst>
-    <p:sldLayoutId xmlns:r="http://schemas.openxmlformats.org/officeDocument/2006/relationships" id="2147483649" r:id="R9595a86ed2584b49"/>
+    <p:sldLayoutId xmlns:r="http://schemas.openxmlformats.org/officeDocument/2006/relationships" id="2147483649" r:id="Re0a4c805ce504b3c"/>
   </p:sldLayoutIdLst>
   <p:txStyles>
     <p:titleStyle>
@@ -2585,7 +2585,7 @@
           <p:nvPr/>
         </p:nvPicPr>
         <p:blipFill>
-          <a:blip xmlns:r="http://schemas.openxmlformats.org/officeDocument/2006/relationships" xmlns:a="http://schemas.openxmlformats.org/drawingml/2006/main" r:embed="R1accb1cbaa534484"/>
+          <a:blip xmlns:r="http://schemas.openxmlformats.org/officeDocument/2006/relationships" xmlns:a="http://schemas.openxmlformats.org/drawingml/2006/main" r:embed="R6de0ea248b394e0e"/>
           <a:srcRect xmlns:a="http://schemas.openxmlformats.org/drawingml/2006/main" l="2579" t="0" r="2579" b="0"/>
           <a:stretch xmlns:a="http://schemas.openxmlformats.org/drawingml/2006/main">
             <a:fillRect l="0" t="0" r="0" b="0"/>
@@ -2606,7 +2606,7 @@
           <p:cNvPr id="2" name="cover-panel">
             <a:extLst xmlns:a="http://schemas.openxmlformats.org/drawingml/2006/main">
               <a:ext uri="{FF2B5EF4-FFF2-40B4-BE49-F238E27FC236}">
-                <a16:creationId xmlns:a16="http://schemas.microsoft.com/office/drawing/2014/main" id="{DC642EAF-268B-44EE-959B-C52DB09EA9C6}"/>
+                <a16:creationId xmlns:a16="http://schemas.microsoft.com/office/drawing/2014/main" id="{7C8C3E21-1693-4652-BA41-BD95196BB4CF}"/>
               </a:ext>
             </a:extLst>
           </p:cNvPr>
@@ -2637,7 +2637,7 @@
           <p:cNvPr id="3" name="cover-accent">
             <a:extLst xmlns:a="http://schemas.openxmlformats.org/drawingml/2006/main">
               <a:ext uri="{FF2B5EF4-FFF2-40B4-BE49-F238E27FC236}">
-                <a16:creationId xmlns:a16="http://schemas.microsoft.com/office/drawing/2014/main" id="{C7732353-253A-49E2-981A-C8EB1404E0EB}"/>
+                <a16:creationId xmlns:a16="http://schemas.microsoft.com/office/drawing/2014/main" id="{41C48AA2-D1A0-49E5-8646-C224E4D9A44C}"/>
               </a:ext>
             </a:extLst>
           </p:cNvPr>
@@ -2672,7 +2672,7 @@
           <p:nvPr/>
         </p:nvPicPr>
         <p:blipFill>
-          <a:blip xmlns:r="http://schemas.openxmlformats.org/officeDocument/2006/relationships" xmlns:a="http://schemas.openxmlformats.org/drawingml/2006/main" r:embed="R1676612604064fcb"/>
+          <a:blip xmlns:r="http://schemas.openxmlformats.org/officeDocument/2006/relationships" xmlns:a="http://schemas.openxmlformats.org/drawingml/2006/main" r:embed="R1a01695cdb114798"/>
           <a:stretch xmlns:a="http://schemas.openxmlformats.org/drawingml/2006/main"/>
         </p:blipFill>
         <p:spPr>
@@ -2690,7 +2690,7 @@
           <p:cNvPr id="5" name="cover-institution">
             <a:extLst xmlns:a="http://schemas.openxmlformats.org/drawingml/2006/main">
               <a:ext uri="{FF2B5EF4-FFF2-40B4-BE49-F238E27FC236}">
-                <a16:creationId xmlns:a16="http://schemas.microsoft.com/office/drawing/2014/main" id="{7A824816-A017-4D4B-BF30-97A2C5A3C7E0}"/>
+                <a16:creationId xmlns:a16="http://schemas.microsoft.com/office/drawing/2014/main" id="{4D2AAE81-19A6-4CED-ABE2-A6613ABBDF12}"/>
               </a:ext>
             </a:extLst>
           </p:cNvPr>
@@ -2752,7 +2752,7 @@
           <p:cNvPr id="6" name="cover-session">
             <a:extLst xmlns:a="http://schemas.openxmlformats.org/drawingml/2006/main">
               <a:ext uri="{FF2B5EF4-FFF2-40B4-BE49-F238E27FC236}">
-                <a16:creationId xmlns:a16="http://schemas.microsoft.com/office/drawing/2014/main" id="{20E463AC-D1F2-4773-AC52-72C8B0876354}"/>
+                <a16:creationId xmlns:a16="http://schemas.microsoft.com/office/drawing/2014/main" id="{523EDA3C-0FB6-4F9A-A3EA-B7916D466C01}"/>
               </a:ext>
             </a:extLst>
           </p:cNvPr>
@@ -2814,7 +2814,7 @@
           <p:cNvPr id="7" name="cover-title">
             <a:extLst xmlns:a="http://schemas.openxmlformats.org/drawingml/2006/main">
               <a:ext uri="{FF2B5EF4-FFF2-40B4-BE49-F238E27FC236}">
-                <a16:creationId xmlns:a16="http://schemas.microsoft.com/office/drawing/2014/main" id="{19EA24CC-9F3C-4E63-BD33-D4F7DCA8A496}"/>
+                <a16:creationId xmlns:a16="http://schemas.microsoft.com/office/drawing/2014/main" id="{25CECEF7-5E80-4EF9-938B-9ABABFD5DE6D}"/>
               </a:ext>
             </a:extLst>
           </p:cNvPr>
@@ -2903,7 +2903,7 @@
           <p:cNvPr id="8" name="cover-gold-rule">
             <a:extLst xmlns:a="http://schemas.openxmlformats.org/drawingml/2006/main">
               <a:ext uri="{FF2B5EF4-FFF2-40B4-BE49-F238E27FC236}">
-                <a16:creationId xmlns:a16="http://schemas.microsoft.com/office/drawing/2014/main" id="{66D0D80C-8F8B-4D8F-8E35-68686045772B}"/>
+                <a16:creationId xmlns:a16="http://schemas.microsoft.com/office/drawing/2014/main" id="{498B77DC-5AFD-43E0-98F8-FCD6B74993DC}"/>
               </a:ext>
             </a:extLst>
           </p:cNvPr>
@@ -2934,7 +2934,7 @@
           <p:cNvPr id="9" name="cover-promise">
             <a:extLst xmlns:a="http://schemas.openxmlformats.org/drawingml/2006/main">
               <a:ext uri="{FF2B5EF4-FFF2-40B4-BE49-F238E27FC236}">
-                <a16:creationId xmlns:a16="http://schemas.microsoft.com/office/drawing/2014/main" id="{20BA3533-6970-4195-85E2-A2809B14A2AD}"/>
+                <a16:creationId xmlns:a16="http://schemas.microsoft.com/office/drawing/2014/main" id="{8EBACB45-2B16-41AB-AD9F-C281E4CE5A20}"/>
               </a:ext>
             </a:extLst>
           </p:cNvPr>
@@ -2996,7 +2996,7 @@
           <p:cNvPr id="10" name="cover-style">
             <a:extLst xmlns:a="http://schemas.openxmlformats.org/drawingml/2006/main">
               <a:ext uri="{FF2B5EF4-FFF2-40B4-BE49-F238E27FC236}">
-                <a16:creationId xmlns:a16="http://schemas.microsoft.com/office/drawing/2014/main" id="{AE5BB813-985A-4FB5-8F29-97DD277A38F8}"/>
+                <a16:creationId xmlns:a16="http://schemas.microsoft.com/office/drawing/2014/main" id="{31B1E907-2A65-4EE1-9AF9-969E1D530982}"/>
               </a:ext>
             </a:extLst>
           </p:cNvPr>
@@ -3062,7 +3062,7 @@
           <p:nvPr/>
         </p:nvPicPr>
         <p:blipFill>
-          <a:blip xmlns:r="http://schemas.openxmlformats.org/officeDocument/2006/relationships" xmlns:a="http://schemas.openxmlformats.org/drawingml/2006/main" r:embed="Rf75db6f6e219473c"/>
+          <a:blip xmlns:r="http://schemas.openxmlformats.org/officeDocument/2006/relationships" xmlns:a="http://schemas.openxmlformats.org/drawingml/2006/main" r:embed="Ra1009543f511490a"/>
           <a:stretch xmlns:a="http://schemas.openxmlformats.org/drawingml/2006/main"/>
         </p:blipFill>
         <p:spPr>
@@ -3078,7 +3078,7 @@
     </p:spTree>
     <p:extLst>
       <p:ext uri="{BB962C8B-B14F-4D97-AF65-F5344CB8AC3E}">
-        <p14:creationId xmlns:p14="http://schemas.microsoft.com/office/powerpoint/2010/main" val="623505645"/>
+        <p14:creationId xmlns:p14="http://schemas.microsoft.com/office/powerpoint/2010/main" val="1858386213"/>
       </p:ext>
     </p:extLst>
   </p:cSld>
@@ -3109,7 +3109,7 @@
           <p:cNvPr id="22" name="side-accent-10">
             <a:extLst xmlns:a="http://schemas.openxmlformats.org/drawingml/2006/main">
               <a:ext uri="{FF2B5EF4-FFF2-40B4-BE49-F238E27FC236}">
-                <a16:creationId xmlns:a16="http://schemas.microsoft.com/office/drawing/2014/main" id="{B46CCAD2-D4A4-4CEA-A7AC-81330D13ACC3}"/>
+                <a16:creationId xmlns:a16="http://schemas.microsoft.com/office/drawing/2014/main" id="{71299A06-827B-4316-ABF4-128FD44151F9}"/>
               </a:ext>
             </a:extLst>
           </p:cNvPr>
@@ -3140,7 +3140,7 @@
           <p:cNvPr id="2" name="kicker-10">
             <a:extLst xmlns:a="http://schemas.openxmlformats.org/drawingml/2006/main">
               <a:ext uri="{FF2B5EF4-FFF2-40B4-BE49-F238E27FC236}">
-                <a16:creationId xmlns:a16="http://schemas.microsoft.com/office/drawing/2014/main" id="{E0C4884F-7E70-4C1E-AC08-3F62405439BE}"/>
+                <a16:creationId xmlns:a16="http://schemas.microsoft.com/office/drawing/2014/main" id="{44A9480B-2171-40B1-9EAF-EA61052D6FDE}"/>
               </a:ext>
             </a:extLst>
           </p:cNvPr>
@@ -3202,7 +3202,7 @@
           <p:cNvPr id="3" name="title-10">
             <a:extLst xmlns:a="http://schemas.openxmlformats.org/drawingml/2006/main">
               <a:ext uri="{FF2B5EF4-FFF2-40B4-BE49-F238E27FC236}">
-                <a16:creationId xmlns:a16="http://schemas.microsoft.com/office/drawing/2014/main" id="{04F6DB57-D4C5-4AE6-A6DB-A2B49860C729}"/>
+                <a16:creationId xmlns:a16="http://schemas.microsoft.com/office/drawing/2014/main" id="{D1009ABB-63C4-40CD-9A4A-2AE9A3265551}"/>
               </a:ext>
             </a:extLst>
           </p:cNvPr>
@@ -3264,7 +3264,7 @@
           <p:cNvPr id="4" name="">
             <a:extLst xmlns:a="http://schemas.openxmlformats.org/drawingml/2006/main">
               <a:ext uri="{FF2B5EF4-FFF2-40B4-BE49-F238E27FC236}">
-                <a16:creationId xmlns:a16="http://schemas.microsoft.com/office/drawing/2014/main" id="{B0F3B398-D57A-41DC-AEE7-1086732DD11F}"/>
+                <a16:creationId xmlns:a16="http://schemas.microsoft.com/office/drawing/2014/main" id="{F8885AEA-BD81-41C7-889D-B208252EAC77}"/>
               </a:ext>
             </a:extLst>
           </p:cNvPr>
@@ -3326,7 +3326,7 @@
           <p:cNvPr id="5" name="">
             <a:extLst xmlns:a="http://schemas.openxmlformats.org/drawingml/2006/main">
               <a:ext uri="{FF2B5EF4-FFF2-40B4-BE49-F238E27FC236}">
-                <a16:creationId xmlns:a16="http://schemas.microsoft.com/office/drawing/2014/main" id="{5F4338F9-7A83-4EB9-AB49-EE0C4D238ECD}"/>
+                <a16:creationId xmlns:a16="http://schemas.microsoft.com/office/drawing/2014/main" id="{725C44F6-40D9-47DC-844D-6FB359B06F62}"/>
               </a:ext>
             </a:extLst>
           </p:cNvPr>
@@ -3357,7 +3357,7 @@
           <p:cNvPr id="6" name="">
             <a:extLst xmlns:a="http://schemas.openxmlformats.org/drawingml/2006/main">
               <a:ext uri="{FF2B5EF4-FFF2-40B4-BE49-F238E27FC236}">
-                <a16:creationId xmlns:a16="http://schemas.microsoft.com/office/drawing/2014/main" id="{91CC9035-21AD-4139-9ABA-49F12660DBC0}"/>
+                <a16:creationId xmlns:a16="http://schemas.microsoft.com/office/drawing/2014/main" id="{5B512061-3028-4CF8-AD49-47D9AB89BC5F}"/>
               </a:ext>
             </a:extLst>
           </p:cNvPr>
@@ -3419,7 +3419,7 @@
           <p:cNvPr id="7" name="">
             <a:extLst xmlns:a="http://schemas.openxmlformats.org/drawingml/2006/main">
               <a:ext uri="{FF2B5EF4-FFF2-40B4-BE49-F238E27FC236}">
-                <a16:creationId xmlns:a16="http://schemas.microsoft.com/office/drawing/2014/main" id="{41772924-07C3-49DE-8E37-8B6E03493CCD}"/>
+                <a16:creationId xmlns:a16="http://schemas.microsoft.com/office/drawing/2014/main" id="{DF66901D-9C0E-49A3-A729-32351AB8427F}"/>
               </a:ext>
             </a:extLst>
           </p:cNvPr>
@@ -3481,7 +3481,7 @@
           <p:cNvPr id="8" name="">
             <a:extLst xmlns:a="http://schemas.openxmlformats.org/drawingml/2006/main">
               <a:ext uri="{FF2B5EF4-FFF2-40B4-BE49-F238E27FC236}">
-                <a16:creationId xmlns:a16="http://schemas.microsoft.com/office/drawing/2014/main" id="{AFFBE678-34CB-4932-8B51-E7CE9DC44513}"/>
+                <a16:creationId xmlns:a16="http://schemas.microsoft.com/office/drawing/2014/main" id="{715F13E8-775D-4614-A23F-F966F94A42E2}"/>
               </a:ext>
             </a:extLst>
           </p:cNvPr>
@@ -3543,7 +3543,7 @@
           <p:cNvPr id="9" name="">
             <a:extLst xmlns:a="http://schemas.openxmlformats.org/drawingml/2006/main">
               <a:ext uri="{FF2B5EF4-FFF2-40B4-BE49-F238E27FC236}">
-                <a16:creationId xmlns:a16="http://schemas.microsoft.com/office/drawing/2014/main" id="{5B836B33-D4A6-4065-8519-1C3EB125058E}"/>
+                <a16:creationId xmlns:a16="http://schemas.microsoft.com/office/drawing/2014/main" id="{1F29D80E-B6C2-4A3C-A940-16476F6009B0}"/>
               </a:ext>
             </a:extLst>
           </p:cNvPr>
@@ -3574,7 +3574,7 @@
           <p:cNvPr id="10" name="">
             <a:extLst xmlns:a="http://schemas.openxmlformats.org/drawingml/2006/main">
               <a:ext uri="{FF2B5EF4-FFF2-40B4-BE49-F238E27FC236}">
-                <a16:creationId xmlns:a16="http://schemas.microsoft.com/office/drawing/2014/main" id="{3A70367D-A87C-437F-AFEE-357006DC428D}"/>
+                <a16:creationId xmlns:a16="http://schemas.microsoft.com/office/drawing/2014/main" id="{6933FF2B-B184-4EEF-B7D2-F11505CE84F1}"/>
               </a:ext>
             </a:extLst>
           </p:cNvPr>
@@ -3636,7 +3636,7 @@
           <p:cNvPr id="11" name="">
             <a:extLst xmlns:a="http://schemas.openxmlformats.org/drawingml/2006/main">
               <a:ext uri="{FF2B5EF4-FFF2-40B4-BE49-F238E27FC236}">
-                <a16:creationId xmlns:a16="http://schemas.microsoft.com/office/drawing/2014/main" id="{26B31CDE-07FA-489F-AD0E-6BD654E79A98}"/>
+                <a16:creationId xmlns:a16="http://schemas.microsoft.com/office/drawing/2014/main" id="{5F8E0297-E63E-4077-93BC-198560E695D6}"/>
               </a:ext>
             </a:extLst>
           </p:cNvPr>
@@ -3698,7 +3698,7 @@
           <p:cNvPr id="12" name="">
             <a:extLst xmlns:a="http://schemas.openxmlformats.org/drawingml/2006/main">
               <a:ext uri="{FF2B5EF4-FFF2-40B4-BE49-F238E27FC236}">
-                <a16:creationId xmlns:a16="http://schemas.microsoft.com/office/drawing/2014/main" id="{F0550247-D640-4E81-B125-50AD62B671E3}"/>
+                <a16:creationId xmlns:a16="http://schemas.microsoft.com/office/drawing/2014/main" id="{485E3AA4-83ED-41FF-8881-DB8E9FC78FD3}"/>
               </a:ext>
             </a:extLst>
           </p:cNvPr>
@@ -3760,7 +3760,7 @@
           <p:cNvPr id="13" name="">
             <a:extLst xmlns:a="http://schemas.openxmlformats.org/drawingml/2006/main">
               <a:ext uri="{FF2B5EF4-FFF2-40B4-BE49-F238E27FC236}">
-                <a16:creationId xmlns:a16="http://schemas.microsoft.com/office/drawing/2014/main" id="{86985E1A-3D0F-4658-A895-570AA8011C13}"/>
+                <a16:creationId xmlns:a16="http://schemas.microsoft.com/office/drawing/2014/main" id="{1E345784-B11F-4C44-ACBB-D2919E0BD217}"/>
               </a:ext>
             </a:extLst>
           </p:cNvPr>
@@ -3791,7 +3791,7 @@
           <p:cNvPr id="14" name="">
             <a:extLst xmlns:a="http://schemas.openxmlformats.org/drawingml/2006/main">
               <a:ext uri="{FF2B5EF4-FFF2-40B4-BE49-F238E27FC236}">
-                <a16:creationId xmlns:a16="http://schemas.microsoft.com/office/drawing/2014/main" id="{E0C45D5A-3B03-4465-B68C-BD26AAE22633}"/>
+                <a16:creationId xmlns:a16="http://schemas.microsoft.com/office/drawing/2014/main" id="{AF458E2F-1EAA-4C66-B530-3B0EE1B021C9}"/>
               </a:ext>
             </a:extLst>
           </p:cNvPr>
@@ -3853,7 +3853,7 @@
           <p:cNvPr id="15" name="">
             <a:extLst xmlns:a="http://schemas.openxmlformats.org/drawingml/2006/main">
               <a:ext uri="{FF2B5EF4-FFF2-40B4-BE49-F238E27FC236}">
-                <a16:creationId xmlns:a16="http://schemas.microsoft.com/office/drawing/2014/main" id="{445402D5-6D26-44A8-8DAD-9479EB8A0AD7}"/>
+                <a16:creationId xmlns:a16="http://schemas.microsoft.com/office/drawing/2014/main" id="{2C5B2876-68EB-46A2-9406-9D05DF8830FA}"/>
               </a:ext>
             </a:extLst>
           </p:cNvPr>
@@ -3915,7 +3915,7 @@
           <p:cNvPr id="16" name="">
             <a:extLst xmlns:a="http://schemas.openxmlformats.org/drawingml/2006/main">
               <a:ext uri="{FF2B5EF4-FFF2-40B4-BE49-F238E27FC236}">
-                <a16:creationId xmlns:a16="http://schemas.microsoft.com/office/drawing/2014/main" id="{2383BEF8-B8E3-4A3C-AFA9-B6F29B9C7619}"/>
+                <a16:creationId xmlns:a16="http://schemas.microsoft.com/office/drawing/2014/main" id="{00A6B63A-D35E-4AD3-9745-81203DBC5103}"/>
               </a:ext>
             </a:extLst>
           </p:cNvPr>
@@ -3977,7 +3977,7 @@
           <p:cNvPr id="17" name="">
             <a:extLst xmlns:a="http://schemas.openxmlformats.org/drawingml/2006/main">
               <a:ext uri="{FF2B5EF4-FFF2-40B4-BE49-F238E27FC236}">
-                <a16:creationId xmlns:a16="http://schemas.microsoft.com/office/drawing/2014/main" id="{01A1BD0E-CD68-4AC7-9410-C9C4893296F4}"/>
+                <a16:creationId xmlns:a16="http://schemas.microsoft.com/office/drawing/2014/main" id="{8CE0BCA3-A677-4745-9471-7BC916F927EC}"/>
               </a:ext>
             </a:extLst>
           </p:cNvPr>
@@ -4012,7 +4012,7 @@
           <p:cNvPr id="18" name="">
             <a:extLst xmlns:a="http://schemas.openxmlformats.org/drawingml/2006/main">
               <a:ext uri="{FF2B5EF4-FFF2-40B4-BE49-F238E27FC236}">
-                <a16:creationId xmlns:a16="http://schemas.microsoft.com/office/drawing/2014/main" id="{B5FCE001-BD76-482A-AC6B-3E70FCBF3DA3}"/>
+                <a16:creationId xmlns:a16="http://schemas.microsoft.com/office/drawing/2014/main" id="{668895F4-914B-420B-889F-98270A8B1D0A}"/>
               </a:ext>
             </a:extLst>
           </p:cNvPr>
@@ -4101,7 +4101,7 @@
           <p:cNvPr id="19" name="footer-rule-10">
             <a:extLst xmlns:a="http://schemas.openxmlformats.org/drawingml/2006/main">
               <a:ext uri="{FF2B5EF4-FFF2-40B4-BE49-F238E27FC236}">
-                <a16:creationId xmlns:a16="http://schemas.microsoft.com/office/drawing/2014/main" id="{E48A08FF-1808-4CDA-A38D-6264691F881D}"/>
+                <a16:creationId xmlns:a16="http://schemas.microsoft.com/office/drawing/2014/main" id="{D799602B-C799-47C6-83ED-69F770A6CC8F}"/>
               </a:ext>
             </a:extLst>
           </p:cNvPr>
@@ -4132,7 +4132,7 @@
           <p:cNvPr id="20" name="footer-label-10">
             <a:extLst xmlns:a="http://schemas.openxmlformats.org/drawingml/2006/main">
               <a:ext uri="{FF2B5EF4-FFF2-40B4-BE49-F238E27FC236}">
-                <a16:creationId xmlns:a16="http://schemas.microsoft.com/office/drawing/2014/main" id="{C3EE4C84-FF38-4CA1-80BF-D75DCCD7E009}"/>
+                <a16:creationId xmlns:a16="http://schemas.microsoft.com/office/drawing/2014/main" id="{5AF985AA-246B-4D90-AE29-7E83251777CE}"/>
               </a:ext>
             </a:extLst>
           </p:cNvPr>
@@ -4194,7 +4194,7 @@
           <p:cNvPr id="21" name="footer-page-10">
             <a:extLst xmlns:a="http://schemas.openxmlformats.org/drawingml/2006/main">
               <a:ext uri="{FF2B5EF4-FFF2-40B4-BE49-F238E27FC236}">
-                <a16:creationId xmlns:a16="http://schemas.microsoft.com/office/drawing/2014/main" id="{5C0D5150-A5C9-466B-9A93-705968444E08}"/>
+                <a16:creationId xmlns:a16="http://schemas.microsoft.com/office/drawing/2014/main" id="{AD89F4AC-6139-44A4-BBC5-AA1DFF7C207B}"/>
               </a:ext>
             </a:extLst>
           </p:cNvPr>
@@ -4254,7 +4254,7 @@
     </p:spTree>
     <p:extLst>
       <p:ext uri="{BB962C8B-B14F-4D97-AF65-F5344CB8AC3E}">
-        <p14:creationId xmlns:p14="http://schemas.microsoft.com/office/powerpoint/2010/main" val="1863270154"/>
+        <p14:creationId xmlns:p14="http://schemas.microsoft.com/office/powerpoint/2010/main" val="736058036"/>
       </p:ext>
     </p:extLst>
   </p:cSld>
@@ -4285,7 +4285,7 @@
           <p:cNvPr id="14" name="side-accent-11">
             <a:extLst xmlns:a="http://schemas.openxmlformats.org/drawingml/2006/main">
               <a:ext uri="{FF2B5EF4-FFF2-40B4-BE49-F238E27FC236}">
-                <a16:creationId xmlns:a16="http://schemas.microsoft.com/office/drawing/2014/main" id="{E6346E21-9376-4746-B4FA-1D20C8D17918}"/>
+                <a16:creationId xmlns:a16="http://schemas.microsoft.com/office/drawing/2014/main" id="{45C48C77-8D4C-47C4-82D0-50684CB5503F}"/>
               </a:ext>
             </a:extLst>
           </p:cNvPr>
@@ -4316,7 +4316,7 @@
           <p:cNvPr id="2" name="kicker-11">
             <a:extLst xmlns:a="http://schemas.openxmlformats.org/drawingml/2006/main">
               <a:ext uri="{FF2B5EF4-FFF2-40B4-BE49-F238E27FC236}">
-                <a16:creationId xmlns:a16="http://schemas.microsoft.com/office/drawing/2014/main" id="{11C7E6DF-EE62-4592-A97A-A2B200632AC1}"/>
+                <a16:creationId xmlns:a16="http://schemas.microsoft.com/office/drawing/2014/main" id="{974B95D2-BA4C-4956-8AD4-448B0190CF3E}"/>
               </a:ext>
             </a:extLst>
           </p:cNvPr>
@@ -4378,7 +4378,7 @@
           <p:cNvPr id="3" name="title-11">
             <a:extLst xmlns:a="http://schemas.openxmlformats.org/drawingml/2006/main">
               <a:ext uri="{FF2B5EF4-FFF2-40B4-BE49-F238E27FC236}">
-                <a16:creationId xmlns:a16="http://schemas.microsoft.com/office/drawing/2014/main" id="{2D56EB79-BB1B-4F51-9076-5B1BE3BBBC03}"/>
+                <a16:creationId xmlns:a16="http://schemas.microsoft.com/office/drawing/2014/main" id="{FC0755D5-41B1-46B9-BCAC-0BA8ADE94D95}"/>
               </a:ext>
             </a:extLst>
           </p:cNvPr>
@@ -4440,7 +4440,7 @@
           <p:cNvPr id="4" name="draft-panel">
             <a:extLst xmlns:a="http://schemas.openxmlformats.org/drawingml/2006/main">
               <a:ext uri="{FF2B5EF4-FFF2-40B4-BE49-F238E27FC236}">
-                <a16:creationId xmlns:a16="http://schemas.microsoft.com/office/drawing/2014/main" id="{5C37948D-539E-4887-98AA-A7AECE49E895}"/>
+                <a16:creationId xmlns:a16="http://schemas.microsoft.com/office/drawing/2014/main" id="{12172C8F-C967-4E77-8AB1-C8F501E5D2A2}"/>
               </a:ext>
             </a:extLst>
           </p:cNvPr>
@@ -4475,7 +4475,7 @@
           <p:cNvPr id="5" name="">
             <a:extLst xmlns:a="http://schemas.openxmlformats.org/drawingml/2006/main">
               <a:ext uri="{FF2B5EF4-FFF2-40B4-BE49-F238E27FC236}">
-                <a16:creationId xmlns:a16="http://schemas.microsoft.com/office/drawing/2014/main" id="{DBB92F87-A470-4722-AD61-CCC92A6E3412}"/>
+                <a16:creationId xmlns:a16="http://schemas.microsoft.com/office/drawing/2014/main" id="{FBE0D041-15D1-4D50-BDDB-402ED19D9B26}"/>
               </a:ext>
             </a:extLst>
           </p:cNvPr>
@@ -4537,7 +4537,7 @@
           <p:cNvPr id="6" name="">
             <a:extLst xmlns:a="http://schemas.openxmlformats.org/drawingml/2006/main">
               <a:ext uri="{FF2B5EF4-FFF2-40B4-BE49-F238E27FC236}">
-                <a16:creationId xmlns:a16="http://schemas.microsoft.com/office/drawing/2014/main" id="{A34D3DAD-3F78-4424-98E8-7501C2623103}"/>
+                <a16:creationId xmlns:a16="http://schemas.microsoft.com/office/drawing/2014/main" id="{63687E59-CCEE-4EA8-9363-CC35AEC06980}"/>
               </a:ext>
             </a:extLst>
           </p:cNvPr>
@@ -4653,7 +4653,7 @@
           <p:cNvPr id="7" name="submit-panel">
             <a:extLst xmlns:a="http://schemas.openxmlformats.org/drawingml/2006/main">
               <a:ext uri="{FF2B5EF4-FFF2-40B4-BE49-F238E27FC236}">
-                <a16:creationId xmlns:a16="http://schemas.microsoft.com/office/drawing/2014/main" id="{E15F2964-9E26-428C-8DAD-5DC763156538}"/>
+                <a16:creationId xmlns:a16="http://schemas.microsoft.com/office/drawing/2014/main" id="{5B9D6060-32F0-4E01-9EB7-8FCBD53D1E81}"/>
               </a:ext>
             </a:extLst>
           </p:cNvPr>
@@ -4688,7 +4688,7 @@
           <p:cNvPr id="8" name="">
             <a:extLst xmlns:a="http://schemas.openxmlformats.org/drawingml/2006/main">
               <a:ext uri="{FF2B5EF4-FFF2-40B4-BE49-F238E27FC236}">
-                <a16:creationId xmlns:a16="http://schemas.microsoft.com/office/drawing/2014/main" id="{BC19B396-08EF-41CE-9D19-BFE084356E99}"/>
+                <a16:creationId xmlns:a16="http://schemas.microsoft.com/office/drawing/2014/main" id="{F88F8B1F-1A6F-4156-AD37-E15B5375251A}"/>
               </a:ext>
             </a:extLst>
           </p:cNvPr>
@@ -4750,7 +4750,7 @@
           <p:cNvPr id="9" name="">
             <a:extLst xmlns:a="http://schemas.openxmlformats.org/drawingml/2006/main">
               <a:ext uri="{FF2B5EF4-FFF2-40B4-BE49-F238E27FC236}">
-                <a16:creationId xmlns:a16="http://schemas.microsoft.com/office/drawing/2014/main" id="{74B4BE9A-0999-4831-9E99-FB3E8ACF2672}"/>
+                <a16:creationId xmlns:a16="http://schemas.microsoft.com/office/drawing/2014/main" id="{91CBE486-78E8-4FE1-A0EF-E75AFA97F266}"/>
               </a:ext>
             </a:extLst>
           </p:cNvPr>
@@ -4866,7 +4866,7 @@
           <p:cNvPr id="10" name="">
             <a:extLst xmlns:a="http://schemas.openxmlformats.org/drawingml/2006/main">
               <a:ext uri="{FF2B5EF4-FFF2-40B4-BE49-F238E27FC236}">
-                <a16:creationId xmlns:a16="http://schemas.microsoft.com/office/drawing/2014/main" id="{AC959425-E274-4814-A945-63864476D5AC}"/>
+                <a16:creationId xmlns:a16="http://schemas.microsoft.com/office/drawing/2014/main" id="{E1424BF8-43B1-4E24-B27D-12E00E1B0810}"/>
               </a:ext>
             </a:extLst>
           </p:cNvPr>
@@ -4928,7 +4928,7 @@
           <p:cNvPr id="11" name="footer-rule-11">
             <a:extLst xmlns:a="http://schemas.openxmlformats.org/drawingml/2006/main">
               <a:ext uri="{FF2B5EF4-FFF2-40B4-BE49-F238E27FC236}">
-                <a16:creationId xmlns:a16="http://schemas.microsoft.com/office/drawing/2014/main" id="{01549995-0ECF-43C9-82E0-85ED7C365EEA}"/>
+                <a16:creationId xmlns:a16="http://schemas.microsoft.com/office/drawing/2014/main" id="{1FAA6B7A-9277-4391-AEEB-E21042818B0F}"/>
               </a:ext>
             </a:extLst>
           </p:cNvPr>
@@ -4959,7 +4959,7 @@
           <p:cNvPr id="12" name="footer-label-11">
             <a:extLst xmlns:a="http://schemas.openxmlformats.org/drawingml/2006/main">
               <a:ext uri="{FF2B5EF4-FFF2-40B4-BE49-F238E27FC236}">
-                <a16:creationId xmlns:a16="http://schemas.microsoft.com/office/drawing/2014/main" id="{6DFF758D-A031-40DD-9043-0818B2E81F36}"/>
+                <a16:creationId xmlns:a16="http://schemas.microsoft.com/office/drawing/2014/main" id="{FEC4D4F8-9509-46B9-B0C5-1EB3E13E291F}"/>
               </a:ext>
             </a:extLst>
           </p:cNvPr>
@@ -5021,7 +5021,7 @@
           <p:cNvPr id="13" name="footer-page-11">
             <a:extLst xmlns:a="http://schemas.openxmlformats.org/drawingml/2006/main">
               <a:ext uri="{FF2B5EF4-FFF2-40B4-BE49-F238E27FC236}">
-                <a16:creationId xmlns:a16="http://schemas.microsoft.com/office/drawing/2014/main" id="{6AED2845-4BF0-40C3-8B71-5279F9F51463}"/>
+                <a16:creationId xmlns:a16="http://schemas.microsoft.com/office/drawing/2014/main" id="{BD381570-0CD0-48CF-93AC-EE2CE597DCB3}"/>
               </a:ext>
             </a:extLst>
           </p:cNvPr>
@@ -5081,7 +5081,7 @@
     </p:spTree>
     <p:extLst>
       <p:ext uri="{BB962C8B-B14F-4D97-AF65-F5344CB8AC3E}">
-        <p14:creationId xmlns:p14="http://schemas.microsoft.com/office/powerpoint/2010/main" val="1889488890"/>
+        <p14:creationId xmlns:p14="http://schemas.microsoft.com/office/powerpoint/2010/main" val="1707302216"/>
       </p:ext>
     </p:extLst>
   </p:cSld>
@@ -5112,7 +5112,7 @@
           <p:cNvPr id="25" name="side-accent-12">
             <a:extLst xmlns:a="http://schemas.openxmlformats.org/drawingml/2006/main">
               <a:ext uri="{FF2B5EF4-FFF2-40B4-BE49-F238E27FC236}">
-                <a16:creationId xmlns:a16="http://schemas.microsoft.com/office/drawing/2014/main" id="{73B8901D-318C-41DA-8614-06969B9574AC}"/>
+                <a16:creationId xmlns:a16="http://schemas.microsoft.com/office/drawing/2014/main" id="{2F2DF7B1-1E8B-4848-BD10-1134AE23CC8B}"/>
               </a:ext>
             </a:extLst>
           </p:cNvPr>
@@ -5143,7 +5143,7 @@
           <p:cNvPr id="2" name="kicker-12">
             <a:extLst xmlns:a="http://schemas.openxmlformats.org/drawingml/2006/main">
               <a:ext uri="{FF2B5EF4-FFF2-40B4-BE49-F238E27FC236}">
-                <a16:creationId xmlns:a16="http://schemas.microsoft.com/office/drawing/2014/main" id="{9EB628F2-6BE2-4E27-86BF-F21C14FAEF6D}"/>
+                <a16:creationId xmlns:a16="http://schemas.microsoft.com/office/drawing/2014/main" id="{BF80ACDD-5C13-4C75-888C-06FCA249C7BB}"/>
               </a:ext>
             </a:extLst>
           </p:cNvPr>
@@ -5205,7 +5205,7 @@
           <p:cNvPr id="3" name="title-12">
             <a:extLst xmlns:a="http://schemas.openxmlformats.org/drawingml/2006/main">
               <a:ext uri="{FF2B5EF4-FFF2-40B4-BE49-F238E27FC236}">
-                <a16:creationId xmlns:a16="http://schemas.microsoft.com/office/drawing/2014/main" id="{53EBDB26-20A5-4E23-B2E1-84BE5E75111B}"/>
+                <a16:creationId xmlns:a16="http://schemas.microsoft.com/office/drawing/2014/main" id="{43E33FA0-A464-44D8-B521-FDC6334288DA}"/>
               </a:ext>
             </a:extLst>
           </p:cNvPr>
@@ -5267,7 +5267,7 @@
           <p:cNvPr id="4" name="">
             <a:extLst xmlns:a="http://schemas.openxmlformats.org/drawingml/2006/main">
               <a:ext uri="{FF2B5EF4-FFF2-40B4-BE49-F238E27FC236}">
-                <a16:creationId xmlns:a16="http://schemas.microsoft.com/office/drawing/2014/main" id="{1E1BEF06-07D4-47B3-A94E-611C47009EA6}"/>
+                <a16:creationId xmlns:a16="http://schemas.microsoft.com/office/drawing/2014/main" id="{B11F4788-B80C-4763-9147-A4060BDD3450}"/>
               </a:ext>
             </a:extLst>
           </p:cNvPr>
@@ -5298,7 +5298,7 @@
           <p:cNvPr id="5" name="">
             <a:extLst xmlns:a="http://schemas.openxmlformats.org/drawingml/2006/main">
               <a:ext uri="{FF2B5EF4-FFF2-40B4-BE49-F238E27FC236}">
-                <a16:creationId xmlns:a16="http://schemas.microsoft.com/office/drawing/2014/main" id="{0422C60D-5075-4B62-8C7C-13E17EBD8FE9}"/>
+                <a16:creationId xmlns:a16="http://schemas.microsoft.com/office/drawing/2014/main" id="{227B9AEC-065A-46E9-9734-4C0B7E96175B}"/>
               </a:ext>
             </a:extLst>
           </p:cNvPr>
@@ -5329,7 +5329,7 @@
           <p:cNvPr id="6" name="">
             <a:extLst xmlns:a="http://schemas.openxmlformats.org/drawingml/2006/main">
               <a:ext uri="{FF2B5EF4-FFF2-40B4-BE49-F238E27FC236}">
-                <a16:creationId xmlns:a16="http://schemas.microsoft.com/office/drawing/2014/main" id="{3FB186B7-F605-460E-8904-9AF6918210AE}"/>
+                <a16:creationId xmlns:a16="http://schemas.microsoft.com/office/drawing/2014/main" id="{E5131214-DFD5-409B-B160-95C3A3EEC100}"/>
               </a:ext>
             </a:extLst>
           </p:cNvPr>
@@ -5391,7 +5391,7 @@
           <p:cNvPr id="7" name="">
             <a:extLst xmlns:a="http://schemas.openxmlformats.org/drawingml/2006/main">
               <a:ext uri="{FF2B5EF4-FFF2-40B4-BE49-F238E27FC236}">
-                <a16:creationId xmlns:a16="http://schemas.microsoft.com/office/drawing/2014/main" id="{9A29F63A-81EC-4772-8516-E58DB6A85F66}"/>
+                <a16:creationId xmlns:a16="http://schemas.microsoft.com/office/drawing/2014/main" id="{4AE4C75A-194D-4C1A-ABA1-289EF8122354}"/>
               </a:ext>
             </a:extLst>
           </p:cNvPr>
@@ -5453,7 +5453,7 @@
           <p:cNvPr id="8" name="">
             <a:extLst xmlns:a="http://schemas.openxmlformats.org/drawingml/2006/main">
               <a:ext uri="{FF2B5EF4-FFF2-40B4-BE49-F238E27FC236}">
-                <a16:creationId xmlns:a16="http://schemas.microsoft.com/office/drawing/2014/main" id="{2A4AE197-2201-4CE4-B840-0AA8A9BF45AA}"/>
+                <a16:creationId xmlns:a16="http://schemas.microsoft.com/office/drawing/2014/main" id="{6D8D680B-968C-4269-9F7F-30F33F31D505}"/>
               </a:ext>
             </a:extLst>
           </p:cNvPr>
@@ -5515,7 +5515,7 @@
           <p:cNvPr id="9" name="">
             <a:extLst xmlns:a="http://schemas.openxmlformats.org/drawingml/2006/main">
               <a:ext uri="{FF2B5EF4-FFF2-40B4-BE49-F238E27FC236}">
-                <a16:creationId xmlns:a16="http://schemas.microsoft.com/office/drawing/2014/main" id="{A53ACE82-A473-491A-A446-FC02E8A2446B}"/>
+                <a16:creationId xmlns:a16="http://schemas.microsoft.com/office/drawing/2014/main" id="{DDA291EB-D18C-42C1-AD44-9E053022976B}"/>
               </a:ext>
             </a:extLst>
           </p:cNvPr>
@@ -5546,7 +5546,7 @@
           <p:cNvPr id="10" name="">
             <a:extLst xmlns:a="http://schemas.openxmlformats.org/drawingml/2006/main">
               <a:ext uri="{FF2B5EF4-FFF2-40B4-BE49-F238E27FC236}">
-                <a16:creationId xmlns:a16="http://schemas.microsoft.com/office/drawing/2014/main" id="{82D8BD40-6F87-4AA3-BD18-47F88DAD9763}"/>
+                <a16:creationId xmlns:a16="http://schemas.microsoft.com/office/drawing/2014/main" id="{E6C024B6-3C87-48A6-9B24-A40F25F12B69}"/>
               </a:ext>
             </a:extLst>
           </p:cNvPr>
@@ -5608,7 +5608,7 @@
           <p:cNvPr id="11" name="">
             <a:extLst xmlns:a="http://schemas.openxmlformats.org/drawingml/2006/main">
               <a:ext uri="{FF2B5EF4-FFF2-40B4-BE49-F238E27FC236}">
-                <a16:creationId xmlns:a16="http://schemas.microsoft.com/office/drawing/2014/main" id="{0C6B237D-DBA1-4BC0-83C6-5A8DFC91C87D}"/>
+                <a16:creationId xmlns:a16="http://schemas.microsoft.com/office/drawing/2014/main" id="{96F5EC8B-B84A-42B9-8D1D-B0BEDE551C8F}"/>
               </a:ext>
             </a:extLst>
           </p:cNvPr>
@@ -5670,7 +5670,7 @@
           <p:cNvPr id="12" name="">
             <a:extLst xmlns:a="http://schemas.openxmlformats.org/drawingml/2006/main">
               <a:ext uri="{FF2B5EF4-FFF2-40B4-BE49-F238E27FC236}">
-                <a16:creationId xmlns:a16="http://schemas.microsoft.com/office/drawing/2014/main" id="{29DA51D2-7A80-40F7-8439-00819F66FD28}"/>
+                <a16:creationId xmlns:a16="http://schemas.microsoft.com/office/drawing/2014/main" id="{A1C5C8B9-4BA5-436E-9A75-C78DC19681E4}"/>
               </a:ext>
             </a:extLst>
           </p:cNvPr>
@@ -5732,7 +5732,7 @@
           <p:cNvPr id="13" name="">
             <a:extLst xmlns:a="http://schemas.openxmlformats.org/drawingml/2006/main">
               <a:ext uri="{FF2B5EF4-FFF2-40B4-BE49-F238E27FC236}">
-                <a16:creationId xmlns:a16="http://schemas.microsoft.com/office/drawing/2014/main" id="{9E140ED8-3937-482A-A143-AC1F2C2850AB}"/>
+                <a16:creationId xmlns:a16="http://schemas.microsoft.com/office/drawing/2014/main" id="{465B997E-5B7B-4673-8226-D9268A60FA92}"/>
               </a:ext>
             </a:extLst>
           </p:cNvPr>
@@ -5763,7 +5763,7 @@
           <p:cNvPr id="14" name="">
             <a:extLst xmlns:a="http://schemas.openxmlformats.org/drawingml/2006/main">
               <a:ext uri="{FF2B5EF4-FFF2-40B4-BE49-F238E27FC236}">
-                <a16:creationId xmlns:a16="http://schemas.microsoft.com/office/drawing/2014/main" id="{03C33273-0B7E-4FF6-9514-6313167D068F}"/>
+                <a16:creationId xmlns:a16="http://schemas.microsoft.com/office/drawing/2014/main" id="{B925A182-2D48-451E-9A67-9D5D78A1247E}"/>
               </a:ext>
             </a:extLst>
           </p:cNvPr>
@@ -5825,7 +5825,7 @@
           <p:cNvPr id="15" name="">
             <a:extLst xmlns:a="http://schemas.openxmlformats.org/drawingml/2006/main">
               <a:ext uri="{FF2B5EF4-FFF2-40B4-BE49-F238E27FC236}">
-                <a16:creationId xmlns:a16="http://schemas.microsoft.com/office/drawing/2014/main" id="{D3FB7B3D-A7F1-4D75-9C8E-F3DAE76CAC1A}"/>
+                <a16:creationId xmlns:a16="http://schemas.microsoft.com/office/drawing/2014/main" id="{BE47D49B-510E-4BA6-84D7-31FAA69FF02A}"/>
               </a:ext>
             </a:extLst>
           </p:cNvPr>
@@ -5887,7 +5887,7 @@
           <p:cNvPr id="16" name="">
             <a:extLst xmlns:a="http://schemas.openxmlformats.org/drawingml/2006/main">
               <a:ext uri="{FF2B5EF4-FFF2-40B4-BE49-F238E27FC236}">
-                <a16:creationId xmlns:a16="http://schemas.microsoft.com/office/drawing/2014/main" id="{A5332BFC-60FE-46AA-9A35-3EF7A13FA288}"/>
+                <a16:creationId xmlns:a16="http://schemas.microsoft.com/office/drawing/2014/main" id="{D1667740-76C4-49D8-9D8F-69EC6295FB06}"/>
               </a:ext>
             </a:extLst>
           </p:cNvPr>
@@ -5949,7 +5949,7 @@
           <p:cNvPr id="17" name="">
             <a:extLst xmlns:a="http://schemas.openxmlformats.org/drawingml/2006/main">
               <a:ext uri="{FF2B5EF4-FFF2-40B4-BE49-F238E27FC236}">
-                <a16:creationId xmlns:a16="http://schemas.microsoft.com/office/drawing/2014/main" id="{82004F7B-B01C-4098-9826-826161D5C9BE}"/>
+                <a16:creationId xmlns:a16="http://schemas.microsoft.com/office/drawing/2014/main" id="{12E78FBD-7361-4591-A198-F9F7F84B3AF3}"/>
               </a:ext>
             </a:extLst>
           </p:cNvPr>
@@ -5980,7 +5980,7 @@
           <p:cNvPr id="18" name="">
             <a:extLst xmlns:a="http://schemas.openxmlformats.org/drawingml/2006/main">
               <a:ext uri="{FF2B5EF4-FFF2-40B4-BE49-F238E27FC236}">
-                <a16:creationId xmlns:a16="http://schemas.microsoft.com/office/drawing/2014/main" id="{3B30EF73-4B6D-4987-8F9A-23E0BFFD9CDB}"/>
+                <a16:creationId xmlns:a16="http://schemas.microsoft.com/office/drawing/2014/main" id="{4097280D-EB66-46F7-8EE3-4D697396EF81}"/>
               </a:ext>
             </a:extLst>
           </p:cNvPr>
@@ -6042,7 +6042,7 @@
           <p:cNvPr id="19" name="">
             <a:extLst xmlns:a="http://schemas.openxmlformats.org/drawingml/2006/main">
               <a:ext uri="{FF2B5EF4-FFF2-40B4-BE49-F238E27FC236}">
-                <a16:creationId xmlns:a16="http://schemas.microsoft.com/office/drawing/2014/main" id="{D10684CF-F998-4BE7-A169-39C23DCCD999}"/>
+                <a16:creationId xmlns:a16="http://schemas.microsoft.com/office/drawing/2014/main" id="{4545F8AC-464F-4DA8-8AE5-351D59F3E6D9}"/>
               </a:ext>
             </a:extLst>
           </p:cNvPr>
@@ -6104,7 +6104,7 @@
           <p:cNvPr id="20" name="">
             <a:extLst xmlns:a="http://schemas.openxmlformats.org/drawingml/2006/main">
               <a:ext uri="{FF2B5EF4-FFF2-40B4-BE49-F238E27FC236}">
-                <a16:creationId xmlns:a16="http://schemas.microsoft.com/office/drawing/2014/main" id="{8367114A-7622-4021-90B4-4E8D3BBF532B}"/>
+                <a16:creationId xmlns:a16="http://schemas.microsoft.com/office/drawing/2014/main" id="{25E77DAF-F331-4000-8FAF-87157068D7A6}"/>
               </a:ext>
             </a:extLst>
           </p:cNvPr>
@@ -6166,7 +6166,7 @@
           <p:cNvPr id="21" name="">
             <a:extLst xmlns:a="http://schemas.openxmlformats.org/drawingml/2006/main">
               <a:ext uri="{FF2B5EF4-FFF2-40B4-BE49-F238E27FC236}">
-                <a16:creationId xmlns:a16="http://schemas.microsoft.com/office/drawing/2014/main" id="{56D4B30A-BE6F-46DC-8635-94AE36390F6D}"/>
+                <a16:creationId xmlns:a16="http://schemas.microsoft.com/office/drawing/2014/main" id="{8499534F-0BE9-44F9-89AD-057669ACE907}"/>
               </a:ext>
             </a:extLst>
           </p:cNvPr>
@@ -6228,7 +6228,7 @@
           <p:cNvPr id="22" name="footer-rule-12">
             <a:extLst xmlns:a="http://schemas.openxmlformats.org/drawingml/2006/main">
               <a:ext uri="{FF2B5EF4-FFF2-40B4-BE49-F238E27FC236}">
-                <a16:creationId xmlns:a16="http://schemas.microsoft.com/office/drawing/2014/main" id="{F26E38C5-2AD4-405F-B801-F39A7D4B815F}"/>
+                <a16:creationId xmlns:a16="http://schemas.microsoft.com/office/drawing/2014/main" id="{2D04544D-2C57-4DEF-AB2B-F41056AA7825}"/>
               </a:ext>
             </a:extLst>
           </p:cNvPr>
@@ -6259,7 +6259,7 @@
           <p:cNvPr id="23" name="footer-label-12">
             <a:extLst xmlns:a="http://schemas.openxmlformats.org/drawingml/2006/main">
               <a:ext uri="{FF2B5EF4-FFF2-40B4-BE49-F238E27FC236}">
-                <a16:creationId xmlns:a16="http://schemas.microsoft.com/office/drawing/2014/main" id="{4DACD08A-1678-4B75-AECB-B8A0F2654568}"/>
+                <a16:creationId xmlns:a16="http://schemas.microsoft.com/office/drawing/2014/main" id="{8BFCCD4D-758B-43AE-8714-2D6F21F6BA85}"/>
               </a:ext>
             </a:extLst>
           </p:cNvPr>
@@ -6321,7 +6321,7 @@
           <p:cNvPr id="24" name="footer-page-12">
             <a:extLst xmlns:a="http://schemas.openxmlformats.org/drawingml/2006/main">
               <a:ext uri="{FF2B5EF4-FFF2-40B4-BE49-F238E27FC236}">
-                <a16:creationId xmlns:a16="http://schemas.microsoft.com/office/drawing/2014/main" id="{E45EBA7A-7E4C-48FA-A1EC-C593ADE0323D}"/>
+                <a16:creationId xmlns:a16="http://schemas.microsoft.com/office/drawing/2014/main" id="{3DA30D84-B049-4EDA-AA21-1AF91093F884}"/>
               </a:ext>
             </a:extLst>
           </p:cNvPr>
@@ -6381,7 +6381,7 @@
     </p:spTree>
     <p:extLst>
       <p:ext uri="{BB962C8B-B14F-4D97-AF65-F5344CB8AC3E}">
-        <p14:creationId xmlns:p14="http://schemas.microsoft.com/office/powerpoint/2010/main" val="1889076445"/>
+        <p14:creationId xmlns:p14="http://schemas.microsoft.com/office/powerpoint/2010/main" val="1121907992"/>
       </p:ext>
     </p:extLst>
   </p:cSld>
@@ -6412,7 +6412,7 @@
           <p:cNvPr id="24" name="side-accent-13">
             <a:extLst xmlns:a="http://schemas.openxmlformats.org/drawingml/2006/main">
               <a:ext uri="{FF2B5EF4-FFF2-40B4-BE49-F238E27FC236}">
-                <a16:creationId xmlns:a16="http://schemas.microsoft.com/office/drawing/2014/main" id="{AB0D84C3-3DF0-4176-9745-2D06585724D5}"/>
+                <a16:creationId xmlns:a16="http://schemas.microsoft.com/office/drawing/2014/main" id="{11A54E23-2A1D-48A6-B683-B3483F6FBB8A}"/>
               </a:ext>
             </a:extLst>
           </p:cNvPr>
@@ -6443,7 +6443,7 @@
           <p:cNvPr id="2" name="kicker-13">
             <a:extLst xmlns:a="http://schemas.openxmlformats.org/drawingml/2006/main">
               <a:ext uri="{FF2B5EF4-FFF2-40B4-BE49-F238E27FC236}">
-                <a16:creationId xmlns:a16="http://schemas.microsoft.com/office/drawing/2014/main" id="{8F8976EE-BC45-4948-85E9-63E364ED3755}"/>
+                <a16:creationId xmlns:a16="http://schemas.microsoft.com/office/drawing/2014/main" id="{DD933788-2E5B-4686-94E4-4C52FDB45D3B}"/>
               </a:ext>
             </a:extLst>
           </p:cNvPr>
@@ -6505,7 +6505,7 @@
           <p:cNvPr id="3" name="title-13">
             <a:extLst xmlns:a="http://schemas.openxmlformats.org/drawingml/2006/main">
               <a:ext uri="{FF2B5EF4-FFF2-40B4-BE49-F238E27FC236}">
-                <a16:creationId xmlns:a16="http://schemas.microsoft.com/office/drawing/2014/main" id="{CA3FF083-9993-4C13-8328-8171CDA15CA7}"/>
+                <a16:creationId xmlns:a16="http://schemas.microsoft.com/office/drawing/2014/main" id="{410FD4A0-8E40-4875-8C05-61C1EB09F4E7}"/>
               </a:ext>
             </a:extLst>
           </p:cNvPr>
@@ -6567,7 +6567,7 @@
           <p:cNvPr id="4" name="">
             <a:extLst xmlns:a="http://schemas.openxmlformats.org/drawingml/2006/main">
               <a:ext uri="{FF2B5EF4-FFF2-40B4-BE49-F238E27FC236}">
-                <a16:creationId xmlns:a16="http://schemas.microsoft.com/office/drawing/2014/main" id="{B1D17F3B-C8D8-47AA-BFC0-A55CBD5ED9E7}"/>
+                <a16:creationId xmlns:a16="http://schemas.microsoft.com/office/drawing/2014/main" id="{FA9C6308-EBA7-43D3-BABD-4466DEDA9894}"/>
               </a:ext>
             </a:extLst>
           </p:cNvPr>
@@ -6629,7 +6629,7 @@
           <p:cNvPr id="5" name="">
             <a:extLst xmlns:a="http://schemas.openxmlformats.org/drawingml/2006/main">
               <a:ext uri="{FF2B5EF4-FFF2-40B4-BE49-F238E27FC236}">
-                <a16:creationId xmlns:a16="http://schemas.microsoft.com/office/drawing/2014/main" id="{B1C2BAFF-5B9B-4531-911C-41BF883BE069}"/>
+                <a16:creationId xmlns:a16="http://schemas.microsoft.com/office/drawing/2014/main" id="{D64ACB93-1766-4FFF-87A1-C318B8252288}"/>
               </a:ext>
             </a:extLst>
           </p:cNvPr>
@@ -6691,7 +6691,7 @@
           <p:cNvPr id="6" name="">
             <a:extLst xmlns:a="http://schemas.openxmlformats.org/drawingml/2006/main">
               <a:ext uri="{FF2B5EF4-FFF2-40B4-BE49-F238E27FC236}">
-                <a16:creationId xmlns:a16="http://schemas.microsoft.com/office/drawing/2014/main" id="{274847A8-7F8B-4FBE-877D-C8A457EC038A}"/>
+                <a16:creationId xmlns:a16="http://schemas.microsoft.com/office/drawing/2014/main" id="{2523D07A-D105-4FA2-8C4D-0E2B665533AF}"/>
               </a:ext>
             </a:extLst>
           </p:cNvPr>
@@ -6753,7 +6753,7 @@
           <p:cNvPr id="7" name="">
             <a:extLst xmlns:a="http://schemas.openxmlformats.org/drawingml/2006/main">
               <a:ext uri="{FF2B5EF4-FFF2-40B4-BE49-F238E27FC236}">
-                <a16:creationId xmlns:a16="http://schemas.microsoft.com/office/drawing/2014/main" id="{9A934E22-604F-4DBB-981B-CEDF29C1C845}"/>
+                <a16:creationId xmlns:a16="http://schemas.microsoft.com/office/drawing/2014/main" id="{A73CC939-6532-4145-AFDB-A81DE578569D}"/>
               </a:ext>
             </a:extLst>
           </p:cNvPr>
@@ -6784,7 +6784,7 @@
           <p:cNvPr id="8" name="">
             <a:extLst xmlns:a="http://schemas.openxmlformats.org/drawingml/2006/main">
               <a:ext uri="{FF2B5EF4-FFF2-40B4-BE49-F238E27FC236}">
-                <a16:creationId xmlns:a16="http://schemas.microsoft.com/office/drawing/2014/main" id="{D06AA2D4-C209-4327-B7DE-EEB8BD51A28E}"/>
+                <a16:creationId xmlns:a16="http://schemas.microsoft.com/office/drawing/2014/main" id="{31E1C592-A470-4393-9DEC-03163C7E0FEE}"/>
               </a:ext>
             </a:extLst>
           </p:cNvPr>
@@ -6846,7 +6846,7 @@
           <p:cNvPr id="9" name="">
             <a:extLst xmlns:a="http://schemas.openxmlformats.org/drawingml/2006/main">
               <a:ext uri="{FF2B5EF4-FFF2-40B4-BE49-F238E27FC236}">
-                <a16:creationId xmlns:a16="http://schemas.microsoft.com/office/drawing/2014/main" id="{B0FB4C6D-8893-490D-AB20-982CBFF5DE70}"/>
+                <a16:creationId xmlns:a16="http://schemas.microsoft.com/office/drawing/2014/main" id="{FD390890-2FDE-4866-A4FA-190901DC8F40}"/>
               </a:ext>
             </a:extLst>
           </p:cNvPr>
@@ -6908,7 +6908,7 @@
           <p:cNvPr id="10" name="">
             <a:extLst xmlns:a="http://schemas.openxmlformats.org/drawingml/2006/main">
               <a:ext uri="{FF2B5EF4-FFF2-40B4-BE49-F238E27FC236}">
-                <a16:creationId xmlns:a16="http://schemas.microsoft.com/office/drawing/2014/main" id="{F2F571CC-31E3-4B8C-98EE-098DA623648C}"/>
+                <a16:creationId xmlns:a16="http://schemas.microsoft.com/office/drawing/2014/main" id="{F9FB6F06-58B6-48BD-8108-2E4646CC5776}"/>
               </a:ext>
             </a:extLst>
           </p:cNvPr>
@@ -6970,7 +6970,7 @@
           <p:cNvPr id="11" name="">
             <a:extLst xmlns:a="http://schemas.openxmlformats.org/drawingml/2006/main">
               <a:ext uri="{FF2B5EF4-FFF2-40B4-BE49-F238E27FC236}">
-                <a16:creationId xmlns:a16="http://schemas.microsoft.com/office/drawing/2014/main" id="{67BEE206-D0B0-40F2-A2CA-6A372CE6417E}"/>
+                <a16:creationId xmlns:a16="http://schemas.microsoft.com/office/drawing/2014/main" id="{062A44BF-9B96-46F3-912E-389DCC6E9C0F}"/>
               </a:ext>
             </a:extLst>
           </p:cNvPr>
@@ -7001,7 +7001,7 @@
           <p:cNvPr id="12" name="">
             <a:extLst xmlns:a="http://schemas.openxmlformats.org/drawingml/2006/main">
               <a:ext uri="{FF2B5EF4-FFF2-40B4-BE49-F238E27FC236}">
-                <a16:creationId xmlns:a16="http://schemas.microsoft.com/office/drawing/2014/main" id="{5B82CC86-E7AD-4BE1-B126-CC98D9945E2F}"/>
+                <a16:creationId xmlns:a16="http://schemas.microsoft.com/office/drawing/2014/main" id="{8B7F5857-F78D-4CFC-9481-22B06A809B91}"/>
               </a:ext>
             </a:extLst>
           </p:cNvPr>
@@ -7063,7 +7063,7 @@
           <p:cNvPr id="13" name="">
             <a:extLst xmlns:a="http://schemas.openxmlformats.org/drawingml/2006/main">
               <a:ext uri="{FF2B5EF4-FFF2-40B4-BE49-F238E27FC236}">
-                <a16:creationId xmlns:a16="http://schemas.microsoft.com/office/drawing/2014/main" id="{A0F7FCFB-CA8A-46D3-AB89-85FD6E1F3475}"/>
+                <a16:creationId xmlns:a16="http://schemas.microsoft.com/office/drawing/2014/main" id="{2388479B-7071-404D-80B2-AC32547923DE}"/>
               </a:ext>
             </a:extLst>
           </p:cNvPr>
@@ -7125,7 +7125,7 @@
           <p:cNvPr id="14" name="">
             <a:extLst xmlns:a="http://schemas.openxmlformats.org/drawingml/2006/main">
               <a:ext uri="{FF2B5EF4-FFF2-40B4-BE49-F238E27FC236}">
-                <a16:creationId xmlns:a16="http://schemas.microsoft.com/office/drawing/2014/main" id="{844B13C5-3D1C-4C99-8A4C-7C24B9A6C53F}"/>
+                <a16:creationId xmlns:a16="http://schemas.microsoft.com/office/drawing/2014/main" id="{88586C9F-29B5-4117-8542-581370BD9866}"/>
               </a:ext>
             </a:extLst>
           </p:cNvPr>
@@ -7187,7 +7187,7 @@
           <p:cNvPr id="15" name="">
             <a:extLst xmlns:a="http://schemas.openxmlformats.org/drawingml/2006/main">
               <a:ext uri="{FF2B5EF4-FFF2-40B4-BE49-F238E27FC236}">
-                <a16:creationId xmlns:a16="http://schemas.microsoft.com/office/drawing/2014/main" id="{E195B0FA-9259-406D-84D4-86322CE7CA4E}"/>
+                <a16:creationId xmlns:a16="http://schemas.microsoft.com/office/drawing/2014/main" id="{8DDC373B-B277-492D-B266-16577443F2DE}"/>
               </a:ext>
             </a:extLst>
           </p:cNvPr>
@@ -7218,7 +7218,7 @@
           <p:cNvPr id="16" name="">
             <a:extLst xmlns:a="http://schemas.openxmlformats.org/drawingml/2006/main">
               <a:ext uri="{FF2B5EF4-FFF2-40B4-BE49-F238E27FC236}">
-                <a16:creationId xmlns:a16="http://schemas.microsoft.com/office/drawing/2014/main" id="{0226B567-0035-4CC3-8FD8-39858580F9B3}"/>
+                <a16:creationId xmlns:a16="http://schemas.microsoft.com/office/drawing/2014/main" id="{1E78BD95-F3E8-4DB7-9444-E525B1F0EDE4}"/>
               </a:ext>
             </a:extLst>
           </p:cNvPr>
@@ -7280,7 +7280,7 @@
           <p:cNvPr id="17" name="">
             <a:extLst xmlns:a="http://schemas.openxmlformats.org/drawingml/2006/main">
               <a:ext uri="{FF2B5EF4-FFF2-40B4-BE49-F238E27FC236}">
-                <a16:creationId xmlns:a16="http://schemas.microsoft.com/office/drawing/2014/main" id="{4AD2B661-CE82-4A92-BB12-38B160865D17}"/>
+                <a16:creationId xmlns:a16="http://schemas.microsoft.com/office/drawing/2014/main" id="{6AF223BA-749B-4155-AAFE-7C5A8AE8F419}"/>
               </a:ext>
             </a:extLst>
           </p:cNvPr>
@@ -7342,7 +7342,7 @@
           <p:cNvPr id="18" name="">
             <a:extLst xmlns:a="http://schemas.openxmlformats.org/drawingml/2006/main">
               <a:ext uri="{FF2B5EF4-FFF2-40B4-BE49-F238E27FC236}">
-                <a16:creationId xmlns:a16="http://schemas.microsoft.com/office/drawing/2014/main" id="{969C4569-FC7D-44A1-BAC7-DE4940AE32F2}"/>
+                <a16:creationId xmlns:a16="http://schemas.microsoft.com/office/drawing/2014/main" id="{CA12F85A-41E6-421E-89B1-19FECDD7F8B4}"/>
               </a:ext>
             </a:extLst>
           </p:cNvPr>
@@ -7404,7 +7404,7 @@
           <p:cNvPr id="19" name="">
             <a:extLst xmlns:a="http://schemas.openxmlformats.org/drawingml/2006/main">
               <a:ext uri="{FF2B5EF4-FFF2-40B4-BE49-F238E27FC236}">
-                <a16:creationId xmlns:a16="http://schemas.microsoft.com/office/drawing/2014/main" id="{5BDA2099-0850-4FF3-B657-CE5363B6DA1A}"/>
+                <a16:creationId xmlns:a16="http://schemas.microsoft.com/office/drawing/2014/main" id="{D6FCB288-A0AC-4750-B5D7-D6E33681BD50}"/>
               </a:ext>
             </a:extLst>
           </p:cNvPr>
@@ -7437,7 +7437,7 @@
           <p:cNvPr id="20" name="">
             <a:extLst xmlns:a="http://schemas.openxmlformats.org/drawingml/2006/main">
               <a:ext uri="{FF2B5EF4-FFF2-40B4-BE49-F238E27FC236}">
-                <a16:creationId xmlns:a16="http://schemas.microsoft.com/office/drawing/2014/main" id="{187FED83-673D-49A1-B5CE-C172F9EFE803}"/>
+                <a16:creationId xmlns:a16="http://schemas.microsoft.com/office/drawing/2014/main" id="{D0D860A5-6F85-4400-9B31-F7ADB5B1FDF2}"/>
               </a:ext>
             </a:extLst>
           </p:cNvPr>
@@ -7499,7 +7499,7 @@
           <p:cNvPr id="21" name="footer-rule-13">
             <a:extLst xmlns:a="http://schemas.openxmlformats.org/drawingml/2006/main">
               <a:ext uri="{FF2B5EF4-FFF2-40B4-BE49-F238E27FC236}">
-                <a16:creationId xmlns:a16="http://schemas.microsoft.com/office/drawing/2014/main" id="{F59CF82F-2A0D-49F7-B167-AE226935FA6D}"/>
+                <a16:creationId xmlns:a16="http://schemas.microsoft.com/office/drawing/2014/main" id="{E78F1FB8-3899-4AB3-9267-669A880B1EDD}"/>
               </a:ext>
             </a:extLst>
           </p:cNvPr>
@@ -7530,7 +7530,7 @@
           <p:cNvPr id="22" name="footer-label-13">
             <a:extLst xmlns:a="http://schemas.openxmlformats.org/drawingml/2006/main">
               <a:ext uri="{FF2B5EF4-FFF2-40B4-BE49-F238E27FC236}">
-                <a16:creationId xmlns:a16="http://schemas.microsoft.com/office/drawing/2014/main" id="{1296C83D-D731-4C3A-8CF5-EB85B1E16692}"/>
+                <a16:creationId xmlns:a16="http://schemas.microsoft.com/office/drawing/2014/main" id="{B41C3CA1-980E-44BD-A314-FAE09A7049BC}"/>
               </a:ext>
             </a:extLst>
           </p:cNvPr>
@@ -7592,7 +7592,7 @@
           <p:cNvPr id="23" name="footer-page-13">
             <a:extLst xmlns:a="http://schemas.openxmlformats.org/drawingml/2006/main">
               <a:ext uri="{FF2B5EF4-FFF2-40B4-BE49-F238E27FC236}">
-                <a16:creationId xmlns:a16="http://schemas.microsoft.com/office/drawing/2014/main" id="{8B339A64-5612-489D-9EC3-14ABDF8BA831}"/>
+                <a16:creationId xmlns:a16="http://schemas.microsoft.com/office/drawing/2014/main" id="{8814C154-32AB-446D-9B4B-11041E3C455F}"/>
               </a:ext>
             </a:extLst>
           </p:cNvPr>
@@ -7652,7 +7652,7 @@
     </p:spTree>
     <p:extLst>
       <p:ext uri="{BB962C8B-B14F-4D97-AF65-F5344CB8AC3E}">
-        <p14:creationId xmlns:p14="http://schemas.microsoft.com/office/powerpoint/2010/main" val="1486649776"/>
+        <p14:creationId xmlns:p14="http://schemas.microsoft.com/office/powerpoint/2010/main" val="1319608274"/>
       </p:ext>
     </p:extLst>
   </p:cSld>
@@ -7683,7 +7683,7 @@
           <p:cNvPr id="21" name="side-accent-14">
             <a:extLst xmlns:a="http://schemas.openxmlformats.org/drawingml/2006/main">
               <a:ext uri="{FF2B5EF4-FFF2-40B4-BE49-F238E27FC236}">
-                <a16:creationId xmlns:a16="http://schemas.microsoft.com/office/drawing/2014/main" id="{B2028567-D87A-4FB1-BED7-1AA3AC9F1152}"/>
+                <a16:creationId xmlns:a16="http://schemas.microsoft.com/office/drawing/2014/main" id="{4ABE237C-9C2F-4C6C-8464-423FF5B78E90}"/>
               </a:ext>
             </a:extLst>
           </p:cNvPr>
@@ -7714,7 +7714,7 @@
           <p:cNvPr id="2" name="kicker-14">
             <a:extLst xmlns:a="http://schemas.openxmlformats.org/drawingml/2006/main">
               <a:ext uri="{FF2B5EF4-FFF2-40B4-BE49-F238E27FC236}">
-                <a16:creationId xmlns:a16="http://schemas.microsoft.com/office/drawing/2014/main" id="{DF5D4338-39BC-473E-8935-B724811EA083}"/>
+                <a16:creationId xmlns:a16="http://schemas.microsoft.com/office/drawing/2014/main" id="{F61FEC0E-34A1-4CAE-8A65-8F4611D4B565}"/>
               </a:ext>
             </a:extLst>
           </p:cNvPr>
@@ -7776,7 +7776,7 @@
           <p:cNvPr id="3" name="title-14">
             <a:extLst xmlns:a="http://schemas.openxmlformats.org/drawingml/2006/main">
               <a:ext uri="{FF2B5EF4-FFF2-40B4-BE49-F238E27FC236}">
-                <a16:creationId xmlns:a16="http://schemas.microsoft.com/office/drawing/2014/main" id="{1E9F9093-F047-4D5F-82C5-2AC39A60B80A}"/>
+                <a16:creationId xmlns:a16="http://schemas.microsoft.com/office/drawing/2014/main" id="{5CB3857C-BEB9-42E5-9B22-8EDB8DD92F91}"/>
               </a:ext>
             </a:extLst>
           </p:cNvPr>
@@ -7838,7 +7838,7 @@
           <p:cNvPr id="4" name="">
             <a:extLst xmlns:a="http://schemas.openxmlformats.org/drawingml/2006/main">
               <a:ext uri="{FF2B5EF4-FFF2-40B4-BE49-F238E27FC236}">
-                <a16:creationId xmlns:a16="http://schemas.microsoft.com/office/drawing/2014/main" id="{BBC33A12-24E4-46FD-B4CC-F28E58358B90}"/>
+                <a16:creationId xmlns:a16="http://schemas.microsoft.com/office/drawing/2014/main" id="{480EDDC6-B344-410F-B897-8B90C20B14ED}"/>
               </a:ext>
             </a:extLst>
           </p:cNvPr>
@@ -7869,7 +7869,7 @@
           <p:cNvPr id="5" name="">
             <a:extLst xmlns:a="http://schemas.openxmlformats.org/drawingml/2006/main">
               <a:ext uri="{FF2B5EF4-FFF2-40B4-BE49-F238E27FC236}">
-                <a16:creationId xmlns:a16="http://schemas.microsoft.com/office/drawing/2014/main" id="{1DD0D068-26BD-4B61-92D5-00DEA4941005}"/>
+                <a16:creationId xmlns:a16="http://schemas.microsoft.com/office/drawing/2014/main" id="{D3A8993D-2158-4DE2-B440-3E90160751E1}"/>
               </a:ext>
             </a:extLst>
           </p:cNvPr>
@@ -7900,7 +7900,7 @@
           <p:cNvPr id="6" name="">
             <a:extLst xmlns:a="http://schemas.openxmlformats.org/drawingml/2006/main">
               <a:ext uri="{FF2B5EF4-FFF2-40B4-BE49-F238E27FC236}">
-                <a16:creationId xmlns:a16="http://schemas.microsoft.com/office/drawing/2014/main" id="{8B597563-F9DF-45AB-89BB-4FDF72F82F1B}"/>
+                <a16:creationId xmlns:a16="http://schemas.microsoft.com/office/drawing/2014/main" id="{C833537A-A80B-41DB-9171-D41B9A1AC4FA}"/>
               </a:ext>
             </a:extLst>
           </p:cNvPr>
@@ -7962,7 +7962,7 @@
           <p:cNvPr id="7" name="">
             <a:extLst xmlns:a="http://schemas.openxmlformats.org/drawingml/2006/main">
               <a:ext uri="{FF2B5EF4-FFF2-40B4-BE49-F238E27FC236}">
-                <a16:creationId xmlns:a16="http://schemas.microsoft.com/office/drawing/2014/main" id="{4511409A-8C14-4E4C-95A9-5C21CA613B67}"/>
+                <a16:creationId xmlns:a16="http://schemas.microsoft.com/office/drawing/2014/main" id="{CBB8364B-F788-4D3D-A97E-0417C193C877}"/>
               </a:ext>
             </a:extLst>
           </p:cNvPr>
@@ -8024,7 +8024,7 @@
           <p:cNvPr id="8" name="">
             <a:extLst xmlns:a="http://schemas.openxmlformats.org/drawingml/2006/main">
               <a:ext uri="{FF2B5EF4-FFF2-40B4-BE49-F238E27FC236}">
-                <a16:creationId xmlns:a16="http://schemas.microsoft.com/office/drawing/2014/main" id="{743EB76F-7044-410C-B7AB-08FE18AECC27}"/>
+                <a16:creationId xmlns:a16="http://schemas.microsoft.com/office/drawing/2014/main" id="{DFAA5634-FB8C-4FC7-98CD-9C6D8FE0F242}"/>
               </a:ext>
             </a:extLst>
           </p:cNvPr>
@@ -8086,7 +8086,7 @@
           <p:cNvPr id="9" name="">
             <a:extLst xmlns:a="http://schemas.openxmlformats.org/drawingml/2006/main">
               <a:ext uri="{FF2B5EF4-FFF2-40B4-BE49-F238E27FC236}">
-                <a16:creationId xmlns:a16="http://schemas.microsoft.com/office/drawing/2014/main" id="{6A2F2CF8-A373-4479-9B05-25AF7D0EE10E}"/>
+                <a16:creationId xmlns:a16="http://schemas.microsoft.com/office/drawing/2014/main" id="{AF792FA2-D833-4CAC-847A-0D54BB3E2AB9}"/>
               </a:ext>
             </a:extLst>
           </p:cNvPr>
@@ -8117,7 +8117,7 @@
           <p:cNvPr id="10" name="">
             <a:extLst xmlns:a="http://schemas.openxmlformats.org/drawingml/2006/main">
               <a:ext uri="{FF2B5EF4-FFF2-40B4-BE49-F238E27FC236}">
-                <a16:creationId xmlns:a16="http://schemas.microsoft.com/office/drawing/2014/main" id="{545522DA-ED8E-40B8-855C-C5CEE1468DF7}"/>
+                <a16:creationId xmlns:a16="http://schemas.microsoft.com/office/drawing/2014/main" id="{73CC1286-FD0F-4243-BD1D-3F0C1F3330A8}"/>
               </a:ext>
             </a:extLst>
           </p:cNvPr>
@@ -8179,7 +8179,7 @@
           <p:cNvPr id="11" name="">
             <a:extLst xmlns:a="http://schemas.openxmlformats.org/drawingml/2006/main">
               <a:ext uri="{FF2B5EF4-FFF2-40B4-BE49-F238E27FC236}">
-                <a16:creationId xmlns:a16="http://schemas.microsoft.com/office/drawing/2014/main" id="{E7F3C3AC-BCAC-422C-98A3-DB9025054ECA}"/>
+                <a16:creationId xmlns:a16="http://schemas.microsoft.com/office/drawing/2014/main" id="{D67A1D84-26F0-45B4-AA58-AFB7998F9158}"/>
               </a:ext>
             </a:extLst>
           </p:cNvPr>
@@ -8241,7 +8241,7 @@
           <p:cNvPr id="12" name="">
             <a:extLst xmlns:a="http://schemas.openxmlformats.org/drawingml/2006/main">
               <a:ext uri="{FF2B5EF4-FFF2-40B4-BE49-F238E27FC236}">
-                <a16:creationId xmlns:a16="http://schemas.microsoft.com/office/drawing/2014/main" id="{42423554-391B-46D1-AA3B-83E00BEB26B9}"/>
+                <a16:creationId xmlns:a16="http://schemas.microsoft.com/office/drawing/2014/main" id="{8A62DCE0-19E1-4118-971C-1BEE9944EF81}"/>
               </a:ext>
             </a:extLst>
           </p:cNvPr>
@@ -8303,7 +8303,7 @@
           <p:cNvPr id="13" name="">
             <a:extLst xmlns:a="http://schemas.openxmlformats.org/drawingml/2006/main">
               <a:ext uri="{FF2B5EF4-FFF2-40B4-BE49-F238E27FC236}">
-                <a16:creationId xmlns:a16="http://schemas.microsoft.com/office/drawing/2014/main" id="{FFAE5C8D-254E-470F-89F7-A8BFC14D0868}"/>
+                <a16:creationId xmlns:a16="http://schemas.microsoft.com/office/drawing/2014/main" id="{DAB029BC-1B5C-4996-948F-D00C4CDFEAFF}"/>
               </a:ext>
             </a:extLst>
           </p:cNvPr>
@@ -8334,7 +8334,7 @@
           <p:cNvPr id="14" name="">
             <a:extLst xmlns:a="http://schemas.openxmlformats.org/drawingml/2006/main">
               <a:ext uri="{FF2B5EF4-FFF2-40B4-BE49-F238E27FC236}">
-                <a16:creationId xmlns:a16="http://schemas.microsoft.com/office/drawing/2014/main" id="{654683B4-A000-4233-A7F9-92331B59B58C}"/>
+                <a16:creationId xmlns:a16="http://schemas.microsoft.com/office/drawing/2014/main" id="{18EDCB06-C273-48A8-8DB6-4CF4770F76F4}"/>
               </a:ext>
             </a:extLst>
           </p:cNvPr>
@@ -8396,7 +8396,7 @@
           <p:cNvPr id="15" name="">
             <a:extLst xmlns:a="http://schemas.openxmlformats.org/drawingml/2006/main">
               <a:ext uri="{FF2B5EF4-FFF2-40B4-BE49-F238E27FC236}">
-                <a16:creationId xmlns:a16="http://schemas.microsoft.com/office/drawing/2014/main" id="{0BF25A24-10E4-4370-A7B5-733A096EF58D}"/>
+                <a16:creationId xmlns:a16="http://schemas.microsoft.com/office/drawing/2014/main" id="{D7439486-9090-435B-B204-51E794FCD4F3}"/>
               </a:ext>
             </a:extLst>
           </p:cNvPr>
@@ -8458,7 +8458,7 @@
           <p:cNvPr id="16" name="">
             <a:extLst xmlns:a="http://schemas.openxmlformats.org/drawingml/2006/main">
               <a:ext uri="{FF2B5EF4-FFF2-40B4-BE49-F238E27FC236}">
-                <a16:creationId xmlns:a16="http://schemas.microsoft.com/office/drawing/2014/main" id="{D125530E-836C-4990-A575-456AEE57A408}"/>
+                <a16:creationId xmlns:a16="http://schemas.microsoft.com/office/drawing/2014/main" id="{652E8603-D97A-49C7-B0DD-5D4F4FAE1B0B}"/>
               </a:ext>
             </a:extLst>
           </p:cNvPr>
@@ -8520,7 +8520,7 @@
           <p:cNvPr id="17" name="">
             <a:extLst xmlns:a="http://schemas.openxmlformats.org/drawingml/2006/main">
               <a:ext uri="{FF2B5EF4-FFF2-40B4-BE49-F238E27FC236}">
-                <a16:creationId xmlns:a16="http://schemas.microsoft.com/office/drawing/2014/main" id="{1FB24627-FFC0-4B43-B5EF-6B87D40EC607}"/>
+                <a16:creationId xmlns:a16="http://schemas.microsoft.com/office/drawing/2014/main" id="{119D2B3D-8D3D-4A44-BD09-5AA48D907C89}"/>
               </a:ext>
             </a:extLst>
           </p:cNvPr>
@@ -8582,7 +8582,7 @@
           <p:cNvPr id="18" name="footer-rule-14">
             <a:extLst xmlns:a="http://schemas.openxmlformats.org/drawingml/2006/main">
               <a:ext uri="{FF2B5EF4-FFF2-40B4-BE49-F238E27FC236}">
-                <a16:creationId xmlns:a16="http://schemas.microsoft.com/office/drawing/2014/main" id="{76813940-593A-42E0-BD05-C471FB265690}"/>
+                <a16:creationId xmlns:a16="http://schemas.microsoft.com/office/drawing/2014/main" id="{BA4AEFEF-8694-4FF1-B8D3-82BB2563A9CB}"/>
               </a:ext>
             </a:extLst>
           </p:cNvPr>
@@ -8613,7 +8613,7 @@
           <p:cNvPr id="19" name="footer-label-14">
             <a:extLst xmlns:a="http://schemas.openxmlformats.org/drawingml/2006/main">
               <a:ext uri="{FF2B5EF4-FFF2-40B4-BE49-F238E27FC236}">
-                <a16:creationId xmlns:a16="http://schemas.microsoft.com/office/drawing/2014/main" id="{72B7D50D-981B-493F-ADA4-1926ABEC5BB3}"/>
+                <a16:creationId xmlns:a16="http://schemas.microsoft.com/office/drawing/2014/main" id="{843303EC-C68D-4669-9B3C-68EC1DDA4184}"/>
               </a:ext>
             </a:extLst>
           </p:cNvPr>
@@ -8675,7 +8675,7 @@
           <p:cNvPr id="20" name="footer-page-14">
             <a:extLst xmlns:a="http://schemas.openxmlformats.org/drawingml/2006/main">
               <a:ext uri="{FF2B5EF4-FFF2-40B4-BE49-F238E27FC236}">
-                <a16:creationId xmlns:a16="http://schemas.microsoft.com/office/drawing/2014/main" id="{1FFB6A43-0C1D-493B-A8AF-76124E18F5D7}"/>
+                <a16:creationId xmlns:a16="http://schemas.microsoft.com/office/drawing/2014/main" id="{5E448289-16E2-4092-835F-2BA3B6062A8F}"/>
               </a:ext>
             </a:extLst>
           </p:cNvPr>
@@ -8735,7 +8735,7 @@
     </p:spTree>
     <p:extLst>
       <p:ext uri="{BB962C8B-B14F-4D97-AF65-F5344CB8AC3E}">
-        <p14:creationId xmlns:p14="http://schemas.microsoft.com/office/powerpoint/2010/main" val="1084232144"/>
+        <p14:creationId xmlns:p14="http://schemas.microsoft.com/office/powerpoint/2010/main" val="1228838793"/>
       </p:ext>
     </p:extLst>
   </p:cSld>
@@ -8766,7 +8766,7 @@
           <p:cNvPr id="22" name="side-accent-15">
             <a:extLst xmlns:a="http://schemas.openxmlformats.org/drawingml/2006/main">
               <a:ext uri="{FF2B5EF4-FFF2-40B4-BE49-F238E27FC236}">
-                <a16:creationId xmlns:a16="http://schemas.microsoft.com/office/drawing/2014/main" id="{B65AB3FE-6A6A-474F-A3E1-4B5906D9143B}"/>
+                <a16:creationId xmlns:a16="http://schemas.microsoft.com/office/drawing/2014/main" id="{55EBF182-62E1-40E3-A142-FA0A3164E365}"/>
               </a:ext>
             </a:extLst>
           </p:cNvPr>
@@ -8797,7 +8797,7 @@
           <p:cNvPr id="2" name="kicker-15">
             <a:extLst xmlns:a="http://schemas.openxmlformats.org/drawingml/2006/main">
               <a:ext uri="{FF2B5EF4-FFF2-40B4-BE49-F238E27FC236}">
-                <a16:creationId xmlns:a16="http://schemas.microsoft.com/office/drawing/2014/main" id="{EF0CD5ED-CDA6-44BB-A30F-462DEE3F1422}"/>
+                <a16:creationId xmlns:a16="http://schemas.microsoft.com/office/drawing/2014/main" id="{463CE632-13F1-4A83-AA8D-AC72D79EAC5D}"/>
               </a:ext>
             </a:extLst>
           </p:cNvPr>
@@ -8859,7 +8859,7 @@
           <p:cNvPr id="3" name="title-15">
             <a:extLst xmlns:a="http://schemas.openxmlformats.org/drawingml/2006/main">
               <a:ext uri="{FF2B5EF4-FFF2-40B4-BE49-F238E27FC236}">
-                <a16:creationId xmlns:a16="http://schemas.microsoft.com/office/drawing/2014/main" id="{ECBAE6BD-82AA-4F9A-AD44-C7EF5EDC98B0}"/>
+                <a16:creationId xmlns:a16="http://schemas.microsoft.com/office/drawing/2014/main" id="{A2505845-09BB-4627-B297-082A46CC92E8}"/>
               </a:ext>
             </a:extLst>
           </p:cNvPr>
@@ -8921,7 +8921,7 @@
           <p:cNvPr id="4" name="">
             <a:extLst xmlns:a="http://schemas.openxmlformats.org/drawingml/2006/main">
               <a:ext uri="{FF2B5EF4-FFF2-40B4-BE49-F238E27FC236}">
-                <a16:creationId xmlns:a16="http://schemas.microsoft.com/office/drawing/2014/main" id="{6B227CAE-1CF8-4A3F-963F-0E47290EDE7E}"/>
+                <a16:creationId xmlns:a16="http://schemas.microsoft.com/office/drawing/2014/main" id="{E1A4F2CF-32A1-45AA-8655-81223BA78D89}"/>
               </a:ext>
             </a:extLst>
           </p:cNvPr>
@@ -8983,7 +8983,7 @@
           <p:cNvPr id="5" name="">
             <a:extLst xmlns:a="http://schemas.openxmlformats.org/drawingml/2006/main">
               <a:ext uri="{FF2B5EF4-FFF2-40B4-BE49-F238E27FC236}">
-                <a16:creationId xmlns:a16="http://schemas.microsoft.com/office/drawing/2014/main" id="{113AF843-498F-4F8A-8799-3AB07EB4F30F}"/>
+                <a16:creationId xmlns:a16="http://schemas.microsoft.com/office/drawing/2014/main" id="{8AC1D26B-450E-4EB9-9A17-91B81DA3D867}"/>
               </a:ext>
             </a:extLst>
           </p:cNvPr>
@@ -9014,7 +9014,7 @@
           <p:cNvPr id="6" name="">
             <a:extLst xmlns:a="http://schemas.openxmlformats.org/drawingml/2006/main">
               <a:ext uri="{FF2B5EF4-FFF2-40B4-BE49-F238E27FC236}">
-                <a16:creationId xmlns:a16="http://schemas.microsoft.com/office/drawing/2014/main" id="{B4CF5CEE-0C72-4C77-9726-FB81F0EB30F0}"/>
+                <a16:creationId xmlns:a16="http://schemas.microsoft.com/office/drawing/2014/main" id="{E13B92EB-731D-4EDB-97BE-234EF8C9FE15}"/>
               </a:ext>
             </a:extLst>
           </p:cNvPr>
@@ -9076,7 +9076,7 @@
           <p:cNvPr id="7" name="">
             <a:extLst xmlns:a="http://schemas.openxmlformats.org/drawingml/2006/main">
               <a:ext uri="{FF2B5EF4-FFF2-40B4-BE49-F238E27FC236}">
-                <a16:creationId xmlns:a16="http://schemas.microsoft.com/office/drawing/2014/main" id="{E7BA9425-4D5C-4A43-8CB2-BC57A00FFEE7}"/>
+                <a16:creationId xmlns:a16="http://schemas.microsoft.com/office/drawing/2014/main" id="{7025166F-E705-4C40-B9C3-ED7DC93FD6E3}"/>
               </a:ext>
             </a:extLst>
           </p:cNvPr>
@@ -9138,7 +9138,7 @@
           <p:cNvPr id="8" name="">
             <a:extLst xmlns:a="http://schemas.openxmlformats.org/drawingml/2006/main">
               <a:ext uri="{FF2B5EF4-FFF2-40B4-BE49-F238E27FC236}">
-                <a16:creationId xmlns:a16="http://schemas.microsoft.com/office/drawing/2014/main" id="{1EDAE304-7BCC-4760-930D-535FE47B2CFF}"/>
+                <a16:creationId xmlns:a16="http://schemas.microsoft.com/office/drawing/2014/main" id="{5A6AAB46-E29A-40F2-9888-8C4CFFFC402A}"/>
               </a:ext>
             </a:extLst>
           </p:cNvPr>
@@ -9169,7 +9169,7 @@
           <p:cNvPr id="9" name="">
             <a:extLst xmlns:a="http://schemas.openxmlformats.org/drawingml/2006/main">
               <a:ext uri="{FF2B5EF4-FFF2-40B4-BE49-F238E27FC236}">
-                <a16:creationId xmlns:a16="http://schemas.microsoft.com/office/drawing/2014/main" id="{2F1F4793-66CE-4C77-9B9F-56F13DC352F8}"/>
+                <a16:creationId xmlns:a16="http://schemas.microsoft.com/office/drawing/2014/main" id="{2A1208F1-2AD5-4BEE-93FC-F085BF5FDC44}"/>
               </a:ext>
             </a:extLst>
           </p:cNvPr>
@@ -9231,7 +9231,7 @@
           <p:cNvPr id="10" name="">
             <a:extLst xmlns:a="http://schemas.openxmlformats.org/drawingml/2006/main">
               <a:ext uri="{FF2B5EF4-FFF2-40B4-BE49-F238E27FC236}">
-                <a16:creationId xmlns:a16="http://schemas.microsoft.com/office/drawing/2014/main" id="{AD264A34-EB2F-445B-B8C1-B3B80FAAB9D3}"/>
+                <a16:creationId xmlns:a16="http://schemas.microsoft.com/office/drawing/2014/main" id="{D5067E5E-6208-41F7-8327-2B9D51441578}"/>
               </a:ext>
             </a:extLst>
           </p:cNvPr>
@@ -9293,7 +9293,7 @@
           <p:cNvPr id="11" name="">
             <a:extLst xmlns:a="http://schemas.openxmlformats.org/drawingml/2006/main">
               <a:ext uri="{FF2B5EF4-FFF2-40B4-BE49-F238E27FC236}">
-                <a16:creationId xmlns:a16="http://schemas.microsoft.com/office/drawing/2014/main" id="{2A9D7449-2BE8-463D-A333-3245B76E4F8D}"/>
+                <a16:creationId xmlns:a16="http://schemas.microsoft.com/office/drawing/2014/main" id="{EDAEAAE3-BB89-4722-B641-7A4B71AC1D3F}"/>
               </a:ext>
             </a:extLst>
           </p:cNvPr>
@@ -9324,7 +9324,7 @@
           <p:cNvPr id="12" name="">
             <a:extLst xmlns:a="http://schemas.openxmlformats.org/drawingml/2006/main">
               <a:ext uri="{FF2B5EF4-FFF2-40B4-BE49-F238E27FC236}">
-                <a16:creationId xmlns:a16="http://schemas.microsoft.com/office/drawing/2014/main" id="{5B7E7D92-A3CE-480B-BEDA-EE52813F9BF6}"/>
+                <a16:creationId xmlns:a16="http://schemas.microsoft.com/office/drawing/2014/main" id="{C4B92097-1D02-4EF2-B476-8A94D97A8CBD}"/>
               </a:ext>
             </a:extLst>
           </p:cNvPr>
@@ -9386,7 +9386,7 @@
           <p:cNvPr id="13" name="">
             <a:extLst xmlns:a="http://schemas.openxmlformats.org/drawingml/2006/main">
               <a:ext uri="{FF2B5EF4-FFF2-40B4-BE49-F238E27FC236}">
-                <a16:creationId xmlns:a16="http://schemas.microsoft.com/office/drawing/2014/main" id="{015C815B-8036-452B-B2E0-0F00A8AF0C4C}"/>
+                <a16:creationId xmlns:a16="http://schemas.microsoft.com/office/drawing/2014/main" id="{8EAD2049-327A-4E16-8FBF-731D4CAF3F99}"/>
               </a:ext>
             </a:extLst>
           </p:cNvPr>
@@ -9448,7 +9448,7 @@
           <p:cNvPr id="14" name="">
             <a:extLst xmlns:a="http://schemas.openxmlformats.org/drawingml/2006/main">
               <a:ext uri="{FF2B5EF4-FFF2-40B4-BE49-F238E27FC236}">
-                <a16:creationId xmlns:a16="http://schemas.microsoft.com/office/drawing/2014/main" id="{8EDEA87C-9EFB-47B2-9E11-DDCCDAABC719}"/>
+                <a16:creationId xmlns:a16="http://schemas.microsoft.com/office/drawing/2014/main" id="{E76CCFE8-F881-433D-987F-A897715233B7}"/>
               </a:ext>
             </a:extLst>
           </p:cNvPr>
@@ -9479,7 +9479,7 @@
           <p:cNvPr id="15" name="">
             <a:extLst xmlns:a="http://schemas.openxmlformats.org/drawingml/2006/main">
               <a:ext uri="{FF2B5EF4-FFF2-40B4-BE49-F238E27FC236}">
-                <a16:creationId xmlns:a16="http://schemas.microsoft.com/office/drawing/2014/main" id="{6D588C8E-21C1-4657-ADE4-278FE38A35E5}"/>
+                <a16:creationId xmlns:a16="http://schemas.microsoft.com/office/drawing/2014/main" id="{B605E50B-8C36-45BF-83B9-8AAA31386C87}"/>
               </a:ext>
             </a:extLst>
           </p:cNvPr>
@@ -9541,7 +9541,7 @@
           <p:cNvPr id="16" name="">
             <a:extLst xmlns:a="http://schemas.openxmlformats.org/drawingml/2006/main">
               <a:ext uri="{FF2B5EF4-FFF2-40B4-BE49-F238E27FC236}">
-                <a16:creationId xmlns:a16="http://schemas.microsoft.com/office/drawing/2014/main" id="{9E059CC7-5833-4238-BA44-7C5E36E056C0}"/>
+                <a16:creationId xmlns:a16="http://schemas.microsoft.com/office/drawing/2014/main" id="{97B05821-2C82-4EEA-A61D-7208F90804D5}"/>
               </a:ext>
             </a:extLst>
           </p:cNvPr>
@@ -9603,7 +9603,7 @@
           <p:cNvPr id="17" name="">
             <a:extLst xmlns:a="http://schemas.openxmlformats.org/drawingml/2006/main">
               <a:ext uri="{FF2B5EF4-FFF2-40B4-BE49-F238E27FC236}">
-                <a16:creationId xmlns:a16="http://schemas.microsoft.com/office/drawing/2014/main" id="{A4F98E4C-7704-45B2-A143-C2F062114D72}"/>
+                <a16:creationId xmlns:a16="http://schemas.microsoft.com/office/drawing/2014/main" id="{8B6368C8-8D2C-4909-B381-A4C899A7A57E}"/>
               </a:ext>
             </a:extLst>
           </p:cNvPr>
@@ -9636,7 +9636,7 @@
           <p:cNvPr id="18" name="">
             <a:extLst xmlns:a="http://schemas.openxmlformats.org/drawingml/2006/main">
               <a:ext uri="{FF2B5EF4-FFF2-40B4-BE49-F238E27FC236}">
-                <a16:creationId xmlns:a16="http://schemas.microsoft.com/office/drawing/2014/main" id="{B048CD93-95DD-40DD-8DB1-6F44A7504D01}"/>
+                <a16:creationId xmlns:a16="http://schemas.microsoft.com/office/drawing/2014/main" id="{3A2ADE22-26AB-4034-91A8-CBC3E486EF1A}"/>
               </a:ext>
             </a:extLst>
           </p:cNvPr>
@@ -9698,7 +9698,7 @@
           <p:cNvPr id="19" name="footer-rule-15">
             <a:extLst xmlns:a="http://schemas.openxmlformats.org/drawingml/2006/main">
               <a:ext uri="{FF2B5EF4-FFF2-40B4-BE49-F238E27FC236}">
-                <a16:creationId xmlns:a16="http://schemas.microsoft.com/office/drawing/2014/main" id="{7B820F38-40E7-467B-BCDF-65997D0A1B05}"/>
+                <a16:creationId xmlns:a16="http://schemas.microsoft.com/office/drawing/2014/main" id="{FC83957E-C6CC-4AF3-A22A-A598AD60B8BB}"/>
               </a:ext>
             </a:extLst>
           </p:cNvPr>
@@ -9729,7 +9729,7 @@
           <p:cNvPr id="20" name="footer-label-15">
             <a:extLst xmlns:a="http://schemas.openxmlformats.org/drawingml/2006/main">
               <a:ext uri="{FF2B5EF4-FFF2-40B4-BE49-F238E27FC236}">
-                <a16:creationId xmlns:a16="http://schemas.microsoft.com/office/drawing/2014/main" id="{27B9B7B6-0104-4291-BC2A-60E24A11E889}"/>
+                <a16:creationId xmlns:a16="http://schemas.microsoft.com/office/drawing/2014/main" id="{0C2D042B-28DC-4C08-9BD1-58C4CD9AADB3}"/>
               </a:ext>
             </a:extLst>
           </p:cNvPr>
@@ -9791,7 +9791,7 @@
           <p:cNvPr id="21" name="footer-page-15">
             <a:extLst xmlns:a="http://schemas.openxmlformats.org/drawingml/2006/main">
               <a:ext uri="{FF2B5EF4-FFF2-40B4-BE49-F238E27FC236}">
-                <a16:creationId xmlns:a16="http://schemas.microsoft.com/office/drawing/2014/main" id="{FC58B2DC-DA40-4C2F-99BE-C30FDE69A22C}"/>
+                <a16:creationId xmlns:a16="http://schemas.microsoft.com/office/drawing/2014/main" id="{61794DA2-0503-40D0-BDE4-CC341C047D1E}"/>
               </a:ext>
             </a:extLst>
           </p:cNvPr>
@@ -9851,7 +9851,7 @@
     </p:spTree>
     <p:extLst>
       <p:ext uri="{BB962C8B-B14F-4D97-AF65-F5344CB8AC3E}">
-        <p14:creationId xmlns:p14="http://schemas.microsoft.com/office/powerpoint/2010/main" val="1850529772"/>
+        <p14:creationId xmlns:p14="http://schemas.microsoft.com/office/powerpoint/2010/main" val="1662748616"/>
       </p:ext>
     </p:extLst>
   </p:cSld>
@@ -9882,7 +9882,7 @@
           <p:cNvPr id="25" name="side-accent-16">
             <a:extLst xmlns:a="http://schemas.openxmlformats.org/drawingml/2006/main">
               <a:ext uri="{FF2B5EF4-FFF2-40B4-BE49-F238E27FC236}">
-                <a16:creationId xmlns:a16="http://schemas.microsoft.com/office/drawing/2014/main" id="{238D1158-C75C-4F56-A92A-D18FA8474D64}"/>
+                <a16:creationId xmlns:a16="http://schemas.microsoft.com/office/drawing/2014/main" id="{BE954A52-732C-47E1-8CA9-DD6BC86C5A72}"/>
               </a:ext>
             </a:extLst>
           </p:cNvPr>
@@ -9913,7 +9913,7 @@
           <p:cNvPr id="2" name="kicker-16">
             <a:extLst xmlns:a="http://schemas.openxmlformats.org/drawingml/2006/main">
               <a:ext uri="{FF2B5EF4-FFF2-40B4-BE49-F238E27FC236}">
-                <a16:creationId xmlns:a16="http://schemas.microsoft.com/office/drawing/2014/main" id="{B0323EAF-14CF-4808-9EC3-107EBAE5123C}"/>
+                <a16:creationId xmlns:a16="http://schemas.microsoft.com/office/drawing/2014/main" id="{9F4436A6-65E6-4947-B793-6F2414471699}"/>
               </a:ext>
             </a:extLst>
           </p:cNvPr>
@@ -9975,7 +9975,7 @@
           <p:cNvPr id="3" name="title-16">
             <a:extLst xmlns:a="http://schemas.openxmlformats.org/drawingml/2006/main">
               <a:ext uri="{FF2B5EF4-FFF2-40B4-BE49-F238E27FC236}">
-                <a16:creationId xmlns:a16="http://schemas.microsoft.com/office/drawing/2014/main" id="{67BE8BBE-9721-4440-9BF0-A9CD6797C76A}"/>
+                <a16:creationId xmlns:a16="http://schemas.microsoft.com/office/drawing/2014/main" id="{9D761D49-7A9A-4DD4-AF5B-DE3D61388BA4}"/>
               </a:ext>
             </a:extLst>
           </p:cNvPr>
@@ -10037,7 +10037,7 @@
           <p:cNvPr id="4" name="">
             <a:extLst xmlns:a="http://schemas.openxmlformats.org/drawingml/2006/main">
               <a:ext uri="{FF2B5EF4-FFF2-40B4-BE49-F238E27FC236}">
-                <a16:creationId xmlns:a16="http://schemas.microsoft.com/office/drawing/2014/main" id="{9BFB1E85-5470-4E00-914D-0AF1166B80F8}"/>
+                <a16:creationId xmlns:a16="http://schemas.microsoft.com/office/drawing/2014/main" id="{09B137A0-5543-49DA-A988-33087EA7249C}"/>
               </a:ext>
             </a:extLst>
           </p:cNvPr>
@@ -10099,7 +10099,7 @@
           <p:cNvPr id="5" name="">
             <a:extLst xmlns:a="http://schemas.openxmlformats.org/drawingml/2006/main">
               <a:ext uri="{FF2B5EF4-FFF2-40B4-BE49-F238E27FC236}">
-                <a16:creationId xmlns:a16="http://schemas.microsoft.com/office/drawing/2014/main" id="{D83D35FB-AF21-4071-9589-5EC8B54AD06E}"/>
+                <a16:creationId xmlns:a16="http://schemas.microsoft.com/office/drawing/2014/main" id="{A65BA3D4-8B8C-4347-9DDA-79E49FEFCFFE}"/>
               </a:ext>
             </a:extLst>
           </p:cNvPr>
@@ -10161,7 +10161,7 @@
           <p:cNvPr id="6" name="">
             <a:extLst xmlns:a="http://schemas.openxmlformats.org/drawingml/2006/main">
               <a:ext uri="{FF2B5EF4-FFF2-40B4-BE49-F238E27FC236}">
-                <a16:creationId xmlns:a16="http://schemas.microsoft.com/office/drawing/2014/main" id="{BF620FB2-7497-4B73-AC98-EBEEAA631659}"/>
+                <a16:creationId xmlns:a16="http://schemas.microsoft.com/office/drawing/2014/main" id="{8F284AC0-0624-453F-975D-865234F084CB}"/>
               </a:ext>
             </a:extLst>
           </p:cNvPr>
@@ -10213,7 +10213,7 @@
                 <a:ea typeface="Tahoma"/>
                 <a:cs typeface="Tahoma"/>
               </a:rPr>
-              <a:t>ตรวจรอบประเมิน บทบาท และงานที่ได้รับมอบหมาย</a:t>
+              <a:t>ตรวจงานที่ได้รับมอบหมาย และแจ้งผู้ดูแลระบบหากรอบไม่ถูกต้อง</a:t>
             </a:r>
           </a:p>
         </p:txBody>
@@ -10223,7 +10223,7 @@
           <p:cNvPr id="7" name="">
             <a:extLst xmlns:a="http://schemas.openxmlformats.org/drawingml/2006/main">
               <a:ext uri="{FF2B5EF4-FFF2-40B4-BE49-F238E27FC236}">
-                <a16:creationId xmlns:a16="http://schemas.microsoft.com/office/drawing/2014/main" id="{1F6089DB-DE5F-4951-9F38-25996AFA21D9}"/>
+                <a16:creationId xmlns:a16="http://schemas.microsoft.com/office/drawing/2014/main" id="{724CE4C9-651A-4A42-AD7C-8A561BAACD13}"/>
               </a:ext>
             </a:extLst>
           </p:cNvPr>
@@ -10254,7 +10254,7 @@
           <p:cNvPr id="8" name="">
             <a:extLst xmlns:a="http://schemas.openxmlformats.org/drawingml/2006/main">
               <a:ext uri="{FF2B5EF4-FFF2-40B4-BE49-F238E27FC236}">
-                <a16:creationId xmlns:a16="http://schemas.microsoft.com/office/drawing/2014/main" id="{7E2E6E34-93CF-4A82-9F98-2C55FCDA4059}"/>
+                <a16:creationId xmlns:a16="http://schemas.microsoft.com/office/drawing/2014/main" id="{35E34261-DC76-4CE4-B610-21EB95DF4B16}"/>
               </a:ext>
             </a:extLst>
           </p:cNvPr>
@@ -10316,7 +10316,7 @@
           <p:cNvPr id="9" name="">
             <a:extLst xmlns:a="http://schemas.openxmlformats.org/drawingml/2006/main">
               <a:ext uri="{FF2B5EF4-FFF2-40B4-BE49-F238E27FC236}">
-                <a16:creationId xmlns:a16="http://schemas.microsoft.com/office/drawing/2014/main" id="{A4828146-B5BD-4C96-843E-A3C702E99386}"/>
+                <a16:creationId xmlns:a16="http://schemas.microsoft.com/office/drawing/2014/main" id="{DF970650-E14D-4116-8810-CA073E23B474}"/>
               </a:ext>
             </a:extLst>
           </p:cNvPr>
@@ -10378,7 +10378,7 @@
           <p:cNvPr id="10" name="">
             <a:extLst xmlns:a="http://schemas.openxmlformats.org/drawingml/2006/main">
               <a:ext uri="{FF2B5EF4-FFF2-40B4-BE49-F238E27FC236}">
-                <a16:creationId xmlns:a16="http://schemas.microsoft.com/office/drawing/2014/main" id="{112E3CB0-E9D0-4138-A78C-5CA889ED9D03}"/>
+                <a16:creationId xmlns:a16="http://schemas.microsoft.com/office/drawing/2014/main" id="{B2532C9F-8FD6-4A30-B5D0-7ED8592B5B57}"/>
               </a:ext>
             </a:extLst>
           </p:cNvPr>
@@ -10440,7 +10440,7 @@
           <p:cNvPr id="11" name="">
             <a:extLst xmlns:a="http://schemas.openxmlformats.org/drawingml/2006/main">
               <a:ext uri="{FF2B5EF4-FFF2-40B4-BE49-F238E27FC236}">
-                <a16:creationId xmlns:a16="http://schemas.microsoft.com/office/drawing/2014/main" id="{7A136CF7-3216-456E-9DA4-0F8669C49930}"/>
+                <a16:creationId xmlns:a16="http://schemas.microsoft.com/office/drawing/2014/main" id="{873AC174-930D-4547-848F-8A7C562452F1}"/>
               </a:ext>
             </a:extLst>
           </p:cNvPr>
@@ -10471,7 +10471,7 @@
           <p:cNvPr id="12" name="">
             <a:extLst xmlns:a="http://schemas.openxmlformats.org/drawingml/2006/main">
               <a:ext uri="{FF2B5EF4-FFF2-40B4-BE49-F238E27FC236}">
-                <a16:creationId xmlns:a16="http://schemas.microsoft.com/office/drawing/2014/main" id="{18857017-15A2-4CBE-A832-7F6F04C8A106}"/>
+                <a16:creationId xmlns:a16="http://schemas.microsoft.com/office/drawing/2014/main" id="{58BC9FD3-2AEC-4C0C-B711-532B5DCFA6A0}"/>
               </a:ext>
             </a:extLst>
           </p:cNvPr>
@@ -10533,7 +10533,7 @@
           <p:cNvPr id="13" name="">
             <a:extLst xmlns:a="http://schemas.openxmlformats.org/drawingml/2006/main">
               <a:ext uri="{FF2B5EF4-FFF2-40B4-BE49-F238E27FC236}">
-                <a16:creationId xmlns:a16="http://schemas.microsoft.com/office/drawing/2014/main" id="{6750520B-2298-41B6-956F-FA1A27FC4A78}"/>
+                <a16:creationId xmlns:a16="http://schemas.microsoft.com/office/drawing/2014/main" id="{B1BFC237-5B1C-46A2-9F8A-A522408EC10D}"/>
               </a:ext>
             </a:extLst>
           </p:cNvPr>
@@ -10595,7 +10595,7 @@
           <p:cNvPr id="14" name="">
             <a:extLst xmlns:a="http://schemas.openxmlformats.org/drawingml/2006/main">
               <a:ext uri="{FF2B5EF4-FFF2-40B4-BE49-F238E27FC236}">
-                <a16:creationId xmlns:a16="http://schemas.microsoft.com/office/drawing/2014/main" id="{C02BFD60-EED2-4510-87E7-96038E1C39FF}"/>
+                <a16:creationId xmlns:a16="http://schemas.microsoft.com/office/drawing/2014/main" id="{B05B2CA2-7D22-45EE-A6A3-5A13B15202B9}"/>
               </a:ext>
             </a:extLst>
           </p:cNvPr>
@@ -10657,7 +10657,7 @@
           <p:cNvPr id="15" name="">
             <a:extLst xmlns:a="http://schemas.openxmlformats.org/drawingml/2006/main">
               <a:ext uri="{FF2B5EF4-FFF2-40B4-BE49-F238E27FC236}">
-                <a16:creationId xmlns:a16="http://schemas.microsoft.com/office/drawing/2014/main" id="{F937D5D6-B0C2-4862-A53C-6A2F5DA736D2}"/>
+                <a16:creationId xmlns:a16="http://schemas.microsoft.com/office/drawing/2014/main" id="{3A7B3F0D-180D-49B8-906E-F3CF34485937}"/>
               </a:ext>
             </a:extLst>
           </p:cNvPr>
@@ -10688,7 +10688,7 @@
           <p:cNvPr id="16" name="">
             <a:extLst xmlns:a="http://schemas.openxmlformats.org/drawingml/2006/main">
               <a:ext uri="{FF2B5EF4-FFF2-40B4-BE49-F238E27FC236}">
-                <a16:creationId xmlns:a16="http://schemas.microsoft.com/office/drawing/2014/main" id="{81082D8D-E8E2-4A92-B364-886446190361}"/>
+                <a16:creationId xmlns:a16="http://schemas.microsoft.com/office/drawing/2014/main" id="{5A994398-8044-4DB2-BEFA-22CA56828802}"/>
               </a:ext>
             </a:extLst>
           </p:cNvPr>
@@ -10750,7 +10750,7 @@
           <p:cNvPr id="17" name="">
             <a:extLst xmlns:a="http://schemas.openxmlformats.org/drawingml/2006/main">
               <a:ext uri="{FF2B5EF4-FFF2-40B4-BE49-F238E27FC236}">
-                <a16:creationId xmlns:a16="http://schemas.microsoft.com/office/drawing/2014/main" id="{F0E00013-86DF-49A6-BCCB-8A3479DAE062}"/>
+                <a16:creationId xmlns:a16="http://schemas.microsoft.com/office/drawing/2014/main" id="{B0E5D6BC-B8A6-4940-8739-03D4B96AA49B}"/>
               </a:ext>
             </a:extLst>
           </p:cNvPr>
@@ -10812,7 +10812,7 @@
           <p:cNvPr id="18" name="">
             <a:extLst xmlns:a="http://schemas.openxmlformats.org/drawingml/2006/main">
               <a:ext uri="{FF2B5EF4-FFF2-40B4-BE49-F238E27FC236}">
-                <a16:creationId xmlns:a16="http://schemas.microsoft.com/office/drawing/2014/main" id="{DF88D98C-D42A-45E2-8967-A4EC26BD6144}"/>
+                <a16:creationId xmlns:a16="http://schemas.microsoft.com/office/drawing/2014/main" id="{E2D3F030-3305-411E-8C90-FF9002A210D8}"/>
               </a:ext>
             </a:extLst>
           </p:cNvPr>
@@ -10874,7 +10874,7 @@
           <p:cNvPr id="19" name="">
             <a:extLst xmlns:a="http://schemas.openxmlformats.org/drawingml/2006/main">
               <a:ext uri="{FF2B5EF4-FFF2-40B4-BE49-F238E27FC236}">
-                <a16:creationId xmlns:a16="http://schemas.microsoft.com/office/drawing/2014/main" id="{FA82F20B-1F34-4A27-B669-7B72F6D61550}"/>
+                <a16:creationId xmlns:a16="http://schemas.microsoft.com/office/drawing/2014/main" id="{8D2DD63C-5DCB-49E3-B52D-1987D58DC501}"/>
               </a:ext>
             </a:extLst>
           </p:cNvPr>
@@ -10907,7 +10907,7 @@
           <p:cNvPr id="20" name="">
             <a:extLst xmlns:a="http://schemas.openxmlformats.org/drawingml/2006/main">
               <a:ext uri="{FF2B5EF4-FFF2-40B4-BE49-F238E27FC236}">
-                <a16:creationId xmlns:a16="http://schemas.microsoft.com/office/drawing/2014/main" id="{88334DF4-0918-46F9-9A23-291474994FF1}"/>
+                <a16:creationId xmlns:a16="http://schemas.microsoft.com/office/drawing/2014/main" id="{ACF761AE-AD95-4C33-862E-9BF9850C14E0}"/>
               </a:ext>
             </a:extLst>
           </p:cNvPr>
@@ -10973,7 +10973,7 @@
           <p:nvPr/>
         </p:nvPicPr>
         <p:blipFill>
-          <a:blip xmlns:r="http://schemas.openxmlformats.org/officeDocument/2006/relationships" xmlns:a="http://schemas.openxmlformats.org/drawingml/2006/main" r:embed="R2640ecd4f1f04912"/>
+          <a:blip xmlns:r="http://schemas.openxmlformats.org/officeDocument/2006/relationships" xmlns:a="http://schemas.openxmlformats.org/drawingml/2006/main" r:embed="Red6fcd6f83b64972"/>
           <a:stretch xmlns:a="http://schemas.openxmlformats.org/drawingml/2006/main"/>
         </p:blipFill>
         <p:spPr>
@@ -10991,7 +10991,7 @@
           <p:cNvPr id="22" name="footer-rule-16">
             <a:extLst xmlns:a="http://schemas.openxmlformats.org/drawingml/2006/main">
               <a:ext uri="{FF2B5EF4-FFF2-40B4-BE49-F238E27FC236}">
-                <a16:creationId xmlns:a16="http://schemas.microsoft.com/office/drawing/2014/main" id="{54AE1ABA-3E87-456E-8504-668FB8D7BEE9}"/>
+                <a16:creationId xmlns:a16="http://schemas.microsoft.com/office/drawing/2014/main" id="{4A5DC41D-D054-4532-A9B5-4DE4BEABCBE9}"/>
               </a:ext>
             </a:extLst>
           </p:cNvPr>
@@ -11022,7 +11022,7 @@
           <p:cNvPr id="23" name="footer-label-16">
             <a:extLst xmlns:a="http://schemas.openxmlformats.org/drawingml/2006/main">
               <a:ext uri="{FF2B5EF4-FFF2-40B4-BE49-F238E27FC236}">
-                <a16:creationId xmlns:a16="http://schemas.microsoft.com/office/drawing/2014/main" id="{2DB57C54-7B66-4501-A296-AA4D200F5417}"/>
+                <a16:creationId xmlns:a16="http://schemas.microsoft.com/office/drawing/2014/main" id="{FDC26DC8-6F08-4732-9CED-44DF9B517B1D}"/>
               </a:ext>
             </a:extLst>
           </p:cNvPr>
@@ -11084,7 +11084,7 @@
           <p:cNvPr id="24" name="footer-page-16">
             <a:extLst xmlns:a="http://schemas.openxmlformats.org/drawingml/2006/main">
               <a:ext uri="{FF2B5EF4-FFF2-40B4-BE49-F238E27FC236}">
-                <a16:creationId xmlns:a16="http://schemas.microsoft.com/office/drawing/2014/main" id="{4224B716-27C1-427D-9C6D-3FF01C83AEA8}"/>
+                <a16:creationId xmlns:a16="http://schemas.microsoft.com/office/drawing/2014/main" id="{B4204C6C-D487-46BC-9ABE-BC8C1A6BDF5C}"/>
               </a:ext>
             </a:extLst>
           </p:cNvPr>
@@ -11144,7 +11144,7 @@
     </p:spTree>
     <p:extLst>
       <p:ext uri="{BB962C8B-B14F-4D97-AF65-F5344CB8AC3E}">
-        <p14:creationId xmlns:p14="http://schemas.microsoft.com/office/powerpoint/2010/main" val="1714861200"/>
+        <p14:creationId xmlns:p14="http://schemas.microsoft.com/office/powerpoint/2010/main" val="1529729249"/>
       </p:ext>
     </p:extLst>
   </p:cSld>
@@ -11175,7 +11175,7 @@
           <p:cNvPr id="20" name="side-accent-2">
             <a:extLst xmlns:a="http://schemas.openxmlformats.org/drawingml/2006/main">
               <a:ext uri="{FF2B5EF4-FFF2-40B4-BE49-F238E27FC236}">
-                <a16:creationId xmlns:a16="http://schemas.microsoft.com/office/drawing/2014/main" id="{1BB452E0-B362-4337-8568-6A30097D5C0D}"/>
+                <a16:creationId xmlns:a16="http://schemas.microsoft.com/office/drawing/2014/main" id="{EC6DF4FA-7067-4606-B8F4-06F2E5E02CDB}"/>
               </a:ext>
             </a:extLst>
           </p:cNvPr>
@@ -11206,7 +11206,7 @@
           <p:cNvPr id="2" name="kicker-2">
             <a:extLst xmlns:a="http://schemas.openxmlformats.org/drawingml/2006/main">
               <a:ext uri="{FF2B5EF4-FFF2-40B4-BE49-F238E27FC236}">
-                <a16:creationId xmlns:a16="http://schemas.microsoft.com/office/drawing/2014/main" id="{8277E6BD-0D53-4E7F-954B-D3CF11E12690}"/>
+                <a16:creationId xmlns:a16="http://schemas.microsoft.com/office/drawing/2014/main" id="{CFF7633A-5BBB-40C3-B1DF-45358D1A197A}"/>
               </a:ext>
             </a:extLst>
           </p:cNvPr>
@@ -11268,7 +11268,7 @@
           <p:cNvPr id="3" name="title-2">
             <a:extLst xmlns:a="http://schemas.openxmlformats.org/drawingml/2006/main">
               <a:ext uri="{FF2B5EF4-FFF2-40B4-BE49-F238E27FC236}">
-                <a16:creationId xmlns:a16="http://schemas.microsoft.com/office/drawing/2014/main" id="{B807AB69-E79A-47F2-94CB-66778E7920C2}"/>
+                <a16:creationId xmlns:a16="http://schemas.microsoft.com/office/drawing/2014/main" id="{6F20F462-252D-4AB4-9391-AB90C1A4ABB7}"/>
               </a:ext>
             </a:extLst>
           </p:cNvPr>
@@ -11330,7 +11330,7 @@
           <p:cNvPr id="4" name="">
             <a:extLst xmlns:a="http://schemas.openxmlformats.org/drawingml/2006/main">
               <a:ext uri="{FF2B5EF4-FFF2-40B4-BE49-F238E27FC236}">
-                <a16:creationId xmlns:a16="http://schemas.microsoft.com/office/drawing/2014/main" id="{6D089A5F-B7CB-428F-AADD-8720C740D83B}"/>
+                <a16:creationId xmlns:a16="http://schemas.microsoft.com/office/drawing/2014/main" id="{B6DEEDDD-0ABF-4E91-B386-2EE09E8A8E6C}"/>
               </a:ext>
             </a:extLst>
           </p:cNvPr>
@@ -11392,7 +11392,7 @@
           <p:cNvPr id="5" name="">
             <a:extLst xmlns:a="http://schemas.openxmlformats.org/drawingml/2006/main">
               <a:ext uri="{FF2B5EF4-FFF2-40B4-BE49-F238E27FC236}">
-                <a16:creationId xmlns:a16="http://schemas.microsoft.com/office/drawing/2014/main" id="{75A130E4-1D93-45B1-9646-717A6A56B71C}"/>
+                <a16:creationId xmlns:a16="http://schemas.microsoft.com/office/drawing/2014/main" id="{17703BF2-924E-41F5-AB0B-AC417B0AD8D1}"/>
               </a:ext>
             </a:extLst>
           </p:cNvPr>
@@ -11454,7 +11454,7 @@
           <p:cNvPr id="6" name="">
             <a:extLst xmlns:a="http://schemas.openxmlformats.org/drawingml/2006/main">
               <a:ext uri="{FF2B5EF4-FFF2-40B4-BE49-F238E27FC236}">
-                <a16:creationId xmlns:a16="http://schemas.microsoft.com/office/drawing/2014/main" id="{1805A9A0-6DFD-4542-8234-7230889C175E}"/>
+                <a16:creationId xmlns:a16="http://schemas.microsoft.com/office/drawing/2014/main" id="{E888D748-F600-4E3F-993D-DB9398AEC618}"/>
               </a:ext>
             </a:extLst>
           </p:cNvPr>
@@ -11485,7 +11485,7 @@
           <p:cNvPr id="7" name="">
             <a:extLst xmlns:a="http://schemas.openxmlformats.org/drawingml/2006/main">
               <a:ext uri="{FF2B5EF4-FFF2-40B4-BE49-F238E27FC236}">
-                <a16:creationId xmlns:a16="http://schemas.microsoft.com/office/drawing/2014/main" id="{CC1EBF72-0103-4F48-8067-41FCFE54A47F}"/>
+                <a16:creationId xmlns:a16="http://schemas.microsoft.com/office/drawing/2014/main" id="{4B743235-4CDF-4713-98CE-DB886B6D1E31}"/>
               </a:ext>
             </a:extLst>
           </p:cNvPr>
@@ -11547,7 +11547,7 @@
           <p:cNvPr id="8" name="">
             <a:extLst xmlns:a="http://schemas.openxmlformats.org/drawingml/2006/main">
               <a:ext uri="{FF2B5EF4-FFF2-40B4-BE49-F238E27FC236}">
-                <a16:creationId xmlns:a16="http://schemas.microsoft.com/office/drawing/2014/main" id="{188A81B0-CAF4-47A3-B22F-1C3A053E7085}"/>
+                <a16:creationId xmlns:a16="http://schemas.microsoft.com/office/drawing/2014/main" id="{E359A596-1678-4EAC-8CF6-29BD25A21AD0}"/>
               </a:ext>
             </a:extLst>
           </p:cNvPr>
@@ -11609,7 +11609,7 @@
           <p:cNvPr id="9" name="">
             <a:extLst xmlns:a="http://schemas.openxmlformats.org/drawingml/2006/main">
               <a:ext uri="{FF2B5EF4-FFF2-40B4-BE49-F238E27FC236}">
-                <a16:creationId xmlns:a16="http://schemas.microsoft.com/office/drawing/2014/main" id="{4F85EEB9-AB25-43AD-B528-17602ED6FF9D}"/>
+                <a16:creationId xmlns:a16="http://schemas.microsoft.com/office/drawing/2014/main" id="{395324A0-472B-4B26-87F8-5B842A27B33D}"/>
               </a:ext>
             </a:extLst>
           </p:cNvPr>
@@ -11640,7 +11640,7 @@
           <p:cNvPr id="10" name="">
             <a:extLst xmlns:a="http://schemas.openxmlformats.org/drawingml/2006/main">
               <a:ext uri="{FF2B5EF4-FFF2-40B4-BE49-F238E27FC236}">
-                <a16:creationId xmlns:a16="http://schemas.microsoft.com/office/drawing/2014/main" id="{B6231151-B1CF-4D73-99E3-6D9D3D266FC4}"/>
+                <a16:creationId xmlns:a16="http://schemas.microsoft.com/office/drawing/2014/main" id="{CFCC2E86-07DD-4DF7-A95F-971C43D0301D}"/>
               </a:ext>
             </a:extLst>
           </p:cNvPr>
@@ -11702,7 +11702,7 @@
           <p:cNvPr id="11" name="">
             <a:extLst xmlns:a="http://schemas.openxmlformats.org/drawingml/2006/main">
               <a:ext uri="{FF2B5EF4-FFF2-40B4-BE49-F238E27FC236}">
-                <a16:creationId xmlns:a16="http://schemas.microsoft.com/office/drawing/2014/main" id="{88562C33-7D93-4B48-A3E6-595A0775A992}"/>
+                <a16:creationId xmlns:a16="http://schemas.microsoft.com/office/drawing/2014/main" id="{B3956988-9E59-4341-9D23-569A874E5BF9}"/>
               </a:ext>
             </a:extLst>
           </p:cNvPr>
@@ -11764,7 +11764,7 @@
           <p:cNvPr id="12" name="">
             <a:extLst xmlns:a="http://schemas.openxmlformats.org/drawingml/2006/main">
               <a:ext uri="{FF2B5EF4-FFF2-40B4-BE49-F238E27FC236}">
-                <a16:creationId xmlns:a16="http://schemas.microsoft.com/office/drawing/2014/main" id="{661ADE7D-344A-45F4-90ED-2222937C253E}"/>
+                <a16:creationId xmlns:a16="http://schemas.microsoft.com/office/drawing/2014/main" id="{7B918448-8E2C-4FAC-9F25-FDD222529F6D}"/>
               </a:ext>
             </a:extLst>
           </p:cNvPr>
@@ -11795,7 +11795,7 @@
           <p:cNvPr id="13" name="">
             <a:extLst xmlns:a="http://schemas.openxmlformats.org/drawingml/2006/main">
               <a:ext uri="{FF2B5EF4-FFF2-40B4-BE49-F238E27FC236}">
-                <a16:creationId xmlns:a16="http://schemas.microsoft.com/office/drawing/2014/main" id="{DE4619D9-9D73-44AF-8325-3EDB52330D3C}"/>
+                <a16:creationId xmlns:a16="http://schemas.microsoft.com/office/drawing/2014/main" id="{D619A5E0-D23A-4686-9ADE-BE99D5B5E1D9}"/>
               </a:ext>
             </a:extLst>
           </p:cNvPr>
@@ -11857,7 +11857,7 @@
           <p:cNvPr id="14" name="outcome-mark">
             <a:extLst xmlns:a="http://schemas.openxmlformats.org/drawingml/2006/main">
               <a:ext uri="{FF2B5EF4-FFF2-40B4-BE49-F238E27FC236}">
-                <a16:creationId xmlns:a16="http://schemas.microsoft.com/office/drawing/2014/main" id="{C89D696E-6625-4976-8143-BF7D2E605AF1}"/>
+                <a16:creationId xmlns:a16="http://schemas.microsoft.com/office/drawing/2014/main" id="{2237D634-41D8-45FD-A0F2-5BD22F10E20D}"/>
               </a:ext>
             </a:extLst>
           </p:cNvPr>
@@ -11892,7 +11892,7 @@
           <p:cNvPr id="15" name="">
             <a:extLst xmlns:a="http://schemas.openxmlformats.org/drawingml/2006/main">
               <a:ext uri="{FF2B5EF4-FFF2-40B4-BE49-F238E27FC236}">
-                <a16:creationId xmlns:a16="http://schemas.microsoft.com/office/drawing/2014/main" id="{B55F4444-07E9-4801-918A-E7F35FB0A4D6}"/>
+                <a16:creationId xmlns:a16="http://schemas.microsoft.com/office/drawing/2014/main" id="{AB5AD41C-0A3F-455B-848E-DDB12E670ABE}"/>
               </a:ext>
             </a:extLst>
           </p:cNvPr>
@@ -11954,7 +11954,7 @@
           <p:cNvPr id="16" name="">
             <a:extLst xmlns:a="http://schemas.openxmlformats.org/drawingml/2006/main">
               <a:ext uri="{FF2B5EF4-FFF2-40B4-BE49-F238E27FC236}">
-                <a16:creationId xmlns:a16="http://schemas.microsoft.com/office/drawing/2014/main" id="{4A057E8E-3841-45AC-98CA-37DB655080BE}"/>
+                <a16:creationId xmlns:a16="http://schemas.microsoft.com/office/drawing/2014/main" id="{98443EA1-C08D-4333-903A-9B5A6A4C5A7D}"/>
               </a:ext>
             </a:extLst>
           </p:cNvPr>
@@ -12043,7 +12043,7 @@
           <p:cNvPr id="17" name="footer-rule-2">
             <a:extLst xmlns:a="http://schemas.openxmlformats.org/drawingml/2006/main">
               <a:ext uri="{FF2B5EF4-FFF2-40B4-BE49-F238E27FC236}">
-                <a16:creationId xmlns:a16="http://schemas.microsoft.com/office/drawing/2014/main" id="{2044A02E-9F8D-4210-923C-D1A838A3A797}"/>
+                <a16:creationId xmlns:a16="http://schemas.microsoft.com/office/drawing/2014/main" id="{C34FB68F-ECCB-4A82-980A-F532EE02A902}"/>
               </a:ext>
             </a:extLst>
           </p:cNvPr>
@@ -12074,7 +12074,7 @@
           <p:cNvPr id="18" name="footer-label-2">
             <a:extLst xmlns:a="http://schemas.openxmlformats.org/drawingml/2006/main">
               <a:ext uri="{FF2B5EF4-FFF2-40B4-BE49-F238E27FC236}">
-                <a16:creationId xmlns:a16="http://schemas.microsoft.com/office/drawing/2014/main" id="{9F0D6BCE-562E-4B9C-A891-89EB7F311883}"/>
+                <a16:creationId xmlns:a16="http://schemas.microsoft.com/office/drawing/2014/main" id="{6A8A710D-D694-4426-A7F1-CCA9F766EB84}"/>
               </a:ext>
             </a:extLst>
           </p:cNvPr>
@@ -12136,7 +12136,7 @@
           <p:cNvPr id="19" name="footer-page-2">
             <a:extLst xmlns:a="http://schemas.openxmlformats.org/drawingml/2006/main">
               <a:ext uri="{FF2B5EF4-FFF2-40B4-BE49-F238E27FC236}">
-                <a16:creationId xmlns:a16="http://schemas.microsoft.com/office/drawing/2014/main" id="{30E69F38-E5BF-43E7-8226-1792E5CA34D6}"/>
+                <a16:creationId xmlns:a16="http://schemas.microsoft.com/office/drawing/2014/main" id="{66DC9AF2-A661-49DA-B6DC-78B4B4C29852}"/>
               </a:ext>
             </a:extLst>
           </p:cNvPr>
@@ -12196,7 +12196,7 @@
     </p:spTree>
     <p:extLst>
       <p:ext uri="{BB962C8B-B14F-4D97-AF65-F5344CB8AC3E}">
-        <p14:creationId xmlns:p14="http://schemas.microsoft.com/office/powerpoint/2010/main" val="1363333221"/>
+        <p14:creationId xmlns:p14="http://schemas.microsoft.com/office/powerpoint/2010/main" val="1208093368"/>
       </p:ext>
     </p:extLst>
   </p:cSld>
@@ -12227,7 +12227,7 @@
           <p:cNvPr id="31" name="side-accent-3">
             <a:extLst xmlns:a="http://schemas.openxmlformats.org/drawingml/2006/main">
               <a:ext uri="{FF2B5EF4-FFF2-40B4-BE49-F238E27FC236}">
-                <a16:creationId xmlns:a16="http://schemas.microsoft.com/office/drawing/2014/main" id="{62C04E92-86B7-40CC-8784-6E032013362C}"/>
+                <a16:creationId xmlns:a16="http://schemas.microsoft.com/office/drawing/2014/main" id="{3BE6D2B9-92FA-4D73-A148-2FE0C35B42DB}"/>
               </a:ext>
             </a:extLst>
           </p:cNvPr>
@@ -12258,7 +12258,7 @@
           <p:cNvPr id="2" name="kicker-3">
             <a:extLst xmlns:a="http://schemas.openxmlformats.org/drawingml/2006/main">
               <a:ext uri="{FF2B5EF4-FFF2-40B4-BE49-F238E27FC236}">
-                <a16:creationId xmlns:a16="http://schemas.microsoft.com/office/drawing/2014/main" id="{DDFF47F6-0420-46A3-AB11-4BB2C2461E68}"/>
+                <a16:creationId xmlns:a16="http://schemas.microsoft.com/office/drawing/2014/main" id="{811A59F9-18B4-4F43-9D96-C9EBEE97AB6C}"/>
               </a:ext>
             </a:extLst>
           </p:cNvPr>
@@ -12320,7 +12320,7 @@
           <p:cNvPr id="3" name="title-3">
             <a:extLst xmlns:a="http://schemas.openxmlformats.org/drawingml/2006/main">
               <a:ext uri="{FF2B5EF4-FFF2-40B4-BE49-F238E27FC236}">
-                <a16:creationId xmlns:a16="http://schemas.microsoft.com/office/drawing/2014/main" id="{031215A1-4711-481A-83EB-E7ADBE6F15FE}"/>
+                <a16:creationId xmlns:a16="http://schemas.microsoft.com/office/drawing/2014/main" id="{9836616C-D2B7-4C74-A7B6-05BEBB13D745}"/>
               </a:ext>
             </a:extLst>
           </p:cNvPr>
@@ -12382,7 +12382,7 @@
           <p:cNvPr id="4" name="">
             <a:extLst xmlns:a="http://schemas.openxmlformats.org/drawingml/2006/main">
               <a:ext uri="{FF2B5EF4-FFF2-40B4-BE49-F238E27FC236}">
-                <a16:creationId xmlns:a16="http://schemas.microsoft.com/office/drawing/2014/main" id="{5D15CBF5-F955-40E8-BDC0-F729D25E85FF}"/>
+                <a16:creationId xmlns:a16="http://schemas.microsoft.com/office/drawing/2014/main" id="{1DE885CC-FAFF-42D6-A9BC-4BB17472930B}"/>
               </a:ext>
             </a:extLst>
           </p:cNvPr>
@@ -12444,7 +12444,7 @@
           <p:cNvPr id="5" name="workflow-line">
             <a:extLst xmlns:a="http://schemas.openxmlformats.org/drawingml/2006/main">
               <a:ext uri="{FF2B5EF4-FFF2-40B4-BE49-F238E27FC236}">
-                <a16:creationId xmlns:a16="http://schemas.microsoft.com/office/drawing/2014/main" id="{BF836693-E4F6-43BF-960A-6C08BF8F30FC}"/>
+                <a16:creationId xmlns:a16="http://schemas.microsoft.com/office/drawing/2014/main" id="{475A5194-EEE8-43F3-BCC3-F7DBE77C1114}"/>
               </a:ext>
             </a:extLst>
           </p:cNvPr>
@@ -12475,7 +12475,7 @@
           <p:cNvPr id="6" name="workflow-arrow">
             <a:extLst xmlns:a="http://schemas.openxmlformats.org/drawingml/2006/main">
               <a:ext uri="{FF2B5EF4-FFF2-40B4-BE49-F238E27FC236}">
-                <a16:creationId xmlns:a16="http://schemas.microsoft.com/office/drawing/2014/main" id="{B2CA3A7F-45F6-4747-B74D-4C18A75DDC13}"/>
+                <a16:creationId xmlns:a16="http://schemas.microsoft.com/office/drawing/2014/main" id="{4FB7403D-8783-4D62-BB94-068BC29D14CA}"/>
               </a:ext>
             </a:extLst>
           </p:cNvPr>
@@ -12506,7 +12506,7 @@
           <p:cNvPr id="7" name="">
             <a:extLst xmlns:a="http://schemas.openxmlformats.org/drawingml/2006/main">
               <a:ext uri="{FF2B5EF4-FFF2-40B4-BE49-F238E27FC236}">
-                <a16:creationId xmlns:a16="http://schemas.microsoft.com/office/drawing/2014/main" id="{96643029-E813-4641-8BEB-03E3BA0DA4BB}"/>
+                <a16:creationId xmlns:a16="http://schemas.microsoft.com/office/drawing/2014/main" id="{225E4CA0-7E07-46EE-A453-489071995D1C}"/>
               </a:ext>
             </a:extLst>
           </p:cNvPr>
@@ -12537,7 +12537,7 @@
           <p:cNvPr id="8" name="">
             <a:extLst xmlns:a="http://schemas.openxmlformats.org/drawingml/2006/main">
               <a:ext uri="{FF2B5EF4-FFF2-40B4-BE49-F238E27FC236}">
-                <a16:creationId xmlns:a16="http://schemas.microsoft.com/office/drawing/2014/main" id="{426DBF0B-2F94-4DA1-B1B3-7FED9326FD7C}"/>
+                <a16:creationId xmlns:a16="http://schemas.microsoft.com/office/drawing/2014/main" id="{75862EB3-C512-4C73-BC4A-107E0312314D}"/>
               </a:ext>
             </a:extLst>
           </p:cNvPr>
@@ -12599,7 +12599,7 @@
           <p:cNvPr id="9" name="">
             <a:extLst xmlns:a="http://schemas.openxmlformats.org/drawingml/2006/main">
               <a:ext uri="{FF2B5EF4-FFF2-40B4-BE49-F238E27FC236}">
-                <a16:creationId xmlns:a16="http://schemas.microsoft.com/office/drawing/2014/main" id="{3D0C2CFA-AC30-4872-B445-8A48E56CBF8E}"/>
+                <a16:creationId xmlns:a16="http://schemas.microsoft.com/office/drawing/2014/main" id="{5C55771C-1422-46B3-912F-38A6A1F392C6}"/>
               </a:ext>
             </a:extLst>
           </p:cNvPr>
@@ -12661,7 +12661,7 @@
           <p:cNvPr id="10" name="">
             <a:extLst xmlns:a="http://schemas.openxmlformats.org/drawingml/2006/main">
               <a:ext uri="{FF2B5EF4-FFF2-40B4-BE49-F238E27FC236}">
-                <a16:creationId xmlns:a16="http://schemas.microsoft.com/office/drawing/2014/main" id="{D815AFBD-E96F-4F60-BA04-423BCFA8A227}"/>
+                <a16:creationId xmlns:a16="http://schemas.microsoft.com/office/drawing/2014/main" id="{9578F075-87FA-4B7E-A4B9-FEFD0F35AC68}"/>
               </a:ext>
             </a:extLst>
           </p:cNvPr>
@@ -12713,7 +12713,7 @@
                 <a:ea typeface="Tahoma"/>
                 <a:cs typeface="Tahoma"/>
               </a:rPr>
-              <a:t>เลือกรอบและรายการ</a:t>
+              <a:t>ตรวจรอบและรายการ</a:t>
             </a:r>
           </a:p>
         </p:txBody>
@@ -12723,7 +12723,7 @@
           <p:cNvPr id="11" name="">
             <a:extLst xmlns:a="http://schemas.openxmlformats.org/drawingml/2006/main">
               <a:ext uri="{FF2B5EF4-FFF2-40B4-BE49-F238E27FC236}">
-                <a16:creationId xmlns:a16="http://schemas.microsoft.com/office/drawing/2014/main" id="{37E23480-E5FB-4DD9-99A8-6079C98C95B4}"/>
+                <a16:creationId xmlns:a16="http://schemas.microsoft.com/office/drawing/2014/main" id="{26B0A109-AD41-4859-BC29-7849B0234E5B}"/>
               </a:ext>
             </a:extLst>
           </p:cNvPr>
@@ -12754,7 +12754,7 @@
           <p:cNvPr id="12" name="">
             <a:extLst xmlns:a="http://schemas.openxmlformats.org/drawingml/2006/main">
               <a:ext uri="{FF2B5EF4-FFF2-40B4-BE49-F238E27FC236}">
-                <a16:creationId xmlns:a16="http://schemas.microsoft.com/office/drawing/2014/main" id="{2E3BDE26-5A41-4189-BB86-6149CA7A169C}"/>
+                <a16:creationId xmlns:a16="http://schemas.microsoft.com/office/drawing/2014/main" id="{D06F842F-F60E-49E1-9348-B8F70DE5C18D}"/>
               </a:ext>
             </a:extLst>
           </p:cNvPr>
@@ -12816,7 +12816,7 @@
           <p:cNvPr id="13" name="">
             <a:extLst xmlns:a="http://schemas.openxmlformats.org/drawingml/2006/main">
               <a:ext uri="{FF2B5EF4-FFF2-40B4-BE49-F238E27FC236}">
-                <a16:creationId xmlns:a16="http://schemas.microsoft.com/office/drawing/2014/main" id="{A6D17B1B-E933-4F24-BD52-6FABE3E737E3}"/>
+                <a16:creationId xmlns:a16="http://schemas.microsoft.com/office/drawing/2014/main" id="{74EA28F8-C02D-4FA0-8873-0CF260D7A9F2}"/>
               </a:ext>
             </a:extLst>
           </p:cNvPr>
@@ -12878,7 +12878,7 @@
           <p:cNvPr id="14" name="">
             <a:extLst xmlns:a="http://schemas.openxmlformats.org/drawingml/2006/main">
               <a:ext uri="{FF2B5EF4-FFF2-40B4-BE49-F238E27FC236}">
-                <a16:creationId xmlns:a16="http://schemas.microsoft.com/office/drawing/2014/main" id="{6AF24E6F-0B2F-4CD7-8985-8AE447EF0F6E}"/>
+                <a16:creationId xmlns:a16="http://schemas.microsoft.com/office/drawing/2014/main" id="{0040A120-E1D5-4DC1-B56E-3AA9370E9781}"/>
               </a:ext>
             </a:extLst>
           </p:cNvPr>
@@ -12940,7 +12940,7 @@
           <p:cNvPr id="15" name="">
             <a:extLst xmlns:a="http://schemas.openxmlformats.org/drawingml/2006/main">
               <a:ext uri="{FF2B5EF4-FFF2-40B4-BE49-F238E27FC236}">
-                <a16:creationId xmlns:a16="http://schemas.microsoft.com/office/drawing/2014/main" id="{F8BA565D-F69E-4926-BA13-69C0E7BBF553}"/>
+                <a16:creationId xmlns:a16="http://schemas.microsoft.com/office/drawing/2014/main" id="{E6A6B600-329D-467F-A944-F7D7EBF0D2D1}"/>
               </a:ext>
             </a:extLst>
           </p:cNvPr>
@@ -12971,7 +12971,7 @@
           <p:cNvPr id="16" name="">
             <a:extLst xmlns:a="http://schemas.openxmlformats.org/drawingml/2006/main">
               <a:ext uri="{FF2B5EF4-FFF2-40B4-BE49-F238E27FC236}">
-                <a16:creationId xmlns:a16="http://schemas.microsoft.com/office/drawing/2014/main" id="{3933559F-2E13-4373-95DA-789D1B664C6B}"/>
+                <a16:creationId xmlns:a16="http://schemas.microsoft.com/office/drawing/2014/main" id="{70C3FB7B-9032-4EFA-8113-3EB829FCBD8E}"/>
               </a:ext>
             </a:extLst>
           </p:cNvPr>
@@ -13033,7 +13033,7 @@
           <p:cNvPr id="17" name="">
             <a:extLst xmlns:a="http://schemas.openxmlformats.org/drawingml/2006/main">
               <a:ext uri="{FF2B5EF4-FFF2-40B4-BE49-F238E27FC236}">
-                <a16:creationId xmlns:a16="http://schemas.microsoft.com/office/drawing/2014/main" id="{47B69C9F-E9B1-44F2-B451-E794DCED25BC}"/>
+                <a16:creationId xmlns:a16="http://schemas.microsoft.com/office/drawing/2014/main" id="{3B36E781-7A00-4F0D-BB4A-7732753299CB}"/>
               </a:ext>
             </a:extLst>
           </p:cNvPr>
@@ -13095,7 +13095,7 @@
           <p:cNvPr id="18" name="">
             <a:extLst xmlns:a="http://schemas.openxmlformats.org/drawingml/2006/main">
               <a:ext uri="{FF2B5EF4-FFF2-40B4-BE49-F238E27FC236}">
-                <a16:creationId xmlns:a16="http://schemas.microsoft.com/office/drawing/2014/main" id="{7AEF11BE-D9AC-4FAA-B25A-117C9738C957}"/>
+                <a16:creationId xmlns:a16="http://schemas.microsoft.com/office/drawing/2014/main" id="{9C82B150-F2A9-4AA6-A6FE-BD531F8E1EA8}"/>
               </a:ext>
             </a:extLst>
           </p:cNvPr>
@@ -13157,7 +13157,7 @@
           <p:cNvPr id="19" name="">
             <a:extLst xmlns:a="http://schemas.openxmlformats.org/drawingml/2006/main">
               <a:ext uri="{FF2B5EF4-FFF2-40B4-BE49-F238E27FC236}">
-                <a16:creationId xmlns:a16="http://schemas.microsoft.com/office/drawing/2014/main" id="{66B6A957-CA9C-418E-AFD4-D8E8CF0AAAF4}"/>
+                <a16:creationId xmlns:a16="http://schemas.microsoft.com/office/drawing/2014/main" id="{F97B5E21-B4D5-420E-81B0-AA86D592D4AB}"/>
               </a:ext>
             </a:extLst>
           </p:cNvPr>
@@ -13188,7 +13188,7 @@
           <p:cNvPr id="20" name="">
             <a:extLst xmlns:a="http://schemas.openxmlformats.org/drawingml/2006/main">
               <a:ext uri="{FF2B5EF4-FFF2-40B4-BE49-F238E27FC236}">
-                <a16:creationId xmlns:a16="http://schemas.microsoft.com/office/drawing/2014/main" id="{C040A61B-E433-4616-AD08-52B1CCE0D90D}"/>
+                <a16:creationId xmlns:a16="http://schemas.microsoft.com/office/drawing/2014/main" id="{3C6C3C4C-74F8-4F21-BC1D-2C3E40929784}"/>
               </a:ext>
             </a:extLst>
           </p:cNvPr>
@@ -13250,7 +13250,7 @@
           <p:cNvPr id="21" name="">
             <a:extLst xmlns:a="http://schemas.openxmlformats.org/drawingml/2006/main">
               <a:ext uri="{FF2B5EF4-FFF2-40B4-BE49-F238E27FC236}">
-                <a16:creationId xmlns:a16="http://schemas.microsoft.com/office/drawing/2014/main" id="{2D89D4FC-0170-4E65-84F0-6EE0DE8DD43F}"/>
+                <a16:creationId xmlns:a16="http://schemas.microsoft.com/office/drawing/2014/main" id="{84B67C83-FD32-4158-B321-2F8AA9E3EAB7}"/>
               </a:ext>
             </a:extLst>
           </p:cNvPr>
@@ -13312,7 +13312,7 @@
           <p:cNvPr id="22" name="">
             <a:extLst xmlns:a="http://schemas.openxmlformats.org/drawingml/2006/main">
               <a:ext uri="{FF2B5EF4-FFF2-40B4-BE49-F238E27FC236}">
-                <a16:creationId xmlns:a16="http://schemas.microsoft.com/office/drawing/2014/main" id="{2283CB26-2F30-4739-A57E-DC5356B95CE3}"/>
+                <a16:creationId xmlns:a16="http://schemas.microsoft.com/office/drawing/2014/main" id="{43D66BF4-9A10-4739-9150-0BAA3EA2E1B5}"/>
               </a:ext>
             </a:extLst>
           </p:cNvPr>
@@ -13374,7 +13374,7 @@
           <p:cNvPr id="23" name="">
             <a:extLst xmlns:a="http://schemas.openxmlformats.org/drawingml/2006/main">
               <a:ext uri="{FF2B5EF4-FFF2-40B4-BE49-F238E27FC236}">
-                <a16:creationId xmlns:a16="http://schemas.microsoft.com/office/drawing/2014/main" id="{DA401A13-B4F0-4202-BABA-566D0CE143B6}"/>
+                <a16:creationId xmlns:a16="http://schemas.microsoft.com/office/drawing/2014/main" id="{F50B39B9-6074-47F0-8D81-962B377378C7}"/>
               </a:ext>
             </a:extLst>
           </p:cNvPr>
@@ -13405,7 +13405,7 @@
           <p:cNvPr id="24" name="">
             <a:extLst xmlns:a="http://schemas.openxmlformats.org/drawingml/2006/main">
               <a:ext uri="{FF2B5EF4-FFF2-40B4-BE49-F238E27FC236}">
-                <a16:creationId xmlns:a16="http://schemas.microsoft.com/office/drawing/2014/main" id="{3DFCF498-2709-4542-B1D2-2A3B58459499}"/>
+                <a16:creationId xmlns:a16="http://schemas.microsoft.com/office/drawing/2014/main" id="{89430665-35FC-49B2-B883-B700B00145D3}"/>
               </a:ext>
             </a:extLst>
           </p:cNvPr>
@@ -13467,7 +13467,7 @@
           <p:cNvPr id="25" name="">
             <a:extLst xmlns:a="http://schemas.openxmlformats.org/drawingml/2006/main">
               <a:ext uri="{FF2B5EF4-FFF2-40B4-BE49-F238E27FC236}">
-                <a16:creationId xmlns:a16="http://schemas.microsoft.com/office/drawing/2014/main" id="{A94D854C-D14A-4CDE-9F9F-9E7F9004437C}"/>
+                <a16:creationId xmlns:a16="http://schemas.microsoft.com/office/drawing/2014/main" id="{0415783E-37FC-4999-B771-3D309D7C5826}"/>
               </a:ext>
             </a:extLst>
           </p:cNvPr>
@@ -13529,7 +13529,7 @@
           <p:cNvPr id="26" name="">
             <a:extLst xmlns:a="http://schemas.openxmlformats.org/drawingml/2006/main">
               <a:ext uri="{FF2B5EF4-FFF2-40B4-BE49-F238E27FC236}">
-                <a16:creationId xmlns:a16="http://schemas.microsoft.com/office/drawing/2014/main" id="{A0476FE3-4DB8-4A15-984C-FBDA098962FB}"/>
+                <a16:creationId xmlns:a16="http://schemas.microsoft.com/office/drawing/2014/main" id="{C3D268C8-D406-4C3B-9161-C594C81A3080}"/>
               </a:ext>
             </a:extLst>
           </p:cNvPr>
@@ -13591,7 +13591,7 @@
           <p:cNvPr id="27" name="">
             <a:extLst xmlns:a="http://schemas.openxmlformats.org/drawingml/2006/main">
               <a:ext uri="{FF2B5EF4-FFF2-40B4-BE49-F238E27FC236}">
-                <a16:creationId xmlns:a16="http://schemas.microsoft.com/office/drawing/2014/main" id="{EC07540B-E37E-443C-8DD2-09B64996C2BC}"/>
+                <a16:creationId xmlns:a16="http://schemas.microsoft.com/office/drawing/2014/main" id="{2EEA81F6-EC99-4653-B785-72591D3644B5}"/>
               </a:ext>
             </a:extLst>
           </p:cNvPr>
@@ -13653,7 +13653,7 @@
           <p:cNvPr id="28" name="footer-rule-3">
             <a:extLst xmlns:a="http://schemas.openxmlformats.org/drawingml/2006/main">
               <a:ext uri="{FF2B5EF4-FFF2-40B4-BE49-F238E27FC236}">
-                <a16:creationId xmlns:a16="http://schemas.microsoft.com/office/drawing/2014/main" id="{3E4D11EF-5613-48EE-A86C-4207448792D9}"/>
+                <a16:creationId xmlns:a16="http://schemas.microsoft.com/office/drawing/2014/main" id="{EB2BC9E8-CBDE-4CD5-94E4-66C362B791D9}"/>
               </a:ext>
             </a:extLst>
           </p:cNvPr>
@@ -13684,7 +13684,7 @@
           <p:cNvPr id="29" name="footer-label-3">
             <a:extLst xmlns:a="http://schemas.openxmlformats.org/drawingml/2006/main">
               <a:ext uri="{FF2B5EF4-FFF2-40B4-BE49-F238E27FC236}">
-                <a16:creationId xmlns:a16="http://schemas.microsoft.com/office/drawing/2014/main" id="{9CCC4278-7F97-43C2-B5ED-EB4B47F6FEA4}"/>
+                <a16:creationId xmlns:a16="http://schemas.microsoft.com/office/drawing/2014/main" id="{4A821449-F6B1-4DB6-ABC0-00188E6C646C}"/>
               </a:ext>
             </a:extLst>
           </p:cNvPr>
@@ -13746,7 +13746,7 @@
           <p:cNvPr id="30" name="footer-page-3">
             <a:extLst xmlns:a="http://schemas.openxmlformats.org/drawingml/2006/main">
               <a:ext uri="{FF2B5EF4-FFF2-40B4-BE49-F238E27FC236}">
-                <a16:creationId xmlns:a16="http://schemas.microsoft.com/office/drawing/2014/main" id="{C35E83A5-D01D-4541-9A50-992F7463EDC2}"/>
+                <a16:creationId xmlns:a16="http://schemas.microsoft.com/office/drawing/2014/main" id="{094B4F8F-4757-4952-86AE-9BFAC0E699C6}"/>
               </a:ext>
             </a:extLst>
           </p:cNvPr>
@@ -13806,7 +13806,7 @@
     </p:spTree>
     <p:extLst>
       <p:ext uri="{BB962C8B-B14F-4D97-AF65-F5344CB8AC3E}">
-        <p14:creationId xmlns:p14="http://schemas.microsoft.com/office/powerpoint/2010/main" val="327316431"/>
+        <p14:creationId xmlns:p14="http://schemas.microsoft.com/office/powerpoint/2010/main" val="1698178951"/>
       </p:ext>
     </p:extLst>
   </p:cSld>
@@ -13837,7 +13837,7 @@
           <p:cNvPr id="22" name="side-accent-4">
             <a:extLst xmlns:a="http://schemas.openxmlformats.org/drawingml/2006/main">
               <a:ext uri="{FF2B5EF4-FFF2-40B4-BE49-F238E27FC236}">
-                <a16:creationId xmlns:a16="http://schemas.microsoft.com/office/drawing/2014/main" id="{523F8FB4-B606-43AB-BA59-75BDE0F1EC54}"/>
+                <a16:creationId xmlns:a16="http://schemas.microsoft.com/office/drawing/2014/main" id="{45967D9B-1E68-4271-8F9B-EE1D07EAA0AA}"/>
               </a:ext>
             </a:extLst>
           </p:cNvPr>
@@ -13868,7 +13868,7 @@
           <p:cNvPr id="2" name="kicker-4">
             <a:extLst xmlns:a="http://schemas.openxmlformats.org/drawingml/2006/main">
               <a:ext uri="{FF2B5EF4-FFF2-40B4-BE49-F238E27FC236}">
-                <a16:creationId xmlns:a16="http://schemas.microsoft.com/office/drawing/2014/main" id="{937A8C3D-A28C-4C2C-9EDB-2FCB47E34ABF}"/>
+                <a16:creationId xmlns:a16="http://schemas.microsoft.com/office/drawing/2014/main" id="{93A40537-7833-4A73-9BA5-ABDEE47A79D5}"/>
               </a:ext>
             </a:extLst>
           </p:cNvPr>
@@ -13930,7 +13930,7 @@
           <p:cNvPr id="3" name="title-4">
             <a:extLst xmlns:a="http://schemas.openxmlformats.org/drawingml/2006/main">
               <a:ext uri="{FF2B5EF4-FFF2-40B4-BE49-F238E27FC236}">
-                <a16:creationId xmlns:a16="http://schemas.microsoft.com/office/drawing/2014/main" id="{2C17DF04-D494-4D56-9268-1068A380C792}"/>
+                <a16:creationId xmlns:a16="http://schemas.microsoft.com/office/drawing/2014/main" id="{6E1D3BFF-774B-474D-9DD2-72089D40AFE9}"/>
               </a:ext>
             </a:extLst>
           </p:cNvPr>
@@ -13992,7 +13992,7 @@
           <p:cNvPr id="4" name="">
             <a:extLst xmlns:a="http://schemas.openxmlformats.org/drawingml/2006/main">
               <a:ext uri="{FF2B5EF4-FFF2-40B4-BE49-F238E27FC236}">
-                <a16:creationId xmlns:a16="http://schemas.microsoft.com/office/drawing/2014/main" id="{ED08CBA5-EAA4-450D-B913-DB45E1994C2C}"/>
+                <a16:creationId xmlns:a16="http://schemas.microsoft.com/office/drawing/2014/main" id="{9B743498-59A2-4CD1-B269-48FA6D37AE16}"/>
               </a:ext>
             </a:extLst>
           </p:cNvPr>
@@ -14054,7 +14054,7 @@
           <p:cNvPr id="5" name="">
             <a:extLst xmlns:a="http://schemas.openxmlformats.org/drawingml/2006/main">
               <a:ext uri="{FF2B5EF4-FFF2-40B4-BE49-F238E27FC236}">
-                <a16:creationId xmlns:a16="http://schemas.microsoft.com/office/drawing/2014/main" id="{5C83F6AB-E270-4D55-A13D-E3DB98DA0740}"/>
+                <a16:creationId xmlns:a16="http://schemas.microsoft.com/office/drawing/2014/main" id="{2681CFC6-990C-4B39-8238-820A5964AC05}"/>
               </a:ext>
             </a:extLst>
           </p:cNvPr>
@@ -14116,7 +14116,7 @@
           <p:cNvPr id="6" name="">
             <a:extLst xmlns:a="http://schemas.openxmlformats.org/drawingml/2006/main">
               <a:ext uri="{FF2B5EF4-FFF2-40B4-BE49-F238E27FC236}">
-                <a16:creationId xmlns:a16="http://schemas.microsoft.com/office/drawing/2014/main" id="{EF5209B1-F913-40F4-ACA9-7083BE305395}"/>
+                <a16:creationId xmlns:a16="http://schemas.microsoft.com/office/drawing/2014/main" id="{95FBE379-D48E-4F92-944D-D7D8064FC968}"/>
               </a:ext>
             </a:extLst>
           </p:cNvPr>
@@ -14178,7 +14178,7 @@
           <p:cNvPr id="7" name="">
             <a:extLst xmlns:a="http://schemas.openxmlformats.org/drawingml/2006/main">
               <a:ext uri="{FF2B5EF4-FFF2-40B4-BE49-F238E27FC236}">
-                <a16:creationId xmlns:a16="http://schemas.microsoft.com/office/drawing/2014/main" id="{80A60272-CD11-4F52-975A-3D35B98A8AFC}"/>
+                <a16:creationId xmlns:a16="http://schemas.microsoft.com/office/drawing/2014/main" id="{40941CDA-03F8-437B-BD04-B289EFA922D4}"/>
               </a:ext>
             </a:extLst>
           </p:cNvPr>
@@ -14209,7 +14209,7 @@
           <p:cNvPr id="8" name="">
             <a:extLst xmlns:a="http://schemas.openxmlformats.org/drawingml/2006/main">
               <a:ext uri="{FF2B5EF4-FFF2-40B4-BE49-F238E27FC236}">
-                <a16:creationId xmlns:a16="http://schemas.microsoft.com/office/drawing/2014/main" id="{9C17FBA6-E25F-413D-9186-29C1429A28FE}"/>
+                <a16:creationId xmlns:a16="http://schemas.microsoft.com/office/drawing/2014/main" id="{B296ADA6-6023-4573-AF0F-D59191256AEB}"/>
               </a:ext>
             </a:extLst>
           </p:cNvPr>
@@ -14298,7 +14298,7 @@
           <p:cNvPr id="9" name="">
             <a:extLst xmlns:a="http://schemas.openxmlformats.org/drawingml/2006/main">
               <a:ext uri="{FF2B5EF4-FFF2-40B4-BE49-F238E27FC236}">
-                <a16:creationId xmlns:a16="http://schemas.microsoft.com/office/drawing/2014/main" id="{99BC3253-9D52-4A56-97C8-FE168973B608}"/>
+                <a16:creationId xmlns:a16="http://schemas.microsoft.com/office/drawing/2014/main" id="{E219CE92-827B-4E71-9147-A085A11CA5E5}"/>
               </a:ext>
             </a:extLst>
           </p:cNvPr>
@@ -14360,7 +14360,7 @@
           <p:cNvPr id="10" name="">
             <a:extLst xmlns:a="http://schemas.openxmlformats.org/drawingml/2006/main">
               <a:ext uri="{FF2B5EF4-FFF2-40B4-BE49-F238E27FC236}">
-                <a16:creationId xmlns:a16="http://schemas.microsoft.com/office/drawing/2014/main" id="{92E6D44A-E342-4AE3-86EC-BE8D1151626A}"/>
+                <a16:creationId xmlns:a16="http://schemas.microsoft.com/office/drawing/2014/main" id="{34A0D00E-9447-4A25-AB7F-FC0853AFDADF}"/>
               </a:ext>
             </a:extLst>
           </p:cNvPr>
@@ -14422,7 +14422,7 @@
           <p:cNvPr id="11" name="">
             <a:extLst xmlns:a="http://schemas.openxmlformats.org/drawingml/2006/main">
               <a:ext uri="{FF2B5EF4-FFF2-40B4-BE49-F238E27FC236}">
-                <a16:creationId xmlns:a16="http://schemas.microsoft.com/office/drawing/2014/main" id="{F9C709E4-8642-49D9-AC37-2E3988A37D68}"/>
+                <a16:creationId xmlns:a16="http://schemas.microsoft.com/office/drawing/2014/main" id="{7D27F0BF-9AE7-4937-BC57-E9B4A16A9B02}"/>
               </a:ext>
             </a:extLst>
           </p:cNvPr>
@@ -14453,7 +14453,7 @@
           <p:cNvPr id="12" name="">
             <a:extLst xmlns:a="http://schemas.openxmlformats.org/drawingml/2006/main">
               <a:ext uri="{FF2B5EF4-FFF2-40B4-BE49-F238E27FC236}">
-                <a16:creationId xmlns:a16="http://schemas.microsoft.com/office/drawing/2014/main" id="{F37B5B49-8C4A-4AB6-AD51-E0C4B33E741E}"/>
+                <a16:creationId xmlns:a16="http://schemas.microsoft.com/office/drawing/2014/main" id="{24DA438D-0E9C-4D48-B5AC-85AF2610DF8C}"/>
               </a:ext>
             </a:extLst>
           </p:cNvPr>
@@ -14542,7 +14542,7 @@
           <p:cNvPr id="13" name="">
             <a:extLst xmlns:a="http://schemas.openxmlformats.org/drawingml/2006/main">
               <a:ext uri="{FF2B5EF4-FFF2-40B4-BE49-F238E27FC236}">
-                <a16:creationId xmlns:a16="http://schemas.microsoft.com/office/drawing/2014/main" id="{433B6C09-2C61-4701-AB4F-CE065CC3D016}"/>
+                <a16:creationId xmlns:a16="http://schemas.microsoft.com/office/drawing/2014/main" id="{9CA32569-FF3C-475B-BEAF-16CD59E65508}"/>
               </a:ext>
             </a:extLst>
           </p:cNvPr>
@@ -14604,7 +14604,7 @@
           <p:cNvPr id="14" name="">
             <a:extLst xmlns:a="http://schemas.openxmlformats.org/drawingml/2006/main">
               <a:ext uri="{FF2B5EF4-FFF2-40B4-BE49-F238E27FC236}">
-                <a16:creationId xmlns:a16="http://schemas.microsoft.com/office/drawing/2014/main" id="{5FE08DC1-9EB3-46AF-B0A1-48AB33F9FA92}"/>
+                <a16:creationId xmlns:a16="http://schemas.microsoft.com/office/drawing/2014/main" id="{CE27EFD9-A57C-40E5-9ABB-1DA02A29A377}"/>
               </a:ext>
             </a:extLst>
           </p:cNvPr>
@@ -14666,7 +14666,7 @@
           <p:cNvPr id="15" name="">
             <a:extLst xmlns:a="http://schemas.openxmlformats.org/drawingml/2006/main">
               <a:ext uri="{FF2B5EF4-FFF2-40B4-BE49-F238E27FC236}">
-                <a16:creationId xmlns:a16="http://schemas.microsoft.com/office/drawing/2014/main" id="{38AC4C2C-9A8C-42C8-A206-2A11DFA0F020}"/>
+                <a16:creationId xmlns:a16="http://schemas.microsoft.com/office/drawing/2014/main" id="{95F1A349-F53F-40E2-8FFE-30E2D6A1ACFA}"/>
               </a:ext>
             </a:extLst>
           </p:cNvPr>
@@ -14697,7 +14697,7 @@
           <p:cNvPr id="16" name="">
             <a:extLst xmlns:a="http://schemas.openxmlformats.org/drawingml/2006/main">
               <a:ext uri="{FF2B5EF4-FFF2-40B4-BE49-F238E27FC236}">
-                <a16:creationId xmlns:a16="http://schemas.microsoft.com/office/drawing/2014/main" id="{F8E6A856-208C-491F-B325-84900D676004}"/>
+                <a16:creationId xmlns:a16="http://schemas.microsoft.com/office/drawing/2014/main" id="{476EBE56-0F85-4159-848D-23321DA3623E}"/>
               </a:ext>
             </a:extLst>
           </p:cNvPr>
@@ -14786,7 +14786,7 @@
           <p:cNvPr id="17" name="">
             <a:extLst xmlns:a="http://schemas.openxmlformats.org/drawingml/2006/main">
               <a:ext uri="{FF2B5EF4-FFF2-40B4-BE49-F238E27FC236}">
-                <a16:creationId xmlns:a16="http://schemas.microsoft.com/office/drawing/2014/main" id="{3018C1B4-CF4F-4E2C-8FF0-69CDFE2ABB7D}"/>
+                <a16:creationId xmlns:a16="http://schemas.microsoft.com/office/drawing/2014/main" id="{ACDF484C-F0AB-4CB6-9C09-D8A2F4FB9109}"/>
               </a:ext>
             </a:extLst>
           </p:cNvPr>
@@ -14819,7 +14819,7 @@
           <p:cNvPr id="18" name="">
             <a:extLst xmlns:a="http://schemas.openxmlformats.org/drawingml/2006/main">
               <a:ext uri="{FF2B5EF4-FFF2-40B4-BE49-F238E27FC236}">
-                <a16:creationId xmlns:a16="http://schemas.microsoft.com/office/drawing/2014/main" id="{98E9E9E6-BD39-4680-B2B3-46895ED1922D}"/>
+                <a16:creationId xmlns:a16="http://schemas.microsoft.com/office/drawing/2014/main" id="{FC8FCF10-30F2-46E1-B042-530726C2FFEC}"/>
               </a:ext>
             </a:extLst>
           </p:cNvPr>
@@ -14908,7 +14908,7 @@
           <p:cNvPr id="19" name="footer-rule-4">
             <a:extLst xmlns:a="http://schemas.openxmlformats.org/drawingml/2006/main">
               <a:ext uri="{FF2B5EF4-FFF2-40B4-BE49-F238E27FC236}">
-                <a16:creationId xmlns:a16="http://schemas.microsoft.com/office/drawing/2014/main" id="{56D21E26-B1F3-44F2-AC90-AFCF6C89C056}"/>
+                <a16:creationId xmlns:a16="http://schemas.microsoft.com/office/drawing/2014/main" id="{6B5154E9-AE0B-4DD4-9418-CB5586E5F6F3}"/>
               </a:ext>
             </a:extLst>
           </p:cNvPr>
@@ -14939,7 +14939,7 @@
           <p:cNvPr id="20" name="footer-label-4">
             <a:extLst xmlns:a="http://schemas.openxmlformats.org/drawingml/2006/main">
               <a:ext uri="{FF2B5EF4-FFF2-40B4-BE49-F238E27FC236}">
-                <a16:creationId xmlns:a16="http://schemas.microsoft.com/office/drawing/2014/main" id="{2430B2D2-5E25-4B76-9120-BD29F7736C9B}"/>
+                <a16:creationId xmlns:a16="http://schemas.microsoft.com/office/drawing/2014/main" id="{6AF6D24F-C215-44F3-8A70-EA79616D9A68}"/>
               </a:ext>
             </a:extLst>
           </p:cNvPr>
@@ -15001,7 +15001,7 @@
           <p:cNvPr id="21" name="footer-page-4">
             <a:extLst xmlns:a="http://schemas.openxmlformats.org/drawingml/2006/main">
               <a:ext uri="{FF2B5EF4-FFF2-40B4-BE49-F238E27FC236}">
-                <a16:creationId xmlns:a16="http://schemas.microsoft.com/office/drawing/2014/main" id="{6084D4AB-F666-44DD-8E9D-E31EFF239753}"/>
+                <a16:creationId xmlns:a16="http://schemas.microsoft.com/office/drawing/2014/main" id="{D137CEA4-A2DD-4583-B5C4-E6CAE02CD6EA}"/>
               </a:ext>
             </a:extLst>
           </p:cNvPr>
@@ -15061,7 +15061,7 @@
     </p:spTree>
     <p:extLst>
       <p:ext uri="{BB962C8B-B14F-4D97-AF65-F5344CB8AC3E}">
-        <p14:creationId xmlns:p14="http://schemas.microsoft.com/office/powerpoint/2010/main" val="743051996"/>
+        <p14:creationId xmlns:p14="http://schemas.microsoft.com/office/powerpoint/2010/main" val="277642875"/>
       </p:ext>
     </p:extLst>
   </p:cSld>
@@ -15092,7 +15092,7 @@
           <p:cNvPr id="28" name="side-accent-5">
             <a:extLst xmlns:a="http://schemas.openxmlformats.org/drawingml/2006/main">
               <a:ext uri="{FF2B5EF4-FFF2-40B4-BE49-F238E27FC236}">
-                <a16:creationId xmlns:a16="http://schemas.microsoft.com/office/drawing/2014/main" id="{6CE53B04-A99B-4688-B8CA-BD02DB6D11E9}"/>
+                <a16:creationId xmlns:a16="http://schemas.microsoft.com/office/drawing/2014/main" id="{72BB8285-7666-4214-9162-5E82479EC961}"/>
               </a:ext>
             </a:extLst>
           </p:cNvPr>
@@ -15123,7 +15123,7 @@
           <p:cNvPr id="2" name="kicker-5">
             <a:extLst xmlns:a="http://schemas.openxmlformats.org/drawingml/2006/main">
               <a:ext uri="{FF2B5EF4-FFF2-40B4-BE49-F238E27FC236}">
-                <a16:creationId xmlns:a16="http://schemas.microsoft.com/office/drawing/2014/main" id="{D3B39C39-A1F2-41B2-84C0-FEA3E4DD08F8}"/>
+                <a16:creationId xmlns:a16="http://schemas.microsoft.com/office/drawing/2014/main" id="{5E6C5E58-0EE8-41F0-AC95-6318983654A2}"/>
               </a:ext>
             </a:extLst>
           </p:cNvPr>
@@ -15185,7 +15185,7 @@
           <p:cNvPr id="3" name="title-5">
             <a:extLst xmlns:a="http://schemas.openxmlformats.org/drawingml/2006/main">
               <a:ext uri="{FF2B5EF4-FFF2-40B4-BE49-F238E27FC236}">
-                <a16:creationId xmlns:a16="http://schemas.microsoft.com/office/drawing/2014/main" id="{228ACBAE-8B3B-4B74-88DA-38A21EC4D209}"/>
+                <a16:creationId xmlns:a16="http://schemas.microsoft.com/office/drawing/2014/main" id="{698E8377-D700-4EEF-9F48-4402D9AF280A}"/>
               </a:ext>
             </a:extLst>
           </p:cNvPr>
@@ -15237,7 +15237,7 @@
                 <a:ea typeface="Tahoma"/>
                 <a:cs typeface="Tahoma"/>
               </a:rPr>
-              <a:t>เริ่มจากตรวจสอบรอบประเมินและรายการของคุณ</a:t>
+              <a:t>ตรวจสอบรอบประเมินและรายการที่ได้รับมอบหมาย</a:t>
             </a:r>
           </a:p>
         </p:txBody>
@@ -15247,7 +15247,7 @@
           <p:cNvPr id="4" name="">
             <a:extLst xmlns:a="http://schemas.openxmlformats.org/drawingml/2006/main">
               <a:ext uri="{FF2B5EF4-FFF2-40B4-BE49-F238E27FC236}">
-                <a16:creationId xmlns:a16="http://schemas.microsoft.com/office/drawing/2014/main" id="{5C3053CF-F32F-4C58-B45C-13993D4E8AE9}"/>
+                <a16:creationId xmlns:a16="http://schemas.microsoft.com/office/drawing/2014/main" id="{4D7505B8-6F00-4768-8842-903616A1535B}"/>
               </a:ext>
             </a:extLst>
           </p:cNvPr>
@@ -15309,7 +15309,7 @@
           <p:cNvPr id="5" name="">
             <a:extLst xmlns:a="http://schemas.openxmlformats.org/drawingml/2006/main">
               <a:ext uri="{FF2B5EF4-FFF2-40B4-BE49-F238E27FC236}">
-                <a16:creationId xmlns:a16="http://schemas.microsoft.com/office/drawing/2014/main" id="{FB1FB925-9463-4F80-A019-266934D32B97}"/>
+                <a16:creationId xmlns:a16="http://schemas.microsoft.com/office/drawing/2014/main" id="{A70B5DC2-0D56-4F99-A663-A037ED97BCC2}"/>
               </a:ext>
             </a:extLst>
           </p:cNvPr>
@@ -15340,7 +15340,7 @@
           <p:cNvPr id="6" name="">
             <a:extLst xmlns:a="http://schemas.openxmlformats.org/drawingml/2006/main">
               <a:ext uri="{FF2B5EF4-FFF2-40B4-BE49-F238E27FC236}">
-                <a16:creationId xmlns:a16="http://schemas.microsoft.com/office/drawing/2014/main" id="{927F2AE6-2EC5-4AF7-A02A-427634317C05}"/>
+                <a16:creationId xmlns:a16="http://schemas.microsoft.com/office/drawing/2014/main" id="{C3A65C6A-3D82-4CD7-8309-E29ADDD62B35}"/>
               </a:ext>
             </a:extLst>
           </p:cNvPr>
@@ -15402,7 +15402,7 @@
           <p:cNvPr id="7" name="">
             <a:extLst xmlns:a="http://schemas.openxmlformats.org/drawingml/2006/main">
               <a:ext uri="{FF2B5EF4-FFF2-40B4-BE49-F238E27FC236}">
-                <a16:creationId xmlns:a16="http://schemas.microsoft.com/office/drawing/2014/main" id="{035769B0-0B48-407F-9DD4-797F347B23AE}"/>
+                <a16:creationId xmlns:a16="http://schemas.microsoft.com/office/drawing/2014/main" id="{54CDD3A9-0D41-4312-9943-88E8727C04D3}"/>
               </a:ext>
             </a:extLst>
           </p:cNvPr>
@@ -15464,7 +15464,7 @@
           <p:cNvPr id="8" name="">
             <a:extLst xmlns:a="http://schemas.openxmlformats.org/drawingml/2006/main">
               <a:ext uri="{FF2B5EF4-FFF2-40B4-BE49-F238E27FC236}">
-                <a16:creationId xmlns:a16="http://schemas.microsoft.com/office/drawing/2014/main" id="{2052E262-8E78-4B98-8AEB-A498E12222E9}"/>
+                <a16:creationId xmlns:a16="http://schemas.microsoft.com/office/drawing/2014/main" id="{30177A5F-9E2F-4678-8F57-557864468F39}"/>
               </a:ext>
             </a:extLst>
           </p:cNvPr>
@@ -15516,7 +15516,7 @@
                 <a:ea typeface="Tahoma"/>
                 <a:cs typeface="Tahoma"/>
               </a:rPr>
-              <a:t>ปีและช่วงเวลาถูกต้อง</a:t>
+              <a:t>ผู้ดูแลระบบกำหนดไว้ถูกต้อง</a:t>
             </a:r>
           </a:p>
         </p:txBody>
@@ -15526,7 +15526,7 @@
           <p:cNvPr id="9" name="">
             <a:extLst xmlns:a="http://schemas.openxmlformats.org/drawingml/2006/main">
               <a:ext uri="{FF2B5EF4-FFF2-40B4-BE49-F238E27FC236}">
-                <a16:creationId xmlns:a16="http://schemas.microsoft.com/office/drawing/2014/main" id="{B97D5C00-0899-4E78-959E-86E8F7C9E6FE}"/>
+                <a16:creationId xmlns:a16="http://schemas.microsoft.com/office/drawing/2014/main" id="{0CC57184-B5B7-4C25-A0E4-16EDA848EFF1}"/>
               </a:ext>
             </a:extLst>
           </p:cNvPr>
@@ -15557,7 +15557,7 @@
           <p:cNvPr id="10" name="">
             <a:extLst xmlns:a="http://schemas.openxmlformats.org/drawingml/2006/main">
               <a:ext uri="{FF2B5EF4-FFF2-40B4-BE49-F238E27FC236}">
-                <a16:creationId xmlns:a16="http://schemas.microsoft.com/office/drawing/2014/main" id="{40C7C20D-12D8-4BB1-8474-D1F839DCF7A6}"/>
+                <a16:creationId xmlns:a16="http://schemas.microsoft.com/office/drawing/2014/main" id="{447DA60A-61B7-44F2-BCA6-766093FEA813}"/>
               </a:ext>
             </a:extLst>
           </p:cNvPr>
@@ -15619,7 +15619,7 @@
           <p:cNvPr id="11" name="">
             <a:extLst xmlns:a="http://schemas.openxmlformats.org/drawingml/2006/main">
               <a:ext uri="{FF2B5EF4-FFF2-40B4-BE49-F238E27FC236}">
-                <a16:creationId xmlns:a16="http://schemas.microsoft.com/office/drawing/2014/main" id="{63A8324D-E5FC-4936-85C0-CCF9B4971C91}"/>
+                <a16:creationId xmlns:a16="http://schemas.microsoft.com/office/drawing/2014/main" id="{D87E8C07-5912-48E6-A3FD-941C2E952AAF}"/>
               </a:ext>
             </a:extLst>
           </p:cNvPr>
@@ -15681,7 +15681,7 @@
           <p:cNvPr id="12" name="">
             <a:extLst xmlns:a="http://schemas.openxmlformats.org/drawingml/2006/main">
               <a:ext uri="{FF2B5EF4-FFF2-40B4-BE49-F238E27FC236}">
-                <a16:creationId xmlns:a16="http://schemas.microsoft.com/office/drawing/2014/main" id="{B472F75D-DE9C-4009-BFDA-35AA8B5DC015}"/>
+                <a16:creationId xmlns:a16="http://schemas.microsoft.com/office/drawing/2014/main" id="{6C674A7E-44F7-4EF6-9A3D-E8E84B2AA154}"/>
               </a:ext>
             </a:extLst>
           </p:cNvPr>
@@ -15743,7 +15743,7 @@
           <p:cNvPr id="13" name="">
             <a:extLst xmlns:a="http://schemas.openxmlformats.org/drawingml/2006/main">
               <a:ext uri="{FF2B5EF4-FFF2-40B4-BE49-F238E27FC236}">
-                <a16:creationId xmlns:a16="http://schemas.microsoft.com/office/drawing/2014/main" id="{56DAA97A-CB09-47FE-9377-B5085350188B}"/>
+                <a16:creationId xmlns:a16="http://schemas.microsoft.com/office/drawing/2014/main" id="{78434E21-1E1B-46A0-AB4C-23BE4BC8C056}"/>
               </a:ext>
             </a:extLst>
           </p:cNvPr>
@@ -15774,7 +15774,7 @@
           <p:cNvPr id="14" name="">
             <a:extLst xmlns:a="http://schemas.openxmlformats.org/drawingml/2006/main">
               <a:ext uri="{FF2B5EF4-FFF2-40B4-BE49-F238E27FC236}">
-                <a16:creationId xmlns:a16="http://schemas.microsoft.com/office/drawing/2014/main" id="{21E94489-1D1E-4D15-9E15-EA369E80AB6F}"/>
+                <a16:creationId xmlns:a16="http://schemas.microsoft.com/office/drawing/2014/main" id="{2B724D03-E947-404E-98F4-A5E44E8DDD69}"/>
               </a:ext>
             </a:extLst>
           </p:cNvPr>
@@ -15836,7 +15836,7 @@
           <p:cNvPr id="15" name="">
             <a:extLst xmlns:a="http://schemas.openxmlformats.org/drawingml/2006/main">
               <a:ext uri="{FF2B5EF4-FFF2-40B4-BE49-F238E27FC236}">
-                <a16:creationId xmlns:a16="http://schemas.microsoft.com/office/drawing/2014/main" id="{FCBC8F23-266C-4E3B-817D-A18D337CEC64}"/>
+                <a16:creationId xmlns:a16="http://schemas.microsoft.com/office/drawing/2014/main" id="{9107B6CD-C639-4690-8F5D-28FED6BBDCE0}"/>
               </a:ext>
             </a:extLst>
           </p:cNvPr>
@@ -15898,7 +15898,7 @@
           <p:cNvPr id="16" name="">
             <a:extLst xmlns:a="http://schemas.openxmlformats.org/drawingml/2006/main">
               <a:ext uri="{FF2B5EF4-FFF2-40B4-BE49-F238E27FC236}">
-                <a16:creationId xmlns:a16="http://schemas.microsoft.com/office/drawing/2014/main" id="{B93DD367-C990-44D8-AC37-71FFF11FFD17}"/>
+                <a16:creationId xmlns:a16="http://schemas.microsoft.com/office/drawing/2014/main" id="{0CD28655-5075-4749-A586-1A6E7EEBA9D5}"/>
               </a:ext>
             </a:extLst>
           </p:cNvPr>
@@ -15960,7 +15960,7 @@
           <p:cNvPr id="17" name="dashboard-preview">
             <a:extLst xmlns:a="http://schemas.openxmlformats.org/drawingml/2006/main">
               <a:ext uri="{FF2B5EF4-FFF2-40B4-BE49-F238E27FC236}">
-                <a16:creationId xmlns:a16="http://schemas.microsoft.com/office/drawing/2014/main" id="{73721473-3C0E-4E5C-B582-7FFD74D80F4F}"/>
+                <a16:creationId xmlns:a16="http://schemas.microsoft.com/office/drawing/2014/main" id="{BE793704-B2E0-4389-9E47-6661F2037280}"/>
               </a:ext>
             </a:extLst>
           </p:cNvPr>
@@ -15995,7 +15995,7 @@
           <p:cNvPr id="18" name="">
             <a:extLst xmlns:a="http://schemas.openxmlformats.org/drawingml/2006/main">
               <a:ext uri="{FF2B5EF4-FFF2-40B4-BE49-F238E27FC236}">
-                <a16:creationId xmlns:a16="http://schemas.microsoft.com/office/drawing/2014/main" id="{D93A6C1D-6B6F-4633-B7E2-C9BA9DD3A49B}"/>
+                <a16:creationId xmlns:a16="http://schemas.microsoft.com/office/drawing/2014/main" id="{0E6F5C82-6156-4DDF-9D78-C24F35BAF655}"/>
               </a:ext>
             </a:extLst>
           </p:cNvPr>
@@ -16057,7 +16057,7 @@
           <p:cNvPr id="19" name="">
             <a:extLst xmlns:a="http://schemas.openxmlformats.org/drawingml/2006/main">
               <a:ext uri="{FF2B5EF4-FFF2-40B4-BE49-F238E27FC236}">
-                <a16:creationId xmlns:a16="http://schemas.microsoft.com/office/drawing/2014/main" id="{62044C2A-347B-441A-9062-A287B3227FE1}"/>
+                <a16:creationId xmlns:a16="http://schemas.microsoft.com/office/drawing/2014/main" id="{452C1FFA-B6B8-4185-94A1-CBC5D54782BE}"/>
               </a:ext>
             </a:extLst>
           </p:cNvPr>
@@ -16088,7 +16088,7 @@
           <p:cNvPr id="20" name="">
             <a:extLst xmlns:a="http://schemas.openxmlformats.org/drawingml/2006/main">
               <a:ext uri="{FF2B5EF4-FFF2-40B4-BE49-F238E27FC236}">
-                <a16:creationId xmlns:a16="http://schemas.microsoft.com/office/drawing/2014/main" id="{95590E05-0819-4477-865B-A330A3014B43}"/>
+                <a16:creationId xmlns:a16="http://schemas.microsoft.com/office/drawing/2014/main" id="{F1F9927B-897B-4FDD-A552-FAB016D502E4}"/>
               </a:ext>
             </a:extLst>
           </p:cNvPr>
@@ -16150,7 +16150,7 @@
           <p:cNvPr id="21" name="">
             <a:extLst xmlns:a="http://schemas.openxmlformats.org/drawingml/2006/main">
               <a:ext uri="{FF2B5EF4-FFF2-40B4-BE49-F238E27FC236}">
-                <a16:creationId xmlns:a16="http://schemas.microsoft.com/office/drawing/2014/main" id="{3CE3AB53-8401-4E19-996F-52D65CF72250}"/>
+                <a16:creationId xmlns:a16="http://schemas.microsoft.com/office/drawing/2014/main" id="{F21F2F60-D537-4B53-BD68-B53F6A477CA9}"/>
               </a:ext>
             </a:extLst>
           </p:cNvPr>
@@ -16181,7 +16181,7 @@
           <p:cNvPr id="22" name="">
             <a:extLst xmlns:a="http://schemas.openxmlformats.org/drawingml/2006/main">
               <a:ext uri="{FF2B5EF4-FFF2-40B4-BE49-F238E27FC236}">
-                <a16:creationId xmlns:a16="http://schemas.microsoft.com/office/drawing/2014/main" id="{2064A051-A9DC-4C66-9887-1CFBBE45D057}"/>
+                <a16:creationId xmlns:a16="http://schemas.microsoft.com/office/drawing/2014/main" id="{C0832604-8FD6-455E-AB8B-BFEE2C142E08}"/>
               </a:ext>
             </a:extLst>
           </p:cNvPr>
@@ -16212,7 +16212,7 @@
           <p:cNvPr id="23" name="">
             <a:extLst xmlns:a="http://schemas.openxmlformats.org/drawingml/2006/main">
               <a:ext uri="{FF2B5EF4-FFF2-40B4-BE49-F238E27FC236}">
-                <a16:creationId xmlns:a16="http://schemas.microsoft.com/office/drawing/2014/main" id="{CB96054F-0142-4E35-8D42-816AD4D0A777}"/>
+                <a16:creationId xmlns:a16="http://schemas.microsoft.com/office/drawing/2014/main" id="{68071CAF-202B-4564-AAD8-2C7B369DE0B2}"/>
               </a:ext>
             </a:extLst>
           </p:cNvPr>
@@ -16245,7 +16245,7 @@
           <p:cNvPr id="24" name="">
             <a:extLst xmlns:a="http://schemas.openxmlformats.org/drawingml/2006/main">
               <a:ext uri="{FF2B5EF4-FFF2-40B4-BE49-F238E27FC236}">
-                <a16:creationId xmlns:a16="http://schemas.microsoft.com/office/drawing/2014/main" id="{4FA9C721-4D45-40BA-A93E-A3534BB5893C}"/>
+                <a16:creationId xmlns:a16="http://schemas.microsoft.com/office/drawing/2014/main" id="{7E009EDF-3E8A-4192-9DF0-0A6E6CE0294D}"/>
               </a:ext>
             </a:extLst>
           </p:cNvPr>
@@ -16307,7 +16307,7 @@
           <p:cNvPr id="25" name="footer-rule-5">
             <a:extLst xmlns:a="http://schemas.openxmlformats.org/drawingml/2006/main">
               <a:ext uri="{FF2B5EF4-FFF2-40B4-BE49-F238E27FC236}">
-                <a16:creationId xmlns:a16="http://schemas.microsoft.com/office/drawing/2014/main" id="{771F28DE-D6B8-47D7-8616-7ADA290E3AEC}"/>
+                <a16:creationId xmlns:a16="http://schemas.microsoft.com/office/drawing/2014/main" id="{D241264C-508D-4716-9123-2C5CACE3EC3F}"/>
               </a:ext>
             </a:extLst>
           </p:cNvPr>
@@ -16338,7 +16338,7 @@
           <p:cNvPr id="26" name="footer-label-5">
             <a:extLst xmlns:a="http://schemas.openxmlformats.org/drawingml/2006/main">
               <a:ext uri="{FF2B5EF4-FFF2-40B4-BE49-F238E27FC236}">
-                <a16:creationId xmlns:a16="http://schemas.microsoft.com/office/drawing/2014/main" id="{DC5F38A8-8852-42D3-891E-5477B0DAA05E}"/>
+                <a16:creationId xmlns:a16="http://schemas.microsoft.com/office/drawing/2014/main" id="{0EA1426F-75E8-44AD-B2F5-F036C77CA81E}"/>
               </a:ext>
             </a:extLst>
           </p:cNvPr>
@@ -16400,7 +16400,7 @@
           <p:cNvPr id="27" name="footer-page-5">
             <a:extLst xmlns:a="http://schemas.openxmlformats.org/drawingml/2006/main">
               <a:ext uri="{FF2B5EF4-FFF2-40B4-BE49-F238E27FC236}">
-                <a16:creationId xmlns:a16="http://schemas.microsoft.com/office/drawing/2014/main" id="{680CCAE5-2E0A-4285-BC50-6A5CA2F96DF2}"/>
+                <a16:creationId xmlns:a16="http://schemas.microsoft.com/office/drawing/2014/main" id="{49C451FC-8984-409D-ADA9-46010CDE06C5}"/>
               </a:ext>
             </a:extLst>
           </p:cNvPr>
@@ -16460,7 +16460,7 @@
     </p:spTree>
     <p:extLst>
       <p:ext uri="{BB962C8B-B14F-4D97-AF65-F5344CB8AC3E}">
-        <p14:creationId xmlns:p14="http://schemas.microsoft.com/office/powerpoint/2010/main" val="1797520041"/>
+        <p14:creationId xmlns:p14="http://schemas.microsoft.com/office/powerpoint/2010/main" val="125019877"/>
       </p:ext>
     </p:extLst>
   </p:cSld>
@@ -16491,7 +16491,7 @@
           <p:cNvPr id="26" name="side-accent-6">
             <a:extLst xmlns:a="http://schemas.openxmlformats.org/drawingml/2006/main">
               <a:ext uri="{FF2B5EF4-FFF2-40B4-BE49-F238E27FC236}">
-                <a16:creationId xmlns:a16="http://schemas.microsoft.com/office/drawing/2014/main" id="{B104FDDD-1066-4D15-8DB9-C419E4C8F83B}"/>
+                <a16:creationId xmlns:a16="http://schemas.microsoft.com/office/drawing/2014/main" id="{A8A2FC56-5FC1-4A9A-847F-076529B97CAE}"/>
               </a:ext>
             </a:extLst>
           </p:cNvPr>
@@ -16522,7 +16522,7 @@
           <p:cNvPr id="2" name="kicker-6">
             <a:extLst xmlns:a="http://schemas.openxmlformats.org/drawingml/2006/main">
               <a:ext uri="{FF2B5EF4-FFF2-40B4-BE49-F238E27FC236}">
-                <a16:creationId xmlns:a16="http://schemas.microsoft.com/office/drawing/2014/main" id="{9EDBB8BB-8935-409E-95FC-9E0697DD2D94}"/>
+                <a16:creationId xmlns:a16="http://schemas.microsoft.com/office/drawing/2014/main" id="{DFC9EDD1-843A-47B0-B10E-11648CAD186B}"/>
               </a:ext>
             </a:extLst>
           </p:cNvPr>
@@ -16584,7 +16584,7 @@
           <p:cNvPr id="3" name="title-6">
             <a:extLst xmlns:a="http://schemas.openxmlformats.org/drawingml/2006/main">
               <a:ext uri="{FF2B5EF4-FFF2-40B4-BE49-F238E27FC236}">
-                <a16:creationId xmlns:a16="http://schemas.microsoft.com/office/drawing/2014/main" id="{F1DC096F-4665-4000-A49D-E1BD578B4F61}"/>
+                <a16:creationId xmlns:a16="http://schemas.microsoft.com/office/drawing/2014/main" id="{675FC51E-824F-4D47-A668-65A30E2C43B0}"/>
               </a:ext>
             </a:extLst>
           </p:cNvPr>
@@ -16646,7 +16646,7 @@
           <p:cNvPr id="4" name="">
             <a:extLst xmlns:a="http://schemas.openxmlformats.org/drawingml/2006/main">
               <a:ext uri="{FF2B5EF4-FFF2-40B4-BE49-F238E27FC236}">
-                <a16:creationId xmlns:a16="http://schemas.microsoft.com/office/drawing/2014/main" id="{ACF440E5-658B-4F1B-8C51-A7247568E0CD}"/>
+                <a16:creationId xmlns:a16="http://schemas.microsoft.com/office/drawing/2014/main" id="{22FB5AA8-7640-47D6-962A-DFD2D2F55719}"/>
               </a:ext>
             </a:extLst>
           </p:cNvPr>
@@ -16708,7 +16708,7 @@
           <p:cNvPr id="5" name="">
             <a:extLst xmlns:a="http://schemas.openxmlformats.org/drawingml/2006/main">
               <a:ext uri="{FF2B5EF4-FFF2-40B4-BE49-F238E27FC236}">
-                <a16:creationId xmlns:a16="http://schemas.microsoft.com/office/drawing/2014/main" id="{AD4F8105-CEB8-4FDF-95E3-2D4D67A22778}"/>
+                <a16:creationId xmlns:a16="http://schemas.microsoft.com/office/drawing/2014/main" id="{5D48B9BF-12C0-4905-AA68-7B5AD63E9C4E}"/>
               </a:ext>
             </a:extLst>
           </p:cNvPr>
@@ -16739,7 +16739,7 @@
           <p:cNvPr id="6" name="">
             <a:extLst xmlns:a="http://schemas.openxmlformats.org/drawingml/2006/main">
               <a:ext uri="{FF2B5EF4-FFF2-40B4-BE49-F238E27FC236}">
-                <a16:creationId xmlns:a16="http://schemas.microsoft.com/office/drawing/2014/main" id="{434D20B2-34E0-469A-BD88-B101BDC90FB1}"/>
+                <a16:creationId xmlns:a16="http://schemas.microsoft.com/office/drawing/2014/main" id="{8A80616D-0537-4511-BBFC-49B1B6136328}"/>
               </a:ext>
             </a:extLst>
           </p:cNvPr>
@@ -16770,7 +16770,7 @@
           <p:cNvPr id="7" name="">
             <a:extLst xmlns:a="http://schemas.openxmlformats.org/drawingml/2006/main">
               <a:ext uri="{FF2B5EF4-FFF2-40B4-BE49-F238E27FC236}">
-                <a16:creationId xmlns:a16="http://schemas.microsoft.com/office/drawing/2014/main" id="{A062D757-D30B-4656-A9FB-DC4CB690EDAA}"/>
+                <a16:creationId xmlns:a16="http://schemas.microsoft.com/office/drawing/2014/main" id="{6AA0B09C-7BA1-406D-B80B-36C88266C28F}"/>
               </a:ext>
             </a:extLst>
           </p:cNvPr>
@@ -16832,7 +16832,7 @@
           <p:cNvPr id="8" name="">
             <a:extLst xmlns:a="http://schemas.openxmlformats.org/drawingml/2006/main">
               <a:ext uri="{FF2B5EF4-FFF2-40B4-BE49-F238E27FC236}">
-                <a16:creationId xmlns:a16="http://schemas.microsoft.com/office/drawing/2014/main" id="{BA327794-65B2-470E-A342-B018A561AAD5}"/>
+                <a16:creationId xmlns:a16="http://schemas.microsoft.com/office/drawing/2014/main" id="{801C3166-C7C5-4565-B317-AB43EFDD4306}"/>
               </a:ext>
             </a:extLst>
           </p:cNvPr>
@@ -16894,7 +16894,7 @@
           <p:cNvPr id="9" name="">
             <a:extLst xmlns:a="http://schemas.openxmlformats.org/drawingml/2006/main">
               <a:ext uri="{FF2B5EF4-FFF2-40B4-BE49-F238E27FC236}">
-                <a16:creationId xmlns:a16="http://schemas.microsoft.com/office/drawing/2014/main" id="{B69C11F6-324D-4838-A904-881E28DFBB39}"/>
+                <a16:creationId xmlns:a16="http://schemas.microsoft.com/office/drawing/2014/main" id="{B74D2D3F-34DC-4620-A145-02B725626AC5}"/>
               </a:ext>
             </a:extLst>
           </p:cNvPr>
@@ -16956,7 +16956,7 @@
           <p:cNvPr id="10" name="">
             <a:extLst xmlns:a="http://schemas.openxmlformats.org/drawingml/2006/main">
               <a:ext uri="{FF2B5EF4-FFF2-40B4-BE49-F238E27FC236}">
-                <a16:creationId xmlns:a16="http://schemas.microsoft.com/office/drawing/2014/main" id="{26CB9A93-1558-4778-B97E-D6EA6CCA7731}"/>
+                <a16:creationId xmlns:a16="http://schemas.microsoft.com/office/drawing/2014/main" id="{ED487616-0B13-4B3E-B6DC-20123643FB65}"/>
               </a:ext>
             </a:extLst>
           </p:cNvPr>
@@ -16987,7 +16987,7 @@
           <p:cNvPr id="11" name="">
             <a:extLst xmlns:a="http://schemas.openxmlformats.org/drawingml/2006/main">
               <a:ext uri="{FF2B5EF4-FFF2-40B4-BE49-F238E27FC236}">
-                <a16:creationId xmlns:a16="http://schemas.microsoft.com/office/drawing/2014/main" id="{527F1196-0F89-4362-8DA4-FDFB56736521}"/>
+                <a16:creationId xmlns:a16="http://schemas.microsoft.com/office/drawing/2014/main" id="{79821413-65E7-4145-8726-D8878B319DFC}"/>
               </a:ext>
             </a:extLst>
           </p:cNvPr>
@@ -17049,7 +17049,7 @@
           <p:cNvPr id="12" name="">
             <a:extLst xmlns:a="http://schemas.openxmlformats.org/drawingml/2006/main">
               <a:ext uri="{FF2B5EF4-FFF2-40B4-BE49-F238E27FC236}">
-                <a16:creationId xmlns:a16="http://schemas.microsoft.com/office/drawing/2014/main" id="{26113B34-E8C7-420F-A7B7-29A0F1BE6D51}"/>
+                <a16:creationId xmlns:a16="http://schemas.microsoft.com/office/drawing/2014/main" id="{A45359DE-8112-47B9-B025-48B3E9EE94A1}"/>
               </a:ext>
             </a:extLst>
           </p:cNvPr>
@@ -17111,7 +17111,7 @@
           <p:cNvPr id="13" name="">
             <a:extLst xmlns:a="http://schemas.openxmlformats.org/drawingml/2006/main">
               <a:ext uri="{FF2B5EF4-FFF2-40B4-BE49-F238E27FC236}">
-                <a16:creationId xmlns:a16="http://schemas.microsoft.com/office/drawing/2014/main" id="{222718B2-8CD1-417D-BB20-D8DB616B748C}"/>
+                <a16:creationId xmlns:a16="http://schemas.microsoft.com/office/drawing/2014/main" id="{B742EEE1-4E9F-4198-94A1-31B4E098991B}"/>
               </a:ext>
             </a:extLst>
           </p:cNvPr>
@@ -17173,7 +17173,7 @@
           <p:cNvPr id="14" name="">
             <a:extLst xmlns:a="http://schemas.openxmlformats.org/drawingml/2006/main">
               <a:ext uri="{FF2B5EF4-FFF2-40B4-BE49-F238E27FC236}">
-                <a16:creationId xmlns:a16="http://schemas.microsoft.com/office/drawing/2014/main" id="{3D9D070D-E86D-4CF5-B641-94D1F907C265}"/>
+                <a16:creationId xmlns:a16="http://schemas.microsoft.com/office/drawing/2014/main" id="{30588C4C-77DD-4C2E-A9D4-72127469D99F}"/>
               </a:ext>
             </a:extLst>
           </p:cNvPr>
@@ -17204,7 +17204,7 @@
           <p:cNvPr id="15" name="">
             <a:extLst xmlns:a="http://schemas.openxmlformats.org/drawingml/2006/main">
               <a:ext uri="{FF2B5EF4-FFF2-40B4-BE49-F238E27FC236}">
-                <a16:creationId xmlns:a16="http://schemas.microsoft.com/office/drawing/2014/main" id="{D50FB435-38B7-4848-99B3-58C2529D72BE}"/>
+                <a16:creationId xmlns:a16="http://schemas.microsoft.com/office/drawing/2014/main" id="{A3982527-3C24-44B9-9A49-039603521129}"/>
               </a:ext>
             </a:extLst>
           </p:cNvPr>
@@ -17266,7 +17266,7 @@
           <p:cNvPr id="16" name="">
             <a:extLst xmlns:a="http://schemas.openxmlformats.org/drawingml/2006/main">
               <a:ext uri="{FF2B5EF4-FFF2-40B4-BE49-F238E27FC236}">
-                <a16:creationId xmlns:a16="http://schemas.microsoft.com/office/drawing/2014/main" id="{15C05C64-9DBE-425C-9658-B2AB382E0CE1}"/>
+                <a16:creationId xmlns:a16="http://schemas.microsoft.com/office/drawing/2014/main" id="{9CE47266-CA8A-4FB5-B310-6A66BBF88B12}"/>
               </a:ext>
             </a:extLst>
           </p:cNvPr>
@@ -17328,7 +17328,7 @@
           <p:cNvPr id="17" name="">
             <a:extLst xmlns:a="http://schemas.openxmlformats.org/drawingml/2006/main">
               <a:ext uri="{FF2B5EF4-FFF2-40B4-BE49-F238E27FC236}">
-                <a16:creationId xmlns:a16="http://schemas.microsoft.com/office/drawing/2014/main" id="{7C29AD77-0EFB-4D3D-8F45-4F60C4E117E5}"/>
+                <a16:creationId xmlns:a16="http://schemas.microsoft.com/office/drawing/2014/main" id="{FDB6723F-E75B-4B99-BA08-CCFB50D1B70B}"/>
               </a:ext>
             </a:extLst>
           </p:cNvPr>
@@ -17390,7 +17390,7 @@
           <p:cNvPr id="18" name="">
             <a:extLst xmlns:a="http://schemas.openxmlformats.org/drawingml/2006/main">
               <a:ext uri="{FF2B5EF4-FFF2-40B4-BE49-F238E27FC236}">
-                <a16:creationId xmlns:a16="http://schemas.microsoft.com/office/drawing/2014/main" id="{565EF09F-C2BC-4984-BA97-5E6040358BAA}"/>
+                <a16:creationId xmlns:a16="http://schemas.microsoft.com/office/drawing/2014/main" id="{0D9BA8B7-9A00-4DD3-9198-B89BE34B0BB2}"/>
               </a:ext>
             </a:extLst>
           </p:cNvPr>
@@ -17421,7 +17421,7 @@
           <p:cNvPr id="19" name="">
             <a:extLst xmlns:a="http://schemas.openxmlformats.org/drawingml/2006/main">
               <a:ext uri="{FF2B5EF4-FFF2-40B4-BE49-F238E27FC236}">
-                <a16:creationId xmlns:a16="http://schemas.microsoft.com/office/drawing/2014/main" id="{E6C65762-CB09-491E-9423-13867AF7EBAF}"/>
+                <a16:creationId xmlns:a16="http://schemas.microsoft.com/office/drawing/2014/main" id="{254758BB-72F5-43BA-98B2-5563300DA289}"/>
               </a:ext>
             </a:extLst>
           </p:cNvPr>
@@ -17483,7 +17483,7 @@
           <p:cNvPr id="20" name="">
             <a:extLst xmlns:a="http://schemas.openxmlformats.org/drawingml/2006/main">
               <a:ext uri="{FF2B5EF4-FFF2-40B4-BE49-F238E27FC236}">
-                <a16:creationId xmlns:a16="http://schemas.microsoft.com/office/drawing/2014/main" id="{428A9750-EF1B-4BA5-8814-68A58F1482F5}"/>
+                <a16:creationId xmlns:a16="http://schemas.microsoft.com/office/drawing/2014/main" id="{376FEB66-C962-41AE-8584-CD96EFDBA97E}"/>
               </a:ext>
             </a:extLst>
           </p:cNvPr>
@@ -17545,7 +17545,7 @@
           <p:cNvPr id="21" name="">
             <a:extLst xmlns:a="http://schemas.openxmlformats.org/drawingml/2006/main">
               <a:ext uri="{FF2B5EF4-FFF2-40B4-BE49-F238E27FC236}">
-                <a16:creationId xmlns:a16="http://schemas.microsoft.com/office/drawing/2014/main" id="{4B06B5E9-2D1D-425C-8F83-F65EEC3C1E6D}"/>
+                <a16:creationId xmlns:a16="http://schemas.microsoft.com/office/drawing/2014/main" id="{755A358A-9584-4572-A5BA-7AC20F8561B0}"/>
               </a:ext>
             </a:extLst>
           </p:cNvPr>
@@ -17607,7 +17607,7 @@
           <p:cNvPr id="22" name="">
             <a:extLst xmlns:a="http://schemas.openxmlformats.org/drawingml/2006/main">
               <a:ext uri="{FF2B5EF4-FFF2-40B4-BE49-F238E27FC236}">
-                <a16:creationId xmlns:a16="http://schemas.microsoft.com/office/drawing/2014/main" id="{10D9D88C-F609-48CF-AB67-B02D5B1CB81A}"/>
+                <a16:creationId xmlns:a16="http://schemas.microsoft.com/office/drawing/2014/main" id="{9F0FFF4E-3565-4E82-AE63-13A02E62852F}"/>
               </a:ext>
             </a:extLst>
           </p:cNvPr>
@@ -17669,7 +17669,7 @@
           <p:cNvPr id="23" name="footer-rule-6">
             <a:extLst xmlns:a="http://schemas.openxmlformats.org/drawingml/2006/main">
               <a:ext uri="{FF2B5EF4-FFF2-40B4-BE49-F238E27FC236}">
-                <a16:creationId xmlns:a16="http://schemas.microsoft.com/office/drawing/2014/main" id="{568050EE-7828-45DB-82C8-2843B55B02C1}"/>
+                <a16:creationId xmlns:a16="http://schemas.microsoft.com/office/drawing/2014/main" id="{AC301583-5588-48C1-8573-1A35E82A171F}"/>
               </a:ext>
             </a:extLst>
           </p:cNvPr>
@@ -17700,7 +17700,7 @@
           <p:cNvPr id="24" name="footer-label-6">
             <a:extLst xmlns:a="http://schemas.openxmlformats.org/drawingml/2006/main">
               <a:ext uri="{FF2B5EF4-FFF2-40B4-BE49-F238E27FC236}">
-                <a16:creationId xmlns:a16="http://schemas.microsoft.com/office/drawing/2014/main" id="{ACF4B99F-1334-403A-AE1D-C80D2D54870B}"/>
+                <a16:creationId xmlns:a16="http://schemas.microsoft.com/office/drawing/2014/main" id="{D8BD4E94-EF06-4160-8B87-B4F1E631274B}"/>
               </a:ext>
             </a:extLst>
           </p:cNvPr>
@@ -17762,7 +17762,7 @@
           <p:cNvPr id="25" name="footer-page-6">
             <a:extLst xmlns:a="http://schemas.openxmlformats.org/drawingml/2006/main">
               <a:ext uri="{FF2B5EF4-FFF2-40B4-BE49-F238E27FC236}">
-                <a16:creationId xmlns:a16="http://schemas.microsoft.com/office/drawing/2014/main" id="{986F923D-BEF6-4526-B53C-184038C31953}"/>
+                <a16:creationId xmlns:a16="http://schemas.microsoft.com/office/drawing/2014/main" id="{E4BCC1F6-3C0A-480C-AB5E-0BC52B4CEB75}"/>
               </a:ext>
             </a:extLst>
           </p:cNvPr>
@@ -17822,7 +17822,7 @@
     </p:spTree>
     <p:extLst>
       <p:ext uri="{BB962C8B-B14F-4D97-AF65-F5344CB8AC3E}">
-        <p14:creationId xmlns:p14="http://schemas.microsoft.com/office/powerpoint/2010/main" val="2125346418"/>
+        <p14:creationId xmlns:p14="http://schemas.microsoft.com/office/powerpoint/2010/main" val="1346428814"/>
       </p:ext>
     </p:extLst>
   </p:cSld>
@@ -17853,7 +17853,7 @@
           <p:cNvPr id="21" name="side-accent-7">
             <a:extLst xmlns:a="http://schemas.openxmlformats.org/drawingml/2006/main">
               <a:ext uri="{FF2B5EF4-FFF2-40B4-BE49-F238E27FC236}">
-                <a16:creationId xmlns:a16="http://schemas.microsoft.com/office/drawing/2014/main" id="{788AD6F0-56D9-45F7-9728-37E60F7B4CA3}"/>
+                <a16:creationId xmlns:a16="http://schemas.microsoft.com/office/drawing/2014/main" id="{1E31D57D-92E9-4375-B692-1C7C2B37F8E9}"/>
               </a:ext>
             </a:extLst>
           </p:cNvPr>
@@ -17884,7 +17884,7 @@
           <p:cNvPr id="2" name="kicker-7">
             <a:extLst xmlns:a="http://schemas.openxmlformats.org/drawingml/2006/main">
               <a:ext uri="{FF2B5EF4-FFF2-40B4-BE49-F238E27FC236}">
-                <a16:creationId xmlns:a16="http://schemas.microsoft.com/office/drawing/2014/main" id="{542A41EB-B0BF-4182-BE47-F6882B38DCE7}"/>
+                <a16:creationId xmlns:a16="http://schemas.microsoft.com/office/drawing/2014/main" id="{A6B602CE-BF10-4D17-9A25-DE1893701447}"/>
               </a:ext>
             </a:extLst>
           </p:cNvPr>
@@ -17946,7 +17946,7 @@
           <p:cNvPr id="3" name="title-7">
             <a:extLst xmlns:a="http://schemas.openxmlformats.org/drawingml/2006/main">
               <a:ext uri="{FF2B5EF4-FFF2-40B4-BE49-F238E27FC236}">
-                <a16:creationId xmlns:a16="http://schemas.microsoft.com/office/drawing/2014/main" id="{3044B3D0-5C74-4790-BCB5-3F1F6983BE95}"/>
+                <a16:creationId xmlns:a16="http://schemas.microsoft.com/office/drawing/2014/main" id="{77686DC1-884F-46E7-8CB6-C1064B36317C}"/>
               </a:ext>
             </a:extLst>
           </p:cNvPr>
@@ -18008,7 +18008,7 @@
           <p:cNvPr id="4" name="">
             <a:extLst xmlns:a="http://schemas.openxmlformats.org/drawingml/2006/main">
               <a:ext uri="{FF2B5EF4-FFF2-40B4-BE49-F238E27FC236}">
-                <a16:creationId xmlns:a16="http://schemas.microsoft.com/office/drawing/2014/main" id="{A5D734C9-DB1F-4DB0-9D1E-27352C99C382}"/>
+                <a16:creationId xmlns:a16="http://schemas.microsoft.com/office/drawing/2014/main" id="{FFA2A105-F826-4E18-9195-BA913B88FD03}"/>
               </a:ext>
             </a:extLst>
           </p:cNvPr>
@@ -18070,7 +18070,7 @@
           <p:cNvPr id="5" name="">
             <a:extLst xmlns:a="http://schemas.openxmlformats.org/drawingml/2006/main">
               <a:ext uri="{FF2B5EF4-FFF2-40B4-BE49-F238E27FC236}">
-                <a16:creationId xmlns:a16="http://schemas.microsoft.com/office/drawing/2014/main" id="{6E8C5357-1507-4ECE-B961-3BBBB03B0021}"/>
+                <a16:creationId xmlns:a16="http://schemas.microsoft.com/office/drawing/2014/main" id="{34A493B9-9E22-4510-8033-5778FC8F9C8D}"/>
               </a:ext>
             </a:extLst>
           </p:cNvPr>
@@ -18101,7 +18101,7 @@
           <p:cNvPr id="6" name="">
             <a:extLst xmlns:a="http://schemas.openxmlformats.org/drawingml/2006/main">
               <a:ext uri="{FF2B5EF4-FFF2-40B4-BE49-F238E27FC236}">
-                <a16:creationId xmlns:a16="http://schemas.microsoft.com/office/drawing/2014/main" id="{F4D165E3-3151-486A-8272-4C31D42A7210}"/>
+                <a16:creationId xmlns:a16="http://schemas.microsoft.com/office/drawing/2014/main" id="{BD40A397-8EFD-45CE-AE20-D8E9E7744C4C}"/>
               </a:ext>
             </a:extLst>
           </p:cNvPr>
@@ -18163,7 +18163,7 @@
           <p:cNvPr id="7" name="">
             <a:extLst xmlns:a="http://schemas.openxmlformats.org/drawingml/2006/main">
               <a:ext uri="{FF2B5EF4-FFF2-40B4-BE49-F238E27FC236}">
-                <a16:creationId xmlns:a16="http://schemas.microsoft.com/office/drawing/2014/main" id="{D6B358A6-B7C7-405B-B326-A5DD3541B886}"/>
+                <a16:creationId xmlns:a16="http://schemas.microsoft.com/office/drawing/2014/main" id="{9CFC858A-E5B0-4BC5-901D-6E3AFF91CB4A}"/>
               </a:ext>
             </a:extLst>
           </p:cNvPr>
@@ -18225,7 +18225,7 @@
           <p:cNvPr id="8" name="">
             <a:extLst xmlns:a="http://schemas.openxmlformats.org/drawingml/2006/main">
               <a:ext uri="{FF2B5EF4-FFF2-40B4-BE49-F238E27FC236}">
-                <a16:creationId xmlns:a16="http://schemas.microsoft.com/office/drawing/2014/main" id="{D53B451B-4F05-463F-AD8E-4C1888738D88}"/>
+                <a16:creationId xmlns:a16="http://schemas.microsoft.com/office/drawing/2014/main" id="{072675FD-8543-4282-A33A-2CA4CC523023}"/>
               </a:ext>
             </a:extLst>
           </p:cNvPr>
@@ -18287,7 +18287,7 @@
           <p:cNvPr id="9" name="">
             <a:extLst xmlns:a="http://schemas.openxmlformats.org/drawingml/2006/main">
               <a:ext uri="{FF2B5EF4-FFF2-40B4-BE49-F238E27FC236}">
-                <a16:creationId xmlns:a16="http://schemas.microsoft.com/office/drawing/2014/main" id="{C27E3ECF-D052-477F-BB8D-0FBD3BF3CCD4}"/>
+                <a16:creationId xmlns:a16="http://schemas.microsoft.com/office/drawing/2014/main" id="{47CF012E-0573-47ED-99CB-20AA3B99665A}"/>
               </a:ext>
             </a:extLst>
           </p:cNvPr>
@@ -18318,7 +18318,7 @@
           <p:cNvPr id="10" name="">
             <a:extLst xmlns:a="http://schemas.openxmlformats.org/drawingml/2006/main">
               <a:ext uri="{FF2B5EF4-FFF2-40B4-BE49-F238E27FC236}">
-                <a16:creationId xmlns:a16="http://schemas.microsoft.com/office/drawing/2014/main" id="{515BA873-DDC8-47EE-954B-367102CC3ED0}"/>
+                <a16:creationId xmlns:a16="http://schemas.microsoft.com/office/drawing/2014/main" id="{43F9E447-C14C-4433-8EE8-7443D7E93634}"/>
               </a:ext>
             </a:extLst>
           </p:cNvPr>
@@ -18380,7 +18380,7 @@
           <p:cNvPr id="11" name="">
             <a:extLst xmlns:a="http://schemas.openxmlformats.org/drawingml/2006/main">
               <a:ext uri="{FF2B5EF4-FFF2-40B4-BE49-F238E27FC236}">
-                <a16:creationId xmlns:a16="http://schemas.microsoft.com/office/drawing/2014/main" id="{B55E7E76-2935-471E-87DB-FE288350CDDD}"/>
+                <a16:creationId xmlns:a16="http://schemas.microsoft.com/office/drawing/2014/main" id="{7BE03BE1-282C-48CE-8F89-005A32E26007}"/>
               </a:ext>
             </a:extLst>
           </p:cNvPr>
@@ -18442,7 +18442,7 @@
           <p:cNvPr id="12" name="">
             <a:extLst xmlns:a="http://schemas.openxmlformats.org/drawingml/2006/main">
               <a:ext uri="{FF2B5EF4-FFF2-40B4-BE49-F238E27FC236}">
-                <a16:creationId xmlns:a16="http://schemas.microsoft.com/office/drawing/2014/main" id="{A39EBD24-270A-483B-99CE-F98B0C202B4A}"/>
+                <a16:creationId xmlns:a16="http://schemas.microsoft.com/office/drawing/2014/main" id="{FBF3F1A8-EF12-4B81-9336-F35779E08BC2}"/>
               </a:ext>
             </a:extLst>
           </p:cNvPr>
@@ -18504,7 +18504,7 @@
           <p:cNvPr id="13" name="">
             <a:extLst xmlns:a="http://schemas.openxmlformats.org/drawingml/2006/main">
               <a:ext uri="{FF2B5EF4-FFF2-40B4-BE49-F238E27FC236}">
-                <a16:creationId xmlns:a16="http://schemas.microsoft.com/office/drawing/2014/main" id="{43FFAB58-455D-4446-A9CF-86E15A5FAC2B}"/>
+                <a16:creationId xmlns:a16="http://schemas.microsoft.com/office/drawing/2014/main" id="{0D93CFDB-49F8-4CE0-859C-7B98C1304CA8}"/>
               </a:ext>
             </a:extLst>
           </p:cNvPr>
@@ -18535,7 +18535,7 @@
           <p:cNvPr id="14" name="">
             <a:extLst xmlns:a="http://schemas.openxmlformats.org/drawingml/2006/main">
               <a:ext uri="{FF2B5EF4-FFF2-40B4-BE49-F238E27FC236}">
-                <a16:creationId xmlns:a16="http://schemas.microsoft.com/office/drawing/2014/main" id="{3F462678-4FD5-434F-8BF9-808DBCA16BDE}"/>
+                <a16:creationId xmlns:a16="http://schemas.microsoft.com/office/drawing/2014/main" id="{9B77C033-C084-4DDF-BA69-95BA4C673C6C}"/>
               </a:ext>
             </a:extLst>
           </p:cNvPr>
@@ -18597,7 +18597,7 @@
           <p:cNvPr id="15" name="">
             <a:extLst xmlns:a="http://schemas.openxmlformats.org/drawingml/2006/main">
               <a:ext uri="{FF2B5EF4-FFF2-40B4-BE49-F238E27FC236}">
-                <a16:creationId xmlns:a16="http://schemas.microsoft.com/office/drawing/2014/main" id="{BB487F2C-AB79-480D-BC14-7E0B54D782D7}"/>
+                <a16:creationId xmlns:a16="http://schemas.microsoft.com/office/drawing/2014/main" id="{2B8734BB-CA8F-4C3D-9EE4-798E7881CB80}"/>
               </a:ext>
             </a:extLst>
           </p:cNvPr>
@@ -18659,7 +18659,7 @@
           <p:cNvPr id="16" name="">
             <a:extLst xmlns:a="http://schemas.openxmlformats.org/drawingml/2006/main">
               <a:ext uri="{FF2B5EF4-FFF2-40B4-BE49-F238E27FC236}">
-                <a16:creationId xmlns:a16="http://schemas.microsoft.com/office/drawing/2014/main" id="{2322F177-F738-4C2B-B343-2AD9354BFE8A}"/>
+                <a16:creationId xmlns:a16="http://schemas.microsoft.com/office/drawing/2014/main" id="{7AC5B358-06D8-4874-A581-4DB990F3E84B}"/>
               </a:ext>
             </a:extLst>
           </p:cNvPr>
@@ -18721,7 +18721,7 @@
           <p:cNvPr id="17" name="">
             <a:extLst xmlns:a="http://schemas.openxmlformats.org/drawingml/2006/main">
               <a:ext uri="{FF2B5EF4-FFF2-40B4-BE49-F238E27FC236}">
-                <a16:creationId xmlns:a16="http://schemas.microsoft.com/office/drawing/2014/main" id="{EB40E555-F996-4E87-B1F5-D0BB6D5ACF76}"/>
+                <a16:creationId xmlns:a16="http://schemas.microsoft.com/office/drawing/2014/main" id="{D06548F2-DD42-471C-BCB0-AB21C63AC6FC}"/>
               </a:ext>
             </a:extLst>
           </p:cNvPr>
@@ -18783,7 +18783,7 @@
           <p:cNvPr id="18" name="footer-rule-7">
             <a:extLst xmlns:a="http://schemas.openxmlformats.org/drawingml/2006/main">
               <a:ext uri="{FF2B5EF4-FFF2-40B4-BE49-F238E27FC236}">
-                <a16:creationId xmlns:a16="http://schemas.microsoft.com/office/drawing/2014/main" id="{3D62E81B-6D69-49C5-BB80-09F89BD2D6BA}"/>
+                <a16:creationId xmlns:a16="http://schemas.microsoft.com/office/drawing/2014/main" id="{DE322C4A-6921-4654-9741-D1FE3E0023C0}"/>
               </a:ext>
             </a:extLst>
           </p:cNvPr>
@@ -18814,7 +18814,7 @@
           <p:cNvPr id="19" name="footer-label-7">
             <a:extLst xmlns:a="http://schemas.openxmlformats.org/drawingml/2006/main">
               <a:ext uri="{FF2B5EF4-FFF2-40B4-BE49-F238E27FC236}">
-                <a16:creationId xmlns:a16="http://schemas.microsoft.com/office/drawing/2014/main" id="{5E80C7B0-F8FD-47DA-AC01-34A1B90D0265}"/>
+                <a16:creationId xmlns:a16="http://schemas.microsoft.com/office/drawing/2014/main" id="{619D039F-256A-440B-AB48-C13A35DB8C5B}"/>
               </a:ext>
             </a:extLst>
           </p:cNvPr>
@@ -18876,7 +18876,7 @@
           <p:cNvPr id="20" name="footer-page-7">
             <a:extLst xmlns:a="http://schemas.openxmlformats.org/drawingml/2006/main">
               <a:ext uri="{FF2B5EF4-FFF2-40B4-BE49-F238E27FC236}">
-                <a16:creationId xmlns:a16="http://schemas.microsoft.com/office/drawing/2014/main" id="{A3BC158A-B392-42CE-8E4D-ACE22ADBC561}"/>
+                <a16:creationId xmlns:a16="http://schemas.microsoft.com/office/drawing/2014/main" id="{CFAD22C6-D7BF-442D-92F9-84EB7233E9CA}"/>
               </a:ext>
             </a:extLst>
           </p:cNvPr>
@@ -18936,7 +18936,7 @@
     </p:spTree>
     <p:extLst>
       <p:ext uri="{BB962C8B-B14F-4D97-AF65-F5344CB8AC3E}">
-        <p14:creationId xmlns:p14="http://schemas.microsoft.com/office/powerpoint/2010/main" val="1872501235"/>
+        <p14:creationId xmlns:p14="http://schemas.microsoft.com/office/powerpoint/2010/main" val="556300779"/>
       </p:ext>
     </p:extLst>
   </p:cSld>
@@ -18967,7 +18967,7 @@
           <p:cNvPr id="15" name="side-accent-8">
             <a:extLst xmlns:a="http://schemas.openxmlformats.org/drawingml/2006/main">
               <a:ext uri="{FF2B5EF4-FFF2-40B4-BE49-F238E27FC236}">
-                <a16:creationId xmlns:a16="http://schemas.microsoft.com/office/drawing/2014/main" id="{C2C28FDD-5165-4012-8C20-4C8CAED36F5B}"/>
+                <a16:creationId xmlns:a16="http://schemas.microsoft.com/office/drawing/2014/main" id="{0274751E-3B22-4541-B4B7-ED0469B4224E}"/>
               </a:ext>
             </a:extLst>
           </p:cNvPr>
@@ -18998,7 +18998,7 @@
           <p:cNvPr id="2" name="kicker-8">
             <a:extLst xmlns:a="http://schemas.openxmlformats.org/drawingml/2006/main">
               <a:ext uri="{FF2B5EF4-FFF2-40B4-BE49-F238E27FC236}">
-                <a16:creationId xmlns:a16="http://schemas.microsoft.com/office/drawing/2014/main" id="{934B9C7B-6A31-4AB4-A8C2-0CDE662C3D92}"/>
+                <a16:creationId xmlns:a16="http://schemas.microsoft.com/office/drawing/2014/main" id="{031DA843-FD0A-47A6-AC37-80B85E0103BD}"/>
               </a:ext>
             </a:extLst>
           </p:cNvPr>
@@ -19060,7 +19060,7 @@
           <p:cNvPr id="3" name="title-8">
             <a:extLst xmlns:a="http://schemas.openxmlformats.org/drawingml/2006/main">
               <a:ext uri="{FF2B5EF4-FFF2-40B4-BE49-F238E27FC236}">
-                <a16:creationId xmlns:a16="http://schemas.microsoft.com/office/drawing/2014/main" id="{8E62E1A9-9389-4DDC-8496-F1F3759920D1}"/>
+                <a16:creationId xmlns:a16="http://schemas.microsoft.com/office/drawing/2014/main" id="{BA142C42-F88F-412D-B428-ACCC7640F2D8}"/>
               </a:ext>
             </a:extLst>
           </p:cNvPr>
@@ -19122,7 +19122,7 @@
           <p:cNvPr id="4" name="">
             <a:extLst xmlns:a="http://schemas.openxmlformats.org/drawingml/2006/main">
               <a:ext uri="{FF2B5EF4-FFF2-40B4-BE49-F238E27FC236}">
-                <a16:creationId xmlns:a16="http://schemas.microsoft.com/office/drawing/2014/main" id="{753B4A0E-7E87-423B-893A-14EC1B5DB03F}"/>
+                <a16:creationId xmlns:a16="http://schemas.microsoft.com/office/drawing/2014/main" id="{1475A166-F5B3-4200-A0BC-69D7D754854B}"/>
               </a:ext>
             </a:extLst>
           </p:cNvPr>
@@ -19184,7 +19184,7 @@
           <p:cNvPr id="5" name="">
             <a:extLst xmlns:a="http://schemas.openxmlformats.org/drawingml/2006/main">
               <a:ext uri="{FF2B5EF4-FFF2-40B4-BE49-F238E27FC236}">
-                <a16:creationId xmlns:a16="http://schemas.microsoft.com/office/drawing/2014/main" id="{9ED9181D-024A-4CD1-A746-24FED331EF56}"/>
+                <a16:creationId xmlns:a16="http://schemas.microsoft.com/office/drawing/2014/main" id="{35CCE647-B4D8-45C6-A641-3CD117D4905A}"/>
               </a:ext>
             </a:extLst>
           </p:cNvPr>
@@ -19246,7 +19246,7 @@
           <p:cNvPr id="6" name="">
             <a:extLst xmlns:a="http://schemas.openxmlformats.org/drawingml/2006/main">
               <a:ext uri="{FF2B5EF4-FFF2-40B4-BE49-F238E27FC236}">
-                <a16:creationId xmlns:a16="http://schemas.microsoft.com/office/drawing/2014/main" id="{44D59AD8-6347-4240-AB25-8B755DD9EC76}"/>
+                <a16:creationId xmlns:a16="http://schemas.microsoft.com/office/drawing/2014/main" id="{7D7943B9-4855-4BF8-9469-B8D295BB18C6}"/>
               </a:ext>
             </a:extLst>
           </p:cNvPr>
@@ -19314,7 +19314,7 @@
           <p:cNvPr id="7" name="">
             <a:extLst xmlns:a="http://schemas.openxmlformats.org/drawingml/2006/main">
               <a:ext uri="{FF2B5EF4-FFF2-40B4-BE49-F238E27FC236}">
-                <a16:creationId xmlns:a16="http://schemas.microsoft.com/office/drawing/2014/main" id="{CDF5DEDB-AED6-4FFE-843E-6A77F7051081}"/>
+                <a16:creationId xmlns:a16="http://schemas.microsoft.com/office/drawing/2014/main" id="{73C01753-3F12-4790-B36A-546C62A0FB28}"/>
               </a:ext>
             </a:extLst>
           </p:cNvPr>
@@ -19376,7 +19376,7 @@
           <p:cNvPr id="8" name="">
             <a:extLst xmlns:a="http://schemas.openxmlformats.org/drawingml/2006/main">
               <a:ext uri="{FF2B5EF4-FFF2-40B4-BE49-F238E27FC236}">
-                <a16:creationId xmlns:a16="http://schemas.microsoft.com/office/drawing/2014/main" id="{A10BBA99-B901-4D15-8313-E7C823650FCE}"/>
+                <a16:creationId xmlns:a16="http://schemas.microsoft.com/office/drawing/2014/main" id="{5509B473-04DE-4527-9993-8BBF67BF82A8}"/>
               </a:ext>
             </a:extLst>
           </p:cNvPr>
@@ -19444,7 +19444,7 @@
           <p:cNvPr id="9" name="">
             <a:extLst xmlns:a="http://schemas.openxmlformats.org/drawingml/2006/main">
               <a:ext uri="{FF2B5EF4-FFF2-40B4-BE49-F238E27FC236}">
-                <a16:creationId xmlns:a16="http://schemas.microsoft.com/office/drawing/2014/main" id="{720E0C91-D3E2-4A4C-BBCD-65473C29A4C6}"/>
+                <a16:creationId xmlns:a16="http://schemas.microsoft.com/office/drawing/2014/main" id="{8F65FA46-2D72-46DA-8B6A-94D4DFD3B3FD}"/>
               </a:ext>
             </a:extLst>
           </p:cNvPr>
@@ -19475,7 +19475,7 @@
           <p:cNvPr id="10" name="">
             <a:extLst xmlns:a="http://schemas.openxmlformats.org/drawingml/2006/main">
               <a:ext uri="{FF2B5EF4-FFF2-40B4-BE49-F238E27FC236}">
-                <a16:creationId xmlns:a16="http://schemas.microsoft.com/office/drawing/2014/main" id="{CFED641A-BADD-48EC-A291-AC3621F64B05}"/>
+                <a16:creationId xmlns:a16="http://schemas.microsoft.com/office/drawing/2014/main" id="{4E51AD7B-815E-4F91-8811-A1A36F4251E4}"/>
               </a:ext>
             </a:extLst>
           </p:cNvPr>
@@ -19537,7 +19537,7 @@
           <p:cNvPr id="11" name="">
             <a:extLst xmlns:a="http://schemas.openxmlformats.org/drawingml/2006/main">
               <a:ext uri="{FF2B5EF4-FFF2-40B4-BE49-F238E27FC236}">
-                <a16:creationId xmlns:a16="http://schemas.microsoft.com/office/drawing/2014/main" id="{00740105-593A-4E92-9562-906E4EF11720}"/>
+                <a16:creationId xmlns:a16="http://schemas.microsoft.com/office/drawing/2014/main" id="{05556147-DF37-49D2-8DE3-BE0C322C6771}"/>
               </a:ext>
             </a:extLst>
           </p:cNvPr>
@@ -19599,7 +19599,7 @@
           <p:cNvPr id="12" name="footer-rule-8">
             <a:extLst xmlns:a="http://schemas.openxmlformats.org/drawingml/2006/main">
               <a:ext uri="{FF2B5EF4-FFF2-40B4-BE49-F238E27FC236}">
-                <a16:creationId xmlns:a16="http://schemas.microsoft.com/office/drawing/2014/main" id="{DA125A18-A133-4430-890F-946A6C31417B}"/>
+                <a16:creationId xmlns:a16="http://schemas.microsoft.com/office/drawing/2014/main" id="{54AEEA35-981B-45DB-B716-F245A0AC5C96}"/>
               </a:ext>
             </a:extLst>
           </p:cNvPr>
@@ -19630,7 +19630,7 @@
           <p:cNvPr id="13" name="footer-label-8">
             <a:extLst xmlns:a="http://schemas.openxmlformats.org/drawingml/2006/main">
               <a:ext uri="{FF2B5EF4-FFF2-40B4-BE49-F238E27FC236}">
-                <a16:creationId xmlns:a16="http://schemas.microsoft.com/office/drawing/2014/main" id="{CA59F9ED-DD02-4548-B615-9198C5B4668A}"/>
+                <a16:creationId xmlns:a16="http://schemas.microsoft.com/office/drawing/2014/main" id="{C9D11E7E-EEF0-49B4-96C6-57167E655493}"/>
               </a:ext>
             </a:extLst>
           </p:cNvPr>
@@ -19692,7 +19692,7 @@
           <p:cNvPr id="14" name="footer-page-8">
             <a:extLst xmlns:a="http://schemas.openxmlformats.org/drawingml/2006/main">
               <a:ext uri="{FF2B5EF4-FFF2-40B4-BE49-F238E27FC236}">
-                <a16:creationId xmlns:a16="http://schemas.microsoft.com/office/drawing/2014/main" id="{F6300BF4-B39E-46FA-B3D4-2C17B409B79C}"/>
+                <a16:creationId xmlns:a16="http://schemas.microsoft.com/office/drawing/2014/main" id="{A9DB1C2E-40E5-42C9-8F74-B00505091456}"/>
               </a:ext>
             </a:extLst>
           </p:cNvPr>
@@ -19752,7 +19752,7 @@
     </p:spTree>
     <p:extLst>
       <p:ext uri="{BB962C8B-B14F-4D97-AF65-F5344CB8AC3E}">
-        <p14:creationId xmlns:p14="http://schemas.microsoft.com/office/powerpoint/2010/main" val="149808947"/>
+        <p14:creationId xmlns:p14="http://schemas.microsoft.com/office/powerpoint/2010/main" val="465682901"/>
       </p:ext>
     </p:extLst>
   </p:cSld>
@@ -19783,7 +19783,7 @@
           <p:cNvPr id="17" name="side-accent-9">
             <a:extLst xmlns:a="http://schemas.openxmlformats.org/drawingml/2006/main">
               <a:ext uri="{FF2B5EF4-FFF2-40B4-BE49-F238E27FC236}">
-                <a16:creationId xmlns:a16="http://schemas.microsoft.com/office/drawing/2014/main" id="{B9A555B2-4431-4FF9-98C6-00A602451D27}"/>
+                <a16:creationId xmlns:a16="http://schemas.microsoft.com/office/drawing/2014/main" id="{66954723-CCCB-4774-9077-98F18F815057}"/>
               </a:ext>
             </a:extLst>
           </p:cNvPr>
@@ -19814,7 +19814,7 @@
           <p:cNvPr id="2" name="kicker-9">
             <a:extLst xmlns:a="http://schemas.openxmlformats.org/drawingml/2006/main">
               <a:ext uri="{FF2B5EF4-FFF2-40B4-BE49-F238E27FC236}">
-                <a16:creationId xmlns:a16="http://schemas.microsoft.com/office/drawing/2014/main" id="{7E1A85B2-C997-48C8-B933-61C8C8EBACA3}"/>
+                <a16:creationId xmlns:a16="http://schemas.microsoft.com/office/drawing/2014/main" id="{17ACE153-BEA0-4D63-B614-462311EF57E9}"/>
               </a:ext>
             </a:extLst>
           </p:cNvPr>
@@ -19876,7 +19876,7 @@
           <p:cNvPr id="3" name="title-9">
             <a:extLst xmlns:a="http://schemas.openxmlformats.org/drawingml/2006/main">
               <a:ext uri="{FF2B5EF4-FFF2-40B4-BE49-F238E27FC236}">
-                <a16:creationId xmlns:a16="http://schemas.microsoft.com/office/drawing/2014/main" id="{46BE4E26-873D-4C0D-B49F-C53928C818ED}"/>
+                <a16:creationId xmlns:a16="http://schemas.microsoft.com/office/drawing/2014/main" id="{6BC4B3B9-74B8-4E05-A1D7-5C0A365BA14E}"/>
               </a:ext>
             </a:extLst>
           </p:cNvPr>
@@ -19938,7 +19938,7 @@
           <p:cNvPr id="4" name="">
             <a:extLst xmlns:a="http://schemas.openxmlformats.org/drawingml/2006/main">
               <a:ext uri="{FF2B5EF4-FFF2-40B4-BE49-F238E27FC236}">
-                <a16:creationId xmlns:a16="http://schemas.microsoft.com/office/drawing/2014/main" id="{20692B8D-5AC6-4326-81CA-85EC20909729}"/>
+                <a16:creationId xmlns:a16="http://schemas.microsoft.com/office/drawing/2014/main" id="{F12DCC13-96AA-4F42-8F77-1655607E2222}"/>
               </a:ext>
             </a:extLst>
           </p:cNvPr>
@@ -19973,7 +19973,7 @@
           <p:cNvPr id="5" name="">
             <a:extLst xmlns:a="http://schemas.openxmlformats.org/drawingml/2006/main">
               <a:ext uri="{FF2B5EF4-FFF2-40B4-BE49-F238E27FC236}">
-                <a16:creationId xmlns:a16="http://schemas.microsoft.com/office/drawing/2014/main" id="{E0FFC141-BA19-4565-984E-63EC62C2C41A}"/>
+                <a16:creationId xmlns:a16="http://schemas.microsoft.com/office/drawing/2014/main" id="{E50B86D5-CB9C-4EA3-ACF2-4625EB373D5F}"/>
               </a:ext>
             </a:extLst>
           </p:cNvPr>
@@ -20035,7 +20035,7 @@
           <p:cNvPr id="6" name="">
             <a:extLst xmlns:a="http://schemas.openxmlformats.org/drawingml/2006/main">
               <a:ext uri="{FF2B5EF4-FFF2-40B4-BE49-F238E27FC236}">
-                <a16:creationId xmlns:a16="http://schemas.microsoft.com/office/drawing/2014/main" id="{C2C69672-207C-416D-8E7A-08F82DC39970}"/>
+                <a16:creationId xmlns:a16="http://schemas.microsoft.com/office/drawing/2014/main" id="{05D7A031-60D4-4FF4-8B77-5B104708F901}"/>
               </a:ext>
             </a:extLst>
           </p:cNvPr>
@@ -20097,7 +20097,7 @@
           <p:cNvPr id="7" name="">
             <a:extLst xmlns:a="http://schemas.openxmlformats.org/drawingml/2006/main">
               <a:ext uri="{FF2B5EF4-FFF2-40B4-BE49-F238E27FC236}">
-                <a16:creationId xmlns:a16="http://schemas.microsoft.com/office/drawing/2014/main" id="{A31F9010-EF35-44C9-ABAC-BB26F5F791A6}"/>
+                <a16:creationId xmlns:a16="http://schemas.microsoft.com/office/drawing/2014/main" id="{A57CA005-B98C-4AEA-803B-05475E8AFE84}"/>
               </a:ext>
             </a:extLst>
           </p:cNvPr>
@@ -20132,7 +20132,7 @@
           <p:cNvPr id="8" name="">
             <a:extLst xmlns:a="http://schemas.openxmlformats.org/drawingml/2006/main">
               <a:ext uri="{FF2B5EF4-FFF2-40B4-BE49-F238E27FC236}">
-                <a16:creationId xmlns:a16="http://schemas.microsoft.com/office/drawing/2014/main" id="{154C1070-DD8A-4FAB-8552-33F2D1829403}"/>
+                <a16:creationId xmlns:a16="http://schemas.microsoft.com/office/drawing/2014/main" id="{DD4D29E3-FC3F-4DFC-9BC4-D0EAD9CCCB3C}"/>
               </a:ext>
             </a:extLst>
           </p:cNvPr>
@@ -20194,7 +20194,7 @@
           <p:cNvPr id="9" name="">
             <a:extLst xmlns:a="http://schemas.openxmlformats.org/drawingml/2006/main">
               <a:ext uri="{FF2B5EF4-FFF2-40B4-BE49-F238E27FC236}">
-                <a16:creationId xmlns:a16="http://schemas.microsoft.com/office/drawing/2014/main" id="{330D7BAA-DCAF-43B8-BBF5-E161E1FF0F00}"/>
+                <a16:creationId xmlns:a16="http://schemas.microsoft.com/office/drawing/2014/main" id="{9EEE783C-4697-4B80-A894-CB8D7D8FF716}"/>
               </a:ext>
             </a:extLst>
           </p:cNvPr>
@@ -20256,7 +20256,7 @@
           <p:cNvPr id="10" name="">
             <a:extLst xmlns:a="http://schemas.openxmlformats.org/drawingml/2006/main">
               <a:ext uri="{FF2B5EF4-FFF2-40B4-BE49-F238E27FC236}">
-                <a16:creationId xmlns:a16="http://schemas.microsoft.com/office/drawing/2014/main" id="{47DB2135-AE68-4C3E-8833-BE045132B2C7}"/>
+                <a16:creationId xmlns:a16="http://schemas.microsoft.com/office/drawing/2014/main" id="{0DDD4BB5-78CD-4092-A5BF-166CAF99BD72}"/>
               </a:ext>
             </a:extLst>
           </p:cNvPr>
@@ -20291,7 +20291,7 @@
           <p:cNvPr id="11" name="">
             <a:extLst xmlns:a="http://schemas.openxmlformats.org/drawingml/2006/main">
               <a:ext uri="{FF2B5EF4-FFF2-40B4-BE49-F238E27FC236}">
-                <a16:creationId xmlns:a16="http://schemas.microsoft.com/office/drawing/2014/main" id="{29344479-02D4-4708-834C-DA0D31187ABF}"/>
+                <a16:creationId xmlns:a16="http://schemas.microsoft.com/office/drawing/2014/main" id="{3CB187AC-68F6-485D-A0B3-6220F8189B79}"/>
               </a:ext>
             </a:extLst>
           </p:cNvPr>
@@ -20353,7 +20353,7 @@
           <p:cNvPr id="12" name="">
             <a:extLst xmlns:a="http://schemas.openxmlformats.org/drawingml/2006/main">
               <a:ext uri="{FF2B5EF4-FFF2-40B4-BE49-F238E27FC236}">
-                <a16:creationId xmlns:a16="http://schemas.microsoft.com/office/drawing/2014/main" id="{6F1E02FE-C3FD-44CB-A031-17FDC7863DEC}"/>
+                <a16:creationId xmlns:a16="http://schemas.microsoft.com/office/drawing/2014/main" id="{CE5D8981-7C24-48AB-A973-1E6CC7BB141F}"/>
               </a:ext>
             </a:extLst>
           </p:cNvPr>
@@ -20415,7 +20415,7 @@
           <p:cNvPr id="13" name="">
             <a:extLst xmlns:a="http://schemas.openxmlformats.org/drawingml/2006/main">
               <a:ext uri="{FF2B5EF4-FFF2-40B4-BE49-F238E27FC236}">
-                <a16:creationId xmlns:a16="http://schemas.microsoft.com/office/drawing/2014/main" id="{A89F39AB-30DD-47F4-BE76-89797794DE41}"/>
+                <a16:creationId xmlns:a16="http://schemas.microsoft.com/office/drawing/2014/main" id="{B57A1FFD-1214-43F3-8D07-191923B53576}"/>
               </a:ext>
             </a:extLst>
           </p:cNvPr>
@@ -20477,7 +20477,7 @@
           <p:cNvPr id="14" name="footer-rule-9">
             <a:extLst xmlns:a="http://schemas.openxmlformats.org/drawingml/2006/main">
               <a:ext uri="{FF2B5EF4-FFF2-40B4-BE49-F238E27FC236}">
-                <a16:creationId xmlns:a16="http://schemas.microsoft.com/office/drawing/2014/main" id="{92918C6D-75AE-442B-B926-952E033272F9}"/>
+                <a16:creationId xmlns:a16="http://schemas.microsoft.com/office/drawing/2014/main" id="{6C6E0721-1ABB-4526-9504-C59FE9F2D86B}"/>
               </a:ext>
             </a:extLst>
           </p:cNvPr>
@@ -20508,7 +20508,7 @@
           <p:cNvPr id="15" name="footer-label-9">
             <a:extLst xmlns:a="http://schemas.openxmlformats.org/drawingml/2006/main">
               <a:ext uri="{FF2B5EF4-FFF2-40B4-BE49-F238E27FC236}">
-                <a16:creationId xmlns:a16="http://schemas.microsoft.com/office/drawing/2014/main" id="{787CC820-AA92-42A6-9B2B-0A8BA1FBAC85}"/>
+                <a16:creationId xmlns:a16="http://schemas.microsoft.com/office/drawing/2014/main" id="{40298186-E760-4D5E-A43C-4E3E0752F0CC}"/>
               </a:ext>
             </a:extLst>
           </p:cNvPr>
@@ -20570,7 +20570,7 @@
           <p:cNvPr id="16" name="footer-page-9">
             <a:extLst xmlns:a="http://schemas.openxmlformats.org/drawingml/2006/main">
               <a:ext uri="{FF2B5EF4-FFF2-40B4-BE49-F238E27FC236}">
-                <a16:creationId xmlns:a16="http://schemas.microsoft.com/office/drawing/2014/main" id="{B6522664-40B3-4BA9-81D3-D4BDE6D23545}"/>
+                <a16:creationId xmlns:a16="http://schemas.microsoft.com/office/drawing/2014/main" id="{CF77BB73-A5CB-4D1A-B245-6ED3BBEA452C}"/>
               </a:ext>
             </a:extLst>
           </p:cNvPr>
@@ -20630,7 +20630,7 @@
     </p:spTree>
     <p:extLst>
       <p:ext uri="{BB962C8B-B14F-4D97-AF65-F5344CB8AC3E}">
-        <p14:creationId xmlns:p14="http://schemas.microsoft.com/office/powerpoint/2010/main" val="1648333065"/>
+        <p14:creationId xmlns:p14="http://schemas.microsoft.com/office/powerpoint/2010/main" val="1785248672"/>
       </p:ext>
     </p:extLst>
   </p:cSld>

--- a/docs/MSU-EVA-อบรมสายสนับสนุน-ฉบับวิทยากร.pptx
+++ b/docs/MSU-EVA-อบรมสายสนับสนุน-ฉบับวิทยากร.pptx
@@ -2,30 +2,30 @@
 <file path=ppt/presentation.xml><?xml version="1.0" encoding="utf-8"?>
 <p:presentation xmlns:p="http://schemas.openxmlformats.org/presentationml/2006/main">
   <p:sldMasterIdLst>
-    <p:sldMasterId xmlns:r="http://schemas.openxmlformats.org/officeDocument/2006/relationships" id="2147483648" r:id="Raa190d37a240471f"/>
+    <p:sldMasterId xmlns:r="http://schemas.openxmlformats.org/officeDocument/2006/relationships" id="2147483648" r:id="R37bf7260deac44e2"/>
   </p:sldMasterIdLst>
   <p:notesMasterIdLst>
-    <p:notesMasterId xmlns:r="http://schemas.openxmlformats.org/officeDocument/2006/relationships" r:id="Ra3610ac72ced4894"/>
+    <p:notesMasterId xmlns:r="http://schemas.openxmlformats.org/officeDocument/2006/relationships" r:id="R2087dc8508244ebb"/>
   </p:notesMasterIdLst>
   <p:sldIdLst>
-    <p:sldId xmlns:r="http://schemas.openxmlformats.org/officeDocument/2006/relationships" id="256" r:id="Re3188b2c317040f9"/>
-    <p:sldId xmlns:r="http://schemas.openxmlformats.org/officeDocument/2006/relationships" id="257" r:id="R74be032d61af4c7b"/>
-    <p:sldId xmlns:r="http://schemas.openxmlformats.org/officeDocument/2006/relationships" id="258" r:id="R725613939a7b40a1"/>
-    <p:sldId xmlns:r="http://schemas.openxmlformats.org/officeDocument/2006/relationships" id="259" r:id="R423db8dfe1e440fc"/>
-    <p:sldId xmlns:r="http://schemas.openxmlformats.org/officeDocument/2006/relationships" id="260" r:id="R19ce8836d2384ba9"/>
-    <p:sldId xmlns:r="http://schemas.openxmlformats.org/officeDocument/2006/relationships" id="261" r:id="Rc6be1e9d3c874ba9"/>
-    <p:sldId xmlns:r="http://schemas.openxmlformats.org/officeDocument/2006/relationships" id="262" r:id="R1a8bf3e25e5a4809"/>
-    <p:sldId xmlns:r="http://schemas.openxmlformats.org/officeDocument/2006/relationships" id="263" r:id="R35698b0cf68c4c60"/>
-    <p:sldId xmlns:r="http://schemas.openxmlformats.org/officeDocument/2006/relationships" id="264" r:id="R61281fb899e84231"/>
-    <p:sldId xmlns:r="http://schemas.openxmlformats.org/officeDocument/2006/relationships" id="265" r:id="Ra5e1c86fabb246ba"/>
-    <p:sldId xmlns:r="http://schemas.openxmlformats.org/officeDocument/2006/relationships" id="266" r:id="R89a5694a077b4aaf"/>
-    <p:sldId xmlns:r="http://schemas.openxmlformats.org/officeDocument/2006/relationships" id="267" r:id="Ra511fa56293b4c26"/>
-    <p:sldId xmlns:r="http://schemas.openxmlformats.org/officeDocument/2006/relationships" id="268" r:id="R09abe0ead0044226"/>
-    <p:sldId xmlns:r="http://schemas.openxmlformats.org/officeDocument/2006/relationships" id="269" r:id="Rd0c6b83233d4420f"/>
-    <p:sldId xmlns:r="http://schemas.openxmlformats.org/officeDocument/2006/relationships" id="270" r:id="R4bafa99c01514d8f"/>
-    <p:sldId xmlns:r="http://schemas.openxmlformats.org/officeDocument/2006/relationships" id="271" r:id="R6dcfaddb7456446d"/>
-    <p:sldId xmlns:r="http://schemas.openxmlformats.org/officeDocument/2006/relationships" id="272" r:id="Rb74ba628cbe24aa0"/>
-    <p:sldId xmlns:r="http://schemas.openxmlformats.org/officeDocument/2006/relationships" id="273" r:id="Rf8f2f6078c2d42e6"/>
+    <p:sldId xmlns:r="http://schemas.openxmlformats.org/officeDocument/2006/relationships" id="256" r:id="R98f804fc49724f6c"/>
+    <p:sldId xmlns:r="http://schemas.openxmlformats.org/officeDocument/2006/relationships" id="257" r:id="Rc9381f0747a3482a"/>
+    <p:sldId xmlns:r="http://schemas.openxmlformats.org/officeDocument/2006/relationships" id="258" r:id="R93ab160da12f42cb"/>
+    <p:sldId xmlns:r="http://schemas.openxmlformats.org/officeDocument/2006/relationships" id="259" r:id="R88685d3c6f0149bb"/>
+    <p:sldId xmlns:r="http://schemas.openxmlformats.org/officeDocument/2006/relationships" id="260" r:id="R8ca9072cb96a45f1"/>
+    <p:sldId xmlns:r="http://schemas.openxmlformats.org/officeDocument/2006/relationships" id="261" r:id="R937be7942d99426d"/>
+    <p:sldId xmlns:r="http://schemas.openxmlformats.org/officeDocument/2006/relationships" id="262" r:id="R65e4dd79c9ef4748"/>
+    <p:sldId xmlns:r="http://schemas.openxmlformats.org/officeDocument/2006/relationships" id="263" r:id="R0f2a4eac388e44cf"/>
+    <p:sldId xmlns:r="http://schemas.openxmlformats.org/officeDocument/2006/relationships" id="264" r:id="R9d1d5fb713d847ea"/>
+    <p:sldId xmlns:r="http://schemas.openxmlformats.org/officeDocument/2006/relationships" id="265" r:id="R4d494010ae3a4841"/>
+    <p:sldId xmlns:r="http://schemas.openxmlformats.org/officeDocument/2006/relationships" id="266" r:id="Rcecec83683394108"/>
+    <p:sldId xmlns:r="http://schemas.openxmlformats.org/officeDocument/2006/relationships" id="267" r:id="R7b6ee03d317244ea"/>
+    <p:sldId xmlns:r="http://schemas.openxmlformats.org/officeDocument/2006/relationships" id="268" r:id="R393431e878e54a4b"/>
+    <p:sldId xmlns:r="http://schemas.openxmlformats.org/officeDocument/2006/relationships" id="269" r:id="R0eb854fdc83c448d"/>
+    <p:sldId xmlns:r="http://schemas.openxmlformats.org/officeDocument/2006/relationships" id="270" r:id="Rb58b53478d7346c2"/>
+    <p:sldId xmlns:r="http://schemas.openxmlformats.org/officeDocument/2006/relationships" id="271" r:id="R65bfc98304754950"/>
+    <p:sldId xmlns:r="http://schemas.openxmlformats.org/officeDocument/2006/relationships" id="272" r:id="R080fd16ea9bd4ce7"/>
+    <p:sldId xmlns:r="http://schemas.openxmlformats.org/officeDocument/2006/relationships" id="273" r:id="R19506843480146fc"/>
   </p:sldIdLst>
   <p:sldSz cx="12192000" cy="6858000"/>
   <p:notesSz cx="6858000" cy="9144000"/>
@@ -459,7 +459,7 @@
           <a:lstStyle xmlns:a="http://schemas.openxmlformats.org/drawingml/2006/main"/>
           <a:p xmlns:a="http://schemas.openxmlformats.org/drawingml/2006/main">
             <a:r>
-              <a:t>[พูด] สวัสดีทุกท่าน สำหรับช่วงบ่ายนี้เราจะอบรมการใช้งานระบบ MSU EVA สำหรับบุคลากรสายสนับสนุน มีทั้งท่านที่เคยทดลองระบบแล้วและท่านที่เพิ่งใช้งานครั้งแรก รวมถึงผู้ประเมิน กรรมการ และผู้บริหาร เราจะเริ่มจากภาพรวมของระบบและหน้าที่ของแต่ละบทบาท ก่อนดูวิธีบันทึกกิจกรรม ตรวจคะแนน แนบหลักฐาน และส่งแบบประเมิน หลังจากชมการสาธิต ทุกท่านจะได้ทดลองทำหนึ่งรายการด้วยตนเอง และหยุดที่การบันทึกร่างก่อนเข้าสู่ขั้นตอนผู้ประเมินร่วมกัน</a:t>
+              <a:t>[พูด] สวัสดีทุกท่านครับ สำหรับช่วงบ่ายนี้เราจะมาดูการใช้งาน MSU EVA สำหรับบุคลากรสายสนับสนุนกันนะครับ บางท่านอาจอยู่ต่อจากช่วงเช้า บางท่านเพิ่งเข้ามาใหม่ และมีทั้งผู้รับการประเมิน ผู้ประเมิน ผู้บริหาร รวมถึงผู้ประเมินระบบ ไม่ต้องกังวลครับ เราจะเริ่มจากภาพรวมสั้น ๆ ก่อน แล้วผมจะสาธิตหนึ่งรายการให้ดู หลังจากนั้นทุกท่านจะได้ทดลองกับบัญชีที่เตรียมไว้ครับ</a:t>
             </a:r>
           </a:p>
           <a:p xmlns:a="http://schemas.openxmlformats.org/drawingml/2006/main">
@@ -564,7 +564,7 @@
           <a:lstStyle xmlns:a="http://schemas.openxmlformats.org/drawingml/2006/main"/>
           <a:p xmlns:a="http://schemas.openxmlformats.org/drawingml/2006/main">
             <a:r>
-              <a:t>[พูด] คะแนนถ่วงน้ำหนักคำนวณจากน้ำหนักคูณคะแนนที่ทำได้ แล้วหารด้วยหนึ่งร้อย น้ำหนักสะท้อนความสำคัญของเกณฑ์ ส่วนคะแนนที่ทำได้สะท้อนผลในรายการนั้น การแสดงสูตรช่วยให้เราตรวจสอบได้ว่าคะแนนรวมไม่ได้เกิดขึ้นแบบลึกลับ หากผลไม่ตรงที่คาด ให้ย้อนกลับไปตรวจน้ำหนัก คะแนนที่ทำได้ และหน่วยของข้อมูล ไม่ควรแก้ตัวเลขเพื่อให้ได้ผลลัพธ์ที่ต้องการ</a:t>
+              <a:t>[พูด] ใช่ครับ สูตรนี้ดูเหมือนมีหลายตัว แต่หลักคิดไม่ซับซ้อน คะแนนถ่วงน้ำหนักเท่ากับน้ำหนักคูณคะแนนที่ทำได้ แล้วหารหนึ่งร้อย น้ำหนักบอกความสำคัญของรายการ ส่วนคะแนนที่ทำได้มาจากผลเทียบกับเกณฑ์ ตรงนี้อย่ากรอกคะแนนถ่วงน้ำหนักเองนะครับ ระบบคำนวณให้ หน้าที่ของเราคือตรวจว่าค่าต้นทางถูกต้อง ต่อไปลองคำนวณจากตัวอย่างจริงกันครับ</a:t>
             </a:r>
           </a:p>
           <a:p xmlns:a="http://schemas.openxmlformats.org/drawingml/2006/main">
@@ -654,17 +654,17 @@
           <a:lstStyle xmlns:a="http://schemas.openxmlformats.org/drawingml/2006/main"/>
           <a:p xmlns:a="http://schemas.openxmlformats.org/drawingml/2006/main">
             <a:r>
-              <a:t>[พูด] ลองดูตัวอย่างนี้ หากน้ำหนักเท่ากับยี่สิบและคะแนนที่ทำได้เท่ากับแปดสิบ คะแนนถ่วงน้ำหนักจะเป็นสิบหก เพราะยี่สิบคูณแปดสิบแล้วหารหนึ่งร้อย ตัวอย่างนี้ใช้เพื่อให้เห็นที่มา ไม่ใช่ค่ามาตรฐานของทุกกิจกรรม</a:t>
-            </a:r>
-          </a:p>
-          <a:p xmlns:a="http://schemas.openxmlformats.org/drawingml/2006/main">
-            <a:r>
-              <a:t>[ถามผู้เข้าอบรม] หากน้ำหนักเป็นสามสิบและคะแนนที่ทำได้เป็นเก้าสิบ ควรได้คะแนนถ่วงน้ำหนักเท่าไร</a:t>
-            </a:r>
-          </a:p>
-          <a:p xmlns:a="http://schemas.openxmlformats.org/drawingml/2006/main">
-            <a:r>
-              <a:t>[พูด] คำตอบคือยี่สิบเจ็ด และควรตรวจได้จากสูตรเดียวกัน</a:t>
+              <a:t>[พูด] ลองช่วยกันคิดนะครับ ถ้าน้ำหนักเท่ากับยี่สิบ และคะแนนที่ทำได้เท่ากับแปดสิบ ผลจะเป็นเท่าไรครับ ใช่ครับ คำตอบคือสิบหกคะแนน เพราะยี่สิบคูณแปดสิบแล้วหารหนึ่งร้อย ตัวอย่างนี้ช่วยให้เราตรวจคร่าว ๆ ได้ว่าคะแนนบนหน้าจอสมเหตุสมผลหรือไม่ ถ้าคะแนนไม่ตรง ให้ย้อนดูน้ำหนัก คะแนนที่ทำได้ และหน่วยข้อมูลก่อนครับ</a:t>
+            </a:r>
+          </a:p>
+          <a:p xmlns:a="http://schemas.openxmlformats.org/drawingml/2006/main">
+            <a:r>
+              <a:t>[ถามผู้เข้าอบรม] ถ้าน้ำหนักเป็น 30 และคะแนนที่ทำได้เป็น 70 คะแนนถ่วงน้ำหนักควรเป็นเท่าไรครับ</a:t>
+            </a:r>
+          </a:p>
+          <a:p xmlns:a="http://schemas.openxmlformats.org/drawingml/2006/main">
+            <a:r>
+              <a:t>[พูด] คำตอบคือ 21 คะแนนครับ ต่อไปเราจะดูหลักฐานที่ใช้รองรับผลกิจกรรม</a:t>
             </a:r>
           </a:p>
           <a:p xmlns:a="http://schemas.openxmlformats.org/drawingml/2006/main">
@@ -754,7 +754,7 @@
           <a:lstStyle xmlns:a="http://schemas.openxmlformats.org/drawingml/2006/main"/>
           <a:p xmlns:a="http://schemas.openxmlformats.org/drawingml/2006/main">
             <a:r>
-              <a:t>[พูด] หลักฐานต้องเปิดได้ ตรงกับกิจกรรม และระบุได้ว่าเป็นเอกสารของรายการใด ควรใช้ลิงก์ที่ผู้ประเมินเข้าถึงได้จริง ตั้งชื่อไฟล์ให้ค้นหาได้ และหลีกเลี่ยงการส่งโฟลเดอร์รวมโดยไม่บอกว่าเอกสารใดเกี่ยวข้อง หากระบบกำหนดว่ารายการนี้ต้องมีหลักฐาน จะยังส่งแบบประเมินไม่ได้จนกว่าจะมีลิงก์ที่ถูกต้อง</a:t>
+              <a:t>[พูด] หลักฐานที่ดีต้องเปิดได้ ตรงกับกิจกรรม และรู้ว่าเป็นเอกสารของรายการใดครับ ลิงก์ควรเปิดได้จากบัญชีของผู้ประเมิน ไม่ใช่เปิดได้เฉพาะเจ้าของไฟล์ และควรตั้งชื่อไฟล์ให้ค้นหาได้ง่าย เดี๋ยวผมกรอกกิจกรรมหนึ่งรายการและแนบหลักฐานให้ดูก่อนครับ ทุกท่านสังเกตทั้งคะแนนที่ระบบคำนวณและการทดลองเปิดลิงก์</a:t>
             </a:r>
           </a:p>
           <a:p xmlns:a="http://schemas.openxmlformats.org/drawingml/2006/main">
@@ -854,7 +854,7 @@
           <a:lstStyle xmlns:a="http://schemas.openxmlformats.org/drawingml/2006/main"/>
           <a:p xmlns:a="http://schemas.openxmlformats.org/drawingml/2006/main">
             <a:r>
-              <a:t>[พูด] หากข้อมูลยังไม่ครบ ให้บันทึกร่างไว้ก่อน เพราะกลับมาแก้ไขได้และงานยังไม่เข้าสู่ผู้ประเมิน ส่วนส่งแบบประเมินควรทำเมื่อข้อมูลบังคับ คะแนน และหลักฐานครบแล้ว ก่อนยืนยันให้ตรวจอีกครั้งว่าผลที่ทำได้สอดคล้องกับรายละเอียดกิจกรรมและหลักฐานหรือไม่ วันนี้ในช่วงทดลอง ทุกคนจะหยุดที่บันทึกร่างก่อน เพื่อให้วิทยากรตรวจและแก้ไขได้โดยไม่ทำให้งานเดินไปยังขั้นถัดไป</a:t>
+              <a:t>[พูด] เมื่อข้อมูลยังไม่ครบ ให้บันทึกร่างไว้ก่อนครับ เรากลับมาแก้ไขได้และงานยังไม่ถูกส่งให้ผู้ประเมิน ส่วนส่งแบบประเมินใช้เมื่อข้อมูลบังคับ คะแนน และหลักฐานครบแล้ว ก่อนยืนยัน ลองหยุดตรวจอีกครั้งว่าผลที่ทำได้สอดคล้องกับรายละเอียดกิจกรรมและหลักฐานหรือไม่ วันนี้ตอนทดลองเราจะหยุดที่บันทึกร่างนะครับ ส่วนต่อไปผมจะอธิบายให้เห็นว่าเมื่อส่งจริง งานเดินต่ออย่างไร</a:t>
             </a:r>
           </a:p>
           <a:p xmlns:a="http://schemas.openxmlformats.org/drawingml/2006/main">
@@ -954,7 +954,7 @@
           <a:lstStyle xmlns:a="http://schemas.openxmlformats.org/drawingml/2006/main"/>
           <a:p xmlns:a="http://schemas.openxmlformats.org/drawingml/2006/main">
             <a:r>
-              <a:t>[พูด] หลังส่งแบบประเมิน ระบบจะส่งงานตามลำดับผู้ประเมินที่กำหนด ผู้ประเมินแต่ละคนตรวจข้อมูล ให้ผล และส่งต่อไปยังคนถัดไป จำนวนผู้ประเมินและสิทธิ์อาจต่างกันในแต่ละงาน จึงต้องดูสถานะและลำดับของรายการนั้นเป็นหลัก อย่าคาดเดาว่าผู้บริหารทุกคนจะเห็นหรือปิดงานได้ทันที เพราะระบบยึดการมอบหมายและลำดับที่ผู้ดูแลกำหนด</a:t>
+              <a:t>[พูด] หลังส่งแบบประเมิน ระบบจะส่งงานตามลำดับผู้ประเมินที่ Admin กำหนดไว้ครับ ผู้ประเมินแต่ละคนตรวจ ให้ผล และส่งต่อไปยังคนถัดไป จำนวนขั้นและสิทธิ์อาจไม่เหมือนกันในทุกงาน เพราะฉะนั้นอย่าคาดเดาจากชื่อตำแหน่ง ให้ดูสถานะและลำดับของรายการนั้นเป็นหลัก เมื่อเข้าใจตรงนี้แล้ว เดี๋ยวเราสลับไปดูหน้าของผู้ประเมินกันครับ</a:t>
             </a:r>
           </a:p>
           <a:p xmlns:a="http://schemas.openxmlformats.org/drawingml/2006/main">
@@ -1049,7 +1049,7 @@
           <a:lstStyle xmlns:a="http://schemas.openxmlformats.org/drawingml/2006/main"/>
           <a:p xmlns:a="http://schemas.openxmlformats.org/drawingml/2006/main">
             <a:r>
-              <a:t>[พูด] เมื่อได้รับงานประเมิน ให้ตรวจผลกิจกรรม เป้าหมาย คะแนนที่ระบบคำนวณ และหลักฐานว่าตรงกับเกณฑ์หรือไม่ เปิดลิงก์หลักฐานจริงก่อนให้ผล หากข้อมูลไม่ครบให้ดำเนินการตามตัวเลือกที่ระบบรองรับ ผู้ประเมินและผู้บริหารที่ยังไม่เคยทดลอง ให้สังเกตว่าข้อมูลใดมาจากผู้รับการประเมิน และส่วนใดเป็นการตัดสินใจของผู้ประเมิน</a:t>
+              <a:t>[พูด] ตอนนี้เราอยู่ในมุมผู้ประเมินครับ สิ่งที่ต้องตรวจคือผลกิจกรรม เป้าหมาย คะแนนที่ระบบคำนวณ และหลักฐานว่าตรงกับเกณฑ์หรือไม่ ควรเปิดหลักฐานจริงก่อนให้ผลนะครับ ไม่ควรดูเฉพาะชื่อไฟล์ เดี๋ยวผมทำให้ดูหนึ่งรายการ ให้สังเกตว่าข้อมูลใดมาจากผู้รับการประเมิน และตรงไหนเป็นส่วนที่ผู้ประเมินต้องตัดสินใจ</a:t>
             </a:r>
           </a:p>
           <a:p xmlns:a="http://schemas.openxmlformats.org/drawingml/2006/main">
@@ -1154,12 +1154,12 @@
           <a:lstStyle xmlns:a="http://schemas.openxmlformats.org/drawingml/2006/main"/>
           <a:p xmlns:a="http://schemas.openxmlformats.org/drawingml/2006/main">
             <a:r>
-              <a:t>[พูด] ผู้ประเมินแต่ละคนตรวจและส่งต่องานตามลำดับ เมื่อถึงผู้ประเมินคนสุดท้าย บุคคลนั้นจะยืนยันขั้นสุดท้ายและทำให้สถานะเป็น ประเมินเสร็จสิ้น หรือ Completed ผู้ประเมินคนสุดท้ายอาจเป็นคนละบทบาทในแต่ละรายการ จึงควรดูข้อมูลลำดับที่ระบบแสดง ไม่ควรยึดชื่อตำแหน่งแบบตายตัว</a:t>
-            </a:r>
-          </a:p>
-          <a:p xmlns:a="http://schemas.openxmlformats.org/drawingml/2006/main">
-            <a:r>
-              <a:t>[สาธิต] ส่งต่องานไปหนึ่งลำดับ เปิดด้วยบัญชีผู้ประเมินคนสุดท้าย และแสดงการยืนยันพร้อมสถานะ Completed</a:t>
+              <a:t>[พูด] ผู้ประเมินแต่ละคนทำงานเฉพาะขั้นของตัวเองครับ เมื่อตรวจครบแล้วจึงส่งต่อ คนถัดไปจึงจะรับงาน และเมื่อถึงคนสุดท้าย บุคคลนั้นจะยืนยันขั้นสุดท้ายจนสถานะเป็น Completed คนสุดท้ายอาจเป็นบทบาทใดก็ได้ตามลำดับที่ Admin กำหนดนะครับ เดี๋ยวผมส่งต่องานและเปิดบัญชีคนสุดท้ายให้ดู เพื่อให้เห็นการเปลี่ยนสถานะจริงครับ</a:t>
+            </a:r>
+          </a:p>
+          <a:p xmlns:a="http://schemas.openxmlformats.org/drawingml/2006/main">
+            <a:r>
+              <a:t>[สาธิต] ส่งต่องานหนึ่งลำดับ เปิดด้วยบัญชีผู้ประเมินคนสุดท้าย และยืนยันจนสถานะเป็น Completed</a:t>
             </a:r>
           </a:p>
           <a:p xmlns:a="http://schemas.openxmlformats.org/drawingml/2006/main">
@@ -1254,7 +1254,7 @@
           <a:lstStyle xmlns:a="http://schemas.openxmlformats.org/drawingml/2006/main"/>
           <a:p xmlns:a="http://schemas.openxmlformats.org/drawingml/2006/main">
             <a:r>
-              <a:t>[พูด] ต่อไปให้ทุกท่านทดลองด้วยบัญชีที่เตรียมไว้ ผู้ที่เคยทดสอบแล้วให้เน้นตรวจคะแนนและความสัมพันธ์ของหลักฐาน ผู้ที่เข้ามาใหม่ทำตามรายการทีละข้อ ได้แก่ เลือกกิจกรรม กรอกเป้าหมายและผล ตรวจคะแนน แนบหลักฐาน แล้วบันทึกร่าง เมื่อเสร็จให้ยกมือหรือเรียกผู้ช่วย ยังไม่ต้องกดส่งแบบประเมิน เพราะเราจะตรวจความพร้อมและทดลองขั้นผู้ประเมินร่วมกันภายหลัง</a:t>
+              <a:t>[พูด] ทีนี้ถึงเวลาลองทำด้วยตัวเองแล้วครับ ให้ทุกท่านเปิดบัญชีที่เตรียมไว้ ผู้ที่เคยทดสอบระบบแล้วลองเน้นตรวจคะแนนและความสัมพันธ์ของหลักฐาน ส่วนผู้ที่เพิ่งเริ่มให้ทำทีละขั้น เลือกกิจกรรม กรอกเป้าหมายและผล ตรวจคะแนน แนบหลักฐาน แล้วบันทึกร่าง ถ้าติดตรงไหนยกมือได้เลยครับ ยังไม่ต้องกดส่งแบบประเมิน เพราะเราจะตรวจความพร้อมร่วมกันก่อน</a:t>
             </a:r>
           </a:p>
           <a:p xmlns:a="http://schemas.openxmlformats.org/drawingml/2006/main">
@@ -1359,17 +1359,17 @@
           <a:lstStyle xmlns:a="http://schemas.openxmlformats.org/drawingml/2006/main"/>
           <a:p xmlns:a="http://schemas.openxmlformats.org/drawingml/2006/main">
             <a:r>
-              <a:t>[พูด] หากใช้งานไม่ได้ ให้ตรวจรอบและรายการ สิทธิ์ของบัญชี สถานะงาน และข้อมูลบังคับรวมถึงลิงก์หลักฐานก่อน หากคะแนนไม่เป็นไปตามคาด ให้ตรวจน้ำหนัก คะแนนที่ทำได้ และหน่วยข้อมูล หากยังแก้ไม่ได้ ให้จดชื่อรายการ สถานะ และข้อความที่พบเพื่อแจ้งผู้ดูแลระบบ</a:t>
-            </a:r>
-          </a:p>
-          <a:p xmlns:a="http://schemas.openxmlformats.org/drawingml/2006/main">
-            <a:r>
-              <a:t>[ถามผู้เข้าอบรม] มีใครติดที่การเลือกกิจกรรม การคำนวณคะแนน หรือการเปิดหลักฐานหรือไม่</a:t>
-            </a:r>
-          </a:p>
-          <a:p xmlns:a="http://schemas.openxmlformats.org/drawingml/2006/main">
-            <a:r>
-              <a:t>[พูด] เมื่อทุกคนพร้อม เราจะตรวจข้อมูล กดส่งแบบประเมิน และให้ผู้ประเมินรับงานต่อ</a:t>
+              <a:t>[พูด] ก่อนจบ ขอฝากวิธีตรวจปัญหาเบื้องต้นไว้สี่จุดครับ ดูรอบและรายการ สิทธิ์ของบัญชี สถานะงาน และข้อมูลบังคับรวมถึงลิงก์หลักฐาน ถ้าคะแนนไม่เป็นไปตามที่คิด ให้ย้อนดูน้ำหนัก คะแนนที่ทำได้ และหน่วยก่อน หากยังแก้ไม่ได้ ให้จดชื่อรายการ สถานะ และข้อความที่พบ แล้วแจ้งผู้ดูแลระบบครับ</a:t>
+            </a:r>
+          </a:p>
+          <a:p xmlns:a="http://schemas.openxmlformats.org/drawingml/2006/main">
+            <a:r>
+              <a:t>[ถามผู้เข้าอบรม] ตอนนี้มีใครติดที่การเลือกกิจกรรม การคำนวณคะแนน หรือการเปิดหลักฐานไหมครับ</a:t>
+            </a:r>
+          </a:p>
+          <a:p xmlns:a="http://schemas.openxmlformats.org/drawingml/2006/main">
+            <a:r>
+              <a:t>[พูด] ถ้าไม่มีคำถามเพิ่มเติม ขอให้จำไว้ครับ ตรวจงานให้ถูก กรอกข้อมูลให้ครบ และบันทึกร่างก่อนส่งจริง ขอบคุณทุกท่านครับ</a:t>
             </a:r>
           </a:p>
           <a:p xmlns:a="http://schemas.openxmlformats.org/drawingml/2006/main">
@@ -1474,7 +1474,7 @@
           <a:lstStyle xmlns:a="http://schemas.openxmlformats.org/drawingml/2006/main"/>
           <a:p xmlns:a="http://schemas.openxmlformats.org/drawingml/2006/main">
             <a:r>
-              <a:t>[พูด] เป้าหมายคือให้ทุกท่านบันทึกกิจกรรมหนึ่งรายการได้ครบและเข้าใจว่าคะแนนเกิดจากข้อมูลใด เราจะฝึกเลือกกิจกรรม กรอกเป้าหมายและผลที่ทำได้ ตรวจคะแนนถ่วงน้ำหนัก แนบหลักฐาน และแยกบันทึกร่างออกจากส่งแบบประเมิน ผู้ที่เคยทดสอบแล้วให้ช่วยตรวจความสมเหตุสมผลของข้อมูล ส่วนผู้เข้าร่วมใหม่ทำตามทีละขั้น และผู้ประเมินให้สังเกตข้อมูลที่จะใช้ตัดสินใจในช่วงท้าย</a:t>
+              <a:t>[พูด] เป้าหมายของช่วงบ่ายนี้ชัดเจนครับ เราจะทำกิจกรรมหนึ่งรายการให้ครบ ตั้งแต่เลือกกิจกรรม กรอกเป้าหมายและผล ตรวจคะแนน แนบหลักฐาน ไปจนถึงบันทึกร่าง ที่สำคัญคือเราต้องอธิบายได้ว่าคะแนนเกิดจากข้อมูลใด รอบประเมินเป็นสิ่งที่ผู้ดูแลระบบกำหนดไว้แล้วนะครับ ผู้ใช้งานมีหน้าที่ตรวจรอบกับรายการที่ได้รับมอบหมาย เมื่อพร้อมแล้ว ทีนี้เรามาดูว่าระบบช่วยงานส่วนไหนบ้างครับ</a:t>
             </a:r>
           </a:p>
           <a:p xmlns:a="http://schemas.openxmlformats.org/drawingml/2006/main">
@@ -1569,7 +1569,7 @@
           <a:lstStyle xmlns:a="http://schemas.openxmlformats.org/drawingml/2006/main"/>
           <a:p xmlns:a="http://schemas.openxmlformats.org/drawingml/2006/main">
             <a:r>
-              <a:t>[พูด] MSU EVA ครอบคลุมงานประเมินทั้งกระบวนการ ตั้งแต่จัดการผู้ใช้และสิทธิ์ จัดทำเกณฑ์ สร้างรอบและมอบหมายงาน ไปจนถึงการบันทึกผล การประเมิน ติดตามสถานะ และส่งออกรายงาน Admin เป็นผู้เตรียมส่วนของระบบและรอบประเมิน ผู้ใช้งานสายสนับสนุนจึงไม่ต้องสร้างหรือเลือกรอบเอง แต่ตรวจสอบรอบ งาน และกิจกรรมที่ได้รับมอบหมาย แล้วกรอกข้อมูลตามหน้าที่ของตน</a:t>
+              <a:t>[พูด] MSU EVA ไม่ได้มีแค่หน้ากรอกกิจกรรมนะครับ ระบบครอบคลุมตั้งแต่การจัดการผู้ใช้และสิทธิ์ การสร้างเกณฑ์ การกำหนดรอบและมอบหมายงาน ไปจนถึงการกรอกข้อมูล การประเมิน ติดตามสถานะ และส่งออกรายงาน ส่วนงานเตรียมระบบเป็นหน้าที่ของ Admin ผู้เข้าอบรมทั่วไปจึงไม่ต้องสร้างหรือเลือกรอบประเมินเองครับ เราตรวจเฉพาะงานที่ได้รับ แล้วดำเนินการตามสิทธิ์ของเรา ต่อไปมาทำความรู้จักผู้ใช้งานแต่ละกลุ่มกันครับ</a:t>
             </a:r>
           </a:p>
           <a:p xmlns:a="http://schemas.openxmlformats.org/drawingml/2006/main">
@@ -1674,7 +1674,7 @@
           <a:lstStyle xmlns:a="http://schemas.openxmlformats.org/drawingml/2006/main"/>
           <a:p xmlns:a="http://schemas.openxmlformats.org/drawingml/2006/main">
             <a:r>
-              <a:t>[พูด] ระบบมีห้าบทบาทหลัก ได้แก่ Admin ผู้รับการประเมิน ผู้ประเมิน กรรมการ และผู้บริหาร ผู้รับการประเมินกรอกผลกิจกรรมและหลักฐาน ส่วนผู้ประเมิน กรรมการ และผู้บริหารตรวจหรือยืนยันตามขั้นที่ได้รับมอบหมาย Admin เป็นผู้กำหนดลำดับเหล่านี้ในแต่ละรอบ บางรอบอาจใช้ผู้ประเมินไม่ครบทั้งสามบทบาท จึงต้องยึดลำดับที่แสดงในงาน ไม่ควรสรุปว่าผู้บริหารจะเป็นผู้ปิดงานทุกครั้ง</a:t>
+              <a:t>[พูด] ในระบบมีห้าบทบาทหลักครับ ได้แก่ Admin ผู้รับการประเมิน ผู้ประเมิน กรรมการ และผู้บริหาร แต่ละบทบาทจะเห็นเมนูต่างกัน ตรงนี้ขอเน้นครับ Admin เป็นผู้กำหนดผู้ใช้ เกณฑ์ รอบประเมิน การมอบหมาย และลำดับผู้ประเมิน ส่วนบทบาทผู้ประเมิน กรรมการ และผู้บริหารจะถูกใช้ตามขั้นที่ Admin จัดไว้ บางงานอาจใช้ไม่ครบทุกบทบาท และคนปิดงานคือคนสุดท้ายในลำดับของงานนั้นครับ เมื่อรู้ว่าใครทำอะไรแล้ว เรามาดูเส้นทางของงานทั้งกระบวนการกันครับ</a:t>
             </a:r>
           </a:p>
           <a:p xmlns:a="http://schemas.openxmlformats.org/drawingml/2006/main">
@@ -1774,7 +1774,7 @@
           <a:lstStyle xmlns:a="http://schemas.openxmlformats.org/drawingml/2006/main"/>
           <a:p xmlns:a="http://schemas.openxmlformats.org/drawingml/2006/main">
             <a:r>
-              <a:t>[พูด] ภาพรวมเริ่มจากผู้รับการประเมินเปิดงาน เลือกกิจกรรม กรอกผล ตรวจคะแนนและหลักฐาน แล้วส่งแบบประเมิน ระบบจะส่งต่อไปยังผู้ประเมินตามลำดับ ผู้ประเมินแต่ละคนตรวจและส่งต่องาน จนผู้ประเมินคนสุดท้ายยืนยันและสถานะเปลี่ยนเป็น ประเมินเสร็จสิ้น หรือ Completed ขอให้จำเส้นทางนี้ไว้ เพราะเมื่อปุ่มหรือสถานะเปลี่ยน เราจะรู้ได้ว่างานอยู่ในความรับผิดชอบของใคร</a:t>
+              <a:t>[พูด] ลองดูภาพนี้จากซ้ายไปขวาครับ ผู้รับการประเมินเปิดงาน เลือกกิจกรรม กรอกผล ตรวจคะแนนและหลักฐาน แล้วจึงส่งแบบประเมิน หลังจากนั้นระบบส่งงานให้ผู้ประเมินทีละคนตามลำดับ คนสุดท้ายยืนยันเมื่อใด งานจึงเป็นประเมินเสร็จสิ้น หรือ Completed ครับ จำไว้ว่าแต่ละปุ่มมีผลกับคนถัดไป เมื่อเห็นภาพรวมแล้ว ต่อไปเราจะเริ่มจากบทบาทของผู้กรอกข้อมูลครับ</a:t>
             </a:r>
           </a:p>
           <a:p xmlns:a="http://schemas.openxmlformats.org/drawingml/2006/main">
@@ -1869,7 +1869,7 @@
           <a:lstStyle xmlns:a="http://schemas.openxmlformats.org/drawingml/2006/main"/>
           <a:p xmlns:a="http://schemas.openxmlformats.org/drawingml/2006/main">
             <a:r>
-              <a:t>[พูด] ผู้รับการประเมินเป็นผู้เตรียมข้อมูลผลกิจกรรมในขั้นแรก ต้องบอกให้ชัดว่าทำกิจกรรมอะไร เป้าหมายคืออะไร ผลที่ทำได้เท่าไร และมีหลักฐานใดรองรับ จากนั้นตรวจคะแนนที่ระบบคำนวณ ก่อนเลือกบันทึกร่างหรือส่งแบบประเมิน ข้อมูลที่ครบช่วยให้ผู้ประเมินตัดสินใจจากข้อเท็จจริง ไม่ต้องย้อนกลับมาถามรายละเอียดพื้นฐาน และช่วยให้คะแนนแต่ละรายการอธิบายที่มาได้</a:t>
+              <a:t>[พูด] ผู้รับการประเมินเป็นคนเตรียมเรื่องราวของกิจกรรมให้ครบครับ เราต้องบอกให้ได้ว่าทำกิจกรรมอะไร ตั้งเป้าหมายไว้เท่าไร ผลจริงเป็นอย่างไร และมีหลักฐานใดยืนยัน ถ้าข้อมูลยังไม่พร้อมก็ใช้บันทึกร่างก่อนได้ ไม่ต้องรีบส่งครับ เพราะข้อมูลที่เราเตรียมตรงนี้จะเป็นฐานให้ผู้ประเมินตัดสินใจ ทีนี้เดี๋ยวผมพาไปดูว่าควรเริ่มจากตรงไหนบนหน้าจอ</a:t>
             </a:r>
           </a:p>
           <a:p xmlns:a="http://schemas.openxmlformats.org/drawingml/2006/main">
@@ -1964,7 +1964,7 @@
           <a:lstStyle xmlns:a="http://schemas.openxmlformats.org/drawingml/2006/main"/>
           <a:p xmlns:a="http://schemas.openxmlformats.org/drawingml/2006/main">
             <a:r>
-              <a:t>[พูด] ก่อนเปิดงาน ให้ตรวจรอบประเมินที่ผู้ดูแลระบบกำหนด รายการที่ได้รับมอบหมาย และสถานะปัจจุบัน ผู้ใช้งานไม่ต้องเลือกรอบประเมินเอง หากข้อมูลไม่ถูกต้องให้แจ้งผู้ดูแลระบบ โดยเฉพาะผู้ที่มีหลายบทบาทต้องตรวจว่ากำลังใช้บัญชีและหน้าจอที่ถูกต้อง ต่อไปผมจะเปิดหนึ่งรายการให้ดู ทุกท่านยังไม่ต้องทำตาม ให้สังเกตว่าผมเริ่มจากตรงไหน เลือกกิจกรรมใด และตรวจสถานะอย่างไรก่อนกรอกข้อมูล</a:t>
+              <a:t>[พูด] ต่อไปมาที่แดชบอร์ดของฉันครับ ก่อนเปิดงานให้ตรวจรอบประเมินที่ผู้ดูแลระบบกำหนด รายการที่ได้รับมอบหมาย และสถานะปัจจุบัน ผู้ใช้งานไม่ต้องเลือกรอบเองนะครับ ถ้ารายการไม่ตรงให้หยุดและแจ้งผู้ดูแลระบบก่อน เดี๋ยวผมทำให้ดูก่อน ทุกท่านยังไม่ต้องกดตามครับ ให้สังเกตชื่อรอบ ชื่อรายการ และปุ่มเปิดงาน</a:t>
             </a:r>
           </a:p>
           <a:p xmlns:a="http://schemas.openxmlformats.org/drawingml/2006/main">
@@ -2059,7 +2059,7 @@
           <a:lstStyle xmlns:a="http://schemas.openxmlformats.org/drawingml/2006/main"/>
           <a:p xmlns:a="http://schemas.openxmlformats.org/drawingml/2006/main">
             <a:r>
-              <a:t>[พูด] ข้อมูลหนึ่งรายการควรเชื่อมกันตั้งแต่โครงการ กิจกรรม ตัวชี้วัด จนถึงหลักฐาน โครงการให้บริบท กิจกรรมบอกว่างานที่ดำเนินการคืออะไร ตัวชี้วัดกำหนดวิธีวัดผล และหลักฐานยืนยันผลที่รายงาน หากเลือกกิจกรรมไม่ตรงกับตัวชี้วัดหรือหลักฐานคนละเรื่อง คะแนนที่ได้จะอธิบายยาก ก่อนกรอกจึงควรอ่านชื่อเกณฑ์และเตรียมข้อมูลที่ตรงกับกิจกรรมจริง</a:t>
+              <a:t>[พูด] เมื่อเปิดรายการแล้ว ลองสังเกตความเชื่อมโยงนะครับ โครงการบอกบริบท กิจกรรมบอกว่างานที่ทำคืออะไร ตัวชี้วัดบอกว่าจะวัดผลแบบไหน และหลักฐานยืนยันผลนั้น ถ้าข้อมูลเหล่านี้ไปคนละทิศ ผู้ประเมินจะอ่านแล้วไม่เห็นภาพครับ เพราะฉะนั้นให้เริ่มจากเลือกกิจกรรมที่ตรงกับงานจริงก่อน แล้วค่อยกรอกเป้าหมายกับผล ต่อไปเราจะดูช่องที่ต้องกรอกกันครับ</a:t>
             </a:r>
           </a:p>
           <a:p xmlns:a="http://schemas.openxmlformats.org/drawingml/2006/main">
@@ -2149,7 +2149,7 @@
           <a:lstStyle xmlns:a="http://schemas.openxmlformats.org/drawingml/2006/main"/>
           <a:p xmlns:a="http://schemas.openxmlformats.org/drawingml/2006/main">
             <a:r>
-              <a:t>[พูด] ในหน้าบันทึกกิจกรรม ให้กรอกสามส่วนหลัก ได้แก่ เป้าหมาย ผลที่ทำได้ และรายละเอียดกิจกรรม เป้าหมายเป็นจุดอ้างอิง ผลที่ทำได้เป็นค่าหรือระดับผลงานจริง และรายละเอียดช่วยอธิบายว่างานเกิดขึ้นอย่างไร หากเกณฑ์อนุญาตให้เพิ่มกิจกรรมหรือโครงการ ควรตั้งชื่อให้จำแนกได้และไม่สร้างรายการซ้ำ จากนั้นตรวจว่าค่าที่กรอกใช้หน่วยเดียวกับเกณฑ์ก่อนให้ระบบคำนวณคะแนน</a:t>
+              <a:t>[พูด] ในหน้าบันทึกกิจกรรม มีสามส่วนที่อยากให้ดูครับ คือเป้าหมาย ผลที่ทำได้ และรายละเอียดกิจกรรม เป้าหมายคือค่าที่ตั้งไว้ ส่วนผลที่ทำได้คือสิ่งที่เกิดขึ้นจริง อย่าสลับสองช่องนี้นะครับ รายละเอียดกิจกรรมควรเขียนสั้น ๆ แต่บอกได้ว่าทำอะไรและเกิดผลอย่างไร เมื่อข้อมูลครบ ระบบจะนำไปคำนวณคะแนน ทีนี้เรามาดูสูตรแบบง่าย ๆ กันครับ</a:t>
             </a:r>
           </a:p>
           <a:p xmlns:a="http://schemas.openxmlformats.org/drawingml/2006/main">
@@ -2237,7 +2237,7 @@
   </p:cSld>
   <p:clrMap bg1="lt1" tx1="dk1" bg2="lt2" tx2="dk2" accent1="accent1" accent2="accent2" accent3="accent3" accent4="accent4" accent5="accent5" accent6="accent6" hlink="hlink" folHlink="folHlink"/>
   <p:sldLayoutIdLst>
-    <p:sldLayoutId xmlns:r="http://schemas.openxmlformats.org/officeDocument/2006/relationships" id="2147483649" r:id="Rcbd3644709174783"/>
+    <p:sldLayoutId xmlns:r="http://schemas.openxmlformats.org/officeDocument/2006/relationships" id="2147483649" r:id="R89a4da2f7d1341ee"/>
   </p:sldLayoutIdLst>
   <p:txStyles>
     <p:titleStyle>
@@ -2792,7 +2792,7 @@
           <p:nvPr/>
         </p:nvPicPr>
         <p:blipFill>
-          <a:blip xmlns:r="http://schemas.openxmlformats.org/officeDocument/2006/relationships" xmlns:a="http://schemas.openxmlformats.org/drawingml/2006/main" r:embed="Rf7c2300932264729"/>
+          <a:blip xmlns:r="http://schemas.openxmlformats.org/officeDocument/2006/relationships" xmlns:a="http://schemas.openxmlformats.org/drawingml/2006/main" r:embed="Rd0dc09e7a2914b94"/>
           <a:srcRect xmlns:a="http://schemas.openxmlformats.org/drawingml/2006/main" l="2579" t="0" r="2579" b="0"/>
           <a:stretch xmlns:a="http://schemas.openxmlformats.org/drawingml/2006/main">
             <a:fillRect l="0" t="0" r="0" b="0"/>
@@ -2813,7 +2813,7 @@
           <p:cNvPr id="2" name="cover-panel">
             <a:extLst xmlns:a="http://schemas.openxmlformats.org/drawingml/2006/main">
               <a:ext uri="{FF2B5EF4-FFF2-40B4-BE49-F238E27FC236}">
-                <a16:creationId xmlns:a16="http://schemas.microsoft.com/office/drawing/2014/main" id="{CE9B90E0-0C35-4EAB-AEDD-5706CC3852AB}"/>
+                <a16:creationId xmlns:a16="http://schemas.microsoft.com/office/drawing/2014/main" id="{8B357B92-4778-49C0-83A8-631EED39A376}"/>
               </a:ext>
             </a:extLst>
           </p:cNvPr>
@@ -2844,7 +2844,7 @@
           <p:cNvPr id="3" name="cover-accent">
             <a:extLst xmlns:a="http://schemas.openxmlformats.org/drawingml/2006/main">
               <a:ext uri="{FF2B5EF4-FFF2-40B4-BE49-F238E27FC236}">
-                <a16:creationId xmlns:a16="http://schemas.microsoft.com/office/drawing/2014/main" id="{292A6790-3B7F-4DB3-A82B-6E906557FC4D}"/>
+                <a16:creationId xmlns:a16="http://schemas.microsoft.com/office/drawing/2014/main" id="{303A0CEA-616D-4642-A5A3-7C0C4BDE568D}"/>
               </a:ext>
             </a:extLst>
           </p:cNvPr>
@@ -2879,7 +2879,7 @@
           <p:nvPr/>
         </p:nvPicPr>
         <p:blipFill>
-          <a:blip xmlns:r="http://schemas.openxmlformats.org/officeDocument/2006/relationships" xmlns:a="http://schemas.openxmlformats.org/drawingml/2006/main" r:embed="R70eb455c0d5044dd"/>
+          <a:blip xmlns:r="http://schemas.openxmlformats.org/officeDocument/2006/relationships" xmlns:a="http://schemas.openxmlformats.org/drawingml/2006/main" r:embed="R9fa24fab74c7447e"/>
           <a:stretch xmlns:a="http://schemas.openxmlformats.org/drawingml/2006/main"/>
         </p:blipFill>
         <p:spPr>
@@ -2897,7 +2897,7 @@
           <p:cNvPr id="5" name="cover-institution">
             <a:extLst xmlns:a="http://schemas.openxmlformats.org/drawingml/2006/main">
               <a:ext uri="{FF2B5EF4-FFF2-40B4-BE49-F238E27FC236}">
-                <a16:creationId xmlns:a16="http://schemas.microsoft.com/office/drawing/2014/main" id="{08A71918-BB2D-43FB-8E57-C2252EBEC628}"/>
+                <a16:creationId xmlns:a16="http://schemas.microsoft.com/office/drawing/2014/main" id="{692C399B-9775-4888-BDA7-3307284F7913}"/>
               </a:ext>
             </a:extLst>
           </p:cNvPr>
@@ -2959,7 +2959,7 @@
           <p:cNvPr id="6" name="cover-session">
             <a:extLst xmlns:a="http://schemas.openxmlformats.org/drawingml/2006/main">
               <a:ext uri="{FF2B5EF4-FFF2-40B4-BE49-F238E27FC236}">
-                <a16:creationId xmlns:a16="http://schemas.microsoft.com/office/drawing/2014/main" id="{E5C434B0-59D4-4C63-B23C-454E97CA7954}"/>
+                <a16:creationId xmlns:a16="http://schemas.microsoft.com/office/drawing/2014/main" id="{401789FB-EE48-401A-A95B-2CBA0843E042}"/>
               </a:ext>
             </a:extLst>
           </p:cNvPr>
@@ -3021,7 +3021,7 @@
           <p:cNvPr id="7" name="cover-title">
             <a:extLst xmlns:a="http://schemas.openxmlformats.org/drawingml/2006/main">
               <a:ext uri="{FF2B5EF4-FFF2-40B4-BE49-F238E27FC236}">
-                <a16:creationId xmlns:a16="http://schemas.microsoft.com/office/drawing/2014/main" id="{E998F6F5-E12A-4205-A364-3CC7086F34FF}"/>
+                <a16:creationId xmlns:a16="http://schemas.microsoft.com/office/drawing/2014/main" id="{ABABF8B7-0B6F-4587-A8CB-62B9CEC6877B}"/>
               </a:ext>
             </a:extLst>
           </p:cNvPr>
@@ -3110,7 +3110,7 @@
           <p:cNvPr id="8" name="cover-gold-rule">
             <a:extLst xmlns:a="http://schemas.openxmlformats.org/drawingml/2006/main">
               <a:ext uri="{FF2B5EF4-FFF2-40B4-BE49-F238E27FC236}">
-                <a16:creationId xmlns:a16="http://schemas.microsoft.com/office/drawing/2014/main" id="{2309B7D8-4905-4993-BBE1-43D4C9156FEF}"/>
+                <a16:creationId xmlns:a16="http://schemas.microsoft.com/office/drawing/2014/main" id="{0D55ACFF-DAE1-444C-852D-B989D356784C}"/>
               </a:ext>
             </a:extLst>
           </p:cNvPr>
@@ -3141,7 +3141,7 @@
           <p:cNvPr id="9" name="cover-promise">
             <a:extLst xmlns:a="http://schemas.openxmlformats.org/drawingml/2006/main">
               <a:ext uri="{FF2B5EF4-FFF2-40B4-BE49-F238E27FC236}">
-                <a16:creationId xmlns:a16="http://schemas.microsoft.com/office/drawing/2014/main" id="{E77EE40F-52B5-46E1-BC75-97399B8D2F6E}"/>
+                <a16:creationId xmlns:a16="http://schemas.microsoft.com/office/drawing/2014/main" id="{0C409219-657C-4CE0-87BC-C8F42A65EA49}"/>
               </a:ext>
             </a:extLst>
           </p:cNvPr>
@@ -3203,7 +3203,7 @@
           <p:cNvPr id="10" name="cover-style">
             <a:extLst xmlns:a="http://schemas.openxmlformats.org/drawingml/2006/main">
               <a:ext uri="{FF2B5EF4-FFF2-40B4-BE49-F238E27FC236}">
-                <a16:creationId xmlns:a16="http://schemas.microsoft.com/office/drawing/2014/main" id="{4C91B7F7-3263-43DE-97FF-41267DFDAC1D}"/>
+                <a16:creationId xmlns:a16="http://schemas.microsoft.com/office/drawing/2014/main" id="{1AA10D42-79A5-4B7F-A9FC-4ADBAB0E4B24}"/>
               </a:ext>
             </a:extLst>
           </p:cNvPr>
@@ -3269,7 +3269,7 @@
           <p:nvPr/>
         </p:nvPicPr>
         <p:blipFill>
-          <a:blip xmlns:r="http://schemas.openxmlformats.org/officeDocument/2006/relationships" xmlns:a="http://schemas.openxmlformats.org/drawingml/2006/main" r:embed="Rb733015e7eb94404"/>
+          <a:blip xmlns:r="http://schemas.openxmlformats.org/officeDocument/2006/relationships" xmlns:a="http://schemas.openxmlformats.org/drawingml/2006/main" r:embed="R85e800ffc6564035"/>
           <a:stretch xmlns:a="http://schemas.openxmlformats.org/drawingml/2006/main"/>
         </p:blipFill>
         <p:spPr>
@@ -3285,7 +3285,7 @@
     </p:spTree>
     <p:extLst>
       <p:ext uri="{BB962C8B-B14F-4D97-AF65-F5344CB8AC3E}">
-        <p14:creationId xmlns:p14="http://schemas.microsoft.com/office/powerpoint/2010/main" val="1774334791"/>
+        <p14:creationId xmlns:p14="http://schemas.microsoft.com/office/powerpoint/2010/main" val="1706007902"/>
       </p:ext>
     </p:extLst>
   </p:cSld>
@@ -3316,7 +3316,7 @@
           <p:cNvPr id="15" name="side-accent-10">
             <a:extLst xmlns:a="http://schemas.openxmlformats.org/drawingml/2006/main">
               <a:ext uri="{FF2B5EF4-FFF2-40B4-BE49-F238E27FC236}">
-                <a16:creationId xmlns:a16="http://schemas.microsoft.com/office/drawing/2014/main" id="{CC724193-EC4C-47BD-87CF-C5E47E2B25A1}"/>
+                <a16:creationId xmlns:a16="http://schemas.microsoft.com/office/drawing/2014/main" id="{203397CC-49E3-4BB6-8137-1F86F099A76A}"/>
               </a:ext>
             </a:extLst>
           </p:cNvPr>
@@ -3347,7 +3347,7 @@
           <p:cNvPr id="2" name="kicker-10">
             <a:extLst xmlns:a="http://schemas.openxmlformats.org/drawingml/2006/main">
               <a:ext uri="{FF2B5EF4-FFF2-40B4-BE49-F238E27FC236}">
-                <a16:creationId xmlns:a16="http://schemas.microsoft.com/office/drawing/2014/main" id="{BFCE77BD-2AF0-4324-8745-E331EEE64AFC}"/>
+                <a16:creationId xmlns:a16="http://schemas.microsoft.com/office/drawing/2014/main" id="{41AF05DF-FCEC-4F12-9EC5-1C71882CF13B}"/>
               </a:ext>
             </a:extLst>
           </p:cNvPr>
@@ -3409,7 +3409,7 @@
           <p:cNvPr id="3" name="title-10">
             <a:extLst xmlns:a="http://schemas.openxmlformats.org/drawingml/2006/main">
               <a:ext uri="{FF2B5EF4-FFF2-40B4-BE49-F238E27FC236}">
-                <a16:creationId xmlns:a16="http://schemas.microsoft.com/office/drawing/2014/main" id="{1B7DB688-ACD5-4591-909D-9484B3124436}"/>
+                <a16:creationId xmlns:a16="http://schemas.microsoft.com/office/drawing/2014/main" id="{44D3D773-43B2-427A-9B94-AA2ACE942061}"/>
               </a:ext>
             </a:extLst>
           </p:cNvPr>
@@ -3471,7 +3471,7 @@
           <p:cNvPr id="4" name="">
             <a:extLst xmlns:a="http://schemas.openxmlformats.org/drawingml/2006/main">
               <a:ext uri="{FF2B5EF4-FFF2-40B4-BE49-F238E27FC236}">
-                <a16:creationId xmlns:a16="http://schemas.microsoft.com/office/drawing/2014/main" id="{9FB08093-042B-459A-9BC1-79BFA7B9EFC6}"/>
+                <a16:creationId xmlns:a16="http://schemas.microsoft.com/office/drawing/2014/main" id="{3BEB4541-92B5-489A-AE43-96485999C542}"/>
               </a:ext>
             </a:extLst>
           </p:cNvPr>
@@ -3533,7 +3533,7 @@
           <p:cNvPr id="5" name="">
             <a:extLst xmlns:a="http://schemas.openxmlformats.org/drawingml/2006/main">
               <a:ext uri="{FF2B5EF4-FFF2-40B4-BE49-F238E27FC236}">
-                <a16:creationId xmlns:a16="http://schemas.microsoft.com/office/drawing/2014/main" id="{277F7A7C-AB4F-4F16-B0D7-3DC73F9321F4}"/>
+                <a16:creationId xmlns:a16="http://schemas.microsoft.com/office/drawing/2014/main" id="{E5DE816E-7B23-477B-9FDA-AC1D177B8309}"/>
               </a:ext>
             </a:extLst>
           </p:cNvPr>
@@ -3595,7 +3595,7 @@
           <p:cNvPr id="6" name="">
             <a:extLst xmlns:a="http://schemas.openxmlformats.org/drawingml/2006/main">
               <a:ext uri="{FF2B5EF4-FFF2-40B4-BE49-F238E27FC236}">
-                <a16:creationId xmlns:a16="http://schemas.microsoft.com/office/drawing/2014/main" id="{07EE3AA4-61C1-4E81-8EB0-B772847E3552}"/>
+                <a16:creationId xmlns:a16="http://schemas.microsoft.com/office/drawing/2014/main" id="{49F0874C-1A1A-4E67-A920-A625AF544AFF}"/>
               </a:ext>
             </a:extLst>
           </p:cNvPr>
@@ -3663,7 +3663,7 @@
           <p:cNvPr id="7" name="">
             <a:extLst xmlns:a="http://schemas.openxmlformats.org/drawingml/2006/main">
               <a:ext uri="{FF2B5EF4-FFF2-40B4-BE49-F238E27FC236}">
-                <a16:creationId xmlns:a16="http://schemas.microsoft.com/office/drawing/2014/main" id="{5D7204E7-C8E1-440D-B666-A067484278C9}"/>
+                <a16:creationId xmlns:a16="http://schemas.microsoft.com/office/drawing/2014/main" id="{D214B907-65FA-42BD-8E48-BBD3CBF7FA84}"/>
               </a:ext>
             </a:extLst>
           </p:cNvPr>
@@ -3725,7 +3725,7 @@
           <p:cNvPr id="8" name="">
             <a:extLst xmlns:a="http://schemas.openxmlformats.org/drawingml/2006/main">
               <a:ext uri="{FF2B5EF4-FFF2-40B4-BE49-F238E27FC236}">
-                <a16:creationId xmlns:a16="http://schemas.microsoft.com/office/drawing/2014/main" id="{884561C0-7047-4537-AC68-A2D2EDF2A064}"/>
+                <a16:creationId xmlns:a16="http://schemas.microsoft.com/office/drawing/2014/main" id="{CB19D7B1-D2FF-46E6-A810-93F80E5D90AB}"/>
               </a:ext>
             </a:extLst>
           </p:cNvPr>
@@ -3793,7 +3793,7 @@
           <p:cNvPr id="9" name="">
             <a:extLst xmlns:a="http://schemas.openxmlformats.org/drawingml/2006/main">
               <a:ext uri="{FF2B5EF4-FFF2-40B4-BE49-F238E27FC236}">
-                <a16:creationId xmlns:a16="http://schemas.microsoft.com/office/drawing/2014/main" id="{300F326F-C64C-4FAD-8836-D4B8952C350E}"/>
+                <a16:creationId xmlns:a16="http://schemas.microsoft.com/office/drawing/2014/main" id="{C179AFD8-CEB9-4D51-A8E8-7F05CBDCA49E}"/>
               </a:ext>
             </a:extLst>
           </p:cNvPr>
@@ -3824,7 +3824,7 @@
           <p:cNvPr id="10" name="">
             <a:extLst xmlns:a="http://schemas.openxmlformats.org/drawingml/2006/main">
               <a:ext uri="{FF2B5EF4-FFF2-40B4-BE49-F238E27FC236}">
-                <a16:creationId xmlns:a16="http://schemas.microsoft.com/office/drawing/2014/main" id="{41656A1B-8BF0-4EF9-844C-DFF33054248A}"/>
+                <a16:creationId xmlns:a16="http://schemas.microsoft.com/office/drawing/2014/main" id="{09F7B664-48D0-4253-A572-E9D897188E86}"/>
               </a:ext>
             </a:extLst>
           </p:cNvPr>
@@ -3886,7 +3886,7 @@
           <p:cNvPr id="11" name="">
             <a:extLst xmlns:a="http://schemas.openxmlformats.org/drawingml/2006/main">
               <a:ext uri="{FF2B5EF4-FFF2-40B4-BE49-F238E27FC236}">
-                <a16:creationId xmlns:a16="http://schemas.microsoft.com/office/drawing/2014/main" id="{BCCC99D7-243A-4962-A158-3057DDDF5702}"/>
+                <a16:creationId xmlns:a16="http://schemas.microsoft.com/office/drawing/2014/main" id="{38E5BE55-A182-4D0E-A24E-27F8EB1C1022}"/>
               </a:ext>
             </a:extLst>
           </p:cNvPr>
@@ -3948,7 +3948,7 @@
           <p:cNvPr id="12" name="footer-rule-10">
             <a:extLst xmlns:a="http://schemas.openxmlformats.org/drawingml/2006/main">
               <a:ext uri="{FF2B5EF4-FFF2-40B4-BE49-F238E27FC236}">
-                <a16:creationId xmlns:a16="http://schemas.microsoft.com/office/drawing/2014/main" id="{A9D35C87-6DBB-4CB8-AE8B-726B461446C2}"/>
+                <a16:creationId xmlns:a16="http://schemas.microsoft.com/office/drawing/2014/main" id="{8BA55BD5-0AD0-4B44-BD86-E80EFBC1AA81}"/>
               </a:ext>
             </a:extLst>
           </p:cNvPr>
@@ -3979,7 +3979,7 @@
           <p:cNvPr id="13" name="footer-label-10">
             <a:extLst xmlns:a="http://schemas.openxmlformats.org/drawingml/2006/main">
               <a:ext uri="{FF2B5EF4-FFF2-40B4-BE49-F238E27FC236}">
-                <a16:creationId xmlns:a16="http://schemas.microsoft.com/office/drawing/2014/main" id="{CC2C56F2-84C4-47FD-9D9E-E36326978021}"/>
+                <a16:creationId xmlns:a16="http://schemas.microsoft.com/office/drawing/2014/main" id="{EC49EA7D-CC93-46AC-8305-59F76583AF79}"/>
               </a:ext>
             </a:extLst>
           </p:cNvPr>
@@ -4041,7 +4041,7 @@
           <p:cNvPr id="14" name="footer-page-10">
             <a:extLst xmlns:a="http://schemas.openxmlformats.org/drawingml/2006/main">
               <a:ext uri="{FF2B5EF4-FFF2-40B4-BE49-F238E27FC236}">
-                <a16:creationId xmlns:a16="http://schemas.microsoft.com/office/drawing/2014/main" id="{63BBF5AD-A86B-4D23-ABBB-1B8AE538D137}"/>
+                <a16:creationId xmlns:a16="http://schemas.microsoft.com/office/drawing/2014/main" id="{D79973A6-56EF-4442-9D20-3951678D39C6}"/>
               </a:ext>
             </a:extLst>
           </p:cNvPr>
@@ -4101,7 +4101,7 @@
     </p:spTree>
     <p:extLst>
       <p:ext uri="{BB962C8B-B14F-4D97-AF65-F5344CB8AC3E}">
-        <p14:creationId xmlns:p14="http://schemas.microsoft.com/office/powerpoint/2010/main" val="604249554"/>
+        <p14:creationId xmlns:p14="http://schemas.microsoft.com/office/powerpoint/2010/main" val="557179271"/>
       </p:ext>
     </p:extLst>
   </p:cSld>
@@ -4132,7 +4132,7 @@
           <p:cNvPr id="17" name="side-accent-11">
             <a:extLst xmlns:a="http://schemas.openxmlformats.org/drawingml/2006/main">
               <a:ext uri="{FF2B5EF4-FFF2-40B4-BE49-F238E27FC236}">
-                <a16:creationId xmlns:a16="http://schemas.microsoft.com/office/drawing/2014/main" id="{FBB677B8-D4E4-4832-8BB7-03503DB16A38}"/>
+                <a16:creationId xmlns:a16="http://schemas.microsoft.com/office/drawing/2014/main" id="{F2CD13B1-5189-463D-AE3C-A2D8E00C7A7F}"/>
               </a:ext>
             </a:extLst>
           </p:cNvPr>
@@ -4163,7 +4163,7 @@
           <p:cNvPr id="2" name="kicker-11">
             <a:extLst xmlns:a="http://schemas.openxmlformats.org/drawingml/2006/main">
               <a:ext uri="{FF2B5EF4-FFF2-40B4-BE49-F238E27FC236}">
-                <a16:creationId xmlns:a16="http://schemas.microsoft.com/office/drawing/2014/main" id="{BF19C2EC-1193-4061-9991-1E401E632F65}"/>
+                <a16:creationId xmlns:a16="http://schemas.microsoft.com/office/drawing/2014/main" id="{20B72C08-980C-4A1B-9FCE-0E6E097ABA63}"/>
               </a:ext>
             </a:extLst>
           </p:cNvPr>
@@ -4225,7 +4225,7 @@
           <p:cNvPr id="3" name="title-11">
             <a:extLst xmlns:a="http://schemas.openxmlformats.org/drawingml/2006/main">
               <a:ext uri="{FF2B5EF4-FFF2-40B4-BE49-F238E27FC236}">
-                <a16:creationId xmlns:a16="http://schemas.microsoft.com/office/drawing/2014/main" id="{814F4D21-C226-450E-9CE2-937C642EB5A4}"/>
+                <a16:creationId xmlns:a16="http://schemas.microsoft.com/office/drawing/2014/main" id="{A7FE3D4E-BE97-42C5-B616-7D3B190B160C}"/>
               </a:ext>
             </a:extLst>
           </p:cNvPr>
@@ -4287,7 +4287,7 @@
           <p:cNvPr id="4" name="">
             <a:extLst xmlns:a="http://schemas.openxmlformats.org/drawingml/2006/main">
               <a:ext uri="{FF2B5EF4-FFF2-40B4-BE49-F238E27FC236}">
-                <a16:creationId xmlns:a16="http://schemas.microsoft.com/office/drawing/2014/main" id="{B1BC19BE-2D22-4DB1-ACE2-EAE921ADB0C4}"/>
+                <a16:creationId xmlns:a16="http://schemas.microsoft.com/office/drawing/2014/main" id="{5C85C058-C251-4E19-83C1-C5E5AE957D2A}"/>
               </a:ext>
             </a:extLst>
           </p:cNvPr>
@@ -4322,7 +4322,7 @@
           <p:cNvPr id="5" name="">
             <a:extLst xmlns:a="http://schemas.openxmlformats.org/drawingml/2006/main">
               <a:ext uri="{FF2B5EF4-FFF2-40B4-BE49-F238E27FC236}">
-                <a16:creationId xmlns:a16="http://schemas.microsoft.com/office/drawing/2014/main" id="{4B26F951-AE7D-42B0-B1A0-594A8DFC6A4C}"/>
+                <a16:creationId xmlns:a16="http://schemas.microsoft.com/office/drawing/2014/main" id="{101F62EF-E8DA-4A4D-8C5D-28E584F5D29C}"/>
               </a:ext>
             </a:extLst>
           </p:cNvPr>
@@ -4384,7 +4384,7 @@
           <p:cNvPr id="6" name="">
             <a:extLst xmlns:a="http://schemas.openxmlformats.org/drawingml/2006/main">
               <a:ext uri="{FF2B5EF4-FFF2-40B4-BE49-F238E27FC236}">
-                <a16:creationId xmlns:a16="http://schemas.microsoft.com/office/drawing/2014/main" id="{70B05982-3942-477F-B7B3-CFEBBB3F6C3F}"/>
+                <a16:creationId xmlns:a16="http://schemas.microsoft.com/office/drawing/2014/main" id="{2DBE3FC1-507D-41A3-914F-746E9D905F4B}"/>
               </a:ext>
             </a:extLst>
           </p:cNvPr>
@@ -4446,7 +4446,7 @@
           <p:cNvPr id="7" name="">
             <a:extLst xmlns:a="http://schemas.openxmlformats.org/drawingml/2006/main">
               <a:ext uri="{FF2B5EF4-FFF2-40B4-BE49-F238E27FC236}">
-                <a16:creationId xmlns:a16="http://schemas.microsoft.com/office/drawing/2014/main" id="{91E92893-D1F2-4650-AF96-E6799BFDC252}"/>
+                <a16:creationId xmlns:a16="http://schemas.microsoft.com/office/drawing/2014/main" id="{09F880A1-02A1-4E7E-9001-A15892A652A9}"/>
               </a:ext>
             </a:extLst>
           </p:cNvPr>
@@ -4481,7 +4481,7 @@
           <p:cNvPr id="8" name="">
             <a:extLst xmlns:a="http://schemas.openxmlformats.org/drawingml/2006/main">
               <a:ext uri="{FF2B5EF4-FFF2-40B4-BE49-F238E27FC236}">
-                <a16:creationId xmlns:a16="http://schemas.microsoft.com/office/drawing/2014/main" id="{6CCE43A2-BCCC-4064-AD39-823AB903BE6E}"/>
+                <a16:creationId xmlns:a16="http://schemas.microsoft.com/office/drawing/2014/main" id="{1FFDB4FB-B69B-4FCC-B0EC-98175CCE8AC5}"/>
               </a:ext>
             </a:extLst>
           </p:cNvPr>
@@ -4543,7 +4543,7 @@
           <p:cNvPr id="9" name="">
             <a:extLst xmlns:a="http://schemas.openxmlformats.org/drawingml/2006/main">
               <a:ext uri="{FF2B5EF4-FFF2-40B4-BE49-F238E27FC236}">
-                <a16:creationId xmlns:a16="http://schemas.microsoft.com/office/drawing/2014/main" id="{D3F0B2F4-1382-4AFC-9C40-769FA753CD0A}"/>
+                <a16:creationId xmlns:a16="http://schemas.microsoft.com/office/drawing/2014/main" id="{12037AD3-4359-4FFB-9EC8-C057122C3DBD}"/>
               </a:ext>
             </a:extLst>
           </p:cNvPr>
@@ -4605,7 +4605,7 @@
           <p:cNvPr id="10" name="">
             <a:extLst xmlns:a="http://schemas.openxmlformats.org/drawingml/2006/main">
               <a:ext uri="{FF2B5EF4-FFF2-40B4-BE49-F238E27FC236}">
-                <a16:creationId xmlns:a16="http://schemas.microsoft.com/office/drawing/2014/main" id="{95D31805-5122-40EB-BE8F-CD58115470B4}"/>
+                <a16:creationId xmlns:a16="http://schemas.microsoft.com/office/drawing/2014/main" id="{1650E6C1-7176-442B-B631-DFCC788372A4}"/>
               </a:ext>
             </a:extLst>
           </p:cNvPr>
@@ -4640,7 +4640,7 @@
           <p:cNvPr id="11" name="">
             <a:extLst xmlns:a="http://schemas.openxmlformats.org/drawingml/2006/main">
               <a:ext uri="{FF2B5EF4-FFF2-40B4-BE49-F238E27FC236}">
-                <a16:creationId xmlns:a16="http://schemas.microsoft.com/office/drawing/2014/main" id="{63C77D70-E647-4AD7-8BFD-3AD42DAC5459}"/>
+                <a16:creationId xmlns:a16="http://schemas.microsoft.com/office/drawing/2014/main" id="{5C756C90-1F08-4E82-B3E6-F5182C4B9004}"/>
               </a:ext>
             </a:extLst>
           </p:cNvPr>
@@ -4702,7 +4702,7 @@
           <p:cNvPr id="12" name="">
             <a:extLst xmlns:a="http://schemas.openxmlformats.org/drawingml/2006/main">
               <a:ext uri="{FF2B5EF4-FFF2-40B4-BE49-F238E27FC236}">
-                <a16:creationId xmlns:a16="http://schemas.microsoft.com/office/drawing/2014/main" id="{15D98BF3-E8AD-4058-AE03-787B1F75CE0A}"/>
+                <a16:creationId xmlns:a16="http://schemas.microsoft.com/office/drawing/2014/main" id="{4B5DCD84-B201-4E6A-AFE0-1333FB83D510}"/>
               </a:ext>
             </a:extLst>
           </p:cNvPr>
@@ -4764,7 +4764,7 @@
           <p:cNvPr id="13" name="">
             <a:extLst xmlns:a="http://schemas.openxmlformats.org/drawingml/2006/main">
               <a:ext uri="{FF2B5EF4-FFF2-40B4-BE49-F238E27FC236}">
-                <a16:creationId xmlns:a16="http://schemas.microsoft.com/office/drawing/2014/main" id="{9BD38511-6D3F-409B-B090-3BF9EE9428D0}"/>
+                <a16:creationId xmlns:a16="http://schemas.microsoft.com/office/drawing/2014/main" id="{97E56381-62ED-416D-9B03-238EC404F125}"/>
               </a:ext>
             </a:extLst>
           </p:cNvPr>
@@ -4826,7 +4826,7 @@
           <p:cNvPr id="14" name="footer-rule-11">
             <a:extLst xmlns:a="http://schemas.openxmlformats.org/drawingml/2006/main">
               <a:ext uri="{FF2B5EF4-FFF2-40B4-BE49-F238E27FC236}">
-                <a16:creationId xmlns:a16="http://schemas.microsoft.com/office/drawing/2014/main" id="{F136B699-62AA-4B57-9148-CAE8FE586405}"/>
+                <a16:creationId xmlns:a16="http://schemas.microsoft.com/office/drawing/2014/main" id="{84F54EB3-F4D1-4496-B22F-B1DC8153E5BA}"/>
               </a:ext>
             </a:extLst>
           </p:cNvPr>
@@ -4857,7 +4857,7 @@
           <p:cNvPr id="15" name="footer-label-11">
             <a:extLst xmlns:a="http://schemas.openxmlformats.org/drawingml/2006/main">
               <a:ext uri="{FF2B5EF4-FFF2-40B4-BE49-F238E27FC236}">
-                <a16:creationId xmlns:a16="http://schemas.microsoft.com/office/drawing/2014/main" id="{ACCCECA2-3CD7-4CBE-B373-FDB7E993BB47}"/>
+                <a16:creationId xmlns:a16="http://schemas.microsoft.com/office/drawing/2014/main" id="{2E1113A6-508C-4A79-8FE5-E0138117E96A}"/>
               </a:ext>
             </a:extLst>
           </p:cNvPr>
@@ -4919,7 +4919,7 @@
           <p:cNvPr id="16" name="footer-page-11">
             <a:extLst xmlns:a="http://schemas.openxmlformats.org/drawingml/2006/main">
               <a:ext uri="{FF2B5EF4-FFF2-40B4-BE49-F238E27FC236}">
-                <a16:creationId xmlns:a16="http://schemas.microsoft.com/office/drawing/2014/main" id="{1CE9A10D-FB1E-4ED3-8BA5-809FBD8D4591}"/>
+                <a16:creationId xmlns:a16="http://schemas.microsoft.com/office/drawing/2014/main" id="{058CAF0A-1383-480D-ACD7-360BF640C7AB}"/>
               </a:ext>
             </a:extLst>
           </p:cNvPr>
@@ -4979,7 +4979,7 @@
     </p:spTree>
     <p:extLst>
       <p:ext uri="{BB962C8B-B14F-4D97-AF65-F5344CB8AC3E}">
-        <p14:creationId xmlns:p14="http://schemas.microsoft.com/office/powerpoint/2010/main" val="1006307540"/>
+        <p14:creationId xmlns:p14="http://schemas.microsoft.com/office/powerpoint/2010/main" val="1873640644"/>
       </p:ext>
     </p:extLst>
   </p:cSld>
@@ -5010,7 +5010,7 @@
           <p:cNvPr id="22" name="side-accent-12">
             <a:extLst xmlns:a="http://schemas.openxmlformats.org/drawingml/2006/main">
               <a:ext uri="{FF2B5EF4-FFF2-40B4-BE49-F238E27FC236}">
-                <a16:creationId xmlns:a16="http://schemas.microsoft.com/office/drawing/2014/main" id="{4DF429B4-1D20-4710-90E6-A3486ABC8A2B}"/>
+                <a16:creationId xmlns:a16="http://schemas.microsoft.com/office/drawing/2014/main" id="{DF3F063A-FBB8-4168-AF1B-C168259D5FCE}"/>
               </a:ext>
             </a:extLst>
           </p:cNvPr>
@@ -5041,7 +5041,7 @@
           <p:cNvPr id="2" name="kicker-12">
             <a:extLst xmlns:a="http://schemas.openxmlformats.org/drawingml/2006/main">
               <a:ext uri="{FF2B5EF4-FFF2-40B4-BE49-F238E27FC236}">
-                <a16:creationId xmlns:a16="http://schemas.microsoft.com/office/drawing/2014/main" id="{51D2FB96-5501-479F-A453-F40C80DD4AD2}"/>
+                <a16:creationId xmlns:a16="http://schemas.microsoft.com/office/drawing/2014/main" id="{8E99DD77-C9C4-4B7E-A2CB-15E648A9BF19}"/>
               </a:ext>
             </a:extLst>
           </p:cNvPr>
@@ -5103,7 +5103,7 @@
           <p:cNvPr id="3" name="title-12">
             <a:extLst xmlns:a="http://schemas.openxmlformats.org/drawingml/2006/main">
               <a:ext uri="{FF2B5EF4-FFF2-40B4-BE49-F238E27FC236}">
-                <a16:creationId xmlns:a16="http://schemas.microsoft.com/office/drawing/2014/main" id="{558B5FA4-1E43-457B-83B7-20C919376B48}"/>
+                <a16:creationId xmlns:a16="http://schemas.microsoft.com/office/drawing/2014/main" id="{5E4070FF-6345-4412-9A28-8655B90F1177}"/>
               </a:ext>
             </a:extLst>
           </p:cNvPr>
@@ -5165,7 +5165,7 @@
           <p:cNvPr id="4" name="">
             <a:extLst xmlns:a="http://schemas.openxmlformats.org/drawingml/2006/main">
               <a:ext uri="{FF2B5EF4-FFF2-40B4-BE49-F238E27FC236}">
-                <a16:creationId xmlns:a16="http://schemas.microsoft.com/office/drawing/2014/main" id="{9BFBC40F-5693-4BE6-B9FC-4E57684C8113}"/>
+                <a16:creationId xmlns:a16="http://schemas.microsoft.com/office/drawing/2014/main" id="{4F2221B8-EFB9-424B-8996-5C9A59619BC4}"/>
               </a:ext>
             </a:extLst>
           </p:cNvPr>
@@ -5227,7 +5227,7 @@
           <p:cNvPr id="5" name="">
             <a:extLst xmlns:a="http://schemas.openxmlformats.org/drawingml/2006/main">
               <a:ext uri="{FF2B5EF4-FFF2-40B4-BE49-F238E27FC236}">
-                <a16:creationId xmlns:a16="http://schemas.microsoft.com/office/drawing/2014/main" id="{03B2BC5E-D5C8-4D00-8FE1-0CAA80BAF0E9}"/>
+                <a16:creationId xmlns:a16="http://schemas.microsoft.com/office/drawing/2014/main" id="{BEED0731-F624-46AB-8334-0BD8C21EA39D}"/>
               </a:ext>
             </a:extLst>
           </p:cNvPr>
@@ -5258,7 +5258,7 @@
           <p:cNvPr id="6" name="">
             <a:extLst xmlns:a="http://schemas.openxmlformats.org/drawingml/2006/main">
               <a:ext uri="{FF2B5EF4-FFF2-40B4-BE49-F238E27FC236}">
-                <a16:creationId xmlns:a16="http://schemas.microsoft.com/office/drawing/2014/main" id="{8C086F13-03C6-4923-A0A7-37556FD0E33B}"/>
+                <a16:creationId xmlns:a16="http://schemas.microsoft.com/office/drawing/2014/main" id="{8C61E800-BC37-41C1-BAB8-7BCE474EF5CE}"/>
               </a:ext>
             </a:extLst>
           </p:cNvPr>
@@ -5320,7 +5320,7 @@
           <p:cNvPr id="7" name="">
             <a:extLst xmlns:a="http://schemas.openxmlformats.org/drawingml/2006/main">
               <a:ext uri="{FF2B5EF4-FFF2-40B4-BE49-F238E27FC236}">
-                <a16:creationId xmlns:a16="http://schemas.microsoft.com/office/drawing/2014/main" id="{7C1D2384-AC7A-49E9-AE75-4FB2896FD53E}"/>
+                <a16:creationId xmlns:a16="http://schemas.microsoft.com/office/drawing/2014/main" id="{F37021A1-CDEE-4AE0-84C0-D0144B2CEAC7}"/>
               </a:ext>
             </a:extLst>
           </p:cNvPr>
@@ -5382,7 +5382,7 @@
           <p:cNvPr id="8" name="">
             <a:extLst xmlns:a="http://schemas.openxmlformats.org/drawingml/2006/main">
               <a:ext uri="{FF2B5EF4-FFF2-40B4-BE49-F238E27FC236}">
-                <a16:creationId xmlns:a16="http://schemas.microsoft.com/office/drawing/2014/main" id="{FC659F64-48F6-475A-BA97-99727E0A0323}"/>
+                <a16:creationId xmlns:a16="http://schemas.microsoft.com/office/drawing/2014/main" id="{37F428A3-DF88-41A0-B997-952157311D56}"/>
               </a:ext>
             </a:extLst>
           </p:cNvPr>
@@ -5444,7 +5444,7 @@
           <p:cNvPr id="9" name="">
             <a:extLst xmlns:a="http://schemas.openxmlformats.org/drawingml/2006/main">
               <a:ext uri="{FF2B5EF4-FFF2-40B4-BE49-F238E27FC236}">
-                <a16:creationId xmlns:a16="http://schemas.microsoft.com/office/drawing/2014/main" id="{C632D1F8-7940-4C86-8557-B23D4AC3B62E}"/>
+                <a16:creationId xmlns:a16="http://schemas.microsoft.com/office/drawing/2014/main" id="{AFF3505D-63FD-45C2-8BDB-63585445B36F}"/>
               </a:ext>
             </a:extLst>
           </p:cNvPr>
@@ -5475,7 +5475,7 @@
           <p:cNvPr id="10" name="">
             <a:extLst xmlns:a="http://schemas.openxmlformats.org/drawingml/2006/main">
               <a:ext uri="{FF2B5EF4-FFF2-40B4-BE49-F238E27FC236}">
-                <a16:creationId xmlns:a16="http://schemas.microsoft.com/office/drawing/2014/main" id="{CCF5B4F7-E92E-4BD9-8BE0-12E1AD69EDB1}"/>
+                <a16:creationId xmlns:a16="http://schemas.microsoft.com/office/drawing/2014/main" id="{68C7591C-7FEA-4616-BA9D-7253DA3505E1}"/>
               </a:ext>
             </a:extLst>
           </p:cNvPr>
@@ -5537,7 +5537,7 @@
           <p:cNvPr id="11" name="">
             <a:extLst xmlns:a="http://schemas.openxmlformats.org/drawingml/2006/main">
               <a:ext uri="{FF2B5EF4-FFF2-40B4-BE49-F238E27FC236}">
-                <a16:creationId xmlns:a16="http://schemas.microsoft.com/office/drawing/2014/main" id="{B6055932-4970-467C-86D6-3B81B7533695}"/>
+                <a16:creationId xmlns:a16="http://schemas.microsoft.com/office/drawing/2014/main" id="{C206E57E-2A0B-450C-965C-FF42C57C513C}"/>
               </a:ext>
             </a:extLst>
           </p:cNvPr>
@@ -5599,7 +5599,7 @@
           <p:cNvPr id="12" name="">
             <a:extLst xmlns:a="http://schemas.openxmlformats.org/drawingml/2006/main">
               <a:ext uri="{FF2B5EF4-FFF2-40B4-BE49-F238E27FC236}">
-                <a16:creationId xmlns:a16="http://schemas.microsoft.com/office/drawing/2014/main" id="{F619741C-D3CD-4532-AD58-FA953EC040C0}"/>
+                <a16:creationId xmlns:a16="http://schemas.microsoft.com/office/drawing/2014/main" id="{2198162F-52AE-424C-930C-E22C1C8D9C8F}"/>
               </a:ext>
             </a:extLst>
           </p:cNvPr>
@@ -5661,7 +5661,7 @@
           <p:cNvPr id="13" name="">
             <a:extLst xmlns:a="http://schemas.openxmlformats.org/drawingml/2006/main">
               <a:ext uri="{FF2B5EF4-FFF2-40B4-BE49-F238E27FC236}">
-                <a16:creationId xmlns:a16="http://schemas.microsoft.com/office/drawing/2014/main" id="{26A626C4-292F-456F-AC4B-8A386484FE8E}"/>
+                <a16:creationId xmlns:a16="http://schemas.microsoft.com/office/drawing/2014/main" id="{41D8F470-FA8C-4307-B8F2-495D5B06A174}"/>
               </a:ext>
             </a:extLst>
           </p:cNvPr>
@@ -5692,7 +5692,7 @@
           <p:cNvPr id="14" name="">
             <a:extLst xmlns:a="http://schemas.openxmlformats.org/drawingml/2006/main">
               <a:ext uri="{FF2B5EF4-FFF2-40B4-BE49-F238E27FC236}">
-                <a16:creationId xmlns:a16="http://schemas.microsoft.com/office/drawing/2014/main" id="{F35C91CA-4478-4B3C-9F24-3D6377DC0468}"/>
+                <a16:creationId xmlns:a16="http://schemas.microsoft.com/office/drawing/2014/main" id="{44C816E4-4EC2-419D-AA14-27A05F78D397}"/>
               </a:ext>
             </a:extLst>
           </p:cNvPr>
@@ -5754,7 +5754,7 @@
           <p:cNvPr id="15" name="">
             <a:extLst xmlns:a="http://schemas.openxmlformats.org/drawingml/2006/main">
               <a:ext uri="{FF2B5EF4-FFF2-40B4-BE49-F238E27FC236}">
-                <a16:creationId xmlns:a16="http://schemas.microsoft.com/office/drawing/2014/main" id="{6296F2FB-5A7C-4EBC-8A91-DE60EDB3128C}"/>
+                <a16:creationId xmlns:a16="http://schemas.microsoft.com/office/drawing/2014/main" id="{59728723-2AC5-4F27-B640-D513F1928239}"/>
               </a:ext>
             </a:extLst>
           </p:cNvPr>
@@ -5816,7 +5816,7 @@
           <p:cNvPr id="16" name="">
             <a:extLst xmlns:a="http://schemas.openxmlformats.org/drawingml/2006/main">
               <a:ext uri="{FF2B5EF4-FFF2-40B4-BE49-F238E27FC236}">
-                <a16:creationId xmlns:a16="http://schemas.microsoft.com/office/drawing/2014/main" id="{61C9529E-0E6C-403A-9520-57F21B21AB80}"/>
+                <a16:creationId xmlns:a16="http://schemas.microsoft.com/office/drawing/2014/main" id="{82D8CBA8-5E0F-4C93-B7DC-5897863EA904}"/>
               </a:ext>
             </a:extLst>
           </p:cNvPr>
@@ -5878,7 +5878,7 @@
           <p:cNvPr id="17" name="">
             <a:extLst xmlns:a="http://schemas.openxmlformats.org/drawingml/2006/main">
               <a:ext uri="{FF2B5EF4-FFF2-40B4-BE49-F238E27FC236}">
-                <a16:creationId xmlns:a16="http://schemas.microsoft.com/office/drawing/2014/main" id="{8C30B1F6-AEFD-454A-BF5B-98F77CCEE00D}"/>
+                <a16:creationId xmlns:a16="http://schemas.microsoft.com/office/drawing/2014/main" id="{599E9789-E4AA-4EC6-88BA-AC4338A44C77}"/>
               </a:ext>
             </a:extLst>
           </p:cNvPr>
@@ -5913,7 +5913,7 @@
           <p:cNvPr id="18" name="">
             <a:extLst xmlns:a="http://schemas.openxmlformats.org/drawingml/2006/main">
               <a:ext uri="{FF2B5EF4-FFF2-40B4-BE49-F238E27FC236}">
-                <a16:creationId xmlns:a16="http://schemas.microsoft.com/office/drawing/2014/main" id="{4F47D8B9-A8E9-473C-8E78-B5695EB9B0BE}"/>
+                <a16:creationId xmlns:a16="http://schemas.microsoft.com/office/drawing/2014/main" id="{927388D7-CF94-401C-A3FB-AE0518C3AE6A}"/>
               </a:ext>
             </a:extLst>
           </p:cNvPr>
@@ -6002,7 +6002,7 @@
           <p:cNvPr id="19" name="footer-rule-12">
             <a:extLst xmlns:a="http://schemas.openxmlformats.org/drawingml/2006/main">
               <a:ext uri="{FF2B5EF4-FFF2-40B4-BE49-F238E27FC236}">
-                <a16:creationId xmlns:a16="http://schemas.microsoft.com/office/drawing/2014/main" id="{4C2A3502-E763-4E79-9472-7CD2E979E1AB}"/>
+                <a16:creationId xmlns:a16="http://schemas.microsoft.com/office/drawing/2014/main" id="{3E24F800-DAF3-4167-9E15-7CF74020B0A0}"/>
               </a:ext>
             </a:extLst>
           </p:cNvPr>
@@ -6033,7 +6033,7 @@
           <p:cNvPr id="20" name="footer-label-12">
             <a:extLst xmlns:a="http://schemas.openxmlformats.org/drawingml/2006/main">
               <a:ext uri="{FF2B5EF4-FFF2-40B4-BE49-F238E27FC236}">
-                <a16:creationId xmlns:a16="http://schemas.microsoft.com/office/drawing/2014/main" id="{24A14C27-00D7-4B66-8D39-8F4D299C215A}"/>
+                <a16:creationId xmlns:a16="http://schemas.microsoft.com/office/drawing/2014/main" id="{22BD823F-28D6-4302-9791-674DDA1F4420}"/>
               </a:ext>
             </a:extLst>
           </p:cNvPr>
@@ -6095,7 +6095,7 @@
           <p:cNvPr id="21" name="footer-page-12">
             <a:extLst xmlns:a="http://schemas.openxmlformats.org/drawingml/2006/main">
               <a:ext uri="{FF2B5EF4-FFF2-40B4-BE49-F238E27FC236}">
-                <a16:creationId xmlns:a16="http://schemas.microsoft.com/office/drawing/2014/main" id="{67A6C4B9-55E4-4570-9322-DC61068CA91F}"/>
+                <a16:creationId xmlns:a16="http://schemas.microsoft.com/office/drawing/2014/main" id="{D741B36A-BC58-4326-B1A2-990FD60CBECE}"/>
               </a:ext>
             </a:extLst>
           </p:cNvPr>
@@ -6155,7 +6155,7 @@
     </p:spTree>
     <p:extLst>
       <p:ext uri="{BB962C8B-B14F-4D97-AF65-F5344CB8AC3E}">
-        <p14:creationId xmlns:p14="http://schemas.microsoft.com/office/powerpoint/2010/main" val="2065551816"/>
+        <p14:creationId xmlns:p14="http://schemas.microsoft.com/office/powerpoint/2010/main" val="9531804"/>
       </p:ext>
     </p:extLst>
   </p:cSld>
@@ -6186,7 +6186,7 @@
           <p:cNvPr id="14" name="side-accent-13">
             <a:extLst xmlns:a="http://schemas.openxmlformats.org/drawingml/2006/main">
               <a:ext uri="{FF2B5EF4-FFF2-40B4-BE49-F238E27FC236}">
-                <a16:creationId xmlns:a16="http://schemas.microsoft.com/office/drawing/2014/main" id="{75861E9F-3BB1-4919-ACC7-DDE25B684319}"/>
+                <a16:creationId xmlns:a16="http://schemas.microsoft.com/office/drawing/2014/main" id="{7EFF9DB6-A152-4F5C-BC86-012A72A6C456}"/>
               </a:ext>
             </a:extLst>
           </p:cNvPr>
@@ -6217,7 +6217,7 @@
           <p:cNvPr id="2" name="kicker-13">
             <a:extLst xmlns:a="http://schemas.openxmlformats.org/drawingml/2006/main">
               <a:ext uri="{FF2B5EF4-FFF2-40B4-BE49-F238E27FC236}">
-                <a16:creationId xmlns:a16="http://schemas.microsoft.com/office/drawing/2014/main" id="{8F87C85A-827E-4B6B-AEF3-042E9BAA6A6E}"/>
+                <a16:creationId xmlns:a16="http://schemas.microsoft.com/office/drawing/2014/main" id="{AC0F94E6-2A6C-4F8B-9419-FFA8F497D7E9}"/>
               </a:ext>
             </a:extLst>
           </p:cNvPr>
@@ -6279,7 +6279,7 @@
           <p:cNvPr id="3" name="title-13">
             <a:extLst xmlns:a="http://schemas.openxmlformats.org/drawingml/2006/main">
               <a:ext uri="{FF2B5EF4-FFF2-40B4-BE49-F238E27FC236}">
-                <a16:creationId xmlns:a16="http://schemas.microsoft.com/office/drawing/2014/main" id="{ABF4DFE7-CAB5-462A-89F4-7326CAC81E09}"/>
+                <a16:creationId xmlns:a16="http://schemas.microsoft.com/office/drawing/2014/main" id="{2C5C8663-2470-4722-B682-F28A4A55B4BF}"/>
               </a:ext>
             </a:extLst>
           </p:cNvPr>
@@ -6341,7 +6341,7 @@
           <p:cNvPr id="4" name="draft-panel">
             <a:extLst xmlns:a="http://schemas.openxmlformats.org/drawingml/2006/main">
               <a:ext uri="{FF2B5EF4-FFF2-40B4-BE49-F238E27FC236}">
-                <a16:creationId xmlns:a16="http://schemas.microsoft.com/office/drawing/2014/main" id="{BF0C361D-278D-4FCC-BE1E-736327B0BC9F}"/>
+                <a16:creationId xmlns:a16="http://schemas.microsoft.com/office/drawing/2014/main" id="{E6BFDCC6-CBE2-4AF0-A8CE-8B3532EF7EA6}"/>
               </a:ext>
             </a:extLst>
           </p:cNvPr>
@@ -6376,7 +6376,7 @@
           <p:cNvPr id="5" name="">
             <a:extLst xmlns:a="http://schemas.openxmlformats.org/drawingml/2006/main">
               <a:ext uri="{FF2B5EF4-FFF2-40B4-BE49-F238E27FC236}">
-                <a16:creationId xmlns:a16="http://schemas.microsoft.com/office/drawing/2014/main" id="{F28D5692-C1AE-4BFA-BE15-75F234C13EDD}"/>
+                <a16:creationId xmlns:a16="http://schemas.microsoft.com/office/drawing/2014/main" id="{F267F465-8A64-4FAC-932D-CAE64F26D475}"/>
               </a:ext>
             </a:extLst>
           </p:cNvPr>
@@ -6438,7 +6438,7 @@
           <p:cNvPr id="6" name="">
             <a:extLst xmlns:a="http://schemas.openxmlformats.org/drawingml/2006/main">
               <a:ext uri="{FF2B5EF4-FFF2-40B4-BE49-F238E27FC236}">
-                <a16:creationId xmlns:a16="http://schemas.microsoft.com/office/drawing/2014/main" id="{50D2D0F9-CC50-465A-9AF4-36602C7E258D}"/>
+                <a16:creationId xmlns:a16="http://schemas.microsoft.com/office/drawing/2014/main" id="{071E8AAB-256D-4101-A2C9-08973585E094}"/>
               </a:ext>
             </a:extLst>
           </p:cNvPr>
@@ -6554,7 +6554,7 @@
           <p:cNvPr id="7" name="submit-panel">
             <a:extLst xmlns:a="http://schemas.openxmlformats.org/drawingml/2006/main">
               <a:ext uri="{FF2B5EF4-FFF2-40B4-BE49-F238E27FC236}">
-                <a16:creationId xmlns:a16="http://schemas.microsoft.com/office/drawing/2014/main" id="{AEEDCB1C-19D7-4659-A7BB-AC6447630DCE}"/>
+                <a16:creationId xmlns:a16="http://schemas.microsoft.com/office/drawing/2014/main" id="{4B15136A-FBF5-4239-A6B2-7CF8872F2EFE}"/>
               </a:ext>
             </a:extLst>
           </p:cNvPr>
@@ -6589,7 +6589,7 @@
           <p:cNvPr id="8" name="">
             <a:extLst xmlns:a="http://schemas.openxmlformats.org/drawingml/2006/main">
               <a:ext uri="{FF2B5EF4-FFF2-40B4-BE49-F238E27FC236}">
-                <a16:creationId xmlns:a16="http://schemas.microsoft.com/office/drawing/2014/main" id="{6C64988B-C065-4AA4-AB03-BC96D66BAF72}"/>
+                <a16:creationId xmlns:a16="http://schemas.microsoft.com/office/drawing/2014/main" id="{137DB81D-28C1-4AE7-8766-F078B2009578}"/>
               </a:ext>
             </a:extLst>
           </p:cNvPr>
@@ -6651,7 +6651,7 @@
           <p:cNvPr id="9" name="">
             <a:extLst xmlns:a="http://schemas.openxmlformats.org/drawingml/2006/main">
               <a:ext uri="{FF2B5EF4-FFF2-40B4-BE49-F238E27FC236}">
-                <a16:creationId xmlns:a16="http://schemas.microsoft.com/office/drawing/2014/main" id="{A2FB301D-F678-4023-8396-76452F00F26B}"/>
+                <a16:creationId xmlns:a16="http://schemas.microsoft.com/office/drawing/2014/main" id="{4C84C177-E64D-475A-AC2F-71C4C1F5BD3E}"/>
               </a:ext>
             </a:extLst>
           </p:cNvPr>
@@ -6767,7 +6767,7 @@
           <p:cNvPr id="10" name="">
             <a:extLst xmlns:a="http://schemas.openxmlformats.org/drawingml/2006/main">
               <a:ext uri="{FF2B5EF4-FFF2-40B4-BE49-F238E27FC236}">
-                <a16:creationId xmlns:a16="http://schemas.microsoft.com/office/drawing/2014/main" id="{341FD831-9DC5-4E3D-9E1D-06995EB07B39}"/>
+                <a16:creationId xmlns:a16="http://schemas.microsoft.com/office/drawing/2014/main" id="{223601AA-CAF7-4B7D-B8FB-80E516EFEFF4}"/>
               </a:ext>
             </a:extLst>
           </p:cNvPr>
@@ -6829,7 +6829,7 @@
           <p:cNvPr id="11" name="footer-rule-13">
             <a:extLst xmlns:a="http://schemas.openxmlformats.org/drawingml/2006/main">
               <a:ext uri="{FF2B5EF4-FFF2-40B4-BE49-F238E27FC236}">
-                <a16:creationId xmlns:a16="http://schemas.microsoft.com/office/drawing/2014/main" id="{0FDFB270-F698-4B55-A160-60CE1E8A3D4E}"/>
+                <a16:creationId xmlns:a16="http://schemas.microsoft.com/office/drawing/2014/main" id="{4122ECB1-9EEA-4F70-BFA1-E7227DF0408E}"/>
               </a:ext>
             </a:extLst>
           </p:cNvPr>
@@ -6860,7 +6860,7 @@
           <p:cNvPr id="12" name="footer-label-13">
             <a:extLst xmlns:a="http://schemas.openxmlformats.org/drawingml/2006/main">
               <a:ext uri="{FF2B5EF4-FFF2-40B4-BE49-F238E27FC236}">
-                <a16:creationId xmlns:a16="http://schemas.microsoft.com/office/drawing/2014/main" id="{243F60E0-2D6D-4EEB-AAB0-7E3C8FCB6616}"/>
+                <a16:creationId xmlns:a16="http://schemas.microsoft.com/office/drawing/2014/main" id="{80E60410-29D8-4AD2-BACC-5C5C9F134649}"/>
               </a:ext>
             </a:extLst>
           </p:cNvPr>
@@ -6922,7 +6922,7 @@
           <p:cNvPr id="13" name="footer-page-13">
             <a:extLst xmlns:a="http://schemas.openxmlformats.org/drawingml/2006/main">
               <a:ext uri="{FF2B5EF4-FFF2-40B4-BE49-F238E27FC236}">
-                <a16:creationId xmlns:a16="http://schemas.microsoft.com/office/drawing/2014/main" id="{673109D0-1AD1-489D-BA10-E00BBD9C5667}"/>
+                <a16:creationId xmlns:a16="http://schemas.microsoft.com/office/drawing/2014/main" id="{FA230287-4ECB-4082-84AE-3E168BA57873}"/>
               </a:ext>
             </a:extLst>
           </p:cNvPr>
@@ -6982,7 +6982,7 @@
     </p:spTree>
     <p:extLst>
       <p:ext uri="{BB962C8B-B14F-4D97-AF65-F5344CB8AC3E}">
-        <p14:creationId xmlns:p14="http://schemas.microsoft.com/office/powerpoint/2010/main" val="319412391"/>
+        <p14:creationId xmlns:p14="http://schemas.microsoft.com/office/powerpoint/2010/main" val="29577949"/>
       </p:ext>
     </p:extLst>
   </p:cSld>
@@ -7013,7 +7013,7 @@
           <p:cNvPr id="25" name="side-accent-14">
             <a:extLst xmlns:a="http://schemas.openxmlformats.org/drawingml/2006/main">
               <a:ext uri="{FF2B5EF4-FFF2-40B4-BE49-F238E27FC236}">
-                <a16:creationId xmlns:a16="http://schemas.microsoft.com/office/drawing/2014/main" id="{17FB2F43-4D6F-40C0-8423-7D0566005A1B}"/>
+                <a16:creationId xmlns:a16="http://schemas.microsoft.com/office/drawing/2014/main" id="{BA7C986B-FA8B-48C4-AE41-6F5C91E7BA7E}"/>
               </a:ext>
             </a:extLst>
           </p:cNvPr>
@@ -7044,7 +7044,7 @@
           <p:cNvPr id="2" name="kicker-14">
             <a:extLst xmlns:a="http://schemas.openxmlformats.org/drawingml/2006/main">
               <a:ext uri="{FF2B5EF4-FFF2-40B4-BE49-F238E27FC236}">
-                <a16:creationId xmlns:a16="http://schemas.microsoft.com/office/drawing/2014/main" id="{33E6C541-1D41-4E9A-9766-D4D4A0AD361F}"/>
+                <a16:creationId xmlns:a16="http://schemas.microsoft.com/office/drawing/2014/main" id="{01BA2321-7729-48A7-90A3-372FEBCF2035}"/>
               </a:ext>
             </a:extLst>
           </p:cNvPr>
@@ -7106,7 +7106,7 @@
           <p:cNvPr id="3" name="title-14">
             <a:extLst xmlns:a="http://schemas.openxmlformats.org/drawingml/2006/main">
               <a:ext uri="{FF2B5EF4-FFF2-40B4-BE49-F238E27FC236}">
-                <a16:creationId xmlns:a16="http://schemas.microsoft.com/office/drawing/2014/main" id="{C6EC9256-F928-4B6E-9F59-7BE25A6C494E}"/>
+                <a16:creationId xmlns:a16="http://schemas.microsoft.com/office/drawing/2014/main" id="{65EF2494-E1AB-486C-B1D7-9322CA177349}"/>
               </a:ext>
             </a:extLst>
           </p:cNvPr>
@@ -7168,7 +7168,7 @@
           <p:cNvPr id="4" name="">
             <a:extLst xmlns:a="http://schemas.openxmlformats.org/drawingml/2006/main">
               <a:ext uri="{FF2B5EF4-FFF2-40B4-BE49-F238E27FC236}">
-                <a16:creationId xmlns:a16="http://schemas.microsoft.com/office/drawing/2014/main" id="{C26BC3F3-9C7F-49D0-9A36-62BA48521F2F}"/>
+                <a16:creationId xmlns:a16="http://schemas.microsoft.com/office/drawing/2014/main" id="{2AA7DDBC-ECF1-42EB-9E96-4694BFB7C0BC}"/>
               </a:ext>
             </a:extLst>
           </p:cNvPr>
@@ -7199,7 +7199,7 @@
           <p:cNvPr id="5" name="">
             <a:extLst xmlns:a="http://schemas.openxmlformats.org/drawingml/2006/main">
               <a:ext uri="{FF2B5EF4-FFF2-40B4-BE49-F238E27FC236}">
-                <a16:creationId xmlns:a16="http://schemas.microsoft.com/office/drawing/2014/main" id="{AA74136B-7F17-4020-8CFA-9DB7F99BA505}"/>
+                <a16:creationId xmlns:a16="http://schemas.microsoft.com/office/drawing/2014/main" id="{557417BE-BB14-42D1-8AE6-6A388EE657B4}"/>
               </a:ext>
             </a:extLst>
           </p:cNvPr>
@@ -7230,7 +7230,7 @@
           <p:cNvPr id="6" name="">
             <a:extLst xmlns:a="http://schemas.openxmlformats.org/drawingml/2006/main">
               <a:ext uri="{FF2B5EF4-FFF2-40B4-BE49-F238E27FC236}">
-                <a16:creationId xmlns:a16="http://schemas.microsoft.com/office/drawing/2014/main" id="{E05A0B65-74F5-40F6-8414-C0791A3379EB}"/>
+                <a16:creationId xmlns:a16="http://schemas.microsoft.com/office/drawing/2014/main" id="{78B608AB-5841-4CC8-A06F-7F9AF51042D8}"/>
               </a:ext>
             </a:extLst>
           </p:cNvPr>
@@ -7292,7 +7292,7 @@
           <p:cNvPr id="7" name="">
             <a:extLst xmlns:a="http://schemas.openxmlformats.org/drawingml/2006/main">
               <a:ext uri="{FF2B5EF4-FFF2-40B4-BE49-F238E27FC236}">
-                <a16:creationId xmlns:a16="http://schemas.microsoft.com/office/drawing/2014/main" id="{AF2786B0-F387-45F5-A42E-E9C265CB7136}"/>
+                <a16:creationId xmlns:a16="http://schemas.microsoft.com/office/drawing/2014/main" id="{E2078962-AC50-471B-901F-D1ACD4E312A7}"/>
               </a:ext>
             </a:extLst>
           </p:cNvPr>
@@ -7354,7 +7354,7 @@
           <p:cNvPr id="8" name="">
             <a:extLst xmlns:a="http://schemas.openxmlformats.org/drawingml/2006/main">
               <a:ext uri="{FF2B5EF4-FFF2-40B4-BE49-F238E27FC236}">
-                <a16:creationId xmlns:a16="http://schemas.microsoft.com/office/drawing/2014/main" id="{19B43B0A-F53F-4C5D-BE0F-B64C3E64BF95}"/>
+                <a16:creationId xmlns:a16="http://schemas.microsoft.com/office/drawing/2014/main" id="{C31AADFE-9E53-4A11-B77F-471CA2D1D588}"/>
               </a:ext>
             </a:extLst>
           </p:cNvPr>
@@ -7416,7 +7416,7 @@
           <p:cNvPr id="9" name="">
             <a:extLst xmlns:a="http://schemas.openxmlformats.org/drawingml/2006/main">
               <a:ext uri="{FF2B5EF4-FFF2-40B4-BE49-F238E27FC236}">
-                <a16:creationId xmlns:a16="http://schemas.microsoft.com/office/drawing/2014/main" id="{28D8C9E2-F03B-4481-B3E7-C9358395D863}"/>
+                <a16:creationId xmlns:a16="http://schemas.microsoft.com/office/drawing/2014/main" id="{E19352AF-4036-400B-88EF-A5BAA45C1F84}"/>
               </a:ext>
             </a:extLst>
           </p:cNvPr>
@@ -7447,7 +7447,7 @@
           <p:cNvPr id="10" name="">
             <a:extLst xmlns:a="http://schemas.openxmlformats.org/drawingml/2006/main">
               <a:ext uri="{FF2B5EF4-FFF2-40B4-BE49-F238E27FC236}">
-                <a16:creationId xmlns:a16="http://schemas.microsoft.com/office/drawing/2014/main" id="{62C6DEEE-6CCC-4127-9ABB-F79BDA50CF7E}"/>
+                <a16:creationId xmlns:a16="http://schemas.microsoft.com/office/drawing/2014/main" id="{7B4579A6-DEE6-47B5-B493-41103816E30B}"/>
               </a:ext>
             </a:extLst>
           </p:cNvPr>
@@ -7509,7 +7509,7 @@
           <p:cNvPr id="11" name="">
             <a:extLst xmlns:a="http://schemas.openxmlformats.org/drawingml/2006/main">
               <a:ext uri="{FF2B5EF4-FFF2-40B4-BE49-F238E27FC236}">
-                <a16:creationId xmlns:a16="http://schemas.microsoft.com/office/drawing/2014/main" id="{D9F52B6C-3CE1-4735-A0DB-D7C16E5C2A0C}"/>
+                <a16:creationId xmlns:a16="http://schemas.microsoft.com/office/drawing/2014/main" id="{1156F867-BFFA-4F5A-A1F9-ACF0C45C662B}"/>
               </a:ext>
             </a:extLst>
           </p:cNvPr>
@@ -7571,7 +7571,7 @@
           <p:cNvPr id="12" name="">
             <a:extLst xmlns:a="http://schemas.openxmlformats.org/drawingml/2006/main">
               <a:ext uri="{FF2B5EF4-FFF2-40B4-BE49-F238E27FC236}">
-                <a16:creationId xmlns:a16="http://schemas.microsoft.com/office/drawing/2014/main" id="{5009A64A-0110-4C4E-9ADE-657D47F7EC06}"/>
+                <a16:creationId xmlns:a16="http://schemas.microsoft.com/office/drawing/2014/main" id="{AC39112D-FBC0-498C-865E-FBAA89B2D048}"/>
               </a:ext>
             </a:extLst>
           </p:cNvPr>
@@ -7633,7 +7633,7 @@
           <p:cNvPr id="13" name="">
             <a:extLst xmlns:a="http://schemas.openxmlformats.org/drawingml/2006/main">
               <a:ext uri="{FF2B5EF4-FFF2-40B4-BE49-F238E27FC236}">
-                <a16:creationId xmlns:a16="http://schemas.microsoft.com/office/drawing/2014/main" id="{ECF4CE97-FB17-41CE-8E05-5CC7C223FB94}"/>
+                <a16:creationId xmlns:a16="http://schemas.microsoft.com/office/drawing/2014/main" id="{9BA0C79B-166B-449D-AEC8-B29C810D81DA}"/>
               </a:ext>
             </a:extLst>
           </p:cNvPr>
@@ -7664,7 +7664,7 @@
           <p:cNvPr id="14" name="">
             <a:extLst xmlns:a="http://schemas.openxmlformats.org/drawingml/2006/main">
               <a:ext uri="{FF2B5EF4-FFF2-40B4-BE49-F238E27FC236}">
-                <a16:creationId xmlns:a16="http://schemas.microsoft.com/office/drawing/2014/main" id="{0967526C-2CB2-448C-97ED-E4E422D22245}"/>
+                <a16:creationId xmlns:a16="http://schemas.microsoft.com/office/drawing/2014/main" id="{DACECEFB-DD81-48A0-92E3-89CD631C706A}"/>
               </a:ext>
             </a:extLst>
           </p:cNvPr>
@@ -7726,7 +7726,7 @@
           <p:cNvPr id="15" name="">
             <a:extLst xmlns:a="http://schemas.openxmlformats.org/drawingml/2006/main">
               <a:ext uri="{FF2B5EF4-FFF2-40B4-BE49-F238E27FC236}">
-                <a16:creationId xmlns:a16="http://schemas.microsoft.com/office/drawing/2014/main" id="{9B141DF1-C03F-4066-BC8B-B0E8DA8A5F5C}"/>
+                <a16:creationId xmlns:a16="http://schemas.microsoft.com/office/drawing/2014/main" id="{5BC822FC-678F-4701-A341-6C677D84A52E}"/>
               </a:ext>
             </a:extLst>
           </p:cNvPr>
@@ -7788,7 +7788,7 @@
           <p:cNvPr id="16" name="">
             <a:extLst xmlns:a="http://schemas.openxmlformats.org/drawingml/2006/main">
               <a:ext uri="{FF2B5EF4-FFF2-40B4-BE49-F238E27FC236}">
-                <a16:creationId xmlns:a16="http://schemas.microsoft.com/office/drawing/2014/main" id="{C4E3DB3C-4D6D-4C14-A288-BFFDF4DCAEAD}"/>
+                <a16:creationId xmlns:a16="http://schemas.microsoft.com/office/drawing/2014/main" id="{85B0617A-D9F1-444E-B11E-2068E52C21CC}"/>
               </a:ext>
             </a:extLst>
           </p:cNvPr>
@@ -7850,7 +7850,7 @@
           <p:cNvPr id="17" name="">
             <a:extLst xmlns:a="http://schemas.openxmlformats.org/drawingml/2006/main">
               <a:ext uri="{FF2B5EF4-FFF2-40B4-BE49-F238E27FC236}">
-                <a16:creationId xmlns:a16="http://schemas.microsoft.com/office/drawing/2014/main" id="{DB495961-F43C-4FF1-B102-419E8BD7385A}"/>
+                <a16:creationId xmlns:a16="http://schemas.microsoft.com/office/drawing/2014/main" id="{0DC5B87A-8569-472A-AAD7-8DE3987A5E04}"/>
               </a:ext>
             </a:extLst>
           </p:cNvPr>
@@ -7881,7 +7881,7 @@
           <p:cNvPr id="18" name="">
             <a:extLst xmlns:a="http://schemas.openxmlformats.org/drawingml/2006/main">
               <a:ext uri="{FF2B5EF4-FFF2-40B4-BE49-F238E27FC236}">
-                <a16:creationId xmlns:a16="http://schemas.microsoft.com/office/drawing/2014/main" id="{A3E5BDBE-2AE3-46F3-BBC2-022943E2707A}"/>
+                <a16:creationId xmlns:a16="http://schemas.microsoft.com/office/drawing/2014/main" id="{ED20AF2F-4DE6-4C34-9729-7E8CF55FC647}"/>
               </a:ext>
             </a:extLst>
           </p:cNvPr>
@@ -7943,7 +7943,7 @@
           <p:cNvPr id="19" name="">
             <a:extLst xmlns:a="http://schemas.openxmlformats.org/drawingml/2006/main">
               <a:ext uri="{FF2B5EF4-FFF2-40B4-BE49-F238E27FC236}">
-                <a16:creationId xmlns:a16="http://schemas.microsoft.com/office/drawing/2014/main" id="{D2CB086E-9D56-414D-ABF5-7C87466625C4}"/>
+                <a16:creationId xmlns:a16="http://schemas.microsoft.com/office/drawing/2014/main" id="{8C8B4A9D-7AE4-4F91-9C06-038444A79B04}"/>
               </a:ext>
             </a:extLst>
           </p:cNvPr>
@@ -8005,7 +8005,7 @@
           <p:cNvPr id="20" name="">
             <a:extLst xmlns:a="http://schemas.openxmlformats.org/drawingml/2006/main">
               <a:ext uri="{FF2B5EF4-FFF2-40B4-BE49-F238E27FC236}">
-                <a16:creationId xmlns:a16="http://schemas.microsoft.com/office/drawing/2014/main" id="{100234B1-A6B8-4989-B895-2DE19BC1199D}"/>
+                <a16:creationId xmlns:a16="http://schemas.microsoft.com/office/drawing/2014/main" id="{26FB53F4-D6DE-4FF4-944C-B8F6C5BF77AA}"/>
               </a:ext>
             </a:extLst>
           </p:cNvPr>
@@ -8067,7 +8067,7 @@
           <p:cNvPr id="21" name="">
             <a:extLst xmlns:a="http://schemas.openxmlformats.org/drawingml/2006/main">
               <a:ext uri="{FF2B5EF4-FFF2-40B4-BE49-F238E27FC236}">
-                <a16:creationId xmlns:a16="http://schemas.microsoft.com/office/drawing/2014/main" id="{44EFB0EB-F99C-4EC2-BB02-43FD843E6AA0}"/>
+                <a16:creationId xmlns:a16="http://schemas.microsoft.com/office/drawing/2014/main" id="{07139262-AC7E-402F-9B5B-26589665346E}"/>
               </a:ext>
             </a:extLst>
           </p:cNvPr>
@@ -8129,7 +8129,7 @@
           <p:cNvPr id="22" name="footer-rule-14">
             <a:extLst xmlns:a="http://schemas.openxmlformats.org/drawingml/2006/main">
               <a:ext uri="{FF2B5EF4-FFF2-40B4-BE49-F238E27FC236}">
-                <a16:creationId xmlns:a16="http://schemas.microsoft.com/office/drawing/2014/main" id="{C501ED25-9CEF-4157-A1B1-2A8A99A8C7C6}"/>
+                <a16:creationId xmlns:a16="http://schemas.microsoft.com/office/drawing/2014/main" id="{AED11EBE-9955-4981-872B-25157B9829DE}"/>
               </a:ext>
             </a:extLst>
           </p:cNvPr>
@@ -8160,7 +8160,7 @@
           <p:cNvPr id="23" name="footer-label-14">
             <a:extLst xmlns:a="http://schemas.openxmlformats.org/drawingml/2006/main">
               <a:ext uri="{FF2B5EF4-FFF2-40B4-BE49-F238E27FC236}">
-                <a16:creationId xmlns:a16="http://schemas.microsoft.com/office/drawing/2014/main" id="{D2520058-DA76-400D-9381-E0C58826A743}"/>
+                <a16:creationId xmlns:a16="http://schemas.microsoft.com/office/drawing/2014/main" id="{FE84F95A-1E92-4677-9AD5-2D0BDEC653B7}"/>
               </a:ext>
             </a:extLst>
           </p:cNvPr>
@@ -8222,7 +8222,7 @@
           <p:cNvPr id="24" name="footer-page-14">
             <a:extLst xmlns:a="http://schemas.openxmlformats.org/drawingml/2006/main">
               <a:ext uri="{FF2B5EF4-FFF2-40B4-BE49-F238E27FC236}">
-                <a16:creationId xmlns:a16="http://schemas.microsoft.com/office/drawing/2014/main" id="{85808ADE-F5AB-4E10-A841-5DA0A3FDAD18}"/>
+                <a16:creationId xmlns:a16="http://schemas.microsoft.com/office/drawing/2014/main" id="{29CC6B34-D2F2-4510-9A1E-9EDF7E5C2971}"/>
               </a:ext>
             </a:extLst>
           </p:cNvPr>
@@ -8282,7 +8282,7 @@
     </p:spTree>
     <p:extLst>
       <p:ext uri="{BB962C8B-B14F-4D97-AF65-F5344CB8AC3E}">
-        <p14:creationId xmlns:p14="http://schemas.microsoft.com/office/powerpoint/2010/main" val="1044083883"/>
+        <p14:creationId xmlns:p14="http://schemas.microsoft.com/office/powerpoint/2010/main" val="1821714290"/>
       </p:ext>
     </p:extLst>
   </p:cSld>
@@ -8313,7 +8313,7 @@
           <p:cNvPr id="24" name="side-accent-15">
             <a:extLst xmlns:a="http://schemas.openxmlformats.org/drawingml/2006/main">
               <a:ext uri="{FF2B5EF4-FFF2-40B4-BE49-F238E27FC236}">
-                <a16:creationId xmlns:a16="http://schemas.microsoft.com/office/drawing/2014/main" id="{4FBDBC72-7105-4E29-960A-2E4393F13EEE}"/>
+                <a16:creationId xmlns:a16="http://schemas.microsoft.com/office/drawing/2014/main" id="{6512CD62-DA3A-497B-9BDC-B56E4B659C51}"/>
               </a:ext>
             </a:extLst>
           </p:cNvPr>
@@ -8344,7 +8344,7 @@
           <p:cNvPr id="2" name="kicker-15">
             <a:extLst xmlns:a="http://schemas.openxmlformats.org/drawingml/2006/main">
               <a:ext uri="{FF2B5EF4-FFF2-40B4-BE49-F238E27FC236}">
-                <a16:creationId xmlns:a16="http://schemas.microsoft.com/office/drawing/2014/main" id="{561242A3-B612-49E0-AC8B-3727800A85F5}"/>
+                <a16:creationId xmlns:a16="http://schemas.microsoft.com/office/drawing/2014/main" id="{C4FA4DD0-E73C-44BA-AF2B-2FA4F198D340}"/>
               </a:ext>
             </a:extLst>
           </p:cNvPr>
@@ -8406,7 +8406,7 @@
           <p:cNvPr id="3" name="title-15">
             <a:extLst xmlns:a="http://schemas.openxmlformats.org/drawingml/2006/main">
               <a:ext uri="{FF2B5EF4-FFF2-40B4-BE49-F238E27FC236}">
-                <a16:creationId xmlns:a16="http://schemas.microsoft.com/office/drawing/2014/main" id="{10C3D624-B3DD-455E-901F-7DAA5A5C8C12}"/>
+                <a16:creationId xmlns:a16="http://schemas.microsoft.com/office/drawing/2014/main" id="{F4C2F7D9-B14E-442C-9525-638AE4EDB86B}"/>
               </a:ext>
             </a:extLst>
           </p:cNvPr>
@@ -8468,7 +8468,7 @@
           <p:cNvPr id="4" name="">
             <a:extLst xmlns:a="http://schemas.openxmlformats.org/drawingml/2006/main">
               <a:ext uri="{FF2B5EF4-FFF2-40B4-BE49-F238E27FC236}">
-                <a16:creationId xmlns:a16="http://schemas.microsoft.com/office/drawing/2014/main" id="{BF5267F2-5517-49E3-BDA9-4CBEAC7D40B5}"/>
+                <a16:creationId xmlns:a16="http://schemas.microsoft.com/office/drawing/2014/main" id="{BC662DCF-BA20-4681-A290-E17832F0D118}"/>
               </a:ext>
             </a:extLst>
           </p:cNvPr>
@@ -8530,7 +8530,7 @@
           <p:cNvPr id="5" name="">
             <a:extLst xmlns:a="http://schemas.openxmlformats.org/drawingml/2006/main">
               <a:ext uri="{FF2B5EF4-FFF2-40B4-BE49-F238E27FC236}">
-                <a16:creationId xmlns:a16="http://schemas.microsoft.com/office/drawing/2014/main" id="{B70BDCF7-2314-4C43-A5E2-DC573AB3D990}"/>
+                <a16:creationId xmlns:a16="http://schemas.microsoft.com/office/drawing/2014/main" id="{BDFC4F7E-1298-4EAB-8FA4-FCC66BA53C0B}"/>
               </a:ext>
             </a:extLst>
           </p:cNvPr>
@@ -8592,7 +8592,7 @@
           <p:cNvPr id="6" name="">
             <a:extLst xmlns:a="http://schemas.openxmlformats.org/drawingml/2006/main">
               <a:ext uri="{FF2B5EF4-FFF2-40B4-BE49-F238E27FC236}">
-                <a16:creationId xmlns:a16="http://schemas.microsoft.com/office/drawing/2014/main" id="{D08620E5-CCE8-431F-8E13-BD23139207CD}"/>
+                <a16:creationId xmlns:a16="http://schemas.microsoft.com/office/drawing/2014/main" id="{3F83A673-3A2C-4E96-9AED-3BB75CEB9E2B}"/>
               </a:ext>
             </a:extLst>
           </p:cNvPr>
@@ -8654,7 +8654,7 @@
           <p:cNvPr id="7" name="">
             <a:extLst xmlns:a="http://schemas.openxmlformats.org/drawingml/2006/main">
               <a:ext uri="{FF2B5EF4-FFF2-40B4-BE49-F238E27FC236}">
-                <a16:creationId xmlns:a16="http://schemas.microsoft.com/office/drawing/2014/main" id="{74498C12-2052-4810-BA8F-88BE94993B8A}"/>
+                <a16:creationId xmlns:a16="http://schemas.microsoft.com/office/drawing/2014/main" id="{A60B7E90-6C76-40B3-A9AD-DBF31B09AE9D}"/>
               </a:ext>
             </a:extLst>
           </p:cNvPr>
@@ -8685,7 +8685,7 @@
           <p:cNvPr id="8" name="">
             <a:extLst xmlns:a="http://schemas.openxmlformats.org/drawingml/2006/main">
               <a:ext uri="{FF2B5EF4-FFF2-40B4-BE49-F238E27FC236}">
-                <a16:creationId xmlns:a16="http://schemas.microsoft.com/office/drawing/2014/main" id="{A9EF3B55-C12A-44DC-904F-CD137F10133E}"/>
+                <a16:creationId xmlns:a16="http://schemas.microsoft.com/office/drawing/2014/main" id="{67C4F8E1-4B8A-427F-B08C-76584BC40D44}"/>
               </a:ext>
             </a:extLst>
           </p:cNvPr>
@@ -8747,7 +8747,7 @@
           <p:cNvPr id="9" name="">
             <a:extLst xmlns:a="http://schemas.openxmlformats.org/drawingml/2006/main">
               <a:ext uri="{FF2B5EF4-FFF2-40B4-BE49-F238E27FC236}">
-                <a16:creationId xmlns:a16="http://schemas.microsoft.com/office/drawing/2014/main" id="{0981780C-04DF-4D05-8A91-B98DE8BD14BF}"/>
+                <a16:creationId xmlns:a16="http://schemas.microsoft.com/office/drawing/2014/main" id="{591A5A30-7B91-467A-AB51-CFD245CF6465}"/>
               </a:ext>
             </a:extLst>
           </p:cNvPr>
@@ -8809,7 +8809,7 @@
           <p:cNvPr id="10" name="">
             <a:extLst xmlns:a="http://schemas.openxmlformats.org/drawingml/2006/main">
               <a:ext uri="{FF2B5EF4-FFF2-40B4-BE49-F238E27FC236}">
-                <a16:creationId xmlns:a16="http://schemas.microsoft.com/office/drawing/2014/main" id="{2AA52F84-1101-401A-A374-84C46974DCE7}"/>
+                <a16:creationId xmlns:a16="http://schemas.microsoft.com/office/drawing/2014/main" id="{B37905AC-9464-4D49-A1F3-BC6D727C46C3}"/>
               </a:ext>
             </a:extLst>
           </p:cNvPr>
@@ -8871,7 +8871,7 @@
           <p:cNvPr id="11" name="">
             <a:extLst xmlns:a="http://schemas.openxmlformats.org/drawingml/2006/main">
               <a:ext uri="{FF2B5EF4-FFF2-40B4-BE49-F238E27FC236}">
-                <a16:creationId xmlns:a16="http://schemas.microsoft.com/office/drawing/2014/main" id="{342C972C-F941-4B22-B10F-3DF01930D800}"/>
+                <a16:creationId xmlns:a16="http://schemas.microsoft.com/office/drawing/2014/main" id="{4A9D4C13-A175-4157-8E43-D870BA3C1DD1}"/>
               </a:ext>
             </a:extLst>
           </p:cNvPr>
@@ -8902,7 +8902,7 @@
           <p:cNvPr id="12" name="">
             <a:extLst xmlns:a="http://schemas.openxmlformats.org/drawingml/2006/main">
               <a:ext uri="{FF2B5EF4-FFF2-40B4-BE49-F238E27FC236}">
-                <a16:creationId xmlns:a16="http://schemas.microsoft.com/office/drawing/2014/main" id="{779975A5-ABF5-48FB-9446-E52B5EA104FB}"/>
+                <a16:creationId xmlns:a16="http://schemas.microsoft.com/office/drawing/2014/main" id="{0B56D607-8B26-4F68-BBA5-34667D4C1763}"/>
               </a:ext>
             </a:extLst>
           </p:cNvPr>
@@ -8964,7 +8964,7 @@
           <p:cNvPr id="13" name="">
             <a:extLst xmlns:a="http://schemas.openxmlformats.org/drawingml/2006/main">
               <a:ext uri="{FF2B5EF4-FFF2-40B4-BE49-F238E27FC236}">
-                <a16:creationId xmlns:a16="http://schemas.microsoft.com/office/drawing/2014/main" id="{72D45682-2AF9-4AF9-991F-6F3B23C9BC38}"/>
+                <a16:creationId xmlns:a16="http://schemas.microsoft.com/office/drawing/2014/main" id="{7A2C1751-70F0-45F7-ABEE-3EC99A6AD8C7}"/>
               </a:ext>
             </a:extLst>
           </p:cNvPr>
@@ -9026,7 +9026,7 @@
           <p:cNvPr id="14" name="">
             <a:extLst xmlns:a="http://schemas.openxmlformats.org/drawingml/2006/main">
               <a:ext uri="{FF2B5EF4-FFF2-40B4-BE49-F238E27FC236}">
-                <a16:creationId xmlns:a16="http://schemas.microsoft.com/office/drawing/2014/main" id="{2D8132CA-B7FE-45DA-A2A9-5F9CC19C613E}"/>
+                <a16:creationId xmlns:a16="http://schemas.microsoft.com/office/drawing/2014/main" id="{782291BE-3BD1-415E-A220-FB6F91208D5A}"/>
               </a:ext>
             </a:extLst>
           </p:cNvPr>
@@ -9088,7 +9088,7 @@
           <p:cNvPr id="15" name="">
             <a:extLst xmlns:a="http://schemas.openxmlformats.org/drawingml/2006/main">
               <a:ext uri="{FF2B5EF4-FFF2-40B4-BE49-F238E27FC236}">
-                <a16:creationId xmlns:a16="http://schemas.microsoft.com/office/drawing/2014/main" id="{507292C5-DC4C-4AD8-AE02-68ADFA273D97}"/>
+                <a16:creationId xmlns:a16="http://schemas.microsoft.com/office/drawing/2014/main" id="{1EF4D6CA-9D74-45E4-88DE-C80C5C79766E}"/>
               </a:ext>
             </a:extLst>
           </p:cNvPr>
@@ -9119,7 +9119,7 @@
           <p:cNvPr id="16" name="">
             <a:extLst xmlns:a="http://schemas.openxmlformats.org/drawingml/2006/main">
               <a:ext uri="{FF2B5EF4-FFF2-40B4-BE49-F238E27FC236}">
-                <a16:creationId xmlns:a16="http://schemas.microsoft.com/office/drawing/2014/main" id="{BE036231-51E7-4B43-9037-ED240C80B18E}"/>
+                <a16:creationId xmlns:a16="http://schemas.microsoft.com/office/drawing/2014/main" id="{D19DB9B2-FA72-4D16-87C0-570D7AAF84DB}"/>
               </a:ext>
             </a:extLst>
           </p:cNvPr>
@@ -9181,7 +9181,7 @@
           <p:cNvPr id="17" name="">
             <a:extLst xmlns:a="http://schemas.openxmlformats.org/drawingml/2006/main">
               <a:ext uri="{FF2B5EF4-FFF2-40B4-BE49-F238E27FC236}">
-                <a16:creationId xmlns:a16="http://schemas.microsoft.com/office/drawing/2014/main" id="{46FB9045-3C0A-4300-B941-DEF3E854A79D}"/>
+                <a16:creationId xmlns:a16="http://schemas.microsoft.com/office/drawing/2014/main" id="{4E5DDEEA-8984-4865-81EE-61582EFC20FF}"/>
               </a:ext>
             </a:extLst>
           </p:cNvPr>
@@ -9243,7 +9243,7 @@
           <p:cNvPr id="18" name="">
             <a:extLst xmlns:a="http://schemas.openxmlformats.org/drawingml/2006/main">
               <a:ext uri="{FF2B5EF4-FFF2-40B4-BE49-F238E27FC236}">
-                <a16:creationId xmlns:a16="http://schemas.microsoft.com/office/drawing/2014/main" id="{2FCD1E1E-7969-4548-8E01-B0A8EA88EDD5}"/>
+                <a16:creationId xmlns:a16="http://schemas.microsoft.com/office/drawing/2014/main" id="{D5E30600-C311-4054-AE40-4DFEBA1FA176}"/>
               </a:ext>
             </a:extLst>
           </p:cNvPr>
@@ -9305,7 +9305,7 @@
           <p:cNvPr id="19" name="">
             <a:extLst xmlns:a="http://schemas.openxmlformats.org/drawingml/2006/main">
               <a:ext uri="{FF2B5EF4-FFF2-40B4-BE49-F238E27FC236}">
-                <a16:creationId xmlns:a16="http://schemas.microsoft.com/office/drawing/2014/main" id="{5A920DB9-BE49-482F-B979-4ADC347467C6}"/>
+                <a16:creationId xmlns:a16="http://schemas.microsoft.com/office/drawing/2014/main" id="{B340433A-B160-41C9-B332-5FD23884E6AE}"/>
               </a:ext>
             </a:extLst>
           </p:cNvPr>
@@ -9338,7 +9338,7 @@
           <p:cNvPr id="20" name="">
             <a:extLst xmlns:a="http://schemas.openxmlformats.org/drawingml/2006/main">
               <a:ext uri="{FF2B5EF4-FFF2-40B4-BE49-F238E27FC236}">
-                <a16:creationId xmlns:a16="http://schemas.microsoft.com/office/drawing/2014/main" id="{1BCB9F63-E8B5-42D2-A40C-1EF23C6E2760}"/>
+                <a16:creationId xmlns:a16="http://schemas.microsoft.com/office/drawing/2014/main" id="{4B940223-265A-4653-A0F5-B3ECF015EECF}"/>
               </a:ext>
             </a:extLst>
           </p:cNvPr>
@@ -9400,7 +9400,7 @@
           <p:cNvPr id="21" name="footer-rule-15">
             <a:extLst xmlns:a="http://schemas.openxmlformats.org/drawingml/2006/main">
               <a:ext uri="{FF2B5EF4-FFF2-40B4-BE49-F238E27FC236}">
-                <a16:creationId xmlns:a16="http://schemas.microsoft.com/office/drawing/2014/main" id="{E91D598A-AC4A-417B-B9E4-242756826B06}"/>
+                <a16:creationId xmlns:a16="http://schemas.microsoft.com/office/drawing/2014/main" id="{1FA6C614-447E-4C10-A77A-7D5704F6E6A6}"/>
               </a:ext>
             </a:extLst>
           </p:cNvPr>
@@ -9431,7 +9431,7 @@
           <p:cNvPr id="22" name="footer-label-15">
             <a:extLst xmlns:a="http://schemas.openxmlformats.org/drawingml/2006/main">
               <a:ext uri="{FF2B5EF4-FFF2-40B4-BE49-F238E27FC236}">
-                <a16:creationId xmlns:a16="http://schemas.microsoft.com/office/drawing/2014/main" id="{93A18B5D-AB97-4536-A7A1-DE2FBB373161}"/>
+                <a16:creationId xmlns:a16="http://schemas.microsoft.com/office/drawing/2014/main" id="{7C1725D0-7611-4899-A461-D34FDDC6A045}"/>
               </a:ext>
             </a:extLst>
           </p:cNvPr>
@@ -9493,7 +9493,7 @@
           <p:cNvPr id="23" name="footer-page-15">
             <a:extLst xmlns:a="http://schemas.openxmlformats.org/drawingml/2006/main">
               <a:ext uri="{FF2B5EF4-FFF2-40B4-BE49-F238E27FC236}">
-                <a16:creationId xmlns:a16="http://schemas.microsoft.com/office/drawing/2014/main" id="{145F4DCD-7494-4118-BD59-CF2836686446}"/>
+                <a16:creationId xmlns:a16="http://schemas.microsoft.com/office/drawing/2014/main" id="{AA610044-CCB9-4E06-8691-212F349567DF}"/>
               </a:ext>
             </a:extLst>
           </p:cNvPr>
@@ -9553,7 +9553,7 @@
     </p:spTree>
     <p:extLst>
       <p:ext uri="{BB962C8B-B14F-4D97-AF65-F5344CB8AC3E}">
-        <p14:creationId xmlns:p14="http://schemas.microsoft.com/office/powerpoint/2010/main" val="237140806"/>
+        <p14:creationId xmlns:p14="http://schemas.microsoft.com/office/powerpoint/2010/main" val="1451021541"/>
       </p:ext>
     </p:extLst>
   </p:cSld>
@@ -9584,7 +9584,7 @@
           <p:cNvPr id="21" name="side-accent-16">
             <a:extLst xmlns:a="http://schemas.openxmlformats.org/drawingml/2006/main">
               <a:ext uri="{FF2B5EF4-FFF2-40B4-BE49-F238E27FC236}">
-                <a16:creationId xmlns:a16="http://schemas.microsoft.com/office/drawing/2014/main" id="{1BA7B435-B4B5-413A-84F1-21C4065C6494}"/>
+                <a16:creationId xmlns:a16="http://schemas.microsoft.com/office/drawing/2014/main" id="{850AE852-DB25-47B1-8E8D-25541883F8FC}"/>
               </a:ext>
             </a:extLst>
           </p:cNvPr>
@@ -9615,7 +9615,7 @@
           <p:cNvPr id="2" name="kicker-16">
             <a:extLst xmlns:a="http://schemas.openxmlformats.org/drawingml/2006/main">
               <a:ext uri="{FF2B5EF4-FFF2-40B4-BE49-F238E27FC236}">
-                <a16:creationId xmlns:a16="http://schemas.microsoft.com/office/drawing/2014/main" id="{3A235351-F2BB-4C2E-BBC6-9A607C21A007}"/>
+                <a16:creationId xmlns:a16="http://schemas.microsoft.com/office/drawing/2014/main" id="{520432CC-5409-48B9-9CB1-6E65F090B9CE}"/>
               </a:ext>
             </a:extLst>
           </p:cNvPr>
@@ -9677,7 +9677,7 @@
           <p:cNvPr id="3" name="title-16">
             <a:extLst xmlns:a="http://schemas.openxmlformats.org/drawingml/2006/main">
               <a:ext uri="{FF2B5EF4-FFF2-40B4-BE49-F238E27FC236}">
-                <a16:creationId xmlns:a16="http://schemas.microsoft.com/office/drawing/2014/main" id="{F65C476C-5ADC-46D5-AD12-38A5F0E6C149}"/>
+                <a16:creationId xmlns:a16="http://schemas.microsoft.com/office/drawing/2014/main" id="{0A3D7B22-C3EC-42AD-9D9F-8D1482D794BC}"/>
               </a:ext>
             </a:extLst>
           </p:cNvPr>
@@ -9739,7 +9739,7 @@
           <p:cNvPr id="4" name="">
             <a:extLst xmlns:a="http://schemas.openxmlformats.org/drawingml/2006/main">
               <a:ext uri="{FF2B5EF4-FFF2-40B4-BE49-F238E27FC236}">
-                <a16:creationId xmlns:a16="http://schemas.microsoft.com/office/drawing/2014/main" id="{946EF33A-D368-47EE-B0D2-F84706C8CC90}"/>
+                <a16:creationId xmlns:a16="http://schemas.microsoft.com/office/drawing/2014/main" id="{71EB387C-006A-475B-BFD7-56B727FCF0B5}"/>
               </a:ext>
             </a:extLst>
           </p:cNvPr>
@@ -9770,7 +9770,7 @@
           <p:cNvPr id="5" name="">
             <a:extLst xmlns:a="http://schemas.openxmlformats.org/drawingml/2006/main">
               <a:ext uri="{FF2B5EF4-FFF2-40B4-BE49-F238E27FC236}">
-                <a16:creationId xmlns:a16="http://schemas.microsoft.com/office/drawing/2014/main" id="{0A229053-72AA-4B44-B6CE-66970D5852FB}"/>
+                <a16:creationId xmlns:a16="http://schemas.microsoft.com/office/drawing/2014/main" id="{E07D8F52-E103-415B-A962-F63D9BAB2165}"/>
               </a:ext>
             </a:extLst>
           </p:cNvPr>
@@ -9801,7 +9801,7 @@
           <p:cNvPr id="6" name="">
             <a:extLst xmlns:a="http://schemas.openxmlformats.org/drawingml/2006/main">
               <a:ext uri="{FF2B5EF4-FFF2-40B4-BE49-F238E27FC236}">
-                <a16:creationId xmlns:a16="http://schemas.microsoft.com/office/drawing/2014/main" id="{67EFED55-5503-4CFB-A9FC-B2E43377C1BC}"/>
+                <a16:creationId xmlns:a16="http://schemas.microsoft.com/office/drawing/2014/main" id="{0A7C9A03-8897-4B36-AAA2-2ED327D75D9F}"/>
               </a:ext>
             </a:extLst>
           </p:cNvPr>
@@ -9863,7 +9863,7 @@
           <p:cNvPr id="7" name="">
             <a:extLst xmlns:a="http://schemas.openxmlformats.org/drawingml/2006/main">
               <a:ext uri="{FF2B5EF4-FFF2-40B4-BE49-F238E27FC236}">
-                <a16:creationId xmlns:a16="http://schemas.microsoft.com/office/drawing/2014/main" id="{9F5D673B-E72B-4FF8-BA44-554B4D85FB3D}"/>
+                <a16:creationId xmlns:a16="http://schemas.microsoft.com/office/drawing/2014/main" id="{3F09AC8C-B1C5-4931-8193-F55A4C884F5D}"/>
               </a:ext>
             </a:extLst>
           </p:cNvPr>
@@ -9925,7 +9925,7 @@
           <p:cNvPr id="8" name="">
             <a:extLst xmlns:a="http://schemas.openxmlformats.org/drawingml/2006/main">
               <a:ext uri="{FF2B5EF4-FFF2-40B4-BE49-F238E27FC236}">
-                <a16:creationId xmlns:a16="http://schemas.microsoft.com/office/drawing/2014/main" id="{70468549-D4F5-4868-BA4C-F00A68AA2CFE}"/>
+                <a16:creationId xmlns:a16="http://schemas.microsoft.com/office/drawing/2014/main" id="{33E29236-70C6-4A40-B590-360C29EC7DF1}"/>
               </a:ext>
             </a:extLst>
           </p:cNvPr>
@@ -9987,7 +9987,7 @@
           <p:cNvPr id="9" name="">
             <a:extLst xmlns:a="http://schemas.openxmlformats.org/drawingml/2006/main">
               <a:ext uri="{FF2B5EF4-FFF2-40B4-BE49-F238E27FC236}">
-                <a16:creationId xmlns:a16="http://schemas.microsoft.com/office/drawing/2014/main" id="{E5E9BF74-B1EB-4FD0-B592-6DAE9BF643B1}"/>
+                <a16:creationId xmlns:a16="http://schemas.microsoft.com/office/drawing/2014/main" id="{4472C71F-6BCC-4631-94DC-4E55FDF42E29}"/>
               </a:ext>
             </a:extLst>
           </p:cNvPr>
@@ -10018,7 +10018,7 @@
           <p:cNvPr id="10" name="">
             <a:extLst xmlns:a="http://schemas.openxmlformats.org/drawingml/2006/main">
               <a:ext uri="{FF2B5EF4-FFF2-40B4-BE49-F238E27FC236}">
-                <a16:creationId xmlns:a16="http://schemas.microsoft.com/office/drawing/2014/main" id="{9B5AED7A-CC1F-47E1-8F0F-0ED90968D0C4}"/>
+                <a16:creationId xmlns:a16="http://schemas.microsoft.com/office/drawing/2014/main" id="{5FE60B9B-CD3E-486D-9DD8-84356C240A06}"/>
               </a:ext>
             </a:extLst>
           </p:cNvPr>
@@ -10080,7 +10080,7 @@
           <p:cNvPr id="11" name="">
             <a:extLst xmlns:a="http://schemas.openxmlformats.org/drawingml/2006/main">
               <a:ext uri="{FF2B5EF4-FFF2-40B4-BE49-F238E27FC236}">
-                <a16:creationId xmlns:a16="http://schemas.microsoft.com/office/drawing/2014/main" id="{94394CED-EB38-44A9-BA19-17C1D83CF28D}"/>
+                <a16:creationId xmlns:a16="http://schemas.microsoft.com/office/drawing/2014/main" id="{466CA1F2-113C-4BEF-8CEC-3F10795727F4}"/>
               </a:ext>
             </a:extLst>
           </p:cNvPr>
@@ -10142,7 +10142,7 @@
           <p:cNvPr id="12" name="">
             <a:extLst xmlns:a="http://schemas.openxmlformats.org/drawingml/2006/main">
               <a:ext uri="{FF2B5EF4-FFF2-40B4-BE49-F238E27FC236}">
-                <a16:creationId xmlns:a16="http://schemas.microsoft.com/office/drawing/2014/main" id="{D08294E7-8054-4654-B7F3-93C16D2EF29D}"/>
+                <a16:creationId xmlns:a16="http://schemas.microsoft.com/office/drawing/2014/main" id="{961FC929-741C-44E5-B1C8-D93B806C5741}"/>
               </a:ext>
             </a:extLst>
           </p:cNvPr>
@@ -10204,7 +10204,7 @@
           <p:cNvPr id="13" name="">
             <a:extLst xmlns:a="http://schemas.openxmlformats.org/drawingml/2006/main">
               <a:ext uri="{FF2B5EF4-FFF2-40B4-BE49-F238E27FC236}">
-                <a16:creationId xmlns:a16="http://schemas.microsoft.com/office/drawing/2014/main" id="{BC0D5D66-7D84-4504-B4F3-4A66397F50CB}"/>
+                <a16:creationId xmlns:a16="http://schemas.microsoft.com/office/drawing/2014/main" id="{F50D6E6A-EC0E-4E7B-B34E-1BF0E761AC6C}"/>
               </a:ext>
             </a:extLst>
           </p:cNvPr>
@@ -10235,7 +10235,7 @@
           <p:cNvPr id="14" name="">
             <a:extLst xmlns:a="http://schemas.openxmlformats.org/drawingml/2006/main">
               <a:ext uri="{FF2B5EF4-FFF2-40B4-BE49-F238E27FC236}">
-                <a16:creationId xmlns:a16="http://schemas.microsoft.com/office/drawing/2014/main" id="{685AD8AF-C42C-45E5-B7A8-027928E82EFE}"/>
+                <a16:creationId xmlns:a16="http://schemas.microsoft.com/office/drawing/2014/main" id="{3738067A-D88F-4F38-8677-B74E2E4205CA}"/>
               </a:ext>
             </a:extLst>
           </p:cNvPr>
@@ -10297,7 +10297,7 @@
           <p:cNvPr id="15" name="">
             <a:extLst xmlns:a="http://schemas.openxmlformats.org/drawingml/2006/main">
               <a:ext uri="{FF2B5EF4-FFF2-40B4-BE49-F238E27FC236}">
-                <a16:creationId xmlns:a16="http://schemas.microsoft.com/office/drawing/2014/main" id="{CA5C4C98-1DA3-483D-86A3-12DAECBF082A}"/>
+                <a16:creationId xmlns:a16="http://schemas.microsoft.com/office/drawing/2014/main" id="{724FE272-32CC-4A7D-9D54-71D9DC62D975}"/>
               </a:ext>
             </a:extLst>
           </p:cNvPr>
@@ -10359,7 +10359,7 @@
           <p:cNvPr id="16" name="">
             <a:extLst xmlns:a="http://schemas.openxmlformats.org/drawingml/2006/main">
               <a:ext uri="{FF2B5EF4-FFF2-40B4-BE49-F238E27FC236}">
-                <a16:creationId xmlns:a16="http://schemas.microsoft.com/office/drawing/2014/main" id="{44DF70B2-F28E-40F4-ACBA-3C13F5F8F42B}"/>
+                <a16:creationId xmlns:a16="http://schemas.microsoft.com/office/drawing/2014/main" id="{860A2DA3-E713-4ADF-B85E-8875EB9F6005}"/>
               </a:ext>
             </a:extLst>
           </p:cNvPr>
@@ -10421,7 +10421,7 @@
           <p:cNvPr id="17" name="">
             <a:extLst xmlns:a="http://schemas.openxmlformats.org/drawingml/2006/main">
               <a:ext uri="{FF2B5EF4-FFF2-40B4-BE49-F238E27FC236}">
-                <a16:creationId xmlns:a16="http://schemas.microsoft.com/office/drawing/2014/main" id="{F3C392B7-D250-40FB-A71B-B74A9F363DD4}"/>
+                <a16:creationId xmlns:a16="http://schemas.microsoft.com/office/drawing/2014/main" id="{01D3382A-E5B8-4968-B9ED-3A8DE55C9ECC}"/>
               </a:ext>
             </a:extLst>
           </p:cNvPr>
@@ -10483,7 +10483,7 @@
           <p:cNvPr id="18" name="footer-rule-16">
             <a:extLst xmlns:a="http://schemas.openxmlformats.org/drawingml/2006/main">
               <a:ext uri="{FF2B5EF4-FFF2-40B4-BE49-F238E27FC236}">
-                <a16:creationId xmlns:a16="http://schemas.microsoft.com/office/drawing/2014/main" id="{56F0A987-8EAC-440C-B50E-8EC371D38081}"/>
+                <a16:creationId xmlns:a16="http://schemas.microsoft.com/office/drawing/2014/main" id="{38921732-F854-4DA4-8F05-A834110B881D}"/>
               </a:ext>
             </a:extLst>
           </p:cNvPr>
@@ -10514,7 +10514,7 @@
           <p:cNvPr id="19" name="footer-label-16">
             <a:extLst xmlns:a="http://schemas.openxmlformats.org/drawingml/2006/main">
               <a:ext uri="{FF2B5EF4-FFF2-40B4-BE49-F238E27FC236}">
-                <a16:creationId xmlns:a16="http://schemas.microsoft.com/office/drawing/2014/main" id="{5EFC304A-40A9-4541-B0DD-8CCE4AC09A52}"/>
+                <a16:creationId xmlns:a16="http://schemas.microsoft.com/office/drawing/2014/main" id="{49732D90-0661-4DC0-A406-4776C03E313A}"/>
               </a:ext>
             </a:extLst>
           </p:cNvPr>
@@ -10576,7 +10576,7 @@
           <p:cNvPr id="20" name="footer-page-16">
             <a:extLst xmlns:a="http://schemas.openxmlformats.org/drawingml/2006/main">
               <a:ext uri="{FF2B5EF4-FFF2-40B4-BE49-F238E27FC236}">
-                <a16:creationId xmlns:a16="http://schemas.microsoft.com/office/drawing/2014/main" id="{1359E84C-B497-4CE9-B1B3-E84FA427D80A}"/>
+                <a16:creationId xmlns:a16="http://schemas.microsoft.com/office/drawing/2014/main" id="{D1FD73CD-193E-4559-A756-260A984F978A}"/>
               </a:ext>
             </a:extLst>
           </p:cNvPr>
@@ -10636,7 +10636,7 @@
     </p:spTree>
     <p:extLst>
       <p:ext uri="{BB962C8B-B14F-4D97-AF65-F5344CB8AC3E}">
-        <p14:creationId xmlns:p14="http://schemas.microsoft.com/office/powerpoint/2010/main" val="1388251588"/>
+        <p14:creationId xmlns:p14="http://schemas.microsoft.com/office/powerpoint/2010/main" val="989540095"/>
       </p:ext>
     </p:extLst>
   </p:cSld>
@@ -10667,7 +10667,7 @@
           <p:cNvPr id="22" name="side-accent-17">
             <a:extLst xmlns:a="http://schemas.openxmlformats.org/drawingml/2006/main">
               <a:ext uri="{FF2B5EF4-FFF2-40B4-BE49-F238E27FC236}">
-                <a16:creationId xmlns:a16="http://schemas.microsoft.com/office/drawing/2014/main" id="{3C6F2300-FC3B-4F61-930D-8E1EF0EB62E4}"/>
+                <a16:creationId xmlns:a16="http://schemas.microsoft.com/office/drawing/2014/main" id="{5874CDC2-2814-49F5-B1CC-0CDCA4EACB3F}"/>
               </a:ext>
             </a:extLst>
           </p:cNvPr>
@@ -10698,7 +10698,7 @@
           <p:cNvPr id="2" name="kicker-17">
             <a:extLst xmlns:a="http://schemas.openxmlformats.org/drawingml/2006/main">
               <a:ext uri="{FF2B5EF4-FFF2-40B4-BE49-F238E27FC236}">
-                <a16:creationId xmlns:a16="http://schemas.microsoft.com/office/drawing/2014/main" id="{E0DE46A0-CDFC-43F3-98D4-7F4A64609AEC}"/>
+                <a16:creationId xmlns:a16="http://schemas.microsoft.com/office/drawing/2014/main" id="{9BA6637E-131E-4CFD-81E9-68D6C9A3C3DB}"/>
               </a:ext>
             </a:extLst>
           </p:cNvPr>
@@ -10760,7 +10760,7 @@
           <p:cNvPr id="3" name="title-17">
             <a:extLst xmlns:a="http://schemas.openxmlformats.org/drawingml/2006/main">
               <a:ext uri="{FF2B5EF4-FFF2-40B4-BE49-F238E27FC236}">
-                <a16:creationId xmlns:a16="http://schemas.microsoft.com/office/drawing/2014/main" id="{A00790A6-812D-4DF4-A823-287C9788A5C2}"/>
+                <a16:creationId xmlns:a16="http://schemas.microsoft.com/office/drawing/2014/main" id="{91AF98D1-1379-4BF1-852C-936277DFB6BD}"/>
               </a:ext>
             </a:extLst>
           </p:cNvPr>
@@ -10822,7 +10822,7 @@
           <p:cNvPr id="4" name="">
             <a:extLst xmlns:a="http://schemas.openxmlformats.org/drawingml/2006/main">
               <a:ext uri="{FF2B5EF4-FFF2-40B4-BE49-F238E27FC236}">
-                <a16:creationId xmlns:a16="http://schemas.microsoft.com/office/drawing/2014/main" id="{33AA9EDD-AF65-484F-91B5-3E968853D17E}"/>
+                <a16:creationId xmlns:a16="http://schemas.microsoft.com/office/drawing/2014/main" id="{F5A3D44E-61D7-4B1A-A92C-A973D2ECD6F5}"/>
               </a:ext>
             </a:extLst>
           </p:cNvPr>
@@ -10884,7 +10884,7 @@
           <p:cNvPr id="5" name="">
             <a:extLst xmlns:a="http://schemas.openxmlformats.org/drawingml/2006/main">
               <a:ext uri="{FF2B5EF4-FFF2-40B4-BE49-F238E27FC236}">
-                <a16:creationId xmlns:a16="http://schemas.microsoft.com/office/drawing/2014/main" id="{6AEBE8C7-8FD9-4997-84BF-CD10A7715CCB}"/>
+                <a16:creationId xmlns:a16="http://schemas.microsoft.com/office/drawing/2014/main" id="{6D8A5629-B873-4314-97F0-F5F1534F574C}"/>
               </a:ext>
             </a:extLst>
           </p:cNvPr>
@@ -10915,7 +10915,7 @@
           <p:cNvPr id="6" name="">
             <a:extLst xmlns:a="http://schemas.openxmlformats.org/drawingml/2006/main">
               <a:ext uri="{FF2B5EF4-FFF2-40B4-BE49-F238E27FC236}">
-                <a16:creationId xmlns:a16="http://schemas.microsoft.com/office/drawing/2014/main" id="{FF3E1524-7EE1-4CE4-896B-3F237EF91174}"/>
+                <a16:creationId xmlns:a16="http://schemas.microsoft.com/office/drawing/2014/main" id="{C687BA64-C40E-43EC-BE4E-AD881FC4B138}"/>
               </a:ext>
             </a:extLst>
           </p:cNvPr>
@@ -10977,7 +10977,7 @@
           <p:cNvPr id="7" name="">
             <a:extLst xmlns:a="http://schemas.openxmlformats.org/drawingml/2006/main">
               <a:ext uri="{FF2B5EF4-FFF2-40B4-BE49-F238E27FC236}">
-                <a16:creationId xmlns:a16="http://schemas.microsoft.com/office/drawing/2014/main" id="{D877DA91-C77C-495B-8F8C-7E5F72F21A52}"/>
+                <a16:creationId xmlns:a16="http://schemas.microsoft.com/office/drawing/2014/main" id="{25D48545-A482-43E5-AB4D-86DB5FB4CC4D}"/>
               </a:ext>
             </a:extLst>
           </p:cNvPr>
@@ -11039,7 +11039,7 @@
           <p:cNvPr id="8" name="">
             <a:extLst xmlns:a="http://schemas.openxmlformats.org/drawingml/2006/main">
               <a:ext uri="{FF2B5EF4-FFF2-40B4-BE49-F238E27FC236}">
-                <a16:creationId xmlns:a16="http://schemas.microsoft.com/office/drawing/2014/main" id="{DC313179-069C-4072-A1BA-39FD43DFFA30}"/>
+                <a16:creationId xmlns:a16="http://schemas.microsoft.com/office/drawing/2014/main" id="{EF083304-588F-44AF-9FF3-455709829123}"/>
               </a:ext>
             </a:extLst>
           </p:cNvPr>
@@ -11070,7 +11070,7 @@
           <p:cNvPr id="9" name="">
             <a:extLst xmlns:a="http://schemas.openxmlformats.org/drawingml/2006/main">
               <a:ext uri="{FF2B5EF4-FFF2-40B4-BE49-F238E27FC236}">
-                <a16:creationId xmlns:a16="http://schemas.microsoft.com/office/drawing/2014/main" id="{356AF692-996E-4E07-8BAC-4E195BA622A3}"/>
+                <a16:creationId xmlns:a16="http://schemas.microsoft.com/office/drawing/2014/main" id="{62112760-AFB7-4768-AE19-CBBD19C5B413}"/>
               </a:ext>
             </a:extLst>
           </p:cNvPr>
@@ -11132,7 +11132,7 @@
           <p:cNvPr id="10" name="">
             <a:extLst xmlns:a="http://schemas.openxmlformats.org/drawingml/2006/main">
               <a:ext uri="{FF2B5EF4-FFF2-40B4-BE49-F238E27FC236}">
-                <a16:creationId xmlns:a16="http://schemas.microsoft.com/office/drawing/2014/main" id="{09D82071-551F-44F5-BF92-9CA9D1ED4E74}"/>
+                <a16:creationId xmlns:a16="http://schemas.microsoft.com/office/drawing/2014/main" id="{B6FB4668-BB53-4312-8B2D-F23811C09D4D}"/>
               </a:ext>
             </a:extLst>
           </p:cNvPr>
@@ -11194,7 +11194,7 @@
           <p:cNvPr id="11" name="">
             <a:extLst xmlns:a="http://schemas.openxmlformats.org/drawingml/2006/main">
               <a:ext uri="{FF2B5EF4-FFF2-40B4-BE49-F238E27FC236}">
-                <a16:creationId xmlns:a16="http://schemas.microsoft.com/office/drawing/2014/main" id="{A3268E39-7D0A-4051-8045-718156016A2A}"/>
+                <a16:creationId xmlns:a16="http://schemas.microsoft.com/office/drawing/2014/main" id="{2B6C57FB-A908-45F8-B8EB-0B75C1694486}"/>
               </a:ext>
             </a:extLst>
           </p:cNvPr>
@@ -11225,7 +11225,7 @@
           <p:cNvPr id="12" name="">
             <a:extLst xmlns:a="http://schemas.openxmlformats.org/drawingml/2006/main">
               <a:ext uri="{FF2B5EF4-FFF2-40B4-BE49-F238E27FC236}">
-                <a16:creationId xmlns:a16="http://schemas.microsoft.com/office/drawing/2014/main" id="{DA9AD50C-0A35-412D-94D6-BAA07B698DBB}"/>
+                <a16:creationId xmlns:a16="http://schemas.microsoft.com/office/drawing/2014/main" id="{1CA97E19-7689-4189-AEF3-B974624A3826}"/>
               </a:ext>
             </a:extLst>
           </p:cNvPr>
@@ -11287,7 +11287,7 @@
           <p:cNvPr id="13" name="">
             <a:extLst xmlns:a="http://schemas.openxmlformats.org/drawingml/2006/main">
               <a:ext uri="{FF2B5EF4-FFF2-40B4-BE49-F238E27FC236}">
-                <a16:creationId xmlns:a16="http://schemas.microsoft.com/office/drawing/2014/main" id="{D87EDB9C-C1E9-4062-9CB8-3B1C17E80CCB}"/>
+                <a16:creationId xmlns:a16="http://schemas.microsoft.com/office/drawing/2014/main" id="{A13BD32A-8B80-44AA-9283-90E8784C23ED}"/>
               </a:ext>
             </a:extLst>
           </p:cNvPr>
@@ -11349,7 +11349,7 @@
           <p:cNvPr id="14" name="">
             <a:extLst xmlns:a="http://schemas.openxmlformats.org/drawingml/2006/main">
               <a:ext uri="{FF2B5EF4-FFF2-40B4-BE49-F238E27FC236}">
-                <a16:creationId xmlns:a16="http://schemas.microsoft.com/office/drawing/2014/main" id="{6F52A453-AFC8-46C5-AFE5-B0E089E46196}"/>
+                <a16:creationId xmlns:a16="http://schemas.microsoft.com/office/drawing/2014/main" id="{38756910-961B-49BF-B25F-E1BAEBC2F84F}"/>
               </a:ext>
             </a:extLst>
           </p:cNvPr>
@@ -11380,7 +11380,7 @@
           <p:cNvPr id="15" name="">
             <a:extLst xmlns:a="http://schemas.openxmlformats.org/drawingml/2006/main">
               <a:ext uri="{FF2B5EF4-FFF2-40B4-BE49-F238E27FC236}">
-                <a16:creationId xmlns:a16="http://schemas.microsoft.com/office/drawing/2014/main" id="{3557A421-AE7F-4400-B141-E10CC5318C6D}"/>
+                <a16:creationId xmlns:a16="http://schemas.microsoft.com/office/drawing/2014/main" id="{14A7BF4E-BBD4-40F4-9E81-7BFF07733C7C}"/>
               </a:ext>
             </a:extLst>
           </p:cNvPr>
@@ -11442,7 +11442,7 @@
           <p:cNvPr id="16" name="">
             <a:extLst xmlns:a="http://schemas.openxmlformats.org/drawingml/2006/main">
               <a:ext uri="{FF2B5EF4-FFF2-40B4-BE49-F238E27FC236}">
-                <a16:creationId xmlns:a16="http://schemas.microsoft.com/office/drawing/2014/main" id="{AEF83E43-41CD-40B3-8C0E-AB5AEAEC28D7}"/>
+                <a16:creationId xmlns:a16="http://schemas.microsoft.com/office/drawing/2014/main" id="{0D79197D-9D19-4B1E-AE3B-59BAA4D9889E}"/>
               </a:ext>
             </a:extLst>
           </p:cNvPr>
@@ -11504,7 +11504,7 @@
           <p:cNvPr id="17" name="">
             <a:extLst xmlns:a="http://schemas.openxmlformats.org/drawingml/2006/main">
               <a:ext uri="{FF2B5EF4-FFF2-40B4-BE49-F238E27FC236}">
-                <a16:creationId xmlns:a16="http://schemas.microsoft.com/office/drawing/2014/main" id="{F20567ED-721E-4B9B-BCA4-016E71AFA890}"/>
+                <a16:creationId xmlns:a16="http://schemas.microsoft.com/office/drawing/2014/main" id="{92BC49A0-3D11-4A0A-B584-EDD768004B0B}"/>
               </a:ext>
             </a:extLst>
           </p:cNvPr>
@@ -11537,7 +11537,7 @@
           <p:cNvPr id="18" name="">
             <a:extLst xmlns:a="http://schemas.openxmlformats.org/drawingml/2006/main">
               <a:ext uri="{FF2B5EF4-FFF2-40B4-BE49-F238E27FC236}">
-                <a16:creationId xmlns:a16="http://schemas.microsoft.com/office/drawing/2014/main" id="{4B2F9573-79A3-4AB3-8BB2-FC5E38852D0A}"/>
+                <a16:creationId xmlns:a16="http://schemas.microsoft.com/office/drawing/2014/main" id="{F663B496-0C34-444B-834B-FFEC09172141}"/>
               </a:ext>
             </a:extLst>
           </p:cNvPr>
@@ -11599,7 +11599,7 @@
           <p:cNvPr id="19" name="footer-rule-17">
             <a:extLst xmlns:a="http://schemas.openxmlformats.org/drawingml/2006/main">
               <a:ext uri="{FF2B5EF4-FFF2-40B4-BE49-F238E27FC236}">
-                <a16:creationId xmlns:a16="http://schemas.microsoft.com/office/drawing/2014/main" id="{824A75CF-F316-4480-8FAF-BA3ACBE61321}"/>
+                <a16:creationId xmlns:a16="http://schemas.microsoft.com/office/drawing/2014/main" id="{751A410C-7CC7-4EB3-91DF-D5E5C635D944}"/>
               </a:ext>
             </a:extLst>
           </p:cNvPr>
@@ -11630,7 +11630,7 @@
           <p:cNvPr id="20" name="footer-label-17">
             <a:extLst xmlns:a="http://schemas.openxmlformats.org/drawingml/2006/main">
               <a:ext uri="{FF2B5EF4-FFF2-40B4-BE49-F238E27FC236}">
-                <a16:creationId xmlns:a16="http://schemas.microsoft.com/office/drawing/2014/main" id="{4E18B86A-0368-49B9-915E-1ED4D0DED610}"/>
+                <a16:creationId xmlns:a16="http://schemas.microsoft.com/office/drawing/2014/main" id="{4D07DC89-3FB3-4285-85CE-0BFCA0F7B237}"/>
               </a:ext>
             </a:extLst>
           </p:cNvPr>
@@ -11692,7 +11692,7 @@
           <p:cNvPr id="21" name="footer-page-17">
             <a:extLst xmlns:a="http://schemas.openxmlformats.org/drawingml/2006/main">
               <a:ext uri="{FF2B5EF4-FFF2-40B4-BE49-F238E27FC236}">
-                <a16:creationId xmlns:a16="http://schemas.microsoft.com/office/drawing/2014/main" id="{CF01AD6C-3AD4-4F3B-81D9-4C10A4C0C4DE}"/>
+                <a16:creationId xmlns:a16="http://schemas.microsoft.com/office/drawing/2014/main" id="{70580EDE-6A68-4C1F-97D3-663D30EF8EE4}"/>
               </a:ext>
             </a:extLst>
           </p:cNvPr>
@@ -11752,7 +11752,7 @@
     </p:spTree>
     <p:extLst>
       <p:ext uri="{BB962C8B-B14F-4D97-AF65-F5344CB8AC3E}">
-        <p14:creationId xmlns:p14="http://schemas.microsoft.com/office/powerpoint/2010/main" val="2086466624"/>
+        <p14:creationId xmlns:p14="http://schemas.microsoft.com/office/powerpoint/2010/main" val="987645612"/>
       </p:ext>
     </p:extLst>
   </p:cSld>
@@ -11783,7 +11783,7 @@
           <p:cNvPr id="25" name="side-accent-18">
             <a:extLst xmlns:a="http://schemas.openxmlformats.org/drawingml/2006/main">
               <a:ext uri="{FF2B5EF4-FFF2-40B4-BE49-F238E27FC236}">
-                <a16:creationId xmlns:a16="http://schemas.microsoft.com/office/drawing/2014/main" id="{9E83E7F5-9AAC-4C15-99AC-933538FA632D}"/>
+                <a16:creationId xmlns:a16="http://schemas.microsoft.com/office/drawing/2014/main" id="{4DFEB07B-B090-4887-99CB-6CF07481D226}"/>
               </a:ext>
             </a:extLst>
           </p:cNvPr>
@@ -11814,7 +11814,7 @@
           <p:cNvPr id="2" name="kicker-18">
             <a:extLst xmlns:a="http://schemas.openxmlformats.org/drawingml/2006/main">
               <a:ext uri="{FF2B5EF4-FFF2-40B4-BE49-F238E27FC236}">
-                <a16:creationId xmlns:a16="http://schemas.microsoft.com/office/drawing/2014/main" id="{DF6A2D5F-E6AF-48FA-9DB8-E7FBD2074644}"/>
+                <a16:creationId xmlns:a16="http://schemas.microsoft.com/office/drawing/2014/main" id="{BBC533D7-F4B8-4ADB-BDF4-DB850003116C}"/>
               </a:ext>
             </a:extLst>
           </p:cNvPr>
@@ -11876,7 +11876,7 @@
           <p:cNvPr id="3" name="title-18">
             <a:extLst xmlns:a="http://schemas.openxmlformats.org/drawingml/2006/main">
               <a:ext uri="{FF2B5EF4-FFF2-40B4-BE49-F238E27FC236}">
-                <a16:creationId xmlns:a16="http://schemas.microsoft.com/office/drawing/2014/main" id="{51A9E250-8F15-4B0B-8731-486457E3D935}"/>
+                <a16:creationId xmlns:a16="http://schemas.microsoft.com/office/drawing/2014/main" id="{62662B87-5D1E-4DA2-99DB-B6997E18BFFA}"/>
               </a:ext>
             </a:extLst>
           </p:cNvPr>
@@ -11938,7 +11938,7 @@
           <p:cNvPr id="4" name="">
             <a:extLst xmlns:a="http://schemas.openxmlformats.org/drawingml/2006/main">
               <a:ext uri="{FF2B5EF4-FFF2-40B4-BE49-F238E27FC236}">
-                <a16:creationId xmlns:a16="http://schemas.microsoft.com/office/drawing/2014/main" id="{2CC9FA93-56E1-4DA9-ABEF-C6541AAC6DE2}"/>
+                <a16:creationId xmlns:a16="http://schemas.microsoft.com/office/drawing/2014/main" id="{716C54B0-2DF9-4696-819E-ED96D0515A9B}"/>
               </a:ext>
             </a:extLst>
           </p:cNvPr>
@@ -12000,7 +12000,7 @@
           <p:cNvPr id="5" name="">
             <a:extLst xmlns:a="http://schemas.openxmlformats.org/drawingml/2006/main">
               <a:ext uri="{FF2B5EF4-FFF2-40B4-BE49-F238E27FC236}">
-                <a16:creationId xmlns:a16="http://schemas.microsoft.com/office/drawing/2014/main" id="{710222C2-2125-442E-932E-BB07FC74A13A}"/>
+                <a16:creationId xmlns:a16="http://schemas.microsoft.com/office/drawing/2014/main" id="{E9D0DFA6-E36B-4BA6-A379-324CB71E38B4}"/>
               </a:ext>
             </a:extLst>
           </p:cNvPr>
@@ -12062,7 +12062,7 @@
           <p:cNvPr id="6" name="">
             <a:extLst xmlns:a="http://schemas.openxmlformats.org/drawingml/2006/main">
               <a:ext uri="{FF2B5EF4-FFF2-40B4-BE49-F238E27FC236}">
-                <a16:creationId xmlns:a16="http://schemas.microsoft.com/office/drawing/2014/main" id="{13E0C0F9-3546-43A9-9B66-49F584716084}"/>
+                <a16:creationId xmlns:a16="http://schemas.microsoft.com/office/drawing/2014/main" id="{63A5D011-13B9-4B95-937F-04DA2134076E}"/>
               </a:ext>
             </a:extLst>
           </p:cNvPr>
@@ -12124,7 +12124,7 @@
           <p:cNvPr id="7" name="">
             <a:extLst xmlns:a="http://schemas.openxmlformats.org/drawingml/2006/main">
               <a:ext uri="{FF2B5EF4-FFF2-40B4-BE49-F238E27FC236}">
-                <a16:creationId xmlns:a16="http://schemas.microsoft.com/office/drawing/2014/main" id="{88000F09-96C7-4555-ADCF-5532333EE26D}"/>
+                <a16:creationId xmlns:a16="http://schemas.microsoft.com/office/drawing/2014/main" id="{1E22FE7C-FD97-4854-B58F-49B4CF9B84AA}"/>
               </a:ext>
             </a:extLst>
           </p:cNvPr>
@@ -12155,7 +12155,7 @@
           <p:cNvPr id="8" name="">
             <a:extLst xmlns:a="http://schemas.openxmlformats.org/drawingml/2006/main">
               <a:ext uri="{FF2B5EF4-FFF2-40B4-BE49-F238E27FC236}">
-                <a16:creationId xmlns:a16="http://schemas.microsoft.com/office/drawing/2014/main" id="{D99AD6CD-64B2-4FD2-955C-D3D7B0CA832D}"/>
+                <a16:creationId xmlns:a16="http://schemas.microsoft.com/office/drawing/2014/main" id="{A6BFBC38-884D-42C3-8370-1C6FF5258659}"/>
               </a:ext>
             </a:extLst>
           </p:cNvPr>
@@ -12217,7 +12217,7 @@
           <p:cNvPr id="9" name="">
             <a:extLst xmlns:a="http://schemas.openxmlformats.org/drawingml/2006/main">
               <a:ext uri="{FF2B5EF4-FFF2-40B4-BE49-F238E27FC236}">
-                <a16:creationId xmlns:a16="http://schemas.microsoft.com/office/drawing/2014/main" id="{288179BF-D44A-4886-B9AB-D6E00CE30198}"/>
+                <a16:creationId xmlns:a16="http://schemas.microsoft.com/office/drawing/2014/main" id="{655264AF-8767-435D-89DD-B54235CF15C5}"/>
               </a:ext>
             </a:extLst>
           </p:cNvPr>
@@ -12279,7 +12279,7 @@
           <p:cNvPr id="10" name="">
             <a:extLst xmlns:a="http://schemas.openxmlformats.org/drawingml/2006/main">
               <a:ext uri="{FF2B5EF4-FFF2-40B4-BE49-F238E27FC236}">
-                <a16:creationId xmlns:a16="http://schemas.microsoft.com/office/drawing/2014/main" id="{DB292FCB-7927-42F0-B9AD-DC7980AAAB54}"/>
+                <a16:creationId xmlns:a16="http://schemas.microsoft.com/office/drawing/2014/main" id="{9D019F20-42CD-4D47-9A5E-760137D5BC17}"/>
               </a:ext>
             </a:extLst>
           </p:cNvPr>
@@ -12341,7 +12341,7 @@
           <p:cNvPr id="11" name="">
             <a:extLst xmlns:a="http://schemas.openxmlformats.org/drawingml/2006/main">
               <a:ext uri="{FF2B5EF4-FFF2-40B4-BE49-F238E27FC236}">
-                <a16:creationId xmlns:a16="http://schemas.microsoft.com/office/drawing/2014/main" id="{5BB4C902-106E-417D-8909-0CCE60869D1F}"/>
+                <a16:creationId xmlns:a16="http://schemas.microsoft.com/office/drawing/2014/main" id="{EF230137-9563-4BE8-90BA-1130F784E881}"/>
               </a:ext>
             </a:extLst>
           </p:cNvPr>
@@ -12372,7 +12372,7 @@
           <p:cNvPr id="12" name="">
             <a:extLst xmlns:a="http://schemas.openxmlformats.org/drawingml/2006/main">
               <a:ext uri="{FF2B5EF4-FFF2-40B4-BE49-F238E27FC236}">
-                <a16:creationId xmlns:a16="http://schemas.microsoft.com/office/drawing/2014/main" id="{C924B469-7F27-4ED0-A646-99ACC220E398}"/>
+                <a16:creationId xmlns:a16="http://schemas.microsoft.com/office/drawing/2014/main" id="{3BDB46DE-C0E1-4700-AA11-F6493050C605}"/>
               </a:ext>
             </a:extLst>
           </p:cNvPr>
@@ -12434,7 +12434,7 @@
           <p:cNvPr id="13" name="">
             <a:extLst xmlns:a="http://schemas.openxmlformats.org/drawingml/2006/main">
               <a:ext uri="{FF2B5EF4-FFF2-40B4-BE49-F238E27FC236}">
-                <a16:creationId xmlns:a16="http://schemas.microsoft.com/office/drawing/2014/main" id="{59CBD49C-ACF1-4F16-A0FC-512C3DF9B56A}"/>
+                <a16:creationId xmlns:a16="http://schemas.microsoft.com/office/drawing/2014/main" id="{7CC58F9B-E377-4690-80A5-C110DD271791}"/>
               </a:ext>
             </a:extLst>
           </p:cNvPr>
@@ -12496,7 +12496,7 @@
           <p:cNvPr id="14" name="">
             <a:extLst xmlns:a="http://schemas.openxmlformats.org/drawingml/2006/main">
               <a:ext uri="{FF2B5EF4-FFF2-40B4-BE49-F238E27FC236}">
-                <a16:creationId xmlns:a16="http://schemas.microsoft.com/office/drawing/2014/main" id="{E14175EE-6556-435D-81A3-C8FAFB102580}"/>
+                <a16:creationId xmlns:a16="http://schemas.microsoft.com/office/drawing/2014/main" id="{E3FD4F2C-C165-4DB9-8EED-9EFE74C5C736}"/>
               </a:ext>
             </a:extLst>
           </p:cNvPr>
@@ -12558,7 +12558,7 @@
           <p:cNvPr id="15" name="">
             <a:extLst xmlns:a="http://schemas.openxmlformats.org/drawingml/2006/main">
               <a:ext uri="{FF2B5EF4-FFF2-40B4-BE49-F238E27FC236}">
-                <a16:creationId xmlns:a16="http://schemas.microsoft.com/office/drawing/2014/main" id="{A272893B-0F46-46FD-B4E1-9BA6B31BE746}"/>
+                <a16:creationId xmlns:a16="http://schemas.microsoft.com/office/drawing/2014/main" id="{47E8C90C-CFA4-4FD7-9DD6-76E2450E2504}"/>
               </a:ext>
             </a:extLst>
           </p:cNvPr>
@@ -12589,7 +12589,7 @@
           <p:cNvPr id="16" name="">
             <a:extLst xmlns:a="http://schemas.openxmlformats.org/drawingml/2006/main">
               <a:ext uri="{FF2B5EF4-FFF2-40B4-BE49-F238E27FC236}">
-                <a16:creationId xmlns:a16="http://schemas.microsoft.com/office/drawing/2014/main" id="{4FB2861F-BC96-45D9-B8AA-3527D47B990F}"/>
+                <a16:creationId xmlns:a16="http://schemas.microsoft.com/office/drawing/2014/main" id="{AC4A1AEC-A757-4D03-9A9B-2256611680BD}"/>
               </a:ext>
             </a:extLst>
           </p:cNvPr>
@@ -12651,7 +12651,7 @@
           <p:cNvPr id="17" name="">
             <a:extLst xmlns:a="http://schemas.openxmlformats.org/drawingml/2006/main">
               <a:ext uri="{FF2B5EF4-FFF2-40B4-BE49-F238E27FC236}">
-                <a16:creationId xmlns:a16="http://schemas.microsoft.com/office/drawing/2014/main" id="{74492C30-2986-4C81-99B1-B47A34CFB0E8}"/>
+                <a16:creationId xmlns:a16="http://schemas.microsoft.com/office/drawing/2014/main" id="{344FF67E-E7FC-4004-8E94-5503A388E205}"/>
               </a:ext>
             </a:extLst>
           </p:cNvPr>
@@ -12713,7 +12713,7 @@
           <p:cNvPr id="18" name="">
             <a:extLst xmlns:a="http://schemas.openxmlformats.org/drawingml/2006/main">
               <a:ext uri="{FF2B5EF4-FFF2-40B4-BE49-F238E27FC236}">
-                <a16:creationId xmlns:a16="http://schemas.microsoft.com/office/drawing/2014/main" id="{F735B5CA-7795-4C2E-9031-55D326899109}"/>
+                <a16:creationId xmlns:a16="http://schemas.microsoft.com/office/drawing/2014/main" id="{13A7F93C-2F46-4A8B-BEB8-540764064E21}"/>
               </a:ext>
             </a:extLst>
           </p:cNvPr>
@@ -12775,7 +12775,7 @@
           <p:cNvPr id="19" name="">
             <a:extLst xmlns:a="http://schemas.openxmlformats.org/drawingml/2006/main">
               <a:ext uri="{FF2B5EF4-FFF2-40B4-BE49-F238E27FC236}">
-                <a16:creationId xmlns:a16="http://schemas.microsoft.com/office/drawing/2014/main" id="{6EFE779A-7D18-4268-835E-F20EB25113B7}"/>
+                <a16:creationId xmlns:a16="http://schemas.microsoft.com/office/drawing/2014/main" id="{4D8489B0-A68B-484B-8446-7066A6C22E79}"/>
               </a:ext>
             </a:extLst>
           </p:cNvPr>
@@ -12808,7 +12808,7 @@
           <p:cNvPr id="20" name="">
             <a:extLst xmlns:a="http://schemas.openxmlformats.org/drawingml/2006/main">
               <a:ext uri="{FF2B5EF4-FFF2-40B4-BE49-F238E27FC236}">
-                <a16:creationId xmlns:a16="http://schemas.microsoft.com/office/drawing/2014/main" id="{6A3D5C91-E237-4B81-BAD0-AC07E52D4130}"/>
+                <a16:creationId xmlns:a16="http://schemas.microsoft.com/office/drawing/2014/main" id="{05A83517-873A-4E19-AB82-0C7672BE9B17}"/>
               </a:ext>
             </a:extLst>
           </p:cNvPr>
@@ -12874,7 +12874,7 @@
           <p:nvPr/>
         </p:nvPicPr>
         <p:blipFill>
-          <a:blip xmlns:r="http://schemas.openxmlformats.org/officeDocument/2006/relationships" xmlns:a="http://schemas.openxmlformats.org/drawingml/2006/main" r:embed="R53b7f7bb96be4ed3"/>
+          <a:blip xmlns:r="http://schemas.openxmlformats.org/officeDocument/2006/relationships" xmlns:a="http://schemas.openxmlformats.org/drawingml/2006/main" r:embed="Rd40b59ebce364ffd"/>
           <a:stretch xmlns:a="http://schemas.openxmlformats.org/drawingml/2006/main"/>
         </p:blipFill>
         <p:spPr>
@@ -12892,7 +12892,7 @@
           <p:cNvPr id="22" name="footer-rule-18">
             <a:extLst xmlns:a="http://schemas.openxmlformats.org/drawingml/2006/main">
               <a:ext uri="{FF2B5EF4-FFF2-40B4-BE49-F238E27FC236}">
-                <a16:creationId xmlns:a16="http://schemas.microsoft.com/office/drawing/2014/main" id="{94AE7D44-C79D-4473-B392-9B921CD28264}"/>
+                <a16:creationId xmlns:a16="http://schemas.microsoft.com/office/drawing/2014/main" id="{A60CCDB7-8192-4C2B-BECE-74385F1EEB59}"/>
               </a:ext>
             </a:extLst>
           </p:cNvPr>
@@ -12923,7 +12923,7 @@
           <p:cNvPr id="23" name="footer-label-18">
             <a:extLst xmlns:a="http://schemas.openxmlformats.org/drawingml/2006/main">
               <a:ext uri="{FF2B5EF4-FFF2-40B4-BE49-F238E27FC236}">
-                <a16:creationId xmlns:a16="http://schemas.microsoft.com/office/drawing/2014/main" id="{3E1142C1-1189-4969-8103-56D590EE3481}"/>
+                <a16:creationId xmlns:a16="http://schemas.microsoft.com/office/drawing/2014/main" id="{16F7F4E2-58F1-4502-9886-13DB0EE00726}"/>
               </a:ext>
             </a:extLst>
           </p:cNvPr>
@@ -12985,7 +12985,7 @@
           <p:cNvPr id="24" name="footer-page-18">
             <a:extLst xmlns:a="http://schemas.openxmlformats.org/drawingml/2006/main">
               <a:ext uri="{FF2B5EF4-FFF2-40B4-BE49-F238E27FC236}">
-                <a16:creationId xmlns:a16="http://schemas.microsoft.com/office/drawing/2014/main" id="{B9E97FF4-5B08-42F0-BA0B-EF4E85787EFE}"/>
+                <a16:creationId xmlns:a16="http://schemas.microsoft.com/office/drawing/2014/main" id="{35C42300-8ED7-4A37-A6EF-21FEFA29F474}"/>
               </a:ext>
             </a:extLst>
           </p:cNvPr>
@@ -13045,7 +13045,7 @@
     </p:spTree>
     <p:extLst>
       <p:ext uri="{BB962C8B-B14F-4D97-AF65-F5344CB8AC3E}">
-        <p14:creationId xmlns:p14="http://schemas.microsoft.com/office/powerpoint/2010/main" val="103184465"/>
+        <p14:creationId xmlns:p14="http://schemas.microsoft.com/office/powerpoint/2010/main" val="1502537650"/>
       </p:ext>
     </p:extLst>
   </p:cSld>
@@ -13076,7 +13076,7 @@
           <p:cNvPr id="20" name="side-accent-2">
             <a:extLst xmlns:a="http://schemas.openxmlformats.org/drawingml/2006/main">
               <a:ext uri="{FF2B5EF4-FFF2-40B4-BE49-F238E27FC236}">
-                <a16:creationId xmlns:a16="http://schemas.microsoft.com/office/drawing/2014/main" id="{4BEB393B-8830-484E-B425-9ED333958230}"/>
+                <a16:creationId xmlns:a16="http://schemas.microsoft.com/office/drawing/2014/main" id="{95C95822-B4C8-44FB-8F75-5DB7396ACEAB}"/>
               </a:ext>
             </a:extLst>
           </p:cNvPr>
@@ -13107,7 +13107,7 @@
           <p:cNvPr id="2" name="kicker-2">
             <a:extLst xmlns:a="http://schemas.openxmlformats.org/drawingml/2006/main">
               <a:ext uri="{FF2B5EF4-FFF2-40B4-BE49-F238E27FC236}">
-                <a16:creationId xmlns:a16="http://schemas.microsoft.com/office/drawing/2014/main" id="{B8A2C8AF-E560-4C0A-BCB7-12DC158534BC}"/>
+                <a16:creationId xmlns:a16="http://schemas.microsoft.com/office/drawing/2014/main" id="{AD19530B-1362-49F8-B406-4005021552A7}"/>
               </a:ext>
             </a:extLst>
           </p:cNvPr>
@@ -13169,7 +13169,7 @@
           <p:cNvPr id="3" name="title-2">
             <a:extLst xmlns:a="http://schemas.openxmlformats.org/drawingml/2006/main">
               <a:ext uri="{FF2B5EF4-FFF2-40B4-BE49-F238E27FC236}">
-                <a16:creationId xmlns:a16="http://schemas.microsoft.com/office/drawing/2014/main" id="{7ED6BDFA-2119-46E9-96EC-B9371A93813E}"/>
+                <a16:creationId xmlns:a16="http://schemas.microsoft.com/office/drawing/2014/main" id="{8DB38D8E-9E3A-4F9A-AE7F-A29080A40350}"/>
               </a:ext>
             </a:extLst>
           </p:cNvPr>
@@ -13231,7 +13231,7 @@
           <p:cNvPr id="4" name="">
             <a:extLst xmlns:a="http://schemas.openxmlformats.org/drawingml/2006/main">
               <a:ext uri="{FF2B5EF4-FFF2-40B4-BE49-F238E27FC236}">
-                <a16:creationId xmlns:a16="http://schemas.microsoft.com/office/drawing/2014/main" id="{3BA505AA-1379-4215-9120-3A63F10D5197}"/>
+                <a16:creationId xmlns:a16="http://schemas.microsoft.com/office/drawing/2014/main" id="{83EB0417-4B01-46DE-9C54-6BF42E86B066}"/>
               </a:ext>
             </a:extLst>
           </p:cNvPr>
@@ -13293,7 +13293,7 @@
           <p:cNvPr id="5" name="">
             <a:extLst xmlns:a="http://schemas.openxmlformats.org/drawingml/2006/main">
               <a:ext uri="{FF2B5EF4-FFF2-40B4-BE49-F238E27FC236}">
-                <a16:creationId xmlns:a16="http://schemas.microsoft.com/office/drawing/2014/main" id="{31A1CB09-3754-401C-9DF7-1A039FE02976}"/>
+                <a16:creationId xmlns:a16="http://schemas.microsoft.com/office/drawing/2014/main" id="{8E1E36ED-F39E-4D8D-9B3C-50BAD1FFDD59}"/>
               </a:ext>
             </a:extLst>
           </p:cNvPr>
@@ -13355,7 +13355,7 @@
           <p:cNvPr id="6" name="">
             <a:extLst xmlns:a="http://schemas.openxmlformats.org/drawingml/2006/main">
               <a:ext uri="{FF2B5EF4-FFF2-40B4-BE49-F238E27FC236}">
-                <a16:creationId xmlns:a16="http://schemas.microsoft.com/office/drawing/2014/main" id="{A29B9B96-0BE5-4253-85E0-72415DBFE917}"/>
+                <a16:creationId xmlns:a16="http://schemas.microsoft.com/office/drawing/2014/main" id="{D9DB315C-221A-4343-88DA-B3AEB16741F0}"/>
               </a:ext>
             </a:extLst>
           </p:cNvPr>
@@ -13386,7 +13386,7 @@
           <p:cNvPr id="7" name="">
             <a:extLst xmlns:a="http://schemas.openxmlformats.org/drawingml/2006/main">
               <a:ext uri="{FF2B5EF4-FFF2-40B4-BE49-F238E27FC236}">
-                <a16:creationId xmlns:a16="http://schemas.microsoft.com/office/drawing/2014/main" id="{49AB7025-BCE2-4CFB-9468-6DDC2DC3E935}"/>
+                <a16:creationId xmlns:a16="http://schemas.microsoft.com/office/drawing/2014/main" id="{57C7B5E6-180F-476B-A6C4-D8BF10EA2942}"/>
               </a:ext>
             </a:extLst>
           </p:cNvPr>
@@ -13448,7 +13448,7 @@
           <p:cNvPr id="8" name="">
             <a:extLst xmlns:a="http://schemas.openxmlformats.org/drawingml/2006/main">
               <a:ext uri="{FF2B5EF4-FFF2-40B4-BE49-F238E27FC236}">
-                <a16:creationId xmlns:a16="http://schemas.microsoft.com/office/drawing/2014/main" id="{E5F3440C-090C-4E1E-8A1B-666FA7D04590}"/>
+                <a16:creationId xmlns:a16="http://schemas.microsoft.com/office/drawing/2014/main" id="{76370E10-126D-4668-B367-B30EED73FC10}"/>
               </a:ext>
             </a:extLst>
           </p:cNvPr>
@@ -13510,7 +13510,7 @@
           <p:cNvPr id="9" name="">
             <a:extLst xmlns:a="http://schemas.openxmlformats.org/drawingml/2006/main">
               <a:ext uri="{FF2B5EF4-FFF2-40B4-BE49-F238E27FC236}">
-                <a16:creationId xmlns:a16="http://schemas.microsoft.com/office/drawing/2014/main" id="{86A3E8CD-66D8-451A-BBA9-05E8DB8DE6BA}"/>
+                <a16:creationId xmlns:a16="http://schemas.microsoft.com/office/drawing/2014/main" id="{AFA37DD7-F7DF-49F8-8B35-3679161BE6DC}"/>
               </a:ext>
             </a:extLst>
           </p:cNvPr>
@@ -13541,7 +13541,7 @@
           <p:cNvPr id="10" name="">
             <a:extLst xmlns:a="http://schemas.openxmlformats.org/drawingml/2006/main">
               <a:ext uri="{FF2B5EF4-FFF2-40B4-BE49-F238E27FC236}">
-                <a16:creationId xmlns:a16="http://schemas.microsoft.com/office/drawing/2014/main" id="{F88A11F1-E66E-4297-8397-7E9B727A9247}"/>
+                <a16:creationId xmlns:a16="http://schemas.microsoft.com/office/drawing/2014/main" id="{4AF479D0-5A16-4CE1-AF82-D5F388256E59}"/>
               </a:ext>
             </a:extLst>
           </p:cNvPr>
@@ -13603,7 +13603,7 @@
           <p:cNvPr id="11" name="">
             <a:extLst xmlns:a="http://schemas.openxmlformats.org/drawingml/2006/main">
               <a:ext uri="{FF2B5EF4-FFF2-40B4-BE49-F238E27FC236}">
-                <a16:creationId xmlns:a16="http://schemas.microsoft.com/office/drawing/2014/main" id="{B974A8E9-B770-4D34-B926-9D97936871DF}"/>
+                <a16:creationId xmlns:a16="http://schemas.microsoft.com/office/drawing/2014/main" id="{4C381478-0C22-461E-B4B8-DB00C71372D1}"/>
               </a:ext>
             </a:extLst>
           </p:cNvPr>
@@ -13665,7 +13665,7 @@
           <p:cNvPr id="12" name="">
             <a:extLst xmlns:a="http://schemas.openxmlformats.org/drawingml/2006/main">
               <a:ext uri="{FF2B5EF4-FFF2-40B4-BE49-F238E27FC236}">
-                <a16:creationId xmlns:a16="http://schemas.microsoft.com/office/drawing/2014/main" id="{4E2F3724-DFC9-4072-9B64-45217EB17BD9}"/>
+                <a16:creationId xmlns:a16="http://schemas.microsoft.com/office/drawing/2014/main" id="{9262994D-F2A5-4140-9E3D-26A4FC454971}"/>
               </a:ext>
             </a:extLst>
           </p:cNvPr>
@@ -13696,7 +13696,7 @@
           <p:cNvPr id="13" name="">
             <a:extLst xmlns:a="http://schemas.openxmlformats.org/drawingml/2006/main">
               <a:ext uri="{FF2B5EF4-FFF2-40B4-BE49-F238E27FC236}">
-                <a16:creationId xmlns:a16="http://schemas.microsoft.com/office/drawing/2014/main" id="{C42A0550-B860-450A-8FEF-44741ECDD7E3}"/>
+                <a16:creationId xmlns:a16="http://schemas.microsoft.com/office/drawing/2014/main" id="{7DFA2928-B4EB-4DB1-914A-BBF1B15867B4}"/>
               </a:ext>
             </a:extLst>
           </p:cNvPr>
@@ -13758,7 +13758,7 @@
           <p:cNvPr id="14" name="outcome-mark">
             <a:extLst xmlns:a="http://schemas.openxmlformats.org/drawingml/2006/main">
               <a:ext uri="{FF2B5EF4-FFF2-40B4-BE49-F238E27FC236}">
-                <a16:creationId xmlns:a16="http://schemas.microsoft.com/office/drawing/2014/main" id="{2CE62646-315F-4BA7-944A-7EB15A85EA63}"/>
+                <a16:creationId xmlns:a16="http://schemas.microsoft.com/office/drawing/2014/main" id="{CB25A0DD-2641-446F-AC5D-0919601C3B74}"/>
               </a:ext>
             </a:extLst>
           </p:cNvPr>
@@ -13793,7 +13793,7 @@
           <p:cNvPr id="15" name="">
             <a:extLst xmlns:a="http://schemas.openxmlformats.org/drawingml/2006/main">
               <a:ext uri="{FF2B5EF4-FFF2-40B4-BE49-F238E27FC236}">
-                <a16:creationId xmlns:a16="http://schemas.microsoft.com/office/drawing/2014/main" id="{06F24E73-8341-4AA9-B417-7E2A6BE10763}"/>
+                <a16:creationId xmlns:a16="http://schemas.microsoft.com/office/drawing/2014/main" id="{BF1FE031-E308-41C5-9F38-B73736489071}"/>
               </a:ext>
             </a:extLst>
           </p:cNvPr>
@@ -13855,7 +13855,7 @@
           <p:cNvPr id="16" name="">
             <a:extLst xmlns:a="http://schemas.openxmlformats.org/drawingml/2006/main">
               <a:ext uri="{FF2B5EF4-FFF2-40B4-BE49-F238E27FC236}">
-                <a16:creationId xmlns:a16="http://schemas.microsoft.com/office/drawing/2014/main" id="{58B02B46-E65E-4D08-991D-D92FFB31FD69}"/>
+                <a16:creationId xmlns:a16="http://schemas.microsoft.com/office/drawing/2014/main" id="{8BF26E9C-AF59-4A30-A89C-EABBA618C92D}"/>
               </a:ext>
             </a:extLst>
           </p:cNvPr>
@@ -13944,7 +13944,7 @@
           <p:cNvPr id="17" name="footer-rule-2">
             <a:extLst xmlns:a="http://schemas.openxmlformats.org/drawingml/2006/main">
               <a:ext uri="{FF2B5EF4-FFF2-40B4-BE49-F238E27FC236}">
-                <a16:creationId xmlns:a16="http://schemas.microsoft.com/office/drawing/2014/main" id="{9A6B2047-EF5D-4B59-93CD-9ED2623638BF}"/>
+                <a16:creationId xmlns:a16="http://schemas.microsoft.com/office/drawing/2014/main" id="{098C0C21-78E0-494C-A607-F0327ED8EE0B}"/>
               </a:ext>
             </a:extLst>
           </p:cNvPr>
@@ -13975,7 +13975,7 @@
           <p:cNvPr id="18" name="footer-label-2">
             <a:extLst xmlns:a="http://schemas.openxmlformats.org/drawingml/2006/main">
               <a:ext uri="{FF2B5EF4-FFF2-40B4-BE49-F238E27FC236}">
-                <a16:creationId xmlns:a16="http://schemas.microsoft.com/office/drawing/2014/main" id="{C7605525-B141-44E7-914B-9A5C9C679D70}"/>
+                <a16:creationId xmlns:a16="http://schemas.microsoft.com/office/drawing/2014/main" id="{B25B5788-737D-41FC-82CE-8492C86969A4}"/>
               </a:ext>
             </a:extLst>
           </p:cNvPr>
@@ -14037,7 +14037,7 @@
           <p:cNvPr id="19" name="footer-page-2">
             <a:extLst xmlns:a="http://schemas.openxmlformats.org/drawingml/2006/main">
               <a:ext uri="{FF2B5EF4-FFF2-40B4-BE49-F238E27FC236}">
-                <a16:creationId xmlns:a16="http://schemas.microsoft.com/office/drawing/2014/main" id="{CCC2248B-2092-4173-9392-83CE2F42349F}"/>
+                <a16:creationId xmlns:a16="http://schemas.microsoft.com/office/drawing/2014/main" id="{3870C1E6-ACBF-4A1D-B38C-894E6DE02A46}"/>
               </a:ext>
             </a:extLst>
           </p:cNvPr>
@@ -14097,7 +14097,7 @@
     </p:spTree>
     <p:extLst>
       <p:ext uri="{BB962C8B-B14F-4D97-AF65-F5344CB8AC3E}">
-        <p14:creationId xmlns:p14="http://schemas.microsoft.com/office/powerpoint/2010/main" val="1925323915"/>
+        <p14:creationId xmlns:p14="http://schemas.microsoft.com/office/powerpoint/2010/main" val="2115246511"/>
       </p:ext>
     </p:extLst>
   </p:cSld>
@@ -14128,7 +14128,7 @@
           <p:cNvPr id="31" name="side-accent-3">
             <a:extLst xmlns:a="http://schemas.openxmlformats.org/drawingml/2006/main">
               <a:ext uri="{FF2B5EF4-FFF2-40B4-BE49-F238E27FC236}">
-                <a16:creationId xmlns:a16="http://schemas.microsoft.com/office/drawing/2014/main" id="{8D7EDEB3-D0CE-4AA4-BC36-7C9F9936461D}"/>
+                <a16:creationId xmlns:a16="http://schemas.microsoft.com/office/drawing/2014/main" id="{BFC0158B-EDFC-4A0B-8A15-64BBA767231C}"/>
               </a:ext>
             </a:extLst>
           </p:cNvPr>
@@ -14159,7 +14159,7 @@
           <p:cNvPr id="2" name="kicker-3">
             <a:extLst xmlns:a="http://schemas.openxmlformats.org/drawingml/2006/main">
               <a:ext uri="{FF2B5EF4-FFF2-40B4-BE49-F238E27FC236}">
-                <a16:creationId xmlns:a16="http://schemas.microsoft.com/office/drawing/2014/main" id="{F6AB249D-13DE-403B-BD4D-2BB0FE5290CC}"/>
+                <a16:creationId xmlns:a16="http://schemas.microsoft.com/office/drawing/2014/main" id="{0374A2F0-681D-4FFF-BA19-D8DB8378A0D4}"/>
               </a:ext>
             </a:extLst>
           </p:cNvPr>
@@ -14221,7 +14221,7 @@
           <p:cNvPr id="3" name="title-3">
             <a:extLst xmlns:a="http://schemas.openxmlformats.org/drawingml/2006/main">
               <a:ext uri="{FF2B5EF4-FFF2-40B4-BE49-F238E27FC236}">
-                <a16:creationId xmlns:a16="http://schemas.microsoft.com/office/drawing/2014/main" id="{510D47C9-6EB1-4F3F-AC4D-CB2A55D92905}"/>
+                <a16:creationId xmlns:a16="http://schemas.microsoft.com/office/drawing/2014/main" id="{BE4130F6-27E6-41A7-9DF7-87A651C8EC12}"/>
               </a:ext>
             </a:extLst>
           </p:cNvPr>
@@ -14283,7 +14283,7 @@
           <p:cNvPr id="4" name="">
             <a:extLst xmlns:a="http://schemas.openxmlformats.org/drawingml/2006/main">
               <a:ext uri="{FF2B5EF4-FFF2-40B4-BE49-F238E27FC236}">
-                <a16:creationId xmlns:a16="http://schemas.microsoft.com/office/drawing/2014/main" id="{81607297-CBF2-4CBD-8E50-AE7884905F9F}"/>
+                <a16:creationId xmlns:a16="http://schemas.microsoft.com/office/drawing/2014/main" id="{ACA113EC-5B98-4183-9335-0547AB5D4F98}"/>
               </a:ext>
             </a:extLst>
           </p:cNvPr>
@@ -14345,7 +14345,7 @@
           <p:cNvPr id="5" name="system-function-line">
             <a:extLst xmlns:a="http://schemas.openxmlformats.org/drawingml/2006/main">
               <a:ext uri="{FF2B5EF4-FFF2-40B4-BE49-F238E27FC236}">
-                <a16:creationId xmlns:a16="http://schemas.microsoft.com/office/drawing/2014/main" id="{E94D1ECA-3B8E-4261-B801-C1F298382492}"/>
+                <a16:creationId xmlns:a16="http://schemas.microsoft.com/office/drawing/2014/main" id="{492385AE-19B9-42E1-8FE2-DC504641C6C9}"/>
               </a:ext>
             </a:extLst>
           </p:cNvPr>
@@ -14376,7 +14376,7 @@
           <p:cNvPr id="6" name="">
             <a:extLst xmlns:a="http://schemas.openxmlformats.org/drawingml/2006/main">
               <a:ext uri="{FF2B5EF4-FFF2-40B4-BE49-F238E27FC236}">
-                <a16:creationId xmlns:a16="http://schemas.microsoft.com/office/drawing/2014/main" id="{D32B26AC-24B8-491D-8932-777A76D2E753}"/>
+                <a16:creationId xmlns:a16="http://schemas.microsoft.com/office/drawing/2014/main" id="{DDBD4685-C061-41D8-9CD3-D1D5038C1DFA}"/>
               </a:ext>
             </a:extLst>
           </p:cNvPr>
@@ -14407,7 +14407,7 @@
           <p:cNvPr id="7" name="">
             <a:extLst xmlns:a="http://schemas.openxmlformats.org/drawingml/2006/main">
               <a:ext uri="{FF2B5EF4-FFF2-40B4-BE49-F238E27FC236}">
-                <a16:creationId xmlns:a16="http://schemas.microsoft.com/office/drawing/2014/main" id="{B7B8EA00-AC4D-4A8E-98C9-10B83F174A03}"/>
+                <a16:creationId xmlns:a16="http://schemas.microsoft.com/office/drawing/2014/main" id="{A1772F53-AF7C-4268-9109-6D62B830D29F}"/>
               </a:ext>
             </a:extLst>
           </p:cNvPr>
@@ -14469,7 +14469,7 @@
           <p:cNvPr id="8" name="">
             <a:extLst xmlns:a="http://schemas.openxmlformats.org/drawingml/2006/main">
               <a:ext uri="{FF2B5EF4-FFF2-40B4-BE49-F238E27FC236}">
-                <a16:creationId xmlns:a16="http://schemas.microsoft.com/office/drawing/2014/main" id="{848422F7-60D9-406A-AF83-EDB5E1C4EC3F}"/>
+                <a16:creationId xmlns:a16="http://schemas.microsoft.com/office/drawing/2014/main" id="{1A0F2AFB-4A88-458C-92A6-5CE5F91EB3DC}"/>
               </a:ext>
             </a:extLst>
           </p:cNvPr>
@@ -14531,7 +14531,7 @@
           <p:cNvPr id="9" name="">
             <a:extLst xmlns:a="http://schemas.openxmlformats.org/drawingml/2006/main">
               <a:ext uri="{FF2B5EF4-FFF2-40B4-BE49-F238E27FC236}">
-                <a16:creationId xmlns:a16="http://schemas.microsoft.com/office/drawing/2014/main" id="{D0ED5694-20D0-4235-A155-2BC89EA19BD9}"/>
+                <a16:creationId xmlns:a16="http://schemas.microsoft.com/office/drawing/2014/main" id="{3489EE14-ECED-4EF2-BCA1-DB519ECEF501}"/>
               </a:ext>
             </a:extLst>
           </p:cNvPr>
@@ -14593,7 +14593,7 @@
           <p:cNvPr id="10" name="">
             <a:extLst xmlns:a="http://schemas.openxmlformats.org/drawingml/2006/main">
               <a:ext uri="{FF2B5EF4-FFF2-40B4-BE49-F238E27FC236}">
-                <a16:creationId xmlns:a16="http://schemas.microsoft.com/office/drawing/2014/main" id="{2BE11F8F-16BA-4B46-842E-94CBD9E2CBF2}"/>
+                <a16:creationId xmlns:a16="http://schemas.microsoft.com/office/drawing/2014/main" id="{556F52AC-0CC4-452A-90BB-3A5E8B71DC1D}"/>
               </a:ext>
             </a:extLst>
           </p:cNvPr>
@@ -14624,7 +14624,7 @@
           <p:cNvPr id="11" name="">
             <a:extLst xmlns:a="http://schemas.openxmlformats.org/drawingml/2006/main">
               <a:ext uri="{FF2B5EF4-FFF2-40B4-BE49-F238E27FC236}">
-                <a16:creationId xmlns:a16="http://schemas.microsoft.com/office/drawing/2014/main" id="{1FFFC3BA-2457-4D8A-8C5F-C911E1B5FC3A}"/>
+                <a16:creationId xmlns:a16="http://schemas.microsoft.com/office/drawing/2014/main" id="{F8A986A4-F47A-45A9-A76A-672D0105BE12}"/>
               </a:ext>
             </a:extLst>
           </p:cNvPr>
@@ -14686,7 +14686,7 @@
           <p:cNvPr id="12" name="">
             <a:extLst xmlns:a="http://schemas.openxmlformats.org/drawingml/2006/main">
               <a:ext uri="{FF2B5EF4-FFF2-40B4-BE49-F238E27FC236}">
-                <a16:creationId xmlns:a16="http://schemas.microsoft.com/office/drawing/2014/main" id="{A4CB219A-53DF-436B-A99C-46BA682BF824}"/>
+                <a16:creationId xmlns:a16="http://schemas.microsoft.com/office/drawing/2014/main" id="{A3C5D0D4-AEFB-41B3-85D1-638B5448AFB5}"/>
               </a:ext>
             </a:extLst>
           </p:cNvPr>
@@ -14748,7 +14748,7 @@
           <p:cNvPr id="13" name="">
             <a:extLst xmlns:a="http://schemas.openxmlformats.org/drawingml/2006/main">
               <a:ext uri="{FF2B5EF4-FFF2-40B4-BE49-F238E27FC236}">
-                <a16:creationId xmlns:a16="http://schemas.microsoft.com/office/drawing/2014/main" id="{1B2DEB91-F6FA-4111-8F4D-4286E0D5BF57}"/>
+                <a16:creationId xmlns:a16="http://schemas.microsoft.com/office/drawing/2014/main" id="{0DF40CA8-988E-4CBC-9F17-1812F7940645}"/>
               </a:ext>
             </a:extLst>
           </p:cNvPr>
@@ -14810,7 +14810,7 @@
           <p:cNvPr id="14" name="">
             <a:extLst xmlns:a="http://schemas.openxmlformats.org/drawingml/2006/main">
               <a:ext uri="{FF2B5EF4-FFF2-40B4-BE49-F238E27FC236}">
-                <a16:creationId xmlns:a16="http://schemas.microsoft.com/office/drawing/2014/main" id="{B05C6FC0-93BE-4032-8351-8FDFFDDB28FC}"/>
+                <a16:creationId xmlns:a16="http://schemas.microsoft.com/office/drawing/2014/main" id="{2E078D8F-A517-4D8B-B847-3BAD29FC4C18}"/>
               </a:ext>
             </a:extLst>
           </p:cNvPr>
@@ -14841,7 +14841,7 @@
           <p:cNvPr id="15" name="">
             <a:extLst xmlns:a="http://schemas.openxmlformats.org/drawingml/2006/main">
               <a:ext uri="{FF2B5EF4-FFF2-40B4-BE49-F238E27FC236}">
-                <a16:creationId xmlns:a16="http://schemas.microsoft.com/office/drawing/2014/main" id="{F29ABD26-0A04-4202-9AEB-F6757E4EEBF0}"/>
+                <a16:creationId xmlns:a16="http://schemas.microsoft.com/office/drawing/2014/main" id="{40C17B23-0065-4E70-98BE-6AFECEC825A2}"/>
               </a:ext>
             </a:extLst>
           </p:cNvPr>
@@ -14903,7 +14903,7 @@
           <p:cNvPr id="16" name="">
             <a:extLst xmlns:a="http://schemas.openxmlformats.org/drawingml/2006/main">
               <a:ext uri="{FF2B5EF4-FFF2-40B4-BE49-F238E27FC236}">
-                <a16:creationId xmlns:a16="http://schemas.microsoft.com/office/drawing/2014/main" id="{38280E4A-8150-4C73-A519-41920A39A3F2}"/>
+                <a16:creationId xmlns:a16="http://schemas.microsoft.com/office/drawing/2014/main" id="{294A087A-96F7-4C10-B17F-F61C998622E0}"/>
               </a:ext>
             </a:extLst>
           </p:cNvPr>
@@ -14965,7 +14965,7 @@
           <p:cNvPr id="17" name="">
             <a:extLst xmlns:a="http://schemas.openxmlformats.org/drawingml/2006/main">
               <a:ext uri="{FF2B5EF4-FFF2-40B4-BE49-F238E27FC236}">
-                <a16:creationId xmlns:a16="http://schemas.microsoft.com/office/drawing/2014/main" id="{11A5774A-677B-4E12-8350-970EA2A49796}"/>
+                <a16:creationId xmlns:a16="http://schemas.microsoft.com/office/drawing/2014/main" id="{52CDA686-C287-4525-85F6-F770D2A6B6AE}"/>
               </a:ext>
             </a:extLst>
           </p:cNvPr>
@@ -15027,7 +15027,7 @@
           <p:cNvPr id="18" name="">
             <a:extLst xmlns:a="http://schemas.openxmlformats.org/drawingml/2006/main">
               <a:ext uri="{FF2B5EF4-FFF2-40B4-BE49-F238E27FC236}">
-                <a16:creationId xmlns:a16="http://schemas.microsoft.com/office/drawing/2014/main" id="{CF8931F0-8ED2-43B0-9E2F-7FBF494F2BA1}"/>
+                <a16:creationId xmlns:a16="http://schemas.microsoft.com/office/drawing/2014/main" id="{EBD099EB-AB5D-4B44-82C4-322960F277D0}"/>
               </a:ext>
             </a:extLst>
           </p:cNvPr>
@@ -15058,7 +15058,7 @@
           <p:cNvPr id="19" name="">
             <a:extLst xmlns:a="http://schemas.openxmlformats.org/drawingml/2006/main">
               <a:ext uri="{FF2B5EF4-FFF2-40B4-BE49-F238E27FC236}">
-                <a16:creationId xmlns:a16="http://schemas.microsoft.com/office/drawing/2014/main" id="{FD8A8FB8-8D3D-48A7-AB49-A2CA898BD50C}"/>
+                <a16:creationId xmlns:a16="http://schemas.microsoft.com/office/drawing/2014/main" id="{1706A2DD-C5BF-47F3-ADA8-A3AB779475FA}"/>
               </a:ext>
             </a:extLst>
           </p:cNvPr>
@@ -15120,7 +15120,7 @@
           <p:cNvPr id="20" name="">
             <a:extLst xmlns:a="http://schemas.openxmlformats.org/drawingml/2006/main">
               <a:ext uri="{FF2B5EF4-FFF2-40B4-BE49-F238E27FC236}">
-                <a16:creationId xmlns:a16="http://schemas.microsoft.com/office/drawing/2014/main" id="{37A1DDCF-682F-437A-98B5-3FB3FAFB04B8}"/>
+                <a16:creationId xmlns:a16="http://schemas.microsoft.com/office/drawing/2014/main" id="{18B38874-5C4F-4FD3-A358-78D4C343C8C5}"/>
               </a:ext>
             </a:extLst>
           </p:cNvPr>
@@ -15182,7 +15182,7 @@
           <p:cNvPr id="21" name="">
             <a:extLst xmlns:a="http://schemas.openxmlformats.org/drawingml/2006/main">
               <a:ext uri="{FF2B5EF4-FFF2-40B4-BE49-F238E27FC236}">
-                <a16:creationId xmlns:a16="http://schemas.microsoft.com/office/drawing/2014/main" id="{B0DBF6FB-C049-4616-B78E-58A11ECB0FB4}"/>
+                <a16:creationId xmlns:a16="http://schemas.microsoft.com/office/drawing/2014/main" id="{5911C08D-72E5-4396-8F92-BBC3207E0536}"/>
               </a:ext>
             </a:extLst>
           </p:cNvPr>
@@ -15244,7 +15244,7 @@
           <p:cNvPr id="22" name="">
             <a:extLst xmlns:a="http://schemas.openxmlformats.org/drawingml/2006/main">
               <a:ext uri="{FF2B5EF4-FFF2-40B4-BE49-F238E27FC236}">
-                <a16:creationId xmlns:a16="http://schemas.microsoft.com/office/drawing/2014/main" id="{18196250-6F91-4C2E-BFA6-5A0BB76D7133}"/>
+                <a16:creationId xmlns:a16="http://schemas.microsoft.com/office/drawing/2014/main" id="{7EEDB0D7-2F85-45AA-8BB2-55EF2DCAD771}"/>
               </a:ext>
             </a:extLst>
           </p:cNvPr>
@@ -15275,7 +15275,7 @@
           <p:cNvPr id="23" name="">
             <a:extLst xmlns:a="http://schemas.openxmlformats.org/drawingml/2006/main">
               <a:ext uri="{FF2B5EF4-FFF2-40B4-BE49-F238E27FC236}">
-                <a16:creationId xmlns:a16="http://schemas.microsoft.com/office/drawing/2014/main" id="{5FF45C98-8D25-448B-A837-85E0C1148877}"/>
+                <a16:creationId xmlns:a16="http://schemas.microsoft.com/office/drawing/2014/main" id="{C29C6FB8-21F2-4C5D-A6F0-DD9226807C58}"/>
               </a:ext>
             </a:extLst>
           </p:cNvPr>
@@ -15337,7 +15337,7 @@
           <p:cNvPr id="24" name="">
             <a:extLst xmlns:a="http://schemas.openxmlformats.org/drawingml/2006/main">
               <a:ext uri="{FF2B5EF4-FFF2-40B4-BE49-F238E27FC236}">
-                <a16:creationId xmlns:a16="http://schemas.microsoft.com/office/drawing/2014/main" id="{18037259-57FA-4C62-A903-3F2F0FAC408E}"/>
+                <a16:creationId xmlns:a16="http://schemas.microsoft.com/office/drawing/2014/main" id="{79BE85BB-0B2F-47C3-BF0C-28366D8B20F1}"/>
               </a:ext>
             </a:extLst>
           </p:cNvPr>
@@ -15399,7 +15399,7 @@
           <p:cNvPr id="25" name="">
             <a:extLst xmlns:a="http://schemas.openxmlformats.org/drawingml/2006/main">
               <a:ext uri="{FF2B5EF4-FFF2-40B4-BE49-F238E27FC236}">
-                <a16:creationId xmlns:a16="http://schemas.microsoft.com/office/drawing/2014/main" id="{E32E35E8-E296-459A-9947-2AA0C0ED2A15}"/>
+                <a16:creationId xmlns:a16="http://schemas.microsoft.com/office/drawing/2014/main" id="{8FD52B4C-DB83-437E-948C-54D37A104DD4}"/>
               </a:ext>
             </a:extLst>
           </p:cNvPr>
@@ -15461,7 +15461,7 @@
           <p:cNvPr id="26" name="">
             <a:extLst xmlns:a="http://schemas.openxmlformats.org/drawingml/2006/main">
               <a:ext uri="{FF2B5EF4-FFF2-40B4-BE49-F238E27FC236}">
-                <a16:creationId xmlns:a16="http://schemas.microsoft.com/office/drawing/2014/main" id="{BDB8BC68-6620-4632-AD84-72CED5ED56BD}"/>
+                <a16:creationId xmlns:a16="http://schemas.microsoft.com/office/drawing/2014/main" id="{9375B62E-A075-4FB8-9FD8-36E7A43F8ADB}"/>
               </a:ext>
             </a:extLst>
           </p:cNvPr>
@@ -15494,7 +15494,7 @@
           <p:cNvPr id="27" name="">
             <a:extLst xmlns:a="http://schemas.openxmlformats.org/drawingml/2006/main">
               <a:ext uri="{FF2B5EF4-FFF2-40B4-BE49-F238E27FC236}">
-                <a16:creationId xmlns:a16="http://schemas.microsoft.com/office/drawing/2014/main" id="{D20F8F35-43DE-4C88-9C0F-1A65515C92ED}"/>
+                <a16:creationId xmlns:a16="http://schemas.microsoft.com/office/drawing/2014/main" id="{B2346840-2369-4159-AEC3-9557E78C9092}"/>
               </a:ext>
             </a:extLst>
           </p:cNvPr>
@@ -15556,7 +15556,7 @@
           <p:cNvPr id="28" name="footer-rule-3">
             <a:extLst xmlns:a="http://schemas.openxmlformats.org/drawingml/2006/main">
               <a:ext uri="{FF2B5EF4-FFF2-40B4-BE49-F238E27FC236}">
-                <a16:creationId xmlns:a16="http://schemas.microsoft.com/office/drawing/2014/main" id="{EB8B5F55-2ACA-4697-B520-53447DB429F6}"/>
+                <a16:creationId xmlns:a16="http://schemas.microsoft.com/office/drawing/2014/main" id="{1237658B-C81C-4211-ACB6-7413F7EBB619}"/>
               </a:ext>
             </a:extLst>
           </p:cNvPr>
@@ -15587,7 +15587,7 @@
           <p:cNvPr id="29" name="footer-label-3">
             <a:extLst xmlns:a="http://schemas.openxmlformats.org/drawingml/2006/main">
               <a:ext uri="{FF2B5EF4-FFF2-40B4-BE49-F238E27FC236}">
-                <a16:creationId xmlns:a16="http://schemas.microsoft.com/office/drawing/2014/main" id="{F51B4E1C-B799-4687-8562-ED9D56D2F824}"/>
+                <a16:creationId xmlns:a16="http://schemas.microsoft.com/office/drawing/2014/main" id="{F9604393-EF7F-455A-B3AE-AD7B7149D8A8}"/>
               </a:ext>
             </a:extLst>
           </p:cNvPr>
@@ -15649,7 +15649,7 @@
           <p:cNvPr id="30" name="footer-page-3">
             <a:extLst xmlns:a="http://schemas.openxmlformats.org/drawingml/2006/main">
               <a:ext uri="{FF2B5EF4-FFF2-40B4-BE49-F238E27FC236}">
-                <a16:creationId xmlns:a16="http://schemas.microsoft.com/office/drawing/2014/main" id="{46DB7E85-7C1A-446B-973E-DFD8022931DD}"/>
+                <a16:creationId xmlns:a16="http://schemas.microsoft.com/office/drawing/2014/main" id="{4BBD151E-231A-443B-8973-5D48E5353621}"/>
               </a:ext>
             </a:extLst>
           </p:cNvPr>
@@ -15709,7 +15709,7 @@
     </p:spTree>
     <p:extLst>
       <p:ext uri="{BB962C8B-B14F-4D97-AF65-F5344CB8AC3E}">
-        <p14:creationId xmlns:p14="http://schemas.microsoft.com/office/powerpoint/2010/main" val="494731020"/>
+        <p14:creationId xmlns:p14="http://schemas.microsoft.com/office/powerpoint/2010/main" val="1773602275"/>
       </p:ext>
     </p:extLst>
   </p:cSld>
@@ -15740,7 +15740,7 @@
           <p:cNvPr id="28" name="side-accent-4">
             <a:extLst xmlns:a="http://schemas.openxmlformats.org/drawingml/2006/main">
               <a:ext uri="{FF2B5EF4-FFF2-40B4-BE49-F238E27FC236}">
-                <a16:creationId xmlns:a16="http://schemas.microsoft.com/office/drawing/2014/main" id="{5B229FED-081B-4BE7-9589-9C570CD16EE6}"/>
+                <a16:creationId xmlns:a16="http://schemas.microsoft.com/office/drawing/2014/main" id="{AA1D870E-BC60-4196-9B9F-A84C4B251092}"/>
               </a:ext>
             </a:extLst>
           </p:cNvPr>
@@ -15771,7 +15771,7 @@
           <p:cNvPr id="2" name="kicker-4">
             <a:extLst xmlns:a="http://schemas.openxmlformats.org/drawingml/2006/main">
               <a:ext uri="{FF2B5EF4-FFF2-40B4-BE49-F238E27FC236}">
-                <a16:creationId xmlns:a16="http://schemas.microsoft.com/office/drawing/2014/main" id="{586A6264-6233-44D4-B979-520EB44F84B2}"/>
+                <a16:creationId xmlns:a16="http://schemas.microsoft.com/office/drawing/2014/main" id="{14FF3C7B-F937-49DB-AF41-8575BCA85035}"/>
               </a:ext>
             </a:extLst>
           </p:cNvPr>
@@ -15833,7 +15833,7 @@
           <p:cNvPr id="3" name="title-4">
             <a:extLst xmlns:a="http://schemas.openxmlformats.org/drawingml/2006/main">
               <a:ext uri="{FF2B5EF4-FFF2-40B4-BE49-F238E27FC236}">
-                <a16:creationId xmlns:a16="http://schemas.microsoft.com/office/drawing/2014/main" id="{2E426134-518E-4272-ACA6-929EABFBB05B}"/>
+                <a16:creationId xmlns:a16="http://schemas.microsoft.com/office/drawing/2014/main" id="{86D86A6C-EFBD-4396-8F64-7B63EF132C75}"/>
               </a:ext>
             </a:extLst>
           </p:cNvPr>
@@ -15895,7 +15895,7 @@
           <p:cNvPr id="4" name="">
             <a:extLst xmlns:a="http://schemas.openxmlformats.org/drawingml/2006/main">
               <a:ext uri="{FF2B5EF4-FFF2-40B4-BE49-F238E27FC236}">
-                <a16:creationId xmlns:a16="http://schemas.microsoft.com/office/drawing/2014/main" id="{08F79D6F-0321-46C9-B7B6-FD29E87C7111}"/>
+                <a16:creationId xmlns:a16="http://schemas.microsoft.com/office/drawing/2014/main" id="{F9A5926E-A75C-4207-95D5-D252629922E3}"/>
               </a:ext>
             </a:extLst>
           </p:cNvPr>
@@ -15957,7 +15957,7 @@
           <p:cNvPr id="5" name="">
             <a:extLst xmlns:a="http://schemas.openxmlformats.org/drawingml/2006/main">
               <a:ext uri="{FF2B5EF4-FFF2-40B4-BE49-F238E27FC236}">
-                <a16:creationId xmlns:a16="http://schemas.microsoft.com/office/drawing/2014/main" id="{C6F70471-5EC5-4BE4-8689-3D7E97074403}"/>
+                <a16:creationId xmlns:a16="http://schemas.microsoft.com/office/drawing/2014/main" id="{B77EF36B-3657-4E4F-951C-B4EB09D7A4B1}"/>
               </a:ext>
             </a:extLst>
           </p:cNvPr>
@@ -16019,7 +16019,7 @@
           <p:cNvPr id="6" name="">
             <a:extLst xmlns:a="http://schemas.openxmlformats.org/drawingml/2006/main">
               <a:ext uri="{FF2B5EF4-FFF2-40B4-BE49-F238E27FC236}">
-                <a16:creationId xmlns:a16="http://schemas.microsoft.com/office/drawing/2014/main" id="{D970C569-5677-4D04-8354-EAF89F29C2F0}"/>
+                <a16:creationId xmlns:a16="http://schemas.microsoft.com/office/drawing/2014/main" id="{64F8E2A4-0AF0-4257-90EF-60BC114FBC5F}"/>
               </a:ext>
             </a:extLst>
           </p:cNvPr>
@@ -16081,7 +16081,7 @@
           <p:cNvPr id="7" name="">
             <a:extLst xmlns:a="http://schemas.openxmlformats.org/drawingml/2006/main">
               <a:ext uri="{FF2B5EF4-FFF2-40B4-BE49-F238E27FC236}">
-                <a16:creationId xmlns:a16="http://schemas.microsoft.com/office/drawing/2014/main" id="{CDAE2622-83DB-4497-B14D-86C8A05722B4}"/>
+                <a16:creationId xmlns:a16="http://schemas.microsoft.com/office/drawing/2014/main" id="{D1995954-DB52-4E85-BBBE-37F8201831D4}"/>
               </a:ext>
             </a:extLst>
           </p:cNvPr>
@@ -16112,7 +16112,7 @@
           <p:cNvPr id="8" name="">
             <a:extLst xmlns:a="http://schemas.openxmlformats.org/drawingml/2006/main">
               <a:ext uri="{FF2B5EF4-FFF2-40B4-BE49-F238E27FC236}">
-                <a16:creationId xmlns:a16="http://schemas.microsoft.com/office/drawing/2014/main" id="{48BE01FA-0CE6-433F-B816-63A23CC09273}"/>
+                <a16:creationId xmlns:a16="http://schemas.microsoft.com/office/drawing/2014/main" id="{3905C437-2B61-4073-B473-54B6239967BB}"/>
               </a:ext>
             </a:extLst>
           </p:cNvPr>
@@ -16174,7 +16174,7 @@
           <p:cNvPr id="9" name="">
             <a:extLst xmlns:a="http://schemas.openxmlformats.org/drawingml/2006/main">
               <a:ext uri="{FF2B5EF4-FFF2-40B4-BE49-F238E27FC236}">
-                <a16:creationId xmlns:a16="http://schemas.microsoft.com/office/drawing/2014/main" id="{CC7499C5-CC8A-4DA8-A3B5-063319E17704}"/>
+                <a16:creationId xmlns:a16="http://schemas.microsoft.com/office/drawing/2014/main" id="{295CBBAD-43E5-46B3-AF8D-A95ADF97D050}"/>
               </a:ext>
             </a:extLst>
           </p:cNvPr>
@@ -16236,7 +16236,7 @@
           <p:cNvPr id="10" name="">
             <a:extLst xmlns:a="http://schemas.openxmlformats.org/drawingml/2006/main">
               <a:ext uri="{FF2B5EF4-FFF2-40B4-BE49-F238E27FC236}">
-                <a16:creationId xmlns:a16="http://schemas.microsoft.com/office/drawing/2014/main" id="{949672E4-BB25-46C5-B8E5-AFF7B72DDDB7}"/>
+                <a16:creationId xmlns:a16="http://schemas.microsoft.com/office/drawing/2014/main" id="{A96A6F61-968C-491A-9D10-3069F4DB4F59}"/>
               </a:ext>
             </a:extLst>
           </p:cNvPr>
@@ -16298,7 +16298,7 @@
           <p:cNvPr id="11" name="">
             <a:extLst xmlns:a="http://schemas.openxmlformats.org/drawingml/2006/main">
               <a:ext uri="{FF2B5EF4-FFF2-40B4-BE49-F238E27FC236}">
-                <a16:creationId xmlns:a16="http://schemas.microsoft.com/office/drawing/2014/main" id="{8E2A2FA2-76B6-4D81-A598-CD26A4EDAEAA}"/>
+                <a16:creationId xmlns:a16="http://schemas.microsoft.com/office/drawing/2014/main" id="{F9969E35-68DE-43C9-BA62-161D07A34F8C}"/>
               </a:ext>
             </a:extLst>
           </p:cNvPr>
@@ -16329,7 +16329,7 @@
           <p:cNvPr id="12" name="">
             <a:extLst xmlns:a="http://schemas.openxmlformats.org/drawingml/2006/main">
               <a:ext uri="{FF2B5EF4-FFF2-40B4-BE49-F238E27FC236}">
-                <a16:creationId xmlns:a16="http://schemas.microsoft.com/office/drawing/2014/main" id="{0E3142E4-E028-4318-98A9-8DF4227F268F}"/>
+                <a16:creationId xmlns:a16="http://schemas.microsoft.com/office/drawing/2014/main" id="{0B765420-3E94-4814-95BF-B018565CD454}"/>
               </a:ext>
             </a:extLst>
           </p:cNvPr>
@@ -16391,7 +16391,7 @@
           <p:cNvPr id="13" name="">
             <a:extLst xmlns:a="http://schemas.openxmlformats.org/drawingml/2006/main">
               <a:ext uri="{FF2B5EF4-FFF2-40B4-BE49-F238E27FC236}">
-                <a16:creationId xmlns:a16="http://schemas.microsoft.com/office/drawing/2014/main" id="{E0414C24-5DAC-4530-8811-9B66CB8CD024}"/>
+                <a16:creationId xmlns:a16="http://schemas.microsoft.com/office/drawing/2014/main" id="{EE03C8B9-3F57-447B-924E-C83CFCB172A3}"/>
               </a:ext>
             </a:extLst>
           </p:cNvPr>
@@ -16453,7 +16453,7 @@
           <p:cNvPr id="14" name="">
             <a:extLst xmlns:a="http://schemas.openxmlformats.org/drawingml/2006/main">
               <a:ext uri="{FF2B5EF4-FFF2-40B4-BE49-F238E27FC236}">
-                <a16:creationId xmlns:a16="http://schemas.microsoft.com/office/drawing/2014/main" id="{C4F86F7C-E4DD-40C1-8570-FE813E461ABC}"/>
+                <a16:creationId xmlns:a16="http://schemas.microsoft.com/office/drawing/2014/main" id="{A6489DEE-A487-4BF3-8BC6-2ED150613573}"/>
               </a:ext>
             </a:extLst>
           </p:cNvPr>
@@ -16515,7 +16515,7 @@
           <p:cNvPr id="15" name="">
             <a:extLst xmlns:a="http://schemas.openxmlformats.org/drawingml/2006/main">
               <a:ext uri="{FF2B5EF4-FFF2-40B4-BE49-F238E27FC236}">
-                <a16:creationId xmlns:a16="http://schemas.microsoft.com/office/drawing/2014/main" id="{47F67114-4335-4351-B7F2-E9F5F3BE68FA}"/>
+                <a16:creationId xmlns:a16="http://schemas.microsoft.com/office/drawing/2014/main" id="{6A9DE2A7-B3ED-4728-8662-10286BAB8028}"/>
               </a:ext>
             </a:extLst>
           </p:cNvPr>
@@ -16546,7 +16546,7 @@
           <p:cNvPr id="16" name="">
             <a:extLst xmlns:a="http://schemas.openxmlformats.org/drawingml/2006/main">
               <a:ext uri="{FF2B5EF4-FFF2-40B4-BE49-F238E27FC236}">
-                <a16:creationId xmlns:a16="http://schemas.microsoft.com/office/drawing/2014/main" id="{995AAB0D-FCA1-4268-A860-597B345FFD90}"/>
+                <a16:creationId xmlns:a16="http://schemas.microsoft.com/office/drawing/2014/main" id="{2595AD9D-76EC-40BE-8469-963A75297F63}"/>
               </a:ext>
             </a:extLst>
           </p:cNvPr>
@@ -16608,7 +16608,7 @@
           <p:cNvPr id="17" name="">
             <a:extLst xmlns:a="http://schemas.openxmlformats.org/drawingml/2006/main">
               <a:ext uri="{FF2B5EF4-FFF2-40B4-BE49-F238E27FC236}">
-                <a16:creationId xmlns:a16="http://schemas.microsoft.com/office/drawing/2014/main" id="{7EF46BCA-0A7F-431B-97E3-9A81FDD6BE91}"/>
+                <a16:creationId xmlns:a16="http://schemas.microsoft.com/office/drawing/2014/main" id="{9EE3E9CA-305C-40CD-9FE4-42079772CADA}"/>
               </a:ext>
             </a:extLst>
           </p:cNvPr>
@@ -16670,7 +16670,7 @@
           <p:cNvPr id="18" name="">
             <a:extLst xmlns:a="http://schemas.openxmlformats.org/drawingml/2006/main">
               <a:ext uri="{FF2B5EF4-FFF2-40B4-BE49-F238E27FC236}">
-                <a16:creationId xmlns:a16="http://schemas.microsoft.com/office/drawing/2014/main" id="{3F1EC2D5-A607-41C1-9CB8-F69AE3840662}"/>
+                <a16:creationId xmlns:a16="http://schemas.microsoft.com/office/drawing/2014/main" id="{B1821D04-6EF5-423B-9224-5421B387BACD}"/>
               </a:ext>
             </a:extLst>
           </p:cNvPr>
@@ -16732,7 +16732,7 @@
           <p:cNvPr id="19" name="">
             <a:extLst xmlns:a="http://schemas.openxmlformats.org/drawingml/2006/main">
               <a:ext uri="{FF2B5EF4-FFF2-40B4-BE49-F238E27FC236}">
-                <a16:creationId xmlns:a16="http://schemas.microsoft.com/office/drawing/2014/main" id="{2586354C-EF24-45D8-8FBF-10E98A952A2F}"/>
+                <a16:creationId xmlns:a16="http://schemas.microsoft.com/office/drawing/2014/main" id="{13E2D018-D135-4F6E-B3B2-6E4E0C6EF9E6}"/>
               </a:ext>
             </a:extLst>
           </p:cNvPr>
@@ -16763,7 +16763,7 @@
           <p:cNvPr id="20" name="">
             <a:extLst xmlns:a="http://schemas.openxmlformats.org/drawingml/2006/main">
               <a:ext uri="{FF2B5EF4-FFF2-40B4-BE49-F238E27FC236}">
-                <a16:creationId xmlns:a16="http://schemas.microsoft.com/office/drawing/2014/main" id="{ACFFD6D2-0291-4EC0-A498-BD53AEFC79CF}"/>
+                <a16:creationId xmlns:a16="http://schemas.microsoft.com/office/drawing/2014/main" id="{E9DA3C86-1A66-4CE7-AA84-0A071DAF8F7F}"/>
               </a:ext>
             </a:extLst>
           </p:cNvPr>
@@ -16825,7 +16825,7 @@
           <p:cNvPr id="21" name="">
             <a:extLst xmlns:a="http://schemas.openxmlformats.org/drawingml/2006/main">
               <a:ext uri="{FF2B5EF4-FFF2-40B4-BE49-F238E27FC236}">
-                <a16:creationId xmlns:a16="http://schemas.microsoft.com/office/drawing/2014/main" id="{0BF3B320-41A6-456D-B24E-53E54757E5E1}"/>
+                <a16:creationId xmlns:a16="http://schemas.microsoft.com/office/drawing/2014/main" id="{F498EF86-833E-4111-9AEE-64D7ACE45B01}"/>
               </a:ext>
             </a:extLst>
           </p:cNvPr>
@@ -16887,7 +16887,7 @@
           <p:cNvPr id="22" name="">
             <a:extLst xmlns:a="http://schemas.openxmlformats.org/drawingml/2006/main">
               <a:ext uri="{FF2B5EF4-FFF2-40B4-BE49-F238E27FC236}">
-                <a16:creationId xmlns:a16="http://schemas.microsoft.com/office/drawing/2014/main" id="{F467F58D-F4D9-4DA5-B053-59BEC8AEC919}"/>
+                <a16:creationId xmlns:a16="http://schemas.microsoft.com/office/drawing/2014/main" id="{548D9A85-9F24-48B0-9CBB-7FC00342EC8F}"/>
               </a:ext>
             </a:extLst>
           </p:cNvPr>
@@ -16949,7 +16949,7 @@
           <p:cNvPr id="23" name="">
             <a:extLst xmlns:a="http://schemas.openxmlformats.org/drawingml/2006/main">
               <a:ext uri="{FF2B5EF4-FFF2-40B4-BE49-F238E27FC236}">
-                <a16:creationId xmlns:a16="http://schemas.microsoft.com/office/drawing/2014/main" id="{153CC85B-23A1-4EA5-B34D-BD4442B585A0}"/>
+                <a16:creationId xmlns:a16="http://schemas.microsoft.com/office/drawing/2014/main" id="{D0A5F415-1A19-44FC-9E64-EA199E43EA09}"/>
               </a:ext>
             </a:extLst>
           </p:cNvPr>
@@ -16982,7 +16982,7 @@
           <p:cNvPr id="24" name="">
             <a:extLst xmlns:a="http://schemas.openxmlformats.org/drawingml/2006/main">
               <a:ext uri="{FF2B5EF4-FFF2-40B4-BE49-F238E27FC236}">
-                <a16:creationId xmlns:a16="http://schemas.microsoft.com/office/drawing/2014/main" id="{90B52D1A-F676-4F3F-BECF-5C59F91A1D0E}"/>
+                <a16:creationId xmlns:a16="http://schemas.microsoft.com/office/drawing/2014/main" id="{56EC3A4A-0101-4F5D-BDCF-087FDF81EBC5}"/>
               </a:ext>
             </a:extLst>
           </p:cNvPr>
@@ -17044,7 +17044,7 @@
           <p:cNvPr id="25" name="footer-rule-4">
             <a:extLst xmlns:a="http://schemas.openxmlformats.org/drawingml/2006/main">
               <a:ext uri="{FF2B5EF4-FFF2-40B4-BE49-F238E27FC236}">
-                <a16:creationId xmlns:a16="http://schemas.microsoft.com/office/drawing/2014/main" id="{E2482104-F44C-464E-BAB8-282AC60811C8}"/>
+                <a16:creationId xmlns:a16="http://schemas.microsoft.com/office/drawing/2014/main" id="{00D62966-E416-40F8-B12E-E6892C6ECE41}"/>
               </a:ext>
             </a:extLst>
           </p:cNvPr>
@@ -17075,7 +17075,7 @@
           <p:cNvPr id="26" name="footer-label-4">
             <a:extLst xmlns:a="http://schemas.openxmlformats.org/drawingml/2006/main">
               <a:ext uri="{FF2B5EF4-FFF2-40B4-BE49-F238E27FC236}">
-                <a16:creationId xmlns:a16="http://schemas.microsoft.com/office/drawing/2014/main" id="{61A35296-ED0D-48E5-B6A3-4002FC2999A9}"/>
+                <a16:creationId xmlns:a16="http://schemas.microsoft.com/office/drawing/2014/main" id="{44DC2A84-E548-43DB-8546-1991BF03B723}"/>
               </a:ext>
             </a:extLst>
           </p:cNvPr>
@@ -17137,7 +17137,7 @@
           <p:cNvPr id="27" name="footer-page-4">
             <a:extLst xmlns:a="http://schemas.openxmlformats.org/drawingml/2006/main">
               <a:ext uri="{FF2B5EF4-FFF2-40B4-BE49-F238E27FC236}">
-                <a16:creationId xmlns:a16="http://schemas.microsoft.com/office/drawing/2014/main" id="{1CFEF906-F650-4AE6-99E1-34ADCE6FE3B8}"/>
+                <a16:creationId xmlns:a16="http://schemas.microsoft.com/office/drawing/2014/main" id="{4999D268-B2A5-4896-B496-6006E3061449}"/>
               </a:ext>
             </a:extLst>
           </p:cNvPr>
@@ -17197,7 +17197,7 @@
     </p:spTree>
     <p:extLst>
       <p:ext uri="{BB962C8B-B14F-4D97-AF65-F5344CB8AC3E}">
-        <p14:creationId xmlns:p14="http://schemas.microsoft.com/office/powerpoint/2010/main" val="1357967485"/>
+        <p14:creationId xmlns:p14="http://schemas.microsoft.com/office/powerpoint/2010/main" val="1884541903"/>
       </p:ext>
     </p:extLst>
   </p:cSld>
@@ -17228,7 +17228,7 @@
           <p:cNvPr id="31" name="side-accent-5">
             <a:extLst xmlns:a="http://schemas.openxmlformats.org/drawingml/2006/main">
               <a:ext uri="{FF2B5EF4-FFF2-40B4-BE49-F238E27FC236}">
-                <a16:creationId xmlns:a16="http://schemas.microsoft.com/office/drawing/2014/main" id="{0E6BFC94-F533-436A-8A69-76C727B8A866}"/>
+                <a16:creationId xmlns:a16="http://schemas.microsoft.com/office/drawing/2014/main" id="{8EA7A6B6-641E-439F-831B-EB2875F3BF4C}"/>
               </a:ext>
             </a:extLst>
           </p:cNvPr>
@@ -17259,7 +17259,7 @@
           <p:cNvPr id="2" name="kicker-5">
             <a:extLst xmlns:a="http://schemas.openxmlformats.org/drawingml/2006/main">
               <a:ext uri="{FF2B5EF4-FFF2-40B4-BE49-F238E27FC236}">
-                <a16:creationId xmlns:a16="http://schemas.microsoft.com/office/drawing/2014/main" id="{1177AE0D-7C53-4606-9F5F-C58BD8E33505}"/>
+                <a16:creationId xmlns:a16="http://schemas.microsoft.com/office/drawing/2014/main" id="{627C264B-E641-420B-A1C5-6D3C2E4C229D}"/>
               </a:ext>
             </a:extLst>
           </p:cNvPr>
@@ -17321,7 +17321,7 @@
           <p:cNvPr id="3" name="title-5">
             <a:extLst xmlns:a="http://schemas.openxmlformats.org/drawingml/2006/main">
               <a:ext uri="{FF2B5EF4-FFF2-40B4-BE49-F238E27FC236}">
-                <a16:creationId xmlns:a16="http://schemas.microsoft.com/office/drawing/2014/main" id="{29BDAB57-D6CD-4A53-960F-AF21E6F247A4}"/>
+                <a16:creationId xmlns:a16="http://schemas.microsoft.com/office/drawing/2014/main" id="{28F37DB7-D637-4165-8DAB-A6204B5AB2C5}"/>
               </a:ext>
             </a:extLst>
           </p:cNvPr>
@@ -17383,7 +17383,7 @@
           <p:cNvPr id="4" name="">
             <a:extLst xmlns:a="http://schemas.openxmlformats.org/drawingml/2006/main">
               <a:ext uri="{FF2B5EF4-FFF2-40B4-BE49-F238E27FC236}">
-                <a16:creationId xmlns:a16="http://schemas.microsoft.com/office/drawing/2014/main" id="{52DF9ED8-58E1-44F4-BC2C-F2DB6636788A}"/>
+                <a16:creationId xmlns:a16="http://schemas.microsoft.com/office/drawing/2014/main" id="{9155FC74-02E2-489A-A3FF-A084CEC05C8A}"/>
               </a:ext>
             </a:extLst>
           </p:cNvPr>
@@ -17445,7 +17445,7 @@
           <p:cNvPr id="5" name="workflow-line">
             <a:extLst xmlns:a="http://schemas.openxmlformats.org/drawingml/2006/main">
               <a:ext uri="{FF2B5EF4-FFF2-40B4-BE49-F238E27FC236}">
-                <a16:creationId xmlns:a16="http://schemas.microsoft.com/office/drawing/2014/main" id="{A751A99E-1A1C-46C3-8EDB-5237C8EE83D9}"/>
+                <a16:creationId xmlns:a16="http://schemas.microsoft.com/office/drawing/2014/main" id="{19777EE4-62D6-4684-B68D-9C1358AFB668}"/>
               </a:ext>
             </a:extLst>
           </p:cNvPr>
@@ -17476,7 +17476,7 @@
           <p:cNvPr id="6" name="workflow-arrow">
             <a:extLst xmlns:a="http://schemas.openxmlformats.org/drawingml/2006/main">
               <a:ext uri="{FF2B5EF4-FFF2-40B4-BE49-F238E27FC236}">
-                <a16:creationId xmlns:a16="http://schemas.microsoft.com/office/drawing/2014/main" id="{5DBFBE9A-7E8F-4918-85F5-D0B4EBF9240D}"/>
+                <a16:creationId xmlns:a16="http://schemas.microsoft.com/office/drawing/2014/main" id="{0022651F-48DC-43CC-A54B-52378DB20631}"/>
               </a:ext>
             </a:extLst>
           </p:cNvPr>
@@ -17507,7 +17507,7 @@
           <p:cNvPr id="7" name="">
             <a:extLst xmlns:a="http://schemas.openxmlformats.org/drawingml/2006/main">
               <a:ext uri="{FF2B5EF4-FFF2-40B4-BE49-F238E27FC236}">
-                <a16:creationId xmlns:a16="http://schemas.microsoft.com/office/drawing/2014/main" id="{E15A86AE-804E-4200-A085-6658B708F3C0}"/>
+                <a16:creationId xmlns:a16="http://schemas.microsoft.com/office/drawing/2014/main" id="{A073CF55-7604-4A22-B0DE-84135DE863FD}"/>
               </a:ext>
             </a:extLst>
           </p:cNvPr>
@@ -17538,7 +17538,7 @@
           <p:cNvPr id="8" name="">
             <a:extLst xmlns:a="http://schemas.openxmlformats.org/drawingml/2006/main">
               <a:ext uri="{FF2B5EF4-FFF2-40B4-BE49-F238E27FC236}">
-                <a16:creationId xmlns:a16="http://schemas.microsoft.com/office/drawing/2014/main" id="{97317288-0B5A-4406-9176-D7B2FEF6168D}"/>
+                <a16:creationId xmlns:a16="http://schemas.microsoft.com/office/drawing/2014/main" id="{EA53AE18-AE41-4CC4-BCB8-219CFDE3728E}"/>
               </a:ext>
             </a:extLst>
           </p:cNvPr>
@@ -17600,7 +17600,7 @@
           <p:cNvPr id="9" name="">
             <a:extLst xmlns:a="http://schemas.openxmlformats.org/drawingml/2006/main">
               <a:ext uri="{FF2B5EF4-FFF2-40B4-BE49-F238E27FC236}">
-                <a16:creationId xmlns:a16="http://schemas.microsoft.com/office/drawing/2014/main" id="{B0E7F9BA-549E-4B2F-81A8-5D5497945252}"/>
+                <a16:creationId xmlns:a16="http://schemas.microsoft.com/office/drawing/2014/main" id="{C572D91A-D9BB-421E-A488-5DDECC145C98}"/>
               </a:ext>
             </a:extLst>
           </p:cNvPr>
@@ -17662,7 +17662,7 @@
           <p:cNvPr id="10" name="">
             <a:extLst xmlns:a="http://schemas.openxmlformats.org/drawingml/2006/main">
               <a:ext uri="{FF2B5EF4-FFF2-40B4-BE49-F238E27FC236}">
-                <a16:creationId xmlns:a16="http://schemas.microsoft.com/office/drawing/2014/main" id="{7184EC80-A256-448D-9E9A-B661CC5E59BA}"/>
+                <a16:creationId xmlns:a16="http://schemas.microsoft.com/office/drawing/2014/main" id="{1AFA824A-EBBA-4555-A57A-960060EBE28D}"/>
               </a:ext>
             </a:extLst>
           </p:cNvPr>
@@ -17724,7 +17724,7 @@
           <p:cNvPr id="11" name="">
             <a:extLst xmlns:a="http://schemas.openxmlformats.org/drawingml/2006/main">
               <a:ext uri="{FF2B5EF4-FFF2-40B4-BE49-F238E27FC236}">
-                <a16:creationId xmlns:a16="http://schemas.microsoft.com/office/drawing/2014/main" id="{61833430-B1C8-47D5-B47C-7E508E7CD0E4}"/>
+                <a16:creationId xmlns:a16="http://schemas.microsoft.com/office/drawing/2014/main" id="{B533807C-33E9-4498-8162-044724B4FDC3}"/>
               </a:ext>
             </a:extLst>
           </p:cNvPr>
@@ -17755,7 +17755,7 @@
           <p:cNvPr id="12" name="">
             <a:extLst xmlns:a="http://schemas.openxmlformats.org/drawingml/2006/main">
               <a:ext uri="{FF2B5EF4-FFF2-40B4-BE49-F238E27FC236}">
-                <a16:creationId xmlns:a16="http://schemas.microsoft.com/office/drawing/2014/main" id="{0DE66CDD-F2F3-4629-8D74-6C3C43802664}"/>
+                <a16:creationId xmlns:a16="http://schemas.microsoft.com/office/drawing/2014/main" id="{F92A8576-5E29-45D1-8F75-6316D269863A}"/>
               </a:ext>
             </a:extLst>
           </p:cNvPr>
@@ -17817,7 +17817,7 @@
           <p:cNvPr id="13" name="">
             <a:extLst xmlns:a="http://schemas.openxmlformats.org/drawingml/2006/main">
               <a:ext uri="{FF2B5EF4-FFF2-40B4-BE49-F238E27FC236}">
-                <a16:creationId xmlns:a16="http://schemas.microsoft.com/office/drawing/2014/main" id="{E3599DF1-6295-4BEF-9668-544DEC2F4E46}"/>
+                <a16:creationId xmlns:a16="http://schemas.microsoft.com/office/drawing/2014/main" id="{B6A7C876-D603-4B1C-B6E4-0F5EA781B228}"/>
               </a:ext>
             </a:extLst>
           </p:cNvPr>
@@ -17879,7 +17879,7 @@
           <p:cNvPr id="14" name="">
             <a:extLst xmlns:a="http://schemas.openxmlformats.org/drawingml/2006/main">
               <a:ext uri="{FF2B5EF4-FFF2-40B4-BE49-F238E27FC236}">
-                <a16:creationId xmlns:a16="http://schemas.microsoft.com/office/drawing/2014/main" id="{E7E949D0-BB4C-4618-A64B-4BFCEB486754}"/>
+                <a16:creationId xmlns:a16="http://schemas.microsoft.com/office/drawing/2014/main" id="{FFF6A7B0-D5A9-485E-8DB0-86E38EC9E63F}"/>
               </a:ext>
             </a:extLst>
           </p:cNvPr>
@@ -17941,7 +17941,7 @@
           <p:cNvPr id="15" name="">
             <a:extLst xmlns:a="http://schemas.openxmlformats.org/drawingml/2006/main">
               <a:ext uri="{FF2B5EF4-FFF2-40B4-BE49-F238E27FC236}">
-                <a16:creationId xmlns:a16="http://schemas.microsoft.com/office/drawing/2014/main" id="{30D7F166-7C76-437A-9DAE-25A505B5D4E5}"/>
+                <a16:creationId xmlns:a16="http://schemas.microsoft.com/office/drawing/2014/main" id="{F0100418-63EE-4087-9769-49C9EAAF157A}"/>
               </a:ext>
             </a:extLst>
           </p:cNvPr>
@@ -17972,7 +17972,7 @@
           <p:cNvPr id="16" name="">
             <a:extLst xmlns:a="http://schemas.openxmlformats.org/drawingml/2006/main">
               <a:ext uri="{FF2B5EF4-FFF2-40B4-BE49-F238E27FC236}">
-                <a16:creationId xmlns:a16="http://schemas.microsoft.com/office/drawing/2014/main" id="{DDE92406-6109-410D-B465-3180E1FF029C}"/>
+                <a16:creationId xmlns:a16="http://schemas.microsoft.com/office/drawing/2014/main" id="{E1DF6B8F-D856-4736-96F1-6593AFB41C89}"/>
               </a:ext>
             </a:extLst>
           </p:cNvPr>
@@ -18034,7 +18034,7 @@
           <p:cNvPr id="17" name="">
             <a:extLst xmlns:a="http://schemas.openxmlformats.org/drawingml/2006/main">
               <a:ext uri="{FF2B5EF4-FFF2-40B4-BE49-F238E27FC236}">
-                <a16:creationId xmlns:a16="http://schemas.microsoft.com/office/drawing/2014/main" id="{772F7D55-3990-4AC8-8AC1-A9FE447DC921}"/>
+                <a16:creationId xmlns:a16="http://schemas.microsoft.com/office/drawing/2014/main" id="{F7C07F08-B40A-4B24-9008-21A929FB3736}"/>
               </a:ext>
             </a:extLst>
           </p:cNvPr>
@@ -18096,7 +18096,7 @@
           <p:cNvPr id="18" name="">
             <a:extLst xmlns:a="http://schemas.openxmlformats.org/drawingml/2006/main">
               <a:ext uri="{FF2B5EF4-FFF2-40B4-BE49-F238E27FC236}">
-                <a16:creationId xmlns:a16="http://schemas.microsoft.com/office/drawing/2014/main" id="{74B7733B-B647-497F-81B9-3BC097CB1A68}"/>
+                <a16:creationId xmlns:a16="http://schemas.microsoft.com/office/drawing/2014/main" id="{90D5E2C8-7753-4B7B-9FCE-131469C5A1EE}"/>
               </a:ext>
             </a:extLst>
           </p:cNvPr>
@@ -18158,7 +18158,7 @@
           <p:cNvPr id="19" name="">
             <a:extLst xmlns:a="http://schemas.openxmlformats.org/drawingml/2006/main">
               <a:ext uri="{FF2B5EF4-FFF2-40B4-BE49-F238E27FC236}">
-                <a16:creationId xmlns:a16="http://schemas.microsoft.com/office/drawing/2014/main" id="{41194465-4487-413E-A6D6-08E23A5D267D}"/>
+                <a16:creationId xmlns:a16="http://schemas.microsoft.com/office/drawing/2014/main" id="{DB156925-EA0C-4546-BD49-B1A02DB1BB57}"/>
               </a:ext>
             </a:extLst>
           </p:cNvPr>
@@ -18189,7 +18189,7 @@
           <p:cNvPr id="20" name="">
             <a:extLst xmlns:a="http://schemas.openxmlformats.org/drawingml/2006/main">
               <a:ext uri="{FF2B5EF4-FFF2-40B4-BE49-F238E27FC236}">
-                <a16:creationId xmlns:a16="http://schemas.microsoft.com/office/drawing/2014/main" id="{32F33CCB-2B69-4ECD-8A78-D29A6523BF76}"/>
+                <a16:creationId xmlns:a16="http://schemas.microsoft.com/office/drawing/2014/main" id="{12016007-6732-4F78-A84F-74E12AEF75EF}"/>
               </a:ext>
             </a:extLst>
           </p:cNvPr>
@@ -18251,7 +18251,7 @@
           <p:cNvPr id="21" name="">
             <a:extLst xmlns:a="http://schemas.openxmlformats.org/drawingml/2006/main">
               <a:ext uri="{FF2B5EF4-FFF2-40B4-BE49-F238E27FC236}">
-                <a16:creationId xmlns:a16="http://schemas.microsoft.com/office/drawing/2014/main" id="{4831A3EF-F0C5-4173-9EBC-F7456C5DF173}"/>
+                <a16:creationId xmlns:a16="http://schemas.microsoft.com/office/drawing/2014/main" id="{A4B9EFCE-EAEA-443A-84E2-E0B54A7AE7F8}"/>
               </a:ext>
             </a:extLst>
           </p:cNvPr>
@@ -18313,7 +18313,7 @@
           <p:cNvPr id="22" name="">
             <a:extLst xmlns:a="http://schemas.openxmlformats.org/drawingml/2006/main">
               <a:ext uri="{FF2B5EF4-FFF2-40B4-BE49-F238E27FC236}">
-                <a16:creationId xmlns:a16="http://schemas.microsoft.com/office/drawing/2014/main" id="{0CCB5FE8-A4FE-463B-A346-6AC885650532}"/>
+                <a16:creationId xmlns:a16="http://schemas.microsoft.com/office/drawing/2014/main" id="{51B323EC-0B9A-430C-8EE8-D7EFADFE6EAA}"/>
               </a:ext>
             </a:extLst>
           </p:cNvPr>
@@ -18375,7 +18375,7 @@
           <p:cNvPr id="23" name="">
             <a:extLst xmlns:a="http://schemas.openxmlformats.org/drawingml/2006/main">
               <a:ext uri="{FF2B5EF4-FFF2-40B4-BE49-F238E27FC236}">
-                <a16:creationId xmlns:a16="http://schemas.microsoft.com/office/drawing/2014/main" id="{BE235282-F13C-45FA-9C34-5D32525A4AAC}"/>
+                <a16:creationId xmlns:a16="http://schemas.microsoft.com/office/drawing/2014/main" id="{9C27E341-E18D-462B-B9E3-9054530FBE13}"/>
               </a:ext>
             </a:extLst>
           </p:cNvPr>
@@ -18406,7 +18406,7 @@
           <p:cNvPr id="24" name="">
             <a:extLst xmlns:a="http://schemas.openxmlformats.org/drawingml/2006/main">
               <a:ext uri="{FF2B5EF4-FFF2-40B4-BE49-F238E27FC236}">
-                <a16:creationId xmlns:a16="http://schemas.microsoft.com/office/drawing/2014/main" id="{0EA59289-3DC9-4B2F-B220-35909CA1A468}"/>
+                <a16:creationId xmlns:a16="http://schemas.microsoft.com/office/drawing/2014/main" id="{25B0DC59-5232-4856-BF36-7C2ED496D697}"/>
               </a:ext>
             </a:extLst>
           </p:cNvPr>
@@ -18468,7 +18468,7 @@
           <p:cNvPr id="25" name="">
             <a:extLst xmlns:a="http://schemas.openxmlformats.org/drawingml/2006/main">
               <a:ext uri="{FF2B5EF4-FFF2-40B4-BE49-F238E27FC236}">
-                <a16:creationId xmlns:a16="http://schemas.microsoft.com/office/drawing/2014/main" id="{1EFE20F6-9E64-469A-8F55-0D352592DB22}"/>
+                <a16:creationId xmlns:a16="http://schemas.microsoft.com/office/drawing/2014/main" id="{044F5B00-7B8E-46C4-8F77-597437EC0D5E}"/>
               </a:ext>
             </a:extLst>
           </p:cNvPr>
@@ -18530,7 +18530,7 @@
           <p:cNvPr id="26" name="">
             <a:extLst xmlns:a="http://schemas.openxmlformats.org/drawingml/2006/main">
               <a:ext uri="{FF2B5EF4-FFF2-40B4-BE49-F238E27FC236}">
-                <a16:creationId xmlns:a16="http://schemas.microsoft.com/office/drawing/2014/main" id="{C7813827-5017-4F7F-8335-011F91CCD493}"/>
+                <a16:creationId xmlns:a16="http://schemas.microsoft.com/office/drawing/2014/main" id="{67C9E876-9095-4113-B7E4-CC941502F10D}"/>
               </a:ext>
             </a:extLst>
           </p:cNvPr>
@@ -18592,7 +18592,7 @@
           <p:cNvPr id="27" name="">
             <a:extLst xmlns:a="http://schemas.openxmlformats.org/drawingml/2006/main">
               <a:ext uri="{FF2B5EF4-FFF2-40B4-BE49-F238E27FC236}">
-                <a16:creationId xmlns:a16="http://schemas.microsoft.com/office/drawing/2014/main" id="{6DD767B2-225F-470A-9662-6267CA5F7A6F}"/>
+                <a16:creationId xmlns:a16="http://schemas.microsoft.com/office/drawing/2014/main" id="{79A97088-B35F-4C69-837E-2C3FE34CAFEC}"/>
               </a:ext>
             </a:extLst>
           </p:cNvPr>
@@ -18654,7 +18654,7 @@
           <p:cNvPr id="28" name="footer-rule-5">
             <a:extLst xmlns:a="http://schemas.openxmlformats.org/drawingml/2006/main">
               <a:ext uri="{FF2B5EF4-FFF2-40B4-BE49-F238E27FC236}">
-                <a16:creationId xmlns:a16="http://schemas.microsoft.com/office/drawing/2014/main" id="{22925880-CA46-4C06-B1DC-B708CD3EA47D}"/>
+                <a16:creationId xmlns:a16="http://schemas.microsoft.com/office/drawing/2014/main" id="{370FBF1D-EF19-400B-8560-53921914BAED}"/>
               </a:ext>
             </a:extLst>
           </p:cNvPr>
@@ -18685,7 +18685,7 @@
           <p:cNvPr id="29" name="footer-label-5">
             <a:extLst xmlns:a="http://schemas.openxmlformats.org/drawingml/2006/main">
               <a:ext uri="{FF2B5EF4-FFF2-40B4-BE49-F238E27FC236}">
-                <a16:creationId xmlns:a16="http://schemas.microsoft.com/office/drawing/2014/main" id="{23055C99-1BA2-41C3-B9A6-0696BB3AE14F}"/>
+                <a16:creationId xmlns:a16="http://schemas.microsoft.com/office/drawing/2014/main" id="{F45394DA-82E1-48F3-BBCF-BA5C1356EF7E}"/>
               </a:ext>
             </a:extLst>
           </p:cNvPr>
@@ -18747,7 +18747,7 @@
           <p:cNvPr id="30" name="footer-page-5">
             <a:extLst xmlns:a="http://schemas.openxmlformats.org/drawingml/2006/main">
               <a:ext uri="{FF2B5EF4-FFF2-40B4-BE49-F238E27FC236}">
-                <a16:creationId xmlns:a16="http://schemas.microsoft.com/office/drawing/2014/main" id="{0A329F1D-322F-4D19-BA1F-D4A0C1EF6D9D}"/>
+                <a16:creationId xmlns:a16="http://schemas.microsoft.com/office/drawing/2014/main" id="{F37C697B-6083-47B8-843B-58063D05D252}"/>
               </a:ext>
             </a:extLst>
           </p:cNvPr>
@@ -18807,7 +18807,7 @@
     </p:spTree>
     <p:extLst>
       <p:ext uri="{BB962C8B-B14F-4D97-AF65-F5344CB8AC3E}">
-        <p14:creationId xmlns:p14="http://schemas.microsoft.com/office/powerpoint/2010/main" val="756319936"/>
+        <p14:creationId xmlns:p14="http://schemas.microsoft.com/office/powerpoint/2010/main" val="1000659268"/>
       </p:ext>
     </p:extLst>
   </p:cSld>
@@ -18838,7 +18838,7 @@
           <p:cNvPr id="22" name="side-accent-6">
             <a:extLst xmlns:a="http://schemas.openxmlformats.org/drawingml/2006/main">
               <a:ext uri="{FF2B5EF4-FFF2-40B4-BE49-F238E27FC236}">
-                <a16:creationId xmlns:a16="http://schemas.microsoft.com/office/drawing/2014/main" id="{0AA58318-2B27-40A0-976A-B339B6BDC84C}"/>
+                <a16:creationId xmlns:a16="http://schemas.microsoft.com/office/drawing/2014/main" id="{458C03D4-1899-45CF-8267-FCA032589759}"/>
               </a:ext>
             </a:extLst>
           </p:cNvPr>
@@ -18869,7 +18869,7 @@
           <p:cNvPr id="2" name="kicker-6">
             <a:extLst xmlns:a="http://schemas.openxmlformats.org/drawingml/2006/main">
               <a:ext uri="{FF2B5EF4-FFF2-40B4-BE49-F238E27FC236}">
-                <a16:creationId xmlns:a16="http://schemas.microsoft.com/office/drawing/2014/main" id="{643BB606-48C2-4BD6-88FF-FF86E38ACD5C}"/>
+                <a16:creationId xmlns:a16="http://schemas.microsoft.com/office/drawing/2014/main" id="{7D40E29E-7F5B-432F-878A-76B2377F728F}"/>
               </a:ext>
             </a:extLst>
           </p:cNvPr>
@@ -18931,7 +18931,7 @@
           <p:cNvPr id="3" name="title-6">
             <a:extLst xmlns:a="http://schemas.openxmlformats.org/drawingml/2006/main">
               <a:ext uri="{FF2B5EF4-FFF2-40B4-BE49-F238E27FC236}">
-                <a16:creationId xmlns:a16="http://schemas.microsoft.com/office/drawing/2014/main" id="{E1B5CE0E-9064-483A-84E5-D308E522FDD3}"/>
+                <a16:creationId xmlns:a16="http://schemas.microsoft.com/office/drawing/2014/main" id="{4ABE1EE7-F998-4261-B1F2-51AE96E39D4A}"/>
               </a:ext>
             </a:extLst>
           </p:cNvPr>
@@ -18993,7 +18993,7 @@
           <p:cNvPr id="4" name="">
             <a:extLst xmlns:a="http://schemas.openxmlformats.org/drawingml/2006/main">
               <a:ext uri="{FF2B5EF4-FFF2-40B4-BE49-F238E27FC236}">
-                <a16:creationId xmlns:a16="http://schemas.microsoft.com/office/drawing/2014/main" id="{1CB652A5-CDEC-4704-A512-87263AD8FE08}"/>
+                <a16:creationId xmlns:a16="http://schemas.microsoft.com/office/drawing/2014/main" id="{E8B1D94A-F716-4494-BA4C-A74722A84F61}"/>
               </a:ext>
             </a:extLst>
           </p:cNvPr>
@@ -19055,7 +19055,7 @@
           <p:cNvPr id="5" name="">
             <a:extLst xmlns:a="http://schemas.openxmlformats.org/drawingml/2006/main">
               <a:ext uri="{FF2B5EF4-FFF2-40B4-BE49-F238E27FC236}">
-                <a16:creationId xmlns:a16="http://schemas.microsoft.com/office/drawing/2014/main" id="{28310D9C-DF09-4443-A376-B4AECD2AE2B5}"/>
+                <a16:creationId xmlns:a16="http://schemas.microsoft.com/office/drawing/2014/main" id="{5D7FF43E-FDE2-46E8-9F86-10CA65B77EC6}"/>
               </a:ext>
             </a:extLst>
           </p:cNvPr>
@@ -19117,7 +19117,7 @@
           <p:cNvPr id="6" name="">
             <a:extLst xmlns:a="http://schemas.openxmlformats.org/drawingml/2006/main">
               <a:ext uri="{FF2B5EF4-FFF2-40B4-BE49-F238E27FC236}">
-                <a16:creationId xmlns:a16="http://schemas.microsoft.com/office/drawing/2014/main" id="{D9A73A49-AB07-4DFB-9756-C87DEE2DFE17}"/>
+                <a16:creationId xmlns:a16="http://schemas.microsoft.com/office/drawing/2014/main" id="{3CEE84B3-1170-4D00-ACED-063F5FDF882B}"/>
               </a:ext>
             </a:extLst>
           </p:cNvPr>
@@ -19179,7 +19179,7 @@
           <p:cNvPr id="7" name="">
             <a:extLst xmlns:a="http://schemas.openxmlformats.org/drawingml/2006/main">
               <a:ext uri="{FF2B5EF4-FFF2-40B4-BE49-F238E27FC236}">
-                <a16:creationId xmlns:a16="http://schemas.microsoft.com/office/drawing/2014/main" id="{5B7F73A3-2BBF-4D37-962D-77A85535A8D5}"/>
+                <a16:creationId xmlns:a16="http://schemas.microsoft.com/office/drawing/2014/main" id="{5E3F21EE-F125-444D-9E75-02780467217B}"/>
               </a:ext>
             </a:extLst>
           </p:cNvPr>
@@ -19210,7 +19210,7 @@
           <p:cNvPr id="8" name="">
             <a:extLst xmlns:a="http://schemas.openxmlformats.org/drawingml/2006/main">
               <a:ext uri="{FF2B5EF4-FFF2-40B4-BE49-F238E27FC236}">
-                <a16:creationId xmlns:a16="http://schemas.microsoft.com/office/drawing/2014/main" id="{5B844E5D-9AAB-4F7B-9D12-6FED7C36EF75}"/>
+                <a16:creationId xmlns:a16="http://schemas.microsoft.com/office/drawing/2014/main" id="{1B8B7D63-09BD-4365-8AA9-B35C628CB104}"/>
               </a:ext>
             </a:extLst>
           </p:cNvPr>
@@ -19299,7 +19299,7 @@
           <p:cNvPr id="9" name="">
             <a:extLst xmlns:a="http://schemas.openxmlformats.org/drawingml/2006/main">
               <a:ext uri="{FF2B5EF4-FFF2-40B4-BE49-F238E27FC236}">
-                <a16:creationId xmlns:a16="http://schemas.microsoft.com/office/drawing/2014/main" id="{E690D791-4F0D-4305-AD8A-AD400A8EBC67}"/>
+                <a16:creationId xmlns:a16="http://schemas.microsoft.com/office/drawing/2014/main" id="{24A2EEE7-39CB-4666-8D81-6FB24DFEB2F9}"/>
               </a:ext>
             </a:extLst>
           </p:cNvPr>
@@ -19361,7 +19361,7 @@
           <p:cNvPr id="10" name="">
             <a:extLst xmlns:a="http://schemas.openxmlformats.org/drawingml/2006/main">
               <a:ext uri="{FF2B5EF4-FFF2-40B4-BE49-F238E27FC236}">
-                <a16:creationId xmlns:a16="http://schemas.microsoft.com/office/drawing/2014/main" id="{5657D51C-0C65-499A-A4D4-140D8E35EC81}"/>
+                <a16:creationId xmlns:a16="http://schemas.microsoft.com/office/drawing/2014/main" id="{3422E4A8-7F3E-4EE8-9CE5-EC5ED4FA0D15}"/>
               </a:ext>
             </a:extLst>
           </p:cNvPr>
@@ -19423,7 +19423,7 @@
           <p:cNvPr id="11" name="">
             <a:extLst xmlns:a="http://schemas.openxmlformats.org/drawingml/2006/main">
               <a:ext uri="{FF2B5EF4-FFF2-40B4-BE49-F238E27FC236}">
-                <a16:creationId xmlns:a16="http://schemas.microsoft.com/office/drawing/2014/main" id="{30D5016C-0FC8-428E-863B-EFBD7B553800}"/>
+                <a16:creationId xmlns:a16="http://schemas.microsoft.com/office/drawing/2014/main" id="{BF4E8181-E4AE-4650-941C-FC65CCB72557}"/>
               </a:ext>
             </a:extLst>
           </p:cNvPr>
@@ -19454,7 +19454,7 @@
           <p:cNvPr id="12" name="">
             <a:extLst xmlns:a="http://schemas.openxmlformats.org/drawingml/2006/main">
               <a:ext uri="{FF2B5EF4-FFF2-40B4-BE49-F238E27FC236}">
-                <a16:creationId xmlns:a16="http://schemas.microsoft.com/office/drawing/2014/main" id="{83017118-7F1B-4269-9050-C7AAC728F859}"/>
+                <a16:creationId xmlns:a16="http://schemas.microsoft.com/office/drawing/2014/main" id="{C6501293-483E-47D8-B565-DBA3A46022DE}"/>
               </a:ext>
             </a:extLst>
           </p:cNvPr>
@@ -19543,7 +19543,7 @@
           <p:cNvPr id="13" name="">
             <a:extLst xmlns:a="http://schemas.openxmlformats.org/drawingml/2006/main">
               <a:ext uri="{FF2B5EF4-FFF2-40B4-BE49-F238E27FC236}">
-                <a16:creationId xmlns:a16="http://schemas.microsoft.com/office/drawing/2014/main" id="{621A51CC-3675-4836-84B7-FA3CC7996E61}"/>
+                <a16:creationId xmlns:a16="http://schemas.microsoft.com/office/drawing/2014/main" id="{91D11419-C4D6-4BAE-875B-E3BCE7DB43DF}"/>
               </a:ext>
             </a:extLst>
           </p:cNvPr>
@@ -19605,7 +19605,7 @@
           <p:cNvPr id="14" name="">
             <a:extLst xmlns:a="http://schemas.openxmlformats.org/drawingml/2006/main">
               <a:ext uri="{FF2B5EF4-FFF2-40B4-BE49-F238E27FC236}">
-                <a16:creationId xmlns:a16="http://schemas.microsoft.com/office/drawing/2014/main" id="{9E396951-233A-479D-ABF3-AA094457577B}"/>
+                <a16:creationId xmlns:a16="http://schemas.microsoft.com/office/drawing/2014/main" id="{CAA86058-F8C0-4EF4-B175-2B61E085BF99}"/>
               </a:ext>
             </a:extLst>
           </p:cNvPr>
@@ -19667,7 +19667,7 @@
           <p:cNvPr id="15" name="">
             <a:extLst xmlns:a="http://schemas.openxmlformats.org/drawingml/2006/main">
               <a:ext uri="{FF2B5EF4-FFF2-40B4-BE49-F238E27FC236}">
-                <a16:creationId xmlns:a16="http://schemas.microsoft.com/office/drawing/2014/main" id="{7D1DDFF5-2E2A-439E-97EA-045D8638C725}"/>
+                <a16:creationId xmlns:a16="http://schemas.microsoft.com/office/drawing/2014/main" id="{9C498936-B758-40A8-B22A-4D0741D968D1}"/>
               </a:ext>
             </a:extLst>
           </p:cNvPr>
@@ -19698,7 +19698,7 @@
           <p:cNvPr id="16" name="">
             <a:extLst xmlns:a="http://schemas.openxmlformats.org/drawingml/2006/main">
               <a:ext uri="{FF2B5EF4-FFF2-40B4-BE49-F238E27FC236}">
-                <a16:creationId xmlns:a16="http://schemas.microsoft.com/office/drawing/2014/main" id="{79394661-A9E3-4241-AEA0-E9B70620CC23}"/>
+                <a16:creationId xmlns:a16="http://schemas.microsoft.com/office/drawing/2014/main" id="{B9D25F2D-FE03-41DD-AC31-42ABF509A8D5}"/>
               </a:ext>
             </a:extLst>
           </p:cNvPr>
@@ -19787,7 +19787,7 @@
           <p:cNvPr id="17" name="">
             <a:extLst xmlns:a="http://schemas.openxmlformats.org/drawingml/2006/main">
               <a:ext uri="{FF2B5EF4-FFF2-40B4-BE49-F238E27FC236}">
-                <a16:creationId xmlns:a16="http://schemas.microsoft.com/office/drawing/2014/main" id="{F72A1160-A0DF-476C-96DF-1B8427C2ED3B}"/>
+                <a16:creationId xmlns:a16="http://schemas.microsoft.com/office/drawing/2014/main" id="{861E5FB0-440B-483B-ADBC-34FC1D4F0EA4}"/>
               </a:ext>
             </a:extLst>
           </p:cNvPr>
@@ -19820,7 +19820,7 @@
           <p:cNvPr id="18" name="">
             <a:extLst xmlns:a="http://schemas.openxmlformats.org/drawingml/2006/main">
               <a:ext uri="{FF2B5EF4-FFF2-40B4-BE49-F238E27FC236}">
-                <a16:creationId xmlns:a16="http://schemas.microsoft.com/office/drawing/2014/main" id="{76E41F3E-CA23-4C67-AB6A-18D0B663A3AF}"/>
+                <a16:creationId xmlns:a16="http://schemas.microsoft.com/office/drawing/2014/main" id="{86B00F28-F9E8-4EA4-A585-365FC7270C7B}"/>
               </a:ext>
             </a:extLst>
           </p:cNvPr>
@@ -19909,7 +19909,7 @@
           <p:cNvPr id="19" name="footer-rule-6">
             <a:extLst xmlns:a="http://schemas.openxmlformats.org/drawingml/2006/main">
               <a:ext uri="{FF2B5EF4-FFF2-40B4-BE49-F238E27FC236}">
-                <a16:creationId xmlns:a16="http://schemas.microsoft.com/office/drawing/2014/main" id="{1237F03A-16D1-4DB2-9E9E-C6F8E97A920C}"/>
+                <a16:creationId xmlns:a16="http://schemas.microsoft.com/office/drawing/2014/main" id="{092104D4-67D0-4714-A32C-B2A56F5DADB2}"/>
               </a:ext>
             </a:extLst>
           </p:cNvPr>
@@ -19940,7 +19940,7 @@
           <p:cNvPr id="20" name="footer-label-6">
             <a:extLst xmlns:a="http://schemas.openxmlformats.org/drawingml/2006/main">
               <a:ext uri="{FF2B5EF4-FFF2-40B4-BE49-F238E27FC236}">
-                <a16:creationId xmlns:a16="http://schemas.microsoft.com/office/drawing/2014/main" id="{B553FC13-9EBA-435D-8201-AE5F511C0B2B}"/>
+                <a16:creationId xmlns:a16="http://schemas.microsoft.com/office/drawing/2014/main" id="{7858B04A-2726-4C8B-AE35-06384D27663B}"/>
               </a:ext>
             </a:extLst>
           </p:cNvPr>
@@ -20002,7 +20002,7 @@
           <p:cNvPr id="21" name="footer-page-6">
             <a:extLst xmlns:a="http://schemas.openxmlformats.org/drawingml/2006/main">
               <a:ext uri="{FF2B5EF4-FFF2-40B4-BE49-F238E27FC236}">
-                <a16:creationId xmlns:a16="http://schemas.microsoft.com/office/drawing/2014/main" id="{43158893-D43A-4C29-AB40-6E8F7ADA10C0}"/>
+                <a16:creationId xmlns:a16="http://schemas.microsoft.com/office/drawing/2014/main" id="{B23AB426-4073-498B-87EF-494BFCC24B13}"/>
               </a:ext>
             </a:extLst>
           </p:cNvPr>
@@ -20062,7 +20062,7 @@
     </p:spTree>
     <p:extLst>
       <p:ext uri="{BB962C8B-B14F-4D97-AF65-F5344CB8AC3E}">
-        <p14:creationId xmlns:p14="http://schemas.microsoft.com/office/powerpoint/2010/main" val="1219486314"/>
+        <p14:creationId xmlns:p14="http://schemas.microsoft.com/office/powerpoint/2010/main" val="1268567040"/>
       </p:ext>
     </p:extLst>
   </p:cSld>
@@ -20093,7 +20093,7 @@
           <p:cNvPr id="28" name="side-accent-7">
             <a:extLst xmlns:a="http://schemas.openxmlformats.org/drawingml/2006/main">
               <a:ext uri="{FF2B5EF4-FFF2-40B4-BE49-F238E27FC236}">
-                <a16:creationId xmlns:a16="http://schemas.microsoft.com/office/drawing/2014/main" id="{9556CC76-D37F-4293-B7D6-1723BD433F2A}"/>
+                <a16:creationId xmlns:a16="http://schemas.microsoft.com/office/drawing/2014/main" id="{812B978E-41D6-4B12-8C1A-3C1A93E475F0}"/>
               </a:ext>
             </a:extLst>
           </p:cNvPr>
@@ -20124,7 +20124,7 @@
           <p:cNvPr id="2" name="kicker-7">
             <a:extLst xmlns:a="http://schemas.openxmlformats.org/drawingml/2006/main">
               <a:ext uri="{FF2B5EF4-FFF2-40B4-BE49-F238E27FC236}">
-                <a16:creationId xmlns:a16="http://schemas.microsoft.com/office/drawing/2014/main" id="{A3DA54C8-F3FE-4429-9B4F-BE334420CDC4}"/>
+                <a16:creationId xmlns:a16="http://schemas.microsoft.com/office/drawing/2014/main" id="{3010FA3F-A6FD-43EE-B069-253BC7EA3D33}"/>
               </a:ext>
             </a:extLst>
           </p:cNvPr>
@@ -20186,7 +20186,7 @@
           <p:cNvPr id="3" name="title-7">
             <a:extLst xmlns:a="http://schemas.openxmlformats.org/drawingml/2006/main">
               <a:ext uri="{FF2B5EF4-FFF2-40B4-BE49-F238E27FC236}">
-                <a16:creationId xmlns:a16="http://schemas.microsoft.com/office/drawing/2014/main" id="{02045847-C2E8-46C9-A617-15F9F45E42DC}"/>
+                <a16:creationId xmlns:a16="http://schemas.microsoft.com/office/drawing/2014/main" id="{D4D5F690-7959-4908-805C-1BF9FF21B1C8}"/>
               </a:ext>
             </a:extLst>
           </p:cNvPr>
@@ -20248,7 +20248,7 @@
           <p:cNvPr id="4" name="">
             <a:extLst xmlns:a="http://schemas.openxmlformats.org/drawingml/2006/main">
               <a:ext uri="{FF2B5EF4-FFF2-40B4-BE49-F238E27FC236}">
-                <a16:creationId xmlns:a16="http://schemas.microsoft.com/office/drawing/2014/main" id="{5E3184FD-249C-46C7-9E05-9CD788703575}"/>
+                <a16:creationId xmlns:a16="http://schemas.microsoft.com/office/drawing/2014/main" id="{416CDC48-FAC0-4E75-BE5E-133FEDFC531A}"/>
               </a:ext>
             </a:extLst>
           </p:cNvPr>
@@ -20310,7 +20310,7 @@
           <p:cNvPr id="5" name="">
             <a:extLst xmlns:a="http://schemas.openxmlformats.org/drawingml/2006/main">
               <a:ext uri="{FF2B5EF4-FFF2-40B4-BE49-F238E27FC236}">
-                <a16:creationId xmlns:a16="http://schemas.microsoft.com/office/drawing/2014/main" id="{05B7B7A9-FBA8-4945-9D2F-0E4340EDA1A2}"/>
+                <a16:creationId xmlns:a16="http://schemas.microsoft.com/office/drawing/2014/main" id="{FF642726-686A-4B5E-A7F1-FC5D01FE4551}"/>
               </a:ext>
             </a:extLst>
           </p:cNvPr>
@@ -20341,7 +20341,7 @@
           <p:cNvPr id="6" name="">
             <a:extLst xmlns:a="http://schemas.openxmlformats.org/drawingml/2006/main">
               <a:ext uri="{FF2B5EF4-FFF2-40B4-BE49-F238E27FC236}">
-                <a16:creationId xmlns:a16="http://schemas.microsoft.com/office/drawing/2014/main" id="{96EB5530-1BFE-4308-957E-B0D11197C839}"/>
+                <a16:creationId xmlns:a16="http://schemas.microsoft.com/office/drawing/2014/main" id="{FD37511F-60A8-4B39-A75D-33B91F0F6261}"/>
               </a:ext>
             </a:extLst>
           </p:cNvPr>
@@ -20403,7 +20403,7 @@
           <p:cNvPr id="7" name="">
             <a:extLst xmlns:a="http://schemas.openxmlformats.org/drawingml/2006/main">
               <a:ext uri="{FF2B5EF4-FFF2-40B4-BE49-F238E27FC236}">
-                <a16:creationId xmlns:a16="http://schemas.microsoft.com/office/drawing/2014/main" id="{6E0EB484-F441-4153-93D6-AFEC60D45FC4}"/>
+                <a16:creationId xmlns:a16="http://schemas.microsoft.com/office/drawing/2014/main" id="{4AFE91B4-A75F-4B05-B5AD-2D393E0AD7AC}"/>
               </a:ext>
             </a:extLst>
           </p:cNvPr>
@@ -20465,7 +20465,7 @@
           <p:cNvPr id="8" name="">
             <a:extLst xmlns:a="http://schemas.openxmlformats.org/drawingml/2006/main">
               <a:ext uri="{FF2B5EF4-FFF2-40B4-BE49-F238E27FC236}">
-                <a16:creationId xmlns:a16="http://schemas.microsoft.com/office/drawing/2014/main" id="{5964E47D-CC31-4886-A774-10DFDA978523}"/>
+                <a16:creationId xmlns:a16="http://schemas.microsoft.com/office/drawing/2014/main" id="{E4EE77B5-CA5B-4F3B-BFC2-4D24B1B917C7}"/>
               </a:ext>
             </a:extLst>
           </p:cNvPr>
@@ -20527,7 +20527,7 @@
           <p:cNvPr id="9" name="">
             <a:extLst xmlns:a="http://schemas.openxmlformats.org/drawingml/2006/main">
               <a:ext uri="{FF2B5EF4-FFF2-40B4-BE49-F238E27FC236}">
-                <a16:creationId xmlns:a16="http://schemas.microsoft.com/office/drawing/2014/main" id="{8796C116-6872-414C-8CEC-7706ABC94D17}"/>
+                <a16:creationId xmlns:a16="http://schemas.microsoft.com/office/drawing/2014/main" id="{F90617E8-E625-4D78-9F4A-58DE79CC8853}"/>
               </a:ext>
             </a:extLst>
           </p:cNvPr>
@@ -20558,7 +20558,7 @@
           <p:cNvPr id="10" name="">
             <a:extLst xmlns:a="http://schemas.openxmlformats.org/drawingml/2006/main">
               <a:ext uri="{FF2B5EF4-FFF2-40B4-BE49-F238E27FC236}">
-                <a16:creationId xmlns:a16="http://schemas.microsoft.com/office/drawing/2014/main" id="{BB243457-81F1-417C-BBBE-6988974DBF51}"/>
+                <a16:creationId xmlns:a16="http://schemas.microsoft.com/office/drawing/2014/main" id="{399F7DE6-F703-43DE-A8CB-E3DB6A297AFA}"/>
               </a:ext>
             </a:extLst>
           </p:cNvPr>
@@ -20620,7 +20620,7 @@
           <p:cNvPr id="11" name="">
             <a:extLst xmlns:a="http://schemas.openxmlformats.org/drawingml/2006/main">
               <a:ext uri="{FF2B5EF4-FFF2-40B4-BE49-F238E27FC236}">
-                <a16:creationId xmlns:a16="http://schemas.microsoft.com/office/drawing/2014/main" id="{901DB896-6A87-4637-9770-179D301B4A42}"/>
+                <a16:creationId xmlns:a16="http://schemas.microsoft.com/office/drawing/2014/main" id="{9326D429-3035-4C48-9980-ADF47F978409}"/>
               </a:ext>
             </a:extLst>
           </p:cNvPr>
@@ -20682,7 +20682,7 @@
           <p:cNvPr id="12" name="">
             <a:extLst xmlns:a="http://schemas.openxmlformats.org/drawingml/2006/main">
               <a:ext uri="{FF2B5EF4-FFF2-40B4-BE49-F238E27FC236}">
-                <a16:creationId xmlns:a16="http://schemas.microsoft.com/office/drawing/2014/main" id="{72CC8018-9040-43CB-91D1-5279DFBDF059}"/>
+                <a16:creationId xmlns:a16="http://schemas.microsoft.com/office/drawing/2014/main" id="{0E1B231F-6F02-44C9-8298-8925487CD7C7}"/>
               </a:ext>
             </a:extLst>
           </p:cNvPr>
@@ -20744,7 +20744,7 @@
           <p:cNvPr id="13" name="">
             <a:extLst xmlns:a="http://schemas.openxmlformats.org/drawingml/2006/main">
               <a:ext uri="{FF2B5EF4-FFF2-40B4-BE49-F238E27FC236}">
-                <a16:creationId xmlns:a16="http://schemas.microsoft.com/office/drawing/2014/main" id="{924B367E-FDD5-4E92-A72E-5CD9AA6C4573}"/>
+                <a16:creationId xmlns:a16="http://schemas.microsoft.com/office/drawing/2014/main" id="{5A9208AA-F19B-4BE2-BEEE-1952E3ACA3C2}"/>
               </a:ext>
             </a:extLst>
           </p:cNvPr>
@@ -20775,7 +20775,7 @@
           <p:cNvPr id="14" name="">
             <a:extLst xmlns:a="http://schemas.openxmlformats.org/drawingml/2006/main">
               <a:ext uri="{FF2B5EF4-FFF2-40B4-BE49-F238E27FC236}">
-                <a16:creationId xmlns:a16="http://schemas.microsoft.com/office/drawing/2014/main" id="{7D9281DD-B486-4E78-AE74-5BC362CC87EA}"/>
+                <a16:creationId xmlns:a16="http://schemas.microsoft.com/office/drawing/2014/main" id="{E3BCCE20-3656-412F-B632-0B7346EFD7B5}"/>
               </a:ext>
             </a:extLst>
           </p:cNvPr>
@@ -20837,7 +20837,7 @@
           <p:cNvPr id="15" name="">
             <a:extLst xmlns:a="http://schemas.openxmlformats.org/drawingml/2006/main">
               <a:ext uri="{FF2B5EF4-FFF2-40B4-BE49-F238E27FC236}">
-                <a16:creationId xmlns:a16="http://schemas.microsoft.com/office/drawing/2014/main" id="{40D2CE98-E1CF-4F57-82DB-ACB5FA45987C}"/>
+                <a16:creationId xmlns:a16="http://schemas.microsoft.com/office/drawing/2014/main" id="{CBEB18F3-0F97-4684-BFBE-3206C8E8726E}"/>
               </a:ext>
             </a:extLst>
           </p:cNvPr>
@@ -20899,7 +20899,7 @@
           <p:cNvPr id="16" name="">
             <a:extLst xmlns:a="http://schemas.openxmlformats.org/drawingml/2006/main">
               <a:ext uri="{FF2B5EF4-FFF2-40B4-BE49-F238E27FC236}">
-                <a16:creationId xmlns:a16="http://schemas.microsoft.com/office/drawing/2014/main" id="{5A20EB1D-EE24-4305-A067-63E201DEE0F8}"/>
+                <a16:creationId xmlns:a16="http://schemas.microsoft.com/office/drawing/2014/main" id="{CAC5CC0F-FD51-45C0-B506-DE59610B7F7A}"/>
               </a:ext>
             </a:extLst>
           </p:cNvPr>
@@ -20961,7 +20961,7 @@
           <p:cNvPr id="17" name="dashboard-preview">
             <a:extLst xmlns:a="http://schemas.openxmlformats.org/drawingml/2006/main">
               <a:ext uri="{FF2B5EF4-FFF2-40B4-BE49-F238E27FC236}">
-                <a16:creationId xmlns:a16="http://schemas.microsoft.com/office/drawing/2014/main" id="{AA9E5D12-BE2E-431D-800E-CE814B5ADCD9}"/>
+                <a16:creationId xmlns:a16="http://schemas.microsoft.com/office/drawing/2014/main" id="{72263329-F431-4ACC-AC9A-687E63DE8A07}"/>
               </a:ext>
             </a:extLst>
           </p:cNvPr>
@@ -20996,7 +20996,7 @@
           <p:cNvPr id="18" name="">
             <a:extLst xmlns:a="http://schemas.openxmlformats.org/drawingml/2006/main">
               <a:ext uri="{FF2B5EF4-FFF2-40B4-BE49-F238E27FC236}">
-                <a16:creationId xmlns:a16="http://schemas.microsoft.com/office/drawing/2014/main" id="{2483F66F-C18C-497D-ADAF-26CEBA6838BE}"/>
+                <a16:creationId xmlns:a16="http://schemas.microsoft.com/office/drawing/2014/main" id="{F9DB885F-BFD3-47AA-A36B-A7513AD0BC5C}"/>
               </a:ext>
             </a:extLst>
           </p:cNvPr>
@@ -21058,7 +21058,7 @@
           <p:cNvPr id="19" name="">
             <a:extLst xmlns:a="http://schemas.openxmlformats.org/drawingml/2006/main">
               <a:ext uri="{FF2B5EF4-FFF2-40B4-BE49-F238E27FC236}">
-                <a16:creationId xmlns:a16="http://schemas.microsoft.com/office/drawing/2014/main" id="{4769E64D-35A2-401D-ABF9-8C0ED8E012A2}"/>
+                <a16:creationId xmlns:a16="http://schemas.microsoft.com/office/drawing/2014/main" id="{A7533D88-6C3F-4686-BE2B-B03D98BC785D}"/>
               </a:ext>
             </a:extLst>
           </p:cNvPr>
@@ -21089,7 +21089,7 @@
           <p:cNvPr id="20" name="">
             <a:extLst xmlns:a="http://schemas.openxmlformats.org/drawingml/2006/main">
               <a:ext uri="{FF2B5EF4-FFF2-40B4-BE49-F238E27FC236}">
-                <a16:creationId xmlns:a16="http://schemas.microsoft.com/office/drawing/2014/main" id="{F5F9F307-25DD-4A6A-BEF6-A42C2368DC72}"/>
+                <a16:creationId xmlns:a16="http://schemas.microsoft.com/office/drawing/2014/main" id="{D6184D17-ACF2-459E-A4BA-DFB93D4D3CEE}"/>
               </a:ext>
             </a:extLst>
           </p:cNvPr>
@@ -21151,7 +21151,7 @@
           <p:cNvPr id="21" name="">
             <a:extLst xmlns:a="http://schemas.openxmlformats.org/drawingml/2006/main">
               <a:ext uri="{FF2B5EF4-FFF2-40B4-BE49-F238E27FC236}">
-                <a16:creationId xmlns:a16="http://schemas.microsoft.com/office/drawing/2014/main" id="{89AE5110-7C8E-41B2-942B-407FD5A56343}"/>
+                <a16:creationId xmlns:a16="http://schemas.microsoft.com/office/drawing/2014/main" id="{8CFD0697-60C3-47E9-B9C4-AD149D8C6F46}"/>
               </a:ext>
             </a:extLst>
           </p:cNvPr>
@@ -21182,7 +21182,7 @@
           <p:cNvPr id="22" name="">
             <a:extLst xmlns:a="http://schemas.openxmlformats.org/drawingml/2006/main">
               <a:ext uri="{FF2B5EF4-FFF2-40B4-BE49-F238E27FC236}">
-                <a16:creationId xmlns:a16="http://schemas.microsoft.com/office/drawing/2014/main" id="{30B1D6E4-2668-466E-89AB-238266B0CBEA}"/>
+                <a16:creationId xmlns:a16="http://schemas.microsoft.com/office/drawing/2014/main" id="{1047A72D-8635-4843-A271-B069E46F4E6F}"/>
               </a:ext>
             </a:extLst>
           </p:cNvPr>
@@ -21213,7 +21213,7 @@
           <p:cNvPr id="23" name="">
             <a:extLst xmlns:a="http://schemas.openxmlformats.org/drawingml/2006/main">
               <a:ext uri="{FF2B5EF4-FFF2-40B4-BE49-F238E27FC236}">
-                <a16:creationId xmlns:a16="http://schemas.microsoft.com/office/drawing/2014/main" id="{A83C67EE-411A-47A3-991F-74EA37AF0AC6}"/>
+                <a16:creationId xmlns:a16="http://schemas.microsoft.com/office/drawing/2014/main" id="{17B4E876-E5CB-4BCF-9707-6AE905924CE8}"/>
               </a:ext>
             </a:extLst>
           </p:cNvPr>
@@ -21246,7 +21246,7 @@
           <p:cNvPr id="24" name="">
             <a:extLst xmlns:a="http://schemas.openxmlformats.org/drawingml/2006/main">
               <a:ext uri="{FF2B5EF4-FFF2-40B4-BE49-F238E27FC236}">
-                <a16:creationId xmlns:a16="http://schemas.microsoft.com/office/drawing/2014/main" id="{51EE3356-0CF9-4D99-AC0F-3F642BE7407B}"/>
+                <a16:creationId xmlns:a16="http://schemas.microsoft.com/office/drawing/2014/main" id="{358D0CB9-1EC8-486C-AC44-542CAAB1671F}"/>
               </a:ext>
             </a:extLst>
           </p:cNvPr>
@@ -21308,7 +21308,7 @@
           <p:cNvPr id="25" name="footer-rule-7">
             <a:extLst xmlns:a="http://schemas.openxmlformats.org/drawingml/2006/main">
               <a:ext uri="{FF2B5EF4-FFF2-40B4-BE49-F238E27FC236}">
-                <a16:creationId xmlns:a16="http://schemas.microsoft.com/office/drawing/2014/main" id="{0D566141-C500-483F-A712-237E6296A930}"/>
+                <a16:creationId xmlns:a16="http://schemas.microsoft.com/office/drawing/2014/main" id="{6BECE940-7732-4E07-B7C0-F42559FD815E}"/>
               </a:ext>
             </a:extLst>
           </p:cNvPr>
@@ -21339,7 +21339,7 @@
           <p:cNvPr id="26" name="footer-label-7">
             <a:extLst xmlns:a="http://schemas.openxmlformats.org/drawingml/2006/main">
               <a:ext uri="{FF2B5EF4-FFF2-40B4-BE49-F238E27FC236}">
-                <a16:creationId xmlns:a16="http://schemas.microsoft.com/office/drawing/2014/main" id="{F149669D-730D-4375-B016-F8B4057EAFE0}"/>
+                <a16:creationId xmlns:a16="http://schemas.microsoft.com/office/drawing/2014/main" id="{5692868C-C9DB-4EDD-9DE8-75EA85E288A2}"/>
               </a:ext>
             </a:extLst>
           </p:cNvPr>
@@ -21401,7 +21401,7 @@
           <p:cNvPr id="27" name="footer-page-7">
             <a:extLst xmlns:a="http://schemas.openxmlformats.org/drawingml/2006/main">
               <a:ext uri="{FF2B5EF4-FFF2-40B4-BE49-F238E27FC236}">
-                <a16:creationId xmlns:a16="http://schemas.microsoft.com/office/drawing/2014/main" id="{8E993265-D1C6-404B-9CB2-EACC1555A091}"/>
+                <a16:creationId xmlns:a16="http://schemas.microsoft.com/office/drawing/2014/main" id="{D36F4495-6156-4FC1-ADFF-41B250645791}"/>
               </a:ext>
             </a:extLst>
           </p:cNvPr>
@@ -21461,7 +21461,7 @@
     </p:spTree>
     <p:extLst>
       <p:ext uri="{BB962C8B-B14F-4D97-AF65-F5344CB8AC3E}">
-        <p14:creationId xmlns:p14="http://schemas.microsoft.com/office/powerpoint/2010/main" val="1397413485"/>
+        <p14:creationId xmlns:p14="http://schemas.microsoft.com/office/powerpoint/2010/main" val="1044932252"/>
       </p:ext>
     </p:extLst>
   </p:cSld>
@@ -21492,7 +21492,7 @@
           <p:cNvPr id="26" name="side-accent-8">
             <a:extLst xmlns:a="http://schemas.openxmlformats.org/drawingml/2006/main">
               <a:ext uri="{FF2B5EF4-FFF2-40B4-BE49-F238E27FC236}">
-                <a16:creationId xmlns:a16="http://schemas.microsoft.com/office/drawing/2014/main" id="{2BFBC7BA-78DD-48CA-A278-01FB8420D5DE}"/>
+                <a16:creationId xmlns:a16="http://schemas.microsoft.com/office/drawing/2014/main" id="{63EB4A12-0E43-4E18-B0D9-CDC53DEBE08B}"/>
               </a:ext>
             </a:extLst>
           </p:cNvPr>
@@ -21523,7 +21523,7 @@
           <p:cNvPr id="2" name="kicker-8">
             <a:extLst xmlns:a="http://schemas.openxmlformats.org/drawingml/2006/main">
               <a:ext uri="{FF2B5EF4-FFF2-40B4-BE49-F238E27FC236}">
-                <a16:creationId xmlns:a16="http://schemas.microsoft.com/office/drawing/2014/main" id="{F4F26299-0315-4C1F-A94C-745508CAF1DC}"/>
+                <a16:creationId xmlns:a16="http://schemas.microsoft.com/office/drawing/2014/main" id="{A27E46E9-F124-464B-9F70-CCBCA1A0F594}"/>
               </a:ext>
             </a:extLst>
           </p:cNvPr>
@@ -21585,7 +21585,7 @@
           <p:cNvPr id="3" name="title-8">
             <a:extLst xmlns:a="http://schemas.openxmlformats.org/drawingml/2006/main">
               <a:ext uri="{FF2B5EF4-FFF2-40B4-BE49-F238E27FC236}">
-                <a16:creationId xmlns:a16="http://schemas.microsoft.com/office/drawing/2014/main" id="{A1EED584-B0FC-4C25-99AD-0BF5A38081C5}"/>
+                <a16:creationId xmlns:a16="http://schemas.microsoft.com/office/drawing/2014/main" id="{3A0D98A4-919E-4D0F-80A9-16A3A5C1B5D3}"/>
               </a:ext>
             </a:extLst>
           </p:cNvPr>
@@ -21647,7 +21647,7 @@
           <p:cNvPr id="4" name="">
             <a:extLst xmlns:a="http://schemas.openxmlformats.org/drawingml/2006/main">
               <a:ext uri="{FF2B5EF4-FFF2-40B4-BE49-F238E27FC236}">
-                <a16:creationId xmlns:a16="http://schemas.microsoft.com/office/drawing/2014/main" id="{2F098F4D-466E-43E3-B16E-9486A617DA1B}"/>
+                <a16:creationId xmlns:a16="http://schemas.microsoft.com/office/drawing/2014/main" id="{B235ADEE-4AD5-4DC5-9068-5576F3E77F6A}"/>
               </a:ext>
             </a:extLst>
           </p:cNvPr>
@@ -21709,7 +21709,7 @@
           <p:cNvPr id="5" name="">
             <a:extLst xmlns:a="http://schemas.openxmlformats.org/drawingml/2006/main">
               <a:ext uri="{FF2B5EF4-FFF2-40B4-BE49-F238E27FC236}">
-                <a16:creationId xmlns:a16="http://schemas.microsoft.com/office/drawing/2014/main" id="{F7AE2987-3C72-41F0-830A-D1E1466A1368}"/>
+                <a16:creationId xmlns:a16="http://schemas.microsoft.com/office/drawing/2014/main" id="{92D1D012-4B9B-46CB-97BB-C30E25C3A047}"/>
               </a:ext>
             </a:extLst>
           </p:cNvPr>
@@ -21740,7 +21740,7 @@
           <p:cNvPr id="6" name="">
             <a:extLst xmlns:a="http://schemas.openxmlformats.org/drawingml/2006/main">
               <a:ext uri="{FF2B5EF4-FFF2-40B4-BE49-F238E27FC236}">
-                <a16:creationId xmlns:a16="http://schemas.microsoft.com/office/drawing/2014/main" id="{7E8BFF79-F4CE-4C04-92DA-6314B2D45AD6}"/>
+                <a16:creationId xmlns:a16="http://schemas.microsoft.com/office/drawing/2014/main" id="{B07B52AF-1ED1-459B-8373-D045E0B85887}"/>
               </a:ext>
             </a:extLst>
           </p:cNvPr>
@@ -21771,7 +21771,7 @@
           <p:cNvPr id="7" name="">
             <a:extLst xmlns:a="http://schemas.openxmlformats.org/drawingml/2006/main">
               <a:ext uri="{FF2B5EF4-FFF2-40B4-BE49-F238E27FC236}">
-                <a16:creationId xmlns:a16="http://schemas.microsoft.com/office/drawing/2014/main" id="{48F8AB14-D3B3-48C0-BC2F-FA2123FA276B}"/>
+                <a16:creationId xmlns:a16="http://schemas.microsoft.com/office/drawing/2014/main" id="{1AC9D0BA-834B-4515-8BA6-078D4B149EC9}"/>
               </a:ext>
             </a:extLst>
           </p:cNvPr>
@@ -21833,7 +21833,7 @@
           <p:cNvPr id="8" name="">
             <a:extLst xmlns:a="http://schemas.openxmlformats.org/drawingml/2006/main">
               <a:ext uri="{FF2B5EF4-FFF2-40B4-BE49-F238E27FC236}">
-                <a16:creationId xmlns:a16="http://schemas.microsoft.com/office/drawing/2014/main" id="{13BEB38E-E098-4C0A-A891-6B082710673E}"/>
+                <a16:creationId xmlns:a16="http://schemas.microsoft.com/office/drawing/2014/main" id="{0F031BCB-11A0-4B16-88AA-4ECAFE5D5833}"/>
               </a:ext>
             </a:extLst>
           </p:cNvPr>
@@ -21895,7 +21895,7 @@
           <p:cNvPr id="9" name="">
             <a:extLst xmlns:a="http://schemas.openxmlformats.org/drawingml/2006/main">
               <a:ext uri="{FF2B5EF4-FFF2-40B4-BE49-F238E27FC236}">
-                <a16:creationId xmlns:a16="http://schemas.microsoft.com/office/drawing/2014/main" id="{B1988F6B-61B2-4490-A951-2CAD3202216E}"/>
+                <a16:creationId xmlns:a16="http://schemas.microsoft.com/office/drawing/2014/main" id="{518B7A68-15DA-41DE-BCAA-7C05FB03A296}"/>
               </a:ext>
             </a:extLst>
           </p:cNvPr>
@@ -21957,7 +21957,7 @@
           <p:cNvPr id="10" name="">
             <a:extLst xmlns:a="http://schemas.openxmlformats.org/drawingml/2006/main">
               <a:ext uri="{FF2B5EF4-FFF2-40B4-BE49-F238E27FC236}">
-                <a16:creationId xmlns:a16="http://schemas.microsoft.com/office/drawing/2014/main" id="{01AA8382-C124-4F4F-B26A-7FCADC970667}"/>
+                <a16:creationId xmlns:a16="http://schemas.microsoft.com/office/drawing/2014/main" id="{E16F5ED2-1059-43FD-8BD0-149A447FF7D6}"/>
               </a:ext>
             </a:extLst>
           </p:cNvPr>
@@ -21988,7 +21988,7 @@
           <p:cNvPr id="11" name="">
             <a:extLst xmlns:a="http://schemas.openxmlformats.org/drawingml/2006/main">
               <a:ext uri="{FF2B5EF4-FFF2-40B4-BE49-F238E27FC236}">
-                <a16:creationId xmlns:a16="http://schemas.microsoft.com/office/drawing/2014/main" id="{4397AE8A-C6CA-4354-99D7-FBBE3FD8A006}"/>
+                <a16:creationId xmlns:a16="http://schemas.microsoft.com/office/drawing/2014/main" id="{8C6E045A-E3B3-4EAD-A6C6-A11435374E56}"/>
               </a:ext>
             </a:extLst>
           </p:cNvPr>
@@ -22050,7 +22050,7 @@
           <p:cNvPr id="12" name="">
             <a:extLst xmlns:a="http://schemas.openxmlformats.org/drawingml/2006/main">
               <a:ext uri="{FF2B5EF4-FFF2-40B4-BE49-F238E27FC236}">
-                <a16:creationId xmlns:a16="http://schemas.microsoft.com/office/drawing/2014/main" id="{913F0EBB-A071-490A-AC14-17EB4F418D28}"/>
+                <a16:creationId xmlns:a16="http://schemas.microsoft.com/office/drawing/2014/main" id="{7D03990B-6344-456E-BF88-4205FC96F6C7}"/>
               </a:ext>
             </a:extLst>
           </p:cNvPr>
@@ -22112,7 +22112,7 @@
           <p:cNvPr id="13" name="">
             <a:extLst xmlns:a="http://schemas.openxmlformats.org/drawingml/2006/main">
               <a:ext uri="{FF2B5EF4-FFF2-40B4-BE49-F238E27FC236}">
-                <a16:creationId xmlns:a16="http://schemas.microsoft.com/office/drawing/2014/main" id="{32616D5A-BE52-42FB-9CF4-9FA69A024C99}"/>
+                <a16:creationId xmlns:a16="http://schemas.microsoft.com/office/drawing/2014/main" id="{7C04E089-6E9D-4BCB-B507-7B6787FA4DC4}"/>
               </a:ext>
             </a:extLst>
           </p:cNvPr>
@@ -22174,7 +22174,7 @@
           <p:cNvPr id="14" name="">
             <a:extLst xmlns:a="http://schemas.openxmlformats.org/drawingml/2006/main">
               <a:ext uri="{FF2B5EF4-FFF2-40B4-BE49-F238E27FC236}">
-                <a16:creationId xmlns:a16="http://schemas.microsoft.com/office/drawing/2014/main" id="{D2AA1EF9-160A-467D-B65F-F2BD797EF85B}"/>
+                <a16:creationId xmlns:a16="http://schemas.microsoft.com/office/drawing/2014/main" id="{D7DE2A78-0D2C-4C6F-8D5E-95F3A3863A3B}"/>
               </a:ext>
             </a:extLst>
           </p:cNvPr>
@@ -22205,7 +22205,7 @@
           <p:cNvPr id="15" name="">
             <a:extLst xmlns:a="http://schemas.openxmlformats.org/drawingml/2006/main">
               <a:ext uri="{FF2B5EF4-FFF2-40B4-BE49-F238E27FC236}">
-                <a16:creationId xmlns:a16="http://schemas.microsoft.com/office/drawing/2014/main" id="{6612EFD8-7A54-4311-BABE-6503080353EC}"/>
+                <a16:creationId xmlns:a16="http://schemas.microsoft.com/office/drawing/2014/main" id="{5B9E36AB-061B-4A2C-9AFA-16BA0C065D09}"/>
               </a:ext>
             </a:extLst>
           </p:cNvPr>
@@ -22267,7 +22267,7 @@
           <p:cNvPr id="16" name="">
             <a:extLst xmlns:a="http://schemas.openxmlformats.org/drawingml/2006/main">
               <a:ext uri="{FF2B5EF4-FFF2-40B4-BE49-F238E27FC236}">
-                <a16:creationId xmlns:a16="http://schemas.microsoft.com/office/drawing/2014/main" id="{4813FC9C-3C38-41D8-BB04-FCDD90144346}"/>
+                <a16:creationId xmlns:a16="http://schemas.microsoft.com/office/drawing/2014/main" id="{EB673983-AAE6-445D-B532-91036C96CDE8}"/>
               </a:ext>
             </a:extLst>
           </p:cNvPr>
@@ -22329,7 +22329,7 @@
           <p:cNvPr id="17" name="">
             <a:extLst xmlns:a="http://schemas.openxmlformats.org/drawingml/2006/main">
               <a:ext uri="{FF2B5EF4-FFF2-40B4-BE49-F238E27FC236}">
-                <a16:creationId xmlns:a16="http://schemas.microsoft.com/office/drawing/2014/main" id="{8991B92F-2662-4EF2-A6E6-4E46BD3984A8}"/>
+                <a16:creationId xmlns:a16="http://schemas.microsoft.com/office/drawing/2014/main" id="{27293F5B-AE10-447B-9700-6989F549A218}"/>
               </a:ext>
             </a:extLst>
           </p:cNvPr>
@@ -22391,7 +22391,7 @@
           <p:cNvPr id="18" name="">
             <a:extLst xmlns:a="http://schemas.openxmlformats.org/drawingml/2006/main">
               <a:ext uri="{FF2B5EF4-FFF2-40B4-BE49-F238E27FC236}">
-                <a16:creationId xmlns:a16="http://schemas.microsoft.com/office/drawing/2014/main" id="{F11BD501-963A-4314-A7C1-E54E3215B5E9}"/>
+                <a16:creationId xmlns:a16="http://schemas.microsoft.com/office/drawing/2014/main" id="{0294E209-35CD-4C78-B41F-BF0751305CF8}"/>
               </a:ext>
             </a:extLst>
           </p:cNvPr>
@@ -22422,7 +22422,7 @@
           <p:cNvPr id="19" name="">
             <a:extLst xmlns:a="http://schemas.openxmlformats.org/drawingml/2006/main">
               <a:ext uri="{FF2B5EF4-FFF2-40B4-BE49-F238E27FC236}">
-                <a16:creationId xmlns:a16="http://schemas.microsoft.com/office/drawing/2014/main" id="{82F7795A-18F1-4D19-BF07-E6CDC30FD7F2}"/>
+                <a16:creationId xmlns:a16="http://schemas.microsoft.com/office/drawing/2014/main" id="{BE7017A0-F2EC-418B-B524-3513A1CD5EA2}"/>
               </a:ext>
             </a:extLst>
           </p:cNvPr>
@@ -22484,7 +22484,7 @@
           <p:cNvPr id="20" name="">
             <a:extLst xmlns:a="http://schemas.openxmlformats.org/drawingml/2006/main">
               <a:ext uri="{FF2B5EF4-FFF2-40B4-BE49-F238E27FC236}">
-                <a16:creationId xmlns:a16="http://schemas.microsoft.com/office/drawing/2014/main" id="{092E3984-01ED-4DAC-B1E4-6DFDA1B415B0}"/>
+                <a16:creationId xmlns:a16="http://schemas.microsoft.com/office/drawing/2014/main" id="{E7DCBA6F-4BFA-4CE3-8294-B72EDA668319}"/>
               </a:ext>
             </a:extLst>
           </p:cNvPr>
@@ -22546,7 +22546,7 @@
           <p:cNvPr id="21" name="">
             <a:extLst xmlns:a="http://schemas.openxmlformats.org/drawingml/2006/main">
               <a:ext uri="{FF2B5EF4-FFF2-40B4-BE49-F238E27FC236}">
-                <a16:creationId xmlns:a16="http://schemas.microsoft.com/office/drawing/2014/main" id="{B7FE4C8E-17BE-406C-9E42-238F617A748A}"/>
+                <a16:creationId xmlns:a16="http://schemas.microsoft.com/office/drawing/2014/main" id="{E75C73DD-6D04-4DE8-B75C-8F7E144B44F2}"/>
               </a:ext>
             </a:extLst>
           </p:cNvPr>
@@ -22608,7 +22608,7 @@
           <p:cNvPr id="22" name="">
             <a:extLst xmlns:a="http://schemas.openxmlformats.org/drawingml/2006/main">
               <a:ext uri="{FF2B5EF4-FFF2-40B4-BE49-F238E27FC236}">
-                <a16:creationId xmlns:a16="http://schemas.microsoft.com/office/drawing/2014/main" id="{8994C6A9-6265-4C91-AAC6-E93AA4C6E114}"/>
+                <a16:creationId xmlns:a16="http://schemas.microsoft.com/office/drawing/2014/main" id="{73A75F90-5EB1-44A7-ADFB-79C359F45DD7}"/>
               </a:ext>
             </a:extLst>
           </p:cNvPr>
@@ -22670,7 +22670,7 @@
           <p:cNvPr id="23" name="footer-rule-8">
             <a:extLst xmlns:a="http://schemas.openxmlformats.org/drawingml/2006/main">
               <a:ext uri="{FF2B5EF4-FFF2-40B4-BE49-F238E27FC236}">
-                <a16:creationId xmlns:a16="http://schemas.microsoft.com/office/drawing/2014/main" id="{1A94D627-A318-4559-8EDE-EAF565398BFA}"/>
+                <a16:creationId xmlns:a16="http://schemas.microsoft.com/office/drawing/2014/main" id="{B0DFD39E-A409-4EA9-975D-96C807237E27}"/>
               </a:ext>
             </a:extLst>
           </p:cNvPr>
@@ -22701,7 +22701,7 @@
           <p:cNvPr id="24" name="footer-label-8">
             <a:extLst xmlns:a="http://schemas.openxmlformats.org/drawingml/2006/main">
               <a:ext uri="{FF2B5EF4-FFF2-40B4-BE49-F238E27FC236}">
-                <a16:creationId xmlns:a16="http://schemas.microsoft.com/office/drawing/2014/main" id="{BC2621BB-C7F7-4133-B04E-0715CD86D448}"/>
+                <a16:creationId xmlns:a16="http://schemas.microsoft.com/office/drawing/2014/main" id="{DC6A77FD-4C16-4D49-AAF1-2E6EC1CAB7D4}"/>
               </a:ext>
             </a:extLst>
           </p:cNvPr>
@@ -22763,7 +22763,7 @@
           <p:cNvPr id="25" name="footer-page-8">
             <a:extLst xmlns:a="http://schemas.openxmlformats.org/drawingml/2006/main">
               <a:ext uri="{FF2B5EF4-FFF2-40B4-BE49-F238E27FC236}">
-                <a16:creationId xmlns:a16="http://schemas.microsoft.com/office/drawing/2014/main" id="{E7BCA26C-4CAC-4E5F-BD06-ED4D6E533ADE}"/>
+                <a16:creationId xmlns:a16="http://schemas.microsoft.com/office/drawing/2014/main" id="{D986FF4A-BBC7-4E83-8758-C3A57B7BE731}"/>
               </a:ext>
             </a:extLst>
           </p:cNvPr>
@@ -22823,7 +22823,7 @@
     </p:spTree>
     <p:extLst>
       <p:ext uri="{BB962C8B-B14F-4D97-AF65-F5344CB8AC3E}">
-        <p14:creationId xmlns:p14="http://schemas.microsoft.com/office/powerpoint/2010/main" val="942371143"/>
+        <p14:creationId xmlns:p14="http://schemas.microsoft.com/office/powerpoint/2010/main" val="1225108089"/>
       </p:ext>
     </p:extLst>
   </p:cSld>
@@ -22854,7 +22854,7 @@
           <p:cNvPr id="21" name="side-accent-9">
             <a:extLst xmlns:a="http://schemas.openxmlformats.org/drawingml/2006/main">
               <a:ext uri="{FF2B5EF4-FFF2-40B4-BE49-F238E27FC236}">
-                <a16:creationId xmlns:a16="http://schemas.microsoft.com/office/drawing/2014/main" id="{14CE4BFA-A0C8-4E92-84E1-675511ED8434}"/>
+                <a16:creationId xmlns:a16="http://schemas.microsoft.com/office/drawing/2014/main" id="{0005EFA4-E6C1-4182-B505-489D8FB8676E}"/>
               </a:ext>
             </a:extLst>
           </p:cNvPr>
@@ -22885,7 +22885,7 @@
           <p:cNvPr id="2" name="kicker-9">
             <a:extLst xmlns:a="http://schemas.openxmlformats.org/drawingml/2006/main">
               <a:ext uri="{FF2B5EF4-FFF2-40B4-BE49-F238E27FC236}">
-                <a16:creationId xmlns:a16="http://schemas.microsoft.com/office/drawing/2014/main" id="{AC8A68E8-486E-4B14-9A16-5EBD6E5D244C}"/>
+                <a16:creationId xmlns:a16="http://schemas.microsoft.com/office/drawing/2014/main" id="{E0E89474-0843-4BF8-AFC3-01498EA35061}"/>
               </a:ext>
             </a:extLst>
           </p:cNvPr>
@@ -22947,7 +22947,7 @@
           <p:cNvPr id="3" name="title-9">
             <a:extLst xmlns:a="http://schemas.openxmlformats.org/drawingml/2006/main">
               <a:ext uri="{FF2B5EF4-FFF2-40B4-BE49-F238E27FC236}">
-                <a16:creationId xmlns:a16="http://schemas.microsoft.com/office/drawing/2014/main" id="{61EE2519-E16A-42AC-BE29-96DEF69C8BEB}"/>
+                <a16:creationId xmlns:a16="http://schemas.microsoft.com/office/drawing/2014/main" id="{C4EE4324-0006-4189-B205-E1C0ADF23E34}"/>
               </a:ext>
             </a:extLst>
           </p:cNvPr>
@@ -23009,7 +23009,7 @@
           <p:cNvPr id="4" name="">
             <a:extLst xmlns:a="http://schemas.openxmlformats.org/drawingml/2006/main">
               <a:ext uri="{FF2B5EF4-FFF2-40B4-BE49-F238E27FC236}">
-                <a16:creationId xmlns:a16="http://schemas.microsoft.com/office/drawing/2014/main" id="{3220D32D-7BC1-4628-A033-A6CDF6CCB945}"/>
+                <a16:creationId xmlns:a16="http://schemas.microsoft.com/office/drawing/2014/main" id="{E09A5592-DC1C-42B9-B3B0-878B6B7C46D6}"/>
               </a:ext>
             </a:extLst>
           </p:cNvPr>
@@ -23071,7 +23071,7 @@
           <p:cNvPr id="5" name="">
             <a:extLst xmlns:a="http://schemas.openxmlformats.org/drawingml/2006/main">
               <a:ext uri="{FF2B5EF4-FFF2-40B4-BE49-F238E27FC236}">
-                <a16:creationId xmlns:a16="http://schemas.microsoft.com/office/drawing/2014/main" id="{4644B2AA-2EC4-4B96-BC0B-33AB381D9A02}"/>
+                <a16:creationId xmlns:a16="http://schemas.microsoft.com/office/drawing/2014/main" id="{D368AF67-A43B-4080-8B10-970BE0C7B8A1}"/>
               </a:ext>
             </a:extLst>
           </p:cNvPr>
@@ -23102,7 +23102,7 @@
           <p:cNvPr id="6" name="">
             <a:extLst xmlns:a="http://schemas.openxmlformats.org/drawingml/2006/main">
               <a:ext uri="{FF2B5EF4-FFF2-40B4-BE49-F238E27FC236}">
-                <a16:creationId xmlns:a16="http://schemas.microsoft.com/office/drawing/2014/main" id="{01BBE1D6-8E87-4B2D-AA59-52C3FCA63345}"/>
+                <a16:creationId xmlns:a16="http://schemas.microsoft.com/office/drawing/2014/main" id="{19E31C51-7779-400A-A927-8E1B38AE03B1}"/>
               </a:ext>
             </a:extLst>
           </p:cNvPr>
@@ -23164,7 +23164,7 @@
           <p:cNvPr id="7" name="">
             <a:extLst xmlns:a="http://schemas.openxmlformats.org/drawingml/2006/main">
               <a:ext uri="{FF2B5EF4-FFF2-40B4-BE49-F238E27FC236}">
-                <a16:creationId xmlns:a16="http://schemas.microsoft.com/office/drawing/2014/main" id="{CAE59089-089A-457D-A46E-6951A15A9A3B}"/>
+                <a16:creationId xmlns:a16="http://schemas.microsoft.com/office/drawing/2014/main" id="{5CE03088-6EAC-439A-BE1F-D2C6BA0E8EC8}"/>
               </a:ext>
             </a:extLst>
           </p:cNvPr>
@@ -23226,7 +23226,7 @@
           <p:cNvPr id="8" name="">
             <a:extLst xmlns:a="http://schemas.openxmlformats.org/drawingml/2006/main">
               <a:ext uri="{FF2B5EF4-FFF2-40B4-BE49-F238E27FC236}">
-                <a16:creationId xmlns:a16="http://schemas.microsoft.com/office/drawing/2014/main" id="{DD88BC1B-241E-4954-A4A5-48140E87F758}"/>
+                <a16:creationId xmlns:a16="http://schemas.microsoft.com/office/drawing/2014/main" id="{9D1FB9D9-319D-4271-AA2C-A0CCCA07E15C}"/>
               </a:ext>
             </a:extLst>
           </p:cNvPr>
@@ -23288,7 +23288,7 @@
           <p:cNvPr id="9" name="">
             <a:extLst xmlns:a="http://schemas.openxmlformats.org/drawingml/2006/main">
               <a:ext uri="{FF2B5EF4-FFF2-40B4-BE49-F238E27FC236}">
-                <a16:creationId xmlns:a16="http://schemas.microsoft.com/office/drawing/2014/main" id="{C7A0993C-EC70-4987-B2C6-620BD94A02DB}"/>
+                <a16:creationId xmlns:a16="http://schemas.microsoft.com/office/drawing/2014/main" id="{9DA2D6BD-C27A-4D80-8026-F679D9D879E5}"/>
               </a:ext>
             </a:extLst>
           </p:cNvPr>
@@ -23319,7 +23319,7 @@
           <p:cNvPr id="10" name="">
             <a:extLst xmlns:a="http://schemas.openxmlformats.org/drawingml/2006/main">
               <a:ext uri="{FF2B5EF4-FFF2-40B4-BE49-F238E27FC236}">
-                <a16:creationId xmlns:a16="http://schemas.microsoft.com/office/drawing/2014/main" id="{5FD7B3DF-3886-4F3A-9B7A-1E2BF0B855D8}"/>
+                <a16:creationId xmlns:a16="http://schemas.microsoft.com/office/drawing/2014/main" id="{2B2E062F-EC40-4B83-AE1F-9BF1301540D8}"/>
               </a:ext>
             </a:extLst>
           </p:cNvPr>
@@ -23381,7 +23381,7 @@
           <p:cNvPr id="11" name="">
             <a:extLst xmlns:a="http://schemas.openxmlformats.org/drawingml/2006/main">
               <a:ext uri="{FF2B5EF4-FFF2-40B4-BE49-F238E27FC236}">
-                <a16:creationId xmlns:a16="http://schemas.microsoft.com/office/drawing/2014/main" id="{49B3AA52-9871-40D2-B9C5-E01FDC43C7E9}"/>
+                <a16:creationId xmlns:a16="http://schemas.microsoft.com/office/drawing/2014/main" id="{FEC104A9-A500-489D-88CA-B894C150D274}"/>
               </a:ext>
             </a:extLst>
           </p:cNvPr>
@@ -23443,7 +23443,7 @@
           <p:cNvPr id="12" name="">
             <a:extLst xmlns:a="http://schemas.openxmlformats.org/drawingml/2006/main">
               <a:ext uri="{FF2B5EF4-FFF2-40B4-BE49-F238E27FC236}">
-                <a16:creationId xmlns:a16="http://schemas.microsoft.com/office/drawing/2014/main" id="{1BFDA48C-0DCC-4327-89B4-A5C75763006A}"/>
+                <a16:creationId xmlns:a16="http://schemas.microsoft.com/office/drawing/2014/main" id="{EE26C9E5-5FB2-4E12-85C3-7DE4AF19F0E0}"/>
               </a:ext>
             </a:extLst>
           </p:cNvPr>
@@ -23505,7 +23505,7 @@
           <p:cNvPr id="13" name="">
             <a:extLst xmlns:a="http://schemas.openxmlformats.org/drawingml/2006/main">
               <a:ext uri="{FF2B5EF4-FFF2-40B4-BE49-F238E27FC236}">
-                <a16:creationId xmlns:a16="http://schemas.microsoft.com/office/drawing/2014/main" id="{DF94563A-56BC-475E-A362-6EC6263764B2}"/>
+                <a16:creationId xmlns:a16="http://schemas.microsoft.com/office/drawing/2014/main" id="{38E0B45A-D43E-416C-8556-24511EF97925}"/>
               </a:ext>
             </a:extLst>
           </p:cNvPr>
@@ -23536,7 +23536,7 @@
           <p:cNvPr id="14" name="">
             <a:extLst xmlns:a="http://schemas.openxmlformats.org/drawingml/2006/main">
               <a:ext uri="{FF2B5EF4-FFF2-40B4-BE49-F238E27FC236}">
-                <a16:creationId xmlns:a16="http://schemas.microsoft.com/office/drawing/2014/main" id="{BA907637-734B-4AA9-9B66-27BBC87B542A}"/>
+                <a16:creationId xmlns:a16="http://schemas.microsoft.com/office/drawing/2014/main" id="{30AF85F5-2D63-42B4-A1EA-0506727BC977}"/>
               </a:ext>
             </a:extLst>
           </p:cNvPr>
@@ -23598,7 +23598,7 @@
           <p:cNvPr id="15" name="">
             <a:extLst xmlns:a="http://schemas.openxmlformats.org/drawingml/2006/main">
               <a:ext uri="{FF2B5EF4-FFF2-40B4-BE49-F238E27FC236}">
-                <a16:creationId xmlns:a16="http://schemas.microsoft.com/office/drawing/2014/main" id="{4682B419-FA73-4238-90F4-0117925BD345}"/>
+                <a16:creationId xmlns:a16="http://schemas.microsoft.com/office/drawing/2014/main" id="{6755E49D-0CDD-4AA3-ADCC-9CF9742B24CF}"/>
               </a:ext>
             </a:extLst>
           </p:cNvPr>
@@ -23660,7 +23660,7 @@
           <p:cNvPr id="16" name="">
             <a:extLst xmlns:a="http://schemas.openxmlformats.org/drawingml/2006/main">
               <a:ext uri="{FF2B5EF4-FFF2-40B4-BE49-F238E27FC236}">
-                <a16:creationId xmlns:a16="http://schemas.microsoft.com/office/drawing/2014/main" id="{E87B8AB8-1537-4564-888D-7B592EB5E960}"/>
+                <a16:creationId xmlns:a16="http://schemas.microsoft.com/office/drawing/2014/main" id="{405ED1BB-9C3C-4F25-9AAB-8B2C74613CDA}"/>
               </a:ext>
             </a:extLst>
           </p:cNvPr>
@@ -23722,7 +23722,7 @@
           <p:cNvPr id="17" name="">
             <a:extLst xmlns:a="http://schemas.openxmlformats.org/drawingml/2006/main">
               <a:ext uri="{FF2B5EF4-FFF2-40B4-BE49-F238E27FC236}">
-                <a16:creationId xmlns:a16="http://schemas.microsoft.com/office/drawing/2014/main" id="{1C40500B-7F29-4A11-8255-886386C520DC}"/>
+                <a16:creationId xmlns:a16="http://schemas.microsoft.com/office/drawing/2014/main" id="{7533A5DF-5C49-4994-95A0-0AD74456890B}"/>
               </a:ext>
             </a:extLst>
           </p:cNvPr>
@@ -23784,7 +23784,7 @@
           <p:cNvPr id="18" name="footer-rule-9">
             <a:extLst xmlns:a="http://schemas.openxmlformats.org/drawingml/2006/main">
               <a:ext uri="{FF2B5EF4-FFF2-40B4-BE49-F238E27FC236}">
-                <a16:creationId xmlns:a16="http://schemas.microsoft.com/office/drawing/2014/main" id="{43367F17-62FE-4516-B8EE-C661BE688567}"/>
+                <a16:creationId xmlns:a16="http://schemas.microsoft.com/office/drawing/2014/main" id="{F1A6A100-7568-4A0C-98DA-898FA373FB9D}"/>
               </a:ext>
             </a:extLst>
           </p:cNvPr>
@@ -23815,7 +23815,7 @@
           <p:cNvPr id="19" name="footer-label-9">
             <a:extLst xmlns:a="http://schemas.openxmlformats.org/drawingml/2006/main">
               <a:ext uri="{FF2B5EF4-FFF2-40B4-BE49-F238E27FC236}">
-                <a16:creationId xmlns:a16="http://schemas.microsoft.com/office/drawing/2014/main" id="{956D977D-15F7-424A-8DF0-761021B944BF}"/>
+                <a16:creationId xmlns:a16="http://schemas.microsoft.com/office/drawing/2014/main" id="{9BE15481-57FD-4120-91DD-39908D97C603}"/>
               </a:ext>
             </a:extLst>
           </p:cNvPr>
@@ -23877,7 +23877,7 @@
           <p:cNvPr id="20" name="footer-page-9">
             <a:extLst xmlns:a="http://schemas.openxmlformats.org/drawingml/2006/main">
               <a:ext uri="{FF2B5EF4-FFF2-40B4-BE49-F238E27FC236}">
-                <a16:creationId xmlns:a16="http://schemas.microsoft.com/office/drawing/2014/main" id="{F56A1A91-E437-4D75-B30D-516E5319D600}"/>
+                <a16:creationId xmlns:a16="http://schemas.microsoft.com/office/drawing/2014/main" id="{8EF04DDA-6F08-4F59-A0D1-76B7786CBE1F}"/>
               </a:ext>
             </a:extLst>
           </p:cNvPr>
@@ -23937,7 +23937,7 @@
     </p:spTree>
     <p:extLst>
       <p:ext uri="{BB962C8B-B14F-4D97-AF65-F5344CB8AC3E}">
-        <p14:creationId xmlns:p14="http://schemas.microsoft.com/office/powerpoint/2010/main" val="1970737467"/>
+        <p14:creationId xmlns:p14="http://schemas.microsoft.com/office/powerpoint/2010/main" val="741017526"/>
       </p:ext>
     </p:extLst>
   </p:cSld>

--- a/docs/MSU-EVA-อบรมสายสนับสนุน-ฉบับวิทยากร.pptx
+++ b/docs/MSU-EVA-อบรมสายสนับสนุน-ฉบับวิทยากร.pptx
@@ -2,30 +2,30 @@
 <file path=ppt/presentation.xml><?xml version="1.0" encoding="utf-8"?>
 <p:presentation xmlns:p="http://schemas.openxmlformats.org/presentationml/2006/main">
   <p:sldMasterIdLst>
-    <p:sldMasterId xmlns:r="http://schemas.openxmlformats.org/officeDocument/2006/relationships" id="2147483648" r:id="R37bf7260deac44e2"/>
+    <p:sldMasterId xmlns:r="http://schemas.openxmlformats.org/officeDocument/2006/relationships" id="2147483648" r:id="Rc7212129460a43b4"/>
   </p:sldMasterIdLst>
   <p:notesMasterIdLst>
-    <p:notesMasterId xmlns:r="http://schemas.openxmlformats.org/officeDocument/2006/relationships" r:id="R2087dc8508244ebb"/>
+    <p:notesMasterId xmlns:r="http://schemas.openxmlformats.org/officeDocument/2006/relationships" r:id="Rbcdf9f8a9f0a4470"/>
   </p:notesMasterIdLst>
   <p:sldIdLst>
-    <p:sldId xmlns:r="http://schemas.openxmlformats.org/officeDocument/2006/relationships" id="256" r:id="R98f804fc49724f6c"/>
-    <p:sldId xmlns:r="http://schemas.openxmlformats.org/officeDocument/2006/relationships" id="257" r:id="Rc9381f0747a3482a"/>
-    <p:sldId xmlns:r="http://schemas.openxmlformats.org/officeDocument/2006/relationships" id="258" r:id="R93ab160da12f42cb"/>
-    <p:sldId xmlns:r="http://schemas.openxmlformats.org/officeDocument/2006/relationships" id="259" r:id="R88685d3c6f0149bb"/>
-    <p:sldId xmlns:r="http://schemas.openxmlformats.org/officeDocument/2006/relationships" id="260" r:id="R8ca9072cb96a45f1"/>
-    <p:sldId xmlns:r="http://schemas.openxmlformats.org/officeDocument/2006/relationships" id="261" r:id="R937be7942d99426d"/>
-    <p:sldId xmlns:r="http://schemas.openxmlformats.org/officeDocument/2006/relationships" id="262" r:id="R65e4dd79c9ef4748"/>
-    <p:sldId xmlns:r="http://schemas.openxmlformats.org/officeDocument/2006/relationships" id="263" r:id="R0f2a4eac388e44cf"/>
-    <p:sldId xmlns:r="http://schemas.openxmlformats.org/officeDocument/2006/relationships" id="264" r:id="R9d1d5fb713d847ea"/>
-    <p:sldId xmlns:r="http://schemas.openxmlformats.org/officeDocument/2006/relationships" id="265" r:id="R4d494010ae3a4841"/>
-    <p:sldId xmlns:r="http://schemas.openxmlformats.org/officeDocument/2006/relationships" id="266" r:id="Rcecec83683394108"/>
-    <p:sldId xmlns:r="http://schemas.openxmlformats.org/officeDocument/2006/relationships" id="267" r:id="R7b6ee03d317244ea"/>
-    <p:sldId xmlns:r="http://schemas.openxmlformats.org/officeDocument/2006/relationships" id="268" r:id="R393431e878e54a4b"/>
-    <p:sldId xmlns:r="http://schemas.openxmlformats.org/officeDocument/2006/relationships" id="269" r:id="R0eb854fdc83c448d"/>
-    <p:sldId xmlns:r="http://schemas.openxmlformats.org/officeDocument/2006/relationships" id="270" r:id="Rb58b53478d7346c2"/>
-    <p:sldId xmlns:r="http://schemas.openxmlformats.org/officeDocument/2006/relationships" id="271" r:id="R65bfc98304754950"/>
-    <p:sldId xmlns:r="http://schemas.openxmlformats.org/officeDocument/2006/relationships" id="272" r:id="R080fd16ea9bd4ce7"/>
-    <p:sldId xmlns:r="http://schemas.openxmlformats.org/officeDocument/2006/relationships" id="273" r:id="R19506843480146fc"/>
+    <p:sldId xmlns:r="http://schemas.openxmlformats.org/officeDocument/2006/relationships" id="256" r:id="R9073e96396f347ad"/>
+    <p:sldId xmlns:r="http://schemas.openxmlformats.org/officeDocument/2006/relationships" id="257" r:id="Rcb25647113d942c2"/>
+    <p:sldId xmlns:r="http://schemas.openxmlformats.org/officeDocument/2006/relationships" id="258" r:id="R67e2127c7b8e4ae0"/>
+    <p:sldId xmlns:r="http://schemas.openxmlformats.org/officeDocument/2006/relationships" id="259" r:id="Re46e6167582a40fb"/>
+    <p:sldId xmlns:r="http://schemas.openxmlformats.org/officeDocument/2006/relationships" id="260" r:id="Rd650393421754b18"/>
+    <p:sldId xmlns:r="http://schemas.openxmlformats.org/officeDocument/2006/relationships" id="261" r:id="Ra294a3fa97304ffe"/>
+    <p:sldId xmlns:r="http://schemas.openxmlformats.org/officeDocument/2006/relationships" id="262" r:id="R3a559ca2c8d149c4"/>
+    <p:sldId xmlns:r="http://schemas.openxmlformats.org/officeDocument/2006/relationships" id="263" r:id="Rafa9169c1a264f75"/>
+    <p:sldId xmlns:r="http://schemas.openxmlformats.org/officeDocument/2006/relationships" id="264" r:id="Reb953a08af1043f1"/>
+    <p:sldId xmlns:r="http://schemas.openxmlformats.org/officeDocument/2006/relationships" id="265" r:id="R376f49a1020d4af8"/>
+    <p:sldId xmlns:r="http://schemas.openxmlformats.org/officeDocument/2006/relationships" id="266" r:id="R9d06a2e508ac4045"/>
+    <p:sldId xmlns:r="http://schemas.openxmlformats.org/officeDocument/2006/relationships" id="267" r:id="R9ded3f7a9c66494f"/>
+    <p:sldId xmlns:r="http://schemas.openxmlformats.org/officeDocument/2006/relationships" id="268" r:id="R13d28b52153641c1"/>
+    <p:sldId xmlns:r="http://schemas.openxmlformats.org/officeDocument/2006/relationships" id="269" r:id="R3efe8f9546f143ff"/>
+    <p:sldId xmlns:r="http://schemas.openxmlformats.org/officeDocument/2006/relationships" id="270" r:id="Rd97fe6a7f0b94bab"/>
+    <p:sldId xmlns:r="http://schemas.openxmlformats.org/officeDocument/2006/relationships" id="271" r:id="Rbef6ced2a22948e5"/>
+    <p:sldId xmlns:r="http://schemas.openxmlformats.org/officeDocument/2006/relationships" id="272" r:id="Rbd534936104547b3"/>
+    <p:sldId xmlns:r="http://schemas.openxmlformats.org/officeDocument/2006/relationships" id="273" r:id="Rc9ad8a9ec8e24c8b"/>
   </p:sldIdLst>
   <p:sldSz cx="12192000" cy="6858000"/>
   <p:notesSz cx="6858000" cy="9144000"/>
@@ -759,7 +759,17 @@
           </a:p>
           <a:p xmlns:a="http://schemas.openxmlformats.org/drawingml/2006/main">
             <a:r>
+              <a:t>[เปลี่ยนไปสาธิตระบบ] ต่อไปผมจะเปิดระบบตามหัวข้อนี้ให้ดูครับ ทุกท่านยังไม่ต้องกดตาม ให้สังเกตขั้นตอนบนหน้าจอก่อน</a:t>
+            </a:r>
+          </a:p>
+          <a:p xmlns:a="http://schemas.openxmlformats.org/drawingml/2006/main">
+            <a:r>
               <a:t>[สาธิต] กรอกกิจกรรมหนึ่งรายการ ตรวจคะแนน แนบหลักฐาน และทดลองเปิดลิงก์</a:t>
+            </a:r>
+          </a:p>
+          <a:p xmlns:a="http://schemas.openxmlformats.org/drawingml/2006/main">
+            <a:r>
+              <a:t>[กลับมานำเสนอ] เมื่อเห็นการกรอกกิจกรรมและเปิดหลักฐานแล้ว ต่อไปเรามาแยกบันทึกร่างกับส่งแบบประเมินให้ชัดครับ</a:t>
             </a:r>
           </a:p>
           <a:p xmlns:a="http://schemas.openxmlformats.org/drawingml/2006/main">
@@ -1054,7 +1064,17 @@
           </a:p>
           <a:p xmlns:a="http://schemas.openxmlformats.org/drawingml/2006/main">
             <a:r>
+              <a:t>[เปลี่ยนไปสาธิตระบบ] ต่อไปผมจะเปิดระบบตามหัวข้อนี้ให้ดูครับ ทุกท่านยังไม่ต้องกดตาม ให้สังเกตขั้นตอนบนหน้าจอก่อน</a:t>
+            </a:r>
+          </a:p>
+          <a:p xmlns:a="http://schemas.openxmlformats.org/drawingml/2006/main">
+            <a:r>
               <a:t>[สาธิต] เปิดบัญชีผู้ประเมิน ตรวจผลกิจกรรม คะแนน และหลักฐาน แล้วบันทึกผล</a:t>
+            </a:r>
+          </a:p>
+          <a:p xmlns:a="http://schemas.openxmlformats.org/drawingml/2006/main">
+            <a:r>
+              <a:t>[กลับมานำเสนอ] เมื่อเห็นมุมของผู้ประเมินแล้ว ต่อไปเรามาดูการส่งต่อและการยืนยันขั้นสุดท้ายครับ</a:t>
             </a:r>
           </a:p>
           <a:p xmlns:a="http://schemas.openxmlformats.org/drawingml/2006/main">
@@ -1159,7 +1179,17 @@
           </a:p>
           <a:p xmlns:a="http://schemas.openxmlformats.org/drawingml/2006/main">
             <a:r>
+              <a:t>[เปลี่ยนไปสาธิตระบบ] ต่อไปผมจะเปิดระบบตามหัวข้อนี้ให้ดูครับ ทุกท่านยังไม่ต้องกดตาม ให้สังเกตขั้นตอนบนหน้าจอก่อน</a:t>
+            </a:r>
+          </a:p>
+          <a:p xmlns:a="http://schemas.openxmlformats.org/drawingml/2006/main">
+            <a:r>
               <a:t>[สาธิต] ส่งต่องานหนึ่งลำดับ เปิดด้วยบัญชีผู้ประเมินคนสุดท้าย และยืนยันจนสถานะเป็น Completed</a:t>
+            </a:r>
+          </a:p>
+          <a:p xmlns:a="http://schemas.openxmlformats.org/drawingml/2006/main">
+            <a:r>
+              <a:t>[กลับมานำเสนอ] เมื่อเห็นสถานะ Completed แล้ว ต่อไปจะเป็นช่วงที่ทุกท่านได้ทดลองใช้งานครับ</a:t>
             </a:r>
           </a:p>
           <a:p xmlns:a="http://schemas.openxmlformats.org/drawingml/2006/main">
@@ -1874,6 +1904,11 @@
           </a:p>
           <a:p xmlns:a="http://schemas.openxmlformats.org/drawingml/2006/main">
             <a:r>
+              <a:t>[เตรียมสาธิต] ตั้งแต่สไลด์ถัดไป ผมจะเปิดระบบให้ดูเป็นช่วง ๆ ครับ ทุกท่านยังไม่ต้องกดตาม จนกว่าจะถึงช่วงทดลองใช้งาน</a:t>
+            </a:r>
+          </a:p>
+          <a:p xmlns:a="http://schemas.openxmlformats.org/drawingml/2006/main">
+            <a:r>
               <a:t/>
             </a:r>
           </a:p>
@@ -1969,7 +2004,17 @@
           </a:p>
           <a:p xmlns:a="http://schemas.openxmlformats.org/drawingml/2006/main">
             <a:r>
+              <a:t>[เปลี่ยนไปสาธิตระบบ] ต่อไปผมจะเปิดระบบตามหัวข้อนี้ให้ดูครับ ทุกท่านยังไม่ต้องกดตาม ให้สังเกตขั้นตอนบนหน้าจอก่อน</a:t>
+            </a:r>
+          </a:p>
+          <a:p xmlns:a="http://schemas.openxmlformats.org/drawingml/2006/main">
+            <a:r>
               <a:t>[สาธิต] เปิดแดชบอร์ด ตรวจสอบรอบประเมินที่ได้รับมอบหมาย แล้วเปิดรายการสายสนับสนุนที่เตรียมไว้</a:t>
+            </a:r>
+          </a:p>
+          <a:p xmlns:a="http://schemas.openxmlformats.org/drawingml/2006/main">
+            <a:r>
+              <a:t>[กลับมานำเสนอ] เมื่อเห็นจุดเริ่มต้นบนระบบแล้ว ต่อไปเรามาดูความสัมพันธ์ระหว่างโครงการ กิจกรรม ตัวชี้วัด และหลักฐานครับ</a:t>
             </a:r>
           </a:p>
           <a:p xmlns:a="http://schemas.openxmlformats.org/drawingml/2006/main">
@@ -2237,7 +2282,7 @@
   </p:cSld>
   <p:clrMap bg1="lt1" tx1="dk1" bg2="lt2" tx2="dk2" accent1="accent1" accent2="accent2" accent3="accent3" accent4="accent4" accent5="accent5" accent6="accent6" hlink="hlink" folHlink="folHlink"/>
   <p:sldLayoutIdLst>
-    <p:sldLayoutId xmlns:r="http://schemas.openxmlformats.org/officeDocument/2006/relationships" id="2147483649" r:id="R89a4da2f7d1341ee"/>
+    <p:sldLayoutId xmlns:r="http://schemas.openxmlformats.org/officeDocument/2006/relationships" id="2147483649" r:id="R682ca8d30654498a"/>
   </p:sldLayoutIdLst>
   <p:txStyles>
     <p:titleStyle>
@@ -2792,7 +2837,7 @@
           <p:nvPr/>
         </p:nvPicPr>
         <p:blipFill>
-          <a:blip xmlns:r="http://schemas.openxmlformats.org/officeDocument/2006/relationships" xmlns:a="http://schemas.openxmlformats.org/drawingml/2006/main" r:embed="Rd0dc09e7a2914b94"/>
+          <a:blip xmlns:r="http://schemas.openxmlformats.org/officeDocument/2006/relationships" xmlns:a="http://schemas.openxmlformats.org/drawingml/2006/main" r:embed="R6800e5295b2e4f7d"/>
           <a:srcRect xmlns:a="http://schemas.openxmlformats.org/drawingml/2006/main" l="2579" t="0" r="2579" b="0"/>
           <a:stretch xmlns:a="http://schemas.openxmlformats.org/drawingml/2006/main">
             <a:fillRect l="0" t="0" r="0" b="0"/>
@@ -2813,7 +2858,7 @@
           <p:cNvPr id="2" name="cover-panel">
             <a:extLst xmlns:a="http://schemas.openxmlformats.org/drawingml/2006/main">
               <a:ext uri="{FF2B5EF4-FFF2-40B4-BE49-F238E27FC236}">
-                <a16:creationId xmlns:a16="http://schemas.microsoft.com/office/drawing/2014/main" id="{8B357B92-4778-49C0-83A8-631EED39A376}"/>
+                <a16:creationId xmlns:a16="http://schemas.microsoft.com/office/drawing/2014/main" id="{615D1E8B-1021-4369-85B6-8D4F4EF85C3D}"/>
               </a:ext>
             </a:extLst>
           </p:cNvPr>
@@ -2844,7 +2889,7 @@
           <p:cNvPr id="3" name="cover-accent">
             <a:extLst xmlns:a="http://schemas.openxmlformats.org/drawingml/2006/main">
               <a:ext uri="{FF2B5EF4-FFF2-40B4-BE49-F238E27FC236}">
-                <a16:creationId xmlns:a16="http://schemas.microsoft.com/office/drawing/2014/main" id="{303A0CEA-616D-4642-A5A3-7C0C4BDE568D}"/>
+                <a16:creationId xmlns:a16="http://schemas.microsoft.com/office/drawing/2014/main" id="{FA1AC356-091F-4FBB-8EA7-1D9A2E6FD603}"/>
               </a:ext>
             </a:extLst>
           </p:cNvPr>
@@ -2879,7 +2924,7 @@
           <p:nvPr/>
         </p:nvPicPr>
         <p:blipFill>
-          <a:blip xmlns:r="http://schemas.openxmlformats.org/officeDocument/2006/relationships" xmlns:a="http://schemas.openxmlformats.org/drawingml/2006/main" r:embed="R9fa24fab74c7447e"/>
+          <a:blip xmlns:r="http://schemas.openxmlformats.org/officeDocument/2006/relationships" xmlns:a="http://schemas.openxmlformats.org/drawingml/2006/main" r:embed="R9e22daad932543ad"/>
           <a:stretch xmlns:a="http://schemas.openxmlformats.org/drawingml/2006/main"/>
         </p:blipFill>
         <p:spPr>
@@ -2897,7 +2942,7 @@
           <p:cNvPr id="5" name="cover-institution">
             <a:extLst xmlns:a="http://schemas.openxmlformats.org/drawingml/2006/main">
               <a:ext uri="{FF2B5EF4-FFF2-40B4-BE49-F238E27FC236}">
-                <a16:creationId xmlns:a16="http://schemas.microsoft.com/office/drawing/2014/main" id="{692C399B-9775-4888-BDA7-3307284F7913}"/>
+                <a16:creationId xmlns:a16="http://schemas.microsoft.com/office/drawing/2014/main" id="{07A4B357-60B6-4790-8EAB-D14A541D15EB}"/>
               </a:ext>
             </a:extLst>
           </p:cNvPr>
@@ -2959,7 +3004,7 @@
           <p:cNvPr id="6" name="cover-session">
             <a:extLst xmlns:a="http://schemas.openxmlformats.org/drawingml/2006/main">
               <a:ext uri="{FF2B5EF4-FFF2-40B4-BE49-F238E27FC236}">
-                <a16:creationId xmlns:a16="http://schemas.microsoft.com/office/drawing/2014/main" id="{401789FB-EE48-401A-A95B-2CBA0843E042}"/>
+                <a16:creationId xmlns:a16="http://schemas.microsoft.com/office/drawing/2014/main" id="{88D6F5F3-B97B-4D7F-89F7-401A67B0BE63}"/>
               </a:ext>
             </a:extLst>
           </p:cNvPr>
@@ -3021,7 +3066,7 @@
           <p:cNvPr id="7" name="cover-title">
             <a:extLst xmlns:a="http://schemas.openxmlformats.org/drawingml/2006/main">
               <a:ext uri="{FF2B5EF4-FFF2-40B4-BE49-F238E27FC236}">
-                <a16:creationId xmlns:a16="http://schemas.microsoft.com/office/drawing/2014/main" id="{ABABF8B7-0B6F-4587-A8CB-62B9CEC6877B}"/>
+                <a16:creationId xmlns:a16="http://schemas.microsoft.com/office/drawing/2014/main" id="{38103830-5A7A-481E-83F9-BECE340882C0}"/>
               </a:ext>
             </a:extLst>
           </p:cNvPr>
@@ -3110,7 +3155,7 @@
           <p:cNvPr id="8" name="cover-gold-rule">
             <a:extLst xmlns:a="http://schemas.openxmlformats.org/drawingml/2006/main">
               <a:ext uri="{FF2B5EF4-FFF2-40B4-BE49-F238E27FC236}">
-                <a16:creationId xmlns:a16="http://schemas.microsoft.com/office/drawing/2014/main" id="{0D55ACFF-DAE1-444C-852D-B989D356784C}"/>
+                <a16:creationId xmlns:a16="http://schemas.microsoft.com/office/drawing/2014/main" id="{EF69F4EF-A8A6-4BAA-8343-DE3EDBCAFC17}"/>
               </a:ext>
             </a:extLst>
           </p:cNvPr>
@@ -3141,7 +3186,7 @@
           <p:cNvPr id="9" name="cover-promise">
             <a:extLst xmlns:a="http://schemas.openxmlformats.org/drawingml/2006/main">
               <a:ext uri="{FF2B5EF4-FFF2-40B4-BE49-F238E27FC236}">
-                <a16:creationId xmlns:a16="http://schemas.microsoft.com/office/drawing/2014/main" id="{0C409219-657C-4CE0-87BC-C8F42A65EA49}"/>
+                <a16:creationId xmlns:a16="http://schemas.microsoft.com/office/drawing/2014/main" id="{54A2FC46-9A84-455D-A581-E5625102FEAB}"/>
               </a:ext>
             </a:extLst>
           </p:cNvPr>
@@ -3203,7 +3248,7 @@
           <p:cNvPr id="10" name="cover-style">
             <a:extLst xmlns:a="http://schemas.openxmlformats.org/drawingml/2006/main">
               <a:ext uri="{FF2B5EF4-FFF2-40B4-BE49-F238E27FC236}">
-                <a16:creationId xmlns:a16="http://schemas.microsoft.com/office/drawing/2014/main" id="{1AA10D42-79A5-4B7F-A9FC-4ADBAB0E4B24}"/>
+                <a16:creationId xmlns:a16="http://schemas.microsoft.com/office/drawing/2014/main" id="{DA3ED1E2-1887-4D02-BFBE-E0499188CE78}"/>
               </a:ext>
             </a:extLst>
           </p:cNvPr>
@@ -3269,7 +3314,7 @@
           <p:nvPr/>
         </p:nvPicPr>
         <p:blipFill>
-          <a:blip xmlns:r="http://schemas.openxmlformats.org/officeDocument/2006/relationships" xmlns:a="http://schemas.openxmlformats.org/drawingml/2006/main" r:embed="R85e800ffc6564035"/>
+          <a:blip xmlns:r="http://schemas.openxmlformats.org/officeDocument/2006/relationships" xmlns:a="http://schemas.openxmlformats.org/drawingml/2006/main" r:embed="R760615a8baf14e8d"/>
           <a:stretch xmlns:a="http://schemas.openxmlformats.org/drawingml/2006/main"/>
         </p:blipFill>
         <p:spPr>
@@ -3285,7 +3330,7 @@
     </p:spTree>
     <p:extLst>
       <p:ext uri="{BB962C8B-B14F-4D97-AF65-F5344CB8AC3E}">
-        <p14:creationId xmlns:p14="http://schemas.microsoft.com/office/powerpoint/2010/main" val="1706007902"/>
+        <p14:creationId xmlns:p14="http://schemas.microsoft.com/office/powerpoint/2010/main" val="1308122707"/>
       </p:ext>
     </p:extLst>
   </p:cSld>
@@ -3316,7 +3361,7 @@
           <p:cNvPr id="15" name="side-accent-10">
             <a:extLst xmlns:a="http://schemas.openxmlformats.org/drawingml/2006/main">
               <a:ext uri="{FF2B5EF4-FFF2-40B4-BE49-F238E27FC236}">
-                <a16:creationId xmlns:a16="http://schemas.microsoft.com/office/drawing/2014/main" id="{203397CC-49E3-4BB6-8137-1F86F099A76A}"/>
+                <a16:creationId xmlns:a16="http://schemas.microsoft.com/office/drawing/2014/main" id="{A67ABE3A-0584-48CC-A8EF-94F6F4A60265}"/>
               </a:ext>
             </a:extLst>
           </p:cNvPr>
@@ -3347,7 +3392,7 @@
           <p:cNvPr id="2" name="kicker-10">
             <a:extLst xmlns:a="http://schemas.openxmlformats.org/drawingml/2006/main">
               <a:ext uri="{FF2B5EF4-FFF2-40B4-BE49-F238E27FC236}">
-                <a16:creationId xmlns:a16="http://schemas.microsoft.com/office/drawing/2014/main" id="{41AF05DF-FCEC-4F12-9EC5-1C71882CF13B}"/>
+                <a16:creationId xmlns:a16="http://schemas.microsoft.com/office/drawing/2014/main" id="{1E5EC6C0-C83A-4CC0-B18E-B9E2C62E06FA}"/>
               </a:ext>
             </a:extLst>
           </p:cNvPr>
@@ -3409,7 +3454,7 @@
           <p:cNvPr id="3" name="title-10">
             <a:extLst xmlns:a="http://schemas.openxmlformats.org/drawingml/2006/main">
               <a:ext uri="{FF2B5EF4-FFF2-40B4-BE49-F238E27FC236}">
-                <a16:creationId xmlns:a16="http://schemas.microsoft.com/office/drawing/2014/main" id="{44D3D773-43B2-427A-9B94-AA2ACE942061}"/>
+                <a16:creationId xmlns:a16="http://schemas.microsoft.com/office/drawing/2014/main" id="{4411304C-C279-445B-9FD6-036C823CA949}"/>
               </a:ext>
             </a:extLst>
           </p:cNvPr>
@@ -3471,7 +3516,7 @@
           <p:cNvPr id="4" name="">
             <a:extLst xmlns:a="http://schemas.openxmlformats.org/drawingml/2006/main">
               <a:ext uri="{FF2B5EF4-FFF2-40B4-BE49-F238E27FC236}">
-                <a16:creationId xmlns:a16="http://schemas.microsoft.com/office/drawing/2014/main" id="{3BEB4541-92B5-489A-AE43-96485999C542}"/>
+                <a16:creationId xmlns:a16="http://schemas.microsoft.com/office/drawing/2014/main" id="{6F555189-DEEB-4180-A0B6-7158FE4C9A99}"/>
               </a:ext>
             </a:extLst>
           </p:cNvPr>
@@ -3533,7 +3578,7 @@
           <p:cNvPr id="5" name="">
             <a:extLst xmlns:a="http://schemas.openxmlformats.org/drawingml/2006/main">
               <a:ext uri="{FF2B5EF4-FFF2-40B4-BE49-F238E27FC236}">
-                <a16:creationId xmlns:a16="http://schemas.microsoft.com/office/drawing/2014/main" id="{E5DE816E-7B23-477B-9FDA-AC1D177B8309}"/>
+                <a16:creationId xmlns:a16="http://schemas.microsoft.com/office/drawing/2014/main" id="{4A5A6EEE-4BF8-4E55-A9BF-13E80FE969F8}"/>
               </a:ext>
             </a:extLst>
           </p:cNvPr>
@@ -3595,7 +3640,7 @@
           <p:cNvPr id="6" name="">
             <a:extLst xmlns:a="http://schemas.openxmlformats.org/drawingml/2006/main">
               <a:ext uri="{FF2B5EF4-FFF2-40B4-BE49-F238E27FC236}">
-                <a16:creationId xmlns:a16="http://schemas.microsoft.com/office/drawing/2014/main" id="{49F0874C-1A1A-4E67-A920-A625AF544AFF}"/>
+                <a16:creationId xmlns:a16="http://schemas.microsoft.com/office/drawing/2014/main" id="{12FA4433-CE70-49CB-886D-67383C6ED588}"/>
               </a:ext>
             </a:extLst>
           </p:cNvPr>
@@ -3663,7 +3708,7 @@
           <p:cNvPr id="7" name="">
             <a:extLst xmlns:a="http://schemas.openxmlformats.org/drawingml/2006/main">
               <a:ext uri="{FF2B5EF4-FFF2-40B4-BE49-F238E27FC236}">
-                <a16:creationId xmlns:a16="http://schemas.microsoft.com/office/drawing/2014/main" id="{D214B907-65FA-42BD-8E48-BBD3CBF7FA84}"/>
+                <a16:creationId xmlns:a16="http://schemas.microsoft.com/office/drawing/2014/main" id="{BED3000D-DA8E-44C8-98C0-C28FEAC7BF87}"/>
               </a:ext>
             </a:extLst>
           </p:cNvPr>
@@ -3725,7 +3770,7 @@
           <p:cNvPr id="8" name="">
             <a:extLst xmlns:a="http://schemas.openxmlformats.org/drawingml/2006/main">
               <a:ext uri="{FF2B5EF4-FFF2-40B4-BE49-F238E27FC236}">
-                <a16:creationId xmlns:a16="http://schemas.microsoft.com/office/drawing/2014/main" id="{CB19D7B1-D2FF-46E6-A810-93F80E5D90AB}"/>
+                <a16:creationId xmlns:a16="http://schemas.microsoft.com/office/drawing/2014/main" id="{5A110CFD-0E7F-40E8-93DF-A9EEF66009B7}"/>
               </a:ext>
             </a:extLst>
           </p:cNvPr>
@@ -3793,7 +3838,7 @@
           <p:cNvPr id="9" name="">
             <a:extLst xmlns:a="http://schemas.openxmlformats.org/drawingml/2006/main">
               <a:ext uri="{FF2B5EF4-FFF2-40B4-BE49-F238E27FC236}">
-                <a16:creationId xmlns:a16="http://schemas.microsoft.com/office/drawing/2014/main" id="{C179AFD8-CEB9-4D51-A8E8-7F05CBDCA49E}"/>
+                <a16:creationId xmlns:a16="http://schemas.microsoft.com/office/drawing/2014/main" id="{EE349C5E-B0BD-411E-B59F-65DCDE56B6CD}"/>
               </a:ext>
             </a:extLst>
           </p:cNvPr>
@@ -3824,7 +3869,7 @@
           <p:cNvPr id="10" name="">
             <a:extLst xmlns:a="http://schemas.openxmlformats.org/drawingml/2006/main">
               <a:ext uri="{FF2B5EF4-FFF2-40B4-BE49-F238E27FC236}">
-                <a16:creationId xmlns:a16="http://schemas.microsoft.com/office/drawing/2014/main" id="{09F7B664-48D0-4253-A572-E9D897188E86}"/>
+                <a16:creationId xmlns:a16="http://schemas.microsoft.com/office/drawing/2014/main" id="{7BC565F9-6FF7-4FB8-8A1E-6905ACDDFEC3}"/>
               </a:ext>
             </a:extLst>
           </p:cNvPr>
@@ -3886,7 +3931,7 @@
           <p:cNvPr id="11" name="">
             <a:extLst xmlns:a="http://schemas.openxmlformats.org/drawingml/2006/main">
               <a:ext uri="{FF2B5EF4-FFF2-40B4-BE49-F238E27FC236}">
-                <a16:creationId xmlns:a16="http://schemas.microsoft.com/office/drawing/2014/main" id="{38E5BE55-A182-4D0E-A24E-27F8EB1C1022}"/>
+                <a16:creationId xmlns:a16="http://schemas.microsoft.com/office/drawing/2014/main" id="{C4BB935C-396A-4FEE-ADC4-8045A96EC6FA}"/>
               </a:ext>
             </a:extLst>
           </p:cNvPr>
@@ -3948,7 +3993,7 @@
           <p:cNvPr id="12" name="footer-rule-10">
             <a:extLst xmlns:a="http://schemas.openxmlformats.org/drawingml/2006/main">
               <a:ext uri="{FF2B5EF4-FFF2-40B4-BE49-F238E27FC236}">
-                <a16:creationId xmlns:a16="http://schemas.microsoft.com/office/drawing/2014/main" id="{8BA55BD5-0AD0-4B44-BD86-E80EFBC1AA81}"/>
+                <a16:creationId xmlns:a16="http://schemas.microsoft.com/office/drawing/2014/main" id="{26641480-FC90-475C-AC8A-8EB251161A5C}"/>
               </a:ext>
             </a:extLst>
           </p:cNvPr>
@@ -3979,7 +4024,7 @@
           <p:cNvPr id="13" name="footer-label-10">
             <a:extLst xmlns:a="http://schemas.openxmlformats.org/drawingml/2006/main">
               <a:ext uri="{FF2B5EF4-FFF2-40B4-BE49-F238E27FC236}">
-                <a16:creationId xmlns:a16="http://schemas.microsoft.com/office/drawing/2014/main" id="{EC49EA7D-CC93-46AC-8305-59F76583AF79}"/>
+                <a16:creationId xmlns:a16="http://schemas.microsoft.com/office/drawing/2014/main" id="{1D369ADB-92D8-459F-BC59-A8A627E01332}"/>
               </a:ext>
             </a:extLst>
           </p:cNvPr>
@@ -4041,7 +4086,7 @@
           <p:cNvPr id="14" name="footer-page-10">
             <a:extLst xmlns:a="http://schemas.openxmlformats.org/drawingml/2006/main">
               <a:ext uri="{FF2B5EF4-FFF2-40B4-BE49-F238E27FC236}">
-                <a16:creationId xmlns:a16="http://schemas.microsoft.com/office/drawing/2014/main" id="{D79973A6-56EF-4442-9D20-3951678D39C6}"/>
+                <a16:creationId xmlns:a16="http://schemas.microsoft.com/office/drawing/2014/main" id="{5C143EC0-8BD3-4C03-AA98-0B877EE5C7E0}"/>
               </a:ext>
             </a:extLst>
           </p:cNvPr>
@@ -4101,7 +4146,7 @@
     </p:spTree>
     <p:extLst>
       <p:ext uri="{BB962C8B-B14F-4D97-AF65-F5344CB8AC3E}">
-        <p14:creationId xmlns:p14="http://schemas.microsoft.com/office/powerpoint/2010/main" val="557179271"/>
+        <p14:creationId xmlns:p14="http://schemas.microsoft.com/office/powerpoint/2010/main" val="1783127499"/>
       </p:ext>
     </p:extLst>
   </p:cSld>
@@ -4132,7 +4177,7 @@
           <p:cNvPr id="17" name="side-accent-11">
             <a:extLst xmlns:a="http://schemas.openxmlformats.org/drawingml/2006/main">
               <a:ext uri="{FF2B5EF4-FFF2-40B4-BE49-F238E27FC236}">
-                <a16:creationId xmlns:a16="http://schemas.microsoft.com/office/drawing/2014/main" id="{F2CD13B1-5189-463D-AE3C-A2D8E00C7A7F}"/>
+                <a16:creationId xmlns:a16="http://schemas.microsoft.com/office/drawing/2014/main" id="{85F93D57-DDFE-4EF9-9EA7-7F81A0139415}"/>
               </a:ext>
             </a:extLst>
           </p:cNvPr>
@@ -4163,7 +4208,7 @@
           <p:cNvPr id="2" name="kicker-11">
             <a:extLst xmlns:a="http://schemas.openxmlformats.org/drawingml/2006/main">
               <a:ext uri="{FF2B5EF4-FFF2-40B4-BE49-F238E27FC236}">
-                <a16:creationId xmlns:a16="http://schemas.microsoft.com/office/drawing/2014/main" id="{20B72C08-980C-4A1B-9FCE-0E6E097ABA63}"/>
+                <a16:creationId xmlns:a16="http://schemas.microsoft.com/office/drawing/2014/main" id="{BF03499C-B928-4294-96AB-359DD9A4B5B4}"/>
               </a:ext>
             </a:extLst>
           </p:cNvPr>
@@ -4225,7 +4270,7 @@
           <p:cNvPr id="3" name="title-11">
             <a:extLst xmlns:a="http://schemas.openxmlformats.org/drawingml/2006/main">
               <a:ext uri="{FF2B5EF4-FFF2-40B4-BE49-F238E27FC236}">
-                <a16:creationId xmlns:a16="http://schemas.microsoft.com/office/drawing/2014/main" id="{A7FE3D4E-BE97-42C5-B616-7D3B190B160C}"/>
+                <a16:creationId xmlns:a16="http://schemas.microsoft.com/office/drawing/2014/main" id="{6DB5D0AC-40EE-4946-AADD-B35479D48B47}"/>
               </a:ext>
             </a:extLst>
           </p:cNvPr>
@@ -4287,7 +4332,7 @@
           <p:cNvPr id="4" name="">
             <a:extLst xmlns:a="http://schemas.openxmlformats.org/drawingml/2006/main">
               <a:ext uri="{FF2B5EF4-FFF2-40B4-BE49-F238E27FC236}">
-                <a16:creationId xmlns:a16="http://schemas.microsoft.com/office/drawing/2014/main" id="{5C85C058-C251-4E19-83C1-C5E5AE957D2A}"/>
+                <a16:creationId xmlns:a16="http://schemas.microsoft.com/office/drawing/2014/main" id="{FA8B4CB7-D4DB-4D97-9CF4-F7DEAA88B4AF}"/>
               </a:ext>
             </a:extLst>
           </p:cNvPr>
@@ -4322,7 +4367,7 @@
           <p:cNvPr id="5" name="">
             <a:extLst xmlns:a="http://schemas.openxmlformats.org/drawingml/2006/main">
               <a:ext uri="{FF2B5EF4-FFF2-40B4-BE49-F238E27FC236}">
-                <a16:creationId xmlns:a16="http://schemas.microsoft.com/office/drawing/2014/main" id="{101F62EF-E8DA-4A4D-8C5D-28E584F5D29C}"/>
+                <a16:creationId xmlns:a16="http://schemas.microsoft.com/office/drawing/2014/main" id="{BB61D447-EA85-4043-BFCD-2FF0E67B1A63}"/>
               </a:ext>
             </a:extLst>
           </p:cNvPr>
@@ -4384,7 +4429,7 @@
           <p:cNvPr id="6" name="">
             <a:extLst xmlns:a="http://schemas.openxmlformats.org/drawingml/2006/main">
               <a:ext uri="{FF2B5EF4-FFF2-40B4-BE49-F238E27FC236}">
-                <a16:creationId xmlns:a16="http://schemas.microsoft.com/office/drawing/2014/main" id="{2DBE3FC1-507D-41A3-914F-746E9D905F4B}"/>
+                <a16:creationId xmlns:a16="http://schemas.microsoft.com/office/drawing/2014/main" id="{00CA3616-7E19-4155-9141-13AA28BD6F4C}"/>
               </a:ext>
             </a:extLst>
           </p:cNvPr>
@@ -4446,7 +4491,7 @@
           <p:cNvPr id="7" name="">
             <a:extLst xmlns:a="http://schemas.openxmlformats.org/drawingml/2006/main">
               <a:ext uri="{FF2B5EF4-FFF2-40B4-BE49-F238E27FC236}">
-                <a16:creationId xmlns:a16="http://schemas.microsoft.com/office/drawing/2014/main" id="{09F880A1-02A1-4E7E-9001-A15892A652A9}"/>
+                <a16:creationId xmlns:a16="http://schemas.microsoft.com/office/drawing/2014/main" id="{ED644B00-F536-4F96-A54E-A755E1D708EB}"/>
               </a:ext>
             </a:extLst>
           </p:cNvPr>
@@ -4481,7 +4526,7 @@
           <p:cNvPr id="8" name="">
             <a:extLst xmlns:a="http://schemas.openxmlformats.org/drawingml/2006/main">
               <a:ext uri="{FF2B5EF4-FFF2-40B4-BE49-F238E27FC236}">
-                <a16:creationId xmlns:a16="http://schemas.microsoft.com/office/drawing/2014/main" id="{1FFDB4FB-B69B-4FCC-B0EC-98175CCE8AC5}"/>
+                <a16:creationId xmlns:a16="http://schemas.microsoft.com/office/drawing/2014/main" id="{82C0C501-3E24-4CAD-8D93-833FEBEA2A3D}"/>
               </a:ext>
             </a:extLst>
           </p:cNvPr>
@@ -4543,7 +4588,7 @@
           <p:cNvPr id="9" name="">
             <a:extLst xmlns:a="http://schemas.openxmlformats.org/drawingml/2006/main">
               <a:ext uri="{FF2B5EF4-FFF2-40B4-BE49-F238E27FC236}">
-                <a16:creationId xmlns:a16="http://schemas.microsoft.com/office/drawing/2014/main" id="{12037AD3-4359-4FFB-9EC8-C057122C3DBD}"/>
+                <a16:creationId xmlns:a16="http://schemas.microsoft.com/office/drawing/2014/main" id="{E4329F5C-9439-402A-925C-DC536CA85620}"/>
               </a:ext>
             </a:extLst>
           </p:cNvPr>
@@ -4605,7 +4650,7 @@
           <p:cNvPr id="10" name="">
             <a:extLst xmlns:a="http://schemas.openxmlformats.org/drawingml/2006/main">
               <a:ext uri="{FF2B5EF4-FFF2-40B4-BE49-F238E27FC236}">
-                <a16:creationId xmlns:a16="http://schemas.microsoft.com/office/drawing/2014/main" id="{1650E6C1-7176-442B-B631-DFCC788372A4}"/>
+                <a16:creationId xmlns:a16="http://schemas.microsoft.com/office/drawing/2014/main" id="{1D6A2518-5609-44AF-A6BB-1E139DF0C520}"/>
               </a:ext>
             </a:extLst>
           </p:cNvPr>
@@ -4640,7 +4685,7 @@
           <p:cNvPr id="11" name="">
             <a:extLst xmlns:a="http://schemas.openxmlformats.org/drawingml/2006/main">
               <a:ext uri="{FF2B5EF4-FFF2-40B4-BE49-F238E27FC236}">
-                <a16:creationId xmlns:a16="http://schemas.microsoft.com/office/drawing/2014/main" id="{5C756C90-1F08-4E82-B3E6-F5182C4B9004}"/>
+                <a16:creationId xmlns:a16="http://schemas.microsoft.com/office/drawing/2014/main" id="{B9289715-847E-4EDE-94DE-1B746C7A08DD}"/>
               </a:ext>
             </a:extLst>
           </p:cNvPr>
@@ -4702,7 +4747,7 @@
           <p:cNvPr id="12" name="">
             <a:extLst xmlns:a="http://schemas.openxmlformats.org/drawingml/2006/main">
               <a:ext uri="{FF2B5EF4-FFF2-40B4-BE49-F238E27FC236}">
-                <a16:creationId xmlns:a16="http://schemas.microsoft.com/office/drawing/2014/main" id="{4B5DCD84-B201-4E6A-AFE0-1333FB83D510}"/>
+                <a16:creationId xmlns:a16="http://schemas.microsoft.com/office/drawing/2014/main" id="{2A6E201F-51C5-4F35-B33F-5C17F6C0935B}"/>
               </a:ext>
             </a:extLst>
           </p:cNvPr>
@@ -4764,7 +4809,7 @@
           <p:cNvPr id="13" name="">
             <a:extLst xmlns:a="http://schemas.openxmlformats.org/drawingml/2006/main">
               <a:ext uri="{FF2B5EF4-FFF2-40B4-BE49-F238E27FC236}">
-                <a16:creationId xmlns:a16="http://schemas.microsoft.com/office/drawing/2014/main" id="{97E56381-62ED-416D-9B03-238EC404F125}"/>
+                <a16:creationId xmlns:a16="http://schemas.microsoft.com/office/drawing/2014/main" id="{5CA2AA60-9018-4F22-A7D8-CF3D5FD49015}"/>
               </a:ext>
             </a:extLst>
           </p:cNvPr>
@@ -4826,7 +4871,7 @@
           <p:cNvPr id="14" name="footer-rule-11">
             <a:extLst xmlns:a="http://schemas.openxmlformats.org/drawingml/2006/main">
               <a:ext uri="{FF2B5EF4-FFF2-40B4-BE49-F238E27FC236}">
-                <a16:creationId xmlns:a16="http://schemas.microsoft.com/office/drawing/2014/main" id="{84F54EB3-F4D1-4496-B22F-B1DC8153E5BA}"/>
+                <a16:creationId xmlns:a16="http://schemas.microsoft.com/office/drawing/2014/main" id="{79B37FAD-CD6A-48F4-8500-85EDB0442CCB}"/>
               </a:ext>
             </a:extLst>
           </p:cNvPr>
@@ -4857,7 +4902,7 @@
           <p:cNvPr id="15" name="footer-label-11">
             <a:extLst xmlns:a="http://schemas.openxmlformats.org/drawingml/2006/main">
               <a:ext uri="{FF2B5EF4-FFF2-40B4-BE49-F238E27FC236}">
-                <a16:creationId xmlns:a16="http://schemas.microsoft.com/office/drawing/2014/main" id="{2E1113A6-508C-4A79-8FE5-E0138117E96A}"/>
+                <a16:creationId xmlns:a16="http://schemas.microsoft.com/office/drawing/2014/main" id="{DA412FE4-437E-4FAE-B01C-97FE8EAC4C90}"/>
               </a:ext>
             </a:extLst>
           </p:cNvPr>
@@ -4919,7 +4964,7 @@
           <p:cNvPr id="16" name="footer-page-11">
             <a:extLst xmlns:a="http://schemas.openxmlformats.org/drawingml/2006/main">
               <a:ext uri="{FF2B5EF4-FFF2-40B4-BE49-F238E27FC236}">
-                <a16:creationId xmlns:a16="http://schemas.microsoft.com/office/drawing/2014/main" id="{058CAF0A-1383-480D-ACD7-360BF640C7AB}"/>
+                <a16:creationId xmlns:a16="http://schemas.microsoft.com/office/drawing/2014/main" id="{71E5F4FA-D675-4B18-A261-356EC91FC9E1}"/>
               </a:ext>
             </a:extLst>
           </p:cNvPr>
@@ -4979,7 +5024,7 @@
     </p:spTree>
     <p:extLst>
       <p:ext uri="{BB962C8B-B14F-4D97-AF65-F5344CB8AC3E}">
-        <p14:creationId xmlns:p14="http://schemas.microsoft.com/office/powerpoint/2010/main" val="1873640644"/>
+        <p14:creationId xmlns:p14="http://schemas.microsoft.com/office/powerpoint/2010/main" val="1081867604"/>
       </p:ext>
     </p:extLst>
   </p:cSld>
@@ -5010,7 +5055,7 @@
           <p:cNvPr id="22" name="side-accent-12">
             <a:extLst xmlns:a="http://schemas.openxmlformats.org/drawingml/2006/main">
               <a:ext uri="{FF2B5EF4-FFF2-40B4-BE49-F238E27FC236}">
-                <a16:creationId xmlns:a16="http://schemas.microsoft.com/office/drawing/2014/main" id="{DF3F063A-FBB8-4168-AF1B-C168259D5FCE}"/>
+                <a16:creationId xmlns:a16="http://schemas.microsoft.com/office/drawing/2014/main" id="{0D821C34-3EF9-439A-A597-6BAEFA7310EF}"/>
               </a:ext>
             </a:extLst>
           </p:cNvPr>
@@ -5041,7 +5086,7 @@
           <p:cNvPr id="2" name="kicker-12">
             <a:extLst xmlns:a="http://schemas.openxmlformats.org/drawingml/2006/main">
               <a:ext uri="{FF2B5EF4-FFF2-40B4-BE49-F238E27FC236}">
-                <a16:creationId xmlns:a16="http://schemas.microsoft.com/office/drawing/2014/main" id="{8E99DD77-C9C4-4B7E-A2CB-15E648A9BF19}"/>
+                <a16:creationId xmlns:a16="http://schemas.microsoft.com/office/drawing/2014/main" id="{9B3A8811-5111-4B61-A782-780B1D3426ED}"/>
               </a:ext>
             </a:extLst>
           </p:cNvPr>
@@ -5103,7 +5148,7 @@
           <p:cNvPr id="3" name="title-12">
             <a:extLst xmlns:a="http://schemas.openxmlformats.org/drawingml/2006/main">
               <a:ext uri="{FF2B5EF4-FFF2-40B4-BE49-F238E27FC236}">
-                <a16:creationId xmlns:a16="http://schemas.microsoft.com/office/drawing/2014/main" id="{5E4070FF-6345-4412-9A28-8655B90F1177}"/>
+                <a16:creationId xmlns:a16="http://schemas.microsoft.com/office/drawing/2014/main" id="{5E079619-E1BB-4071-88D0-7DD6ADAAC0A6}"/>
               </a:ext>
             </a:extLst>
           </p:cNvPr>
@@ -5165,7 +5210,7 @@
           <p:cNvPr id="4" name="">
             <a:extLst xmlns:a="http://schemas.openxmlformats.org/drawingml/2006/main">
               <a:ext uri="{FF2B5EF4-FFF2-40B4-BE49-F238E27FC236}">
-                <a16:creationId xmlns:a16="http://schemas.microsoft.com/office/drawing/2014/main" id="{4F2221B8-EFB9-424B-8996-5C9A59619BC4}"/>
+                <a16:creationId xmlns:a16="http://schemas.microsoft.com/office/drawing/2014/main" id="{32E65BA9-75B8-427C-ABE0-FBE4F9EB03B3}"/>
               </a:ext>
             </a:extLst>
           </p:cNvPr>
@@ -5227,7 +5272,7 @@
           <p:cNvPr id="5" name="">
             <a:extLst xmlns:a="http://schemas.openxmlformats.org/drawingml/2006/main">
               <a:ext uri="{FF2B5EF4-FFF2-40B4-BE49-F238E27FC236}">
-                <a16:creationId xmlns:a16="http://schemas.microsoft.com/office/drawing/2014/main" id="{BEED0731-F624-46AB-8334-0BD8C21EA39D}"/>
+                <a16:creationId xmlns:a16="http://schemas.microsoft.com/office/drawing/2014/main" id="{5D0D4EBE-B65C-478B-8532-84D83CB61582}"/>
               </a:ext>
             </a:extLst>
           </p:cNvPr>
@@ -5258,7 +5303,7 @@
           <p:cNvPr id="6" name="">
             <a:extLst xmlns:a="http://schemas.openxmlformats.org/drawingml/2006/main">
               <a:ext uri="{FF2B5EF4-FFF2-40B4-BE49-F238E27FC236}">
-                <a16:creationId xmlns:a16="http://schemas.microsoft.com/office/drawing/2014/main" id="{8C61E800-BC37-41C1-BAB8-7BCE474EF5CE}"/>
+                <a16:creationId xmlns:a16="http://schemas.microsoft.com/office/drawing/2014/main" id="{46C8211F-1CCB-4DBA-98A2-14486B8D8776}"/>
               </a:ext>
             </a:extLst>
           </p:cNvPr>
@@ -5320,7 +5365,7 @@
           <p:cNvPr id="7" name="">
             <a:extLst xmlns:a="http://schemas.openxmlformats.org/drawingml/2006/main">
               <a:ext uri="{FF2B5EF4-FFF2-40B4-BE49-F238E27FC236}">
-                <a16:creationId xmlns:a16="http://schemas.microsoft.com/office/drawing/2014/main" id="{F37021A1-CDEE-4AE0-84C0-D0144B2CEAC7}"/>
+                <a16:creationId xmlns:a16="http://schemas.microsoft.com/office/drawing/2014/main" id="{869B7432-6988-4937-A25B-F804076C8D7B}"/>
               </a:ext>
             </a:extLst>
           </p:cNvPr>
@@ -5382,7 +5427,7 @@
           <p:cNvPr id="8" name="">
             <a:extLst xmlns:a="http://schemas.openxmlformats.org/drawingml/2006/main">
               <a:ext uri="{FF2B5EF4-FFF2-40B4-BE49-F238E27FC236}">
-                <a16:creationId xmlns:a16="http://schemas.microsoft.com/office/drawing/2014/main" id="{37F428A3-DF88-41A0-B997-952157311D56}"/>
+                <a16:creationId xmlns:a16="http://schemas.microsoft.com/office/drawing/2014/main" id="{3959EC2B-9501-4CE2-A8FA-E41DA5AFD9F2}"/>
               </a:ext>
             </a:extLst>
           </p:cNvPr>
@@ -5444,7 +5489,7 @@
           <p:cNvPr id="9" name="">
             <a:extLst xmlns:a="http://schemas.openxmlformats.org/drawingml/2006/main">
               <a:ext uri="{FF2B5EF4-FFF2-40B4-BE49-F238E27FC236}">
-                <a16:creationId xmlns:a16="http://schemas.microsoft.com/office/drawing/2014/main" id="{AFF3505D-63FD-45C2-8BDB-63585445B36F}"/>
+                <a16:creationId xmlns:a16="http://schemas.microsoft.com/office/drawing/2014/main" id="{DAD5C153-1726-4B60-A800-BD45DBF03EC8}"/>
               </a:ext>
             </a:extLst>
           </p:cNvPr>
@@ -5475,7 +5520,7 @@
           <p:cNvPr id="10" name="">
             <a:extLst xmlns:a="http://schemas.openxmlformats.org/drawingml/2006/main">
               <a:ext uri="{FF2B5EF4-FFF2-40B4-BE49-F238E27FC236}">
-                <a16:creationId xmlns:a16="http://schemas.microsoft.com/office/drawing/2014/main" id="{68C7591C-7FEA-4616-BA9D-7253DA3505E1}"/>
+                <a16:creationId xmlns:a16="http://schemas.microsoft.com/office/drawing/2014/main" id="{247EBE49-CF7F-4B80-BE40-041862067DD0}"/>
               </a:ext>
             </a:extLst>
           </p:cNvPr>
@@ -5537,7 +5582,7 @@
           <p:cNvPr id="11" name="">
             <a:extLst xmlns:a="http://schemas.openxmlformats.org/drawingml/2006/main">
               <a:ext uri="{FF2B5EF4-FFF2-40B4-BE49-F238E27FC236}">
-                <a16:creationId xmlns:a16="http://schemas.microsoft.com/office/drawing/2014/main" id="{C206E57E-2A0B-450C-965C-FF42C57C513C}"/>
+                <a16:creationId xmlns:a16="http://schemas.microsoft.com/office/drawing/2014/main" id="{A957306E-75B0-465D-8093-78EA54BFF658}"/>
               </a:ext>
             </a:extLst>
           </p:cNvPr>
@@ -5599,7 +5644,7 @@
           <p:cNvPr id="12" name="">
             <a:extLst xmlns:a="http://schemas.openxmlformats.org/drawingml/2006/main">
               <a:ext uri="{FF2B5EF4-FFF2-40B4-BE49-F238E27FC236}">
-                <a16:creationId xmlns:a16="http://schemas.microsoft.com/office/drawing/2014/main" id="{2198162F-52AE-424C-930C-E22C1C8D9C8F}"/>
+                <a16:creationId xmlns:a16="http://schemas.microsoft.com/office/drawing/2014/main" id="{71182462-236E-43F4-BBD6-2450BE5263E5}"/>
               </a:ext>
             </a:extLst>
           </p:cNvPr>
@@ -5661,7 +5706,7 @@
           <p:cNvPr id="13" name="">
             <a:extLst xmlns:a="http://schemas.openxmlformats.org/drawingml/2006/main">
               <a:ext uri="{FF2B5EF4-FFF2-40B4-BE49-F238E27FC236}">
-                <a16:creationId xmlns:a16="http://schemas.microsoft.com/office/drawing/2014/main" id="{41D8F470-FA8C-4307-B8F2-495D5B06A174}"/>
+                <a16:creationId xmlns:a16="http://schemas.microsoft.com/office/drawing/2014/main" id="{08E69BCE-5652-416B-AAED-170967256FB9}"/>
               </a:ext>
             </a:extLst>
           </p:cNvPr>
@@ -5692,7 +5737,7 @@
           <p:cNvPr id="14" name="">
             <a:extLst xmlns:a="http://schemas.openxmlformats.org/drawingml/2006/main">
               <a:ext uri="{FF2B5EF4-FFF2-40B4-BE49-F238E27FC236}">
-                <a16:creationId xmlns:a16="http://schemas.microsoft.com/office/drawing/2014/main" id="{44C816E4-4EC2-419D-AA14-27A05F78D397}"/>
+                <a16:creationId xmlns:a16="http://schemas.microsoft.com/office/drawing/2014/main" id="{7EA85A45-0362-4997-8A6C-29697378CDFB}"/>
               </a:ext>
             </a:extLst>
           </p:cNvPr>
@@ -5754,7 +5799,7 @@
           <p:cNvPr id="15" name="">
             <a:extLst xmlns:a="http://schemas.openxmlformats.org/drawingml/2006/main">
               <a:ext uri="{FF2B5EF4-FFF2-40B4-BE49-F238E27FC236}">
-                <a16:creationId xmlns:a16="http://schemas.microsoft.com/office/drawing/2014/main" id="{59728723-2AC5-4F27-B640-D513F1928239}"/>
+                <a16:creationId xmlns:a16="http://schemas.microsoft.com/office/drawing/2014/main" id="{5B04431D-DAA6-46B0-A359-DE354B055206}"/>
               </a:ext>
             </a:extLst>
           </p:cNvPr>
@@ -5816,7 +5861,7 @@
           <p:cNvPr id="16" name="">
             <a:extLst xmlns:a="http://schemas.openxmlformats.org/drawingml/2006/main">
               <a:ext uri="{FF2B5EF4-FFF2-40B4-BE49-F238E27FC236}">
-                <a16:creationId xmlns:a16="http://schemas.microsoft.com/office/drawing/2014/main" id="{82D8CBA8-5E0F-4C93-B7DC-5897863EA904}"/>
+                <a16:creationId xmlns:a16="http://schemas.microsoft.com/office/drawing/2014/main" id="{F0280E4B-29E2-4673-BA0C-9F294AE7B95B}"/>
               </a:ext>
             </a:extLst>
           </p:cNvPr>
@@ -5878,7 +5923,7 @@
           <p:cNvPr id="17" name="">
             <a:extLst xmlns:a="http://schemas.openxmlformats.org/drawingml/2006/main">
               <a:ext uri="{FF2B5EF4-FFF2-40B4-BE49-F238E27FC236}">
-                <a16:creationId xmlns:a16="http://schemas.microsoft.com/office/drawing/2014/main" id="{599E9789-E4AA-4EC6-88BA-AC4338A44C77}"/>
+                <a16:creationId xmlns:a16="http://schemas.microsoft.com/office/drawing/2014/main" id="{9CD47399-455F-4D0B-9381-321ED943EFB6}"/>
               </a:ext>
             </a:extLst>
           </p:cNvPr>
@@ -5913,7 +5958,7 @@
           <p:cNvPr id="18" name="">
             <a:extLst xmlns:a="http://schemas.openxmlformats.org/drawingml/2006/main">
               <a:ext uri="{FF2B5EF4-FFF2-40B4-BE49-F238E27FC236}">
-                <a16:creationId xmlns:a16="http://schemas.microsoft.com/office/drawing/2014/main" id="{927388D7-CF94-401C-A3FB-AE0518C3AE6A}"/>
+                <a16:creationId xmlns:a16="http://schemas.microsoft.com/office/drawing/2014/main" id="{85376330-523E-4B30-A821-A8966DD93E36}"/>
               </a:ext>
             </a:extLst>
           </p:cNvPr>
@@ -6002,7 +6047,7 @@
           <p:cNvPr id="19" name="footer-rule-12">
             <a:extLst xmlns:a="http://schemas.openxmlformats.org/drawingml/2006/main">
               <a:ext uri="{FF2B5EF4-FFF2-40B4-BE49-F238E27FC236}">
-                <a16:creationId xmlns:a16="http://schemas.microsoft.com/office/drawing/2014/main" id="{3E24F800-DAF3-4167-9E15-7CF74020B0A0}"/>
+                <a16:creationId xmlns:a16="http://schemas.microsoft.com/office/drawing/2014/main" id="{145AAC77-ACAE-4D59-919A-8EADB75C6C1A}"/>
               </a:ext>
             </a:extLst>
           </p:cNvPr>
@@ -6033,7 +6078,7 @@
           <p:cNvPr id="20" name="footer-label-12">
             <a:extLst xmlns:a="http://schemas.openxmlformats.org/drawingml/2006/main">
               <a:ext uri="{FF2B5EF4-FFF2-40B4-BE49-F238E27FC236}">
-                <a16:creationId xmlns:a16="http://schemas.microsoft.com/office/drawing/2014/main" id="{22BD823F-28D6-4302-9791-674DDA1F4420}"/>
+                <a16:creationId xmlns:a16="http://schemas.microsoft.com/office/drawing/2014/main" id="{ABE0C7D7-286E-4B63-A75A-38887100B6C2}"/>
               </a:ext>
             </a:extLst>
           </p:cNvPr>
@@ -6095,7 +6140,7 @@
           <p:cNvPr id="21" name="footer-page-12">
             <a:extLst xmlns:a="http://schemas.openxmlformats.org/drawingml/2006/main">
               <a:ext uri="{FF2B5EF4-FFF2-40B4-BE49-F238E27FC236}">
-                <a16:creationId xmlns:a16="http://schemas.microsoft.com/office/drawing/2014/main" id="{D741B36A-BC58-4326-B1A2-990FD60CBECE}"/>
+                <a16:creationId xmlns:a16="http://schemas.microsoft.com/office/drawing/2014/main" id="{90CC7DEF-370A-4ECA-BF4B-85B1C1054DCE}"/>
               </a:ext>
             </a:extLst>
           </p:cNvPr>
@@ -6155,7 +6200,7 @@
     </p:spTree>
     <p:extLst>
       <p:ext uri="{BB962C8B-B14F-4D97-AF65-F5344CB8AC3E}">
-        <p14:creationId xmlns:p14="http://schemas.microsoft.com/office/powerpoint/2010/main" val="9531804"/>
+        <p14:creationId xmlns:p14="http://schemas.microsoft.com/office/powerpoint/2010/main" val="1192595161"/>
       </p:ext>
     </p:extLst>
   </p:cSld>
@@ -6186,7 +6231,7 @@
           <p:cNvPr id="14" name="side-accent-13">
             <a:extLst xmlns:a="http://schemas.openxmlformats.org/drawingml/2006/main">
               <a:ext uri="{FF2B5EF4-FFF2-40B4-BE49-F238E27FC236}">
-                <a16:creationId xmlns:a16="http://schemas.microsoft.com/office/drawing/2014/main" id="{7EFF9DB6-A152-4F5C-BC86-012A72A6C456}"/>
+                <a16:creationId xmlns:a16="http://schemas.microsoft.com/office/drawing/2014/main" id="{400C55BD-CE13-4F53-8653-B24D4C42C2AB}"/>
               </a:ext>
             </a:extLst>
           </p:cNvPr>
@@ -6217,7 +6262,7 @@
           <p:cNvPr id="2" name="kicker-13">
             <a:extLst xmlns:a="http://schemas.openxmlformats.org/drawingml/2006/main">
               <a:ext uri="{FF2B5EF4-FFF2-40B4-BE49-F238E27FC236}">
-                <a16:creationId xmlns:a16="http://schemas.microsoft.com/office/drawing/2014/main" id="{AC0F94E6-2A6C-4F8B-9419-FFA8F497D7E9}"/>
+                <a16:creationId xmlns:a16="http://schemas.microsoft.com/office/drawing/2014/main" id="{8EE32B9F-8CE3-4DA0-8EAD-D7EA2C9C079F}"/>
               </a:ext>
             </a:extLst>
           </p:cNvPr>
@@ -6279,7 +6324,7 @@
           <p:cNvPr id="3" name="title-13">
             <a:extLst xmlns:a="http://schemas.openxmlformats.org/drawingml/2006/main">
               <a:ext uri="{FF2B5EF4-FFF2-40B4-BE49-F238E27FC236}">
-                <a16:creationId xmlns:a16="http://schemas.microsoft.com/office/drawing/2014/main" id="{2C5C8663-2470-4722-B682-F28A4A55B4BF}"/>
+                <a16:creationId xmlns:a16="http://schemas.microsoft.com/office/drawing/2014/main" id="{F3B3B501-C93C-4FEC-B44D-8DC4111E072F}"/>
               </a:ext>
             </a:extLst>
           </p:cNvPr>
@@ -6341,7 +6386,7 @@
           <p:cNvPr id="4" name="draft-panel">
             <a:extLst xmlns:a="http://schemas.openxmlformats.org/drawingml/2006/main">
               <a:ext uri="{FF2B5EF4-FFF2-40B4-BE49-F238E27FC236}">
-                <a16:creationId xmlns:a16="http://schemas.microsoft.com/office/drawing/2014/main" id="{E6BFDCC6-CBE2-4AF0-A8CE-8B3532EF7EA6}"/>
+                <a16:creationId xmlns:a16="http://schemas.microsoft.com/office/drawing/2014/main" id="{9BB79C49-F611-479F-9727-DB3B68112B9D}"/>
               </a:ext>
             </a:extLst>
           </p:cNvPr>
@@ -6376,7 +6421,7 @@
           <p:cNvPr id="5" name="">
             <a:extLst xmlns:a="http://schemas.openxmlformats.org/drawingml/2006/main">
               <a:ext uri="{FF2B5EF4-FFF2-40B4-BE49-F238E27FC236}">
-                <a16:creationId xmlns:a16="http://schemas.microsoft.com/office/drawing/2014/main" id="{F267F465-8A64-4FAC-932D-CAE64F26D475}"/>
+                <a16:creationId xmlns:a16="http://schemas.microsoft.com/office/drawing/2014/main" id="{8BD079D0-024B-46E2-A558-D573C13F6DEA}"/>
               </a:ext>
             </a:extLst>
           </p:cNvPr>
@@ -6438,7 +6483,7 @@
           <p:cNvPr id="6" name="">
             <a:extLst xmlns:a="http://schemas.openxmlformats.org/drawingml/2006/main">
               <a:ext uri="{FF2B5EF4-FFF2-40B4-BE49-F238E27FC236}">
-                <a16:creationId xmlns:a16="http://schemas.microsoft.com/office/drawing/2014/main" id="{071E8AAB-256D-4101-A2C9-08973585E094}"/>
+                <a16:creationId xmlns:a16="http://schemas.microsoft.com/office/drawing/2014/main" id="{5C1DB654-213E-4765-A8B2-16644375ECE9}"/>
               </a:ext>
             </a:extLst>
           </p:cNvPr>
@@ -6554,7 +6599,7 @@
           <p:cNvPr id="7" name="submit-panel">
             <a:extLst xmlns:a="http://schemas.openxmlformats.org/drawingml/2006/main">
               <a:ext uri="{FF2B5EF4-FFF2-40B4-BE49-F238E27FC236}">
-                <a16:creationId xmlns:a16="http://schemas.microsoft.com/office/drawing/2014/main" id="{4B15136A-FBF5-4239-A6B2-7CF8872F2EFE}"/>
+                <a16:creationId xmlns:a16="http://schemas.microsoft.com/office/drawing/2014/main" id="{9FA7E12E-6DE9-4828-89D7-278C8C951BF4}"/>
               </a:ext>
             </a:extLst>
           </p:cNvPr>
@@ -6589,7 +6634,7 @@
           <p:cNvPr id="8" name="">
             <a:extLst xmlns:a="http://schemas.openxmlformats.org/drawingml/2006/main">
               <a:ext uri="{FF2B5EF4-FFF2-40B4-BE49-F238E27FC236}">
-                <a16:creationId xmlns:a16="http://schemas.microsoft.com/office/drawing/2014/main" id="{137DB81D-28C1-4AE7-8766-F078B2009578}"/>
+                <a16:creationId xmlns:a16="http://schemas.microsoft.com/office/drawing/2014/main" id="{0EDDB318-FA28-4553-885D-48A008E6D2FB}"/>
               </a:ext>
             </a:extLst>
           </p:cNvPr>
@@ -6651,7 +6696,7 @@
           <p:cNvPr id="9" name="">
             <a:extLst xmlns:a="http://schemas.openxmlformats.org/drawingml/2006/main">
               <a:ext uri="{FF2B5EF4-FFF2-40B4-BE49-F238E27FC236}">
-                <a16:creationId xmlns:a16="http://schemas.microsoft.com/office/drawing/2014/main" id="{4C84C177-E64D-475A-AC2F-71C4C1F5BD3E}"/>
+                <a16:creationId xmlns:a16="http://schemas.microsoft.com/office/drawing/2014/main" id="{2813F3DC-B793-4D02-A473-F29A8E754D3D}"/>
               </a:ext>
             </a:extLst>
           </p:cNvPr>
@@ -6767,7 +6812,7 @@
           <p:cNvPr id="10" name="">
             <a:extLst xmlns:a="http://schemas.openxmlformats.org/drawingml/2006/main">
               <a:ext uri="{FF2B5EF4-FFF2-40B4-BE49-F238E27FC236}">
-                <a16:creationId xmlns:a16="http://schemas.microsoft.com/office/drawing/2014/main" id="{223601AA-CAF7-4B7D-B8FB-80E516EFEFF4}"/>
+                <a16:creationId xmlns:a16="http://schemas.microsoft.com/office/drawing/2014/main" id="{1149CB11-5785-4733-8774-3339F58946E7}"/>
               </a:ext>
             </a:extLst>
           </p:cNvPr>
@@ -6829,7 +6874,7 @@
           <p:cNvPr id="11" name="footer-rule-13">
             <a:extLst xmlns:a="http://schemas.openxmlformats.org/drawingml/2006/main">
               <a:ext uri="{FF2B5EF4-FFF2-40B4-BE49-F238E27FC236}">
-                <a16:creationId xmlns:a16="http://schemas.microsoft.com/office/drawing/2014/main" id="{4122ECB1-9EEA-4F70-BFA1-E7227DF0408E}"/>
+                <a16:creationId xmlns:a16="http://schemas.microsoft.com/office/drawing/2014/main" id="{F1AE642A-EF26-478F-9CE0-6A49DE230FFB}"/>
               </a:ext>
             </a:extLst>
           </p:cNvPr>
@@ -6860,7 +6905,7 @@
           <p:cNvPr id="12" name="footer-label-13">
             <a:extLst xmlns:a="http://schemas.openxmlformats.org/drawingml/2006/main">
               <a:ext uri="{FF2B5EF4-FFF2-40B4-BE49-F238E27FC236}">
-                <a16:creationId xmlns:a16="http://schemas.microsoft.com/office/drawing/2014/main" id="{80E60410-29D8-4AD2-BACC-5C5C9F134649}"/>
+                <a16:creationId xmlns:a16="http://schemas.microsoft.com/office/drawing/2014/main" id="{2641A00B-48E6-4FB3-9E7B-C8DDE0B4948E}"/>
               </a:ext>
             </a:extLst>
           </p:cNvPr>
@@ -6922,7 +6967,7 @@
           <p:cNvPr id="13" name="footer-page-13">
             <a:extLst xmlns:a="http://schemas.openxmlformats.org/drawingml/2006/main">
               <a:ext uri="{FF2B5EF4-FFF2-40B4-BE49-F238E27FC236}">
-                <a16:creationId xmlns:a16="http://schemas.microsoft.com/office/drawing/2014/main" id="{FA230287-4ECB-4082-84AE-3E168BA57873}"/>
+                <a16:creationId xmlns:a16="http://schemas.microsoft.com/office/drawing/2014/main" id="{8A6AB699-C62A-422B-942D-092E176DDA1D}"/>
               </a:ext>
             </a:extLst>
           </p:cNvPr>
@@ -6982,7 +7027,7 @@
     </p:spTree>
     <p:extLst>
       <p:ext uri="{BB962C8B-B14F-4D97-AF65-F5344CB8AC3E}">
-        <p14:creationId xmlns:p14="http://schemas.microsoft.com/office/powerpoint/2010/main" val="29577949"/>
+        <p14:creationId xmlns:p14="http://schemas.microsoft.com/office/powerpoint/2010/main" val="148243487"/>
       </p:ext>
     </p:extLst>
   </p:cSld>
@@ -7013,7 +7058,7 @@
           <p:cNvPr id="25" name="side-accent-14">
             <a:extLst xmlns:a="http://schemas.openxmlformats.org/drawingml/2006/main">
               <a:ext uri="{FF2B5EF4-FFF2-40B4-BE49-F238E27FC236}">
-                <a16:creationId xmlns:a16="http://schemas.microsoft.com/office/drawing/2014/main" id="{BA7C986B-FA8B-48C4-AE41-6F5C91E7BA7E}"/>
+                <a16:creationId xmlns:a16="http://schemas.microsoft.com/office/drawing/2014/main" id="{A604764E-5438-4F17-AC51-445217C00842}"/>
               </a:ext>
             </a:extLst>
           </p:cNvPr>
@@ -7044,7 +7089,7 @@
           <p:cNvPr id="2" name="kicker-14">
             <a:extLst xmlns:a="http://schemas.openxmlformats.org/drawingml/2006/main">
               <a:ext uri="{FF2B5EF4-FFF2-40B4-BE49-F238E27FC236}">
-                <a16:creationId xmlns:a16="http://schemas.microsoft.com/office/drawing/2014/main" id="{01BA2321-7729-48A7-90A3-372FEBCF2035}"/>
+                <a16:creationId xmlns:a16="http://schemas.microsoft.com/office/drawing/2014/main" id="{5256C69A-8639-4B75-8A3A-1FBDC6211BBE}"/>
               </a:ext>
             </a:extLst>
           </p:cNvPr>
@@ -7106,7 +7151,7 @@
           <p:cNvPr id="3" name="title-14">
             <a:extLst xmlns:a="http://schemas.openxmlformats.org/drawingml/2006/main">
               <a:ext uri="{FF2B5EF4-FFF2-40B4-BE49-F238E27FC236}">
-                <a16:creationId xmlns:a16="http://schemas.microsoft.com/office/drawing/2014/main" id="{65EF2494-E1AB-486C-B1D7-9322CA177349}"/>
+                <a16:creationId xmlns:a16="http://schemas.microsoft.com/office/drawing/2014/main" id="{121AA853-FC73-4124-ACDE-95DE00845673}"/>
               </a:ext>
             </a:extLst>
           </p:cNvPr>
@@ -7168,7 +7213,7 @@
           <p:cNvPr id="4" name="">
             <a:extLst xmlns:a="http://schemas.openxmlformats.org/drawingml/2006/main">
               <a:ext uri="{FF2B5EF4-FFF2-40B4-BE49-F238E27FC236}">
-                <a16:creationId xmlns:a16="http://schemas.microsoft.com/office/drawing/2014/main" id="{2AA7DDBC-ECF1-42EB-9E96-4694BFB7C0BC}"/>
+                <a16:creationId xmlns:a16="http://schemas.microsoft.com/office/drawing/2014/main" id="{0582064D-68CA-4D79-B326-70BBF216F417}"/>
               </a:ext>
             </a:extLst>
           </p:cNvPr>
@@ -7199,7 +7244,7 @@
           <p:cNvPr id="5" name="">
             <a:extLst xmlns:a="http://schemas.openxmlformats.org/drawingml/2006/main">
               <a:ext uri="{FF2B5EF4-FFF2-40B4-BE49-F238E27FC236}">
-                <a16:creationId xmlns:a16="http://schemas.microsoft.com/office/drawing/2014/main" id="{557417BE-BB14-42D1-8AE6-6A388EE657B4}"/>
+                <a16:creationId xmlns:a16="http://schemas.microsoft.com/office/drawing/2014/main" id="{C9BAB4A0-2FE2-4368-BF34-6C26E8C2B4C1}"/>
               </a:ext>
             </a:extLst>
           </p:cNvPr>
@@ -7230,7 +7275,7 @@
           <p:cNvPr id="6" name="">
             <a:extLst xmlns:a="http://schemas.openxmlformats.org/drawingml/2006/main">
               <a:ext uri="{FF2B5EF4-FFF2-40B4-BE49-F238E27FC236}">
-                <a16:creationId xmlns:a16="http://schemas.microsoft.com/office/drawing/2014/main" id="{78B608AB-5841-4CC8-A06F-7F9AF51042D8}"/>
+                <a16:creationId xmlns:a16="http://schemas.microsoft.com/office/drawing/2014/main" id="{0DF89456-9BD8-4457-A291-B163CB0F7D6C}"/>
               </a:ext>
             </a:extLst>
           </p:cNvPr>
@@ -7292,7 +7337,7 @@
           <p:cNvPr id="7" name="">
             <a:extLst xmlns:a="http://schemas.openxmlformats.org/drawingml/2006/main">
               <a:ext uri="{FF2B5EF4-FFF2-40B4-BE49-F238E27FC236}">
-                <a16:creationId xmlns:a16="http://schemas.microsoft.com/office/drawing/2014/main" id="{E2078962-AC50-471B-901F-D1ACD4E312A7}"/>
+                <a16:creationId xmlns:a16="http://schemas.microsoft.com/office/drawing/2014/main" id="{265B2FC4-CAC0-4F08-8090-5C93B03DFECD}"/>
               </a:ext>
             </a:extLst>
           </p:cNvPr>
@@ -7354,7 +7399,7 @@
           <p:cNvPr id="8" name="">
             <a:extLst xmlns:a="http://schemas.openxmlformats.org/drawingml/2006/main">
               <a:ext uri="{FF2B5EF4-FFF2-40B4-BE49-F238E27FC236}">
-                <a16:creationId xmlns:a16="http://schemas.microsoft.com/office/drawing/2014/main" id="{C31AADFE-9E53-4A11-B77F-471CA2D1D588}"/>
+                <a16:creationId xmlns:a16="http://schemas.microsoft.com/office/drawing/2014/main" id="{72A84788-9B6B-4D69-9E3F-7B329CACBAA3}"/>
               </a:ext>
             </a:extLst>
           </p:cNvPr>
@@ -7416,7 +7461,7 @@
           <p:cNvPr id="9" name="">
             <a:extLst xmlns:a="http://schemas.openxmlformats.org/drawingml/2006/main">
               <a:ext uri="{FF2B5EF4-FFF2-40B4-BE49-F238E27FC236}">
-                <a16:creationId xmlns:a16="http://schemas.microsoft.com/office/drawing/2014/main" id="{E19352AF-4036-400B-88EF-A5BAA45C1F84}"/>
+                <a16:creationId xmlns:a16="http://schemas.microsoft.com/office/drawing/2014/main" id="{B52173FF-55BE-4731-9627-E3E476CB94F1}"/>
               </a:ext>
             </a:extLst>
           </p:cNvPr>
@@ -7447,7 +7492,7 @@
           <p:cNvPr id="10" name="">
             <a:extLst xmlns:a="http://schemas.openxmlformats.org/drawingml/2006/main">
               <a:ext uri="{FF2B5EF4-FFF2-40B4-BE49-F238E27FC236}">
-                <a16:creationId xmlns:a16="http://schemas.microsoft.com/office/drawing/2014/main" id="{7B4579A6-DEE6-47B5-B493-41103816E30B}"/>
+                <a16:creationId xmlns:a16="http://schemas.microsoft.com/office/drawing/2014/main" id="{2F86D0A4-6356-47FD-BCAA-97737C4F55A9}"/>
               </a:ext>
             </a:extLst>
           </p:cNvPr>
@@ -7509,7 +7554,7 @@
           <p:cNvPr id="11" name="">
             <a:extLst xmlns:a="http://schemas.openxmlformats.org/drawingml/2006/main">
               <a:ext uri="{FF2B5EF4-FFF2-40B4-BE49-F238E27FC236}">
-                <a16:creationId xmlns:a16="http://schemas.microsoft.com/office/drawing/2014/main" id="{1156F867-BFFA-4F5A-A1F9-ACF0C45C662B}"/>
+                <a16:creationId xmlns:a16="http://schemas.microsoft.com/office/drawing/2014/main" id="{EFE41AB1-D5D0-4163-A4A0-25750D094C8E}"/>
               </a:ext>
             </a:extLst>
           </p:cNvPr>
@@ -7571,7 +7616,7 @@
           <p:cNvPr id="12" name="">
             <a:extLst xmlns:a="http://schemas.openxmlformats.org/drawingml/2006/main">
               <a:ext uri="{FF2B5EF4-FFF2-40B4-BE49-F238E27FC236}">
-                <a16:creationId xmlns:a16="http://schemas.microsoft.com/office/drawing/2014/main" id="{AC39112D-FBC0-498C-865E-FBAA89B2D048}"/>
+                <a16:creationId xmlns:a16="http://schemas.microsoft.com/office/drawing/2014/main" id="{0D7EA0E9-3E33-4684-A7A9-82102CD2C978}"/>
               </a:ext>
             </a:extLst>
           </p:cNvPr>
@@ -7633,7 +7678,7 @@
           <p:cNvPr id="13" name="">
             <a:extLst xmlns:a="http://schemas.openxmlformats.org/drawingml/2006/main">
               <a:ext uri="{FF2B5EF4-FFF2-40B4-BE49-F238E27FC236}">
-                <a16:creationId xmlns:a16="http://schemas.microsoft.com/office/drawing/2014/main" id="{9BA0C79B-166B-449D-AEC8-B29C810D81DA}"/>
+                <a16:creationId xmlns:a16="http://schemas.microsoft.com/office/drawing/2014/main" id="{9B1B7341-A9EC-4470-B6B9-247BC6E557F8}"/>
               </a:ext>
             </a:extLst>
           </p:cNvPr>
@@ -7664,7 +7709,7 @@
           <p:cNvPr id="14" name="">
             <a:extLst xmlns:a="http://schemas.openxmlformats.org/drawingml/2006/main">
               <a:ext uri="{FF2B5EF4-FFF2-40B4-BE49-F238E27FC236}">
-                <a16:creationId xmlns:a16="http://schemas.microsoft.com/office/drawing/2014/main" id="{DACECEFB-DD81-48A0-92E3-89CD631C706A}"/>
+                <a16:creationId xmlns:a16="http://schemas.microsoft.com/office/drawing/2014/main" id="{0ED68A9B-191F-407E-84D0-D21FB9DCDD14}"/>
               </a:ext>
             </a:extLst>
           </p:cNvPr>
@@ -7726,7 +7771,7 @@
           <p:cNvPr id="15" name="">
             <a:extLst xmlns:a="http://schemas.openxmlformats.org/drawingml/2006/main">
               <a:ext uri="{FF2B5EF4-FFF2-40B4-BE49-F238E27FC236}">
-                <a16:creationId xmlns:a16="http://schemas.microsoft.com/office/drawing/2014/main" id="{5BC822FC-678F-4701-A341-6C677D84A52E}"/>
+                <a16:creationId xmlns:a16="http://schemas.microsoft.com/office/drawing/2014/main" id="{51AE7B9D-FBE1-491F-9CAD-6D3F7C5497E3}"/>
               </a:ext>
             </a:extLst>
           </p:cNvPr>
@@ -7788,7 +7833,7 @@
           <p:cNvPr id="16" name="">
             <a:extLst xmlns:a="http://schemas.openxmlformats.org/drawingml/2006/main">
               <a:ext uri="{FF2B5EF4-FFF2-40B4-BE49-F238E27FC236}">
-                <a16:creationId xmlns:a16="http://schemas.microsoft.com/office/drawing/2014/main" id="{85B0617A-D9F1-444E-B11E-2068E52C21CC}"/>
+                <a16:creationId xmlns:a16="http://schemas.microsoft.com/office/drawing/2014/main" id="{AE1C628A-9934-46B5-AB3E-4953430D397B}"/>
               </a:ext>
             </a:extLst>
           </p:cNvPr>
@@ -7850,7 +7895,7 @@
           <p:cNvPr id="17" name="">
             <a:extLst xmlns:a="http://schemas.openxmlformats.org/drawingml/2006/main">
               <a:ext uri="{FF2B5EF4-FFF2-40B4-BE49-F238E27FC236}">
-                <a16:creationId xmlns:a16="http://schemas.microsoft.com/office/drawing/2014/main" id="{0DC5B87A-8569-472A-AAD7-8DE3987A5E04}"/>
+                <a16:creationId xmlns:a16="http://schemas.microsoft.com/office/drawing/2014/main" id="{5922FFC1-1FE1-470B-A562-1B0E1C82050D}"/>
               </a:ext>
             </a:extLst>
           </p:cNvPr>
@@ -7881,7 +7926,7 @@
           <p:cNvPr id="18" name="">
             <a:extLst xmlns:a="http://schemas.openxmlformats.org/drawingml/2006/main">
               <a:ext uri="{FF2B5EF4-FFF2-40B4-BE49-F238E27FC236}">
-                <a16:creationId xmlns:a16="http://schemas.microsoft.com/office/drawing/2014/main" id="{ED20AF2F-4DE6-4C34-9729-7E8CF55FC647}"/>
+                <a16:creationId xmlns:a16="http://schemas.microsoft.com/office/drawing/2014/main" id="{585A68B2-9C83-40A5-A9B4-32F51DE047EC}"/>
               </a:ext>
             </a:extLst>
           </p:cNvPr>
@@ -7943,7 +7988,7 @@
           <p:cNvPr id="19" name="">
             <a:extLst xmlns:a="http://schemas.openxmlformats.org/drawingml/2006/main">
               <a:ext uri="{FF2B5EF4-FFF2-40B4-BE49-F238E27FC236}">
-                <a16:creationId xmlns:a16="http://schemas.microsoft.com/office/drawing/2014/main" id="{8C8B4A9D-7AE4-4F91-9C06-038444A79B04}"/>
+                <a16:creationId xmlns:a16="http://schemas.microsoft.com/office/drawing/2014/main" id="{79E06143-882E-4F51-85FB-1617B44F81EF}"/>
               </a:ext>
             </a:extLst>
           </p:cNvPr>
@@ -8005,7 +8050,7 @@
           <p:cNvPr id="20" name="">
             <a:extLst xmlns:a="http://schemas.openxmlformats.org/drawingml/2006/main">
               <a:ext uri="{FF2B5EF4-FFF2-40B4-BE49-F238E27FC236}">
-                <a16:creationId xmlns:a16="http://schemas.microsoft.com/office/drawing/2014/main" id="{26FB53F4-D6DE-4FF4-944C-B8F6C5BF77AA}"/>
+                <a16:creationId xmlns:a16="http://schemas.microsoft.com/office/drawing/2014/main" id="{D71BC079-CEBF-4D07-965C-470C94ECE62F}"/>
               </a:ext>
             </a:extLst>
           </p:cNvPr>
@@ -8067,7 +8112,7 @@
           <p:cNvPr id="21" name="">
             <a:extLst xmlns:a="http://schemas.openxmlformats.org/drawingml/2006/main">
               <a:ext uri="{FF2B5EF4-FFF2-40B4-BE49-F238E27FC236}">
-                <a16:creationId xmlns:a16="http://schemas.microsoft.com/office/drawing/2014/main" id="{07139262-AC7E-402F-9B5B-26589665346E}"/>
+                <a16:creationId xmlns:a16="http://schemas.microsoft.com/office/drawing/2014/main" id="{C4207A3C-DD37-47C3-B455-EEEA8EEA7001}"/>
               </a:ext>
             </a:extLst>
           </p:cNvPr>
@@ -8129,7 +8174,7 @@
           <p:cNvPr id="22" name="footer-rule-14">
             <a:extLst xmlns:a="http://schemas.openxmlformats.org/drawingml/2006/main">
               <a:ext uri="{FF2B5EF4-FFF2-40B4-BE49-F238E27FC236}">
-                <a16:creationId xmlns:a16="http://schemas.microsoft.com/office/drawing/2014/main" id="{AED11EBE-9955-4981-872B-25157B9829DE}"/>
+                <a16:creationId xmlns:a16="http://schemas.microsoft.com/office/drawing/2014/main" id="{9DF98508-7B01-401B-A2B7-D187CEBC309A}"/>
               </a:ext>
             </a:extLst>
           </p:cNvPr>
@@ -8160,7 +8205,7 @@
           <p:cNvPr id="23" name="footer-label-14">
             <a:extLst xmlns:a="http://schemas.openxmlformats.org/drawingml/2006/main">
               <a:ext uri="{FF2B5EF4-FFF2-40B4-BE49-F238E27FC236}">
-                <a16:creationId xmlns:a16="http://schemas.microsoft.com/office/drawing/2014/main" id="{FE84F95A-1E92-4677-9AD5-2D0BDEC653B7}"/>
+                <a16:creationId xmlns:a16="http://schemas.microsoft.com/office/drawing/2014/main" id="{A6E5A01C-920E-4466-A7CB-D90AEDA25BCC}"/>
               </a:ext>
             </a:extLst>
           </p:cNvPr>
@@ -8222,7 +8267,7 @@
           <p:cNvPr id="24" name="footer-page-14">
             <a:extLst xmlns:a="http://schemas.openxmlformats.org/drawingml/2006/main">
               <a:ext uri="{FF2B5EF4-FFF2-40B4-BE49-F238E27FC236}">
-                <a16:creationId xmlns:a16="http://schemas.microsoft.com/office/drawing/2014/main" id="{29CC6B34-D2F2-4510-9A1E-9EDF7E5C2971}"/>
+                <a16:creationId xmlns:a16="http://schemas.microsoft.com/office/drawing/2014/main" id="{A53E5C2E-9143-47DC-9FDE-35C1292DDA65}"/>
               </a:ext>
             </a:extLst>
           </p:cNvPr>
@@ -8282,7 +8327,7 @@
     </p:spTree>
     <p:extLst>
       <p:ext uri="{BB962C8B-B14F-4D97-AF65-F5344CB8AC3E}">
-        <p14:creationId xmlns:p14="http://schemas.microsoft.com/office/powerpoint/2010/main" val="1821714290"/>
+        <p14:creationId xmlns:p14="http://schemas.microsoft.com/office/powerpoint/2010/main" val="2025024365"/>
       </p:ext>
     </p:extLst>
   </p:cSld>
@@ -8313,7 +8358,7 @@
           <p:cNvPr id="24" name="side-accent-15">
             <a:extLst xmlns:a="http://schemas.openxmlformats.org/drawingml/2006/main">
               <a:ext uri="{FF2B5EF4-FFF2-40B4-BE49-F238E27FC236}">
-                <a16:creationId xmlns:a16="http://schemas.microsoft.com/office/drawing/2014/main" id="{6512CD62-DA3A-497B-9BDC-B56E4B659C51}"/>
+                <a16:creationId xmlns:a16="http://schemas.microsoft.com/office/drawing/2014/main" id="{951DFE8C-AD56-483F-B0E9-2E1813272B79}"/>
               </a:ext>
             </a:extLst>
           </p:cNvPr>
@@ -8344,7 +8389,7 @@
           <p:cNvPr id="2" name="kicker-15">
             <a:extLst xmlns:a="http://schemas.openxmlformats.org/drawingml/2006/main">
               <a:ext uri="{FF2B5EF4-FFF2-40B4-BE49-F238E27FC236}">
-                <a16:creationId xmlns:a16="http://schemas.microsoft.com/office/drawing/2014/main" id="{C4FA4DD0-E73C-44BA-AF2B-2FA4F198D340}"/>
+                <a16:creationId xmlns:a16="http://schemas.microsoft.com/office/drawing/2014/main" id="{42027A6D-627F-47E9-9C69-11B2FF6D8ACB}"/>
               </a:ext>
             </a:extLst>
           </p:cNvPr>
@@ -8406,7 +8451,7 @@
           <p:cNvPr id="3" name="title-15">
             <a:extLst xmlns:a="http://schemas.openxmlformats.org/drawingml/2006/main">
               <a:ext uri="{FF2B5EF4-FFF2-40B4-BE49-F238E27FC236}">
-                <a16:creationId xmlns:a16="http://schemas.microsoft.com/office/drawing/2014/main" id="{F4C2F7D9-B14E-442C-9525-638AE4EDB86B}"/>
+                <a16:creationId xmlns:a16="http://schemas.microsoft.com/office/drawing/2014/main" id="{DA132E2B-B5D0-4969-8E46-2BC2C5029C98}"/>
               </a:ext>
             </a:extLst>
           </p:cNvPr>
@@ -8468,7 +8513,7 @@
           <p:cNvPr id="4" name="">
             <a:extLst xmlns:a="http://schemas.openxmlformats.org/drawingml/2006/main">
               <a:ext uri="{FF2B5EF4-FFF2-40B4-BE49-F238E27FC236}">
-                <a16:creationId xmlns:a16="http://schemas.microsoft.com/office/drawing/2014/main" id="{BC662DCF-BA20-4681-A290-E17832F0D118}"/>
+                <a16:creationId xmlns:a16="http://schemas.microsoft.com/office/drawing/2014/main" id="{75120013-5813-4342-AFC7-4BE4FAF6072D}"/>
               </a:ext>
             </a:extLst>
           </p:cNvPr>
@@ -8530,7 +8575,7 @@
           <p:cNvPr id="5" name="">
             <a:extLst xmlns:a="http://schemas.openxmlformats.org/drawingml/2006/main">
               <a:ext uri="{FF2B5EF4-FFF2-40B4-BE49-F238E27FC236}">
-                <a16:creationId xmlns:a16="http://schemas.microsoft.com/office/drawing/2014/main" id="{BDFC4F7E-1298-4EAB-8FA4-FCC66BA53C0B}"/>
+                <a16:creationId xmlns:a16="http://schemas.microsoft.com/office/drawing/2014/main" id="{91BE01FE-0A57-4054-B5F9-189705C4E3AF}"/>
               </a:ext>
             </a:extLst>
           </p:cNvPr>
@@ -8592,7 +8637,7 @@
           <p:cNvPr id="6" name="">
             <a:extLst xmlns:a="http://schemas.openxmlformats.org/drawingml/2006/main">
               <a:ext uri="{FF2B5EF4-FFF2-40B4-BE49-F238E27FC236}">
-                <a16:creationId xmlns:a16="http://schemas.microsoft.com/office/drawing/2014/main" id="{3F83A673-3A2C-4E96-9AED-3BB75CEB9E2B}"/>
+                <a16:creationId xmlns:a16="http://schemas.microsoft.com/office/drawing/2014/main" id="{750D38CF-4912-4F0E-B469-9F0703BB2E4B}"/>
               </a:ext>
             </a:extLst>
           </p:cNvPr>
@@ -8654,7 +8699,7 @@
           <p:cNvPr id="7" name="">
             <a:extLst xmlns:a="http://schemas.openxmlformats.org/drawingml/2006/main">
               <a:ext uri="{FF2B5EF4-FFF2-40B4-BE49-F238E27FC236}">
-                <a16:creationId xmlns:a16="http://schemas.microsoft.com/office/drawing/2014/main" id="{A60B7E90-6C76-40B3-A9AD-DBF31B09AE9D}"/>
+                <a16:creationId xmlns:a16="http://schemas.microsoft.com/office/drawing/2014/main" id="{7D00AA9E-1843-496B-B4FC-6A7B2E53D0FB}"/>
               </a:ext>
             </a:extLst>
           </p:cNvPr>
@@ -8685,7 +8730,7 @@
           <p:cNvPr id="8" name="">
             <a:extLst xmlns:a="http://schemas.openxmlformats.org/drawingml/2006/main">
               <a:ext uri="{FF2B5EF4-FFF2-40B4-BE49-F238E27FC236}">
-                <a16:creationId xmlns:a16="http://schemas.microsoft.com/office/drawing/2014/main" id="{67C4F8E1-4B8A-427F-B08C-76584BC40D44}"/>
+                <a16:creationId xmlns:a16="http://schemas.microsoft.com/office/drawing/2014/main" id="{17B59673-EC8F-47C5-BC43-164499498E0B}"/>
               </a:ext>
             </a:extLst>
           </p:cNvPr>
@@ -8747,7 +8792,7 @@
           <p:cNvPr id="9" name="">
             <a:extLst xmlns:a="http://schemas.openxmlformats.org/drawingml/2006/main">
               <a:ext uri="{FF2B5EF4-FFF2-40B4-BE49-F238E27FC236}">
-                <a16:creationId xmlns:a16="http://schemas.microsoft.com/office/drawing/2014/main" id="{591A5A30-7B91-467A-AB51-CFD245CF6465}"/>
+                <a16:creationId xmlns:a16="http://schemas.microsoft.com/office/drawing/2014/main" id="{B1BE50F1-D947-417F-BAF7-FB79CF8E5C5F}"/>
               </a:ext>
             </a:extLst>
           </p:cNvPr>
@@ -8809,7 +8854,7 @@
           <p:cNvPr id="10" name="">
             <a:extLst xmlns:a="http://schemas.openxmlformats.org/drawingml/2006/main">
               <a:ext uri="{FF2B5EF4-FFF2-40B4-BE49-F238E27FC236}">
-                <a16:creationId xmlns:a16="http://schemas.microsoft.com/office/drawing/2014/main" id="{B37905AC-9464-4D49-A1F3-BC6D727C46C3}"/>
+                <a16:creationId xmlns:a16="http://schemas.microsoft.com/office/drawing/2014/main" id="{FB544EC8-8AFB-4545-B1C7-E98EC0B99110}"/>
               </a:ext>
             </a:extLst>
           </p:cNvPr>
@@ -8871,7 +8916,7 @@
           <p:cNvPr id="11" name="">
             <a:extLst xmlns:a="http://schemas.openxmlformats.org/drawingml/2006/main">
               <a:ext uri="{FF2B5EF4-FFF2-40B4-BE49-F238E27FC236}">
-                <a16:creationId xmlns:a16="http://schemas.microsoft.com/office/drawing/2014/main" id="{4A9D4C13-A175-4157-8E43-D870BA3C1DD1}"/>
+                <a16:creationId xmlns:a16="http://schemas.microsoft.com/office/drawing/2014/main" id="{8E566BE2-7AFD-4F57-BA58-E999C0576F16}"/>
               </a:ext>
             </a:extLst>
           </p:cNvPr>
@@ -8902,7 +8947,7 @@
           <p:cNvPr id="12" name="">
             <a:extLst xmlns:a="http://schemas.openxmlformats.org/drawingml/2006/main">
               <a:ext uri="{FF2B5EF4-FFF2-40B4-BE49-F238E27FC236}">
-                <a16:creationId xmlns:a16="http://schemas.microsoft.com/office/drawing/2014/main" id="{0B56D607-8B26-4F68-BBA5-34667D4C1763}"/>
+                <a16:creationId xmlns:a16="http://schemas.microsoft.com/office/drawing/2014/main" id="{B2A507E9-58D6-44C1-8FD7-BD2389029EF7}"/>
               </a:ext>
             </a:extLst>
           </p:cNvPr>
@@ -8964,7 +9009,7 @@
           <p:cNvPr id="13" name="">
             <a:extLst xmlns:a="http://schemas.openxmlformats.org/drawingml/2006/main">
               <a:ext uri="{FF2B5EF4-FFF2-40B4-BE49-F238E27FC236}">
-                <a16:creationId xmlns:a16="http://schemas.microsoft.com/office/drawing/2014/main" id="{7A2C1751-70F0-45F7-ABEE-3EC99A6AD8C7}"/>
+                <a16:creationId xmlns:a16="http://schemas.microsoft.com/office/drawing/2014/main" id="{D558C347-C23A-4EEE-AFAB-2AA497B33D3E}"/>
               </a:ext>
             </a:extLst>
           </p:cNvPr>
@@ -9026,7 +9071,7 @@
           <p:cNvPr id="14" name="">
             <a:extLst xmlns:a="http://schemas.openxmlformats.org/drawingml/2006/main">
               <a:ext uri="{FF2B5EF4-FFF2-40B4-BE49-F238E27FC236}">
-                <a16:creationId xmlns:a16="http://schemas.microsoft.com/office/drawing/2014/main" id="{782291BE-3BD1-415E-A220-FB6F91208D5A}"/>
+                <a16:creationId xmlns:a16="http://schemas.microsoft.com/office/drawing/2014/main" id="{DA869A72-E7A4-4E59-ADFE-596EFC6A8FC3}"/>
               </a:ext>
             </a:extLst>
           </p:cNvPr>
@@ -9088,7 +9133,7 @@
           <p:cNvPr id="15" name="">
             <a:extLst xmlns:a="http://schemas.openxmlformats.org/drawingml/2006/main">
               <a:ext uri="{FF2B5EF4-FFF2-40B4-BE49-F238E27FC236}">
-                <a16:creationId xmlns:a16="http://schemas.microsoft.com/office/drawing/2014/main" id="{1EF4D6CA-9D74-45E4-88DE-C80C5C79766E}"/>
+                <a16:creationId xmlns:a16="http://schemas.microsoft.com/office/drawing/2014/main" id="{9ABED787-D38F-4E90-ACF0-B74AEECAF783}"/>
               </a:ext>
             </a:extLst>
           </p:cNvPr>
@@ -9119,7 +9164,7 @@
           <p:cNvPr id="16" name="">
             <a:extLst xmlns:a="http://schemas.openxmlformats.org/drawingml/2006/main">
               <a:ext uri="{FF2B5EF4-FFF2-40B4-BE49-F238E27FC236}">
-                <a16:creationId xmlns:a16="http://schemas.microsoft.com/office/drawing/2014/main" id="{D19DB9B2-FA72-4D16-87C0-570D7AAF84DB}"/>
+                <a16:creationId xmlns:a16="http://schemas.microsoft.com/office/drawing/2014/main" id="{294F6E0F-6E72-4AC6-898B-41322E6F4CD7}"/>
               </a:ext>
             </a:extLst>
           </p:cNvPr>
@@ -9181,7 +9226,7 @@
           <p:cNvPr id="17" name="">
             <a:extLst xmlns:a="http://schemas.openxmlformats.org/drawingml/2006/main">
               <a:ext uri="{FF2B5EF4-FFF2-40B4-BE49-F238E27FC236}">
-                <a16:creationId xmlns:a16="http://schemas.microsoft.com/office/drawing/2014/main" id="{4E5DDEEA-8984-4865-81EE-61582EFC20FF}"/>
+                <a16:creationId xmlns:a16="http://schemas.microsoft.com/office/drawing/2014/main" id="{C759A8F9-4AF6-453D-8F05-5E5C98E3B690}"/>
               </a:ext>
             </a:extLst>
           </p:cNvPr>
@@ -9243,7 +9288,7 @@
           <p:cNvPr id="18" name="">
             <a:extLst xmlns:a="http://schemas.openxmlformats.org/drawingml/2006/main">
               <a:ext uri="{FF2B5EF4-FFF2-40B4-BE49-F238E27FC236}">
-                <a16:creationId xmlns:a16="http://schemas.microsoft.com/office/drawing/2014/main" id="{D5E30600-C311-4054-AE40-4DFEBA1FA176}"/>
+                <a16:creationId xmlns:a16="http://schemas.microsoft.com/office/drawing/2014/main" id="{EFC58902-77BB-437B-8ECA-A77C6926E8C7}"/>
               </a:ext>
             </a:extLst>
           </p:cNvPr>
@@ -9305,7 +9350,7 @@
           <p:cNvPr id="19" name="">
             <a:extLst xmlns:a="http://schemas.openxmlformats.org/drawingml/2006/main">
               <a:ext uri="{FF2B5EF4-FFF2-40B4-BE49-F238E27FC236}">
-                <a16:creationId xmlns:a16="http://schemas.microsoft.com/office/drawing/2014/main" id="{B340433A-B160-41C9-B332-5FD23884E6AE}"/>
+                <a16:creationId xmlns:a16="http://schemas.microsoft.com/office/drawing/2014/main" id="{20E7C7E2-9064-40F9-85FA-DB2333EF8620}"/>
               </a:ext>
             </a:extLst>
           </p:cNvPr>
@@ -9338,7 +9383,7 @@
           <p:cNvPr id="20" name="">
             <a:extLst xmlns:a="http://schemas.openxmlformats.org/drawingml/2006/main">
               <a:ext uri="{FF2B5EF4-FFF2-40B4-BE49-F238E27FC236}">
-                <a16:creationId xmlns:a16="http://schemas.microsoft.com/office/drawing/2014/main" id="{4B940223-265A-4653-A0F5-B3ECF015EECF}"/>
+                <a16:creationId xmlns:a16="http://schemas.microsoft.com/office/drawing/2014/main" id="{C3455F86-865D-410E-9B14-3FFB60FDC301}"/>
               </a:ext>
             </a:extLst>
           </p:cNvPr>
@@ -9400,7 +9445,7 @@
           <p:cNvPr id="21" name="footer-rule-15">
             <a:extLst xmlns:a="http://schemas.openxmlformats.org/drawingml/2006/main">
               <a:ext uri="{FF2B5EF4-FFF2-40B4-BE49-F238E27FC236}">
-                <a16:creationId xmlns:a16="http://schemas.microsoft.com/office/drawing/2014/main" id="{1FA6C614-447E-4C10-A77A-7D5704F6E6A6}"/>
+                <a16:creationId xmlns:a16="http://schemas.microsoft.com/office/drawing/2014/main" id="{C047B2CD-B91C-42D3-9D4A-6EE6A1B3B470}"/>
               </a:ext>
             </a:extLst>
           </p:cNvPr>
@@ -9431,7 +9476,7 @@
           <p:cNvPr id="22" name="footer-label-15">
             <a:extLst xmlns:a="http://schemas.openxmlformats.org/drawingml/2006/main">
               <a:ext uri="{FF2B5EF4-FFF2-40B4-BE49-F238E27FC236}">
-                <a16:creationId xmlns:a16="http://schemas.microsoft.com/office/drawing/2014/main" id="{7C1725D0-7611-4899-A461-D34FDDC6A045}"/>
+                <a16:creationId xmlns:a16="http://schemas.microsoft.com/office/drawing/2014/main" id="{B3C8C34A-1668-4D13-8B41-D7403FED379D}"/>
               </a:ext>
             </a:extLst>
           </p:cNvPr>
@@ -9493,7 +9538,7 @@
           <p:cNvPr id="23" name="footer-page-15">
             <a:extLst xmlns:a="http://schemas.openxmlformats.org/drawingml/2006/main">
               <a:ext uri="{FF2B5EF4-FFF2-40B4-BE49-F238E27FC236}">
-                <a16:creationId xmlns:a16="http://schemas.microsoft.com/office/drawing/2014/main" id="{AA610044-CCB9-4E06-8691-212F349567DF}"/>
+                <a16:creationId xmlns:a16="http://schemas.microsoft.com/office/drawing/2014/main" id="{6B4DC357-9C32-4F54-856C-613D93C0B610}"/>
               </a:ext>
             </a:extLst>
           </p:cNvPr>
@@ -9553,7 +9598,7 @@
     </p:spTree>
     <p:extLst>
       <p:ext uri="{BB962C8B-B14F-4D97-AF65-F5344CB8AC3E}">
-        <p14:creationId xmlns:p14="http://schemas.microsoft.com/office/powerpoint/2010/main" val="1451021541"/>
+        <p14:creationId xmlns:p14="http://schemas.microsoft.com/office/powerpoint/2010/main" val="1971429130"/>
       </p:ext>
     </p:extLst>
   </p:cSld>
@@ -9584,7 +9629,7 @@
           <p:cNvPr id="21" name="side-accent-16">
             <a:extLst xmlns:a="http://schemas.openxmlformats.org/drawingml/2006/main">
               <a:ext uri="{FF2B5EF4-FFF2-40B4-BE49-F238E27FC236}">
-                <a16:creationId xmlns:a16="http://schemas.microsoft.com/office/drawing/2014/main" id="{850AE852-DB25-47B1-8E8D-25541883F8FC}"/>
+                <a16:creationId xmlns:a16="http://schemas.microsoft.com/office/drawing/2014/main" id="{AD362A5B-48D6-4EE5-8712-3331B44CB564}"/>
               </a:ext>
             </a:extLst>
           </p:cNvPr>
@@ -9615,7 +9660,7 @@
           <p:cNvPr id="2" name="kicker-16">
             <a:extLst xmlns:a="http://schemas.openxmlformats.org/drawingml/2006/main">
               <a:ext uri="{FF2B5EF4-FFF2-40B4-BE49-F238E27FC236}">
-                <a16:creationId xmlns:a16="http://schemas.microsoft.com/office/drawing/2014/main" id="{520432CC-5409-48B9-9CB1-6E65F090B9CE}"/>
+                <a16:creationId xmlns:a16="http://schemas.microsoft.com/office/drawing/2014/main" id="{69C650D3-39AA-48F0-A435-AB9466679CA9}"/>
               </a:ext>
             </a:extLst>
           </p:cNvPr>
@@ -9677,7 +9722,7 @@
           <p:cNvPr id="3" name="title-16">
             <a:extLst xmlns:a="http://schemas.openxmlformats.org/drawingml/2006/main">
               <a:ext uri="{FF2B5EF4-FFF2-40B4-BE49-F238E27FC236}">
-                <a16:creationId xmlns:a16="http://schemas.microsoft.com/office/drawing/2014/main" id="{0A3D7B22-C3EC-42AD-9D9F-8D1482D794BC}"/>
+                <a16:creationId xmlns:a16="http://schemas.microsoft.com/office/drawing/2014/main" id="{3F041E87-56ED-43CA-9DBC-9C1B87D9B416}"/>
               </a:ext>
             </a:extLst>
           </p:cNvPr>
@@ -9739,7 +9784,7 @@
           <p:cNvPr id="4" name="">
             <a:extLst xmlns:a="http://schemas.openxmlformats.org/drawingml/2006/main">
               <a:ext uri="{FF2B5EF4-FFF2-40B4-BE49-F238E27FC236}">
-                <a16:creationId xmlns:a16="http://schemas.microsoft.com/office/drawing/2014/main" id="{71EB387C-006A-475B-BFD7-56B727FCF0B5}"/>
+                <a16:creationId xmlns:a16="http://schemas.microsoft.com/office/drawing/2014/main" id="{E1D269BF-50B4-4E60-8C76-0FE1913C3F32}"/>
               </a:ext>
             </a:extLst>
           </p:cNvPr>
@@ -9770,7 +9815,7 @@
           <p:cNvPr id="5" name="">
             <a:extLst xmlns:a="http://schemas.openxmlformats.org/drawingml/2006/main">
               <a:ext uri="{FF2B5EF4-FFF2-40B4-BE49-F238E27FC236}">
-                <a16:creationId xmlns:a16="http://schemas.microsoft.com/office/drawing/2014/main" id="{E07D8F52-E103-415B-A962-F63D9BAB2165}"/>
+                <a16:creationId xmlns:a16="http://schemas.microsoft.com/office/drawing/2014/main" id="{89F9DEF2-59B9-415A-9E8A-B4AD62733AE7}"/>
               </a:ext>
             </a:extLst>
           </p:cNvPr>
@@ -9801,7 +9846,7 @@
           <p:cNvPr id="6" name="">
             <a:extLst xmlns:a="http://schemas.openxmlformats.org/drawingml/2006/main">
               <a:ext uri="{FF2B5EF4-FFF2-40B4-BE49-F238E27FC236}">
-                <a16:creationId xmlns:a16="http://schemas.microsoft.com/office/drawing/2014/main" id="{0A7C9A03-8897-4B36-AAA2-2ED327D75D9F}"/>
+                <a16:creationId xmlns:a16="http://schemas.microsoft.com/office/drawing/2014/main" id="{8A5322A2-DFB2-47D9-A366-167D58D83449}"/>
               </a:ext>
             </a:extLst>
           </p:cNvPr>
@@ -9863,7 +9908,7 @@
           <p:cNvPr id="7" name="">
             <a:extLst xmlns:a="http://schemas.openxmlformats.org/drawingml/2006/main">
               <a:ext uri="{FF2B5EF4-FFF2-40B4-BE49-F238E27FC236}">
-                <a16:creationId xmlns:a16="http://schemas.microsoft.com/office/drawing/2014/main" id="{3F09AC8C-B1C5-4931-8193-F55A4C884F5D}"/>
+                <a16:creationId xmlns:a16="http://schemas.microsoft.com/office/drawing/2014/main" id="{1801AFCC-073F-4366-B534-0B6CFE78A876}"/>
               </a:ext>
             </a:extLst>
           </p:cNvPr>
@@ -9925,7 +9970,7 @@
           <p:cNvPr id="8" name="">
             <a:extLst xmlns:a="http://schemas.openxmlformats.org/drawingml/2006/main">
               <a:ext uri="{FF2B5EF4-FFF2-40B4-BE49-F238E27FC236}">
-                <a16:creationId xmlns:a16="http://schemas.microsoft.com/office/drawing/2014/main" id="{33E29236-70C6-4A40-B590-360C29EC7DF1}"/>
+                <a16:creationId xmlns:a16="http://schemas.microsoft.com/office/drawing/2014/main" id="{72D02833-6DCE-4D3D-8749-271DE431ACA6}"/>
               </a:ext>
             </a:extLst>
           </p:cNvPr>
@@ -9987,7 +10032,7 @@
           <p:cNvPr id="9" name="">
             <a:extLst xmlns:a="http://schemas.openxmlformats.org/drawingml/2006/main">
               <a:ext uri="{FF2B5EF4-FFF2-40B4-BE49-F238E27FC236}">
-                <a16:creationId xmlns:a16="http://schemas.microsoft.com/office/drawing/2014/main" id="{4472C71F-6BCC-4631-94DC-4E55FDF42E29}"/>
+                <a16:creationId xmlns:a16="http://schemas.microsoft.com/office/drawing/2014/main" id="{D611E6E5-F96D-47A3-B963-BC65E840CD01}"/>
               </a:ext>
             </a:extLst>
           </p:cNvPr>
@@ -10018,7 +10063,7 @@
           <p:cNvPr id="10" name="">
             <a:extLst xmlns:a="http://schemas.openxmlformats.org/drawingml/2006/main">
               <a:ext uri="{FF2B5EF4-FFF2-40B4-BE49-F238E27FC236}">
-                <a16:creationId xmlns:a16="http://schemas.microsoft.com/office/drawing/2014/main" id="{5FE60B9B-CD3E-486D-9DD8-84356C240A06}"/>
+                <a16:creationId xmlns:a16="http://schemas.microsoft.com/office/drawing/2014/main" id="{57D580A5-129C-4B46-AD65-4941C675986A}"/>
               </a:ext>
             </a:extLst>
           </p:cNvPr>
@@ -10080,7 +10125,7 @@
           <p:cNvPr id="11" name="">
             <a:extLst xmlns:a="http://schemas.openxmlformats.org/drawingml/2006/main">
               <a:ext uri="{FF2B5EF4-FFF2-40B4-BE49-F238E27FC236}">
-                <a16:creationId xmlns:a16="http://schemas.microsoft.com/office/drawing/2014/main" id="{466CA1F2-113C-4BEF-8CEC-3F10795727F4}"/>
+                <a16:creationId xmlns:a16="http://schemas.microsoft.com/office/drawing/2014/main" id="{CAA37C42-4073-4AFE-8639-B38AD1A86204}"/>
               </a:ext>
             </a:extLst>
           </p:cNvPr>
@@ -10142,7 +10187,7 @@
           <p:cNvPr id="12" name="">
             <a:extLst xmlns:a="http://schemas.openxmlformats.org/drawingml/2006/main">
               <a:ext uri="{FF2B5EF4-FFF2-40B4-BE49-F238E27FC236}">
-                <a16:creationId xmlns:a16="http://schemas.microsoft.com/office/drawing/2014/main" id="{961FC929-741C-44E5-B1C8-D93B806C5741}"/>
+                <a16:creationId xmlns:a16="http://schemas.microsoft.com/office/drawing/2014/main" id="{189D5CC5-FB10-498A-9873-F66EE9365974}"/>
               </a:ext>
             </a:extLst>
           </p:cNvPr>
@@ -10204,7 +10249,7 @@
           <p:cNvPr id="13" name="">
             <a:extLst xmlns:a="http://schemas.openxmlformats.org/drawingml/2006/main">
               <a:ext uri="{FF2B5EF4-FFF2-40B4-BE49-F238E27FC236}">
-                <a16:creationId xmlns:a16="http://schemas.microsoft.com/office/drawing/2014/main" id="{F50D6E6A-EC0E-4E7B-B34E-1BF0E761AC6C}"/>
+                <a16:creationId xmlns:a16="http://schemas.microsoft.com/office/drawing/2014/main" id="{FD71A4CA-2F6A-4021-BCD9-88E71243F139}"/>
               </a:ext>
             </a:extLst>
           </p:cNvPr>
@@ -10235,7 +10280,7 @@
           <p:cNvPr id="14" name="">
             <a:extLst xmlns:a="http://schemas.openxmlformats.org/drawingml/2006/main">
               <a:ext uri="{FF2B5EF4-FFF2-40B4-BE49-F238E27FC236}">
-                <a16:creationId xmlns:a16="http://schemas.microsoft.com/office/drawing/2014/main" id="{3738067A-D88F-4F38-8677-B74E2E4205CA}"/>
+                <a16:creationId xmlns:a16="http://schemas.microsoft.com/office/drawing/2014/main" id="{803294CC-A47F-47CD-B4E5-499944D92FC8}"/>
               </a:ext>
             </a:extLst>
           </p:cNvPr>
@@ -10297,7 +10342,7 @@
           <p:cNvPr id="15" name="">
             <a:extLst xmlns:a="http://schemas.openxmlformats.org/drawingml/2006/main">
               <a:ext uri="{FF2B5EF4-FFF2-40B4-BE49-F238E27FC236}">
-                <a16:creationId xmlns:a16="http://schemas.microsoft.com/office/drawing/2014/main" id="{724FE272-32CC-4A7D-9D54-71D9DC62D975}"/>
+                <a16:creationId xmlns:a16="http://schemas.microsoft.com/office/drawing/2014/main" id="{DAB54234-A8A8-4984-A149-4CD146199B69}"/>
               </a:ext>
             </a:extLst>
           </p:cNvPr>
@@ -10359,7 +10404,7 @@
           <p:cNvPr id="16" name="">
             <a:extLst xmlns:a="http://schemas.openxmlformats.org/drawingml/2006/main">
               <a:ext uri="{FF2B5EF4-FFF2-40B4-BE49-F238E27FC236}">
-                <a16:creationId xmlns:a16="http://schemas.microsoft.com/office/drawing/2014/main" id="{860A2DA3-E713-4ADF-B85E-8875EB9F6005}"/>
+                <a16:creationId xmlns:a16="http://schemas.microsoft.com/office/drawing/2014/main" id="{F3C3B7DB-5B8D-4EA0-9BF3-1049749C622C}"/>
               </a:ext>
             </a:extLst>
           </p:cNvPr>
@@ -10421,7 +10466,7 @@
           <p:cNvPr id="17" name="">
             <a:extLst xmlns:a="http://schemas.openxmlformats.org/drawingml/2006/main">
               <a:ext uri="{FF2B5EF4-FFF2-40B4-BE49-F238E27FC236}">
-                <a16:creationId xmlns:a16="http://schemas.microsoft.com/office/drawing/2014/main" id="{01D3382A-E5B8-4968-B9ED-3A8DE55C9ECC}"/>
+                <a16:creationId xmlns:a16="http://schemas.microsoft.com/office/drawing/2014/main" id="{9F26090E-AEF9-4DAF-9151-D04C3AB760C0}"/>
               </a:ext>
             </a:extLst>
           </p:cNvPr>
@@ -10483,7 +10528,7 @@
           <p:cNvPr id="18" name="footer-rule-16">
             <a:extLst xmlns:a="http://schemas.openxmlformats.org/drawingml/2006/main">
               <a:ext uri="{FF2B5EF4-FFF2-40B4-BE49-F238E27FC236}">
-                <a16:creationId xmlns:a16="http://schemas.microsoft.com/office/drawing/2014/main" id="{38921732-F854-4DA4-8F05-A834110B881D}"/>
+                <a16:creationId xmlns:a16="http://schemas.microsoft.com/office/drawing/2014/main" id="{8DEFA011-89FF-41C2-B937-52F66B26B03B}"/>
               </a:ext>
             </a:extLst>
           </p:cNvPr>
@@ -10514,7 +10559,7 @@
           <p:cNvPr id="19" name="footer-label-16">
             <a:extLst xmlns:a="http://schemas.openxmlformats.org/drawingml/2006/main">
               <a:ext uri="{FF2B5EF4-FFF2-40B4-BE49-F238E27FC236}">
-                <a16:creationId xmlns:a16="http://schemas.microsoft.com/office/drawing/2014/main" id="{49732D90-0661-4DC0-A406-4776C03E313A}"/>
+                <a16:creationId xmlns:a16="http://schemas.microsoft.com/office/drawing/2014/main" id="{43068CD7-D981-4302-AEE3-716B0A02907A}"/>
               </a:ext>
             </a:extLst>
           </p:cNvPr>
@@ -10576,7 +10621,7 @@
           <p:cNvPr id="20" name="footer-page-16">
             <a:extLst xmlns:a="http://schemas.openxmlformats.org/drawingml/2006/main">
               <a:ext uri="{FF2B5EF4-FFF2-40B4-BE49-F238E27FC236}">
-                <a16:creationId xmlns:a16="http://schemas.microsoft.com/office/drawing/2014/main" id="{D1FD73CD-193E-4559-A756-260A984F978A}"/>
+                <a16:creationId xmlns:a16="http://schemas.microsoft.com/office/drawing/2014/main" id="{8743F296-8AD3-40EC-AEC2-D61F898DB88D}"/>
               </a:ext>
             </a:extLst>
           </p:cNvPr>
@@ -10636,7 +10681,7 @@
     </p:spTree>
     <p:extLst>
       <p:ext uri="{BB962C8B-B14F-4D97-AF65-F5344CB8AC3E}">
-        <p14:creationId xmlns:p14="http://schemas.microsoft.com/office/powerpoint/2010/main" val="989540095"/>
+        <p14:creationId xmlns:p14="http://schemas.microsoft.com/office/powerpoint/2010/main" val="608655186"/>
       </p:ext>
     </p:extLst>
   </p:cSld>
@@ -10667,7 +10712,7 @@
           <p:cNvPr id="22" name="side-accent-17">
             <a:extLst xmlns:a="http://schemas.openxmlformats.org/drawingml/2006/main">
               <a:ext uri="{FF2B5EF4-FFF2-40B4-BE49-F238E27FC236}">
-                <a16:creationId xmlns:a16="http://schemas.microsoft.com/office/drawing/2014/main" id="{5874CDC2-2814-49F5-B1CC-0CDCA4EACB3F}"/>
+                <a16:creationId xmlns:a16="http://schemas.microsoft.com/office/drawing/2014/main" id="{17855AA0-67E0-4861-8B1E-4846C23D07CB}"/>
               </a:ext>
             </a:extLst>
           </p:cNvPr>
@@ -10698,7 +10743,7 @@
           <p:cNvPr id="2" name="kicker-17">
             <a:extLst xmlns:a="http://schemas.openxmlformats.org/drawingml/2006/main">
               <a:ext uri="{FF2B5EF4-FFF2-40B4-BE49-F238E27FC236}">
-                <a16:creationId xmlns:a16="http://schemas.microsoft.com/office/drawing/2014/main" id="{9BA6637E-131E-4CFD-81E9-68D6C9A3C3DB}"/>
+                <a16:creationId xmlns:a16="http://schemas.microsoft.com/office/drawing/2014/main" id="{DFEDB746-F853-4B9A-8E82-0FD6BAAE26EA}"/>
               </a:ext>
             </a:extLst>
           </p:cNvPr>
@@ -10760,7 +10805,7 @@
           <p:cNvPr id="3" name="title-17">
             <a:extLst xmlns:a="http://schemas.openxmlformats.org/drawingml/2006/main">
               <a:ext uri="{FF2B5EF4-FFF2-40B4-BE49-F238E27FC236}">
-                <a16:creationId xmlns:a16="http://schemas.microsoft.com/office/drawing/2014/main" id="{91AF98D1-1379-4BF1-852C-936277DFB6BD}"/>
+                <a16:creationId xmlns:a16="http://schemas.microsoft.com/office/drawing/2014/main" id="{42630506-3AF0-4D9E-BF9A-2F0346D782B8}"/>
               </a:ext>
             </a:extLst>
           </p:cNvPr>
@@ -10822,7 +10867,7 @@
           <p:cNvPr id="4" name="">
             <a:extLst xmlns:a="http://schemas.openxmlformats.org/drawingml/2006/main">
               <a:ext uri="{FF2B5EF4-FFF2-40B4-BE49-F238E27FC236}">
-                <a16:creationId xmlns:a16="http://schemas.microsoft.com/office/drawing/2014/main" id="{F5A3D44E-61D7-4B1A-A92C-A973D2ECD6F5}"/>
+                <a16:creationId xmlns:a16="http://schemas.microsoft.com/office/drawing/2014/main" id="{59D6C8BF-0C27-47DC-A0AB-BD7E30AEC7C7}"/>
               </a:ext>
             </a:extLst>
           </p:cNvPr>
@@ -10884,7 +10929,7 @@
           <p:cNvPr id="5" name="">
             <a:extLst xmlns:a="http://schemas.openxmlformats.org/drawingml/2006/main">
               <a:ext uri="{FF2B5EF4-FFF2-40B4-BE49-F238E27FC236}">
-                <a16:creationId xmlns:a16="http://schemas.microsoft.com/office/drawing/2014/main" id="{6D8A5629-B873-4314-97F0-F5F1534F574C}"/>
+                <a16:creationId xmlns:a16="http://schemas.microsoft.com/office/drawing/2014/main" id="{1083114C-B584-47C2-A6AB-DEA0DD53B0B7}"/>
               </a:ext>
             </a:extLst>
           </p:cNvPr>
@@ -10915,7 +10960,7 @@
           <p:cNvPr id="6" name="">
             <a:extLst xmlns:a="http://schemas.openxmlformats.org/drawingml/2006/main">
               <a:ext uri="{FF2B5EF4-FFF2-40B4-BE49-F238E27FC236}">
-                <a16:creationId xmlns:a16="http://schemas.microsoft.com/office/drawing/2014/main" id="{C687BA64-C40E-43EC-BE4E-AD881FC4B138}"/>
+                <a16:creationId xmlns:a16="http://schemas.microsoft.com/office/drawing/2014/main" id="{74457043-7E3B-49A5-BA76-507038F70C45}"/>
               </a:ext>
             </a:extLst>
           </p:cNvPr>
@@ -10977,7 +11022,7 @@
           <p:cNvPr id="7" name="">
             <a:extLst xmlns:a="http://schemas.openxmlformats.org/drawingml/2006/main">
               <a:ext uri="{FF2B5EF4-FFF2-40B4-BE49-F238E27FC236}">
-                <a16:creationId xmlns:a16="http://schemas.microsoft.com/office/drawing/2014/main" id="{25D48545-A482-43E5-AB4D-86DB5FB4CC4D}"/>
+                <a16:creationId xmlns:a16="http://schemas.microsoft.com/office/drawing/2014/main" id="{E6922D69-0F12-42C3-B117-C5241C9BB6EC}"/>
               </a:ext>
             </a:extLst>
           </p:cNvPr>
@@ -11039,7 +11084,7 @@
           <p:cNvPr id="8" name="">
             <a:extLst xmlns:a="http://schemas.openxmlformats.org/drawingml/2006/main">
               <a:ext uri="{FF2B5EF4-FFF2-40B4-BE49-F238E27FC236}">
-                <a16:creationId xmlns:a16="http://schemas.microsoft.com/office/drawing/2014/main" id="{EF083304-588F-44AF-9FF3-455709829123}"/>
+                <a16:creationId xmlns:a16="http://schemas.microsoft.com/office/drawing/2014/main" id="{52FE6E2A-C411-4220-B2F1-B348356584E8}"/>
               </a:ext>
             </a:extLst>
           </p:cNvPr>
@@ -11070,7 +11115,7 @@
           <p:cNvPr id="9" name="">
             <a:extLst xmlns:a="http://schemas.openxmlformats.org/drawingml/2006/main">
               <a:ext uri="{FF2B5EF4-FFF2-40B4-BE49-F238E27FC236}">
-                <a16:creationId xmlns:a16="http://schemas.microsoft.com/office/drawing/2014/main" id="{62112760-AFB7-4768-AE19-CBBD19C5B413}"/>
+                <a16:creationId xmlns:a16="http://schemas.microsoft.com/office/drawing/2014/main" id="{63FF2025-3C1D-4533-B15D-53ADBB8D14DC}"/>
               </a:ext>
             </a:extLst>
           </p:cNvPr>
@@ -11132,7 +11177,7 @@
           <p:cNvPr id="10" name="">
             <a:extLst xmlns:a="http://schemas.openxmlformats.org/drawingml/2006/main">
               <a:ext uri="{FF2B5EF4-FFF2-40B4-BE49-F238E27FC236}">
-                <a16:creationId xmlns:a16="http://schemas.microsoft.com/office/drawing/2014/main" id="{B6FB4668-BB53-4312-8B2D-F23811C09D4D}"/>
+                <a16:creationId xmlns:a16="http://schemas.microsoft.com/office/drawing/2014/main" id="{F54F6D3F-AE9A-48B6-873A-C6D8A721E9E7}"/>
               </a:ext>
             </a:extLst>
           </p:cNvPr>
@@ -11194,7 +11239,7 @@
           <p:cNvPr id="11" name="">
             <a:extLst xmlns:a="http://schemas.openxmlformats.org/drawingml/2006/main">
               <a:ext uri="{FF2B5EF4-FFF2-40B4-BE49-F238E27FC236}">
-                <a16:creationId xmlns:a16="http://schemas.microsoft.com/office/drawing/2014/main" id="{2B6C57FB-A908-45F8-B8EB-0B75C1694486}"/>
+                <a16:creationId xmlns:a16="http://schemas.microsoft.com/office/drawing/2014/main" id="{450BFB19-8F9F-4502-A1B7-26307F7F72CD}"/>
               </a:ext>
             </a:extLst>
           </p:cNvPr>
@@ -11225,7 +11270,7 @@
           <p:cNvPr id="12" name="">
             <a:extLst xmlns:a="http://schemas.openxmlformats.org/drawingml/2006/main">
               <a:ext uri="{FF2B5EF4-FFF2-40B4-BE49-F238E27FC236}">
-                <a16:creationId xmlns:a16="http://schemas.microsoft.com/office/drawing/2014/main" id="{1CA97E19-7689-4189-AEF3-B974624A3826}"/>
+                <a16:creationId xmlns:a16="http://schemas.microsoft.com/office/drawing/2014/main" id="{788E892A-BFA7-459C-947B-7E68BF6F2C89}"/>
               </a:ext>
             </a:extLst>
           </p:cNvPr>
@@ -11287,7 +11332,7 @@
           <p:cNvPr id="13" name="">
             <a:extLst xmlns:a="http://schemas.openxmlformats.org/drawingml/2006/main">
               <a:ext uri="{FF2B5EF4-FFF2-40B4-BE49-F238E27FC236}">
-                <a16:creationId xmlns:a16="http://schemas.microsoft.com/office/drawing/2014/main" id="{A13BD32A-8B80-44AA-9283-90E8784C23ED}"/>
+                <a16:creationId xmlns:a16="http://schemas.microsoft.com/office/drawing/2014/main" id="{4D9FA242-427B-4FF4-9C53-82D0C5D1512A}"/>
               </a:ext>
             </a:extLst>
           </p:cNvPr>
@@ -11349,7 +11394,7 @@
           <p:cNvPr id="14" name="">
             <a:extLst xmlns:a="http://schemas.openxmlformats.org/drawingml/2006/main">
               <a:ext uri="{FF2B5EF4-FFF2-40B4-BE49-F238E27FC236}">
-                <a16:creationId xmlns:a16="http://schemas.microsoft.com/office/drawing/2014/main" id="{38756910-961B-49BF-B25F-E1BAEBC2F84F}"/>
+                <a16:creationId xmlns:a16="http://schemas.microsoft.com/office/drawing/2014/main" id="{2208AD32-167E-4BFA-83B3-CE72B38C3C9D}"/>
               </a:ext>
             </a:extLst>
           </p:cNvPr>
@@ -11380,7 +11425,7 @@
           <p:cNvPr id="15" name="">
             <a:extLst xmlns:a="http://schemas.openxmlformats.org/drawingml/2006/main">
               <a:ext uri="{FF2B5EF4-FFF2-40B4-BE49-F238E27FC236}">
-                <a16:creationId xmlns:a16="http://schemas.microsoft.com/office/drawing/2014/main" id="{14A7BF4E-BBD4-40F4-9E81-7BFF07733C7C}"/>
+                <a16:creationId xmlns:a16="http://schemas.microsoft.com/office/drawing/2014/main" id="{4B7A1ED9-E42D-4E36-8243-90B5EB1BD44E}"/>
               </a:ext>
             </a:extLst>
           </p:cNvPr>
@@ -11442,7 +11487,7 @@
           <p:cNvPr id="16" name="">
             <a:extLst xmlns:a="http://schemas.openxmlformats.org/drawingml/2006/main">
               <a:ext uri="{FF2B5EF4-FFF2-40B4-BE49-F238E27FC236}">
-                <a16:creationId xmlns:a16="http://schemas.microsoft.com/office/drawing/2014/main" id="{0D79197D-9D19-4B1E-AE3B-59BAA4D9889E}"/>
+                <a16:creationId xmlns:a16="http://schemas.microsoft.com/office/drawing/2014/main" id="{321BDDA5-7E7C-4B7D-A8AD-77B6D7FC65E5}"/>
               </a:ext>
             </a:extLst>
           </p:cNvPr>
@@ -11504,7 +11549,7 @@
           <p:cNvPr id="17" name="">
             <a:extLst xmlns:a="http://schemas.openxmlformats.org/drawingml/2006/main">
               <a:ext uri="{FF2B5EF4-FFF2-40B4-BE49-F238E27FC236}">
-                <a16:creationId xmlns:a16="http://schemas.microsoft.com/office/drawing/2014/main" id="{92BC49A0-3D11-4A0A-B584-EDD768004B0B}"/>
+                <a16:creationId xmlns:a16="http://schemas.microsoft.com/office/drawing/2014/main" id="{FF65892D-474B-4311-9A86-368EF6AAA8AD}"/>
               </a:ext>
             </a:extLst>
           </p:cNvPr>
@@ -11537,7 +11582,7 @@
           <p:cNvPr id="18" name="">
             <a:extLst xmlns:a="http://schemas.openxmlformats.org/drawingml/2006/main">
               <a:ext uri="{FF2B5EF4-FFF2-40B4-BE49-F238E27FC236}">
-                <a16:creationId xmlns:a16="http://schemas.microsoft.com/office/drawing/2014/main" id="{F663B496-0C34-444B-834B-FFEC09172141}"/>
+                <a16:creationId xmlns:a16="http://schemas.microsoft.com/office/drawing/2014/main" id="{B9634E42-51CB-44E0-87FB-A052CC221A45}"/>
               </a:ext>
             </a:extLst>
           </p:cNvPr>
@@ -11599,7 +11644,7 @@
           <p:cNvPr id="19" name="footer-rule-17">
             <a:extLst xmlns:a="http://schemas.openxmlformats.org/drawingml/2006/main">
               <a:ext uri="{FF2B5EF4-FFF2-40B4-BE49-F238E27FC236}">
-                <a16:creationId xmlns:a16="http://schemas.microsoft.com/office/drawing/2014/main" id="{751A410C-7CC7-4EB3-91DF-D5E5C635D944}"/>
+                <a16:creationId xmlns:a16="http://schemas.microsoft.com/office/drawing/2014/main" id="{7D68B00D-EEB6-4FB8-AFDE-0EEAF5A080EC}"/>
               </a:ext>
             </a:extLst>
           </p:cNvPr>
@@ -11630,7 +11675,7 @@
           <p:cNvPr id="20" name="footer-label-17">
             <a:extLst xmlns:a="http://schemas.openxmlformats.org/drawingml/2006/main">
               <a:ext uri="{FF2B5EF4-FFF2-40B4-BE49-F238E27FC236}">
-                <a16:creationId xmlns:a16="http://schemas.microsoft.com/office/drawing/2014/main" id="{4D07DC89-3FB3-4285-85CE-0BFCA0F7B237}"/>
+                <a16:creationId xmlns:a16="http://schemas.microsoft.com/office/drawing/2014/main" id="{C571D35C-2717-4B93-A6EF-EBE3E24F1ADD}"/>
               </a:ext>
             </a:extLst>
           </p:cNvPr>
@@ -11692,7 +11737,7 @@
           <p:cNvPr id="21" name="footer-page-17">
             <a:extLst xmlns:a="http://schemas.openxmlformats.org/drawingml/2006/main">
               <a:ext uri="{FF2B5EF4-FFF2-40B4-BE49-F238E27FC236}">
-                <a16:creationId xmlns:a16="http://schemas.microsoft.com/office/drawing/2014/main" id="{70580EDE-6A68-4C1F-97D3-663D30EF8EE4}"/>
+                <a16:creationId xmlns:a16="http://schemas.microsoft.com/office/drawing/2014/main" id="{FB09646B-FADB-42F9-9556-6F595D7563C2}"/>
               </a:ext>
             </a:extLst>
           </p:cNvPr>
@@ -11752,7 +11797,7 @@
     </p:spTree>
     <p:extLst>
       <p:ext uri="{BB962C8B-B14F-4D97-AF65-F5344CB8AC3E}">
-        <p14:creationId xmlns:p14="http://schemas.microsoft.com/office/powerpoint/2010/main" val="987645612"/>
+        <p14:creationId xmlns:p14="http://schemas.microsoft.com/office/powerpoint/2010/main" val="1738664811"/>
       </p:ext>
     </p:extLst>
   </p:cSld>
@@ -11783,7 +11828,7 @@
           <p:cNvPr id="25" name="side-accent-18">
             <a:extLst xmlns:a="http://schemas.openxmlformats.org/drawingml/2006/main">
               <a:ext uri="{FF2B5EF4-FFF2-40B4-BE49-F238E27FC236}">
-                <a16:creationId xmlns:a16="http://schemas.microsoft.com/office/drawing/2014/main" id="{4DFEB07B-B090-4887-99CB-6CF07481D226}"/>
+                <a16:creationId xmlns:a16="http://schemas.microsoft.com/office/drawing/2014/main" id="{D75023DD-328E-4523-883D-6532E2358BD8}"/>
               </a:ext>
             </a:extLst>
           </p:cNvPr>
@@ -11814,7 +11859,7 @@
           <p:cNvPr id="2" name="kicker-18">
             <a:extLst xmlns:a="http://schemas.openxmlformats.org/drawingml/2006/main">
               <a:ext uri="{FF2B5EF4-FFF2-40B4-BE49-F238E27FC236}">
-                <a16:creationId xmlns:a16="http://schemas.microsoft.com/office/drawing/2014/main" id="{BBC533D7-F4B8-4ADB-BDF4-DB850003116C}"/>
+                <a16:creationId xmlns:a16="http://schemas.microsoft.com/office/drawing/2014/main" id="{1E1BA783-C435-4F2C-8246-86154503CD9A}"/>
               </a:ext>
             </a:extLst>
           </p:cNvPr>
@@ -11876,7 +11921,7 @@
           <p:cNvPr id="3" name="title-18">
             <a:extLst xmlns:a="http://schemas.openxmlformats.org/drawingml/2006/main">
               <a:ext uri="{FF2B5EF4-FFF2-40B4-BE49-F238E27FC236}">
-                <a16:creationId xmlns:a16="http://schemas.microsoft.com/office/drawing/2014/main" id="{62662B87-5D1E-4DA2-99DB-B6997E18BFFA}"/>
+                <a16:creationId xmlns:a16="http://schemas.microsoft.com/office/drawing/2014/main" id="{D7B23558-054B-4CAD-B8B3-8D80EE32A3E6}"/>
               </a:ext>
             </a:extLst>
           </p:cNvPr>
@@ -11938,7 +11983,7 @@
           <p:cNvPr id="4" name="">
             <a:extLst xmlns:a="http://schemas.openxmlformats.org/drawingml/2006/main">
               <a:ext uri="{FF2B5EF4-FFF2-40B4-BE49-F238E27FC236}">
-                <a16:creationId xmlns:a16="http://schemas.microsoft.com/office/drawing/2014/main" id="{716C54B0-2DF9-4696-819E-ED96D0515A9B}"/>
+                <a16:creationId xmlns:a16="http://schemas.microsoft.com/office/drawing/2014/main" id="{F19A05A3-F0A9-4733-A1C2-0375AADBB801}"/>
               </a:ext>
             </a:extLst>
           </p:cNvPr>
@@ -12000,7 +12045,7 @@
           <p:cNvPr id="5" name="">
             <a:extLst xmlns:a="http://schemas.openxmlformats.org/drawingml/2006/main">
               <a:ext uri="{FF2B5EF4-FFF2-40B4-BE49-F238E27FC236}">
-                <a16:creationId xmlns:a16="http://schemas.microsoft.com/office/drawing/2014/main" id="{E9D0DFA6-E36B-4BA6-A379-324CB71E38B4}"/>
+                <a16:creationId xmlns:a16="http://schemas.microsoft.com/office/drawing/2014/main" id="{38233145-82E1-46FF-B64D-818CAF94EF65}"/>
               </a:ext>
             </a:extLst>
           </p:cNvPr>
@@ -12062,7 +12107,7 @@
           <p:cNvPr id="6" name="">
             <a:extLst xmlns:a="http://schemas.openxmlformats.org/drawingml/2006/main">
               <a:ext uri="{FF2B5EF4-FFF2-40B4-BE49-F238E27FC236}">
-                <a16:creationId xmlns:a16="http://schemas.microsoft.com/office/drawing/2014/main" id="{63A5D011-13B9-4B95-937F-04DA2134076E}"/>
+                <a16:creationId xmlns:a16="http://schemas.microsoft.com/office/drawing/2014/main" id="{EEC3F059-6AE3-420C-B14A-D6FC7F353C00}"/>
               </a:ext>
             </a:extLst>
           </p:cNvPr>
@@ -12124,7 +12169,7 @@
           <p:cNvPr id="7" name="">
             <a:extLst xmlns:a="http://schemas.openxmlformats.org/drawingml/2006/main">
               <a:ext uri="{FF2B5EF4-FFF2-40B4-BE49-F238E27FC236}">
-                <a16:creationId xmlns:a16="http://schemas.microsoft.com/office/drawing/2014/main" id="{1E22FE7C-FD97-4854-B58F-49B4CF9B84AA}"/>
+                <a16:creationId xmlns:a16="http://schemas.microsoft.com/office/drawing/2014/main" id="{5CB8595E-46B1-4FCE-BA40-A1D3A7D33778}"/>
               </a:ext>
             </a:extLst>
           </p:cNvPr>
@@ -12155,7 +12200,7 @@
           <p:cNvPr id="8" name="">
             <a:extLst xmlns:a="http://schemas.openxmlformats.org/drawingml/2006/main">
               <a:ext uri="{FF2B5EF4-FFF2-40B4-BE49-F238E27FC236}">
-                <a16:creationId xmlns:a16="http://schemas.microsoft.com/office/drawing/2014/main" id="{A6BFBC38-884D-42C3-8370-1C6FF5258659}"/>
+                <a16:creationId xmlns:a16="http://schemas.microsoft.com/office/drawing/2014/main" id="{CD6323F8-E5E1-4904-81B5-CA7262081479}"/>
               </a:ext>
             </a:extLst>
           </p:cNvPr>
@@ -12217,7 +12262,7 @@
           <p:cNvPr id="9" name="">
             <a:extLst xmlns:a="http://schemas.openxmlformats.org/drawingml/2006/main">
               <a:ext uri="{FF2B5EF4-FFF2-40B4-BE49-F238E27FC236}">
-                <a16:creationId xmlns:a16="http://schemas.microsoft.com/office/drawing/2014/main" id="{655264AF-8767-435D-89DD-B54235CF15C5}"/>
+                <a16:creationId xmlns:a16="http://schemas.microsoft.com/office/drawing/2014/main" id="{93C8A111-7DAF-47F1-A389-F74B42BE9D7B}"/>
               </a:ext>
             </a:extLst>
           </p:cNvPr>
@@ -12279,7 +12324,7 @@
           <p:cNvPr id="10" name="">
             <a:extLst xmlns:a="http://schemas.openxmlformats.org/drawingml/2006/main">
               <a:ext uri="{FF2B5EF4-FFF2-40B4-BE49-F238E27FC236}">
-                <a16:creationId xmlns:a16="http://schemas.microsoft.com/office/drawing/2014/main" id="{9D019F20-42CD-4D47-9A5E-760137D5BC17}"/>
+                <a16:creationId xmlns:a16="http://schemas.microsoft.com/office/drawing/2014/main" id="{8A0F1B01-E19D-4C0C-A8EF-DA90D499F35B}"/>
               </a:ext>
             </a:extLst>
           </p:cNvPr>
@@ -12341,7 +12386,7 @@
           <p:cNvPr id="11" name="">
             <a:extLst xmlns:a="http://schemas.openxmlformats.org/drawingml/2006/main">
               <a:ext uri="{FF2B5EF4-FFF2-40B4-BE49-F238E27FC236}">
-                <a16:creationId xmlns:a16="http://schemas.microsoft.com/office/drawing/2014/main" id="{EF230137-9563-4BE8-90BA-1130F784E881}"/>
+                <a16:creationId xmlns:a16="http://schemas.microsoft.com/office/drawing/2014/main" id="{75E55682-25D2-415F-B57F-B57C84B65085}"/>
               </a:ext>
             </a:extLst>
           </p:cNvPr>
@@ -12372,7 +12417,7 @@
           <p:cNvPr id="12" name="">
             <a:extLst xmlns:a="http://schemas.openxmlformats.org/drawingml/2006/main">
               <a:ext uri="{FF2B5EF4-FFF2-40B4-BE49-F238E27FC236}">
-                <a16:creationId xmlns:a16="http://schemas.microsoft.com/office/drawing/2014/main" id="{3BDB46DE-C0E1-4700-AA11-F6493050C605}"/>
+                <a16:creationId xmlns:a16="http://schemas.microsoft.com/office/drawing/2014/main" id="{7A3E044A-C5FB-4AF3-A008-54A9471E9B1F}"/>
               </a:ext>
             </a:extLst>
           </p:cNvPr>
@@ -12434,7 +12479,7 @@
           <p:cNvPr id="13" name="">
             <a:extLst xmlns:a="http://schemas.openxmlformats.org/drawingml/2006/main">
               <a:ext uri="{FF2B5EF4-FFF2-40B4-BE49-F238E27FC236}">
-                <a16:creationId xmlns:a16="http://schemas.microsoft.com/office/drawing/2014/main" id="{7CC58F9B-E377-4690-80A5-C110DD271791}"/>
+                <a16:creationId xmlns:a16="http://schemas.microsoft.com/office/drawing/2014/main" id="{E42B02A2-892C-4873-A2ED-089C6E669BB9}"/>
               </a:ext>
             </a:extLst>
           </p:cNvPr>
@@ -12496,7 +12541,7 @@
           <p:cNvPr id="14" name="">
             <a:extLst xmlns:a="http://schemas.openxmlformats.org/drawingml/2006/main">
               <a:ext uri="{FF2B5EF4-FFF2-40B4-BE49-F238E27FC236}">
-                <a16:creationId xmlns:a16="http://schemas.microsoft.com/office/drawing/2014/main" id="{E3FD4F2C-C165-4DB9-8EED-9EFE74C5C736}"/>
+                <a16:creationId xmlns:a16="http://schemas.microsoft.com/office/drawing/2014/main" id="{293B3A37-F3FF-4C2A-B9A6-8C4AA8A43203}"/>
               </a:ext>
             </a:extLst>
           </p:cNvPr>
@@ -12558,7 +12603,7 @@
           <p:cNvPr id="15" name="">
             <a:extLst xmlns:a="http://schemas.openxmlformats.org/drawingml/2006/main">
               <a:ext uri="{FF2B5EF4-FFF2-40B4-BE49-F238E27FC236}">
-                <a16:creationId xmlns:a16="http://schemas.microsoft.com/office/drawing/2014/main" id="{47E8C90C-CFA4-4FD7-9DD6-76E2450E2504}"/>
+                <a16:creationId xmlns:a16="http://schemas.microsoft.com/office/drawing/2014/main" id="{925A921D-3F19-444E-BBD1-10FB20F14C46}"/>
               </a:ext>
             </a:extLst>
           </p:cNvPr>
@@ -12589,7 +12634,7 @@
           <p:cNvPr id="16" name="">
             <a:extLst xmlns:a="http://schemas.openxmlformats.org/drawingml/2006/main">
               <a:ext uri="{FF2B5EF4-FFF2-40B4-BE49-F238E27FC236}">
-                <a16:creationId xmlns:a16="http://schemas.microsoft.com/office/drawing/2014/main" id="{AC4A1AEC-A757-4D03-9A9B-2256611680BD}"/>
+                <a16:creationId xmlns:a16="http://schemas.microsoft.com/office/drawing/2014/main" id="{0A2963E2-6E59-4FAD-B409-47071915D276}"/>
               </a:ext>
             </a:extLst>
           </p:cNvPr>
@@ -12651,7 +12696,7 @@
           <p:cNvPr id="17" name="">
             <a:extLst xmlns:a="http://schemas.openxmlformats.org/drawingml/2006/main">
               <a:ext uri="{FF2B5EF4-FFF2-40B4-BE49-F238E27FC236}">
-                <a16:creationId xmlns:a16="http://schemas.microsoft.com/office/drawing/2014/main" id="{344FF67E-E7FC-4004-8E94-5503A388E205}"/>
+                <a16:creationId xmlns:a16="http://schemas.microsoft.com/office/drawing/2014/main" id="{552B8214-101C-4A20-B481-E2B226EE7B37}"/>
               </a:ext>
             </a:extLst>
           </p:cNvPr>
@@ -12713,7 +12758,7 @@
           <p:cNvPr id="18" name="">
             <a:extLst xmlns:a="http://schemas.openxmlformats.org/drawingml/2006/main">
               <a:ext uri="{FF2B5EF4-FFF2-40B4-BE49-F238E27FC236}">
-                <a16:creationId xmlns:a16="http://schemas.microsoft.com/office/drawing/2014/main" id="{13A7F93C-2F46-4A8B-BEB8-540764064E21}"/>
+                <a16:creationId xmlns:a16="http://schemas.microsoft.com/office/drawing/2014/main" id="{571BCEB7-84B8-473A-BDB4-426BD7918C2B}"/>
               </a:ext>
             </a:extLst>
           </p:cNvPr>
@@ -12775,7 +12820,7 @@
           <p:cNvPr id="19" name="">
             <a:extLst xmlns:a="http://schemas.openxmlformats.org/drawingml/2006/main">
               <a:ext uri="{FF2B5EF4-FFF2-40B4-BE49-F238E27FC236}">
-                <a16:creationId xmlns:a16="http://schemas.microsoft.com/office/drawing/2014/main" id="{4D8489B0-A68B-484B-8446-7066A6C22E79}"/>
+                <a16:creationId xmlns:a16="http://schemas.microsoft.com/office/drawing/2014/main" id="{EE4BAB67-D346-4EF2-AE54-752C7D49605C}"/>
               </a:ext>
             </a:extLst>
           </p:cNvPr>
@@ -12808,7 +12853,7 @@
           <p:cNvPr id="20" name="">
             <a:extLst xmlns:a="http://schemas.openxmlformats.org/drawingml/2006/main">
               <a:ext uri="{FF2B5EF4-FFF2-40B4-BE49-F238E27FC236}">
-                <a16:creationId xmlns:a16="http://schemas.microsoft.com/office/drawing/2014/main" id="{05A83517-873A-4E19-AB82-0C7672BE9B17}"/>
+                <a16:creationId xmlns:a16="http://schemas.microsoft.com/office/drawing/2014/main" id="{C5A66852-CA96-4052-B66D-467ACECBEBB1}"/>
               </a:ext>
             </a:extLst>
           </p:cNvPr>
@@ -12874,7 +12919,7 @@
           <p:nvPr/>
         </p:nvPicPr>
         <p:blipFill>
-          <a:blip xmlns:r="http://schemas.openxmlformats.org/officeDocument/2006/relationships" xmlns:a="http://schemas.openxmlformats.org/drawingml/2006/main" r:embed="Rd40b59ebce364ffd"/>
+          <a:blip xmlns:r="http://schemas.openxmlformats.org/officeDocument/2006/relationships" xmlns:a="http://schemas.openxmlformats.org/drawingml/2006/main" r:embed="R071f9bae71684cf7"/>
           <a:stretch xmlns:a="http://schemas.openxmlformats.org/drawingml/2006/main"/>
         </p:blipFill>
         <p:spPr>
@@ -12892,7 +12937,7 @@
           <p:cNvPr id="22" name="footer-rule-18">
             <a:extLst xmlns:a="http://schemas.openxmlformats.org/drawingml/2006/main">
               <a:ext uri="{FF2B5EF4-FFF2-40B4-BE49-F238E27FC236}">
-                <a16:creationId xmlns:a16="http://schemas.microsoft.com/office/drawing/2014/main" id="{A60CCDB7-8192-4C2B-BECE-74385F1EEB59}"/>
+                <a16:creationId xmlns:a16="http://schemas.microsoft.com/office/drawing/2014/main" id="{92F2EB8C-0314-4F1A-BCF3-89A6E6D8AD19}"/>
               </a:ext>
             </a:extLst>
           </p:cNvPr>
@@ -12923,7 +12968,7 @@
           <p:cNvPr id="23" name="footer-label-18">
             <a:extLst xmlns:a="http://schemas.openxmlformats.org/drawingml/2006/main">
               <a:ext uri="{FF2B5EF4-FFF2-40B4-BE49-F238E27FC236}">
-                <a16:creationId xmlns:a16="http://schemas.microsoft.com/office/drawing/2014/main" id="{16F7F4E2-58F1-4502-9886-13DB0EE00726}"/>
+                <a16:creationId xmlns:a16="http://schemas.microsoft.com/office/drawing/2014/main" id="{60571DB8-11C0-458B-919F-01BD9C95C173}"/>
               </a:ext>
             </a:extLst>
           </p:cNvPr>
@@ -12985,7 +13030,7 @@
           <p:cNvPr id="24" name="footer-page-18">
             <a:extLst xmlns:a="http://schemas.openxmlformats.org/drawingml/2006/main">
               <a:ext uri="{FF2B5EF4-FFF2-40B4-BE49-F238E27FC236}">
-                <a16:creationId xmlns:a16="http://schemas.microsoft.com/office/drawing/2014/main" id="{35C42300-8ED7-4A37-A6EF-21FEFA29F474}"/>
+                <a16:creationId xmlns:a16="http://schemas.microsoft.com/office/drawing/2014/main" id="{D6913B6F-C5BE-4661-8F9B-BBA176DD6F2D}"/>
               </a:ext>
             </a:extLst>
           </p:cNvPr>
@@ -13045,7 +13090,7 @@
     </p:spTree>
     <p:extLst>
       <p:ext uri="{BB962C8B-B14F-4D97-AF65-F5344CB8AC3E}">
-        <p14:creationId xmlns:p14="http://schemas.microsoft.com/office/powerpoint/2010/main" val="1502537650"/>
+        <p14:creationId xmlns:p14="http://schemas.microsoft.com/office/powerpoint/2010/main" val="960076789"/>
       </p:ext>
     </p:extLst>
   </p:cSld>
@@ -13076,7 +13121,7 @@
           <p:cNvPr id="20" name="side-accent-2">
             <a:extLst xmlns:a="http://schemas.openxmlformats.org/drawingml/2006/main">
               <a:ext uri="{FF2B5EF4-FFF2-40B4-BE49-F238E27FC236}">
-                <a16:creationId xmlns:a16="http://schemas.microsoft.com/office/drawing/2014/main" id="{95C95822-B4C8-44FB-8F75-5DB7396ACEAB}"/>
+                <a16:creationId xmlns:a16="http://schemas.microsoft.com/office/drawing/2014/main" id="{465D30A5-7C76-4BFF-A0D6-9F0BD45620FC}"/>
               </a:ext>
             </a:extLst>
           </p:cNvPr>
@@ -13107,7 +13152,7 @@
           <p:cNvPr id="2" name="kicker-2">
             <a:extLst xmlns:a="http://schemas.openxmlformats.org/drawingml/2006/main">
               <a:ext uri="{FF2B5EF4-FFF2-40B4-BE49-F238E27FC236}">
-                <a16:creationId xmlns:a16="http://schemas.microsoft.com/office/drawing/2014/main" id="{AD19530B-1362-49F8-B406-4005021552A7}"/>
+                <a16:creationId xmlns:a16="http://schemas.microsoft.com/office/drawing/2014/main" id="{9E3DFC52-18AC-425C-A7F9-071E2FB030C5}"/>
               </a:ext>
             </a:extLst>
           </p:cNvPr>
@@ -13169,7 +13214,7 @@
           <p:cNvPr id="3" name="title-2">
             <a:extLst xmlns:a="http://schemas.openxmlformats.org/drawingml/2006/main">
               <a:ext uri="{FF2B5EF4-FFF2-40B4-BE49-F238E27FC236}">
-                <a16:creationId xmlns:a16="http://schemas.microsoft.com/office/drawing/2014/main" id="{8DB38D8E-9E3A-4F9A-AE7F-A29080A40350}"/>
+                <a16:creationId xmlns:a16="http://schemas.microsoft.com/office/drawing/2014/main" id="{81FEE5F5-B5E9-4533-825A-218F9139140F}"/>
               </a:ext>
             </a:extLst>
           </p:cNvPr>
@@ -13231,7 +13276,7 @@
           <p:cNvPr id="4" name="">
             <a:extLst xmlns:a="http://schemas.openxmlformats.org/drawingml/2006/main">
               <a:ext uri="{FF2B5EF4-FFF2-40B4-BE49-F238E27FC236}">
-                <a16:creationId xmlns:a16="http://schemas.microsoft.com/office/drawing/2014/main" id="{83EB0417-4B01-46DE-9C54-6BF42E86B066}"/>
+                <a16:creationId xmlns:a16="http://schemas.microsoft.com/office/drawing/2014/main" id="{F931AEB5-CACA-4960-AFC9-7289E468B46D}"/>
               </a:ext>
             </a:extLst>
           </p:cNvPr>
@@ -13293,7 +13338,7 @@
           <p:cNvPr id="5" name="">
             <a:extLst xmlns:a="http://schemas.openxmlformats.org/drawingml/2006/main">
               <a:ext uri="{FF2B5EF4-FFF2-40B4-BE49-F238E27FC236}">
-                <a16:creationId xmlns:a16="http://schemas.microsoft.com/office/drawing/2014/main" id="{8E1E36ED-F39E-4D8D-9B3C-50BAD1FFDD59}"/>
+                <a16:creationId xmlns:a16="http://schemas.microsoft.com/office/drawing/2014/main" id="{457B3086-F50E-4B96-9E15-F922CC0F4314}"/>
               </a:ext>
             </a:extLst>
           </p:cNvPr>
@@ -13355,7 +13400,7 @@
           <p:cNvPr id="6" name="">
             <a:extLst xmlns:a="http://schemas.openxmlformats.org/drawingml/2006/main">
               <a:ext uri="{FF2B5EF4-FFF2-40B4-BE49-F238E27FC236}">
-                <a16:creationId xmlns:a16="http://schemas.microsoft.com/office/drawing/2014/main" id="{D9DB315C-221A-4343-88DA-B3AEB16741F0}"/>
+                <a16:creationId xmlns:a16="http://schemas.microsoft.com/office/drawing/2014/main" id="{C4BF9AF8-9DC0-4FDC-9017-18AF88CA05BE}"/>
               </a:ext>
             </a:extLst>
           </p:cNvPr>
@@ -13386,7 +13431,7 @@
           <p:cNvPr id="7" name="">
             <a:extLst xmlns:a="http://schemas.openxmlformats.org/drawingml/2006/main">
               <a:ext uri="{FF2B5EF4-FFF2-40B4-BE49-F238E27FC236}">
-                <a16:creationId xmlns:a16="http://schemas.microsoft.com/office/drawing/2014/main" id="{57C7B5E6-180F-476B-A6C4-D8BF10EA2942}"/>
+                <a16:creationId xmlns:a16="http://schemas.microsoft.com/office/drawing/2014/main" id="{CDDC68D3-24DB-49D0-A6B8-718BFF757926}"/>
               </a:ext>
             </a:extLst>
           </p:cNvPr>
@@ -13448,7 +13493,7 @@
           <p:cNvPr id="8" name="">
             <a:extLst xmlns:a="http://schemas.openxmlformats.org/drawingml/2006/main">
               <a:ext uri="{FF2B5EF4-FFF2-40B4-BE49-F238E27FC236}">
-                <a16:creationId xmlns:a16="http://schemas.microsoft.com/office/drawing/2014/main" id="{76370E10-126D-4668-B367-B30EED73FC10}"/>
+                <a16:creationId xmlns:a16="http://schemas.microsoft.com/office/drawing/2014/main" id="{60E45EAE-C59B-4C49-B7E1-FB6EC3CB66BF}"/>
               </a:ext>
             </a:extLst>
           </p:cNvPr>
@@ -13510,7 +13555,7 @@
           <p:cNvPr id="9" name="">
             <a:extLst xmlns:a="http://schemas.openxmlformats.org/drawingml/2006/main">
               <a:ext uri="{FF2B5EF4-FFF2-40B4-BE49-F238E27FC236}">
-                <a16:creationId xmlns:a16="http://schemas.microsoft.com/office/drawing/2014/main" id="{AFA37DD7-F7DF-49F8-8B35-3679161BE6DC}"/>
+                <a16:creationId xmlns:a16="http://schemas.microsoft.com/office/drawing/2014/main" id="{73D02A19-FA94-479C-8254-5CEACE7BEE07}"/>
               </a:ext>
             </a:extLst>
           </p:cNvPr>
@@ -13541,7 +13586,7 @@
           <p:cNvPr id="10" name="">
             <a:extLst xmlns:a="http://schemas.openxmlformats.org/drawingml/2006/main">
               <a:ext uri="{FF2B5EF4-FFF2-40B4-BE49-F238E27FC236}">
-                <a16:creationId xmlns:a16="http://schemas.microsoft.com/office/drawing/2014/main" id="{4AF479D0-5A16-4CE1-AF82-D5F388256E59}"/>
+                <a16:creationId xmlns:a16="http://schemas.microsoft.com/office/drawing/2014/main" id="{9052FA30-4A46-4782-961F-6B3EB611FAB9}"/>
               </a:ext>
             </a:extLst>
           </p:cNvPr>
@@ -13603,7 +13648,7 @@
           <p:cNvPr id="11" name="">
             <a:extLst xmlns:a="http://schemas.openxmlformats.org/drawingml/2006/main">
               <a:ext uri="{FF2B5EF4-FFF2-40B4-BE49-F238E27FC236}">
-                <a16:creationId xmlns:a16="http://schemas.microsoft.com/office/drawing/2014/main" id="{4C381478-0C22-461E-B4B8-DB00C71372D1}"/>
+                <a16:creationId xmlns:a16="http://schemas.microsoft.com/office/drawing/2014/main" id="{445EDE7A-237F-487F-9462-E95AEB7C874B}"/>
               </a:ext>
             </a:extLst>
           </p:cNvPr>
@@ -13665,7 +13710,7 @@
           <p:cNvPr id="12" name="">
             <a:extLst xmlns:a="http://schemas.openxmlformats.org/drawingml/2006/main">
               <a:ext uri="{FF2B5EF4-FFF2-40B4-BE49-F238E27FC236}">
-                <a16:creationId xmlns:a16="http://schemas.microsoft.com/office/drawing/2014/main" id="{9262994D-F2A5-4140-9E3D-26A4FC454971}"/>
+                <a16:creationId xmlns:a16="http://schemas.microsoft.com/office/drawing/2014/main" id="{E3D1C591-3180-414D-B75B-0C576AF59D4B}"/>
               </a:ext>
             </a:extLst>
           </p:cNvPr>
@@ -13696,7 +13741,7 @@
           <p:cNvPr id="13" name="">
             <a:extLst xmlns:a="http://schemas.openxmlformats.org/drawingml/2006/main">
               <a:ext uri="{FF2B5EF4-FFF2-40B4-BE49-F238E27FC236}">
-                <a16:creationId xmlns:a16="http://schemas.microsoft.com/office/drawing/2014/main" id="{7DFA2928-B4EB-4DB1-914A-BBF1B15867B4}"/>
+                <a16:creationId xmlns:a16="http://schemas.microsoft.com/office/drawing/2014/main" id="{7301E46A-62CD-47D4-8AAA-F76E68BCD378}"/>
               </a:ext>
             </a:extLst>
           </p:cNvPr>
@@ -13758,7 +13803,7 @@
           <p:cNvPr id="14" name="outcome-mark">
             <a:extLst xmlns:a="http://schemas.openxmlformats.org/drawingml/2006/main">
               <a:ext uri="{FF2B5EF4-FFF2-40B4-BE49-F238E27FC236}">
-                <a16:creationId xmlns:a16="http://schemas.microsoft.com/office/drawing/2014/main" id="{CB25A0DD-2641-446F-AC5D-0919601C3B74}"/>
+                <a16:creationId xmlns:a16="http://schemas.microsoft.com/office/drawing/2014/main" id="{5D4274C6-4B1D-47BD-9B27-1E90430ADE9F}"/>
               </a:ext>
             </a:extLst>
           </p:cNvPr>
@@ -13793,7 +13838,7 @@
           <p:cNvPr id="15" name="">
             <a:extLst xmlns:a="http://schemas.openxmlformats.org/drawingml/2006/main">
               <a:ext uri="{FF2B5EF4-FFF2-40B4-BE49-F238E27FC236}">
-                <a16:creationId xmlns:a16="http://schemas.microsoft.com/office/drawing/2014/main" id="{BF1FE031-E308-41C5-9F38-B73736489071}"/>
+                <a16:creationId xmlns:a16="http://schemas.microsoft.com/office/drawing/2014/main" id="{D908DE75-B7CD-4C0B-AC02-F085B1674388}"/>
               </a:ext>
             </a:extLst>
           </p:cNvPr>
@@ -13855,7 +13900,7 @@
           <p:cNvPr id="16" name="">
             <a:extLst xmlns:a="http://schemas.openxmlformats.org/drawingml/2006/main">
               <a:ext uri="{FF2B5EF4-FFF2-40B4-BE49-F238E27FC236}">
-                <a16:creationId xmlns:a16="http://schemas.microsoft.com/office/drawing/2014/main" id="{8BF26E9C-AF59-4A30-A89C-EABBA618C92D}"/>
+                <a16:creationId xmlns:a16="http://schemas.microsoft.com/office/drawing/2014/main" id="{6E1B7DC2-CDD7-4F26-B84E-EC22C08647A1}"/>
               </a:ext>
             </a:extLst>
           </p:cNvPr>
@@ -13944,7 +13989,7 @@
           <p:cNvPr id="17" name="footer-rule-2">
             <a:extLst xmlns:a="http://schemas.openxmlformats.org/drawingml/2006/main">
               <a:ext uri="{FF2B5EF4-FFF2-40B4-BE49-F238E27FC236}">
-                <a16:creationId xmlns:a16="http://schemas.microsoft.com/office/drawing/2014/main" id="{098C0C21-78E0-494C-A607-F0327ED8EE0B}"/>
+                <a16:creationId xmlns:a16="http://schemas.microsoft.com/office/drawing/2014/main" id="{C1F4F8E7-1E66-4922-A02C-028079CD2F58}"/>
               </a:ext>
             </a:extLst>
           </p:cNvPr>
@@ -13975,7 +14020,7 @@
           <p:cNvPr id="18" name="footer-label-2">
             <a:extLst xmlns:a="http://schemas.openxmlformats.org/drawingml/2006/main">
               <a:ext uri="{FF2B5EF4-FFF2-40B4-BE49-F238E27FC236}">
-                <a16:creationId xmlns:a16="http://schemas.microsoft.com/office/drawing/2014/main" id="{B25B5788-737D-41FC-82CE-8492C86969A4}"/>
+                <a16:creationId xmlns:a16="http://schemas.microsoft.com/office/drawing/2014/main" id="{C8CE120B-242B-4F17-8318-660991470EFD}"/>
               </a:ext>
             </a:extLst>
           </p:cNvPr>
@@ -14037,7 +14082,7 @@
           <p:cNvPr id="19" name="footer-page-2">
             <a:extLst xmlns:a="http://schemas.openxmlformats.org/drawingml/2006/main">
               <a:ext uri="{FF2B5EF4-FFF2-40B4-BE49-F238E27FC236}">
-                <a16:creationId xmlns:a16="http://schemas.microsoft.com/office/drawing/2014/main" id="{3870C1E6-ACBF-4A1D-B38C-894E6DE02A46}"/>
+                <a16:creationId xmlns:a16="http://schemas.microsoft.com/office/drawing/2014/main" id="{461E792F-D940-4B08-A692-5C261CD7D792}"/>
               </a:ext>
             </a:extLst>
           </p:cNvPr>
@@ -14097,7 +14142,7 @@
     </p:spTree>
     <p:extLst>
       <p:ext uri="{BB962C8B-B14F-4D97-AF65-F5344CB8AC3E}">
-        <p14:creationId xmlns:p14="http://schemas.microsoft.com/office/powerpoint/2010/main" val="2115246511"/>
+        <p14:creationId xmlns:p14="http://schemas.microsoft.com/office/powerpoint/2010/main" val="267051246"/>
       </p:ext>
     </p:extLst>
   </p:cSld>
@@ -14128,7 +14173,7 @@
           <p:cNvPr id="31" name="side-accent-3">
             <a:extLst xmlns:a="http://schemas.openxmlformats.org/drawingml/2006/main">
               <a:ext uri="{FF2B5EF4-FFF2-40B4-BE49-F238E27FC236}">
-                <a16:creationId xmlns:a16="http://schemas.microsoft.com/office/drawing/2014/main" id="{BFC0158B-EDFC-4A0B-8A15-64BBA767231C}"/>
+                <a16:creationId xmlns:a16="http://schemas.microsoft.com/office/drawing/2014/main" id="{496E59E0-B60E-461B-AAA5-EB02EB993EBC}"/>
               </a:ext>
             </a:extLst>
           </p:cNvPr>
@@ -14159,7 +14204,7 @@
           <p:cNvPr id="2" name="kicker-3">
             <a:extLst xmlns:a="http://schemas.openxmlformats.org/drawingml/2006/main">
               <a:ext uri="{FF2B5EF4-FFF2-40B4-BE49-F238E27FC236}">
-                <a16:creationId xmlns:a16="http://schemas.microsoft.com/office/drawing/2014/main" id="{0374A2F0-681D-4FFF-BA19-D8DB8378A0D4}"/>
+                <a16:creationId xmlns:a16="http://schemas.microsoft.com/office/drawing/2014/main" id="{18B35FC9-46A4-43E9-86AB-C43507FD314D}"/>
               </a:ext>
             </a:extLst>
           </p:cNvPr>
@@ -14221,7 +14266,7 @@
           <p:cNvPr id="3" name="title-3">
             <a:extLst xmlns:a="http://schemas.openxmlformats.org/drawingml/2006/main">
               <a:ext uri="{FF2B5EF4-FFF2-40B4-BE49-F238E27FC236}">
-                <a16:creationId xmlns:a16="http://schemas.microsoft.com/office/drawing/2014/main" id="{BE4130F6-27E6-41A7-9DF7-87A651C8EC12}"/>
+                <a16:creationId xmlns:a16="http://schemas.microsoft.com/office/drawing/2014/main" id="{6109A841-1D09-4928-90F8-FE804DD88E15}"/>
               </a:ext>
             </a:extLst>
           </p:cNvPr>
@@ -14283,7 +14328,7 @@
           <p:cNvPr id="4" name="">
             <a:extLst xmlns:a="http://schemas.openxmlformats.org/drawingml/2006/main">
               <a:ext uri="{FF2B5EF4-FFF2-40B4-BE49-F238E27FC236}">
-                <a16:creationId xmlns:a16="http://schemas.microsoft.com/office/drawing/2014/main" id="{ACA113EC-5B98-4183-9335-0547AB5D4F98}"/>
+                <a16:creationId xmlns:a16="http://schemas.microsoft.com/office/drawing/2014/main" id="{1E92C5B3-B777-4304-B022-C6690B4B82B9}"/>
               </a:ext>
             </a:extLst>
           </p:cNvPr>
@@ -14345,7 +14390,7 @@
           <p:cNvPr id="5" name="system-function-line">
             <a:extLst xmlns:a="http://schemas.openxmlformats.org/drawingml/2006/main">
               <a:ext uri="{FF2B5EF4-FFF2-40B4-BE49-F238E27FC236}">
-                <a16:creationId xmlns:a16="http://schemas.microsoft.com/office/drawing/2014/main" id="{492385AE-19B9-42E1-8FE2-DC504641C6C9}"/>
+                <a16:creationId xmlns:a16="http://schemas.microsoft.com/office/drawing/2014/main" id="{DE23B66A-8CFE-47DE-A5A6-32313B457DAA}"/>
               </a:ext>
             </a:extLst>
           </p:cNvPr>
@@ -14376,7 +14421,7 @@
           <p:cNvPr id="6" name="">
             <a:extLst xmlns:a="http://schemas.openxmlformats.org/drawingml/2006/main">
               <a:ext uri="{FF2B5EF4-FFF2-40B4-BE49-F238E27FC236}">
-                <a16:creationId xmlns:a16="http://schemas.microsoft.com/office/drawing/2014/main" id="{DDBD4685-C061-41D8-9CD3-D1D5038C1DFA}"/>
+                <a16:creationId xmlns:a16="http://schemas.microsoft.com/office/drawing/2014/main" id="{2429FBFE-95F6-4C35-ABE4-9629DB7F0F5A}"/>
               </a:ext>
             </a:extLst>
           </p:cNvPr>
@@ -14407,7 +14452,7 @@
           <p:cNvPr id="7" name="">
             <a:extLst xmlns:a="http://schemas.openxmlformats.org/drawingml/2006/main">
               <a:ext uri="{FF2B5EF4-FFF2-40B4-BE49-F238E27FC236}">
-                <a16:creationId xmlns:a16="http://schemas.microsoft.com/office/drawing/2014/main" id="{A1772F53-AF7C-4268-9109-6D62B830D29F}"/>
+                <a16:creationId xmlns:a16="http://schemas.microsoft.com/office/drawing/2014/main" id="{C542F77C-3879-43E8-88C7-FC1ECB624236}"/>
               </a:ext>
             </a:extLst>
           </p:cNvPr>
@@ -14469,7 +14514,7 @@
           <p:cNvPr id="8" name="">
             <a:extLst xmlns:a="http://schemas.openxmlformats.org/drawingml/2006/main">
               <a:ext uri="{FF2B5EF4-FFF2-40B4-BE49-F238E27FC236}">
-                <a16:creationId xmlns:a16="http://schemas.microsoft.com/office/drawing/2014/main" id="{1A0F2AFB-4A88-458C-92A6-5CE5F91EB3DC}"/>
+                <a16:creationId xmlns:a16="http://schemas.microsoft.com/office/drawing/2014/main" id="{C60A2580-A4D2-46D0-B378-76FD238A79F8}"/>
               </a:ext>
             </a:extLst>
           </p:cNvPr>
@@ -14531,7 +14576,7 @@
           <p:cNvPr id="9" name="">
             <a:extLst xmlns:a="http://schemas.openxmlformats.org/drawingml/2006/main">
               <a:ext uri="{FF2B5EF4-FFF2-40B4-BE49-F238E27FC236}">
-                <a16:creationId xmlns:a16="http://schemas.microsoft.com/office/drawing/2014/main" id="{3489EE14-ECED-4EF2-BCA1-DB519ECEF501}"/>
+                <a16:creationId xmlns:a16="http://schemas.microsoft.com/office/drawing/2014/main" id="{BAC6A2AF-ED5D-4550-87D2-87C12108EDCF}"/>
               </a:ext>
             </a:extLst>
           </p:cNvPr>
@@ -14593,7 +14638,7 @@
           <p:cNvPr id="10" name="">
             <a:extLst xmlns:a="http://schemas.openxmlformats.org/drawingml/2006/main">
               <a:ext uri="{FF2B5EF4-FFF2-40B4-BE49-F238E27FC236}">
-                <a16:creationId xmlns:a16="http://schemas.microsoft.com/office/drawing/2014/main" id="{556F52AC-0CC4-452A-90BB-3A5E8B71DC1D}"/>
+                <a16:creationId xmlns:a16="http://schemas.microsoft.com/office/drawing/2014/main" id="{0EA66979-B85F-4B0E-8892-CF1850D92914}"/>
               </a:ext>
             </a:extLst>
           </p:cNvPr>
@@ -14624,7 +14669,7 @@
           <p:cNvPr id="11" name="">
             <a:extLst xmlns:a="http://schemas.openxmlformats.org/drawingml/2006/main">
               <a:ext uri="{FF2B5EF4-FFF2-40B4-BE49-F238E27FC236}">
-                <a16:creationId xmlns:a16="http://schemas.microsoft.com/office/drawing/2014/main" id="{F8A986A4-F47A-45A9-A76A-672D0105BE12}"/>
+                <a16:creationId xmlns:a16="http://schemas.microsoft.com/office/drawing/2014/main" id="{ECD2AC88-1942-4F94-BDD9-4B2E3B769B84}"/>
               </a:ext>
             </a:extLst>
           </p:cNvPr>
@@ -14686,7 +14731,7 @@
           <p:cNvPr id="12" name="">
             <a:extLst xmlns:a="http://schemas.openxmlformats.org/drawingml/2006/main">
               <a:ext uri="{FF2B5EF4-FFF2-40B4-BE49-F238E27FC236}">
-                <a16:creationId xmlns:a16="http://schemas.microsoft.com/office/drawing/2014/main" id="{A3C5D0D4-AEFB-41B3-85D1-638B5448AFB5}"/>
+                <a16:creationId xmlns:a16="http://schemas.microsoft.com/office/drawing/2014/main" id="{ED094F60-F453-468C-AC92-4126EF5BBBF4}"/>
               </a:ext>
             </a:extLst>
           </p:cNvPr>
@@ -14748,7 +14793,7 @@
           <p:cNvPr id="13" name="">
             <a:extLst xmlns:a="http://schemas.openxmlformats.org/drawingml/2006/main">
               <a:ext uri="{FF2B5EF4-FFF2-40B4-BE49-F238E27FC236}">
-                <a16:creationId xmlns:a16="http://schemas.microsoft.com/office/drawing/2014/main" id="{0DF40CA8-988E-4CBC-9F17-1812F7940645}"/>
+                <a16:creationId xmlns:a16="http://schemas.microsoft.com/office/drawing/2014/main" id="{8777C98A-3A7A-479C-8A72-5B50073CDA28}"/>
               </a:ext>
             </a:extLst>
           </p:cNvPr>
@@ -14810,7 +14855,7 @@
           <p:cNvPr id="14" name="">
             <a:extLst xmlns:a="http://schemas.openxmlformats.org/drawingml/2006/main">
               <a:ext uri="{FF2B5EF4-FFF2-40B4-BE49-F238E27FC236}">
-                <a16:creationId xmlns:a16="http://schemas.microsoft.com/office/drawing/2014/main" id="{2E078D8F-A517-4D8B-B847-3BAD29FC4C18}"/>
+                <a16:creationId xmlns:a16="http://schemas.microsoft.com/office/drawing/2014/main" id="{D75350D6-A7CA-4FE8-9B47-C9AB790F1B0B}"/>
               </a:ext>
             </a:extLst>
           </p:cNvPr>
@@ -14841,7 +14886,7 @@
           <p:cNvPr id="15" name="">
             <a:extLst xmlns:a="http://schemas.openxmlformats.org/drawingml/2006/main">
               <a:ext uri="{FF2B5EF4-FFF2-40B4-BE49-F238E27FC236}">
-                <a16:creationId xmlns:a16="http://schemas.microsoft.com/office/drawing/2014/main" id="{40C17B23-0065-4E70-98BE-6AFECEC825A2}"/>
+                <a16:creationId xmlns:a16="http://schemas.microsoft.com/office/drawing/2014/main" id="{9DB12DD4-7926-442A-9D43-FCA6D825D72E}"/>
               </a:ext>
             </a:extLst>
           </p:cNvPr>
@@ -14903,7 +14948,7 @@
           <p:cNvPr id="16" name="">
             <a:extLst xmlns:a="http://schemas.openxmlformats.org/drawingml/2006/main">
               <a:ext uri="{FF2B5EF4-FFF2-40B4-BE49-F238E27FC236}">
-                <a16:creationId xmlns:a16="http://schemas.microsoft.com/office/drawing/2014/main" id="{294A087A-96F7-4C10-B17F-F61C998622E0}"/>
+                <a16:creationId xmlns:a16="http://schemas.microsoft.com/office/drawing/2014/main" id="{0ADD5D6A-E1C5-446D-803A-7F56E64FBFF6}"/>
               </a:ext>
             </a:extLst>
           </p:cNvPr>
@@ -14965,7 +15010,7 @@
           <p:cNvPr id="17" name="">
             <a:extLst xmlns:a="http://schemas.openxmlformats.org/drawingml/2006/main">
               <a:ext uri="{FF2B5EF4-FFF2-40B4-BE49-F238E27FC236}">
-                <a16:creationId xmlns:a16="http://schemas.microsoft.com/office/drawing/2014/main" id="{52CDA686-C287-4525-85F6-F770D2A6B6AE}"/>
+                <a16:creationId xmlns:a16="http://schemas.microsoft.com/office/drawing/2014/main" id="{A940C428-263D-43E9-A0F0-7D78A1ECC8C6}"/>
               </a:ext>
             </a:extLst>
           </p:cNvPr>
@@ -15027,7 +15072,7 @@
           <p:cNvPr id="18" name="">
             <a:extLst xmlns:a="http://schemas.openxmlformats.org/drawingml/2006/main">
               <a:ext uri="{FF2B5EF4-FFF2-40B4-BE49-F238E27FC236}">
-                <a16:creationId xmlns:a16="http://schemas.microsoft.com/office/drawing/2014/main" id="{EBD099EB-AB5D-4B44-82C4-322960F277D0}"/>
+                <a16:creationId xmlns:a16="http://schemas.microsoft.com/office/drawing/2014/main" id="{6AD30F30-F0C6-47B5-A2B7-A8EEF65A536C}"/>
               </a:ext>
             </a:extLst>
           </p:cNvPr>
@@ -15058,7 +15103,7 @@
           <p:cNvPr id="19" name="">
             <a:extLst xmlns:a="http://schemas.openxmlformats.org/drawingml/2006/main">
               <a:ext uri="{FF2B5EF4-FFF2-40B4-BE49-F238E27FC236}">
-                <a16:creationId xmlns:a16="http://schemas.microsoft.com/office/drawing/2014/main" id="{1706A2DD-C5BF-47F3-ADA8-A3AB779475FA}"/>
+                <a16:creationId xmlns:a16="http://schemas.microsoft.com/office/drawing/2014/main" id="{06AD3E82-9126-4CAB-A174-5DB3E3DEE9C6}"/>
               </a:ext>
             </a:extLst>
           </p:cNvPr>
@@ -15120,7 +15165,7 @@
           <p:cNvPr id="20" name="">
             <a:extLst xmlns:a="http://schemas.openxmlformats.org/drawingml/2006/main">
               <a:ext uri="{FF2B5EF4-FFF2-40B4-BE49-F238E27FC236}">
-                <a16:creationId xmlns:a16="http://schemas.microsoft.com/office/drawing/2014/main" id="{18B38874-5C4F-4FD3-A358-78D4C343C8C5}"/>
+                <a16:creationId xmlns:a16="http://schemas.microsoft.com/office/drawing/2014/main" id="{217A1D29-9867-42A4-B132-663B2301C2ED}"/>
               </a:ext>
             </a:extLst>
           </p:cNvPr>
@@ -15182,7 +15227,7 @@
           <p:cNvPr id="21" name="">
             <a:extLst xmlns:a="http://schemas.openxmlformats.org/drawingml/2006/main">
               <a:ext uri="{FF2B5EF4-FFF2-40B4-BE49-F238E27FC236}">
-                <a16:creationId xmlns:a16="http://schemas.microsoft.com/office/drawing/2014/main" id="{5911C08D-72E5-4396-8F92-BBC3207E0536}"/>
+                <a16:creationId xmlns:a16="http://schemas.microsoft.com/office/drawing/2014/main" id="{60D4540B-FDC0-4C3D-BBD6-0EC81901DE39}"/>
               </a:ext>
             </a:extLst>
           </p:cNvPr>
@@ -15244,7 +15289,7 @@
           <p:cNvPr id="22" name="">
             <a:extLst xmlns:a="http://schemas.openxmlformats.org/drawingml/2006/main">
               <a:ext uri="{FF2B5EF4-FFF2-40B4-BE49-F238E27FC236}">
-                <a16:creationId xmlns:a16="http://schemas.microsoft.com/office/drawing/2014/main" id="{7EEDB0D7-2F85-45AA-8BB2-55EF2DCAD771}"/>
+                <a16:creationId xmlns:a16="http://schemas.microsoft.com/office/drawing/2014/main" id="{34F6CE88-6B68-4713-A1D8-EA408E59722A}"/>
               </a:ext>
             </a:extLst>
           </p:cNvPr>
@@ -15275,7 +15320,7 @@
           <p:cNvPr id="23" name="">
             <a:extLst xmlns:a="http://schemas.openxmlformats.org/drawingml/2006/main">
               <a:ext uri="{FF2B5EF4-FFF2-40B4-BE49-F238E27FC236}">
-                <a16:creationId xmlns:a16="http://schemas.microsoft.com/office/drawing/2014/main" id="{C29C6FB8-21F2-4C5D-A6F0-DD9226807C58}"/>
+                <a16:creationId xmlns:a16="http://schemas.microsoft.com/office/drawing/2014/main" id="{D6EB6A6C-176E-4163-ADFA-7F7BE253F8BB}"/>
               </a:ext>
             </a:extLst>
           </p:cNvPr>
@@ -15337,7 +15382,7 @@
           <p:cNvPr id="24" name="">
             <a:extLst xmlns:a="http://schemas.openxmlformats.org/drawingml/2006/main">
               <a:ext uri="{FF2B5EF4-FFF2-40B4-BE49-F238E27FC236}">
-                <a16:creationId xmlns:a16="http://schemas.microsoft.com/office/drawing/2014/main" id="{79BE85BB-0B2F-47C3-BF0C-28366D8B20F1}"/>
+                <a16:creationId xmlns:a16="http://schemas.microsoft.com/office/drawing/2014/main" id="{AA47180C-CD4E-4C8A-B777-BE01425049D6}"/>
               </a:ext>
             </a:extLst>
           </p:cNvPr>
@@ -15399,7 +15444,7 @@
           <p:cNvPr id="25" name="">
             <a:extLst xmlns:a="http://schemas.openxmlformats.org/drawingml/2006/main">
               <a:ext uri="{FF2B5EF4-FFF2-40B4-BE49-F238E27FC236}">
-                <a16:creationId xmlns:a16="http://schemas.microsoft.com/office/drawing/2014/main" id="{8FD52B4C-DB83-437E-948C-54D37A104DD4}"/>
+                <a16:creationId xmlns:a16="http://schemas.microsoft.com/office/drawing/2014/main" id="{250D67E1-0504-4E7E-B186-E0757C704E2C}"/>
               </a:ext>
             </a:extLst>
           </p:cNvPr>
@@ -15461,7 +15506,7 @@
           <p:cNvPr id="26" name="">
             <a:extLst xmlns:a="http://schemas.openxmlformats.org/drawingml/2006/main">
               <a:ext uri="{FF2B5EF4-FFF2-40B4-BE49-F238E27FC236}">
-                <a16:creationId xmlns:a16="http://schemas.microsoft.com/office/drawing/2014/main" id="{9375B62E-A075-4FB8-9FD8-36E7A43F8ADB}"/>
+                <a16:creationId xmlns:a16="http://schemas.microsoft.com/office/drawing/2014/main" id="{6393E0DD-F11B-4EF8-83E1-D8AC2BEC9EA9}"/>
               </a:ext>
             </a:extLst>
           </p:cNvPr>
@@ -15494,7 +15539,7 @@
           <p:cNvPr id="27" name="">
             <a:extLst xmlns:a="http://schemas.openxmlformats.org/drawingml/2006/main">
               <a:ext uri="{FF2B5EF4-FFF2-40B4-BE49-F238E27FC236}">
-                <a16:creationId xmlns:a16="http://schemas.microsoft.com/office/drawing/2014/main" id="{B2346840-2369-4159-AEC3-9557E78C9092}"/>
+                <a16:creationId xmlns:a16="http://schemas.microsoft.com/office/drawing/2014/main" id="{7B41E675-5990-4305-A043-C9318B04C860}"/>
               </a:ext>
             </a:extLst>
           </p:cNvPr>
@@ -15556,7 +15601,7 @@
           <p:cNvPr id="28" name="footer-rule-3">
             <a:extLst xmlns:a="http://schemas.openxmlformats.org/drawingml/2006/main">
               <a:ext uri="{FF2B5EF4-FFF2-40B4-BE49-F238E27FC236}">
-                <a16:creationId xmlns:a16="http://schemas.microsoft.com/office/drawing/2014/main" id="{1237658B-C81C-4211-ACB6-7413F7EBB619}"/>
+                <a16:creationId xmlns:a16="http://schemas.microsoft.com/office/drawing/2014/main" id="{A3F82E5D-2A7A-491B-AFF8-E4D3F71C1237}"/>
               </a:ext>
             </a:extLst>
           </p:cNvPr>
@@ -15587,7 +15632,7 @@
           <p:cNvPr id="29" name="footer-label-3">
             <a:extLst xmlns:a="http://schemas.openxmlformats.org/drawingml/2006/main">
               <a:ext uri="{FF2B5EF4-FFF2-40B4-BE49-F238E27FC236}">
-                <a16:creationId xmlns:a16="http://schemas.microsoft.com/office/drawing/2014/main" id="{F9604393-EF7F-455A-B3AE-AD7B7149D8A8}"/>
+                <a16:creationId xmlns:a16="http://schemas.microsoft.com/office/drawing/2014/main" id="{E8F640F7-027E-4CF3-BC6A-9528F093E391}"/>
               </a:ext>
             </a:extLst>
           </p:cNvPr>
@@ -15649,7 +15694,7 @@
           <p:cNvPr id="30" name="footer-page-3">
             <a:extLst xmlns:a="http://schemas.openxmlformats.org/drawingml/2006/main">
               <a:ext uri="{FF2B5EF4-FFF2-40B4-BE49-F238E27FC236}">
-                <a16:creationId xmlns:a16="http://schemas.microsoft.com/office/drawing/2014/main" id="{4BBD151E-231A-443B-8973-5D48E5353621}"/>
+                <a16:creationId xmlns:a16="http://schemas.microsoft.com/office/drawing/2014/main" id="{94492E2C-D8F6-41FE-B3D1-4263B0DE40BF}"/>
               </a:ext>
             </a:extLst>
           </p:cNvPr>
@@ -15709,7 +15754,7 @@
     </p:spTree>
     <p:extLst>
       <p:ext uri="{BB962C8B-B14F-4D97-AF65-F5344CB8AC3E}">
-        <p14:creationId xmlns:p14="http://schemas.microsoft.com/office/powerpoint/2010/main" val="1773602275"/>
+        <p14:creationId xmlns:p14="http://schemas.microsoft.com/office/powerpoint/2010/main" val="903976431"/>
       </p:ext>
     </p:extLst>
   </p:cSld>
@@ -15740,7 +15785,7 @@
           <p:cNvPr id="28" name="side-accent-4">
             <a:extLst xmlns:a="http://schemas.openxmlformats.org/drawingml/2006/main">
               <a:ext uri="{FF2B5EF4-FFF2-40B4-BE49-F238E27FC236}">
-                <a16:creationId xmlns:a16="http://schemas.microsoft.com/office/drawing/2014/main" id="{AA1D870E-BC60-4196-9B9F-A84C4B251092}"/>
+                <a16:creationId xmlns:a16="http://schemas.microsoft.com/office/drawing/2014/main" id="{398E57C6-CEC4-40CD-B3E0-16BDE582C45A}"/>
               </a:ext>
             </a:extLst>
           </p:cNvPr>
@@ -15771,7 +15816,7 @@
           <p:cNvPr id="2" name="kicker-4">
             <a:extLst xmlns:a="http://schemas.openxmlformats.org/drawingml/2006/main">
               <a:ext uri="{FF2B5EF4-FFF2-40B4-BE49-F238E27FC236}">
-                <a16:creationId xmlns:a16="http://schemas.microsoft.com/office/drawing/2014/main" id="{14FF3C7B-F937-49DB-AF41-8575BCA85035}"/>
+                <a16:creationId xmlns:a16="http://schemas.microsoft.com/office/drawing/2014/main" id="{E80CB312-DC78-4B64-BE36-2146470A5BEF}"/>
               </a:ext>
             </a:extLst>
           </p:cNvPr>
@@ -15833,7 +15878,7 @@
           <p:cNvPr id="3" name="title-4">
             <a:extLst xmlns:a="http://schemas.openxmlformats.org/drawingml/2006/main">
               <a:ext uri="{FF2B5EF4-FFF2-40B4-BE49-F238E27FC236}">
-                <a16:creationId xmlns:a16="http://schemas.microsoft.com/office/drawing/2014/main" id="{86D86A6C-EFBD-4396-8F64-7B63EF132C75}"/>
+                <a16:creationId xmlns:a16="http://schemas.microsoft.com/office/drawing/2014/main" id="{7117763A-E9B4-4515-8FCF-CA6A6349D61A}"/>
               </a:ext>
             </a:extLst>
           </p:cNvPr>
@@ -15895,7 +15940,7 @@
           <p:cNvPr id="4" name="">
             <a:extLst xmlns:a="http://schemas.openxmlformats.org/drawingml/2006/main">
               <a:ext uri="{FF2B5EF4-FFF2-40B4-BE49-F238E27FC236}">
-                <a16:creationId xmlns:a16="http://schemas.microsoft.com/office/drawing/2014/main" id="{F9A5926E-A75C-4207-95D5-D252629922E3}"/>
+                <a16:creationId xmlns:a16="http://schemas.microsoft.com/office/drawing/2014/main" id="{2DDF2A70-0BB8-4C55-94B5-8B6AB5D88BA0}"/>
               </a:ext>
             </a:extLst>
           </p:cNvPr>
@@ -15957,7 +16002,7 @@
           <p:cNvPr id="5" name="">
             <a:extLst xmlns:a="http://schemas.openxmlformats.org/drawingml/2006/main">
               <a:ext uri="{FF2B5EF4-FFF2-40B4-BE49-F238E27FC236}">
-                <a16:creationId xmlns:a16="http://schemas.microsoft.com/office/drawing/2014/main" id="{B77EF36B-3657-4E4F-951C-B4EB09D7A4B1}"/>
+                <a16:creationId xmlns:a16="http://schemas.microsoft.com/office/drawing/2014/main" id="{4E10141E-C8F5-4AF3-A728-296BC60FB2EC}"/>
               </a:ext>
             </a:extLst>
           </p:cNvPr>
@@ -16019,7 +16064,7 @@
           <p:cNvPr id="6" name="">
             <a:extLst xmlns:a="http://schemas.openxmlformats.org/drawingml/2006/main">
               <a:ext uri="{FF2B5EF4-FFF2-40B4-BE49-F238E27FC236}">
-                <a16:creationId xmlns:a16="http://schemas.microsoft.com/office/drawing/2014/main" id="{64F8E2A4-0AF0-4257-90EF-60BC114FBC5F}"/>
+                <a16:creationId xmlns:a16="http://schemas.microsoft.com/office/drawing/2014/main" id="{FABF0BF2-AD83-4BFD-8A2A-5DD5C1BD4789}"/>
               </a:ext>
             </a:extLst>
           </p:cNvPr>
@@ -16081,7 +16126,7 @@
           <p:cNvPr id="7" name="">
             <a:extLst xmlns:a="http://schemas.openxmlformats.org/drawingml/2006/main">
               <a:ext uri="{FF2B5EF4-FFF2-40B4-BE49-F238E27FC236}">
-                <a16:creationId xmlns:a16="http://schemas.microsoft.com/office/drawing/2014/main" id="{D1995954-DB52-4E85-BBBE-37F8201831D4}"/>
+                <a16:creationId xmlns:a16="http://schemas.microsoft.com/office/drawing/2014/main" id="{E36A108F-A363-4790-8D0F-589669B2276F}"/>
               </a:ext>
             </a:extLst>
           </p:cNvPr>
@@ -16112,7 +16157,7 @@
           <p:cNvPr id="8" name="">
             <a:extLst xmlns:a="http://schemas.openxmlformats.org/drawingml/2006/main">
               <a:ext uri="{FF2B5EF4-FFF2-40B4-BE49-F238E27FC236}">
-                <a16:creationId xmlns:a16="http://schemas.microsoft.com/office/drawing/2014/main" id="{3905C437-2B61-4073-B473-54B6239967BB}"/>
+                <a16:creationId xmlns:a16="http://schemas.microsoft.com/office/drawing/2014/main" id="{B01E4D90-FA5A-4A87-8B9F-3939B65BDFB7}"/>
               </a:ext>
             </a:extLst>
           </p:cNvPr>
@@ -16174,7 +16219,7 @@
           <p:cNvPr id="9" name="">
             <a:extLst xmlns:a="http://schemas.openxmlformats.org/drawingml/2006/main">
               <a:ext uri="{FF2B5EF4-FFF2-40B4-BE49-F238E27FC236}">
-                <a16:creationId xmlns:a16="http://schemas.microsoft.com/office/drawing/2014/main" id="{295CBBAD-43E5-46B3-AF8D-A95ADF97D050}"/>
+                <a16:creationId xmlns:a16="http://schemas.microsoft.com/office/drawing/2014/main" id="{844812A5-C732-4268-A151-DE3B4F35630E}"/>
               </a:ext>
             </a:extLst>
           </p:cNvPr>
@@ -16236,7 +16281,7 @@
           <p:cNvPr id="10" name="">
             <a:extLst xmlns:a="http://schemas.openxmlformats.org/drawingml/2006/main">
               <a:ext uri="{FF2B5EF4-FFF2-40B4-BE49-F238E27FC236}">
-                <a16:creationId xmlns:a16="http://schemas.microsoft.com/office/drawing/2014/main" id="{A96A6F61-968C-491A-9D10-3069F4DB4F59}"/>
+                <a16:creationId xmlns:a16="http://schemas.microsoft.com/office/drawing/2014/main" id="{2F808075-CCC1-4778-AB02-F55EA1FEFE96}"/>
               </a:ext>
             </a:extLst>
           </p:cNvPr>
@@ -16298,7 +16343,7 @@
           <p:cNvPr id="11" name="">
             <a:extLst xmlns:a="http://schemas.openxmlformats.org/drawingml/2006/main">
               <a:ext uri="{FF2B5EF4-FFF2-40B4-BE49-F238E27FC236}">
-                <a16:creationId xmlns:a16="http://schemas.microsoft.com/office/drawing/2014/main" id="{F9969E35-68DE-43C9-BA62-161D07A34F8C}"/>
+                <a16:creationId xmlns:a16="http://schemas.microsoft.com/office/drawing/2014/main" id="{5A920FEB-7829-4BFB-91CE-492F7A6DD99B}"/>
               </a:ext>
             </a:extLst>
           </p:cNvPr>
@@ -16329,7 +16374,7 @@
           <p:cNvPr id="12" name="">
             <a:extLst xmlns:a="http://schemas.openxmlformats.org/drawingml/2006/main">
               <a:ext uri="{FF2B5EF4-FFF2-40B4-BE49-F238E27FC236}">
-                <a16:creationId xmlns:a16="http://schemas.microsoft.com/office/drawing/2014/main" id="{0B765420-3E94-4814-95BF-B018565CD454}"/>
+                <a16:creationId xmlns:a16="http://schemas.microsoft.com/office/drawing/2014/main" id="{54A473D8-BB30-44AF-86DF-FF30B3917C06}"/>
               </a:ext>
             </a:extLst>
           </p:cNvPr>
@@ -16391,7 +16436,7 @@
           <p:cNvPr id="13" name="">
             <a:extLst xmlns:a="http://schemas.openxmlformats.org/drawingml/2006/main">
               <a:ext uri="{FF2B5EF4-FFF2-40B4-BE49-F238E27FC236}">
-                <a16:creationId xmlns:a16="http://schemas.microsoft.com/office/drawing/2014/main" id="{EE03C8B9-3F57-447B-924E-C83CFCB172A3}"/>
+                <a16:creationId xmlns:a16="http://schemas.microsoft.com/office/drawing/2014/main" id="{A9DCE846-9340-4A50-84DA-5D04922671C8}"/>
               </a:ext>
             </a:extLst>
           </p:cNvPr>
@@ -16453,7 +16498,7 @@
           <p:cNvPr id="14" name="">
             <a:extLst xmlns:a="http://schemas.openxmlformats.org/drawingml/2006/main">
               <a:ext uri="{FF2B5EF4-FFF2-40B4-BE49-F238E27FC236}">
-                <a16:creationId xmlns:a16="http://schemas.microsoft.com/office/drawing/2014/main" id="{A6489DEE-A487-4BF3-8BC6-2ED150613573}"/>
+                <a16:creationId xmlns:a16="http://schemas.microsoft.com/office/drawing/2014/main" id="{35A6193A-8DC3-4FCD-94B8-AAF47548F84F}"/>
               </a:ext>
             </a:extLst>
           </p:cNvPr>
@@ -16515,7 +16560,7 @@
           <p:cNvPr id="15" name="">
             <a:extLst xmlns:a="http://schemas.openxmlformats.org/drawingml/2006/main">
               <a:ext uri="{FF2B5EF4-FFF2-40B4-BE49-F238E27FC236}">
-                <a16:creationId xmlns:a16="http://schemas.microsoft.com/office/drawing/2014/main" id="{6A9DE2A7-B3ED-4728-8662-10286BAB8028}"/>
+                <a16:creationId xmlns:a16="http://schemas.microsoft.com/office/drawing/2014/main" id="{4A3ED521-0673-461E-98BA-7D8C65F3D6C0}"/>
               </a:ext>
             </a:extLst>
           </p:cNvPr>
@@ -16546,7 +16591,7 @@
           <p:cNvPr id="16" name="">
             <a:extLst xmlns:a="http://schemas.openxmlformats.org/drawingml/2006/main">
               <a:ext uri="{FF2B5EF4-FFF2-40B4-BE49-F238E27FC236}">
-                <a16:creationId xmlns:a16="http://schemas.microsoft.com/office/drawing/2014/main" id="{2595AD9D-76EC-40BE-8469-963A75297F63}"/>
+                <a16:creationId xmlns:a16="http://schemas.microsoft.com/office/drawing/2014/main" id="{2D5DCAC6-858A-402F-B81B-296136F8FDD7}"/>
               </a:ext>
             </a:extLst>
           </p:cNvPr>
@@ -16608,7 +16653,7 @@
           <p:cNvPr id="17" name="">
             <a:extLst xmlns:a="http://schemas.openxmlformats.org/drawingml/2006/main">
               <a:ext uri="{FF2B5EF4-FFF2-40B4-BE49-F238E27FC236}">
-                <a16:creationId xmlns:a16="http://schemas.microsoft.com/office/drawing/2014/main" id="{9EE3E9CA-305C-40CD-9FE4-42079772CADA}"/>
+                <a16:creationId xmlns:a16="http://schemas.microsoft.com/office/drawing/2014/main" id="{11058C61-807B-47A9-B1D1-91256795A5C6}"/>
               </a:ext>
             </a:extLst>
           </p:cNvPr>
@@ -16670,7 +16715,7 @@
           <p:cNvPr id="18" name="">
             <a:extLst xmlns:a="http://schemas.openxmlformats.org/drawingml/2006/main">
               <a:ext uri="{FF2B5EF4-FFF2-40B4-BE49-F238E27FC236}">
-                <a16:creationId xmlns:a16="http://schemas.microsoft.com/office/drawing/2014/main" id="{B1821D04-6EF5-423B-9224-5421B387BACD}"/>
+                <a16:creationId xmlns:a16="http://schemas.microsoft.com/office/drawing/2014/main" id="{DD5F44F2-6C6F-4BBC-9260-59ABA06E273B}"/>
               </a:ext>
             </a:extLst>
           </p:cNvPr>
@@ -16732,7 +16777,7 @@
           <p:cNvPr id="19" name="">
             <a:extLst xmlns:a="http://schemas.openxmlformats.org/drawingml/2006/main">
               <a:ext uri="{FF2B5EF4-FFF2-40B4-BE49-F238E27FC236}">
-                <a16:creationId xmlns:a16="http://schemas.microsoft.com/office/drawing/2014/main" id="{13E2D018-D135-4F6E-B3B2-6E4E0C6EF9E6}"/>
+                <a16:creationId xmlns:a16="http://schemas.microsoft.com/office/drawing/2014/main" id="{CD02A08F-D94E-45BD-B3B3-4BC50F44664F}"/>
               </a:ext>
             </a:extLst>
           </p:cNvPr>
@@ -16763,7 +16808,7 @@
           <p:cNvPr id="20" name="">
             <a:extLst xmlns:a="http://schemas.openxmlformats.org/drawingml/2006/main">
               <a:ext uri="{FF2B5EF4-FFF2-40B4-BE49-F238E27FC236}">
-                <a16:creationId xmlns:a16="http://schemas.microsoft.com/office/drawing/2014/main" id="{E9DA3C86-1A66-4CE7-AA84-0A071DAF8F7F}"/>
+                <a16:creationId xmlns:a16="http://schemas.microsoft.com/office/drawing/2014/main" id="{C74EE33E-41EC-4820-ACEA-04D215C452C0}"/>
               </a:ext>
             </a:extLst>
           </p:cNvPr>
@@ -16825,7 +16870,7 @@
           <p:cNvPr id="21" name="">
             <a:extLst xmlns:a="http://schemas.openxmlformats.org/drawingml/2006/main">
               <a:ext uri="{FF2B5EF4-FFF2-40B4-BE49-F238E27FC236}">
-                <a16:creationId xmlns:a16="http://schemas.microsoft.com/office/drawing/2014/main" id="{F498EF86-833E-4111-9AEE-64D7ACE45B01}"/>
+                <a16:creationId xmlns:a16="http://schemas.microsoft.com/office/drawing/2014/main" id="{B06B0288-C12F-4C05-AA63-31EA7A2A1258}"/>
               </a:ext>
             </a:extLst>
           </p:cNvPr>
@@ -16887,7 +16932,7 @@
           <p:cNvPr id="22" name="">
             <a:extLst xmlns:a="http://schemas.openxmlformats.org/drawingml/2006/main">
               <a:ext uri="{FF2B5EF4-FFF2-40B4-BE49-F238E27FC236}">
-                <a16:creationId xmlns:a16="http://schemas.microsoft.com/office/drawing/2014/main" id="{548D9A85-9F24-48B0-9CBB-7FC00342EC8F}"/>
+                <a16:creationId xmlns:a16="http://schemas.microsoft.com/office/drawing/2014/main" id="{982F46C4-A49D-4052-8B46-9E637E4EAE96}"/>
               </a:ext>
             </a:extLst>
           </p:cNvPr>
@@ -16949,7 +16994,7 @@
           <p:cNvPr id="23" name="">
             <a:extLst xmlns:a="http://schemas.openxmlformats.org/drawingml/2006/main">
               <a:ext uri="{FF2B5EF4-FFF2-40B4-BE49-F238E27FC236}">
-                <a16:creationId xmlns:a16="http://schemas.microsoft.com/office/drawing/2014/main" id="{D0A5F415-1A19-44FC-9E64-EA199E43EA09}"/>
+                <a16:creationId xmlns:a16="http://schemas.microsoft.com/office/drawing/2014/main" id="{2279EEE7-69BA-4DD2-8065-2527639EE12F}"/>
               </a:ext>
             </a:extLst>
           </p:cNvPr>
@@ -16982,7 +17027,7 @@
           <p:cNvPr id="24" name="">
             <a:extLst xmlns:a="http://schemas.openxmlformats.org/drawingml/2006/main">
               <a:ext uri="{FF2B5EF4-FFF2-40B4-BE49-F238E27FC236}">
-                <a16:creationId xmlns:a16="http://schemas.microsoft.com/office/drawing/2014/main" id="{56EC3A4A-0101-4F5D-BDCF-087FDF81EBC5}"/>
+                <a16:creationId xmlns:a16="http://schemas.microsoft.com/office/drawing/2014/main" id="{5093F998-D706-4286-B930-B175A9284CE2}"/>
               </a:ext>
             </a:extLst>
           </p:cNvPr>
@@ -17044,7 +17089,7 @@
           <p:cNvPr id="25" name="footer-rule-4">
             <a:extLst xmlns:a="http://schemas.openxmlformats.org/drawingml/2006/main">
               <a:ext uri="{FF2B5EF4-FFF2-40B4-BE49-F238E27FC236}">
-                <a16:creationId xmlns:a16="http://schemas.microsoft.com/office/drawing/2014/main" id="{00D62966-E416-40F8-B12E-E6892C6ECE41}"/>
+                <a16:creationId xmlns:a16="http://schemas.microsoft.com/office/drawing/2014/main" id="{13E9F5DF-08AB-4F2E-8A7E-33B6F8505B06}"/>
               </a:ext>
             </a:extLst>
           </p:cNvPr>
@@ -17075,7 +17120,7 @@
           <p:cNvPr id="26" name="footer-label-4">
             <a:extLst xmlns:a="http://schemas.openxmlformats.org/drawingml/2006/main">
               <a:ext uri="{FF2B5EF4-FFF2-40B4-BE49-F238E27FC236}">
-                <a16:creationId xmlns:a16="http://schemas.microsoft.com/office/drawing/2014/main" id="{44DC2A84-E548-43DB-8546-1991BF03B723}"/>
+                <a16:creationId xmlns:a16="http://schemas.microsoft.com/office/drawing/2014/main" id="{F9500E04-6055-4334-B76F-717D510AFF6B}"/>
               </a:ext>
             </a:extLst>
           </p:cNvPr>
@@ -17137,7 +17182,7 @@
           <p:cNvPr id="27" name="footer-page-4">
             <a:extLst xmlns:a="http://schemas.openxmlformats.org/drawingml/2006/main">
               <a:ext uri="{FF2B5EF4-FFF2-40B4-BE49-F238E27FC236}">
-                <a16:creationId xmlns:a16="http://schemas.microsoft.com/office/drawing/2014/main" id="{4999D268-B2A5-4896-B496-6006E3061449}"/>
+                <a16:creationId xmlns:a16="http://schemas.microsoft.com/office/drawing/2014/main" id="{CFE72236-1834-44AE-9EC1-F23C82D945A3}"/>
               </a:ext>
             </a:extLst>
           </p:cNvPr>
@@ -17197,7 +17242,7 @@
     </p:spTree>
     <p:extLst>
       <p:ext uri="{BB962C8B-B14F-4D97-AF65-F5344CB8AC3E}">
-        <p14:creationId xmlns:p14="http://schemas.microsoft.com/office/powerpoint/2010/main" val="1884541903"/>
+        <p14:creationId xmlns:p14="http://schemas.microsoft.com/office/powerpoint/2010/main" val="425403206"/>
       </p:ext>
     </p:extLst>
   </p:cSld>
@@ -17228,7 +17273,7 @@
           <p:cNvPr id="31" name="side-accent-5">
             <a:extLst xmlns:a="http://schemas.openxmlformats.org/drawingml/2006/main">
               <a:ext uri="{FF2B5EF4-FFF2-40B4-BE49-F238E27FC236}">
-                <a16:creationId xmlns:a16="http://schemas.microsoft.com/office/drawing/2014/main" id="{8EA7A6B6-641E-439F-831B-EB2875F3BF4C}"/>
+                <a16:creationId xmlns:a16="http://schemas.microsoft.com/office/drawing/2014/main" id="{7D908226-3A03-44B6-B7AA-AAF3272EFDBE}"/>
               </a:ext>
             </a:extLst>
           </p:cNvPr>
@@ -17259,7 +17304,7 @@
           <p:cNvPr id="2" name="kicker-5">
             <a:extLst xmlns:a="http://schemas.openxmlformats.org/drawingml/2006/main">
               <a:ext uri="{FF2B5EF4-FFF2-40B4-BE49-F238E27FC236}">
-                <a16:creationId xmlns:a16="http://schemas.microsoft.com/office/drawing/2014/main" id="{627C264B-E641-420B-A1C5-6D3C2E4C229D}"/>
+                <a16:creationId xmlns:a16="http://schemas.microsoft.com/office/drawing/2014/main" id="{3D89A5CB-B5A4-4A07-8178-FF819FEA9D86}"/>
               </a:ext>
             </a:extLst>
           </p:cNvPr>
@@ -17321,7 +17366,7 @@
           <p:cNvPr id="3" name="title-5">
             <a:extLst xmlns:a="http://schemas.openxmlformats.org/drawingml/2006/main">
               <a:ext uri="{FF2B5EF4-FFF2-40B4-BE49-F238E27FC236}">
-                <a16:creationId xmlns:a16="http://schemas.microsoft.com/office/drawing/2014/main" id="{28F37DB7-D637-4165-8DAB-A6204B5AB2C5}"/>
+                <a16:creationId xmlns:a16="http://schemas.microsoft.com/office/drawing/2014/main" id="{E250BEF7-8025-413E-9963-CB3DBB656C41}"/>
               </a:ext>
             </a:extLst>
           </p:cNvPr>
@@ -17383,7 +17428,7 @@
           <p:cNvPr id="4" name="">
             <a:extLst xmlns:a="http://schemas.openxmlformats.org/drawingml/2006/main">
               <a:ext uri="{FF2B5EF4-FFF2-40B4-BE49-F238E27FC236}">
-                <a16:creationId xmlns:a16="http://schemas.microsoft.com/office/drawing/2014/main" id="{9155FC74-02E2-489A-A3FF-A084CEC05C8A}"/>
+                <a16:creationId xmlns:a16="http://schemas.microsoft.com/office/drawing/2014/main" id="{10646622-FA9B-4B57-8727-6866335F7ABF}"/>
               </a:ext>
             </a:extLst>
           </p:cNvPr>
@@ -17445,7 +17490,7 @@
           <p:cNvPr id="5" name="workflow-line">
             <a:extLst xmlns:a="http://schemas.openxmlformats.org/drawingml/2006/main">
               <a:ext uri="{FF2B5EF4-FFF2-40B4-BE49-F238E27FC236}">
-                <a16:creationId xmlns:a16="http://schemas.microsoft.com/office/drawing/2014/main" id="{19777EE4-62D6-4684-B68D-9C1358AFB668}"/>
+                <a16:creationId xmlns:a16="http://schemas.microsoft.com/office/drawing/2014/main" id="{C0E402A0-DCBF-41E1-8835-414689C4C407}"/>
               </a:ext>
             </a:extLst>
           </p:cNvPr>
@@ -17476,7 +17521,7 @@
           <p:cNvPr id="6" name="workflow-arrow">
             <a:extLst xmlns:a="http://schemas.openxmlformats.org/drawingml/2006/main">
               <a:ext uri="{FF2B5EF4-FFF2-40B4-BE49-F238E27FC236}">
-                <a16:creationId xmlns:a16="http://schemas.microsoft.com/office/drawing/2014/main" id="{0022651F-48DC-43CC-A54B-52378DB20631}"/>
+                <a16:creationId xmlns:a16="http://schemas.microsoft.com/office/drawing/2014/main" id="{5EE5ADE9-22DA-4941-A6D5-7744198F621B}"/>
               </a:ext>
             </a:extLst>
           </p:cNvPr>
@@ -17507,7 +17552,7 @@
           <p:cNvPr id="7" name="">
             <a:extLst xmlns:a="http://schemas.openxmlformats.org/drawingml/2006/main">
               <a:ext uri="{FF2B5EF4-FFF2-40B4-BE49-F238E27FC236}">
-                <a16:creationId xmlns:a16="http://schemas.microsoft.com/office/drawing/2014/main" id="{A073CF55-7604-4A22-B0DE-84135DE863FD}"/>
+                <a16:creationId xmlns:a16="http://schemas.microsoft.com/office/drawing/2014/main" id="{8B4B60C4-A827-48A9-9ADF-8FA30723432D}"/>
               </a:ext>
             </a:extLst>
           </p:cNvPr>
@@ -17538,7 +17583,7 @@
           <p:cNvPr id="8" name="">
             <a:extLst xmlns:a="http://schemas.openxmlformats.org/drawingml/2006/main">
               <a:ext uri="{FF2B5EF4-FFF2-40B4-BE49-F238E27FC236}">
-                <a16:creationId xmlns:a16="http://schemas.microsoft.com/office/drawing/2014/main" id="{EA53AE18-AE41-4CC4-BCB8-219CFDE3728E}"/>
+                <a16:creationId xmlns:a16="http://schemas.microsoft.com/office/drawing/2014/main" id="{7D1842D8-2599-4E95-A4D4-8F09FF272D14}"/>
               </a:ext>
             </a:extLst>
           </p:cNvPr>
@@ -17600,7 +17645,7 @@
           <p:cNvPr id="9" name="">
             <a:extLst xmlns:a="http://schemas.openxmlformats.org/drawingml/2006/main">
               <a:ext uri="{FF2B5EF4-FFF2-40B4-BE49-F238E27FC236}">
-                <a16:creationId xmlns:a16="http://schemas.microsoft.com/office/drawing/2014/main" id="{C572D91A-D9BB-421E-A488-5DDECC145C98}"/>
+                <a16:creationId xmlns:a16="http://schemas.microsoft.com/office/drawing/2014/main" id="{890DC9B5-13EB-4AF4-AA3D-B1F11C9C65AA}"/>
               </a:ext>
             </a:extLst>
           </p:cNvPr>
@@ -17662,7 +17707,7 @@
           <p:cNvPr id="10" name="">
             <a:extLst xmlns:a="http://schemas.openxmlformats.org/drawingml/2006/main">
               <a:ext uri="{FF2B5EF4-FFF2-40B4-BE49-F238E27FC236}">
-                <a16:creationId xmlns:a16="http://schemas.microsoft.com/office/drawing/2014/main" id="{1AFA824A-EBBA-4555-A57A-960060EBE28D}"/>
+                <a16:creationId xmlns:a16="http://schemas.microsoft.com/office/drawing/2014/main" id="{40877F88-3BB4-4E3A-B0CB-1F9CF35989E3}"/>
               </a:ext>
             </a:extLst>
           </p:cNvPr>
@@ -17724,7 +17769,7 @@
           <p:cNvPr id="11" name="">
             <a:extLst xmlns:a="http://schemas.openxmlformats.org/drawingml/2006/main">
               <a:ext uri="{FF2B5EF4-FFF2-40B4-BE49-F238E27FC236}">
-                <a16:creationId xmlns:a16="http://schemas.microsoft.com/office/drawing/2014/main" id="{B533807C-33E9-4498-8162-044724B4FDC3}"/>
+                <a16:creationId xmlns:a16="http://schemas.microsoft.com/office/drawing/2014/main" id="{CAA296BB-897B-4CC5-BBC3-489DE2F05EDE}"/>
               </a:ext>
             </a:extLst>
           </p:cNvPr>
@@ -17755,7 +17800,7 @@
           <p:cNvPr id="12" name="">
             <a:extLst xmlns:a="http://schemas.openxmlformats.org/drawingml/2006/main">
               <a:ext uri="{FF2B5EF4-FFF2-40B4-BE49-F238E27FC236}">
-                <a16:creationId xmlns:a16="http://schemas.microsoft.com/office/drawing/2014/main" id="{F92A8576-5E29-45D1-8F75-6316D269863A}"/>
+                <a16:creationId xmlns:a16="http://schemas.microsoft.com/office/drawing/2014/main" id="{80977E22-FB6C-4392-8846-A85CAD940F54}"/>
               </a:ext>
             </a:extLst>
           </p:cNvPr>
@@ -17817,7 +17862,7 @@
           <p:cNvPr id="13" name="">
             <a:extLst xmlns:a="http://schemas.openxmlformats.org/drawingml/2006/main">
               <a:ext uri="{FF2B5EF4-FFF2-40B4-BE49-F238E27FC236}">
-                <a16:creationId xmlns:a16="http://schemas.microsoft.com/office/drawing/2014/main" id="{B6A7C876-D603-4B1C-B6E4-0F5EA781B228}"/>
+                <a16:creationId xmlns:a16="http://schemas.microsoft.com/office/drawing/2014/main" id="{0F7F06EE-DB40-4978-B782-52E1BFFF0E4E}"/>
               </a:ext>
             </a:extLst>
           </p:cNvPr>
@@ -17879,7 +17924,7 @@
           <p:cNvPr id="14" name="">
             <a:extLst xmlns:a="http://schemas.openxmlformats.org/drawingml/2006/main">
               <a:ext uri="{FF2B5EF4-FFF2-40B4-BE49-F238E27FC236}">
-                <a16:creationId xmlns:a16="http://schemas.microsoft.com/office/drawing/2014/main" id="{FFF6A7B0-D5A9-485E-8DB0-86E38EC9E63F}"/>
+                <a16:creationId xmlns:a16="http://schemas.microsoft.com/office/drawing/2014/main" id="{496745F7-A4EC-40E9-95DB-E116784B5211}"/>
               </a:ext>
             </a:extLst>
           </p:cNvPr>
@@ -17941,7 +17986,7 @@
           <p:cNvPr id="15" name="">
             <a:extLst xmlns:a="http://schemas.openxmlformats.org/drawingml/2006/main">
               <a:ext uri="{FF2B5EF4-FFF2-40B4-BE49-F238E27FC236}">
-                <a16:creationId xmlns:a16="http://schemas.microsoft.com/office/drawing/2014/main" id="{F0100418-63EE-4087-9769-49C9EAAF157A}"/>
+                <a16:creationId xmlns:a16="http://schemas.microsoft.com/office/drawing/2014/main" id="{3BE09458-5AA6-48B8-B204-A3A3284EF8D5}"/>
               </a:ext>
             </a:extLst>
           </p:cNvPr>
@@ -17972,7 +18017,7 @@
           <p:cNvPr id="16" name="">
             <a:extLst xmlns:a="http://schemas.openxmlformats.org/drawingml/2006/main">
               <a:ext uri="{FF2B5EF4-FFF2-40B4-BE49-F238E27FC236}">
-                <a16:creationId xmlns:a16="http://schemas.microsoft.com/office/drawing/2014/main" id="{E1DF6B8F-D856-4736-96F1-6593AFB41C89}"/>
+                <a16:creationId xmlns:a16="http://schemas.microsoft.com/office/drawing/2014/main" id="{CC7AE8C6-C621-4962-B3B1-688728B29683}"/>
               </a:ext>
             </a:extLst>
           </p:cNvPr>
@@ -18034,7 +18079,7 @@
           <p:cNvPr id="17" name="">
             <a:extLst xmlns:a="http://schemas.openxmlformats.org/drawingml/2006/main">
               <a:ext uri="{FF2B5EF4-FFF2-40B4-BE49-F238E27FC236}">
-                <a16:creationId xmlns:a16="http://schemas.microsoft.com/office/drawing/2014/main" id="{F7C07F08-B40A-4B24-9008-21A929FB3736}"/>
+                <a16:creationId xmlns:a16="http://schemas.microsoft.com/office/drawing/2014/main" id="{E2C15303-77C1-4E72-9D69-02C8A913EB3F}"/>
               </a:ext>
             </a:extLst>
           </p:cNvPr>
@@ -18096,7 +18141,7 @@
           <p:cNvPr id="18" name="">
             <a:extLst xmlns:a="http://schemas.openxmlformats.org/drawingml/2006/main">
               <a:ext uri="{FF2B5EF4-FFF2-40B4-BE49-F238E27FC236}">
-                <a16:creationId xmlns:a16="http://schemas.microsoft.com/office/drawing/2014/main" id="{90D5E2C8-7753-4B7B-9FCE-131469C5A1EE}"/>
+                <a16:creationId xmlns:a16="http://schemas.microsoft.com/office/drawing/2014/main" id="{7884829E-4829-4882-85FA-0E553006237E}"/>
               </a:ext>
             </a:extLst>
           </p:cNvPr>
@@ -18158,7 +18203,7 @@
           <p:cNvPr id="19" name="">
             <a:extLst xmlns:a="http://schemas.openxmlformats.org/drawingml/2006/main">
               <a:ext uri="{FF2B5EF4-FFF2-40B4-BE49-F238E27FC236}">
-                <a16:creationId xmlns:a16="http://schemas.microsoft.com/office/drawing/2014/main" id="{DB156925-EA0C-4546-BD49-B1A02DB1BB57}"/>
+                <a16:creationId xmlns:a16="http://schemas.microsoft.com/office/drawing/2014/main" id="{9012738C-6E89-4093-B4BB-7C2C034CCBD8}"/>
               </a:ext>
             </a:extLst>
           </p:cNvPr>
@@ -18189,7 +18234,7 @@
           <p:cNvPr id="20" name="">
             <a:extLst xmlns:a="http://schemas.openxmlformats.org/drawingml/2006/main">
               <a:ext uri="{FF2B5EF4-FFF2-40B4-BE49-F238E27FC236}">
-                <a16:creationId xmlns:a16="http://schemas.microsoft.com/office/drawing/2014/main" id="{12016007-6732-4F78-A84F-74E12AEF75EF}"/>
+                <a16:creationId xmlns:a16="http://schemas.microsoft.com/office/drawing/2014/main" id="{EEC85B4B-D162-429B-B32B-F503278C91D2}"/>
               </a:ext>
             </a:extLst>
           </p:cNvPr>
@@ -18251,7 +18296,7 @@
           <p:cNvPr id="21" name="">
             <a:extLst xmlns:a="http://schemas.openxmlformats.org/drawingml/2006/main">
               <a:ext uri="{FF2B5EF4-FFF2-40B4-BE49-F238E27FC236}">
-                <a16:creationId xmlns:a16="http://schemas.microsoft.com/office/drawing/2014/main" id="{A4B9EFCE-EAEA-443A-84E2-E0B54A7AE7F8}"/>
+                <a16:creationId xmlns:a16="http://schemas.microsoft.com/office/drawing/2014/main" id="{E306BE5F-32D9-4043-B4D0-D86849422D93}"/>
               </a:ext>
             </a:extLst>
           </p:cNvPr>
@@ -18313,7 +18358,7 @@
           <p:cNvPr id="22" name="">
             <a:extLst xmlns:a="http://schemas.openxmlformats.org/drawingml/2006/main">
               <a:ext uri="{FF2B5EF4-FFF2-40B4-BE49-F238E27FC236}">
-                <a16:creationId xmlns:a16="http://schemas.microsoft.com/office/drawing/2014/main" id="{51B323EC-0B9A-430C-8EE8-D7EFADFE6EAA}"/>
+                <a16:creationId xmlns:a16="http://schemas.microsoft.com/office/drawing/2014/main" id="{E13B1B63-E056-44B4-B353-BED74824573D}"/>
               </a:ext>
             </a:extLst>
           </p:cNvPr>
@@ -18375,7 +18420,7 @@
           <p:cNvPr id="23" name="">
             <a:extLst xmlns:a="http://schemas.openxmlformats.org/drawingml/2006/main">
               <a:ext uri="{FF2B5EF4-FFF2-40B4-BE49-F238E27FC236}">
-                <a16:creationId xmlns:a16="http://schemas.microsoft.com/office/drawing/2014/main" id="{9C27E341-E18D-462B-B9E3-9054530FBE13}"/>
+                <a16:creationId xmlns:a16="http://schemas.microsoft.com/office/drawing/2014/main" id="{0160196F-0995-453F-8FF5-95449F988223}"/>
               </a:ext>
             </a:extLst>
           </p:cNvPr>
@@ -18406,7 +18451,7 @@
           <p:cNvPr id="24" name="">
             <a:extLst xmlns:a="http://schemas.openxmlformats.org/drawingml/2006/main">
               <a:ext uri="{FF2B5EF4-FFF2-40B4-BE49-F238E27FC236}">
-                <a16:creationId xmlns:a16="http://schemas.microsoft.com/office/drawing/2014/main" id="{25B0DC59-5232-4856-BF36-7C2ED496D697}"/>
+                <a16:creationId xmlns:a16="http://schemas.microsoft.com/office/drawing/2014/main" id="{7957961A-1027-4D73-90EA-833DEE12FDF3}"/>
               </a:ext>
             </a:extLst>
           </p:cNvPr>
@@ -18468,7 +18513,7 @@
           <p:cNvPr id="25" name="">
             <a:extLst xmlns:a="http://schemas.openxmlformats.org/drawingml/2006/main">
               <a:ext uri="{FF2B5EF4-FFF2-40B4-BE49-F238E27FC236}">
-                <a16:creationId xmlns:a16="http://schemas.microsoft.com/office/drawing/2014/main" id="{044F5B00-7B8E-46C4-8F77-597437EC0D5E}"/>
+                <a16:creationId xmlns:a16="http://schemas.microsoft.com/office/drawing/2014/main" id="{7A3238B4-0537-4293-B90F-C28AA7DCF2B7}"/>
               </a:ext>
             </a:extLst>
           </p:cNvPr>
@@ -18530,7 +18575,7 @@
           <p:cNvPr id="26" name="">
             <a:extLst xmlns:a="http://schemas.openxmlformats.org/drawingml/2006/main">
               <a:ext uri="{FF2B5EF4-FFF2-40B4-BE49-F238E27FC236}">
-                <a16:creationId xmlns:a16="http://schemas.microsoft.com/office/drawing/2014/main" id="{67C9E876-9095-4113-B7E4-CC941502F10D}"/>
+                <a16:creationId xmlns:a16="http://schemas.microsoft.com/office/drawing/2014/main" id="{613D599A-83DB-47A3-ADD8-1A35271FF775}"/>
               </a:ext>
             </a:extLst>
           </p:cNvPr>
@@ -18592,7 +18637,7 @@
           <p:cNvPr id="27" name="">
             <a:extLst xmlns:a="http://schemas.openxmlformats.org/drawingml/2006/main">
               <a:ext uri="{FF2B5EF4-FFF2-40B4-BE49-F238E27FC236}">
-                <a16:creationId xmlns:a16="http://schemas.microsoft.com/office/drawing/2014/main" id="{79A97088-B35F-4C69-837E-2C3FE34CAFEC}"/>
+                <a16:creationId xmlns:a16="http://schemas.microsoft.com/office/drawing/2014/main" id="{2B36BF3B-9D0B-4C37-8C99-7075EFA0AE0D}"/>
               </a:ext>
             </a:extLst>
           </p:cNvPr>
@@ -18654,7 +18699,7 @@
           <p:cNvPr id="28" name="footer-rule-5">
             <a:extLst xmlns:a="http://schemas.openxmlformats.org/drawingml/2006/main">
               <a:ext uri="{FF2B5EF4-FFF2-40B4-BE49-F238E27FC236}">
-                <a16:creationId xmlns:a16="http://schemas.microsoft.com/office/drawing/2014/main" id="{370FBF1D-EF19-400B-8560-53921914BAED}"/>
+                <a16:creationId xmlns:a16="http://schemas.microsoft.com/office/drawing/2014/main" id="{8F404831-D043-45FF-8CA6-E8E444936DE4}"/>
               </a:ext>
             </a:extLst>
           </p:cNvPr>
@@ -18685,7 +18730,7 @@
           <p:cNvPr id="29" name="footer-label-5">
             <a:extLst xmlns:a="http://schemas.openxmlformats.org/drawingml/2006/main">
               <a:ext uri="{FF2B5EF4-FFF2-40B4-BE49-F238E27FC236}">
-                <a16:creationId xmlns:a16="http://schemas.microsoft.com/office/drawing/2014/main" id="{F45394DA-82E1-48F3-BBCF-BA5C1356EF7E}"/>
+                <a16:creationId xmlns:a16="http://schemas.microsoft.com/office/drawing/2014/main" id="{36AFDBB6-7488-4131-A9C8-DBC7DB8BED05}"/>
               </a:ext>
             </a:extLst>
           </p:cNvPr>
@@ -18747,7 +18792,7 @@
           <p:cNvPr id="30" name="footer-page-5">
             <a:extLst xmlns:a="http://schemas.openxmlformats.org/drawingml/2006/main">
               <a:ext uri="{FF2B5EF4-FFF2-40B4-BE49-F238E27FC236}">
-                <a16:creationId xmlns:a16="http://schemas.microsoft.com/office/drawing/2014/main" id="{F37C697B-6083-47B8-843B-58063D05D252}"/>
+                <a16:creationId xmlns:a16="http://schemas.microsoft.com/office/drawing/2014/main" id="{FC784354-8B0D-492D-B4F1-CF31929CE2CA}"/>
               </a:ext>
             </a:extLst>
           </p:cNvPr>
@@ -18807,7 +18852,7 @@
     </p:spTree>
     <p:extLst>
       <p:ext uri="{BB962C8B-B14F-4D97-AF65-F5344CB8AC3E}">
-        <p14:creationId xmlns:p14="http://schemas.microsoft.com/office/powerpoint/2010/main" val="1000659268"/>
+        <p14:creationId xmlns:p14="http://schemas.microsoft.com/office/powerpoint/2010/main" val="564377881"/>
       </p:ext>
     </p:extLst>
   </p:cSld>
@@ -18838,7 +18883,7 @@
           <p:cNvPr id="22" name="side-accent-6">
             <a:extLst xmlns:a="http://schemas.openxmlformats.org/drawingml/2006/main">
               <a:ext uri="{FF2B5EF4-FFF2-40B4-BE49-F238E27FC236}">
-                <a16:creationId xmlns:a16="http://schemas.microsoft.com/office/drawing/2014/main" id="{458C03D4-1899-45CF-8267-FCA032589759}"/>
+                <a16:creationId xmlns:a16="http://schemas.microsoft.com/office/drawing/2014/main" id="{48926D11-3FE8-4BF4-8951-6ED60266D011}"/>
               </a:ext>
             </a:extLst>
           </p:cNvPr>
@@ -18869,7 +18914,7 @@
           <p:cNvPr id="2" name="kicker-6">
             <a:extLst xmlns:a="http://schemas.openxmlformats.org/drawingml/2006/main">
               <a:ext uri="{FF2B5EF4-FFF2-40B4-BE49-F238E27FC236}">
-                <a16:creationId xmlns:a16="http://schemas.microsoft.com/office/drawing/2014/main" id="{7D40E29E-7F5B-432F-878A-76B2377F728F}"/>
+                <a16:creationId xmlns:a16="http://schemas.microsoft.com/office/drawing/2014/main" id="{00B1575E-AA41-434E-BE74-6F63CC5EE323}"/>
               </a:ext>
             </a:extLst>
           </p:cNvPr>
@@ -18931,7 +18976,7 @@
           <p:cNvPr id="3" name="title-6">
             <a:extLst xmlns:a="http://schemas.openxmlformats.org/drawingml/2006/main">
               <a:ext uri="{FF2B5EF4-FFF2-40B4-BE49-F238E27FC236}">
-                <a16:creationId xmlns:a16="http://schemas.microsoft.com/office/drawing/2014/main" id="{4ABE1EE7-F998-4261-B1F2-51AE96E39D4A}"/>
+                <a16:creationId xmlns:a16="http://schemas.microsoft.com/office/drawing/2014/main" id="{0623E43D-C193-4915-A3CF-4C3E6CD1C68B}"/>
               </a:ext>
             </a:extLst>
           </p:cNvPr>
@@ -18993,7 +19038,7 @@
           <p:cNvPr id="4" name="">
             <a:extLst xmlns:a="http://schemas.openxmlformats.org/drawingml/2006/main">
               <a:ext uri="{FF2B5EF4-FFF2-40B4-BE49-F238E27FC236}">
-                <a16:creationId xmlns:a16="http://schemas.microsoft.com/office/drawing/2014/main" id="{E8B1D94A-F716-4494-BA4C-A74722A84F61}"/>
+                <a16:creationId xmlns:a16="http://schemas.microsoft.com/office/drawing/2014/main" id="{E9B91710-7441-49C8-AF27-DDDFCEB589E2}"/>
               </a:ext>
             </a:extLst>
           </p:cNvPr>
@@ -19055,7 +19100,7 @@
           <p:cNvPr id="5" name="">
             <a:extLst xmlns:a="http://schemas.openxmlformats.org/drawingml/2006/main">
               <a:ext uri="{FF2B5EF4-FFF2-40B4-BE49-F238E27FC236}">
-                <a16:creationId xmlns:a16="http://schemas.microsoft.com/office/drawing/2014/main" id="{5D7FF43E-FDE2-46E8-9F86-10CA65B77EC6}"/>
+                <a16:creationId xmlns:a16="http://schemas.microsoft.com/office/drawing/2014/main" id="{A7FA5491-A57B-45A4-99A4-D984DAE828BD}"/>
               </a:ext>
             </a:extLst>
           </p:cNvPr>
@@ -19117,7 +19162,7 @@
           <p:cNvPr id="6" name="">
             <a:extLst xmlns:a="http://schemas.openxmlformats.org/drawingml/2006/main">
               <a:ext uri="{FF2B5EF4-FFF2-40B4-BE49-F238E27FC236}">
-                <a16:creationId xmlns:a16="http://schemas.microsoft.com/office/drawing/2014/main" id="{3CEE84B3-1170-4D00-ACED-063F5FDF882B}"/>
+                <a16:creationId xmlns:a16="http://schemas.microsoft.com/office/drawing/2014/main" id="{33BB7B60-FA48-44FC-B3EE-E5E8FB8A4AF4}"/>
               </a:ext>
             </a:extLst>
           </p:cNvPr>
@@ -19179,7 +19224,7 @@
           <p:cNvPr id="7" name="">
             <a:extLst xmlns:a="http://schemas.openxmlformats.org/drawingml/2006/main">
               <a:ext uri="{FF2B5EF4-FFF2-40B4-BE49-F238E27FC236}">
-                <a16:creationId xmlns:a16="http://schemas.microsoft.com/office/drawing/2014/main" id="{5E3F21EE-F125-444D-9E75-02780467217B}"/>
+                <a16:creationId xmlns:a16="http://schemas.microsoft.com/office/drawing/2014/main" id="{D71FB4C6-2F7A-414E-96FA-EE57990807C4}"/>
               </a:ext>
             </a:extLst>
           </p:cNvPr>
@@ -19210,7 +19255,7 @@
           <p:cNvPr id="8" name="">
             <a:extLst xmlns:a="http://schemas.openxmlformats.org/drawingml/2006/main">
               <a:ext uri="{FF2B5EF4-FFF2-40B4-BE49-F238E27FC236}">
-                <a16:creationId xmlns:a16="http://schemas.microsoft.com/office/drawing/2014/main" id="{1B8B7D63-09BD-4365-8AA9-B35C628CB104}"/>
+                <a16:creationId xmlns:a16="http://schemas.microsoft.com/office/drawing/2014/main" id="{97046D05-DB82-44A6-ABBB-ECF3EFCB613F}"/>
               </a:ext>
             </a:extLst>
           </p:cNvPr>
@@ -19299,7 +19344,7 @@
           <p:cNvPr id="9" name="">
             <a:extLst xmlns:a="http://schemas.openxmlformats.org/drawingml/2006/main">
               <a:ext uri="{FF2B5EF4-FFF2-40B4-BE49-F238E27FC236}">
-                <a16:creationId xmlns:a16="http://schemas.microsoft.com/office/drawing/2014/main" id="{24A2EEE7-39CB-4666-8D81-6FB24DFEB2F9}"/>
+                <a16:creationId xmlns:a16="http://schemas.microsoft.com/office/drawing/2014/main" id="{2CB30A76-047D-47C2-977A-C1C4A6CF5353}"/>
               </a:ext>
             </a:extLst>
           </p:cNvPr>
@@ -19361,7 +19406,7 @@
           <p:cNvPr id="10" name="">
             <a:extLst xmlns:a="http://schemas.openxmlformats.org/drawingml/2006/main">
               <a:ext uri="{FF2B5EF4-FFF2-40B4-BE49-F238E27FC236}">
-                <a16:creationId xmlns:a16="http://schemas.microsoft.com/office/drawing/2014/main" id="{3422E4A8-7F3E-4EE8-9CE5-EC5ED4FA0D15}"/>
+                <a16:creationId xmlns:a16="http://schemas.microsoft.com/office/drawing/2014/main" id="{19683D37-10D3-4A02-B36F-28AFD24C50AD}"/>
               </a:ext>
             </a:extLst>
           </p:cNvPr>
@@ -19423,7 +19468,7 @@
           <p:cNvPr id="11" name="">
             <a:extLst xmlns:a="http://schemas.openxmlformats.org/drawingml/2006/main">
               <a:ext uri="{FF2B5EF4-FFF2-40B4-BE49-F238E27FC236}">
-                <a16:creationId xmlns:a16="http://schemas.microsoft.com/office/drawing/2014/main" id="{BF4E8181-E4AE-4650-941C-FC65CCB72557}"/>
+                <a16:creationId xmlns:a16="http://schemas.microsoft.com/office/drawing/2014/main" id="{53DF27DF-0CCE-40FA-A9A5-04F613A7C84C}"/>
               </a:ext>
             </a:extLst>
           </p:cNvPr>
@@ -19454,7 +19499,7 @@
           <p:cNvPr id="12" name="">
             <a:extLst xmlns:a="http://schemas.openxmlformats.org/drawingml/2006/main">
               <a:ext uri="{FF2B5EF4-FFF2-40B4-BE49-F238E27FC236}">
-                <a16:creationId xmlns:a16="http://schemas.microsoft.com/office/drawing/2014/main" id="{C6501293-483E-47D8-B565-DBA3A46022DE}"/>
+                <a16:creationId xmlns:a16="http://schemas.microsoft.com/office/drawing/2014/main" id="{283D6F38-103A-44A4-9BC2-7CA1759F73C9}"/>
               </a:ext>
             </a:extLst>
           </p:cNvPr>
@@ -19543,7 +19588,7 @@
           <p:cNvPr id="13" name="">
             <a:extLst xmlns:a="http://schemas.openxmlformats.org/drawingml/2006/main">
               <a:ext uri="{FF2B5EF4-FFF2-40B4-BE49-F238E27FC236}">
-                <a16:creationId xmlns:a16="http://schemas.microsoft.com/office/drawing/2014/main" id="{91D11419-C4D6-4BAE-875B-E3BCE7DB43DF}"/>
+                <a16:creationId xmlns:a16="http://schemas.microsoft.com/office/drawing/2014/main" id="{D1FAC5A8-6DC4-4BF2-BE6D-2EBF1FA78359}"/>
               </a:ext>
             </a:extLst>
           </p:cNvPr>
@@ -19605,7 +19650,7 @@
           <p:cNvPr id="14" name="">
             <a:extLst xmlns:a="http://schemas.openxmlformats.org/drawingml/2006/main">
               <a:ext uri="{FF2B5EF4-FFF2-40B4-BE49-F238E27FC236}">
-                <a16:creationId xmlns:a16="http://schemas.microsoft.com/office/drawing/2014/main" id="{CAA86058-F8C0-4EF4-B175-2B61E085BF99}"/>
+                <a16:creationId xmlns:a16="http://schemas.microsoft.com/office/drawing/2014/main" id="{05597145-8FAC-460D-9420-DBF23A8BCA27}"/>
               </a:ext>
             </a:extLst>
           </p:cNvPr>
@@ -19667,7 +19712,7 @@
           <p:cNvPr id="15" name="">
             <a:extLst xmlns:a="http://schemas.openxmlformats.org/drawingml/2006/main">
               <a:ext uri="{FF2B5EF4-FFF2-40B4-BE49-F238E27FC236}">
-                <a16:creationId xmlns:a16="http://schemas.microsoft.com/office/drawing/2014/main" id="{9C498936-B758-40A8-B22A-4D0741D968D1}"/>
+                <a16:creationId xmlns:a16="http://schemas.microsoft.com/office/drawing/2014/main" id="{882DFF7A-8956-40E8-A4A3-8B6BA0B86EF4}"/>
               </a:ext>
             </a:extLst>
           </p:cNvPr>
@@ -19698,7 +19743,7 @@
           <p:cNvPr id="16" name="">
             <a:extLst xmlns:a="http://schemas.openxmlformats.org/drawingml/2006/main">
               <a:ext uri="{FF2B5EF4-FFF2-40B4-BE49-F238E27FC236}">
-                <a16:creationId xmlns:a16="http://schemas.microsoft.com/office/drawing/2014/main" id="{B9D25F2D-FE03-41DD-AC31-42ABF509A8D5}"/>
+                <a16:creationId xmlns:a16="http://schemas.microsoft.com/office/drawing/2014/main" id="{A0259892-BAEF-4F20-9D0F-FEDD75C3D649}"/>
               </a:ext>
             </a:extLst>
           </p:cNvPr>
@@ -19787,7 +19832,7 @@
           <p:cNvPr id="17" name="">
             <a:extLst xmlns:a="http://schemas.openxmlformats.org/drawingml/2006/main">
               <a:ext uri="{FF2B5EF4-FFF2-40B4-BE49-F238E27FC236}">
-                <a16:creationId xmlns:a16="http://schemas.microsoft.com/office/drawing/2014/main" id="{861E5FB0-440B-483B-ADBC-34FC1D4F0EA4}"/>
+                <a16:creationId xmlns:a16="http://schemas.microsoft.com/office/drawing/2014/main" id="{ED2E0853-1499-4C79-B46D-27A446B071C3}"/>
               </a:ext>
             </a:extLst>
           </p:cNvPr>
@@ -19820,7 +19865,7 @@
           <p:cNvPr id="18" name="">
             <a:extLst xmlns:a="http://schemas.openxmlformats.org/drawingml/2006/main">
               <a:ext uri="{FF2B5EF4-FFF2-40B4-BE49-F238E27FC236}">
-                <a16:creationId xmlns:a16="http://schemas.microsoft.com/office/drawing/2014/main" id="{86B00F28-F9E8-4EA4-A585-365FC7270C7B}"/>
+                <a16:creationId xmlns:a16="http://schemas.microsoft.com/office/drawing/2014/main" id="{577F9448-8AC7-43A1-BF21-639145BA4A14}"/>
               </a:ext>
             </a:extLst>
           </p:cNvPr>
@@ -19909,7 +19954,7 @@
           <p:cNvPr id="19" name="footer-rule-6">
             <a:extLst xmlns:a="http://schemas.openxmlformats.org/drawingml/2006/main">
               <a:ext uri="{FF2B5EF4-FFF2-40B4-BE49-F238E27FC236}">
-                <a16:creationId xmlns:a16="http://schemas.microsoft.com/office/drawing/2014/main" id="{092104D4-67D0-4714-A32C-B2A56F5DADB2}"/>
+                <a16:creationId xmlns:a16="http://schemas.microsoft.com/office/drawing/2014/main" id="{45EEBE49-997E-4A41-9541-BEFB263C7C76}"/>
               </a:ext>
             </a:extLst>
           </p:cNvPr>
@@ -19940,7 +19985,7 @@
           <p:cNvPr id="20" name="footer-label-6">
             <a:extLst xmlns:a="http://schemas.openxmlformats.org/drawingml/2006/main">
               <a:ext uri="{FF2B5EF4-FFF2-40B4-BE49-F238E27FC236}">
-                <a16:creationId xmlns:a16="http://schemas.microsoft.com/office/drawing/2014/main" id="{7858B04A-2726-4C8B-AE35-06384D27663B}"/>
+                <a16:creationId xmlns:a16="http://schemas.microsoft.com/office/drawing/2014/main" id="{5005E295-1080-437B-B36A-109E2AF387FB}"/>
               </a:ext>
             </a:extLst>
           </p:cNvPr>
@@ -20002,7 +20047,7 @@
           <p:cNvPr id="21" name="footer-page-6">
             <a:extLst xmlns:a="http://schemas.openxmlformats.org/drawingml/2006/main">
               <a:ext uri="{FF2B5EF4-FFF2-40B4-BE49-F238E27FC236}">
-                <a16:creationId xmlns:a16="http://schemas.microsoft.com/office/drawing/2014/main" id="{B23AB426-4073-498B-87EF-494BFCC24B13}"/>
+                <a16:creationId xmlns:a16="http://schemas.microsoft.com/office/drawing/2014/main" id="{D752CAD0-C48B-405F-86DC-CF5A9660A86C}"/>
               </a:ext>
             </a:extLst>
           </p:cNvPr>
@@ -20062,7 +20107,7 @@
     </p:spTree>
     <p:extLst>
       <p:ext uri="{BB962C8B-B14F-4D97-AF65-F5344CB8AC3E}">
-        <p14:creationId xmlns:p14="http://schemas.microsoft.com/office/powerpoint/2010/main" val="1268567040"/>
+        <p14:creationId xmlns:p14="http://schemas.microsoft.com/office/powerpoint/2010/main" val="2042431873"/>
       </p:ext>
     </p:extLst>
   </p:cSld>
@@ -20093,7 +20138,7 @@
           <p:cNvPr id="28" name="side-accent-7">
             <a:extLst xmlns:a="http://schemas.openxmlformats.org/drawingml/2006/main">
               <a:ext uri="{FF2B5EF4-FFF2-40B4-BE49-F238E27FC236}">
-                <a16:creationId xmlns:a16="http://schemas.microsoft.com/office/drawing/2014/main" id="{812B978E-41D6-4B12-8C1A-3C1A93E475F0}"/>
+                <a16:creationId xmlns:a16="http://schemas.microsoft.com/office/drawing/2014/main" id="{FA179097-084E-4318-A908-475A5B6A5A13}"/>
               </a:ext>
             </a:extLst>
           </p:cNvPr>
@@ -20124,7 +20169,7 @@
           <p:cNvPr id="2" name="kicker-7">
             <a:extLst xmlns:a="http://schemas.openxmlformats.org/drawingml/2006/main">
               <a:ext uri="{FF2B5EF4-FFF2-40B4-BE49-F238E27FC236}">
-                <a16:creationId xmlns:a16="http://schemas.microsoft.com/office/drawing/2014/main" id="{3010FA3F-A6FD-43EE-B069-253BC7EA3D33}"/>
+                <a16:creationId xmlns:a16="http://schemas.microsoft.com/office/drawing/2014/main" id="{23BBC077-8627-4D92-8540-ED88DEC6738B}"/>
               </a:ext>
             </a:extLst>
           </p:cNvPr>
@@ -20186,7 +20231,7 @@
           <p:cNvPr id="3" name="title-7">
             <a:extLst xmlns:a="http://schemas.openxmlformats.org/drawingml/2006/main">
               <a:ext uri="{FF2B5EF4-FFF2-40B4-BE49-F238E27FC236}">
-                <a16:creationId xmlns:a16="http://schemas.microsoft.com/office/drawing/2014/main" id="{D4D5F690-7959-4908-805C-1BF9FF21B1C8}"/>
+                <a16:creationId xmlns:a16="http://schemas.microsoft.com/office/drawing/2014/main" id="{08EC3A07-5F28-4061-AF27-BEB99A81CAE5}"/>
               </a:ext>
             </a:extLst>
           </p:cNvPr>
@@ -20248,7 +20293,7 @@
           <p:cNvPr id="4" name="">
             <a:extLst xmlns:a="http://schemas.openxmlformats.org/drawingml/2006/main">
               <a:ext uri="{FF2B5EF4-FFF2-40B4-BE49-F238E27FC236}">
-                <a16:creationId xmlns:a16="http://schemas.microsoft.com/office/drawing/2014/main" id="{416CDC48-FAC0-4E75-BE5E-133FEDFC531A}"/>
+                <a16:creationId xmlns:a16="http://schemas.microsoft.com/office/drawing/2014/main" id="{2B388005-708D-4D40-8B0A-0BF6D4AB562C}"/>
               </a:ext>
             </a:extLst>
           </p:cNvPr>
@@ -20310,7 +20355,7 @@
           <p:cNvPr id="5" name="">
             <a:extLst xmlns:a="http://schemas.openxmlformats.org/drawingml/2006/main">
               <a:ext uri="{FF2B5EF4-FFF2-40B4-BE49-F238E27FC236}">
-                <a16:creationId xmlns:a16="http://schemas.microsoft.com/office/drawing/2014/main" id="{FF642726-686A-4B5E-A7F1-FC5D01FE4551}"/>
+                <a16:creationId xmlns:a16="http://schemas.microsoft.com/office/drawing/2014/main" id="{EDAE764E-4FF5-4ECA-B35B-6FC89BE57507}"/>
               </a:ext>
             </a:extLst>
           </p:cNvPr>
@@ -20341,7 +20386,7 @@
           <p:cNvPr id="6" name="">
             <a:extLst xmlns:a="http://schemas.openxmlformats.org/drawingml/2006/main">
               <a:ext uri="{FF2B5EF4-FFF2-40B4-BE49-F238E27FC236}">
-                <a16:creationId xmlns:a16="http://schemas.microsoft.com/office/drawing/2014/main" id="{FD37511F-60A8-4B39-A75D-33B91F0F6261}"/>
+                <a16:creationId xmlns:a16="http://schemas.microsoft.com/office/drawing/2014/main" id="{F977BABB-4F46-4ED9-AB69-15DDB505FA1C}"/>
               </a:ext>
             </a:extLst>
           </p:cNvPr>
@@ -20403,7 +20448,7 @@
           <p:cNvPr id="7" name="">
             <a:extLst xmlns:a="http://schemas.openxmlformats.org/drawingml/2006/main">
               <a:ext uri="{FF2B5EF4-FFF2-40B4-BE49-F238E27FC236}">
-                <a16:creationId xmlns:a16="http://schemas.microsoft.com/office/drawing/2014/main" id="{4AFE91B4-A75F-4B05-B5AD-2D393E0AD7AC}"/>
+                <a16:creationId xmlns:a16="http://schemas.microsoft.com/office/drawing/2014/main" id="{31B76292-61CF-4CF9-B7EB-2169D00B0B63}"/>
               </a:ext>
             </a:extLst>
           </p:cNvPr>
@@ -20465,7 +20510,7 @@
           <p:cNvPr id="8" name="">
             <a:extLst xmlns:a="http://schemas.openxmlformats.org/drawingml/2006/main">
               <a:ext uri="{FF2B5EF4-FFF2-40B4-BE49-F238E27FC236}">
-                <a16:creationId xmlns:a16="http://schemas.microsoft.com/office/drawing/2014/main" id="{E4EE77B5-CA5B-4F3B-BFC2-4D24B1B917C7}"/>
+                <a16:creationId xmlns:a16="http://schemas.microsoft.com/office/drawing/2014/main" id="{8F8C54FF-80EE-43E6-A981-1CCC5CB62202}"/>
               </a:ext>
             </a:extLst>
           </p:cNvPr>
@@ -20527,7 +20572,7 @@
           <p:cNvPr id="9" name="">
             <a:extLst xmlns:a="http://schemas.openxmlformats.org/drawingml/2006/main">
               <a:ext uri="{FF2B5EF4-FFF2-40B4-BE49-F238E27FC236}">
-                <a16:creationId xmlns:a16="http://schemas.microsoft.com/office/drawing/2014/main" id="{F90617E8-E625-4D78-9F4A-58DE79CC8853}"/>
+                <a16:creationId xmlns:a16="http://schemas.microsoft.com/office/drawing/2014/main" id="{043CCF9E-7E29-40E7-8BCD-3C9BD8403BA1}"/>
               </a:ext>
             </a:extLst>
           </p:cNvPr>
@@ -20558,7 +20603,7 @@
           <p:cNvPr id="10" name="">
             <a:extLst xmlns:a="http://schemas.openxmlformats.org/drawingml/2006/main">
               <a:ext uri="{FF2B5EF4-FFF2-40B4-BE49-F238E27FC236}">
-                <a16:creationId xmlns:a16="http://schemas.microsoft.com/office/drawing/2014/main" id="{399F7DE6-F703-43DE-A8CB-E3DB6A297AFA}"/>
+                <a16:creationId xmlns:a16="http://schemas.microsoft.com/office/drawing/2014/main" id="{37639703-01FC-4735-A58C-1A1CD82DFD04}"/>
               </a:ext>
             </a:extLst>
           </p:cNvPr>
@@ -20620,7 +20665,7 @@
           <p:cNvPr id="11" name="">
             <a:extLst xmlns:a="http://schemas.openxmlformats.org/drawingml/2006/main">
               <a:ext uri="{FF2B5EF4-FFF2-40B4-BE49-F238E27FC236}">
-                <a16:creationId xmlns:a16="http://schemas.microsoft.com/office/drawing/2014/main" id="{9326D429-3035-4C48-9980-ADF47F978409}"/>
+                <a16:creationId xmlns:a16="http://schemas.microsoft.com/office/drawing/2014/main" id="{3C21F4F2-9C84-4461-8951-C939CC029E9F}"/>
               </a:ext>
             </a:extLst>
           </p:cNvPr>
@@ -20682,7 +20727,7 @@
           <p:cNvPr id="12" name="">
             <a:extLst xmlns:a="http://schemas.openxmlformats.org/drawingml/2006/main">
               <a:ext uri="{FF2B5EF4-FFF2-40B4-BE49-F238E27FC236}">
-                <a16:creationId xmlns:a16="http://schemas.microsoft.com/office/drawing/2014/main" id="{0E1B231F-6F02-44C9-8298-8925487CD7C7}"/>
+                <a16:creationId xmlns:a16="http://schemas.microsoft.com/office/drawing/2014/main" id="{9D0DFFB2-0B7B-4CDD-ABE3-42F3F8A8A81E}"/>
               </a:ext>
             </a:extLst>
           </p:cNvPr>
@@ -20744,7 +20789,7 @@
           <p:cNvPr id="13" name="">
             <a:extLst xmlns:a="http://schemas.openxmlformats.org/drawingml/2006/main">
               <a:ext uri="{FF2B5EF4-FFF2-40B4-BE49-F238E27FC236}">
-                <a16:creationId xmlns:a16="http://schemas.microsoft.com/office/drawing/2014/main" id="{5A9208AA-F19B-4BE2-BEEE-1952E3ACA3C2}"/>
+                <a16:creationId xmlns:a16="http://schemas.microsoft.com/office/drawing/2014/main" id="{0BE774FB-51D9-4DEC-BEE0-17A77241E5CC}"/>
               </a:ext>
             </a:extLst>
           </p:cNvPr>
@@ -20775,7 +20820,7 @@
           <p:cNvPr id="14" name="">
             <a:extLst xmlns:a="http://schemas.openxmlformats.org/drawingml/2006/main">
               <a:ext uri="{FF2B5EF4-FFF2-40B4-BE49-F238E27FC236}">
-                <a16:creationId xmlns:a16="http://schemas.microsoft.com/office/drawing/2014/main" id="{E3BCCE20-3656-412F-B632-0B7346EFD7B5}"/>
+                <a16:creationId xmlns:a16="http://schemas.microsoft.com/office/drawing/2014/main" id="{441DDF83-6ADA-4D7E-A115-17CFFC8F9D01}"/>
               </a:ext>
             </a:extLst>
           </p:cNvPr>
@@ -20837,7 +20882,7 @@
           <p:cNvPr id="15" name="">
             <a:extLst xmlns:a="http://schemas.openxmlformats.org/drawingml/2006/main">
               <a:ext uri="{FF2B5EF4-FFF2-40B4-BE49-F238E27FC236}">
-                <a16:creationId xmlns:a16="http://schemas.microsoft.com/office/drawing/2014/main" id="{CBEB18F3-0F97-4684-BFBE-3206C8E8726E}"/>
+                <a16:creationId xmlns:a16="http://schemas.microsoft.com/office/drawing/2014/main" id="{376731FF-8A9F-486A-A9FA-12D006DC7C55}"/>
               </a:ext>
             </a:extLst>
           </p:cNvPr>
@@ -20899,7 +20944,7 @@
           <p:cNvPr id="16" name="">
             <a:extLst xmlns:a="http://schemas.openxmlformats.org/drawingml/2006/main">
               <a:ext uri="{FF2B5EF4-FFF2-40B4-BE49-F238E27FC236}">
-                <a16:creationId xmlns:a16="http://schemas.microsoft.com/office/drawing/2014/main" id="{CAC5CC0F-FD51-45C0-B506-DE59610B7F7A}"/>
+                <a16:creationId xmlns:a16="http://schemas.microsoft.com/office/drawing/2014/main" id="{096051B5-A370-4CEF-860A-1857FE9EFB7A}"/>
               </a:ext>
             </a:extLst>
           </p:cNvPr>
@@ -20961,7 +21006,7 @@
           <p:cNvPr id="17" name="dashboard-preview">
             <a:extLst xmlns:a="http://schemas.openxmlformats.org/drawingml/2006/main">
               <a:ext uri="{FF2B5EF4-FFF2-40B4-BE49-F238E27FC236}">
-                <a16:creationId xmlns:a16="http://schemas.microsoft.com/office/drawing/2014/main" id="{72263329-F431-4ACC-AC9A-687E63DE8A07}"/>
+                <a16:creationId xmlns:a16="http://schemas.microsoft.com/office/drawing/2014/main" id="{1640D8C3-813A-43EF-BB7B-C95B8E39EC61}"/>
               </a:ext>
             </a:extLst>
           </p:cNvPr>
@@ -20996,7 +21041,7 @@
           <p:cNvPr id="18" name="">
             <a:extLst xmlns:a="http://schemas.openxmlformats.org/drawingml/2006/main">
               <a:ext uri="{FF2B5EF4-FFF2-40B4-BE49-F238E27FC236}">
-                <a16:creationId xmlns:a16="http://schemas.microsoft.com/office/drawing/2014/main" id="{F9DB885F-BFD3-47AA-A36B-A7513AD0BC5C}"/>
+                <a16:creationId xmlns:a16="http://schemas.microsoft.com/office/drawing/2014/main" id="{DBDB6D2E-9A1F-4A0D-B457-D7A442EAC963}"/>
               </a:ext>
             </a:extLst>
           </p:cNvPr>
@@ -21058,7 +21103,7 @@
           <p:cNvPr id="19" name="">
             <a:extLst xmlns:a="http://schemas.openxmlformats.org/drawingml/2006/main">
               <a:ext uri="{FF2B5EF4-FFF2-40B4-BE49-F238E27FC236}">
-                <a16:creationId xmlns:a16="http://schemas.microsoft.com/office/drawing/2014/main" id="{A7533D88-6C3F-4686-BE2B-B03D98BC785D}"/>
+                <a16:creationId xmlns:a16="http://schemas.microsoft.com/office/drawing/2014/main" id="{01D36940-0FEF-458B-A60A-C69CBCEAB1C5}"/>
               </a:ext>
             </a:extLst>
           </p:cNvPr>
@@ -21089,7 +21134,7 @@
           <p:cNvPr id="20" name="">
             <a:extLst xmlns:a="http://schemas.openxmlformats.org/drawingml/2006/main">
               <a:ext uri="{FF2B5EF4-FFF2-40B4-BE49-F238E27FC236}">
-                <a16:creationId xmlns:a16="http://schemas.microsoft.com/office/drawing/2014/main" id="{D6184D17-ACF2-459E-A4BA-DFB93D4D3CEE}"/>
+                <a16:creationId xmlns:a16="http://schemas.microsoft.com/office/drawing/2014/main" id="{3A069272-1847-48BB-A9D3-3993E6191BB9}"/>
               </a:ext>
             </a:extLst>
           </p:cNvPr>
@@ -21151,7 +21196,7 @@
           <p:cNvPr id="21" name="">
             <a:extLst xmlns:a="http://schemas.openxmlformats.org/drawingml/2006/main">
               <a:ext uri="{FF2B5EF4-FFF2-40B4-BE49-F238E27FC236}">
-                <a16:creationId xmlns:a16="http://schemas.microsoft.com/office/drawing/2014/main" id="{8CFD0697-60C3-47E9-B9C4-AD149D8C6F46}"/>
+                <a16:creationId xmlns:a16="http://schemas.microsoft.com/office/drawing/2014/main" id="{4F76859C-08D1-464C-8A9D-8812D9C56ABC}"/>
               </a:ext>
             </a:extLst>
           </p:cNvPr>
@@ -21182,7 +21227,7 @@
           <p:cNvPr id="22" name="">
             <a:extLst xmlns:a="http://schemas.openxmlformats.org/drawingml/2006/main">
               <a:ext uri="{FF2B5EF4-FFF2-40B4-BE49-F238E27FC236}">
-                <a16:creationId xmlns:a16="http://schemas.microsoft.com/office/drawing/2014/main" id="{1047A72D-8635-4843-A271-B069E46F4E6F}"/>
+                <a16:creationId xmlns:a16="http://schemas.microsoft.com/office/drawing/2014/main" id="{57D4C086-C169-4DD1-91D4-B1DB9F4465F6}"/>
               </a:ext>
             </a:extLst>
           </p:cNvPr>
@@ -21213,7 +21258,7 @@
           <p:cNvPr id="23" name="">
             <a:extLst xmlns:a="http://schemas.openxmlformats.org/drawingml/2006/main">
               <a:ext uri="{FF2B5EF4-FFF2-40B4-BE49-F238E27FC236}">
-                <a16:creationId xmlns:a16="http://schemas.microsoft.com/office/drawing/2014/main" id="{17B4E876-E5CB-4BCF-9707-6AE905924CE8}"/>
+                <a16:creationId xmlns:a16="http://schemas.microsoft.com/office/drawing/2014/main" id="{91C712F7-C9F8-4D9B-BE26-5A54B5276A8B}"/>
               </a:ext>
             </a:extLst>
           </p:cNvPr>
@@ -21246,7 +21291,7 @@
           <p:cNvPr id="24" name="">
             <a:extLst xmlns:a="http://schemas.openxmlformats.org/drawingml/2006/main">
               <a:ext uri="{FF2B5EF4-FFF2-40B4-BE49-F238E27FC236}">
-                <a16:creationId xmlns:a16="http://schemas.microsoft.com/office/drawing/2014/main" id="{358D0CB9-1EC8-486C-AC44-542CAAB1671F}"/>
+                <a16:creationId xmlns:a16="http://schemas.microsoft.com/office/drawing/2014/main" id="{EA0922F1-B789-41EE-968C-F4852D8FA445}"/>
               </a:ext>
             </a:extLst>
           </p:cNvPr>
@@ -21308,7 +21353,7 @@
           <p:cNvPr id="25" name="footer-rule-7">
             <a:extLst xmlns:a="http://schemas.openxmlformats.org/drawingml/2006/main">
               <a:ext uri="{FF2B5EF4-FFF2-40B4-BE49-F238E27FC236}">
-                <a16:creationId xmlns:a16="http://schemas.microsoft.com/office/drawing/2014/main" id="{6BECE940-7732-4E07-B7C0-F42559FD815E}"/>
+                <a16:creationId xmlns:a16="http://schemas.microsoft.com/office/drawing/2014/main" id="{D32A6E59-55E5-49D6-A0FA-1CCE2D09D157}"/>
               </a:ext>
             </a:extLst>
           </p:cNvPr>
@@ -21339,7 +21384,7 @@
           <p:cNvPr id="26" name="footer-label-7">
             <a:extLst xmlns:a="http://schemas.openxmlformats.org/drawingml/2006/main">
               <a:ext uri="{FF2B5EF4-FFF2-40B4-BE49-F238E27FC236}">
-                <a16:creationId xmlns:a16="http://schemas.microsoft.com/office/drawing/2014/main" id="{5692868C-C9DB-4EDD-9DE8-75EA85E288A2}"/>
+                <a16:creationId xmlns:a16="http://schemas.microsoft.com/office/drawing/2014/main" id="{E8923B5B-C15E-475F-90D7-A1407F16BA50}"/>
               </a:ext>
             </a:extLst>
           </p:cNvPr>
@@ -21401,7 +21446,7 @@
           <p:cNvPr id="27" name="footer-page-7">
             <a:extLst xmlns:a="http://schemas.openxmlformats.org/drawingml/2006/main">
               <a:ext uri="{FF2B5EF4-FFF2-40B4-BE49-F238E27FC236}">
-                <a16:creationId xmlns:a16="http://schemas.microsoft.com/office/drawing/2014/main" id="{D36F4495-6156-4FC1-ADFF-41B250645791}"/>
+                <a16:creationId xmlns:a16="http://schemas.microsoft.com/office/drawing/2014/main" id="{E2C2B7B6-5F5E-44D4-8D6C-CD21496FBF81}"/>
               </a:ext>
             </a:extLst>
           </p:cNvPr>
@@ -21461,7 +21506,7 @@
     </p:spTree>
     <p:extLst>
       <p:ext uri="{BB962C8B-B14F-4D97-AF65-F5344CB8AC3E}">
-        <p14:creationId xmlns:p14="http://schemas.microsoft.com/office/powerpoint/2010/main" val="1044932252"/>
+        <p14:creationId xmlns:p14="http://schemas.microsoft.com/office/powerpoint/2010/main" val="383732125"/>
       </p:ext>
     </p:extLst>
   </p:cSld>
@@ -21492,7 +21537,7 @@
           <p:cNvPr id="26" name="side-accent-8">
             <a:extLst xmlns:a="http://schemas.openxmlformats.org/drawingml/2006/main">
               <a:ext uri="{FF2B5EF4-FFF2-40B4-BE49-F238E27FC236}">
-                <a16:creationId xmlns:a16="http://schemas.microsoft.com/office/drawing/2014/main" id="{63EB4A12-0E43-4E18-B0D9-CDC53DEBE08B}"/>
+                <a16:creationId xmlns:a16="http://schemas.microsoft.com/office/drawing/2014/main" id="{B278883E-C962-4B89-8DB5-248AD146FAD9}"/>
               </a:ext>
             </a:extLst>
           </p:cNvPr>
@@ -21523,7 +21568,7 @@
           <p:cNvPr id="2" name="kicker-8">
             <a:extLst xmlns:a="http://schemas.openxmlformats.org/drawingml/2006/main">
               <a:ext uri="{FF2B5EF4-FFF2-40B4-BE49-F238E27FC236}">
-                <a16:creationId xmlns:a16="http://schemas.microsoft.com/office/drawing/2014/main" id="{A27E46E9-F124-464B-9F70-CCBCA1A0F594}"/>
+                <a16:creationId xmlns:a16="http://schemas.microsoft.com/office/drawing/2014/main" id="{AE2D84CE-798F-4A98-BB28-909FE1A9D8EC}"/>
               </a:ext>
             </a:extLst>
           </p:cNvPr>
@@ -21585,7 +21630,7 @@
           <p:cNvPr id="3" name="title-8">
             <a:extLst xmlns:a="http://schemas.openxmlformats.org/drawingml/2006/main">
               <a:ext uri="{FF2B5EF4-FFF2-40B4-BE49-F238E27FC236}">
-                <a16:creationId xmlns:a16="http://schemas.microsoft.com/office/drawing/2014/main" id="{3A0D98A4-919E-4D0F-80A9-16A3A5C1B5D3}"/>
+                <a16:creationId xmlns:a16="http://schemas.microsoft.com/office/drawing/2014/main" id="{2E02B2FB-FF12-481C-8B4F-D8949648E1A4}"/>
               </a:ext>
             </a:extLst>
           </p:cNvPr>
@@ -21647,7 +21692,7 @@
           <p:cNvPr id="4" name="">
             <a:extLst xmlns:a="http://schemas.openxmlformats.org/drawingml/2006/main">
               <a:ext uri="{FF2B5EF4-FFF2-40B4-BE49-F238E27FC236}">
-                <a16:creationId xmlns:a16="http://schemas.microsoft.com/office/drawing/2014/main" id="{B235ADEE-4AD5-4DC5-9068-5576F3E77F6A}"/>
+                <a16:creationId xmlns:a16="http://schemas.microsoft.com/office/drawing/2014/main" id="{91F52B13-A0A3-45D8-832B-369C609C6BF7}"/>
               </a:ext>
             </a:extLst>
           </p:cNvPr>
@@ -21709,7 +21754,7 @@
           <p:cNvPr id="5" name="">
             <a:extLst xmlns:a="http://schemas.openxmlformats.org/drawingml/2006/main">
               <a:ext uri="{FF2B5EF4-FFF2-40B4-BE49-F238E27FC236}">
-                <a16:creationId xmlns:a16="http://schemas.microsoft.com/office/drawing/2014/main" id="{92D1D012-4B9B-46CB-97BB-C30E25C3A047}"/>
+                <a16:creationId xmlns:a16="http://schemas.microsoft.com/office/drawing/2014/main" id="{C8E34C0F-7F92-4EAB-853A-36FAF092D89E}"/>
               </a:ext>
             </a:extLst>
           </p:cNvPr>
@@ -21740,7 +21785,7 @@
           <p:cNvPr id="6" name="">
             <a:extLst xmlns:a="http://schemas.openxmlformats.org/drawingml/2006/main">
               <a:ext uri="{FF2B5EF4-FFF2-40B4-BE49-F238E27FC236}">
-                <a16:creationId xmlns:a16="http://schemas.microsoft.com/office/drawing/2014/main" id="{B07B52AF-1ED1-459B-8373-D045E0B85887}"/>
+                <a16:creationId xmlns:a16="http://schemas.microsoft.com/office/drawing/2014/main" id="{A13DCF1B-BA65-4CAB-9ECD-505F1E8A5E47}"/>
               </a:ext>
             </a:extLst>
           </p:cNvPr>
@@ -21771,7 +21816,7 @@
           <p:cNvPr id="7" name="">
             <a:extLst xmlns:a="http://schemas.openxmlformats.org/drawingml/2006/main">
               <a:ext uri="{FF2B5EF4-FFF2-40B4-BE49-F238E27FC236}">
-                <a16:creationId xmlns:a16="http://schemas.microsoft.com/office/drawing/2014/main" id="{1AC9D0BA-834B-4515-8BA6-078D4B149EC9}"/>
+                <a16:creationId xmlns:a16="http://schemas.microsoft.com/office/drawing/2014/main" id="{6D422665-05CC-4401-9B27-8366B852A51D}"/>
               </a:ext>
             </a:extLst>
           </p:cNvPr>
@@ -21833,7 +21878,7 @@
           <p:cNvPr id="8" name="">
             <a:extLst xmlns:a="http://schemas.openxmlformats.org/drawingml/2006/main">
               <a:ext uri="{FF2B5EF4-FFF2-40B4-BE49-F238E27FC236}">
-                <a16:creationId xmlns:a16="http://schemas.microsoft.com/office/drawing/2014/main" id="{0F031BCB-11A0-4B16-88AA-4ECAFE5D5833}"/>
+                <a16:creationId xmlns:a16="http://schemas.microsoft.com/office/drawing/2014/main" id="{87F02026-4B11-42EF-B3BC-206FE69070DA}"/>
               </a:ext>
             </a:extLst>
           </p:cNvPr>
@@ -21895,7 +21940,7 @@
           <p:cNvPr id="9" name="">
             <a:extLst xmlns:a="http://schemas.openxmlformats.org/drawingml/2006/main">
               <a:ext uri="{FF2B5EF4-FFF2-40B4-BE49-F238E27FC236}">
-                <a16:creationId xmlns:a16="http://schemas.microsoft.com/office/drawing/2014/main" id="{518B7A68-15DA-41DE-BCAA-7C05FB03A296}"/>
+                <a16:creationId xmlns:a16="http://schemas.microsoft.com/office/drawing/2014/main" id="{D54BC909-C56D-42CA-B8A0-65AB21EE2544}"/>
               </a:ext>
             </a:extLst>
           </p:cNvPr>
@@ -21957,7 +22002,7 @@
           <p:cNvPr id="10" name="">
             <a:extLst xmlns:a="http://schemas.openxmlformats.org/drawingml/2006/main">
               <a:ext uri="{FF2B5EF4-FFF2-40B4-BE49-F238E27FC236}">
-                <a16:creationId xmlns:a16="http://schemas.microsoft.com/office/drawing/2014/main" id="{E16F5ED2-1059-43FD-8BD0-149A447FF7D6}"/>
+                <a16:creationId xmlns:a16="http://schemas.microsoft.com/office/drawing/2014/main" id="{06302261-F755-47F4-A245-55341B4B5C3D}"/>
               </a:ext>
             </a:extLst>
           </p:cNvPr>
@@ -21988,7 +22033,7 @@
           <p:cNvPr id="11" name="">
             <a:extLst xmlns:a="http://schemas.openxmlformats.org/drawingml/2006/main">
               <a:ext uri="{FF2B5EF4-FFF2-40B4-BE49-F238E27FC236}">
-                <a16:creationId xmlns:a16="http://schemas.microsoft.com/office/drawing/2014/main" id="{8C6E045A-E3B3-4EAD-A6C6-A11435374E56}"/>
+                <a16:creationId xmlns:a16="http://schemas.microsoft.com/office/drawing/2014/main" id="{5DAD4C52-7848-4C42-B53F-6FF1B148B4C3}"/>
               </a:ext>
             </a:extLst>
           </p:cNvPr>
@@ -22050,7 +22095,7 @@
           <p:cNvPr id="12" name="">
             <a:extLst xmlns:a="http://schemas.openxmlformats.org/drawingml/2006/main">
               <a:ext uri="{FF2B5EF4-FFF2-40B4-BE49-F238E27FC236}">
-                <a16:creationId xmlns:a16="http://schemas.microsoft.com/office/drawing/2014/main" id="{7D03990B-6344-456E-BF88-4205FC96F6C7}"/>
+                <a16:creationId xmlns:a16="http://schemas.microsoft.com/office/drawing/2014/main" id="{56063ED9-B8D4-4021-AC6F-665490071529}"/>
               </a:ext>
             </a:extLst>
           </p:cNvPr>
@@ -22112,7 +22157,7 @@
           <p:cNvPr id="13" name="">
             <a:extLst xmlns:a="http://schemas.openxmlformats.org/drawingml/2006/main">
               <a:ext uri="{FF2B5EF4-FFF2-40B4-BE49-F238E27FC236}">
-                <a16:creationId xmlns:a16="http://schemas.microsoft.com/office/drawing/2014/main" id="{7C04E089-6E9D-4BCB-B507-7B6787FA4DC4}"/>
+                <a16:creationId xmlns:a16="http://schemas.microsoft.com/office/drawing/2014/main" id="{B504F16C-5EFE-4975-8CAC-D9826E11CA4F}"/>
               </a:ext>
             </a:extLst>
           </p:cNvPr>
@@ -22174,7 +22219,7 @@
           <p:cNvPr id="14" name="">
             <a:extLst xmlns:a="http://schemas.openxmlformats.org/drawingml/2006/main">
               <a:ext uri="{FF2B5EF4-FFF2-40B4-BE49-F238E27FC236}">
-                <a16:creationId xmlns:a16="http://schemas.microsoft.com/office/drawing/2014/main" id="{D7DE2A78-0D2C-4C6F-8D5E-95F3A3863A3B}"/>
+                <a16:creationId xmlns:a16="http://schemas.microsoft.com/office/drawing/2014/main" id="{62B74F10-052F-49B8-A43D-35A48B963784}"/>
               </a:ext>
             </a:extLst>
           </p:cNvPr>
@@ -22205,7 +22250,7 @@
           <p:cNvPr id="15" name="">
             <a:extLst xmlns:a="http://schemas.openxmlformats.org/drawingml/2006/main">
               <a:ext uri="{FF2B5EF4-FFF2-40B4-BE49-F238E27FC236}">
-                <a16:creationId xmlns:a16="http://schemas.microsoft.com/office/drawing/2014/main" id="{5B9E36AB-061B-4A2C-9AFA-16BA0C065D09}"/>
+                <a16:creationId xmlns:a16="http://schemas.microsoft.com/office/drawing/2014/main" id="{80861D56-D90A-4A53-873E-A418B0B290B3}"/>
               </a:ext>
             </a:extLst>
           </p:cNvPr>
@@ -22267,7 +22312,7 @@
           <p:cNvPr id="16" name="">
             <a:extLst xmlns:a="http://schemas.openxmlformats.org/drawingml/2006/main">
               <a:ext uri="{FF2B5EF4-FFF2-40B4-BE49-F238E27FC236}">
-                <a16:creationId xmlns:a16="http://schemas.microsoft.com/office/drawing/2014/main" id="{EB673983-AAE6-445D-B532-91036C96CDE8}"/>
+                <a16:creationId xmlns:a16="http://schemas.microsoft.com/office/drawing/2014/main" id="{D5CFEA2E-07D7-43C3-BA9E-13B9468C7F5D}"/>
               </a:ext>
             </a:extLst>
           </p:cNvPr>
@@ -22329,7 +22374,7 @@
           <p:cNvPr id="17" name="">
             <a:extLst xmlns:a="http://schemas.openxmlformats.org/drawingml/2006/main">
               <a:ext uri="{FF2B5EF4-FFF2-40B4-BE49-F238E27FC236}">
-                <a16:creationId xmlns:a16="http://schemas.microsoft.com/office/drawing/2014/main" id="{27293F5B-AE10-447B-9700-6989F549A218}"/>
+                <a16:creationId xmlns:a16="http://schemas.microsoft.com/office/drawing/2014/main" id="{0CAFAD6E-0AD1-4D42-8897-B16F23AC3E2D}"/>
               </a:ext>
             </a:extLst>
           </p:cNvPr>
@@ -22391,7 +22436,7 @@
           <p:cNvPr id="18" name="">
             <a:extLst xmlns:a="http://schemas.openxmlformats.org/drawingml/2006/main">
               <a:ext uri="{FF2B5EF4-FFF2-40B4-BE49-F238E27FC236}">
-                <a16:creationId xmlns:a16="http://schemas.microsoft.com/office/drawing/2014/main" id="{0294E209-35CD-4C78-B41F-BF0751305CF8}"/>
+                <a16:creationId xmlns:a16="http://schemas.microsoft.com/office/drawing/2014/main" id="{64930F2C-02ED-40E0-93B6-E6B1F96241DE}"/>
               </a:ext>
             </a:extLst>
           </p:cNvPr>
@@ -22422,7 +22467,7 @@
           <p:cNvPr id="19" name="">
             <a:extLst xmlns:a="http://schemas.openxmlformats.org/drawingml/2006/main">
               <a:ext uri="{FF2B5EF4-FFF2-40B4-BE49-F238E27FC236}">
-                <a16:creationId xmlns:a16="http://schemas.microsoft.com/office/drawing/2014/main" id="{BE7017A0-F2EC-418B-B524-3513A1CD5EA2}"/>
+                <a16:creationId xmlns:a16="http://schemas.microsoft.com/office/drawing/2014/main" id="{411F2002-7486-409E-9E4B-E2D0139B1033}"/>
               </a:ext>
             </a:extLst>
           </p:cNvPr>
@@ -22484,7 +22529,7 @@
           <p:cNvPr id="20" name="">
             <a:extLst xmlns:a="http://schemas.openxmlformats.org/drawingml/2006/main">
               <a:ext uri="{FF2B5EF4-FFF2-40B4-BE49-F238E27FC236}">
-                <a16:creationId xmlns:a16="http://schemas.microsoft.com/office/drawing/2014/main" id="{E7DCBA6F-4BFA-4CE3-8294-B72EDA668319}"/>
+                <a16:creationId xmlns:a16="http://schemas.microsoft.com/office/drawing/2014/main" id="{35D7A1E5-BB1B-43D9-A2BE-6329295923B2}"/>
               </a:ext>
             </a:extLst>
           </p:cNvPr>
@@ -22546,7 +22591,7 @@
           <p:cNvPr id="21" name="">
             <a:extLst xmlns:a="http://schemas.openxmlformats.org/drawingml/2006/main">
               <a:ext uri="{FF2B5EF4-FFF2-40B4-BE49-F238E27FC236}">
-                <a16:creationId xmlns:a16="http://schemas.microsoft.com/office/drawing/2014/main" id="{E75C73DD-6D04-4DE8-B75C-8F7E144B44F2}"/>
+                <a16:creationId xmlns:a16="http://schemas.microsoft.com/office/drawing/2014/main" id="{2A806673-A56A-4600-AD05-2C364E177BD7}"/>
               </a:ext>
             </a:extLst>
           </p:cNvPr>
@@ -22608,7 +22653,7 @@
           <p:cNvPr id="22" name="">
             <a:extLst xmlns:a="http://schemas.openxmlformats.org/drawingml/2006/main">
               <a:ext uri="{FF2B5EF4-FFF2-40B4-BE49-F238E27FC236}">
-                <a16:creationId xmlns:a16="http://schemas.microsoft.com/office/drawing/2014/main" id="{73A75F90-5EB1-44A7-ADFB-79C359F45DD7}"/>
+                <a16:creationId xmlns:a16="http://schemas.microsoft.com/office/drawing/2014/main" id="{C9A45B58-C506-4A93-A953-7828B9FE45F4}"/>
               </a:ext>
             </a:extLst>
           </p:cNvPr>
@@ -22670,7 +22715,7 @@
           <p:cNvPr id="23" name="footer-rule-8">
             <a:extLst xmlns:a="http://schemas.openxmlformats.org/drawingml/2006/main">
               <a:ext uri="{FF2B5EF4-FFF2-40B4-BE49-F238E27FC236}">
-                <a16:creationId xmlns:a16="http://schemas.microsoft.com/office/drawing/2014/main" id="{B0DFD39E-A409-4EA9-975D-96C807237E27}"/>
+                <a16:creationId xmlns:a16="http://schemas.microsoft.com/office/drawing/2014/main" id="{879A4409-ABFC-4974-808F-8D422E5731BC}"/>
               </a:ext>
             </a:extLst>
           </p:cNvPr>
@@ -22701,7 +22746,7 @@
           <p:cNvPr id="24" name="footer-label-8">
             <a:extLst xmlns:a="http://schemas.openxmlformats.org/drawingml/2006/main">
               <a:ext uri="{FF2B5EF4-FFF2-40B4-BE49-F238E27FC236}">
-                <a16:creationId xmlns:a16="http://schemas.microsoft.com/office/drawing/2014/main" id="{DC6A77FD-4C16-4D49-AAF1-2E6EC1CAB7D4}"/>
+                <a16:creationId xmlns:a16="http://schemas.microsoft.com/office/drawing/2014/main" id="{B931FE9C-72CB-4638-8CA3-94B4477DBA64}"/>
               </a:ext>
             </a:extLst>
           </p:cNvPr>
@@ -22763,7 +22808,7 @@
           <p:cNvPr id="25" name="footer-page-8">
             <a:extLst xmlns:a="http://schemas.openxmlformats.org/drawingml/2006/main">
               <a:ext uri="{FF2B5EF4-FFF2-40B4-BE49-F238E27FC236}">
-                <a16:creationId xmlns:a16="http://schemas.microsoft.com/office/drawing/2014/main" id="{D986FF4A-BBC7-4E83-8758-C3A57B7BE731}"/>
+                <a16:creationId xmlns:a16="http://schemas.microsoft.com/office/drawing/2014/main" id="{31FB8D3A-7C8F-4D69-943E-BACE4ED87FD0}"/>
               </a:ext>
             </a:extLst>
           </p:cNvPr>
@@ -22823,7 +22868,7 @@
     </p:spTree>
     <p:extLst>
       <p:ext uri="{BB962C8B-B14F-4D97-AF65-F5344CB8AC3E}">
-        <p14:creationId xmlns:p14="http://schemas.microsoft.com/office/powerpoint/2010/main" val="1225108089"/>
+        <p14:creationId xmlns:p14="http://schemas.microsoft.com/office/powerpoint/2010/main" val="217755335"/>
       </p:ext>
     </p:extLst>
   </p:cSld>
@@ -22854,7 +22899,7 @@
           <p:cNvPr id="21" name="side-accent-9">
             <a:extLst xmlns:a="http://schemas.openxmlformats.org/drawingml/2006/main">
               <a:ext uri="{FF2B5EF4-FFF2-40B4-BE49-F238E27FC236}">
-                <a16:creationId xmlns:a16="http://schemas.microsoft.com/office/drawing/2014/main" id="{0005EFA4-E6C1-4182-B505-489D8FB8676E}"/>
+                <a16:creationId xmlns:a16="http://schemas.microsoft.com/office/drawing/2014/main" id="{99DB06FD-8711-4798-ADEE-439A7CBDB00D}"/>
               </a:ext>
             </a:extLst>
           </p:cNvPr>
@@ -22885,7 +22930,7 @@
           <p:cNvPr id="2" name="kicker-9">
             <a:extLst xmlns:a="http://schemas.openxmlformats.org/drawingml/2006/main">
               <a:ext uri="{FF2B5EF4-FFF2-40B4-BE49-F238E27FC236}">
-                <a16:creationId xmlns:a16="http://schemas.microsoft.com/office/drawing/2014/main" id="{E0E89474-0843-4BF8-AFC3-01498EA35061}"/>
+                <a16:creationId xmlns:a16="http://schemas.microsoft.com/office/drawing/2014/main" id="{7329BADF-E725-49DD-8097-CF39587C21B2}"/>
               </a:ext>
             </a:extLst>
           </p:cNvPr>
@@ -22947,7 +22992,7 @@
           <p:cNvPr id="3" name="title-9">
             <a:extLst xmlns:a="http://schemas.openxmlformats.org/drawingml/2006/main">
               <a:ext uri="{FF2B5EF4-FFF2-40B4-BE49-F238E27FC236}">
-                <a16:creationId xmlns:a16="http://schemas.microsoft.com/office/drawing/2014/main" id="{C4EE4324-0006-4189-B205-E1C0ADF23E34}"/>
+                <a16:creationId xmlns:a16="http://schemas.microsoft.com/office/drawing/2014/main" id="{B2457273-89A4-48EA-BE71-ADE3E55F5C47}"/>
               </a:ext>
             </a:extLst>
           </p:cNvPr>
@@ -23009,7 +23054,7 @@
           <p:cNvPr id="4" name="">
             <a:extLst xmlns:a="http://schemas.openxmlformats.org/drawingml/2006/main">
               <a:ext uri="{FF2B5EF4-FFF2-40B4-BE49-F238E27FC236}">
-                <a16:creationId xmlns:a16="http://schemas.microsoft.com/office/drawing/2014/main" id="{E09A5592-DC1C-42B9-B3B0-878B6B7C46D6}"/>
+                <a16:creationId xmlns:a16="http://schemas.microsoft.com/office/drawing/2014/main" id="{A8861956-3A17-4447-9C91-6441FFD87052}"/>
               </a:ext>
             </a:extLst>
           </p:cNvPr>
@@ -23071,7 +23116,7 @@
           <p:cNvPr id="5" name="">
             <a:extLst xmlns:a="http://schemas.openxmlformats.org/drawingml/2006/main">
               <a:ext uri="{FF2B5EF4-FFF2-40B4-BE49-F238E27FC236}">
-                <a16:creationId xmlns:a16="http://schemas.microsoft.com/office/drawing/2014/main" id="{D368AF67-A43B-4080-8B10-970BE0C7B8A1}"/>
+                <a16:creationId xmlns:a16="http://schemas.microsoft.com/office/drawing/2014/main" id="{1DB71E92-6527-408F-9219-4362F4B445A0}"/>
               </a:ext>
             </a:extLst>
           </p:cNvPr>
@@ -23102,7 +23147,7 @@
           <p:cNvPr id="6" name="">
             <a:extLst xmlns:a="http://schemas.openxmlformats.org/drawingml/2006/main">
               <a:ext uri="{FF2B5EF4-FFF2-40B4-BE49-F238E27FC236}">
-                <a16:creationId xmlns:a16="http://schemas.microsoft.com/office/drawing/2014/main" id="{19E31C51-7779-400A-A927-8E1B38AE03B1}"/>
+                <a16:creationId xmlns:a16="http://schemas.microsoft.com/office/drawing/2014/main" id="{8EA73212-43A3-41F7-9487-ABE5B21E442C}"/>
               </a:ext>
             </a:extLst>
           </p:cNvPr>
@@ -23164,7 +23209,7 @@
           <p:cNvPr id="7" name="">
             <a:extLst xmlns:a="http://schemas.openxmlformats.org/drawingml/2006/main">
               <a:ext uri="{FF2B5EF4-FFF2-40B4-BE49-F238E27FC236}">
-                <a16:creationId xmlns:a16="http://schemas.microsoft.com/office/drawing/2014/main" id="{5CE03088-6EAC-439A-BE1F-D2C6BA0E8EC8}"/>
+                <a16:creationId xmlns:a16="http://schemas.microsoft.com/office/drawing/2014/main" id="{C50B4B46-D3B8-4FE4-AE0E-7157B24914EC}"/>
               </a:ext>
             </a:extLst>
           </p:cNvPr>
@@ -23226,7 +23271,7 @@
           <p:cNvPr id="8" name="">
             <a:extLst xmlns:a="http://schemas.openxmlformats.org/drawingml/2006/main">
               <a:ext uri="{FF2B5EF4-FFF2-40B4-BE49-F238E27FC236}">
-                <a16:creationId xmlns:a16="http://schemas.microsoft.com/office/drawing/2014/main" id="{9D1FB9D9-319D-4271-AA2C-A0CCCA07E15C}"/>
+                <a16:creationId xmlns:a16="http://schemas.microsoft.com/office/drawing/2014/main" id="{DE2296CB-6962-4A9A-91F1-C48ABEC67E9C}"/>
               </a:ext>
             </a:extLst>
           </p:cNvPr>
@@ -23288,7 +23333,7 @@
           <p:cNvPr id="9" name="">
             <a:extLst xmlns:a="http://schemas.openxmlformats.org/drawingml/2006/main">
               <a:ext uri="{FF2B5EF4-FFF2-40B4-BE49-F238E27FC236}">
-                <a16:creationId xmlns:a16="http://schemas.microsoft.com/office/drawing/2014/main" id="{9DA2D6BD-C27A-4D80-8026-F679D9D879E5}"/>
+                <a16:creationId xmlns:a16="http://schemas.microsoft.com/office/drawing/2014/main" id="{D6D81057-60A0-40B5-8A38-880501616E06}"/>
               </a:ext>
             </a:extLst>
           </p:cNvPr>
@@ -23319,7 +23364,7 @@
           <p:cNvPr id="10" name="">
             <a:extLst xmlns:a="http://schemas.openxmlformats.org/drawingml/2006/main">
               <a:ext uri="{FF2B5EF4-FFF2-40B4-BE49-F238E27FC236}">
-                <a16:creationId xmlns:a16="http://schemas.microsoft.com/office/drawing/2014/main" id="{2B2E062F-EC40-4B83-AE1F-9BF1301540D8}"/>
+                <a16:creationId xmlns:a16="http://schemas.microsoft.com/office/drawing/2014/main" id="{5CD1068B-0A72-40F6-9D21-7FCD4588010E}"/>
               </a:ext>
             </a:extLst>
           </p:cNvPr>
@@ -23381,7 +23426,7 @@
           <p:cNvPr id="11" name="">
             <a:extLst xmlns:a="http://schemas.openxmlformats.org/drawingml/2006/main">
               <a:ext uri="{FF2B5EF4-FFF2-40B4-BE49-F238E27FC236}">
-                <a16:creationId xmlns:a16="http://schemas.microsoft.com/office/drawing/2014/main" id="{FEC104A9-A500-489D-88CA-B894C150D274}"/>
+                <a16:creationId xmlns:a16="http://schemas.microsoft.com/office/drawing/2014/main" id="{18CAAB4B-ABD5-4D26-A8A6-A9077977A0DF}"/>
               </a:ext>
             </a:extLst>
           </p:cNvPr>
@@ -23443,7 +23488,7 @@
           <p:cNvPr id="12" name="">
             <a:extLst xmlns:a="http://schemas.openxmlformats.org/drawingml/2006/main">
               <a:ext uri="{FF2B5EF4-FFF2-40B4-BE49-F238E27FC236}">
-                <a16:creationId xmlns:a16="http://schemas.microsoft.com/office/drawing/2014/main" id="{EE26C9E5-5FB2-4E12-85C3-7DE4AF19F0E0}"/>
+                <a16:creationId xmlns:a16="http://schemas.microsoft.com/office/drawing/2014/main" id="{BAA70734-DD1E-47CD-A91C-7CF6334B6264}"/>
               </a:ext>
             </a:extLst>
           </p:cNvPr>
@@ -23505,7 +23550,7 @@
           <p:cNvPr id="13" name="">
             <a:extLst xmlns:a="http://schemas.openxmlformats.org/drawingml/2006/main">
               <a:ext uri="{FF2B5EF4-FFF2-40B4-BE49-F238E27FC236}">
-                <a16:creationId xmlns:a16="http://schemas.microsoft.com/office/drawing/2014/main" id="{38E0B45A-D43E-416C-8556-24511EF97925}"/>
+                <a16:creationId xmlns:a16="http://schemas.microsoft.com/office/drawing/2014/main" id="{DA832DA8-E088-4191-9952-F078507E9F8A}"/>
               </a:ext>
             </a:extLst>
           </p:cNvPr>
@@ -23536,7 +23581,7 @@
           <p:cNvPr id="14" name="">
             <a:extLst xmlns:a="http://schemas.openxmlformats.org/drawingml/2006/main">
               <a:ext uri="{FF2B5EF4-FFF2-40B4-BE49-F238E27FC236}">
-                <a16:creationId xmlns:a16="http://schemas.microsoft.com/office/drawing/2014/main" id="{30AF85F5-2D63-42B4-A1EA-0506727BC977}"/>
+                <a16:creationId xmlns:a16="http://schemas.microsoft.com/office/drawing/2014/main" id="{B0F31604-BA98-4CDC-8EC8-BEF67CDE2947}"/>
               </a:ext>
             </a:extLst>
           </p:cNvPr>
@@ -23598,7 +23643,7 @@
           <p:cNvPr id="15" name="">
             <a:extLst xmlns:a="http://schemas.openxmlformats.org/drawingml/2006/main">
               <a:ext uri="{FF2B5EF4-FFF2-40B4-BE49-F238E27FC236}">
-                <a16:creationId xmlns:a16="http://schemas.microsoft.com/office/drawing/2014/main" id="{6755E49D-0CDD-4AA3-ADCC-9CF9742B24CF}"/>
+                <a16:creationId xmlns:a16="http://schemas.microsoft.com/office/drawing/2014/main" id="{DD60F04E-A30E-40DD-AF7B-924A0A2C8F1E}"/>
               </a:ext>
             </a:extLst>
           </p:cNvPr>
@@ -23660,7 +23705,7 @@
           <p:cNvPr id="16" name="">
             <a:extLst xmlns:a="http://schemas.openxmlformats.org/drawingml/2006/main">
               <a:ext uri="{FF2B5EF4-FFF2-40B4-BE49-F238E27FC236}">
-                <a16:creationId xmlns:a16="http://schemas.microsoft.com/office/drawing/2014/main" id="{405ED1BB-9C3C-4F25-9AAB-8B2C74613CDA}"/>
+                <a16:creationId xmlns:a16="http://schemas.microsoft.com/office/drawing/2014/main" id="{F02FCF1A-5BA9-43ED-A8E8-06D61AB8F49B}"/>
               </a:ext>
             </a:extLst>
           </p:cNvPr>
@@ -23722,7 +23767,7 @@
           <p:cNvPr id="17" name="">
             <a:extLst xmlns:a="http://schemas.openxmlformats.org/drawingml/2006/main">
               <a:ext uri="{FF2B5EF4-FFF2-40B4-BE49-F238E27FC236}">
-                <a16:creationId xmlns:a16="http://schemas.microsoft.com/office/drawing/2014/main" id="{7533A5DF-5C49-4994-95A0-0AD74456890B}"/>
+                <a16:creationId xmlns:a16="http://schemas.microsoft.com/office/drawing/2014/main" id="{3491AEEA-4444-481D-A169-A39E79218C0B}"/>
               </a:ext>
             </a:extLst>
           </p:cNvPr>
@@ -23784,7 +23829,7 @@
           <p:cNvPr id="18" name="footer-rule-9">
             <a:extLst xmlns:a="http://schemas.openxmlformats.org/drawingml/2006/main">
               <a:ext uri="{FF2B5EF4-FFF2-40B4-BE49-F238E27FC236}">
-                <a16:creationId xmlns:a16="http://schemas.microsoft.com/office/drawing/2014/main" id="{F1A6A100-7568-4A0C-98DA-898FA373FB9D}"/>
+                <a16:creationId xmlns:a16="http://schemas.microsoft.com/office/drawing/2014/main" id="{C6D730F8-FA39-4BF7-A733-04F480469022}"/>
               </a:ext>
             </a:extLst>
           </p:cNvPr>
@@ -23815,7 +23860,7 @@
           <p:cNvPr id="19" name="footer-label-9">
             <a:extLst xmlns:a="http://schemas.openxmlformats.org/drawingml/2006/main">
               <a:ext uri="{FF2B5EF4-FFF2-40B4-BE49-F238E27FC236}">
-                <a16:creationId xmlns:a16="http://schemas.microsoft.com/office/drawing/2014/main" id="{9BE15481-57FD-4120-91DD-39908D97C603}"/>
+                <a16:creationId xmlns:a16="http://schemas.microsoft.com/office/drawing/2014/main" id="{6A5EF091-5B6F-496C-A958-786CEBC301B4}"/>
               </a:ext>
             </a:extLst>
           </p:cNvPr>
@@ -23877,7 +23922,7 @@
           <p:cNvPr id="20" name="footer-page-9">
             <a:extLst xmlns:a="http://schemas.openxmlformats.org/drawingml/2006/main">
               <a:ext uri="{FF2B5EF4-FFF2-40B4-BE49-F238E27FC236}">
-                <a16:creationId xmlns:a16="http://schemas.microsoft.com/office/drawing/2014/main" id="{8EF04DDA-6F08-4F59-A0D1-76B7786CBE1F}"/>
+                <a16:creationId xmlns:a16="http://schemas.microsoft.com/office/drawing/2014/main" id="{2E7F5A70-FA24-408D-B01C-DFAC59F9C3EB}"/>
               </a:ext>
             </a:extLst>
           </p:cNvPr>
@@ -23937,7 +23982,7 @@
     </p:spTree>
     <p:extLst>
       <p:ext uri="{BB962C8B-B14F-4D97-AF65-F5344CB8AC3E}">
-        <p14:creationId xmlns:p14="http://schemas.microsoft.com/office/powerpoint/2010/main" val="741017526"/>
+        <p14:creationId xmlns:p14="http://schemas.microsoft.com/office/powerpoint/2010/main" val="9412917"/>
       </p:ext>
     </p:extLst>
   </p:cSld>

--- a/docs/MSU-EVA-อบรมสายสนับสนุน-ฉบับวิทยากร.pptx
+++ b/docs/MSU-EVA-อบรมสายสนับสนุน-ฉบับวิทยากร.pptx
@@ -2,30 +2,30 @@
 <file path=ppt/presentation.xml><?xml version="1.0" encoding="utf-8"?>
 <p:presentation xmlns:p="http://schemas.openxmlformats.org/presentationml/2006/main">
   <p:sldMasterIdLst>
-    <p:sldMasterId xmlns:r="http://schemas.openxmlformats.org/officeDocument/2006/relationships" id="2147483648" r:id="Rc7212129460a43b4"/>
+    <p:sldMasterId xmlns:r="http://schemas.openxmlformats.org/officeDocument/2006/relationships" id="2147483648" r:id="Rca38ee24cce64450"/>
   </p:sldMasterIdLst>
   <p:notesMasterIdLst>
-    <p:notesMasterId xmlns:r="http://schemas.openxmlformats.org/officeDocument/2006/relationships" r:id="Rbcdf9f8a9f0a4470"/>
+    <p:notesMasterId xmlns:r="http://schemas.openxmlformats.org/officeDocument/2006/relationships" r:id="R1beff4bfe0254dc0"/>
   </p:notesMasterIdLst>
   <p:sldIdLst>
-    <p:sldId xmlns:r="http://schemas.openxmlformats.org/officeDocument/2006/relationships" id="256" r:id="R9073e96396f347ad"/>
-    <p:sldId xmlns:r="http://schemas.openxmlformats.org/officeDocument/2006/relationships" id="257" r:id="Rcb25647113d942c2"/>
-    <p:sldId xmlns:r="http://schemas.openxmlformats.org/officeDocument/2006/relationships" id="258" r:id="R67e2127c7b8e4ae0"/>
-    <p:sldId xmlns:r="http://schemas.openxmlformats.org/officeDocument/2006/relationships" id="259" r:id="Re46e6167582a40fb"/>
-    <p:sldId xmlns:r="http://schemas.openxmlformats.org/officeDocument/2006/relationships" id="260" r:id="Rd650393421754b18"/>
-    <p:sldId xmlns:r="http://schemas.openxmlformats.org/officeDocument/2006/relationships" id="261" r:id="Ra294a3fa97304ffe"/>
-    <p:sldId xmlns:r="http://schemas.openxmlformats.org/officeDocument/2006/relationships" id="262" r:id="R3a559ca2c8d149c4"/>
-    <p:sldId xmlns:r="http://schemas.openxmlformats.org/officeDocument/2006/relationships" id="263" r:id="Rafa9169c1a264f75"/>
-    <p:sldId xmlns:r="http://schemas.openxmlformats.org/officeDocument/2006/relationships" id="264" r:id="Reb953a08af1043f1"/>
-    <p:sldId xmlns:r="http://schemas.openxmlformats.org/officeDocument/2006/relationships" id="265" r:id="R376f49a1020d4af8"/>
-    <p:sldId xmlns:r="http://schemas.openxmlformats.org/officeDocument/2006/relationships" id="266" r:id="R9d06a2e508ac4045"/>
-    <p:sldId xmlns:r="http://schemas.openxmlformats.org/officeDocument/2006/relationships" id="267" r:id="R9ded3f7a9c66494f"/>
-    <p:sldId xmlns:r="http://schemas.openxmlformats.org/officeDocument/2006/relationships" id="268" r:id="R13d28b52153641c1"/>
-    <p:sldId xmlns:r="http://schemas.openxmlformats.org/officeDocument/2006/relationships" id="269" r:id="R3efe8f9546f143ff"/>
-    <p:sldId xmlns:r="http://schemas.openxmlformats.org/officeDocument/2006/relationships" id="270" r:id="Rd97fe6a7f0b94bab"/>
-    <p:sldId xmlns:r="http://schemas.openxmlformats.org/officeDocument/2006/relationships" id="271" r:id="Rbef6ced2a22948e5"/>
-    <p:sldId xmlns:r="http://schemas.openxmlformats.org/officeDocument/2006/relationships" id="272" r:id="Rbd534936104547b3"/>
-    <p:sldId xmlns:r="http://schemas.openxmlformats.org/officeDocument/2006/relationships" id="273" r:id="Rc9ad8a9ec8e24c8b"/>
+    <p:sldId xmlns:r="http://schemas.openxmlformats.org/officeDocument/2006/relationships" id="256" r:id="R0abaa2487c074399"/>
+    <p:sldId xmlns:r="http://schemas.openxmlformats.org/officeDocument/2006/relationships" id="257" r:id="Rf1dd62338d7740e0"/>
+    <p:sldId xmlns:r="http://schemas.openxmlformats.org/officeDocument/2006/relationships" id="258" r:id="R79ab4c9f42124747"/>
+    <p:sldId xmlns:r="http://schemas.openxmlformats.org/officeDocument/2006/relationships" id="259" r:id="Rde2e384c841c4943"/>
+    <p:sldId xmlns:r="http://schemas.openxmlformats.org/officeDocument/2006/relationships" id="260" r:id="R8309f4f9140d41d9"/>
+    <p:sldId xmlns:r="http://schemas.openxmlformats.org/officeDocument/2006/relationships" id="261" r:id="Re3765f9d37494818"/>
+    <p:sldId xmlns:r="http://schemas.openxmlformats.org/officeDocument/2006/relationships" id="262" r:id="Rd59e28097b664324"/>
+    <p:sldId xmlns:r="http://schemas.openxmlformats.org/officeDocument/2006/relationships" id="263" r:id="R637491a060d3444a"/>
+    <p:sldId xmlns:r="http://schemas.openxmlformats.org/officeDocument/2006/relationships" id="264" r:id="R59fb711ce03a44aa"/>
+    <p:sldId xmlns:r="http://schemas.openxmlformats.org/officeDocument/2006/relationships" id="265" r:id="Rb8730a1d44e0469a"/>
+    <p:sldId xmlns:r="http://schemas.openxmlformats.org/officeDocument/2006/relationships" id="266" r:id="R074440736eb14698"/>
+    <p:sldId xmlns:r="http://schemas.openxmlformats.org/officeDocument/2006/relationships" id="267" r:id="R1c2230f0abf04797"/>
+    <p:sldId xmlns:r="http://schemas.openxmlformats.org/officeDocument/2006/relationships" id="268" r:id="R357a4798d02e429a"/>
+    <p:sldId xmlns:r="http://schemas.openxmlformats.org/officeDocument/2006/relationships" id="269" r:id="Ra6f3bb1a12314644"/>
+    <p:sldId xmlns:r="http://schemas.openxmlformats.org/officeDocument/2006/relationships" id="270" r:id="R063766a108724c5e"/>
+    <p:sldId xmlns:r="http://schemas.openxmlformats.org/officeDocument/2006/relationships" id="271" r:id="R00d3506f62e44a4e"/>
+    <p:sldId xmlns:r="http://schemas.openxmlformats.org/officeDocument/2006/relationships" id="272" r:id="Rb8d3545f7b294212"/>
+    <p:sldId xmlns:r="http://schemas.openxmlformats.org/officeDocument/2006/relationships" id="273" r:id="Rd51b1030e66946e1"/>
   </p:sldIdLst>
   <p:sldSz cx="12192000" cy="6858000"/>
   <p:notesSz cx="6858000" cy="9144000"/>
@@ -459,7 +459,7 @@
           <a:lstStyle xmlns:a="http://schemas.openxmlformats.org/drawingml/2006/main"/>
           <a:p xmlns:a="http://schemas.openxmlformats.org/drawingml/2006/main">
             <a:r>
-              <a:t>[พูด] สวัสดีทุกท่านครับ สำหรับช่วงบ่ายนี้เราจะมาดูการใช้งาน MSU EVA สำหรับบุคลากรสายสนับสนุนกันนะครับ บางท่านอาจอยู่ต่อจากช่วงเช้า บางท่านเพิ่งเข้ามาใหม่ และมีทั้งผู้รับการประเมิน ผู้ประเมิน ผู้บริหาร รวมถึงผู้ประเมินระบบ ไม่ต้องกังวลครับ เราจะเริ่มจากภาพรวมสั้น ๆ ก่อน แล้วผมจะสาธิตหนึ่งรายการให้ดู หลังจากนั้นทุกท่านจะได้ทดลองกับบัญชีที่เตรียมไว้ครับ</a:t>
+              <a:t>[พูด] สวัสดีทุกท่านครับ สำหรับช่วงบ่ายนี้เราจะมาดูการใช้งานระบบประเมินผลการปฏิบัติงานบุคลากร หรือ MSU EVA สำหรับบุคลากรสายสนับสนุนกันนะครับ บางท่านอาจอยู่ต่อจากช่วงเช้า บางท่านเพิ่งเข้ามาใหม่ และมีทั้งผู้รับการประเมิน ผู้ประเมิน ผู้บริหาร รวมถึงผู้ประเมินระบบ ไม่ต้องกังวลครับ เราจะเริ่มจากภาพรวมสั้น ๆ ก่อน แล้วผมจะสาธิตหนึ่งรายการให้ดู หลังจากนั้นทุกท่านจะได้ทดลองกับบัญชีที่เตรียมไว้ครับ</a:t>
             </a:r>
           </a:p>
           <a:p xmlns:a="http://schemas.openxmlformats.org/drawingml/2006/main">
@@ -864,7 +864,7 @@
           <a:lstStyle xmlns:a="http://schemas.openxmlformats.org/drawingml/2006/main"/>
           <a:p xmlns:a="http://schemas.openxmlformats.org/drawingml/2006/main">
             <a:r>
-              <a:t>[พูด] เมื่อข้อมูลยังไม่ครบ ให้บันทึกร่างไว้ก่อนครับ เรากลับมาแก้ไขได้และงานยังไม่ถูกส่งให้ผู้ประเมิน ส่วนส่งแบบประเมินใช้เมื่อข้อมูลบังคับ คะแนน และหลักฐานครบแล้ว ก่อนยืนยัน ลองหยุดตรวจอีกครั้งว่าผลที่ทำได้สอดคล้องกับรายละเอียดกิจกรรมและหลักฐานหรือไม่ วันนี้ตอนทดลองเราจะหยุดที่บันทึกร่างนะครับ ส่วนต่อไปผมจะอธิบายให้เห็นว่าเมื่อส่งจริง งานเดินต่ออย่างไร</a:t>
+              <a:t>[พูด] ถ้าข้อมูลยังไม่ครบ ให้บันทึกร่างไว้ก่อน เมื่อข้อมูลและหลักฐานครบแล้วจึงส่งแบบประเมินครับ ก่อนยืนยัน ลองหยุดตรวจอีกครั้งว่าผลที่ทำได้สอดคล้องกับรายละเอียดกิจกรรมและหลักฐานหรือไม่ วันนี้ตอนทดลองเราจะหยุดที่บันทึกร่างนะครับ ส่วนต่อไปผมจะอธิบายให้เห็นว่าเมื่อส่งจริง งานเดินต่ออย่างไร</a:t>
             </a:r>
           </a:p>
           <a:p xmlns:a="http://schemas.openxmlformats.org/drawingml/2006/main">
@@ -1599,7 +1599,7 @@
           <a:lstStyle xmlns:a="http://schemas.openxmlformats.org/drawingml/2006/main"/>
           <a:p xmlns:a="http://schemas.openxmlformats.org/drawingml/2006/main">
             <a:r>
-              <a:t>[พูด] MSU EVA ไม่ได้มีแค่หน้ากรอกกิจกรรมนะครับ ระบบครอบคลุมตั้งแต่การจัดการผู้ใช้และสิทธิ์ การสร้างเกณฑ์ การกำหนดรอบและมอบหมายงาน ไปจนถึงการกรอกข้อมูล การประเมิน ติดตามสถานะ และส่งออกรายงาน ส่วนงานเตรียมระบบเป็นหน้าที่ของ Admin ผู้เข้าอบรมทั่วไปจึงไม่ต้องสร้างหรือเลือกรอบประเมินเองครับ เราตรวจเฉพาะงานที่ได้รับ แล้วดำเนินการตามสิทธิ์ของเรา ต่อไปมาทำความรู้จักผู้ใช้งานแต่ละกลุ่มกันครับ</a:t>
+              <a:t>[พูด] ระบบไม่ได้มีแค่หน้ากรอกกิจกรรมนะครับ ระบบครอบคลุมตั้งแต่การจัดการผู้ใช้และสิทธิ์ การสร้างเกณฑ์ การกำหนดรอบและมอบหมายงาน ไปจนถึงการกรอกข้อมูล การประเมิน ติดตามสถานะ และส่งออกรายงาน ส่วนงานเตรียมระบบเป็นหน้าที่ของ Admin ผู้เข้าอบรมทั่วไปจึงไม่ต้องสร้างหรือเลือกรอบประเมินเองครับ เราตรวจเฉพาะงานที่ได้รับ แล้วดำเนินการตามสิทธิ์ของเรา ต่อไปมาทำความรู้จักผู้ใช้งานแต่ละกลุ่มกันครับ</a:t>
             </a:r>
           </a:p>
           <a:p xmlns:a="http://schemas.openxmlformats.org/drawingml/2006/main">
@@ -1704,7 +1704,7 @@
           <a:lstStyle xmlns:a="http://schemas.openxmlformats.org/drawingml/2006/main"/>
           <a:p xmlns:a="http://schemas.openxmlformats.org/drawingml/2006/main">
             <a:r>
-              <a:t>[พูด] ในระบบมีห้าบทบาทหลักครับ ได้แก่ Admin ผู้รับการประเมิน ผู้ประเมิน กรรมการ และผู้บริหาร แต่ละบทบาทจะเห็นเมนูต่างกัน ตรงนี้ขอเน้นครับ Admin เป็นผู้กำหนดผู้ใช้ เกณฑ์ รอบประเมิน การมอบหมาย และลำดับผู้ประเมิน ส่วนบทบาทผู้ประเมิน กรรมการ และผู้บริหารจะถูกใช้ตามขั้นที่ Admin จัดไว้ บางงานอาจใช้ไม่ครบทุกบทบาท และคนปิดงานคือคนสุดท้ายในลำดับของงานนั้นครับ เมื่อรู้ว่าใครทำอะไรแล้ว เรามาดูเส้นทางของงานทั้งกระบวนการกันครับ</a:t>
+              <a:t>[พูด] ในระบบมีห้าบทบาทหลักครับ ได้แก่ Admin ผู้รับการประเมิน ผู้ประเมิน กรรมการ และผู้บริหาร แต่ละบทบาทจะเห็นเมนูต่างกัน ตรงนี้ขอเน้นครับ Admin เป็นผู้กำหนดผู้ใช้ เกณฑ์ รอบประเมิน การมอบหมาย และลำดับผู้ประเมิน ส่วนบทบาทผู้ประเมิน กรรมการ และผู้บริหารจะถูกใช้ตามขั้นที่ Admin จัดไว้ บางงานอาจใช้ไม่ครบทุกบทบาท และงานจะเสร็จสมบูรณ์เมื่อผู้ประเมินลำดับสุดท้ายกดยืนยันผลครับ เมื่อรู้ว่าใครทำอะไรแล้ว เรามาดูเส้นทางของงานทั้งกระบวนการกันครับ</a:t>
             </a:r>
           </a:p>
           <a:p xmlns:a="http://schemas.openxmlformats.org/drawingml/2006/main">
@@ -2282,7 +2282,7 @@
   </p:cSld>
   <p:clrMap bg1="lt1" tx1="dk1" bg2="lt2" tx2="dk2" accent1="accent1" accent2="accent2" accent3="accent3" accent4="accent4" accent5="accent5" accent6="accent6" hlink="hlink" folHlink="folHlink"/>
   <p:sldLayoutIdLst>
-    <p:sldLayoutId xmlns:r="http://schemas.openxmlformats.org/officeDocument/2006/relationships" id="2147483649" r:id="R682ca8d30654498a"/>
+    <p:sldLayoutId xmlns:r="http://schemas.openxmlformats.org/officeDocument/2006/relationships" id="2147483649" r:id="Rbe318a677f8e43f1"/>
   </p:sldLayoutIdLst>
   <p:txStyles>
     <p:titleStyle>
@@ -2830,14 +2830,14 @@
       </p:grpSpPr>
       <p:pic>
         <p:nvPicPr>
-          <p:cNvPr id="12" name=""/>
+          <p:cNvPr id="13" name=""/>
           <p:cNvPicPr>
             <a:picLocks xmlns:a="http://schemas.openxmlformats.org/drawingml/2006/main" noChangeAspect="1"/>
           </p:cNvPicPr>
           <p:nvPr/>
         </p:nvPicPr>
         <p:blipFill>
-          <a:blip xmlns:r="http://schemas.openxmlformats.org/officeDocument/2006/relationships" xmlns:a="http://schemas.openxmlformats.org/drawingml/2006/main" r:embed="R6800e5295b2e4f7d"/>
+          <a:blip xmlns:r="http://schemas.openxmlformats.org/officeDocument/2006/relationships" xmlns:a="http://schemas.openxmlformats.org/drawingml/2006/main" r:embed="Rfd28a947962e4aa2"/>
           <a:srcRect xmlns:a="http://schemas.openxmlformats.org/drawingml/2006/main" l="2579" t="0" r="2579" b="0"/>
           <a:stretch xmlns:a="http://schemas.openxmlformats.org/drawingml/2006/main">
             <a:fillRect l="0" t="0" r="0" b="0"/>
@@ -2858,7 +2858,7 @@
           <p:cNvPr id="2" name="cover-panel">
             <a:extLst xmlns:a="http://schemas.openxmlformats.org/drawingml/2006/main">
               <a:ext uri="{FF2B5EF4-FFF2-40B4-BE49-F238E27FC236}">
-                <a16:creationId xmlns:a16="http://schemas.microsoft.com/office/drawing/2014/main" id="{615D1E8B-1021-4369-85B6-8D4F4EF85C3D}"/>
+                <a16:creationId xmlns:a16="http://schemas.microsoft.com/office/drawing/2014/main" id="{4BD920DD-3FBA-46AA-AFA6-410B13FC3DE8}"/>
               </a:ext>
             </a:extLst>
           </p:cNvPr>
@@ -2889,7 +2889,7 @@
           <p:cNvPr id="3" name="cover-accent">
             <a:extLst xmlns:a="http://schemas.openxmlformats.org/drawingml/2006/main">
               <a:ext uri="{FF2B5EF4-FFF2-40B4-BE49-F238E27FC236}">
-                <a16:creationId xmlns:a16="http://schemas.microsoft.com/office/drawing/2014/main" id="{FA1AC356-091F-4FBB-8EA7-1D9A2E6FD603}"/>
+                <a16:creationId xmlns:a16="http://schemas.microsoft.com/office/drawing/2014/main" id="{7B3A8A63-4259-4E88-BDCC-6C9864C88F2A}"/>
               </a:ext>
             </a:extLst>
           </p:cNvPr>
@@ -2917,14 +2917,14 @@
       </p:sp>
       <p:pic>
         <p:nvPicPr>
-          <p:cNvPr id="15" name=""/>
+          <p:cNvPr id="16" name=""/>
           <p:cNvPicPr>
             <a:picLocks xmlns:a="http://schemas.openxmlformats.org/drawingml/2006/main" noChangeAspect="1"/>
           </p:cNvPicPr>
           <p:nvPr/>
         </p:nvPicPr>
         <p:blipFill>
-          <a:blip xmlns:r="http://schemas.openxmlformats.org/officeDocument/2006/relationships" xmlns:a="http://schemas.openxmlformats.org/drawingml/2006/main" r:embed="R9e22daad932543ad"/>
+          <a:blip xmlns:r="http://schemas.openxmlformats.org/officeDocument/2006/relationships" xmlns:a="http://schemas.openxmlformats.org/drawingml/2006/main" r:embed="Rb03719f3d2154348"/>
           <a:stretch xmlns:a="http://schemas.openxmlformats.org/drawingml/2006/main"/>
         </p:blipFill>
         <p:spPr>
@@ -2942,7 +2942,7 @@
           <p:cNvPr id="5" name="cover-institution">
             <a:extLst xmlns:a="http://schemas.openxmlformats.org/drawingml/2006/main">
               <a:ext uri="{FF2B5EF4-FFF2-40B4-BE49-F238E27FC236}">
-                <a16:creationId xmlns:a16="http://schemas.microsoft.com/office/drawing/2014/main" id="{07A4B357-60B6-4790-8EAB-D14A541D15EB}"/>
+                <a16:creationId xmlns:a16="http://schemas.microsoft.com/office/drawing/2014/main" id="{CDB00FE0-CF47-4949-9002-D0655C6DD291}"/>
               </a:ext>
             </a:extLst>
           </p:cNvPr>
@@ -3004,7 +3004,7 @@
           <p:cNvPr id="6" name="cover-session">
             <a:extLst xmlns:a="http://schemas.openxmlformats.org/drawingml/2006/main">
               <a:ext uri="{FF2B5EF4-FFF2-40B4-BE49-F238E27FC236}">
-                <a16:creationId xmlns:a16="http://schemas.microsoft.com/office/drawing/2014/main" id="{88D6F5F3-B97B-4D7F-89F7-401A67B0BE63}"/>
+                <a16:creationId xmlns:a16="http://schemas.microsoft.com/office/drawing/2014/main" id="{4D83D276-F8C0-4EAB-AE03-582C83F0A729}"/>
               </a:ext>
             </a:extLst>
           </p:cNvPr>
@@ -3066,7 +3066,7 @@
           <p:cNvPr id="7" name="cover-title">
             <a:extLst xmlns:a="http://schemas.openxmlformats.org/drawingml/2006/main">
               <a:ext uri="{FF2B5EF4-FFF2-40B4-BE49-F238E27FC236}">
-                <a16:creationId xmlns:a16="http://schemas.microsoft.com/office/drawing/2014/main" id="{38103830-5A7A-481E-83F9-BECE340882C0}"/>
+                <a16:creationId xmlns:a16="http://schemas.microsoft.com/office/drawing/2014/main" id="{A470D213-6405-4028-A0EB-03023D6D159E}"/>
               </a:ext>
             </a:extLst>
           </p:cNvPr>
@@ -3078,7 +3078,7 @@
         <p:spPr>
           <a:xfrm xmlns:a="http://schemas.openxmlformats.org/drawingml/2006/main">
             <a:off x="647700" y="2095500"/>
-            <a:ext cx="6191250" cy="1695450"/>
+            <a:ext cx="6477000" cy="1504950"/>
           </a:xfrm>
           <a:prstGeom xmlns:a="http://schemas.openxmlformats.org/drawingml/2006/main" prst="rect">
             <a:avLst/>
@@ -3097,10 +3097,10 @@
           <a:p xmlns:a="http://schemas.openxmlformats.org/drawingml/2006/main">
             <a:pPr algn="l">
               <a:lnSpc>
-                <a:spcPct val="92000"/>
-              </a:lnSpc>
-              <a:buNone/>
-              <a:defRPr sz="3975" b="1">
+                <a:spcPct val="96000"/>
+              </a:lnSpc>
+              <a:buNone/>
+              <a:defRPr sz="3525" b="1">
                 <a:solidFill>
                   <a:srgbClr val="102A43"/>
                 </a:solidFill>
@@ -3110,7 +3110,7 @@
               </a:defRPr>
             </a:pPr>
             <a:r>
-              <a:rPr sz="3975" b="1">
+              <a:rPr sz="3525" b="1">
                 <a:solidFill>
                   <a:srgbClr val="102A43"/>
                 </a:solidFill>
@@ -3118,55 +3118,90 @@
                 <a:ea typeface="Tahoma"/>
                 <a:cs typeface="Tahoma"/>
               </a:rPr>
-              <a:t>การใช้งานระบบ MSU EVA</a:t>
-            </a:r>
-          </a:p>
+              <a:t>ระบบประเมินผลการปฏิบัติงานบุคลากร</a:t>
+            </a:r>
+          </a:p>
+        </p:txBody>
+      </p:sp>
+      <p:sp>
+        <p:nvSpPr>
+          <p:cNvPr id="8" name="cover-system-short-name">
+            <a:extLst xmlns:a="http://schemas.openxmlformats.org/drawingml/2006/main">
+              <a:ext uri="{FF2B5EF4-FFF2-40B4-BE49-F238E27FC236}">
+                <a16:creationId xmlns:a16="http://schemas.microsoft.com/office/drawing/2014/main" id="{328C5F3D-8462-4234-B733-C1237C76F3DB}"/>
+              </a:ext>
+            </a:extLst>
+          </p:cNvPr>
+          <p:cNvSpPr>
+            <a:spLocks xmlns:a="http://schemas.openxmlformats.org/drawingml/2006/main" noGrp="1"/>
+          </p:cNvSpPr>
+          <p:nvPr/>
+        </p:nvSpPr>
+        <p:spPr>
+          <a:xfrm xmlns:a="http://schemas.openxmlformats.org/drawingml/2006/main">
+            <a:off x="647700" y="3714750"/>
+            <a:ext cx="5715000" cy="400050"/>
+          </a:xfrm>
+          <a:prstGeom xmlns:a="http://schemas.openxmlformats.org/drawingml/2006/main" prst="rect">
+            <a:avLst/>
+          </a:prstGeom>
+          <a:noFill xmlns:a="http://schemas.openxmlformats.org/drawingml/2006/main"/>
+          <a:ln xmlns:a="http://schemas.openxmlformats.org/drawingml/2006/main" w="0">
+            <a:noFill/>
+            <a:prstDash val="solid"/>
+          </a:ln>
+        </p:spPr>
+        <p:txBody>
+          <a:bodyPr xmlns:a="http://schemas.openxmlformats.org/drawingml/2006/main" lIns="0" tIns="0" rIns="0" bIns="0" anchor="t">
+            <a:noAutofit/>
+          </a:bodyPr>
+          <a:lstStyle xmlns:a="http://schemas.openxmlformats.org/drawingml/2006/main"/>
           <a:p xmlns:a="http://schemas.openxmlformats.org/drawingml/2006/main">
             <a:pPr algn="l">
               <a:lnSpc>
-                <a:spcPct val="92000"/>
-              </a:lnSpc>
-              <a:buNone/>
-              <a:defRPr sz="3975" b="1">
-                <a:solidFill>
-                  <a:srgbClr val="102A43"/>
-                </a:solidFill>
-                <a:latin typeface="Tahoma"/>
-                <a:ea typeface="Tahoma"/>
-                <a:cs typeface="Tahoma"/>
-              </a:defRPr>
-            </a:pPr>
-            <a:r>
-              <a:rPr sz="3975" b="1">
-                <a:solidFill>
-                  <a:srgbClr val="102A43"/>
-                </a:solidFill>
-                <a:latin typeface="Tahoma"/>
-                <a:ea typeface="Tahoma"/>
-                <a:cs typeface="Tahoma"/>
-              </a:rPr>
-              <a:t>สำหรับบุคลากรสายสนับสนุน</a:t>
-            </a:r>
-          </a:p>
-        </p:txBody>
-      </p:sp>
-      <p:sp>
-        <p:nvSpPr>
-          <p:cNvPr id="8" name="cover-gold-rule">
-            <a:extLst xmlns:a="http://schemas.openxmlformats.org/drawingml/2006/main">
-              <a:ext uri="{FF2B5EF4-FFF2-40B4-BE49-F238E27FC236}">
-                <a16:creationId xmlns:a16="http://schemas.microsoft.com/office/drawing/2014/main" id="{EF69F4EF-A8A6-4BAA-8343-DE3EDBCAFC17}"/>
-              </a:ext>
-            </a:extLst>
-          </p:cNvPr>
-          <p:cNvSpPr>
-            <a:spLocks xmlns:a="http://schemas.openxmlformats.org/drawingml/2006/main" noGrp="1"/>
-          </p:cNvSpPr>
-          <p:nvPr/>
-        </p:nvSpPr>
-        <p:spPr>
-          <a:xfrm xmlns:a="http://schemas.openxmlformats.org/drawingml/2006/main">
-            <a:off x="647700" y="4095750"/>
+                <a:spcPct val="100000"/>
+              </a:lnSpc>
+              <a:buNone/>
+              <a:defRPr sz="2025" b="1">
+                <a:solidFill>
+                  <a:srgbClr val="008C86"/>
+                </a:solidFill>
+                <a:latin typeface="Tahoma"/>
+                <a:ea typeface="Tahoma"/>
+                <a:cs typeface="Tahoma"/>
+              </a:defRPr>
+            </a:pPr>
+            <a:r>
+              <a:rPr sz="2025" b="1">
+                <a:solidFill>
+                  <a:srgbClr val="008C86"/>
+                </a:solidFill>
+                <a:latin typeface="Tahoma"/>
+                <a:ea typeface="Tahoma"/>
+                <a:cs typeface="Tahoma"/>
+              </a:rPr>
+              <a:t>(MSU EVA)  •  สายสนับสนุน</a:t>
+            </a:r>
+          </a:p>
+        </p:txBody>
+      </p:sp>
+      <p:sp>
+        <p:nvSpPr>
+          <p:cNvPr id="9" name="cover-gold-rule">
+            <a:extLst xmlns:a="http://schemas.openxmlformats.org/drawingml/2006/main">
+              <a:ext uri="{FF2B5EF4-FFF2-40B4-BE49-F238E27FC236}">
+                <a16:creationId xmlns:a16="http://schemas.microsoft.com/office/drawing/2014/main" id="{A2AA34B2-C68C-4970-8246-D749623C289F}"/>
+              </a:ext>
+            </a:extLst>
+          </p:cNvPr>
+          <p:cNvSpPr>
+            <a:spLocks xmlns:a="http://schemas.openxmlformats.org/drawingml/2006/main" noGrp="1"/>
+          </p:cNvSpPr>
+          <p:nvPr/>
+        </p:nvSpPr>
+        <p:spPr>
+          <a:xfrm xmlns:a="http://schemas.openxmlformats.org/drawingml/2006/main">
+            <a:off x="647700" y="4305300"/>
             <a:ext cx="876300" cy="57150"/>
           </a:xfrm>
           <a:prstGeom xmlns:a="http://schemas.openxmlformats.org/drawingml/2006/main" prst="rect">
@@ -3183,21 +3218,21 @@
       </p:sp>
       <p:sp>
         <p:nvSpPr>
-          <p:cNvPr id="9" name="cover-promise">
-            <a:extLst xmlns:a="http://schemas.openxmlformats.org/drawingml/2006/main">
-              <a:ext uri="{FF2B5EF4-FFF2-40B4-BE49-F238E27FC236}">
-                <a16:creationId xmlns:a16="http://schemas.microsoft.com/office/drawing/2014/main" id="{54A2FC46-9A84-455D-A581-E5625102FEAB}"/>
-              </a:ext>
-            </a:extLst>
-          </p:cNvPr>
-          <p:cNvSpPr>
-            <a:spLocks xmlns:a="http://schemas.openxmlformats.org/drawingml/2006/main" noGrp="1"/>
-          </p:cNvSpPr>
-          <p:nvPr/>
-        </p:nvSpPr>
-        <p:spPr>
-          <a:xfrm xmlns:a="http://schemas.openxmlformats.org/drawingml/2006/main">
-            <a:off x="647700" y="4457700"/>
+          <p:cNvPr id="10" name="cover-promise">
+            <a:extLst xmlns:a="http://schemas.openxmlformats.org/drawingml/2006/main">
+              <a:ext uri="{FF2B5EF4-FFF2-40B4-BE49-F238E27FC236}">
+                <a16:creationId xmlns:a16="http://schemas.microsoft.com/office/drawing/2014/main" id="{63683B48-4FBD-42AC-83E8-7F1A986EC51B}"/>
+              </a:ext>
+            </a:extLst>
+          </p:cNvPr>
+          <p:cNvSpPr>
+            <a:spLocks xmlns:a="http://schemas.openxmlformats.org/drawingml/2006/main" noGrp="1"/>
+          </p:cNvSpPr>
+          <p:nvPr/>
+        </p:nvSpPr>
+        <p:spPr>
+          <a:xfrm xmlns:a="http://schemas.openxmlformats.org/drawingml/2006/main">
+            <a:off x="647700" y="4667250"/>
             <a:ext cx="5905500" cy="781050"/>
           </a:xfrm>
           <a:prstGeom xmlns:a="http://schemas.openxmlformats.org/drawingml/2006/main" prst="rect">
@@ -3245,10 +3280,10 @@
       </p:sp>
       <p:sp>
         <p:nvSpPr>
-          <p:cNvPr id="10" name="cover-style">
-            <a:extLst xmlns:a="http://schemas.openxmlformats.org/drawingml/2006/main">
-              <a:ext uri="{FF2B5EF4-FFF2-40B4-BE49-F238E27FC236}">
-                <a16:creationId xmlns:a16="http://schemas.microsoft.com/office/drawing/2014/main" id="{DA3ED1E2-1887-4D02-BFBE-E0499188CE78}"/>
+          <p:cNvPr id="11" name="cover-style">
+            <a:extLst xmlns:a="http://schemas.openxmlformats.org/drawingml/2006/main">
+              <a:ext uri="{FF2B5EF4-FFF2-40B4-BE49-F238E27FC236}">
+                <a16:creationId xmlns:a16="http://schemas.microsoft.com/office/drawing/2014/main" id="{8CF27664-C6EA-40F1-8652-B777A36C0282}"/>
               </a:ext>
             </a:extLst>
           </p:cNvPr>
@@ -3307,14 +3342,14 @@
       </p:sp>
       <p:pic>
         <p:nvPicPr>
-          <p:cNvPr id="22" name=""/>
+          <p:cNvPr id="24" name=""/>
           <p:cNvPicPr>
             <a:picLocks xmlns:a="http://schemas.openxmlformats.org/drawingml/2006/main" noChangeAspect="1"/>
           </p:cNvPicPr>
           <p:nvPr/>
         </p:nvPicPr>
         <p:blipFill>
-          <a:blip xmlns:r="http://schemas.openxmlformats.org/officeDocument/2006/relationships" xmlns:a="http://schemas.openxmlformats.org/drawingml/2006/main" r:embed="R760615a8baf14e8d"/>
+          <a:blip xmlns:r="http://schemas.openxmlformats.org/officeDocument/2006/relationships" xmlns:a="http://schemas.openxmlformats.org/drawingml/2006/main" r:embed="R3c7b39f88c374072"/>
           <a:stretch xmlns:a="http://schemas.openxmlformats.org/drawingml/2006/main"/>
         </p:blipFill>
         <p:spPr>
@@ -3330,7 +3365,7 @@
     </p:spTree>
     <p:extLst>
       <p:ext uri="{BB962C8B-B14F-4D97-AF65-F5344CB8AC3E}">
-        <p14:creationId xmlns:p14="http://schemas.microsoft.com/office/powerpoint/2010/main" val="1308122707"/>
+        <p14:creationId xmlns:p14="http://schemas.microsoft.com/office/powerpoint/2010/main" val="599453742"/>
       </p:ext>
     </p:extLst>
   </p:cSld>
@@ -3361,7 +3396,7 @@
           <p:cNvPr id="15" name="side-accent-10">
             <a:extLst xmlns:a="http://schemas.openxmlformats.org/drawingml/2006/main">
               <a:ext uri="{FF2B5EF4-FFF2-40B4-BE49-F238E27FC236}">
-                <a16:creationId xmlns:a16="http://schemas.microsoft.com/office/drawing/2014/main" id="{A67ABE3A-0584-48CC-A8EF-94F6F4A60265}"/>
+                <a16:creationId xmlns:a16="http://schemas.microsoft.com/office/drawing/2014/main" id="{ECC15DAA-BC26-4F82-B8CA-A07EFD9F2E7D}"/>
               </a:ext>
             </a:extLst>
           </p:cNvPr>
@@ -3392,7 +3427,7 @@
           <p:cNvPr id="2" name="kicker-10">
             <a:extLst xmlns:a="http://schemas.openxmlformats.org/drawingml/2006/main">
               <a:ext uri="{FF2B5EF4-FFF2-40B4-BE49-F238E27FC236}">
-                <a16:creationId xmlns:a16="http://schemas.microsoft.com/office/drawing/2014/main" id="{1E5EC6C0-C83A-4CC0-B18E-B9E2C62E06FA}"/>
+                <a16:creationId xmlns:a16="http://schemas.microsoft.com/office/drawing/2014/main" id="{6C46BE26-632F-4F45-97A1-061D0A56DE6E}"/>
               </a:ext>
             </a:extLst>
           </p:cNvPr>
@@ -3454,7 +3489,7 @@
           <p:cNvPr id="3" name="title-10">
             <a:extLst xmlns:a="http://schemas.openxmlformats.org/drawingml/2006/main">
               <a:ext uri="{FF2B5EF4-FFF2-40B4-BE49-F238E27FC236}">
-                <a16:creationId xmlns:a16="http://schemas.microsoft.com/office/drawing/2014/main" id="{4411304C-C279-445B-9FD6-036C823CA949}"/>
+                <a16:creationId xmlns:a16="http://schemas.microsoft.com/office/drawing/2014/main" id="{57684424-75BB-498F-9044-578768DB729B}"/>
               </a:ext>
             </a:extLst>
           </p:cNvPr>
@@ -3516,7 +3551,7 @@
           <p:cNvPr id="4" name="">
             <a:extLst xmlns:a="http://schemas.openxmlformats.org/drawingml/2006/main">
               <a:ext uri="{FF2B5EF4-FFF2-40B4-BE49-F238E27FC236}">
-                <a16:creationId xmlns:a16="http://schemas.microsoft.com/office/drawing/2014/main" id="{6F555189-DEEB-4180-A0B6-7158FE4C9A99}"/>
+                <a16:creationId xmlns:a16="http://schemas.microsoft.com/office/drawing/2014/main" id="{1C0072D3-DAB5-4041-8242-3B0BC62ECF72}"/>
               </a:ext>
             </a:extLst>
           </p:cNvPr>
@@ -3578,7 +3613,7 @@
           <p:cNvPr id="5" name="">
             <a:extLst xmlns:a="http://schemas.openxmlformats.org/drawingml/2006/main">
               <a:ext uri="{FF2B5EF4-FFF2-40B4-BE49-F238E27FC236}">
-                <a16:creationId xmlns:a16="http://schemas.microsoft.com/office/drawing/2014/main" id="{4A5A6EEE-4BF8-4E55-A9BF-13E80FE969F8}"/>
+                <a16:creationId xmlns:a16="http://schemas.microsoft.com/office/drawing/2014/main" id="{BC105AF9-41A9-4638-BCB6-4AA2CDA05199}"/>
               </a:ext>
             </a:extLst>
           </p:cNvPr>
@@ -3640,7 +3675,7 @@
           <p:cNvPr id="6" name="">
             <a:extLst xmlns:a="http://schemas.openxmlformats.org/drawingml/2006/main">
               <a:ext uri="{FF2B5EF4-FFF2-40B4-BE49-F238E27FC236}">
-                <a16:creationId xmlns:a16="http://schemas.microsoft.com/office/drawing/2014/main" id="{12FA4433-CE70-49CB-886D-67383C6ED588}"/>
+                <a16:creationId xmlns:a16="http://schemas.microsoft.com/office/drawing/2014/main" id="{4F72F7D2-65D0-472D-8724-C4A1E321145F}"/>
               </a:ext>
             </a:extLst>
           </p:cNvPr>
@@ -3708,7 +3743,7 @@
           <p:cNvPr id="7" name="">
             <a:extLst xmlns:a="http://schemas.openxmlformats.org/drawingml/2006/main">
               <a:ext uri="{FF2B5EF4-FFF2-40B4-BE49-F238E27FC236}">
-                <a16:creationId xmlns:a16="http://schemas.microsoft.com/office/drawing/2014/main" id="{BED3000D-DA8E-44C8-98C0-C28FEAC7BF87}"/>
+                <a16:creationId xmlns:a16="http://schemas.microsoft.com/office/drawing/2014/main" id="{54BF2620-8B84-4E6C-8FF5-509E52A2CEE5}"/>
               </a:ext>
             </a:extLst>
           </p:cNvPr>
@@ -3770,7 +3805,7 @@
           <p:cNvPr id="8" name="">
             <a:extLst xmlns:a="http://schemas.openxmlformats.org/drawingml/2006/main">
               <a:ext uri="{FF2B5EF4-FFF2-40B4-BE49-F238E27FC236}">
-                <a16:creationId xmlns:a16="http://schemas.microsoft.com/office/drawing/2014/main" id="{5A110CFD-0E7F-40E8-93DF-A9EEF66009B7}"/>
+                <a16:creationId xmlns:a16="http://schemas.microsoft.com/office/drawing/2014/main" id="{C07F8ECC-54D3-41E4-BDAC-14725692CFA1}"/>
               </a:ext>
             </a:extLst>
           </p:cNvPr>
@@ -3838,7 +3873,7 @@
           <p:cNvPr id="9" name="">
             <a:extLst xmlns:a="http://schemas.openxmlformats.org/drawingml/2006/main">
               <a:ext uri="{FF2B5EF4-FFF2-40B4-BE49-F238E27FC236}">
-                <a16:creationId xmlns:a16="http://schemas.microsoft.com/office/drawing/2014/main" id="{EE349C5E-B0BD-411E-B59F-65DCDE56B6CD}"/>
+                <a16:creationId xmlns:a16="http://schemas.microsoft.com/office/drawing/2014/main" id="{10A7C6C4-F54C-485B-BD90-6CD5D7992343}"/>
               </a:ext>
             </a:extLst>
           </p:cNvPr>
@@ -3869,7 +3904,7 @@
           <p:cNvPr id="10" name="">
             <a:extLst xmlns:a="http://schemas.openxmlformats.org/drawingml/2006/main">
               <a:ext uri="{FF2B5EF4-FFF2-40B4-BE49-F238E27FC236}">
-                <a16:creationId xmlns:a16="http://schemas.microsoft.com/office/drawing/2014/main" id="{7BC565F9-6FF7-4FB8-8A1E-6905ACDDFEC3}"/>
+                <a16:creationId xmlns:a16="http://schemas.microsoft.com/office/drawing/2014/main" id="{132E3C8A-60F5-4758-A122-15DF478649E1}"/>
               </a:ext>
             </a:extLst>
           </p:cNvPr>
@@ -3931,7 +3966,7 @@
           <p:cNvPr id="11" name="">
             <a:extLst xmlns:a="http://schemas.openxmlformats.org/drawingml/2006/main">
               <a:ext uri="{FF2B5EF4-FFF2-40B4-BE49-F238E27FC236}">
-                <a16:creationId xmlns:a16="http://schemas.microsoft.com/office/drawing/2014/main" id="{C4BB935C-396A-4FEE-ADC4-8045A96EC6FA}"/>
+                <a16:creationId xmlns:a16="http://schemas.microsoft.com/office/drawing/2014/main" id="{70C744E1-E87A-47DB-B5AC-138968E5EF69}"/>
               </a:ext>
             </a:extLst>
           </p:cNvPr>
@@ -3993,7 +4028,7 @@
           <p:cNvPr id="12" name="footer-rule-10">
             <a:extLst xmlns:a="http://schemas.openxmlformats.org/drawingml/2006/main">
               <a:ext uri="{FF2B5EF4-FFF2-40B4-BE49-F238E27FC236}">
-                <a16:creationId xmlns:a16="http://schemas.microsoft.com/office/drawing/2014/main" id="{26641480-FC90-475C-AC8A-8EB251161A5C}"/>
+                <a16:creationId xmlns:a16="http://schemas.microsoft.com/office/drawing/2014/main" id="{B6781F43-E0B7-4D5B-867B-46C1F5591BE1}"/>
               </a:ext>
             </a:extLst>
           </p:cNvPr>
@@ -4024,7 +4059,7 @@
           <p:cNvPr id="13" name="footer-label-10">
             <a:extLst xmlns:a="http://schemas.openxmlformats.org/drawingml/2006/main">
               <a:ext uri="{FF2B5EF4-FFF2-40B4-BE49-F238E27FC236}">
-                <a16:creationId xmlns:a16="http://schemas.microsoft.com/office/drawing/2014/main" id="{1D369ADB-92D8-459F-BC59-A8A627E01332}"/>
+                <a16:creationId xmlns:a16="http://schemas.microsoft.com/office/drawing/2014/main" id="{A56B2616-7AB8-4D51-AD3F-1D03D05DE0A9}"/>
               </a:ext>
             </a:extLst>
           </p:cNvPr>
@@ -4086,7 +4121,7 @@
           <p:cNvPr id="14" name="footer-page-10">
             <a:extLst xmlns:a="http://schemas.openxmlformats.org/drawingml/2006/main">
               <a:ext uri="{FF2B5EF4-FFF2-40B4-BE49-F238E27FC236}">
-                <a16:creationId xmlns:a16="http://schemas.microsoft.com/office/drawing/2014/main" id="{5C143EC0-8BD3-4C03-AA98-0B877EE5C7E0}"/>
+                <a16:creationId xmlns:a16="http://schemas.microsoft.com/office/drawing/2014/main" id="{3BA9AC52-F897-4315-AD0E-F7365ADAD69D}"/>
               </a:ext>
             </a:extLst>
           </p:cNvPr>
@@ -4146,7 +4181,7 @@
     </p:spTree>
     <p:extLst>
       <p:ext uri="{BB962C8B-B14F-4D97-AF65-F5344CB8AC3E}">
-        <p14:creationId xmlns:p14="http://schemas.microsoft.com/office/powerpoint/2010/main" val="1783127499"/>
+        <p14:creationId xmlns:p14="http://schemas.microsoft.com/office/powerpoint/2010/main" val="643830650"/>
       </p:ext>
     </p:extLst>
   </p:cSld>
@@ -4177,7 +4212,7 @@
           <p:cNvPr id="17" name="side-accent-11">
             <a:extLst xmlns:a="http://schemas.openxmlformats.org/drawingml/2006/main">
               <a:ext uri="{FF2B5EF4-FFF2-40B4-BE49-F238E27FC236}">
-                <a16:creationId xmlns:a16="http://schemas.microsoft.com/office/drawing/2014/main" id="{85F93D57-DDFE-4EF9-9EA7-7F81A0139415}"/>
+                <a16:creationId xmlns:a16="http://schemas.microsoft.com/office/drawing/2014/main" id="{C6FE2ADD-BCCF-4215-9585-13892F07AB9A}"/>
               </a:ext>
             </a:extLst>
           </p:cNvPr>
@@ -4208,7 +4243,7 @@
           <p:cNvPr id="2" name="kicker-11">
             <a:extLst xmlns:a="http://schemas.openxmlformats.org/drawingml/2006/main">
               <a:ext uri="{FF2B5EF4-FFF2-40B4-BE49-F238E27FC236}">
-                <a16:creationId xmlns:a16="http://schemas.microsoft.com/office/drawing/2014/main" id="{BF03499C-B928-4294-96AB-359DD9A4B5B4}"/>
+                <a16:creationId xmlns:a16="http://schemas.microsoft.com/office/drawing/2014/main" id="{6646C9F8-CFDB-4810-8A24-95FCB6EF8476}"/>
               </a:ext>
             </a:extLst>
           </p:cNvPr>
@@ -4270,7 +4305,7 @@
           <p:cNvPr id="3" name="title-11">
             <a:extLst xmlns:a="http://schemas.openxmlformats.org/drawingml/2006/main">
               <a:ext uri="{FF2B5EF4-FFF2-40B4-BE49-F238E27FC236}">
-                <a16:creationId xmlns:a16="http://schemas.microsoft.com/office/drawing/2014/main" id="{6DB5D0AC-40EE-4946-AADD-B35479D48B47}"/>
+                <a16:creationId xmlns:a16="http://schemas.microsoft.com/office/drawing/2014/main" id="{62DBD3FE-F247-4A6E-ADD0-91D508A06D0D}"/>
               </a:ext>
             </a:extLst>
           </p:cNvPr>
@@ -4332,7 +4367,7 @@
           <p:cNvPr id="4" name="">
             <a:extLst xmlns:a="http://schemas.openxmlformats.org/drawingml/2006/main">
               <a:ext uri="{FF2B5EF4-FFF2-40B4-BE49-F238E27FC236}">
-                <a16:creationId xmlns:a16="http://schemas.microsoft.com/office/drawing/2014/main" id="{FA8B4CB7-D4DB-4D97-9CF4-F7DEAA88B4AF}"/>
+                <a16:creationId xmlns:a16="http://schemas.microsoft.com/office/drawing/2014/main" id="{B863A6B1-D4D4-4BCB-AC36-D030B164302F}"/>
               </a:ext>
             </a:extLst>
           </p:cNvPr>
@@ -4367,7 +4402,7 @@
           <p:cNvPr id="5" name="">
             <a:extLst xmlns:a="http://schemas.openxmlformats.org/drawingml/2006/main">
               <a:ext uri="{FF2B5EF4-FFF2-40B4-BE49-F238E27FC236}">
-                <a16:creationId xmlns:a16="http://schemas.microsoft.com/office/drawing/2014/main" id="{BB61D447-EA85-4043-BFCD-2FF0E67B1A63}"/>
+                <a16:creationId xmlns:a16="http://schemas.microsoft.com/office/drawing/2014/main" id="{F2A19726-4AF9-4498-BA3B-384C61A40F72}"/>
               </a:ext>
             </a:extLst>
           </p:cNvPr>
@@ -4429,7 +4464,7 @@
           <p:cNvPr id="6" name="">
             <a:extLst xmlns:a="http://schemas.openxmlformats.org/drawingml/2006/main">
               <a:ext uri="{FF2B5EF4-FFF2-40B4-BE49-F238E27FC236}">
-                <a16:creationId xmlns:a16="http://schemas.microsoft.com/office/drawing/2014/main" id="{00CA3616-7E19-4155-9141-13AA28BD6F4C}"/>
+                <a16:creationId xmlns:a16="http://schemas.microsoft.com/office/drawing/2014/main" id="{8AD42A3A-5780-45A6-9643-5AC7089C6A34}"/>
               </a:ext>
             </a:extLst>
           </p:cNvPr>
@@ -4491,7 +4526,7 @@
           <p:cNvPr id="7" name="">
             <a:extLst xmlns:a="http://schemas.openxmlformats.org/drawingml/2006/main">
               <a:ext uri="{FF2B5EF4-FFF2-40B4-BE49-F238E27FC236}">
-                <a16:creationId xmlns:a16="http://schemas.microsoft.com/office/drawing/2014/main" id="{ED644B00-F536-4F96-A54E-A755E1D708EB}"/>
+                <a16:creationId xmlns:a16="http://schemas.microsoft.com/office/drawing/2014/main" id="{709031FA-97A2-496B-AA81-99E6408B263F}"/>
               </a:ext>
             </a:extLst>
           </p:cNvPr>
@@ -4526,7 +4561,7 @@
           <p:cNvPr id="8" name="">
             <a:extLst xmlns:a="http://schemas.openxmlformats.org/drawingml/2006/main">
               <a:ext uri="{FF2B5EF4-FFF2-40B4-BE49-F238E27FC236}">
-                <a16:creationId xmlns:a16="http://schemas.microsoft.com/office/drawing/2014/main" id="{82C0C501-3E24-4CAD-8D93-833FEBEA2A3D}"/>
+                <a16:creationId xmlns:a16="http://schemas.microsoft.com/office/drawing/2014/main" id="{F4A622B8-AEDE-4379-8AF2-36FBD2C1FA0C}"/>
               </a:ext>
             </a:extLst>
           </p:cNvPr>
@@ -4588,7 +4623,7 @@
           <p:cNvPr id="9" name="">
             <a:extLst xmlns:a="http://schemas.openxmlformats.org/drawingml/2006/main">
               <a:ext uri="{FF2B5EF4-FFF2-40B4-BE49-F238E27FC236}">
-                <a16:creationId xmlns:a16="http://schemas.microsoft.com/office/drawing/2014/main" id="{E4329F5C-9439-402A-925C-DC536CA85620}"/>
+                <a16:creationId xmlns:a16="http://schemas.microsoft.com/office/drawing/2014/main" id="{164ECE9B-7755-415C-8C6D-558674DDDE9C}"/>
               </a:ext>
             </a:extLst>
           </p:cNvPr>
@@ -4650,7 +4685,7 @@
           <p:cNvPr id="10" name="">
             <a:extLst xmlns:a="http://schemas.openxmlformats.org/drawingml/2006/main">
               <a:ext uri="{FF2B5EF4-FFF2-40B4-BE49-F238E27FC236}">
-                <a16:creationId xmlns:a16="http://schemas.microsoft.com/office/drawing/2014/main" id="{1D6A2518-5609-44AF-A6BB-1E139DF0C520}"/>
+                <a16:creationId xmlns:a16="http://schemas.microsoft.com/office/drawing/2014/main" id="{53A6950B-5C53-482F-B84D-237AEC2AD1C1}"/>
               </a:ext>
             </a:extLst>
           </p:cNvPr>
@@ -4685,7 +4720,7 @@
           <p:cNvPr id="11" name="">
             <a:extLst xmlns:a="http://schemas.openxmlformats.org/drawingml/2006/main">
               <a:ext uri="{FF2B5EF4-FFF2-40B4-BE49-F238E27FC236}">
-                <a16:creationId xmlns:a16="http://schemas.microsoft.com/office/drawing/2014/main" id="{B9289715-847E-4EDE-94DE-1B746C7A08DD}"/>
+                <a16:creationId xmlns:a16="http://schemas.microsoft.com/office/drawing/2014/main" id="{E45D492F-A3A0-48CA-8D93-E76399B0A720}"/>
               </a:ext>
             </a:extLst>
           </p:cNvPr>
@@ -4747,7 +4782,7 @@
           <p:cNvPr id="12" name="">
             <a:extLst xmlns:a="http://schemas.openxmlformats.org/drawingml/2006/main">
               <a:ext uri="{FF2B5EF4-FFF2-40B4-BE49-F238E27FC236}">
-                <a16:creationId xmlns:a16="http://schemas.microsoft.com/office/drawing/2014/main" id="{2A6E201F-51C5-4F35-B33F-5C17F6C0935B}"/>
+                <a16:creationId xmlns:a16="http://schemas.microsoft.com/office/drawing/2014/main" id="{B4BF5876-80AA-40B1-BD24-6E122BDF4146}"/>
               </a:ext>
             </a:extLst>
           </p:cNvPr>
@@ -4809,7 +4844,7 @@
           <p:cNvPr id="13" name="">
             <a:extLst xmlns:a="http://schemas.openxmlformats.org/drawingml/2006/main">
               <a:ext uri="{FF2B5EF4-FFF2-40B4-BE49-F238E27FC236}">
-                <a16:creationId xmlns:a16="http://schemas.microsoft.com/office/drawing/2014/main" id="{5CA2AA60-9018-4F22-A7D8-CF3D5FD49015}"/>
+                <a16:creationId xmlns:a16="http://schemas.microsoft.com/office/drawing/2014/main" id="{2616B852-05DF-41C2-87B0-E6C2F829200A}"/>
               </a:ext>
             </a:extLst>
           </p:cNvPr>
@@ -4871,7 +4906,7 @@
           <p:cNvPr id="14" name="footer-rule-11">
             <a:extLst xmlns:a="http://schemas.openxmlformats.org/drawingml/2006/main">
               <a:ext uri="{FF2B5EF4-FFF2-40B4-BE49-F238E27FC236}">
-                <a16:creationId xmlns:a16="http://schemas.microsoft.com/office/drawing/2014/main" id="{79B37FAD-CD6A-48F4-8500-85EDB0442CCB}"/>
+                <a16:creationId xmlns:a16="http://schemas.microsoft.com/office/drawing/2014/main" id="{141E528E-0305-480A-992F-E870D36ECF24}"/>
               </a:ext>
             </a:extLst>
           </p:cNvPr>
@@ -4902,7 +4937,7 @@
           <p:cNvPr id="15" name="footer-label-11">
             <a:extLst xmlns:a="http://schemas.openxmlformats.org/drawingml/2006/main">
               <a:ext uri="{FF2B5EF4-FFF2-40B4-BE49-F238E27FC236}">
-                <a16:creationId xmlns:a16="http://schemas.microsoft.com/office/drawing/2014/main" id="{DA412FE4-437E-4FAE-B01C-97FE8EAC4C90}"/>
+                <a16:creationId xmlns:a16="http://schemas.microsoft.com/office/drawing/2014/main" id="{5F1664D3-D0C6-4284-9831-38FBA0D922E6}"/>
               </a:ext>
             </a:extLst>
           </p:cNvPr>
@@ -4964,7 +4999,7 @@
           <p:cNvPr id="16" name="footer-page-11">
             <a:extLst xmlns:a="http://schemas.openxmlformats.org/drawingml/2006/main">
               <a:ext uri="{FF2B5EF4-FFF2-40B4-BE49-F238E27FC236}">
-                <a16:creationId xmlns:a16="http://schemas.microsoft.com/office/drawing/2014/main" id="{71E5F4FA-D675-4B18-A261-356EC91FC9E1}"/>
+                <a16:creationId xmlns:a16="http://schemas.microsoft.com/office/drawing/2014/main" id="{D474736A-7F96-456F-B5AA-AAA5B1F51EF1}"/>
               </a:ext>
             </a:extLst>
           </p:cNvPr>
@@ -5024,7 +5059,7 @@
     </p:spTree>
     <p:extLst>
       <p:ext uri="{BB962C8B-B14F-4D97-AF65-F5344CB8AC3E}">
-        <p14:creationId xmlns:p14="http://schemas.microsoft.com/office/powerpoint/2010/main" val="1081867604"/>
+        <p14:creationId xmlns:p14="http://schemas.microsoft.com/office/powerpoint/2010/main" val="1991549452"/>
       </p:ext>
     </p:extLst>
   </p:cSld>
@@ -5055,7 +5090,7 @@
           <p:cNvPr id="22" name="side-accent-12">
             <a:extLst xmlns:a="http://schemas.openxmlformats.org/drawingml/2006/main">
               <a:ext uri="{FF2B5EF4-FFF2-40B4-BE49-F238E27FC236}">
-                <a16:creationId xmlns:a16="http://schemas.microsoft.com/office/drawing/2014/main" id="{0D821C34-3EF9-439A-A597-6BAEFA7310EF}"/>
+                <a16:creationId xmlns:a16="http://schemas.microsoft.com/office/drawing/2014/main" id="{C91476FB-FA2F-4FBF-B2ED-33D0EF91472B}"/>
               </a:ext>
             </a:extLst>
           </p:cNvPr>
@@ -5086,7 +5121,7 @@
           <p:cNvPr id="2" name="kicker-12">
             <a:extLst xmlns:a="http://schemas.openxmlformats.org/drawingml/2006/main">
               <a:ext uri="{FF2B5EF4-FFF2-40B4-BE49-F238E27FC236}">
-                <a16:creationId xmlns:a16="http://schemas.microsoft.com/office/drawing/2014/main" id="{9B3A8811-5111-4B61-A782-780B1D3426ED}"/>
+                <a16:creationId xmlns:a16="http://schemas.microsoft.com/office/drawing/2014/main" id="{210CFF02-26D5-4835-A415-441868283E46}"/>
               </a:ext>
             </a:extLst>
           </p:cNvPr>
@@ -5148,7 +5183,7 @@
           <p:cNvPr id="3" name="title-12">
             <a:extLst xmlns:a="http://schemas.openxmlformats.org/drawingml/2006/main">
               <a:ext uri="{FF2B5EF4-FFF2-40B4-BE49-F238E27FC236}">
-                <a16:creationId xmlns:a16="http://schemas.microsoft.com/office/drawing/2014/main" id="{5E079619-E1BB-4071-88D0-7DD6ADAAC0A6}"/>
+                <a16:creationId xmlns:a16="http://schemas.microsoft.com/office/drawing/2014/main" id="{3047B1C0-EA38-4CA5-8A97-418F8BBDD08E}"/>
               </a:ext>
             </a:extLst>
           </p:cNvPr>
@@ -5210,7 +5245,7 @@
           <p:cNvPr id="4" name="">
             <a:extLst xmlns:a="http://schemas.openxmlformats.org/drawingml/2006/main">
               <a:ext uri="{FF2B5EF4-FFF2-40B4-BE49-F238E27FC236}">
-                <a16:creationId xmlns:a16="http://schemas.microsoft.com/office/drawing/2014/main" id="{32E65BA9-75B8-427C-ABE0-FBE4F9EB03B3}"/>
+                <a16:creationId xmlns:a16="http://schemas.microsoft.com/office/drawing/2014/main" id="{F754FDC5-2B82-418F-8723-13AF12E0903B}"/>
               </a:ext>
             </a:extLst>
           </p:cNvPr>
@@ -5272,7 +5307,7 @@
           <p:cNvPr id="5" name="">
             <a:extLst xmlns:a="http://schemas.openxmlformats.org/drawingml/2006/main">
               <a:ext uri="{FF2B5EF4-FFF2-40B4-BE49-F238E27FC236}">
-                <a16:creationId xmlns:a16="http://schemas.microsoft.com/office/drawing/2014/main" id="{5D0D4EBE-B65C-478B-8532-84D83CB61582}"/>
+                <a16:creationId xmlns:a16="http://schemas.microsoft.com/office/drawing/2014/main" id="{B98F16EC-83F1-408A-9357-5DDF1AD1D9CD}"/>
               </a:ext>
             </a:extLst>
           </p:cNvPr>
@@ -5303,7 +5338,7 @@
           <p:cNvPr id="6" name="">
             <a:extLst xmlns:a="http://schemas.openxmlformats.org/drawingml/2006/main">
               <a:ext uri="{FF2B5EF4-FFF2-40B4-BE49-F238E27FC236}">
-                <a16:creationId xmlns:a16="http://schemas.microsoft.com/office/drawing/2014/main" id="{46C8211F-1CCB-4DBA-98A2-14486B8D8776}"/>
+                <a16:creationId xmlns:a16="http://schemas.microsoft.com/office/drawing/2014/main" id="{BE7A29BE-ECDB-45C9-9BD6-B78B21CF1B5A}"/>
               </a:ext>
             </a:extLst>
           </p:cNvPr>
@@ -5365,7 +5400,7 @@
           <p:cNvPr id="7" name="">
             <a:extLst xmlns:a="http://schemas.openxmlformats.org/drawingml/2006/main">
               <a:ext uri="{FF2B5EF4-FFF2-40B4-BE49-F238E27FC236}">
-                <a16:creationId xmlns:a16="http://schemas.microsoft.com/office/drawing/2014/main" id="{869B7432-6988-4937-A25B-F804076C8D7B}"/>
+                <a16:creationId xmlns:a16="http://schemas.microsoft.com/office/drawing/2014/main" id="{FB986859-A9FC-43B3-8A80-4E7A8EAF51F1}"/>
               </a:ext>
             </a:extLst>
           </p:cNvPr>
@@ -5427,7 +5462,7 @@
           <p:cNvPr id="8" name="">
             <a:extLst xmlns:a="http://schemas.openxmlformats.org/drawingml/2006/main">
               <a:ext uri="{FF2B5EF4-FFF2-40B4-BE49-F238E27FC236}">
-                <a16:creationId xmlns:a16="http://schemas.microsoft.com/office/drawing/2014/main" id="{3959EC2B-9501-4CE2-A8FA-E41DA5AFD9F2}"/>
+                <a16:creationId xmlns:a16="http://schemas.microsoft.com/office/drawing/2014/main" id="{D3CF8EDF-B429-4FE3-9C19-96AC70DC434E}"/>
               </a:ext>
             </a:extLst>
           </p:cNvPr>
@@ -5489,7 +5524,7 @@
           <p:cNvPr id="9" name="">
             <a:extLst xmlns:a="http://schemas.openxmlformats.org/drawingml/2006/main">
               <a:ext uri="{FF2B5EF4-FFF2-40B4-BE49-F238E27FC236}">
-                <a16:creationId xmlns:a16="http://schemas.microsoft.com/office/drawing/2014/main" id="{DAD5C153-1726-4B60-A800-BD45DBF03EC8}"/>
+                <a16:creationId xmlns:a16="http://schemas.microsoft.com/office/drawing/2014/main" id="{0FECB252-25E0-4D4D-A516-7317E022604D}"/>
               </a:ext>
             </a:extLst>
           </p:cNvPr>
@@ -5520,7 +5555,7 @@
           <p:cNvPr id="10" name="">
             <a:extLst xmlns:a="http://schemas.openxmlformats.org/drawingml/2006/main">
               <a:ext uri="{FF2B5EF4-FFF2-40B4-BE49-F238E27FC236}">
-                <a16:creationId xmlns:a16="http://schemas.microsoft.com/office/drawing/2014/main" id="{247EBE49-CF7F-4B80-BE40-041862067DD0}"/>
+                <a16:creationId xmlns:a16="http://schemas.microsoft.com/office/drawing/2014/main" id="{56B126F1-F5C7-4976-9F7B-BBFF2F8626CE}"/>
               </a:ext>
             </a:extLst>
           </p:cNvPr>
@@ -5582,7 +5617,7 @@
           <p:cNvPr id="11" name="">
             <a:extLst xmlns:a="http://schemas.openxmlformats.org/drawingml/2006/main">
               <a:ext uri="{FF2B5EF4-FFF2-40B4-BE49-F238E27FC236}">
-                <a16:creationId xmlns:a16="http://schemas.microsoft.com/office/drawing/2014/main" id="{A957306E-75B0-465D-8093-78EA54BFF658}"/>
+                <a16:creationId xmlns:a16="http://schemas.microsoft.com/office/drawing/2014/main" id="{AF27BE5E-2E86-4513-9E0A-B3FC17C09684}"/>
               </a:ext>
             </a:extLst>
           </p:cNvPr>
@@ -5644,7 +5679,7 @@
           <p:cNvPr id="12" name="">
             <a:extLst xmlns:a="http://schemas.openxmlformats.org/drawingml/2006/main">
               <a:ext uri="{FF2B5EF4-FFF2-40B4-BE49-F238E27FC236}">
-                <a16:creationId xmlns:a16="http://schemas.microsoft.com/office/drawing/2014/main" id="{71182462-236E-43F4-BBD6-2450BE5263E5}"/>
+                <a16:creationId xmlns:a16="http://schemas.microsoft.com/office/drawing/2014/main" id="{92922729-5056-4771-99B1-4369FFD8EEF8}"/>
               </a:ext>
             </a:extLst>
           </p:cNvPr>
@@ -5706,7 +5741,7 @@
           <p:cNvPr id="13" name="">
             <a:extLst xmlns:a="http://schemas.openxmlformats.org/drawingml/2006/main">
               <a:ext uri="{FF2B5EF4-FFF2-40B4-BE49-F238E27FC236}">
-                <a16:creationId xmlns:a16="http://schemas.microsoft.com/office/drawing/2014/main" id="{08E69BCE-5652-416B-AAED-170967256FB9}"/>
+                <a16:creationId xmlns:a16="http://schemas.microsoft.com/office/drawing/2014/main" id="{EB4EE4A2-EB0F-4751-9825-58A0610BCEC9}"/>
               </a:ext>
             </a:extLst>
           </p:cNvPr>
@@ -5737,7 +5772,7 @@
           <p:cNvPr id="14" name="">
             <a:extLst xmlns:a="http://schemas.openxmlformats.org/drawingml/2006/main">
               <a:ext uri="{FF2B5EF4-FFF2-40B4-BE49-F238E27FC236}">
-                <a16:creationId xmlns:a16="http://schemas.microsoft.com/office/drawing/2014/main" id="{7EA85A45-0362-4997-8A6C-29697378CDFB}"/>
+                <a16:creationId xmlns:a16="http://schemas.microsoft.com/office/drawing/2014/main" id="{853B132D-4811-4895-B7A0-07827C4CDD34}"/>
               </a:ext>
             </a:extLst>
           </p:cNvPr>
@@ -5799,7 +5834,7 @@
           <p:cNvPr id="15" name="">
             <a:extLst xmlns:a="http://schemas.openxmlformats.org/drawingml/2006/main">
               <a:ext uri="{FF2B5EF4-FFF2-40B4-BE49-F238E27FC236}">
-                <a16:creationId xmlns:a16="http://schemas.microsoft.com/office/drawing/2014/main" id="{5B04431D-DAA6-46B0-A359-DE354B055206}"/>
+                <a16:creationId xmlns:a16="http://schemas.microsoft.com/office/drawing/2014/main" id="{C6FB6F9B-8761-47FA-A5B8-5293CBEE7545}"/>
               </a:ext>
             </a:extLst>
           </p:cNvPr>
@@ -5861,7 +5896,7 @@
           <p:cNvPr id="16" name="">
             <a:extLst xmlns:a="http://schemas.openxmlformats.org/drawingml/2006/main">
               <a:ext uri="{FF2B5EF4-FFF2-40B4-BE49-F238E27FC236}">
-                <a16:creationId xmlns:a16="http://schemas.microsoft.com/office/drawing/2014/main" id="{F0280E4B-29E2-4673-BA0C-9F294AE7B95B}"/>
+                <a16:creationId xmlns:a16="http://schemas.microsoft.com/office/drawing/2014/main" id="{AE1D88B3-7637-4890-B85A-91B4CB430468}"/>
               </a:ext>
             </a:extLst>
           </p:cNvPr>
@@ -5923,7 +5958,7 @@
           <p:cNvPr id="17" name="">
             <a:extLst xmlns:a="http://schemas.openxmlformats.org/drawingml/2006/main">
               <a:ext uri="{FF2B5EF4-FFF2-40B4-BE49-F238E27FC236}">
-                <a16:creationId xmlns:a16="http://schemas.microsoft.com/office/drawing/2014/main" id="{9CD47399-455F-4D0B-9381-321ED943EFB6}"/>
+                <a16:creationId xmlns:a16="http://schemas.microsoft.com/office/drawing/2014/main" id="{DFF33614-F2B1-48F2-B285-94713268DACE}"/>
               </a:ext>
             </a:extLst>
           </p:cNvPr>
@@ -5958,7 +5993,7 @@
           <p:cNvPr id="18" name="">
             <a:extLst xmlns:a="http://schemas.openxmlformats.org/drawingml/2006/main">
               <a:ext uri="{FF2B5EF4-FFF2-40B4-BE49-F238E27FC236}">
-                <a16:creationId xmlns:a16="http://schemas.microsoft.com/office/drawing/2014/main" id="{85376330-523E-4B30-A821-A8966DD93E36}"/>
+                <a16:creationId xmlns:a16="http://schemas.microsoft.com/office/drawing/2014/main" id="{E1641499-6E42-44D2-8D4F-A78B16434608}"/>
               </a:ext>
             </a:extLst>
           </p:cNvPr>
@@ -6047,7 +6082,7 @@
           <p:cNvPr id="19" name="footer-rule-12">
             <a:extLst xmlns:a="http://schemas.openxmlformats.org/drawingml/2006/main">
               <a:ext uri="{FF2B5EF4-FFF2-40B4-BE49-F238E27FC236}">
-                <a16:creationId xmlns:a16="http://schemas.microsoft.com/office/drawing/2014/main" id="{145AAC77-ACAE-4D59-919A-8EADB75C6C1A}"/>
+                <a16:creationId xmlns:a16="http://schemas.microsoft.com/office/drawing/2014/main" id="{A728D128-E765-4656-B449-32A5665DF0E2}"/>
               </a:ext>
             </a:extLst>
           </p:cNvPr>
@@ -6078,7 +6113,7 @@
           <p:cNvPr id="20" name="footer-label-12">
             <a:extLst xmlns:a="http://schemas.openxmlformats.org/drawingml/2006/main">
               <a:ext uri="{FF2B5EF4-FFF2-40B4-BE49-F238E27FC236}">
-                <a16:creationId xmlns:a16="http://schemas.microsoft.com/office/drawing/2014/main" id="{ABE0C7D7-286E-4B63-A75A-38887100B6C2}"/>
+                <a16:creationId xmlns:a16="http://schemas.microsoft.com/office/drawing/2014/main" id="{4CBE9AC4-27E3-4B51-BFEE-0ACF5261E08F}"/>
               </a:ext>
             </a:extLst>
           </p:cNvPr>
@@ -6140,7 +6175,7 @@
           <p:cNvPr id="21" name="footer-page-12">
             <a:extLst xmlns:a="http://schemas.openxmlformats.org/drawingml/2006/main">
               <a:ext uri="{FF2B5EF4-FFF2-40B4-BE49-F238E27FC236}">
-                <a16:creationId xmlns:a16="http://schemas.microsoft.com/office/drawing/2014/main" id="{90CC7DEF-370A-4ECA-BF4B-85B1C1054DCE}"/>
+                <a16:creationId xmlns:a16="http://schemas.microsoft.com/office/drawing/2014/main" id="{83D4F62A-C816-4123-AE9A-4B28F1A340EB}"/>
               </a:ext>
             </a:extLst>
           </p:cNvPr>
@@ -6200,7 +6235,7 @@
     </p:spTree>
     <p:extLst>
       <p:ext uri="{BB962C8B-B14F-4D97-AF65-F5344CB8AC3E}">
-        <p14:creationId xmlns:p14="http://schemas.microsoft.com/office/powerpoint/2010/main" val="1192595161"/>
+        <p14:creationId xmlns:p14="http://schemas.microsoft.com/office/powerpoint/2010/main" val="717143540"/>
       </p:ext>
     </p:extLst>
   </p:cSld>
@@ -6231,7 +6266,7 @@
           <p:cNvPr id="14" name="side-accent-13">
             <a:extLst xmlns:a="http://schemas.openxmlformats.org/drawingml/2006/main">
               <a:ext uri="{FF2B5EF4-FFF2-40B4-BE49-F238E27FC236}">
-                <a16:creationId xmlns:a16="http://schemas.microsoft.com/office/drawing/2014/main" id="{400C55BD-CE13-4F53-8653-B24D4C42C2AB}"/>
+                <a16:creationId xmlns:a16="http://schemas.microsoft.com/office/drawing/2014/main" id="{EF7A3AC6-DB05-4C72-ADAE-8F0BBE2B4299}"/>
               </a:ext>
             </a:extLst>
           </p:cNvPr>
@@ -6262,7 +6297,7 @@
           <p:cNvPr id="2" name="kicker-13">
             <a:extLst xmlns:a="http://schemas.openxmlformats.org/drawingml/2006/main">
               <a:ext uri="{FF2B5EF4-FFF2-40B4-BE49-F238E27FC236}">
-                <a16:creationId xmlns:a16="http://schemas.microsoft.com/office/drawing/2014/main" id="{8EE32B9F-8CE3-4DA0-8EAD-D7EA2C9C079F}"/>
+                <a16:creationId xmlns:a16="http://schemas.microsoft.com/office/drawing/2014/main" id="{ECB06AC3-19F0-4A88-89F1-A1244EA3B414}"/>
               </a:ext>
             </a:extLst>
           </p:cNvPr>
@@ -6324,7 +6359,7 @@
           <p:cNvPr id="3" name="title-13">
             <a:extLst xmlns:a="http://schemas.openxmlformats.org/drawingml/2006/main">
               <a:ext uri="{FF2B5EF4-FFF2-40B4-BE49-F238E27FC236}">
-                <a16:creationId xmlns:a16="http://schemas.microsoft.com/office/drawing/2014/main" id="{F3B3B501-C93C-4FEC-B44D-8DC4111E072F}"/>
+                <a16:creationId xmlns:a16="http://schemas.microsoft.com/office/drawing/2014/main" id="{A023E77C-315F-44FF-8D86-A37EF2603087}"/>
               </a:ext>
             </a:extLst>
           </p:cNvPr>
@@ -6386,7 +6421,7 @@
           <p:cNvPr id="4" name="draft-panel">
             <a:extLst xmlns:a="http://schemas.openxmlformats.org/drawingml/2006/main">
               <a:ext uri="{FF2B5EF4-FFF2-40B4-BE49-F238E27FC236}">
-                <a16:creationId xmlns:a16="http://schemas.microsoft.com/office/drawing/2014/main" id="{9BB79C49-F611-479F-9727-DB3B68112B9D}"/>
+                <a16:creationId xmlns:a16="http://schemas.microsoft.com/office/drawing/2014/main" id="{562E9938-9DD4-4D4C-A229-CD4D80372D5F}"/>
               </a:ext>
             </a:extLst>
           </p:cNvPr>
@@ -6421,7 +6456,7 @@
           <p:cNvPr id="5" name="">
             <a:extLst xmlns:a="http://schemas.openxmlformats.org/drawingml/2006/main">
               <a:ext uri="{FF2B5EF4-FFF2-40B4-BE49-F238E27FC236}">
-                <a16:creationId xmlns:a16="http://schemas.microsoft.com/office/drawing/2014/main" id="{8BD079D0-024B-46E2-A558-D573C13F6DEA}"/>
+                <a16:creationId xmlns:a16="http://schemas.microsoft.com/office/drawing/2014/main" id="{9ABA4FA0-D858-4CC0-B74E-F1DBB3721636}"/>
               </a:ext>
             </a:extLst>
           </p:cNvPr>
@@ -6483,7 +6518,7 @@
           <p:cNvPr id="6" name="">
             <a:extLst xmlns:a="http://schemas.openxmlformats.org/drawingml/2006/main">
               <a:ext uri="{FF2B5EF4-FFF2-40B4-BE49-F238E27FC236}">
-                <a16:creationId xmlns:a16="http://schemas.microsoft.com/office/drawing/2014/main" id="{5C1DB654-213E-4765-A8B2-16644375ECE9}"/>
+                <a16:creationId xmlns:a16="http://schemas.microsoft.com/office/drawing/2014/main" id="{E3D6B41D-D0AF-4C1F-B4AD-5C7463A68272}"/>
               </a:ext>
             </a:extLst>
           </p:cNvPr>
@@ -6599,7 +6634,7 @@
           <p:cNvPr id="7" name="submit-panel">
             <a:extLst xmlns:a="http://schemas.openxmlformats.org/drawingml/2006/main">
               <a:ext uri="{FF2B5EF4-FFF2-40B4-BE49-F238E27FC236}">
-                <a16:creationId xmlns:a16="http://schemas.microsoft.com/office/drawing/2014/main" id="{9FA7E12E-6DE9-4828-89D7-278C8C951BF4}"/>
+                <a16:creationId xmlns:a16="http://schemas.microsoft.com/office/drawing/2014/main" id="{823D8B1F-F849-4F7E-BD78-53BB859AAA9E}"/>
               </a:ext>
             </a:extLst>
           </p:cNvPr>
@@ -6634,7 +6669,7 @@
           <p:cNvPr id="8" name="">
             <a:extLst xmlns:a="http://schemas.openxmlformats.org/drawingml/2006/main">
               <a:ext uri="{FF2B5EF4-FFF2-40B4-BE49-F238E27FC236}">
-                <a16:creationId xmlns:a16="http://schemas.microsoft.com/office/drawing/2014/main" id="{0EDDB318-FA28-4553-885D-48A008E6D2FB}"/>
+                <a16:creationId xmlns:a16="http://schemas.microsoft.com/office/drawing/2014/main" id="{04363060-85F6-4B9A-97BA-B2ECF272E936}"/>
               </a:ext>
             </a:extLst>
           </p:cNvPr>
@@ -6696,7 +6731,7 @@
           <p:cNvPr id="9" name="">
             <a:extLst xmlns:a="http://schemas.openxmlformats.org/drawingml/2006/main">
               <a:ext uri="{FF2B5EF4-FFF2-40B4-BE49-F238E27FC236}">
-                <a16:creationId xmlns:a16="http://schemas.microsoft.com/office/drawing/2014/main" id="{2813F3DC-B793-4D02-A473-F29A8E754D3D}"/>
+                <a16:creationId xmlns:a16="http://schemas.microsoft.com/office/drawing/2014/main" id="{DA1E86D1-8F8C-461B-B705-C1ECE11F7EBB}"/>
               </a:ext>
             </a:extLst>
           </p:cNvPr>
@@ -6812,7 +6847,7 @@
           <p:cNvPr id="10" name="">
             <a:extLst xmlns:a="http://schemas.openxmlformats.org/drawingml/2006/main">
               <a:ext uri="{FF2B5EF4-FFF2-40B4-BE49-F238E27FC236}">
-                <a16:creationId xmlns:a16="http://schemas.microsoft.com/office/drawing/2014/main" id="{1149CB11-5785-4733-8774-3339F58946E7}"/>
+                <a16:creationId xmlns:a16="http://schemas.microsoft.com/office/drawing/2014/main" id="{4F207866-4DCE-44D3-8B97-A73627E00711}"/>
               </a:ext>
             </a:extLst>
           </p:cNvPr>
@@ -6874,7 +6909,7 @@
           <p:cNvPr id="11" name="footer-rule-13">
             <a:extLst xmlns:a="http://schemas.openxmlformats.org/drawingml/2006/main">
               <a:ext uri="{FF2B5EF4-FFF2-40B4-BE49-F238E27FC236}">
-                <a16:creationId xmlns:a16="http://schemas.microsoft.com/office/drawing/2014/main" id="{F1AE642A-EF26-478F-9CE0-6A49DE230FFB}"/>
+                <a16:creationId xmlns:a16="http://schemas.microsoft.com/office/drawing/2014/main" id="{815E424B-21BA-4625-B7C1-7F7AE082B75E}"/>
               </a:ext>
             </a:extLst>
           </p:cNvPr>
@@ -6905,7 +6940,7 @@
           <p:cNvPr id="12" name="footer-label-13">
             <a:extLst xmlns:a="http://schemas.openxmlformats.org/drawingml/2006/main">
               <a:ext uri="{FF2B5EF4-FFF2-40B4-BE49-F238E27FC236}">
-                <a16:creationId xmlns:a16="http://schemas.microsoft.com/office/drawing/2014/main" id="{2641A00B-48E6-4FB3-9E7B-C8DDE0B4948E}"/>
+                <a16:creationId xmlns:a16="http://schemas.microsoft.com/office/drawing/2014/main" id="{3D1DF070-ED15-457E-BC18-3FF3B7825BAE}"/>
               </a:ext>
             </a:extLst>
           </p:cNvPr>
@@ -6967,7 +7002,7 @@
           <p:cNvPr id="13" name="footer-page-13">
             <a:extLst xmlns:a="http://schemas.openxmlformats.org/drawingml/2006/main">
               <a:ext uri="{FF2B5EF4-FFF2-40B4-BE49-F238E27FC236}">
-                <a16:creationId xmlns:a16="http://schemas.microsoft.com/office/drawing/2014/main" id="{8A6AB699-C62A-422B-942D-092E176DDA1D}"/>
+                <a16:creationId xmlns:a16="http://schemas.microsoft.com/office/drawing/2014/main" id="{B118166D-9BCA-401D-BCCA-EB1E298CC60F}"/>
               </a:ext>
             </a:extLst>
           </p:cNvPr>
@@ -7027,7 +7062,7 @@
     </p:spTree>
     <p:extLst>
       <p:ext uri="{BB962C8B-B14F-4D97-AF65-F5344CB8AC3E}">
-        <p14:creationId xmlns:p14="http://schemas.microsoft.com/office/powerpoint/2010/main" val="148243487"/>
+        <p14:creationId xmlns:p14="http://schemas.microsoft.com/office/powerpoint/2010/main" val="2074096206"/>
       </p:ext>
     </p:extLst>
   </p:cSld>
@@ -7058,7 +7093,7 @@
           <p:cNvPr id="25" name="side-accent-14">
             <a:extLst xmlns:a="http://schemas.openxmlformats.org/drawingml/2006/main">
               <a:ext uri="{FF2B5EF4-FFF2-40B4-BE49-F238E27FC236}">
-                <a16:creationId xmlns:a16="http://schemas.microsoft.com/office/drawing/2014/main" id="{A604764E-5438-4F17-AC51-445217C00842}"/>
+                <a16:creationId xmlns:a16="http://schemas.microsoft.com/office/drawing/2014/main" id="{A3C1DC07-DBAB-4EB0-B5D2-27B757AC7829}"/>
               </a:ext>
             </a:extLst>
           </p:cNvPr>
@@ -7089,7 +7124,7 @@
           <p:cNvPr id="2" name="kicker-14">
             <a:extLst xmlns:a="http://schemas.openxmlformats.org/drawingml/2006/main">
               <a:ext uri="{FF2B5EF4-FFF2-40B4-BE49-F238E27FC236}">
-                <a16:creationId xmlns:a16="http://schemas.microsoft.com/office/drawing/2014/main" id="{5256C69A-8639-4B75-8A3A-1FBDC6211BBE}"/>
+                <a16:creationId xmlns:a16="http://schemas.microsoft.com/office/drawing/2014/main" id="{918D8717-A76E-4BF3-8BB0-F898B85D00B7}"/>
               </a:ext>
             </a:extLst>
           </p:cNvPr>
@@ -7151,7 +7186,7 @@
           <p:cNvPr id="3" name="title-14">
             <a:extLst xmlns:a="http://schemas.openxmlformats.org/drawingml/2006/main">
               <a:ext uri="{FF2B5EF4-FFF2-40B4-BE49-F238E27FC236}">
-                <a16:creationId xmlns:a16="http://schemas.microsoft.com/office/drawing/2014/main" id="{121AA853-FC73-4124-ACDE-95DE00845673}"/>
+                <a16:creationId xmlns:a16="http://schemas.microsoft.com/office/drawing/2014/main" id="{50D152CB-D741-4B04-BA25-5016E20E63E5}"/>
               </a:ext>
             </a:extLst>
           </p:cNvPr>
@@ -7213,7 +7248,7 @@
           <p:cNvPr id="4" name="">
             <a:extLst xmlns:a="http://schemas.openxmlformats.org/drawingml/2006/main">
               <a:ext uri="{FF2B5EF4-FFF2-40B4-BE49-F238E27FC236}">
-                <a16:creationId xmlns:a16="http://schemas.microsoft.com/office/drawing/2014/main" id="{0582064D-68CA-4D79-B326-70BBF216F417}"/>
+                <a16:creationId xmlns:a16="http://schemas.microsoft.com/office/drawing/2014/main" id="{0C89D214-FE40-4123-A094-8A55EDB3B1A4}"/>
               </a:ext>
             </a:extLst>
           </p:cNvPr>
@@ -7244,7 +7279,7 @@
           <p:cNvPr id="5" name="">
             <a:extLst xmlns:a="http://schemas.openxmlformats.org/drawingml/2006/main">
               <a:ext uri="{FF2B5EF4-FFF2-40B4-BE49-F238E27FC236}">
-                <a16:creationId xmlns:a16="http://schemas.microsoft.com/office/drawing/2014/main" id="{C9BAB4A0-2FE2-4368-BF34-6C26E8C2B4C1}"/>
+                <a16:creationId xmlns:a16="http://schemas.microsoft.com/office/drawing/2014/main" id="{F471E249-B507-4CA6-8ADF-6779F4B0BDA7}"/>
               </a:ext>
             </a:extLst>
           </p:cNvPr>
@@ -7275,7 +7310,7 @@
           <p:cNvPr id="6" name="">
             <a:extLst xmlns:a="http://schemas.openxmlformats.org/drawingml/2006/main">
               <a:ext uri="{FF2B5EF4-FFF2-40B4-BE49-F238E27FC236}">
-                <a16:creationId xmlns:a16="http://schemas.microsoft.com/office/drawing/2014/main" id="{0DF89456-9BD8-4457-A291-B163CB0F7D6C}"/>
+                <a16:creationId xmlns:a16="http://schemas.microsoft.com/office/drawing/2014/main" id="{BD2B93AB-6080-4AAB-B73D-F7B2DF9A9CF1}"/>
               </a:ext>
             </a:extLst>
           </p:cNvPr>
@@ -7337,7 +7372,7 @@
           <p:cNvPr id="7" name="">
             <a:extLst xmlns:a="http://schemas.openxmlformats.org/drawingml/2006/main">
               <a:ext uri="{FF2B5EF4-FFF2-40B4-BE49-F238E27FC236}">
-                <a16:creationId xmlns:a16="http://schemas.microsoft.com/office/drawing/2014/main" id="{265B2FC4-CAC0-4F08-8090-5C93B03DFECD}"/>
+                <a16:creationId xmlns:a16="http://schemas.microsoft.com/office/drawing/2014/main" id="{F62C35C4-D27E-483D-B95E-E6A766F12DD2}"/>
               </a:ext>
             </a:extLst>
           </p:cNvPr>
@@ -7399,7 +7434,7 @@
           <p:cNvPr id="8" name="">
             <a:extLst xmlns:a="http://schemas.openxmlformats.org/drawingml/2006/main">
               <a:ext uri="{FF2B5EF4-FFF2-40B4-BE49-F238E27FC236}">
-                <a16:creationId xmlns:a16="http://schemas.microsoft.com/office/drawing/2014/main" id="{72A84788-9B6B-4D69-9E3F-7B329CACBAA3}"/>
+                <a16:creationId xmlns:a16="http://schemas.microsoft.com/office/drawing/2014/main" id="{74443B82-96BE-4982-9F99-4CE6704CFD6D}"/>
               </a:ext>
             </a:extLst>
           </p:cNvPr>
@@ -7461,7 +7496,7 @@
           <p:cNvPr id="9" name="">
             <a:extLst xmlns:a="http://schemas.openxmlformats.org/drawingml/2006/main">
               <a:ext uri="{FF2B5EF4-FFF2-40B4-BE49-F238E27FC236}">
-                <a16:creationId xmlns:a16="http://schemas.microsoft.com/office/drawing/2014/main" id="{B52173FF-55BE-4731-9627-E3E476CB94F1}"/>
+                <a16:creationId xmlns:a16="http://schemas.microsoft.com/office/drawing/2014/main" id="{6EC7069E-289C-405C-8194-F407695BAAC3}"/>
               </a:ext>
             </a:extLst>
           </p:cNvPr>
@@ -7492,7 +7527,7 @@
           <p:cNvPr id="10" name="">
             <a:extLst xmlns:a="http://schemas.openxmlformats.org/drawingml/2006/main">
               <a:ext uri="{FF2B5EF4-FFF2-40B4-BE49-F238E27FC236}">
-                <a16:creationId xmlns:a16="http://schemas.microsoft.com/office/drawing/2014/main" id="{2F86D0A4-6356-47FD-BCAA-97737C4F55A9}"/>
+                <a16:creationId xmlns:a16="http://schemas.microsoft.com/office/drawing/2014/main" id="{8B53F28F-5064-4266-9771-F818DE3FF04C}"/>
               </a:ext>
             </a:extLst>
           </p:cNvPr>
@@ -7554,7 +7589,7 @@
           <p:cNvPr id="11" name="">
             <a:extLst xmlns:a="http://schemas.openxmlformats.org/drawingml/2006/main">
               <a:ext uri="{FF2B5EF4-FFF2-40B4-BE49-F238E27FC236}">
-                <a16:creationId xmlns:a16="http://schemas.microsoft.com/office/drawing/2014/main" id="{EFE41AB1-D5D0-4163-A4A0-25750D094C8E}"/>
+                <a16:creationId xmlns:a16="http://schemas.microsoft.com/office/drawing/2014/main" id="{1C6AAEC6-8144-4183-A213-90A6A425396A}"/>
               </a:ext>
             </a:extLst>
           </p:cNvPr>
@@ -7616,7 +7651,7 @@
           <p:cNvPr id="12" name="">
             <a:extLst xmlns:a="http://schemas.openxmlformats.org/drawingml/2006/main">
               <a:ext uri="{FF2B5EF4-FFF2-40B4-BE49-F238E27FC236}">
-                <a16:creationId xmlns:a16="http://schemas.microsoft.com/office/drawing/2014/main" id="{0D7EA0E9-3E33-4684-A7A9-82102CD2C978}"/>
+                <a16:creationId xmlns:a16="http://schemas.microsoft.com/office/drawing/2014/main" id="{25F51534-61E8-413E-A951-F3BF433AE24E}"/>
               </a:ext>
             </a:extLst>
           </p:cNvPr>
@@ -7678,7 +7713,7 @@
           <p:cNvPr id="13" name="">
             <a:extLst xmlns:a="http://schemas.openxmlformats.org/drawingml/2006/main">
               <a:ext uri="{FF2B5EF4-FFF2-40B4-BE49-F238E27FC236}">
-                <a16:creationId xmlns:a16="http://schemas.microsoft.com/office/drawing/2014/main" id="{9B1B7341-A9EC-4470-B6B9-247BC6E557F8}"/>
+                <a16:creationId xmlns:a16="http://schemas.microsoft.com/office/drawing/2014/main" id="{11C3330C-3E1E-4472-ABC8-1C8E088570FB}"/>
               </a:ext>
             </a:extLst>
           </p:cNvPr>
@@ -7709,7 +7744,7 @@
           <p:cNvPr id="14" name="">
             <a:extLst xmlns:a="http://schemas.openxmlformats.org/drawingml/2006/main">
               <a:ext uri="{FF2B5EF4-FFF2-40B4-BE49-F238E27FC236}">
-                <a16:creationId xmlns:a16="http://schemas.microsoft.com/office/drawing/2014/main" id="{0ED68A9B-191F-407E-84D0-D21FB9DCDD14}"/>
+                <a16:creationId xmlns:a16="http://schemas.microsoft.com/office/drawing/2014/main" id="{C99460B7-9D6A-4D3B-BFF7-0438FBB92EF7}"/>
               </a:ext>
             </a:extLst>
           </p:cNvPr>
@@ -7771,7 +7806,7 @@
           <p:cNvPr id="15" name="">
             <a:extLst xmlns:a="http://schemas.openxmlformats.org/drawingml/2006/main">
               <a:ext uri="{FF2B5EF4-FFF2-40B4-BE49-F238E27FC236}">
-                <a16:creationId xmlns:a16="http://schemas.microsoft.com/office/drawing/2014/main" id="{51AE7B9D-FBE1-491F-9CAD-6D3F7C5497E3}"/>
+                <a16:creationId xmlns:a16="http://schemas.microsoft.com/office/drawing/2014/main" id="{448AE140-43CA-4821-BEEC-2A2C634FD96E}"/>
               </a:ext>
             </a:extLst>
           </p:cNvPr>
@@ -7833,7 +7868,7 @@
           <p:cNvPr id="16" name="">
             <a:extLst xmlns:a="http://schemas.openxmlformats.org/drawingml/2006/main">
               <a:ext uri="{FF2B5EF4-FFF2-40B4-BE49-F238E27FC236}">
-                <a16:creationId xmlns:a16="http://schemas.microsoft.com/office/drawing/2014/main" id="{AE1C628A-9934-46B5-AB3E-4953430D397B}"/>
+                <a16:creationId xmlns:a16="http://schemas.microsoft.com/office/drawing/2014/main" id="{13A3ADA9-A9A3-4478-BCB8-F9A2AA820805}"/>
               </a:ext>
             </a:extLst>
           </p:cNvPr>
@@ -7895,7 +7930,7 @@
           <p:cNvPr id="17" name="">
             <a:extLst xmlns:a="http://schemas.openxmlformats.org/drawingml/2006/main">
               <a:ext uri="{FF2B5EF4-FFF2-40B4-BE49-F238E27FC236}">
-                <a16:creationId xmlns:a16="http://schemas.microsoft.com/office/drawing/2014/main" id="{5922FFC1-1FE1-470B-A562-1B0E1C82050D}"/>
+                <a16:creationId xmlns:a16="http://schemas.microsoft.com/office/drawing/2014/main" id="{49D8A14C-2B1C-4F8B-AC3F-199B5FC8CE1E}"/>
               </a:ext>
             </a:extLst>
           </p:cNvPr>
@@ -7926,7 +7961,7 @@
           <p:cNvPr id="18" name="">
             <a:extLst xmlns:a="http://schemas.openxmlformats.org/drawingml/2006/main">
               <a:ext uri="{FF2B5EF4-FFF2-40B4-BE49-F238E27FC236}">
-                <a16:creationId xmlns:a16="http://schemas.microsoft.com/office/drawing/2014/main" id="{585A68B2-9C83-40A5-A9B4-32F51DE047EC}"/>
+                <a16:creationId xmlns:a16="http://schemas.microsoft.com/office/drawing/2014/main" id="{61B9960B-10C8-4256-9FE6-178EC1EE045C}"/>
               </a:ext>
             </a:extLst>
           </p:cNvPr>
@@ -7988,7 +8023,7 @@
           <p:cNvPr id="19" name="">
             <a:extLst xmlns:a="http://schemas.openxmlformats.org/drawingml/2006/main">
               <a:ext uri="{FF2B5EF4-FFF2-40B4-BE49-F238E27FC236}">
-                <a16:creationId xmlns:a16="http://schemas.microsoft.com/office/drawing/2014/main" id="{79E06143-882E-4F51-85FB-1617B44F81EF}"/>
+                <a16:creationId xmlns:a16="http://schemas.microsoft.com/office/drawing/2014/main" id="{55B2885B-7933-414B-91DB-F263D52B913A}"/>
               </a:ext>
             </a:extLst>
           </p:cNvPr>
@@ -8040,7 +8075,7 @@
                 <a:ea typeface="Tahoma"/>
                 <a:cs typeface="Tahoma"/>
               </a:rPr>
-              <a:t>ปิดงาน</a:t>
+              <a:t>ยืนยันขั้นสุดท้าย</a:t>
             </a:r>
           </a:p>
         </p:txBody>
@@ -8050,7 +8085,7 @@
           <p:cNvPr id="20" name="">
             <a:extLst xmlns:a="http://schemas.openxmlformats.org/drawingml/2006/main">
               <a:ext uri="{FF2B5EF4-FFF2-40B4-BE49-F238E27FC236}">
-                <a16:creationId xmlns:a16="http://schemas.microsoft.com/office/drawing/2014/main" id="{D71BC079-CEBF-4D07-965C-470C94ECE62F}"/>
+                <a16:creationId xmlns:a16="http://schemas.microsoft.com/office/drawing/2014/main" id="{9F515883-5AC9-43AD-8E15-1985115392F0}"/>
               </a:ext>
             </a:extLst>
           </p:cNvPr>
@@ -8102,7 +8137,7 @@
                 <a:ea typeface="Tahoma"/>
                 <a:cs typeface="Tahoma"/>
               </a:rPr>
-              <a:t>เมื่อเป็นผู้ประเมินคนสุดท้าย</a:t>
+              <a:t>เมื่ออยู่ในลำดับสุดท้าย</a:t>
             </a:r>
           </a:p>
         </p:txBody>
@@ -8112,7 +8147,7 @@
           <p:cNvPr id="21" name="">
             <a:extLst xmlns:a="http://schemas.openxmlformats.org/drawingml/2006/main">
               <a:ext uri="{FF2B5EF4-FFF2-40B4-BE49-F238E27FC236}">
-                <a16:creationId xmlns:a16="http://schemas.microsoft.com/office/drawing/2014/main" id="{C4207A3C-DD37-47C3-B455-EEEA8EEA7001}"/>
+                <a16:creationId xmlns:a16="http://schemas.microsoft.com/office/drawing/2014/main" id="{94500E91-554C-4B43-8C09-752BBF90DF85}"/>
               </a:ext>
             </a:extLst>
           </p:cNvPr>
@@ -8174,7 +8209,7 @@
           <p:cNvPr id="22" name="footer-rule-14">
             <a:extLst xmlns:a="http://schemas.openxmlformats.org/drawingml/2006/main">
               <a:ext uri="{FF2B5EF4-FFF2-40B4-BE49-F238E27FC236}">
-                <a16:creationId xmlns:a16="http://schemas.microsoft.com/office/drawing/2014/main" id="{9DF98508-7B01-401B-A2B7-D187CEBC309A}"/>
+                <a16:creationId xmlns:a16="http://schemas.microsoft.com/office/drawing/2014/main" id="{D44D5BEE-2E6E-4577-B77B-1C033479985C}"/>
               </a:ext>
             </a:extLst>
           </p:cNvPr>
@@ -8205,7 +8240,7 @@
           <p:cNvPr id="23" name="footer-label-14">
             <a:extLst xmlns:a="http://schemas.openxmlformats.org/drawingml/2006/main">
               <a:ext uri="{FF2B5EF4-FFF2-40B4-BE49-F238E27FC236}">
-                <a16:creationId xmlns:a16="http://schemas.microsoft.com/office/drawing/2014/main" id="{A6E5A01C-920E-4466-A7CB-D90AEDA25BCC}"/>
+                <a16:creationId xmlns:a16="http://schemas.microsoft.com/office/drawing/2014/main" id="{C534FFB1-98DC-46F2-A33B-7B13BA5CF7C5}"/>
               </a:ext>
             </a:extLst>
           </p:cNvPr>
@@ -8267,7 +8302,7 @@
           <p:cNvPr id="24" name="footer-page-14">
             <a:extLst xmlns:a="http://schemas.openxmlformats.org/drawingml/2006/main">
               <a:ext uri="{FF2B5EF4-FFF2-40B4-BE49-F238E27FC236}">
-                <a16:creationId xmlns:a16="http://schemas.microsoft.com/office/drawing/2014/main" id="{A53E5C2E-9143-47DC-9FDE-35C1292DDA65}"/>
+                <a16:creationId xmlns:a16="http://schemas.microsoft.com/office/drawing/2014/main" id="{B1DE41D6-9543-4CD9-8699-0D9ABB7FFD6E}"/>
               </a:ext>
             </a:extLst>
           </p:cNvPr>
@@ -8327,7 +8362,7 @@
     </p:spTree>
     <p:extLst>
       <p:ext uri="{BB962C8B-B14F-4D97-AF65-F5344CB8AC3E}">
-        <p14:creationId xmlns:p14="http://schemas.microsoft.com/office/powerpoint/2010/main" val="2025024365"/>
+        <p14:creationId xmlns:p14="http://schemas.microsoft.com/office/powerpoint/2010/main" val="24472736"/>
       </p:ext>
     </p:extLst>
   </p:cSld>
@@ -8358,7 +8393,7 @@
           <p:cNvPr id="24" name="side-accent-15">
             <a:extLst xmlns:a="http://schemas.openxmlformats.org/drawingml/2006/main">
               <a:ext uri="{FF2B5EF4-FFF2-40B4-BE49-F238E27FC236}">
-                <a16:creationId xmlns:a16="http://schemas.microsoft.com/office/drawing/2014/main" id="{951DFE8C-AD56-483F-B0E9-2E1813272B79}"/>
+                <a16:creationId xmlns:a16="http://schemas.microsoft.com/office/drawing/2014/main" id="{ABB1DCC1-34CC-4A5A-BF47-73924ED1E7ED}"/>
               </a:ext>
             </a:extLst>
           </p:cNvPr>
@@ -8389,7 +8424,7 @@
           <p:cNvPr id="2" name="kicker-15">
             <a:extLst xmlns:a="http://schemas.openxmlformats.org/drawingml/2006/main">
               <a:ext uri="{FF2B5EF4-FFF2-40B4-BE49-F238E27FC236}">
-                <a16:creationId xmlns:a16="http://schemas.microsoft.com/office/drawing/2014/main" id="{42027A6D-627F-47E9-9C69-11B2FF6D8ACB}"/>
+                <a16:creationId xmlns:a16="http://schemas.microsoft.com/office/drawing/2014/main" id="{411468E2-3B89-41F6-B3D4-12D230995B5C}"/>
               </a:ext>
             </a:extLst>
           </p:cNvPr>
@@ -8451,7 +8486,7 @@
           <p:cNvPr id="3" name="title-15">
             <a:extLst xmlns:a="http://schemas.openxmlformats.org/drawingml/2006/main">
               <a:ext uri="{FF2B5EF4-FFF2-40B4-BE49-F238E27FC236}">
-                <a16:creationId xmlns:a16="http://schemas.microsoft.com/office/drawing/2014/main" id="{DA132E2B-B5D0-4969-8E46-2BC2C5029C98}"/>
+                <a16:creationId xmlns:a16="http://schemas.microsoft.com/office/drawing/2014/main" id="{CE7A1F19-1F55-4D31-87BE-0E76441E06BD}"/>
               </a:ext>
             </a:extLst>
           </p:cNvPr>
@@ -8513,7 +8548,7 @@
           <p:cNvPr id="4" name="">
             <a:extLst xmlns:a="http://schemas.openxmlformats.org/drawingml/2006/main">
               <a:ext uri="{FF2B5EF4-FFF2-40B4-BE49-F238E27FC236}">
-                <a16:creationId xmlns:a16="http://schemas.microsoft.com/office/drawing/2014/main" id="{75120013-5813-4342-AFC7-4BE4FAF6072D}"/>
+                <a16:creationId xmlns:a16="http://schemas.microsoft.com/office/drawing/2014/main" id="{B0EAAC92-C3FC-46FC-8FAC-8806CCBAAA1A}"/>
               </a:ext>
             </a:extLst>
           </p:cNvPr>
@@ -8575,7 +8610,7 @@
           <p:cNvPr id="5" name="">
             <a:extLst xmlns:a="http://schemas.openxmlformats.org/drawingml/2006/main">
               <a:ext uri="{FF2B5EF4-FFF2-40B4-BE49-F238E27FC236}">
-                <a16:creationId xmlns:a16="http://schemas.microsoft.com/office/drawing/2014/main" id="{91BE01FE-0A57-4054-B5F9-189705C4E3AF}"/>
+                <a16:creationId xmlns:a16="http://schemas.microsoft.com/office/drawing/2014/main" id="{940B00B0-3961-46E8-8DE3-14795BB68ADC}"/>
               </a:ext>
             </a:extLst>
           </p:cNvPr>
@@ -8637,7 +8672,7 @@
           <p:cNvPr id="6" name="">
             <a:extLst xmlns:a="http://schemas.openxmlformats.org/drawingml/2006/main">
               <a:ext uri="{FF2B5EF4-FFF2-40B4-BE49-F238E27FC236}">
-                <a16:creationId xmlns:a16="http://schemas.microsoft.com/office/drawing/2014/main" id="{750D38CF-4912-4F0E-B469-9F0703BB2E4B}"/>
+                <a16:creationId xmlns:a16="http://schemas.microsoft.com/office/drawing/2014/main" id="{C33C0A8C-1AE1-496A-8DB6-7765544C2720}"/>
               </a:ext>
             </a:extLst>
           </p:cNvPr>
@@ -8699,7 +8734,7 @@
           <p:cNvPr id="7" name="">
             <a:extLst xmlns:a="http://schemas.openxmlformats.org/drawingml/2006/main">
               <a:ext uri="{FF2B5EF4-FFF2-40B4-BE49-F238E27FC236}">
-                <a16:creationId xmlns:a16="http://schemas.microsoft.com/office/drawing/2014/main" id="{7D00AA9E-1843-496B-B4FC-6A7B2E53D0FB}"/>
+                <a16:creationId xmlns:a16="http://schemas.microsoft.com/office/drawing/2014/main" id="{853D74DE-CFD5-448C-8FE4-57CED24DA60A}"/>
               </a:ext>
             </a:extLst>
           </p:cNvPr>
@@ -8730,7 +8765,7 @@
           <p:cNvPr id="8" name="">
             <a:extLst xmlns:a="http://schemas.openxmlformats.org/drawingml/2006/main">
               <a:ext uri="{FF2B5EF4-FFF2-40B4-BE49-F238E27FC236}">
-                <a16:creationId xmlns:a16="http://schemas.microsoft.com/office/drawing/2014/main" id="{17B59673-EC8F-47C5-BC43-164499498E0B}"/>
+                <a16:creationId xmlns:a16="http://schemas.microsoft.com/office/drawing/2014/main" id="{DAC4C34F-16BF-40B8-A689-6A54C018475D}"/>
               </a:ext>
             </a:extLst>
           </p:cNvPr>
@@ -8792,7 +8827,7 @@
           <p:cNvPr id="9" name="">
             <a:extLst xmlns:a="http://schemas.openxmlformats.org/drawingml/2006/main">
               <a:ext uri="{FF2B5EF4-FFF2-40B4-BE49-F238E27FC236}">
-                <a16:creationId xmlns:a16="http://schemas.microsoft.com/office/drawing/2014/main" id="{B1BE50F1-D947-417F-BAF7-FB79CF8E5C5F}"/>
+                <a16:creationId xmlns:a16="http://schemas.microsoft.com/office/drawing/2014/main" id="{56C63BFB-4B3C-40E4-97F4-A86143ACFA4B}"/>
               </a:ext>
             </a:extLst>
           </p:cNvPr>
@@ -8854,7 +8889,7 @@
           <p:cNvPr id="10" name="">
             <a:extLst xmlns:a="http://schemas.openxmlformats.org/drawingml/2006/main">
               <a:ext uri="{FF2B5EF4-FFF2-40B4-BE49-F238E27FC236}">
-                <a16:creationId xmlns:a16="http://schemas.microsoft.com/office/drawing/2014/main" id="{FB544EC8-8AFB-4545-B1C7-E98EC0B99110}"/>
+                <a16:creationId xmlns:a16="http://schemas.microsoft.com/office/drawing/2014/main" id="{F2D73B44-F5D4-4841-AA00-3F10D5F17302}"/>
               </a:ext>
             </a:extLst>
           </p:cNvPr>
@@ -8916,7 +8951,7 @@
           <p:cNvPr id="11" name="">
             <a:extLst xmlns:a="http://schemas.openxmlformats.org/drawingml/2006/main">
               <a:ext uri="{FF2B5EF4-FFF2-40B4-BE49-F238E27FC236}">
-                <a16:creationId xmlns:a16="http://schemas.microsoft.com/office/drawing/2014/main" id="{8E566BE2-7AFD-4F57-BA58-E999C0576F16}"/>
+                <a16:creationId xmlns:a16="http://schemas.microsoft.com/office/drawing/2014/main" id="{8059336D-659E-4069-ACE8-674A882F5B12}"/>
               </a:ext>
             </a:extLst>
           </p:cNvPr>
@@ -8947,7 +8982,7 @@
           <p:cNvPr id="12" name="">
             <a:extLst xmlns:a="http://schemas.openxmlformats.org/drawingml/2006/main">
               <a:ext uri="{FF2B5EF4-FFF2-40B4-BE49-F238E27FC236}">
-                <a16:creationId xmlns:a16="http://schemas.microsoft.com/office/drawing/2014/main" id="{B2A507E9-58D6-44C1-8FD7-BD2389029EF7}"/>
+                <a16:creationId xmlns:a16="http://schemas.microsoft.com/office/drawing/2014/main" id="{7A040285-E68B-450F-A214-771E1B3A06FD}"/>
               </a:ext>
             </a:extLst>
           </p:cNvPr>
@@ -9009,7 +9044,7 @@
           <p:cNvPr id="13" name="">
             <a:extLst xmlns:a="http://schemas.openxmlformats.org/drawingml/2006/main">
               <a:ext uri="{FF2B5EF4-FFF2-40B4-BE49-F238E27FC236}">
-                <a16:creationId xmlns:a16="http://schemas.microsoft.com/office/drawing/2014/main" id="{D558C347-C23A-4EEE-AFAB-2AA497B33D3E}"/>
+                <a16:creationId xmlns:a16="http://schemas.microsoft.com/office/drawing/2014/main" id="{FF51DB59-AFD4-4315-8A06-9DF86A1E3B2C}"/>
               </a:ext>
             </a:extLst>
           </p:cNvPr>
@@ -9071,7 +9106,7 @@
           <p:cNvPr id="14" name="">
             <a:extLst xmlns:a="http://schemas.openxmlformats.org/drawingml/2006/main">
               <a:ext uri="{FF2B5EF4-FFF2-40B4-BE49-F238E27FC236}">
-                <a16:creationId xmlns:a16="http://schemas.microsoft.com/office/drawing/2014/main" id="{DA869A72-E7A4-4E59-ADFE-596EFC6A8FC3}"/>
+                <a16:creationId xmlns:a16="http://schemas.microsoft.com/office/drawing/2014/main" id="{D13FBB90-EAA1-4B3D-AFF4-0A50A4A001D5}"/>
               </a:ext>
             </a:extLst>
           </p:cNvPr>
@@ -9133,7 +9168,7 @@
           <p:cNvPr id="15" name="">
             <a:extLst xmlns:a="http://schemas.openxmlformats.org/drawingml/2006/main">
               <a:ext uri="{FF2B5EF4-FFF2-40B4-BE49-F238E27FC236}">
-                <a16:creationId xmlns:a16="http://schemas.microsoft.com/office/drawing/2014/main" id="{9ABED787-D38F-4E90-ACF0-B74AEECAF783}"/>
+                <a16:creationId xmlns:a16="http://schemas.microsoft.com/office/drawing/2014/main" id="{3F2A813E-12DC-429F-A3F5-881CBB3A1457}"/>
               </a:ext>
             </a:extLst>
           </p:cNvPr>
@@ -9164,7 +9199,7 @@
           <p:cNvPr id="16" name="">
             <a:extLst xmlns:a="http://schemas.openxmlformats.org/drawingml/2006/main">
               <a:ext uri="{FF2B5EF4-FFF2-40B4-BE49-F238E27FC236}">
-                <a16:creationId xmlns:a16="http://schemas.microsoft.com/office/drawing/2014/main" id="{294F6E0F-6E72-4AC6-898B-41322E6F4CD7}"/>
+                <a16:creationId xmlns:a16="http://schemas.microsoft.com/office/drawing/2014/main" id="{D9EA0E21-B83B-4A69-937D-550AF4FDC6CB}"/>
               </a:ext>
             </a:extLst>
           </p:cNvPr>
@@ -9226,7 +9261,7 @@
           <p:cNvPr id="17" name="">
             <a:extLst xmlns:a="http://schemas.openxmlformats.org/drawingml/2006/main">
               <a:ext uri="{FF2B5EF4-FFF2-40B4-BE49-F238E27FC236}">
-                <a16:creationId xmlns:a16="http://schemas.microsoft.com/office/drawing/2014/main" id="{C759A8F9-4AF6-453D-8F05-5E5C98E3B690}"/>
+                <a16:creationId xmlns:a16="http://schemas.microsoft.com/office/drawing/2014/main" id="{3673A875-9B9C-4DA9-AA28-51ED8C341F1F}"/>
               </a:ext>
             </a:extLst>
           </p:cNvPr>
@@ -9288,7 +9323,7 @@
           <p:cNvPr id="18" name="">
             <a:extLst xmlns:a="http://schemas.openxmlformats.org/drawingml/2006/main">
               <a:ext uri="{FF2B5EF4-FFF2-40B4-BE49-F238E27FC236}">
-                <a16:creationId xmlns:a16="http://schemas.microsoft.com/office/drawing/2014/main" id="{EFC58902-77BB-437B-8ECA-A77C6926E8C7}"/>
+                <a16:creationId xmlns:a16="http://schemas.microsoft.com/office/drawing/2014/main" id="{AD5F252C-1380-4CFE-9D78-2E130481BF9A}"/>
               </a:ext>
             </a:extLst>
           </p:cNvPr>
@@ -9350,7 +9385,7 @@
           <p:cNvPr id="19" name="">
             <a:extLst xmlns:a="http://schemas.openxmlformats.org/drawingml/2006/main">
               <a:ext uri="{FF2B5EF4-FFF2-40B4-BE49-F238E27FC236}">
-                <a16:creationId xmlns:a16="http://schemas.microsoft.com/office/drawing/2014/main" id="{20E7C7E2-9064-40F9-85FA-DB2333EF8620}"/>
+                <a16:creationId xmlns:a16="http://schemas.microsoft.com/office/drawing/2014/main" id="{1863916C-E827-4B97-BB19-48D870597B0A}"/>
               </a:ext>
             </a:extLst>
           </p:cNvPr>
@@ -9383,7 +9418,7 @@
           <p:cNvPr id="20" name="">
             <a:extLst xmlns:a="http://schemas.openxmlformats.org/drawingml/2006/main">
               <a:ext uri="{FF2B5EF4-FFF2-40B4-BE49-F238E27FC236}">
-                <a16:creationId xmlns:a16="http://schemas.microsoft.com/office/drawing/2014/main" id="{C3455F86-865D-410E-9B14-3FFB60FDC301}"/>
+                <a16:creationId xmlns:a16="http://schemas.microsoft.com/office/drawing/2014/main" id="{26FE5782-F56B-463A-A79B-7A93F3A90FAE}"/>
               </a:ext>
             </a:extLst>
           </p:cNvPr>
@@ -9445,7 +9480,7 @@
           <p:cNvPr id="21" name="footer-rule-15">
             <a:extLst xmlns:a="http://schemas.openxmlformats.org/drawingml/2006/main">
               <a:ext uri="{FF2B5EF4-FFF2-40B4-BE49-F238E27FC236}">
-                <a16:creationId xmlns:a16="http://schemas.microsoft.com/office/drawing/2014/main" id="{C047B2CD-B91C-42D3-9D4A-6EE6A1B3B470}"/>
+                <a16:creationId xmlns:a16="http://schemas.microsoft.com/office/drawing/2014/main" id="{99D218C1-BA75-416C-BACB-03BE8D906889}"/>
               </a:ext>
             </a:extLst>
           </p:cNvPr>
@@ -9476,7 +9511,7 @@
           <p:cNvPr id="22" name="footer-label-15">
             <a:extLst xmlns:a="http://schemas.openxmlformats.org/drawingml/2006/main">
               <a:ext uri="{FF2B5EF4-FFF2-40B4-BE49-F238E27FC236}">
-                <a16:creationId xmlns:a16="http://schemas.microsoft.com/office/drawing/2014/main" id="{B3C8C34A-1668-4D13-8B41-D7403FED379D}"/>
+                <a16:creationId xmlns:a16="http://schemas.microsoft.com/office/drawing/2014/main" id="{D6E28750-3F78-4419-BF73-E83087BABD92}"/>
               </a:ext>
             </a:extLst>
           </p:cNvPr>
@@ -9538,7 +9573,7 @@
           <p:cNvPr id="23" name="footer-page-15">
             <a:extLst xmlns:a="http://schemas.openxmlformats.org/drawingml/2006/main">
               <a:ext uri="{FF2B5EF4-FFF2-40B4-BE49-F238E27FC236}">
-                <a16:creationId xmlns:a16="http://schemas.microsoft.com/office/drawing/2014/main" id="{6B4DC357-9C32-4F54-856C-613D93C0B610}"/>
+                <a16:creationId xmlns:a16="http://schemas.microsoft.com/office/drawing/2014/main" id="{9C3B3DBE-E0A7-4C2D-BB7F-ECC544899AB5}"/>
               </a:ext>
             </a:extLst>
           </p:cNvPr>
@@ -9598,7 +9633,7 @@
     </p:spTree>
     <p:extLst>
       <p:ext uri="{BB962C8B-B14F-4D97-AF65-F5344CB8AC3E}">
-        <p14:creationId xmlns:p14="http://schemas.microsoft.com/office/powerpoint/2010/main" val="1971429130"/>
+        <p14:creationId xmlns:p14="http://schemas.microsoft.com/office/powerpoint/2010/main" val="1174669177"/>
       </p:ext>
     </p:extLst>
   </p:cSld>
@@ -9629,7 +9664,7 @@
           <p:cNvPr id="21" name="side-accent-16">
             <a:extLst xmlns:a="http://schemas.openxmlformats.org/drawingml/2006/main">
               <a:ext uri="{FF2B5EF4-FFF2-40B4-BE49-F238E27FC236}">
-                <a16:creationId xmlns:a16="http://schemas.microsoft.com/office/drawing/2014/main" id="{AD362A5B-48D6-4EE5-8712-3331B44CB564}"/>
+                <a16:creationId xmlns:a16="http://schemas.microsoft.com/office/drawing/2014/main" id="{29E809C4-BF85-4191-9519-374114E7D48A}"/>
               </a:ext>
             </a:extLst>
           </p:cNvPr>
@@ -9660,7 +9695,7 @@
           <p:cNvPr id="2" name="kicker-16">
             <a:extLst xmlns:a="http://schemas.openxmlformats.org/drawingml/2006/main">
               <a:ext uri="{FF2B5EF4-FFF2-40B4-BE49-F238E27FC236}">
-                <a16:creationId xmlns:a16="http://schemas.microsoft.com/office/drawing/2014/main" id="{69C650D3-39AA-48F0-A435-AB9466679CA9}"/>
+                <a16:creationId xmlns:a16="http://schemas.microsoft.com/office/drawing/2014/main" id="{D2DE7189-D126-4ADC-BD28-CBAD52334C6B}"/>
               </a:ext>
             </a:extLst>
           </p:cNvPr>
@@ -9722,7 +9757,7 @@
           <p:cNvPr id="3" name="title-16">
             <a:extLst xmlns:a="http://schemas.openxmlformats.org/drawingml/2006/main">
               <a:ext uri="{FF2B5EF4-FFF2-40B4-BE49-F238E27FC236}">
-                <a16:creationId xmlns:a16="http://schemas.microsoft.com/office/drawing/2014/main" id="{3F041E87-56ED-43CA-9DBC-9C1B87D9B416}"/>
+                <a16:creationId xmlns:a16="http://schemas.microsoft.com/office/drawing/2014/main" id="{BBECA28C-F232-4C59-8D15-4C92071E8A18}"/>
               </a:ext>
             </a:extLst>
           </p:cNvPr>
@@ -9784,7 +9819,7 @@
           <p:cNvPr id="4" name="">
             <a:extLst xmlns:a="http://schemas.openxmlformats.org/drawingml/2006/main">
               <a:ext uri="{FF2B5EF4-FFF2-40B4-BE49-F238E27FC236}">
-                <a16:creationId xmlns:a16="http://schemas.microsoft.com/office/drawing/2014/main" id="{E1D269BF-50B4-4E60-8C76-0FE1913C3F32}"/>
+                <a16:creationId xmlns:a16="http://schemas.microsoft.com/office/drawing/2014/main" id="{0D78E5E6-B41E-4E55-B128-F67C32BA8C7D}"/>
               </a:ext>
             </a:extLst>
           </p:cNvPr>
@@ -9815,7 +9850,7 @@
           <p:cNvPr id="5" name="">
             <a:extLst xmlns:a="http://schemas.openxmlformats.org/drawingml/2006/main">
               <a:ext uri="{FF2B5EF4-FFF2-40B4-BE49-F238E27FC236}">
-                <a16:creationId xmlns:a16="http://schemas.microsoft.com/office/drawing/2014/main" id="{89F9DEF2-59B9-415A-9E8A-B4AD62733AE7}"/>
+                <a16:creationId xmlns:a16="http://schemas.microsoft.com/office/drawing/2014/main" id="{63118CD5-8F59-4CB1-889D-FAD4341197D3}"/>
               </a:ext>
             </a:extLst>
           </p:cNvPr>
@@ -9846,7 +9881,7 @@
           <p:cNvPr id="6" name="">
             <a:extLst xmlns:a="http://schemas.openxmlformats.org/drawingml/2006/main">
               <a:ext uri="{FF2B5EF4-FFF2-40B4-BE49-F238E27FC236}">
-                <a16:creationId xmlns:a16="http://schemas.microsoft.com/office/drawing/2014/main" id="{8A5322A2-DFB2-47D9-A366-167D58D83449}"/>
+                <a16:creationId xmlns:a16="http://schemas.microsoft.com/office/drawing/2014/main" id="{EB104F25-FF5E-4FB2-9E92-5B8C287591DB}"/>
               </a:ext>
             </a:extLst>
           </p:cNvPr>
@@ -9908,7 +9943,7 @@
           <p:cNvPr id="7" name="">
             <a:extLst xmlns:a="http://schemas.openxmlformats.org/drawingml/2006/main">
               <a:ext uri="{FF2B5EF4-FFF2-40B4-BE49-F238E27FC236}">
-                <a16:creationId xmlns:a16="http://schemas.microsoft.com/office/drawing/2014/main" id="{1801AFCC-073F-4366-B534-0B6CFE78A876}"/>
+                <a16:creationId xmlns:a16="http://schemas.microsoft.com/office/drawing/2014/main" id="{1190B5CC-792B-467D-A386-FF1AE5EBA119}"/>
               </a:ext>
             </a:extLst>
           </p:cNvPr>
@@ -9970,7 +10005,7 @@
           <p:cNvPr id="8" name="">
             <a:extLst xmlns:a="http://schemas.openxmlformats.org/drawingml/2006/main">
               <a:ext uri="{FF2B5EF4-FFF2-40B4-BE49-F238E27FC236}">
-                <a16:creationId xmlns:a16="http://schemas.microsoft.com/office/drawing/2014/main" id="{72D02833-6DCE-4D3D-8749-271DE431ACA6}"/>
+                <a16:creationId xmlns:a16="http://schemas.microsoft.com/office/drawing/2014/main" id="{E12CF86D-85A6-42F8-B55E-A8C0D4208F66}"/>
               </a:ext>
             </a:extLst>
           </p:cNvPr>
@@ -10032,7 +10067,7 @@
           <p:cNvPr id="9" name="">
             <a:extLst xmlns:a="http://schemas.openxmlformats.org/drawingml/2006/main">
               <a:ext uri="{FF2B5EF4-FFF2-40B4-BE49-F238E27FC236}">
-                <a16:creationId xmlns:a16="http://schemas.microsoft.com/office/drawing/2014/main" id="{D611E6E5-F96D-47A3-B963-BC65E840CD01}"/>
+                <a16:creationId xmlns:a16="http://schemas.microsoft.com/office/drawing/2014/main" id="{64C42090-488C-4564-A0CF-D8152E28C977}"/>
               </a:ext>
             </a:extLst>
           </p:cNvPr>
@@ -10063,7 +10098,7 @@
           <p:cNvPr id="10" name="">
             <a:extLst xmlns:a="http://schemas.openxmlformats.org/drawingml/2006/main">
               <a:ext uri="{FF2B5EF4-FFF2-40B4-BE49-F238E27FC236}">
-                <a16:creationId xmlns:a16="http://schemas.microsoft.com/office/drawing/2014/main" id="{57D580A5-129C-4B46-AD65-4941C675986A}"/>
+                <a16:creationId xmlns:a16="http://schemas.microsoft.com/office/drawing/2014/main" id="{36047850-FC6D-4594-99A4-4835431E7DDE}"/>
               </a:ext>
             </a:extLst>
           </p:cNvPr>
@@ -10125,7 +10160,7 @@
           <p:cNvPr id="11" name="">
             <a:extLst xmlns:a="http://schemas.openxmlformats.org/drawingml/2006/main">
               <a:ext uri="{FF2B5EF4-FFF2-40B4-BE49-F238E27FC236}">
-                <a16:creationId xmlns:a16="http://schemas.microsoft.com/office/drawing/2014/main" id="{CAA37C42-4073-4AFE-8639-B38AD1A86204}"/>
+                <a16:creationId xmlns:a16="http://schemas.microsoft.com/office/drawing/2014/main" id="{D691A57E-FA65-4F8F-B934-0D3200530F20}"/>
               </a:ext>
             </a:extLst>
           </p:cNvPr>
@@ -10187,7 +10222,7 @@
           <p:cNvPr id="12" name="">
             <a:extLst xmlns:a="http://schemas.openxmlformats.org/drawingml/2006/main">
               <a:ext uri="{FF2B5EF4-FFF2-40B4-BE49-F238E27FC236}">
-                <a16:creationId xmlns:a16="http://schemas.microsoft.com/office/drawing/2014/main" id="{189D5CC5-FB10-498A-9873-F66EE9365974}"/>
+                <a16:creationId xmlns:a16="http://schemas.microsoft.com/office/drawing/2014/main" id="{B1181DBB-344B-41EA-95CB-8472D3FAC26B}"/>
               </a:ext>
             </a:extLst>
           </p:cNvPr>
@@ -10249,7 +10284,7 @@
           <p:cNvPr id="13" name="">
             <a:extLst xmlns:a="http://schemas.openxmlformats.org/drawingml/2006/main">
               <a:ext uri="{FF2B5EF4-FFF2-40B4-BE49-F238E27FC236}">
-                <a16:creationId xmlns:a16="http://schemas.microsoft.com/office/drawing/2014/main" id="{FD71A4CA-2F6A-4021-BCD9-88E71243F139}"/>
+                <a16:creationId xmlns:a16="http://schemas.microsoft.com/office/drawing/2014/main" id="{7682659E-D06D-42F5-BEA7-0FD0ED7D1FDC}"/>
               </a:ext>
             </a:extLst>
           </p:cNvPr>
@@ -10280,7 +10315,7 @@
           <p:cNvPr id="14" name="">
             <a:extLst xmlns:a="http://schemas.openxmlformats.org/drawingml/2006/main">
               <a:ext uri="{FF2B5EF4-FFF2-40B4-BE49-F238E27FC236}">
-                <a16:creationId xmlns:a16="http://schemas.microsoft.com/office/drawing/2014/main" id="{803294CC-A47F-47CD-B4E5-499944D92FC8}"/>
+                <a16:creationId xmlns:a16="http://schemas.microsoft.com/office/drawing/2014/main" id="{E7134E57-1DB0-4E3A-AB04-5D19BE408D7F}"/>
               </a:ext>
             </a:extLst>
           </p:cNvPr>
@@ -10342,7 +10377,7 @@
           <p:cNvPr id="15" name="">
             <a:extLst xmlns:a="http://schemas.openxmlformats.org/drawingml/2006/main">
               <a:ext uri="{FF2B5EF4-FFF2-40B4-BE49-F238E27FC236}">
-                <a16:creationId xmlns:a16="http://schemas.microsoft.com/office/drawing/2014/main" id="{DAB54234-A8A8-4984-A149-4CD146199B69}"/>
+                <a16:creationId xmlns:a16="http://schemas.microsoft.com/office/drawing/2014/main" id="{34A2AD7E-0AC9-4E4E-BBEB-DB0619FB00A3}"/>
               </a:ext>
             </a:extLst>
           </p:cNvPr>
@@ -10404,7 +10439,7 @@
           <p:cNvPr id="16" name="">
             <a:extLst xmlns:a="http://schemas.openxmlformats.org/drawingml/2006/main">
               <a:ext uri="{FF2B5EF4-FFF2-40B4-BE49-F238E27FC236}">
-                <a16:creationId xmlns:a16="http://schemas.microsoft.com/office/drawing/2014/main" id="{F3C3B7DB-5B8D-4EA0-9BF3-1049749C622C}"/>
+                <a16:creationId xmlns:a16="http://schemas.microsoft.com/office/drawing/2014/main" id="{E4C8D912-3453-4E91-B18C-358164111934}"/>
               </a:ext>
             </a:extLst>
           </p:cNvPr>
@@ -10466,7 +10501,7 @@
           <p:cNvPr id="17" name="">
             <a:extLst xmlns:a="http://schemas.openxmlformats.org/drawingml/2006/main">
               <a:ext uri="{FF2B5EF4-FFF2-40B4-BE49-F238E27FC236}">
-                <a16:creationId xmlns:a16="http://schemas.microsoft.com/office/drawing/2014/main" id="{9F26090E-AEF9-4DAF-9151-D04C3AB760C0}"/>
+                <a16:creationId xmlns:a16="http://schemas.microsoft.com/office/drawing/2014/main" id="{A83AD853-FE74-4FF9-96F5-1BA5138BFD91}"/>
               </a:ext>
             </a:extLst>
           </p:cNvPr>
@@ -10528,7 +10563,7 @@
           <p:cNvPr id="18" name="footer-rule-16">
             <a:extLst xmlns:a="http://schemas.openxmlformats.org/drawingml/2006/main">
               <a:ext uri="{FF2B5EF4-FFF2-40B4-BE49-F238E27FC236}">
-                <a16:creationId xmlns:a16="http://schemas.microsoft.com/office/drawing/2014/main" id="{8DEFA011-89FF-41C2-B937-52F66B26B03B}"/>
+                <a16:creationId xmlns:a16="http://schemas.microsoft.com/office/drawing/2014/main" id="{10D17F40-DA17-43D2-82DF-F3C7615F3F2C}"/>
               </a:ext>
             </a:extLst>
           </p:cNvPr>
@@ -10559,7 +10594,7 @@
           <p:cNvPr id="19" name="footer-label-16">
             <a:extLst xmlns:a="http://schemas.openxmlformats.org/drawingml/2006/main">
               <a:ext uri="{FF2B5EF4-FFF2-40B4-BE49-F238E27FC236}">
-                <a16:creationId xmlns:a16="http://schemas.microsoft.com/office/drawing/2014/main" id="{43068CD7-D981-4302-AEE3-716B0A02907A}"/>
+                <a16:creationId xmlns:a16="http://schemas.microsoft.com/office/drawing/2014/main" id="{E65B6547-0F10-4F50-A293-C614DC041FC3}"/>
               </a:ext>
             </a:extLst>
           </p:cNvPr>
@@ -10621,7 +10656,7 @@
           <p:cNvPr id="20" name="footer-page-16">
             <a:extLst xmlns:a="http://schemas.openxmlformats.org/drawingml/2006/main">
               <a:ext uri="{FF2B5EF4-FFF2-40B4-BE49-F238E27FC236}">
-                <a16:creationId xmlns:a16="http://schemas.microsoft.com/office/drawing/2014/main" id="{8743F296-8AD3-40EC-AEC2-D61F898DB88D}"/>
+                <a16:creationId xmlns:a16="http://schemas.microsoft.com/office/drawing/2014/main" id="{221A051E-8E63-4E70-B350-B6BCB158460F}"/>
               </a:ext>
             </a:extLst>
           </p:cNvPr>
@@ -10681,7 +10716,7 @@
     </p:spTree>
     <p:extLst>
       <p:ext uri="{BB962C8B-B14F-4D97-AF65-F5344CB8AC3E}">
-        <p14:creationId xmlns:p14="http://schemas.microsoft.com/office/powerpoint/2010/main" val="608655186"/>
+        <p14:creationId xmlns:p14="http://schemas.microsoft.com/office/powerpoint/2010/main" val="970947580"/>
       </p:ext>
     </p:extLst>
   </p:cSld>
@@ -10712,7 +10747,7 @@
           <p:cNvPr id="22" name="side-accent-17">
             <a:extLst xmlns:a="http://schemas.openxmlformats.org/drawingml/2006/main">
               <a:ext uri="{FF2B5EF4-FFF2-40B4-BE49-F238E27FC236}">
-                <a16:creationId xmlns:a16="http://schemas.microsoft.com/office/drawing/2014/main" id="{17855AA0-67E0-4861-8B1E-4846C23D07CB}"/>
+                <a16:creationId xmlns:a16="http://schemas.microsoft.com/office/drawing/2014/main" id="{9F0D066C-2A88-49C6-B781-9B65FE1F0B0D}"/>
               </a:ext>
             </a:extLst>
           </p:cNvPr>
@@ -10743,7 +10778,7 @@
           <p:cNvPr id="2" name="kicker-17">
             <a:extLst xmlns:a="http://schemas.openxmlformats.org/drawingml/2006/main">
               <a:ext uri="{FF2B5EF4-FFF2-40B4-BE49-F238E27FC236}">
-                <a16:creationId xmlns:a16="http://schemas.microsoft.com/office/drawing/2014/main" id="{DFEDB746-F853-4B9A-8E82-0FD6BAAE26EA}"/>
+                <a16:creationId xmlns:a16="http://schemas.microsoft.com/office/drawing/2014/main" id="{B027F96B-D089-4BE2-B6B0-84BC197FBE29}"/>
               </a:ext>
             </a:extLst>
           </p:cNvPr>
@@ -10805,7 +10840,7 @@
           <p:cNvPr id="3" name="title-17">
             <a:extLst xmlns:a="http://schemas.openxmlformats.org/drawingml/2006/main">
               <a:ext uri="{FF2B5EF4-FFF2-40B4-BE49-F238E27FC236}">
-                <a16:creationId xmlns:a16="http://schemas.microsoft.com/office/drawing/2014/main" id="{42630506-3AF0-4D9E-BF9A-2F0346D782B8}"/>
+                <a16:creationId xmlns:a16="http://schemas.microsoft.com/office/drawing/2014/main" id="{5A964D3C-00A2-4CBA-975D-903C3BF709E0}"/>
               </a:ext>
             </a:extLst>
           </p:cNvPr>
@@ -10867,7 +10902,7 @@
           <p:cNvPr id="4" name="">
             <a:extLst xmlns:a="http://schemas.openxmlformats.org/drawingml/2006/main">
               <a:ext uri="{FF2B5EF4-FFF2-40B4-BE49-F238E27FC236}">
-                <a16:creationId xmlns:a16="http://schemas.microsoft.com/office/drawing/2014/main" id="{59D6C8BF-0C27-47DC-A0AB-BD7E30AEC7C7}"/>
+                <a16:creationId xmlns:a16="http://schemas.microsoft.com/office/drawing/2014/main" id="{398BEA84-2744-4C2D-8BBF-880596A9B5CD}"/>
               </a:ext>
             </a:extLst>
           </p:cNvPr>
@@ -10929,7 +10964,7 @@
           <p:cNvPr id="5" name="">
             <a:extLst xmlns:a="http://schemas.openxmlformats.org/drawingml/2006/main">
               <a:ext uri="{FF2B5EF4-FFF2-40B4-BE49-F238E27FC236}">
-                <a16:creationId xmlns:a16="http://schemas.microsoft.com/office/drawing/2014/main" id="{1083114C-B584-47C2-A6AB-DEA0DD53B0B7}"/>
+                <a16:creationId xmlns:a16="http://schemas.microsoft.com/office/drawing/2014/main" id="{0C186C6A-8B1D-4E6A-8E6F-DAB97B24A2C9}"/>
               </a:ext>
             </a:extLst>
           </p:cNvPr>
@@ -10960,7 +10995,7 @@
           <p:cNvPr id="6" name="">
             <a:extLst xmlns:a="http://schemas.openxmlformats.org/drawingml/2006/main">
               <a:ext uri="{FF2B5EF4-FFF2-40B4-BE49-F238E27FC236}">
-                <a16:creationId xmlns:a16="http://schemas.microsoft.com/office/drawing/2014/main" id="{74457043-7E3B-49A5-BA76-507038F70C45}"/>
+                <a16:creationId xmlns:a16="http://schemas.microsoft.com/office/drawing/2014/main" id="{55519F44-39F3-4EB5-B38A-73601BC09212}"/>
               </a:ext>
             </a:extLst>
           </p:cNvPr>
@@ -11022,7 +11057,7 @@
           <p:cNvPr id="7" name="">
             <a:extLst xmlns:a="http://schemas.openxmlformats.org/drawingml/2006/main">
               <a:ext uri="{FF2B5EF4-FFF2-40B4-BE49-F238E27FC236}">
-                <a16:creationId xmlns:a16="http://schemas.microsoft.com/office/drawing/2014/main" id="{E6922D69-0F12-42C3-B117-C5241C9BB6EC}"/>
+                <a16:creationId xmlns:a16="http://schemas.microsoft.com/office/drawing/2014/main" id="{2BE6F325-3F0D-4DDC-90E2-F20237F9E1AB}"/>
               </a:ext>
             </a:extLst>
           </p:cNvPr>
@@ -11084,7 +11119,7 @@
           <p:cNvPr id="8" name="">
             <a:extLst xmlns:a="http://schemas.openxmlformats.org/drawingml/2006/main">
               <a:ext uri="{FF2B5EF4-FFF2-40B4-BE49-F238E27FC236}">
-                <a16:creationId xmlns:a16="http://schemas.microsoft.com/office/drawing/2014/main" id="{52FE6E2A-C411-4220-B2F1-B348356584E8}"/>
+                <a16:creationId xmlns:a16="http://schemas.microsoft.com/office/drawing/2014/main" id="{DBA74349-370E-4155-B01E-0EA346A2BAD4}"/>
               </a:ext>
             </a:extLst>
           </p:cNvPr>
@@ -11115,7 +11150,7 @@
           <p:cNvPr id="9" name="">
             <a:extLst xmlns:a="http://schemas.openxmlformats.org/drawingml/2006/main">
               <a:ext uri="{FF2B5EF4-FFF2-40B4-BE49-F238E27FC236}">
-                <a16:creationId xmlns:a16="http://schemas.microsoft.com/office/drawing/2014/main" id="{63FF2025-3C1D-4533-B15D-53ADBB8D14DC}"/>
+                <a16:creationId xmlns:a16="http://schemas.microsoft.com/office/drawing/2014/main" id="{91161617-9A50-44AF-9538-A96226D02D7A}"/>
               </a:ext>
             </a:extLst>
           </p:cNvPr>
@@ -11177,7 +11212,7 @@
           <p:cNvPr id="10" name="">
             <a:extLst xmlns:a="http://schemas.openxmlformats.org/drawingml/2006/main">
               <a:ext uri="{FF2B5EF4-FFF2-40B4-BE49-F238E27FC236}">
-                <a16:creationId xmlns:a16="http://schemas.microsoft.com/office/drawing/2014/main" id="{F54F6D3F-AE9A-48B6-873A-C6D8A721E9E7}"/>
+                <a16:creationId xmlns:a16="http://schemas.microsoft.com/office/drawing/2014/main" id="{3A1FFE32-F135-4F25-8790-FB075CF83C29}"/>
               </a:ext>
             </a:extLst>
           </p:cNvPr>
@@ -11239,7 +11274,7 @@
           <p:cNvPr id="11" name="">
             <a:extLst xmlns:a="http://schemas.openxmlformats.org/drawingml/2006/main">
               <a:ext uri="{FF2B5EF4-FFF2-40B4-BE49-F238E27FC236}">
-                <a16:creationId xmlns:a16="http://schemas.microsoft.com/office/drawing/2014/main" id="{450BFB19-8F9F-4502-A1B7-26307F7F72CD}"/>
+                <a16:creationId xmlns:a16="http://schemas.microsoft.com/office/drawing/2014/main" id="{10C442F9-5BB1-47C6-9DD6-4A4C36C31863}"/>
               </a:ext>
             </a:extLst>
           </p:cNvPr>
@@ -11270,7 +11305,7 @@
           <p:cNvPr id="12" name="">
             <a:extLst xmlns:a="http://schemas.openxmlformats.org/drawingml/2006/main">
               <a:ext uri="{FF2B5EF4-FFF2-40B4-BE49-F238E27FC236}">
-                <a16:creationId xmlns:a16="http://schemas.microsoft.com/office/drawing/2014/main" id="{788E892A-BFA7-459C-947B-7E68BF6F2C89}"/>
+                <a16:creationId xmlns:a16="http://schemas.microsoft.com/office/drawing/2014/main" id="{AB014143-73EE-444F-A45A-9B02CF776C2E}"/>
               </a:ext>
             </a:extLst>
           </p:cNvPr>
@@ -11332,7 +11367,7 @@
           <p:cNvPr id="13" name="">
             <a:extLst xmlns:a="http://schemas.openxmlformats.org/drawingml/2006/main">
               <a:ext uri="{FF2B5EF4-FFF2-40B4-BE49-F238E27FC236}">
-                <a16:creationId xmlns:a16="http://schemas.microsoft.com/office/drawing/2014/main" id="{4D9FA242-427B-4FF4-9C53-82D0C5D1512A}"/>
+                <a16:creationId xmlns:a16="http://schemas.microsoft.com/office/drawing/2014/main" id="{B78B6263-D988-4E28-AC0E-6A20BDD5EE1E}"/>
               </a:ext>
             </a:extLst>
           </p:cNvPr>
@@ -11394,7 +11429,7 @@
           <p:cNvPr id="14" name="">
             <a:extLst xmlns:a="http://schemas.openxmlformats.org/drawingml/2006/main">
               <a:ext uri="{FF2B5EF4-FFF2-40B4-BE49-F238E27FC236}">
-                <a16:creationId xmlns:a16="http://schemas.microsoft.com/office/drawing/2014/main" id="{2208AD32-167E-4BFA-83B3-CE72B38C3C9D}"/>
+                <a16:creationId xmlns:a16="http://schemas.microsoft.com/office/drawing/2014/main" id="{57708B69-AEC7-45B3-8785-87C69A1A1801}"/>
               </a:ext>
             </a:extLst>
           </p:cNvPr>
@@ -11425,7 +11460,7 @@
           <p:cNvPr id="15" name="">
             <a:extLst xmlns:a="http://schemas.openxmlformats.org/drawingml/2006/main">
               <a:ext uri="{FF2B5EF4-FFF2-40B4-BE49-F238E27FC236}">
-                <a16:creationId xmlns:a16="http://schemas.microsoft.com/office/drawing/2014/main" id="{4B7A1ED9-E42D-4E36-8243-90B5EB1BD44E}"/>
+                <a16:creationId xmlns:a16="http://schemas.microsoft.com/office/drawing/2014/main" id="{2B232F36-AEA9-4749-BCB2-DA9FA0541F69}"/>
               </a:ext>
             </a:extLst>
           </p:cNvPr>
@@ -11487,7 +11522,7 @@
           <p:cNvPr id="16" name="">
             <a:extLst xmlns:a="http://schemas.openxmlformats.org/drawingml/2006/main">
               <a:ext uri="{FF2B5EF4-FFF2-40B4-BE49-F238E27FC236}">
-                <a16:creationId xmlns:a16="http://schemas.microsoft.com/office/drawing/2014/main" id="{321BDDA5-7E7C-4B7D-A8AD-77B6D7FC65E5}"/>
+                <a16:creationId xmlns:a16="http://schemas.microsoft.com/office/drawing/2014/main" id="{2C58EEEB-BBD3-4110-B7E4-1E499A311AAD}"/>
               </a:ext>
             </a:extLst>
           </p:cNvPr>
@@ -11549,7 +11584,7 @@
           <p:cNvPr id="17" name="">
             <a:extLst xmlns:a="http://schemas.openxmlformats.org/drawingml/2006/main">
               <a:ext uri="{FF2B5EF4-FFF2-40B4-BE49-F238E27FC236}">
-                <a16:creationId xmlns:a16="http://schemas.microsoft.com/office/drawing/2014/main" id="{FF65892D-474B-4311-9A86-368EF6AAA8AD}"/>
+                <a16:creationId xmlns:a16="http://schemas.microsoft.com/office/drawing/2014/main" id="{9A38CCF9-D4D8-465C-927A-6ACECEA1955D}"/>
               </a:ext>
             </a:extLst>
           </p:cNvPr>
@@ -11582,7 +11617,7 @@
           <p:cNvPr id="18" name="">
             <a:extLst xmlns:a="http://schemas.openxmlformats.org/drawingml/2006/main">
               <a:ext uri="{FF2B5EF4-FFF2-40B4-BE49-F238E27FC236}">
-                <a16:creationId xmlns:a16="http://schemas.microsoft.com/office/drawing/2014/main" id="{B9634E42-51CB-44E0-87FB-A052CC221A45}"/>
+                <a16:creationId xmlns:a16="http://schemas.microsoft.com/office/drawing/2014/main" id="{3EDDF04D-183B-4C33-8A50-311855EDBE30}"/>
               </a:ext>
             </a:extLst>
           </p:cNvPr>
@@ -11644,7 +11679,7 @@
           <p:cNvPr id="19" name="footer-rule-17">
             <a:extLst xmlns:a="http://schemas.openxmlformats.org/drawingml/2006/main">
               <a:ext uri="{FF2B5EF4-FFF2-40B4-BE49-F238E27FC236}">
-                <a16:creationId xmlns:a16="http://schemas.microsoft.com/office/drawing/2014/main" id="{7D68B00D-EEB6-4FB8-AFDE-0EEAF5A080EC}"/>
+                <a16:creationId xmlns:a16="http://schemas.microsoft.com/office/drawing/2014/main" id="{65ECA71F-F023-4A66-9721-7FEA08FA9F33}"/>
               </a:ext>
             </a:extLst>
           </p:cNvPr>
@@ -11675,7 +11710,7 @@
           <p:cNvPr id="20" name="footer-label-17">
             <a:extLst xmlns:a="http://schemas.openxmlformats.org/drawingml/2006/main">
               <a:ext uri="{FF2B5EF4-FFF2-40B4-BE49-F238E27FC236}">
-                <a16:creationId xmlns:a16="http://schemas.microsoft.com/office/drawing/2014/main" id="{C571D35C-2717-4B93-A6EF-EBE3E24F1ADD}"/>
+                <a16:creationId xmlns:a16="http://schemas.microsoft.com/office/drawing/2014/main" id="{D88A1588-E148-4873-8FD5-A88265564572}"/>
               </a:ext>
             </a:extLst>
           </p:cNvPr>
@@ -11737,7 +11772,7 @@
           <p:cNvPr id="21" name="footer-page-17">
             <a:extLst xmlns:a="http://schemas.openxmlformats.org/drawingml/2006/main">
               <a:ext uri="{FF2B5EF4-FFF2-40B4-BE49-F238E27FC236}">
-                <a16:creationId xmlns:a16="http://schemas.microsoft.com/office/drawing/2014/main" id="{FB09646B-FADB-42F9-9556-6F595D7563C2}"/>
+                <a16:creationId xmlns:a16="http://schemas.microsoft.com/office/drawing/2014/main" id="{B9E42A44-D0B4-4D84-80FE-46873A4E21FD}"/>
               </a:ext>
             </a:extLst>
           </p:cNvPr>
@@ -11797,7 +11832,7 @@
     </p:spTree>
     <p:extLst>
       <p:ext uri="{BB962C8B-B14F-4D97-AF65-F5344CB8AC3E}">
-        <p14:creationId xmlns:p14="http://schemas.microsoft.com/office/powerpoint/2010/main" val="1738664811"/>
+        <p14:creationId xmlns:p14="http://schemas.microsoft.com/office/powerpoint/2010/main" val="778199715"/>
       </p:ext>
     </p:extLst>
   </p:cSld>
@@ -11828,7 +11863,7 @@
           <p:cNvPr id="25" name="side-accent-18">
             <a:extLst xmlns:a="http://schemas.openxmlformats.org/drawingml/2006/main">
               <a:ext uri="{FF2B5EF4-FFF2-40B4-BE49-F238E27FC236}">
-                <a16:creationId xmlns:a16="http://schemas.microsoft.com/office/drawing/2014/main" id="{D75023DD-328E-4523-883D-6532E2358BD8}"/>
+                <a16:creationId xmlns:a16="http://schemas.microsoft.com/office/drawing/2014/main" id="{DB759B29-6991-40FA-9835-ED20B6DA270C}"/>
               </a:ext>
             </a:extLst>
           </p:cNvPr>
@@ -11859,7 +11894,7 @@
           <p:cNvPr id="2" name="kicker-18">
             <a:extLst xmlns:a="http://schemas.openxmlformats.org/drawingml/2006/main">
               <a:ext uri="{FF2B5EF4-FFF2-40B4-BE49-F238E27FC236}">
-                <a16:creationId xmlns:a16="http://schemas.microsoft.com/office/drawing/2014/main" id="{1E1BA783-C435-4F2C-8246-86154503CD9A}"/>
+                <a16:creationId xmlns:a16="http://schemas.microsoft.com/office/drawing/2014/main" id="{52B43491-CD41-4532-82FF-8F8DA1D91642}"/>
               </a:ext>
             </a:extLst>
           </p:cNvPr>
@@ -11921,7 +11956,7 @@
           <p:cNvPr id="3" name="title-18">
             <a:extLst xmlns:a="http://schemas.openxmlformats.org/drawingml/2006/main">
               <a:ext uri="{FF2B5EF4-FFF2-40B4-BE49-F238E27FC236}">
-                <a16:creationId xmlns:a16="http://schemas.microsoft.com/office/drawing/2014/main" id="{D7B23558-054B-4CAD-B8B3-8D80EE32A3E6}"/>
+                <a16:creationId xmlns:a16="http://schemas.microsoft.com/office/drawing/2014/main" id="{373A1F4E-F097-4363-93B8-0FD568FA66C6}"/>
               </a:ext>
             </a:extLst>
           </p:cNvPr>
@@ -11983,7 +12018,7 @@
           <p:cNvPr id="4" name="">
             <a:extLst xmlns:a="http://schemas.openxmlformats.org/drawingml/2006/main">
               <a:ext uri="{FF2B5EF4-FFF2-40B4-BE49-F238E27FC236}">
-                <a16:creationId xmlns:a16="http://schemas.microsoft.com/office/drawing/2014/main" id="{F19A05A3-F0A9-4733-A1C2-0375AADBB801}"/>
+                <a16:creationId xmlns:a16="http://schemas.microsoft.com/office/drawing/2014/main" id="{8975ABB8-56CB-4F4B-9DE6-1733CDB86778}"/>
               </a:ext>
             </a:extLst>
           </p:cNvPr>
@@ -12045,7 +12080,7 @@
           <p:cNvPr id="5" name="">
             <a:extLst xmlns:a="http://schemas.openxmlformats.org/drawingml/2006/main">
               <a:ext uri="{FF2B5EF4-FFF2-40B4-BE49-F238E27FC236}">
-                <a16:creationId xmlns:a16="http://schemas.microsoft.com/office/drawing/2014/main" id="{38233145-82E1-46FF-B64D-818CAF94EF65}"/>
+                <a16:creationId xmlns:a16="http://schemas.microsoft.com/office/drawing/2014/main" id="{332FCB4A-6C96-4EEF-A872-B550DD6CEDB4}"/>
               </a:ext>
             </a:extLst>
           </p:cNvPr>
@@ -12107,7 +12142,7 @@
           <p:cNvPr id="6" name="">
             <a:extLst xmlns:a="http://schemas.openxmlformats.org/drawingml/2006/main">
               <a:ext uri="{FF2B5EF4-FFF2-40B4-BE49-F238E27FC236}">
-                <a16:creationId xmlns:a16="http://schemas.microsoft.com/office/drawing/2014/main" id="{EEC3F059-6AE3-420C-B14A-D6FC7F353C00}"/>
+                <a16:creationId xmlns:a16="http://schemas.microsoft.com/office/drawing/2014/main" id="{40BD24EB-93B2-410B-9A1D-7EFCEABC12C3}"/>
               </a:ext>
             </a:extLst>
           </p:cNvPr>
@@ -12169,7 +12204,7 @@
           <p:cNvPr id="7" name="">
             <a:extLst xmlns:a="http://schemas.openxmlformats.org/drawingml/2006/main">
               <a:ext uri="{FF2B5EF4-FFF2-40B4-BE49-F238E27FC236}">
-                <a16:creationId xmlns:a16="http://schemas.microsoft.com/office/drawing/2014/main" id="{5CB8595E-46B1-4FCE-BA40-A1D3A7D33778}"/>
+                <a16:creationId xmlns:a16="http://schemas.microsoft.com/office/drawing/2014/main" id="{D30A9652-CF1C-44C0-AB23-D0142E321479}"/>
               </a:ext>
             </a:extLst>
           </p:cNvPr>
@@ -12200,7 +12235,7 @@
           <p:cNvPr id="8" name="">
             <a:extLst xmlns:a="http://schemas.openxmlformats.org/drawingml/2006/main">
               <a:ext uri="{FF2B5EF4-FFF2-40B4-BE49-F238E27FC236}">
-                <a16:creationId xmlns:a16="http://schemas.microsoft.com/office/drawing/2014/main" id="{CD6323F8-E5E1-4904-81B5-CA7262081479}"/>
+                <a16:creationId xmlns:a16="http://schemas.microsoft.com/office/drawing/2014/main" id="{957CA648-2668-4570-9C3D-1EC13C7BAFCD}"/>
               </a:ext>
             </a:extLst>
           </p:cNvPr>
@@ -12262,7 +12297,7 @@
           <p:cNvPr id="9" name="">
             <a:extLst xmlns:a="http://schemas.openxmlformats.org/drawingml/2006/main">
               <a:ext uri="{FF2B5EF4-FFF2-40B4-BE49-F238E27FC236}">
-                <a16:creationId xmlns:a16="http://schemas.microsoft.com/office/drawing/2014/main" id="{93C8A111-7DAF-47F1-A389-F74B42BE9D7B}"/>
+                <a16:creationId xmlns:a16="http://schemas.microsoft.com/office/drawing/2014/main" id="{A5B5CB16-628B-4951-81E6-E889B9ABA16C}"/>
               </a:ext>
             </a:extLst>
           </p:cNvPr>
@@ -12324,7 +12359,7 @@
           <p:cNvPr id="10" name="">
             <a:extLst xmlns:a="http://schemas.openxmlformats.org/drawingml/2006/main">
               <a:ext uri="{FF2B5EF4-FFF2-40B4-BE49-F238E27FC236}">
-                <a16:creationId xmlns:a16="http://schemas.microsoft.com/office/drawing/2014/main" id="{8A0F1B01-E19D-4C0C-A8EF-DA90D499F35B}"/>
+                <a16:creationId xmlns:a16="http://schemas.microsoft.com/office/drawing/2014/main" id="{0A2B603D-67C5-4FCD-A6B5-3A36E7AB060A}"/>
               </a:ext>
             </a:extLst>
           </p:cNvPr>
@@ -12386,7 +12421,7 @@
           <p:cNvPr id="11" name="">
             <a:extLst xmlns:a="http://schemas.openxmlformats.org/drawingml/2006/main">
               <a:ext uri="{FF2B5EF4-FFF2-40B4-BE49-F238E27FC236}">
-                <a16:creationId xmlns:a16="http://schemas.microsoft.com/office/drawing/2014/main" id="{75E55682-25D2-415F-B57F-B57C84B65085}"/>
+                <a16:creationId xmlns:a16="http://schemas.microsoft.com/office/drawing/2014/main" id="{74B74A42-1975-4043-8F99-42B4123E1A06}"/>
               </a:ext>
             </a:extLst>
           </p:cNvPr>
@@ -12417,7 +12452,7 @@
           <p:cNvPr id="12" name="">
             <a:extLst xmlns:a="http://schemas.openxmlformats.org/drawingml/2006/main">
               <a:ext uri="{FF2B5EF4-FFF2-40B4-BE49-F238E27FC236}">
-                <a16:creationId xmlns:a16="http://schemas.microsoft.com/office/drawing/2014/main" id="{7A3E044A-C5FB-4AF3-A008-54A9471E9B1F}"/>
+                <a16:creationId xmlns:a16="http://schemas.microsoft.com/office/drawing/2014/main" id="{C47F34B6-0B64-4936-99D3-55951CA99B0C}"/>
               </a:ext>
             </a:extLst>
           </p:cNvPr>
@@ -12479,7 +12514,7 @@
           <p:cNvPr id="13" name="">
             <a:extLst xmlns:a="http://schemas.openxmlformats.org/drawingml/2006/main">
               <a:ext uri="{FF2B5EF4-FFF2-40B4-BE49-F238E27FC236}">
-                <a16:creationId xmlns:a16="http://schemas.microsoft.com/office/drawing/2014/main" id="{E42B02A2-892C-4873-A2ED-089C6E669BB9}"/>
+                <a16:creationId xmlns:a16="http://schemas.microsoft.com/office/drawing/2014/main" id="{DC08ADAE-19D4-4C08-A153-8A52DDBB4757}"/>
               </a:ext>
             </a:extLst>
           </p:cNvPr>
@@ -12541,7 +12576,7 @@
           <p:cNvPr id="14" name="">
             <a:extLst xmlns:a="http://schemas.openxmlformats.org/drawingml/2006/main">
               <a:ext uri="{FF2B5EF4-FFF2-40B4-BE49-F238E27FC236}">
-                <a16:creationId xmlns:a16="http://schemas.microsoft.com/office/drawing/2014/main" id="{293B3A37-F3FF-4C2A-B9A6-8C4AA8A43203}"/>
+                <a16:creationId xmlns:a16="http://schemas.microsoft.com/office/drawing/2014/main" id="{26A07C59-6364-46D5-BF39-31B1C17C6B1B}"/>
               </a:ext>
             </a:extLst>
           </p:cNvPr>
@@ -12603,7 +12638,7 @@
           <p:cNvPr id="15" name="">
             <a:extLst xmlns:a="http://schemas.openxmlformats.org/drawingml/2006/main">
               <a:ext uri="{FF2B5EF4-FFF2-40B4-BE49-F238E27FC236}">
-                <a16:creationId xmlns:a16="http://schemas.microsoft.com/office/drawing/2014/main" id="{925A921D-3F19-444E-BBD1-10FB20F14C46}"/>
+                <a16:creationId xmlns:a16="http://schemas.microsoft.com/office/drawing/2014/main" id="{BFF7260C-DCAC-47D9-9A5C-D152F92D3BB5}"/>
               </a:ext>
             </a:extLst>
           </p:cNvPr>
@@ -12634,7 +12669,7 @@
           <p:cNvPr id="16" name="">
             <a:extLst xmlns:a="http://schemas.openxmlformats.org/drawingml/2006/main">
               <a:ext uri="{FF2B5EF4-FFF2-40B4-BE49-F238E27FC236}">
-                <a16:creationId xmlns:a16="http://schemas.microsoft.com/office/drawing/2014/main" id="{0A2963E2-6E59-4FAD-B409-47071915D276}"/>
+                <a16:creationId xmlns:a16="http://schemas.microsoft.com/office/drawing/2014/main" id="{C79246E5-A715-49B2-8A28-A3A35422594E}"/>
               </a:ext>
             </a:extLst>
           </p:cNvPr>
@@ -12696,7 +12731,7 @@
           <p:cNvPr id="17" name="">
             <a:extLst xmlns:a="http://schemas.openxmlformats.org/drawingml/2006/main">
               <a:ext uri="{FF2B5EF4-FFF2-40B4-BE49-F238E27FC236}">
-                <a16:creationId xmlns:a16="http://schemas.microsoft.com/office/drawing/2014/main" id="{552B8214-101C-4A20-B481-E2B226EE7B37}"/>
+                <a16:creationId xmlns:a16="http://schemas.microsoft.com/office/drawing/2014/main" id="{6201061D-4F13-4597-8B51-2493978A9BE2}"/>
               </a:ext>
             </a:extLst>
           </p:cNvPr>
@@ -12758,7 +12793,7 @@
           <p:cNvPr id="18" name="">
             <a:extLst xmlns:a="http://schemas.openxmlformats.org/drawingml/2006/main">
               <a:ext uri="{FF2B5EF4-FFF2-40B4-BE49-F238E27FC236}">
-                <a16:creationId xmlns:a16="http://schemas.microsoft.com/office/drawing/2014/main" id="{571BCEB7-84B8-473A-BDB4-426BD7918C2B}"/>
+                <a16:creationId xmlns:a16="http://schemas.microsoft.com/office/drawing/2014/main" id="{AB7FDB5B-63D3-4EB1-9956-06205A09274F}"/>
               </a:ext>
             </a:extLst>
           </p:cNvPr>
@@ -12820,7 +12855,7 @@
           <p:cNvPr id="19" name="">
             <a:extLst xmlns:a="http://schemas.openxmlformats.org/drawingml/2006/main">
               <a:ext uri="{FF2B5EF4-FFF2-40B4-BE49-F238E27FC236}">
-                <a16:creationId xmlns:a16="http://schemas.microsoft.com/office/drawing/2014/main" id="{EE4BAB67-D346-4EF2-AE54-752C7D49605C}"/>
+                <a16:creationId xmlns:a16="http://schemas.microsoft.com/office/drawing/2014/main" id="{5EE9CFC1-2717-4BBF-89E5-AC2BDCE2168D}"/>
               </a:ext>
             </a:extLst>
           </p:cNvPr>
@@ -12853,7 +12888,7 @@
           <p:cNvPr id="20" name="">
             <a:extLst xmlns:a="http://schemas.openxmlformats.org/drawingml/2006/main">
               <a:ext uri="{FF2B5EF4-FFF2-40B4-BE49-F238E27FC236}">
-                <a16:creationId xmlns:a16="http://schemas.microsoft.com/office/drawing/2014/main" id="{C5A66852-CA96-4052-B66D-467ACECBEBB1}"/>
+                <a16:creationId xmlns:a16="http://schemas.microsoft.com/office/drawing/2014/main" id="{E544E800-9AC9-41C0-8602-D95E304C41EF}"/>
               </a:ext>
             </a:extLst>
           </p:cNvPr>
@@ -12919,7 +12954,7 @@
           <p:nvPr/>
         </p:nvPicPr>
         <p:blipFill>
-          <a:blip xmlns:r="http://schemas.openxmlformats.org/officeDocument/2006/relationships" xmlns:a="http://schemas.openxmlformats.org/drawingml/2006/main" r:embed="R071f9bae71684cf7"/>
+          <a:blip xmlns:r="http://schemas.openxmlformats.org/officeDocument/2006/relationships" xmlns:a="http://schemas.openxmlformats.org/drawingml/2006/main" r:embed="R27089341f3f341ef"/>
           <a:stretch xmlns:a="http://schemas.openxmlformats.org/drawingml/2006/main"/>
         </p:blipFill>
         <p:spPr>
@@ -12937,7 +12972,7 @@
           <p:cNvPr id="22" name="footer-rule-18">
             <a:extLst xmlns:a="http://schemas.openxmlformats.org/drawingml/2006/main">
               <a:ext uri="{FF2B5EF4-FFF2-40B4-BE49-F238E27FC236}">
-                <a16:creationId xmlns:a16="http://schemas.microsoft.com/office/drawing/2014/main" id="{92F2EB8C-0314-4F1A-BCF3-89A6E6D8AD19}"/>
+                <a16:creationId xmlns:a16="http://schemas.microsoft.com/office/drawing/2014/main" id="{4C94CDAB-CC36-46A6-9D5A-09C795BFC724}"/>
               </a:ext>
             </a:extLst>
           </p:cNvPr>
@@ -12968,7 +13003,7 @@
           <p:cNvPr id="23" name="footer-label-18">
             <a:extLst xmlns:a="http://schemas.openxmlformats.org/drawingml/2006/main">
               <a:ext uri="{FF2B5EF4-FFF2-40B4-BE49-F238E27FC236}">
-                <a16:creationId xmlns:a16="http://schemas.microsoft.com/office/drawing/2014/main" id="{60571DB8-11C0-458B-919F-01BD9C95C173}"/>
+                <a16:creationId xmlns:a16="http://schemas.microsoft.com/office/drawing/2014/main" id="{7B8F1BAF-DFF3-4E48-BEC8-9A45BEB49908}"/>
               </a:ext>
             </a:extLst>
           </p:cNvPr>
@@ -13030,7 +13065,7 @@
           <p:cNvPr id="24" name="footer-page-18">
             <a:extLst xmlns:a="http://schemas.openxmlformats.org/drawingml/2006/main">
               <a:ext uri="{FF2B5EF4-FFF2-40B4-BE49-F238E27FC236}">
-                <a16:creationId xmlns:a16="http://schemas.microsoft.com/office/drawing/2014/main" id="{D6913B6F-C5BE-4661-8F9B-BBA176DD6F2D}"/>
+                <a16:creationId xmlns:a16="http://schemas.microsoft.com/office/drawing/2014/main" id="{82589325-5410-472B-AC0A-662ED1763A46}"/>
               </a:ext>
             </a:extLst>
           </p:cNvPr>
@@ -13090,7 +13125,7 @@
     </p:spTree>
     <p:extLst>
       <p:ext uri="{BB962C8B-B14F-4D97-AF65-F5344CB8AC3E}">
-        <p14:creationId xmlns:p14="http://schemas.microsoft.com/office/powerpoint/2010/main" val="960076789"/>
+        <p14:creationId xmlns:p14="http://schemas.microsoft.com/office/powerpoint/2010/main" val="994160217"/>
       </p:ext>
     </p:extLst>
   </p:cSld>
@@ -13121,7 +13156,7 @@
           <p:cNvPr id="20" name="side-accent-2">
             <a:extLst xmlns:a="http://schemas.openxmlformats.org/drawingml/2006/main">
               <a:ext uri="{FF2B5EF4-FFF2-40B4-BE49-F238E27FC236}">
-                <a16:creationId xmlns:a16="http://schemas.microsoft.com/office/drawing/2014/main" id="{465D30A5-7C76-4BFF-A0D6-9F0BD45620FC}"/>
+                <a16:creationId xmlns:a16="http://schemas.microsoft.com/office/drawing/2014/main" id="{FAFF347C-A37C-40FA-8F79-E27A26A92847}"/>
               </a:ext>
             </a:extLst>
           </p:cNvPr>
@@ -13152,7 +13187,7 @@
           <p:cNvPr id="2" name="kicker-2">
             <a:extLst xmlns:a="http://schemas.openxmlformats.org/drawingml/2006/main">
               <a:ext uri="{FF2B5EF4-FFF2-40B4-BE49-F238E27FC236}">
-                <a16:creationId xmlns:a16="http://schemas.microsoft.com/office/drawing/2014/main" id="{9E3DFC52-18AC-425C-A7F9-071E2FB030C5}"/>
+                <a16:creationId xmlns:a16="http://schemas.microsoft.com/office/drawing/2014/main" id="{1E31CBE9-30A5-4D4A-8284-31294D0A6A7C}"/>
               </a:ext>
             </a:extLst>
           </p:cNvPr>
@@ -13214,7 +13249,7 @@
           <p:cNvPr id="3" name="title-2">
             <a:extLst xmlns:a="http://schemas.openxmlformats.org/drawingml/2006/main">
               <a:ext uri="{FF2B5EF4-FFF2-40B4-BE49-F238E27FC236}">
-                <a16:creationId xmlns:a16="http://schemas.microsoft.com/office/drawing/2014/main" id="{81FEE5F5-B5E9-4533-825A-218F9139140F}"/>
+                <a16:creationId xmlns:a16="http://schemas.microsoft.com/office/drawing/2014/main" id="{0D62D390-9736-4534-A49B-AF0497C0B044}"/>
               </a:ext>
             </a:extLst>
           </p:cNvPr>
@@ -13276,7 +13311,7 @@
           <p:cNvPr id="4" name="">
             <a:extLst xmlns:a="http://schemas.openxmlformats.org/drawingml/2006/main">
               <a:ext uri="{FF2B5EF4-FFF2-40B4-BE49-F238E27FC236}">
-                <a16:creationId xmlns:a16="http://schemas.microsoft.com/office/drawing/2014/main" id="{F931AEB5-CACA-4960-AFC9-7289E468B46D}"/>
+                <a16:creationId xmlns:a16="http://schemas.microsoft.com/office/drawing/2014/main" id="{2B282996-E667-4592-90C0-F41EDC9E9F3B}"/>
               </a:ext>
             </a:extLst>
           </p:cNvPr>
@@ -13338,7 +13373,7 @@
           <p:cNvPr id="5" name="">
             <a:extLst xmlns:a="http://schemas.openxmlformats.org/drawingml/2006/main">
               <a:ext uri="{FF2B5EF4-FFF2-40B4-BE49-F238E27FC236}">
-                <a16:creationId xmlns:a16="http://schemas.microsoft.com/office/drawing/2014/main" id="{457B3086-F50E-4B96-9E15-F922CC0F4314}"/>
+                <a16:creationId xmlns:a16="http://schemas.microsoft.com/office/drawing/2014/main" id="{C4360D5A-452C-4D5E-AEFD-2527005FF20D}"/>
               </a:ext>
             </a:extLst>
           </p:cNvPr>
@@ -13400,7 +13435,7 @@
           <p:cNvPr id="6" name="">
             <a:extLst xmlns:a="http://schemas.openxmlformats.org/drawingml/2006/main">
               <a:ext uri="{FF2B5EF4-FFF2-40B4-BE49-F238E27FC236}">
-                <a16:creationId xmlns:a16="http://schemas.microsoft.com/office/drawing/2014/main" id="{C4BF9AF8-9DC0-4FDC-9017-18AF88CA05BE}"/>
+                <a16:creationId xmlns:a16="http://schemas.microsoft.com/office/drawing/2014/main" id="{C1069BD4-001E-4289-8518-7C666D111127}"/>
               </a:ext>
             </a:extLst>
           </p:cNvPr>
@@ -13431,7 +13466,7 @@
           <p:cNvPr id="7" name="">
             <a:extLst xmlns:a="http://schemas.openxmlformats.org/drawingml/2006/main">
               <a:ext uri="{FF2B5EF4-FFF2-40B4-BE49-F238E27FC236}">
-                <a16:creationId xmlns:a16="http://schemas.microsoft.com/office/drawing/2014/main" id="{CDDC68D3-24DB-49D0-A6B8-718BFF757926}"/>
+                <a16:creationId xmlns:a16="http://schemas.microsoft.com/office/drawing/2014/main" id="{35AA0E8E-8517-49B6-B6F0-322682963EF1}"/>
               </a:ext>
             </a:extLst>
           </p:cNvPr>
@@ -13493,7 +13528,7 @@
           <p:cNvPr id="8" name="">
             <a:extLst xmlns:a="http://schemas.openxmlformats.org/drawingml/2006/main">
               <a:ext uri="{FF2B5EF4-FFF2-40B4-BE49-F238E27FC236}">
-                <a16:creationId xmlns:a16="http://schemas.microsoft.com/office/drawing/2014/main" id="{60E45EAE-C59B-4C49-B7E1-FB6EC3CB66BF}"/>
+                <a16:creationId xmlns:a16="http://schemas.microsoft.com/office/drawing/2014/main" id="{627E81AC-1DA1-42C4-82E4-D1C855E67738}"/>
               </a:ext>
             </a:extLst>
           </p:cNvPr>
@@ -13555,7 +13590,7 @@
           <p:cNvPr id="9" name="">
             <a:extLst xmlns:a="http://schemas.openxmlformats.org/drawingml/2006/main">
               <a:ext uri="{FF2B5EF4-FFF2-40B4-BE49-F238E27FC236}">
-                <a16:creationId xmlns:a16="http://schemas.microsoft.com/office/drawing/2014/main" id="{73D02A19-FA94-479C-8254-5CEACE7BEE07}"/>
+                <a16:creationId xmlns:a16="http://schemas.microsoft.com/office/drawing/2014/main" id="{617F13C5-B633-4C3B-B5B7-8F5728C8C307}"/>
               </a:ext>
             </a:extLst>
           </p:cNvPr>
@@ -13586,7 +13621,7 @@
           <p:cNvPr id="10" name="">
             <a:extLst xmlns:a="http://schemas.openxmlformats.org/drawingml/2006/main">
               <a:ext uri="{FF2B5EF4-FFF2-40B4-BE49-F238E27FC236}">
-                <a16:creationId xmlns:a16="http://schemas.microsoft.com/office/drawing/2014/main" id="{9052FA30-4A46-4782-961F-6B3EB611FAB9}"/>
+                <a16:creationId xmlns:a16="http://schemas.microsoft.com/office/drawing/2014/main" id="{4B4B3D64-02A5-406E-BDF4-AF410021E455}"/>
               </a:ext>
             </a:extLst>
           </p:cNvPr>
@@ -13648,7 +13683,7 @@
           <p:cNvPr id="11" name="">
             <a:extLst xmlns:a="http://schemas.openxmlformats.org/drawingml/2006/main">
               <a:ext uri="{FF2B5EF4-FFF2-40B4-BE49-F238E27FC236}">
-                <a16:creationId xmlns:a16="http://schemas.microsoft.com/office/drawing/2014/main" id="{445EDE7A-237F-487F-9462-E95AEB7C874B}"/>
+                <a16:creationId xmlns:a16="http://schemas.microsoft.com/office/drawing/2014/main" id="{64ABB61B-AEB9-44CA-80EC-C1320402EA2D}"/>
               </a:ext>
             </a:extLst>
           </p:cNvPr>
@@ -13710,7 +13745,7 @@
           <p:cNvPr id="12" name="">
             <a:extLst xmlns:a="http://schemas.openxmlformats.org/drawingml/2006/main">
               <a:ext uri="{FF2B5EF4-FFF2-40B4-BE49-F238E27FC236}">
-                <a16:creationId xmlns:a16="http://schemas.microsoft.com/office/drawing/2014/main" id="{E3D1C591-3180-414D-B75B-0C576AF59D4B}"/>
+                <a16:creationId xmlns:a16="http://schemas.microsoft.com/office/drawing/2014/main" id="{2EBF113E-4CCD-423C-9DB7-206973A97796}"/>
               </a:ext>
             </a:extLst>
           </p:cNvPr>
@@ -13741,7 +13776,7 @@
           <p:cNvPr id="13" name="">
             <a:extLst xmlns:a="http://schemas.openxmlformats.org/drawingml/2006/main">
               <a:ext uri="{FF2B5EF4-FFF2-40B4-BE49-F238E27FC236}">
-                <a16:creationId xmlns:a16="http://schemas.microsoft.com/office/drawing/2014/main" id="{7301E46A-62CD-47D4-8AAA-F76E68BCD378}"/>
+                <a16:creationId xmlns:a16="http://schemas.microsoft.com/office/drawing/2014/main" id="{9C4659D2-51AA-41F7-B1A9-AAAEB1C80B8E}"/>
               </a:ext>
             </a:extLst>
           </p:cNvPr>
@@ -13803,7 +13838,7 @@
           <p:cNvPr id="14" name="outcome-mark">
             <a:extLst xmlns:a="http://schemas.openxmlformats.org/drawingml/2006/main">
               <a:ext uri="{FF2B5EF4-FFF2-40B4-BE49-F238E27FC236}">
-                <a16:creationId xmlns:a16="http://schemas.microsoft.com/office/drawing/2014/main" id="{5D4274C6-4B1D-47BD-9B27-1E90430ADE9F}"/>
+                <a16:creationId xmlns:a16="http://schemas.microsoft.com/office/drawing/2014/main" id="{836559AE-B069-4EC8-911C-6808A6FAB38D}"/>
               </a:ext>
             </a:extLst>
           </p:cNvPr>
@@ -13838,7 +13873,7 @@
           <p:cNvPr id="15" name="">
             <a:extLst xmlns:a="http://schemas.openxmlformats.org/drawingml/2006/main">
               <a:ext uri="{FF2B5EF4-FFF2-40B4-BE49-F238E27FC236}">
-                <a16:creationId xmlns:a16="http://schemas.microsoft.com/office/drawing/2014/main" id="{D908DE75-B7CD-4C0B-AC02-F085B1674388}"/>
+                <a16:creationId xmlns:a16="http://schemas.microsoft.com/office/drawing/2014/main" id="{363B2B4F-56E5-4BE0-9068-824FDCF75FAB}"/>
               </a:ext>
             </a:extLst>
           </p:cNvPr>
@@ -13900,7 +13935,7 @@
           <p:cNvPr id="16" name="">
             <a:extLst xmlns:a="http://schemas.openxmlformats.org/drawingml/2006/main">
               <a:ext uri="{FF2B5EF4-FFF2-40B4-BE49-F238E27FC236}">
-                <a16:creationId xmlns:a16="http://schemas.microsoft.com/office/drawing/2014/main" id="{6E1B7DC2-CDD7-4F26-B84E-EC22C08647A1}"/>
+                <a16:creationId xmlns:a16="http://schemas.microsoft.com/office/drawing/2014/main" id="{6F96BFF6-67C2-4F96-A42F-31983A58BC36}"/>
               </a:ext>
             </a:extLst>
           </p:cNvPr>
@@ -13989,7 +14024,7 @@
           <p:cNvPr id="17" name="footer-rule-2">
             <a:extLst xmlns:a="http://schemas.openxmlformats.org/drawingml/2006/main">
               <a:ext uri="{FF2B5EF4-FFF2-40B4-BE49-F238E27FC236}">
-                <a16:creationId xmlns:a16="http://schemas.microsoft.com/office/drawing/2014/main" id="{C1F4F8E7-1E66-4922-A02C-028079CD2F58}"/>
+                <a16:creationId xmlns:a16="http://schemas.microsoft.com/office/drawing/2014/main" id="{5666037C-5764-44FC-918E-86549D77797D}"/>
               </a:ext>
             </a:extLst>
           </p:cNvPr>
@@ -14020,7 +14055,7 @@
           <p:cNvPr id="18" name="footer-label-2">
             <a:extLst xmlns:a="http://schemas.openxmlformats.org/drawingml/2006/main">
               <a:ext uri="{FF2B5EF4-FFF2-40B4-BE49-F238E27FC236}">
-                <a16:creationId xmlns:a16="http://schemas.microsoft.com/office/drawing/2014/main" id="{C8CE120B-242B-4F17-8318-660991470EFD}"/>
+                <a16:creationId xmlns:a16="http://schemas.microsoft.com/office/drawing/2014/main" id="{F5920002-7894-4FB2-8FBA-3C7C00E4607B}"/>
               </a:ext>
             </a:extLst>
           </p:cNvPr>
@@ -14082,7 +14117,7 @@
           <p:cNvPr id="19" name="footer-page-2">
             <a:extLst xmlns:a="http://schemas.openxmlformats.org/drawingml/2006/main">
               <a:ext uri="{FF2B5EF4-FFF2-40B4-BE49-F238E27FC236}">
-                <a16:creationId xmlns:a16="http://schemas.microsoft.com/office/drawing/2014/main" id="{461E792F-D940-4B08-A692-5C261CD7D792}"/>
+                <a16:creationId xmlns:a16="http://schemas.microsoft.com/office/drawing/2014/main" id="{FF4F9183-0BBD-4E31-95D3-D7226E0869AA}"/>
               </a:ext>
             </a:extLst>
           </p:cNvPr>
@@ -14142,7 +14177,7 @@
     </p:spTree>
     <p:extLst>
       <p:ext uri="{BB962C8B-B14F-4D97-AF65-F5344CB8AC3E}">
-        <p14:creationId xmlns:p14="http://schemas.microsoft.com/office/powerpoint/2010/main" val="267051246"/>
+        <p14:creationId xmlns:p14="http://schemas.microsoft.com/office/powerpoint/2010/main" val="1027563877"/>
       </p:ext>
     </p:extLst>
   </p:cSld>
@@ -14173,7 +14208,7 @@
           <p:cNvPr id="31" name="side-accent-3">
             <a:extLst xmlns:a="http://schemas.openxmlformats.org/drawingml/2006/main">
               <a:ext uri="{FF2B5EF4-FFF2-40B4-BE49-F238E27FC236}">
-                <a16:creationId xmlns:a16="http://schemas.microsoft.com/office/drawing/2014/main" id="{496E59E0-B60E-461B-AAA5-EB02EB993EBC}"/>
+                <a16:creationId xmlns:a16="http://schemas.microsoft.com/office/drawing/2014/main" id="{FBBFEEB7-FA01-474B-8D0B-B80EAB800F82}"/>
               </a:ext>
             </a:extLst>
           </p:cNvPr>
@@ -14204,7 +14239,7 @@
           <p:cNvPr id="2" name="kicker-3">
             <a:extLst xmlns:a="http://schemas.openxmlformats.org/drawingml/2006/main">
               <a:ext uri="{FF2B5EF4-FFF2-40B4-BE49-F238E27FC236}">
-                <a16:creationId xmlns:a16="http://schemas.microsoft.com/office/drawing/2014/main" id="{18B35FC9-46A4-43E9-86AB-C43507FD314D}"/>
+                <a16:creationId xmlns:a16="http://schemas.microsoft.com/office/drawing/2014/main" id="{9DCB312A-052E-4AD3-BB20-BA0F27A129FF}"/>
               </a:ext>
             </a:extLst>
           </p:cNvPr>
@@ -14266,7 +14301,7 @@
           <p:cNvPr id="3" name="title-3">
             <a:extLst xmlns:a="http://schemas.openxmlformats.org/drawingml/2006/main">
               <a:ext uri="{FF2B5EF4-FFF2-40B4-BE49-F238E27FC236}">
-                <a16:creationId xmlns:a16="http://schemas.microsoft.com/office/drawing/2014/main" id="{6109A841-1D09-4928-90F8-FE804DD88E15}"/>
+                <a16:creationId xmlns:a16="http://schemas.microsoft.com/office/drawing/2014/main" id="{17C76F05-ED3D-48C5-A81F-B1A1C698AAC2}"/>
               </a:ext>
             </a:extLst>
           </p:cNvPr>
@@ -14318,7 +14353,7 @@
                 <a:ea typeface="Tahoma"/>
                 <a:cs typeface="Tahoma"/>
               </a:rPr>
-              <a:t>MSU EVA ช่วยจัดการงานประเมินตั้งแต่เตรียมรอบจนถึงรายงานผล</a:t>
+              <a:t>ระบบช่วยจัดการงานประเมินตั้งแต่เตรียมรอบจนถึงรายงานผล</a:t>
             </a:r>
           </a:p>
         </p:txBody>
@@ -14328,7 +14363,7 @@
           <p:cNvPr id="4" name="">
             <a:extLst xmlns:a="http://schemas.openxmlformats.org/drawingml/2006/main">
               <a:ext uri="{FF2B5EF4-FFF2-40B4-BE49-F238E27FC236}">
-                <a16:creationId xmlns:a16="http://schemas.microsoft.com/office/drawing/2014/main" id="{1E92C5B3-B777-4304-B022-C6690B4B82B9}"/>
+                <a16:creationId xmlns:a16="http://schemas.microsoft.com/office/drawing/2014/main" id="{00B96D2E-B317-4AFC-B610-AEC6A96263A9}"/>
               </a:ext>
             </a:extLst>
           </p:cNvPr>
@@ -14390,7 +14425,7 @@
           <p:cNvPr id="5" name="system-function-line">
             <a:extLst xmlns:a="http://schemas.openxmlformats.org/drawingml/2006/main">
               <a:ext uri="{FF2B5EF4-FFF2-40B4-BE49-F238E27FC236}">
-                <a16:creationId xmlns:a16="http://schemas.microsoft.com/office/drawing/2014/main" id="{DE23B66A-8CFE-47DE-A5A6-32313B457DAA}"/>
+                <a16:creationId xmlns:a16="http://schemas.microsoft.com/office/drawing/2014/main" id="{ABE6F67C-6C78-4267-9B94-F5C02D3146B9}"/>
               </a:ext>
             </a:extLst>
           </p:cNvPr>
@@ -14421,7 +14456,7 @@
           <p:cNvPr id="6" name="">
             <a:extLst xmlns:a="http://schemas.openxmlformats.org/drawingml/2006/main">
               <a:ext uri="{FF2B5EF4-FFF2-40B4-BE49-F238E27FC236}">
-                <a16:creationId xmlns:a16="http://schemas.microsoft.com/office/drawing/2014/main" id="{2429FBFE-95F6-4C35-ABE4-9629DB7F0F5A}"/>
+                <a16:creationId xmlns:a16="http://schemas.microsoft.com/office/drawing/2014/main" id="{F5228F5A-AC70-4DC3-88F3-E0AB57FD1B6E}"/>
               </a:ext>
             </a:extLst>
           </p:cNvPr>
@@ -14452,7 +14487,7 @@
           <p:cNvPr id="7" name="">
             <a:extLst xmlns:a="http://schemas.openxmlformats.org/drawingml/2006/main">
               <a:ext uri="{FF2B5EF4-FFF2-40B4-BE49-F238E27FC236}">
-                <a16:creationId xmlns:a16="http://schemas.microsoft.com/office/drawing/2014/main" id="{C542F77C-3879-43E8-88C7-FC1ECB624236}"/>
+                <a16:creationId xmlns:a16="http://schemas.microsoft.com/office/drawing/2014/main" id="{BFB6A1A2-5449-4449-9C20-48E902314A1E}"/>
               </a:ext>
             </a:extLst>
           </p:cNvPr>
@@ -14514,7 +14549,7 @@
           <p:cNvPr id="8" name="">
             <a:extLst xmlns:a="http://schemas.openxmlformats.org/drawingml/2006/main">
               <a:ext uri="{FF2B5EF4-FFF2-40B4-BE49-F238E27FC236}">
-                <a16:creationId xmlns:a16="http://schemas.microsoft.com/office/drawing/2014/main" id="{C60A2580-A4D2-46D0-B378-76FD238A79F8}"/>
+                <a16:creationId xmlns:a16="http://schemas.microsoft.com/office/drawing/2014/main" id="{BB129CD3-DB77-4CF4-85B1-F8C12B5DD03B}"/>
               </a:ext>
             </a:extLst>
           </p:cNvPr>
@@ -14576,7 +14611,7 @@
           <p:cNvPr id="9" name="">
             <a:extLst xmlns:a="http://schemas.openxmlformats.org/drawingml/2006/main">
               <a:ext uri="{FF2B5EF4-FFF2-40B4-BE49-F238E27FC236}">
-                <a16:creationId xmlns:a16="http://schemas.microsoft.com/office/drawing/2014/main" id="{BAC6A2AF-ED5D-4550-87D2-87C12108EDCF}"/>
+                <a16:creationId xmlns:a16="http://schemas.microsoft.com/office/drawing/2014/main" id="{8DB1C34C-F2EB-48F6-A9B5-39AECC9D9A23}"/>
               </a:ext>
             </a:extLst>
           </p:cNvPr>
@@ -14638,7 +14673,7 @@
           <p:cNvPr id="10" name="">
             <a:extLst xmlns:a="http://schemas.openxmlformats.org/drawingml/2006/main">
               <a:ext uri="{FF2B5EF4-FFF2-40B4-BE49-F238E27FC236}">
-                <a16:creationId xmlns:a16="http://schemas.microsoft.com/office/drawing/2014/main" id="{0EA66979-B85F-4B0E-8892-CF1850D92914}"/>
+                <a16:creationId xmlns:a16="http://schemas.microsoft.com/office/drawing/2014/main" id="{73C23CFC-8362-464D-B3F6-83B43437D6A2}"/>
               </a:ext>
             </a:extLst>
           </p:cNvPr>
@@ -14669,7 +14704,7 @@
           <p:cNvPr id="11" name="">
             <a:extLst xmlns:a="http://schemas.openxmlformats.org/drawingml/2006/main">
               <a:ext uri="{FF2B5EF4-FFF2-40B4-BE49-F238E27FC236}">
-                <a16:creationId xmlns:a16="http://schemas.microsoft.com/office/drawing/2014/main" id="{ECD2AC88-1942-4F94-BDD9-4B2E3B769B84}"/>
+                <a16:creationId xmlns:a16="http://schemas.microsoft.com/office/drawing/2014/main" id="{AE046AEF-1D77-4AE9-89B7-B5B40E4E8A68}"/>
               </a:ext>
             </a:extLst>
           </p:cNvPr>
@@ -14731,7 +14766,7 @@
           <p:cNvPr id="12" name="">
             <a:extLst xmlns:a="http://schemas.openxmlformats.org/drawingml/2006/main">
               <a:ext uri="{FF2B5EF4-FFF2-40B4-BE49-F238E27FC236}">
-                <a16:creationId xmlns:a16="http://schemas.microsoft.com/office/drawing/2014/main" id="{ED094F60-F453-468C-AC92-4126EF5BBBF4}"/>
+                <a16:creationId xmlns:a16="http://schemas.microsoft.com/office/drawing/2014/main" id="{29E73D7B-00D5-4510-80FF-F928BDAD1CA8}"/>
               </a:ext>
             </a:extLst>
           </p:cNvPr>
@@ -14793,7 +14828,7 @@
           <p:cNvPr id="13" name="">
             <a:extLst xmlns:a="http://schemas.openxmlformats.org/drawingml/2006/main">
               <a:ext uri="{FF2B5EF4-FFF2-40B4-BE49-F238E27FC236}">
-                <a16:creationId xmlns:a16="http://schemas.microsoft.com/office/drawing/2014/main" id="{8777C98A-3A7A-479C-8A72-5B50073CDA28}"/>
+                <a16:creationId xmlns:a16="http://schemas.microsoft.com/office/drawing/2014/main" id="{21422D82-D4A6-4A1C-910A-FE065D037C70}"/>
               </a:ext>
             </a:extLst>
           </p:cNvPr>
@@ -14855,7 +14890,7 @@
           <p:cNvPr id="14" name="">
             <a:extLst xmlns:a="http://schemas.openxmlformats.org/drawingml/2006/main">
               <a:ext uri="{FF2B5EF4-FFF2-40B4-BE49-F238E27FC236}">
-                <a16:creationId xmlns:a16="http://schemas.microsoft.com/office/drawing/2014/main" id="{D75350D6-A7CA-4FE8-9B47-C9AB790F1B0B}"/>
+                <a16:creationId xmlns:a16="http://schemas.microsoft.com/office/drawing/2014/main" id="{36BFCBE3-607C-4798-8EC7-A7F4DEA2141E}"/>
               </a:ext>
             </a:extLst>
           </p:cNvPr>
@@ -14886,7 +14921,7 @@
           <p:cNvPr id="15" name="">
             <a:extLst xmlns:a="http://schemas.openxmlformats.org/drawingml/2006/main">
               <a:ext uri="{FF2B5EF4-FFF2-40B4-BE49-F238E27FC236}">
-                <a16:creationId xmlns:a16="http://schemas.microsoft.com/office/drawing/2014/main" id="{9DB12DD4-7926-442A-9D43-FCA6D825D72E}"/>
+                <a16:creationId xmlns:a16="http://schemas.microsoft.com/office/drawing/2014/main" id="{17B66DCA-72F1-4FD7-8D8A-03C34E4B526A}"/>
               </a:ext>
             </a:extLst>
           </p:cNvPr>
@@ -14948,7 +14983,7 @@
           <p:cNvPr id="16" name="">
             <a:extLst xmlns:a="http://schemas.openxmlformats.org/drawingml/2006/main">
               <a:ext uri="{FF2B5EF4-FFF2-40B4-BE49-F238E27FC236}">
-                <a16:creationId xmlns:a16="http://schemas.microsoft.com/office/drawing/2014/main" id="{0ADD5D6A-E1C5-446D-803A-7F56E64FBFF6}"/>
+                <a16:creationId xmlns:a16="http://schemas.microsoft.com/office/drawing/2014/main" id="{C3E79EAE-C26A-4E5B-B118-F9AF9168423F}"/>
               </a:ext>
             </a:extLst>
           </p:cNvPr>
@@ -15010,7 +15045,7 @@
           <p:cNvPr id="17" name="">
             <a:extLst xmlns:a="http://schemas.openxmlformats.org/drawingml/2006/main">
               <a:ext uri="{FF2B5EF4-FFF2-40B4-BE49-F238E27FC236}">
-                <a16:creationId xmlns:a16="http://schemas.microsoft.com/office/drawing/2014/main" id="{A940C428-263D-43E9-A0F0-7D78A1ECC8C6}"/>
+                <a16:creationId xmlns:a16="http://schemas.microsoft.com/office/drawing/2014/main" id="{5746BA98-AE44-425F-A634-A7DBD2F71F3C}"/>
               </a:ext>
             </a:extLst>
           </p:cNvPr>
@@ -15072,7 +15107,7 @@
           <p:cNvPr id="18" name="">
             <a:extLst xmlns:a="http://schemas.openxmlformats.org/drawingml/2006/main">
               <a:ext uri="{FF2B5EF4-FFF2-40B4-BE49-F238E27FC236}">
-                <a16:creationId xmlns:a16="http://schemas.microsoft.com/office/drawing/2014/main" id="{6AD30F30-F0C6-47B5-A2B7-A8EEF65A536C}"/>
+                <a16:creationId xmlns:a16="http://schemas.microsoft.com/office/drawing/2014/main" id="{EC5983D9-4D3A-4A7D-8C49-9B8BCF154D51}"/>
               </a:ext>
             </a:extLst>
           </p:cNvPr>
@@ -15103,7 +15138,7 @@
           <p:cNvPr id="19" name="">
             <a:extLst xmlns:a="http://schemas.openxmlformats.org/drawingml/2006/main">
               <a:ext uri="{FF2B5EF4-FFF2-40B4-BE49-F238E27FC236}">
-                <a16:creationId xmlns:a16="http://schemas.microsoft.com/office/drawing/2014/main" id="{06AD3E82-9126-4CAB-A174-5DB3E3DEE9C6}"/>
+                <a16:creationId xmlns:a16="http://schemas.microsoft.com/office/drawing/2014/main" id="{55F0F598-3220-4024-A50A-84BD724909F2}"/>
               </a:ext>
             </a:extLst>
           </p:cNvPr>
@@ -15165,7 +15200,7 @@
           <p:cNvPr id="20" name="">
             <a:extLst xmlns:a="http://schemas.openxmlformats.org/drawingml/2006/main">
               <a:ext uri="{FF2B5EF4-FFF2-40B4-BE49-F238E27FC236}">
-                <a16:creationId xmlns:a16="http://schemas.microsoft.com/office/drawing/2014/main" id="{217A1D29-9867-42A4-B132-663B2301C2ED}"/>
+                <a16:creationId xmlns:a16="http://schemas.microsoft.com/office/drawing/2014/main" id="{7DDC7A92-2F25-4BA4-8233-010368C17A50}"/>
               </a:ext>
             </a:extLst>
           </p:cNvPr>
@@ -15227,7 +15262,7 @@
           <p:cNvPr id="21" name="">
             <a:extLst xmlns:a="http://schemas.openxmlformats.org/drawingml/2006/main">
               <a:ext uri="{FF2B5EF4-FFF2-40B4-BE49-F238E27FC236}">
-                <a16:creationId xmlns:a16="http://schemas.microsoft.com/office/drawing/2014/main" id="{60D4540B-FDC0-4C3D-BBD6-0EC81901DE39}"/>
+                <a16:creationId xmlns:a16="http://schemas.microsoft.com/office/drawing/2014/main" id="{0C6C6C21-38D7-47DF-AD2B-3191462B4E2A}"/>
               </a:ext>
             </a:extLst>
           </p:cNvPr>
@@ -15289,7 +15324,7 @@
           <p:cNvPr id="22" name="">
             <a:extLst xmlns:a="http://schemas.openxmlformats.org/drawingml/2006/main">
               <a:ext uri="{FF2B5EF4-FFF2-40B4-BE49-F238E27FC236}">
-                <a16:creationId xmlns:a16="http://schemas.microsoft.com/office/drawing/2014/main" id="{34F6CE88-6B68-4713-A1D8-EA408E59722A}"/>
+                <a16:creationId xmlns:a16="http://schemas.microsoft.com/office/drawing/2014/main" id="{33F60F6F-4521-4AF6-B22E-3679DA00FF58}"/>
               </a:ext>
             </a:extLst>
           </p:cNvPr>
@@ -15320,7 +15355,7 @@
           <p:cNvPr id="23" name="">
             <a:extLst xmlns:a="http://schemas.openxmlformats.org/drawingml/2006/main">
               <a:ext uri="{FF2B5EF4-FFF2-40B4-BE49-F238E27FC236}">
-                <a16:creationId xmlns:a16="http://schemas.microsoft.com/office/drawing/2014/main" id="{D6EB6A6C-176E-4163-ADFA-7F7BE253F8BB}"/>
+                <a16:creationId xmlns:a16="http://schemas.microsoft.com/office/drawing/2014/main" id="{B9717C3C-D674-4CA1-85DC-E6C2EBC2C12C}"/>
               </a:ext>
             </a:extLst>
           </p:cNvPr>
@@ -15382,7 +15417,7 @@
           <p:cNvPr id="24" name="">
             <a:extLst xmlns:a="http://schemas.openxmlformats.org/drawingml/2006/main">
               <a:ext uri="{FF2B5EF4-FFF2-40B4-BE49-F238E27FC236}">
-                <a16:creationId xmlns:a16="http://schemas.microsoft.com/office/drawing/2014/main" id="{AA47180C-CD4E-4C8A-B777-BE01425049D6}"/>
+                <a16:creationId xmlns:a16="http://schemas.microsoft.com/office/drawing/2014/main" id="{B88390F8-2CE0-405F-97E9-3BD21CD9ED67}"/>
               </a:ext>
             </a:extLst>
           </p:cNvPr>
@@ -15444,7 +15479,7 @@
           <p:cNvPr id="25" name="">
             <a:extLst xmlns:a="http://schemas.openxmlformats.org/drawingml/2006/main">
               <a:ext uri="{FF2B5EF4-FFF2-40B4-BE49-F238E27FC236}">
-                <a16:creationId xmlns:a16="http://schemas.microsoft.com/office/drawing/2014/main" id="{250D67E1-0504-4E7E-B186-E0757C704E2C}"/>
+                <a16:creationId xmlns:a16="http://schemas.microsoft.com/office/drawing/2014/main" id="{A86E74B7-83A5-4E3C-A514-C3E68D765802}"/>
               </a:ext>
             </a:extLst>
           </p:cNvPr>
@@ -15506,7 +15541,7 @@
           <p:cNvPr id="26" name="">
             <a:extLst xmlns:a="http://schemas.openxmlformats.org/drawingml/2006/main">
               <a:ext uri="{FF2B5EF4-FFF2-40B4-BE49-F238E27FC236}">
-                <a16:creationId xmlns:a16="http://schemas.microsoft.com/office/drawing/2014/main" id="{6393E0DD-F11B-4EF8-83E1-D8AC2BEC9EA9}"/>
+                <a16:creationId xmlns:a16="http://schemas.microsoft.com/office/drawing/2014/main" id="{9AECB81C-3B09-4DCA-968B-C24E4A351A8A}"/>
               </a:ext>
             </a:extLst>
           </p:cNvPr>
@@ -15539,7 +15574,7 @@
           <p:cNvPr id="27" name="">
             <a:extLst xmlns:a="http://schemas.openxmlformats.org/drawingml/2006/main">
               <a:ext uri="{FF2B5EF4-FFF2-40B4-BE49-F238E27FC236}">
-                <a16:creationId xmlns:a16="http://schemas.microsoft.com/office/drawing/2014/main" id="{7B41E675-5990-4305-A043-C9318B04C860}"/>
+                <a16:creationId xmlns:a16="http://schemas.microsoft.com/office/drawing/2014/main" id="{C964A36F-D210-40C0-8089-DE445A15994D}"/>
               </a:ext>
             </a:extLst>
           </p:cNvPr>
@@ -15601,7 +15636,7 @@
           <p:cNvPr id="28" name="footer-rule-3">
             <a:extLst xmlns:a="http://schemas.openxmlformats.org/drawingml/2006/main">
               <a:ext uri="{FF2B5EF4-FFF2-40B4-BE49-F238E27FC236}">
-                <a16:creationId xmlns:a16="http://schemas.microsoft.com/office/drawing/2014/main" id="{A3F82E5D-2A7A-491B-AFF8-E4D3F71C1237}"/>
+                <a16:creationId xmlns:a16="http://schemas.microsoft.com/office/drawing/2014/main" id="{7DB551C0-06F9-49A3-8E46-4A1FD97B1113}"/>
               </a:ext>
             </a:extLst>
           </p:cNvPr>
@@ -15632,7 +15667,7 @@
           <p:cNvPr id="29" name="footer-label-3">
             <a:extLst xmlns:a="http://schemas.openxmlformats.org/drawingml/2006/main">
               <a:ext uri="{FF2B5EF4-FFF2-40B4-BE49-F238E27FC236}">
-                <a16:creationId xmlns:a16="http://schemas.microsoft.com/office/drawing/2014/main" id="{E8F640F7-027E-4CF3-BC6A-9528F093E391}"/>
+                <a16:creationId xmlns:a16="http://schemas.microsoft.com/office/drawing/2014/main" id="{058CECFF-B5FB-4684-B9EF-B209D8F7D839}"/>
               </a:ext>
             </a:extLst>
           </p:cNvPr>
@@ -15694,7 +15729,7 @@
           <p:cNvPr id="30" name="footer-page-3">
             <a:extLst xmlns:a="http://schemas.openxmlformats.org/drawingml/2006/main">
               <a:ext uri="{FF2B5EF4-FFF2-40B4-BE49-F238E27FC236}">
-                <a16:creationId xmlns:a16="http://schemas.microsoft.com/office/drawing/2014/main" id="{94492E2C-D8F6-41FE-B3D1-4263B0DE40BF}"/>
+                <a16:creationId xmlns:a16="http://schemas.microsoft.com/office/drawing/2014/main" id="{A0FCB849-153C-42A5-941B-9D274B8301D7}"/>
               </a:ext>
             </a:extLst>
           </p:cNvPr>
@@ -15754,7 +15789,7 @@
     </p:spTree>
     <p:extLst>
       <p:ext uri="{BB962C8B-B14F-4D97-AF65-F5344CB8AC3E}">
-        <p14:creationId xmlns:p14="http://schemas.microsoft.com/office/powerpoint/2010/main" val="903976431"/>
+        <p14:creationId xmlns:p14="http://schemas.microsoft.com/office/powerpoint/2010/main" val="1306940326"/>
       </p:ext>
     </p:extLst>
   </p:cSld>
@@ -15785,7 +15820,7 @@
           <p:cNvPr id="28" name="side-accent-4">
             <a:extLst xmlns:a="http://schemas.openxmlformats.org/drawingml/2006/main">
               <a:ext uri="{FF2B5EF4-FFF2-40B4-BE49-F238E27FC236}">
-                <a16:creationId xmlns:a16="http://schemas.microsoft.com/office/drawing/2014/main" id="{398E57C6-CEC4-40CD-B3E0-16BDE582C45A}"/>
+                <a16:creationId xmlns:a16="http://schemas.microsoft.com/office/drawing/2014/main" id="{AA472FF9-79F5-465E-88F8-0685A25CC486}"/>
               </a:ext>
             </a:extLst>
           </p:cNvPr>
@@ -15816,7 +15851,7 @@
           <p:cNvPr id="2" name="kicker-4">
             <a:extLst xmlns:a="http://schemas.openxmlformats.org/drawingml/2006/main">
               <a:ext uri="{FF2B5EF4-FFF2-40B4-BE49-F238E27FC236}">
-                <a16:creationId xmlns:a16="http://schemas.microsoft.com/office/drawing/2014/main" id="{E80CB312-DC78-4B64-BE36-2146470A5BEF}"/>
+                <a16:creationId xmlns:a16="http://schemas.microsoft.com/office/drawing/2014/main" id="{6F7C6190-1749-4FEE-BEC4-DD4734ADFDE1}"/>
               </a:ext>
             </a:extLst>
           </p:cNvPr>
@@ -15878,7 +15913,7 @@
           <p:cNvPr id="3" name="title-4">
             <a:extLst xmlns:a="http://schemas.openxmlformats.org/drawingml/2006/main">
               <a:ext uri="{FF2B5EF4-FFF2-40B4-BE49-F238E27FC236}">
-                <a16:creationId xmlns:a16="http://schemas.microsoft.com/office/drawing/2014/main" id="{7117763A-E9B4-4515-8FCF-CA6A6349D61A}"/>
+                <a16:creationId xmlns:a16="http://schemas.microsoft.com/office/drawing/2014/main" id="{FDDC8A0B-BF68-49F1-81BB-3A7C1ACF5BF0}"/>
               </a:ext>
             </a:extLst>
           </p:cNvPr>
@@ -15940,7 +15975,7 @@
           <p:cNvPr id="4" name="">
             <a:extLst xmlns:a="http://schemas.openxmlformats.org/drawingml/2006/main">
               <a:ext uri="{FF2B5EF4-FFF2-40B4-BE49-F238E27FC236}">
-                <a16:creationId xmlns:a16="http://schemas.microsoft.com/office/drawing/2014/main" id="{2DDF2A70-0BB8-4C55-94B5-8B6AB5D88BA0}"/>
+                <a16:creationId xmlns:a16="http://schemas.microsoft.com/office/drawing/2014/main" id="{21F36A18-4247-4B0C-A298-613CD354D6B9}"/>
               </a:ext>
             </a:extLst>
           </p:cNvPr>
@@ -16002,7 +16037,7 @@
           <p:cNvPr id="5" name="">
             <a:extLst xmlns:a="http://schemas.openxmlformats.org/drawingml/2006/main">
               <a:ext uri="{FF2B5EF4-FFF2-40B4-BE49-F238E27FC236}">
-                <a16:creationId xmlns:a16="http://schemas.microsoft.com/office/drawing/2014/main" id="{4E10141E-C8F5-4AF3-A728-296BC60FB2EC}"/>
+                <a16:creationId xmlns:a16="http://schemas.microsoft.com/office/drawing/2014/main" id="{314AC0AF-F400-453A-A7D4-AAD3A173BC9C}"/>
               </a:ext>
             </a:extLst>
           </p:cNvPr>
@@ -16064,7 +16099,7 @@
           <p:cNvPr id="6" name="">
             <a:extLst xmlns:a="http://schemas.openxmlformats.org/drawingml/2006/main">
               <a:ext uri="{FF2B5EF4-FFF2-40B4-BE49-F238E27FC236}">
-                <a16:creationId xmlns:a16="http://schemas.microsoft.com/office/drawing/2014/main" id="{FABF0BF2-AD83-4BFD-8A2A-5DD5C1BD4789}"/>
+                <a16:creationId xmlns:a16="http://schemas.microsoft.com/office/drawing/2014/main" id="{7117ED35-1E36-4788-86A6-A282EF248B82}"/>
               </a:ext>
             </a:extLst>
           </p:cNvPr>
@@ -16126,7 +16161,7 @@
           <p:cNvPr id="7" name="">
             <a:extLst xmlns:a="http://schemas.openxmlformats.org/drawingml/2006/main">
               <a:ext uri="{FF2B5EF4-FFF2-40B4-BE49-F238E27FC236}">
-                <a16:creationId xmlns:a16="http://schemas.microsoft.com/office/drawing/2014/main" id="{E36A108F-A363-4790-8D0F-589669B2276F}"/>
+                <a16:creationId xmlns:a16="http://schemas.microsoft.com/office/drawing/2014/main" id="{D6D0778E-07EF-4346-ACAC-27F8BEE49377}"/>
               </a:ext>
             </a:extLst>
           </p:cNvPr>
@@ -16157,7 +16192,7 @@
           <p:cNvPr id="8" name="">
             <a:extLst xmlns:a="http://schemas.openxmlformats.org/drawingml/2006/main">
               <a:ext uri="{FF2B5EF4-FFF2-40B4-BE49-F238E27FC236}">
-                <a16:creationId xmlns:a16="http://schemas.microsoft.com/office/drawing/2014/main" id="{B01E4D90-FA5A-4A87-8B9F-3939B65BDFB7}"/>
+                <a16:creationId xmlns:a16="http://schemas.microsoft.com/office/drawing/2014/main" id="{796F7428-8E54-494C-868D-D686653AAADD}"/>
               </a:ext>
             </a:extLst>
           </p:cNvPr>
@@ -16219,7 +16254,7 @@
           <p:cNvPr id="9" name="">
             <a:extLst xmlns:a="http://schemas.openxmlformats.org/drawingml/2006/main">
               <a:ext uri="{FF2B5EF4-FFF2-40B4-BE49-F238E27FC236}">
-                <a16:creationId xmlns:a16="http://schemas.microsoft.com/office/drawing/2014/main" id="{844812A5-C732-4268-A151-DE3B4F35630E}"/>
+                <a16:creationId xmlns:a16="http://schemas.microsoft.com/office/drawing/2014/main" id="{F36A2ED6-F39B-4E7B-B091-B7B2D4596F34}"/>
               </a:ext>
             </a:extLst>
           </p:cNvPr>
@@ -16281,7 +16316,7 @@
           <p:cNvPr id="10" name="">
             <a:extLst xmlns:a="http://schemas.openxmlformats.org/drawingml/2006/main">
               <a:ext uri="{FF2B5EF4-FFF2-40B4-BE49-F238E27FC236}">
-                <a16:creationId xmlns:a16="http://schemas.microsoft.com/office/drawing/2014/main" id="{2F808075-CCC1-4778-AB02-F55EA1FEFE96}"/>
+                <a16:creationId xmlns:a16="http://schemas.microsoft.com/office/drawing/2014/main" id="{3C79467E-7A98-47B1-9AD9-F88BECA3F16A}"/>
               </a:ext>
             </a:extLst>
           </p:cNvPr>
@@ -16343,7 +16378,7 @@
           <p:cNvPr id="11" name="">
             <a:extLst xmlns:a="http://schemas.openxmlformats.org/drawingml/2006/main">
               <a:ext uri="{FF2B5EF4-FFF2-40B4-BE49-F238E27FC236}">
-                <a16:creationId xmlns:a16="http://schemas.microsoft.com/office/drawing/2014/main" id="{5A920FEB-7829-4BFB-91CE-492F7A6DD99B}"/>
+                <a16:creationId xmlns:a16="http://schemas.microsoft.com/office/drawing/2014/main" id="{4F0C4D5B-9531-4093-8849-A9DADB6DD7F5}"/>
               </a:ext>
             </a:extLst>
           </p:cNvPr>
@@ -16374,7 +16409,7 @@
           <p:cNvPr id="12" name="">
             <a:extLst xmlns:a="http://schemas.openxmlformats.org/drawingml/2006/main">
               <a:ext uri="{FF2B5EF4-FFF2-40B4-BE49-F238E27FC236}">
-                <a16:creationId xmlns:a16="http://schemas.microsoft.com/office/drawing/2014/main" id="{54A473D8-BB30-44AF-86DF-FF30B3917C06}"/>
+                <a16:creationId xmlns:a16="http://schemas.microsoft.com/office/drawing/2014/main" id="{FCE327C9-01DE-40F9-A74A-62C5EFF6E8E7}"/>
               </a:ext>
             </a:extLst>
           </p:cNvPr>
@@ -16436,7 +16471,7 @@
           <p:cNvPr id="13" name="">
             <a:extLst xmlns:a="http://schemas.openxmlformats.org/drawingml/2006/main">
               <a:ext uri="{FF2B5EF4-FFF2-40B4-BE49-F238E27FC236}">
-                <a16:creationId xmlns:a16="http://schemas.microsoft.com/office/drawing/2014/main" id="{A9DCE846-9340-4A50-84DA-5D04922671C8}"/>
+                <a16:creationId xmlns:a16="http://schemas.microsoft.com/office/drawing/2014/main" id="{F83D5DA0-4B5A-4346-95C5-318BE5B1C4B5}"/>
               </a:ext>
             </a:extLst>
           </p:cNvPr>
@@ -16498,7 +16533,7 @@
           <p:cNvPr id="14" name="">
             <a:extLst xmlns:a="http://schemas.openxmlformats.org/drawingml/2006/main">
               <a:ext uri="{FF2B5EF4-FFF2-40B4-BE49-F238E27FC236}">
-                <a16:creationId xmlns:a16="http://schemas.microsoft.com/office/drawing/2014/main" id="{35A6193A-8DC3-4FCD-94B8-AAF47548F84F}"/>
+                <a16:creationId xmlns:a16="http://schemas.microsoft.com/office/drawing/2014/main" id="{7FE25979-6CB5-4557-A6A6-8DC564D4FFB5}"/>
               </a:ext>
             </a:extLst>
           </p:cNvPr>
@@ -16560,7 +16595,7 @@
           <p:cNvPr id="15" name="">
             <a:extLst xmlns:a="http://schemas.openxmlformats.org/drawingml/2006/main">
               <a:ext uri="{FF2B5EF4-FFF2-40B4-BE49-F238E27FC236}">
-                <a16:creationId xmlns:a16="http://schemas.microsoft.com/office/drawing/2014/main" id="{4A3ED521-0673-461E-98BA-7D8C65F3D6C0}"/>
+                <a16:creationId xmlns:a16="http://schemas.microsoft.com/office/drawing/2014/main" id="{0B21DFA1-91CD-41E0-931C-25AA8C81FD1D}"/>
               </a:ext>
             </a:extLst>
           </p:cNvPr>
@@ -16591,7 +16626,7 @@
           <p:cNvPr id="16" name="">
             <a:extLst xmlns:a="http://schemas.openxmlformats.org/drawingml/2006/main">
               <a:ext uri="{FF2B5EF4-FFF2-40B4-BE49-F238E27FC236}">
-                <a16:creationId xmlns:a16="http://schemas.microsoft.com/office/drawing/2014/main" id="{2D5DCAC6-858A-402F-B81B-296136F8FDD7}"/>
+                <a16:creationId xmlns:a16="http://schemas.microsoft.com/office/drawing/2014/main" id="{184F2A61-97AE-4CDA-9D5C-F6B34CDB5A23}"/>
               </a:ext>
             </a:extLst>
           </p:cNvPr>
@@ -16653,7 +16688,7 @@
           <p:cNvPr id="17" name="">
             <a:extLst xmlns:a="http://schemas.openxmlformats.org/drawingml/2006/main">
               <a:ext uri="{FF2B5EF4-FFF2-40B4-BE49-F238E27FC236}">
-                <a16:creationId xmlns:a16="http://schemas.microsoft.com/office/drawing/2014/main" id="{11058C61-807B-47A9-B1D1-91256795A5C6}"/>
+                <a16:creationId xmlns:a16="http://schemas.microsoft.com/office/drawing/2014/main" id="{75325FC2-4353-4DBF-B070-3EAC3AC82143}"/>
               </a:ext>
             </a:extLst>
           </p:cNvPr>
@@ -16715,7 +16750,7 @@
           <p:cNvPr id="18" name="">
             <a:extLst xmlns:a="http://schemas.openxmlformats.org/drawingml/2006/main">
               <a:ext uri="{FF2B5EF4-FFF2-40B4-BE49-F238E27FC236}">
-                <a16:creationId xmlns:a16="http://schemas.microsoft.com/office/drawing/2014/main" id="{DD5F44F2-6C6F-4BBC-9260-59ABA06E273B}"/>
+                <a16:creationId xmlns:a16="http://schemas.microsoft.com/office/drawing/2014/main" id="{94DE0325-2702-4440-8E07-C5450AB24F0F}"/>
               </a:ext>
             </a:extLst>
           </p:cNvPr>
@@ -16777,7 +16812,7 @@
           <p:cNvPr id="19" name="">
             <a:extLst xmlns:a="http://schemas.openxmlformats.org/drawingml/2006/main">
               <a:ext uri="{FF2B5EF4-FFF2-40B4-BE49-F238E27FC236}">
-                <a16:creationId xmlns:a16="http://schemas.microsoft.com/office/drawing/2014/main" id="{CD02A08F-D94E-45BD-B3B3-4BC50F44664F}"/>
+                <a16:creationId xmlns:a16="http://schemas.microsoft.com/office/drawing/2014/main" id="{BF65CF17-9083-4638-8960-DD49072348C2}"/>
               </a:ext>
             </a:extLst>
           </p:cNvPr>
@@ -16808,7 +16843,7 @@
           <p:cNvPr id="20" name="">
             <a:extLst xmlns:a="http://schemas.openxmlformats.org/drawingml/2006/main">
               <a:ext uri="{FF2B5EF4-FFF2-40B4-BE49-F238E27FC236}">
-                <a16:creationId xmlns:a16="http://schemas.microsoft.com/office/drawing/2014/main" id="{C74EE33E-41EC-4820-ACEA-04D215C452C0}"/>
+                <a16:creationId xmlns:a16="http://schemas.microsoft.com/office/drawing/2014/main" id="{F5C3322E-D4D0-419F-830D-2F1610A2F4F7}"/>
               </a:ext>
             </a:extLst>
           </p:cNvPr>
@@ -16870,7 +16905,7 @@
           <p:cNvPr id="21" name="">
             <a:extLst xmlns:a="http://schemas.openxmlformats.org/drawingml/2006/main">
               <a:ext uri="{FF2B5EF4-FFF2-40B4-BE49-F238E27FC236}">
-                <a16:creationId xmlns:a16="http://schemas.microsoft.com/office/drawing/2014/main" id="{B06B0288-C12F-4C05-AA63-31EA7A2A1258}"/>
+                <a16:creationId xmlns:a16="http://schemas.microsoft.com/office/drawing/2014/main" id="{C219E4CF-CA12-403D-883E-B1FD2D2BB7BD}"/>
               </a:ext>
             </a:extLst>
           </p:cNvPr>
@@ -16932,7 +16967,7 @@
           <p:cNvPr id="22" name="">
             <a:extLst xmlns:a="http://schemas.openxmlformats.org/drawingml/2006/main">
               <a:ext uri="{FF2B5EF4-FFF2-40B4-BE49-F238E27FC236}">
-                <a16:creationId xmlns:a16="http://schemas.microsoft.com/office/drawing/2014/main" id="{982F46C4-A49D-4052-8B46-9E637E4EAE96}"/>
+                <a16:creationId xmlns:a16="http://schemas.microsoft.com/office/drawing/2014/main" id="{EC0AFF95-CF90-4412-84F0-3638DF98B081}"/>
               </a:ext>
             </a:extLst>
           </p:cNvPr>
@@ -16994,7 +17029,7 @@
           <p:cNvPr id="23" name="">
             <a:extLst xmlns:a="http://schemas.openxmlformats.org/drawingml/2006/main">
               <a:ext uri="{FF2B5EF4-FFF2-40B4-BE49-F238E27FC236}">
-                <a16:creationId xmlns:a16="http://schemas.microsoft.com/office/drawing/2014/main" id="{2279EEE7-69BA-4DD2-8065-2527639EE12F}"/>
+                <a16:creationId xmlns:a16="http://schemas.microsoft.com/office/drawing/2014/main" id="{83B8DA5D-7DA2-45F8-822E-4F26A1A697E2}"/>
               </a:ext>
             </a:extLst>
           </p:cNvPr>
@@ -17027,7 +17062,7 @@
           <p:cNvPr id="24" name="">
             <a:extLst xmlns:a="http://schemas.openxmlformats.org/drawingml/2006/main">
               <a:ext uri="{FF2B5EF4-FFF2-40B4-BE49-F238E27FC236}">
-                <a16:creationId xmlns:a16="http://schemas.microsoft.com/office/drawing/2014/main" id="{5093F998-D706-4286-B930-B175A9284CE2}"/>
+                <a16:creationId xmlns:a16="http://schemas.microsoft.com/office/drawing/2014/main" id="{174756C8-F3DC-4ADC-B5A8-D801F2881B1A}"/>
               </a:ext>
             </a:extLst>
           </p:cNvPr>
@@ -17089,7 +17124,7 @@
           <p:cNvPr id="25" name="footer-rule-4">
             <a:extLst xmlns:a="http://schemas.openxmlformats.org/drawingml/2006/main">
               <a:ext uri="{FF2B5EF4-FFF2-40B4-BE49-F238E27FC236}">
-                <a16:creationId xmlns:a16="http://schemas.microsoft.com/office/drawing/2014/main" id="{13E9F5DF-08AB-4F2E-8A7E-33B6F8505B06}"/>
+                <a16:creationId xmlns:a16="http://schemas.microsoft.com/office/drawing/2014/main" id="{3F498152-BBAC-4019-9E43-83A9D8AD7381}"/>
               </a:ext>
             </a:extLst>
           </p:cNvPr>
@@ -17120,7 +17155,7 @@
           <p:cNvPr id="26" name="footer-label-4">
             <a:extLst xmlns:a="http://schemas.openxmlformats.org/drawingml/2006/main">
               <a:ext uri="{FF2B5EF4-FFF2-40B4-BE49-F238E27FC236}">
-                <a16:creationId xmlns:a16="http://schemas.microsoft.com/office/drawing/2014/main" id="{F9500E04-6055-4334-B76F-717D510AFF6B}"/>
+                <a16:creationId xmlns:a16="http://schemas.microsoft.com/office/drawing/2014/main" id="{0E5E749E-7244-4225-9F62-E66D09FB16B5}"/>
               </a:ext>
             </a:extLst>
           </p:cNvPr>
@@ -17182,7 +17217,7 @@
           <p:cNvPr id="27" name="footer-page-4">
             <a:extLst xmlns:a="http://schemas.openxmlformats.org/drawingml/2006/main">
               <a:ext uri="{FF2B5EF4-FFF2-40B4-BE49-F238E27FC236}">
-                <a16:creationId xmlns:a16="http://schemas.microsoft.com/office/drawing/2014/main" id="{CFE72236-1834-44AE-9EC1-F23C82D945A3}"/>
+                <a16:creationId xmlns:a16="http://schemas.microsoft.com/office/drawing/2014/main" id="{E7CF2CB1-9957-4BA1-9A81-3A83AE46F6DD}"/>
               </a:ext>
             </a:extLst>
           </p:cNvPr>
@@ -17242,7 +17277,7 @@
     </p:spTree>
     <p:extLst>
       <p:ext uri="{BB962C8B-B14F-4D97-AF65-F5344CB8AC3E}">
-        <p14:creationId xmlns:p14="http://schemas.microsoft.com/office/powerpoint/2010/main" val="425403206"/>
+        <p14:creationId xmlns:p14="http://schemas.microsoft.com/office/powerpoint/2010/main" val="2099543323"/>
       </p:ext>
     </p:extLst>
   </p:cSld>
@@ -17273,7 +17308,7 @@
           <p:cNvPr id="31" name="side-accent-5">
             <a:extLst xmlns:a="http://schemas.openxmlformats.org/drawingml/2006/main">
               <a:ext uri="{FF2B5EF4-FFF2-40B4-BE49-F238E27FC236}">
-                <a16:creationId xmlns:a16="http://schemas.microsoft.com/office/drawing/2014/main" id="{7D908226-3A03-44B6-B7AA-AAF3272EFDBE}"/>
+                <a16:creationId xmlns:a16="http://schemas.microsoft.com/office/drawing/2014/main" id="{50D8DD8C-5DEC-4D4F-96B9-20023564F512}"/>
               </a:ext>
             </a:extLst>
           </p:cNvPr>
@@ -17304,7 +17339,7 @@
           <p:cNvPr id="2" name="kicker-5">
             <a:extLst xmlns:a="http://schemas.openxmlformats.org/drawingml/2006/main">
               <a:ext uri="{FF2B5EF4-FFF2-40B4-BE49-F238E27FC236}">
-                <a16:creationId xmlns:a16="http://schemas.microsoft.com/office/drawing/2014/main" id="{3D89A5CB-B5A4-4A07-8178-FF819FEA9D86}"/>
+                <a16:creationId xmlns:a16="http://schemas.microsoft.com/office/drawing/2014/main" id="{AD01D278-1E1A-4CAE-AD52-B446C4ECEDFD}"/>
               </a:ext>
             </a:extLst>
           </p:cNvPr>
@@ -17366,7 +17401,7 @@
           <p:cNvPr id="3" name="title-5">
             <a:extLst xmlns:a="http://schemas.openxmlformats.org/drawingml/2006/main">
               <a:ext uri="{FF2B5EF4-FFF2-40B4-BE49-F238E27FC236}">
-                <a16:creationId xmlns:a16="http://schemas.microsoft.com/office/drawing/2014/main" id="{E250BEF7-8025-413E-9963-CB3DBB656C41}"/>
+                <a16:creationId xmlns:a16="http://schemas.microsoft.com/office/drawing/2014/main" id="{6E7EB246-713B-4358-813B-5DB38FFADB05}"/>
               </a:ext>
             </a:extLst>
           </p:cNvPr>
@@ -17428,7 +17463,7 @@
           <p:cNvPr id="4" name="">
             <a:extLst xmlns:a="http://schemas.openxmlformats.org/drawingml/2006/main">
               <a:ext uri="{FF2B5EF4-FFF2-40B4-BE49-F238E27FC236}">
-                <a16:creationId xmlns:a16="http://schemas.microsoft.com/office/drawing/2014/main" id="{10646622-FA9B-4B57-8727-6866335F7ABF}"/>
+                <a16:creationId xmlns:a16="http://schemas.microsoft.com/office/drawing/2014/main" id="{BC4B014E-64E2-4C87-BF72-C255965710F4}"/>
               </a:ext>
             </a:extLst>
           </p:cNvPr>
@@ -17490,7 +17525,7 @@
           <p:cNvPr id="5" name="workflow-line">
             <a:extLst xmlns:a="http://schemas.openxmlformats.org/drawingml/2006/main">
               <a:ext uri="{FF2B5EF4-FFF2-40B4-BE49-F238E27FC236}">
-                <a16:creationId xmlns:a16="http://schemas.microsoft.com/office/drawing/2014/main" id="{C0E402A0-DCBF-41E1-8835-414689C4C407}"/>
+                <a16:creationId xmlns:a16="http://schemas.microsoft.com/office/drawing/2014/main" id="{CD471E77-2926-4462-B3B7-D668B37C89B3}"/>
               </a:ext>
             </a:extLst>
           </p:cNvPr>
@@ -17521,7 +17556,7 @@
           <p:cNvPr id="6" name="workflow-arrow">
             <a:extLst xmlns:a="http://schemas.openxmlformats.org/drawingml/2006/main">
               <a:ext uri="{FF2B5EF4-FFF2-40B4-BE49-F238E27FC236}">
-                <a16:creationId xmlns:a16="http://schemas.microsoft.com/office/drawing/2014/main" id="{5EE5ADE9-22DA-4941-A6D5-7744198F621B}"/>
+                <a16:creationId xmlns:a16="http://schemas.microsoft.com/office/drawing/2014/main" id="{C50F2337-73CF-472D-BD19-DD3D1427A6F6}"/>
               </a:ext>
             </a:extLst>
           </p:cNvPr>
@@ -17552,7 +17587,7 @@
           <p:cNvPr id="7" name="">
             <a:extLst xmlns:a="http://schemas.openxmlformats.org/drawingml/2006/main">
               <a:ext uri="{FF2B5EF4-FFF2-40B4-BE49-F238E27FC236}">
-                <a16:creationId xmlns:a16="http://schemas.microsoft.com/office/drawing/2014/main" id="{8B4B60C4-A827-48A9-9ADF-8FA30723432D}"/>
+                <a16:creationId xmlns:a16="http://schemas.microsoft.com/office/drawing/2014/main" id="{8AAA66E9-E505-4B8A-AC2F-8E746800A8CF}"/>
               </a:ext>
             </a:extLst>
           </p:cNvPr>
@@ -17583,7 +17618,7 @@
           <p:cNvPr id="8" name="">
             <a:extLst xmlns:a="http://schemas.openxmlformats.org/drawingml/2006/main">
               <a:ext uri="{FF2B5EF4-FFF2-40B4-BE49-F238E27FC236}">
-                <a16:creationId xmlns:a16="http://schemas.microsoft.com/office/drawing/2014/main" id="{7D1842D8-2599-4E95-A4D4-8F09FF272D14}"/>
+                <a16:creationId xmlns:a16="http://schemas.microsoft.com/office/drawing/2014/main" id="{147C6187-2F4E-4F73-8A01-553AE8488EB6}"/>
               </a:ext>
             </a:extLst>
           </p:cNvPr>
@@ -17645,7 +17680,7 @@
           <p:cNvPr id="9" name="">
             <a:extLst xmlns:a="http://schemas.openxmlformats.org/drawingml/2006/main">
               <a:ext uri="{FF2B5EF4-FFF2-40B4-BE49-F238E27FC236}">
-                <a16:creationId xmlns:a16="http://schemas.microsoft.com/office/drawing/2014/main" id="{890DC9B5-13EB-4AF4-AA3D-B1F11C9C65AA}"/>
+                <a16:creationId xmlns:a16="http://schemas.microsoft.com/office/drawing/2014/main" id="{E7A33A2B-50C3-4BD0-A80C-A2052D956AF6}"/>
               </a:ext>
             </a:extLst>
           </p:cNvPr>
@@ -17707,7 +17742,7 @@
           <p:cNvPr id="10" name="">
             <a:extLst xmlns:a="http://schemas.openxmlformats.org/drawingml/2006/main">
               <a:ext uri="{FF2B5EF4-FFF2-40B4-BE49-F238E27FC236}">
-                <a16:creationId xmlns:a16="http://schemas.microsoft.com/office/drawing/2014/main" id="{40877F88-3BB4-4E3A-B0CB-1F9CF35989E3}"/>
+                <a16:creationId xmlns:a16="http://schemas.microsoft.com/office/drawing/2014/main" id="{8FC43158-4413-4CB8-BCDD-BB756CDA91A6}"/>
               </a:ext>
             </a:extLst>
           </p:cNvPr>
@@ -17769,7 +17804,7 @@
           <p:cNvPr id="11" name="">
             <a:extLst xmlns:a="http://schemas.openxmlformats.org/drawingml/2006/main">
               <a:ext uri="{FF2B5EF4-FFF2-40B4-BE49-F238E27FC236}">
-                <a16:creationId xmlns:a16="http://schemas.microsoft.com/office/drawing/2014/main" id="{CAA296BB-897B-4CC5-BBC3-489DE2F05EDE}"/>
+                <a16:creationId xmlns:a16="http://schemas.microsoft.com/office/drawing/2014/main" id="{AF3396FC-3F32-4875-9409-BBF76E942455}"/>
               </a:ext>
             </a:extLst>
           </p:cNvPr>
@@ -17800,7 +17835,7 @@
           <p:cNvPr id="12" name="">
             <a:extLst xmlns:a="http://schemas.openxmlformats.org/drawingml/2006/main">
               <a:ext uri="{FF2B5EF4-FFF2-40B4-BE49-F238E27FC236}">
-                <a16:creationId xmlns:a16="http://schemas.microsoft.com/office/drawing/2014/main" id="{80977E22-FB6C-4392-8846-A85CAD940F54}"/>
+                <a16:creationId xmlns:a16="http://schemas.microsoft.com/office/drawing/2014/main" id="{5E11052E-8271-40A3-880C-C50902500991}"/>
               </a:ext>
             </a:extLst>
           </p:cNvPr>
@@ -17862,7 +17897,7 @@
           <p:cNvPr id="13" name="">
             <a:extLst xmlns:a="http://schemas.openxmlformats.org/drawingml/2006/main">
               <a:ext uri="{FF2B5EF4-FFF2-40B4-BE49-F238E27FC236}">
-                <a16:creationId xmlns:a16="http://schemas.microsoft.com/office/drawing/2014/main" id="{0F7F06EE-DB40-4978-B782-52E1BFFF0E4E}"/>
+                <a16:creationId xmlns:a16="http://schemas.microsoft.com/office/drawing/2014/main" id="{E5C2E01D-A0C8-4BCC-A472-2980C3554306}"/>
               </a:ext>
             </a:extLst>
           </p:cNvPr>
@@ -17924,7 +17959,7 @@
           <p:cNvPr id="14" name="">
             <a:extLst xmlns:a="http://schemas.openxmlformats.org/drawingml/2006/main">
               <a:ext uri="{FF2B5EF4-FFF2-40B4-BE49-F238E27FC236}">
-                <a16:creationId xmlns:a16="http://schemas.microsoft.com/office/drawing/2014/main" id="{496745F7-A4EC-40E9-95DB-E116784B5211}"/>
+                <a16:creationId xmlns:a16="http://schemas.microsoft.com/office/drawing/2014/main" id="{D8EF48B6-CCA8-432B-BFC2-47FC7F89601B}"/>
               </a:ext>
             </a:extLst>
           </p:cNvPr>
@@ -17986,7 +18021,7 @@
           <p:cNvPr id="15" name="">
             <a:extLst xmlns:a="http://schemas.openxmlformats.org/drawingml/2006/main">
               <a:ext uri="{FF2B5EF4-FFF2-40B4-BE49-F238E27FC236}">
-                <a16:creationId xmlns:a16="http://schemas.microsoft.com/office/drawing/2014/main" id="{3BE09458-5AA6-48B8-B204-A3A3284EF8D5}"/>
+                <a16:creationId xmlns:a16="http://schemas.microsoft.com/office/drawing/2014/main" id="{CAA9FB9F-AF02-4905-80AB-868E34476634}"/>
               </a:ext>
             </a:extLst>
           </p:cNvPr>
@@ -18017,7 +18052,7 @@
           <p:cNvPr id="16" name="">
             <a:extLst xmlns:a="http://schemas.openxmlformats.org/drawingml/2006/main">
               <a:ext uri="{FF2B5EF4-FFF2-40B4-BE49-F238E27FC236}">
-                <a16:creationId xmlns:a16="http://schemas.microsoft.com/office/drawing/2014/main" id="{CC7AE8C6-C621-4962-B3B1-688728B29683}"/>
+                <a16:creationId xmlns:a16="http://schemas.microsoft.com/office/drawing/2014/main" id="{38DBDED9-0354-4C32-9356-EE273ED74CAA}"/>
               </a:ext>
             </a:extLst>
           </p:cNvPr>
@@ -18079,7 +18114,7 @@
           <p:cNvPr id="17" name="">
             <a:extLst xmlns:a="http://schemas.openxmlformats.org/drawingml/2006/main">
               <a:ext uri="{FF2B5EF4-FFF2-40B4-BE49-F238E27FC236}">
-                <a16:creationId xmlns:a16="http://schemas.microsoft.com/office/drawing/2014/main" id="{E2C15303-77C1-4E72-9D69-02C8A913EB3F}"/>
+                <a16:creationId xmlns:a16="http://schemas.microsoft.com/office/drawing/2014/main" id="{66A18AC7-BE09-40DD-8EFF-EEC24A567829}"/>
               </a:ext>
             </a:extLst>
           </p:cNvPr>
@@ -18141,7 +18176,7 @@
           <p:cNvPr id="18" name="">
             <a:extLst xmlns:a="http://schemas.openxmlformats.org/drawingml/2006/main">
               <a:ext uri="{FF2B5EF4-FFF2-40B4-BE49-F238E27FC236}">
-                <a16:creationId xmlns:a16="http://schemas.microsoft.com/office/drawing/2014/main" id="{7884829E-4829-4882-85FA-0E553006237E}"/>
+                <a16:creationId xmlns:a16="http://schemas.microsoft.com/office/drawing/2014/main" id="{0B789A31-87EB-4322-879A-90E40925C580}"/>
               </a:ext>
             </a:extLst>
           </p:cNvPr>
@@ -18203,7 +18238,7 @@
           <p:cNvPr id="19" name="">
             <a:extLst xmlns:a="http://schemas.openxmlformats.org/drawingml/2006/main">
               <a:ext uri="{FF2B5EF4-FFF2-40B4-BE49-F238E27FC236}">
-                <a16:creationId xmlns:a16="http://schemas.microsoft.com/office/drawing/2014/main" id="{9012738C-6E89-4093-B4BB-7C2C034CCBD8}"/>
+                <a16:creationId xmlns:a16="http://schemas.microsoft.com/office/drawing/2014/main" id="{5147887C-5AEB-44CE-A06A-8887645A9382}"/>
               </a:ext>
             </a:extLst>
           </p:cNvPr>
@@ -18234,7 +18269,7 @@
           <p:cNvPr id="20" name="">
             <a:extLst xmlns:a="http://schemas.openxmlformats.org/drawingml/2006/main">
               <a:ext uri="{FF2B5EF4-FFF2-40B4-BE49-F238E27FC236}">
-                <a16:creationId xmlns:a16="http://schemas.microsoft.com/office/drawing/2014/main" id="{EEC85B4B-D162-429B-B32B-F503278C91D2}"/>
+                <a16:creationId xmlns:a16="http://schemas.microsoft.com/office/drawing/2014/main" id="{95582176-A0A5-4C21-8E47-8952AFCC9A53}"/>
               </a:ext>
             </a:extLst>
           </p:cNvPr>
@@ -18296,7 +18331,7 @@
           <p:cNvPr id="21" name="">
             <a:extLst xmlns:a="http://schemas.openxmlformats.org/drawingml/2006/main">
               <a:ext uri="{FF2B5EF4-FFF2-40B4-BE49-F238E27FC236}">
-                <a16:creationId xmlns:a16="http://schemas.microsoft.com/office/drawing/2014/main" id="{E306BE5F-32D9-4043-B4D0-D86849422D93}"/>
+                <a16:creationId xmlns:a16="http://schemas.microsoft.com/office/drawing/2014/main" id="{90F192A0-CFE5-4B0A-9BF1-9E4BF02FB8D1}"/>
               </a:ext>
             </a:extLst>
           </p:cNvPr>
@@ -18358,7 +18393,7 @@
           <p:cNvPr id="22" name="">
             <a:extLst xmlns:a="http://schemas.openxmlformats.org/drawingml/2006/main">
               <a:ext uri="{FF2B5EF4-FFF2-40B4-BE49-F238E27FC236}">
-                <a16:creationId xmlns:a16="http://schemas.microsoft.com/office/drawing/2014/main" id="{E13B1B63-E056-44B4-B353-BED74824573D}"/>
+                <a16:creationId xmlns:a16="http://schemas.microsoft.com/office/drawing/2014/main" id="{A0674B75-82B4-4937-BB1C-A4E36151FCD9}"/>
               </a:ext>
             </a:extLst>
           </p:cNvPr>
@@ -18420,7 +18455,7 @@
           <p:cNvPr id="23" name="">
             <a:extLst xmlns:a="http://schemas.openxmlformats.org/drawingml/2006/main">
               <a:ext uri="{FF2B5EF4-FFF2-40B4-BE49-F238E27FC236}">
-                <a16:creationId xmlns:a16="http://schemas.microsoft.com/office/drawing/2014/main" id="{0160196F-0995-453F-8FF5-95449F988223}"/>
+                <a16:creationId xmlns:a16="http://schemas.microsoft.com/office/drawing/2014/main" id="{839D17F7-163C-4A97-AF5B-EBD098668E33}"/>
               </a:ext>
             </a:extLst>
           </p:cNvPr>
@@ -18451,7 +18486,7 @@
           <p:cNvPr id="24" name="">
             <a:extLst xmlns:a="http://schemas.openxmlformats.org/drawingml/2006/main">
               <a:ext uri="{FF2B5EF4-FFF2-40B4-BE49-F238E27FC236}">
-                <a16:creationId xmlns:a16="http://schemas.microsoft.com/office/drawing/2014/main" id="{7957961A-1027-4D73-90EA-833DEE12FDF3}"/>
+                <a16:creationId xmlns:a16="http://schemas.microsoft.com/office/drawing/2014/main" id="{D3C29DC6-E286-4B48-B5A6-1F2F28DBB8B2}"/>
               </a:ext>
             </a:extLst>
           </p:cNvPr>
@@ -18513,7 +18548,7 @@
           <p:cNvPr id="25" name="">
             <a:extLst xmlns:a="http://schemas.openxmlformats.org/drawingml/2006/main">
               <a:ext uri="{FF2B5EF4-FFF2-40B4-BE49-F238E27FC236}">
-                <a16:creationId xmlns:a16="http://schemas.microsoft.com/office/drawing/2014/main" id="{7A3238B4-0537-4293-B90F-C28AA7DCF2B7}"/>
+                <a16:creationId xmlns:a16="http://schemas.microsoft.com/office/drawing/2014/main" id="{6E28062A-34BA-45E3-A4D4-B0EDA5611464}"/>
               </a:ext>
             </a:extLst>
           </p:cNvPr>
@@ -18575,7 +18610,7 @@
           <p:cNvPr id="26" name="">
             <a:extLst xmlns:a="http://schemas.openxmlformats.org/drawingml/2006/main">
               <a:ext uri="{FF2B5EF4-FFF2-40B4-BE49-F238E27FC236}">
-                <a16:creationId xmlns:a16="http://schemas.microsoft.com/office/drawing/2014/main" id="{613D599A-83DB-47A3-ADD8-1A35271FF775}"/>
+                <a16:creationId xmlns:a16="http://schemas.microsoft.com/office/drawing/2014/main" id="{64FAE24E-8D46-4F15-8717-568E7C467685}"/>
               </a:ext>
             </a:extLst>
           </p:cNvPr>
@@ -18637,7 +18672,7 @@
           <p:cNvPr id="27" name="">
             <a:extLst xmlns:a="http://schemas.openxmlformats.org/drawingml/2006/main">
               <a:ext uri="{FF2B5EF4-FFF2-40B4-BE49-F238E27FC236}">
-                <a16:creationId xmlns:a16="http://schemas.microsoft.com/office/drawing/2014/main" id="{2B36BF3B-9D0B-4C37-8C99-7075EFA0AE0D}"/>
+                <a16:creationId xmlns:a16="http://schemas.microsoft.com/office/drawing/2014/main" id="{FBF819B9-0008-4A50-85B2-1FAD162A07F0}"/>
               </a:ext>
             </a:extLst>
           </p:cNvPr>
@@ -18699,7 +18734,7 @@
           <p:cNvPr id="28" name="footer-rule-5">
             <a:extLst xmlns:a="http://schemas.openxmlformats.org/drawingml/2006/main">
               <a:ext uri="{FF2B5EF4-FFF2-40B4-BE49-F238E27FC236}">
-                <a16:creationId xmlns:a16="http://schemas.microsoft.com/office/drawing/2014/main" id="{8F404831-D043-45FF-8CA6-E8E444936DE4}"/>
+                <a16:creationId xmlns:a16="http://schemas.microsoft.com/office/drawing/2014/main" id="{CDC72168-0026-433C-9FC0-3418C16B9491}"/>
               </a:ext>
             </a:extLst>
           </p:cNvPr>
@@ -18730,7 +18765,7 @@
           <p:cNvPr id="29" name="footer-label-5">
             <a:extLst xmlns:a="http://schemas.openxmlformats.org/drawingml/2006/main">
               <a:ext uri="{FF2B5EF4-FFF2-40B4-BE49-F238E27FC236}">
-                <a16:creationId xmlns:a16="http://schemas.microsoft.com/office/drawing/2014/main" id="{36AFDBB6-7488-4131-A9C8-DBC7DB8BED05}"/>
+                <a16:creationId xmlns:a16="http://schemas.microsoft.com/office/drawing/2014/main" id="{CD5073D6-0B2C-4508-8894-EE19AEE18F34}"/>
               </a:ext>
             </a:extLst>
           </p:cNvPr>
@@ -18792,7 +18827,7 @@
           <p:cNvPr id="30" name="footer-page-5">
             <a:extLst xmlns:a="http://schemas.openxmlformats.org/drawingml/2006/main">
               <a:ext uri="{FF2B5EF4-FFF2-40B4-BE49-F238E27FC236}">
-                <a16:creationId xmlns:a16="http://schemas.microsoft.com/office/drawing/2014/main" id="{FC784354-8B0D-492D-B4F1-CF31929CE2CA}"/>
+                <a16:creationId xmlns:a16="http://schemas.microsoft.com/office/drawing/2014/main" id="{92F6D8AF-997C-4B95-9426-FF7ED3EDBADD}"/>
               </a:ext>
             </a:extLst>
           </p:cNvPr>
@@ -18852,7 +18887,7 @@
     </p:spTree>
     <p:extLst>
       <p:ext uri="{BB962C8B-B14F-4D97-AF65-F5344CB8AC3E}">
-        <p14:creationId xmlns:p14="http://schemas.microsoft.com/office/powerpoint/2010/main" val="564377881"/>
+        <p14:creationId xmlns:p14="http://schemas.microsoft.com/office/powerpoint/2010/main" val="1857442748"/>
       </p:ext>
     </p:extLst>
   </p:cSld>
@@ -18883,7 +18918,7 @@
           <p:cNvPr id="22" name="side-accent-6">
             <a:extLst xmlns:a="http://schemas.openxmlformats.org/drawingml/2006/main">
               <a:ext uri="{FF2B5EF4-FFF2-40B4-BE49-F238E27FC236}">
-                <a16:creationId xmlns:a16="http://schemas.microsoft.com/office/drawing/2014/main" id="{48926D11-3FE8-4BF4-8951-6ED60266D011}"/>
+                <a16:creationId xmlns:a16="http://schemas.microsoft.com/office/drawing/2014/main" id="{2D27267A-F148-44F9-AFED-C77CE076FEEB}"/>
               </a:ext>
             </a:extLst>
           </p:cNvPr>
@@ -18914,7 +18949,7 @@
           <p:cNvPr id="2" name="kicker-6">
             <a:extLst xmlns:a="http://schemas.openxmlformats.org/drawingml/2006/main">
               <a:ext uri="{FF2B5EF4-FFF2-40B4-BE49-F238E27FC236}">
-                <a16:creationId xmlns:a16="http://schemas.microsoft.com/office/drawing/2014/main" id="{00B1575E-AA41-434E-BE74-6F63CC5EE323}"/>
+                <a16:creationId xmlns:a16="http://schemas.microsoft.com/office/drawing/2014/main" id="{F5C1D67F-0769-4E69-B640-67AF55294B59}"/>
               </a:ext>
             </a:extLst>
           </p:cNvPr>
@@ -18976,7 +19011,7 @@
           <p:cNvPr id="3" name="title-6">
             <a:extLst xmlns:a="http://schemas.openxmlformats.org/drawingml/2006/main">
               <a:ext uri="{FF2B5EF4-FFF2-40B4-BE49-F238E27FC236}">
-                <a16:creationId xmlns:a16="http://schemas.microsoft.com/office/drawing/2014/main" id="{0623E43D-C193-4915-A3CF-4C3E6CD1C68B}"/>
+                <a16:creationId xmlns:a16="http://schemas.microsoft.com/office/drawing/2014/main" id="{D6159078-8765-479E-BD3D-C5E4B44CDB93}"/>
               </a:ext>
             </a:extLst>
           </p:cNvPr>
@@ -19038,7 +19073,7 @@
           <p:cNvPr id="4" name="">
             <a:extLst xmlns:a="http://schemas.openxmlformats.org/drawingml/2006/main">
               <a:ext uri="{FF2B5EF4-FFF2-40B4-BE49-F238E27FC236}">
-                <a16:creationId xmlns:a16="http://schemas.microsoft.com/office/drawing/2014/main" id="{E9B91710-7441-49C8-AF27-DDDFCEB589E2}"/>
+                <a16:creationId xmlns:a16="http://schemas.microsoft.com/office/drawing/2014/main" id="{E58AC566-021D-45D6-9A8E-3FAB118E833A}"/>
               </a:ext>
             </a:extLst>
           </p:cNvPr>
@@ -19090,7 +19125,7 @@
                 <a:ea typeface="Tahoma"/>
                 <a:cs typeface="Tahoma"/>
               </a:rPr>
-              <a:t>คุณเป็นเจ้าของข้อมูลผลกิจกรรมในขั้นแรก คะแนนที่น่าเชื่อถือต้องมีรายละเอียดและหลักฐานรองรับ</a:t>
+              <a:t>ผู้รับการประเมินกรอกผลกิจกรรมและแนบหลักฐานให้ครบ เพื่อให้ผู้ประเมินตรวจข้อมูลได้ชัดเจน</a:t>
             </a:r>
           </a:p>
         </p:txBody>
@@ -19100,7 +19135,7 @@
           <p:cNvPr id="5" name="">
             <a:extLst xmlns:a="http://schemas.openxmlformats.org/drawingml/2006/main">
               <a:ext uri="{FF2B5EF4-FFF2-40B4-BE49-F238E27FC236}">
-                <a16:creationId xmlns:a16="http://schemas.microsoft.com/office/drawing/2014/main" id="{A7FA5491-A57B-45A4-99A4-D984DAE828BD}"/>
+                <a16:creationId xmlns:a16="http://schemas.microsoft.com/office/drawing/2014/main" id="{63E7B8F1-62C7-4A07-BF77-294F1E2C1ED2}"/>
               </a:ext>
             </a:extLst>
           </p:cNvPr>
@@ -19162,7 +19197,7 @@
           <p:cNvPr id="6" name="">
             <a:extLst xmlns:a="http://schemas.openxmlformats.org/drawingml/2006/main">
               <a:ext uri="{FF2B5EF4-FFF2-40B4-BE49-F238E27FC236}">
-                <a16:creationId xmlns:a16="http://schemas.microsoft.com/office/drawing/2014/main" id="{33BB7B60-FA48-44FC-B3EE-E5E8FB8A4AF4}"/>
+                <a16:creationId xmlns:a16="http://schemas.microsoft.com/office/drawing/2014/main" id="{899F5D1D-42A2-43A0-B95C-E90654632E79}"/>
               </a:ext>
             </a:extLst>
           </p:cNvPr>
@@ -19224,7 +19259,7 @@
           <p:cNvPr id="7" name="">
             <a:extLst xmlns:a="http://schemas.openxmlformats.org/drawingml/2006/main">
               <a:ext uri="{FF2B5EF4-FFF2-40B4-BE49-F238E27FC236}">
-                <a16:creationId xmlns:a16="http://schemas.microsoft.com/office/drawing/2014/main" id="{D71FB4C6-2F7A-414E-96FA-EE57990807C4}"/>
+                <a16:creationId xmlns:a16="http://schemas.microsoft.com/office/drawing/2014/main" id="{9EE6955A-1F03-40E3-9926-A89442158F9F}"/>
               </a:ext>
             </a:extLst>
           </p:cNvPr>
@@ -19255,7 +19290,7 @@
           <p:cNvPr id="8" name="">
             <a:extLst xmlns:a="http://schemas.openxmlformats.org/drawingml/2006/main">
               <a:ext uri="{FF2B5EF4-FFF2-40B4-BE49-F238E27FC236}">
-                <a16:creationId xmlns:a16="http://schemas.microsoft.com/office/drawing/2014/main" id="{97046D05-DB82-44A6-ABBB-ECF3EFCB613F}"/>
+                <a16:creationId xmlns:a16="http://schemas.microsoft.com/office/drawing/2014/main" id="{2680FA90-E348-4EA6-8992-2F1CD935396E}"/>
               </a:ext>
             </a:extLst>
           </p:cNvPr>
@@ -19344,7 +19379,7 @@
           <p:cNvPr id="9" name="">
             <a:extLst xmlns:a="http://schemas.openxmlformats.org/drawingml/2006/main">
               <a:ext uri="{FF2B5EF4-FFF2-40B4-BE49-F238E27FC236}">
-                <a16:creationId xmlns:a16="http://schemas.microsoft.com/office/drawing/2014/main" id="{2CB30A76-047D-47C2-977A-C1C4A6CF5353}"/>
+                <a16:creationId xmlns:a16="http://schemas.microsoft.com/office/drawing/2014/main" id="{5F948735-9EB5-4E51-9561-4F84E36A97B9}"/>
               </a:ext>
             </a:extLst>
           </p:cNvPr>
@@ -19406,7 +19441,7 @@
           <p:cNvPr id="10" name="">
             <a:extLst xmlns:a="http://schemas.openxmlformats.org/drawingml/2006/main">
               <a:ext uri="{FF2B5EF4-FFF2-40B4-BE49-F238E27FC236}">
-                <a16:creationId xmlns:a16="http://schemas.microsoft.com/office/drawing/2014/main" id="{19683D37-10D3-4A02-B36F-28AFD24C50AD}"/>
+                <a16:creationId xmlns:a16="http://schemas.microsoft.com/office/drawing/2014/main" id="{349C3C26-42E5-4EC1-800C-E7D11BC6D5B4}"/>
               </a:ext>
             </a:extLst>
           </p:cNvPr>
@@ -19468,7 +19503,7 @@
           <p:cNvPr id="11" name="">
             <a:extLst xmlns:a="http://schemas.openxmlformats.org/drawingml/2006/main">
               <a:ext uri="{FF2B5EF4-FFF2-40B4-BE49-F238E27FC236}">
-                <a16:creationId xmlns:a16="http://schemas.microsoft.com/office/drawing/2014/main" id="{53DF27DF-0CCE-40FA-A9A5-04F613A7C84C}"/>
+                <a16:creationId xmlns:a16="http://schemas.microsoft.com/office/drawing/2014/main" id="{D886C614-5FBD-45B5-BB87-0688AC41C931}"/>
               </a:ext>
             </a:extLst>
           </p:cNvPr>
@@ -19499,7 +19534,7 @@
           <p:cNvPr id="12" name="">
             <a:extLst xmlns:a="http://schemas.openxmlformats.org/drawingml/2006/main">
               <a:ext uri="{FF2B5EF4-FFF2-40B4-BE49-F238E27FC236}">
-                <a16:creationId xmlns:a16="http://schemas.microsoft.com/office/drawing/2014/main" id="{283D6F38-103A-44A4-9BC2-7CA1759F73C9}"/>
+                <a16:creationId xmlns:a16="http://schemas.microsoft.com/office/drawing/2014/main" id="{C2E645D2-D3E8-484F-98ED-B8C3D1164325}"/>
               </a:ext>
             </a:extLst>
           </p:cNvPr>
@@ -19588,7 +19623,7 @@
           <p:cNvPr id="13" name="">
             <a:extLst xmlns:a="http://schemas.openxmlformats.org/drawingml/2006/main">
               <a:ext uri="{FF2B5EF4-FFF2-40B4-BE49-F238E27FC236}">
-                <a16:creationId xmlns:a16="http://schemas.microsoft.com/office/drawing/2014/main" id="{D1FAC5A8-6DC4-4BF2-BE6D-2EBF1FA78359}"/>
+                <a16:creationId xmlns:a16="http://schemas.microsoft.com/office/drawing/2014/main" id="{27974FD9-18FD-4E08-9020-59CB81DC3C68}"/>
               </a:ext>
             </a:extLst>
           </p:cNvPr>
@@ -19650,7 +19685,7 @@
           <p:cNvPr id="14" name="">
             <a:extLst xmlns:a="http://schemas.openxmlformats.org/drawingml/2006/main">
               <a:ext uri="{FF2B5EF4-FFF2-40B4-BE49-F238E27FC236}">
-                <a16:creationId xmlns:a16="http://schemas.microsoft.com/office/drawing/2014/main" id="{05597145-8FAC-460D-9420-DBF23A8BCA27}"/>
+                <a16:creationId xmlns:a16="http://schemas.microsoft.com/office/drawing/2014/main" id="{055CE6AC-462F-4F5B-8931-4EE0A975AC5C}"/>
               </a:ext>
             </a:extLst>
           </p:cNvPr>
@@ -19712,7 +19747,7 @@
           <p:cNvPr id="15" name="">
             <a:extLst xmlns:a="http://schemas.openxmlformats.org/drawingml/2006/main">
               <a:ext uri="{FF2B5EF4-FFF2-40B4-BE49-F238E27FC236}">
-                <a16:creationId xmlns:a16="http://schemas.microsoft.com/office/drawing/2014/main" id="{882DFF7A-8956-40E8-A4A3-8B6BA0B86EF4}"/>
+                <a16:creationId xmlns:a16="http://schemas.microsoft.com/office/drawing/2014/main" id="{742ABEA6-C73D-4DA4-BDA3-4766F8DB0537}"/>
               </a:ext>
             </a:extLst>
           </p:cNvPr>
@@ -19743,7 +19778,7 @@
           <p:cNvPr id="16" name="">
             <a:extLst xmlns:a="http://schemas.openxmlformats.org/drawingml/2006/main">
               <a:ext uri="{FF2B5EF4-FFF2-40B4-BE49-F238E27FC236}">
-                <a16:creationId xmlns:a16="http://schemas.microsoft.com/office/drawing/2014/main" id="{A0259892-BAEF-4F20-9D0F-FEDD75C3D649}"/>
+                <a16:creationId xmlns:a16="http://schemas.microsoft.com/office/drawing/2014/main" id="{A3F22CEC-97A7-4529-8D16-8B8CE8462F95}"/>
               </a:ext>
             </a:extLst>
           </p:cNvPr>
@@ -19832,7 +19867,7 @@
           <p:cNvPr id="17" name="">
             <a:extLst xmlns:a="http://schemas.openxmlformats.org/drawingml/2006/main">
               <a:ext uri="{FF2B5EF4-FFF2-40B4-BE49-F238E27FC236}">
-                <a16:creationId xmlns:a16="http://schemas.microsoft.com/office/drawing/2014/main" id="{ED2E0853-1499-4C79-B46D-27A446B071C3}"/>
+                <a16:creationId xmlns:a16="http://schemas.microsoft.com/office/drawing/2014/main" id="{4455DE5A-EB65-4F1D-9992-F2DB90BDEC8B}"/>
               </a:ext>
             </a:extLst>
           </p:cNvPr>
@@ -19865,7 +19900,7 @@
           <p:cNvPr id="18" name="">
             <a:extLst xmlns:a="http://schemas.openxmlformats.org/drawingml/2006/main">
               <a:ext uri="{FF2B5EF4-FFF2-40B4-BE49-F238E27FC236}">
-                <a16:creationId xmlns:a16="http://schemas.microsoft.com/office/drawing/2014/main" id="{577F9448-8AC7-43A1-BF21-639145BA4A14}"/>
+                <a16:creationId xmlns:a16="http://schemas.microsoft.com/office/drawing/2014/main" id="{656B104B-833F-4D18-921C-0CF99E3B6DD2}"/>
               </a:ext>
             </a:extLst>
           </p:cNvPr>
@@ -19877,7 +19912,7 @@
         <p:spPr>
           <a:xfrm xmlns:a="http://schemas.openxmlformats.org/drawingml/2006/main">
             <a:off x="8839200" y="1990725"/>
-            <a:ext cx="2476500" cy="533400"/>
+            <a:ext cx="2476500" cy="590550"/>
           </a:xfrm>
           <a:prstGeom xmlns:a="http://schemas.openxmlformats.org/drawingml/2006/main" prst="rect">
             <a:avLst/>
@@ -19917,7 +19952,7 @@
                 <a:ea typeface="Tahoma"/>
                 <a:cs typeface="Tahoma"/>
               </a:rPr>
-              <a:t>ผู้ประเมินคนสุดท้าย</a:t>
+              <a:t>งานเสร็จเมื่อผู้ประเมิน</a:t>
             </a:r>
           </a:p>
           <a:p xmlns:a="http://schemas.openxmlformats.org/drawingml/2006/main">
@@ -19944,7 +19979,7 @@
                 <a:ea typeface="Tahoma"/>
                 <a:cs typeface="Tahoma"/>
               </a:rPr>
-              <a:t>เป็นผู้ปิดงาน</a:t>
+              <a:t>ลำดับสุดท้ายยืนยันผล</a:t>
             </a:r>
           </a:p>
         </p:txBody>
@@ -19954,7 +19989,7 @@
           <p:cNvPr id="19" name="footer-rule-6">
             <a:extLst xmlns:a="http://schemas.openxmlformats.org/drawingml/2006/main">
               <a:ext uri="{FF2B5EF4-FFF2-40B4-BE49-F238E27FC236}">
-                <a16:creationId xmlns:a16="http://schemas.microsoft.com/office/drawing/2014/main" id="{45EEBE49-997E-4A41-9541-BEFB263C7C76}"/>
+                <a16:creationId xmlns:a16="http://schemas.microsoft.com/office/drawing/2014/main" id="{7C2A3F7A-B4AD-41B8-89DD-B8F23AD0B470}"/>
               </a:ext>
             </a:extLst>
           </p:cNvPr>
@@ -19985,7 +20020,7 @@
           <p:cNvPr id="20" name="footer-label-6">
             <a:extLst xmlns:a="http://schemas.openxmlformats.org/drawingml/2006/main">
               <a:ext uri="{FF2B5EF4-FFF2-40B4-BE49-F238E27FC236}">
-                <a16:creationId xmlns:a16="http://schemas.microsoft.com/office/drawing/2014/main" id="{5005E295-1080-437B-B36A-109E2AF387FB}"/>
+                <a16:creationId xmlns:a16="http://schemas.microsoft.com/office/drawing/2014/main" id="{B48654E5-A69B-4FAB-A4FD-054BEFEE9FD7}"/>
               </a:ext>
             </a:extLst>
           </p:cNvPr>
@@ -20047,7 +20082,7 @@
           <p:cNvPr id="21" name="footer-page-6">
             <a:extLst xmlns:a="http://schemas.openxmlformats.org/drawingml/2006/main">
               <a:ext uri="{FF2B5EF4-FFF2-40B4-BE49-F238E27FC236}">
-                <a16:creationId xmlns:a16="http://schemas.microsoft.com/office/drawing/2014/main" id="{D752CAD0-C48B-405F-86DC-CF5A9660A86C}"/>
+                <a16:creationId xmlns:a16="http://schemas.microsoft.com/office/drawing/2014/main" id="{8DAA9D32-7B0A-4037-B4A7-6FCFAEDD9488}"/>
               </a:ext>
             </a:extLst>
           </p:cNvPr>
@@ -20107,7 +20142,7 @@
     </p:spTree>
     <p:extLst>
       <p:ext uri="{BB962C8B-B14F-4D97-AF65-F5344CB8AC3E}">
-        <p14:creationId xmlns:p14="http://schemas.microsoft.com/office/powerpoint/2010/main" val="2042431873"/>
+        <p14:creationId xmlns:p14="http://schemas.microsoft.com/office/powerpoint/2010/main" val="1253196465"/>
       </p:ext>
     </p:extLst>
   </p:cSld>
@@ -20138,7 +20173,7 @@
           <p:cNvPr id="28" name="side-accent-7">
             <a:extLst xmlns:a="http://schemas.openxmlformats.org/drawingml/2006/main">
               <a:ext uri="{FF2B5EF4-FFF2-40B4-BE49-F238E27FC236}">
-                <a16:creationId xmlns:a16="http://schemas.microsoft.com/office/drawing/2014/main" id="{FA179097-084E-4318-A908-475A5B6A5A13}"/>
+                <a16:creationId xmlns:a16="http://schemas.microsoft.com/office/drawing/2014/main" id="{ECD74EB9-E3B3-4C12-9FA3-66BB9F22863F}"/>
               </a:ext>
             </a:extLst>
           </p:cNvPr>
@@ -20169,7 +20204,7 @@
           <p:cNvPr id="2" name="kicker-7">
             <a:extLst xmlns:a="http://schemas.openxmlformats.org/drawingml/2006/main">
               <a:ext uri="{FF2B5EF4-FFF2-40B4-BE49-F238E27FC236}">
-                <a16:creationId xmlns:a16="http://schemas.microsoft.com/office/drawing/2014/main" id="{23BBC077-8627-4D92-8540-ED88DEC6738B}"/>
+                <a16:creationId xmlns:a16="http://schemas.microsoft.com/office/drawing/2014/main" id="{B757731A-4062-43C3-82F7-8516C0DF7DE0}"/>
               </a:ext>
             </a:extLst>
           </p:cNvPr>
@@ -20231,7 +20266,7 @@
           <p:cNvPr id="3" name="title-7">
             <a:extLst xmlns:a="http://schemas.openxmlformats.org/drawingml/2006/main">
               <a:ext uri="{FF2B5EF4-FFF2-40B4-BE49-F238E27FC236}">
-                <a16:creationId xmlns:a16="http://schemas.microsoft.com/office/drawing/2014/main" id="{08EC3A07-5F28-4061-AF27-BEB99A81CAE5}"/>
+                <a16:creationId xmlns:a16="http://schemas.microsoft.com/office/drawing/2014/main" id="{B9A32FB4-E020-47AE-844F-A6508AFD71B8}"/>
               </a:ext>
             </a:extLst>
           </p:cNvPr>
@@ -20293,7 +20328,7 @@
           <p:cNvPr id="4" name="">
             <a:extLst xmlns:a="http://schemas.openxmlformats.org/drawingml/2006/main">
               <a:ext uri="{FF2B5EF4-FFF2-40B4-BE49-F238E27FC236}">
-                <a16:creationId xmlns:a16="http://schemas.microsoft.com/office/drawing/2014/main" id="{2B388005-708D-4D40-8B0A-0BF6D4AB562C}"/>
+                <a16:creationId xmlns:a16="http://schemas.microsoft.com/office/drawing/2014/main" id="{FD9F41BA-F28A-4221-907A-EB9A59719C90}"/>
               </a:ext>
             </a:extLst>
           </p:cNvPr>
@@ -20355,7 +20390,7 @@
           <p:cNvPr id="5" name="">
             <a:extLst xmlns:a="http://schemas.openxmlformats.org/drawingml/2006/main">
               <a:ext uri="{FF2B5EF4-FFF2-40B4-BE49-F238E27FC236}">
-                <a16:creationId xmlns:a16="http://schemas.microsoft.com/office/drawing/2014/main" id="{EDAE764E-4FF5-4ECA-B35B-6FC89BE57507}"/>
+                <a16:creationId xmlns:a16="http://schemas.microsoft.com/office/drawing/2014/main" id="{FBAE2145-071D-4EAF-BC7A-0981AB9B8DCE}"/>
               </a:ext>
             </a:extLst>
           </p:cNvPr>
@@ -20386,7 +20421,7 @@
           <p:cNvPr id="6" name="">
             <a:extLst xmlns:a="http://schemas.openxmlformats.org/drawingml/2006/main">
               <a:ext uri="{FF2B5EF4-FFF2-40B4-BE49-F238E27FC236}">
-                <a16:creationId xmlns:a16="http://schemas.microsoft.com/office/drawing/2014/main" id="{F977BABB-4F46-4ED9-AB69-15DDB505FA1C}"/>
+                <a16:creationId xmlns:a16="http://schemas.microsoft.com/office/drawing/2014/main" id="{EF2DFC4B-757F-47D5-B352-009934CDD30A}"/>
               </a:ext>
             </a:extLst>
           </p:cNvPr>
@@ -20448,7 +20483,7 @@
           <p:cNvPr id="7" name="">
             <a:extLst xmlns:a="http://schemas.openxmlformats.org/drawingml/2006/main">
               <a:ext uri="{FF2B5EF4-FFF2-40B4-BE49-F238E27FC236}">
-                <a16:creationId xmlns:a16="http://schemas.microsoft.com/office/drawing/2014/main" id="{31B76292-61CF-4CF9-B7EB-2169D00B0B63}"/>
+                <a16:creationId xmlns:a16="http://schemas.microsoft.com/office/drawing/2014/main" id="{56F58407-7AFB-4601-B90F-27BAA7EB3288}"/>
               </a:ext>
             </a:extLst>
           </p:cNvPr>
@@ -20510,7 +20545,7 @@
           <p:cNvPr id="8" name="">
             <a:extLst xmlns:a="http://schemas.openxmlformats.org/drawingml/2006/main">
               <a:ext uri="{FF2B5EF4-FFF2-40B4-BE49-F238E27FC236}">
-                <a16:creationId xmlns:a16="http://schemas.microsoft.com/office/drawing/2014/main" id="{8F8C54FF-80EE-43E6-A981-1CCC5CB62202}"/>
+                <a16:creationId xmlns:a16="http://schemas.microsoft.com/office/drawing/2014/main" id="{84CA72C7-486F-4891-AC4A-DE0C52F250DE}"/>
               </a:ext>
             </a:extLst>
           </p:cNvPr>
@@ -20572,7 +20607,7 @@
           <p:cNvPr id="9" name="">
             <a:extLst xmlns:a="http://schemas.openxmlformats.org/drawingml/2006/main">
               <a:ext uri="{FF2B5EF4-FFF2-40B4-BE49-F238E27FC236}">
-                <a16:creationId xmlns:a16="http://schemas.microsoft.com/office/drawing/2014/main" id="{043CCF9E-7E29-40E7-8BCD-3C9BD8403BA1}"/>
+                <a16:creationId xmlns:a16="http://schemas.microsoft.com/office/drawing/2014/main" id="{917BE122-35B6-4CD6-A9EB-028728985802}"/>
               </a:ext>
             </a:extLst>
           </p:cNvPr>
@@ -20603,7 +20638,7 @@
           <p:cNvPr id="10" name="">
             <a:extLst xmlns:a="http://schemas.openxmlformats.org/drawingml/2006/main">
               <a:ext uri="{FF2B5EF4-FFF2-40B4-BE49-F238E27FC236}">
-                <a16:creationId xmlns:a16="http://schemas.microsoft.com/office/drawing/2014/main" id="{37639703-01FC-4735-A58C-1A1CD82DFD04}"/>
+                <a16:creationId xmlns:a16="http://schemas.microsoft.com/office/drawing/2014/main" id="{9A665040-43DC-443A-92E7-7E783F7E929A}"/>
               </a:ext>
             </a:extLst>
           </p:cNvPr>
@@ -20665,7 +20700,7 @@
           <p:cNvPr id="11" name="">
             <a:extLst xmlns:a="http://schemas.openxmlformats.org/drawingml/2006/main">
               <a:ext uri="{FF2B5EF4-FFF2-40B4-BE49-F238E27FC236}">
-                <a16:creationId xmlns:a16="http://schemas.microsoft.com/office/drawing/2014/main" id="{3C21F4F2-9C84-4461-8951-C939CC029E9F}"/>
+                <a16:creationId xmlns:a16="http://schemas.microsoft.com/office/drawing/2014/main" id="{C8050EEE-3014-44C3-A141-8EA36C073BA5}"/>
               </a:ext>
             </a:extLst>
           </p:cNvPr>
@@ -20727,7 +20762,7 @@
           <p:cNvPr id="12" name="">
             <a:extLst xmlns:a="http://schemas.openxmlformats.org/drawingml/2006/main">
               <a:ext uri="{FF2B5EF4-FFF2-40B4-BE49-F238E27FC236}">
-                <a16:creationId xmlns:a16="http://schemas.microsoft.com/office/drawing/2014/main" id="{9D0DFFB2-0B7B-4CDD-ABE3-42F3F8A8A81E}"/>
+                <a16:creationId xmlns:a16="http://schemas.microsoft.com/office/drawing/2014/main" id="{54E89D19-5171-40E3-ABE6-01B736871830}"/>
               </a:ext>
             </a:extLst>
           </p:cNvPr>
@@ -20789,7 +20824,7 @@
           <p:cNvPr id="13" name="">
             <a:extLst xmlns:a="http://schemas.openxmlformats.org/drawingml/2006/main">
               <a:ext uri="{FF2B5EF4-FFF2-40B4-BE49-F238E27FC236}">
-                <a16:creationId xmlns:a16="http://schemas.microsoft.com/office/drawing/2014/main" id="{0BE774FB-51D9-4DEC-BEE0-17A77241E5CC}"/>
+                <a16:creationId xmlns:a16="http://schemas.microsoft.com/office/drawing/2014/main" id="{7C0998D1-E200-4154-A31A-1F1DC09B6C65}"/>
               </a:ext>
             </a:extLst>
           </p:cNvPr>
@@ -20820,7 +20855,7 @@
           <p:cNvPr id="14" name="">
             <a:extLst xmlns:a="http://schemas.openxmlformats.org/drawingml/2006/main">
               <a:ext uri="{FF2B5EF4-FFF2-40B4-BE49-F238E27FC236}">
-                <a16:creationId xmlns:a16="http://schemas.microsoft.com/office/drawing/2014/main" id="{441DDF83-6ADA-4D7E-A115-17CFFC8F9D01}"/>
+                <a16:creationId xmlns:a16="http://schemas.microsoft.com/office/drawing/2014/main" id="{568ED00E-7149-4416-B80D-15E8A73A0815}"/>
               </a:ext>
             </a:extLst>
           </p:cNvPr>
@@ -20882,7 +20917,7 @@
           <p:cNvPr id="15" name="">
             <a:extLst xmlns:a="http://schemas.openxmlformats.org/drawingml/2006/main">
               <a:ext uri="{FF2B5EF4-FFF2-40B4-BE49-F238E27FC236}">
-                <a16:creationId xmlns:a16="http://schemas.microsoft.com/office/drawing/2014/main" id="{376731FF-8A9F-486A-A9FA-12D006DC7C55}"/>
+                <a16:creationId xmlns:a16="http://schemas.microsoft.com/office/drawing/2014/main" id="{DF0DEB65-C33F-45CF-ADAB-2E5781630E95}"/>
               </a:ext>
             </a:extLst>
           </p:cNvPr>
@@ -20944,7 +20979,7 @@
           <p:cNvPr id="16" name="">
             <a:extLst xmlns:a="http://schemas.openxmlformats.org/drawingml/2006/main">
               <a:ext uri="{FF2B5EF4-FFF2-40B4-BE49-F238E27FC236}">
-                <a16:creationId xmlns:a16="http://schemas.microsoft.com/office/drawing/2014/main" id="{096051B5-A370-4CEF-860A-1857FE9EFB7A}"/>
+                <a16:creationId xmlns:a16="http://schemas.microsoft.com/office/drawing/2014/main" id="{2AA03487-CB54-45C5-8485-6110C2FCF634}"/>
               </a:ext>
             </a:extLst>
           </p:cNvPr>
@@ -21006,7 +21041,7 @@
           <p:cNvPr id="17" name="dashboard-preview">
             <a:extLst xmlns:a="http://schemas.openxmlformats.org/drawingml/2006/main">
               <a:ext uri="{FF2B5EF4-FFF2-40B4-BE49-F238E27FC236}">
-                <a16:creationId xmlns:a16="http://schemas.microsoft.com/office/drawing/2014/main" id="{1640D8C3-813A-43EF-BB7B-C95B8E39EC61}"/>
+                <a16:creationId xmlns:a16="http://schemas.microsoft.com/office/drawing/2014/main" id="{6CF712E3-A53C-4D17-B286-16F3815C9247}"/>
               </a:ext>
             </a:extLst>
           </p:cNvPr>
@@ -21041,7 +21076,7 @@
           <p:cNvPr id="18" name="">
             <a:extLst xmlns:a="http://schemas.openxmlformats.org/drawingml/2006/main">
               <a:ext uri="{FF2B5EF4-FFF2-40B4-BE49-F238E27FC236}">
-                <a16:creationId xmlns:a16="http://schemas.microsoft.com/office/drawing/2014/main" id="{DBDB6D2E-9A1F-4A0D-B457-D7A442EAC963}"/>
+                <a16:creationId xmlns:a16="http://schemas.microsoft.com/office/drawing/2014/main" id="{38534F2E-95F5-43E2-8D39-583139436FE8}"/>
               </a:ext>
             </a:extLst>
           </p:cNvPr>
@@ -21103,7 +21138,7 @@
           <p:cNvPr id="19" name="">
             <a:extLst xmlns:a="http://schemas.openxmlformats.org/drawingml/2006/main">
               <a:ext uri="{FF2B5EF4-FFF2-40B4-BE49-F238E27FC236}">
-                <a16:creationId xmlns:a16="http://schemas.microsoft.com/office/drawing/2014/main" id="{01D36940-0FEF-458B-A60A-C69CBCEAB1C5}"/>
+                <a16:creationId xmlns:a16="http://schemas.microsoft.com/office/drawing/2014/main" id="{74B2BE68-ABEE-481A-9FEF-EB8E0DDE2D4A}"/>
               </a:ext>
             </a:extLst>
           </p:cNvPr>
@@ -21134,7 +21169,7 @@
           <p:cNvPr id="20" name="">
             <a:extLst xmlns:a="http://schemas.openxmlformats.org/drawingml/2006/main">
               <a:ext uri="{FF2B5EF4-FFF2-40B4-BE49-F238E27FC236}">
-                <a16:creationId xmlns:a16="http://schemas.microsoft.com/office/drawing/2014/main" id="{3A069272-1847-48BB-A9D3-3993E6191BB9}"/>
+                <a16:creationId xmlns:a16="http://schemas.microsoft.com/office/drawing/2014/main" id="{07178FFF-A641-41BB-A991-95B14760E497}"/>
               </a:ext>
             </a:extLst>
           </p:cNvPr>
@@ -21196,7 +21231,7 @@
           <p:cNvPr id="21" name="">
             <a:extLst xmlns:a="http://schemas.openxmlformats.org/drawingml/2006/main">
               <a:ext uri="{FF2B5EF4-FFF2-40B4-BE49-F238E27FC236}">
-                <a16:creationId xmlns:a16="http://schemas.microsoft.com/office/drawing/2014/main" id="{4F76859C-08D1-464C-8A9D-8812D9C56ABC}"/>
+                <a16:creationId xmlns:a16="http://schemas.microsoft.com/office/drawing/2014/main" id="{05DBC6BF-806A-4B48-ABA4-873D5C74C78E}"/>
               </a:ext>
             </a:extLst>
           </p:cNvPr>
@@ -21227,7 +21262,7 @@
           <p:cNvPr id="22" name="">
             <a:extLst xmlns:a="http://schemas.openxmlformats.org/drawingml/2006/main">
               <a:ext uri="{FF2B5EF4-FFF2-40B4-BE49-F238E27FC236}">
-                <a16:creationId xmlns:a16="http://schemas.microsoft.com/office/drawing/2014/main" id="{57D4C086-C169-4DD1-91D4-B1DB9F4465F6}"/>
+                <a16:creationId xmlns:a16="http://schemas.microsoft.com/office/drawing/2014/main" id="{80A42C74-156A-4AE9-9BA1-0DC4A6D8E046}"/>
               </a:ext>
             </a:extLst>
           </p:cNvPr>
@@ -21258,7 +21293,7 @@
           <p:cNvPr id="23" name="">
             <a:extLst xmlns:a="http://schemas.openxmlformats.org/drawingml/2006/main">
               <a:ext uri="{FF2B5EF4-FFF2-40B4-BE49-F238E27FC236}">
-                <a16:creationId xmlns:a16="http://schemas.microsoft.com/office/drawing/2014/main" id="{91C712F7-C9F8-4D9B-BE26-5A54B5276A8B}"/>
+                <a16:creationId xmlns:a16="http://schemas.microsoft.com/office/drawing/2014/main" id="{EBF868AD-2002-4088-8C54-1524687F895F}"/>
               </a:ext>
             </a:extLst>
           </p:cNvPr>
@@ -21291,7 +21326,7 @@
           <p:cNvPr id="24" name="">
             <a:extLst xmlns:a="http://schemas.openxmlformats.org/drawingml/2006/main">
               <a:ext uri="{FF2B5EF4-FFF2-40B4-BE49-F238E27FC236}">
-                <a16:creationId xmlns:a16="http://schemas.microsoft.com/office/drawing/2014/main" id="{EA0922F1-B789-41EE-968C-F4852D8FA445}"/>
+                <a16:creationId xmlns:a16="http://schemas.microsoft.com/office/drawing/2014/main" id="{C8355C58-C0CD-4B51-A549-B3C62ACC26E1}"/>
               </a:ext>
             </a:extLst>
           </p:cNvPr>
@@ -21353,7 +21388,7 @@
           <p:cNvPr id="25" name="footer-rule-7">
             <a:extLst xmlns:a="http://schemas.openxmlformats.org/drawingml/2006/main">
               <a:ext uri="{FF2B5EF4-FFF2-40B4-BE49-F238E27FC236}">
-                <a16:creationId xmlns:a16="http://schemas.microsoft.com/office/drawing/2014/main" id="{D32A6E59-55E5-49D6-A0FA-1CCE2D09D157}"/>
+                <a16:creationId xmlns:a16="http://schemas.microsoft.com/office/drawing/2014/main" id="{570732CA-F8C2-4ADB-A9A7-98F037F7C8CA}"/>
               </a:ext>
             </a:extLst>
           </p:cNvPr>
@@ -21384,7 +21419,7 @@
           <p:cNvPr id="26" name="footer-label-7">
             <a:extLst xmlns:a="http://schemas.openxmlformats.org/drawingml/2006/main">
               <a:ext uri="{FF2B5EF4-FFF2-40B4-BE49-F238E27FC236}">
-                <a16:creationId xmlns:a16="http://schemas.microsoft.com/office/drawing/2014/main" id="{E8923B5B-C15E-475F-90D7-A1407F16BA50}"/>
+                <a16:creationId xmlns:a16="http://schemas.microsoft.com/office/drawing/2014/main" id="{9EA9DBF6-58E8-4755-9BBD-6AAD183DCA0F}"/>
               </a:ext>
             </a:extLst>
           </p:cNvPr>
@@ -21446,7 +21481,7 @@
           <p:cNvPr id="27" name="footer-page-7">
             <a:extLst xmlns:a="http://schemas.openxmlformats.org/drawingml/2006/main">
               <a:ext uri="{FF2B5EF4-FFF2-40B4-BE49-F238E27FC236}">
-                <a16:creationId xmlns:a16="http://schemas.microsoft.com/office/drawing/2014/main" id="{E2C2B7B6-5F5E-44D4-8D6C-CD21496FBF81}"/>
+                <a16:creationId xmlns:a16="http://schemas.microsoft.com/office/drawing/2014/main" id="{DF7A09F1-652E-47B1-B89E-858085AAF7FF}"/>
               </a:ext>
             </a:extLst>
           </p:cNvPr>
@@ -21506,7 +21541,7 @@
     </p:spTree>
     <p:extLst>
       <p:ext uri="{BB962C8B-B14F-4D97-AF65-F5344CB8AC3E}">
-        <p14:creationId xmlns:p14="http://schemas.microsoft.com/office/powerpoint/2010/main" val="383732125"/>
+        <p14:creationId xmlns:p14="http://schemas.microsoft.com/office/powerpoint/2010/main" val="481610865"/>
       </p:ext>
     </p:extLst>
   </p:cSld>
@@ -21537,7 +21572,7 @@
           <p:cNvPr id="26" name="side-accent-8">
             <a:extLst xmlns:a="http://schemas.openxmlformats.org/drawingml/2006/main">
               <a:ext uri="{FF2B5EF4-FFF2-40B4-BE49-F238E27FC236}">
-                <a16:creationId xmlns:a16="http://schemas.microsoft.com/office/drawing/2014/main" id="{B278883E-C962-4B89-8DB5-248AD146FAD9}"/>
+                <a16:creationId xmlns:a16="http://schemas.microsoft.com/office/drawing/2014/main" id="{9C53FF99-180A-44BA-93A5-15B9275B11B2}"/>
               </a:ext>
             </a:extLst>
           </p:cNvPr>
@@ -21568,7 +21603,7 @@
           <p:cNvPr id="2" name="kicker-8">
             <a:extLst xmlns:a="http://schemas.openxmlformats.org/drawingml/2006/main">
               <a:ext uri="{FF2B5EF4-FFF2-40B4-BE49-F238E27FC236}">
-                <a16:creationId xmlns:a16="http://schemas.microsoft.com/office/drawing/2014/main" id="{AE2D84CE-798F-4A98-BB28-909FE1A9D8EC}"/>
+                <a16:creationId xmlns:a16="http://schemas.microsoft.com/office/drawing/2014/main" id="{5652303E-E516-4622-82A4-EC8AC08EF233}"/>
               </a:ext>
             </a:extLst>
           </p:cNvPr>
@@ -21630,7 +21665,7 @@
           <p:cNvPr id="3" name="title-8">
             <a:extLst xmlns:a="http://schemas.openxmlformats.org/drawingml/2006/main">
               <a:ext uri="{FF2B5EF4-FFF2-40B4-BE49-F238E27FC236}">
-                <a16:creationId xmlns:a16="http://schemas.microsoft.com/office/drawing/2014/main" id="{2E02B2FB-FF12-481C-8B4F-D8949648E1A4}"/>
+                <a16:creationId xmlns:a16="http://schemas.microsoft.com/office/drawing/2014/main" id="{9EE61D20-948C-4718-ACF5-BD91C363DC55}"/>
               </a:ext>
             </a:extLst>
           </p:cNvPr>
@@ -21692,7 +21727,7 @@
           <p:cNvPr id="4" name="">
             <a:extLst xmlns:a="http://schemas.openxmlformats.org/drawingml/2006/main">
               <a:ext uri="{FF2B5EF4-FFF2-40B4-BE49-F238E27FC236}">
-                <a16:creationId xmlns:a16="http://schemas.microsoft.com/office/drawing/2014/main" id="{91F52B13-A0A3-45D8-832B-369C609C6BF7}"/>
+                <a16:creationId xmlns:a16="http://schemas.microsoft.com/office/drawing/2014/main" id="{92350BE6-286B-496B-97C7-A0E5E00FE171}"/>
               </a:ext>
             </a:extLst>
           </p:cNvPr>
@@ -21754,7 +21789,7 @@
           <p:cNvPr id="5" name="">
             <a:extLst xmlns:a="http://schemas.openxmlformats.org/drawingml/2006/main">
               <a:ext uri="{FF2B5EF4-FFF2-40B4-BE49-F238E27FC236}">
-                <a16:creationId xmlns:a16="http://schemas.microsoft.com/office/drawing/2014/main" id="{C8E34C0F-7F92-4EAB-853A-36FAF092D89E}"/>
+                <a16:creationId xmlns:a16="http://schemas.microsoft.com/office/drawing/2014/main" id="{AA95D84E-5075-479A-BC20-351A3C93F863}"/>
               </a:ext>
             </a:extLst>
           </p:cNvPr>
@@ -21785,7 +21820,7 @@
           <p:cNvPr id="6" name="">
             <a:extLst xmlns:a="http://schemas.openxmlformats.org/drawingml/2006/main">
               <a:ext uri="{FF2B5EF4-FFF2-40B4-BE49-F238E27FC236}">
-                <a16:creationId xmlns:a16="http://schemas.microsoft.com/office/drawing/2014/main" id="{A13DCF1B-BA65-4CAB-9ECD-505F1E8A5E47}"/>
+                <a16:creationId xmlns:a16="http://schemas.microsoft.com/office/drawing/2014/main" id="{262A8EFF-1770-4E3F-815F-FE43D4FFBC4C}"/>
               </a:ext>
             </a:extLst>
           </p:cNvPr>
@@ -21816,7 +21851,7 @@
           <p:cNvPr id="7" name="">
             <a:extLst xmlns:a="http://schemas.openxmlformats.org/drawingml/2006/main">
               <a:ext uri="{FF2B5EF4-FFF2-40B4-BE49-F238E27FC236}">
-                <a16:creationId xmlns:a16="http://schemas.microsoft.com/office/drawing/2014/main" id="{6D422665-05CC-4401-9B27-8366B852A51D}"/>
+                <a16:creationId xmlns:a16="http://schemas.microsoft.com/office/drawing/2014/main" id="{90CD17D2-ACA5-4672-BC39-D189CCF03BB7}"/>
               </a:ext>
             </a:extLst>
           </p:cNvPr>
@@ -21878,7 +21913,7 @@
           <p:cNvPr id="8" name="">
             <a:extLst xmlns:a="http://schemas.openxmlformats.org/drawingml/2006/main">
               <a:ext uri="{FF2B5EF4-FFF2-40B4-BE49-F238E27FC236}">
-                <a16:creationId xmlns:a16="http://schemas.microsoft.com/office/drawing/2014/main" id="{87F02026-4B11-42EF-B3BC-206FE69070DA}"/>
+                <a16:creationId xmlns:a16="http://schemas.microsoft.com/office/drawing/2014/main" id="{FE64CB94-3326-4AFF-BFF9-DD6B8A1536BC}"/>
               </a:ext>
             </a:extLst>
           </p:cNvPr>
@@ -21940,7 +21975,7 @@
           <p:cNvPr id="9" name="">
             <a:extLst xmlns:a="http://schemas.openxmlformats.org/drawingml/2006/main">
               <a:ext uri="{FF2B5EF4-FFF2-40B4-BE49-F238E27FC236}">
-                <a16:creationId xmlns:a16="http://schemas.microsoft.com/office/drawing/2014/main" id="{D54BC909-C56D-42CA-B8A0-65AB21EE2544}"/>
+                <a16:creationId xmlns:a16="http://schemas.microsoft.com/office/drawing/2014/main" id="{91AE9D68-BC15-41F8-A1FA-476116CB1B5E}"/>
               </a:ext>
             </a:extLst>
           </p:cNvPr>
@@ -22002,7 +22037,7 @@
           <p:cNvPr id="10" name="">
             <a:extLst xmlns:a="http://schemas.openxmlformats.org/drawingml/2006/main">
               <a:ext uri="{FF2B5EF4-FFF2-40B4-BE49-F238E27FC236}">
-                <a16:creationId xmlns:a16="http://schemas.microsoft.com/office/drawing/2014/main" id="{06302261-F755-47F4-A245-55341B4B5C3D}"/>
+                <a16:creationId xmlns:a16="http://schemas.microsoft.com/office/drawing/2014/main" id="{0EE6BDC8-A7BE-42D7-B68E-8D19841D2AFD}"/>
               </a:ext>
             </a:extLst>
           </p:cNvPr>
@@ -22033,7 +22068,7 @@
           <p:cNvPr id="11" name="">
             <a:extLst xmlns:a="http://schemas.openxmlformats.org/drawingml/2006/main">
               <a:ext uri="{FF2B5EF4-FFF2-40B4-BE49-F238E27FC236}">
-                <a16:creationId xmlns:a16="http://schemas.microsoft.com/office/drawing/2014/main" id="{5DAD4C52-7848-4C42-B53F-6FF1B148B4C3}"/>
+                <a16:creationId xmlns:a16="http://schemas.microsoft.com/office/drawing/2014/main" id="{D73B9018-DD28-412B-B47B-D1FDDABB270F}"/>
               </a:ext>
             </a:extLst>
           </p:cNvPr>
@@ -22095,7 +22130,7 @@
           <p:cNvPr id="12" name="">
             <a:extLst xmlns:a="http://schemas.openxmlformats.org/drawingml/2006/main">
               <a:ext uri="{FF2B5EF4-FFF2-40B4-BE49-F238E27FC236}">
-                <a16:creationId xmlns:a16="http://schemas.microsoft.com/office/drawing/2014/main" id="{56063ED9-B8D4-4021-AC6F-665490071529}"/>
+                <a16:creationId xmlns:a16="http://schemas.microsoft.com/office/drawing/2014/main" id="{03ADEE15-1F5E-4EA8-BA2C-B5BBD564CED5}"/>
               </a:ext>
             </a:extLst>
           </p:cNvPr>
@@ -22157,7 +22192,7 @@
           <p:cNvPr id="13" name="">
             <a:extLst xmlns:a="http://schemas.openxmlformats.org/drawingml/2006/main">
               <a:ext uri="{FF2B5EF4-FFF2-40B4-BE49-F238E27FC236}">
-                <a16:creationId xmlns:a16="http://schemas.microsoft.com/office/drawing/2014/main" id="{B504F16C-5EFE-4975-8CAC-D9826E11CA4F}"/>
+                <a16:creationId xmlns:a16="http://schemas.microsoft.com/office/drawing/2014/main" id="{8F3937B6-E29A-4B18-994D-EFBB04ECCB80}"/>
               </a:ext>
             </a:extLst>
           </p:cNvPr>
@@ -22219,7 +22254,7 @@
           <p:cNvPr id="14" name="">
             <a:extLst xmlns:a="http://schemas.openxmlformats.org/drawingml/2006/main">
               <a:ext uri="{FF2B5EF4-FFF2-40B4-BE49-F238E27FC236}">
-                <a16:creationId xmlns:a16="http://schemas.microsoft.com/office/drawing/2014/main" id="{62B74F10-052F-49B8-A43D-35A48B963784}"/>
+                <a16:creationId xmlns:a16="http://schemas.microsoft.com/office/drawing/2014/main" id="{5877674F-585B-4EA5-8F75-FCCF05A51DE2}"/>
               </a:ext>
             </a:extLst>
           </p:cNvPr>
@@ -22250,7 +22285,7 @@
           <p:cNvPr id="15" name="">
             <a:extLst xmlns:a="http://schemas.openxmlformats.org/drawingml/2006/main">
               <a:ext uri="{FF2B5EF4-FFF2-40B4-BE49-F238E27FC236}">
-                <a16:creationId xmlns:a16="http://schemas.microsoft.com/office/drawing/2014/main" id="{80861D56-D90A-4A53-873E-A418B0B290B3}"/>
+                <a16:creationId xmlns:a16="http://schemas.microsoft.com/office/drawing/2014/main" id="{6700CAAC-BEFF-4B08-B82A-74F4F8CC6487}"/>
               </a:ext>
             </a:extLst>
           </p:cNvPr>
@@ -22312,7 +22347,7 @@
           <p:cNvPr id="16" name="">
             <a:extLst xmlns:a="http://schemas.openxmlformats.org/drawingml/2006/main">
               <a:ext uri="{FF2B5EF4-FFF2-40B4-BE49-F238E27FC236}">
-                <a16:creationId xmlns:a16="http://schemas.microsoft.com/office/drawing/2014/main" id="{D5CFEA2E-07D7-43C3-BA9E-13B9468C7F5D}"/>
+                <a16:creationId xmlns:a16="http://schemas.microsoft.com/office/drawing/2014/main" id="{EEB149C0-3685-4B96-8723-DCA03CD2435F}"/>
               </a:ext>
             </a:extLst>
           </p:cNvPr>
@@ -22374,7 +22409,7 @@
           <p:cNvPr id="17" name="">
             <a:extLst xmlns:a="http://schemas.openxmlformats.org/drawingml/2006/main">
               <a:ext uri="{FF2B5EF4-FFF2-40B4-BE49-F238E27FC236}">
-                <a16:creationId xmlns:a16="http://schemas.microsoft.com/office/drawing/2014/main" id="{0CAFAD6E-0AD1-4D42-8897-B16F23AC3E2D}"/>
+                <a16:creationId xmlns:a16="http://schemas.microsoft.com/office/drawing/2014/main" id="{02D65DA2-2199-4812-AD8B-78FDC9FB71D7}"/>
               </a:ext>
             </a:extLst>
           </p:cNvPr>
@@ -22436,7 +22471,7 @@
           <p:cNvPr id="18" name="">
             <a:extLst xmlns:a="http://schemas.openxmlformats.org/drawingml/2006/main">
               <a:ext uri="{FF2B5EF4-FFF2-40B4-BE49-F238E27FC236}">
-                <a16:creationId xmlns:a16="http://schemas.microsoft.com/office/drawing/2014/main" id="{64930F2C-02ED-40E0-93B6-E6B1F96241DE}"/>
+                <a16:creationId xmlns:a16="http://schemas.microsoft.com/office/drawing/2014/main" id="{78592BD9-45C9-44F4-A6C6-38B6FDA24DBF}"/>
               </a:ext>
             </a:extLst>
           </p:cNvPr>
@@ -22467,7 +22502,7 @@
           <p:cNvPr id="19" name="">
             <a:extLst xmlns:a="http://schemas.openxmlformats.org/drawingml/2006/main">
               <a:ext uri="{FF2B5EF4-FFF2-40B4-BE49-F238E27FC236}">
-                <a16:creationId xmlns:a16="http://schemas.microsoft.com/office/drawing/2014/main" id="{411F2002-7486-409E-9E4B-E2D0139B1033}"/>
+                <a16:creationId xmlns:a16="http://schemas.microsoft.com/office/drawing/2014/main" id="{E4765997-8B9B-49EC-BB78-6CF86FC63BF1}"/>
               </a:ext>
             </a:extLst>
           </p:cNvPr>
@@ -22529,7 +22564,7 @@
           <p:cNvPr id="20" name="">
             <a:extLst xmlns:a="http://schemas.openxmlformats.org/drawingml/2006/main">
               <a:ext uri="{FF2B5EF4-FFF2-40B4-BE49-F238E27FC236}">
-                <a16:creationId xmlns:a16="http://schemas.microsoft.com/office/drawing/2014/main" id="{35D7A1E5-BB1B-43D9-A2BE-6329295923B2}"/>
+                <a16:creationId xmlns:a16="http://schemas.microsoft.com/office/drawing/2014/main" id="{A78815E4-26D0-4EC1-84CF-79B03723C305}"/>
               </a:ext>
             </a:extLst>
           </p:cNvPr>
@@ -22591,7 +22626,7 @@
           <p:cNvPr id="21" name="">
             <a:extLst xmlns:a="http://schemas.openxmlformats.org/drawingml/2006/main">
               <a:ext uri="{FF2B5EF4-FFF2-40B4-BE49-F238E27FC236}">
-                <a16:creationId xmlns:a16="http://schemas.microsoft.com/office/drawing/2014/main" id="{2A806673-A56A-4600-AD05-2C364E177BD7}"/>
+                <a16:creationId xmlns:a16="http://schemas.microsoft.com/office/drawing/2014/main" id="{5B086895-BBAB-4204-B3CC-02C81651DEBB}"/>
               </a:ext>
             </a:extLst>
           </p:cNvPr>
@@ -22653,7 +22688,7 @@
           <p:cNvPr id="22" name="">
             <a:extLst xmlns:a="http://schemas.openxmlformats.org/drawingml/2006/main">
               <a:ext uri="{FF2B5EF4-FFF2-40B4-BE49-F238E27FC236}">
-                <a16:creationId xmlns:a16="http://schemas.microsoft.com/office/drawing/2014/main" id="{C9A45B58-C506-4A93-A953-7828B9FE45F4}"/>
+                <a16:creationId xmlns:a16="http://schemas.microsoft.com/office/drawing/2014/main" id="{F5E9E0C5-AFEC-4C02-8B36-915177EE7665}"/>
               </a:ext>
             </a:extLst>
           </p:cNvPr>
@@ -22715,7 +22750,7 @@
           <p:cNvPr id="23" name="footer-rule-8">
             <a:extLst xmlns:a="http://schemas.openxmlformats.org/drawingml/2006/main">
               <a:ext uri="{FF2B5EF4-FFF2-40B4-BE49-F238E27FC236}">
-                <a16:creationId xmlns:a16="http://schemas.microsoft.com/office/drawing/2014/main" id="{879A4409-ABFC-4974-808F-8D422E5731BC}"/>
+                <a16:creationId xmlns:a16="http://schemas.microsoft.com/office/drawing/2014/main" id="{3546F610-A646-4DF7-8F9E-7EBF5CBD3F8E}"/>
               </a:ext>
             </a:extLst>
           </p:cNvPr>
@@ -22746,7 +22781,7 @@
           <p:cNvPr id="24" name="footer-label-8">
             <a:extLst xmlns:a="http://schemas.openxmlformats.org/drawingml/2006/main">
               <a:ext uri="{FF2B5EF4-FFF2-40B4-BE49-F238E27FC236}">
-                <a16:creationId xmlns:a16="http://schemas.microsoft.com/office/drawing/2014/main" id="{B931FE9C-72CB-4638-8CA3-94B4477DBA64}"/>
+                <a16:creationId xmlns:a16="http://schemas.microsoft.com/office/drawing/2014/main" id="{CD0AB27D-8675-436E-AC09-1E27148DFEA4}"/>
               </a:ext>
             </a:extLst>
           </p:cNvPr>
@@ -22808,7 +22843,7 @@
           <p:cNvPr id="25" name="footer-page-8">
             <a:extLst xmlns:a="http://schemas.openxmlformats.org/drawingml/2006/main">
               <a:ext uri="{FF2B5EF4-FFF2-40B4-BE49-F238E27FC236}">
-                <a16:creationId xmlns:a16="http://schemas.microsoft.com/office/drawing/2014/main" id="{31FB8D3A-7C8F-4D69-943E-BACE4ED87FD0}"/>
+                <a16:creationId xmlns:a16="http://schemas.microsoft.com/office/drawing/2014/main" id="{AD60CFFE-44E3-45B7-AD16-1B079ADD2F9E}"/>
               </a:ext>
             </a:extLst>
           </p:cNvPr>
@@ -22868,7 +22903,7 @@
     </p:spTree>
     <p:extLst>
       <p:ext uri="{BB962C8B-B14F-4D97-AF65-F5344CB8AC3E}">
-        <p14:creationId xmlns:p14="http://schemas.microsoft.com/office/powerpoint/2010/main" val="217755335"/>
+        <p14:creationId xmlns:p14="http://schemas.microsoft.com/office/powerpoint/2010/main" val="1294690101"/>
       </p:ext>
     </p:extLst>
   </p:cSld>
@@ -22899,7 +22934,7 @@
           <p:cNvPr id="21" name="side-accent-9">
             <a:extLst xmlns:a="http://schemas.openxmlformats.org/drawingml/2006/main">
               <a:ext uri="{FF2B5EF4-FFF2-40B4-BE49-F238E27FC236}">
-                <a16:creationId xmlns:a16="http://schemas.microsoft.com/office/drawing/2014/main" id="{99DB06FD-8711-4798-ADEE-439A7CBDB00D}"/>
+                <a16:creationId xmlns:a16="http://schemas.microsoft.com/office/drawing/2014/main" id="{49EFA9A9-B934-46B0-B598-15E1F659E40C}"/>
               </a:ext>
             </a:extLst>
           </p:cNvPr>
@@ -22930,7 +22965,7 @@
           <p:cNvPr id="2" name="kicker-9">
             <a:extLst xmlns:a="http://schemas.openxmlformats.org/drawingml/2006/main">
               <a:ext uri="{FF2B5EF4-FFF2-40B4-BE49-F238E27FC236}">
-                <a16:creationId xmlns:a16="http://schemas.microsoft.com/office/drawing/2014/main" id="{7329BADF-E725-49DD-8097-CF39587C21B2}"/>
+                <a16:creationId xmlns:a16="http://schemas.microsoft.com/office/drawing/2014/main" id="{6194C4D0-998B-4950-8B3D-988D474E7084}"/>
               </a:ext>
             </a:extLst>
           </p:cNvPr>
@@ -22992,7 +23027,7 @@
           <p:cNvPr id="3" name="title-9">
             <a:extLst xmlns:a="http://schemas.openxmlformats.org/drawingml/2006/main">
               <a:ext uri="{FF2B5EF4-FFF2-40B4-BE49-F238E27FC236}">
-                <a16:creationId xmlns:a16="http://schemas.microsoft.com/office/drawing/2014/main" id="{B2457273-89A4-48EA-BE71-ADE3E55F5C47}"/>
+                <a16:creationId xmlns:a16="http://schemas.microsoft.com/office/drawing/2014/main" id="{CEF35647-B091-4480-9F67-D318E18A4154}"/>
               </a:ext>
             </a:extLst>
           </p:cNvPr>
@@ -23054,7 +23089,7 @@
           <p:cNvPr id="4" name="">
             <a:extLst xmlns:a="http://schemas.openxmlformats.org/drawingml/2006/main">
               <a:ext uri="{FF2B5EF4-FFF2-40B4-BE49-F238E27FC236}">
-                <a16:creationId xmlns:a16="http://schemas.microsoft.com/office/drawing/2014/main" id="{A8861956-3A17-4447-9C91-6441FFD87052}"/>
+                <a16:creationId xmlns:a16="http://schemas.microsoft.com/office/drawing/2014/main" id="{AD380D38-41DF-407F-B0D7-9D211919F1F9}"/>
               </a:ext>
             </a:extLst>
           </p:cNvPr>
@@ -23116,7 +23151,7 @@
           <p:cNvPr id="5" name="">
             <a:extLst xmlns:a="http://schemas.openxmlformats.org/drawingml/2006/main">
               <a:ext uri="{FF2B5EF4-FFF2-40B4-BE49-F238E27FC236}">
-                <a16:creationId xmlns:a16="http://schemas.microsoft.com/office/drawing/2014/main" id="{1DB71E92-6527-408F-9219-4362F4B445A0}"/>
+                <a16:creationId xmlns:a16="http://schemas.microsoft.com/office/drawing/2014/main" id="{FDB728B5-DD6F-4C70-AF36-1B1E2AE02F85}"/>
               </a:ext>
             </a:extLst>
           </p:cNvPr>
@@ -23147,7 +23182,7 @@
           <p:cNvPr id="6" name="">
             <a:extLst xmlns:a="http://schemas.openxmlformats.org/drawingml/2006/main">
               <a:ext uri="{FF2B5EF4-FFF2-40B4-BE49-F238E27FC236}">
-                <a16:creationId xmlns:a16="http://schemas.microsoft.com/office/drawing/2014/main" id="{8EA73212-43A3-41F7-9487-ABE5B21E442C}"/>
+                <a16:creationId xmlns:a16="http://schemas.microsoft.com/office/drawing/2014/main" id="{C8026531-5479-4338-8832-F6EA5C7D0660}"/>
               </a:ext>
             </a:extLst>
           </p:cNvPr>
@@ -23209,7 +23244,7 @@
           <p:cNvPr id="7" name="">
             <a:extLst xmlns:a="http://schemas.openxmlformats.org/drawingml/2006/main">
               <a:ext uri="{FF2B5EF4-FFF2-40B4-BE49-F238E27FC236}">
-                <a16:creationId xmlns:a16="http://schemas.microsoft.com/office/drawing/2014/main" id="{C50B4B46-D3B8-4FE4-AE0E-7157B24914EC}"/>
+                <a16:creationId xmlns:a16="http://schemas.microsoft.com/office/drawing/2014/main" id="{E52661E3-2A40-433B-B3D8-7AD1305A9AFD}"/>
               </a:ext>
             </a:extLst>
           </p:cNvPr>
@@ -23271,7 +23306,7 @@
           <p:cNvPr id="8" name="">
             <a:extLst xmlns:a="http://schemas.openxmlformats.org/drawingml/2006/main">
               <a:ext uri="{FF2B5EF4-FFF2-40B4-BE49-F238E27FC236}">
-                <a16:creationId xmlns:a16="http://schemas.microsoft.com/office/drawing/2014/main" id="{DE2296CB-6962-4A9A-91F1-C48ABEC67E9C}"/>
+                <a16:creationId xmlns:a16="http://schemas.microsoft.com/office/drawing/2014/main" id="{1B65E273-C92E-4A80-A24A-F1A1ADD47F36}"/>
               </a:ext>
             </a:extLst>
           </p:cNvPr>
@@ -23333,7 +23368,7 @@
           <p:cNvPr id="9" name="">
             <a:extLst xmlns:a="http://schemas.openxmlformats.org/drawingml/2006/main">
               <a:ext uri="{FF2B5EF4-FFF2-40B4-BE49-F238E27FC236}">
-                <a16:creationId xmlns:a16="http://schemas.microsoft.com/office/drawing/2014/main" id="{D6D81057-60A0-40B5-8A38-880501616E06}"/>
+                <a16:creationId xmlns:a16="http://schemas.microsoft.com/office/drawing/2014/main" id="{06880F6C-5087-4E87-985B-00B164272A21}"/>
               </a:ext>
             </a:extLst>
           </p:cNvPr>
@@ -23364,7 +23399,7 @@
           <p:cNvPr id="10" name="">
             <a:extLst xmlns:a="http://schemas.openxmlformats.org/drawingml/2006/main">
               <a:ext uri="{FF2B5EF4-FFF2-40B4-BE49-F238E27FC236}">
-                <a16:creationId xmlns:a16="http://schemas.microsoft.com/office/drawing/2014/main" id="{5CD1068B-0A72-40F6-9D21-7FCD4588010E}"/>
+                <a16:creationId xmlns:a16="http://schemas.microsoft.com/office/drawing/2014/main" id="{2E91A775-EC6E-4119-A722-100AB09429A0}"/>
               </a:ext>
             </a:extLst>
           </p:cNvPr>
@@ -23426,7 +23461,7 @@
           <p:cNvPr id="11" name="">
             <a:extLst xmlns:a="http://schemas.openxmlformats.org/drawingml/2006/main">
               <a:ext uri="{FF2B5EF4-FFF2-40B4-BE49-F238E27FC236}">
-                <a16:creationId xmlns:a16="http://schemas.microsoft.com/office/drawing/2014/main" id="{18CAAB4B-ABD5-4D26-A8A6-A9077977A0DF}"/>
+                <a16:creationId xmlns:a16="http://schemas.microsoft.com/office/drawing/2014/main" id="{7DB2C8C9-3DC2-4A6C-8881-81E8C756F4AD}"/>
               </a:ext>
             </a:extLst>
           </p:cNvPr>
@@ -23488,7 +23523,7 @@
           <p:cNvPr id="12" name="">
             <a:extLst xmlns:a="http://schemas.openxmlformats.org/drawingml/2006/main">
               <a:ext uri="{FF2B5EF4-FFF2-40B4-BE49-F238E27FC236}">
-                <a16:creationId xmlns:a16="http://schemas.microsoft.com/office/drawing/2014/main" id="{BAA70734-DD1E-47CD-A91C-7CF6334B6264}"/>
+                <a16:creationId xmlns:a16="http://schemas.microsoft.com/office/drawing/2014/main" id="{50D65AEB-0C13-4983-90D7-4A01C9C54259}"/>
               </a:ext>
             </a:extLst>
           </p:cNvPr>
@@ -23550,7 +23585,7 @@
           <p:cNvPr id="13" name="">
             <a:extLst xmlns:a="http://schemas.openxmlformats.org/drawingml/2006/main">
               <a:ext uri="{FF2B5EF4-FFF2-40B4-BE49-F238E27FC236}">
-                <a16:creationId xmlns:a16="http://schemas.microsoft.com/office/drawing/2014/main" id="{DA832DA8-E088-4191-9952-F078507E9F8A}"/>
+                <a16:creationId xmlns:a16="http://schemas.microsoft.com/office/drawing/2014/main" id="{B082A9DC-722B-492A-B572-0EA4FB3EB8E9}"/>
               </a:ext>
             </a:extLst>
           </p:cNvPr>
@@ -23581,7 +23616,7 @@
           <p:cNvPr id="14" name="">
             <a:extLst xmlns:a="http://schemas.openxmlformats.org/drawingml/2006/main">
               <a:ext uri="{FF2B5EF4-FFF2-40B4-BE49-F238E27FC236}">
-                <a16:creationId xmlns:a16="http://schemas.microsoft.com/office/drawing/2014/main" id="{B0F31604-BA98-4CDC-8EC8-BEF67CDE2947}"/>
+                <a16:creationId xmlns:a16="http://schemas.microsoft.com/office/drawing/2014/main" id="{9789E5B5-EC9A-496D-AF22-C8BEE9853F81}"/>
               </a:ext>
             </a:extLst>
           </p:cNvPr>
@@ -23643,7 +23678,7 @@
           <p:cNvPr id="15" name="">
             <a:extLst xmlns:a="http://schemas.openxmlformats.org/drawingml/2006/main">
               <a:ext uri="{FF2B5EF4-FFF2-40B4-BE49-F238E27FC236}">
-                <a16:creationId xmlns:a16="http://schemas.microsoft.com/office/drawing/2014/main" id="{DD60F04E-A30E-40DD-AF7B-924A0A2C8F1E}"/>
+                <a16:creationId xmlns:a16="http://schemas.microsoft.com/office/drawing/2014/main" id="{AC061172-9CDC-4DBA-A8B8-DED62FCB7BD6}"/>
               </a:ext>
             </a:extLst>
           </p:cNvPr>
@@ -23705,7 +23740,7 @@
           <p:cNvPr id="16" name="">
             <a:extLst xmlns:a="http://schemas.openxmlformats.org/drawingml/2006/main">
               <a:ext uri="{FF2B5EF4-FFF2-40B4-BE49-F238E27FC236}">
-                <a16:creationId xmlns:a16="http://schemas.microsoft.com/office/drawing/2014/main" id="{F02FCF1A-5BA9-43ED-A8E8-06D61AB8F49B}"/>
+                <a16:creationId xmlns:a16="http://schemas.microsoft.com/office/drawing/2014/main" id="{7FD589D3-93DB-45CC-BE73-755969912DF7}"/>
               </a:ext>
             </a:extLst>
           </p:cNvPr>
@@ -23767,7 +23802,7 @@
           <p:cNvPr id="17" name="">
             <a:extLst xmlns:a="http://schemas.openxmlformats.org/drawingml/2006/main">
               <a:ext uri="{FF2B5EF4-FFF2-40B4-BE49-F238E27FC236}">
-                <a16:creationId xmlns:a16="http://schemas.microsoft.com/office/drawing/2014/main" id="{3491AEEA-4444-481D-A169-A39E79218C0B}"/>
+                <a16:creationId xmlns:a16="http://schemas.microsoft.com/office/drawing/2014/main" id="{27FF342F-19E2-4A7E-9AD3-CC8DA831DC66}"/>
               </a:ext>
             </a:extLst>
           </p:cNvPr>
@@ -23829,7 +23864,7 @@
           <p:cNvPr id="18" name="footer-rule-9">
             <a:extLst xmlns:a="http://schemas.openxmlformats.org/drawingml/2006/main">
               <a:ext uri="{FF2B5EF4-FFF2-40B4-BE49-F238E27FC236}">
-                <a16:creationId xmlns:a16="http://schemas.microsoft.com/office/drawing/2014/main" id="{C6D730F8-FA39-4BF7-A733-04F480469022}"/>
+                <a16:creationId xmlns:a16="http://schemas.microsoft.com/office/drawing/2014/main" id="{A4FEB40B-5786-40A3-8702-D98714EC87C8}"/>
               </a:ext>
             </a:extLst>
           </p:cNvPr>
@@ -23860,7 +23895,7 @@
           <p:cNvPr id="19" name="footer-label-9">
             <a:extLst xmlns:a="http://schemas.openxmlformats.org/drawingml/2006/main">
               <a:ext uri="{FF2B5EF4-FFF2-40B4-BE49-F238E27FC236}">
-                <a16:creationId xmlns:a16="http://schemas.microsoft.com/office/drawing/2014/main" id="{6A5EF091-5B6F-496C-A958-786CEBC301B4}"/>
+                <a16:creationId xmlns:a16="http://schemas.microsoft.com/office/drawing/2014/main" id="{933F7BDE-ADA4-4E56-814E-2193627A02E1}"/>
               </a:ext>
             </a:extLst>
           </p:cNvPr>
@@ -23922,7 +23957,7 @@
           <p:cNvPr id="20" name="footer-page-9">
             <a:extLst xmlns:a="http://schemas.openxmlformats.org/drawingml/2006/main">
               <a:ext uri="{FF2B5EF4-FFF2-40B4-BE49-F238E27FC236}">
-                <a16:creationId xmlns:a16="http://schemas.microsoft.com/office/drawing/2014/main" id="{2E7F5A70-FA24-408D-B01C-DFAC59F9C3EB}"/>
+                <a16:creationId xmlns:a16="http://schemas.microsoft.com/office/drawing/2014/main" id="{04A02B82-9D23-4B99-8BFA-A167D7F20644}"/>
               </a:ext>
             </a:extLst>
           </p:cNvPr>
@@ -23982,7 +24017,7 @@
     </p:spTree>
     <p:extLst>
       <p:ext uri="{BB962C8B-B14F-4D97-AF65-F5344CB8AC3E}">
-        <p14:creationId xmlns:p14="http://schemas.microsoft.com/office/powerpoint/2010/main" val="9412917"/>
+        <p14:creationId xmlns:p14="http://schemas.microsoft.com/office/powerpoint/2010/main" val="1446216718"/>
       </p:ext>
     </p:extLst>
   </p:cSld>

--- a/docs/MSU-EVA-อบรมสายสนับสนุน-ฉบับวิทยากร.pptx
+++ b/docs/MSU-EVA-อบรมสายสนับสนุน-ฉบับวิทยากร.pptx
@@ -2,30 +2,30 @@
 <file path=ppt/presentation.xml><?xml version="1.0" encoding="utf-8"?>
 <p:presentation xmlns:p="http://schemas.openxmlformats.org/presentationml/2006/main">
   <p:sldMasterIdLst>
-    <p:sldMasterId xmlns:r="http://schemas.openxmlformats.org/officeDocument/2006/relationships" id="2147483648" r:id="Rca38ee24cce64450"/>
+    <p:sldMasterId xmlns:r="http://schemas.openxmlformats.org/officeDocument/2006/relationships" id="2147483648" r:id="R01c50aa930934d25"/>
   </p:sldMasterIdLst>
   <p:notesMasterIdLst>
-    <p:notesMasterId xmlns:r="http://schemas.openxmlformats.org/officeDocument/2006/relationships" r:id="R1beff4bfe0254dc0"/>
+    <p:notesMasterId xmlns:r="http://schemas.openxmlformats.org/officeDocument/2006/relationships" r:id="Rf970149b4e2f4817"/>
   </p:notesMasterIdLst>
   <p:sldIdLst>
-    <p:sldId xmlns:r="http://schemas.openxmlformats.org/officeDocument/2006/relationships" id="256" r:id="R0abaa2487c074399"/>
-    <p:sldId xmlns:r="http://schemas.openxmlformats.org/officeDocument/2006/relationships" id="257" r:id="Rf1dd62338d7740e0"/>
-    <p:sldId xmlns:r="http://schemas.openxmlformats.org/officeDocument/2006/relationships" id="258" r:id="R79ab4c9f42124747"/>
-    <p:sldId xmlns:r="http://schemas.openxmlformats.org/officeDocument/2006/relationships" id="259" r:id="Rde2e384c841c4943"/>
-    <p:sldId xmlns:r="http://schemas.openxmlformats.org/officeDocument/2006/relationships" id="260" r:id="R8309f4f9140d41d9"/>
-    <p:sldId xmlns:r="http://schemas.openxmlformats.org/officeDocument/2006/relationships" id="261" r:id="Re3765f9d37494818"/>
-    <p:sldId xmlns:r="http://schemas.openxmlformats.org/officeDocument/2006/relationships" id="262" r:id="Rd59e28097b664324"/>
-    <p:sldId xmlns:r="http://schemas.openxmlformats.org/officeDocument/2006/relationships" id="263" r:id="R637491a060d3444a"/>
-    <p:sldId xmlns:r="http://schemas.openxmlformats.org/officeDocument/2006/relationships" id="264" r:id="R59fb711ce03a44aa"/>
-    <p:sldId xmlns:r="http://schemas.openxmlformats.org/officeDocument/2006/relationships" id="265" r:id="Rb8730a1d44e0469a"/>
-    <p:sldId xmlns:r="http://schemas.openxmlformats.org/officeDocument/2006/relationships" id="266" r:id="R074440736eb14698"/>
-    <p:sldId xmlns:r="http://schemas.openxmlformats.org/officeDocument/2006/relationships" id="267" r:id="R1c2230f0abf04797"/>
-    <p:sldId xmlns:r="http://schemas.openxmlformats.org/officeDocument/2006/relationships" id="268" r:id="R357a4798d02e429a"/>
-    <p:sldId xmlns:r="http://schemas.openxmlformats.org/officeDocument/2006/relationships" id="269" r:id="Ra6f3bb1a12314644"/>
-    <p:sldId xmlns:r="http://schemas.openxmlformats.org/officeDocument/2006/relationships" id="270" r:id="R063766a108724c5e"/>
-    <p:sldId xmlns:r="http://schemas.openxmlformats.org/officeDocument/2006/relationships" id="271" r:id="R00d3506f62e44a4e"/>
-    <p:sldId xmlns:r="http://schemas.openxmlformats.org/officeDocument/2006/relationships" id="272" r:id="Rb8d3545f7b294212"/>
-    <p:sldId xmlns:r="http://schemas.openxmlformats.org/officeDocument/2006/relationships" id="273" r:id="Rd51b1030e66946e1"/>
+    <p:sldId xmlns:r="http://schemas.openxmlformats.org/officeDocument/2006/relationships" id="256" r:id="R708dd0864e334213"/>
+    <p:sldId xmlns:r="http://schemas.openxmlformats.org/officeDocument/2006/relationships" id="257" r:id="R4d681224831840dc"/>
+    <p:sldId xmlns:r="http://schemas.openxmlformats.org/officeDocument/2006/relationships" id="258" r:id="R2622e1ef101b4292"/>
+    <p:sldId xmlns:r="http://schemas.openxmlformats.org/officeDocument/2006/relationships" id="259" r:id="Rc968975c8d844350"/>
+    <p:sldId xmlns:r="http://schemas.openxmlformats.org/officeDocument/2006/relationships" id="260" r:id="R2ab28a0196674e6e"/>
+    <p:sldId xmlns:r="http://schemas.openxmlformats.org/officeDocument/2006/relationships" id="261" r:id="Rfc149c02a18b4245"/>
+    <p:sldId xmlns:r="http://schemas.openxmlformats.org/officeDocument/2006/relationships" id="262" r:id="Ra7c0051490d94d72"/>
+    <p:sldId xmlns:r="http://schemas.openxmlformats.org/officeDocument/2006/relationships" id="263" r:id="R9eaeb2f406cb4a3f"/>
+    <p:sldId xmlns:r="http://schemas.openxmlformats.org/officeDocument/2006/relationships" id="264" r:id="R0e36079390d74e7e"/>
+    <p:sldId xmlns:r="http://schemas.openxmlformats.org/officeDocument/2006/relationships" id="265" r:id="R8940a9bcde3d47a2"/>
+    <p:sldId xmlns:r="http://schemas.openxmlformats.org/officeDocument/2006/relationships" id="266" r:id="R2f663d1e7dd04aff"/>
+    <p:sldId xmlns:r="http://schemas.openxmlformats.org/officeDocument/2006/relationships" id="267" r:id="R5ef9ba89a3d84bfc"/>
+    <p:sldId xmlns:r="http://schemas.openxmlformats.org/officeDocument/2006/relationships" id="268" r:id="Rd1f6915e472a48f5"/>
+    <p:sldId xmlns:r="http://schemas.openxmlformats.org/officeDocument/2006/relationships" id="269" r:id="R00aea908f28d48ca"/>
+    <p:sldId xmlns:r="http://schemas.openxmlformats.org/officeDocument/2006/relationships" id="270" r:id="R76641b74f27d42de"/>
+    <p:sldId xmlns:r="http://schemas.openxmlformats.org/officeDocument/2006/relationships" id="271" r:id="R8bd6d63d1f1c4466"/>
+    <p:sldId xmlns:r="http://schemas.openxmlformats.org/officeDocument/2006/relationships" id="272" r:id="R95ad89e29fec4ce6"/>
+    <p:sldId xmlns:r="http://schemas.openxmlformats.org/officeDocument/2006/relationships" id="273" r:id="R161a500217c9493d"/>
   </p:sldIdLst>
   <p:sldSz cx="12192000" cy="6858000"/>
   <p:notesSz cx="6858000" cy="9144000"/>
@@ -754,22 +754,7 @@
           <a:lstStyle xmlns:a="http://schemas.openxmlformats.org/drawingml/2006/main"/>
           <a:p xmlns:a="http://schemas.openxmlformats.org/drawingml/2006/main">
             <a:r>
-              <a:t>[พูด] หลักฐานที่ดีต้องเปิดได้ ตรงกับกิจกรรม และรู้ว่าเป็นเอกสารของรายการใดครับ ลิงก์ควรเปิดได้จากบัญชีของผู้ประเมิน ไม่ใช่เปิดได้เฉพาะเจ้าของไฟล์ และควรตั้งชื่อไฟล์ให้ค้นหาได้ง่าย เดี๋ยวผมกรอกกิจกรรมหนึ่งรายการและแนบหลักฐานให้ดูก่อนครับ ทุกท่านสังเกตทั้งคะแนนที่ระบบคำนวณและการทดลองเปิดลิงก์</a:t>
-            </a:r>
-          </a:p>
-          <a:p xmlns:a="http://schemas.openxmlformats.org/drawingml/2006/main">
-            <a:r>
-              <a:t>[เปลี่ยนไปสาธิตระบบ] ต่อไปผมจะเปิดระบบตามหัวข้อนี้ให้ดูครับ ทุกท่านยังไม่ต้องกดตาม ให้สังเกตขั้นตอนบนหน้าจอก่อน</a:t>
-            </a:r>
-          </a:p>
-          <a:p xmlns:a="http://schemas.openxmlformats.org/drawingml/2006/main">
-            <a:r>
-              <a:t>[สาธิต] กรอกกิจกรรมหนึ่งรายการ ตรวจคะแนน แนบหลักฐาน และทดลองเปิดลิงก์</a:t>
-            </a:r>
-          </a:p>
-          <a:p xmlns:a="http://schemas.openxmlformats.org/drawingml/2006/main">
-            <a:r>
-              <a:t>[กลับมานำเสนอ] เมื่อเห็นการกรอกกิจกรรมและเปิดหลักฐานแล้ว ต่อไปเรามาแยกบันทึกร่างกับส่งแบบประเมินให้ชัดครับ</a:t>
+              <a:t>[พูด] หลักฐานที่ดีต้องเปิดได้ ตรงกับกิจกรรม และรู้ว่าเป็นเอกสารของรายการใดครับ ลิงก์ควรเปิดได้จากบัญชีของผู้ประเมิน ไม่ใช่เปิดได้เฉพาะเจ้าของไฟล์ และควรตั้งชื่อไฟล์ให้ค้นหาได้ง่าย หลักฐานควรผ่านการตรวจทั้งคะแนนที่ระบบคำนวณ การเปิดลิงก์ และความตรงกับกิจกรรมครับ</a:t>
             </a:r>
           </a:p>
           <a:p xmlns:a="http://schemas.openxmlformats.org/drawingml/2006/main">
@@ -964,7 +949,7 @@
           <a:lstStyle xmlns:a="http://schemas.openxmlformats.org/drawingml/2006/main"/>
           <a:p xmlns:a="http://schemas.openxmlformats.org/drawingml/2006/main">
             <a:r>
-              <a:t>[พูด] หลังส่งแบบประเมิน ระบบจะส่งงานตามลำดับผู้ประเมินที่ Admin กำหนดไว้ครับ ผู้ประเมินแต่ละคนตรวจ ให้ผล และส่งต่อไปยังคนถัดไป จำนวนขั้นและสิทธิ์อาจไม่เหมือนกันในทุกงาน เพราะฉะนั้นอย่าคาดเดาจากชื่อตำแหน่ง ให้ดูสถานะและลำดับของรายการนั้นเป็นหลัก เมื่อเข้าใจตรงนี้แล้ว เดี๋ยวเราสลับไปดูหน้าของผู้ประเมินกันครับ</a:t>
+              <a:t>[พูด] หลังส่งแบบประเมิน ระบบจะส่งงานตามลำดับผู้ประเมินที่ Admin กำหนดไว้ครับ ผู้ประเมินแต่ละคนตรวจ ให้ผล และส่งต่อไปยังคนถัดไป จำนวนขั้นและสิทธิ์อาจไม่เหมือนกันในทุกงาน เพราะฉะนั้นอย่าคาดเดาจากชื่อตำแหน่ง ให้ดูสถานะและลำดับของรายการนั้นเป็นหลัก เมื่อเข้าใจตรงนี้แล้ว ต่อไปเรามาดูหน้าที่ของผู้ประเมินครับ</a:t>
             </a:r>
           </a:p>
           <a:p xmlns:a="http://schemas.openxmlformats.org/drawingml/2006/main">
@@ -1059,22 +1044,7 @@
           <a:lstStyle xmlns:a="http://schemas.openxmlformats.org/drawingml/2006/main"/>
           <a:p xmlns:a="http://schemas.openxmlformats.org/drawingml/2006/main">
             <a:r>
-              <a:t>[พูด] ตอนนี้เราอยู่ในมุมผู้ประเมินครับ สิ่งที่ต้องตรวจคือผลกิจกรรม เป้าหมาย คะแนนที่ระบบคำนวณ และหลักฐานว่าตรงกับเกณฑ์หรือไม่ ควรเปิดหลักฐานจริงก่อนให้ผลนะครับ ไม่ควรดูเฉพาะชื่อไฟล์ เดี๋ยวผมทำให้ดูหนึ่งรายการ ให้สังเกตว่าข้อมูลใดมาจากผู้รับการประเมิน และตรงไหนเป็นส่วนที่ผู้ประเมินต้องตัดสินใจ</a:t>
-            </a:r>
-          </a:p>
-          <a:p xmlns:a="http://schemas.openxmlformats.org/drawingml/2006/main">
-            <a:r>
-              <a:t>[เปลี่ยนไปสาธิตระบบ] ต่อไปผมจะเปิดระบบตามหัวข้อนี้ให้ดูครับ ทุกท่านยังไม่ต้องกดตาม ให้สังเกตขั้นตอนบนหน้าจอก่อน</a:t>
-            </a:r>
-          </a:p>
-          <a:p xmlns:a="http://schemas.openxmlformats.org/drawingml/2006/main">
-            <a:r>
-              <a:t>[สาธิต] เปิดบัญชีผู้ประเมิน ตรวจผลกิจกรรม คะแนน และหลักฐาน แล้วบันทึกผล</a:t>
-            </a:r>
-          </a:p>
-          <a:p xmlns:a="http://schemas.openxmlformats.org/drawingml/2006/main">
-            <a:r>
-              <a:t>[กลับมานำเสนอ] เมื่อเห็นมุมของผู้ประเมินแล้ว ต่อไปเรามาดูการส่งต่อและการยืนยันขั้นสุดท้ายครับ</a:t>
+              <a:t>[พูด] ตอนนี้เราอยู่ในมุมผู้ประเมินครับ สิ่งที่ต้องตรวจคือผลกิจกรรม เป้าหมาย คะแนนที่ระบบคำนวณ และหลักฐานว่าตรงกับเกณฑ์หรือไม่ ควรเปิดหลักฐานจริงก่อนให้ผลนะครับ ไม่ควรดูเฉพาะชื่อไฟล์ เมื่อผู้ประเมินได้รับงาน ควรแยกให้ชัดว่าข้อมูลใดมาจากผู้รับการประเมิน และส่วนใดเป็นการตัดสินใจของผู้ประเมินครับ</a:t>
             </a:r>
           </a:p>
           <a:p xmlns:a="http://schemas.openxmlformats.org/drawingml/2006/main">
@@ -1174,22 +1144,72 @@
           <a:lstStyle xmlns:a="http://schemas.openxmlformats.org/drawingml/2006/main"/>
           <a:p xmlns:a="http://schemas.openxmlformats.org/drawingml/2006/main">
             <a:r>
-              <a:t>[พูด] ผู้ประเมินแต่ละคนทำงานเฉพาะขั้นของตัวเองครับ เมื่อตรวจครบแล้วจึงส่งต่อ คนถัดไปจึงจะรับงาน และเมื่อถึงคนสุดท้าย บุคคลนั้นจะยืนยันขั้นสุดท้ายจนสถานะเป็น Completed คนสุดท้ายอาจเป็นบทบาทใดก็ได้ตามลำดับที่ Admin กำหนดนะครับ เดี๋ยวผมส่งต่องานและเปิดบัญชีคนสุดท้ายให้ดู เพื่อให้เห็นการเปลี่ยนสถานะจริงครับ</a:t>
-            </a:r>
-          </a:p>
-          <a:p xmlns:a="http://schemas.openxmlformats.org/drawingml/2006/main">
-            <a:r>
-              <a:t>[เปลี่ยนไปสาธิตระบบ] ต่อไปผมจะเปิดระบบตามหัวข้อนี้ให้ดูครับ ทุกท่านยังไม่ต้องกดตาม ให้สังเกตขั้นตอนบนหน้าจอก่อน</a:t>
-            </a:r>
-          </a:p>
-          <a:p xmlns:a="http://schemas.openxmlformats.org/drawingml/2006/main">
-            <a:r>
-              <a:t>[สาธิต] ส่งต่องานหนึ่งลำดับ เปิดด้วยบัญชีผู้ประเมินคนสุดท้าย และยืนยันจนสถานะเป็น Completed</a:t>
-            </a:r>
-          </a:p>
-          <a:p xmlns:a="http://schemas.openxmlformats.org/drawingml/2006/main">
-            <a:r>
-              <a:t>[กลับมานำเสนอ] เมื่อเห็นสถานะ Completed แล้ว ต่อไปจะเป็นช่วงที่ทุกท่านได้ทดลองใช้งานครับ</a:t>
+              <a:t>[พูด] ผู้ประเมินแต่ละคนทำงานเฉพาะขั้นของตัวเองครับ เมื่อตรวจครบแล้วจึงส่งต่อ คนถัดไปจึงจะรับงาน และเมื่อถึงคนสุดท้าย บุคคลนั้นจะยืนยันขั้นสุดท้ายจนสถานะเป็น Completed คนสุดท้ายอาจเป็นบทบาทใดก็ได้ตามลำดับที่ Admin กำหนดนะครับ เมื่อส่งต่องาน สถานะและผู้รับผิดชอบจะเปลี่ยนไปตามลำดับ จนผู้ประเมินลำดับสุดท้ายยืนยันผลครับ</a:t>
+            </a:r>
+          </a:p>
+          <a:p xmlns:a="http://schemas.openxmlformats.org/drawingml/2006/main">
+            <a:r>
+              <a:t>[เริ่มสาธิตระบบ] ต่อไปผมจะสาธิตขั้นตอนทั้งหมดบนระบบให้ดู ตั้งแต่เริ่มต้นจนงานเสร็จครับ ทุกท่านยังไม่ต้องกดตาม ให้สังเกตลำดับการทำงานก่อน</a:t>
+            </a:r>
+          </a:p>
+          <a:p xmlns:a="http://schemas.openxmlformats.org/drawingml/2006/main">
+            <a:r>
+              <a:t>[สาธิตต่อเนื่อง]</a:t>
+            </a:r>
+          </a:p>
+          <a:p xmlns:a="http://schemas.openxmlformats.org/drawingml/2006/main">
+            <a:r>
+              <a:t>1. เปิดแดชบอร์ดและรายการที่ได้รับมอบหมาย</a:t>
+            </a:r>
+          </a:p>
+          <a:p xmlns:a="http://schemas.openxmlformats.org/drawingml/2006/main">
+            <a:r>
+              <a:t>2. กรอกกิจกรรม เป้าหมาย และผล</a:t>
+            </a:r>
+          </a:p>
+          <a:p xmlns:a="http://schemas.openxmlformats.org/drawingml/2006/main">
+            <a:r>
+              <a:t>3. ตรวจคะแนนที่ระบบคำนวณ</a:t>
+            </a:r>
+          </a:p>
+          <a:p xmlns:a="http://schemas.openxmlformats.org/drawingml/2006/main">
+            <a:r>
+              <a:t>4. แนบและเปิดหลักฐาน</a:t>
+            </a:r>
+          </a:p>
+          <a:p xmlns:a="http://schemas.openxmlformats.org/drawingml/2006/main">
+            <a:r>
+              <a:t>5. บันทึกร่าง</a:t>
+            </a:r>
+          </a:p>
+          <a:p xmlns:a="http://schemas.openxmlformats.org/drawingml/2006/main">
+            <a:r>
+              <a:t>6. ตรวจความพร้อมและส่งแบบประเมิน</a:t>
+            </a:r>
+          </a:p>
+          <a:p xmlns:a="http://schemas.openxmlformats.org/drawingml/2006/main">
+            <a:r>
+              <a:t>7. เปิดมุมผู้ประเมิน</a:t>
+            </a:r>
+          </a:p>
+          <a:p xmlns:a="http://schemas.openxmlformats.org/drawingml/2006/main">
+            <a:r>
+              <a:t>8. ตรวจข้อมูล ให้ผล และส่งต่อ</a:t>
+            </a:r>
+          </a:p>
+          <a:p xmlns:a="http://schemas.openxmlformats.org/drawingml/2006/main">
+            <a:r>
+              <a:t>9. เปิดบัญชีผู้ประเมินลำดับสุดท้าย</a:t>
+            </a:r>
+          </a:p>
+          <a:p xmlns:a="http://schemas.openxmlformats.org/drawingml/2006/main">
+            <a:r>
+              <a:t>10. ยืนยันผลจนสถานะเป็น ประเมินเสร็จสิ้น (Completed)</a:t>
+            </a:r>
+          </a:p>
+          <a:p xmlns:a="http://schemas.openxmlformats.org/drawingml/2006/main">
+            <a:r>
+              <a:t>[กลับมานำเสนอ] เมื่อเห็นขั้นตอนทั้งหมดแล้ว ต่อไปทุกท่านจะได้ทดลองทำด้วยบัญชีที่เตรียมไว้ครับ</a:t>
             </a:r>
           </a:p>
           <a:p xmlns:a="http://schemas.openxmlformats.org/drawingml/2006/main">
@@ -1899,12 +1919,7 @@
           <a:lstStyle xmlns:a="http://schemas.openxmlformats.org/drawingml/2006/main"/>
           <a:p xmlns:a="http://schemas.openxmlformats.org/drawingml/2006/main">
             <a:r>
-              <a:t>[พูด] ผู้รับการประเมินเป็นคนเตรียมเรื่องราวของกิจกรรมให้ครบครับ เราต้องบอกให้ได้ว่าทำกิจกรรมอะไร ตั้งเป้าหมายไว้เท่าไร ผลจริงเป็นอย่างไร และมีหลักฐานใดยืนยัน ถ้าข้อมูลยังไม่พร้อมก็ใช้บันทึกร่างก่อนได้ ไม่ต้องรีบส่งครับ เพราะข้อมูลที่เราเตรียมตรงนี้จะเป็นฐานให้ผู้ประเมินตัดสินใจ ทีนี้เดี๋ยวผมพาไปดูว่าควรเริ่มจากตรงไหนบนหน้าจอ</a:t>
-            </a:r>
-          </a:p>
-          <a:p xmlns:a="http://schemas.openxmlformats.org/drawingml/2006/main">
-            <a:r>
-              <a:t>[เตรียมสาธิต] ตั้งแต่สไลด์ถัดไป ผมจะเปิดระบบให้ดูเป็นช่วง ๆ ครับ ทุกท่านยังไม่ต้องกดตาม จนกว่าจะถึงช่วงทดลองใช้งาน</a:t>
+              <a:t>[พูด] ผู้รับการประเมินเป็นคนเตรียมเรื่องราวของกิจกรรมให้ครบครับ เราต้องบอกให้ได้ว่าทำกิจกรรมอะไร ตั้งเป้าหมายไว้เท่าไร ผลจริงเป็นอย่างไร และมีหลักฐานใดยืนยัน ถ้าข้อมูลยังไม่พร้อมก็ใช้บันทึกร่างก่อนได้ ไม่ต้องรีบส่งครับ เพราะข้อมูลที่เราเตรียมตรงนี้จะเป็นฐานให้ผู้ประเมินตัดสินใจ เมื่อเข้าใจหน้าที่นี้แล้ว ต่อไปเรามาดูจุดเริ่มต้นบนแดชบอร์ดครับ</a:t>
             </a:r>
           </a:p>
           <a:p xmlns:a="http://schemas.openxmlformats.org/drawingml/2006/main">
@@ -1999,22 +2014,7 @@
           <a:lstStyle xmlns:a="http://schemas.openxmlformats.org/drawingml/2006/main"/>
           <a:p xmlns:a="http://schemas.openxmlformats.org/drawingml/2006/main">
             <a:r>
-              <a:t>[พูด] ต่อไปมาที่แดชบอร์ดของฉันครับ ก่อนเปิดงานให้ตรวจรอบประเมินที่ผู้ดูแลระบบกำหนด รายการที่ได้รับมอบหมาย และสถานะปัจจุบัน ผู้ใช้งานไม่ต้องเลือกรอบเองนะครับ ถ้ารายการไม่ตรงให้หยุดและแจ้งผู้ดูแลระบบก่อน เดี๋ยวผมทำให้ดูก่อน ทุกท่านยังไม่ต้องกดตามครับ ให้สังเกตชื่อรอบ ชื่อรายการ และปุ่มเปิดงาน</a:t>
-            </a:r>
-          </a:p>
-          <a:p xmlns:a="http://schemas.openxmlformats.org/drawingml/2006/main">
-            <a:r>
-              <a:t>[เปลี่ยนไปสาธิตระบบ] ต่อไปผมจะเปิดระบบตามหัวข้อนี้ให้ดูครับ ทุกท่านยังไม่ต้องกดตาม ให้สังเกตขั้นตอนบนหน้าจอก่อน</a:t>
-            </a:r>
-          </a:p>
-          <a:p xmlns:a="http://schemas.openxmlformats.org/drawingml/2006/main">
-            <a:r>
-              <a:t>[สาธิต] เปิดแดชบอร์ด ตรวจสอบรอบประเมินที่ได้รับมอบหมาย แล้วเปิดรายการสายสนับสนุนที่เตรียมไว้</a:t>
-            </a:r>
-          </a:p>
-          <a:p xmlns:a="http://schemas.openxmlformats.org/drawingml/2006/main">
-            <a:r>
-              <a:t>[กลับมานำเสนอ] เมื่อเห็นจุดเริ่มต้นบนระบบแล้ว ต่อไปเรามาดูความสัมพันธ์ระหว่างโครงการ กิจกรรม ตัวชี้วัด และหลักฐานครับ</a:t>
+              <a:t>[พูด] ต่อไปมาที่แดชบอร์ดของฉันครับ ก่อนเปิดงานให้ตรวจรอบประเมินที่ผู้ดูแลระบบกำหนด รายการที่ได้รับมอบหมาย และสถานะปัจจุบัน ผู้ใช้งานไม่ต้องเลือกรอบเองนะครับ ถ้ารายการไม่ตรงให้หยุดและแจ้งผู้ดูแลระบบก่อน บนแดชบอร์ดให้สังเกตชื่อรอบ ชื่อรายการ และปุ่มเปิดงานครับ</a:t>
             </a:r>
           </a:p>
           <a:p xmlns:a="http://schemas.openxmlformats.org/drawingml/2006/main">
@@ -2282,7 +2282,7 @@
   </p:cSld>
   <p:clrMap bg1="lt1" tx1="dk1" bg2="lt2" tx2="dk2" accent1="accent1" accent2="accent2" accent3="accent3" accent4="accent4" accent5="accent5" accent6="accent6" hlink="hlink" folHlink="folHlink"/>
   <p:sldLayoutIdLst>
-    <p:sldLayoutId xmlns:r="http://schemas.openxmlformats.org/officeDocument/2006/relationships" id="2147483649" r:id="Rbe318a677f8e43f1"/>
+    <p:sldLayoutId xmlns:r="http://schemas.openxmlformats.org/officeDocument/2006/relationships" id="2147483649" r:id="R29b4f58ed2904506"/>
   </p:sldLayoutIdLst>
   <p:txStyles>
     <p:titleStyle>
@@ -2837,7 +2837,7 @@
           <p:nvPr/>
         </p:nvPicPr>
         <p:blipFill>
-          <a:blip xmlns:r="http://schemas.openxmlformats.org/officeDocument/2006/relationships" xmlns:a="http://schemas.openxmlformats.org/drawingml/2006/main" r:embed="Rfd28a947962e4aa2"/>
+          <a:blip xmlns:r="http://schemas.openxmlformats.org/officeDocument/2006/relationships" xmlns:a="http://schemas.openxmlformats.org/drawingml/2006/main" r:embed="R072684655ecf4e29"/>
           <a:srcRect xmlns:a="http://schemas.openxmlformats.org/drawingml/2006/main" l="2579" t="0" r="2579" b="0"/>
           <a:stretch xmlns:a="http://schemas.openxmlformats.org/drawingml/2006/main">
             <a:fillRect l="0" t="0" r="0" b="0"/>
@@ -2858,7 +2858,7 @@
           <p:cNvPr id="2" name="cover-panel">
             <a:extLst xmlns:a="http://schemas.openxmlformats.org/drawingml/2006/main">
               <a:ext uri="{FF2B5EF4-FFF2-40B4-BE49-F238E27FC236}">
-                <a16:creationId xmlns:a16="http://schemas.microsoft.com/office/drawing/2014/main" id="{4BD920DD-3FBA-46AA-AFA6-410B13FC3DE8}"/>
+                <a16:creationId xmlns:a16="http://schemas.microsoft.com/office/drawing/2014/main" id="{230775A3-31CA-4654-952D-33C1BB01C0C2}"/>
               </a:ext>
             </a:extLst>
           </p:cNvPr>
@@ -2889,7 +2889,7 @@
           <p:cNvPr id="3" name="cover-accent">
             <a:extLst xmlns:a="http://schemas.openxmlformats.org/drawingml/2006/main">
               <a:ext uri="{FF2B5EF4-FFF2-40B4-BE49-F238E27FC236}">
-                <a16:creationId xmlns:a16="http://schemas.microsoft.com/office/drawing/2014/main" id="{7B3A8A63-4259-4E88-BDCC-6C9864C88F2A}"/>
+                <a16:creationId xmlns:a16="http://schemas.microsoft.com/office/drawing/2014/main" id="{CA283370-CE74-41D3-A7F9-C29C03C05FA4}"/>
               </a:ext>
             </a:extLst>
           </p:cNvPr>
@@ -2924,7 +2924,7 @@
           <p:nvPr/>
         </p:nvPicPr>
         <p:blipFill>
-          <a:blip xmlns:r="http://schemas.openxmlformats.org/officeDocument/2006/relationships" xmlns:a="http://schemas.openxmlformats.org/drawingml/2006/main" r:embed="Rb03719f3d2154348"/>
+          <a:blip xmlns:r="http://schemas.openxmlformats.org/officeDocument/2006/relationships" xmlns:a="http://schemas.openxmlformats.org/drawingml/2006/main" r:embed="R91259323042c493d"/>
           <a:stretch xmlns:a="http://schemas.openxmlformats.org/drawingml/2006/main"/>
         </p:blipFill>
         <p:spPr>
@@ -2942,7 +2942,7 @@
           <p:cNvPr id="5" name="cover-institution">
             <a:extLst xmlns:a="http://schemas.openxmlformats.org/drawingml/2006/main">
               <a:ext uri="{FF2B5EF4-FFF2-40B4-BE49-F238E27FC236}">
-                <a16:creationId xmlns:a16="http://schemas.microsoft.com/office/drawing/2014/main" id="{CDB00FE0-CF47-4949-9002-D0655C6DD291}"/>
+                <a16:creationId xmlns:a16="http://schemas.microsoft.com/office/drawing/2014/main" id="{C3599FED-647D-49A0-9AE5-5F15FABBAC4A}"/>
               </a:ext>
             </a:extLst>
           </p:cNvPr>
@@ -3004,7 +3004,7 @@
           <p:cNvPr id="6" name="cover-session">
             <a:extLst xmlns:a="http://schemas.openxmlformats.org/drawingml/2006/main">
               <a:ext uri="{FF2B5EF4-FFF2-40B4-BE49-F238E27FC236}">
-                <a16:creationId xmlns:a16="http://schemas.microsoft.com/office/drawing/2014/main" id="{4D83D276-F8C0-4EAB-AE03-582C83F0A729}"/>
+                <a16:creationId xmlns:a16="http://schemas.microsoft.com/office/drawing/2014/main" id="{A682ACDD-8065-4AFE-8A8A-0B3B7ECE174C}"/>
               </a:ext>
             </a:extLst>
           </p:cNvPr>
@@ -3066,7 +3066,7 @@
           <p:cNvPr id="7" name="cover-title">
             <a:extLst xmlns:a="http://schemas.openxmlformats.org/drawingml/2006/main">
               <a:ext uri="{FF2B5EF4-FFF2-40B4-BE49-F238E27FC236}">
-                <a16:creationId xmlns:a16="http://schemas.microsoft.com/office/drawing/2014/main" id="{A470D213-6405-4028-A0EB-03023D6D159E}"/>
+                <a16:creationId xmlns:a16="http://schemas.microsoft.com/office/drawing/2014/main" id="{47773968-1A2E-48DC-8103-D94081E74C9B}"/>
               </a:ext>
             </a:extLst>
           </p:cNvPr>
@@ -3128,7 +3128,7 @@
           <p:cNvPr id="8" name="cover-system-short-name">
             <a:extLst xmlns:a="http://schemas.openxmlformats.org/drawingml/2006/main">
               <a:ext uri="{FF2B5EF4-FFF2-40B4-BE49-F238E27FC236}">
-                <a16:creationId xmlns:a16="http://schemas.microsoft.com/office/drawing/2014/main" id="{328C5F3D-8462-4234-B733-C1237C76F3DB}"/>
+                <a16:creationId xmlns:a16="http://schemas.microsoft.com/office/drawing/2014/main" id="{55DAF244-ABE8-4ABD-9E27-4AF13F7683DC}"/>
               </a:ext>
             </a:extLst>
           </p:cNvPr>
@@ -3190,7 +3190,7 @@
           <p:cNvPr id="9" name="cover-gold-rule">
             <a:extLst xmlns:a="http://schemas.openxmlformats.org/drawingml/2006/main">
               <a:ext uri="{FF2B5EF4-FFF2-40B4-BE49-F238E27FC236}">
-                <a16:creationId xmlns:a16="http://schemas.microsoft.com/office/drawing/2014/main" id="{A2AA34B2-C68C-4970-8246-D749623C289F}"/>
+                <a16:creationId xmlns:a16="http://schemas.microsoft.com/office/drawing/2014/main" id="{71A21E8C-1C0C-49A8-9EC4-43F34FB55759}"/>
               </a:ext>
             </a:extLst>
           </p:cNvPr>
@@ -3221,7 +3221,7 @@
           <p:cNvPr id="10" name="cover-promise">
             <a:extLst xmlns:a="http://schemas.openxmlformats.org/drawingml/2006/main">
               <a:ext uri="{FF2B5EF4-FFF2-40B4-BE49-F238E27FC236}">
-                <a16:creationId xmlns:a16="http://schemas.microsoft.com/office/drawing/2014/main" id="{63683B48-4FBD-42AC-83E8-7F1A986EC51B}"/>
+                <a16:creationId xmlns:a16="http://schemas.microsoft.com/office/drawing/2014/main" id="{CC3A2619-3112-417E-9057-7F4DE6F92361}"/>
               </a:ext>
             </a:extLst>
           </p:cNvPr>
@@ -3283,7 +3283,7 @@
           <p:cNvPr id="11" name="cover-style">
             <a:extLst xmlns:a="http://schemas.openxmlformats.org/drawingml/2006/main">
               <a:ext uri="{FF2B5EF4-FFF2-40B4-BE49-F238E27FC236}">
-                <a16:creationId xmlns:a16="http://schemas.microsoft.com/office/drawing/2014/main" id="{8CF27664-C6EA-40F1-8652-B777A36C0282}"/>
+                <a16:creationId xmlns:a16="http://schemas.microsoft.com/office/drawing/2014/main" id="{A606FD9A-8E37-4A20-80DA-7672470B68F9}"/>
               </a:ext>
             </a:extLst>
           </p:cNvPr>
@@ -3349,7 +3349,7 @@
           <p:nvPr/>
         </p:nvPicPr>
         <p:blipFill>
-          <a:blip xmlns:r="http://schemas.openxmlformats.org/officeDocument/2006/relationships" xmlns:a="http://schemas.openxmlformats.org/drawingml/2006/main" r:embed="R3c7b39f88c374072"/>
+          <a:blip xmlns:r="http://schemas.openxmlformats.org/officeDocument/2006/relationships" xmlns:a="http://schemas.openxmlformats.org/drawingml/2006/main" r:embed="R043af6b08deb4eba"/>
           <a:stretch xmlns:a="http://schemas.openxmlformats.org/drawingml/2006/main"/>
         </p:blipFill>
         <p:spPr>
@@ -3365,7 +3365,7 @@
     </p:spTree>
     <p:extLst>
       <p:ext uri="{BB962C8B-B14F-4D97-AF65-F5344CB8AC3E}">
-        <p14:creationId xmlns:p14="http://schemas.microsoft.com/office/powerpoint/2010/main" val="599453742"/>
+        <p14:creationId xmlns:p14="http://schemas.microsoft.com/office/powerpoint/2010/main" val="535675839"/>
       </p:ext>
     </p:extLst>
   </p:cSld>
@@ -3396,7 +3396,7 @@
           <p:cNvPr id="15" name="side-accent-10">
             <a:extLst xmlns:a="http://schemas.openxmlformats.org/drawingml/2006/main">
               <a:ext uri="{FF2B5EF4-FFF2-40B4-BE49-F238E27FC236}">
-                <a16:creationId xmlns:a16="http://schemas.microsoft.com/office/drawing/2014/main" id="{ECC15DAA-BC26-4F82-B8CA-A07EFD9F2E7D}"/>
+                <a16:creationId xmlns:a16="http://schemas.microsoft.com/office/drawing/2014/main" id="{5DEA5770-7FAD-4654-B521-CF5FC193395F}"/>
               </a:ext>
             </a:extLst>
           </p:cNvPr>
@@ -3427,7 +3427,7 @@
           <p:cNvPr id="2" name="kicker-10">
             <a:extLst xmlns:a="http://schemas.openxmlformats.org/drawingml/2006/main">
               <a:ext uri="{FF2B5EF4-FFF2-40B4-BE49-F238E27FC236}">
-                <a16:creationId xmlns:a16="http://schemas.microsoft.com/office/drawing/2014/main" id="{6C46BE26-632F-4F45-97A1-061D0A56DE6E}"/>
+                <a16:creationId xmlns:a16="http://schemas.microsoft.com/office/drawing/2014/main" id="{0B10F8CE-58F7-4233-984F-5A6C5A16CF2E}"/>
               </a:ext>
             </a:extLst>
           </p:cNvPr>
@@ -3489,7 +3489,7 @@
           <p:cNvPr id="3" name="title-10">
             <a:extLst xmlns:a="http://schemas.openxmlformats.org/drawingml/2006/main">
               <a:ext uri="{FF2B5EF4-FFF2-40B4-BE49-F238E27FC236}">
-                <a16:creationId xmlns:a16="http://schemas.microsoft.com/office/drawing/2014/main" id="{57684424-75BB-498F-9044-578768DB729B}"/>
+                <a16:creationId xmlns:a16="http://schemas.microsoft.com/office/drawing/2014/main" id="{49FC4D05-1CBF-491D-8604-40EDBA00E56B}"/>
               </a:ext>
             </a:extLst>
           </p:cNvPr>
@@ -3551,7 +3551,7 @@
           <p:cNvPr id="4" name="">
             <a:extLst xmlns:a="http://schemas.openxmlformats.org/drawingml/2006/main">
               <a:ext uri="{FF2B5EF4-FFF2-40B4-BE49-F238E27FC236}">
-                <a16:creationId xmlns:a16="http://schemas.microsoft.com/office/drawing/2014/main" id="{1C0072D3-DAB5-4041-8242-3B0BC62ECF72}"/>
+                <a16:creationId xmlns:a16="http://schemas.microsoft.com/office/drawing/2014/main" id="{6011A0AA-5B8D-425C-8F21-A4AF39D50D31}"/>
               </a:ext>
             </a:extLst>
           </p:cNvPr>
@@ -3613,7 +3613,7 @@
           <p:cNvPr id="5" name="">
             <a:extLst xmlns:a="http://schemas.openxmlformats.org/drawingml/2006/main">
               <a:ext uri="{FF2B5EF4-FFF2-40B4-BE49-F238E27FC236}">
-                <a16:creationId xmlns:a16="http://schemas.microsoft.com/office/drawing/2014/main" id="{BC105AF9-41A9-4638-BCB6-4AA2CDA05199}"/>
+                <a16:creationId xmlns:a16="http://schemas.microsoft.com/office/drawing/2014/main" id="{D954CC23-894D-4095-9A0B-6E94358DFFF9}"/>
               </a:ext>
             </a:extLst>
           </p:cNvPr>
@@ -3675,7 +3675,7 @@
           <p:cNvPr id="6" name="">
             <a:extLst xmlns:a="http://schemas.openxmlformats.org/drawingml/2006/main">
               <a:ext uri="{FF2B5EF4-FFF2-40B4-BE49-F238E27FC236}">
-                <a16:creationId xmlns:a16="http://schemas.microsoft.com/office/drawing/2014/main" id="{4F72F7D2-65D0-472D-8724-C4A1E321145F}"/>
+                <a16:creationId xmlns:a16="http://schemas.microsoft.com/office/drawing/2014/main" id="{06F45B5A-1200-4F95-A617-4600C44D88A8}"/>
               </a:ext>
             </a:extLst>
           </p:cNvPr>
@@ -3743,7 +3743,7 @@
           <p:cNvPr id="7" name="">
             <a:extLst xmlns:a="http://schemas.openxmlformats.org/drawingml/2006/main">
               <a:ext uri="{FF2B5EF4-FFF2-40B4-BE49-F238E27FC236}">
-                <a16:creationId xmlns:a16="http://schemas.microsoft.com/office/drawing/2014/main" id="{54BF2620-8B84-4E6C-8FF5-509E52A2CEE5}"/>
+                <a16:creationId xmlns:a16="http://schemas.microsoft.com/office/drawing/2014/main" id="{BA28FEED-75EC-49EF-A121-D71678059670}"/>
               </a:ext>
             </a:extLst>
           </p:cNvPr>
@@ -3805,7 +3805,7 @@
           <p:cNvPr id="8" name="">
             <a:extLst xmlns:a="http://schemas.openxmlformats.org/drawingml/2006/main">
               <a:ext uri="{FF2B5EF4-FFF2-40B4-BE49-F238E27FC236}">
-                <a16:creationId xmlns:a16="http://schemas.microsoft.com/office/drawing/2014/main" id="{C07F8ECC-54D3-41E4-BDAC-14725692CFA1}"/>
+                <a16:creationId xmlns:a16="http://schemas.microsoft.com/office/drawing/2014/main" id="{9122FF7D-C302-4078-AA60-52F9B735E89A}"/>
               </a:ext>
             </a:extLst>
           </p:cNvPr>
@@ -3873,7 +3873,7 @@
           <p:cNvPr id="9" name="">
             <a:extLst xmlns:a="http://schemas.openxmlformats.org/drawingml/2006/main">
               <a:ext uri="{FF2B5EF4-FFF2-40B4-BE49-F238E27FC236}">
-                <a16:creationId xmlns:a16="http://schemas.microsoft.com/office/drawing/2014/main" id="{10A7C6C4-F54C-485B-BD90-6CD5D7992343}"/>
+                <a16:creationId xmlns:a16="http://schemas.microsoft.com/office/drawing/2014/main" id="{74E671EB-7D25-429F-8B18-DAAFC9C63EC7}"/>
               </a:ext>
             </a:extLst>
           </p:cNvPr>
@@ -3904,7 +3904,7 @@
           <p:cNvPr id="10" name="">
             <a:extLst xmlns:a="http://schemas.openxmlformats.org/drawingml/2006/main">
               <a:ext uri="{FF2B5EF4-FFF2-40B4-BE49-F238E27FC236}">
-                <a16:creationId xmlns:a16="http://schemas.microsoft.com/office/drawing/2014/main" id="{132E3C8A-60F5-4758-A122-15DF478649E1}"/>
+                <a16:creationId xmlns:a16="http://schemas.microsoft.com/office/drawing/2014/main" id="{B8200ACA-4C6D-433F-8125-E9EC356E3EE3}"/>
               </a:ext>
             </a:extLst>
           </p:cNvPr>
@@ -3966,7 +3966,7 @@
           <p:cNvPr id="11" name="">
             <a:extLst xmlns:a="http://schemas.openxmlformats.org/drawingml/2006/main">
               <a:ext uri="{FF2B5EF4-FFF2-40B4-BE49-F238E27FC236}">
-                <a16:creationId xmlns:a16="http://schemas.microsoft.com/office/drawing/2014/main" id="{70C744E1-E87A-47DB-B5AC-138968E5EF69}"/>
+                <a16:creationId xmlns:a16="http://schemas.microsoft.com/office/drawing/2014/main" id="{74DBC869-0CFC-4DAD-96B1-FE65AC230576}"/>
               </a:ext>
             </a:extLst>
           </p:cNvPr>
@@ -4028,7 +4028,7 @@
           <p:cNvPr id="12" name="footer-rule-10">
             <a:extLst xmlns:a="http://schemas.openxmlformats.org/drawingml/2006/main">
               <a:ext uri="{FF2B5EF4-FFF2-40B4-BE49-F238E27FC236}">
-                <a16:creationId xmlns:a16="http://schemas.microsoft.com/office/drawing/2014/main" id="{B6781F43-E0B7-4D5B-867B-46C1F5591BE1}"/>
+                <a16:creationId xmlns:a16="http://schemas.microsoft.com/office/drawing/2014/main" id="{F87B4D85-7BFC-4FCE-AF62-6CEF9B79B619}"/>
               </a:ext>
             </a:extLst>
           </p:cNvPr>
@@ -4059,7 +4059,7 @@
           <p:cNvPr id="13" name="footer-label-10">
             <a:extLst xmlns:a="http://schemas.openxmlformats.org/drawingml/2006/main">
               <a:ext uri="{FF2B5EF4-FFF2-40B4-BE49-F238E27FC236}">
-                <a16:creationId xmlns:a16="http://schemas.microsoft.com/office/drawing/2014/main" id="{A56B2616-7AB8-4D51-AD3F-1D03D05DE0A9}"/>
+                <a16:creationId xmlns:a16="http://schemas.microsoft.com/office/drawing/2014/main" id="{6B046CD1-F8F1-4F13-B289-555011729CFB}"/>
               </a:ext>
             </a:extLst>
           </p:cNvPr>
@@ -4121,7 +4121,7 @@
           <p:cNvPr id="14" name="footer-page-10">
             <a:extLst xmlns:a="http://schemas.openxmlformats.org/drawingml/2006/main">
               <a:ext uri="{FF2B5EF4-FFF2-40B4-BE49-F238E27FC236}">
-                <a16:creationId xmlns:a16="http://schemas.microsoft.com/office/drawing/2014/main" id="{3BA9AC52-F897-4315-AD0E-F7365ADAD69D}"/>
+                <a16:creationId xmlns:a16="http://schemas.microsoft.com/office/drawing/2014/main" id="{EF085F1C-E427-402D-A394-688C9DE61724}"/>
               </a:ext>
             </a:extLst>
           </p:cNvPr>
@@ -4181,7 +4181,7 @@
     </p:spTree>
     <p:extLst>
       <p:ext uri="{BB962C8B-B14F-4D97-AF65-F5344CB8AC3E}">
-        <p14:creationId xmlns:p14="http://schemas.microsoft.com/office/powerpoint/2010/main" val="643830650"/>
+        <p14:creationId xmlns:p14="http://schemas.microsoft.com/office/powerpoint/2010/main" val="284253096"/>
       </p:ext>
     </p:extLst>
   </p:cSld>
@@ -4212,7 +4212,7 @@
           <p:cNvPr id="17" name="side-accent-11">
             <a:extLst xmlns:a="http://schemas.openxmlformats.org/drawingml/2006/main">
               <a:ext uri="{FF2B5EF4-FFF2-40B4-BE49-F238E27FC236}">
-                <a16:creationId xmlns:a16="http://schemas.microsoft.com/office/drawing/2014/main" id="{C6FE2ADD-BCCF-4215-9585-13892F07AB9A}"/>
+                <a16:creationId xmlns:a16="http://schemas.microsoft.com/office/drawing/2014/main" id="{CBCE8AD3-748B-4F15-B38D-C0ECF3C36B8D}"/>
               </a:ext>
             </a:extLst>
           </p:cNvPr>
@@ -4243,7 +4243,7 @@
           <p:cNvPr id="2" name="kicker-11">
             <a:extLst xmlns:a="http://schemas.openxmlformats.org/drawingml/2006/main">
               <a:ext uri="{FF2B5EF4-FFF2-40B4-BE49-F238E27FC236}">
-                <a16:creationId xmlns:a16="http://schemas.microsoft.com/office/drawing/2014/main" id="{6646C9F8-CFDB-4810-8A24-95FCB6EF8476}"/>
+                <a16:creationId xmlns:a16="http://schemas.microsoft.com/office/drawing/2014/main" id="{5A167D4F-A77E-4E5F-92EC-9069E3D5D5B6}"/>
               </a:ext>
             </a:extLst>
           </p:cNvPr>
@@ -4305,7 +4305,7 @@
           <p:cNvPr id="3" name="title-11">
             <a:extLst xmlns:a="http://schemas.openxmlformats.org/drawingml/2006/main">
               <a:ext uri="{FF2B5EF4-FFF2-40B4-BE49-F238E27FC236}">
-                <a16:creationId xmlns:a16="http://schemas.microsoft.com/office/drawing/2014/main" id="{62DBD3FE-F247-4A6E-ADD0-91D508A06D0D}"/>
+                <a16:creationId xmlns:a16="http://schemas.microsoft.com/office/drawing/2014/main" id="{AB932BE6-960D-4534-9785-237A111B0B1A}"/>
               </a:ext>
             </a:extLst>
           </p:cNvPr>
@@ -4367,7 +4367,7 @@
           <p:cNvPr id="4" name="">
             <a:extLst xmlns:a="http://schemas.openxmlformats.org/drawingml/2006/main">
               <a:ext uri="{FF2B5EF4-FFF2-40B4-BE49-F238E27FC236}">
-                <a16:creationId xmlns:a16="http://schemas.microsoft.com/office/drawing/2014/main" id="{B863A6B1-D4D4-4BCB-AC36-D030B164302F}"/>
+                <a16:creationId xmlns:a16="http://schemas.microsoft.com/office/drawing/2014/main" id="{ABCE4500-0908-4B2B-BBFA-B65F7DBB0CCB}"/>
               </a:ext>
             </a:extLst>
           </p:cNvPr>
@@ -4402,7 +4402,7 @@
           <p:cNvPr id="5" name="">
             <a:extLst xmlns:a="http://schemas.openxmlformats.org/drawingml/2006/main">
               <a:ext uri="{FF2B5EF4-FFF2-40B4-BE49-F238E27FC236}">
-                <a16:creationId xmlns:a16="http://schemas.microsoft.com/office/drawing/2014/main" id="{F2A19726-4AF9-4498-BA3B-384C61A40F72}"/>
+                <a16:creationId xmlns:a16="http://schemas.microsoft.com/office/drawing/2014/main" id="{D83FBB90-3AE2-43F9-9FA0-6A4BDC4591A2}"/>
               </a:ext>
             </a:extLst>
           </p:cNvPr>
@@ -4464,7 +4464,7 @@
           <p:cNvPr id="6" name="">
             <a:extLst xmlns:a="http://schemas.openxmlformats.org/drawingml/2006/main">
               <a:ext uri="{FF2B5EF4-FFF2-40B4-BE49-F238E27FC236}">
-                <a16:creationId xmlns:a16="http://schemas.microsoft.com/office/drawing/2014/main" id="{8AD42A3A-5780-45A6-9643-5AC7089C6A34}"/>
+                <a16:creationId xmlns:a16="http://schemas.microsoft.com/office/drawing/2014/main" id="{C1E1B05F-4ECE-4C1F-9C7C-229762570935}"/>
               </a:ext>
             </a:extLst>
           </p:cNvPr>
@@ -4526,7 +4526,7 @@
           <p:cNvPr id="7" name="">
             <a:extLst xmlns:a="http://schemas.openxmlformats.org/drawingml/2006/main">
               <a:ext uri="{FF2B5EF4-FFF2-40B4-BE49-F238E27FC236}">
-                <a16:creationId xmlns:a16="http://schemas.microsoft.com/office/drawing/2014/main" id="{709031FA-97A2-496B-AA81-99E6408B263F}"/>
+                <a16:creationId xmlns:a16="http://schemas.microsoft.com/office/drawing/2014/main" id="{B364F293-9DC3-40CF-8BB8-0E0F1060128B}"/>
               </a:ext>
             </a:extLst>
           </p:cNvPr>
@@ -4561,7 +4561,7 @@
           <p:cNvPr id="8" name="">
             <a:extLst xmlns:a="http://schemas.openxmlformats.org/drawingml/2006/main">
               <a:ext uri="{FF2B5EF4-FFF2-40B4-BE49-F238E27FC236}">
-                <a16:creationId xmlns:a16="http://schemas.microsoft.com/office/drawing/2014/main" id="{F4A622B8-AEDE-4379-8AF2-36FBD2C1FA0C}"/>
+                <a16:creationId xmlns:a16="http://schemas.microsoft.com/office/drawing/2014/main" id="{6B004E43-3A65-47BD-9A47-A4DDE766D4C2}"/>
               </a:ext>
             </a:extLst>
           </p:cNvPr>
@@ -4623,7 +4623,7 @@
           <p:cNvPr id="9" name="">
             <a:extLst xmlns:a="http://schemas.openxmlformats.org/drawingml/2006/main">
               <a:ext uri="{FF2B5EF4-FFF2-40B4-BE49-F238E27FC236}">
-                <a16:creationId xmlns:a16="http://schemas.microsoft.com/office/drawing/2014/main" id="{164ECE9B-7755-415C-8C6D-558674DDDE9C}"/>
+                <a16:creationId xmlns:a16="http://schemas.microsoft.com/office/drawing/2014/main" id="{E07E9FBC-4011-4D99-98B5-27439C00C871}"/>
               </a:ext>
             </a:extLst>
           </p:cNvPr>
@@ -4685,7 +4685,7 @@
           <p:cNvPr id="10" name="">
             <a:extLst xmlns:a="http://schemas.openxmlformats.org/drawingml/2006/main">
               <a:ext uri="{FF2B5EF4-FFF2-40B4-BE49-F238E27FC236}">
-                <a16:creationId xmlns:a16="http://schemas.microsoft.com/office/drawing/2014/main" id="{53A6950B-5C53-482F-B84D-237AEC2AD1C1}"/>
+                <a16:creationId xmlns:a16="http://schemas.microsoft.com/office/drawing/2014/main" id="{F1921A69-2618-41A9-9B44-259B8FFCEA1B}"/>
               </a:ext>
             </a:extLst>
           </p:cNvPr>
@@ -4720,7 +4720,7 @@
           <p:cNvPr id="11" name="">
             <a:extLst xmlns:a="http://schemas.openxmlformats.org/drawingml/2006/main">
               <a:ext uri="{FF2B5EF4-FFF2-40B4-BE49-F238E27FC236}">
-                <a16:creationId xmlns:a16="http://schemas.microsoft.com/office/drawing/2014/main" id="{E45D492F-A3A0-48CA-8D93-E76399B0A720}"/>
+                <a16:creationId xmlns:a16="http://schemas.microsoft.com/office/drawing/2014/main" id="{4ADD0718-031D-4875-9DB0-69B70D5C20A3}"/>
               </a:ext>
             </a:extLst>
           </p:cNvPr>
@@ -4782,7 +4782,7 @@
           <p:cNvPr id="12" name="">
             <a:extLst xmlns:a="http://schemas.openxmlformats.org/drawingml/2006/main">
               <a:ext uri="{FF2B5EF4-FFF2-40B4-BE49-F238E27FC236}">
-                <a16:creationId xmlns:a16="http://schemas.microsoft.com/office/drawing/2014/main" id="{B4BF5876-80AA-40B1-BD24-6E122BDF4146}"/>
+                <a16:creationId xmlns:a16="http://schemas.microsoft.com/office/drawing/2014/main" id="{A4AEDAB5-4F6F-43A0-8838-0F8291AD71EA}"/>
               </a:ext>
             </a:extLst>
           </p:cNvPr>
@@ -4844,7 +4844,7 @@
           <p:cNvPr id="13" name="">
             <a:extLst xmlns:a="http://schemas.openxmlformats.org/drawingml/2006/main">
               <a:ext uri="{FF2B5EF4-FFF2-40B4-BE49-F238E27FC236}">
-                <a16:creationId xmlns:a16="http://schemas.microsoft.com/office/drawing/2014/main" id="{2616B852-05DF-41C2-87B0-E6C2F829200A}"/>
+                <a16:creationId xmlns:a16="http://schemas.microsoft.com/office/drawing/2014/main" id="{9E628E7B-6122-47B0-8F67-E1C5B5831E52}"/>
               </a:ext>
             </a:extLst>
           </p:cNvPr>
@@ -4906,7 +4906,7 @@
           <p:cNvPr id="14" name="footer-rule-11">
             <a:extLst xmlns:a="http://schemas.openxmlformats.org/drawingml/2006/main">
               <a:ext uri="{FF2B5EF4-FFF2-40B4-BE49-F238E27FC236}">
-                <a16:creationId xmlns:a16="http://schemas.microsoft.com/office/drawing/2014/main" id="{141E528E-0305-480A-992F-E870D36ECF24}"/>
+                <a16:creationId xmlns:a16="http://schemas.microsoft.com/office/drawing/2014/main" id="{E9ABD196-E7E4-422B-BBF0-AF8E4C9B7CC3}"/>
               </a:ext>
             </a:extLst>
           </p:cNvPr>
@@ -4937,7 +4937,7 @@
           <p:cNvPr id="15" name="footer-label-11">
             <a:extLst xmlns:a="http://schemas.openxmlformats.org/drawingml/2006/main">
               <a:ext uri="{FF2B5EF4-FFF2-40B4-BE49-F238E27FC236}">
-                <a16:creationId xmlns:a16="http://schemas.microsoft.com/office/drawing/2014/main" id="{5F1664D3-D0C6-4284-9831-38FBA0D922E6}"/>
+                <a16:creationId xmlns:a16="http://schemas.microsoft.com/office/drawing/2014/main" id="{7643C656-B10B-4A4E-A075-D0F3C0426AF3}"/>
               </a:ext>
             </a:extLst>
           </p:cNvPr>
@@ -4999,7 +4999,7 @@
           <p:cNvPr id="16" name="footer-page-11">
             <a:extLst xmlns:a="http://schemas.openxmlformats.org/drawingml/2006/main">
               <a:ext uri="{FF2B5EF4-FFF2-40B4-BE49-F238E27FC236}">
-                <a16:creationId xmlns:a16="http://schemas.microsoft.com/office/drawing/2014/main" id="{D474736A-7F96-456F-B5AA-AAA5B1F51EF1}"/>
+                <a16:creationId xmlns:a16="http://schemas.microsoft.com/office/drawing/2014/main" id="{826FAD87-AA0A-4858-AEC7-99F66FB2032D}"/>
               </a:ext>
             </a:extLst>
           </p:cNvPr>
@@ -5059,7 +5059,7 @@
     </p:spTree>
     <p:extLst>
       <p:ext uri="{BB962C8B-B14F-4D97-AF65-F5344CB8AC3E}">
-        <p14:creationId xmlns:p14="http://schemas.microsoft.com/office/powerpoint/2010/main" val="1991549452"/>
+        <p14:creationId xmlns:p14="http://schemas.microsoft.com/office/powerpoint/2010/main" val="553792054"/>
       </p:ext>
     </p:extLst>
   </p:cSld>
@@ -5090,7 +5090,7 @@
           <p:cNvPr id="22" name="side-accent-12">
             <a:extLst xmlns:a="http://schemas.openxmlformats.org/drawingml/2006/main">
               <a:ext uri="{FF2B5EF4-FFF2-40B4-BE49-F238E27FC236}">
-                <a16:creationId xmlns:a16="http://schemas.microsoft.com/office/drawing/2014/main" id="{C91476FB-FA2F-4FBF-B2ED-33D0EF91472B}"/>
+                <a16:creationId xmlns:a16="http://schemas.microsoft.com/office/drawing/2014/main" id="{34497D30-5A05-491D-82B1-EC4ED87A2F4F}"/>
               </a:ext>
             </a:extLst>
           </p:cNvPr>
@@ -5121,7 +5121,7 @@
           <p:cNvPr id="2" name="kicker-12">
             <a:extLst xmlns:a="http://schemas.openxmlformats.org/drawingml/2006/main">
               <a:ext uri="{FF2B5EF4-FFF2-40B4-BE49-F238E27FC236}">
-                <a16:creationId xmlns:a16="http://schemas.microsoft.com/office/drawing/2014/main" id="{210CFF02-26D5-4835-A415-441868283E46}"/>
+                <a16:creationId xmlns:a16="http://schemas.microsoft.com/office/drawing/2014/main" id="{0F00113A-28AA-4F94-BD5C-25A0C052A2B4}"/>
               </a:ext>
             </a:extLst>
           </p:cNvPr>
@@ -5183,7 +5183,7 @@
           <p:cNvPr id="3" name="title-12">
             <a:extLst xmlns:a="http://schemas.openxmlformats.org/drawingml/2006/main">
               <a:ext uri="{FF2B5EF4-FFF2-40B4-BE49-F238E27FC236}">
-                <a16:creationId xmlns:a16="http://schemas.microsoft.com/office/drawing/2014/main" id="{3047B1C0-EA38-4CA5-8A97-418F8BBDD08E}"/>
+                <a16:creationId xmlns:a16="http://schemas.microsoft.com/office/drawing/2014/main" id="{E4643A89-11E9-4187-B1E5-745BD8E586D7}"/>
               </a:ext>
             </a:extLst>
           </p:cNvPr>
@@ -5245,7 +5245,7 @@
           <p:cNvPr id="4" name="">
             <a:extLst xmlns:a="http://schemas.openxmlformats.org/drawingml/2006/main">
               <a:ext uri="{FF2B5EF4-FFF2-40B4-BE49-F238E27FC236}">
-                <a16:creationId xmlns:a16="http://schemas.microsoft.com/office/drawing/2014/main" id="{F754FDC5-2B82-418F-8723-13AF12E0903B}"/>
+                <a16:creationId xmlns:a16="http://schemas.microsoft.com/office/drawing/2014/main" id="{53A0786B-B6BF-416E-8549-D5606928FB7A}"/>
               </a:ext>
             </a:extLst>
           </p:cNvPr>
@@ -5307,7 +5307,7 @@
           <p:cNvPr id="5" name="">
             <a:extLst xmlns:a="http://schemas.openxmlformats.org/drawingml/2006/main">
               <a:ext uri="{FF2B5EF4-FFF2-40B4-BE49-F238E27FC236}">
-                <a16:creationId xmlns:a16="http://schemas.microsoft.com/office/drawing/2014/main" id="{B98F16EC-83F1-408A-9357-5DDF1AD1D9CD}"/>
+                <a16:creationId xmlns:a16="http://schemas.microsoft.com/office/drawing/2014/main" id="{9BF41EF4-E080-49C9-8A67-3FA00FABF5D0}"/>
               </a:ext>
             </a:extLst>
           </p:cNvPr>
@@ -5338,7 +5338,7 @@
           <p:cNvPr id="6" name="">
             <a:extLst xmlns:a="http://schemas.openxmlformats.org/drawingml/2006/main">
               <a:ext uri="{FF2B5EF4-FFF2-40B4-BE49-F238E27FC236}">
-                <a16:creationId xmlns:a16="http://schemas.microsoft.com/office/drawing/2014/main" id="{BE7A29BE-ECDB-45C9-9BD6-B78B21CF1B5A}"/>
+                <a16:creationId xmlns:a16="http://schemas.microsoft.com/office/drawing/2014/main" id="{BECFEB9F-8375-48A9-ADCA-C31070EF40FE}"/>
               </a:ext>
             </a:extLst>
           </p:cNvPr>
@@ -5400,7 +5400,7 @@
           <p:cNvPr id="7" name="">
             <a:extLst xmlns:a="http://schemas.openxmlformats.org/drawingml/2006/main">
               <a:ext uri="{FF2B5EF4-FFF2-40B4-BE49-F238E27FC236}">
-                <a16:creationId xmlns:a16="http://schemas.microsoft.com/office/drawing/2014/main" id="{FB986859-A9FC-43B3-8A80-4E7A8EAF51F1}"/>
+                <a16:creationId xmlns:a16="http://schemas.microsoft.com/office/drawing/2014/main" id="{BB3652E8-E3DB-4599-A70D-1B3028A2C6D4}"/>
               </a:ext>
             </a:extLst>
           </p:cNvPr>
@@ -5462,7 +5462,7 @@
           <p:cNvPr id="8" name="">
             <a:extLst xmlns:a="http://schemas.openxmlformats.org/drawingml/2006/main">
               <a:ext uri="{FF2B5EF4-FFF2-40B4-BE49-F238E27FC236}">
-                <a16:creationId xmlns:a16="http://schemas.microsoft.com/office/drawing/2014/main" id="{D3CF8EDF-B429-4FE3-9C19-96AC70DC434E}"/>
+                <a16:creationId xmlns:a16="http://schemas.microsoft.com/office/drawing/2014/main" id="{70ADB702-0A07-4BDA-BCCB-AA4A8A4393FE}"/>
               </a:ext>
             </a:extLst>
           </p:cNvPr>
@@ -5524,7 +5524,7 @@
           <p:cNvPr id="9" name="">
             <a:extLst xmlns:a="http://schemas.openxmlformats.org/drawingml/2006/main">
               <a:ext uri="{FF2B5EF4-FFF2-40B4-BE49-F238E27FC236}">
-                <a16:creationId xmlns:a16="http://schemas.microsoft.com/office/drawing/2014/main" id="{0FECB252-25E0-4D4D-A516-7317E022604D}"/>
+                <a16:creationId xmlns:a16="http://schemas.microsoft.com/office/drawing/2014/main" id="{8F319778-6559-47A3-9941-84D6D695DC9F}"/>
               </a:ext>
             </a:extLst>
           </p:cNvPr>
@@ -5555,7 +5555,7 @@
           <p:cNvPr id="10" name="">
             <a:extLst xmlns:a="http://schemas.openxmlformats.org/drawingml/2006/main">
               <a:ext uri="{FF2B5EF4-FFF2-40B4-BE49-F238E27FC236}">
-                <a16:creationId xmlns:a16="http://schemas.microsoft.com/office/drawing/2014/main" id="{56B126F1-F5C7-4976-9F7B-BBFF2F8626CE}"/>
+                <a16:creationId xmlns:a16="http://schemas.microsoft.com/office/drawing/2014/main" id="{A4935990-1FC2-4D75-A212-D1E2F3A49B76}"/>
               </a:ext>
             </a:extLst>
           </p:cNvPr>
@@ -5617,7 +5617,7 @@
           <p:cNvPr id="11" name="">
             <a:extLst xmlns:a="http://schemas.openxmlformats.org/drawingml/2006/main">
               <a:ext uri="{FF2B5EF4-FFF2-40B4-BE49-F238E27FC236}">
-                <a16:creationId xmlns:a16="http://schemas.microsoft.com/office/drawing/2014/main" id="{AF27BE5E-2E86-4513-9E0A-B3FC17C09684}"/>
+                <a16:creationId xmlns:a16="http://schemas.microsoft.com/office/drawing/2014/main" id="{5B54174F-759A-471C-9719-97D9F21EB2F0}"/>
               </a:ext>
             </a:extLst>
           </p:cNvPr>
@@ -5679,7 +5679,7 @@
           <p:cNvPr id="12" name="">
             <a:extLst xmlns:a="http://schemas.openxmlformats.org/drawingml/2006/main">
               <a:ext uri="{FF2B5EF4-FFF2-40B4-BE49-F238E27FC236}">
-                <a16:creationId xmlns:a16="http://schemas.microsoft.com/office/drawing/2014/main" id="{92922729-5056-4771-99B1-4369FFD8EEF8}"/>
+                <a16:creationId xmlns:a16="http://schemas.microsoft.com/office/drawing/2014/main" id="{DF679E60-7348-40B8-A088-4BC7DF6B816A}"/>
               </a:ext>
             </a:extLst>
           </p:cNvPr>
@@ -5741,7 +5741,7 @@
           <p:cNvPr id="13" name="">
             <a:extLst xmlns:a="http://schemas.openxmlformats.org/drawingml/2006/main">
               <a:ext uri="{FF2B5EF4-FFF2-40B4-BE49-F238E27FC236}">
-                <a16:creationId xmlns:a16="http://schemas.microsoft.com/office/drawing/2014/main" id="{EB4EE4A2-EB0F-4751-9825-58A0610BCEC9}"/>
+                <a16:creationId xmlns:a16="http://schemas.microsoft.com/office/drawing/2014/main" id="{B493F026-5776-4249-90EC-7CA59585EDF2}"/>
               </a:ext>
             </a:extLst>
           </p:cNvPr>
@@ -5772,7 +5772,7 @@
           <p:cNvPr id="14" name="">
             <a:extLst xmlns:a="http://schemas.openxmlformats.org/drawingml/2006/main">
               <a:ext uri="{FF2B5EF4-FFF2-40B4-BE49-F238E27FC236}">
-                <a16:creationId xmlns:a16="http://schemas.microsoft.com/office/drawing/2014/main" id="{853B132D-4811-4895-B7A0-07827C4CDD34}"/>
+                <a16:creationId xmlns:a16="http://schemas.microsoft.com/office/drawing/2014/main" id="{312B9042-D320-4C6E-BBA6-FE515125C525}"/>
               </a:ext>
             </a:extLst>
           </p:cNvPr>
@@ -5834,7 +5834,7 @@
           <p:cNvPr id="15" name="">
             <a:extLst xmlns:a="http://schemas.openxmlformats.org/drawingml/2006/main">
               <a:ext uri="{FF2B5EF4-FFF2-40B4-BE49-F238E27FC236}">
-                <a16:creationId xmlns:a16="http://schemas.microsoft.com/office/drawing/2014/main" id="{C6FB6F9B-8761-47FA-A5B8-5293CBEE7545}"/>
+                <a16:creationId xmlns:a16="http://schemas.microsoft.com/office/drawing/2014/main" id="{1FF83535-600A-44AF-B0ED-ABAD1C9CC43B}"/>
               </a:ext>
             </a:extLst>
           </p:cNvPr>
@@ -5896,7 +5896,7 @@
           <p:cNvPr id="16" name="">
             <a:extLst xmlns:a="http://schemas.openxmlformats.org/drawingml/2006/main">
               <a:ext uri="{FF2B5EF4-FFF2-40B4-BE49-F238E27FC236}">
-                <a16:creationId xmlns:a16="http://schemas.microsoft.com/office/drawing/2014/main" id="{AE1D88B3-7637-4890-B85A-91B4CB430468}"/>
+                <a16:creationId xmlns:a16="http://schemas.microsoft.com/office/drawing/2014/main" id="{765E7779-E519-42A6-8AB6-BF933AE8E492}"/>
               </a:ext>
             </a:extLst>
           </p:cNvPr>
@@ -5958,7 +5958,7 @@
           <p:cNvPr id="17" name="">
             <a:extLst xmlns:a="http://schemas.openxmlformats.org/drawingml/2006/main">
               <a:ext uri="{FF2B5EF4-FFF2-40B4-BE49-F238E27FC236}">
-                <a16:creationId xmlns:a16="http://schemas.microsoft.com/office/drawing/2014/main" id="{DFF33614-F2B1-48F2-B285-94713268DACE}"/>
+                <a16:creationId xmlns:a16="http://schemas.microsoft.com/office/drawing/2014/main" id="{13F61C47-048B-4659-9CDE-20734C7AF3A7}"/>
               </a:ext>
             </a:extLst>
           </p:cNvPr>
@@ -5993,7 +5993,7 @@
           <p:cNvPr id="18" name="">
             <a:extLst xmlns:a="http://schemas.openxmlformats.org/drawingml/2006/main">
               <a:ext uri="{FF2B5EF4-FFF2-40B4-BE49-F238E27FC236}">
-                <a16:creationId xmlns:a16="http://schemas.microsoft.com/office/drawing/2014/main" id="{E1641499-6E42-44D2-8D4F-A78B16434608}"/>
+                <a16:creationId xmlns:a16="http://schemas.microsoft.com/office/drawing/2014/main" id="{9B6A4068-18D2-4CB9-9AF8-79DB13929A7D}"/>
               </a:ext>
             </a:extLst>
           </p:cNvPr>
@@ -6082,7 +6082,7 @@
           <p:cNvPr id="19" name="footer-rule-12">
             <a:extLst xmlns:a="http://schemas.openxmlformats.org/drawingml/2006/main">
               <a:ext uri="{FF2B5EF4-FFF2-40B4-BE49-F238E27FC236}">
-                <a16:creationId xmlns:a16="http://schemas.microsoft.com/office/drawing/2014/main" id="{A728D128-E765-4656-B449-32A5665DF0E2}"/>
+                <a16:creationId xmlns:a16="http://schemas.microsoft.com/office/drawing/2014/main" id="{2CD618FB-069F-49DB-BD68-6856239943E4}"/>
               </a:ext>
             </a:extLst>
           </p:cNvPr>
@@ -6113,7 +6113,7 @@
           <p:cNvPr id="20" name="footer-label-12">
             <a:extLst xmlns:a="http://schemas.openxmlformats.org/drawingml/2006/main">
               <a:ext uri="{FF2B5EF4-FFF2-40B4-BE49-F238E27FC236}">
-                <a16:creationId xmlns:a16="http://schemas.microsoft.com/office/drawing/2014/main" id="{4CBE9AC4-27E3-4B51-BFEE-0ACF5261E08F}"/>
+                <a16:creationId xmlns:a16="http://schemas.microsoft.com/office/drawing/2014/main" id="{342CD8E6-223D-4082-8337-C2E7F234EE3A}"/>
               </a:ext>
             </a:extLst>
           </p:cNvPr>
@@ -6175,7 +6175,7 @@
           <p:cNvPr id="21" name="footer-page-12">
             <a:extLst xmlns:a="http://schemas.openxmlformats.org/drawingml/2006/main">
               <a:ext uri="{FF2B5EF4-FFF2-40B4-BE49-F238E27FC236}">
-                <a16:creationId xmlns:a16="http://schemas.microsoft.com/office/drawing/2014/main" id="{83D4F62A-C816-4123-AE9A-4B28F1A340EB}"/>
+                <a16:creationId xmlns:a16="http://schemas.microsoft.com/office/drawing/2014/main" id="{CD393119-5A83-49B4-8355-1506BC6E55DD}"/>
               </a:ext>
             </a:extLst>
           </p:cNvPr>
@@ -6235,7 +6235,7 @@
     </p:spTree>
     <p:extLst>
       <p:ext uri="{BB962C8B-B14F-4D97-AF65-F5344CB8AC3E}">
-        <p14:creationId xmlns:p14="http://schemas.microsoft.com/office/powerpoint/2010/main" val="717143540"/>
+        <p14:creationId xmlns:p14="http://schemas.microsoft.com/office/powerpoint/2010/main" val="747459130"/>
       </p:ext>
     </p:extLst>
   </p:cSld>
@@ -6266,7 +6266,7 @@
           <p:cNvPr id="14" name="side-accent-13">
             <a:extLst xmlns:a="http://schemas.openxmlformats.org/drawingml/2006/main">
               <a:ext uri="{FF2B5EF4-FFF2-40B4-BE49-F238E27FC236}">
-                <a16:creationId xmlns:a16="http://schemas.microsoft.com/office/drawing/2014/main" id="{EF7A3AC6-DB05-4C72-ADAE-8F0BBE2B4299}"/>
+                <a16:creationId xmlns:a16="http://schemas.microsoft.com/office/drawing/2014/main" id="{FFF088DC-D23D-4F4A-A8CE-F198A0E44EE0}"/>
               </a:ext>
             </a:extLst>
           </p:cNvPr>
@@ -6297,7 +6297,7 @@
           <p:cNvPr id="2" name="kicker-13">
             <a:extLst xmlns:a="http://schemas.openxmlformats.org/drawingml/2006/main">
               <a:ext uri="{FF2B5EF4-FFF2-40B4-BE49-F238E27FC236}">
-                <a16:creationId xmlns:a16="http://schemas.microsoft.com/office/drawing/2014/main" id="{ECB06AC3-19F0-4A88-89F1-A1244EA3B414}"/>
+                <a16:creationId xmlns:a16="http://schemas.microsoft.com/office/drawing/2014/main" id="{852696DD-85D4-49CC-BCA9-CBB9271105D7}"/>
               </a:ext>
             </a:extLst>
           </p:cNvPr>
@@ -6359,7 +6359,7 @@
           <p:cNvPr id="3" name="title-13">
             <a:extLst xmlns:a="http://schemas.openxmlformats.org/drawingml/2006/main">
               <a:ext uri="{FF2B5EF4-FFF2-40B4-BE49-F238E27FC236}">
-                <a16:creationId xmlns:a16="http://schemas.microsoft.com/office/drawing/2014/main" id="{A023E77C-315F-44FF-8D86-A37EF2603087}"/>
+                <a16:creationId xmlns:a16="http://schemas.microsoft.com/office/drawing/2014/main" id="{E0FD8368-EBCA-4091-B5B7-E437C97FD10C}"/>
               </a:ext>
             </a:extLst>
           </p:cNvPr>
@@ -6421,7 +6421,7 @@
           <p:cNvPr id="4" name="draft-panel">
             <a:extLst xmlns:a="http://schemas.openxmlformats.org/drawingml/2006/main">
               <a:ext uri="{FF2B5EF4-FFF2-40B4-BE49-F238E27FC236}">
-                <a16:creationId xmlns:a16="http://schemas.microsoft.com/office/drawing/2014/main" id="{562E9938-9DD4-4D4C-A229-CD4D80372D5F}"/>
+                <a16:creationId xmlns:a16="http://schemas.microsoft.com/office/drawing/2014/main" id="{87F3BA45-35FB-4F24-AA50-631FA3CAB884}"/>
               </a:ext>
             </a:extLst>
           </p:cNvPr>
@@ -6456,7 +6456,7 @@
           <p:cNvPr id="5" name="">
             <a:extLst xmlns:a="http://schemas.openxmlformats.org/drawingml/2006/main">
               <a:ext uri="{FF2B5EF4-FFF2-40B4-BE49-F238E27FC236}">
-                <a16:creationId xmlns:a16="http://schemas.microsoft.com/office/drawing/2014/main" id="{9ABA4FA0-D858-4CC0-B74E-F1DBB3721636}"/>
+                <a16:creationId xmlns:a16="http://schemas.microsoft.com/office/drawing/2014/main" id="{060E530D-66C6-4DB7-923B-6C04662481C3}"/>
               </a:ext>
             </a:extLst>
           </p:cNvPr>
@@ -6518,7 +6518,7 @@
           <p:cNvPr id="6" name="">
             <a:extLst xmlns:a="http://schemas.openxmlformats.org/drawingml/2006/main">
               <a:ext uri="{FF2B5EF4-FFF2-40B4-BE49-F238E27FC236}">
-                <a16:creationId xmlns:a16="http://schemas.microsoft.com/office/drawing/2014/main" id="{E3D6B41D-D0AF-4C1F-B4AD-5C7463A68272}"/>
+                <a16:creationId xmlns:a16="http://schemas.microsoft.com/office/drawing/2014/main" id="{647559C2-3D37-400E-AE06-FA704808DBB9}"/>
               </a:ext>
             </a:extLst>
           </p:cNvPr>
@@ -6634,7 +6634,7 @@
           <p:cNvPr id="7" name="submit-panel">
             <a:extLst xmlns:a="http://schemas.openxmlformats.org/drawingml/2006/main">
               <a:ext uri="{FF2B5EF4-FFF2-40B4-BE49-F238E27FC236}">
-                <a16:creationId xmlns:a16="http://schemas.microsoft.com/office/drawing/2014/main" id="{823D8B1F-F849-4F7E-BD78-53BB859AAA9E}"/>
+                <a16:creationId xmlns:a16="http://schemas.microsoft.com/office/drawing/2014/main" id="{1B8812DB-DC3C-4FF5-A3AE-BB651C99C8E9}"/>
               </a:ext>
             </a:extLst>
           </p:cNvPr>
@@ -6669,7 +6669,7 @@
           <p:cNvPr id="8" name="">
             <a:extLst xmlns:a="http://schemas.openxmlformats.org/drawingml/2006/main">
               <a:ext uri="{FF2B5EF4-FFF2-40B4-BE49-F238E27FC236}">
-                <a16:creationId xmlns:a16="http://schemas.microsoft.com/office/drawing/2014/main" id="{04363060-85F6-4B9A-97BA-B2ECF272E936}"/>
+                <a16:creationId xmlns:a16="http://schemas.microsoft.com/office/drawing/2014/main" id="{8A4E77A1-077A-4F59-A3CA-29A76BAAD79B}"/>
               </a:ext>
             </a:extLst>
           </p:cNvPr>
@@ -6731,7 +6731,7 @@
           <p:cNvPr id="9" name="">
             <a:extLst xmlns:a="http://schemas.openxmlformats.org/drawingml/2006/main">
               <a:ext uri="{FF2B5EF4-FFF2-40B4-BE49-F238E27FC236}">
-                <a16:creationId xmlns:a16="http://schemas.microsoft.com/office/drawing/2014/main" id="{DA1E86D1-8F8C-461B-B705-C1ECE11F7EBB}"/>
+                <a16:creationId xmlns:a16="http://schemas.microsoft.com/office/drawing/2014/main" id="{9A007380-6CA0-4BC2-9099-F3E4B6729A64}"/>
               </a:ext>
             </a:extLst>
           </p:cNvPr>
@@ -6847,7 +6847,7 @@
           <p:cNvPr id="10" name="">
             <a:extLst xmlns:a="http://schemas.openxmlformats.org/drawingml/2006/main">
               <a:ext uri="{FF2B5EF4-FFF2-40B4-BE49-F238E27FC236}">
-                <a16:creationId xmlns:a16="http://schemas.microsoft.com/office/drawing/2014/main" id="{4F207866-4DCE-44D3-8B97-A73627E00711}"/>
+                <a16:creationId xmlns:a16="http://schemas.microsoft.com/office/drawing/2014/main" id="{90B7041F-EC69-4619-B1D8-A7E2CC395DBD}"/>
               </a:ext>
             </a:extLst>
           </p:cNvPr>
@@ -6909,7 +6909,7 @@
           <p:cNvPr id="11" name="footer-rule-13">
             <a:extLst xmlns:a="http://schemas.openxmlformats.org/drawingml/2006/main">
               <a:ext uri="{FF2B5EF4-FFF2-40B4-BE49-F238E27FC236}">
-                <a16:creationId xmlns:a16="http://schemas.microsoft.com/office/drawing/2014/main" id="{815E424B-21BA-4625-B7C1-7F7AE082B75E}"/>
+                <a16:creationId xmlns:a16="http://schemas.microsoft.com/office/drawing/2014/main" id="{7006110A-2E02-462E-A33D-505FC363E3DF}"/>
               </a:ext>
             </a:extLst>
           </p:cNvPr>
@@ -6940,7 +6940,7 @@
           <p:cNvPr id="12" name="footer-label-13">
             <a:extLst xmlns:a="http://schemas.openxmlformats.org/drawingml/2006/main">
               <a:ext uri="{FF2B5EF4-FFF2-40B4-BE49-F238E27FC236}">
-                <a16:creationId xmlns:a16="http://schemas.microsoft.com/office/drawing/2014/main" id="{3D1DF070-ED15-457E-BC18-3FF3B7825BAE}"/>
+                <a16:creationId xmlns:a16="http://schemas.microsoft.com/office/drawing/2014/main" id="{31797E09-0538-4BA2-A86D-363293D6078B}"/>
               </a:ext>
             </a:extLst>
           </p:cNvPr>
@@ -7002,7 +7002,7 @@
           <p:cNvPr id="13" name="footer-page-13">
             <a:extLst xmlns:a="http://schemas.openxmlformats.org/drawingml/2006/main">
               <a:ext uri="{FF2B5EF4-FFF2-40B4-BE49-F238E27FC236}">
-                <a16:creationId xmlns:a16="http://schemas.microsoft.com/office/drawing/2014/main" id="{B118166D-9BCA-401D-BCCA-EB1E298CC60F}"/>
+                <a16:creationId xmlns:a16="http://schemas.microsoft.com/office/drawing/2014/main" id="{9D9DDF95-3894-411B-A9D6-1714FF14B4F7}"/>
               </a:ext>
             </a:extLst>
           </p:cNvPr>
@@ -7062,7 +7062,7 @@
     </p:spTree>
     <p:extLst>
       <p:ext uri="{BB962C8B-B14F-4D97-AF65-F5344CB8AC3E}">
-        <p14:creationId xmlns:p14="http://schemas.microsoft.com/office/powerpoint/2010/main" val="2074096206"/>
+        <p14:creationId xmlns:p14="http://schemas.microsoft.com/office/powerpoint/2010/main" val="783152197"/>
       </p:ext>
     </p:extLst>
   </p:cSld>
@@ -7093,7 +7093,7 @@
           <p:cNvPr id="25" name="side-accent-14">
             <a:extLst xmlns:a="http://schemas.openxmlformats.org/drawingml/2006/main">
               <a:ext uri="{FF2B5EF4-FFF2-40B4-BE49-F238E27FC236}">
-                <a16:creationId xmlns:a16="http://schemas.microsoft.com/office/drawing/2014/main" id="{A3C1DC07-DBAB-4EB0-B5D2-27B757AC7829}"/>
+                <a16:creationId xmlns:a16="http://schemas.microsoft.com/office/drawing/2014/main" id="{42EE8B4B-DB37-4D4C-8DCD-6B41D093658C}"/>
               </a:ext>
             </a:extLst>
           </p:cNvPr>
@@ -7124,7 +7124,7 @@
           <p:cNvPr id="2" name="kicker-14">
             <a:extLst xmlns:a="http://schemas.openxmlformats.org/drawingml/2006/main">
               <a:ext uri="{FF2B5EF4-FFF2-40B4-BE49-F238E27FC236}">
-                <a16:creationId xmlns:a16="http://schemas.microsoft.com/office/drawing/2014/main" id="{918D8717-A76E-4BF3-8BB0-F898B85D00B7}"/>
+                <a16:creationId xmlns:a16="http://schemas.microsoft.com/office/drawing/2014/main" id="{F64C1AB2-D7FD-4999-859F-34E99142BDF6}"/>
               </a:ext>
             </a:extLst>
           </p:cNvPr>
@@ -7186,7 +7186,7 @@
           <p:cNvPr id="3" name="title-14">
             <a:extLst xmlns:a="http://schemas.openxmlformats.org/drawingml/2006/main">
               <a:ext uri="{FF2B5EF4-FFF2-40B4-BE49-F238E27FC236}">
-                <a16:creationId xmlns:a16="http://schemas.microsoft.com/office/drawing/2014/main" id="{50D152CB-D741-4B04-BA25-5016E20E63E5}"/>
+                <a16:creationId xmlns:a16="http://schemas.microsoft.com/office/drawing/2014/main" id="{799ACAFE-9E30-4ED2-A4A1-37391C824973}"/>
               </a:ext>
             </a:extLst>
           </p:cNvPr>
@@ -7248,7 +7248,7 @@
           <p:cNvPr id="4" name="">
             <a:extLst xmlns:a="http://schemas.openxmlformats.org/drawingml/2006/main">
               <a:ext uri="{FF2B5EF4-FFF2-40B4-BE49-F238E27FC236}">
-                <a16:creationId xmlns:a16="http://schemas.microsoft.com/office/drawing/2014/main" id="{0C89D214-FE40-4123-A094-8A55EDB3B1A4}"/>
+                <a16:creationId xmlns:a16="http://schemas.microsoft.com/office/drawing/2014/main" id="{4A114CCC-332D-440B-ABDC-CB692BD392DE}"/>
               </a:ext>
             </a:extLst>
           </p:cNvPr>
@@ -7279,7 +7279,7 @@
           <p:cNvPr id="5" name="">
             <a:extLst xmlns:a="http://schemas.openxmlformats.org/drawingml/2006/main">
               <a:ext uri="{FF2B5EF4-FFF2-40B4-BE49-F238E27FC236}">
-                <a16:creationId xmlns:a16="http://schemas.microsoft.com/office/drawing/2014/main" id="{F471E249-B507-4CA6-8ADF-6779F4B0BDA7}"/>
+                <a16:creationId xmlns:a16="http://schemas.microsoft.com/office/drawing/2014/main" id="{8EB47E8D-F6C4-444F-99D5-39393956FB3D}"/>
               </a:ext>
             </a:extLst>
           </p:cNvPr>
@@ -7310,7 +7310,7 @@
           <p:cNvPr id="6" name="">
             <a:extLst xmlns:a="http://schemas.openxmlformats.org/drawingml/2006/main">
               <a:ext uri="{FF2B5EF4-FFF2-40B4-BE49-F238E27FC236}">
-                <a16:creationId xmlns:a16="http://schemas.microsoft.com/office/drawing/2014/main" id="{BD2B93AB-6080-4AAB-B73D-F7B2DF9A9CF1}"/>
+                <a16:creationId xmlns:a16="http://schemas.microsoft.com/office/drawing/2014/main" id="{E7FA2D50-0604-4F85-BD1D-55514D750699}"/>
               </a:ext>
             </a:extLst>
           </p:cNvPr>
@@ -7372,7 +7372,7 @@
           <p:cNvPr id="7" name="">
             <a:extLst xmlns:a="http://schemas.openxmlformats.org/drawingml/2006/main">
               <a:ext uri="{FF2B5EF4-FFF2-40B4-BE49-F238E27FC236}">
-                <a16:creationId xmlns:a16="http://schemas.microsoft.com/office/drawing/2014/main" id="{F62C35C4-D27E-483D-B95E-E6A766F12DD2}"/>
+                <a16:creationId xmlns:a16="http://schemas.microsoft.com/office/drawing/2014/main" id="{59B8A1B6-12D4-454B-8F96-0650E46981CB}"/>
               </a:ext>
             </a:extLst>
           </p:cNvPr>
@@ -7434,7 +7434,7 @@
           <p:cNvPr id="8" name="">
             <a:extLst xmlns:a="http://schemas.openxmlformats.org/drawingml/2006/main">
               <a:ext uri="{FF2B5EF4-FFF2-40B4-BE49-F238E27FC236}">
-                <a16:creationId xmlns:a16="http://schemas.microsoft.com/office/drawing/2014/main" id="{74443B82-96BE-4982-9F99-4CE6704CFD6D}"/>
+                <a16:creationId xmlns:a16="http://schemas.microsoft.com/office/drawing/2014/main" id="{EC2DE42A-0BD4-4B67-A69B-1473847E52DA}"/>
               </a:ext>
             </a:extLst>
           </p:cNvPr>
@@ -7496,7 +7496,7 @@
           <p:cNvPr id="9" name="">
             <a:extLst xmlns:a="http://schemas.openxmlformats.org/drawingml/2006/main">
               <a:ext uri="{FF2B5EF4-FFF2-40B4-BE49-F238E27FC236}">
-                <a16:creationId xmlns:a16="http://schemas.microsoft.com/office/drawing/2014/main" id="{6EC7069E-289C-405C-8194-F407695BAAC3}"/>
+                <a16:creationId xmlns:a16="http://schemas.microsoft.com/office/drawing/2014/main" id="{819F3B2A-2F37-4785-97FE-BCEFF6EFF977}"/>
               </a:ext>
             </a:extLst>
           </p:cNvPr>
@@ -7527,7 +7527,7 @@
           <p:cNvPr id="10" name="">
             <a:extLst xmlns:a="http://schemas.openxmlformats.org/drawingml/2006/main">
               <a:ext uri="{FF2B5EF4-FFF2-40B4-BE49-F238E27FC236}">
-                <a16:creationId xmlns:a16="http://schemas.microsoft.com/office/drawing/2014/main" id="{8B53F28F-5064-4266-9771-F818DE3FF04C}"/>
+                <a16:creationId xmlns:a16="http://schemas.microsoft.com/office/drawing/2014/main" id="{497CC56D-1118-4ED0-8E2A-1E4F84C3AC65}"/>
               </a:ext>
             </a:extLst>
           </p:cNvPr>
@@ -7589,7 +7589,7 @@
           <p:cNvPr id="11" name="">
             <a:extLst xmlns:a="http://schemas.openxmlformats.org/drawingml/2006/main">
               <a:ext uri="{FF2B5EF4-FFF2-40B4-BE49-F238E27FC236}">
-                <a16:creationId xmlns:a16="http://schemas.microsoft.com/office/drawing/2014/main" id="{1C6AAEC6-8144-4183-A213-90A6A425396A}"/>
+                <a16:creationId xmlns:a16="http://schemas.microsoft.com/office/drawing/2014/main" id="{F6B5E49C-248E-4096-A81F-E31F4A10DD2E}"/>
               </a:ext>
             </a:extLst>
           </p:cNvPr>
@@ -7651,7 +7651,7 @@
           <p:cNvPr id="12" name="">
             <a:extLst xmlns:a="http://schemas.openxmlformats.org/drawingml/2006/main">
               <a:ext uri="{FF2B5EF4-FFF2-40B4-BE49-F238E27FC236}">
-                <a16:creationId xmlns:a16="http://schemas.microsoft.com/office/drawing/2014/main" id="{25F51534-61E8-413E-A951-F3BF433AE24E}"/>
+                <a16:creationId xmlns:a16="http://schemas.microsoft.com/office/drawing/2014/main" id="{440F1FBF-D6E0-45C3-B9EA-CF3D6B2966BC}"/>
               </a:ext>
             </a:extLst>
           </p:cNvPr>
@@ -7713,7 +7713,7 @@
           <p:cNvPr id="13" name="">
             <a:extLst xmlns:a="http://schemas.openxmlformats.org/drawingml/2006/main">
               <a:ext uri="{FF2B5EF4-FFF2-40B4-BE49-F238E27FC236}">
-                <a16:creationId xmlns:a16="http://schemas.microsoft.com/office/drawing/2014/main" id="{11C3330C-3E1E-4472-ABC8-1C8E088570FB}"/>
+                <a16:creationId xmlns:a16="http://schemas.microsoft.com/office/drawing/2014/main" id="{23332536-0F24-4C6B-9EB6-33532F503419}"/>
               </a:ext>
             </a:extLst>
           </p:cNvPr>
@@ -7744,7 +7744,7 @@
           <p:cNvPr id="14" name="">
             <a:extLst xmlns:a="http://schemas.openxmlformats.org/drawingml/2006/main">
               <a:ext uri="{FF2B5EF4-FFF2-40B4-BE49-F238E27FC236}">
-                <a16:creationId xmlns:a16="http://schemas.microsoft.com/office/drawing/2014/main" id="{C99460B7-9D6A-4D3B-BFF7-0438FBB92EF7}"/>
+                <a16:creationId xmlns:a16="http://schemas.microsoft.com/office/drawing/2014/main" id="{9084DDF8-E0DB-434F-A0F7-AA7276EBD07B}"/>
               </a:ext>
             </a:extLst>
           </p:cNvPr>
@@ -7806,7 +7806,7 @@
           <p:cNvPr id="15" name="">
             <a:extLst xmlns:a="http://schemas.openxmlformats.org/drawingml/2006/main">
               <a:ext uri="{FF2B5EF4-FFF2-40B4-BE49-F238E27FC236}">
-                <a16:creationId xmlns:a16="http://schemas.microsoft.com/office/drawing/2014/main" id="{448AE140-43CA-4821-BEEC-2A2C634FD96E}"/>
+                <a16:creationId xmlns:a16="http://schemas.microsoft.com/office/drawing/2014/main" id="{A9B1D412-5D3E-4D73-83D5-37E95C48CC72}"/>
               </a:ext>
             </a:extLst>
           </p:cNvPr>
@@ -7868,7 +7868,7 @@
           <p:cNvPr id="16" name="">
             <a:extLst xmlns:a="http://schemas.openxmlformats.org/drawingml/2006/main">
               <a:ext uri="{FF2B5EF4-FFF2-40B4-BE49-F238E27FC236}">
-                <a16:creationId xmlns:a16="http://schemas.microsoft.com/office/drawing/2014/main" id="{13A3ADA9-A9A3-4478-BCB8-F9A2AA820805}"/>
+                <a16:creationId xmlns:a16="http://schemas.microsoft.com/office/drawing/2014/main" id="{2BD89918-947B-45B8-827B-4BF7A8225708}"/>
               </a:ext>
             </a:extLst>
           </p:cNvPr>
@@ -7930,7 +7930,7 @@
           <p:cNvPr id="17" name="">
             <a:extLst xmlns:a="http://schemas.openxmlformats.org/drawingml/2006/main">
               <a:ext uri="{FF2B5EF4-FFF2-40B4-BE49-F238E27FC236}">
-                <a16:creationId xmlns:a16="http://schemas.microsoft.com/office/drawing/2014/main" id="{49D8A14C-2B1C-4F8B-AC3F-199B5FC8CE1E}"/>
+                <a16:creationId xmlns:a16="http://schemas.microsoft.com/office/drawing/2014/main" id="{BEBB22F1-087A-440B-B66C-692D877720BD}"/>
               </a:ext>
             </a:extLst>
           </p:cNvPr>
@@ -7961,7 +7961,7 @@
           <p:cNvPr id="18" name="">
             <a:extLst xmlns:a="http://schemas.openxmlformats.org/drawingml/2006/main">
               <a:ext uri="{FF2B5EF4-FFF2-40B4-BE49-F238E27FC236}">
-                <a16:creationId xmlns:a16="http://schemas.microsoft.com/office/drawing/2014/main" id="{61B9960B-10C8-4256-9FE6-178EC1EE045C}"/>
+                <a16:creationId xmlns:a16="http://schemas.microsoft.com/office/drawing/2014/main" id="{46C6D49F-0095-43A3-8F34-B3B66B3197CA}"/>
               </a:ext>
             </a:extLst>
           </p:cNvPr>
@@ -8023,7 +8023,7 @@
           <p:cNvPr id="19" name="">
             <a:extLst xmlns:a="http://schemas.openxmlformats.org/drawingml/2006/main">
               <a:ext uri="{FF2B5EF4-FFF2-40B4-BE49-F238E27FC236}">
-                <a16:creationId xmlns:a16="http://schemas.microsoft.com/office/drawing/2014/main" id="{55B2885B-7933-414B-91DB-F263D52B913A}"/>
+                <a16:creationId xmlns:a16="http://schemas.microsoft.com/office/drawing/2014/main" id="{89D05720-DEB5-4308-8CFB-9D150B842DCF}"/>
               </a:ext>
             </a:extLst>
           </p:cNvPr>
@@ -8085,7 +8085,7 @@
           <p:cNvPr id="20" name="">
             <a:extLst xmlns:a="http://schemas.openxmlformats.org/drawingml/2006/main">
               <a:ext uri="{FF2B5EF4-FFF2-40B4-BE49-F238E27FC236}">
-                <a16:creationId xmlns:a16="http://schemas.microsoft.com/office/drawing/2014/main" id="{9F515883-5AC9-43AD-8E15-1985115392F0}"/>
+                <a16:creationId xmlns:a16="http://schemas.microsoft.com/office/drawing/2014/main" id="{1C9AD511-F53F-454D-8A3C-2FC8E6BCB918}"/>
               </a:ext>
             </a:extLst>
           </p:cNvPr>
@@ -8147,7 +8147,7 @@
           <p:cNvPr id="21" name="">
             <a:extLst xmlns:a="http://schemas.openxmlformats.org/drawingml/2006/main">
               <a:ext uri="{FF2B5EF4-FFF2-40B4-BE49-F238E27FC236}">
-                <a16:creationId xmlns:a16="http://schemas.microsoft.com/office/drawing/2014/main" id="{94500E91-554C-4B43-8C09-752BBF90DF85}"/>
+                <a16:creationId xmlns:a16="http://schemas.microsoft.com/office/drawing/2014/main" id="{86506098-2C59-4865-8476-D1FFEA09617F}"/>
               </a:ext>
             </a:extLst>
           </p:cNvPr>
@@ -8209,7 +8209,7 @@
           <p:cNvPr id="22" name="footer-rule-14">
             <a:extLst xmlns:a="http://schemas.openxmlformats.org/drawingml/2006/main">
               <a:ext uri="{FF2B5EF4-FFF2-40B4-BE49-F238E27FC236}">
-                <a16:creationId xmlns:a16="http://schemas.microsoft.com/office/drawing/2014/main" id="{D44D5BEE-2E6E-4577-B77B-1C033479985C}"/>
+                <a16:creationId xmlns:a16="http://schemas.microsoft.com/office/drawing/2014/main" id="{140E962A-2388-465E-B512-DCF9E45A971B}"/>
               </a:ext>
             </a:extLst>
           </p:cNvPr>
@@ -8240,7 +8240,7 @@
           <p:cNvPr id="23" name="footer-label-14">
             <a:extLst xmlns:a="http://schemas.openxmlformats.org/drawingml/2006/main">
               <a:ext uri="{FF2B5EF4-FFF2-40B4-BE49-F238E27FC236}">
-                <a16:creationId xmlns:a16="http://schemas.microsoft.com/office/drawing/2014/main" id="{C534FFB1-98DC-46F2-A33B-7B13BA5CF7C5}"/>
+                <a16:creationId xmlns:a16="http://schemas.microsoft.com/office/drawing/2014/main" id="{5E499253-76C6-4951-BFDA-DC2CF121EFA0}"/>
               </a:ext>
             </a:extLst>
           </p:cNvPr>
@@ -8302,7 +8302,7 @@
           <p:cNvPr id="24" name="footer-page-14">
             <a:extLst xmlns:a="http://schemas.openxmlformats.org/drawingml/2006/main">
               <a:ext uri="{FF2B5EF4-FFF2-40B4-BE49-F238E27FC236}">
-                <a16:creationId xmlns:a16="http://schemas.microsoft.com/office/drawing/2014/main" id="{B1DE41D6-9543-4CD9-8699-0D9ABB7FFD6E}"/>
+                <a16:creationId xmlns:a16="http://schemas.microsoft.com/office/drawing/2014/main" id="{9E53EBE9-FB56-424A-8D2C-B19869ECB347}"/>
               </a:ext>
             </a:extLst>
           </p:cNvPr>
@@ -8362,7 +8362,7 @@
     </p:spTree>
     <p:extLst>
       <p:ext uri="{BB962C8B-B14F-4D97-AF65-F5344CB8AC3E}">
-        <p14:creationId xmlns:p14="http://schemas.microsoft.com/office/powerpoint/2010/main" val="24472736"/>
+        <p14:creationId xmlns:p14="http://schemas.microsoft.com/office/powerpoint/2010/main" val="1953223147"/>
       </p:ext>
     </p:extLst>
   </p:cSld>
@@ -8393,7 +8393,7 @@
           <p:cNvPr id="24" name="side-accent-15">
             <a:extLst xmlns:a="http://schemas.openxmlformats.org/drawingml/2006/main">
               <a:ext uri="{FF2B5EF4-FFF2-40B4-BE49-F238E27FC236}">
-                <a16:creationId xmlns:a16="http://schemas.microsoft.com/office/drawing/2014/main" id="{ABB1DCC1-34CC-4A5A-BF47-73924ED1E7ED}"/>
+                <a16:creationId xmlns:a16="http://schemas.microsoft.com/office/drawing/2014/main" id="{63743A58-A05A-4C7F-AB32-201DD63F896E}"/>
               </a:ext>
             </a:extLst>
           </p:cNvPr>
@@ -8424,7 +8424,7 @@
           <p:cNvPr id="2" name="kicker-15">
             <a:extLst xmlns:a="http://schemas.openxmlformats.org/drawingml/2006/main">
               <a:ext uri="{FF2B5EF4-FFF2-40B4-BE49-F238E27FC236}">
-                <a16:creationId xmlns:a16="http://schemas.microsoft.com/office/drawing/2014/main" id="{411468E2-3B89-41F6-B3D4-12D230995B5C}"/>
+                <a16:creationId xmlns:a16="http://schemas.microsoft.com/office/drawing/2014/main" id="{27F755BA-4E42-42D2-8565-BC0C58DF07AE}"/>
               </a:ext>
             </a:extLst>
           </p:cNvPr>
@@ -8486,7 +8486,7 @@
           <p:cNvPr id="3" name="title-15">
             <a:extLst xmlns:a="http://schemas.openxmlformats.org/drawingml/2006/main">
               <a:ext uri="{FF2B5EF4-FFF2-40B4-BE49-F238E27FC236}">
-                <a16:creationId xmlns:a16="http://schemas.microsoft.com/office/drawing/2014/main" id="{CE7A1F19-1F55-4D31-87BE-0E76441E06BD}"/>
+                <a16:creationId xmlns:a16="http://schemas.microsoft.com/office/drawing/2014/main" id="{337DF264-8EA0-4B91-A481-4BA9F8A64015}"/>
               </a:ext>
             </a:extLst>
           </p:cNvPr>
@@ -8548,7 +8548,7 @@
           <p:cNvPr id="4" name="">
             <a:extLst xmlns:a="http://schemas.openxmlformats.org/drawingml/2006/main">
               <a:ext uri="{FF2B5EF4-FFF2-40B4-BE49-F238E27FC236}">
-                <a16:creationId xmlns:a16="http://schemas.microsoft.com/office/drawing/2014/main" id="{B0EAAC92-C3FC-46FC-8FAC-8806CCBAAA1A}"/>
+                <a16:creationId xmlns:a16="http://schemas.microsoft.com/office/drawing/2014/main" id="{92720645-9FFD-4F8C-A7D6-6EA1AA818D95}"/>
               </a:ext>
             </a:extLst>
           </p:cNvPr>
@@ -8610,7 +8610,7 @@
           <p:cNvPr id="5" name="">
             <a:extLst xmlns:a="http://schemas.openxmlformats.org/drawingml/2006/main">
               <a:ext uri="{FF2B5EF4-FFF2-40B4-BE49-F238E27FC236}">
-                <a16:creationId xmlns:a16="http://schemas.microsoft.com/office/drawing/2014/main" id="{940B00B0-3961-46E8-8DE3-14795BB68ADC}"/>
+                <a16:creationId xmlns:a16="http://schemas.microsoft.com/office/drawing/2014/main" id="{9DCF6B4B-26FC-4912-AEA6-4855C3BD9108}"/>
               </a:ext>
             </a:extLst>
           </p:cNvPr>
@@ -8672,7 +8672,7 @@
           <p:cNvPr id="6" name="">
             <a:extLst xmlns:a="http://schemas.openxmlformats.org/drawingml/2006/main">
               <a:ext uri="{FF2B5EF4-FFF2-40B4-BE49-F238E27FC236}">
-                <a16:creationId xmlns:a16="http://schemas.microsoft.com/office/drawing/2014/main" id="{C33C0A8C-1AE1-496A-8DB6-7765544C2720}"/>
+                <a16:creationId xmlns:a16="http://schemas.microsoft.com/office/drawing/2014/main" id="{669BBFB4-A09C-49C7-BC33-FAB832C15257}"/>
               </a:ext>
             </a:extLst>
           </p:cNvPr>
@@ -8734,7 +8734,7 @@
           <p:cNvPr id="7" name="">
             <a:extLst xmlns:a="http://schemas.openxmlformats.org/drawingml/2006/main">
               <a:ext uri="{FF2B5EF4-FFF2-40B4-BE49-F238E27FC236}">
-                <a16:creationId xmlns:a16="http://schemas.microsoft.com/office/drawing/2014/main" id="{853D74DE-CFD5-448C-8FE4-57CED24DA60A}"/>
+                <a16:creationId xmlns:a16="http://schemas.microsoft.com/office/drawing/2014/main" id="{FE0F08AC-7555-4649-BC23-6B71E773CDB4}"/>
               </a:ext>
             </a:extLst>
           </p:cNvPr>
@@ -8765,7 +8765,7 @@
           <p:cNvPr id="8" name="">
             <a:extLst xmlns:a="http://schemas.openxmlformats.org/drawingml/2006/main">
               <a:ext uri="{FF2B5EF4-FFF2-40B4-BE49-F238E27FC236}">
-                <a16:creationId xmlns:a16="http://schemas.microsoft.com/office/drawing/2014/main" id="{DAC4C34F-16BF-40B8-A689-6A54C018475D}"/>
+                <a16:creationId xmlns:a16="http://schemas.microsoft.com/office/drawing/2014/main" id="{83A15885-4501-4135-BC0A-9A471A4E205F}"/>
               </a:ext>
             </a:extLst>
           </p:cNvPr>
@@ -8827,7 +8827,7 @@
           <p:cNvPr id="9" name="">
             <a:extLst xmlns:a="http://schemas.openxmlformats.org/drawingml/2006/main">
               <a:ext uri="{FF2B5EF4-FFF2-40B4-BE49-F238E27FC236}">
-                <a16:creationId xmlns:a16="http://schemas.microsoft.com/office/drawing/2014/main" id="{56C63BFB-4B3C-40E4-97F4-A86143ACFA4B}"/>
+                <a16:creationId xmlns:a16="http://schemas.microsoft.com/office/drawing/2014/main" id="{BD69768B-821A-4AF1-AA92-7F9927A38682}"/>
               </a:ext>
             </a:extLst>
           </p:cNvPr>
@@ -8889,7 +8889,7 @@
           <p:cNvPr id="10" name="">
             <a:extLst xmlns:a="http://schemas.openxmlformats.org/drawingml/2006/main">
               <a:ext uri="{FF2B5EF4-FFF2-40B4-BE49-F238E27FC236}">
-                <a16:creationId xmlns:a16="http://schemas.microsoft.com/office/drawing/2014/main" id="{F2D73B44-F5D4-4841-AA00-3F10D5F17302}"/>
+                <a16:creationId xmlns:a16="http://schemas.microsoft.com/office/drawing/2014/main" id="{C918CEC7-5F1D-4F98-8132-E5966C8EB67A}"/>
               </a:ext>
             </a:extLst>
           </p:cNvPr>
@@ -8951,7 +8951,7 @@
           <p:cNvPr id="11" name="">
             <a:extLst xmlns:a="http://schemas.openxmlformats.org/drawingml/2006/main">
               <a:ext uri="{FF2B5EF4-FFF2-40B4-BE49-F238E27FC236}">
-                <a16:creationId xmlns:a16="http://schemas.microsoft.com/office/drawing/2014/main" id="{8059336D-659E-4069-ACE8-674A882F5B12}"/>
+                <a16:creationId xmlns:a16="http://schemas.microsoft.com/office/drawing/2014/main" id="{8393DB01-35DE-4B3A-8EF7-4A6A8D8FF495}"/>
               </a:ext>
             </a:extLst>
           </p:cNvPr>
@@ -8982,7 +8982,7 @@
           <p:cNvPr id="12" name="">
             <a:extLst xmlns:a="http://schemas.openxmlformats.org/drawingml/2006/main">
               <a:ext uri="{FF2B5EF4-FFF2-40B4-BE49-F238E27FC236}">
-                <a16:creationId xmlns:a16="http://schemas.microsoft.com/office/drawing/2014/main" id="{7A040285-E68B-450F-A214-771E1B3A06FD}"/>
+                <a16:creationId xmlns:a16="http://schemas.microsoft.com/office/drawing/2014/main" id="{08D82C35-FA2C-4E4F-840C-B000D15647F0}"/>
               </a:ext>
             </a:extLst>
           </p:cNvPr>
@@ -9044,7 +9044,7 @@
           <p:cNvPr id="13" name="">
             <a:extLst xmlns:a="http://schemas.openxmlformats.org/drawingml/2006/main">
               <a:ext uri="{FF2B5EF4-FFF2-40B4-BE49-F238E27FC236}">
-                <a16:creationId xmlns:a16="http://schemas.microsoft.com/office/drawing/2014/main" id="{FF51DB59-AFD4-4315-8A06-9DF86A1E3B2C}"/>
+                <a16:creationId xmlns:a16="http://schemas.microsoft.com/office/drawing/2014/main" id="{FBAC9BA5-6AB3-4C4E-94C6-593511630B4F}"/>
               </a:ext>
             </a:extLst>
           </p:cNvPr>
@@ -9106,7 +9106,7 @@
           <p:cNvPr id="14" name="">
             <a:extLst xmlns:a="http://schemas.openxmlformats.org/drawingml/2006/main">
               <a:ext uri="{FF2B5EF4-FFF2-40B4-BE49-F238E27FC236}">
-                <a16:creationId xmlns:a16="http://schemas.microsoft.com/office/drawing/2014/main" id="{D13FBB90-EAA1-4B3D-AFF4-0A50A4A001D5}"/>
+                <a16:creationId xmlns:a16="http://schemas.microsoft.com/office/drawing/2014/main" id="{24BDDDB4-4F2D-4267-AC13-4EE9F3FFEBF1}"/>
               </a:ext>
             </a:extLst>
           </p:cNvPr>
@@ -9168,7 +9168,7 @@
           <p:cNvPr id="15" name="">
             <a:extLst xmlns:a="http://schemas.openxmlformats.org/drawingml/2006/main">
               <a:ext uri="{FF2B5EF4-FFF2-40B4-BE49-F238E27FC236}">
-                <a16:creationId xmlns:a16="http://schemas.microsoft.com/office/drawing/2014/main" id="{3F2A813E-12DC-429F-A3F5-881CBB3A1457}"/>
+                <a16:creationId xmlns:a16="http://schemas.microsoft.com/office/drawing/2014/main" id="{7E815356-06DB-4CF6-8E36-C9CA840F7BD4}"/>
               </a:ext>
             </a:extLst>
           </p:cNvPr>
@@ -9199,7 +9199,7 @@
           <p:cNvPr id="16" name="">
             <a:extLst xmlns:a="http://schemas.openxmlformats.org/drawingml/2006/main">
               <a:ext uri="{FF2B5EF4-FFF2-40B4-BE49-F238E27FC236}">
-                <a16:creationId xmlns:a16="http://schemas.microsoft.com/office/drawing/2014/main" id="{D9EA0E21-B83B-4A69-937D-550AF4FDC6CB}"/>
+                <a16:creationId xmlns:a16="http://schemas.microsoft.com/office/drawing/2014/main" id="{34AAD7ED-799B-4025-8277-81FAC1F60DDD}"/>
               </a:ext>
             </a:extLst>
           </p:cNvPr>
@@ -9261,7 +9261,7 @@
           <p:cNvPr id="17" name="">
             <a:extLst xmlns:a="http://schemas.openxmlformats.org/drawingml/2006/main">
               <a:ext uri="{FF2B5EF4-FFF2-40B4-BE49-F238E27FC236}">
-                <a16:creationId xmlns:a16="http://schemas.microsoft.com/office/drawing/2014/main" id="{3673A875-9B9C-4DA9-AA28-51ED8C341F1F}"/>
+                <a16:creationId xmlns:a16="http://schemas.microsoft.com/office/drawing/2014/main" id="{E5956863-89DA-4FDC-8182-80DFEC129C95}"/>
               </a:ext>
             </a:extLst>
           </p:cNvPr>
@@ -9323,7 +9323,7 @@
           <p:cNvPr id="18" name="">
             <a:extLst xmlns:a="http://schemas.openxmlformats.org/drawingml/2006/main">
               <a:ext uri="{FF2B5EF4-FFF2-40B4-BE49-F238E27FC236}">
-                <a16:creationId xmlns:a16="http://schemas.microsoft.com/office/drawing/2014/main" id="{AD5F252C-1380-4CFE-9D78-2E130481BF9A}"/>
+                <a16:creationId xmlns:a16="http://schemas.microsoft.com/office/drawing/2014/main" id="{E864A05B-9F6C-4CC9-A5F0-E90620AE0AA9}"/>
               </a:ext>
             </a:extLst>
           </p:cNvPr>
@@ -9385,7 +9385,7 @@
           <p:cNvPr id="19" name="">
             <a:extLst xmlns:a="http://schemas.openxmlformats.org/drawingml/2006/main">
               <a:ext uri="{FF2B5EF4-FFF2-40B4-BE49-F238E27FC236}">
-                <a16:creationId xmlns:a16="http://schemas.microsoft.com/office/drawing/2014/main" id="{1863916C-E827-4B97-BB19-48D870597B0A}"/>
+                <a16:creationId xmlns:a16="http://schemas.microsoft.com/office/drawing/2014/main" id="{F36D3029-1F86-4D68-8BC4-A7DFA645F8E0}"/>
               </a:ext>
             </a:extLst>
           </p:cNvPr>
@@ -9418,7 +9418,7 @@
           <p:cNvPr id="20" name="">
             <a:extLst xmlns:a="http://schemas.openxmlformats.org/drawingml/2006/main">
               <a:ext uri="{FF2B5EF4-FFF2-40B4-BE49-F238E27FC236}">
-                <a16:creationId xmlns:a16="http://schemas.microsoft.com/office/drawing/2014/main" id="{26FE5782-F56B-463A-A79B-7A93F3A90FAE}"/>
+                <a16:creationId xmlns:a16="http://schemas.microsoft.com/office/drawing/2014/main" id="{919428C4-60CF-41DE-8CE8-B4D98C8AA282}"/>
               </a:ext>
             </a:extLst>
           </p:cNvPr>
@@ -9480,7 +9480,7 @@
           <p:cNvPr id="21" name="footer-rule-15">
             <a:extLst xmlns:a="http://schemas.openxmlformats.org/drawingml/2006/main">
               <a:ext uri="{FF2B5EF4-FFF2-40B4-BE49-F238E27FC236}">
-                <a16:creationId xmlns:a16="http://schemas.microsoft.com/office/drawing/2014/main" id="{99D218C1-BA75-416C-BACB-03BE8D906889}"/>
+                <a16:creationId xmlns:a16="http://schemas.microsoft.com/office/drawing/2014/main" id="{FA69E204-A127-4BC7-B03B-9D37706A6A56}"/>
               </a:ext>
             </a:extLst>
           </p:cNvPr>
@@ -9511,7 +9511,7 @@
           <p:cNvPr id="22" name="footer-label-15">
             <a:extLst xmlns:a="http://schemas.openxmlformats.org/drawingml/2006/main">
               <a:ext uri="{FF2B5EF4-FFF2-40B4-BE49-F238E27FC236}">
-                <a16:creationId xmlns:a16="http://schemas.microsoft.com/office/drawing/2014/main" id="{D6E28750-3F78-4419-BF73-E83087BABD92}"/>
+                <a16:creationId xmlns:a16="http://schemas.microsoft.com/office/drawing/2014/main" id="{8064D1B0-904C-40C1-A2AC-992E211CF07B}"/>
               </a:ext>
             </a:extLst>
           </p:cNvPr>
@@ -9573,7 +9573,7 @@
           <p:cNvPr id="23" name="footer-page-15">
             <a:extLst xmlns:a="http://schemas.openxmlformats.org/drawingml/2006/main">
               <a:ext uri="{FF2B5EF4-FFF2-40B4-BE49-F238E27FC236}">
-                <a16:creationId xmlns:a16="http://schemas.microsoft.com/office/drawing/2014/main" id="{9C3B3DBE-E0A7-4C2D-BB7F-ECC544899AB5}"/>
+                <a16:creationId xmlns:a16="http://schemas.microsoft.com/office/drawing/2014/main" id="{82AAEBB8-B4F2-4C09-88BD-B49F455A9A4E}"/>
               </a:ext>
             </a:extLst>
           </p:cNvPr>
@@ -9633,7 +9633,7 @@
     </p:spTree>
     <p:extLst>
       <p:ext uri="{BB962C8B-B14F-4D97-AF65-F5344CB8AC3E}">
-        <p14:creationId xmlns:p14="http://schemas.microsoft.com/office/powerpoint/2010/main" val="1174669177"/>
+        <p14:creationId xmlns:p14="http://schemas.microsoft.com/office/powerpoint/2010/main" val="826631126"/>
       </p:ext>
     </p:extLst>
   </p:cSld>
@@ -9664,7 +9664,7 @@
           <p:cNvPr id="21" name="side-accent-16">
             <a:extLst xmlns:a="http://schemas.openxmlformats.org/drawingml/2006/main">
               <a:ext uri="{FF2B5EF4-FFF2-40B4-BE49-F238E27FC236}">
-                <a16:creationId xmlns:a16="http://schemas.microsoft.com/office/drawing/2014/main" id="{29E809C4-BF85-4191-9519-374114E7D48A}"/>
+                <a16:creationId xmlns:a16="http://schemas.microsoft.com/office/drawing/2014/main" id="{F6B5BAEB-7488-451E-9ED7-44A636FA85AE}"/>
               </a:ext>
             </a:extLst>
           </p:cNvPr>
@@ -9695,7 +9695,7 @@
           <p:cNvPr id="2" name="kicker-16">
             <a:extLst xmlns:a="http://schemas.openxmlformats.org/drawingml/2006/main">
               <a:ext uri="{FF2B5EF4-FFF2-40B4-BE49-F238E27FC236}">
-                <a16:creationId xmlns:a16="http://schemas.microsoft.com/office/drawing/2014/main" id="{D2DE7189-D126-4ADC-BD28-CBAD52334C6B}"/>
+                <a16:creationId xmlns:a16="http://schemas.microsoft.com/office/drawing/2014/main" id="{6FF2BB5E-2D02-427D-9728-0241ED96F0AC}"/>
               </a:ext>
             </a:extLst>
           </p:cNvPr>
@@ -9757,7 +9757,7 @@
           <p:cNvPr id="3" name="title-16">
             <a:extLst xmlns:a="http://schemas.openxmlformats.org/drawingml/2006/main">
               <a:ext uri="{FF2B5EF4-FFF2-40B4-BE49-F238E27FC236}">
-                <a16:creationId xmlns:a16="http://schemas.microsoft.com/office/drawing/2014/main" id="{BBECA28C-F232-4C59-8D15-4C92071E8A18}"/>
+                <a16:creationId xmlns:a16="http://schemas.microsoft.com/office/drawing/2014/main" id="{FA826E3F-C854-4A8E-BA2C-13EC4E9354AF}"/>
               </a:ext>
             </a:extLst>
           </p:cNvPr>
@@ -9819,7 +9819,7 @@
           <p:cNvPr id="4" name="">
             <a:extLst xmlns:a="http://schemas.openxmlformats.org/drawingml/2006/main">
               <a:ext uri="{FF2B5EF4-FFF2-40B4-BE49-F238E27FC236}">
-                <a16:creationId xmlns:a16="http://schemas.microsoft.com/office/drawing/2014/main" id="{0D78E5E6-B41E-4E55-B128-F67C32BA8C7D}"/>
+                <a16:creationId xmlns:a16="http://schemas.microsoft.com/office/drawing/2014/main" id="{F9747704-1FDD-4F1D-8DFA-7C8CE40CBFA9}"/>
               </a:ext>
             </a:extLst>
           </p:cNvPr>
@@ -9850,7 +9850,7 @@
           <p:cNvPr id="5" name="">
             <a:extLst xmlns:a="http://schemas.openxmlformats.org/drawingml/2006/main">
               <a:ext uri="{FF2B5EF4-FFF2-40B4-BE49-F238E27FC236}">
-                <a16:creationId xmlns:a16="http://schemas.microsoft.com/office/drawing/2014/main" id="{63118CD5-8F59-4CB1-889D-FAD4341197D3}"/>
+                <a16:creationId xmlns:a16="http://schemas.microsoft.com/office/drawing/2014/main" id="{2D500249-678D-4D17-82CE-9A6BC8893116}"/>
               </a:ext>
             </a:extLst>
           </p:cNvPr>
@@ -9881,7 +9881,7 @@
           <p:cNvPr id="6" name="">
             <a:extLst xmlns:a="http://schemas.openxmlformats.org/drawingml/2006/main">
               <a:ext uri="{FF2B5EF4-FFF2-40B4-BE49-F238E27FC236}">
-                <a16:creationId xmlns:a16="http://schemas.microsoft.com/office/drawing/2014/main" id="{EB104F25-FF5E-4FB2-9E92-5B8C287591DB}"/>
+                <a16:creationId xmlns:a16="http://schemas.microsoft.com/office/drawing/2014/main" id="{81B49A72-7A19-4F8C-AA6A-EACC2BC2450B}"/>
               </a:ext>
             </a:extLst>
           </p:cNvPr>
@@ -9943,7 +9943,7 @@
           <p:cNvPr id="7" name="">
             <a:extLst xmlns:a="http://schemas.openxmlformats.org/drawingml/2006/main">
               <a:ext uri="{FF2B5EF4-FFF2-40B4-BE49-F238E27FC236}">
-                <a16:creationId xmlns:a16="http://schemas.microsoft.com/office/drawing/2014/main" id="{1190B5CC-792B-467D-A386-FF1AE5EBA119}"/>
+                <a16:creationId xmlns:a16="http://schemas.microsoft.com/office/drawing/2014/main" id="{DD8E692E-F7A6-4DDC-8E42-AAF3401F3803}"/>
               </a:ext>
             </a:extLst>
           </p:cNvPr>
@@ -10005,7 +10005,7 @@
           <p:cNvPr id="8" name="">
             <a:extLst xmlns:a="http://schemas.openxmlformats.org/drawingml/2006/main">
               <a:ext uri="{FF2B5EF4-FFF2-40B4-BE49-F238E27FC236}">
-                <a16:creationId xmlns:a16="http://schemas.microsoft.com/office/drawing/2014/main" id="{E12CF86D-85A6-42F8-B55E-A8C0D4208F66}"/>
+                <a16:creationId xmlns:a16="http://schemas.microsoft.com/office/drawing/2014/main" id="{054E38D9-3441-4AF7-9257-BE8C5510F8F2}"/>
               </a:ext>
             </a:extLst>
           </p:cNvPr>
@@ -10067,7 +10067,7 @@
           <p:cNvPr id="9" name="">
             <a:extLst xmlns:a="http://schemas.openxmlformats.org/drawingml/2006/main">
               <a:ext uri="{FF2B5EF4-FFF2-40B4-BE49-F238E27FC236}">
-                <a16:creationId xmlns:a16="http://schemas.microsoft.com/office/drawing/2014/main" id="{64C42090-488C-4564-A0CF-D8152E28C977}"/>
+                <a16:creationId xmlns:a16="http://schemas.microsoft.com/office/drawing/2014/main" id="{4A635154-6DA9-4822-97B6-C95A40582BCC}"/>
               </a:ext>
             </a:extLst>
           </p:cNvPr>
@@ -10098,7 +10098,7 @@
           <p:cNvPr id="10" name="">
             <a:extLst xmlns:a="http://schemas.openxmlformats.org/drawingml/2006/main">
               <a:ext uri="{FF2B5EF4-FFF2-40B4-BE49-F238E27FC236}">
-                <a16:creationId xmlns:a16="http://schemas.microsoft.com/office/drawing/2014/main" id="{36047850-FC6D-4594-99A4-4835431E7DDE}"/>
+                <a16:creationId xmlns:a16="http://schemas.microsoft.com/office/drawing/2014/main" id="{08AD20FB-ACDC-4D0E-BCE6-A0BEDAF2B55F}"/>
               </a:ext>
             </a:extLst>
           </p:cNvPr>
@@ -10160,7 +10160,7 @@
           <p:cNvPr id="11" name="">
             <a:extLst xmlns:a="http://schemas.openxmlformats.org/drawingml/2006/main">
               <a:ext uri="{FF2B5EF4-FFF2-40B4-BE49-F238E27FC236}">
-                <a16:creationId xmlns:a16="http://schemas.microsoft.com/office/drawing/2014/main" id="{D691A57E-FA65-4F8F-B934-0D3200530F20}"/>
+                <a16:creationId xmlns:a16="http://schemas.microsoft.com/office/drawing/2014/main" id="{A7C770C1-3D4A-476F-BDD0-C475C955B1AF}"/>
               </a:ext>
             </a:extLst>
           </p:cNvPr>
@@ -10222,7 +10222,7 @@
           <p:cNvPr id="12" name="">
             <a:extLst xmlns:a="http://schemas.openxmlformats.org/drawingml/2006/main">
               <a:ext uri="{FF2B5EF4-FFF2-40B4-BE49-F238E27FC236}">
-                <a16:creationId xmlns:a16="http://schemas.microsoft.com/office/drawing/2014/main" id="{B1181DBB-344B-41EA-95CB-8472D3FAC26B}"/>
+                <a16:creationId xmlns:a16="http://schemas.microsoft.com/office/drawing/2014/main" id="{48FBB769-C9F2-443D-91EC-F8D696E77591}"/>
               </a:ext>
             </a:extLst>
           </p:cNvPr>
@@ -10284,7 +10284,7 @@
           <p:cNvPr id="13" name="">
             <a:extLst xmlns:a="http://schemas.openxmlformats.org/drawingml/2006/main">
               <a:ext uri="{FF2B5EF4-FFF2-40B4-BE49-F238E27FC236}">
-                <a16:creationId xmlns:a16="http://schemas.microsoft.com/office/drawing/2014/main" id="{7682659E-D06D-42F5-BEA7-0FD0ED7D1FDC}"/>
+                <a16:creationId xmlns:a16="http://schemas.microsoft.com/office/drawing/2014/main" id="{5C00A9BD-AE96-4CCE-AB8C-C5C5CC7D6B11}"/>
               </a:ext>
             </a:extLst>
           </p:cNvPr>
@@ -10315,7 +10315,7 @@
           <p:cNvPr id="14" name="">
             <a:extLst xmlns:a="http://schemas.openxmlformats.org/drawingml/2006/main">
               <a:ext uri="{FF2B5EF4-FFF2-40B4-BE49-F238E27FC236}">
-                <a16:creationId xmlns:a16="http://schemas.microsoft.com/office/drawing/2014/main" id="{E7134E57-1DB0-4E3A-AB04-5D19BE408D7F}"/>
+                <a16:creationId xmlns:a16="http://schemas.microsoft.com/office/drawing/2014/main" id="{89FDAA17-30E4-44F3-B08A-70F58022EADC}"/>
               </a:ext>
             </a:extLst>
           </p:cNvPr>
@@ -10377,7 +10377,7 @@
           <p:cNvPr id="15" name="">
             <a:extLst xmlns:a="http://schemas.openxmlformats.org/drawingml/2006/main">
               <a:ext uri="{FF2B5EF4-FFF2-40B4-BE49-F238E27FC236}">
-                <a16:creationId xmlns:a16="http://schemas.microsoft.com/office/drawing/2014/main" id="{34A2AD7E-0AC9-4E4E-BBEB-DB0619FB00A3}"/>
+                <a16:creationId xmlns:a16="http://schemas.microsoft.com/office/drawing/2014/main" id="{A3CD6AFA-966D-4D6B-9212-10BB14C4CB8D}"/>
               </a:ext>
             </a:extLst>
           </p:cNvPr>
@@ -10439,7 +10439,7 @@
           <p:cNvPr id="16" name="">
             <a:extLst xmlns:a="http://schemas.openxmlformats.org/drawingml/2006/main">
               <a:ext uri="{FF2B5EF4-FFF2-40B4-BE49-F238E27FC236}">
-                <a16:creationId xmlns:a16="http://schemas.microsoft.com/office/drawing/2014/main" id="{E4C8D912-3453-4E91-B18C-358164111934}"/>
+                <a16:creationId xmlns:a16="http://schemas.microsoft.com/office/drawing/2014/main" id="{2CA75C54-95D1-41AB-B34B-AB7B2CF2E330}"/>
               </a:ext>
             </a:extLst>
           </p:cNvPr>
@@ -10501,7 +10501,7 @@
           <p:cNvPr id="17" name="">
             <a:extLst xmlns:a="http://schemas.openxmlformats.org/drawingml/2006/main">
               <a:ext uri="{FF2B5EF4-FFF2-40B4-BE49-F238E27FC236}">
-                <a16:creationId xmlns:a16="http://schemas.microsoft.com/office/drawing/2014/main" id="{A83AD853-FE74-4FF9-96F5-1BA5138BFD91}"/>
+                <a16:creationId xmlns:a16="http://schemas.microsoft.com/office/drawing/2014/main" id="{C9563CF5-E488-47EF-AA66-82DC7FC69FD6}"/>
               </a:ext>
             </a:extLst>
           </p:cNvPr>
@@ -10563,7 +10563,7 @@
           <p:cNvPr id="18" name="footer-rule-16">
             <a:extLst xmlns:a="http://schemas.openxmlformats.org/drawingml/2006/main">
               <a:ext uri="{FF2B5EF4-FFF2-40B4-BE49-F238E27FC236}">
-                <a16:creationId xmlns:a16="http://schemas.microsoft.com/office/drawing/2014/main" id="{10D17F40-DA17-43D2-82DF-F3C7615F3F2C}"/>
+                <a16:creationId xmlns:a16="http://schemas.microsoft.com/office/drawing/2014/main" id="{426036D6-D603-4089-B68F-3EA1810BA2F4}"/>
               </a:ext>
             </a:extLst>
           </p:cNvPr>
@@ -10594,7 +10594,7 @@
           <p:cNvPr id="19" name="footer-label-16">
             <a:extLst xmlns:a="http://schemas.openxmlformats.org/drawingml/2006/main">
               <a:ext uri="{FF2B5EF4-FFF2-40B4-BE49-F238E27FC236}">
-                <a16:creationId xmlns:a16="http://schemas.microsoft.com/office/drawing/2014/main" id="{E65B6547-0F10-4F50-A293-C614DC041FC3}"/>
+                <a16:creationId xmlns:a16="http://schemas.microsoft.com/office/drawing/2014/main" id="{6C8BAA2F-2947-4485-B631-21CEDF99A064}"/>
               </a:ext>
             </a:extLst>
           </p:cNvPr>
@@ -10656,7 +10656,7 @@
           <p:cNvPr id="20" name="footer-page-16">
             <a:extLst xmlns:a="http://schemas.openxmlformats.org/drawingml/2006/main">
               <a:ext uri="{FF2B5EF4-FFF2-40B4-BE49-F238E27FC236}">
-                <a16:creationId xmlns:a16="http://schemas.microsoft.com/office/drawing/2014/main" id="{221A051E-8E63-4E70-B350-B6BCB158460F}"/>
+                <a16:creationId xmlns:a16="http://schemas.microsoft.com/office/drawing/2014/main" id="{298FA71A-1C58-4F3C-BFD3-BA772AEF6424}"/>
               </a:ext>
             </a:extLst>
           </p:cNvPr>
@@ -10716,7 +10716,7 @@
     </p:spTree>
     <p:extLst>
       <p:ext uri="{BB962C8B-B14F-4D97-AF65-F5344CB8AC3E}">
-        <p14:creationId xmlns:p14="http://schemas.microsoft.com/office/powerpoint/2010/main" val="970947580"/>
+        <p14:creationId xmlns:p14="http://schemas.microsoft.com/office/powerpoint/2010/main" val="2100455791"/>
       </p:ext>
     </p:extLst>
   </p:cSld>
@@ -10747,7 +10747,7 @@
           <p:cNvPr id="22" name="side-accent-17">
             <a:extLst xmlns:a="http://schemas.openxmlformats.org/drawingml/2006/main">
               <a:ext uri="{FF2B5EF4-FFF2-40B4-BE49-F238E27FC236}">
-                <a16:creationId xmlns:a16="http://schemas.microsoft.com/office/drawing/2014/main" id="{9F0D066C-2A88-49C6-B781-9B65FE1F0B0D}"/>
+                <a16:creationId xmlns:a16="http://schemas.microsoft.com/office/drawing/2014/main" id="{EDBF9746-01DF-47DE-9E57-7C6EFB40B02D}"/>
               </a:ext>
             </a:extLst>
           </p:cNvPr>
@@ -10778,7 +10778,7 @@
           <p:cNvPr id="2" name="kicker-17">
             <a:extLst xmlns:a="http://schemas.openxmlformats.org/drawingml/2006/main">
               <a:ext uri="{FF2B5EF4-FFF2-40B4-BE49-F238E27FC236}">
-                <a16:creationId xmlns:a16="http://schemas.microsoft.com/office/drawing/2014/main" id="{B027F96B-D089-4BE2-B6B0-84BC197FBE29}"/>
+                <a16:creationId xmlns:a16="http://schemas.microsoft.com/office/drawing/2014/main" id="{2BA39CCA-597B-45FB-82B2-0B9C5FC8CE1B}"/>
               </a:ext>
             </a:extLst>
           </p:cNvPr>
@@ -10840,7 +10840,7 @@
           <p:cNvPr id="3" name="title-17">
             <a:extLst xmlns:a="http://schemas.openxmlformats.org/drawingml/2006/main">
               <a:ext uri="{FF2B5EF4-FFF2-40B4-BE49-F238E27FC236}">
-                <a16:creationId xmlns:a16="http://schemas.microsoft.com/office/drawing/2014/main" id="{5A964D3C-00A2-4CBA-975D-903C3BF709E0}"/>
+                <a16:creationId xmlns:a16="http://schemas.microsoft.com/office/drawing/2014/main" id="{FEE13294-BA98-4762-AABF-F164BFAA352A}"/>
               </a:ext>
             </a:extLst>
           </p:cNvPr>
@@ -10902,7 +10902,7 @@
           <p:cNvPr id="4" name="">
             <a:extLst xmlns:a="http://schemas.openxmlformats.org/drawingml/2006/main">
               <a:ext uri="{FF2B5EF4-FFF2-40B4-BE49-F238E27FC236}">
-                <a16:creationId xmlns:a16="http://schemas.microsoft.com/office/drawing/2014/main" id="{398BEA84-2744-4C2D-8BBF-880596A9B5CD}"/>
+                <a16:creationId xmlns:a16="http://schemas.microsoft.com/office/drawing/2014/main" id="{6C97F2A1-0701-4779-9BA3-4D84D75AFA80}"/>
               </a:ext>
             </a:extLst>
           </p:cNvPr>
@@ -10964,7 +10964,7 @@
           <p:cNvPr id="5" name="">
             <a:extLst xmlns:a="http://schemas.openxmlformats.org/drawingml/2006/main">
               <a:ext uri="{FF2B5EF4-FFF2-40B4-BE49-F238E27FC236}">
-                <a16:creationId xmlns:a16="http://schemas.microsoft.com/office/drawing/2014/main" id="{0C186C6A-8B1D-4E6A-8E6F-DAB97B24A2C9}"/>
+                <a16:creationId xmlns:a16="http://schemas.microsoft.com/office/drawing/2014/main" id="{4DD237CE-89DC-4EF1-85B8-9B6104324538}"/>
               </a:ext>
             </a:extLst>
           </p:cNvPr>
@@ -10995,7 +10995,7 @@
           <p:cNvPr id="6" name="">
             <a:extLst xmlns:a="http://schemas.openxmlformats.org/drawingml/2006/main">
               <a:ext uri="{FF2B5EF4-FFF2-40B4-BE49-F238E27FC236}">
-                <a16:creationId xmlns:a16="http://schemas.microsoft.com/office/drawing/2014/main" id="{55519F44-39F3-4EB5-B38A-73601BC09212}"/>
+                <a16:creationId xmlns:a16="http://schemas.microsoft.com/office/drawing/2014/main" id="{9C2BBB38-EC41-4CDC-9934-CBF798475E68}"/>
               </a:ext>
             </a:extLst>
           </p:cNvPr>
@@ -11057,7 +11057,7 @@
           <p:cNvPr id="7" name="">
             <a:extLst xmlns:a="http://schemas.openxmlformats.org/drawingml/2006/main">
               <a:ext uri="{FF2B5EF4-FFF2-40B4-BE49-F238E27FC236}">
-                <a16:creationId xmlns:a16="http://schemas.microsoft.com/office/drawing/2014/main" id="{2BE6F325-3F0D-4DDC-90E2-F20237F9E1AB}"/>
+                <a16:creationId xmlns:a16="http://schemas.microsoft.com/office/drawing/2014/main" id="{C026487F-2BE4-4F1D-A26D-2C88A3EAFD10}"/>
               </a:ext>
             </a:extLst>
           </p:cNvPr>
@@ -11119,7 +11119,7 @@
           <p:cNvPr id="8" name="">
             <a:extLst xmlns:a="http://schemas.openxmlformats.org/drawingml/2006/main">
               <a:ext uri="{FF2B5EF4-FFF2-40B4-BE49-F238E27FC236}">
-                <a16:creationId xmlns:a16="http://schemas.microsoft.com/office/drawing/2014/main" id="{DBA74349-370E-4155-B01E-0EA346A2BAD4}"/>
+                <a16:creationId xmlns:a16="http://schemas.microsoft.com/office/drawing/2014/main" id="{39AC2AD8-0493-45D0-B211-A0F52FA23A93}"/>
               </a:ext>
             </a:extLst>
           </p:cNvPr>
@@ -11150,7 +11150,7 @@
           <p:cNvPr id="9" name="">
             <a:extLst xmlns:a="http://schemas.openxmlformats.org/drawingml/2006/main">
               <a:ext uri="{FF2B5EF4-FFF2-40B4-BE49-F238E27FC236}">
-                <a16:creationId xmlns:a16="http://schemas.microsoft.com/office/drawing/2014/main" id="{91161617-9A50-44AF-9538-A96226D02D7A}"/>
+                <a16:creationId xmlns:a16="http://schemas.microsoft.com/office/drawing/2014/main" id="{FCBD57E7-7101-4489-AEAE-24706145E9E3}"/>
               </a:ext>
             </a:extLst>
           </p:cNvPr>
@@ -11212,7 +11212,7 @@
           <p:cNvPr id="10" name="">
             <a:extLst xmlns:a="http://schemas.openxmlformats.org/drawingml/2006/main">
               <a:ext uri="{FF2B5EF4-FFF2-40B4-BE49-F238E27FC236}">
-                <a16:creationId xmlns:a16="http://schemas.microsoft.com/office/drawing/2014/main" id="{3A1FFE32-F135-4F25-8790-FB075CF83C29}"/>
+                <a16:creationId xmlns:a16="http://schemas.microsoft.com/office/drawing/2014/main" id="{989F95CF-F743-40D3-AF44-B139812BF6A5}"/>
               </a:ext>
             </a:extLst>
           </p:cNvPr>
@@ -11274,7 +11274,7 @@
           <p:cNvPr id="11" name="">
             <a:extLst xmlns:a="http://schemas.openxmlformats.org/drawingml/2006/main">
               <a:ext uri="{FF2B5EF4-FFF2-40B4-BE49-F238E27FC236}">
-                <a16:creationId xmlns:a16="http://schemas.microsoft.com/office/drawing/2014/main" id="{10C442F9-5BB1-47C6-9DD6-4A4C36C31863}"/>
+                <a16:creationId xmlns:a16="http://schemas.microsoft.com/office/drawing/2014/main" id="{580DA31C-79E2-4033-854A-4EE8569585D1}"/>
               </a:ext>
             </a:extLst>
           </p:cNvPr>
@@ -11305,7 +11305,7 @@
           <p:cNvPr id="12" name="">
             <a:extLst xmlns:a="http://schemas.openxmlformats.org/drawingml/2006/main">
               <a:ext uri="{FF2B5EF4-FFF2-40B4-BE49-F238E27FC236}">
-                <a16:creationId xmlns:a16="http://schemas.microsoft.com/office/drawing/2014/main" id="{AB014143-73EE-444F-A45A-9B02CF776C2E}"/>
+                <a16:creationId xmlns:a16="http://schemas.microsoft.com/office/drawing/2014/main" id="{0ADA7B47-0ECC-46F0-BE4E-94AB64EDD897}"/>
               </a:ext>
             </a:extLst>
           </p:cNvPr>
@@ -11367,7 +11367,7 @@
           <p:cNvPr id="13" name="">
             <a:extLst xmlns:a="http://schemas.openxmlformats.org/drawingml/2006/main">
               <a:ext uri="{FF2B5EF4-FFF2-40B4-BE49-F238E27FC236}">
-                <a16:creationId xmlns:a16="http://schemas.microsoft.com/office/drawing/2014/main" id="{B78B6263-D988-4E28-AC0E-6A20BDD5EE1E}"/>
+                <a16:creationId xmlns:a16="http://schemas.microsoft.com/office/drawing/2014/main" id="{F92F853B-2B40-4E1B-A252-A1A046B3EDFD}"/>
               </a:ext>
             </a:extLst>
           </p:cNvPr>
@@ -11429,7 +11429,7 @@
           <p:cNvPr id="14" name="">
             <a:extLst xmlns:a="http://schemas.openxmlformats.org/drawingml/2006/main">
               <a:ext uri="{FF2B5EF4-FFF2-40B4-BE49-F238E27FC236}">
-                <a16:creationId xmlns:a16="http://schemas.microsoft.com/office/drawing/2014/main" id="{57708B69-AEC7-45B3-8785-87C69A1A1801}"/>
+                <a16:creationId xmlns:a16="http://schemas.microsoft.com/office/drawing/2014/main" id="{27519437-00BB-4597-A38B-079B2693B4F1}"/>
               </a:ext>
             </a:extLst>
           </p:cNvPr>
@@ -11460,7 +11460,7 @@
           <p:cNvPr id="15" name="">
             <a:extLst xmlns:a="http://schemas.openxmlformats.org/drawingml/2006/main">
               <a:ext uri="{FF2B5EF4-FFF2-40B4-BE49-F238E27FC236}">
-                <a16:creationId xmlns:a16="http://schemas.microsoft.com/office/drawing/2014/main" id="{2B232F36-AEA9-4749-BCB2-DA9FA0541F69}"/>
+                <a16:creationId xmlns:a16="http://schemas.microsoft.com/office/drawing/2014/main" id="{39A09B38-ADA8-429F-ACC8-8EBF0232CC68}"/>
               </a:ext>
             </a:extLst>
           </p:cNvPr>
@@ -11522,7 +11522,7 @@
           <p:cNvPr id="16" name="">
             <a:extLst xmlns:a="http://schemas.openxmlformats.org/drawingml/2006/main">
               <a:ext uri="{FF2B5EF4-FFF2-40B4-BE49-F238E27FC236}">
-                <a16:creationId xmlns:a16="http://schemas.microsoft.com/office/drawing/2014/main" id="{2C58EEEB-BBD3-4110-B7E4-1E499A311AAD}"/>
+                <a16:creationId xmlns:a16="http://schemas.microsoft.com/office/drawing/2014/main" id="{90B4C6B9-FB3B-423C-843F-2A737A9F0FCA}"/>
               </a:ext>
             </a:extLst>
           </p:cNvPr>
@@ -11584,7 +11584,7 @@
           <p:cNvPr id="17" name="">
             <a:extLst xmlns:a="http://schemas.openxmlformats.org/drawingml/2006/main">
               <a:ext uri="{FF2B5EF4-FFF2-40B4-BE49-F238E27FC236}">
-                <a16:creationId xmlns:a16="http://schemas.microsoft.com/office/drawing/2014/main" id="{9A38CCF9-D4D8-465C-927A-6ACECEA1955D}"/>
+                <a16:creationId xmlns:a16="http://schemas.microsoft.com/office/drawing/2014/main" id="{0D46C675-3815-4B1B-A5D6-6ECBF9DCDF50}"/>
               </a:ext>
             </a:extLst>
           </p:cNvPr>
@@ -11617,7 +11617,7 @@
           <p:cNvPr id="18" name="">
             <a:extLst xmlns:a="http://schemas.openxmlformats.org/drawingml/2006/main">
               <a:ext uri="{FF2B5EF4-FFF2-40B4-BE49-F238E27FC236}">
-                <a16:creationId xmlns:a16="http://schemas.microsoft.com/office/drawing/2014/main" id="{3EDDF04D-183B-4C33-8A50-311855EDBE30}"/>
+                <a16:creationId xmlns:a16="http://schemas.microsoft.com/office/drawing/2014/main" id="{E1042CED-9EF2-4605-970D-39B92FD5E10F}"/>
               </a:ext>
             </a:extLst>
           </p:cNvPr>
@@ -11679,7 +11679,7 @@
           <p:cNvPr id="19" name="footer-rule-17">
             <a:extLst xmlns:a="http://schemas.openxmlformats.org/drawingml/2006/main">
               <a:ext uri="{FF2B5EF4-FFF2-40B4-BE49-F238E27FC236}">
-                <a16:creationId xmlns:a16="http://schemas.microsoft.com/office/drawing/2014/main" id="{65ECA71F-F023-4A66-9721-7FEA08FA9F33}"/>
+                <a16:creationId xmlns:a16="http://schemas.microsoft.com/office/drawing/2014/main" id="{D368DD2B-42F7-44E2-A697-F90BCB9272FD}"/>
               </a:ext>
             </a:extLst>
           </p:cNvPr>
@@ -11710,7 +11710,7 @@
           <p:cNvPr id="20" name="footer-label-17">
             <a:extLst xmlns:a="http://schemas.openxmlformats.org/drawingml/2006/main">
               <a:ext uri="{FF2B5EF4-FFF2-40B4-BE49-F238E27FC236}">
-                <a16:creationId xmlns:a16="http://schemas.microsoft.com/office/drawing/2014/main" id="{D88A1588-E148-4873-8FD5-A88265564572}"/>
+                <a16:creationId xmlns:a16="http://schemas.microsoft.com/office/drawing/2014/main" id="{0C8719BB-CBF5-4B3C-9A2F-F1B023DB0C46}"/>
               </a:ext>
             </a:extLst>
           </p:cNvPr>
@@ -11772,7 +11772,7 @@
           <p:cNvPr id="21" name="footer-page-17">
             <a:extLst xmlns:a="http://schemas.openxmlformats.org/drawingml/2006/main">
               <a:ext uri="{FF2B5EF4-FFF2-40B4-BE49-F238E27FC236}">
-                <a16:creationId xmlns:a16="http://schemas.microsoft.com/office/drawing/2014/main" id="{B9E42A44-D0B4-4D84-80FE-46873A4E21FD}"/>
+                <a16:creationId xmlns:a16="http://schemas.microsoft.com/office/drawing/2014/main" id="{BA7DE3E9-8B03-4B31-8248-516102A96A4E}"/>
               </a:ext>
             </a:extLst>
           </p:cNvPr>
@@ -11832,7 +11832,7 @@
     </p:spTree>
     <p:extLst>
       <p:ext uri="{BB962C8B-B14F-4D97-AF65-F5344CB8AC3E}">
-        <p14:creationId xmlns:p14="http://schemas.microsoft.com/office/powerpoint/2010/main" val="778199715"/>
+        <p14:creationId xmlns:p14="http://schemas.microsoft.com/office/powerpoint/2010/main" val="260322183"/>
       </p:ext>
     </p:extLst>
   </p:cSld>
@@ -11863,7 +11863,7 @@
           <p:cNvPr id="25" name="side-accent-18">
             <a:extLst xmlns:a="http://schemas.openxmlformats.org/drawingml/2006/main">
               <a:ext uri="{FF2B5EF4-FFF2-40B4-BE49-F238E27FC236}">
-                <a16:creationId xmlns:a16="http://schemas.microsoft.com/office/drawing/2014/main" id="{DB759B29-6991-40FA-9835-ED20B6DA270C}"/>
+                <a16:creationId xmlns:a16="http://schemas.microsoft.com/office/drawing/2014/main" id="{B57D1059-D740-424B-A897-DDBDF3D4E7ED}"/>
               </a:ext>
             </a:extLst>
           </p:cNvPr>
@@ -11894,7 +11894,7 @@
           <p:cNvPr id="2" name="kicker-18">
             <a:extLst xmlns:a="http://schemas.openxmlformats.org/drawingml/2006/main">
               <a:ext uri="{FF2B5EF4-FFF2-40B4-BE49-F238E27FC236}">
-                <a16:creationId xmlns:a16="http://schemas.microsoft.com/office/drawing/2014/main" id="{52B43491-CD41-4532-82FF-8F8DA1D91642}"/>
+                <a16:creationId xmlns:a16="http://schemas.microsoft.com/office/drawing/2014/main" id="{9BC8102B-9589-4F32-9E0A-7331180EBFA8}"/>
               </a:ext>
             </a:extLst>
           </p:cNvPr>
@@ -11956,7 +11956,7 @@
           <p:cNvPr id="3" name="title-18">
             <a:extLst xmlns:a="http://schemas.openxmlformats.org/drawingml/2006/main">
               <a:ext uri="{FF2B5EF4-FFF2-40B4-BE49-F238E27FC236}">
-                <a16:creationId xmlns:a16="http://schemas.microsoft.com/office/drawing/2014/main" id="{373A1F4E-F097-4363-93B8-0FD568FA66C6}"/>
+                <a16:creationId xmlns:a16="http://schemas.microsoft.com/office/drawing/2014/main" id="{7FC8F464-F47B-4108-AC92-5CA5B3A08E44}"/>
               </a:ext>
             </a:extLst>
           </p:cNvPr>
@@ -12018,7 +12018,7 @@
           <p:cNvPr id="4" name="">
             <a:extLst xmlns:a="http://schemas.openxmlformats.org/drawingml/2006/main">
               <a:ext uri="{FF2B5EF4-FFF2-40B4-BE49-F238E27FC236}">
-                <a16:creationId xmlns:a16="http://schemas.microsoft.com/office/drawing/2014/main" id="{8975ABB8-56CB-4F4B-9DE6-1733CDB86778}"/>
+                <a16:creationId xmlns:a16="http://schemas.microsoft.com/office/drawing/2014/main" id="{F37E5A96-E3C3-4AF5-A74F-CFAD082F9B88}"/>
               </a:ext>
             </a:extLst>
           </p:cNvPr>
@@ -12080,7 +12080,7 @@
           <p:cNvPr id="5" name="">
             <a:extLst xmlns:a="http://schemas.openxmlformats.org/drawingml/2006/main">
               <a:ext uri="{FF2B5EF4-FFF2-40B4-BE49-F238E27FC236}">
-                <a16:creationId xmlns:a16="http://schemas.microsoft.com/office/drawing/2014/main" id="{332FCB4A-6C96-4EEF-A872-B550DD6CEDB4}"/>
+                <a16:creationId xmlns:a16="http://schemas.microsoft.com/office/drawing/2014/main" id="{1FDD8C35-ABB6-481B-8980-91FD433BD572}"/>
               </a:ext>
             </a:extLst>
           </p:cNvPr>
@@ -12142,7 +12142,7 @@
           <p:cNvPr id="6" name="">
             <a:extLst xmlns:a="http://schemas.openxmlformats.org/drawingml/2006/main">
               <a:ext uri="{FF2B5EF4-FFF2-40B4-BE49-F238E27FC236}">
-                <a16:creationId xmlns:a16="http://schemas.microsoft.com/office/drawing/2014/main" id="{40BD24EB-93B2-410B-9A1D-7EFCEABC12C3}"/>
+                <a16:creationId xmlns:a16="http://schemas.microsoft.com/office/drawing/2014/main" id="{596425C2-BDF8-46B9-9621-15B9695AD958}"/>
               </a:ext>
             </a:extLst>
           </p:cNvPr>
@@ -12204,7 +12204,7 @@
           <p:cNvPr id="7" name="">
             <a:extLst xmlns:a="http://schemas.openxmlformats.org/drawingml/2006/main">
               <a:ext uri="{FF2B5EF4-FFF2-40B4-BE49-F238E27FC236}">
-                <a16:creationId xmlns:a16="http://schemas.microsoft.com/office/drawing/2014/main" id="{D30A9652-CF1C-44C0-AB23-D0142E321479}"/>
+                <a16:creationId xmlns:a16="http://schemas.microsoft.com/office/drawing/2014/main" id="{3CF5ACED-375D-4117-B434-618524FA3EF1}"/>
               </a:ext>
             </a:extLst>
           </p:cNvPr>
@@ -12235,7 +12235,7 @@
           <p:cNvPr id="8" name="">
             <a:extLst xmlns:a="http://schemas.openxmlformats.org/drawingml/2006/main">
               <a:ext uri="{FF2B5EF4-FFF2-40B4-BE49-F238E27FC236}">
-                <a16:creationId xmlns:a16="http://schemas.microsoft.com/office/drawing/2014/main" id="{957CA648-2668-4570-9C3D-1EC13C7BAFCD}"/>
+                <a16:creationId xmlns:a16="http://schemas.microsoft.com/office/drawing/2014/main" id="{0EEC331D-02C6-42A9-ABFF-A3B494825465}"/>
               </a:ext>
             </a:extLst>
           </p:cNvPr>
@@ -12297,7 +12297,7 @@
           <p:cNvPr id="9" name="">
             <a:extLst xmlns:a="http://schemas.openxmlformats.org/drawingml/2006/main">
               <a:ext uri="{FF2B5EF4-FFF2-40B4-BE49-F238E27FC236}">
-                <a16:creationId xmlns:a16="http://schemas.microsoft.com/office/drawing/2014/main" id="{A5B5CB16-628B-4951-81E6-E889B9ABA16C}"/>
+                <a16:creationId xmlns:a16="http://schemas.microsoft.com/office/drawing/2014/main" id="{EA5517E1-5F2E-47B1-8994-D279BE4AA2F0}"/>
               </a:ext>
             </a:extLst>
           </p:cNvPr>
@@ -12359,7 +12359,7 @@
           <p:cNvPr id="10" name="">
             <a:extLst xmlns:a="http://schemas.openxmlformats.org/drawingml/2006/main">
               <a:ext uri="{FF2B5EF4-FFF2-40B4-BE49-F238E27FC236}">
-                <a16:creationId xmlns:a16="http://schemas.microsoft.com/office/drawing/2014/main" id="{0A2B603D-67C5-4FCD-A6B5-3A36E7AB060A}"/>
+                <a16:creationId xmlns:a16="http://schemas.microsoft.com/office/drawing/2014/main" id="{F9A03210-100B-4C33-B5BF-99E15800DCB2}"/>
               </a:ext>
             </a:extLst>
           </p:cNvPr>
@@ -12421,7 +12421,7 @@
           <p:cNvPr id="11" name="">
             <a:extLst xmlns:a="http://schemas.openxmlformats.org/drawingml/2006/main">
               <a:ext uri="{FF2B5EF4-FFF2-40B4-BE49-F238E27FC236}">
-                <a16:creationId xmlns:a16="http://schemas.microsoft.com/office/drawing/2014/main" id="{74B74A42-1975-4043-8F99-42B4123E1A06}"/>
+                <a16:creationId xmlns:a16="http://schemas.microsoft.com/office/drawing/2014/main" id="{EB5B8211-AA90-4680-BB54-7DD647BC33A3}"/>
               </a:ext>
             </a:extLst>
           </p:cNvPr>
@@ -12452,7 +12452,7 @@
           <p:cNvPr id="12" name="">
             <a:extLst xmlns:a="http://schemas.openxmlformats.org/drawingml/2006/main">
               <a:ext uri="{FF2B5EF4-FFF2-40B4-BE49-F238E27FC236}">
-                <a16:creationId xmlns:a16="http://schemas.microsoft.com/office/drawing/2014/main" id="{C47F34B6-0B64-4936-99D3-55951CA99B0C}"/>
+                <a16:creationId xmlns:a16="http://schemas.microsoft.com/office/drawing/2014/main" id="{6B0A79D9-71DE-4B08-84B4-CA801EC66508}"/>
               </a:ext>
             </a:extLst>
           </p:cNvPr>
@@ -12514,7 +12514,7 @@
           <p:cNvPr id="13" name="">
             <a:extLst xmlns:a="http://schemas.openxmlformats.org/drawingml/2006/main">
               <a:ext uri="{FF2B5EF4-FFF2-40B4-BE49-F238E27FC236}">
-                <a16:creationId xmlns:a16="http://schemas.microsoft.com/office/drawing/2014/main" id="{DC08ADAE-19D4-4C08-A153-8A52DDBB4757}"/>
+                <a16:creationId xmlns:a16="http://schemas.microsoft.com/office/drawing/2014/main" id="{EF81467D-25C1-4732-BDF1-DF3FB8EE7D38}"/>
               </a:ext>
             </a:extLst>
           </p:cNvPr>
@@ -12576,7 +12576,7 @@
           <p:cNvPr id="14" name="">
             <a:extLst xmlns:a="http://schemas.openxmlformats.org/drawingml/2006/main">
               <a:ext uri="{FF2B5EF4-FFF2-40B4-BE49-F238E27FC236}">
-                <a16:creationId xmlns:a16="http://schemas.microsoft.com/office/drawing/2014/main" id="{26A07C59-6364-46D5-BF39-31B1C17C6B1B}"/>
+                <a16:creationId xmlns:a16="http://schemas.microsoft.com/office/drawing/2014/main" id="{0C6385FB-0C18-4D29-B255-14DD6C36BD63}"/>
               </a:ext>
             </a:extLst>
           </p:cNvPr>
@@ -12638,7 +12638,7 @@
           <p:cNvPr id="15" name="">
             <a:extLst xmlns:a="http://schemas.openxmlformats.org/drawingml/2006/main">
               <a:ext uri="{FF2B5EF4-FFF2-40B4-BE49-F238E27FC236}">
-                <a16:creationId xmlns:a16="http://schemas.microsoft.com/office/drawing/2014/main" id="{BFF7260C-DCAC-47D9-9A5C-D152F92D3BB5}"/>
+                <a16:creationId xmlns:a16="http://schemas.microsoft.com/office/drawing/2014/main" id="{E9E6CE7E-FB36-4D3E-A88C-A1F1DB064292}"/>
               </a:ext>
             </a:extLst>
           </p:cNvPr>
@@ -12669,7 +12669,7 @@
           <p:cNvPr id="16" name="">
             <a:extLst xmlns:a="http://schemas.openxmlformats.org/drawingml/2006/main">
               <a:ext uri="{FF2B5EF4-FFF2-40B4-BE49-F238E27FC236}">
-                <a16:creationId xmlns:a16="http://schemas.microsoft.com/office/drawing/2014/main" id="{C79246E5-A715-49B2-8A28-A3A35422594E}"/>
+                <a16:creationId xmlns:a16="http://schemas.microsoft.com/office/drawing/2014/main" id="{D9B34E2E-D5D1-492F-89A5-2CF9F77ADD90}"/>
               </a:ext>
             </a:extLst>
           </p:cNvPr>
@@ -12731,7 +12731,7 @@
           <p:cNvPr id="17" name="">
             <a:extLst xmlns:a="http://schemas.openxmlformats.org/drawingml/2006/main">
               <a:ext uri="{FF2B5EF4-FFF2-40B4-BE49-F238E27FC236}">
-                <a16:creationId xmlns:a16="http://schemas.microsoft.com/office/drawing/2014/main" id="{6201061D-4F13-4597-8B51-2493978A9BE2}"/>
+                <a16:creationId xmlns:a16="http://schemas.microsoft.com/office/drawing/2014/main" id="{EC3A0F18-1CFE-4975-A277-2BDF08D975D2}"/>
               </a:ext>
             </a:extLst>
           </p:cNvPr>
@@ -12793,7 +12793,7 @@
           <p:cNvPr id="18" name="">
             <a:extLst xmlns:a="http://schemas.openxmlformats.org/drawingml/2006/main">
               <a:ext uri="{FF2B5EF4-FFF2-40B4-BE49-F238E27FC236}">
-                <a16:creationId xmlns:a16="http://schemas.microsoft.com/office/drawing/2014/main" id="{AB7FDB5B-63D3-4EB1-9956-06205A09274F}"/>
+                <a16:creationId xmlns:a16="http://schemas.microsoft.com/office/drawing/2014/main" id="{51EC2A2A-1117-4E81-9545-E8B0B768F315}"/>
               </a:ext>
             </a:extLst>
           </p:cNvPr>
@@ -12855,7 +12855,7 @@
           <p:cNvPr id="19" name="">
             <a:extLst xmlns:a="http://schemas.openxmlformats.org/drawingml/2006/main">
               <a:ext uri="{FF2B5EF4-FFF2-40B4-BE49-F238E27FC236}">
-                <a16:creationId xmlns:a16="http://schemas.microsoft.com/office/drawing/2014/main" id="{5EE9CFC1-2717-4BBF-89E5-AC2BDCE2168D}"/>
+                <a16:creationId xmlns:a16="http://schemas.microsoft.com/office/drawing/2014/main" id="{1D5FE941-AEE3-4942-8879-CF28818CBA1E}"/>
               </a:ext>
             </a:extLst>
           </p:cNvPr>
@@ -12888,7 +12888,7 @@
           <p:cNvPr id="20" name="">
             <a:extLst xmlns:a="http://schemas.openxmlformats.org/drawingml/2006/main">
               <a:ext uri="{FF2B5EF4-FFF2-40B4-BE49-F238E27FC236}">
-                <a16:creationId xmlns:a16="http://schemas.microsoft.com/office/drawing/2014/main" id="{E544E800-9AC9-41C0-8602-D95E304C41EF}"/>
+                <a16:creationId xmlns:a16="http://schemas.microsoft.com/office/drawing/2014/main" id="{C27A9D31-F096-4B63-845A-0F19728A5A68}"/>
               </a:ext>
             </a:extLst>
           </p:cNvPr>
@@ -12954,7 +12954,7 @@
           <p:nvPr/>
         </p:nvPicPr>
         <p:blipFill>
-          <a:blip xmlns:r="http://schemas.openxmlformats.org/officeDocument/2006/relationships" xmlns:a="http://schemas.openxmlformats.org/drawingml/2006/main" r:embed="R27089341f3f341ef"/>
+          <a:blip xmlns:r="http://schemas.openxmlformats.org/officeDocument/2006/relationships" xmlns:a="http://schemas.openxmlformats.org/drawingml/2006/main" r:embed="R75b676bac08f49b3"/>
           <a:stretch xmlns:a="http://schemas.openxmlformats.org/drawingml/2006/main"/>
         </p:blipFill>
         <p:spPr>
@@ -12972,7 +12972,7 @@
           <p:cNvPr id="22" name="footer-rule-18">
             <a:extLst xmlns:a="http://schemas.openxmlformats.org/drawingml/2006/main">
               <a:ext uri="{FF2B5EF4-FFF2-40B4-BE49-F238E27FC236}">
-                <a16:creationId xmlns:a16="http://schemas.microsoft.com/office/drawing/2014/main" id="{4C94CDAB-CC36-46A6-9D5A-09C795BFC724}"/>
+                <a16:creationId xmlns:a16="http://schemas.microsoft.com/office/drawing/2014/main" id="{EBFD74D1-8056-4B6B-9B74-A6695F52C239}"/>
               </a:ext>
             </a:extLst>
           </p:cNvPr>
@@ -13003,7 +13003,7 @@
           <p:cNvPr id="23" name="footer-label-18">
             <a:extLst xmlns:a="http://schemas.openxmlformats.org/drawingml/2006/main">
               <a:ext uri="{FF2B5EF4-FFF2-40B4-BE49-F238E27FC236}">
-                <a16:creationId xmlns:a16="http://schemas.microsoft.com/office/drawing/2014/main" id="{7B8F1BAF-DFF3-4E48-BEC8-9A45BEB49908}"/>
+                <a16:creationId xmlns:a16="http://schemas.microsoft.com/office/drawing/2014/main" id="{7FB79E86-5C17-4429-ABF1-28684B880147}"/>
               </a:ext>
             </a:extLst>
           </p:cNvPr>
@@ -13065,7 +13065,7 @@
           <p:cNvPr id="24" name="footer-page-18">
             <a:extLst xmlns:a="http://schemas.openxmlformats.org/drawingml/2006/main">
               <a:ext uri="{FF2B5EF4-FFF2-40B4-BE49-F238E27FC236}">
-                <a16:creationId xmlns:a16="http://schemas.microsoft.com/office/drawing/2014/main" id="{82589325-5410-472B-AC0A-662ED1763A46}"/>
+                <a16:creationId xmlns:a16="http://schemas.microsoft.com/office/drawing/2014/main" id="{333687C3-15DA-4851-9448-88DF60ACBE0C}"/>
               </a:ext>
             </a:extLst>
           </p:cNvPr>
@@ -13125,7 +13125,7 @@
     </p:spTree>
     <p:extLst>
       <p:ext uri="{BB962C8B-B14F-4D97-AF65-F5344CB8AC3E}">
-        <p14:creationId xmlns:p14="http://schemas.microsoft.com/office/powerpoint/2010/main" val="994160217"/>
+        <p14:creationId xmlns:p14="http://schemas.microsoft.com/office/powerpoint/2010/main" val="652363205"/>
       </p:ext>
     </p:extLst>
   </p:cSld>
@@ -13156,7 +13156,7 @@
           <p:cNvPr id="20" name="side-accent-2">
             <a:extLst xmlns:a="http://schemas.openxmlformats.org/drawingml/2006/main">
               <a:ext uri="{FF2B5EF4-FFF2-40B4-BE49-F238E27FC236}">
-                <a16:creationId xmlns:a16="http://schemas.microsoft.com/office/drawing/2014/main" id="{FAFF347C-A37C-40FA-8F79-E27A26A92847}"/>
+                <a16:creationId xmlns:a16="http://schemas.microsoft.com/office/drawing/2014/main" id="{9D6ECC8C-FDE9-4FB2-8EE1-6777CFCE8D2C}"/>
               </a:ext>
             </a:extLst>
           </p:cNvPr>
@@ -13187,7 +13187,7 @@
           <p:cNvPr id="2" name="kicker-2">
             <a:extLst xmlns:a="http://schemas.openxmlformats.org/drawingml/2006/main">
               <a:ext uri="{FF2B5EF4-FFF2-40B4-BE49-F238E27FC236}">
-                <a16:creationId xmlns:a16="http://schemas.microsoft.com/office/drawing/2014/main" id="{1E31CBE9-30A5-4D4A-8284-31294D0A6A7C}"/>
+                <a16:creationId xmlns:a16="http://schemas.microsoft.com/office/drawing/2014/main" id="{6AC7F029-70B8-419F-86CB-913892B2ED91}"/>
               </a:ext>
             </a:extLst>
           </p:cNvPr>
@@ -13249,7 +13249,7 @@
           <p:cNvPr id="3" name="title-2">
             <a:extLst xmlns:a="http://schemas.openxmlformats.org/drawingml/2006/main">
               <a:ext uri="{FF2B5EF4-FFF2-40B4-BE49-F238E27FC236}">
-                <a16:creationId xmlns:a16="http://schemas.microsoft.com/office/drawing/2014/main" id="{0D62D390-9736-4534-A49B-AF0497C0B044}"/>
+                <a16:creationId xmlns:a16="http://schemas.microsoft.com/office/drawing/2014/main" id="{EE6396F6-CACC-4F9B-8399-76C4F18734FA}"/>
               </a:ext>
             </a:extLst>
           </p:cNvPr>
@@ -13311,7 +13311,7 @@
           <p:cNvPr id="4" name="">
             <a:extLst xmlns:a="http://schemas.openxmlformats.org/drawingml/2006/main">
               <a:ext uri="{FF2B5EF4-FFF2-40B4-BE49-F238E27FC236}">
-                <a16:creationId xmlns:a16="http://schemas.microsoft.com/office/drawing/2014/main" id="{2B282996-E667-4592-90C0-F41EDC9E9F3B}"/>
+                <a16:creationId xmlns:a16="http://schemas.microsoft.com/office/drawing/2014/main" id="{AA315D70-3616-4451-A3F7-D7E445B27AD1}"/>
               </a:ext>
             </a:extLst>
           </p:cNvPr>
@@ -13373,7 +13373,7 @@
           <p:cNvPr id="5" name="">
             <a:extLst xmlns:a="http://schemas.openxmlformats.org/drawingml/2006/main">
               <a:ext uri="{FF2B5EF4-FFF2-40B4-BE49-F238E27FC236}">
-                <a16:creationId xmlns:a16="http://schemas.microsoft.com/office/drawing/2014/main" id="{C4360D5A-452C-4D5E-AEFD-2527005FF20D}"/>
+                <a16:creationId xmlns:a16="http://schemas.microsoft.com/office/drawing/2014/main" id="{1D5CC336-D387-4701-AC0C-35E8C8DC47B1}"/>
               </a:ext>
             </a:extLst>
           </p:cNvPr>
@@ -13435,7 +13435,7 @@
           <p:cNvPr id="6" name="">
             <a:extLst xmlns:a="http://schemas.openxmlformats.org/drawingml/2006/main">
               <a:ext uri="{FF2B5EF4-FFF2-40B4-BE49-F238E27FC236}">
-                <a16:creationId xmlns:a16="http://schemas.microsoft.com/office/drawing/2014/main" id="{C1069BD4-001E-4289-8518-7C666D111127}"/>
+                <a16:creationId xmlns:a16="http://schemas.microsoft.com/office/drawing/2014/main" id="{1C8DA445-4C56-40DA-BB15-3EE3EAB1C0D7}"/>
               </a:ext>
             </a:extLst>
           </p:cNvPr>
@@ -13466,7 +13466,7 @@
           <p:cNvPr id="7" name="">
             <a:extLst xmlns:a="http://schemas.openxmlformats.org/drawingml/2006/main">
               <a:ext uri="{FF2B5EF4-FFF2-40B4-BE49-F238E27FC236}">
-                <a16:creationId xmlns:a16="http://schemas.microsoft.com/office/drawing/2014/main" id="{35AA0E8E-8517-49B6-B6F0-322682963EF1}"/>
+                <a16:creationId xmlns:a16="http://schemas.microsoft.com/office/drawing/2014/main" id="{EA3BC7C8-90C9-4295-8EAD-1E40D726FF73}"/>
               </a:ext>
             </a:extLst>
           </p:cNvPr>
@@ -13528,7 +13528,7 @@
           <p:cNvPr id="8" name="">
             <a:extLst xmlns:a="http://schemas.openxmlformats.org/drawingml/2006/main">
               <a:ext uri="{FF2B5EF4-FFF2-40B4-BE49-F238E27FC236}">
-                <a16:creationId xmlns:a16="http://schemas.microsoft.com/office/drawing/2014/main" id="{627E81AC-1DA1-42C4-82E4-D1C855E67738}"/>
+                <a16:creationId xmlns:a16="http://schemas.microsoft.com/office/drawing/2014/main" id="{73A310BC-2DB0-473C-9255-9480275A2B63}"/>
               </a:ext>
             </a:extLst>
           </p:cNvPr>
@@ -13590,7 +13590,7 @@
           <p:cNvPr id="9" name="">
             <a:extLst xmlns:a="http://schemas.openxmlformats.org/drawingml/2006/main">
               <a:ext uri="{FF2B5EF4-FFF2-40B4-BE49-F238E27FC236}">
-                <a16:creationId xmlns:a16="http://schemas.microsoft.com/office/drawing/2014/main" id="{617F13C5-B633-4C3B-B5B7-8F5728C8C307}"/>
+                <a16:creationId xmlns:a16="http://schemas.microsoft.com/office/drawing/2014/main" id="{16B447BA-DD77-480F-A174-D5AFDE8B962F}"/>
               </a:ext>
             </a:extLst>
           </p:cNvPr>
@@ -13621,7 +13621,7 @@
           <p:cNvPr id="10" name="">
             <a:extLst xmlns:a="http://schemas.openxmlformats.org/drawingml/2006/main">
               <a:ext uri="{FF2B5EF4-FFF2-40B4-BE49-F238E27FC236}">
-                <a16:creationId xmlns:a16="http://schemas.microsoft.com/office/drawing/2014/main" id="{4B4B3D64-02A5-406E-BDF4-AF410021E455}"/>
+                <a16:creationId xmlns:a16="http://schemas.microsoft.com/office/drawing/2014/main" id="{89F48696-602F-407A-97EF-A086388ED98D}"/>
               </a:ext>
             </a:extLst>
           </p:cNvPr>
@@ -13683,7 +13683,7 @@
           <p:cNvPr id="11" name="">
             <a:extLst xmlns:a="http://schemas.openxmlformats.org/drawingml/2006/main">
               <a:ext uri="{FF2B5EF4-FFF2-40B4-BE49-F238E27FC236}">
-                <a16:creationId xmlns:a16="http://schemas.microsoft.com/office/drawing/2014/main" id="{64ABB61B-AEB9-44CA-80EC-C1320402EA2D}"/>
+                <a16:creationId xmlns:a16="http://schemas.microsoft.com/office/drawing/2014/main" id="{55CB8845-BF7C-4C41-8F24-D3D78D9208C2}"/>
               </a:ext>
             </a:extLst>
           </p:cNvPr>
@@ -13745,7 +13745,7 @@
           <p:cNvPr id="12" name="">
             <a:extLst xmlns:a="http://schemas.openxmlformats.org/drawingml/2006/main">
               <a:ext uri="{FF2B5EF4-FFF2-40B4-BE49-F238E27FC236}">
-                <a16:creationId xmlns:a16="http://schemas.microsoft.com/office/drawing/2014/main" id="{2EBF113E-4CCD-423C-9DB7-206973A97796}"/>
+                <a16:creationId xmlns:a16="http://schemas.microsoft.com/office/drawing/2014/main" id="{49CC79FD-AF43-45D1-B1FE-5D304F88777D}"/>
               </a:ext>
             </a:extLst>
           </p:cNvPr>
@@ -13776,7 +13776,7 @@
           <p:cNvPr id="13" name="">
             <a:extLst xmlns:a="http://schemas.openxmlformats.org/drawingml/2006/main">
               <a:ext uri="{FF2B5EF4-FFF2-40B4-BE49-F238E27FC236}">
-                <a16:creationId xmlns:a16="http://schemas.microsoft.com/office/drawing/2014/main" id="{9C4659D2-51AA-41F7-B1A9-AAAEB1C80B8E}"/>
+                <a16:creationId xmlns:a16="http://schemas.microsoft.com/office/drawing/2014/main" id="{411AA701-6C7A-476F-A8D3-A193B5546A22}"/>
               </a:ext>
             </a:extLst>
           </p:cNvPr>
@@ -13838,7 +13838,7 @@
           <p:cNvPr id="14" name="outcome-mark">
             <a:extLst xmlns:a="http://schemas.openxmlformats.org/drawingml/2006/main">
               <a:ext uri="{FF2B5EF4-FFF2-40B4-BE49-F238E27FC236}">
-                <a16:creationId xmlns:a16="http://schemas.microsoft.com/office/drawing/2014/main" id="{836559AE-B069-4EC8-911C-6808A6FAB38D}"/>
+                <a16:creationId xmlns:a16="http://schemas.microsoft.com/office/drawing/2014/main" id="{E3560FCF-3663-414D-862E-EFFC07D5C65F}"/>
               </a:ext>
             </a:extLst>
           </p:cNvPr>
@@ -13873,7 +13873,7 @@
           <p:cNvPr id="15" name="">
             <a:extLst xmlns:a="http://schemas.openxmlformats.org/drawingml/2006/main">
               <a:ext uri="{FF2B5EF4-FFF2-40B4-BE49-F238E27FC236}">
-                <a16:creationId xmlns:a16="http://schemas.microsoft.com/office/drawing/2014/main" id="{363B2B4F-56E5-4BE0-9068-824FDCF75FAB}"/>
+                <a16:creationId xmlns:a16="http://schemas.microsoft.com/office/drawing/2014/main" id="{39AF5EB1-5BBE-4DE7-BAB6-94DB042CB842}"/>
               </a:ext>
             </a:extLst>
           </p:cNvPr>
@@ -13935,7 +13935,7 @@
           <p:cNvPr id="16" name="">
             <a:extLst xmlns:a="http://schemas.openxmlformats.org/drawingml/2006/main">
               <a:ext uri="{FF2B5EF4-FFF2-40B4-BE49-F238E27FC236}">
-                <a16:creationId xmlns:a16="http://schemas.microsoft.com/office/drawing/2014/main" id="{6F96BFF6-67C2-4F96-A42F-31983A58BC36}"/>
+                <a16:creationId xmlns:a16="http://schemas.microsoft.com/office/drawing/2014/main" id="{8A8FD49A-9FD2-4367-99A9-1134282377CC}"/>
               </a:ext>
             </a:extLst>
           </p:cNvPr>
@@ -14024,7 +14024,7 @@
           <p:cNvPr id="17" name="footer-rule-2">
             <a:extLst xmlns:a="http://schemas.openxmlformats.org/drawingml/2006/main">
               <a:ext uri="{FF2B5EF4-FFF2-40B4-BE49-F238E27FC236}">
-                <a16:creationId xmlns:a16="http://schemas.microsoft.com/office/drawing/2014/main" id="{5666037C-5764-44FC-918E-86549D77797D}"/>
+                <a16:creationId xmlns:a16="http://schemas.microsoft.com/office/drawing/2014/main" id="{A3AD2AC2-F21E-4BFC-A997-B5C23F761577}"/>
               </a:ext>
             </a:extLst>
           </p:cNvPr>
@@ -14055,7 +14055,7 @@
           <p:cNvPr id="18" name="footer-label-2">
             <a:extLst xmlns:a="http://schemas.openxmlformats.org/drawingml/2006/main">
               <a:ext uri="{FF2B5EF4-FFF2-40B4-BE49-F238E27FC236}">
-                <a16:creationId xmlns:a16="http://schemas.microsoft.com/office/drawing/2014/main" id="{F5920002-7894-4FB2-8FBA-3C7C00E4607B}"/>
+                <a16:creationId xmlns:a16="http://schemas.microsoft.com/office/drawing/2014/main" id="{13ABA7BA-645F-438F-B80C-59A768986A6B}"/>
               </a:ext>
             </a:extLst>
           </p:cNvPr>
@@ -14117,7 +14117,7 @@
           <p:cNvPr id="19" name="footer-page-2">
             <a:extLst xmlns:a="http://schemas.openxmlformats.org/drawingml/2006/main">
               <a:ext uri="{FF2B5EF4-FFF2-40B4-BE49-F238E27FC236}">
-                <a16:creationId xmlns:a16="http://schemas.microsoft.com/office/drawing/2014/main" id="{FF4F9183-0BBD-4E31-95D3-D7226E0869AA}"/>
+                <a16:creationId xmlns:a16="http://schemas.microsoft.com/office/drawing/2014/main" id="{9A4D2FFA-6C0B-4D00-9EC3-0C2F4F447070}"/>
               </a:ext>
             </a:extLst>
           </p:cNvPr>
@@ -14177,7 +14177,7 @@
     </p:spTree>
     <p:extLst>
       <p:ext uri="{BB962C8B-B14F-4D97-AF65-F5344CB8AC3E}">
-        <p14:creationId xmlns:p14="http://schemas.microsoft.com/office/powerpoint/2010/main" val="1027563877"/>
+        <p14:creationId xmlns:p14="http://schemas.microsoft.com/office/powerpoint/2010/main" val="10967585"/>
       </p:ext>
     </p:extLst>
   </p:cSld>
@@ -14208,7 +14208,7 @@
           <p:cNvPr id="31" name="side-accent-3">
             <a:extLst xmlns:a="http://schemas.openxmlformats.org/drawingml/2006/main">
               <a:ext uri="{FF2B5EF4-FFF2-40B4-BE49-F238E27FC236}">
-                <a16:creationId xmlns:a16="http://schemas.microsoft.com/office/drawing/2014/main" id="{FBBFEEB7-FA01-474B-8D0B-B80EAB800F82}"/>
+                <a16:creationId xmlns:a16="http://schemas.microsoft.com/office/drawing/2014/main" id="{5BF386A4-30D8-4351-AC0D-12CB5ED173A1}"/>
               </a:ext>
             </a:extLst>
           </p:cNvPr>
@@ -14239,7 +14239,7 @@
           <p:cNvPr id="2" name="kicker-3">
             <a:extLst xmlns:a="http://schemas.openxmlformats.org/drawingml/2006/main">
               <a:ext uri="{FF2B5EF4-FFF2-40B4-BE49-F238E27FC236}">
-                <a16:creationId xmlns:a16="http://schemas.microsoft.com/office/drawing/2014/main" id="{9DCB312A-052E-4AD3-BB20-BA0F27A129FF}"/>
+                <a16:creationId xmlns:a16="http://schemas.microsoft.com/office/drawing/2014/main" id="{8C54917F-C11A-4E71-B7B8-E156E3DA2472}"/>
               </a:ext>
             </a:extLst>
           </p:cNvPr>
@@ -14301,7 +14301,7 @@
           <p:cNvPr id="3" name="title-3">
             <a:extLst xmlns:a="http://schemas.openxmlformats.org/drawingml/2006/main">
               <a:ext uri="{FF2B5EF4-FFF2-40B4-BE49-F238E27FC236}">
-                <a16:creationId xmlns:a16="http://schemas.microsoft.com/office/drawing/2014/main" id="{17C76F05-ED3D-48C5-A81F-B1A1C698AAC2}"/>
+                <a16:creationId xmlns:a16="http://schemas.microsoft.com/office/drawing/2014/main" id="{0E2656AE-09F8-4A65-8F51-B9DBA1C711F7}"/>
               </a:ext>
             </a:extLst>
           </p:cNvPr>
@@ -14363,7 +14363,7 @@
           <p:cNvPr id="4" name="">
             <a:extLst xmlns:a="http://schemas.openxmlformats.org/drawingml/2006/main">
               <a:ext uri="{FF2B5EF4-FFF2-40B4-BE49-F238E27FC236}">
-                <a16:creationId xmlns:a16="http://schemas.microsoft.com/office/drawing/2014/main" id="{00B96D2E-B317-4AFC-B610-AEC6A96263A9}"/>
+                <a16:creationId xmlns:a16="http://schemas.microsoft.com/office/drawing/2014/main" id="{A6812D81-4295-497F-9416-4787CEB5F142}"/>
               </a:ext>
             </a:extLst>
           </p:cNvPr>
@@ -14425,7 +14425,7 @@
           <p:cNvPr id="5" name="system-function-line">
             <a:extLst xmlns:a="http://schemas.openxmlformats.org/drawingml/2006/main">
               <a:ext uri="{FF2B5EF4-FFF2-40B4-BE49-F238E27FC236}">
-                <a16:creationId xmlns:a16="http://schemas.microsoft.com/office/drawing/2014/main" id="{ABE6F67C-6C78-4267-9B94-F5C02D3146B9}"/>
+                <a16:creationId xmlns:a16="http://schemas.microsoft.com/office/drawing/2014/main" id="{D5EB675B-CC94-4B43-8CEC-CDC689DD424F}"/>
               </a:ext>
             </a:extLst>
           </p:cNvPr>
@@ -14456,7 +14456,7 @@
           <p:cNvPr id="6" name="">
             <a:extLst xmlns:a="http://schemas.openxmlformats.org/drawingml/2006/main">
               <a:ext uri="{FF2B5EF4-FFF2-40B4-BE49-F238E27FC236}">
-                <a16:creationId xmlns:a16="http://schemas.microsoft.com/office/drawing/2014/main" id="{F5228F5A-AC70-4DC3-88F3-E0AB57FD1B6E}"/>
+                <a16:creationId xmlns:a16="http://schemas.microsoft.com/office/drawing/2014/main" id="{54421334-5620-4732-B57A-F141782398AD}"/>
               </a:ext>
             </a:extLst>
           </p:cNvPr>
@@ -14487,7 +14487,7 @@
           <p:cNvPr id="7" name="">
             <a:extLst xmlns:a="http://schemas.openxmlformats.org/drawingml/2006/main">
               <a:ext uri="{FF2B5EF4-FFF2-40B4-BE49-F238E27FC236}">
-                <a16:creationId xmlns:a16="http://schemas.microsoft.com/office/drawing/2014/main" id="{BFB6A1A2-5449-4449-9C20-48E902314A1E}"/>
+                <a16:creationId xmlns:a16="http://schemas.microsoft.com/office/drawing/2014/main" id="{94F9E7CC-37E5-4C37-878F-627E31B01EB3}"/>
               </a:ext>
             </a:extLst>
           </p:cNvPr>
@@ -14549,7 +14549,7 @@
           <p:cNvPr id="8" name="">
             <a:extLst xmlns:a="http://schemas.openxmlformats.org/drawingml/2006/main">
               <a:ext uri="{FF2B5EF4-FFF2-40B4-BE49-F238E27FC236}">
-                <a16:creationId xmlns:a16="http://schemas.microsoft.com/office/drawing/2014/main" id="{BB129CD3-DB77-4CF4-85B1-F8C12B5DD03B}"/>
+                <a16:creationId xmlns:a16="http://schemas.microsoft.com/office/drawing/2014/main" id="{BA56FF99-7B6F-4536-BCCB-E919E861AD18}"/>
               </a:ext>
             </a:extLst>
           </p:cNvPr>
@@ -14611,7 +14611,7 @@
           <p:cNvPr id="9" name="">
             <a:extLst xmlns:a="http://schemas.openxmlformats.org/drawingml/2006/main">
               <a:ext uri="{FF2B5EF4-FFF2-40B4-BE49-F238E27FC236}">
-                <a16:creationId xmlns:a16="http://schemas.microsoft.com/office/drawing/2014/main" id="{8DB1C34C-F2EB-48F6-A9B5-39AECC9D9A23}"/>
+                <a16:creationId xmlns:a16="http://schemas.microsoft.com/office/drawing/2014/main" id="{6C23662A-88E7-4433-88BB-58AF83D69A5A}"/>
               </a:ext>
             </a:extLst>
           </p:cNvPr>
@@ -14673,7 +14673,7 @@
           <p:cNvPr id="10" name="">
             <a:extLst xmlns:a="http://schemas.openxmlformats.org/drawingml/2006/main">
               <a:ext uri="{FF2B5EF4-FFF2-40B4-BE49-F238E27FC236}">
-                <a16:creationId xmlns:a16="http://schemas.microsoft.com/office/drawing/2014/main" id="{73C23CFC-8362-464D-B3F6-83B43437D6A2}"/>
+                <a16:creationId xmlns:a16="http://schemas.microsoft.com/office/drawing/2014/main" id="{83BEBC1C-4A4C-4413-A055-9CB66FE172E6}"/>
               </a:ext>
             </a:extLst>
           </p:cNvPr>
@@ -14704,7 +14704,7 @@
           <p:cNvPr id="11" name="">
             <a:extLst xmlns:a="http://schemas.openxmlformats.org/drawingml/2006/main">
               <a:ext uri="{FF2B5EF4-FFF2-40B4-BE49-F238E27FC236}">
-                <a16:creationId xmlns:a16="http://schemas.microsoft.com/office/drawing/2014/main" id="{AE046AEF-1D77-4AE9-89B7-B5B40E4E8A68}"/>
+                <a16:creationId xmlns:a16="http://schemas.microsoft.com/office/drawing/2014/main" id="{2203F167-4FC8-4727-A6DD-5A07CBD3A957}"/>
               </a:ext>
             </a:extLst>
           </p:cNvPr>
@@ -14766,7 +14766,7 @@
           <p:cNvPr id="12" name="">
             <a:extLst xmlns:a="http://schemas.openxmlformats.org/drawingml/2006/main">
               <a:ext uri="{FF2B5EF4-FFF2-40B4-BE49-F238E27FC236}">
-                <a16:creationId xmlns:a16="http://schemas.microsoft.com/office/drawing/2014/main" id="{29E73D7B-00D5-4510-80FF-F928BDAD1CA8}"/>
+                <a16:creationId xmlns:a16="http://schemas.microsoft.com/office/drawing/2014/main" id="{619A51F2-5BBE-4DFD-8C5F-8002B72231C1}"/>
               </a:ext>
             </a:extLst>
           </p:cNvPr>
@@ -14828,7 +14828,7 @@
           <p:cNvPr id="13" name="">
             <a:extLst xmlns:a="http://schemas.openxmlformats.org/drawingml/2006/main">
               <a:ext uri="{FF2B5EF4-FFF2-40B4-BE49-F238E27FC236}">
-                <a16:creationId xmlns:a16="http://schemas.microsoft.com/office/drawing/2014/main" id="{21422D82-D4A6-4A1C-910A-FE065D037C70}"/>
+                <a16:creationId xmlns:a16="http://schemas.microsoft.com/office/drawing/2014/main" id="{F6B0698F-E8B7-47D5-A098-EA3B70440849}"/>
               </a:ext>
             </a:extLst>
           </p:cNvPr>
@@ -14890,7 +14890,7 @@
           <p:cNvPr id="14" name="">
             <a:extLst xmlns:a="http://schemas.openxmlformats.org/drawingml/2006/main">
               <a:ext uri="{FF2B5EF4-FFF2-40B4-BE49-F238E27FC236}">
-                <a16:creationId xmlns:a16="http://schemas.microsoft.com/office/drawing/2014/main" id="{36BFCBE3-607C-4798-8EC7-A7F4DEA2141E}"/>
+                <a16:creationId xmlns:a16="http://schemas.microsoft.com/office/drawing/2014/main" id="{DDCCE7CF-59B5-43A0-B0F2-DCDBABD977DD}"/>
               </a:ext>
             </a:extLst>
           </p:cNvPr>
@@ -14921,7 +14921,7 @@
           <p:cNvPr id="15" name="">
             <a:extLst xmlns:a="http://schemas.openxmlformats.org/drawingml/2006/main">
               <a:ext uri="{FF2B5EF4-FFF2-40B4-BE49-F238E27FC236}">
-                <a16:creationId xmlns:a16="http://schemas.microsoft.com/office/drawing/2014/main" id="{17B66DCA-72F1-4FD7-8D8A-03C34E4B526A}"/>
+                <a16:creationId xmlns:a16="http://schemas.microsoft.com/office/drawing/2014/main" id="{7C3C391E-4266-4502-9DD3-829228C39D19}"/>
               </a:ext>
             </a:extLst>
           </p:cNvPr>
@@ -14983,7 +14983,7 @@
           <p:cNvPr id="16" name="">
             <a:extLst xmlns:a="http://schemas.openxmlformats.org/drawingml/2006/main">
               <a:ext uri="{FF2B5EF4-FFF2-40B4-BE49-F238E27FC236}">
-                <a16:creationId xmlns:a16="http://schemas.microsoft.com/office/drawing/2014/main" id="{C3E79EAE-C26A-4E5B-B118-F9AF9168423F}"/>
+                <a16:creationId xmlns:a16="http://schemas.microsoft.com/office/drawing/2014/main" id="{29EE9ADD-05B9-437A-9186-2349241C1353}"/>
               </a:ext>
             </a:extLst>
           </p:cNvPr>
@@ -15045,7 +15045,7 @@
           <p:cNvPr id="17" name="">
             <a:extLst xmlns:a="http://schemas.openxmlformats.org/drawingml/2006/main">
               <a:ext uri="{FF2B5EF4-FFF2-40B4-BE49-F238E27FC236}">
-                <a16:creationId xmlns:a16="http://schemas.microsoft.com/office/drawing/2014/main" id="{5746BA98-AE44-425F-A634-A7DBD2F71F3C}"/>
+                <a16:creationId xmlns:a16="http://schemas.microsoft.com/office/drawing/2014/main" id="{E793C515-99BD-4081-9B8A-0682C7AE057C}"/>
               </a:ext>
             </a:extLst>
           </p:cNvPr>
@@ -15107,7 +15107,7 @@
           <p:cNvPr id="18" name="">
             <a:extLst xmlns:a="http://schemas.openxmlformats.org/drawingml/2006/main">
               <a:ext uri="{FF2B5EF4-FFF2-40B4-BE49-F238E27FC236}">
-                <a16:creationId xmlns:a16="http://schemas.microsoft.com/office/drawing/2014/main" id="{EC5983D9-4D3A-4A7D-8C49-9B8BCF154D51}"/>
+                <a16:creationId xmlns:a16="http://schemas.microsoft.com/office/drawing/2014/main" id="{E5388E30-152B-464F-8A51-FA999BE915AD}"/>
               </a:ext>
             </a:extLst>
           </p:cNvPr>
@@ -15138,7 +15138,7 @@
           <p:cNvPr id="19" name="">
             <a:extLst xmlns:a="http://schemas.openxmlformats.org/drawingml/2006/main">
               <a:ext uri="{FF2B5EF4-FFF2-40B4-BE49-F238E27FC236}">
-                <a16:creationId xmlns:a16="http://schemas.microsoft.com/office/drawing/2014/main" id="{55F0F598-3220-4024-A50A-84BD724909F2}"/>
+                <a16:creationId xmlns:a16="http://schemas.microsoft.com/office/drawing/2014/main" id="{CABB522A-32A4-4001-8A2C-858BD97913CE}"/>
               </a:ext>
             </a:extLst>
           </p:cNvPr>
@@ -15200,7 +15200,7 @@
           <p:cNvPr id="20" name="">
             <a:extLst xmlns:a="http://schemas.openxmlformats.org/drawingml/2006/main">
               <a:ext uri="{FF2B5EF4-FFF2-40B4-BE49-F238E27FC236}">
-                <a16:creationId xmlns:a16="http://schemas.microsoft.com/office/drawing/2014/main" id="{7DDC7A92-2F25-4BA4-8233-010368C17A50}"/>
+                <a16:creationId xmlns:a16="http://schemas.microsoft.com/office/drawing/2014/main" id="{4E5F1D2E-2A7A-464C-8769-BE349EFF1C9B}"/>
               </a:ext>
             </a:extLst>
           </p:cNvPr>
@@ -15262,7 +15262,7 @@
           <p:cNvPr id="21" name="">
             <a:extLst xmlns:a="http://schemas.openxmlformats.org/drawingml/2006/main">
               <a:ext uri="{FF2B5EF4-FFF2-40B4-BE49-F238E27FC236}">
-                <a16:creationId xmlns:a16="http://schemas.microsoft.com/office/drawing/2014/main" id="{0C6C6C21-38D7-47DF-AD2B-3191462B4E2A}"/>
+                <a16:creationId xmlns:a16="http://schemas.microsoft.com/office/drawing/2014/main" id="{DF8CF7BF-ADA2-4BA0-A6CC-A1ECB362AC7C}"/>
               </a:ext>
             </a:extLst>
           </p:cNvPr>
@@ -15324,7 +15324,7 @@
           <p:cNvPr id="22" name="">
             <a:extLst xmlns:a="http://schemas.openxmlformats.org/drawingml/2006/main">
               <a:ext uri="{FF2B5EF4-FFF2-40B4-BE49-F238E27FC236}">
-                <a16:creationId xmlns:a16="http://schemas.microsoft.com/office/drawing/2014/main" id="{33F60F6F-4521-4AF6-B22E-3679DA00FF58}"/>
+                <a16:creationId xmlns:a16="http://schemas.microsoft.com/office/drawing/2014/main" id="{E2863959-C304-4CDF-B4B4-27209B8A3102}"/>
               </a:ext>
             </a:extLst>
           </p:cNvPr>
@@ -15355,7 +15355,7 @@
           <p:cNvPr id="23" name="">
             <a:extLst xmlns:a="http://schemas.openxmlformats.org/drawingml/2006/main">
               <a:ext uri="{FF2B5EF4-FFF2-40B4-BE49-F238E27FC236}">
-                <a16:creationId xmlns:a16="http://schemas.microsoft.com/office/drawing/2014/main" id="{B9717C3C-D674-4CA1-85DC-E6C2EBC2C12C}"/>
+                <a16:creationId xmlns:a16="http://schemas.microsoft.com/office/drawing/2014/main" id="{767306EC-B225-456C-B22B-2CA2810B09AD}"/>
               </a:ext>
             </a:extLst>
           </p:cNvPr>
@@ -15417,7 +15417,7 @@
           <p:cNvPr id="24" name="">
             <a:extLst xmlns:a="http://schemas.openxmlformats.org/drawingml/2006/main">
               <a:ext uri="{FF2B5EF4-FFF2-40B4-BE49-F238E27FC236}">
-                <a16:creationId xmlns:a16="http://schemas.microsoft.com/office/drawing/2014/main" id="{B88390F8-2CE0-405F-97E9-3BD21CD9ED67}"/>
+                <a16:creationId xmlns:a16="http://schemas.microsoft.com/office/drawing/2014/main" id="{2AE2C188-3E3C-4BF7-8932-C477A246B67E}"/>
               </a:ext>
             </a:extLst>
           </p:cNvPr>
@@ -15479,7 +15479,7 @@
           <p:cNvPr id="25" name="">
             <a:extLst xmlns:a="http://schemas.openxmlformats.org/drawingml/2006/main">
               <a:ext uri="{FF2B5EF4-FFF2-40B4-BE49-F238E27FC236}">
-                <a16:creationId xmlns:a16="http://schemas.microsoft.com/office/drawing/2014/main" id="{A86E74B7-83A5-4E3C-A514-C3E68D765802}"/>
+                <a16:creationId xmlns:a16="http://schemas.microsoft.com/office/drawing/2014/main" id="{E89C4276-7334-4983-B6EF-EEA1279D2246}"/>
               </a:ext>
             </a:extLst>
           </p:cNvPr>
@@ -15541,7 +15541,7 @@
           <p:cNvPr id="26" name="">
             <a:extLst xmlns:a="http://schemas.openxmlformats.org/drawingml/2006/main">
               <a:ext uri="{FF2B5EF4-FFF2-40B4-BE49-F238E27FC236}">
-                <a16:creationId xmlns:a16="http://schemas.microsoft.com/office/drawing/2014/main" id="{9AECB81C-3B09-4DCA-968B-C24E4A351A8A}"/>
+                <a16:creationId xmlns:a16="http://schemas.microsoft.com/office/drawing/2014/main" id="{3BF0B0BA-FC3F-4FA0-A69C-51129FD4F076}"/>
               </a:ext>
             </a:extLst>
           </p:cNvPr>
@@ -15574,7 +15574,7 @@
           <p:cNvPr id="27" name="">
             <a:extLst xmlns:a="http://schemas.openxmlformats.org/drawingml/2006/main">
               <a:ext uri="{FF2B5EF4-FFF2-40B4-BE49-F238E27FC236}">
-                <a16:creationId xmlns:a16="http://schemas.microsoft.com/office/drawing/2014/main" id="{C964A36F-D210-40C0-8089-DE445A15994D}"/>
+                <a16:creationId xmlns:a16="http://schemas.microsoft.com/office/drawing/2014/main" id="{FFD95CA1-73D4-4BA1-A21B-0328A6FFE315}"/>
               </a:ext>
             </a:extLst>
           </p:cNvPr>
@@ -15636,7 +15636,7 @@
           <p:cNvPr id="28" name="footer-rule-3">
             <a:extLst xmlns:a="http://schemas.openxmlformats.org/drawingml/2006/main">
               <a:ext uri="{FF2B5EF4-FFF2-40B4-BE49-F238E27FC236}">
-                <a16:creationId xmlns:a16="http://schemas.microsoft.com/office/drawing/2014/main" id="{7DB551C0-06F9-49A3-8E46-4A1FD97B1113}"/>
+                <a16:creationId xmlns:a16="http://schemas.microsoft.com/office/drawing/2014/main" id="{8DEC78D2-312A-4C58-B793-2514EE684ABF}"/>
               </a:ext>
             </a:extLst>
           </p:cNvPr>
@@ -15667,7 +15667,7 @@
           <p:cNvPr id="29" name="footer-label-3">
             <a:extLst xmlns:a="http://schemas.openxmlformats.org/drawingml/2006/main">
               <a:ext uri="{FF2B5EF4-FFF2-40B4-BE49-F238E27FC236}">
-                <a16:creationId xmlns:a16="http://schemas.microsoft.com/office/drawing/2014/main" id="{058CECFF-B5FB-4684-B9EF-B209D8F7D839}"/>
+                <a16:creationId xmlns:a16="http://schemas.microsoft.com/office/drawing/2014/main" id="{1FC51D88-8021-451F-BA54-F650670B7C4D}"/>
               </a:ext>
             </a:extLst>
           </p:cNvPr>
@@ -15729,7 +15729,7 @@
           <p:cNvPr id="30" name="footer-page-3">
             <a:extLst xmlns:a="http://schemas.openxmlformats.org/drawingml/2006/main">
               <a:ext uri="{FF2B5EF4-FFF2-40B4-BE49-F238E27FC236}">
-                <a16:creationId xmlns:a16="http://schemas.microsoft.com/office/drawing/2014/main" id="{A0FCB849-153C-42A5-941B-9D274B8301D7}"/>
+                <a16:creationId xmlns:a16="http://schemas.microsoft.com/office/drawing/2014/main" id="{E8472CF9-813F-4D21-A175-784E00CA8BAB}"/>
               </a:ext>
             </a:extLst>
           </p:cNvPr>
@@ -15789,7 +15789,7 @@
     </p:spTree>
     <p:extLst>
       <p:ext uri="{BB962C8B-B14F-4D97-AF65-F5344CB8AC3E}">
-        <p14:creationId xmlns:p14="http://schemas.microsoft.com/office/powerpoint/2010/main" val="1306940326"/>
+        <p14:creationId xmlns:p14="http://schemas.microsoft.com/office/powerpoint/2010/main" val="1059400256"/>
       </p:ext>
     </p:extLst>
   </p:cSld>
@@ -15820,7 +15820,7 @@
           <p:cNvPr id="28" name="side-accent-4">
             <a:extLst xmlns:a="http://schemas.openxmlformats.org/drawingml/2006/main">
               <a:ext uri="{FF2B5EF4-FFF2-40B4-BE49-F238E27FC236}">
-                <a16:creationId xmlns:a16="http://schemas.microsoft.com/office/drawing/2014/main" id="{AA472FF9-79F5-465E-88F8-0685A25CC486}"/>
+                <a16:creationId xmlns:a16="http://schemas.microsoft.com/office/drawing/2014/main" id="{ED76D571-708E-42B4-AAB3-F4763F666388}"/>
               </a:ext>
             </a:extLst>
           </p:cNvPr>
@@ -15851,7 +15851,7 @@
           <p:cNvPr id="2" name="kicker-4">
             <a:extLst xmlns:a="http://schemas.openxmlformats.org/drawingml/2006/main">
               <a:ext uri="{FF2B5EF4-FFF2-40B4-BE49-F238E27FC236}">
-                <a16:creationId xmlns:a16="http://schemas.microsoft.com/office/drawing/2014/main" id="{6F7C6190-1749-4FEE-BEC4-DD4734ADFDE1}"/>
+                <a16:creationId xmlns:a16="http://schemas.microsoft.com/office/drawing/2014/main" id="{6A962E39-1F5D-4CCA-B490-250FEE77A72D}"/>
               </a:ext>
             </a:extLst>
           </p:cNvPr>
@@ -15913,7 +15913,7 @@
           <p:cNvPr id="3" name="title-4">
             <a:extLst xmlns:a="http://schemas.openxmlformats.org/drawingml/2006/main">
               <a:ext uri="{FF2B5EF4-FFF2-40B4-BE49-F238E27FC236}">
-                <a16:creationId xmlns:a16="http://schemas.microsoft.com/office/drawing/2014/main" id="{FDDC8A0B-BF68-49F1-81BB-3A7C1ACF5BF0}"/>
+                <a16:creationId xmlns:a16="http://schemas.microsoft.com/office/drawing/2014/main" id="{77741C1B-C737-42C7-A72F-AF63FCF3E96B}"/>
               </a:ext>
             </a:extLst>
           </p:cNvPr>
@@ -15975,7 +15975,7 @@
           <p:cNvPr id="4" name="">
             <a:extLst xmlns:a="http://schemas.openxmlformats.org/drawingml/2006/main">
               <a:ext uri="{FF2B5EF4-FFF2-40B4-BE49-F238E27FC236}">
-                <a16:creationId xmlns:a16="http://schemas.microsoft.com/office/drawing/2014/main" id="{21F36A18-4247-4B0C-A298-613CD354D6B9}"/>
+                <a16:creationId xmlns:a16="http://schemas.microsoft.com/office/drawing/2014/main" id="{B73370B3-CA2D-46D4-B9A5-22E9DB4F20AE}"/>
               </a:ext>
             </a:extLst>
           </p:cNvPr>
@@ -16037,7 +16037,7 @@
           <p:cNvPr id="5" name="">
             <a:extLst xmlns:a="http://schemas.openxmlformats.org/drawingml/2006/main">
               <a:ext uri="{FF2B5EF4-FFF2-40B4-BE49-F238E27FC236}">
-                <a16:creationId xmlns:a16="http://schemas.microsoft.com/office/drawing/2014/main" id="{314AC0AF-F400-453A-A7D4-AAD3A173BC9C}"/>
+                <a16:creationId xmlns:a16="http://schemas.microsoft.com/office/drawing/2014/main" id="{14CA03C1-F70B-44B6-B709-F0E39B480FC4}"/>
               </a:ext>
             </a:extLst>
           </p:cNvPr>
@@ -16099,7 +16099,7 @@
           <p:cNvPr id="6" name="">
             <a:extLst xmlns:a="http://schemas.openxmlformats.org/drawingml/2006/main">
               <a:ext uri="{FF2B5EF4-FFF2-40B4-BE49-F238E27FC236}">
-                <a16:creationId xmlns:a16="http://schemas.microsoft.com/office/drawing/2014/main" id="{7117ED35-1E36-4788-86A6-A282EF248B82}"/>
+                <a16:creationId xmlns:a16="http://schemas.microsoft.com/office/drawing/2014/main" id="{23D64612-C6E6-4FDD-B1F1-94ED422EE545}"/>
               </a:ext>
             </a:extLst>
           </p:cNvPr>
@@ -16161,7 +16161,7 @@
           <p:cNvPr id="7" name="">
             <a:extLst xmlns:a="http://schemas.openxmlformats.org/drawingml/2006/main">
               <a:ext uri="{FF2B5EF4-FFF2-40B4-BE49-F238E27FC236}">
-                <a16:creationId xmlns:a16="http://schemas.microsoft.com/office/drawing/2014/main" id="{D6D0778E-07EF-4346-ACAC-27F8BEE49377}"/>
+                <a16:creationId xmlns:a16="http://schemas.microsoft.com/office/drawing/2014/main" id="{C7A55164-917C-4B03-B5CC-F4EC642318FE}"/>
               </a:ext>
             </a:extLst>
           </p:cNvPr>
@@ -16192,7 +16192,7 @@
           <p:cNvPr id="8" name="">
             <a:extLst xmlns:a="http://schemas.openxmlformats.org/drawingml/2006/main">
               <a:ext uri="{FF2B5EF4-FFF2-40B4-BE49-F238E27FC236}">
-                <a16:creationId xmlns:a16="http://schemas.microsoft.com/office/drawing/2014/main" id="{796F7428-8E54-494C-868D-D686653AAADD}"/>
+                <a16:creationId xmlns:a16="http://schemas.microsoft.com/office/drawing/2014/main" id="{553936E1-78F3-4BBA-AA7A-E2CDF699484A}"/>
               </a:ext>
             </a:extLst>
           </p:cNvPr>
@@ -16254,7 +16254,7 @@
           <p:cNvPr id="9" name="">
             <a:extLst xmlns:a="http://schemas.openxmlformats.org/drawingml/2006/main">
               <a:ext uri="{FF2B5EF4-FFF2-40B4-BE49-F238E27FC236}">
-                <a16:creationId xmlns:a16="http://schemas.microsoft.com/office/drawing/2014/main" id="{F36A2ED6-F39B-4E7B-B091-B7B2D4596F34}"/>
+                <a16:creationId xmlns:a16="http://schemas.microsoft.com/office/drawing/2014/main" id="{3113463B-552C-4AEC-8495-2D8168BCDFA5}"/>
               </a:ext>
             </a:extLst>
           </p:cNvPr>
@@ -16316,7 +16316,7 @@
           <p:cNvPr id="10" name="">
             <a:extLst xmlns:a="http://schemas.openxmlformats.org/drawingml/2006/main">
               <a:ext uri="{FF2B5EF4-FFF2-40B4-BE49-F238E27FC236}">
-                <a16:creationId xmlns:a16="http://schemas.microsoft.com/office/drawing/2014/main" id="{3C79467E-7A98-47B1-9AD9-F88BECA3F16A}"/>
+                <a16:creationId xmlns:a16="http://schemas.microsoft.com/office/drawing/2014/main" id="{2073F029-F642-47FC-A841-101E49450725}"/>
               </a:ext>
             </a:extLst>
           </p:cNvPr>
@@ -16378,7 +16378,7 @@
           <p:cNvPr id="11" name="">
             <a:extLst xmlns:a="http://schemas.openxmlformats.org/drawingml/2006/main">
               <a:ext uri="{FF2B5EF4-FFF2-40B4-BE49-F238E27FC236}">
-                <a16:creationId xmlns:a16="http://schemas.microsoft.com/office/drawing/2014/main" id="{4F0C4D5B-9531-4093-8849-A9DADB6DD7F5}"/>
+                <a16:creationId xmlns:a16="http://schemas.microsoft.com/office/drawing/2014/main" id="{26DBD86D-0936-472A-A6D3-A1F4F1C37A6E}"/>
               </a:ext>
             </a:extLst>
           </p:cNvPr>
@@ -16409,7 +16409,7 @@
           <p:cNvPr id="12" name="">
             <a:extLst xmlns:a="http://schemas.openxmlformats.org/drawingml/2006/main">
               <a:ext uri="{FF2B5EF4-FFF2-40B4-BE49-F238E27FC236}">
-                <a16:creationId xmlns:a16="http://schemas.microsoft.com/office/drawing/2014/main" id="{FCE327C9-01DE-40F9-A74A-62C5EFF6E8E7}"/>
+                <a16:creationId xmlns:a16="http://schemas.microsoft.com/office/drawing/2014/main" id="{FB0F3D1B-B311-4831-BECF-039B26AE856D}"/>
               </a:ext>
             </a:extLst>
           </p:cNvPr>
@@ -16471,7 +16471,7 @@
           <p:cNvPr id="13" name="">
             <a:extLst xmlns:a="http://schemas.openxmlformats.org/drawingml/2006/main">
               <a:ext uri="{FF2B5EF4-FFF2-40B4-BE49-F238E27FC236}">
-                <a16:creationId xmlns:a16="http://schemas.microsoft.com/office/drawing/2014/main" id="{F83D5DA0-4B5A-4346-95C5-318BE5B1C4B5}"/>
+                <a16:creationId xmlns:a16="http://schemas.microsoft.com/office/drawing/2014/main" id="{19D045FD-F063-402F-BFC4-3FF189E88C3D}"/>
               </a:ext>
             </a:extLst>
           </p:cNvPr>
@@ -16533,7 +16533,7 @@
           <p:cNvPr id="14" name="">
             <a:extLst xmlns:a="http://schemas.openxmlformats.org/drawingml/2006/main">
               <a:ext uri="{FF2B5EF4-FFF2-40B4-BE49-F238E27FC236}">
-                <a16:creationId xmlns:a16="http://schemas.microsoft.com/office/drawing/2014/main" id="{7FE25979-6CB5-4557-A6A6-8DC564D4FFB5}"/>
+                <a16:creationId xmlns:a16="http://schemas.microsoft.com/office/drawing/2014/main" id="{FD196C84-5C79-434A-A1B6-99386CF28704}"/>
               </a:ext>
             </a:extLst>
           </p:cNvPr>
@@ -16595,7 +16595,7 @@
           <p:cNvPr id="15" name="">
             <a:extLst xmlns:a="http://schemas.openxmlformats.org/drawingml/2006/main">
               <a:ext uri="{FF2B5EF4-FFF2-40B4-BE49-F238E27FC236}">
-                <a16:creationId xmlns:a16="http://schemas.microsoft.com/office/drawing/2014/main" id="{0B21DFA1-91CD-41E0-931C-25AA8C81FD1D}"/>
+                <a16:creationId xmlns:a16="http://schemas.microsoft.com/office/drawing/2014/main" id="{BC676BDA-04F6-4438-A860-C1BDA3F0B8B1}"/>
               </a:ext>
             </a:extLst>
           </p:cNvPr>
@@ -16626,7 +16626,7 @@
           <p:cNvPr id="16" name="">
             <a:extLst xmlns:a="http://schemas.openxmlformats.org/drawingml/2006/main">
               <a:ext uri="{FF2B5EF4-FFF2-40B4-BE49-F238E27FC236}">
-                <a16:creationId xmlns:a16="http://schemas.microsoft.com/office/drawing/2014/main" id="{184F2A61-97AE-4CDA-9D5C-F6B34CDB5A23}"/>
+                <a16:creationId xmlns:a16="http://schemas.microsoft.com/office/drawing/2014/main" id="{CE8CC266-00B8-467E-8367-12849BD811BC}"/>
               </a:ext>
             </a:extLst>
           </p:cNvPr>
@@ -16688,7 +16688,7 @@
           <p:cNvPr id="17" name="">
             <a:extLst xmlns:a="http://schemas.openxmlformats.org/drawingml/2006/main">
               <a:ext uri="{FF2B5EF4-FFF2-40B4-BE49-F238E27FC236}">
-                <a16:creationId xmlns:a16="http://schemas.microsoft.com/office/drawing/2014/main" id="{75325FC2-4353-4DBF-B070-3EAC3AC82143}"/>
+                <a16:creationId xmlns:a16="http://schemas.microsoft.com/office/drawing/2014/main" id="{71EFF172-25C0-4D36-8B62-65343C6E6028}"/>
               </a:ext>
             </a:extLst>
           </p:cNvPr>
@@ -16750,7 +16750,7 @@
           <p:cNvPr id="18" name="">
             <a:extLst xmlns:a="http://schemas.openxmlformats.org/drawingml/2006/main">
               <a:ext uri="{FF2B5EF4-FFF2-40B4-BE49-F238E27FC236}">
-                <a16:creationId xmlns:a16="http://schemas.microsoft.com/office/drawing/2014/main" id="{94DE0325-2702-4440-8E07-C5450AB24F0F}"/>
+                <a16:creationId xmlns:a16="http://schemas.microsoft.com/office/drawing/2014/main" id="{A5498F78-F1CF-41D4-92D3-D9EBA2CF82E5}"/>
               </a:ext>
             </a:extLst>
           </p:cNvPr>
@@ -16812,7 +16812,7 @@
           <p:cNvPr id="19" name="">
             <a:extLst xmlns:a="http://schemas.openxmlformats.org/drawingml/2006/main">
               <a:ext uri="{FF2B5EF4-FFF2-40B4-BE49-F238E27FC236}">
-                <a16:creationId xmlns:a16="http://schemas.microsoft.com/office/drawing/2014/main" id="{BF65CF17-9083-4638-8960-DD49072348C2}"/>
+                <a16:creationId xmlns:a16="http://schemas.microsoft.com/office/drawing/2014/main" id="{424205F4-EA75-4FF1-B2CB-A3EB537981C6}"/>
               </a:ext>
             </a:extLst>
           </p:cNvPr>
@@ -16843,7 +16843,7 @@
           <p:cNvPr id="20" name="">
             <a:extLst xmlns:a="http://schemas.openxmlformats.org/drawingml/2006/main">
               <a:ext uri="{FF2B5EF4-FFF2-40B4-BE49-F238E27FC236}">
-                <a16:creationId xmlns:a16="http://schemas.microsoft.com/office/drawing/2014/main" id="{F5C3322E-D4D0-419F-830D-2F1610A2F4F7}"/>
+                <a16:creationId xmlns:a16="http://schemas.microsoft.com/office/drawing/2014/main" id="{AFD71A8A-DE74-4AC8-BA9E-0FF972DCAD06}"/>
               </a:ext>
             </a:extLst>
           </p:cNvPr>
@@ -16905,7 +16905,7 @@
           <p:cNvPr id="21" name="">
             <a:extLst xmlns:a="http://schemas.openxmlformats.org/drawingml/2006/main">
               <a:ext uri="{FF2B5EF4-FFF2-40B4-BE49-F238E27FC236}">
-                <a16:creationId xmlns:a16="http://schemas.microsoft.com/office/drawing/2014/main" id="{C219E4CF-CA12-403D-883E-B1FD2D2BB7BD}"/>
+                <a16:creationId xmlns:a16="http://schemas.microsoft.com/office/drawing/2014/main" id="{2DBAA058-EB95-4E52-A149-AEDD598E9648}"/>
               </a:ext>
             </a:extLst>
           </p:cNvPr>
@@ -16967,7 +16967,7 @@
           <p:cNvPr id="22" name="">
             <a:extLst xmlns:a="http://schemas.openxmlformats.org/drawingml/2006/main">
               <a:ext uri="{FF2B5EF4-FFF2-40B4-BE49-F238E27FC236}">
-                <a16:creationId xmlns:a16="http://schemas.microsoft.com/office/drawing/2014/main" id="{EC0AFF95-CF90-4412-84F0-3638DF98B081}"/>
+                <a16:creationId xmlns:a16="http://schemas.microsoft.com/office/drawing/2014/main" id="{E9BCAB8B-5E87-4598-A5ED-B0FCC933A946}"/>
               </a:ext>
             </a:extLst>
           </p:cNvPr>
@@ -17029,7 +17029,7 @@
           <p:cNvPr id="23" name="">
             <a:extLst xmlns:a="http://schemas.openxmlformats.org/drawingml/2006/main">
               <a:ext uri="{FF2B5EF4-FFF2-40B4-BE49-F238E27FC236}">
-                <a16:creationId xmlns:a16="http://schemas.microsoft.com/office/drawing/2014/main" id="{83B8DA5D-7DA2-45F8-822E-4F26A1A697E2}"/>
+                <a16:creationId xmlns:a16="http://schemas.microsoft.com/office/drawing/2014/main" id="{3190D2B1-7208-4549-B577-E524C936455F}"/>
               </a:ext>
             </a:extLst>
           </p:cNvPr>
@@ -17062,7 +17062,7 @@
           <p:cNvPr id="24" name="">
             <a:extLst xmlns:a="http://schemas.openxmlformats.org/drawingml/2006/main">
               <a:ext uri="{FF2B5EF4-FFF2-40B4-BE49-F238E27FC236}">
-                <a16:creationId xmlns:a16="http://schemas.microsoft.com/office/drawing/2014/main" id="{174756C8-F3DC-4ADC-B5A8-D801F2881B1A}"/>
+                <a16:creationId xmlns:a16="http://schemas.microsoft.com/office/drawing/2014/main" id="{3957166E-3461-4423-BA07-6C7A4A670834}"/>
               </a:ext>
             </a:extLst>
           </p:cNvPr>
@@ -17124,7 +17124,7 @@
           <p:cNvPr id="25" name="footer-rule-4">
             <a:extLst xmlns:a="http://schemas.openxmlformats.org/drawingml/2006/main">
               <a:ext uri="{FF2B5EF4-FFF2-40B4-BE49-F238E27FC236}">
-                <a16:creationId xmlns:a16="http://schemas.microsoft.com/office/drawing/2014/main" id="{3F498152-BBAC-4019-9E43-83A9D8AD7381}"/>
+                <a16:creationId xmlns:a16="http://schemas.microsoft.com/office/drawing/2014/main" id="{59996A68-43D9-47B3-922A-2A719B8E0163}"/>
               </a:ext>
             </a:extLst>
           </p:cNvPr>
@@ -17155,7 +17155,7 @@
           <p:cNvPr id="26" name="footer-label-4">
             <a:extLst xmlns:a="http://schemas.openxmlformats.org/drawingml/2006/main">
               <a:ext uri="{FF2B5EF4-FFF2-40B4-BE49-F238E27FC236}">
-                <a16:creationId xmlns:a16="http://schemas.microsoft.com/office/drawing/2014/main" id="{0E5E749E-7244-4225-9F62-E66D09FB16B5}"/>
+                <a16:creationId xmlns:a16="http://schemas.microsoft.com/office/drawing/2014/main" id="{4DD1C71B-8AF9-4CC0-A8B2-BE8DE4A497D0}"/>
               </a:ext>
             </a:extLst>
           </p:cNvPr>
@@ -17217,7 +17217,7 @@
           <p:cNvPr id="27" name="footer-page-4">
             <a:extLst xmlns:a="http://schemas.openxmlformats.org/drawingml/2006/main">
               <a:ext uri="{FF2B5EF4-FFF2-40B4-BE49-F238E27FC236}">
-                <a16:creationId xmlns:a16="http://schemas.microsoft.com/office/drawing/2014/main" id="{E7CF2CB1-9957-4BA1-9A81-3A83AE46F6DD}"/>
+                <a16:creationId xmlns:a16="http://schemas.microsoft.com/office/drawing/2014/main" id="{26B2E22E-1B98-4E4A-A72D-7CE23131E29D}"/>
               </a:ext>
             </a:extLst>
           </p:cNvPr>
@@ -17277,7 +17277,7 @@
     </p:spTree>
     <p:extLst>
       <p:ext uri="{BB962C8B-B14F-4D97-AF65-F5344CB8AC3E}">
-        <p14:creationId xmlns:p14="http://schemas.microsoft.com/office/powerpoint/2010/main" val="2099543323"/>
+        <p14:creationId xmlns:p14="http://schemas.microsoft.com/office/powerpoint/2010/main" val="595322937"/>
       </p:ext>
     </p:extLst>
   </p:cSld>
@@ -17308,7 +17308,7 @@
           <p:cNvPr id="31" name="side-accent-5">
             <a:extLst xmlns:a="http://schemas.openxmlformats.org/drawingml/2006/main">
               <a:ext uri="{FF2B5EF4-FFF2-40B4-BE49-F238E27FC236}">
-                <a16:creationId xmlns:a16="http://schemas.microsoft.com/office/drawing/2014/main" id="{50D8DD8C-5DEC-4D4F-96B9-20023564F512}"/>
+                <a16:creationId xmlns:a16="http://schemas.microsoft.com/office/drawing/2014/main" id="{0D52BA65-4CAC-4BA1-BA4C-16C251BC8418}"/>
               </a:ext>
             </a:extLst>
           </p:cNvPr>
@@ -17339,7 +17339,7 @@
           <p:cNvPr id="2" name="kicker-5">
             <a:extLst xmlns:a="http://schemas.openxmlformats.org/drawingml/2006/main">
               <a:ext uri="{FF2B5EF4-FFF2-40B4-BE49-F238E27FC236}">
-                <a16:creationId xmlns:a16="http://schemas.microsoft.com/office/drawing/2014/main" id="{AD01D278-1E1A-4CAE-AD52-B446C4ECEDFD}"/>
+                <a16:creationId xmlns:a16="http://schemas.microsoft.com/office/drawing/2014/main" id="{0319D8C2-1765-473D-A6CC-F1AE752CF995}"/>
               </a:ext>
             </a:extLst>
           </p:cNvPr>
@@ -17401,7 +17401,7 @@
           <p:cNvPr id="3" name="title-5">
             <a:extLst xmlns:a="http://schemas.openxmlformats.org/drawingml/2006/main">
               <a:ext uri="{FF2B5EF4-FFF2-40B4-BE49-F238E27FC236}">
-                <a16:creationId xmlns:a16="http://schemas.microsoft.com/office/drawing/2014/main" id="{6E7EB246-713B-4358-813B-5DB38FFADB05}"/>
+                <a16:creationId xmlns:a16="http://schemas.microsoft.com/office/drawing/2014/main" id="{2F3B11AB-94E0-49BC-9ADE-D6F7D4A74C95}"/>
               </a:ext>
             </a:extLst>
           </p:cNvPr>
@@ -17463,7 +17463,7 @@
           <p:cNvPr id="4" name="">
             <a:extLst xmlns:a="http://schemas.openxmlformats.org/drawingml/2006/main">
               <a:ext uri="{FF2B5EF4-FFF2-40B4-BE49-F238E27FC236}">
-                <a16:creationId xmlns:a16="http://schemas.microsoft.com/office/drawing/2014/main" id="{BC4B014E-64E2-4C87-BF72-C255965710F4}"/>
+                <a16:creationId xmlns:a16="http://schemas.microsoft.com/office/drawing/2014/main" id="{4606EEB4-82EB-4124-BBA9-24B2D9F22509}"/>
               </a:ext>
             </a:extLst>
           </p:cNvPr>
@@ -17525,7 +17525,7 @@
           <p:cNvPr id="5" name="workflow-line">
             <a:extLst xmlns:a="http://schemas.openxmlformats.org/drawingml/2006/main">
               <a:ext uri="{FF2B5EF4-FFF2-40B4-BE49-F238E27FC236}">
-                <a16:creationId xmlns:a16="http://schemas.microsoft.com/office/drawing/2014/main" id="{CD471E77-2926-4462-B3B7-D668B37C89B3}"/>
+                <a16:creationId xmlns:a16="http://schemas.microsoft.com/office/drawing/2014/main" id="{84A85EF3-27AB-4B8F-923B-3D9784C00C61}"/>
               </a:ext>
             </a:extLst>
           </p:cNvPr>
@@ -17556,7 +17556,7 @@
           <p:cNvPr id="6" name="workflow-arrow">
             <a:extLst xmlns:a="http://schemas.openxmlformats.org/drawingml/2006/main">
               <a:ext uri="{FF2B5EF4-FFF2-40B4-BE49-F238E27FC236}">
-                <a16:creationId xmlns:a16="http://schemas.microsoft.com/office/drawing/2014/main" id="{C50F2337-73CF-472D-BD19-DD3D1427A6F6}"/>
+                <a16:creationId xmlns:a16="http://schemas.microsoft.com/office/drawing/2014/main" id="{E0913D09-C9B0-4833-9F31-45072F49B123}"/>
               </a:ext>
             </a:extLst>
           </p:cNvPr>
@@ -17587,7 +17587,7 @@
           <p:cNvPr id="7" name="">
             <a:extLst xmlns:a="http://schemas.openxmlformats.org/drawingml/2006/main">
               <a:ext uri="{FF2B5EF4-FFF2-40B4-BE49-F238E27FC236}">
-                <a16:creationId xmlns:a16="http://schemas.microsoft.com/office/drawing/2014/main" id="{8AAA66E9-E505-4B8A-AC2F-8E746800A8CF}"/>
+                <a16:creationId xmlns:a16="http://schemas.microsoft.com/office/drawing/2014/main" id="{36FFFCC1-A537-4AD4-9056-4479F54DBD7F}"/>
               </a:ext>
             </a:extLst>
           </p:cNvPr>
@@ -17618,7 +17618,7 @@
           <p:cNvPr id="8" name="">
             <a:extLst xmlns:a="http://schemas.openxmlformats.org/drawingml/2006/main">
               <a:ext uri="{FF2B5EF4-FFF2-40B4-BE49-F238E27FC236}">
-                <a16:creationId xmlns:a16="http://schemas.microsoft.com/office/drawing/2014/main" id="{147C6187-2F4E-4F73-8A01-553AE8488EB6}"/>
+                <a16:creationId xmlns:a16="http://schemas.microsoft.com/office/drawing/2014/main" id="{563A4EB9-C0C2-431C-9151-620391813213}"/>
               </a:ext>
             </a:extLst>
           </p:cNvPr>
@@ -17680,7 +17680,7 @@
           <p:cNvPr id="9" name="">
             <a:extLst xmlns:a="http://schemas.openxmlformats.org/drawingml/2006/main">
               <a:ext uri="{FF2B5EF4-FFF2-40B4-BE49-F238E27FC236}">
-                <a16:creationId xmlns:a16="http://schemas.microsoft.com/office/drawing/2014/main" id="{E7A33A2B-50C3-4BD0-A80C-A2052D956AF6}"/>
+                <a16:creationId xmlns:a16="http://schemas.microsoft.com/office/drawing/2014/main" id="{2A3B664F-C6E9-48E8-8708-E0818E41C68A}"/>
               </a:ext>
             </a:extLst>
           </p:cNvPr>
@@ -17742,7 +17742,7 @@
           <p:cNvPr id="10" name="">
             <a:extLst xmlns:a="http://schemas.openxmlformats.org/drawingml/2006/main">
               <a:ext uri="{FF2B5EF4-FFF2-40B4-BE49-F238E27FC236}">
-                <a16:creationId xmlns:a16="http://schemas.microsoft.com/office/drawing/2014/main" id="{8FC43158-4413-4CB8-BCDD-BB756CDA91A6}"/>
+                <a16:creationId xmlns:a16="http://schemas.microsoft.com/office/drawing/2014/main" id="{91DC5E83-FD57-45FA-B240-0FA60B461102}"/>
               </a:ext>
             </a:extLst>
           </p:cNvPr>
@@ -17804,7 +17804,7 @@
           <p:cNvPr id="11" name="">
             <a:extLst xmlns:a="http://schemas.openxmlformats.org/drawingml/2006/main">
               <a:ext uri="{FF2B5EF4-FFF2-40B4-BE49-F238E27FC236}">
-                <a16:creationId xmlns:a16="http://schemas.microsoft.com/office/drawing/2014/main" id="{AF3396FC-3F32-4875-9409-BBF76E942455}"/>
+                <a16:creationId xmlns:a16="http://schemas.microsoft.com/office/drawing/2014/main" id="{EF683347-5EE0-495A-A5BA-B0F813313AD8}"/>
               </a:ext>
             </a:extLst>
           </p:cNvPr>
@@ -17835,7 +17835,7 @@
           <p:cNvPr id="12" name="">
             <a:extLst xmlns:a="http://schemas.openxmlformats.org/drawingml/2006/main">
               <a:ext uri="{FF2B5EF4-FFF2-40B4-BE49-F238E27FC236}">
-                <a16:creationId xmlns:a16="http://schemas.microsoft.com/office/drawing/2014/main" id="{5E11052E-8271-40A3-880C-C50902500991}"/>
+                <a16:creationId xmlns:a16="http://schemas.microsoft.com/office/drawing/2014/main" id="{2DFFE569-D01A-4BFC-99CE-15A7A5A598A4}"/>
               </a:ext>
             </a:extLst>
           </p:cNvPr>
@@ -17897,7 +17897,7 @@
           <p:cNvPr id="13" name="">
             <a:extLst xmlns:a="http://schemas.openxmlformats.org/drawingml/2006/main">
               <a:ext uri="{FF2B5EF4-FFF2-40B4-BE49-F238E27FC236}">
-                <a16:creationId xmlns:a16="http://schemas.microsoft.com/office/drawing/2014/main" id="{E5C2E01D-A0C8-4BCC-A472-2980C3554306}"/>
+                <a16:creationId xmlns:a16="http://schemas.microsoft.com/office/drawing/2014/main" id="{F79B3E59-8DE9-4029-B2E1-4BA690455289}"/>
               </a:ext>
             </a:extLst>
           </p:cNvPr>
@@ -17959,7 +17959,7 @@
           <p:cNvPr id="14" name="">
             <a:extLst xmlns:a="http://schemas.openxmlformats.org/drawingml/2006/main">
               <a:ext uri="{FF2B5EF4-FFF2-40B4-BE49-F238E27FC236}">
-                <a16:creationId xmlns:a16="http://schemas.microsoft.com/office/drawing/2014/main" id="{D8EF48B6-CCA8-432B-BFC2-47FC7F89601B}"/>
+                <a16:creationId xmlns:a16="http://schemas.microsoft.com/office/drawing/2014/main" id="{8ECD5F46-97B2-4052-8570-A626229A15D7}"/>
               </a:ext>
             </a:extLst>
           </p:cNvPr>
@@ -18021,7 +18021,7 @@
           <p:cNvPr id="15" name="">
             <a:extLst xmlns:a="http://schemas.openxmlformats.org/drawingml/2006/main">
               <a:ext uri="{FF2B5EF4-FFF2-40B4-BE49-F238E27FC236}">
-                <a16:creationId xmlns:a16="http://schemas.microsoft.com/office/drawing/2014/main" id="{CAA9FB9F-AF02-4905-80AB-868E34476634}"/>
+                <a16:creationId xmlns:a16="http://schemas.microsoft.com/office/drawing/2014/main" id="{F3A7CD1B-DBE6-4BDA-9D6F-03BE43F7409B}"/>
               </a:ext>
             </a:extLst>
           </p:cNvPr>
@@ -18052,7 +18052,7 @@
           <p:cNvPr id="16" name="">
             <a:extLst xmlns:a="http://schemas.openxmlformats.org/drawingml/2006/main">
               <a:ext uri="{FF2B5EF4-FFF2-40B4-BE49-F238E27FC236}">
-                <a16:creationId xmlns:a16="http://schemas.microsoft.com/office/drawing/2014/main" id="{38DBDED9-0354-4C32-9356-EE273ED74CAA}"/>
+                <a16:creationId xmlns:a16="http://schemas.microsoft.com/office/drawing/2014/main" id="{BC8FDC47-5E4F-4A8F-BE11-8AF6C153705E}"/>
               </a:ext>
             </a:extLst>
           </p:cNvPr>
@@ -18114,7 +18114,7 @@
           <p:cNvPr id="17" name="">
             <a:extLst xmlns:a="http://schemas.openxmlformats.org/drawingml/2006/main">
               <a:ext uri="{FF2B5EF4-FFF2-40B4-BE49-F238E27FC236}">
-                <a16:creationId xmlns:a16="http://schemas.microsoft.com/office/drawing/2014/main" id="{66A18AC7-BE09-40DD-8EFF-EEC24A567829}"/>
+                <a16:creationId xmlns:a16="http://schemas.microsoft.com/office/drawing/2014/main" id="{E23F6038-51CD-4155-987F-36B2CE7DC4C1}"/>
               </a:ext>
             </a:extLst>
           </p:cNvPr>
@@ -18176,7 +18176,7 @@
           <p:cNvPr id="18" name="">
             <a:extLst xmlns:a="http://schemas.openxmlformats.org/drawingml/2006/main">
               <a:ext uri="{FF2B5EF4-FFF2-40B4-BE49-F238E27FC236}">
-                <a16:creationId xmlns:a16="http://schemas.microsoft.com/office/drawing/2014/main" id="{0B789A31-87EB-4322-879A-90E40925C580}"/>
+                <a16:creationId xmlns:a16="http://schemas.microsoft.com/office/drawing/2014/main" id="{D14964F5-B44D-4F04-AF22-973621CD7C11}"/>
               </a:ext>
             </a:extLst>
           </p:cNvPr>
@@ -18238,7 +18238,7 @@
           <p:cNvPr id="19" name="">
             <a:extLst xmlns:a="http://schemas.openxmlformats.org/drawingml/2006/main">
               <a:ext uri="{FF2B5EF4-FFF2-40B4-BE49-F238E27FC236}">
-                <a16:creationId xmlns:a16="http://schemas.microsoft.com/office/drawing/2014/main" id="{5147887C-5AEB-44CE-A06A-8887645A9382}"/>
+                <a16:creationId xmlns:a16="http://schemas.microsoft.com/office/drawing/2014/main" id="{C8CF7886-394A-4EFC-8134-EF67AB9112FF}"/>
               </a:ext>
             </a:extLst>
           </p:cNvPr>
@@ -18269,7 +18269,7 @@
           <p:cNvPr id="20" name="">
             <a:extLst xmlns:a="http://schemas.openxmlformats.org/drawingml/2006/main">
               <a:ext uri="{FF2B5EF4-FFF2-40B4-BE49-F238E27FC236}">
-                <a16:creationId xmlns:a16="http://schemas.microsoft.com/office/drawing/2014/main" id="{95582176-A0A5-4C21-8E47-8952AFCC9A53}"/>
+                <a16:creationId xmlns:a16="http://schemas.microsoft.com/office/drawing/2014/main" id="{57A7B0CE-4752-43D5-9E7F-CE2D4FEA4817}"/>
               </a:ext>
             </a:extLst>
           </p:cNvPr>
@@ -18331,7 +18331,7 @@
           <p:cNvPr id="21" name="">
             <a:extLst xmlns:a="http://schemas.openxmlformats.org/drawingml/2006/main">
               <a:ext uri="{FF2B5EF4-FFF2-40B4-BE49-F238E27FC236}">
-                <a16:creationId xmlns:a16="http://schemas.microsoft.com/office/drawing/2014/main" id="{90F192A0-CFE5-4B0A-9BF1-9E4BF02FB8D1}"/>
+                <a16:creationId xmlns:a16="http://schemas.microsoft.com/office/drawing/2014/main" id="{39DD7D64-98F8-479D-88EE-6854E8088E03}"/>
               </a:ext>
             </a:extLst>
           </p:cNvPr>
@@ -18393,7 +18393,7 @@
           <p:cNvPr id="22" name="">
             <a:extLst xmlns:a="http://schemas.openxmlformats.org/drawingml/2006/main">
               <a:ext uri="{FF2B5EF4-FFF2-40B4-BE49-F238E27FC236}">
-                <a16:creationId xmlns:a16="http://schemas.microsoft.com/office/drawing/2014/main" id="{A0674B75-82B4-4937-BB1C-A4E36151FCD9}"/>
+                <a16:creationId xmlns:a16="http://schemas.microsoft.com/office/drawing/2014/main" id="{BCD1117E-445A-4C4E-B510-79EB12191502}"/>
               </a:ext>
             </a:extLst>
           </p:cNvPr>
@@ -18455,7 +18455,7 @@
           <p:cNvPr id="23" name="">
             <a:extLst xmlns:a="http://schemas.openxmlformats.org/drawingml/2006/main">
               <a:ext uri="{FF2B5EF4-FFF2-40B4-BE49-F238E27FC236}">
-                <a16:creationId xmlns:a16="http://schemas.microsoft.com/office/drawing/2014/main" id="{839D17F7-163C-4A97-AF5B-EBD098668E33}"/>
+                <a16:creationId xmlns:a16="http://schemas.microsoft.com/office/drawing/2014/main" id="{CEB81BA9-4B0C-438F-BBB4-F612FFBDC0F2}"/>
               </a:ext>
             </a:extLst>
           </p:cNvPr>
@@ -18486,7 +18486,7 @@
           <p:cNvPr id="24" name="">
             <a:extLst xmlns:a="http://schemas.openxmlformats.org/drawingml/2006/main">
               <a:ext uri="{FF2B5EF4-FFF2-40B4-BE49-F238E27FC236}">
-                <a16:creationId xmlns:a16="http://schemas.microsoft.com/office/drawing/2014/main" id="{D3C29DC6-E286-4B48-B5A6-1F2F28DBB8B2}"/>
+                <a16:creationId xmlns:a16="http://schemas.microsoft.com/office/drawing/2014/main" id="{9471A52F-8DAA-4E9A-9349-76B0F63538D2}"/>
               </a:ext>
             </a:extLst>
           </p:cNvPr>
@@ -18548,7 +18548,7 @@
           <p:cNvPr id="25" name="">
             <a:extLst xmlns:a="http://schemas.openxmlformats.org/drawingml/2006/main">
               <a:ext uri="{FF2B5EF4-FFF2-40B4-BE49-F238E27FC236}">
-                <a16:creationId xmlns:a16="http://schemas.microsoft.com/office/drawing/2014/main" id="{6E28062A-34BA-45E3-A4D4-B0EDA5611464}"/>
+                <a16:creationId xmlns:a16="http://schemas.microsoft.com/office/drawing/2014/main" id="{8A4E5322-C1BE-4967-AB1C-32BFBF3162B1}"/>
               </a:ext>
             </a:extLst>
           </p:cNvPr>
@@ -18610,7 +18610,7 @@
           <p:cNvPr id="26" name="">
             <a:extLst xmlns:a="http://schemas.openxmlformats.org/drawingml/2006/main">
               <a:ext uri="{FF2B5EF4-FFF2-40B4-BE49-F238E27FC236}">
-                <a16:creationId xmlns:a16="http://schemas.microsoft.com/office/drawing/2014/main" id="{64FAE24E-8D46-4F15-8717-568E7C467685}"/>
+                <a16:creationId xmlns:a16="http://schemas.microsoft.com/office/drawing/2014/main" id="{F8B08722-AE06-4B19-81A9-728BFB3211F9}"/>
               </a:ext>
             </a:extLst>
           </p:cNvPr>
@@ -18672,7 +18672,7 @@
           <p:cNvPr id="27" name="">
             <a:extLst xmlns:a="http://schemas.openxmlformats.org/drawingml/2006/main">
               <a:ext uri="{FF2B5EF4-FFF2-40B4-BE49-F238E27FC236}">
-                <a16:creationId xmlns:a16="http://schemas.microsoft.com/office/drawing/2014/main" id="{FBF819B9-0008-4A50-85B2-1FAD162A07F0}"/>
+                <a16:creationId xmlns:a16="http://schemas.microsoft.com/office/drawing/2014/main" id="{73DCD6C3-7264-4B3E-AE03-E15447872F31}"/>
               </a:ext>
             </a:extLst>
           </p:cNvPr>
@@ -18734,7 +18734,7 @@
           <p:cNvPr id="28" name="footer-rule-5">
             <a:extLst xmlns:a="http://schemas.openxmlformats.org/drawingml/2006/main">
               <a:ext uri="{FF2B5EF4-FFF2-40B4-BE49-F238E27FC236}">
-                <a16:creationId xmlns:a16="http://schemas.microsoft.com/office/drawing/2014/main" id="{CDC72168-0026-433C-9FC0-3418C16B9491}"/>
+                <a16:creationId xmlns:a16="http://schemas.microsoft.com/office/drawing/2014/main" id="{91A90071-56E7-4C17-BBDF-04AC9829B363}"/>
               </a:ext>
             </a:extLst>
           </p:cNvPr>
@@ -18765,7 +18765,7 @@
           <p:cNvPr id="29" name="footer-label-5">
             <a:extLst xmlns:a="http://schemas.openxmlformats.org/drawingml/2006/main">
               <a:ext uri="{FF2B5EF4-FFF2-40B4-BE49-F238E27FC236}">
-                <a16:creationId xmlns:a16="http://schemas.microsoft.com/office/drawing/2014/main" id="{CD5073D6-0B2C-4508-8894-EE19AEE18F34}"/>
+                <a16:creationId xmlns:a16="http://schemas.microsoft.com/office/drawing/2014/main" id="{9554037A-EB1F-4272-8473-EBEAA21BB3CF}"/>
               </a:ext>
             </a:extLst>
           </p:cNvPr>
@@ -18827,7 +18827,7 @@
           <p:cNvPr id="30" name="footer-page-5">
             <a:extLst xmlns:a="http://schemas.openxmlformats.org/drawingml/2006/main">
               <a:ext uri="{FF2B5EF4-FFF2-40B4-BE49-F238E27FC236}">
-                <a16:creationId xmlns:a16="http://schemas.microsoft.com/office/drawing/2014/main" id="{92F6D8AF-997C-4B95-9426-FF7ED3EDBADD}"/>
+                <a16:creationId xmlns:a16="http://schemas.microsoft.com/office/drawing/2014/main" id="{63B60BD5-F89B-475B-9058-5E56EEF96C13}"/>
               </a:ext>
             </a:extLst>
           </p:cNvPr>
@@ -18887,7 +18887,7 @@
     </p:spTree>
     <p:extLst>
       <p:ext uri="{BB962C8B-B14F-4D97-AF65-F5344CB8AC3E}">
-        <p14:creationId xmlns:p14="http://schemas.microsoft.com/office/powerpoint/2010/main" val="1857442748"/>
+        <p14:creationId xmlns:p14="http://schemas.microsoft.com/office/powerpoint/2010/main" val="724852078"/>
       </p:ext>
     </p:extLst>
   </p:cSld>
@@ -18918,7 +18918,7 @@
           <p:cNvPr id="22" name="side-accent-6">
             <a:extLst xmlns:a="http://schemas.openxmlformats.org/drawingml/2006/main">
               <a:ext uri="{FF2B5EF4-FFF2-40B4-BE49-F238E27FC236}">
-                <a16:creationId xmlns:a16="http://schemas.microsoft.com/office/drawing/2014/main" id="{2D27267A-F148-44F9-AFED-C77CE076FEEB}"/>
+                <a16:creationId xmlns:a16="http://schemas.microsoft.com/office/drawing/2014/main" id="{18F4B9A1-2B27-4B77-BE01-EC0B7C8139B5}"/>
               </a:ext>
             </a:extLst>
           </p:cNvPr>
@@ -18949,7 +18949,7 @@
           <p:cNvPr id="2" name="kicker-6">
             <a:extLst xmlns:a="http://schemas.openxmlformats.org/drawingml/2006/main">
               <a:ext uri="{FF2B5EF4-FFF2-40B4-BE49-F238E27FC236}">
-                <a16:creationId xmlns:a16="http://schemas.microsoft.com/office/drawing/2014/main" id="{F5C1D67F-0769-4E69-B640-67AF55294B59}"/>
+                <a16:creationId xmlns:a16="http://schemas.microsoft.com/office/drawing/2014/main" id="{197C43D3-0149-4C21-AC14-34492E7BE5D9}"/>
               </a:ext>
             </a:extLst>
           </p:cNvPr>
@@ -19011,7 +19011,7 @@
           <p:cNvPr id="3" name="title-6">
             <a:extLst xmlns:a="http://schemas.openxmlformats.org/drawingml/2006/main">
               <a:ext uri="{FF2B5EF4-FFF2-40B4-BE49-F238E27FC236}">
-                <a16:creationId xmlns:a16="http://schemas.microsoft.com/office/drawing/2014/main" id="{D6159078-8765-479E-BD3D-C5E4B44CDB93}"/>
+                <a16:creationId xmlns:a16="http://schemas.microsoft.com/office/drawing/2014/main" id="{F928D59E-D84D-40B1-82B3-1B7C5E39793A}"/>
               </a:ext>
             </a:extLst>
           </p:cNvPr>
@@ -19073,7 +19073,7 @@
           <p:cNvPr id="4" name="">
             <a:extLst xmlns:a="http://schemas.openxmlformats.org/drawingml/2006/main">
               <a:ext uri="{FF2B5EF4-FFF2-40B4-BE49-F238E27FC236}">
-                <a16:creationId xmlns:a16="http://schemas.microsoft.com/office/drawing/2014/main" id="{E58AC566-021D-45D6-9A8E-3FAB118E833A}"/>
+                <a16:creationId xmlns:a16="http://schemas.microsoft.com/office/drawing/2014/main" id="{32DA745C-E1C0-4757-A93D-ED6AA0575482}"/>
               </a:ext>
             </a:extLst>
           </p:cNvPr>
@@ -19135,7 +19135,7 @@
           <p:cNvPr id="5" name="">
             <a:extLst xmlns:a="http://schemas.openxmlformats.org/drawingml/2006/main">
               <a:ext uri="{FF2B5EF4-FFF2-40B4-BE49-F238E27FC236}">
-                <a16:creationId xmlns:a16="http://schemas.microsoft.com/office/drawing/2014/main" id="{63E7B8F1-62C7-4A07-BF77-294F1E2C1ED2}"/>
+                <a16:creationId xmlns:a16="http://schemas.microsoft.com/office/drawing/2014/main" id="{496B9EBF-F206-491F-9A74-74555BEA720E}"/>
               </a:ext>
             </a:extLst>
           </p:cNvPr>
@@ -19197,7 +19197,7 @@
           <p:cNvPr id="6" name="">
             <a:extLst xmlns:a="http://schemas.openxmlformats.org/drawingml/2006/main">
               <a:ext uri="{FF2B5EF4-FFF2-40B4-BE49-F238E27FC236}">
-                <a16:creationId xmlns:a16="http://schemas.microsoft.com/office/drawing/2014/main" id="{899F5D1D-42A2-43A0-B95C-E90654632E79}"/>
+                <a16:creationId xmlns:a16="http://schemas.microsoft.com/office/drawing/2014/main" id="{834277A9-417A-41CB-857D-67626A0CA097}"/>
               </a:ext>
             </a:extLst>
           </p:cNvPr>
@@ -19259,7 +19259,7 @@
           <p:cNvPr id="7" name="">
             <a:extLst xmlns:a="http://schemas.openxmlformats.org/drawingml/2006/main">
               <a:ext uri="{FF2B5EF4-FFF2-40B4-BE49-F238E27FC236}">
-                <a16:creationId xmlns:a16="http://schemas.microsoft.com/office/drawing/2014/main" id="{9EE6955A-1F03-40E3-9926-A89442158F9F}"/>
+                <a16:creationId xmlns:a16="http://schemas.microsoft.com/office/drawing/2014/main" id="{244D7517-DFB5-46DF-8953-9D5EAF7BA71F}"/>
               </a:ext>
             </a:extLst>
           </p:cNvPr>
@@ -19290,7 +19290,7 @@
           <p:cNvPr id="8" name="">
             <a:extLst xmlns:a="http://schemas.openxmlformats.org/drawingml/2006/main">
               <a:ext uri="{FF2B5EF4-FFF2-40B4-BE49-F238E27FC236}">
-                <a16:creationId xmlns:a16="http://schemas.microsoft.com/office/drawing/2014/main" id="{2680FA90-E348-4EA6-8992-2F1CD935396E}"/>
+                <a16:creationId xmlns:a16="http://schemas.microsoft.com/office/drawing/2014/main" id="{6D63955D-0084-45A9-9A41-45F7F257B713}"/>
               </a:ext>
             </a:extLst>
           </p:cNvPr>
@@ -19379,7 +19379,7 @@
           <p:cNvPr id="9" name="">
             <a:extLst xmlns:a="http://schemas.openxmlformats.org/drawingml/2006/main">
               <a:ext uri="{FF2B5EF4-FFF2-40B4-BE49-F238E27FC236}">
-                <a16:creationId xmlns:a16="http://schemas.microsoft.com/office/drawing/2014/main" id="{5F948735-9EB5-4E51-9561-4F84E36A97B9}"/>
+                <a16:creationId xmlns:a16="http://schemas.microsoft.com/office/drawing/2014/main" id="{4633BD43-F59D-43B0-B919-BE939F215A8E}"/>
               </a:ext>
             </a:extLst>
           </p:cNvPr>
@@ -19441,7 +19441,7 @@
           <p:cNvPr id="10" name="">
             <a:extLst xmlns:a="http://schemas.openxmlformats.org/drawingml/2006/main">
               <a:ext uri="{FF2B5EF4-FFF2-40B4-BE49-F238E27FC236}">
-                <a16:creationId xmlns:a16="http://schemas.microsoft.com/office/drawing/2014/main" id="{349C3C26-42E5-4EC1-800C-E7D11BC6D5B4}"/>
+                <a16:creationId xmlns:a16="http://schemas.microsoft.com/office/drawing/2014/main" id="{D7B1CF5F-2512-4CCE-BED0-3775477F3281}"/>
               </a:ext>
             </a:extLst>
           </p:cNvPr>
@@ -19503,7 +19503,7 @@
           <p:cNvPr id="11" name="">
             <a:extLst xmlns:a="http://schemas.openxmlformats.org/drawingml/2006/main">
               <a:ext uri="{FF2B5EF4-FFF2-40B4-BE49-F238E27FC236}">
-                <a16:creationId xmlns:a16="http://schemas.microsoft.com/office/drawing/2014/main" id="{D886C614-5FBD-45B5-BB87-0688AC41C931}"/>
+                <a16:creationId xmlns:a16="http://schemas.microsoft.com/office/drawing/2014/main" id="{8DC4F462-0DBE-4AA3-9835-98BD31732470}"/>
               </a:ext>
             </a:extLst>
           </p:cNvPr>
@@ -19534,7 +19534,7 @@
           <p:cNvPr id="12" name="">
             <a:extLst xmlns:a="http://schemas.openxmlformats.org/drawingml/2006/main">
               <a:ext uri="{FF2B5EF4-FFF2-40B4-BE49-F238E27FC236}">
-                <a16:creationId xmlns:a16="http://schemas.microsoft.com/office/drawing/2014/main" id="{C2E645D2-D3E8-484F-98ED-B8C3D1164325}"/>
+                <a16:creationId xmlns:a16="http://schemas.microsoft.com/office/drawing/2014/main" id="{27C532FC-5B04-4DC4-BE01-30DB24D4DA68}"/>
               </a:ext>
             </a:extLst>
           </p:cNvPr>
@@ -19623,7 +19623,7 @@
           <p:cNvPr id="13" name="">
             <a:extLst xmlns:a="http://schemas.openxmlformats.org/drawingml/2006/main">
               <a:ext uri="{FF2B5EF4-FFF2-40B4-BE49-F238E27FC236}">
-                <a16:creationId xmlns:a16="http://schemas.microsoft.com/office/drawing/2014/main" id="{27974FD9-18FD-4E08-9020-59CB81DC3C68}"/>
+                <a16:creationId xmlns:a16="http://schemas.microsoft.com/office/drawing/2014/main" id="{04C4EB69-D9E8-4660-9152-B1AD1B31DF9F}"/>
               </a:ext>
             </a:extLst>
           </p:cNvPr>
@@ -19685,7 +19685,7 @@
           <p:cNvPr id="14" name="">
             <a:extLst xmlns:a="http://schemas.openxmlformats.org/drawingml/2006/main">
               <a:ext uri="{FF2B5EF4-FFF2-40B4-BE49-F238E27FC236}">
-                <a16:creationId xmlns:a16="http://schemas.microsoft.com/office/drawing/2014/main" id="{055CE6AC-462F-4F5B-8931-4EE0A975AC5C}"/>
+                <a16:creationId xmlns:a16="http://schemas.microsoft.com/office/drawing/2014/main" id="{9E8E6F37-4D56-48EE-A66C-34C1D5594B3C}"/>
               </a:ext>
             </a:extLst>
           </p:cNvPr>
@@ -19747,7 +19747,7 @@
           <p:cNvPr id="15" name="">
             <a:extLst xmlns:a="http://schemas.openxmlformats.org/drawingml/2006/main">
               <a:ext uri="{FF2B5EF4-FFF2-40B4-BE49-F238E27FC236}">
-                <a16:creationId xmlns:a16="http://schemas.microsoft.com/office/drawing/2014/main" id="{742ABEA6-C73D-4DA4-BDA3-4766F8DB0537}"/>
+                <a16:creationId xmlns:a16="http://schemas.microsoft.com/office/drawing/2014/main" id="{7C81439F-2378-47AC-B9E5-509C6933D6E2}"/>
               </a:ext>
             </a:extLst>
           </p:cNvPr>
@@ -19778,7 +19778,7 @@
           <p:cNvPr id="16" name="">
             <a:extLst xmlns:a="http://schemas.openxmlformats.org/drawingml/2006/main">
               <a:ext uri="{FF2B5EF4-FFF2-40B4-BE49-F238E27FC236}">
-                <a16:creationId xmlns:a16="http://schemas.microsoft.com/office/drawing/2014/main" id="{A3F22CEC-97A7-4529-8D16-8B8CE8462F95}"/>
+                <a16:creationId xmlns:a16="http://schemas.microsoft.com/office/drawing/2014/main" id="{E6957A43-3CBE-467F-B940-35A73D219791}"/>
               </a:ext>
             </a:extLst>
           </p:cNvPr>
@@ -19867,7 +19867,7 @@
           <p:cNvPr id="17" name="">
             <a:extLst xmlns:a="http://schemas.openxmlformats.org/drawingml/2006/main">
               <a:ext uri="{FF2B5EF4-FFF2-40B4-BE49-F238E27FC236}">
-                <a16:creationId xmlns:a16="http://schemas.microsoft.com/office/drawing/2014/main" id="{4455DE5A-EB65-4F1D-9992-F2DB90BDEC8B}"/>
+                <a16:creationId xmlns:a16="http://schemas.microsoft.com/office/drawing/2014/main" id="{60F08A5E-F4E5-4105-A5F4-908FBA12677C}"/>
               </a:ext>
             </a:extLst>
           </p:cNvPr>
@@ -19900,7 +19900,7 @@
           <p:cNvPr id="18" name="">
             <a:extLst xmlns:a="http://schemas.openxmlformats.org/drawingml/2006/main">
               <a:ext uri="{FF2B5EF4-FFF2-40B4-BE49-F238E27FC236}">
-                <a16:creationId xmlns:a16="http://schemas.microsoft.com/office/drawing/2014/main" id="{656B104B-833F-4D18-921C-0CF99E3B6DD2}"/>
+                <a16:creationId xmlns:a16="http://schemas.microsoft.com/office/drawing/2014/main" id="{3E4BF80C-9920-4660-AEC4-AC5DDA274025}"/>
               </a:ext>
             </a:extLst>
           </p:cNvPr>
@@ -19989,7 +19989,7 @@
           <p:cNvPr id="19" name="footer-rule-6">
             <a:extLst xmlns:a="http://schemas.openxmlformats.org/drawingml/2006/main">
               <a:ext uri="{FF2B5EF4-FFF2-40B4-BE49-F238E27FC236}">
-                <a16:creationId xmlns:a16="http://schemas.microsoft.com/office/drawing/2014/main" id="{7C2A3F7A-B4AD-41B8-89DD-B8F23AD0B470}"/>
+                <a16:creationId xmlns:a16="http://schemas.microsoft.com/office/drawing/2014/main" id="{2055AB2C-BB77-4C7D-BE1B-4A6C06D11AE8}"/>
               </a:ext>
             </a:extLst>
           </p:cNvPr>
@@ -20020,7 +20020,7 @@
           <p:cNvPr id="20" name="footer-label-6">
             <a:extLst xmlns:a="http://schemas.openxmlformats.org/drawingml/2006/main">
               <a:ext uri="{FF2B5EF4-FFF2-40B4-BE49-F238E27FC236}">
-                <a16:creationId xmlns:a16="http://schemas.microsoft.com/office/drawing/2014/main" id="{B48654E5-A69B-4FAB-A4FD-054BEFEE9FD7}"/>
+                <a16:creationId xmlns:a16="http://schemas.microsoft.com/office/drawing/2014/main" id="{B52E955B-CB13-46B0-B320-F212B5065DC4}"/>
               </a:ext>
             </a:extLst>
           </p:cNvPr>
@@ -20082,7 +20082,7 @@
           <p:cNvPr id="21" name="footer-page-6">
             <a:extLst xmlns:a="http://schemas.openxmlformats.org/drawingml/2006/main">
               <a:ext uri="{FF2B5EF4-FFF2-40B4-BE49-F238E27FC236}">
-                <a16:creationId xmlns:a16="http://schemas.microsoft.com/office/drawing/2014/main" id="{8DAA9D32-7B0A-4037-B4A7-6FCFAEDD9488}"/>
+                <a16:creationId xmlns:a16="http://schemas.microsoft.com/office/drawing/2014/main" id="{832915AC-9E36-403E-BDF4-4E89A0DADB12}"/>
               </a:ext>
             </a:extLst>
           </p:cNvPr>
@@ -20142,7 +20142,7 @@
     </p:spTree>
     <p:extLst>
       <p:ext uri="{BB962C8B-B14F-4D97-AF65-F5344CB8AC3E}">
-        <p14:creationId xmlns:p14="http://schemas.microsoft.com/office/powerpoint/2010/main" val="1253196465"/>
+        <p14:creationId xmlns:p14="http://schemas.microsoft.com/office/powerpoint/2010/main" val="1988457212"/>
       </p:ext>
     </p:extLst>
   </p:cSld>
@@ -20173,7 +20173,7 @@
           <p:cNvPr id="28" name="side-accent-7">
             <a:extLst xmlns:a="http://schemas.openxmlformats.org/drawingml/2006/main">
               <a:ext uri="{FF2B5EF4-FFF2-40B4-BE49-F238E27FC236}">
-                <a16:creationId xmlns:a16="http://schemas.microsoft.com/office/drawing/2014/main" id="{ECD74EB9-E3B3-4C12-9FA3-66BB9F22863F}"/>
+                <a16:creationId xmlns:a16="http://schemas.microsoft.com/office/drawing/2014/main" id="{F5A3A089-6C2F-4724-B8A2-B93CA7296D5B}"/>
               </a:ext>
             </a:extLst>
           </p:cNvPr>
@@ -20204,7 +20204,7 @@
           <p:cNvPr id="2" name="kicker-7">
             <a:extLst xmlns:a="http://schemas.openxmlformats.org/drawingml/2006/main">
               <a:ext uri="{FF2B5EF4-FFF2-40B4-BE49-F238E27FC236}">
-                <a16:creationId xmlns:a16="http://schemas.microsoft.com/office/drawing/2014/main" id="{B757731A-4062-43C3-82F7-8516C0DF7DE0}"/>
+                <a16:creationId xmlns:a16="http://schemas.microsoft.com/office/drawing/2014/main" id="{770A8A74-B432-4CE3-B0EF-F517954C8CA6}"/>
               </a:ext>
             </a:extLst>
           </p:cNvPr>
@@ -20266,7 +20266,7 @@
           <p:cNvPr id="3" name="title-7">
             <a:extLst xmlns:a="http://schemas.openxmlformats.org/drawingml/2006/main">
               <a:ext uri="{FF2B5EF4-FFF2-40B4-BE49-F238E27FC236}">
-                <a16:creationId xmlns:a16="http://schemas.microsoft.com/office/drawing/2014/main" id="{B9A32FB4-E020-47AE-844F-A6508AFD71B8}"/>
+                <a16:creationId xmlns:a16="http://schemas.microsoft.com/office/drawing/2014/main" id="{191D104D-929E-46D0-B67D-7A67C22BC20C}"/>
               </a:ext>
             </a:extLst>
           </p:cNvPr>
@@ -20328,7 +20328,7 @@
           <p:cNvPr id="4" name="">
             <a:extLst xmlns:a="http://schemas.openxmlformats.org/drawingml/2006/main">
               <a:ext uri="{FF2B5EF4-FFF2-40B4-BE49-F238E27FC236}">
-                <a16:creationId xmlns:a16="http://schemas.microsoft.com/office/drawing/2014/main" id="{FD9F41BA-F28A-4221-907A-EB9A59719C90}"/>
+                <a16:creationId xmlns:a16="http://schemas.microsoft.com/office/drawing/2014/main" id="{F4160D13-B1F9-42A9-B75E-EEE684198FED}"/>
               </a:ext>
             </a:extLst>
           </p:cNvPr>
@@ -20390,7 +20390,7 @@
           <p:cNvPr id="5" name="">
             <a:extLst xmlns:a="http://schemas.openxmlformats.org/drawingml/2006/main">
               <a:ext uri="{FF2B5EF4-FFF2-40B4-BE49-F238E27FC236}">
-                <a16:creationId xmlns:a16="http://schemas.microsoft.com/office/drawing/2014/main" id="{FBAE2145-071D-4EAF-BC7A-0981AB9B8DCE}"/>
+                <a16:creationId xmlns:a16="http://schemas.microsoft.com/office/drawing/2014/main" id="{D8E631CB-918C-4F78-A85A-DB0850163682}"/>
               </a:ext>
             </a:extLst>
           </p:cNvPr>
@@ -20421,7 +20421,7 @@
           <p:cNvPr id="6" name="">
             <a:extLst xmlns:a="http://schemas.openxmlformats.org/drawingml/2006/main">
               <a:ext uri="{FF2B5EF4-FFF2-40B4-BE49-F238E27FC236}">
-                <a16:creationId xmlns:a16="http://schemas.microsoft.com/office/drawing/2014/main" id="{EF2DFC4B-757F-47D5-B352-009934CDD30A}"/>
+                <a16:creationId xmlns:a16="http://schemas.microsoft.com/office/drawing/2014/main" id="{FEB3CC76-2C22-4A4D-8B1F-4497F89B6BB6}"/>
               </a:ext>
             </a:extLst>
           </p:cNvPr>
@@ -20483,7 +20483,7 @@
           <p:cNvPr id="7" name="">
             <a:extLst xmlns:a="http://schemas.openxmlformats.org/drawingml/2006/main">
               <a:ext uri="{FF2B5EF4-FFF2-40B4-BE49-F238E27FC236}">
-                <a16:creationId xmlns:a16="http://schemas.microsoft.com/office/drawing/2014/main" id="{56F58407-7AFB-4601-B90F-27BAA7EB3288}"/>
+                <a16:creationId xmlns:a16="http://schemas.microsoft.com/office/drawing/2014/main" id="{10243095-96F6-4223-81CC-10CF996085DB}"/>
               </a:ext>
             </a:extLst>
           </p:cNvPr>
@@ -20545,7 +20545,7 @@
           <p:cNvPr id="8" name="">
             <a:extLst xmlns:a="http://schemas.openxmlformats.org/drawingml/2006/main">
               <a:ext uri="{FF2B5EF4-FFF2-40B4-BE49-F238E27FC236}">
-                <a16:creationId xmlns:a16="http://schemas.microsoft.com/office/drawing/2014/main" id="{84CA72C7-486F-4891-AC4A-DE0C52F250DE}"/>
+                <a16:creationId xmlns:a16="http://schemas.microsoft.com/office/drawing/2014/main" id="{4D544E06-471A-4350-8B31-70592AA0F73B}"/>
               </a:ext>
             </a:extLst>
           </p:cNvPr>
@@ -20607,7 +20607,7 @@
           <p:cNvPr id="9" name="">
             <a:extLst xmlns:a="http://schemas.openxmlformats.org/drawingml/2006/main">
               <a:ext uri="{FF2B5EF4-FFF2-40B4-BE49-F238E27FC236}">
-                <a16:creationId xmlns:a16="http://schemas.microsoft.com/office/drawing/2014/main" id="{917BE122-35B6-4CD6-A9EB-028728985802}"/>
+                <a16:creationId xmlns:a16="http://schemas.microsoft.com/office/drawing/2014/main" id="{31CF8D05-0B31-4BD9-B47E-25C47E067BE4}"/>
               </a:ext>
             </a:extLst>
           </p:cNvPr>
@@ -20638,7 +20638,7 @@
           <p:cNvPr id="10" name="">
             <a:extLst xmlns:a="http://schemas.openxmlformats.org/drawingml/2006/main">
               <a:ext uri="{FF2B5EF4-FFF2-40B4-BE49-F238E27FC236}">
-                <a16:creationId xmlns:a16="http://schemas.microsoft.com/office/drawing/2014/main" id="{9A665040-43DC-443A-92E7-7E783F7E929A}"/>
+                <a16:creationId xmlns:a16="http://schemas.microsoft.com/office/drawing/2014/main" id="{B8B82AA3-85FD-4315-8B6D-5C7B6EDDF4A4}"/>
               </a:ext>
             </a:extLst>
           </p:cNvPr>
@@ -20700,7 +20700,7 @@
           <p:cNvPr id="11" name="">
             <a:extLst xmlns:a="http://schemas.openxmlformats.org/drawingml/2006/main">
               <a:ext uri="{FF2B5EF4-FFF2-40B4-BE49-F238E27FC236}">
-                <a16:creationId xmlns:a16="http://schemas.microsoft.com/office/drawing/2014/main" id="{C8050EEE-3014-44C3-A141-8EA36C073BA5}"/>
+                <a16:creationId xmlns:a16="http://schemas.microsoft.com/office/drawing/2014/main" id="{29D6742B-228B-41F6-9BAE-0642AD56757A}"/>
               </a:ext>
             </a:extLst>
           </p:cNvPr>
@@ -20762,7 +20762,7 @@
           <p:cNvPr id="12" name="">
             <a:extLst xmlns:a="http://schemas.openxmlformats.org/drawingml/2006/main">
               <a:ext uri="{FF2B5EF4-FFF2-40B4-BE49-F238E27FC236}">
-                <a16:creationId xmlns:a16="http://schemas.microsoft.com/office/drawing/2014/main" id="{54E89D19-5171-40E3-ABE6-01B736871830}"/>
+                <a16:creationId xmlns:a16="http://schemas.microsoft.com/office/drawing/2014/main" id="{18894E5C-EC36-427E-9C34-6D5C7ECCC3C4}"/>
               </a:ext>
             </a:extLst>
           </p:cNvPr>
@@ -20824,7 +20824,7 @@
           <p:cNvPr id="13" name="">
             <a:extLst xmlns:a="http://schemas.openxmlformats.org/drawingml/2006/main">
               <a:ext uri="{FF2B5EF4-FFF2-40B4-BE49-F238E27FC236}">
-                <a16:creationId xmlns:a16="http://schemas.microsoft.com/office/drawing/2014/main" id="{7C0998D1-E200-4154-A31A-1F1DC09B6C65}"/>
+                <a16:creationId xmlns:a16="http://schemas.microsoft.com/office/drawing/2014/main" id="{266B06E9-6103-4B38-BA9B-935B8A370EC2}"/>
               </a:ext>
             </a:extLst>
           </p:cNvPr>
@@ -20855,7 +20855,7 @@
           <p:cNvPr id="14" name="">
             <a:extLst xmlns:a="http://schemas.openxmlformats.org/drawingml/2006/main">
               <a:ext uri="{FF2B5EF4-FFF2-40B4-BE49-F238E27FC236}">
-                <a16:creationId xmlns:a16="http://schemas.microsoft.com/office/drawing/2014/main" id="{568ED00E-7149-4416-B80D-15E8A73A0815}"/>
+                <a16:creationId xmlns:a16="http://schemas.microsoft.com/office/drawing/2014/main" id="{4CF6EA9C-6C27-46DB-BB85-3332FD6BE151}"/>
               </a:ext>
             </a:extLst>
           </p:cNvPr>
@@ -20917,7 +20917,7 @@
           <p:cNvPr id="15" name="">
             <a:extLst xmlns:a="http://schemas.openxmlformats.org/drawingml/2006/main">
               <a:ext uri="{FF2B5EF4-FFF2-40B4-BE49-F238E27FC236}">
-                <a16:creationId xmlns:a16="http://schemas.microsoft.com/office/drawing/2014/main" id="{DF0DEB65-C33F-45CF-ADAB-2E5781630E95}"/>
+                <a16:creationId xmlns:a16="http://schemas.microsoft.com/office/drawing/2014/main" id="{82554B5D-A171-48D4-891D-96F962BB2902}"/>
               </a:ext>
             </a:extLst>
           </p:cNvPr>
@@ -20979,7 +20979,7 @@
           <p:cNvPr id="16" name="">
             <a:extLst xmlns:a="http://schemas.openxmlformats.org/drawingml/2006/main">
               <a:ext uri="{FF2B5EF4-FFF2-40B4-BE49-F238E27FC236}">
-                <a16:creationId xmlns:a16="http://schemas.microsoft.com/office/drawing/2014/main" id="{2AA03487-CB54-45C5-8485-6110C2FCF634}"/>
+                <a16:creationId xmlns:a16="http://schemas.microsoft.com/office/drawing/2014/main" id="{91D0B444-69AF-4891-9BD4-6288CA4F02BF}"/>
               </a:ext>
             </a:extLst>
           </p:cNvPr>
@@ -21041,7 +21041,7 @@
           <p:cNvPr id="17" name="dashboard-preview">
             <a:extLst xmlns:a="http://schemas.openxmlformats.org/drawingml/2006/main">
               <a:ext uri="{FF2B5EF4-FFF2-40B4-BE49-F238E27FC236}">
-                <a16:creationId xmlns:a16="http://schemas.microsoft.com/office/drawing/2014/main" id="{6CF712E3-A53C-4D17-B286-16F3815C9247}"/>
+                <a16:creationId xmlns:a16="http://schemas.microsoft.com/office/drawing/2014/main" id="{FF21E646-4017-42A6-A521-6A6F234E52E5}"/>
               </a:ext>
             </a:extLst>
           </p:cNvPr>
@@ -21076,7 +21076,7 @@
           <p:cNvPr id="18" name="">
             <a:extLst xmlns:a="http://schemas.openxmlformats.org/drawingml/2006/main">
               <a:ext uri="{FF2B5EF4-FFF2-40B4-BE49-F238E27FC236}">
-                <a16:creationId xmlns:a16="http://schemas.microsoft.com/office/drawing/2014/main" id="{38534F2E-95F5-43E2-8D39-583139436FE8}"/>
+                <a16:creationId xmlns:a16="http://schemas.microsoft.com/office/drawing/2014/main" id="{3DA4CBB8-7737-41B5-99BB-A2BE8DE865DD}"/>
               </a:ext>
             </a:extLst>
           </p:cNvPr>
@@ -21138,7 +21138,7 @@
           <p:cNvPr id="19" name="">
             <a:extLst xmlns:a="http://schemas.openxmlformats.org/drawingml/2006/main">
               <a:ext uri="{FF2B5EF4-FFF2-40B4-BE49-F238E27FC236}">
-                <a16:creationId xmlns:a16="http://schemas.microsoft.com/office/drawing/2014/main" id="{74B2BE68-ABEE-481A-9FEF-EB8E0DDE2D4A}"/>
+                <a16:creationId xmlns:a16="http://schemas.microsoft.com/office/drawing/2014/main" id="{BF6B0B32-9157-4884-9BD9-2876BA48C8D3}"/>
               </a:ext>
             </a:extLst>
           </p:cNvPr>
@@ -21169,7 +21169,7 @@
           <p:cNvPr id="20" name="">
             <a:extLst xmlns:a="http://schemas.openxmlformats.org/drawingml/2006/main">
               <a:ext uri="{FF2B5EF4-FFF2-40B4-BE49-F238E27FC236}">
-                <a16:creationId xmlns:a16="http://schemas.microsoft.com/office/drawing/2014/main" id="{07178FFF-A641-41BB-A991-95B14760E497}"/>
+                <a16:creationId xmlns:a16="http://schemas.microsoft.com/office/drawing/2014/main" id="{A3DFDCAC-49D9-4C4D-B718-2C535E2C3A48}"/>
               </a:ext>
             </a:extLst>
           </p:cNvPr>
@@ -21231,7 +21231,7 @@
           <p:cNvPr id="21" name="">
             <a:extLst xmlns:a="http://schemas.openxmlformats.org/drawingml/2006/main">
               <a:ext uri="{FF2B5EF4-FFF2-40B4-BE49-F238E27FC236}">
-                <a16:creationId xmlns:a16="http://schemas.microsoft.com/office/drawing/2014/main" id="{05DBC6BF-806A-4B48-ABA4-873D5C74C78E}"/>
+                <a16:creationId xmlns:a16="http://schemas.microsoft.com/office/drawing/2014/main" id="{97776FD5-E7B4-4B74-A8E9-38DF204B5423}"/>
               </a:ext>
             </a:extLst>
           </p:cNvPr>
@@ -21262,7 +21262,7 @@
           <p:cNvPr id="22" name="">
             <a:extLst xmlns:a="http://schemas.openxmlformats.org/drawingml/2006/main">
               <a:ext uri="{FF2B5EF4-FFF2-40B4-BE49-F238E27FC236}">
-                <a16:creationId xmlns:a16="http://schemas.microsoft.com/office/drawing/2014/main" id="{80A42C74-156A-4AE9-9BA1-0DC4A6D8E046}"/>
+                <a16:creationId xmlns:a16="http://schemas.microsoft.com/office/drawing/2014/main" id="{4BCE9AF1-D72F-4F0F-ABE5-07759D5230FF}"/>
               </a:ext>
             </a:extLst>
           </p:cNvPr>
@@ -21293,7 +21293,7 @@
           <p:cNvPr id="23" name="">
             <a:extLst xmlns:a="http://schemas.openxmlformats.org/drawingml/2006/main">
               <a:ext uri="{FF2B5EF4-FFF2-40B4-BE49-F238E27FC236}">
-                <a16:creationId xmlns:a16="http://schemas.microsoft.com/office/drawing/2014/main" id="{EBF868AD-2002-4088-8C54-1524687F895F}"/>
+                <a16:creationId xmlns:a16="http://schemas.microsoft.com/office/drawing/2014/main" id="{D4C012F7-A1BB-49B1-9EEB-A896E9E62B33}"/>
               </a:ext>
             </a:extLst>
           </p:cNvPr>
@@ -21326,7 +21326,7 @@
           <p:cNvPr id="24" name="">
             <a:extLst xmlns:a="http://schemas.openxmlformats.org/drawingml/2006/main">
               <a:ext uri="{FF2B5EF4-FFF2-40B4-BE49-F238E27FC236}">
-                <a16:creationId xmlns:a16="http://schemas.microsoft.com/office/drawing/2014/main" id="{C8355C58-C0CD-4B51-A549-B3C62ACC26E1}"/>
+                <a16:creationId xmlns:a16="http://schemas.microsoft.com/office/drawing/2014/main" id="{DD5B3F9C-F487-4625-A645-0809357F9A6B}"/>
               </a:ext>
             </a:extLst>
           </p:cNvPr>
@@ -21388,7 +21388,7 @@
           <p:cNvPr id="25" name="footer-rule-7">
             <a:extLst xmlns:a="http://schemas.openxmlformats.org/drawingml/2006/main">
               <a:ext uri="{FF2B5EF4-FFF2-40B4-BE49-F238E27FC236}">
-                <a16:creationId xmlns:a16="http://schemas.microsoft.com/office/drawing/2014/main" id="{570732CA-F8C2-4ADB-A9A7-98F037F7C8CA}"/>
+                <a16:creationId xmlns:a16="http://schemas.microsoft.com/office/drawing/2014/main" id="{9F44A676-ED76-46D1-9012-86BF8C1160BE}"/>
               </a:ext>
             </a:extLst>
           </p:cNvPr>
@@ -21419,7 +21419,7 @@
           <p:cNvPr id="26" name="footer-label-7">
             <a:extLst xmlns:a="http://schemas.openxmlformats.org/drawingml/2006/main">
               <a:ext uri="{FF2B5EF4-FFF2-40B4-BE49-F238E27FC236}">
-                <a16:creationId xmlns:a16="http://schemas.microsoft.com/office/drawing/2014/main" id="{9EA9DBF6-58E8-4755-9BBD-6AAD183DCA0F}"/>
+                <a16:creationId xmlns:a16="http://schemas.microsoft.com/office/drawing/2014/main" id="{A2F7E856-CDDB-4CC0-BDD4-CC84C6E57F40}"/>
               </a:ext>
             </a:extLst>
           </p:cNvPr>
@@ -21481,7 +21481,7 @@
           <p:cNvPr id="27" name="footer-page-7">
             <a:extLst xmlns:a="http://schemas.openxmlformats.org/drawingml/2006/main">
               <a:ext uri="{FF2B5EF4-FFF2-40B4-BE49-F238E27FC236}">
-                <a16:creationId xmlns:a16="http://schemas.microsoft.com/office/drawing/2014/main" id="{DF7A09F1-652E-47B1-B89E-858085AAF7FF}"/>
+                <a16:creationId xmlns:a16="http://schemas.microsoft.com/office/drawing/2014/main" id="{D661F602-555D-4B9C-BB75-8D86CAC907A1}"/>
               </a:ext>
             </a:extLst>
           </p:cNvPr>
@@ -21541,7 +21541,7 @@
     </p:spTree>
     <p:extLst>
       <p:ext uri="{BB962C8B-B14F-4D97-AF65-F5344CB8AC3E}">
-        <p14:creationId xmlns:p14="http://schemas.microsoft.com/office/powerpoint/2010/main" val="481610865"/>
+        <p14:creationId xmlns:p14="http://schemas.microsoft.com/office/powerpoint/2010/main" val="1317103653"/>
       </p:ext>
     </p:extLst>
   </p:cSld>
@@ -21572,7 +21572,7 @@
           <p:cNvPr id="26" name="side-accent-8">
             <a:extLst xmlns:a="http://schemas.openxmlformats.org/drawingml/2006/main">
               <a:ext uri="{FF2B5EF4-FFF2-40B4-BE49-F238E27FC236}">
-                <a16:creationId xmlns:a16="http://schemas.microsoft.com/office/drawing/2014/main" id="{9C53FF99-180A-44BA-93A5-15B9275B11B2}"/>
+                <a16:creationId xmlns:a16="http://schemas.microsoft.com/office/drawing/2014/main" id="{5E7BFB5E-5D9B-453B-B6F7-0EA4075210B7}"/>
               </a:ext>
             </a:extLst>
           </p:cNvPr>
@@ -21603,7 +21603,7 @@
           <p:cNvPr id="2" name="kicker-8">
             <a:extLst xmlns:a="http://schemas.openxmlformats.org/drawingml/2006/main">
               <a:ext uri="{FF2B5EF4-FFF2-40B4-BE49-F238E27FC236}">
-                <a16:creationId xmlns:a16="http://schemas.microsoft.com/office/drawing/2014/main" id="{5652303E-E516-4622-82A4-EC8AC08EF233}"/>
+                <a16:creationId xmlns:a16="http://schemas.microsoft.com/office/drawing/2014/main" id="{8C2DCD4B-1E82-436C-ABAB-F0771F6C350A}"/>
               </a:ext>
             </a:extLst>
           </p:cNvPr>
@@ -21665,7 +21665,7 @@
           <p:cNvPr id="3" name="title-8">
             <a:extLst xmlns:a="http://schemas.openxmlformats.org/drawingml/2006/main">
               <a:ext uri="{FF2B5EF4-FFF2-40B4-BE49-F238E27FC236}">
-                <a16:creationId xmlns:a16="http://schemas.microsoft.com/office/drawing/2014/main" id="{9EE61D20-948C-4718-ACF5-BD91C363DC55}"/>
+                <a16:creationId xmlns:a16="http://schemas.microsoft.com/office/drawing/2014/main" id="{05B2036C-B4BC-4B6D-8F7B-F92A975E2EB7}"/>
               </a:ext>
             </a:extLst>
           </p:cNvPr>
@@ -21727,7 +21727,7 @@
           <p:cNvPr id="4" name="">
             <a:extLst xmlns:a="http://schemas.openxmlformats.org/drawingml/2006/main">
               <a:ext uri="{FF2B5EF4-FFF2-40B4-BE49-F238E27FC236}">
-                <a16:creationId xmlns:a16="http://schemas.microsoft.com/office/drawing/2014/main" id="{92350BE6-286B-496B-97C7-A0E5E00FE171}"/>
+                <a16:creationId xmlns:a16="http://schemas.microsoft.com/office/drawing/2014/main" id="{F3ADEE66-1341-4371-B68E-48ADB0D3CAF2}"/>
               </a:ext>
             </a:extLst>
           </p:cNvPr>
@@ -21789,7 +21789,7 @@
           <p:cNvPr id="5" name="">
             <a:extLst xmlns:a="http://schemas.openxmlformats.org/drawingml/2006/main">
               <a:ext uri="{FF2B5EF4-FFF2-40B4-BE49-F238E27FC236}">
-                <a16:creationId xmlns:a16="http://schemas.microsoft.com/office/drawing/2014/main" id="{AA95D84E-5075-479A-BC20-351A3C93F863}"/>
+                <a16:creationId xmlns:a16="http://schemas.microsoft.com/office/drawing/2014/main" id="{236AE2E3-99E6-4C62-B933-E86C82395B02}"/>
               </a:ext>
             </a:extLst>
           </p:cNvPr>
@@ -21820,7 +21820,7 @@
           <p:cNvPr id="6" name="">
             <a:extLst xmlns:a="http://schemas.openxmlformats.org/drawingml/2006/main">
               <a:ext uri="{FF2B5EF4-FFF2-40B4-BE49-F238E27FC236}">
-                <a16:creationId xmlns:a16="http://schemas.microsoft.com/office/drawing/2014/main" id="{262A8EFF-1770-4E3F-815F-FE43D4FFBC4C}"/>
+                <a16:creationId xmlns:a16="http://schemas.microsoft.com/office/drawing/2014/main" id="{955A68DF-6484-4DEC-907A-AF50B056C4BF}"/>
               </a:ext>
             </a:extLst>
           </p:cNvPr>
@@ -21851,7 +21851,7 @@
           <p:cNvPr id="7" name="">
             <a:extLst xmlns:a="http://schemas.openxmlformats.org/drawingml/2006/main">
               <a:ext uri="{FF2B5EF4-FFF2-40B4-BE49-F238E27FC236}">
-                <a16:creationId xmlns:a16="http://schemas.microsoft.com/office/drawing/2014/main" id="{90CD17D2-ACA5-4672-BC39-D189CCF03BB7}"/>
+                <a16:creationId xmlns:a16="http://schemas.microsoft.com/office/drawing/2014/main" id="{58753073-56BE-4C07-A637-C6B7917ED0B2}"/>
               </a:ext>
             </a:extLst>
           </p:cNvPr>
@@ -21913,7 +21913,7 @@
           <p:cNvPr id="8" name="">
             <a:extLst xmlns:a="http://schemas.openxmlformats.org/drawingml/2006/main">
               <a:ext uri="{FF2B5EF4-FFF2-40B4-BE49-F238E27FC236}">
-                <a16:creationId xmlns:a16="http://schemas.microsoft.com/office/drawing/2014/main" id="{FE64CB94-3326-4AFF-BFF9-DD6B8A1536BC}"/>
+                <a16:creationId xmlns:a16="http://schemas.microsoft.com/office/drawing/2014/main" id="{6B4949D4-842A-4729-8FDD-995F48D25C64}"/>
               </a:ext>
             </a:extLst>
           </p:cNvPr>
@@ -21975,7 +21975,7 @@
           <p:cNvPr id="9" name="">
             <a:extLst xmlns:a="http://schemas.openxmlformats.org/drawingml/2006/main">
               <a:ext uri="{FF2B5EF4-FFF2-40B4-BE49-F238E27FC236}">
-                <a16:creationId xmlns:a16="http://schemas.microsoft.com/office/drawing/2014/main" id="{91AE9D68-BC15-41F8-A1FA-476116CB1B5E}"/>
+                <a16:creationId xmlns:a16="http://schemas.microsoft.com/office/drawing/2014/main" id="{5434DD70-4F46-4719-AC29-725A0B2EB1AC}"/>
               </a:ext>
             </a:extLst>
           </p:cNvPr>
@@ -22037,7 +22037,7 @@
           <p:cNvPr id="10" name="">
             <a:extLst xmlns:a="http://schemas.openxmlformats.org/drawingml/2006/main">
               <a:ext uri="{FF2B5EF4-FFF2-40B4-BE49-F238E27FC236}">
-                <a16:creationId xmlns:a16="http://schemas.microsoft.com/office/drawing/2014/main" id="{0EE6BDC8-A7BE-42D7-B68E-8D19841D2AFD}"/>
+                <a16:creationId xmlns:a16="http://schemas.microsoft.com/office/drawing/2014/main" id="{5A18EA88-332C-4DE8-8C64-ACFF60C16E95}"/>
               </a:ext>
             </a:extLst>
           </p:cNvPr>
@@ -22068,7 +22068,7 @@
           <p:cNvPr id="11" name="">
             <a:extLst xmlns:a="http://schemas.openxmlformats.org/drawingml/2006/main">
               <a:ext uri="{FF2B5EF4-FFF2-40B4-BE49-F238E27FC236}">
-                <a16:creationId xmlns:a16="http://schemas.microsoft.com/office/drawing/2014/main" id="{D73B9018-DD28-412B-B47B-D1FDDABB270F}"/>
+                <a16:creationId xmlns:a16="http://schemas.microsoft.com/office/drawing/2014/main" id="{EF613A84-2FBD-43AB-81E9-B93E38A1F8FA}"/>
               </a:ext>
             </a:extLst>
           </p:cNvPr>
@@ -22130,7 +22130,7 @@
           <p:cNvPr id="12" name="">
             <a:extLst xmlns:a="http://schemas.openxmlformats.org/drawingml/2006/main">
               <a:ext uri="{FF2B5EF4-FFF2-40B4-BE49-F238E27FC236}">
-                <a16:creationId xmlns:a16="http://schemas.microsoft.com/office/drawing/2014/main" id="{03ADEE15-1F5E-4EA8-BA2C-B5BBD564CED5}"/>
+                <a16:creationId xmlns:a16="http://schemas.microsoft.com/office/drawing/2014/main" id="{539D04D9-DF8B-44B4-A101-3D97839DCA5A}"/>
               </a:ext>
             </a:extLst>
           </p:cNvPr>
@@ -22192,7 +22192,7 @@
           <p:cNvPr id="13" name="">
             <a:extLst xmlns:a="http://schemas.openxmlformats.org/drawingml/2006/main">
               <a:ext uri="{FF2B5EF4-FFF2-40B4-BE49-F238E27FC236}">
-                <a16:creationId xmlns:a16="http://schemas.microsoft.com/office/drawing/2014/main" id="{8F3937B6-E29A-4B18-994D-EFBB04ECCB80}"/>
+                <a16:creationId xmlns:a16="http://schemas.microsoft.com/office/drawing/2014/main" id="{8FCF9342-897E-4BE3-8333-C4EF4751A504}"/>
               </a:ext>
             </a:extLst>
           </p:cNvPr>
@@ -22254,7 +22254,7 @@
           <p:cNvPr id="14" name="">
             <a:extLst xmlns:a="http://schemas.openxmlformats.org/drawingml/2006/main">
               <a:ext uri="{FF2B5EF4-FFF2-40B4-BE49-F238E27FC236}">
-                <a16:creationId xmlns:a16="http://schemas.microsoft.com/office/drawing/2014/main" id="{5877674F-585B-4EA5-8F75-FCCF05A51DE2}"/>
+                <a16:creationId xmlns:a16="http://schemas.microsoft.com/office/drawing/2014/main" id="{9CD2BB1D-A320-4055-B61F-7F50458FFA76}"/>
               </a:ext>
             </a:extLst>
           </p:cNvPr>
@@ -22285,7 +22285,7 @@
           <p:cNvPr id="15" name="">
             <a:extLst xmlns:a="http://schemas.openxmlformats.org/drawingml/2006/main">
               <a:ext uri="{FF2B5EF4-FFF2-40B4-BE49-F238E27FC236}">
-                <a16:creationId xmlns:a16="http://schemas.microsoft.com/office/drawing/2014/main" id="{6700CAAC-BEFF-4B08-B82A-74F4F8CC6487}"/>
+                <a16:creationId xmlns:a16="http://schemas.microsoft.com/office/drawing/2014/main" id="{C6A4F85D-B910-4043-9732-5750E65660A2}"/>
               </a:ext>
             </a:extLst>
           </p:cNvPr>
@@ -22347,7 +22347,7 @@
           <p:cNvPr id="16" name="">
             <a:extLst xmlns:a="http://schemas.openxmlformats.org/drawingml/2006/main">
               <a:ext uri="{FF2B5EF4-FFF2-40B4-BE49-F238E27FC236}">
-                <a16:creationId xmlns:a16="http://schemas.microsoft.com/office/drawing/2014/main" id="{EEB149C0-3685-4B96-8723-DCA03CD2435F}"/>
+                <a16:creationId xmlns:a16="http://schemas.microsoft.com/office/drawing/2014/main" id="{23FDB443-4343-43E0-A33D-61E8F5A5F27A}"/>
               </a:ext>
             </a:extLst>
           </p:cNvPr>
@@ -22409,7 +22409,7 @@
           <p:cNvPr id="17" name="">
             <a:extLst xmlns:a="http://schemas.openxmlformats.org/drawingml/2006/main">
               <a:ext uri="{FF2B5EF4-FFF2-40B4-BE49-F238E27FC236}">
-                <a16:creationId xmlns:a16="http://schemas.microsoft.com/office/drawing/2014/main" id="{02D65DA2-2199-4812-AD8B-78FDC9FB71D7}"/>
+                <a16:creationId xmlns:a16="http://schemas.microsoft.com/office/drawing/2014/main" id="{163A1E93-250E-432C-B9E4-E50554FAFBDC}"/>
               </a:ext>
             </a:extLst>
           </p:cNvPr>
@@ -22471,7 +22471,7 @@
           <p:cNvPr id="18" name="">
             <a:extLst xmlns:a="http://schemas.openxmlformats.org/drawingml/2006/main">
               <a:ext uri="{FF2B5EF4-FFF2-40B4-BE49-F238E27FC236}">
-                <a16:creationId xmlns:a16="http://schemas.microsoft.com/office/drawing/2014/main" id="{78592BD9-45C9-44F4-A6C6-38B6FDA24DBF}"/>
+                <a16:creationId xmlns:a16="http://schemas.microsoft.com/office/drawing/2014/main" id="{8C330155-32A8-4BF6-B077-B174A94E43F6}"/>
               </a:ext>
             </a:extLst>
           </p:cNvPr>
@@ -22502,7 +22502,7 @@
           <p:cNvPr id="19" name="">
             <a:extLst xmlns:a="http://schemas.openxmlformats.org/drawingml/2006/main">
               <a:ext uri="{FF2B5EF4-FFF2-40B4-BE49-F238E27FC236}">
-                <a16:creationId xmlns:a16="http://schemas.microsoft.com/office/drawing/2014/main" id="{E4765997-8B9B-49EC-BB78-6CF86FC63BF1}"/>
+                <a16:creationId xmlns:a16="http://schemas.microsoft.com/office/drawing/2014/main" id="{0CD2EF05-7FB4-44D1-8839-0A81A84057EA}"/>
               </a:ext>
             </a:extLst>
           </p:cNvPr>
@@ -22564,7 +22564,7 @@
           <p:cNvPr id="20" name="">
             <a:extLst xmlns:a="http://schemas.openxmlformats.org/drawingml/2006/main">
               <a:ext uri="{FF2B5EF4-FFF2-40B4-BE49-F238E27FC236}">
-                <a16:creationId xmlns:a16="http://schemas.microsoft.com/office/drawing/2014/main" id="{A78815E4-26D0-4EC1-84CF-79B03723C305}"/>
+                <a16:creationId xmlns:a16="http://schemas.microsoft.com/office/drawing/2014/main" id="{0F3369E5-5EB1-4185-A27C-4214C63C5C8E}"/>
               </a:ext>
             </a:extLst>
           </p:cNvPr>
@@ -22626,7 +22626,7 @@
           <p:cNvPr id="21" name="">
             <a:extLst xmlns:a="http://schemas.openxmlformats.org/drawingml/2006/main">
               <a:ext uri="{FF2B5EF4-FFF2-40B4-BE49-F238E27FC236}">
-                <a16:creationId xmlns:a16="http://schemas.microsoft.com/office/drawing/2014/main" id="{5B086895-BBAB-4204-B3CC-02C81651DEBB}"/>
+                <a16:creationId xmlns:a16="http://schemas.microsoft.com/office/drawing/2014/main" id="{60F8B97F-8593-4D37-AFE2-6073DA2CA616}"/>
               </a:ext>
             </a:extLst>
           </p:cNvPr>
@@ -22688,7 +22688,7 @@
           <p:cNvPr id="22" name="">
             <a:extLst xmlns:a="http://schemas.openxmlformats.org/drawingml/2006/main">
               <a:ext uri="{FF2B5EF4-FFF2-40B4-BE49-F238E27FC236}">
-                <a16:creationId xmlns:a16="http://schemas.microsoft.com/office/drawing/2014/main" id="{F5E9E0C5-AFEC-4C02-8B36-915177EE7665}"/>
+                <a16:creationId xmlns:a16="http://schemas.microsoft.com/office/drawing/2014/main" id="{E4ED3FA6-63EA-48BB-9FEB-5B32A43114F0}"/>
               </a:ext>
             </a:extLst>
           </p:cNvPr>
@@ -22750,7 +22750,7 @@
           <p:cNvPr id="23" name="footer-rule-8">
             <a:extLst xmlns:a="http://schemas.openxmlformats.org/drawingml/2006/main">
               <a:ext uri="{FF2B5EF4-FFF2-40B4-BE49-F238E27FC236}">
-                <a16:creationId xmlns:a16="http://schemas.microsoft.com/office/drawing/2014/main" id="{3546F610-A646-4DF7-8F9E-7EBF5CBD3F8E}"/>
+                <a16:creationId xmlns:a16="http://schemas.microsoft.com/office/drawing/2014/main" id="{E0CCA6DD-9B67-40E0-9963-E2409CCE943A}"/>
               </a:ext>
             </a:extLst>
           </p:cNvPr>
@@ -22781,7 +22781,7 @@
           <p:cNvPr id="24" name="footer-label-8">
             <a:extLst xmlns:a="http://schemas.openxmlformats.org/drawingml/2006/main">
               <a:ext uri="{FF2B5EF4-FFF2-40B4-BE49-F238E27FC236}">
-                <a16:creationId xmlns:a16="http://schemas.microsoft.com/office/drawing/2014/main" id="{CD0AB27D-8675-436E-AC09-1E27148DFEA4}"/>
+                <a16:creationId xmlns:a16="http://schemas.microsoft.com/office/drawing/2014/main" id="{0FD43EDA-D3CF-4ABA-BC81-F075F894A6E9}"/>
               </a:ext>
             </a:extLst>
           </p:cNvPr>
@@ -22843,7 +22843,7 @@
           <p:cNvPr id="25" name="footer-page-8">
             <a:extLst xmlns:a="http://schemas.openxmlformats.org/drawingml/2006/main">
               <a:ext uri="{FF2B5EF4-FFF2-40B4-BE49-F238E27FC236}">
-                <a16:creationId xmlns:a16="http://schemas.microsoft.com/office/drawing/2014/main" id="{AD60CFFE-44E3-45B7-AD16-1B079ADD2F9E}"/>
+                <a16:creationId xmlns:a16="http://schemas.microsoft.com/office/drawing/2014/main" id="{6E9F8911-8360-4851-B494-A178BCDFC9DD}"/>
               </a:ext>
             </a:extLst>
           </p:cNvPr>
@@ -22903,7 +22903,7 @@
     </p:spTree>
     <p:extLst>
       <p:ext uri="{BB962C8B-B14F-4D97-AF65-F5344CB8AC3E}">
-        <p14:creationId xmlns:p14="http://schemas.microsoft.com/office/powerpoint/2010/main" val="1294690101"/>
+        <p14:creationId xmlns:p14="http://schemas.microsoft.com/office/powerpoint/2010/main" val="1851241387"/>
       </p:ext>
     </p:extLst>
   </p:cSld>
@@ -22934,7 +22934,7 @@
           <p:cNvPr id="21" name="side-accent-9">
             <a:extLst xmlns:a="http://schemas.openxmlformats.org/drawingml/2006/main">
               <a:ext uri="{FF2B5EF4-FFF2-40B4-BE49-F238E27FC236}">
-                <a16:creationId xmlns:a16="http://schemas.microsoft.com/office/drawing/2014/main" id="{49EFA9A9-B934-46B0-B598-15E1F659E40C}"/>
+                <a16:creationId xmlns:a16="http://schemas.microsoft.com/office/drawing/2014/main" id="{1EA6402E-0D7F-45A6-AB20-C2842D5D4AFF}"/>
               </a:ext>
             </a:extLst>
           </p:cNvPr>
@@ -22965,7 +22965,7 @@
           <p:cNvPr id="2" name="kicker-9">
             <a:extLst xmlns:a="http://schemas.openxmlformats.org/drawingml/2006/main">
               <a:ext uri="{FF2B5EF4-FFF2-40B4-BE49-F238E27FC236}">
-                <a16:creationId xmlns:a16="http://schemas.microsoft.com/office/drawing/2014/main" id="{6194C4D0-998B-4950-8B3D-988D474E7084}"/>
+                <a16:creationId xmlns:a16="http://schemas.microsoft.com/office/drawing/2014/main" id="{2BF6AF9C-4129-442B-A684-1B6292228FAA}"/>
               </a:ext>
             </a:extLst>
           </p:cNvPr>
@@ -23027,7 +23027,7 @@
           <p:cNvPr id="3" name="title-9">
             <a:extLst xmlns:a="http://schemas.openxmlformats.org/drawingml/2006/main">
               <a:ext uri="{FF2B5EF4-FFF2-40B4-BE49-F238E27FC236}">
-                <a16:creationId xmlns:a16="http://schemas.microsoft.com/office/drawing/2014/main" id="{CEF35647-B091-4480-9F67-D318E18A4154}"/>
+                <a16:creationId xmlns:a16="http://schemas.microsoft.com/office/drawing/2014/main" id="{7092C948-3700-4675-B809-474F9E0C3B82}"/>
               </a:ext>
             </a:extLst>
           </p:cNvPr>
@@ -23089,7 +23089,7 @@
           <p:cNvPr id="4" name="">
             <a:extLst xmlns:a="http://schemas.openxmlformats.org/drawingml/2006/main">
               <a:ext uri="{FF2B5EF4-FFF2-40B4-BE49-F238E27FC236}">
-                <a16:creationId xmlns:a16="http://schemas.microsoft.com/office/drawing/2014/main" id="{AD380D38-41DF-407F-B0D7-9D211919F1F9}"/>
+                <a16:creationId xmlns:a16="http://schemas.microsoft.com/office/drawing/2014/main" id="{80659473-0A7D-4182-B777-DEAE0E8A80AE}"/>
               </a:ext>
             </a:extLst>
           </p:cNvPr>
@@ -23151,7 +23151,7 @@
           <p:cNvPr id="5" name="">
             <a:extLst xmlns:a="http://schemas.openxmlformats.org/drawingml/2006/main">
               <a:ext uri="{FF2B5EF4-FFF2-40B4-BE49-F238E27FC236}">
-                <a16:creationId xmlns:a16="http://schemas.microsoft.com/office/drawing/2014/main" id="{FDB728B5-DD6F-4C70-AF36-1B1E2AE02F85}"/>
+                <a16:creationId xmlns:a16="http://schemas.microsoft.com/office/drawing/2014/main" id="{603052E8-9F4F-4175-895A-65F685C5EC41}"/>
               </a:ext>
             </a:extLst>
           </p:cNvPr>
@@ -23182,7 +23182,7 @@
           <p:cNvPr id="6" name="">
             <a:extLst xmlns:a="http://schemas.openxmlformats.org/drawingml/2006/main">
               <a:ext uri="{FF2B5EF4-FFF2-40B4-BE49-F238E27FC236}">
-                <a16:creationId xmlns:a16="http://schemas.microsoft.com/office/drawing/2014/main" id="{C8026531-5479-4338-8832-F6EA5C7D0660}"/>
+                <a16:creationId xmlns:a16="http://schemas.microsoft.com/office/drawing/2014/main" id="{3CBE0F51-C9F8-4A9C-8CD6-FE983B621092}"/>
               </a:ext>
             </a:extLst>
           </p:cNvPr>
@@ -23244,7 +23244,7 @@
           <p:cNvPr id="7" name="">
             <a:extLst xmlns:a="http://schemas.openxmlformats.org/drawingml/2006/main">
               <a:ext uri="{FF2B5EF4-FFF2-40B4-BE49-F238E27FC236}">
-                <a16:creationId xmlns:a16="http://schemas.microsoft.com/office/drawing/2014/main" id="{E52661E3-2A40-433B-B3D8-7AD1305A9AFD}"/>
+                <a16:creationId xmlns:a16="http://schemas.microsoft.com/office/drawing/2014/main" id="{4FA168AC-E5D7-4B41-A14B-A6B74E48C7BE}"/>
               </a:ext>
             </a:extLst>
           </p:cNvPr>
@@ -23306,7 +23306,7 @@
           <p:cNvPr id="8" name="">
             <a:extLst xmlns:a="http://schemas.openxmlformats.org/drawingml/2006/main">
               <a:ext uri="{FF2B5EF4-FFF2-40B4-BE49-F238E27FC236}">
-                <a16:creationId xmlns:a16="http://schemas.microsoft.com/office/drawing/2014/main" id="{1B65E273-C92E-4A80-A24A-F1A1ADD47F36}"/>
+                <a16:creationId xmlns:a16="http://schemas.microsoft.com/office/drawing/2014/main" id="{ED8F0C54-8F65-460A-B89D-5D756C9D9E27}"/>
               </a:ext>
             </a:extLst>
           </p:cNvPr>
@@ -23368,7 +23368,7 @@
           <p:cNvPr id="9" name="">
             <a:extLst xmlns:a="http://schemas.openxmlformats.org/drawingml/2006/main">
               <a:ext uri="{FF2B5EF4-FFF2-40B4-BE49-F238E27FC236}">
-                <a16:creationId xmlns:a16="http://schemas.microsoft.com/office/drawing/2014/main" id="{06880F6C-5087-4E87-985B-00B164272A21}"/>
+                <a16:creationId xmlns:a16="http://schemas.microsoft.com/office/drawing/2014/main" id="{9CEB1425-A648-440A-9823-E422AADEEC18}"/>
               </a:ext>
             </a:extLst>
           </p:cNvPr>
@@ -23399,7 +23399,7 @@
           <p:cNvPr id="10" name="">
             <a:extLst xmlns:a="http://schemas.openxmlformats.org/drawingml/2006/main">
               <a:ext uri="{FF2B5EF4-FFF2-40B4-BE49-F238E27FC236}">
-                <a16:creationId xmlns:a16="http://schemas.microsoft.com/office/drawing/2014/main" id="{2E91A775-EC6E-4119-A722-100AB09429A0}"/>
+                <a16:creationId xmlns:a16="http://schemas.microsoft.com/office/drawing/2014/main" id="{6B42C676-1A1F-4A58-BD08-74AA3E6B0E67}"/>
               </a:ext>
             </a:extLst>
           </p:cNvPr>
@@ -23461,7 +23461,7 @@
           <p:cNvPr id="11" name="">
             <a:extLst xmlns:a="http://schemas.openxmlformats.org/drawingml/2006/main">
               <a:ext uri="{FF2B5EF4-FFF2-40B4-BE49-F238E27FC236}">
-                <a16:creationId xmlns:a16="http://schemas.microsoft.com/office/drawing/2014/main" id="{7DB2C8C9-3DC2-4A6C-8881-81E8C756F4AD}"/>
+                <a16:creationId xmlns:a16="http://schemas.microsoft.com/office/drawing/2014/main" id="{1BCB6C2B-0757-46C7-A378-8E7BD7130A47}"/>
               </a:ext>
             </a:extLst>
           </p:cNvPr>
@@ -23523,7 +23523,7 @@
           <p:cNvPr id="12" name="">
             <a:extLst xmlns:a="http://schemas.openxmlformats.org/drawingml/2006/main">
               <a:ext uri="{FF2B5EF4-FFF2-40B4-BE49-F238E27FC236}">
-                <a16:creationId xmlns:a16="http://schemas.microsoft.com/office/drawing/2014/main" id="{50D65AEB-0C13-4983-90D7-4A01C9C54259}"/>
+                <a16:creationId xmlns:a16="http://schemas.microsoft.com/office/drawing/2014/main" id="{53303F38-3FA4-485E-946E-8DC545A25F61}"/>
               </a:ext>
             </a:extLst>
           </p:cNvPr>
@@ -23585,7 +23585,7 @@
           <p:cNvPr id="13" name="">
             <a:extLst xmlns:a="http://schemas.openxmlformats.org/drawingml/2006/main">
               <a:ext uri="{FF2B5EF4-FFF2-40B4-BE49-F238E27FC236}">
-                <a16:creationId xmlns:a16="http://schemas.microsoft.com/office/drawing/2014/main" id="{B082A9DC-722B-492A-B572-0EA4FB3EB8E9}"/>
+                <a16:creationId xmlns:a16="http://schemas.microsoft.com/office/drawing/2014/main" id="{10F56999-AEBB-4A45-B34D-406D15A4DB1D}"/>
               </a:ext>
             </a:extLst>
           </p:cNvPr>
@@ -23616,7 +23616,7 @@
           <p:cNvPr id="14" name="">
             <a:extLst xmlns:a="http://schemas.openxmlformats.org/drawingml/2006/main">
               <a:ext uri="{FF2B5EF4-FFF2-40B4-BE49-F238E27FC236}">
-                <a16:creationId xmlns:a16="http://schemas.microsoft.com/office/drawing/2014/main" id="{9789E5B5-EC9A-496D-AF22-C8BEE9853F81}"/>
+                <a16:creationId xmlns:a16="http://schemas.microsoft.com/office/drawing/2014/main" id="{9527939E-B69E-4E11-BD67-3D4AC2C0828A}"/>
               </a:ext>
             </a:extLst>
           </p:cNvPr>
@@ -23678,7 +23678,7 @@
           <p:cNvPr id="15" name="">
             <a:extLst xmlns:a="http://schemas.openxmlformats.org/drawingml/2006/main">
               <a:ext uri="{FF2B5EF4-FFF2-40B4-BE49-F238E27FC236}">
-                <a16:creationId xmlns:a16="http://schemas.microsoft.com/office/drawing/2014/main" id="{AC061172-9CDC-4DBA-A8B8-DED62FCB7BD6}"/>
+                <a16:creationId xmlns:a16="http://schemas.microsoft.com/office/drawing/2014/main" id="{16B434BB-0208-4381-986D-F2F8E3F79402}"/>
               </a:ext>
             </a:extLst>
           </p:cNvPr>
@@ -23740,7 +23740,7 @@
           <p:cNvPr id="16" name="">
             <a:extLst xmlns:a="http://schemas.openxmlformats.org/drawingml/2006/main">
               <a:ext uri="{FF2B5EF4-FFF2-40B4-BE49-F238E27FC236}">
-                <a16:creationId xmlns:a16="http://schemas.microsoft.com/office/drawing/2014/main" id="{7FD589D3-93DB-45CC-BE73-755969912DF7}"/>
+                <a16:creationId xmlns:a16="http://schemas.microsoft.com/office/drawing/2014/main" id="{1338AA24-4DF2-459D-A947-97F234583A6B}"/>
               </a:ext>
             </a:extLst>
           </p:cNvPr>
@@ -23802,7 +23802,7 @@
           <p:cNvPr id="17" name="">
             <a:extLst xmlns:a="http://schemas.openxmlformats.org/drawingml/2006/main">
               <a:ext uri="{FF2B5EF4-FFF2-40B4-BE49-F238E27FC236}">
-                <a16:creationId xmlns:a16="http://schemas.microsoft.com/office/drawing/2014/main" id="{27FF342F-19E2-4A7E-9AD3-CC8DA831DC66}"/>
+                <a16:creationId xmlns:a16="http://schemas.microsoft.com/office/drawing/2014/main" id="{89F58360-C713-487F-AEB3-0A6ECB97A621}"/>
               </a:ext>
             </a:extLst>
           </p:cNvPr>
@@ -23864,7 +23864,7 @@
           <p:cNvPr id="18" name="footer-rule-9">
             <a:extLst xmlns:a="http://schemas.openxmlformats.org/drawingml/2006/main">
               <a:ext uri="{FF2B5EF4-FFF2-40B4-BE49-F238E27FC236}">
-                <a16:creationId xmlns:a16="http://schemas.microsoft.com/office/drawing/2014/main" id="{A4FEB40B-5786-40A3-8702-D98714EC87C8}"/>
+                <a16:creationId xmlns:a16="http://schemas.microsoft.com/office/drawing/2014/main" id="{092AEE9B-CC34-43E7-B295-5EFA553CD48D}"/>
               </a:ext>
             </a:extLst>
           </p:cNvPr>
@@ -23895,7 +23895,7 @@
           <p:cNvPr id="19" name="footer-label-9">
             <a:extLst xmlns:a="http://schemas.openxmlformats.org/drawingml/2006/main">
               <a:ext uri="{FF2B5EF4-FFF2-40B4-BE49-F238E27FC236}">
-                <a16:creationId xmlns:a16="http://schemas.microsoft.com/office/drawing/2014/main" id="{933F7BDE-ADA4-4E56-814E-2193627A02E1}"/>
+                <a16:creationId xmlns:a16="http://schemas.microsoft.com/office/drawing/2014/main" id="{4796B66B-1CC2-4F76-B49D-E5BF648640C7}"/>
               </a:ext>
             </a:extLst>
           </p:cNvPr>
@@ -23957,7 +23957,7 @@
           <p:cNvPr id="20" name="footer-page-9">
             <a:extLst xmlns:a="http://schemas.openxmlformats.org/drawingml/2006/main">
               <a:ext uri="{FF2B5EF4-FFF2-40B4-BE49-F238E27FC236}">
-                <a16:creationId xmlns:a16="http://schemas.microsoft.com/office/drawing/2014/main" id="{04A02B82-9D23-4B99-8BFA-A167D7F20644}"/>
+                <a16:creationId xmlns:a16="http://schemas.microsoft.com/office/drawing/2014/main" id="{2455F6FC-680A-4DD9-BDE2-A8A532572D9D}"/>
               </a:ext>
             </a:extLst>
           </p:cNvPr>
@@ -24017,7 +24017,7 @@
     </p:spTree>
     <p:extLst>
       <p:ext uri="{BB962C8B-B14F-4D97-AF65-F5344CB8AC3E}">
-        <p14:creationId xmlns:p14="http://schemas.microsoft.com/office/powerpoint/2010/main" val="1446216718"/>
+        <p14:creationId xmlns:p14="http://schemas.microsoft.com/office/powerpoint/2010/main" val="713694996"/>
       </p:ext>
     </p:extLst>
   </p:cSld>

--- a/docs/MSU-EVA-อบรมสายสนับสนุน-ฉบับวิทยากร.pptx
+++ b/docs/MSU-EVA-อบรมสายสนับสนุน-ฉบับวิทยากร.pptx
@@ -2,30 +2,30 @@
 <file path=ppt/presentation.xml><?xml version="1.0" encoding="utf-8"?>
 <p:presentation xmlns:p="http://schemas.openxmlformats.org/presentationml/2006/main">
   <p:sldMasterIdLst>
-    <p:sldMasterId xmlns:r="http://schemas.openxmlformats.org/officeDocument/2006/relationships" id="2147483648" r:id="R01c50aa930934d25"/>
+    <p:sldMasterId xmlns:r="http://schemas.openxmlformats.org/officeDocument/2006/relationships" id="2147483648" r:id="Redd03ff9f6994d03"/>
   </p:sldMasterIdLst>
   <p:notesMasterIdLst>
-    <p:notesMasterId xmlns:r="http://schemas.openxmlformats.org/officeDocument/2006/relationships" r:id="Rf970149b4e2f4817"/>
+    <p:notesMasterId xmlns:r="http://schemas.openxmlformats.org/officeDocument/2006/relationships" r:id="R3e4ef5225cf84f5b"/>
   </p:notesMasterIdLst>
   <p:sldIdLst>
-    <p:sldId xmlns:r="http://schemas.openxmlformats.org/officeDocument/2006/relationships" id="256" r:id="R708dd0864e334213"/>
-    <p:sldId xmlns:r="http://schemas.openxmlformats.org/officeDocument/2006/relationships" id="257" r:id="R4d681224831840dc"/>
-    <p:sldId xmlns:r="http://schemas.openxmlformats.org/officeDocument/2006/relationships" id="258" r:id="R2622e1ef101b4292"/>
-    <p:sldId xmlns:r="http://schemas.openxmlformats.org/officeDocument/2006/relationships" id="259" r:id="Rc968975c8d844350"/>
-    <p:sldId xmlns:r="http://schemas.openxmlformats.org/officeDocument/2006/relationships" id="260" r:id="R2ab28a0196674e6e"/>
-    <p:sldId xmlns:r="http://schemas.openxmlformats.org/officeDocument/2006/relationships" id="261" r:id="Rfc149c02a18b4245"/>
-    <p:sldId xmlns:r="http://schemas.openxmlformats.org/officeDocument/2006/relationships" id="262" r:id="Ra7c0051490d94d72"/>
-    <p:sldId xmlns:r="http://schemas.openxmlformats.org/officeDocument/2006/relationships" id="263" r:id="R9eaeb2f406cb4a3f"/>
-    <p:sldId xmlns:r="http://schemas.openxmlformats.org/officeDocument/2006/relationships" id="264" r:id="R0e36079390d74e7e"/>
-    <p:sldId xmlns:r="http://schemas.openxmlformats.org/officeDocument/2006/relationships" id="265" r:id="R8940a9bcde3d47a2"/>
-    <p:sldId xmlns:r="http://schemas.openxmlformats.org/officeDocument/2006/relationships" id="266" r:id="R2f663d1e7dd04aff"/>
-    <p:sldId xmlns:r="http://schemas.openxmlformats.org/officeDocument/2006/relationships" id="267" r:id="R5ef9ba89a3d84bfc"/>
-    <p:sldId xmlns:r="http://schemas.openxmlformats.org/officeDocument/2006/relationships" id="268" r:id="Rd1f6915e472a48f5"/>
-    <p:sldId xmlns:r="http://schemas.openxmlformats.org/officeDocument/2006/relationships" id="269" r:id="R00aea908f28d48ca"/>
-    <p:sldId xmlns:r="http://schemas.openxmlformats.org/officeDocument/2006/relationships" id="270" r:id="R76641b74f27d42de"/>
-    <p:sldId xmlns:r="http://schemas.openxmlformats.org/officeDocument/2006/relationships" id="271" r:id="R8bd6d63d1f1c4466"/>
-    <p:sldId xmlns:r="http://schemas.openxmlformats.org/officeDocument/2006/relationships" id="272" r:id="R95ad89e29fec4ce6"/>
-    <p:sldId xmlns:r="http://schemas.openxmlformats.org/officeDocument/2006/relationships" id="273" r:id="R161a500217c9493d"/>
+    <p:sldId xmlns:r="http://schemas.openxmlformats.org/officeDocument/2006/relationships" id="256" r:id="R5dd6c0e8636d464e"/>
+    <p:sldId xmlns:r="http://schemas.openxmlformats.org/officeDocument/2006/relationships" id="257" r:id="Rdea1cbc0b9404a10"/>
+    <p:sldId xmlns:r="http://schemas.openxmlformats.org/officeDocument/2006/relationships" id="258" r:id="Rc813cfb4598e4244"/>
+    <p:sldId xmlns:r="http://schemas.openxmlformats.org/officeDocument/2006/relationships" id="259" r:id="Rf7ee6d64163c4574"/>
+    <p:sldId xmlns:r="http://schemas.openxmlformats.org/officeDocument/2006/relationships" id="260" r:id="R4f24c80fb0fe4959"/>
+    <p:sldId xmlns:r="http://schemas.openxmlformats.org/officeDocument/2006/relationships" id="261" r:id="R42b8602b06d748cf"/>
+    <p:sldId xmlns:r="http://schemas.openxmlformats.org/officeDocument/2006/relationships" id="262" r:id="R243d8e490c7e47e0"/>
+    <p:sldId xmlns:r="http://schemas.openxmlformats.org/officeDocument/2006/relationships" id="263" r:id="Rb444e3ed6b3746a9"/>
+    <p:sldId xmlns:r="http://schemas.openxmlformats.org/officeDocument/2006/relationships" id="264" r:id="R6601e93af8dd4d34"/>
+    <p:sldId xmlns:r="http://schemas.openxmlformats.org/officeDocument/2006/relationships" id="265" r:id="Rc65b5f8fd33147e1"/>
+    <p:sldId xmlns:r="http://schemas.openxmlformats.org/officeDocument/2006/relationships" id="266" r:id="R1be78efb24f448d4"/>
+    <p:sldId xmlns:r="http://schemas.openxmlformats.org/officeDocument/2006/relationships" id="267" r:id="Rac1fe3ce6a904acf"/>
+    <p:sldId xmlns:r="http://schemas.openxmlformats.org/officeDocument/2006/relationships" id="268" r:id="R94e66db85db54c68"/>
+    <p:sldId xmlns:r="http://schemas.openxmlformats.org/officeDocument/2006/relationships" id="269" r:id="R29b6ed5608664c2d"/>
+    <p:sldId xmlns:r="http://schemas.openxmlformats.org/officeDocument/2006/relationships" id="270" r:id="Rac723ac9e9834695"/>
+    <p:sldId xmlns:r="http://schemas.openxmlformats.org/officeDocument/2006/relationships" id="271" r:id="Rf78ebbcb4227480b"/>
+    <p:sldId xmlns:r="http://schemas.openxmlformats.org/officeDocument/2006/relationships" id="272" r:id="R0962243c73e7457d"/>
+    <p:sldId xmlns:r="http://schemas.openxmlformats.org/officeDocument/2006/relationships" id="273" r:id="Rd82d7c29d2454f93"/>
   </p:sldIdLst>
   <p:sldSz cx="12192000" cy="6858000"/>
   <p:notesSz cx="6858000" cy="9144000"/>
@@ -754,7 +754,7 @@
           <a:lstStyle xmlns:a="http://schemas.openxmlformats.org/drawingml/2006/main"/>
           <a:p xmlns:a="http://schemas.openxmlformats.org/drawingml/2006/main">
             <a:r>
-              <a:t>[พูด] หลักฐานที่ดีต้องเปิดได้ ตรงกับกิจกรรม และรู้ว่าเป็นเอกสารของรายการใดครับ ลิงก์ควรเปิดได้จากบัญชีของผู้ประเมิน ไม่ใช่เปิดได้เฉพาะเจ้าของไฟล์ และควรตั้งชื่อไฟล์ให้ค้นหาได้ง่าย หลักฐานควรผ่านการตรวจทั้งคะแนนที่ระบบคำนวณ การเปิดลิงก์ และความตรงกับกิจกรรมครับ</a:t>
+              <a:t>[พูด] ก่อนส่ง ให้ตรวจ 3 เรื่องครับ หนึ่ง คะแนนที่ระบบคำนวณสมเหตุสมผลหรือไม่ สอง ลิงก์หลักฐานเปิดได้จากบัญชีผู้ประเมินหรือไม่ และสาม หลักฐานตรงกับกิจกรรมหรือไม่ ควรตั้งชื่อไฟล์ให้รู้ว่าเป็นหลักฐานของรายการใดครับ</a:t>
             </a:r>
           </a:p>
           <a:p xmlns:a="http://schemas.openxmlformats.org/drawingml/2006/main">
@@ -949,7 +949,7 @@
           <a:lstStyle xmlns:a="http://schemas.openxmlformats.org/drawingml/2006/main"/>
           <a:p xmlns:a="http://schemas.openxmlformats.org/drawingml/2006/main">
             <a:r>
-              <a:t>[พูด] หลังส่งแบบประเมิน ระบบจะส่งงานตามลำดับผู้ประเมินที่ Admin กำหนดไว้ครับ ผู้ประเมินแต่ละคนตรวจ ให้ผล และส่งต่อไปยังคนถัดไป จำนวนขั้นและสิทธิ์อาจไม่เหมือนกันในทุกงาน เพราะฉะนั้นอย่าคาดเดาจากชื่อตำแหน่ง ให้ดูสถานะและลำดับของรายการนั้นเป็นหลัก เมื่อเข้าใจตรงนี้แล้ว ต่อไปเรามาดูหน้าที่ของผู้ประเมินครับ</a:t>
+              <a:t>[พูด] หลังส่งแบบประเมิน ระบบจะส่งงานไปยังผู้ประเมินตามลำดับที่ Admin กำหนดครับ ผู้ประเมินแต่ละคนตรวจ บันทึกผล และส่งต่อให้คนถัดไป จำนวนขั้นอาจต่างกันในแต่ละงาน เวลาตรวจว่างานอยู่ที่ใคร ให้ดูสถานะและลำดับของรายการ ไม่ต้องคาดเดาจากชื่อตำแหน่งครับ ต่อไปเรามาดูหน้าที่ของผู้ประเมินครับ</a:t>
             </a:r>
           </a:p>
           <a:p xmlns:a="http://schemas.openxmlformats.org/drawingml/2006/main">
@@ -1044,7 +1044,7 @@
           <a:lstStyle xmlns:a="http://schemas.openxmlformats.org/drawingml/2006/main"/>
           <a:p xmlns:a="http://schemas.openxmlformats.org/drawingml/2006/main">
             <a:r>
-              <a:t>[พูด] ตอนนี้เราอยู่ในมุมผู้ประเมินครับ สิ่งที่ต้องตรวจคือผลกิจกรรม เป้าหมาย คะแนนที่ระบบคำนวณ และหลักฐานว่าตรงกับเกณฑ์หรือไม่ ควรเปิดหลักฐานจริงก่อนให้ผลนะครับ ไม่ควรดูเฉพาะชื่อไฟล์ เมื่อผู้ประเมินได้รับงาน ควรแยกให้ชัดว่าข้อมูลใดมาจากผู้รับการประเมิน และส่วนใดเป็นการตัดสินใจของผู้ประเมินครับ</a:t>
+              <a:t>[พูด] ตอนนี้เรามาดูฝั่งผู้ประเมินครับ เมื่อได้รับงาน ให้ตรวจ 4 เรื่องตามลำดับ คือ กิจกรรมตรงกับเกณฑ์หรือไม่ เป้าหมายกับผลที่ทำได้สอดคล้องกันหรือไม่ คะแนนถูกต้องหรือไม่ และหลักฐานเปิดได้และตรงกับข้อมูลหรือไม่ หากข้อมูลยังไม่ครบ ยังไม่ต้องบันทึกผล ให้แจ้งผู้เกี่ยวข้องตามขั้นตอนที่หน่วยงานกำหนดครับ บนหน้าจอให้สังเกตด้วยว่า ส่วนใดเป็นข้อมูลที่ผู้รับการประเมินกรอก และส่วนใดเป็นผลที่ผู้ประเมินต้องบันทึกครับ</a:t>
             </a:r>
           </a:p>
           <a:p xmlns:a="http://schemas.openxmlformats.org/drawingml/2006/main">
@@ -1619,7 +1619,7 @@
           <a:lstStyle xmlns:a="http://schemas.openxmlformats.org/drawingml/2006/main"/>
           <a:p xmlns:a="http://schemas.openxmlformats.org/drawingml/2006/main">
             <a:r>
-              <a:t>[พูด] ระบบไม่ได้มีแค่หน้ากรอกกิจกรรมนะครับ ระบบครอบคลุมตั้งแต่การจัดการผู้ใช้และสิทธิ์ การสร้างเกณฑ์ การกำหนดรอบและมอบหมายงาน ไปจนถึงการกรอกข้อมูล การประเมิน ติดตามสถานะ และส่งออกรายงาน ส่วนงานเตรียมระบบเป็นหน้าที่ของ Admin ผู้เข้าอบรมทั่วไปจึงไม่ต้องสร้างหรือเลือกรอบประเมินเองครับ เราตรวจเฉพาะงานที่ได้รับ แล้วดำเนินการตามสิทธิ์ของเรา ต่อไปมาทำความรู้จักผู้ใช้งานแต่ละกลุ่มกันครับ</a:t>
+              <a:t>[พูด] ระบบไม่ได้มีเฉพาะหน้ากรอกกิจกรรมครับ ก่อนเริ่มใช้งาน Admin จะจัดการผู้ใช้ สิทธิ์ เกณฑ์ รอบประเมิน และการมอบหมายงานให้เรียบร้อย ส่วนผู้ใช้งานจะทำงานตามรายการที่ได้รับ ตั้งแต่การกรอกข้อมูล การประเมิน การติดตามสถานะ จนถึงการออกรายงาน ดังนั้นผู้เข้าอบรมไม่ต้องสร้างหรือเลือกรอบประเมินเองครับ เพียงตรวจว่ารอบและรายการถูกต้อง แล้วทำหน้าที่ตามสิทธิ์ของตนเอง ต่อไปเรามาดูผู้ใช้งานแต่ละกลุ่มกันครับ</a:t>
             </a:r>
           </a:p>
           <a:p xmlns:a="http://schemas.openxmlformats.org/drawingml/2006/main">
@@ -1919,7 +1919,7 @@
           <a:lstStyle xmlns:a="http://schemas.openxmlformats.org/drawingml/2006/main"/>
           <a:p xmlns:a="http://schemas.openxmlformats.org/drawingml/2006/main">
             <a:r>
-              <a:t>[พูด] ผู้รับการประเมินเป็นคนเตรียมเรื่องราวของกิจกรรมให้ครบครับ เราต้องบอกให้ได้ว่าทำกิจกรรมอะไร ตั้งเป้าหมายไว้เท่าไร ผลจริงเป็นอย่างไร และมีหลักฐานใดยืนยัน ถ้าข้อมูลยังไม่พร้อมก็ใช้บันทึกร่างก่อนได้ ไม่ต้องรีบส่งครับ เพราะข้อมูลที่เราเตรียมตรงนี้จะเป็นฐานให้ผู้ประเมินตัดสินใจ เมื่อเข้าใจหน้าที่นี้แล้ว ต่อไปเรามาดูจุดเริ่มต้นบนแดชบอร์ดครับ</a:t>
+              <a:t>[พูด] ผู้รับการประเมินมีหน้าที่กรอกข้อมูลกิจกรรมให้ครบครับ ในแต่ละกิจกรรมต้องระบุว่า ทำอะไร ตั้งเป้าหมายไว้เท่าไร ผลจริงเป็นอย่างไร และใช้หลักฐานใดยืนยัน หากข้อมูลยังไม่ครบ ให้บันทึกร่างไว้ก่อน ยังไม่ต้องส่งแบบประเมิน เพราะผู้ประเมินจะใช้ข้อมูลส่วนนี้ประกอบการให้ผลครับ ต่อไปเรามาดูจุดเริ่มต้นบนแดชบอร์ดครับ</a:t>
             </a:r>
           </a:p>
           <a:p xmlns:a="http://schemas.openxmlformats.org/drawingml/2006/main">
@@ -2104,7 +2104,7 @@
           <a:lstStyle xmlns:a="http://schemas.openxmlformats.org/drawingml/2006/main"/>
           <a:p xmlns:a="http://schemas.openxmlformats.org/drawingml/2006/main">
             <a:r>
-              <a:t>[พูด] เมื่อเปิดรายการแล้ว ลองสังเกตความเชื่อมโยงนะครับ โครงการบอกบริบท กิจกรรมบอกว่างานที่ทำคืออะไร ตัวชี้วัดบอกว่าจะวัดผลแบบไหน และหลักฐานยืนยันผลนั้น ถ้าข้อมูลเหล่านี้ไปคนละทิศ ผู้ประเมินจะอ่านแล้วไม่เห็นภาพครับ เพราะฉะนั้นให้เริ่มจากเลือกกิจกรรมที่ตรงกับงานจริงก่อน แล้วค่อยกรอกเป้าหมายกับผล ต่อไปเราจะดูช่องที่ต้องกรอกกันครับ</a:t>
+              <a:t>[พูด] เมื่อเปิดรายการแล้ว ให้ตรวจว่าข้อมูล 4 ส่วนสอดคล้องกันครับ หนึ่ง โครงการบอกว่างานนี้อยู่ภายใต้เรื่องใด สอง กิจกรรมบอกว่างานที่ทำคืออะไร สาม ตัวชี้วัดบอกว่าจะวัดผลอย่างไร และสี่ หลักฐานใช้ยืนยันผลที่กรอก หากข้อมูลส่วนใดไม่ตรงกัน ผู้ประเมินอาจต้องขอข้อมูลเพิ่มครับ ดังนั้นให้เลือกกิจกรรมที่ตรงกับงานจริงก่อน แล้วจึงกรอกเป้าหมายและผลครับ</a:t>
             </a:r>
           </a:p>
           <a:p xmlns:a="http://schemas.openxmlformats.org/drawingml/2006/main">
@@ -2282,7 +2282,7 @@
   </p:cSld>
   <p:clrMap bg1="lt1" tx1="dk1" bg2="lt2" tx2="dk2" accent1="accent1" accent2="accent2" accent3="accent3" accent4="accent4" accent5="accent5" accent6="accent6" hlink="hlink" folHlink="folHlink"/>
   <p:sldLayoutIdLst>
-    <p:sldLayoutId xmlns:r="http://schemas.openxmlformats.org/officeDocument/2006/relationships" id="2147483649" r:id="R29b4f58ed2904506"/>
+    <p:sldLayoutId xmlns:r="http://schemas.openxmlformats.org/officeDocument/2006/relationships" id="2147483649" r:id="R81c77ee164694cdd"/>
   </p:sldLayoutIdLst>
   <p:txStyles>
     <p:titleStyle>
@@ -2837,7 +2837,7 @@
           <p:nvPr/>
         </p:nvPicPr>
         <p:blipFill>
-          <a:blip xmlns:r="http://schemas.openxmlformats.org/officeDocument/2006/relationships" xmlns:a="http://schemas.openxmlformats.org/drawingml/2006/main" r:embed="R072684655ecf4e29"/>
+          <a:blip xmlns:r="http://schemas.openxmlformats.org/officeDocument/2006/relationships" xmlns:a="http://schemas.openxmlformats.org/drawingml/2006/main" r:embed="Rc53587b9fb624545"/>
           <a:srcRect xmlns:a="http://schemas.openxmlformats.org/drawingml/2006/main" l="2579" t="0" r="2579" b="0"/>
           <a:stretch xmlns:a="http://schemas.openxmlformats.org/drawingml/2006/main">
             <a:fillRect l="0" t="0" r="0" b="0"/>
@@ -2858,7 +2858,7 @@
           <p:cNvPr id="2" name="cover-panel">
             <a:extLst xmlns:a="http://schemas.openxmlformats.org/drawingml/2006/main">
               <a:ext uri="{FF2B5EF4-FFF2-40B4-BE49-F238E27FC236}">
-                <a16:creationId xmlns:a16="http://schemas.microsoft.com/office/drawing/2014/main" id="{230775A3-31CA-4654-952D-33C1BB01C0C2}"/>
+                <a16:creationId xmlns:a16="http://schemas.microsoft.com/office/drawing/2014/main" id="{E21DA3D2-E746-4E01-8FD5-54450C66C665}"/>
               </a:ext>
             </a:extLst>
           </p:cNvPr>
@@ -2889,7 +2889,7 @@
           <p:cNvPr id="3" name="cover-accent">
             <a:extLst xmlns:a="http://schemas.openxmlformats.org/drawingml/2006/main">
               <a:ext uri="{FF2B5EF4-FFF2-40B4-BE49-F238E27FC236}">
-                <a16:creationId xmlns:a16="http://schemas.microsoft.com/office/drawing/2014/main" id="{CA283370-CE74-41D3-A7F9-C29C03C05FA4}"/>
+                <a16:creationId xmlns:a16="http://schemas.microsoft.com/office/drawing/2014/main" id="{E2F6D43C-665B-4A8F-9375-33CE878D0C3B}"/>
               </a:ext>
             </a:extLst>
           </p:cNvPr>
@@ -2924,7 +2924,7 @@
           <p:nvPr/>
         </p:nvPicPr>
         <p:blipFill>
-          <a:blip xmlns:r="http://schemas.openxmlformats.org/officeDocument/2006/relationships" xmlns:a="http://schemas.openxmlformats.org/drawingml/2006/main" r:embed="R91259323042c493d"/>
+          <a:blip xmlns:r="http://schemas.openxmlformats.org/officeDocument/2006/relationships" xmlns:a="http://schemas.openxmlformats.org/drawingml/2006/main" r:embed="R4d67ebdfc0bf45d0"/>
           <a:stretch xmlns:a="http://schemas.openxmlformats.org/drawingml/2006/main"/>
         </p:blipFill>
         <p:spPr>
@@ -2942,7 +2942,7 @@
           <p:cNvPr id="5" name="cover-institution">
             <a:extLst xmlns:a="http://schemas.openxmlformats.org/drawingml/2006/main">
               <a:ext uri="{FF2B5EF4-FFF2-40B4-BE49-F238E27FC236}">
-                <a16:creationId xmlns:a16="http://schemas.microsoft.com/office/drawing/2014/main" id="{C3599FED-647D-49A0-9AE5-5F15FABBAC4A}"/>
+                <a16:creationId xmlns:a16="http://schemas.microsoft.com/office/drawing/2014/main" id="{AB4095D1-F3FB-422F-876B-70520B1F6491}"/>
               </a:ext>
             </a:extLst>
           </p:cNvPr>
@@ -3004,7 +3004,7 @@
           <p:cNvPr id="6" name="cover-session">
             <a:extLst xmlns:a="http://schemas.openxmlformats.org/drawingml/2006/main">
               <a:ext uri="{FF2B5EF4-FFF2-40B4-BE49-F238E27FC236}">
-                <a16:creationId xmlns:a16="http://schemas.microsoft.com/office/drawing/2014/main" id="{A682ACDD-8065-4AFE-8A8A-0B3B7ECE174C}"/>
+                <a16:creationId xmlns:a16="http://schemas.microsoft.com/office/drawing/2014/main" id="{58137DA4-9C14-406E-8DE8-44C8B713D282}"/>
               </a:ext>
             </a:extLst>
           </p:cNvPr>
@@ -3066,7 +3066,7 @@
           <p:cNvPr id="7" name="cover-title">
             <a:extLst xmlns:a="http://schemas.openxmlformats.org/drawingml/2006/main">
               <a:ext uri="{FF2B5EF4-FFF2-40B4-BE49-F238E27FC236}">
-                <a16:creationId xmlns:a16="http://schemas.microsoft.com/office/drawing/2014/main" id="{47773968-1A2E-48DC-8103-D94081E74C9B}"/>
+                <a16:creationId xmlns:a16="http://schemas.microsoft.com/office/drawing/2014/main" id="{DF12BE92-B6A7-4F0A-B4C5-97381B96FAC5}"/>
               </a:ext>
             </a:extLst>
           </p:cNvPr>
@@ -3128,7 +3128,7 @@
           <p:cNvPr id="8" name="cover-system-short-name">
             <a:extLst xmlns:a="http://schemas.openxmlformats.org/drawingml/2006/main">
               <a:ext uri="{FF2B5EF4-FFF2-40B4-BE49-F238E27FC236}">
-                <a16:creationId xmlns:a16="http://schemas.microsoft.com/office/drawing/2014/main" id="{55DAF244-ABE8-4ABD-9E27-4AF13F7683DC}"/>
+                <a16:creationId xmlns:a16="http://schemas.microsoft.com/office/drawing/2014/main" id="{CEB49476-97B4-4FF1-91D8-FBDEFE9D0207}"/>
               </a:ext>
             </a:extLst>
           </p:cNvPr>
@@ -3190,7 +3190,7 @@
           <p:cNvPr id="9" name="cover-gold-rule">
             <a:extLst xmlns:a="http://schemas.openxmlformats.org/drawingml/2006/main">
               <a:ext uri="{FF2B5EF4-FFF2-40B4-BE49-F238E27FC236}">
-                <a16:creationId xmlns:a16="http://schemas.microsoft.com/office/drawing/2014/main" id="{71A21E8C-1C0C-49A8-9EC4-43F34FB55759}"/>
+                <a16:creationId xmlns:a16="http://schemas.microsoft.com/office/drawing/2014/main" id="{F9A087EC-FA23-4175-A9FA-1BB42D8D753A}"/>
               </a:ext>
             </a:extLst>
           </p:cNvPr>
@@ -3221,7 +3221,7 @@
           <p:cNvPr id="10" name="cover-promise">
             <a:extLst xmlns:a="http://schemas.openxmlformats.org/drawingml/2006/main">
               <a:ext uri="{FF2B5EF4-FFF2-40B4-BE49-F238E27FC236}">
-                <a16:creationId xmlns:a16="http://schemas.microsoft.com/office/drawing/2014/main" id="{CC3A2619-3112-417E-9057-7F4DE6F92361}"/>
+                <a16:creationId xmlns:a16="http://schemas.microsoft.com/office/drawing/2014/main" id="{4057040E-6190-43F3-AADF-7CF6409D3812}"/>
               </a:ext>
             </a:extLst>
           </p:cNvPr>
@@ -3283,7 +3283,7 @@
           <p:cNvPr id="11" name="cover-style">
             <a:extLst xmlns:a="http://schemas.openxmlformats.org/drawingml/2006/main">
               <a:ext uri="{FF2B5EF4-FFF2-40B4-BE49-F238E27FC236}">
-                <a16:creationId xmlns:a16="http://schemas.microsoft.com/office/drawing/2014/main" id="{A606FD9A-8E37-4A20-80DA-7672470B68F9}"/>
+                <a16:creationId xmlns:a16="http://schemas.microsoft.com/office/drawing/2014/main" id="{C274FD41-5720-4A33-ABEC-A94300C4649A}"/>
               </a:ext>
             </a:extLst>
           </p:cNvPr>
@@ -3349,7 +3349,7 @@
           <p:nvPr/>
         </p:nvPicPr>
         <p:blipFill>
-          <a:blip xmlns:r="http://schemas.openxmlformats.org/officeDocument/2006/relationships" xmlns:a="http://schemas.openxmlformats.org/drawingml/2006/main" r:embed="R043af6b08deb4eba"/>
+          <a:blip xmlns:r="http://schemas.openxmlformats.org/officeDocument/2006/relationships" xmlns:a="http://schemas.openxmlformats.org/drawingml/2006/main" r:embed="Raed6bbc97678491f"/>
           <a:stretch xmlns:a="http://schemas.openxmlformats.org/drawingml/2006/main"/>
         </p:blipFill>
         <p:spPr>
@@ -3365,7 +3365,7 @@
     </p:spTree>
     <p:extLst>
       <p:ext uri="{BB962C8B-B14F-4D97-AF65-F5344CB8AC3E}">
-        <p14:creationId xmlns:p14="http://schemas.microsoft.com/office/powerpoint/2010/main" val="535675839"/>
+        <p14:creationId xmlns:p14="http://schemas.microsoft.com/office/powerpoint/2010/main" val="1566411266"/>
       </p:ext>
     </p:extLst>
   </p:cSld>
@@ -3396,7 +3396,7 @@
           <p:cNvPr id="15" name="side-accent-10">
             <a:extLst xmlns:a="http://schemas.openxmlformats.org/drawingml/2006/main">
               <a:ext uri="{FF2B5EF4-FFF2-40B4-BE49-F238E27FC236}">
-                <a16:creationId xmlns:a16="http://schemas.microsoft.com/office/drawing/2014/main" id="{5DEA5770-7FAD-4654-B521-CF5FC193395F}"/>
+                <a16:creationId xmlns:a16="http://schemas.microsoft.com/office/drawing/2014/main" id="{7FD48FB0-66DF-4AA9-935F-C18B1B6DDFEF}"/>
               </a:ext>
             </a:extLst>
           </p:cNvPr>
@@ -3427,7 +3427,7 @@
           <p:cNvPr id="2" name="kicker-10">
             <a:extLst xmlns:a="http://schemas.openxmlformats.org/drawingml/2006/main">
               <a:ext uri="{FF2B5EF4-FFF2-40B4-BE49-F238E27FC236}">
-                <a16:creationId xmlns:a16="http://schemas.microsoft.com/office/drawing/2014/main" id="{0B10F8CE-58F7-4233-984F-5A6C5A16CF2E}"/>
+                <a16:creationId xmlns:a16="http://schemas.microsoft.com/office/drawing/2014/main" id="{E6767B42-78BF-428E-B946-ACB0FC2354F3}"/>
               </a:ext>
             </a:extLst>
           </p:cNvPr>
@@ -3489,7 +3489,7 @@
           <p:cNvPr id="3" name="title-10">
             <a:extLst xmlns:a="http://schemas.openxmlformats.org/drawingml/2006/main">
               <a:ext uri="{FF2B5EF4-FFF2-40B4-BE49-F238E27FC236}">
-                <a16:creationId xmlns:a16="http://schemas.microsoft.com/office/drawing/2014/main" id="{49FC4D05-1CBF-491D-8604-40EDBA00E56B}"/>
+                <a16:creationId xmlns:a16="http://schemas.microsoft.com/office/drawing/2014/main" id="{4AAEE529-3334-4A5F-8426-078439DA6A25}"/>
               </a:ext>
             </a:extLst>
           </p:cNvPr>
@@ -3551,7 +3551,7 @@
           <p:cNvPr id="4" name="">
             <a:extLst xmlns:a="http://schemas.openxmlformats.org/drawingml/2006/main">
               <a:ext uri="{FF2B5EF4-FFF2-40B4-BE49-F238E27FC236}">
-                <a16:creationId xmlns:a16="http://schemas.microsoft.com/office/drawing/2014/main" id="{6011A0AA-5B8D-425C-8F21-A4AF39D50D31}"/>
+                <a16:creationId xmlns:a16="http://schemas.microsoft.com/office/drawing/2014/main" id="{6DDD2C16-A1AC-4BEA-A4E5-0D4263BAACE6}"/>
               </a:ext>
             </a:extLst>
           </p:cNvPr>
@@ -3613,7 +3613,7 @@
           <p:cNvPr id="5" name="">
             <a:extLst xmlns:a="http://schemas.openxmlformats.org/drawingml/2006/main">
               <a:ext uri="{FF2B5EF4-FFF2-40B4-BE49-F238E27FC236}">
-                <a16:creationId xmlns:a16="http://schemas.microsoft.com/office/drawing/2014/main" id="{D954CC23-894D-4095-9A0B-6E94358DFFF9}"/>
+                <a16:creationId xmlns:a16="http://schemas.microsoft.com/office/drawing/2014/main" id="{06D3F68B-702F-46EE-9489-C46313A534CD}"/>
               </a:ext>
             </a:extLst>
           </p:cNvPr>
@@ -3675,7 +3675,7 @@
           <p:cNvPr id="6" name="">
             <a:extLst xmlns:a="http://schemas.openxmlformats.org/drawingml/2006/main">
               <a:ext uri="{FF2B5EF4-FFF2-40B4-BE49-F238E27FC236}">
-                <a16:creationId xmlns:a16="http://schemas.microsoft.com/office/drawing/2014/main" id="{06F45B5A-1200-4F95-A617-4600C44D88A8}"/>
+                <a16:creationId xmlns:a16="http://schemas.microsoft.com/office/drawing/2014/main" id="{EEC12871-5064-4A4C-A0CD-00C946E39B4F}"/>
               </a:ext>
             </a:extLst>
           </p:cNvPr>
@@ -3743,7 +3743,7 @@
           <p:cNvPr id="7" name="">
             <a:extLst xmlns:a="http://schemas.openxmlformats.org/drawingml/2006/main">
               <a:ext uri="{FF2B5EF4-FFF2-40B4-BE49-F238E27FC236}">
-                <a16:creationId xmlns:a16="http://schemas.microsoft.com/office/drawing/2014/main" id="{BA28FEED-75EC-49EF-A121-D71678059670}"/>
+                <a16:creationId xmlns:a16="http://schemas.microsoft.com/office/drawing/2014/main" id="{6F47A626-EB29-4B2D-B572-3FFB48C4C1E8}"/>
               </a:ext>
             </a:extLst>
           </p:cNvPr>
@@ -3805,7 +3805,7 @@
           <p:cNvPr id="8" name="">
             <a:extLst xmlns:a="http://schemas.openxmlformats.org/drawingml/2006/main">
               <a:ext uri="{FF2B5EF4-FFF2-40B4-BE49-F238E27FC236}">
-                <a16:creationId xmlns:a16="http://schemas.microsoft.com/office/drawing/2014/main" id="{9122FF7D-C302-4078-AA60-52F9B735E89A}"/>
+                <a16:creationId xmlns:a16="http://schemas.microsoft.com/office/drawing/2014/main" id="{4E452610-8805-4168-BA41-008637FEBC42}"/>
               </a:ext>
             </a:extLst>
           </p:cNvPr>
@@ -3873,7 +3873,7 @@
           <p:cNvPr id="9" name="">
             <a:extLst xmlns:a="http://schemas.openxmlformats.org/drawingml/2006/main">
               <a:ext uri="{FF2B5EF4-FFF2-40B4-BE49-F238E27FC236}">
-                <a16:creationId xmlns:a16="http://schemas.microsoft.com/office/drawing/2014/main" id="{74E671EB-7D25-429F-8B18-DAAFC9C63EC7}"/>
+                <a16:creationId xmlns:a16="http://schemas.microsoft.com/office/drawing/2014/main" id="{A667BF14-4765-4D61-AC0F-BB9537251C6F}"/>
               </a:ext>
             </a:extLst>
           </p:cNvPr>
@@ -3904,7 +3904,7 @@
           <p:cNvPr id="10" name="">
             <a:extLst xmlns:a="http://schemas.openxmlformats.org/drawingml/2006/main">
               <a:ext uri="{FF2B5EF4-FFF2-40B4-BE49-F238E27FC236}">
-                <a16:creationId xmlns:a16="http://schemas.microsoft.com/office/drawing/2014/main" id="{B8200ACA-4C6D-433F-8125-E9EC356E3EE3}"/>
+                <a16:creationId xmlns:a16="http://schemas.microsoft.com/office/drawing/2014/main" id="{EF61BC5A-5A3E-498D-BBE0-0CB474C73DC4}"/>
               </a:ext>
             </a:extLst>
           </p:cNvPr>
@@ -3966,7 +3966,7 @@
           <p:cNvPr id="11" name="">
             <a:extLst xmlns:a="http://schemas.openxmlformats.org/drawingml/2006/main">
               <a:ext uri="{FF2B5EF4-FFF2-40B4-BE49-F238E27FC236}">
-                <a16:creationId xmlns:a16="http://schemas.microsoft.com/office/drawing/2014/main" id="{74DBC869-0CFC-4DAD-96B1-FE65AC230576}"/>
+                <a16:creationId xmlns:a16="http://schemas.microsoft.com/office/drawing/2014/main" id="{F90ACBE2-418B-4AF8-A369-51EBCB66BD4E}"/>
               </a:ext>
             </a:extLst>
           </p:cNvPr>
@@ -4028,7 +4028,7 @@
           <p:cNvPr id="12" name="footer-rule-10">
             <a:extLst xmlns:a="http://schemas.openxmlformats.org/drawingml/2006/main">
               <a:ext uri="{FF2B5EF4-FFF2-40B4-BE49-F238E27FC236}">
-                <a16:creationId xmlns:a16="http://schemas.microsoft.com/office/drawing/2014/main" id="{F87B4D85-7BFC-4FCE-AF62-6CEF9B79B619}"/>
+                <a16:creationId xmlns:a16="http://schemas.microsoft.com/office/drawing/2014/main" id="{40BA8A73-30E9-4D8E-8510-01434B71B75D}"/>
               </a:ext>
             </a:extLst>
           </p:cNvPr>
@@ -4059,7 +4059,7 @@
           <p:cNvPr id="13" name="footer-label-10">
             <a:extLst xmlns:a="http://schemas.openxmlformats.org/drawingml/2006/main">
               <a:ext uri="{FF2B5EF4-FFF2-40B4-BE49-F238E27FC236}">
-                <a16:creationId xmlns:a16="http://schemas.microsoft.com/office/drawing/2014/main" id="{6B046CD1-F8F1-4F13-B289-555011729CFB}"/>
+                <a16:creationId xmlns:a16="http://schemas.microsoft.com/office/drawing/2014/main" id="{29748CC5-2248-45F1-8F8D-0946A9ED1AA5}"/>
               </a:ext>
             </a:extLst>
           </p:cNvPr>
@@ -4121,7 +4121,7 @@
           <p:cNvPr id="14" name="footer-page-10">
             <a:extLst xmlns:a="http://schemas.openxmlformats.org/drawingml/2006/main">
               <a:ext uri="{FF2B5EF4-FFF2-40B4-BE49-F238E27FC236}">
-                <a16:creationId xmlns:a16="http://schemas.microsoft.com/office/drawing/2014/main" id="{EF085F1C-E427-402D-A394-688C9DE61724}"/>
+                <a16:creationId xmlns:a16="http://schemas.microsoft.com/office/drawing/2014/main" id="{36801014-917A-4CCF-BB26-09BE925CA920}"/>
               </a:ext>
             </a:extLst>
           </p:cNvPr>
@@ -4181,7 +4181,7 @@
     </p:spTree>
     <p:extLst>
       <p:ext uri="{BB962C8B-B14F-4D97-AF65-F5344CB8AC3E}">
-        <p14:creationId xmlns:p14="http://schemas.microsoft.com/office/powerpoint/2010/main" val="284253096"/>
+        <p14:creationId xmlns:p14="http://schemas.microsoft.com/office/powerpoint/2010/main" val="340205609"/>
       </p:ext>
     </p:extLst>
   </p:cSld>
@@ -4212,7 +4212,7 @@
           <p:cNvPr id="17" name="side-accent-11">
             <a:extLst xmlns:a="http://schemas.openxmlformats.org/drawingml/2006/main">
               <a:ext uri="{FF2B5EF4-FFF2-40B4-BE49-F238E27FC236}">
-                <a16:creationId xmlns:a16="http://schemas.microsoft.com/office/drawing/2014/main" id="{CBCE8AD3-748B-4F15-B38D-C0ECF3C36B8D}"/>
+                <a16:creationId xmlns:a16="http://schemas.microsoft.com/office/drawing/2014/main" id="{8129789E-0F29-4DB6-8D65-0C5C18795518}"/>
               </a:ext>
             </a:extLst>
           </p:cNvPr>
@@ -4243,7 +4243,7 @@
           <p:cNvPr id="2" name="kicker-11">
             <a:extLst xmlns:a="http://schemas.openxmlformats.org/drawingml/2006/main">
               <a:ext uri="{FF2B5EF4-FFF2-40B4-BE49-F238E27FC236}">
-                <a16:creationId xmlns:a16="http://schemas.microsoft.com/office/drawing/2014/main" id="{5A167D4F-A77E-4E5F-92EC-9069E3D5D5B6}"/>
+                <a16:creationId xmlns:a16="http://schemas.microsoft.com/office/drawing/2014/main" id="{254C5BDD-18CF-4C62-8BB9-A37D77864615}"/>
               </a:ext>
             </a:extLst>
           </p:cNvPr>
@@ -4305,7 +4305,7 @@
           <p:cNvPr id="3" name="title-11">
             <a:extLst xmlns:a="http://schemas.openxmlformats.org/drawingml/2006/main">
               <a:ext uri="{FF2B5EF4-FFF2-40B4-BE49-F238E27FC236}">
-                <a16:creationId xmlns:a16="http://schemas.microsoft.com/office/drawing/2014/main" id="{AB932BE6-960D-4534-9785-237A111B0B1A}"/>
+                <a16:creationId xmlns:a16="http://schemas.microsoft.com/office/drawing/2014/main" id="{68CB33C2-4375-4087-BA7F-8B8277C94194}"/>
               </a:ext>
             </a:extLst>
           </p:cNvPr>
@@ -4367,7 +4367,7 @@
           <p:cNvPr id="4" name="">
             <a:extLst xmlns:a="http://schemas.openxmlformats.org/drawingml/2006/main">
               <a:ext uri="{FF2B5EF4-FFF2-40B4-BE49-F238E27FC236}">
-                <a16:creationId xmlns:a16="http://schemas.microsoft.com/office/drawing/2014/main" id="{ABCE4500-0908-4B2B-BBFA-B65F7DBB0CCB}"/>
+                <a16:creationId xmlns:a16="http://schemas.microsoft.com/office/drawing/2014/main" id="{AB6EAB5B-BC26-46A2-9E0D-AC527E9E83A1}"/>
               </a:ext>
             </a:extLst>
           </p:cNvPr>
@@ -4402,7 +4402,7 @@
           <p:cNvPr id="5" name="">
             <a:extLst xmlns:a="http://schemas.openxmlformats.org/drawingml/2006/main">
               <a:ext uri="{FF2B5EF4-FFF2-40B4-BE49-F238E27FC236}">
-                <a16:creationId xmlns:a16="http://schemas.microsoft.com/office/drawing/2014/main" id="{D83FBB90-3AE2-43F9-9FA0-6A4BDC4591A2}"/>
+                <a16:creationId xmlns:a16="http://schemas.microsoft.com/office/drawing/2014/main" id="{3FB25BE3-6838-4700-9136-68616C3A871A}"/>
               </a:ext>
             </a:extLst>
           </p:cNvPr>
@@ -4464,7 +4464,7 @@
           <p:cNvPr id="6" name="">
             <a:extLst xmlns:a="http://schemas.openxmlformats.org/drawingml/2006/main">
               <a:ext uri="{FF2B5EF4-FFF2-40B4-BE49-F238E27FC236}">
-                <a16:creationId xmlns:a16="http://schemas.microsoft.com/office/drawing/2014/main" id="{C1E1B05F-4ECE-4C1F-9C7C-229762570935}"/>
+                <a16:creationId xmlns:a16="http://schemas.microsoft.com/office/drawing/2014/main" id="{335132A9-55B9-412E-95A4-38970AC33C41}"/>
               </a:ext>
             </a:extLst>
           </p:cNvPr>
@@ -4526,7 +4526,7 @@
           <p:cNvPr id="7" name="">
             <a:extLst xmlns:a="http://schemas.openxmlformats.org/drawingml/2006/main">
               <a:ext uri="{FF2B5EF4-FFF2-40B4-BE49-F238E27FC236}">
-                <a16:creationId xmlns:a16="http://schemas.microsoft.com/office/drawing/2014/main" id="{B364F293-9DC3-40CF-8BB8-0E0F1060128B}"/>
+                <a16:creationId xmlns:a16="http://schemas.microsoft.com/office/drawing/2014/main" id="{C0C60451-3F72-4620-8C23-192211A874AA}"/>
               </a:ext>
             </a:extLst>
           </p:cNvPr>
@@ -4561,7 +4561,7 @@
           <p:cNvPr id="8" name="">
             <a:extLst xmlns:a="http://schemas.openxmlformats.org/drawingml/2006/main">
               <a:ext uri="{FF2B5EF4-FFF2-40B4-BE49-F238E27FC236}">
-                <a16:creationId xmlns:a16="http://schemas.microsoft.com/office/drawing/2014/main" id="{6B004E43-3A65-47BD-9A47-A4DDE766D4C2}"/>
+                <a16:creationId xmlns:a16="http://schemas.microsoft.com/office/drawing/2014/main" id="{79595598-2400-414D-96EA-35D3B5DA00F5}"/>
               </a:ext>
             </a:extLst>
           </p:cNvPr>
@@ -4623,7 +4623,7 @@
           <p:cNvPr id="9" name="">
             <a:extLst xmlns:a="http://schemas.openxmlformats.org/drawingml/2006/main">
               <a:ext uri="{FF2B5EF4-FFF2-40B4-BE49-F238E27FC236}">
-                <a16:creationId xmlns:a16="http://schemas.microsoft.com/office/drawing/2014/main" id="{E07E9FBC-4011-4D99-98B5-27439C00C871}"/>
+                <a16:creationId xmlns:a16="http://schemas.microsoft.com/office/drawing/2014/main" id="{7D191DC0-7461-4A23-BE0C-D7E03C08C4D7}"/>
               </a:ext>
             </a:extLst>
           </p:cNvPr>
@@ -4685,7 +4685,7 @@
           <p:cNvPr id="10" name="">
             <a:extLst xmlns:a="http://schemas.openxmlformats.org/drawingml/2006/main">
               <a:ext uri="{FF2B5EF4-FFF2-40B4-BE49-F238E27FC236}">
-                <a16:creationId xmlns:a16="http://schemas.microsoft.com/office/drawing/2014/main" id="{F1921A69-2618-41A9-9B44-259B8FFCEA1B}"/>
+                <a16:creationId xmlns:a16="http://schemas.microsoft.com/office/drawing/2014/main" id="{8F13A86A-C7B6-4588-89BF-EC73D6BC1F4E}"/>
               </a:ext>
             </a:extLst>
           </p:cNvPr>
@@ -4720,7 +4720,7 @@
           <p:cNvPr id="11" name="">
             <a:extLst xmlns:a="http://schemas.openxmlformats.org/drawingml/2006/main">
               <a:ext uri="{FF2B5EF4-FFF2-40B4-BE49-F238E27FC236}">
-                <a16:creationId xmlns:a16="http://schemas.microsoft.com/office/drawing/2014/main" id="{4ADD0718-031D-4875-9DB0-69B70D5C20A3}"/>
+                <a16:creationId xmlns:a16="http://schemas.microsoft.com/office/drawing/2014/main" id="{198D00E4-1C51-4E6C-B1BF-C0A79E97FB7B}"/>
               </a:ext>
             </a:extLst>
           </p:cNvPr>
@@ -4782,7 +4782,7 @@
           <p:cNvPr id="12" name="">
             <a:extLst xmlns:a="http://schemas.openxmlformats.org/drawingml/2006/main">
               <a:ext uri="{FF2B5EF4-FFF2-40B4-BE49-F238E27FC236}">
-                <a16:creationId xmlns:a16="http://schemas.microsoft.com/office/drawing/2014/main" id="{A4AEDAB5-4F6F-43A0-8838-0F8291AD71EA}"/>
+                <a16:creationId xmlns:a16="http://schemas.microsoft.com/office/drawing/2014/main" id="{2F3E08FD-DF6E-4AE1-9E85-1F84F0D0B7CA}"/>
               </a:ext>
             </a:extLst>
           </p:cNvPr>
@@ -4844,7 +4844,7 @@
           <p:cNvPr id="13" name="">
             <a:extLst xmlns:a="http://schemas.openxmlformats.org/drawingml/2006/main">
               <a:ext uri="{FF2B5EF4-FFF2-40B4-BE49-F238E27FC236}">
-                <a16:creationId xmlns:a16="http://schemas.microsoft.com/office/drawing/2014/main" id="{9E628E7B-6122-47B0-8F67-E1C5B5831E52}"/>
+                <a16:creationId xmlns:a16="http://schemas.microsoft.com/office/drawing/2014/main" id="{427CBC0F-E791-4C0E-B8E4-36DF829FB88D}"/>
               </a:ext>
             </a:extLst>
           </p:cNvPr>
@@ -4906,7 +4906,7 @@
           <p:cNvPr id="14" name="footer-rule-11">
             <a:extLst xmlns:a="http://schemas.openxmlformats.org/drawingml/2006/main">
               <a:ext uri="{FF2B5EF4-FFF2-40B4-BE49-F238E27FC236}">
-                <a16:creationId xmlns:a16="http://schemas.microsoft.com/office/drawing/2014/main" id="{E9ABD196-E7E4-422B-BBF0-AF8E4C9B7CC3}"/>
+                <a16:creationId xmlns:a16="http://schemas.microsoft.com/office/drawing/2014/main" id="{1D978E4F-D044-4D28-B7B4-39094EF17743}"/>
               </a:ext>
             </a:extLst>
           </p:cNvPr>
@@ -4937,7 +4937,7 @@
           <p:cNvPr id="15" name="footer-label-11">
             <a:extLst xmlns:a="http://schemas.openxmlformats.org/drawingml/2006/main">
               <a:ext uri="{FF2B5EF4-FFF2-40B4-BE49-F238E27FC236}">
-                <a16:creationId xmlns:a16="http://schemas.microsoft.com/office/drawing/2014/main" id="{7643C656-B10B-4A4E-A075-D0F3C0426AF3}"/>
+                <a16:creationId xmlns:a16="http://schemas.microsoft.com/office/drawing/2014/main" id="{F987B2AC-F873-4977-A870-B8E3C9EBB196}"/>
               </a:ext>
             </a:extLst>
           </p:cNvPr>
@@ -4999,7 +4999,7 @@
           <p:cNvPr id="16" name="footer-page-11">
             <a:extLst xmlns:a="http://schemas.openxmlformats.org/drawingml/2006/main">
               <a:ext uri="{FF2B5EF4-FFF2-40B4-BE49-F238E27FC236}">
-                <a16:creationId xmlns:a16="http://schemas.microsoft.com/office/drawing/2014/main" id="{826FAD87-AA0A-4858-AEC7-99F66FB2032D}"/>
+                <a16:creationId xmlns:a16="http://schemas.microsoft.com/office/drawing/2014/main" id="{72A7CD5F-BB85-4FF5-AE38-0D65CEF537BF}"/>
               </a:ext>
             </a:extLst>
           </p:cNvPr>
@@ -5059,7 +5059,7 @@
     </p:spTree>
     <p:extLst>
       <p:ext uri="{BB962C8B-B14F-4D97-AF65-F5344CB8AC3E}">
-        <p14:creationId xmlns:p14="http://schemas.microsoft.com/office/powerpoint/2010/main" val="553792054"/>
+        <p14:creationId xmlns:p14="http://schemas.microsoft.com/office/powerpoint/2010/main" val="986047180"/>
       </p:ext>
     </p:extLst>
   </p:cSld>
@@ -5090,7 +5090,7 @@
           <p:cNvPr id="22" name="side-accent-12">
             <a:extLst xmlns:a="http://schemas.openxmlformats.org/drawingml/2006/main">
               <a:ext uri="{FF2B5EF4-FFF2-40B4-BE49-F238E27FC236}">
-                <a16:creationId xmlns:a16="http://schemas.microsoft.com/office/drawing/2014/main" id="{34497D30-5A05-491D-82B1-EC4ED87A2F4F}"/>
+                <a16:creationId xmlns:a16="http://schemas.microsoft.com/office/drawing/2014/main" id="{15D45E8A-2501-4406-A7E6-1D6362ACB077}"/>
               </a:ext>
             </a:extLst>
           </p:cNvPr>
@@ -5121,7 +5121,7 @@
           <p:cNvPr id="2" name="kicker-12">
             <a:extLst xmlns:a="http://schemas.openxmlformats.org/drawingml/2006/main">
               <a:ext uri="{FF2B5EF4-FFF2-40B4-BE49-F238E27FC236}">
-                <a16:creationId xmlns:a16="http://schemas.microsoft.com/office/drawing/2014/main" id="{0F00113A-28AA-4F94-BD5C-25A0C052A2B4}"/>
+                <a16:creationId xmlns:a16="http://schemas.microsoft.com/office/drawing/2014/main" id="{8A008F5B-9626-405A-AEE6-1DADE32C0F6B}"/>
               </a:ext>
             </a:extLst>
           </p:cNvPr>
@@ -5183,7 +5183,7 @@
           <p:cNvPr id="3" name="title-12">
             <a:extLst xmlns:a="http://schemas.openxmlformats.org/drawingml/2006/main">
               <a:ext uri="{FF2B5EF4-FFF2-40B4-BE49-F238E27FC236}">
-                <a16:creationId xmlns:a16="http://schemas.microsoft.com/office/drawing/2014/main" id="{E4643A89-11E9-4187-B1E5-745BD8E586D7}"/>
+                <a16:creationId xmlns:a16="http://schemas.microsoft.com/office/drawing/2014/main" id="{B2F5680F-CE96-4E86-B1FC-110456DCA6BA}"/>
               </a:ext>
             </a:extLst>
           </p:cNvPr>
@@ -5245,7 +5245,7 @@
           <p:cNvPr id="4" name="">
             <a:extLst xmlns:a="http://schemas.openxmlformats.org/drawingml/2006/main">
               <a:ext uri="{FF2B5EF4-FFF2-40B4-BE49-F238E27FC236}">
-                <a16:creationId xmlns:a16="http://schemas.microsoft.com/office/drawing/2014/main" id="{53A0786B-B6BF-416E-8549-D5606928FB7A}"/>
+                <a16:creationId xmlns:a16="http://schemas.microsoft.com/office/drawing/2014/main" id="{CA7444D8-10F7-463B-8025-C78AE5A777FD}"/>
               </a:ext>
             </a:extLst>
           </p:cNvPr>
@@ -5307,7 +5307,7 @@
           <p:cNvPr id="5" name="">
             <a:extLst xmlns:a="http://schemas.openxmlformats.org/drawingml/2006/main">
               <a:ext uri="{FF2B5EF4-FFF2-40B4-BE49-F238E27FC236}">
-                <a16:creationId xmlns:a16="http://schemas.microsoft.com/office/drawing/2014/main" id="{9BF41EF4-E080-49C9-8A67-3FA00FABF5D0}"/>
+                <a16:creationId xmlns:a16="http://schemas.microsoft.com/office/drawing/2014/main" id="{B4D44302-2A4C-432B-B80D-8322295A889D}"/>
               </a:ext>
             </a:extLst>
           </p:cNvPr>
@@ -5338,7 +5338,7 @@
           <p:cNvPr id="6" name="">
             <a:extLst xmlns:a="http://schemas.openxmlformats.org/drawingml/2006/main">
               <a:ext uri="{FF2B5EF4-FFF2-40B4-BE49-F238E27FC236}">
-                <a16:creationId xmlns:a16="http://schemas.microsoft.com/office/drawing/2014/main" id="{BECFEB9F-8375-48A9-ADCA-C31070EF40FE}"/>
+                <a16:creationId xmlns:a16="http://schemas.microsoft.com/office/drawing/2014/main" id="{C31C3C1A-B078-44E2-B864-8BEA8C9CB252}"/>
               </a:ext>
             </a:extLst>
           </p:cNvPr>
@@ -5400,7 +5400,7 @@
           <p:cNvPr id="7" name="">
             <a:extLst xmlns:a="http://schemas.openxmlformats.org/drawingml/2006/main">
               <a:ext uri="{FF2B5EF4-FFF2-40B4-BE49-F238E27FC236}">
-                <a16:creationId xmlns:a16="http://schemas.microsoft.com/office/drawing/2014/main" id="{BB3652E8-E3DB-4599-A70D-1B3028A2C6D4}"/>
+                <a16:creationId xmlns:a16="http://schemas.microsoft.com/office/drawing/2014/main" id="{916AB7CD-0BC9-42CA-B5E4-4DD082280679}"/>
               </a:ext>
             </a:extLst>
           </p:cNvPr>
@@ -5462,7 +5462,7 @@
           <p:cNvPr id="8" name="">
             <a:extLst xmlns:a="http://schemas.openxmlformats.org/drawingml/2006/main">
               <a:ext uri="{FF2B5EF4-FFF2-40B4-BE49-F238E27FC236}">
-                <a16:creationId xmlns:a16="http://schemas.microsoft.com/office/drawing/2014/main" id="{70ADB702-0A07-4BDA-BCCB-AA4A8A4393FE}"/>
+                <a16:creationId xmlns:a16="http://schemas.microsoft.com/office/drawing/2014/main" id="{94D90379-D4A4-4A2E-A1A1-EE8E9E9FB80C}"/>
               </a:ext>
             </a:extLst>
           </p:cNvPr>
@@ -5524,7 +5524,7 @@
           <p:cNvPr id="9" name="">
             <a:extLst xmlns:a="http://schemas.openxmlformats.org/drawingml/2006/main">
               <a:ext uri="{FF2B5EF4-FFF2-40B4-BE49-F238E27FC236}">
-                <a16:creationId xmlns:a16="http://schemas.microsoft.com/office/drawing/2014/main" id="{8F319778-6559-47A3-9941-84D6D695DC9F}"/>
+                <a16:creationId xmlns:a16="http://schemas.microsoft.com/office/drawing/2014/main" id="{FB52B9F4-E4B2-4D9A-B13A-56BCFC00376B}"/>
               </a:ext>
             </a:extLst>
           </p:cNvPr>
@@ -5555,7 +5555,7 @@
           <p:cNvPr id="10" name="">
             <a:extLst xmlns:a="http://schemas.openxmlformats.org/drawingml/2006/main">
               <a:ext uri="{FF2B5EF4-FFF2-40B4-BE49-F238E27FC236}">
-                <a16:creationId xmlns:a16="http://schemas.microsoft.com/office/drawing/2014/main" id="{A4935990-1FC2-4D75-A212-D1E2F3A49B76}"/>
+                <a16:creationId xmlns:a16="http://schemas.microsoft.com/office/drawing/2014/main" id="{25BB954C-EB7D-4055-92C9-D1F307F49BAC}"/>
               </a:ext>
             </a:extLst>
           </p:cNvPr>
@@ -5617,7 +5617,7 @@
           <p:cNvPr id="11" name="">
             <a:extLst xmlns:a="http://schemas.openxmlformats.org/drawingml/2006/main">
               <a:ext uri="{FF2B5EF4-FFF2-40B4-BE49-F238E27FC236}">
-                <a16:creationId xmlns:a16="http://schemas.microsoft.com/office/drawing/2014/main" id="{5B54174F-759A-471C-9719-97D9F21EB2F0}"/>
+                <a16:creationId xmlns:a16="http://schemas.microsoft.com/office/drawing/2014/main" id="{75B1E72B-BE39-4F1F-B8EC-A518751ECC9F}"/>
               </a:ext>
             </a:extLst>
           </p:cNvPr>
@@ -5679,7 +5679,7 @@
           <p:cNvPr id="12" name="">
             <a:extLst xmlns:a="http://schemas.openxmlformats.org/drawingml/2006/main">
               <a:ext uri="{FF2B5EF4-FFF2-40B4-BE49-F238E27FC236}">
-                <a16:creationId xmlns:a16="http://schemas.microsoft.com/office/drawing/2014/main" id="{DF679E60-7348-40B8-A088-4BC7DF6B816A}"/>
+                <a16:creationId xmlns:a16="http://schemas.microsoft.com/office/drawing/2014/main" id="{E9378ED4-B6B6-4C8A-8899-E8952EADADFD}"/>
               </a:ext>
             </a:extLst>
           </p:cNvPr>
@@ -5741,7 +5741,7 @@
           <p:cNvPr id="13" name="">
             <a:extLst xmlns:a="http://schemas.openxmlformats.org/drawingml/2006/main">
               <a:ext uri="{FF2B5EF4-FFF2-40B4-BE49-F238E27FC236}">
-                <a16:creationId xmlns:a16="http://schemas.microsoft.com/office/drawing/2014/main" id="{B493F026-5776-4249-90EC-7CA59585EDF2}"/>
+                <a16:creationId xmlns:a16="http://schemas.microsoft.com/office/drawing/2014/main" id="{98C30533-FB93-4DDE-8448-40CDDAC56669}"/>
               </a:ext>
             </a:extLst>
           </p:cNvPr>
@@ -5772,7 +5772,7 @@
           <p:cNvPr id="14" name="">
             <a:extLst xmlns:a="http://schemas.openxmlformats.org/drawingml/2006/main">
               <a:ext uri="{FF2B5EF4-FFF2-40B4-BE49-F238E27FC236}">
-                <a16:creationId xmlns:a16="http://schemas.microsoft.com/office/drawing/2014/main" id="{312B9042-D320-4C6E-BBA6-FE515125C525}"/>
+                <a16:creationId xmlns:a16="http://schemas.microsoft.com/office/drawing/2014/main" id="{468D02BE-6F1D-45B3-A1A1-54983873559A}"/>
               </a:ext>
             </a:extLst>
           </p:cNvPr>
@@ -5834,7 +5834,7 @@
           <p:cNvPr id="15" name="">
             <a:extLst xmlns:a="http://schemas.openxmlformats.org/drawingml/2006/main">
               <a:ext uri="{FF2B5EF4-FFF2-40B4-BE49-F238E27FC236}">
-                <a16:creationId xmlns:a16="http://schemas.microsoft.com/office/drawing/2014/main" id="{1FF83535-600A-44AF-B0ED-ABAD1C9CC43B}"/>
+                <a16:creationId xmlns:a16="http://schemas.microsoft.com/office/drawing/2014/main" id="{F9B3E6E9-2DE1-4D7E-97F8-FB33D64F2F64}"/>
               </a:ext>
             </a:extLst>
           </p:cNvPr>
@@ -5896,7 +5896,7 @@
           <p:cNvPr id="16" name="">
             <a:extLst xmlns:a="http://schemas.openxmlformats.org/drawingml/2006/main">
               <a:ext uri="{FF2B5EF4-FFF2-40B4-BE49-F238E27FC236}">
-                <a16:creationId xmlns:a16="http://schemas.microsoft.com/office/drawing/2014/main" id="{765E7779-E519-42A6-8AB6-BF933AE8E492}"/>
+                <a16:creationId xmlns:a16="http://schemas.microsoft.com/office/drawing/2014/main" id="{8A026CD0-FEDF-4501-A129-406F826E1D45}"/>
               </a:ext>
             </a:extLst>
           </p:cNvPr>
@@ -5958,7 +5958,7 @@
           <p:cNvPr id="17" name="">
             <a:extLst xmlns:a="http://schemas.openxmlformats.org/drawingml/2006/main">
               <a:ext uri="{FF2B5EF4-FFF2-40B4-BE49-F238E27FC236}">
-                <a16:creationId xmlns:a16="http://schemas.microsoft.com/office/drawing/2014/main" id="{13F61C47-048B-4659-9CDE-20734C7AF3A7}"/>
+                <a16:creationId xmlns:a16="http://schemas.microsoft.com/office/drawing/2014/main" id="{09111116-FC75-4CF7-A852-8B5C96061036}"/>
               </a:ext>
             </a:extLst>
           </p:cNvPr>
@@ -5993,7 +5993,7 @@
           <p:cNvPr id="18" name="">
             <a:extLst xmlns:a="http://schemas.openxmlformats.org/drawingml/2006/main">
               <a:ext uri="{FF2B5EF4-FFF2-40B4-BE49-F238E27FC236}">
-                <a16:creationId xmlns:a16="http://schemas.microsoft.com/office/drawing/2014/main" id="{9B6A4068-18D2-4CB9-9AF8-79DB13929A7D}"/>
+                <a16:creationId xmlns:a16="http://schemas.microsoft.com/office/drawing/2014/main" id="{7F61751A-A068-449C-9CB7-A004761DA31B}"/>
               </a:ext>
             </a:extLst>
           </p:cNvPr>
@@ -6082,7 +6082,7 @@
           <p:cNvPr id="19" name="footer-rule-12">
             <a:extLst xmlns:a="http://schemas.openxmlformats.org/drawingml/2006/main">
               <a:ext uri="{FF2B5EF4-FFF2-40B4-BE49-F238E27FC236}">
-                <a16:creationId xmlns:a16="http://schemas.microsoft.com/office/drawing/2014/main" id="{2CD618FB-069F-49DB-BD68-6856239943E4}"/>
+                <a16:creationId xmlns:a16="http://schemas.microsoft.com/office/drawing/2014/main" id="{4BE828A5-5413-4159-B2C3-AFD7ABB62DDD}"/>
               </a:ext>
             </a:extLst>
           </p:cNvPr>
@@ -6113,7 +6113,7 @@
           <p:cNvPr id="20" name="footer-label-12">
             <a:extLst xmlns:a="http://schemas.openxmlformats.org/drawingml/2006/main">
               <a:ext uri="{FF2B5EF4-FFF2-40B4-BE49-F238E27FC236}">
-                <a16:creationId xmlns:a16="http://schemas.microsoft.com/office/drawing/2014/main" id="{342CD8E6-223D-4082-8337-C2E7F234EE3A}"/>
+                <a16:creationId xmlns:a16="http://schemas.microsoft.com/office/drawing/2014/main" id="{A385CA1A-65B2-4384-BF74-B1BA94D1006C}"/>
               </a:ext>
             </a:extLst>
           </p:cNvPr>
@@ -6175,7 +6175,7 @@
           <p:cNvPr id="21" name="footer-page-12">
             <a:extLst xmlns:a="http://schemas.openxmlformats.org/drawingml/2006/main">
               <a:ext uri="{FF2B5EF4-FFF2-40B4-BE49-F238E27FC236}">
-                <a16:creationId xmlns:a16="http://schemas.microsoft.com/office/drawing/2014/main" id="{CD393119-5A83-49B4-8355-1506BC6E55DD}"/>
+                <a16:creationId xmlns:a16="http://schemas.microsoft.com/office/drawing/2014/main" id="{E609D14E-0D3A-4C2B-B917-CC69B7E7AF8D}"/>
               </a:ext>
             </a:extLst>
           </p:cNvPr>
@@ -6235,7 +6235,7 @@
     </p:spTree>
     <p:extLst>
       <p:ext uri="{BB962C8B-B14F-4D97-AF65-F5344CB8AC3E}">
-        <p14:creationId xmlns:p14="http://schemas.microsoft.com/office/powerpoint/2010/main" val="747459130"/>
+        <p14:creationId xmlns:p14="http://schemas.microsoft.com/office/powerpoint/2010/main" val="1630445470"/>
       </p:ext>
     </p:extLst>
   </p:cSld>
@@ -6266,7 +6266,7 @@
           <p:cNvPr id="14" name="side-accent-13">
             <a:extLst xmlns:a="http://schemas.openxmlformats.org/drawingml/2006/main">
               <a:ext uri="{FF2B5EF4-FFF2-40B4-BE49-F238E27FC236}">
-                <a16:creationId xmlns:a16="http://schemas.microsoft.com/office/drawing/2014/main" id="{FFF088DC-D23D-4F4A-A8CE-F198A0E44EE0}"/>
+                <a16:creationId xmlns:a16="http://schemas.microsoft.com/office/drawing/2014/main" id="{B303436C-DD82-4538-A31E-1016559597D1}"/>
               </a:ext>
             </a:extLst>
           </p:cNvPr>
@@ -6297,7 +6297,7 @@
           <p:cNvPr id="2" name="kicker-13">
             <a:extLst xmlns:a="http://schemas.openxmlformats.org/drawingml/2006/main">
               <a:ext uri="{FF2B5EF4-FFF2-40B4-BE49-F238E27FC236}">
-                <a16:creationId xmlns:a16="http://schemas.microsoft.com/office/drawing/2014/main" id="{852696DD-85D4-49CC-BCA9-CBB9271105D7}"/>
+                <a16:creationId xmlns:a16="http://schemas.microsoft.com/office/drawing/2014/main" id="{8071F922-D666-46F1-8FF7-96D204C5E2BF}"/>
               </a:ext>
             </a:extLst>
           </p:cNvPr>
@@ -6359,7 +6359,7 @@
           <p:cNvPr id="3" name="title-13">
             <a:extLst xmlns:a="http://schemas.openxmlformats.org/drawingml/2006/main">
               <a:ext uri="{FF2B5EF4-FFF2-40B4-BE49-F238E27FC236}">
-                <a16:creationId xmlns:a16="http://schemas.microsoft.com/office/drawing/2014/main" id="{E0FD8368-EBCA-4091-B5B7-E437C97FD10C}"/>
+                <a16:creationId xmlns:a16="http://schemas.microsoft.com/office/drawing/2014/main" id="{981D7247-2A11-4014-8226-D0EDB2CD8FD3}"/>
               </a:ext>
             </a:extLst>
           </p:cNvPr>
@@ -6421,7 +6421,7 @@
           <p:cNvPr id="4" name="draft-panel">
             <a:extLst xmlns:a="http://schemas.openxmlformats.org/drawingml/2006/main">
               <a:ext uri="{FF2B5EF4-FFF2-40B4-BE49-F238E27FC236}">
-                <a16:creationId xmlns:a16="http://schemas.microsoft.com/office/drawing/2014/main" id="{87F3BA45-35FB-4F24-AA50-631FA3CAB884}"/>
+                <a16:creationId xmlns:a16="http://schemas.microsoft.com/office/drawing/2014/main" id="{5ED48E0A-51C6-43D7-B128-A0F0ED9EEBFE}"/>
               </a:ext>
             </a:extLst>
           </p:cNvPr>
@@ -6456,7 +6456,7 @@
           <p:cNvPr id="5" name="">
             <a:extLst xmlns:a="http://schemas.openxmlformats.org/drawingml/2006/main">
               <a:ext uri="{FF2B5EF4-FFF2-40B4-BE49-F238E27FC236}">
-                <a16:creationId xmlns:a16="http://schemas.microsoft.com/office/drawing/2014/main" id="{060E530D-66C6-4DB7-923B-6C04662481C3}"/>
+                <a16:creationId xmlns:a16="http://schemas.microsoft.com/office/drawing/2014/main" id="{3EC187E8-696C-4F9B-91D7-BE1B14C8AB7B}"/>
               </a:ext>
             </a:extLst>
           </p:cNvPr>
@@ -6518,7 +6518,7 @@
           <p:cNvPr id="6" name="">
             <a:extLst xmlns:a="http://schemas.openxmlformats.org/drawingml/2006/main">
               <a:ext uri="{FF2B5EF4-FFF2-40B4-BE49-F238E27FC236}">
-                <a16:creationId xmlns:a16="http://schemas.microsoft.com/office/drawing/2014/main" id="{647559C2-3D37-400E-AE06-FA704808DBB9}"/>
+                <a16:creationId xmlns:a16="http://schemas.microsoft.com/office/drawing/2014/main" id="{9FFC9DBC-A89A-4854-A5F6-F8FAB76DB95A}"/>
               </a:ext>
             </a:extLst>
           </p:cNvPr>
@@ -6634,7 +6634,7 @@
           <p:cNvPr id="7" name="submit-panel">
             <a:extLst xmlns:a="http://schemas.openxmlformats.org/drawingml/2006/main">
               <a:ext uri="{FF2B5EF4-FFF2-40B4-BE49-F238E27FC236}">
-                <a16:creationId xmlns:a16="http://schemas.microsoft.com/office/drawing/2014/main" id="{1B8812DB-DC3C-4FF5-A3AE-BB651C99C8E9}"/>
+                <a16:creationId xmlns:a16="http://schemas.microsoft.com/office/drawing/2014/main" id="{C53FF3CB-ED44-4E15-96AF-B1C603806225}"/>
               </a:ext>
             </a:extLst>
           </p:cNvPr>
@@ -6669,7 +6669,7 @@
           <p:cNvPr id="8" name="">
             <a:extLst xmlns:a="http://schemas.openxmlformats.org/drawingml/2006/main">
               <a:ext uri="{FF2B5EF4-FFF2-40B4-BE49-F238E27FC236}">
-                <a16:creationId xmlns:a16="http://schemas.microsoft.com/office/drawing/2014/main" id="{8A4E77A1-077A-4F59-A3CA-29A76BAAD79B}"/>
+                <a16:creationId xmlns:a16="http://schemas.microsoft.com/office/drawing/2014/main" id="{F2930B45-0DE8-430E-9727-B71AF6DC664E}"/>
               </a:ext>
             </a:extLst>
           </p:cNvPr>
@@ -6731,7 +6731,7 @@
           <p:cNvPr id="9" name="">
             <a:extLst xmlns:a="http://schemas.openxmlformats.org/drawingml/2006/main">
               <a:ext uri="{FF2B5EF4-FFF2-40B4-BE49-F238E27FC236}">
-                <a16:creationId xmlns:a16="http://schemas.microsoft.com/office/drawing/2014/main" id="{9A007380-6CA0-4BC2-9099-F3E4B6729A64}"/>
+                <a16:creationId xmlns:a16="http://schemas.microsoft.com/office/drawing/2014/main" id="{745913D8-DD23-4F80-8B4C-CFBFE9916FD6}"/>
               </a:ext>
             </a:extLst>
           </p:cNvPr>
@@ -6847,7 +6847,7 @@
           <p:cNvPr id="10" name="">
             <a:extLst xmlns:a="http://schemas.openxmlformats.org/drawingml/2006/main">
               <a:ext uri="{FF2B5EF4-FFF2-40B4-BE49-F238E27FC236}">
-                <a16:creationId xmlns:a16="http://schemas.microsoft.com/office/drawing/2014/main" id="{90B7041F-EC69-4619-B1D8-A7E2CC395DBD}"/>
+                <a16:creationId xmlns:a16="http://schemas.microsoft.com/office/drawing/2014/main" id="{41C64BD5-A410-4703-BA28-65A8AFA5FB3F}"/>
               </a:ext>
             </a:extLst>
           </p:cNvPr>
@@ -6909,7 +6909,7 @@
           <p:cNvPr id="11" name="footer-rule-13">
             <a:extLst xmlns:a="http://schemas.openxmlformats.org/drawingml/2006/main">
               <a:ext uri="{FF2B5EF4-FFF2-40B4-BE49-F238E27FC236}">
-                <a16:creationId xmlns:a16="http://schemas.microsoft.com/office/drawing/2014/main" id="{7006110A-2E02-462E-A33D-505FC363E3DF}"/>
+                <a16:creationId xmlns:a16="http://schemas.microsoft.com/office/drawing/2014/main" id="{EBF8DC0E-A088-4E8E-A3B9-33351C76C091}"/>
               </a:ext>
             </a:extLst>
           </p:cNvPr>
@@ -6940,7 +6940,7 @@
           <p:cNvPr id="12" name="footer-label-13">
             <a:extLst xmlns:a="http://schemas.openxmlformats.org/drawingml/2006/main">
               <a:ext uri="{FF2B5EF4-FFF2-40B4-BE49-F238E27FC236}">
-                <a16:creationId xmlns:a16="http://schemas.microsoft.com/office/drawing/2014/main" id="{31797E09-0538-4BA2-A86D-363293D6078B}"/>
+                <a16:creationId xmlns:a16="http://schemas.microsoft.com/office/drawing/2014/main" id="{EF3AAD65-7342-43B4-8410-6EAABF719D97}"/>
               </a:ext>
             </a:extLst>
           </p:cNvPr>
@@ -7002,7 +7002,7 @@
           <p:cNvPr id="13" name="footer-page-13">
             <a:extLst xmlns:a="http://schemas.openxmlformats.org/drawingml/2006/main">
               <a:ext uri="{FF2B5EF4-FFF2-40B4-BE49-F238E27FC236}">
-                <a16:creationId xmlns:a16="http://schemas.microsoft.com/office/drawing/2014/main" id="{9D9DDF95-3894-411B-A9D6-1714FF14B4F7}"/>
+                <a16:creationId xmlns:a16="http://schemas.microsoft.com/office/drawing/2014/main" id="{5B9D7F3D-A36D-4CC1-86CE-96C3A2D11F71}"/>
               </a:ext>
             </a:extLst>
           </p:cNvPr>
@@ -7062,7 +7062,7 @@
     </p:spTree>
     <p:extLst>
       <p:ext uri="{BB962C8B-B14F-4D97-AF65-F5344CB8AC3E}">
-        <p14:creationId xmlns:p14="http://schemas.microsoft.com/office/powerpoint/2010/main" val="783152197"/>
+        <p14:creationId xmlns:p14="http://schemas.microsoft.com/office/powerpoint/2010/main" val="1999503192"/>
       </p:ext>
     </p:extLst>
   </p:cSld>
@@ -7093,7 +7093,7 @@
           <p:cNvPr id="25" name="side-accent-14">
             <a:extLst xmlns:a="http://schemas.openxmlformats.org/drawingml/2006/main">
               <a:ext uri="{FF2B5EF4-FFF2-40B4-BE49-F238E27FC236}">
-                <a16:creationId xmlns:a16="http://schemas.microsoft.com/office/drawing/2014/main" id="{42EE8B4B-DB37-4D4C-8DCD-6B41D093658C}"/>
+                <a16:creationId xmlns:a16="http://schemas.microsoft.com/office/drawing/2014/main" id="{514D1999-2AC5-4204-9236-BCF6F13FE27A}"/>
               </a:ext>
             </a:extLst>
           </p:cNvPr>
@@ -7124,7 +7124,7 @@
           <p:cNvPr id="2" name="kicker-14">
             <a:extLst xmlns:a="http://schemas.openxmlformats.org/drawingml/2006/main">
               <a:ext uri="{FF2B5EF4-FFF2-40B4-BE49-F238E27FC236}">
-                <a16:creationId xmlns:a16="http://schemas.microsoft.com/office/drawing/2014/main" id="{F64C1AB2-D7FD-4999-859F-34E99142BDF6}"/>
+                <a16:creationId xmlns:a16="http://schemas.microsoft.com/office/drawing/2014/main" id="{965BD65F-216E-4393-9EC3-240CFEB97AEA}"/>
               </a:ext>
             </a:extLst>
           </p:cNvPr>
@@ -7186,7 +7186,7 @@
           <p:cNvPr id="3" name="title-14">
             <a:extLst xmlns:a="http://schemas.openxmlformats.org/drawingml/2006/main">
               <a:ext uri="{FF2B5EF4-FFF2-40B4-BE49-F238E27FC236}">
-                <a16:creationId xmlns:a16="http://schemas.microsoft.com/office/drawing/2014/main" id="{799ACAFE-9E30-4ED2-A4A1-37391C824973}"/>
+                <a16:creationId xmlns:a16="http://schemas.microsoft.com/office/drawing/2014/main" id="{E75FCB45-8F61-4D6E-AA02-F4A2C82363E4}"/>
               </a:ext>
             </a:extLst>
           </p:cNvPr>
@@ -7248,7 +7248,7 @@
           <p:cNvPr id="4" name="">
             <a:extLst xmlns:a="http://schemas.openxmlformats.org/drawingml/2006/main">
               <a:ext uri="{FF2B5EF4-FFF2-40B4-BE49-F238E27FC236}">
-                <a16:creationId xmlns:a16="http://schemas.microsoft.com/office/drawing/2014/main" id="{4A114CCC-332D-440B-ABDC-CB692BD392DE}"/>
+                <a16:creationId xmlns:a16="http://schemas.microsoft.com/office/drawing/2014/main" id="{1EFEF300-1B2A-44E2-8FF6-A6B382AD2E5E}"/>
               </a:ext>
             </a:extLst>
           </p:cNvPr>
@@ -7279,7 +7279,7 @@
           <p:cNvPr id="5" name="">
             <a:extLst xmlns:a="http://schemas.openxmlformats.org/drawingml/2006/main">
               <a:ext uri="{FF2B5EF4-FFF2-40B4-BE49-F238E27FC236}">
-                <a16:creationId xmlns:a16="http://schemas.microsoft.com/office/drawing/2014/main" id="{8EB47E8D-F6C4-444F-99D5-39393956FB3D}"/>
+                <a16:creationId xmlns:a16="http://schemas.microsoft.com/office/drawing/2014/main" id="{D966EE29-FBE4-4F17-9624-45CF81453995}"/>
               </a:ext>
             </a:extLst>
           </p:cNvPr>
@@ -7310,7 +7310,7 @@
           <p:cNvPr id="6" name="">
             <a:extLst xmlns:a="http://schemas.openxmlformats.org/drawingml/2006/main">
               <a:ext uri="{FF2B5EF4-FFF2-40B4-BE49-F238E27FC236}">
-                <a16:creationId xmlns:a16="http://schemas.microsoft.com/office/drawing/2014/main" id="{E7FA2D50-0604-4F85-BD1D-55514D750699}"/>
+                <a16:creationId xmlns:a16="http://schemas.microsoft.com/office/drawing/2014/main" id="{C41BD189-14BA-4EF2-8E88-D797AA5BDD0E}"/>
               </a:ext>
             </a:extLst>
           </p:cNvPr>
@@ -7372,7 +7372,7 @@
           <p:cNvPr id="7" name="">
             <a:extLst xmlns:a="http://schemas.openxmlformats.org/drawingml/2006/main">
               <a:ext uri="{FF2B5EF4-FFF2-40B4-BE49-F238E27FC236}">
-                <a16:creationId xmlns:a16="http://schemas.microsoft.com/office/drawing/2014/main" id="{59B8A1B6-12D4-454B-8F96-0650E46981CB}"/>
+                <a16:creationId xmlns:a16="http://schemas.microsoft.com/office/drawing/2014/main" id="{2F94B0E5-6652-48B3-9E3F-D625A2D75EC1}"/>
               </a:ext>
             </a:extLst>
           </p:cNvPr>
@@ -7434,7 +7434,7 @@
           <p:cNvPr id="8" name="">
             <a:extLst xmlns:a="http://schemas.openxmlformats.org/drawingml/2006/main">
               <a:ext uri="{FF2B5EF4-FFF2-40B4-BE49-F238E27FC236}">
-                <a16:creationId xmlns:a16="http://schemas.microsoft.com/office/drawing/2014/main" id="{EC2DE42A-0BD4-4B67-A69B-1473847E52DA}"/>
+                <a16:creationId xmlns:a16="http://schemas.microsoft.com/office/drawing/2014/main" id="{E6E3F96B-5512-458E-B04C-FAA49FF5902C}"/>
               </a:ext>
             </a:extLst>
           </p:cNvPr>
@@ -7496,7 +7496,7 @@
           <p:cNvPr id="9" name="">
             <a:extLst xmlns:a="http://schemas.openxmlformats.org/drawingml/2006/main">
               <a:ext uri="{FF2B5EF4-FFF2-40B4-BE49-F238E27FC236}">
-                <a16:creationId xmlns:a16="http://schemas.microsoft.com/office/drawing/2014/main" id="{819F3B2A-2F37-4785-97FE-BCEFF6EFF977}"/>
+                <a16:creationId xmlns:a16="http://schemas.microsoft.com/office/drawing/2014/main" id="{3088EAF8-7721-473C-872E-95CA71A126B9}"/>
               </a:ext>
             </a:extLst>
           </p:cNvPr>
@@ -7527,7 +7527,7 @@
           <p:cNvPr id="10" name="">
             <a:extLst xmlns:a="http://schemas.openxmlformats.org/drawingml/2006/main">
               <a:ext uri="{FF2B5EF4-FFF2-40B4-BE49-F238E27FC236}">
-                <a16:creationId xmlns:a16="http://schemas.microsoft.com/office/drawing/2014/main" id="{497CC56D-1118-4ED0-8E2A-1E4F84C3AC65}"/>
+                <a16:creationId xmlns:a16="http://schemas.microsoft.com/office/drawing/2014/main" id="{2D3389AD-C2FE-4767-A53D-454637FED440}"/>
               </a:ext>
             </a:extLst>
           </p:cNvPr>
@@ -7589,7 +7589,7 @@
           <p:cNvPr id="11" name="">
             <a:extLst xmlns:a="http://schemas.openxmlformats.org/drawingml/2006/main">
               <a:ext uri="{FF2B5EF4-FFF2-40B4-BE49-F238E27FC236}">
-                <a16:creationId xmlns:a16="http://schemas.microsoft.com/office/drawing/2014/main" id="{F6B5E49C-248E-4096-A81F-E31F4A10DD2E}"/>
+                <a16:creationId xmlns:a16="http://schemas.microsoft.com/office/drawing/2014/main" id="{5F6FFFB9-DA00-4280-B1FA-F39DD44E45EA}"/>
               </a:ext>
             </a:extLst>
           </p:cNvPr>
@@ -7651,7 +7651,7 @@
           <p:cNvPr id="12" name="">
             <a:extLst xmlns:a="http://schemas.openxmlformats.org/drawingml/2006/main">
               <a:ext uri="{FF2B5EF4-FFF2-40B4-BE49-F238E27FC236}">
-                <a16:creationId xmlns:a16="http://schemas.microsoft.com/office/drawing/2014/main" id="{440F1FBF-D6E0-45C3-B9EA-CF3D6B2966BC}"/>
+                <a16:creationId xmlns:a16="http://schemas.microsoft.com/office/drawing/2014/main" id="{7FB50698-D17A-4B14-96EA-A2338F1DE268}"/>
               </a:ext>
             </a:extLst>
           </p:cNvPr>
@@ -7713,7 +7713,7 @@
           <p:cNvPr id="13" name="">
             <a:extLst xmlns:a="http://schemas.openxmlformats.org/drawingml/2006/main">
               <a:ext uri="{FF2B5EF4-FFF2-40B4-BE49-F238E27FC236}">
-                <a16:creationId xmlns:a16="http://schemas.microsoft.com/office/drawing/2014/main" id="{23332536-0F24-4C6B-9EB6-33532F503419}"/>
+                <a16:creationId xmlns:a16="http://schemas.microsoft.com/office/drawing/2014/main" id="{643965EC-1632-4220-BDB3-08D9FF9E8CE1}"/>
               </a:ext>
             </a:extLst>
           </p:cNvPr>
@@ -7744,7 +7744,7 @@
           <p:cNvPr id="14" name="">
             <a:extLst xmlns:a="http://schemas.openxmlformats.org/drawingml/2006/main">
               <a:ext uri="{FF2B5EF4-FFF2-40B4-BE49-F238E27FC236}">
-                <a16:creationId xmlns:a16="http://schemas.microsoft.com/office/drawing/2014/main" id="{9084DDF8-E0DB-434F-A0F7-AA7276EBD07B}"/>
+                <a16:creationId xmlns:a16="http://schemas.microsoft.com/office/drawing/2014/main" id="{223210D2-2470-4D04-B903-726AB2F347E8}"/>
               </a:ext>
             </a:extLst>
           </p:cNvPr>
@@ -7806,7 +7806,7 @@
           <p:cNvPr id="15" name="">
             <a:extLst xmlns:a="http://schemas.openxmlformats.org/drawingml/2006/main">
               <a:ext uri="{FF2B5EF4-FFF2-40B4-BE49-F238E27FC236}">
-                <a16:creationId xmlns:a16="http://schemas.microsoft.com/office/drawing/2014/main" id="{A9B1D412-5D3E-4D73-83D5-37E95C48CC72}"/>
+                <a16:creationId xmlns:a16="http://schemas.microsoft.com/office/drawing/2014/main" id="{8A99CC96-9277-44D3-97B3-E92AD506CD5D}"/>
               </a:ext>
             </a:extLst>
           </p:cNvPr>
@@ -7868,7 +7868,7 @@
           <p:cNvPr id="16" name="">
             <a:extLst xmlns:a="http://schemas.openxmlformats.org/drawingml/2006/main">
               <a:ext uri="{FF2B5EF4-FFF2-40B4-BE49-F238E27FC236}">
-                <a16:creationId xmlns:a16="http://schemas.microsoft.com/office/drawing/2014/main" id="{2BD89918-947B-45B8-827B-4BF7A8225708}"/>
+                <a16:creationId xmlns:a16="http://schemas.microsoft.com/office/drawing/2014/main" id="{D691A9A2-5D7C-4E5D-A403-21BCA74E0A08}"/>
               </a:ext>
             </a:extLst>
           </p:cNvPr>
@@ -7930,7 +7930,7 @@
           <p:cNvPr id="17" name="">
             <a:extLst xmlns:a="http://schemas.openxmlformats.org/drawingml/2006/main">
               <a:ext uri="{FF2B5EF4-FFF2-40B4-BE49-F238E27FC236}">
-                <a16:creationId xmlns:a16="http://schemas.microsoft.com/office/drawing/2014/main" id="{BEBB22F1-087A-440B-B66C-692D877720BD}"/>
+                <a16:creationId xmlns:a16="http://schemas.microsoft.com/office/drawing/2014/main" id="{D9B7D1CE-373E-43C5-B864-23D615344079}"/>
               </a:ext>
             </a:extLst>
           </p:cNvPr>
@@ -7961,7 +7961,7 @@
           <p:cNvPr id="18" name="">
             <a:extLst xmlns:a="http://schemas.openxmlformats.org/drawingml/2006/main">
               <a:ext uri="{FF2B5EF4-FFF2-40B4-BE49-F238E27FC236}">
-                <a16:creationId xmlns:a16="http://schemas.microsoft.com/office/drawing/2014/main" id="{46C6D49F-0095-43A3-8F34-B3B66B3197CA}"/>
+                <a16:creationId xmlns:a16="http://schemas.microsoft.com/office/drawing/2014/main" id="{CFB387BF-270D-4780-8889-47473AE740DC}"/>
               </a:ext>
             </a:extLst>
           </p:cNvPr>
@@ -8023,7 +8023,7 @@
           <p:cNvPr id="19" name="">
             <a:extLst xmlns:a="http://schemas.openxmlformats.org/drawingml/2006/main">
               <a:ext uri="{FF2B5EF4-FFF2-40B4-BE49-F238E27FC236}">
-                <a16:creationId xmlns:a16="http://schemas.microsoft.com/office/drawing/2014/main" id="{89D05720-DEB5-4308-8CFB-9D150B842DCF}"/>
+                <a16:creationId xmlns:a16="http://schemas.microsoft.com/office/drawing/2014/main" id="{D216FF06-67D2-45E8-82D5-591F1BDA37C5}"/>
               </a:ext>
             </a:extLst>
           </p:cNvPr>
@@ -8085,7 +8085,7 @@
           <p:cNvPr id="20" name="">
             <a:extLst xmlns:a="http://schemas.openxmlformats.org/drawingml/2006/main">
               <a:ext uri="{FF2B5EF4-FFF2-40B4-BE49-F238E27FC236}">
-                <a16:creationId xmlns:a16="http://schemas.microsoft.com/office/drawing/2014/main" id="{1C9AD511-F53F-454D-8A3C-2FC8E6BCB918}"/>
+                <a16:creationId xmlns:a16="http://schemas.microsoft.com/office/drawing/2014/main" id="{85C74093-EF81-40AC-A58A-6913BB1AC0AD}"/>
               </a:ext>
             </a:extLst>
           </p:cNvPr>
@@ -8147,7 +8147,7 @@
           <p:cNvPr id="21" name="">
             <a:extLst xmlns:a="http://schemas.openxmlformats.org/drawingml/2006/main">
               <a:ext uri="{FF2B5EF4-FFF2-40B4-BE49-F238E27FC236}">
-                <a16:creationId xmlns:a16="http://schemas.microsoft.com/office/drawing/2014/main" id="{86506098-2C59-4865-8476-D1FFEA09617F}"/>
+                <a16:creationId xmlns:a16="http://schemas.microsoft.com/office/drawing/2014/main" id="{596DCA1C-7C65-44E1-BAAF-3E0DE4CBCA59}"/>
               </a:ext>
             </a:extLst>
           </p:cNvPr>
@@ -8209,7 +8209,7 @@
           <p:cNvPr id="22" name="footer-rule-14">
             <a:extLst xmlns:a="http://schemas.openxmlformats.org/drawingml/2006/main">
               <a:ext uri="{FF2B5EF4-FFF2-40B4-BE49-F238E27FC236}">
-                <a16:creationId xmlns:a16="http://schemas.microsoft.com/office/drawing/2014/main" id="{140E962A-2388-465E-B512-DCF9E45A971B}"/>
+                <a16:creationId xmlns:a16="http://schemas.microsoft.com/office/drawing/2014/main" id="{86F17661-B8CA-45E0-9B72-C20B948D0E64}"/>
               </a:ext>
             </a:extLst>
           </p:cNvPr>
@@ -8240,7 +8240,7 @@
           <p:cNvPr id="23" name="footer-label-14">
             <a:extLst xmlns:a="http://schemas.openxmlformats.org/drawingml/2006/main">
               <a:ext uri="{FF2B5EF4-FFF2-40B4-BE49-F238E27FC236}">
-                <a16:creationId xmlns:a16="http://schemas.microsoft.com/office/drawing/2014/main" id="{5E499253-76C6-4951-BFDA-DC2CF121EFA0}"/>
+                <a16:creationId xmlns:a16="http://schemas.microsoft.com/office/drawing/2014/main" id="{5316F99E-BF64-422B-9E99-92ED1B5B0887}"/>
               </a:ext>
             </a:extLst>
           </p:cNvPr>
@@ -8302,7 +8302,7 @@
           <p:cNvPr id="24" name="footer-page-14">
             <a:extLst xmlns:a="http://schemas.openxmlformats.org/drawingml/2006/main">
               <a:ext uri="{FF2B5EF4-FFF2-40B4-BE49-F238E27FC236}">
-                <a16:creationId xmlns:a16="http://schemas.microsoft.com/office/drawing/2014/main" id="{9E53EBE9-FB56-424A-8D2C-B19869ECB347}"/>
+                <a16:creationId xmlns:a16="http://schemas.microsoft.com/office/drawing/2014/main" id="{F42258C3-517E-4873-89E9-6B4E13C733FC}"/>
               </a:ext>
             </a:extLst>
           </p:cNvPr>
@@ -8362,7 +8362,7 @@
     </p:spTree>
     <p:extLst>
       <p:ext uri="{BB962C8B-B14F-4D97-AF65-F5344CB8AC3E}">
-        <p14:creationId xmlns:p14="http://schemas.microsoft.com/office/powerpoint/2010/main" val="1953223147"/>
+        <p14:creationId xmlns:p14="http://schemas.microsoft.com/office/powerpoint/2010/main" val="863258442"/>
       </p:ext>
     </p:extLst>
   </p:cSld>
@@ -8393,7 +8393,7 @@
           <p:cNvPr id="24" name="side-accent-15">
             <a:extLst xmlns:a="http://schemas.openxmlformats.org/drawingml/2006/main">
               <a:ext uri="{FF2B5EF4-FFF2-40B4-BE49-F238E27FC236}">
-                <a16:creationId xmlns:a16="http://schemas.microsoft.com/office/drawing/2014/main" id="{63743A58-A05A-4C7F-AB32-201DD63F896E}"/>
+                <a16:creationId xmlns:a16="http://schemas.microsoft.com/office/drawing/2014/main" id="{52D51099-D3A0-4EC8-864A-ECE7AF4DDAA7}"/>
               </a:ext>
             </a:extLst>
           </p:cNvPr>
@@ -8424,7 +8424,7 @@
           <p:cNvPr id="2" name="kicker-15">
             <a:extLst xmlns:a="http://schemas.openxmlformats.org/drawingml/2006/main">
               <a:ext uri="{FF2B5EF4-FFF2-40B4-BE49-F238E27FC236}">
-                <a16:creationId xmlns:a16="http://schemas.microsoft.com/office/drawing/2014/main" id="{27F755BA-4E42-42D2-8565-BC0C58DF07AE}"/>
+                <a16:creationId xmlns:a16="http://schemas.microsoft.com/office/drawing/2014/main" id="{5A6829F8-BCD3-41A6-8FD0-AFF17A8DA568}"/>
               </a:ext>
             </a:extLst>
           </p:cNvPr>
@@ -8486,7 +8486,7 @@
           <p:cNvPr id="3" name="title-15">
             <a:extLst xmlns:a="http://schemas.openxmlformats.org/drawingml/2006/main">
               <a:ext uri="{FF2B5EF4-FFF2-40B4-BE49-F238E27FC236}">
-                <a16:creationId xmlns:a16="http://schemas.microsoft.com/office/drawing/2014/main" id="{337DF264-8EA0-4B91-A481-4BA9F8A64015}"/>
+                <a16:creationId xmlns:a16="http://schemas.microsoft.com/office/drawing/2014/main" id="{DB76418F-F629-4331-8698-D34885938CEA}"/>
               </a:ext>
             </a:extLst>
           </p:cNvPr>
@@ -8548,7 +8548,7 @@
           <p:cNvPr id="4" name="">
             <a:extLst xmlns:a="http://schemas.openxmlformats.org/drawingml/2006/main">
               <a:ext uri="{FF2B5EF4-FFF2-40B4-BE49-F238E27FC236}">
-                <a16:creationId xmlns:a16="http://schemas.microsoft.com/office/drawing/2014/main" id="{92720645-9FFD-4F8C-A7D6-6EA1AA818D95}"/>
+                <a16:creationId xmlns:a16="http://schemas.microsoft.com/office/drawing/2014/main" id="{54E41881-C3D3-4133-A4BB-C537BF967073}"/>
               </a:ext>
             </a:extLst>
           </p:cNvPr>
@@ -8610,7 +8610,7 @@
           <p:cNvPr id="5" name="">
             <a:extLst xmlns:a="http://schemas.openxmlformats.org/drawingml/2006/main">
               <a:ext uri="{FF2B5EF4-FFF2-40B4-BE49-F238E27FC236}">
-                <a16:creationId xmlns:a16="http://schemas.microsoft.com/office/drawing/2014/main" id="{9DCF6B4B-26FC-4912-AEA6-4855C3BD9108}"/>
+                <a16:creationId xmlns:a16="http://schemas.microsoft.com/office/drawing/2014/main" id="{A623F97E-6FB7-4EC5-AD71-61F5EBE71A02}"/>
               </a:ext>
             </a:extLst>
           </p:cNvPr>
@@ -8672,7 +8672,7 @@
           <p:cNvPr id="6" name="">
             <a:extLst xmlns:a="http://schemas.openxmlformats.org/drawingml/2006/main">
               <a:ext uri="{FF2B5EF4-FFF2-40B4-BE49-F238E27FC236}">
-                <a16:creationId xmlns:a16="http://schemas.microsoft.com/office/drawing/2014/main" id="{669BBFB4-A09C-49C7-BC33-FAB832C15257}"/>
+                <a16:creationId xmlns:a16="http://schemas.microsoft.com/office/drawing/2014/main" id="{D4B3055F-0BCB-45D1-AD6D-59A1A9192B3D}"/>
               </a:ext>
             </a:extLst>
           </p:cNvPr>
@@ -8734,7 +8734,7 @@
           <p:cNvPr id="7" name="">
             <a:extLst xmlns:a="http://schemas.openxmlformats.org/drawingml/2006/main">
               <a:ext uri="{FF2B5EF4-FFF2-40B4-BE49-F238E27FC236}">
-                <a16:creationId xmlns:a16="http://schemas.microsoft.com/office/drawing/2014/main" id="{FE0F08AC-7555-4649-BC23-6B71E773CDB4}"/>
+                <a16:creationId xmlns:a16="http://schemas.microsoft.com/office/drawing/2014/main" id="{DC2F1112-12D9-4766-884D-CD8F80E548F4}"/>
               </a:ext>
             </a:extLst>
           </p:cNvPr>
@@ -8765,7 +8765,7 @@
           <p:cNvPr id="8" name="">
             <a:extLst xmlns:a="http://schemas.openxmlformats.org/drawingml/2006/main">
               <a:ext uri="{FF2B5EF4-FFF2-40B4-BE49-F238E27FC236}">
-                <a16:creationId xmlns:a16="http://schemas.microsoft.com/office/drawing/2014/main" id="{83A15885-4501-4135-BC0A-9A471A4E205F}"/>
+                <a16:creationId xmlns:a16="http://schemas.microsoft.com/office/drawing/2014/main" id="{3EECE8C8-549A-4297-A601-0926A1EFB058}"/>
               </a:ext>
             </a:extLst>
           </p:cNvPr>
@@ -8827,7 +8827,7 @@
           <p:cNvPr id="9" name="">
             <a:extLst xmlns:a="http://schemas.openxmlformats.org/drawingml/2006/main">
               <a:ext uri="{FF2B5EF4-FFF2-40B4-BE49-F238E27FC236}">
-                <a16:creationId xmlns:a16="http://schemas.microsoft.com/office/drawing/2014/main" id="{BD69768B-821A-4AF1-AA92-7F9927A38682}"/>
+                <a16:creationId xmlns:a16="http://schemas.microsoft.com/office/drawing/2014/main" id="{2622D0D9-F515-4F45-B488-7B0BD98D1622}"/>
               </a:ext>
             </a:extLst>
           </p:cNvPr>
@@ -8889,7 +8889,7 @@
           <p:cNvPr id="10" name="">
             <a:extLst xmlns:a="http://schemas.openxmlformats.org/drawingml/2006/main">
               <a:ext uri="{FF2B5EF4-FFF2-40B4-BE49-F238E27FC236}">
-                <a16:creationId xmlns:a16="http://schemas.microsoft.com/office/drawing/2014/main" id="{C918CEC7-5F1D-4F98-8132-E5966C8EB67A}"/>
+                <a16:creationId xmlns:a16="http://schemas.microsoft.com/office/drawing/2014/main" id="{5D96053C-AE95-416E-A199-A836F6944483}"/>
               </a:ext>
             </a:extLst>
           </p:cNvPr>
@@ -8951,7 +8951,7 @@
           <p:cNvPr id="11" name="">
             <a:extLst xmlns:a="http://schemas.openxmlformats.org/drawingml/2006/main">
               <a:ext uri="{FF2B5EF4-FFF2-40B4-BE49-F238E27FC236}">
-                <a16:creationId xmlns:a16="http://schemas.microsoft.com/office/drawing/2014/main" id="{8393DB01-35DE-4B3A-8EF7-4A6A8D8FF495}"/>
+                <a16:creationId xmlns:a16="http://schemas.microsoft.com/office/drawing/2014/main" id="{55686EB3-E01E-4634-92D4-991878E7C2A7}"/>
               </a:ext>
             </a:extLst>
           </p:cNvPr>
@@ -8982,7 +8982,7 @@
           <p:cNvPr id="12" name="">
             <a:extLst xmlns:a="http://schemas.openxmlformats.org/drawingml/2006/main">
               <a:ext uri="{FF2B5EF4-FFF2-40B4-BE49-F238E27FC236}">
-                <a16:creationId xmlns:a16="http://schemas.microsoft.com/office/drawing/2014/main" id="{08D82C35-FA2C-4E4F-840C-B000D15647F0}"/>
+                <a16:creationId xmlns:a16="http://schemas.microsoft.com/office/drawing/2014/main" id="{EF3D8C0D-7FBA-42A8-8901-975C7F336161}"/>
               </a:ext>
             </a:extLst>
           </p:cNvPr>
@@ -9044,7 +9044,7 @@
           <p:cNvPr id="13" name="">
             <a:extLst xmlns:a="http://schemas.openxmlformats.org/drawingml/2006/main">
               <a:ext uri="{FF2B5EF4-FFF2-40B4-BE49-F238E27FC236}">
-                <a16:creationId xmlns:a16="http://schemas.microsoft.com/office/drawing/2014/main" id="{FBAC9BA5-6AB3-4C4E-94C6-593511630B4F}"/>
+                <a16:creationId xmlns:a16="http://schemas.microsoft.com/office/drawing/2014/main" id="{A9F46E54-1BB0-498F-916E-4D15CAD81754}"/>
               </a:ext>
             </a:extLst>
           </p:cNvPr>
@@ -9106,7 +9106,7 @@
           <p:cNvPr id="14" name="">
             <a:extLst xmlns:a="http://schemas.openxmlformats.org/drawingml/2006/main">
               <a:ext uri="{FF2B5EF4-FFF2-40B4-BE49-F238E27FC236}">
-                <a16:creationId xmlns:a16="http://schemas.microsoft.com/office/drawing/2014/main" id="{24BDDDB4-4F2D-4267-AC13-4EE9F3FFEBF1}"/>
+                <a16:creationId xmlns:a16="http://schemas.microsoft.com/office/drawing/2014/main" id="{50BDCB27-F842-470B-B5B2-50A3565829E9}"/>
               </a:ext>
             </a:extLst>
           </p:cNvPr>
@@ -9168,7 +9168,7 @@
           <p:cNvPr id="15" name="">
             <a:extLst xmlns:a="http://schemas.openxmlformats.org/drawingml/2006/main">
               <a:ext uri="{FF2B5EF4-FFF2-40B4-BE49-F238E27FC236}">
-                <a16:creationId xmlns:a16="http://schemas.microsoft.com/office/drawing/2014/main" id="{7E815356-06DB-4CF6-8E36-C9CA840F7BD4}"/>
+                <a16:creationId xmlns:a16="http://schemas.microsoft.com/office/drawing/2014/main" id="{FB41710A-63D6-4399-BE7B-78501BC914B6}"/>
               </a:ext>
             </a:extLst>
           </p:cNvPr>
@@ -9199,7 +9199,7 @@
           <p:cNvPr id="16" name="">
             <a:extLst xmlns:a="http://schemas.openxmlformats.org/drawingml/2006/main">
               <a:ext uri="{FF2B5EF4-FFF2-40B4-BE49-F238E27FC236}">
-                <a16:creationId xmlns:a16="http://schemas.microsoft.com/office/drawing/2014/main" id="{34AAD7ED-799B-4025-8277-81FAC1F60DDD}"/>
+                <a16:creationId xmlns:a16="http://schemas.microsoft.com/office/drawing/2014/main" id="{BC57C199-E3B8-4838-A8EE-8BAFF9178ED6}"/>
               </a:ext>
             </a:extLst>
           </p:cNvPr>
@@ -9261,7 +9261,7 @@
           <p:cNvPr id="17" name="">
             <a:extLst xmlns:a="http://schemas.openxmlformats.org/drawingml/2006/main">
               <a:ext uri="{FF2B5EF4-FFF2-40B4-BE49-F238E27FC236}">
-                <a16:creationId xmlns:a16="http://schemas.microsoft.com/office/drawing/2014/main" id="{E5956863-89DA-4FDC-8182-80DFEC129C95}"/>
+                <a16:creationId xmlns:a16="http://schemas.microsoft.com/office/drawing/2014/main" id="{8A0140AA-63E3-4BB1-94DC-9E00158BE81A}"/>
               </a:ext>
             </a:extLst>
           </p:cNvPr>
@@ -9323,7 +9323,7 @@
           <p:cNvPr id="18" name="">
             <a:extLst xmlns:a="http://schemas.openxmlformats.org/drawingml/2006/main">
               <a:ext uri="{FF2B5EF4-FFF2-40B4-BE49-F238E27FC236}">
-                <a16:creationId xmlns:a16="http://schemas.microsoft.com/office/drawing/2014/main" id="{E864A05B-9F6C-4CC9-A5F0-E90620AE0AA9}"/>
+                <a16:creationId xmlns:a16="http://schemas.microsoft.com/office/drawing/2014/main" id="{CBF9A26F-038D-4532-91A6-8B3715A67C4E}"/>
               </a:ext>
             </a:extLst>
           </p:cNvPr>
@@ -9385,7 +9385,7 @@
           <p:cNvPr id="19" name="">
             <a:extLst xmlns:a="http://schemas.openxmlformats.org/drawingml/2006/main">
               <a:ext uri="{FF2B5EF4-FFF2-40B4-BE49-F238E27FC236}">
-                <a16:creationId xmlns:a16="http://schemas.microsoft.com/office/drawing/2014/main" id="{F36D3029-1F86-4D68-8BC4-A7DFA645F8E0}"/>
+                <a16:creationId xmlns:a16="http://schemas.microsoft.com/office/drawing/2014/main" id="{7FA26A6A-B0F9-4274-8919-A66ED152788E}"/>
               </a:ext>
             </a:extLst>
           </p:cNvPr>
@@ -9418,7 +9418,7 @@
           <p:cNvPr id="20" name="">
             <a:extLst xmlns:a="http://schemas.openxmlformats.org/drawingml/2006/main">
               <a:ext uri="{FF2B5EF4-FFF2-40B4-BE49-F238E27FC236}">
-                <a16:creationId xmlns:a16="http://schemas.microsoft.com/office/drawing/2014/main" id="{919428C4-60CF-41DE-8CE8-B4D98C8AA282}"/>
+                <a16:creationId xmlns:a16="http://schemas.microsoft.com/office/drawing/2014/main" id="{46E4CC0F-2532-4EAB-9691-3DC97CE7127F}"/>
               </a:ext>
             </a:extLst>
           </p:cNvPr>
@@ -9480,7 +9480,7 @@
           <p:cNvPr id="21" name="footer-rule-15">
             <a:extLst xmlns:a="http://schemas.openxmlformats.org/drawingml/2006/main">
               <a:ext uri="{FF2B5EF4-FFF2-40B4-BE49-F238E27FC236}">
-                <a16:creationId xmlns:a16="http://schemas.microsoft.com/office/drawing/2014/main" id="{FA69E204-A127-4BC7-B03B-9D37706A6A56}"/>
+                <a16:creationId xmlns:a16="http://schemas.microsoft.com/office/drawing/2014/main" id="{E7E8B398-9A92-4E89-8D7A-42DEC01E7D15}"/>
               </a:ext>
             </a:extLst>
           </p:cNvPr>
@@ -9511,7 +9511,7 @@
           <p:cNvPr id="22" name="footer-label-15">
             <a:extLst xmlns:a="http://schemas.openxmlformats.org/drawingml/2006/main">
               <a:ext uri="{FF2B5EF4-FFF2-40B4-BE49-F238E27FC236}">
-                <a16:creationId xmlns:a16="http://schemas.microsoft.com/office/drawing/2014/main" id="{8064D1B0-904C-40C1-A2AC-992E211CF07B}"/>
+                <a16:creationId xmlns:a16="http://schemas.microsoft.com/office/drawing/2014/main" id="{8A75E69E-9928-4EC7-8178-20B4A395763C}"/>
               </a:ext>
             </a:extLst>
           </p:cNvPr>
@@ -9573,7 +9573,7 @@
           <p:cNvPr id="23" name="footer-page-15">
             <a:extLst xmlns:a="http://schemas.openxmlformats.org/drawingml/2006/main">
               <a:ext uri="{FF2B5EF4-FFF2-40B4-BE49-F238E27FC236}">
-                <a16:creationId xmlns:a16="http://schemas.microsoft.com/office/drawing/2014/main" id="{82AAEBB8-B4F2-4C09-88BD-B49F455A9A4E}"/>
+                <a16:creationId xmlns:a16="http://schemas.microsoft.com/office/drawing/2014/main" id="{44A6CA42-D3C9-4319-B338-5583CAF25F4A}"/>
               </a:ext>
             </a:extLst>
           </p:cNvPr>
@@ -9633,7 +9633,7 @@
     </p:spTree>
     <p:extLst>
       <p:ext uri="{BB962C8B-B14F-4D97-AF65-F5344CB8AC3E}">
-        <p14:creationId xmlns:p14="http://schemas.microsoft.com/office/powerpoint/2010/main" val="826631126"/>
+        <p14:creationId xmlns:p14="http://schemas.microsoft.com/office/powerpoint/2010/main" val="2093243760"/>
       </p:ext>
     </p:extLst>
   </p:cSld>
@@ -9664,7 +9664,7 @@
           <p:cNvPr id="21" name="side-accent-16">
             <a:extLst xmlns:a="http://schemas.openxmlformats.org/drawingml/2006/main">
               <a:ext uri="{FF2B5EF4-FFF2-40B4-BE49-F238E27FC236}">
-                <a16:creationId xmlns:a16="http://schemas.microsoft.com/office/drawing/2014/main" id="{F6B5BAEB-7488-451E-9ED7-44A636FA85AE}"/>
+                <a16:creationId xmlns:a16="http://schemas.microsoft.com/office/drawing/2014/main" id="{EDB97FBD-8920-4113-A936-357260729E5F}"/>
               </a:ext>
             </a:extLst>
           </p:cNvPr>
@@ -9695,7 +9695,7 @@
           <p:cNvPr id="2" name="kicker-16">
             <a:extLst xmlns:a="http://schemas.openxmlformats.org/drawingml/2006/main">
               <a:ext uri="{FF2B5EF4-FFF2-40B4-BE49-F238E27FC236}">
-                <a16:creationId xmlns:a16="http://schemas.microsoft.com/office/drawing/2014/main" id="{6FF2BB5E-2D02-427D-9728-0241ED96F0AC}"/>
+                <a16:creationId xmlns:a16="http://schemas.microsoft.com/office/drawing/2014/main" id="{3A885B5A-D9A0-4EED-98BA-9D245B45B26F}"/>
               </a:ext>
             </a:extLst>
           </p:cNvPr>
@@ -9757,7 +9757,7 @@
           <p:cNvPr id="3" name="title-16">
             <a:extLst xmlns:a="http://schemas.openxmlformats.org/drawingml/2006/main">
               <a:ext uri="{FF2B5EF4-FFF2-40B4-BE49-F238E27FC236}">
-                <a16:creationId xmlns:a16="http://schemas.microsoft.com/office/drawing/2014/main" id="{FA826E3F-C854-4A8E-BA2C-13EC4E9354AF}"/>
+                <a16:creationId xmlns:a16="http://schemas.microsoft.com/office/drawing/2014/main" id="{3538AF04-5B46-4E93-A98E-BFA7E464A6F8}"/>
               </a:ext>
             </a:extLst>
           </p:cNvPr>
@@ -9819,7 +9819,7 @@
           <p:cNvPr id="4" name="">
             <a:extLst xmlns:a="http://schemas.openxmlformats.org/drawingml/2006/main">
               <a:ext uri="{FF2B5EF4-FFF2-40B4-BE49-F238E27FC236}">
-                <a16:creationId xmlns:a16="http://schemas.microsoft.com/office/drawing/2014/main" id="{F9747704-1FDD-4F1D-8DFA-7C8CE40CBFA9}"/>
+                <a16:creationId xmlns:a16="http://schemas.microsoft.com/office/drawing/2014/main" id="{DB86E01F-D6FB-419F-8CA7-14D541ED2FBC}"/>
               </a:ext>
             </a:extLst>
           </p:cNvPr>
@@ -9850,7 +9850,7 @@
           <p:cNvPr id="5" name="">
             <a:extLst xmlns:a="http://schemas.openxmlformats.org/drawingml/2006/main">
               <a:ext uri="{FF2B5EF4-FFF2-40B4-BE49-F238E27FC236}">
-                <a16:creationId xmlns:a16="http://schemas.microsoft.com/office/drawing/2014/main" id="{2D500249-678D-4D17-82CE-9A6BC8893116}"/>
+                <a16:creationId xmlns:a16="http://schemas.microsoft.com/office/drawing/2014/main" id="{1A225AEE-A73A-4A21-9F2F-3C5F8949073D}"/>
               </a:ext>
             </a:extLst>
           </p:cNvPr>
@@ -9881,7 +9881,7 @@
           <p:cNvPr id="6" name="">
             <a:extLst xmlns:a="http://schemas.openxmlformats.org/drawingml/2006/main">
               <a:ext uri="{FF2B5EF4-FFF2-40B4-BE49-F238E27FC236}">
-                <a16:creationId xmlns:a16="http://schemas.microsoft.com/office/drawing/2014/main" id="{81B49A72-7A19-4F8C-AA6A-EACC2BC2450B}"/>
+                <a16:creationId xmlns:a16="http://schemas.microsoft.com/office/drawing/2014/main" id="{37A64C2B-394B-4D07-80F7-4A874C8A0812}"/>
               </a:ext>
             </a:extLst>
           </p:cNvPr>
@@ -9943,7 +9943,7 @@
           <p:cNvPr id="7" name="">
             <a:extLst xmlns:a="http://schemas.openxmlformats.org/drawingml/2006/main">
               <a:ext uri="{FF2B5EF4-FFF2-40B4-BE49-F238E27FC236}">
-                <a16:creationId xmlns:a16="http://schemas.microsoft.com/office/drawing/2014/main" id="{DD8E692E-F7A6-4DDC-8E42-AAF3401F3803}"/>
+                <a16:creationId xmlns:a16="http://schemas.microsoft.com/office/drawing/2014/main" id="{7F241339-A84F-4810-BA71-791819A026BC}"/>
               </a:ext>
             </a:extLst>
           </p:cNvPr>
@@ -10005,7 +10005,7 @@
           <p:cNvPr id="8" name="">
             <a:extLst xmlns:a="http://schemas.openxmlformats.org/drawingml/2006/main">
               <a:ext uri="{FF2B5EF4-FFF2-40B4-BE49-F238E27FC236}">
-                <a16:creationId xmlns:a16="http://schemas.microsoft.com/office/drawing/2014/main" id="{054E38D9-3441-4AF7-9257-BE8C5510F8F2}"/>
+                <a16:creationId xmlns:a16="http://schemas.microsoft.com/office/drawing/2014/main" id="{F8950A0C-EB6C-4C83-BEA8-CB0383C55B9C}"/>
               </a:ext>
             </a:extLst>
           </p:cNvPr>
@@ -10067,7 +10067,7 @@
           <p:cNvPr id="9" name="">
             <a:extLst xmlns:a="http://schemas.openxmlformats.org/drawingml/2006/main">
               <a:ext uri="{FF2B5EF4-FFF2-40B4-BE49-F238E27FC236}">
-                <a16:creationId xmlns:a16="http://schemas.microsoft.com/office/drawing/2014/main" id="{4A635154-6DA9-4822-97B6-C95A40582BCC}"/>
+                <a16:creationId xmlns:a16="http://schemas.microsoft.com/office/drawing/2014/main" id="{56EB08AE-E346-4F39-BE9E-F7A0E7895C52}"/>
               </a:ext>
             </a:extLst>
           </p:cNvPr>
@@ -10098,7 +10098,7 @@
           <p:cNvPr id="10" name="">
             <a:extLst xmlns:a="http://schemas.openxmlformats.org/drawingml/2006/main">
               <a:ext uri="{FF2B5EF4-FFF2-40B4-BE49-F238E27FC236}">
-                <a16:creationId xmlns:a16="http://schemas.microsoft.com/office/drawing/2014/main" id="{08AD20FB-ACDC-4D0E-BCE6-A0BEDAF2B55F}"/>
+                <a16:creationId xmlns:a16="http://schemas.microsoft.com/office/drawing/2014/main" id="{7BC057C4-288D-49EA-B328-3240D12D6AA5}"/>
               </a:ext>
             </a:extLst>
           </p:cNvPr>
@@ -10160,7 +10160,7 @@
           <p:cNvPr id="11" name="">
             <a:extLst xmlns:a="http://schemas.openxmlformats.org/drawingml/2006/main">
               <a:ext uri="{FF2B5EF4-FFF2-40B4-BE49-F238E27FC236}">
-                <a16:creationId xmlns:a16="http://schemas.microsoft.com/office/drawing/2014/main" id="{A7C770C1-3D4A-476F-BDD0-C475C955B1AF}"/>
+                <a16:creationId xmlns:a16="http://schemas.microsoft.com/office/drawing/2014/main" id="{E3811ECF-76A3-4C72-A239-5699A923F569}"/>
               </a:ext>
             </a:extLst>
           </p:cNvPr>
@@ -10222,7 +10222,7 @@
           <p:cNvPr id="12" name="">
             <a:extLst xmlns:a="http://schemas.openxmlformats.org/drawingml/2006/main">
               <a:ext uri="{FF2B5EF4-FFF2-40B4-BE49-F238E27FC236}">
-                <a16:creationId xmlns:a16="http://schemas.microsoft.com/office/drawing/2014/main" id="{48FBB769-C9F2-443D-91EC-F8D696E77591}"/>
+                <a16:creationId xmlns:a16="http://schemas.microsoft.com/office/drawing/2014/main" id="{E8EE1183-97AF-45E0-B79C-733508FE07FE}"/>
               </a:ext>
             </a:extLst>
           </p:cNvPr>
@@ -10284,7 +10284,7 @@
           <p:cNvPr id="13" name="">
             <a:extLst xmlns:a="http://schemas.openxmlformats.org/drawingml/2006/main">
               <a:ext uri="{FF2B5EF4-FFF2-40B4-BE49-F238E27FC236}">
-                <a16:creationId xmlns:a16="http://schemas.microsoft.com/office/drawing/2014/main" id="{5C00A9BD-AE96-4CCE-AB8C-C5C5CC7D6B11}"/>
+                <a16:creationId xmlns:a16="http://schemas.microsoft.com/office/drawing/2014/main" id="{F485041B-4D0E-43A9-AF94-1EE892956F20}"/>
               </a:ext>
             </a:extLst>
           </p:cNvPr>
@@ -10315,7 +10315,7 @@
           <p:cNvPr id="14" name="">
             <a:extLst xmlns:a="http://schemas.openxmlformats.org/drawingml/2006/main">
               <a:ext uri="{FF2B5EF4-FFF2-40B4-BE49-F238E27FC236}">
-                <a16:creationId xmlns:a16="http://schemas.microsoft.com/office/drawing/2014/main" id="{89FDAA17-30E4-44F3-B08A-70F58022EADC}"/>
+                <a16:creationId xmlns:a16="http://schemas.microsoft.com/office/drawing/2014/main" id="{7554304F-1927-46B8-9F33-DD795D503B0B}"/>
               </a:ext>
             </a:extLst>
           </p:cNvPr>
@@ -10377,7 +10377,7 @@
           <p:cNvPr id="15" name="">
             <a:extLst xmlns:a="http://schemas.openxmlformats.org/drawingml/2006/main">
               <a:ext uri="{FF2B5EF4-FFF2-40B4-BE49-F238E27FC236}">
-                <a16:creationId xmlns:a16="http://schemas.microsoft.com/office/drawing/2014/main" id="{A3CD6AFA-966D-4D6B-9212-10BB14C4CB8D}"/>
+                <a16:creationId xmlns:a16="http://schemas.microsoft.com/office/drawing/2014/main" id="{CE6596CC-1C31-4442-BD28-E004993585A8}"/>
               </a:ext>
             </a:extLst>
           </p:cNvPr>
@@ -10439,7 +10439,7 @@
           <p:cNvPr id="16" name="">
             <a:extLst xmlns:a="http://schemas.openxmlformats.org/drawingml/2006/main">
               <a:ext uri="{FF2B5EF4-FFF2-40B4-BE49-F238E27FC236}">
-                <a16:creationId xmlns:a16="http://schemas.microsoft.com/office/drawing/2014/main" id="{2CA75C54-95D1-41AB-B34B-AB7B2CF2E330}"/>
+                <a16:creationId xmlns:a16="http://schemas.microsoft.com/office/drawing/2014/main" id="{6B949257-4D33-4F83-8DDA-A3A1E130307B}"/>
               </a:ext>
             </a:extLst>
           </p:cNvPr>
@@ -10501,7 +10501,7 @@
           <p:cNvPr id="17" name="">
             <a:extLst xmlns:a="http://schemas.openxmlformats.org/drawingml/2006/main">
               <a:ext uri="{FF2B5EF4-FFF2-40B4-BE49-F238E27FC236}">
-                <a16:creationId xmlns:a16="http://schemas.microsoft.com/office/drawing/2014/main" id="{C9563CF5-E488-47EF-AA66-82DC7FC69FD6}"/>
+                <a16:creationId xmlns:a16="http://schemas.microsoft.com/office/drawing/2014/main" id="{2E4AC31E-1160-4ECC-9EC8-D8DDBFE27A41}"/>
               </a:ext>
             </a:extLst>
           </p:cNvPr>
@@ -10563,7 +10563,7 @@
           <p:cNvPr id="18" name="footer-rule-16">
             <a:extLst xmlns:a="http://schemas.openxmlformats.org/drawingml/2006/main">
               <a:ext uri="{FF2B5EF4-FFF2-40B4-BE49-F238E27FC236}">
-                <a16:creationId xmlns:a16="http://schemas.microsoft.com/office/drawing/2014/main" id="{426036D6-D603-4089-B68F-3EA1810BA2F4}"/>
+                <a16:creationId xmlns:a16="http://schemas.microsoft.com/office/drawing/2014/main" id="{BD445C95-64B1-448A-8C9B-29E8333DA5B0}"/>
               </a:ext>
             </a:extLst>
           </p:cNvPr>
@@ -10594,7 +10594,7 @@
           <p:cNvPr id="19" name="footer-label-16">
             <a:extLst xmlns:a="http://schemas.openxmlformats.org/drawingml/2006/main">
               <a:ext uri="{FF2B5EF4-FFF2-40B4-BE49-F238E27FC236}">
-                <a16:creationId xmlns:a16="http://schemas.microsoft.com/office/drawing/2014/main" id="{6C8BAA2F-2947-4485-B631-21CEDF99A064}"/>
+                <a16:creationId xmlns:a16="http://schemas.microsoft.com/office/drawing/2014/main" id="{00C0B80C-7123-4593-9816-3233B919DFAB}"/>
               </a:ext>
             </a:extLst>
           </p:cNvPr>
@@ -10656,7 +10656,7 @@
           <p:cNvPr id="20" name="footer-page-16">
             <a:extLst xmlns:a="http://schemas.openxmlformats.org/drawingml/2006/main">
               <a:ext uri="{FF2B5EF4-FFF2-40B4-BE49-F238E27FC236}">
-                <a16:creationId xmlns:a16="http://schemas.microsoft.com/office/drawing/2014/main" id="{298FA71A-1C58-4F3C-BFD3-BA772AEF6424}"/>
+                <a16:creationId xmlns:a16="http://schemas.microsoft.com/office/drawing/2014/main" id="{97CACBBC-6057-4460-9BC0-A72F910820A8}"/>
               </a:ext>
             </a:extLst>
           </p:cNvPr>
@@ -10716,7 +10716,7 @@
     </p:spTree>
     <p:extLst>
       <p:ext uri="{BB962C8B-B14F-4D97-AF65-F5344CB8AC3E}">
-        <p14:creationId xmlns:p14="http://schemas.microsoft.com/office/powerpoint/2010/main" val="2100455791"/>
+        <p14:creationId xmlns:p14="http://schemas.microsoft.com/office/powerpoint/2010/main" val="278889150"/>
       </p:ext>
     </p:extLst>
   </p:cSld>
@@ -10747,7 +10747,7 @@
           <p:cNvPr id="22" name="side-accent-17">
             <a:extLst xmlns:a="http://schemas.openxmlformats.org/drawingml/2006/main">
               <a:ext uri="{FF2B5EF4-FFF2-40B4-BE49-F238E27FC236}">
-                <a16:creationId xmlns:a16="http://schemas.microsoft.com/office/drawing/2014/main" id="{EDBF9746-01DF-47DE-9E57-7C6EFB40B02D}"/>
+                <a16:creationId xmlns:a16="http://schemas.microsoft.com/office/drawing/2014/main" id="{D2FAFB59-0C5A-4F39-B3D9-F3B218EC3465}"/>
               </a:ext>
             </a:extLst>
           </p:cNvPr>
@@ -10778,7 +10778,7 @@
           <p:cNvPr id="2" name="kicker-17">
             <a:extLst xmlns:a="http://schemas.openxmlformats.org/drawingml/2006/main">
               <a:ext uri="{FF2B5EF4-FFF2-40B4-BE49-F238E27FC236}">
-                <a16:creationId xmlns:a16="http://schemas.microsoft.com/office/drawing/2014/main" id="{2BA39CCA-597B-45FB-82B2-0B9C5FC8CE1B}"/>
+                <a16:creationId xmlns:a16="http://schemas.microsoft.com/office/drawing/2014/main" id="{7B292E17-06EB-4F4C-BFF8-C5E1D057CDE3}"/>
               </a:ext>
             </a:extLst>
           </p:cNvPr>
@@ -10840,7 +10840,7 @@
           <p:cNvPr id="3" name="title-17">
             <a:extLst xmlns:a="http://schemas.openxmlformats.org/drawingml/2006/main">
               <a:ext uri="{FF2B5EF4-FFF2-40B4-BE49-F238E27FC236}">
-                <a16:creationId xmlns:a16="http://schemas.microsoft.com/office/drawing/2014/main" id="{FEE13294-BA98-4762-AABF-F164BFAA352A}"/>
+                <a16:creationId xmlns:a16="http://schemas.microsoft.com/office/drawing/2014/main" id="{86EFA55D-546C-4D75-96C6-03C8BA6101C6}"/>
               </a:ext>
             </a:extLst>
           </p:cNvPr>
@@ -10902,7 +10902,7 @@
           <p:cNvPr id="4" name="">
             <a:extLst xmlns:a="http://schemas.openxmlformats.org/drawingml/2006/main">
               <a:ext uri="{FF2B5EF4-FFF2-40B4-BE49-F238E27FC236}">
-                <a16:creationId xmlns:a16="http://schemas.microsoft.com/office/drawing/2014/main" id="{6C97F2A1-0701-4779-9BA3-4D84D75AFA80}"/>
+                <a16:creationId xmlns:a16="http://schemas.microsoft.com/office/drawing/2014/main" id="{96AB91C3-221C-4C33-A3D1-D06448FFA927}"/>
               </a:ext>
             </a:extLst>
           </p:cNvPr>
@@ -10964,7 +10964,7 @@
           <p:cNvPr id="5" name="">
             <a:extLst xmlns:a="http://schemas.openxmlformats.org/drawingml/2006/main">
               <a:ext uri="{FF2B5EF4-FFF2-40B4-BE49-F238E27FC236}">
-                <a16:creationId xmlns:a16="http://schemas.microsoft.com/office/drawing/2014/main" id="{4DD237CE-89DC-4EF1-85B8-9B6104324538}"/>
+                <a16:creationId xmlns:a16="http://schemas.microsoft.com/office/drawing/2014/main" id="{7A10B5FF-0126-42C0-B472-A4CBCEA1E30A}"/>
               </a:ext>
             </a:extLst>
           </p:cNvPr>
@@ -10995,7 +10995,7 @@
           <p:cNvPr id="6" name="">
             <a:extLst xmlns:a="http://schemas.openxmlformats.org/drawingml/2006/main">
               <a:ext uri="{FF2B5EF4-FFF2-40B4-BE49-F238E27FC236}">
-                <a16:creationId xmlns:a16="http://schemas.microsoft.com/office/drawing/2014/main" id="{9C2BBB38-EC41-4CDC-9934-CBF798475E68}"/>
+                <a16:creationId xmlns:a16="http://schemas.microsoft.com/office/drawing/2014/main" id="{2D843794-9E43-4A29-953B-FD8057C25275}"/>
               </a:ext>
             </a:extLst>
           </p:cNvPr>
@@ -11057,7 +11057,7 @@
           <p:cNvPr id="7" name="">
             <a:extLst xmlns:a="http://schemas.openxmlformats.org/drawingml/2006/main">
               <a:ext uri="{FF2B5EF4-FFF2-40B4-BE49-F238E27FC236}">
-                <a16:creationId xmlns:a16="http://schemas.microsoft.com/office/drawing/2014/main" id="{C026487F-2BE4-4F1D-A26D-2C88A3EAFD10}"/>
+                <a16:creationId xmlns:a16="http://schemas.microsoft.com/office/drawing/2014/main" id="{08E8E9A7-4F28-49A3-AE67-B3F239BA98C2}"/>
               </a:ext>
             </a:extLst>
           </p:cNvPr>
@@ -11119,7 +11119,7 @@
           <p:cNvPr id="8" name="">
             <a:extLst xmlns:a="http://schemas.openxmlformats.org/drawingml/2006/main">
               <a:ext uri="{FF2B5EF4-FFF2-40B4-BE49-F238E27FC236}">
-                <a16:creationId xmlns:a16="http://schemas.microsoft.com/office/drawing/2014/main" id="{39AC2AD8-0493-45D0-B211-A0F52FA23A93}"/>
+                <a16:creationId xmlns:a16="http://schemas.microsoft.com/office/drawing/2014/main" id="{A63197BF-41EA-4F38-AD31-A3F199D262EE}"/>
               </a:ext>
             </a:extLst>
           </p:cNvPr>
@@ -11150,7 +11150,7 @@
           <p:cNvPr id="9" name="">
             <a:extLst xmlns:a="http://schemas.openxmlformats.org/drawingml/2006/main">
               <a:ext uri="{FF2B5EF4-FFF2-40B4-BE49-F238E27FC236}">
-                <a16:creationId xmlns:a16="http://schemas.microsoft.com/office/drawing/2014/main" id="{FCBD57E7-7101-4489-AEAE-24706145E9E3}"/>
+                <a16:creationId xmlns:a16="http://schemas.microsoft.com/office/drawing/2014/main" id="{03B1E5BE-8CD1-4252-84EA-3DAF77E1D446}"/>
               </a:ext>
             </a:extLst>
           </p:cNvPr>
@@ -11212,7 +11212,7 @@
           <p:cNvPr id="10" name="">
             <a:extLst xmlns:a="http://schemas.openxmlformats.org/drawingml/2006/main">
               <a:ext uri="{FF2B5EF4-FFF2-40B4-BE49-F238E27FC236}">
-                <a16:creationId xmlns:a16="http://schemas.microsoft.com/office/drawing/2014/main" id="{989F95CF-F743-40D3-AF44-B139812BF6A5}"/>
+                <a16:creationId xmlns:a16="http://schemas.microsoft.com/office/drawing/2014/main" id="{FCFD16F7-6B75-4904-81F5-402D86DBD7F6}"/>
               </a:ext>
             </a:extLst>
           </p:cNvPr>
@@ -11274,7 +11274,7 @@
           <p:cNvPr id="11" name="">
             <a:extLst xmlns:a="http://schemas.openxmlformats.org/drawingml/2006/main">
               <a:ext uri="{FF2B5EF4-FFF2-40B4-BE49-F238E27FC236}">
-                <a16:creationId xmlns:a16="http://schemas.microsoft.com/office/drawing/2014/main" id="{580DA31C-79E2-4033-854A-4EE8569585D1}"/>
+                <a16:creationId xmlns:a16="http://schemas.microsoft.com/office/drawing/2014/main" id="{BB4455B2-53A8-45FF-8DE4-DC44FBBF2365}"/>
               </a:ext>
             </a:extLst>
           </p:cNvPr>
@@ -11305,7 +11305,7 @@
           <p:cNvPr id="12" name="">
             <a:extLst xmlns:a="http://schemas.openxmlformats.org/drawingml/2006/main">
               <a:ext uri="{FF2B5EF4-FFF2-40B4-BE49-F238E27FC236}">
-                <a16:creationId xmlns:a16="http://schemas.microsoft.com/office/drawing/2014/main" id="{0ADA7B47-0ECC-46F0-BE4E-94AB64EDD897}"/>
+                <a16:creationId xmlns:a16="http://schemas.microsoft.com/office/drawing/2014/main" id="{48171CD8-288B-49DA-BA21-D3FF0A8949F0}"/>
               </a:ext>
             </a:extLst>
           </p:cNvPr>
@@ -11367,7 +11367,7 @@
           <p:cNvPr id="13" name="">
             <a:extLst xmlns:a="http://schemas.openxmlformats.org/drawingml/2006/main">
               <a:ext uri="{FF2B5EF4-FFF2-40B4-BE49-F238E27FC236}">
-                <a16:creationId xmlns:a16="http://schemas.microsoft.com/office/drawing/2014/main" id="{F92F853B-2B40-4E1B-A252-A1A046B3EDFD}"/>
+                <a16:creationId xmlns:a16="http://schemas.microsoft.com/office/drawing/2014/main" id="{112CED10-B44F-4A3B-9CC9-A650FF112F26}"/>
               </a:ext>
             </a:extLst>
           </p:cNvPr>
@@ -11429,7 +11429,7 @@
           <p:cNvPr id="14" name="">
             <a:extLst xmlns:a="http://schemas.openxmlformats.org/drawingml/2006/main">
               <a:ext uri="{FF2B5EF4-FFF2-40B4-BE49-F238E27FC236}">
-                <a16:creationId xmlns:a16="http://schemas.microsoft.com/office/drawing/2014/main" id="{27519437-00BB-4597-A38B-079B2693B4F1}"/>
+                <a16:creationId xmlns:a16="http://schemas.microsoft.com/office/drawing/2014/main" id="{EF36DBFC-F2E1-4093-A1DB-C29C159DD33C}"/>
               </a:ext>
             </a:extLst>
           </p:cNvPr>
@@ -11460,7 +11460,7 @@
           <p:cNvPr id="15" name="">
             <a:extLst xmlns:a="http://schemas.openxmlformats.org/drawingml/2006/main">
               <a:ext uri="{FF2B5EF4-FFF2-40B4-BE49-F238E27FC236}">
-                <a16:creationId xmlns:a16="http://schemas.microsoft.com/office/drawing/2014/main" id="{39A09B38-ADA8-429F-ACC8-8EBF0232CC68}"/>
+                <a16:creationId xmlns:a16="http://schemas.microsoft.com/office/drawing/2014/main" id="{999AF5BC-AF9C-43D4-B728-9914B6CE98E2}"/>
               </a:ext>
             </a:extLst>
           </p:cNvPr>
@@ -11522,7 +11522,7 @@
           <p:cNvPr id="16" name="">
             <a:extLst xmlns:a="http://schemas.openxmlformats.org/drawingml/2006/main">
               <a:ext uri="{FF2B5EF4-FFF2-40B4-BE49-F238E27FC236}">
-                <a16:creationId xmlns:a16="http://schemas.microsoft.com/office/drawing/2014/main" id="{90B4C6B9-FB3B-423C-843F-2A737A9F0FCA}"/>
+                <a16:creationId xmlns:a16="http://schemas.microsoft.com/office/drawing/2014/main" id="{CDEB2977-DE66-4B36-B936-06D4DC2E46C0}"/>
               </a:ext>
             </a:extLst>
           </p:cNvPr>
@@ -11584,7 +11584,7 @@
           <p:cNvPr id="17" name="">
             <a:extLst xmlns:a="http://schemas.openxmlformats.org/drawingml/2006/main">
               <a:ext uri="{FF2B5EF4-FFF2-40B4-BE49-F238E27FC236}">
-                <a16:creationId xmlns:a16="http://schemas.microsoft.com/office/drawing/2014/main" id="{0D46C675-3815-4B1B-A5D6-6ECBF9DCDF50}"/>
+                <a16:creationId xmlns:a16="http://schemas.microsoft.com/office/drawing/2014/main" id="{02B439CD-A61B-4A3B-BD27-034CF3608392}"/>
               </a:ext>
             </a:extLst>
           </p:cNvPr>
@@ -11617,7 +11617,7 @@
           <p:cNvPr id="18" name="">
             <a:extLst xmlns:a="http://schemas.openxmlformats.org/drawingml/2006/main">
               <a:ext uri="{FF2B5EF4-FFF2-40B4-BE49-F238E27FC236}">
-                <a16:creationId xmlns:a16="http://schemas.microsoft.com/office/drawing/2014/main" id="{E1042CED-9EF2-4605-970D-39B92FD5E10F}"/>
+                <a16:creationId xmlns:a16="http://schemas.microsoft.com/office/drawing/2014/main" id="{6CFB9DEA-CB97-4B97-9D3A-8041FE0BCB1D}"/>
               </a:ext>
             </a:extLst>
           </p:cNvPr>
@@ -11679,7 +11679,7 @@
           <p:cNvPr id="19" name="footer-rule-17">
             <a:extLst xmlns:a="http://schemas.openxmlformats.org/drawingml/2006/main">
               <a:ext uri="{FF2B5EF4-FFF2-40B4-BE49-F238E27FC236}">
-                <a16:creationId xmlns:a16="http://schemas.microsoft.com/office/drawing/2014/main" id="{D368DD2B-42F7-44E2-A697-F90BCB9272FD}"/>
+                <a16:creationId xmlns:a16="http://schemas.microsoft.com/office/drawing/2014/main" id="{32A4B9D7-20F0-40C8-B91E-C849E8550FDF}"/>
               </a:ext>
             </a:extLst>
           </p:cNvPr>
@@ -11710,7 +11710,7 @@
           <p:cNvPr id="20" name="footer-label-17">
             <a:extLst xmlns:a="http://schemas.openxmlformats.org/drawingml/2006/main">
               <a:ext uri="{FF2B5EF4-FFF2-40B4-BE49-F238E27FC236}">
-                <a16:creationId xmlns:a16="http://schemas.microsoft.com/office/drawing/2014/main" id="{0C8719BB-CBF5-4B3C-9A2F-F1B023DB0C46}"/>
+                <a16:creationId xmlns:a16="http://schemas.microsoft.com/office/drawing/2014/main" id="{DD941AA0-D53A-4FBF-89DA-0A709A1F9395}"/>
               </a:ext>
             </a:extLst>
           </p:cNvPr>
@@ -11772,7 +11772,7 @@
           <p:cNvPr id="21" name="footer-page-17">
             <a:extLst xmlns:a="http://schemas.openxmlformats.org/drawingml/2006/main">
               <a:ext uri="{FF2B5EF4-FFF2-40B4-BE49-F238E27FC236}">
-                <a16:creationId xmlns:a16="http://schemas.microsoft.com/office/drawing/2014/main" id="{BA7DE3E9-8B03-4B31-8248-516102A96A4E}"/>
+                <a16:creationId xmlns:a16="http://schemas.microsoft.com/office/drawing/2014/main" id="{BD1F9A57-563B-4982-BE91-03278EF3F34A}"/>
               </a:ext>
             </a:extLst>
           </p:cNvPr>
@@ -11832,7 +11832,7 @@
     </p:spTree>
     <p:extLst>
       <p:ext uri="{BB962C8B-B14F-4D97-AF65-F5344CB8AC3E}">
-        <p14:creationId xmlns:p14="http://schemas.microsoft.com/office/powerpoint/2010/main" val="260322183"/>
+        <p14:creationId xmlns:p14="http://schemas.microsoft.com/office/powerpoint/2010/main" val="1651472411"/>
       </p:ext>
     </p:extLst>
   </p:cSld>
@@ -11863,7 +11863,7 @@
           <p:cNvPr id="25" name="side-accent-18">
             <a:extLst xmlns:a="http://schemas.openxmlformats.org/drawingml/2006/main">
               <a:ext uri="{FF2B5EF4-FFF2-40B4-BE49-F238E27FC236}">
-                <a16:creationId xmlns:a16="http://schemas.microsoft.com/office/drawing/2014/main" id="{B57D1059-D740-424B-A897-DDBDF3D4E7ED}"/>
+                <a16:creationId xmlns:a16="http://schemas.microsoft.com/office/drawing/2014/main" id="{73B03D6E-4E64-41CC-9668-CAB9885F8282}"/>
               </a:ext>
             </a:extLst>
           </p:cNvPr>
@@ -11894,7 +11894,7 @@
           <p:cNvPr id="2" name="kicker-18">
             <a:extLst xmlns:a="http://schemas.openxmlformats.org/drawingml/2006/main">
               <a:ext uri="{FF2B5EF4-FFF2-40B4-BE49-F238E27FC236}">
-                <a16:creationId xmlns:a16="http://schemas.microsoft.com/office/drawing/2014/main" id="{9BC8102B-9589-4F32-9E0A-7331180EBFA8}"/>
+                <a16:creationId xmlns:a16="http://schemas.microsoft.com/office/drawing/2014/main" id="{5000CCAD-C3D1-4585-8920-62FE5C458E47}"/>
               </a:ext>
             </a:extLst>
           </p:cNvPr>
@@ -11956,7 +11956,7 @@
           <p:cNvPr id="3" name="title-18">
             <a:extLst xmlns:a="http://schemas.openxmlformats.org/drawingml/2006/main">
               <a:ext uri="{FF2B5EF4-FFF2-40B4-BE49-F238E27FC236}">
-                <a16:creationId xmlns:a16="http://schemas.microsoft.com/office/drawing/2014/main" id="{7FC8F464-F47B-4108-AC92-5CA5B3A08E44}"/>
+                <a16:creationId xmlns:a16="http://schemas.microsoft.com/office/drawing/2014/main" id="{5BA6E5E2-3DD0-4F62-B802-C45FD4CD5810}"/>
               </a:ext>
             </a:extLst>
           </p:cNvPr>
@@ -12018,7 +12018,7 @@
           <p:cNvPr id="4" name="">
             <a:extLst xmlns:a="http://schemas.openxmlformats.org/drawingml/2006/main">
               <a:ext uri="{FF2B5EF4-FFF2-40B4-BE49-F238E27FC236}">
-                <a16:creationId xmlns:a16="http://schemas.microsoft.com/office/drawing/2014/main" id="{F37E5A96-E3C3-4AF5-A74F-CFAD082F9B88}"/>
+                <a16:creationId xmlns:a16="http://schemas.microsoft.com/office/drawing/2014/main" id="{7216FB96-F464-4524-802C-CEC006E9E8C1}"/>
               </a:ext>
             </a:extLst>
           </p:cNvPr>
@@ -12080,7 +12080,7 @@
           <p:cNvPr id="5" name="">
             <a:extLst xmlns:a="http://schemas.openxmlformats.org/drawingml/2006/main">
               <a:ext uri="{FF2B5EF4-FFF2-40B4-BE49-F238E27FC236}">
-                <a16:creationId xmlns:a16="http://schemas.microsoft.com/office/drawing/2014/main" id="{1FDD8C35-ABB6-481B-8980-91FD433BD572}"/>
+                <a16:creationId xmlns:a16="http://schemas.microsoft.com/office/drawing/2014/main" id="{81609983-DCF5-4C25-8567-77DBE88119B8}"/>
               </a:ext>
             </a:extLst>
           </p:cNvPr>
@@ -12142,7 +12142,7 @@
           <p:cNvPr id="6" name="">
             <a:extLst xmlns:a="http://schemas.openxmlformats.org/drawingml/2006/main">
               <a:ext uri="{FF2B5EF4-FFF2-40B4-BE49-F238E27FC236}">
-                <a16:creationId xmlns:a16="http://schemas.microsoft.com/office/drawing/2014/main" id="{596425C2-BDF8-46B9-9621-15B9695AD958}"/>
+                <a16:creationId xmlns:a16="http://schemas.microsoft.com/office/drawing/2014/main" id="{C69AC3BE-9B66-474B-8257-39C31F6EBD74}"/>
               </a:ext>
             </a:extLst>
           </p:cNvPr>
@@ -12204,7 +12204,7 @@
           <p:cNvPr id="7" name="">
             <a:extLst xmlns:a="http://schemas.openxmlformats.org/drawingml/2006/main">
               <a:ext uri="{FF2B5EF4-FFF2-40B4-BE49-F238E27FC236}">
-                <a16:creationId xmlns:a16="http://schemas.microsoft.com/office/drawing/2014/main" id="{3CF5ACED-375D-4117-B434-618524FA3EF1}"/>
+                <a16:creationId xmlns:a16="http://schemas.microsoft.com/office/drawing/2014/main" id="{B608DC4C-7B4E-4E14-9B24-AC21055BB63E}"/>
               </a:ext>
             </a:extLst>
           </p:cNvPr>
@@ -12235,7 +12235,7 @@
           <p:cNvPr id="8" name="">
             <a:extLst xmlns:a="http://schemas.openxmlformats.org/drawingml/2006/main">
               <a:ext uri="{FF2B5EF4-FFF2-40B4-BE49-F238E27FC236}">
-                <a16:creationId xmlns:a16="http://schemas.microsoft.com/office/drawing/2014/main" id="{0EEC331D-02C6-42A9-ABFF-A3B494825465}"/>
+                <a16:creationId xmlns:a16="http://schemas.microsoft.com/office/drawing/2014/main" id="{0FEC5BD7-7694-4F4C-9D23-0D355490D360}"/>
               </a:ext>
             </a:extLst>
           </p:cNvPr>
@@ -12297,7 +12297,7 @@
           <p:cNvPr id="9" name="">
             <a:extLst xmlns:a="http://schemas.openxmlformats.org/drawingml/2006/main">
               <a:ext uri="{FF2B5EF4-FFF2-40B4-BE49-F238E27FC236}">
-                <a16:creationId xmlns:a16="http://schemas.microsoft.com/office/drawing/2014/main" id="{EA5517E1-5F2E-47B1-8994-D279BE4AA2F0}"/>
+                <a16:creationId xmlns:a16="http://schemas.microsoft.com/office/drawing/2014/main" id="{DF934167-5C1A-4834-8CDF-8B0FCAAC3882}"/>
               </a:ext>
             </a:extLst>
           </p:cNvPr>
@@ -12359,7 +12359,7 @@
           <p:cNvPr id="10" name="">
             <a:extLst xmlns:a="http://schemas.openxmlformats.org/drawingml/2006/main">
               <a:ext uri="{FF2B5EF4-FFF2-40B4-BE49-F238E27FC236}">
-                <a16:creationId xmlns:a16="http://schemas.microsoft.com/office/drawing/2014/main" id="{F9A03210-100B-4C33-B5BF-99E15800DCB2}"/>
+                <a16:creationId xmlns:a16="http://schemas.microsoft.com/office/drawing/2014/main" id="{B92332C7-3423-47BF-B052-A3CB614EEDC2}"/>
               </a:ext>
             </a:extLst>
           </p:cNvPr>
@@ -12421,7 +12421,7 @@
           <p:cNvPr id="11" name="">
             <a:extLst xmlns:a="http://schemas.openxmlformats.org/drawingml/2006/main">
               <a:ext uri="{FF2B5EF4-FFF2-40B4-BE49-F238E27FC236}">
-                <a16:creationId xmlns:a16="http://schemas.microsoft.com/office/drawing/2014/main" id="{EB5B8211-AA90-4680-BB54-7DD647BC33A3}"/>
+                <a16:creationId xmlns:a16="http://schemas.microsoft.com/office/drawing/2014/main" id="{4BB49A20-9FAD-45AC-8F37-EE172D735322}"/>
               </a:ext>
             </a:extLst>
           </p:cNvPr>
@@ -12452,7 +12452,7 @@
           <p:cNvPr id="12" name="">
             <a:extLst xmlns:a="http://schemas.openxmlformats.org/drawingml/2006/main">
               <a:ext uri="{FF2B5EF4-FFF2-40B4-BE49-F238E27FC236}">
-                <a16:creationId xmlns:a16="http://schemas.microsoft.com/office/drawing/2014/main" id="{6B0A79D9-71DE-4B08-84B4-CA801EC66508}"/>
+                <a16:creationId xmlns:a16="http://schemas.microsoft.com/office/drawing/2014/main" id="{A1A5E342-EC0E-4D9F-95C8-3C0B233A98A0}"/>
               </a:ext>
             </a:extLst>
           </p:cNvPr>
@@ -12514,7 +12514,7 @@
           <p:cNvPr id="13" name="">
             <a:extLst xmlns:a="http://schemas.openxmlformats.org/drawingml/2006/main">
               <a:ext uri="{FF2B5EF4-FFF2-40B4-BE49-F238E27FC236}">
-                <a16:creationId xmlns:a16="http://schemas.microsoft.com/office/drawing/2014/main" id="{EF81467D-25C1-4732-BDF1-DF3FB8EE7D38}"/>
+                <a16:creationId xmlns:a16="http://schemas.microsoft.com/office/drawing/2014/main" id="{F2AC6657-92BB-4699-88A7-78D6F78EDA06}"/>
               </a:ext>
             </a:extLst>
           </p:cNvPr>
@@ -12576,7 +12576,7 @@
           <p:cNvPr id="14" name="">
             <a:extLst xmlns:a="http://schemas.openxmlformats.org/drawingml/2006/main">
               <a:ext uri="{FF2B5EF4-FFF2-40B4-BE49-F238E27FC236}">
-                <a16:creationId xmlns:a16="http://schemas.microsoft.com/office/drawing/2014/main" id="{0C6385FB-0C18-4D29-B255-14DD6C36BD63}"/>
+                <a16:creationId xmlns:a16="http://schemas.microsoft.com/office/drawing/2014/main" id="{0BDD96CC-30A3-4362-95A6-BFD422610EA9}"/>
               </a:ext>
             </a:extLst>
           </p:cNvPr>
@@ -12638,7 +12638,7 @@
           <p:cNvPr id="15" name="">
             <a:extLst xmlns:a="http://schemas.openxmlformats.org/drawingml/2006/main">
               <a:ext uri="{FF2B5EF4-FFF2-40B4-BE49-F238E27FC236}">
-                <a16:creationId xmlns:a16="http://schemas.microsoft.com/office/drawing/2014/main" id="{E9E6CE7E-FB36-4D3E-A88C-A1F1DB064292}"/>
+                <a16:creationId xmlns:a16="http://schemas.microsoft.com/office/drawing/2014/main" id="{E7F8A37C-1AC8-4CD5-9086-7FCB785AB2B6}"/>
               </a:ext>
             </a:extLst>
           </p:cNvPr>
@@ -12669,7 +12669,7 @@
           <p:cNvPr id="16" name="">
             <a:extLst xmlns:a="http://schemas.openxmlformats.org/drawingml/2006/main">
               <a:ext uri="{FF2B5EF4-FFF2-40B4-BE49-F238E27FC236}">
-                <a16:creationId xmlns:a16="http://schemas.microsoft.com/office/drawing/2014/main" id="{D9B34E2E-D5D1-492F-89A5-2CF9F77ADD90}"/>
+                <a16:creationId xmlns:a16="http://schemas.microsoft.com/office/drawing/2014/main" id="{E570DA70-EFAE-4255-A9AC-BED6CD0F9F93}"/>
               </a:ext>
             </a:extLst>
           </p:cNvPr>
@@ -12731,7 +12731,7 @@
           <p:cNvPr id="17" name="">
             <a:extLst xmlns:a="http://schemas.openxmlformats.org/drawingml/2006/main">
               <a:ext uri="{FF2B5EF4-FFF2-40B4-BE49-F238E27FC236}">
-                <a16:creationId xmlns:a16="http://schemas.microsoft.com/office/drawing/2014/main" id="{EC3A0F18-1CFE-4975-A277-2BDF08D975D2}"/>
+                <a16:creationId xmlns:a16="http://schemas.microsoft.com/office/drawing/2014/main" id="{390DC481-EA56-49B3-A3A2-EEA8B93EC5FB}"/>
               </a:ext>
             </a:extLst>
           </p:cNvPr>
@@ -12793,7 +12793,7 @@
           <p:cNvPr id="18" name="">
             <a:extLst xmlns:a="http://schemas.openxmlformats.org/drawingml/2006/main">
               <a:ext uri="{FF2B5EF4-FFF2-40B4-BE49-F238E27FC236}">
-                <a16:creationId xmlns:a16="http://schemas.microsoft.com/office/drawing/2014/main" id="{51EC2A2A-1117-4E81-9545-E8B0B768F315}"/>
+                <a16:creationId xmlns:a16="http://schemas.microsoft.com/office/drawing/2014/main" id="{64B4349D-9A92-48EB-B347-D305AAB922F5}"/>
               </a:ext>
             </a:extLst>
           </p:cNvPr>
@@ -12855,7 +12855,7 @@
           <p:cNvPr id="19" name="">
             <a:extLst xmlns:a="http://schemas.openxmlformats.org/drawingml/2006/main">
               <a:ext uri="{FF2B5EF4-FFF2-40B4-BE49-F238E27FC236}">
-                <a16:creationId xmlns:a16="http://schemas.microsoft.com/office/drawing/2014/main" id="{1D5FE941-AEE3-4942-8879-CF28818CBA1E}"/>
+                <a16:creationId xmlns:a16="http://schemas.microsoft.com/office/drawing/2014/main" id="{A9EFE471-F0AF-4099-B5A4-597B87CE9F8D}"/>
               </a:ext>
             </a:extLst>
           </p:cNvPr>
@@ -12888,7 +12888,7 @@
           <p:cNvPr id="20" name="">
             <a:extLst xmlns:a="http://schemas.openxmlformats.org/drawingml/2006/main">
               <a:ext uri="{FF2B5EF4-FFF2-40B4-BE49-F238E27FC236}">
-                <a16:creationId xmlns:a16="http://schemas.microsoft.com/office/drawing/2014/main" id="{C27A9D31-F096-4B63-845A-0F19728A5A68}"/>
+                <a16:creationId xmlns:a16="http://schemas.microsoft.com/office/drawing/2014/main" id="{C7F972C6-B94A-4F1C-A6C7-51DE4D420237}"/>
               </a:ext>
             </a:extLst>
           </p:cNvPr>
@@ -12954,7 +12954,7 @@
           <p:nvPr/>
         </p:nvPicPr>
         <p:blipFill>
-          <a:blip xmlns:r="http://schemas.openxmlformats.org/officeDocument/2006/relationships" xmlns:a="http://schemas.openxmlformats.org/drawingml/2006/main" r:embed="R75b676bac08f49b3"/>
+          <a:blip xmlns:r="http://schemas.openxmlformats.org/officeDocument/2006/relationships" xmlns:a="http://schemas.openxmlformats.org/drawingml/2006/main" r:embed="R4165b088ec76461a"/>
           <a:stretch xmlns:a="http://schemas.openxmlformats.org/drawingml/2006/main"/>
         </p:blipFill>
         <p:spPr>
@@ -12972,7 +12972,7 @@
           <p:cNvPr id="22" name="footer-rule-18">
             <a:extLst xmlns:a="http://schemas.openxmlformats.org/drawingml/2006/main">
               <a:ext uri="{FF2B5EF4-FFF2-40B4-BE49-F238E27FC236}">
-                <a16:creationId xmlns:a16="http://schemas.microsoft.com/office/drawing/2014/main" id="{EBFD74D1-8056-4B6B-9B74-A6695F52C239}"/>
+                <a16:creationId xmlns:a16="http://schemas.microsoft.com/office/drawing/2014/main" id="{A574CC08-81A5-4211-9BCF-8ABADBD6E8E1}"/>
               </a:ext>
             </a:extLst>
           </p:cNvPr>
@@ -13003,7 +13003,7 @@
           <p:cNvPr id="23" name="footer-label-18">
             <a:extLst xmlns:a="http://schemas.openxmlformats.org/drawingml/2006/main">
               <a:ext uri="{FF2B5EF4-FFF2-40B4-BE49-F238E27FC236}">
-                <a16:creationId xmlns:a16="http://schemas.microsoft.com/office/drawing/2014/main" id="{7FB79E86-5C17-4429-ABF1-28684B880147}"/>
+                <a16:creationId xmlns:a16="http://schemas.microsoft.com/office/drawing/2014/main" id="{A3F31A77-3C08-4550-8B7E-3021EE467BF5}"/>
               </a:ext>
             </a:extLst>
           </p:cNvPr>
@@ -13065,7 +13065,7 @@
           <p:cNvPr id="24" name="footer-page-18">
             <a:extLst xmlns:a="http://schemas.openxmlformats.org/drawingml/2006/main">
               <a:ext uri="{FF2B5EF4-FFF2-40B4-BE49-F238E27FC236}">
-                <a16:creationId xmlns:a16="http://schemas.microsoft.com/office/drawing/2014/main" id="{333687C3-15DA-4851-9448-88DF60ACBE0C}"/>
+                <a16:creationId xmlns:a16="http://schemas.microsoft.com/office/drawing/2014/main" id="{AD8B8234-E162-434E-9472-BCCB6548225C}"/>
               </a:ext>
             </a:extLst>
           </p:cNvPr>
@@ -13125,7 +13125,7 @@
     </p:spTree>
     <p:extLst>
       <p:ext uri="{BB962C8B-B14F-4D97-AF65-F5344CB8AC3E}">
-        <p14:creationId xmlns:p14="http://schemas.microsoft.com/office/powerpoint/2010/main" val="652363205"/>
+        <p14:creationId xmlns:p14="http://schemas.microsoft.com/office/powerpoint/2010/main" val="400683721"/>
       </p:ext>
     </p:extLst>
   </p:cSld>
@@ -13156,7 +13156,7 @@
           <p:cNvPr id="20" name="side-accent-2">
             <a:extLst xmlns:a="http://schemas.openxmlformats.org/drawingml/2006/main">
               <a:ext uri="{FF2B5EF4-FFF2-40B4-BE49-F238E27FC236}">
-                <a16:creationId xmlns:a16="http://schemas.microsoft.com/office/drawing/2014/main" id="{9D6ECC8C-FDE9-4FB2-8EE1-6777CFCE8D2C}"/>
+                <a16:creationId xmlns:a16="http://schemas.microsoft.com/office/drawing/2014/main" id="{5F39FBC6-F0FC-4823-BE4A-0E19733C5907}"/>
               </a:ext>
             </a:extLst>
           </p:cNvPr>
@@ -13187,7 +13187,7 @@
           <p:cNvPr id="2" name="kicker-2">
             <a:extLst xmlns:a="http://schemas.openxmlformats.org/drawingml/2006/main">
               <a:ext uri="{FF2B5EF4-FFF2-40B4-BE49-F238E27FC236}">
-                <a16:creationId xmlns:a16="http://schemas.microsoft.com/office/drawing/2014/main" id="{6AC7F029-70B8-419F-86CB-913892B2ED91}"/>
+                <a16:creationId xmlns:a16="http://schemas.microsoft.com/office/drawing/2014/main" id="{7DEF3BDE-3DDC-499D-81CD-416DA8A1429D}"/>
               </a:ext>
             </a:extLst>
           </p:cNvPr>
@@ -13249,7 +13249,7 @@
           <p:cNvPr id="3" name="title-2">
             <a:extLst xmlns:a="http://schemas.openxmlformats.org/drawingml/2006/main">
               <a:ext uri="{FF2B5EF4-FFF2-40B4-BE49-F238E27FC236}">
-                <a16:creationId xmlns:a16="http://schemas.microsoft.com/office/drawing/2014/main" id="{EE6396F6-CACC-4F9B-8399-76C4F18734FA}"/>
+                <a16:creationId xmlns:a16="http://schemas.microsoft.com/office/drawing/2014/main" id="{90374745-30E2-4AF2-882D-6397C57AF251}"/>
               </a:ext>
             </a:extLst>
           </p:cNvPr>
@@ -13311,7 +13311,7 @@
           <p:cNvPr id="4" name="">
             <a:extLst xmlns:a="http://schemas.openxmlformats.org/drawingml/2006/main">
               <a:ext uri="{FF2B5EF4-FFF2-40B4-BE49-F238E27FC236}">
-                <a16:creationId xmlns:a16="http://schemas.microsoft.com/office/drawing/2014/main" id="{AA315D70-3616-4451-A3F7-D7E445B27AD1}"/>
+                <a16:creationId xmlns:a16="http://schemas.microsoft.com/office/drawing/2014/main" id="{3396C66E-A6DF-45E6-A12D-09507F0D5D32}"/>
               </a:ext>
             </a:extLst>
           </p:cNvPr>
@@ -13373,7 +13373,7 @@
           <p:cNvPr id="5" name="">
             <a:extLst xmlns:a="http://schemas.openxmlformats.org/drawingml/2006/main">
               <a:ext uri="{FF2B5EF4-FFF2-40B4-BE49-F238E27FC236}">
-                <a16:creationId xmlns:a16="http://schemas.microsoft.com/office/drawing/2014/main" id="{1D5CC336-D387-4701-AC0C-35E8C8DC47B1}"/>
+                <a16:creationId xmlns:a16="http://schemas.microsoft.com/office/drawing/2014/main" id="{EDC79006-CA36-4A20-8E0D-B779C6CDC396}"/>
               </a:ext>
             </a:extLst>
           </p:cNvPr>
@@ -13435,7 +13435,7 @@
           <p:cNvPr id="6" name="">
             <a:extLst xmlns:a="http://schemas.openxmlformats.org/drawingml/2006/main">
               <a:ext uri="{FF2B5EF4-FFF2-40B4-BE49-F238E27FC236}">
-                <a16:creationId xmlns:a16="http://schemas.microsoft.com/office/drawing/2014/main" id="{1C8DA445-4C56-40DA-BB15-3EE3EAB1C0D7}"/>
+                <a16:creationId xmlns:a16="http://schemas.microsoft.com/office/drawing/2014/main" id="{1F116ECE-2DAB-4861-8B53-63DD86646F4C}"/>
               </a:ext>
             </a:extLst>
           </p:cNvPr>
@@ -13466,7 +13466,7 @@
           <p:cNvPr id="7" name="">
             <a:extLst xmlns:a="http://schemas.openxmlformats.org/drawingml/2006/main">
               <a:ext uri="{FF2B5EF4-FFF2-40B4-BE49-F238E27FC236}">
-                <a16:creationId xmlns:a16="http://schemas.microsoft.com/office/drawing/2014/main" id="{EA3BC7C8-90C9-4295-8EAD-1E40D726FF73}"/>
+                <a16:creationId xmlns:a16="http://schemas.microsoft.com/office/drawing/2014/main" id="{73223B30-748D-4182-B0BD-3277B26924B1}"/>
               </a:ext>
             </a:extLst>
           </p:cNvPr>
@@ -13528,7 +13528,7 @@
           <p:cNvPr id="8" name="">
             <a:extLst xmlns:a="http://schemas.openxmlformats.org/drawingml/2006/main">
               <a:ext uri="{FF2B5EF4-FFF2-40B4-BE49-F238E27FC236}">
-                <a16:creationId xmlns:a16="http://schemas.microsoft.com/office/drawing/2014/main" id="{73A310BC-2DB0-473C-9255-9480275A2B63}"/>
+                <a16:creationId xmlns:a16="http://schemas.microsoft.com/office/drawing/2014/main" id="{9325DA1A-C65D-4CBA-8728-73AC0544B4F9}"/>
               </a:ext>
             </a:extLst>
           </p:cNvPr>
@@ -13590,7 +13590,7 @@
           <p:cNvPr id="9" name="">
             <a:extLst xmlns:a="http://schemas.openxmlformats.org/drawingml/2006/main">
               <a:ext uri="{FF2B5EF4-FFF2-40B4-BE49-F238E27FC236}">
-                <a16:creationId xmlns:a16="http://schemas.microsoft.com/office/drawing/2014/main" id="{16B447BA-DD77-480F-A174-D5AFDE8B962F}"/>
+                <a16:creationId xmlns:a16="http://schemas.microsoft.com/office/drawing/2014/main" id="{035E9EBA-4C02-494C-8E25-8FCFDAE37861}"/>
               </a:ext>
             </a:extLst>
           </p:cNvPr>
@@ -13621,7 +13621,7 @@
           <p:cNvPr id="10" name="">
             <a:extLst xmlns:a="http://schemas.openxmlformats.org/drawingml/2006/main">
               <a:ext uri="{FF2B5EF4-FFF2-40B4-BE49-F238E27FC236}">
-                <a16:creationId xmlns:a16="http://schemas.microsoft.com/office/drawing/2014/main" id="{89F48696-602F-407A-97EF-A086388ED98D}"/>
+                <a16:creationId xmlns:a16="http://schemas.microsoft.com/office/drawing/2014/main" id="{4DE751BB-0BAD-4F71-BBE2-2A30DCEF567C}"/>
               </a:ext>
             </a:extLst>
           </p:cNvPr>
@@ -13683,7 +13683,7 @@
           <p:cNvPr id="11" name="">
             <a:extLst xmlns:a="http://schemas.openxmlformats.org/drawingml/2006/main">
               <a:ext uri="{FF2B5EF4-FFF2-40B4-BE49-F238E27FC236}">
-                <a16:creationId xmlns:a16="http://schemas.microsoft.com/office/drawing/2014/main" id="{55CB8845-BF7C-4C41-8F24-D3D78D9208C2}"/>
+                <a16:creationId xmlns:a16="http://schemas.microsoft.com/office/drawing/2014/main" id="{6AC8BECF-1EDA-4AC4-84BC-F082EC4B77D2}"/>
               </a:ext>
             </a:extLst>
           </p:cNvPr>
@@ -13745,7 +13745,7 @@
           <p:cNvPr id="12" name="">
             <a:extLst xmlns:a="http://schemas.openxmlformats.org/drawingml/2006/main">
               <a:ext uri="{FF2B5EF4-FFF2-40B4-BE49-F238E27FC236}">
-                <a16:creationId xmlns:a16="http://schemas.microsoft.com/office/drawing/2014/main" id="{49CC79FD-AF43-45D1-B1FE-5D304F88777D}"/>
+                <a16:creationId xmlns:a16="http://schemas.microsoft.com/office/drawing/2014/main" id="{7CC74EC9-99E4-4FE5-AA70-92942AB528B9}"/>
               </a:ext>
             </a:extLst>
           </p:cNvPr>
@@ -13776,7 +13776,7 @@
           <p:cNvPr id="13" name="">
             <a:extLst xmlns:a="http://schemas.openxmlformats.org/drawingml/2006/main">
               <a:ext uri="{FF2B5EF4-FFF2-40B4-BE49-F238E27FC236}">
-                <a16:creationId xmlns:a16="http://schemas.microsoft.com/office/drawing/2014/main" id="{411AA701-6C7A-476F-A8D3-A193B5546A22}"/>
+                <a16:creationId xmlns:a16="http://schemas.microsoft.com/office/drawing/2014/main" id="{A7E579B7-4511-44EF-86C5-F68BFFAD802F}"/>
               </a:ext>
             </a:extLst>
           </p:cNvPr>
@@ -13838,7 +13838,7 @@
           <p:cNvPr id="14" name="outcome-mark">
             <a:extLst xmlns:a="http://schemas.openxmlformats.org/drawingml/2006/main">
               <a:ext uri="{FF2B5EF4-FFF2-40B4-BE49-F238E27FC236}">
-                <a16:creationId xmlns:a16="http://schemas.microsoft.com/office/drawing/2014/main" id="{E3560FCF-3663-414D-862E-EFFC07D5C65F}"/>
+                <a16:creationId xmlns:a16="http://schemas.microsoft.com/office/drawing/2014/main" id="{2BF0A207-69E3-4A53-AEE7-3497879A0C92}"/>
               </a:ext>
             </a:extLst>
           </p:cNvPr>
@@ -13873,7 +13873,7 @@
           <p:cNvPr id="15" name="">
             <a:extLst xmlns:a="http://schemas.openxmlformats.org/drawingml/2006/main">
               <a:ext uri="{FF2B5EF4-FFF2-40B4-BE49-F238E27FC236}">
-                <a16:creationId xmlns:a16="http://schemas.microsoft.com/office/drawing/2014/main" id="{39AF5EB1-5BBE-4DE7-BAB6-94DB042CB842}"/>
+                <a16:creationId xmlns:a16="http://schemas.microsoft.com/office/drawing/2014/main" id="{7FB6C5AC-4B43-4A28-8AE4-30B6153497C9}"/>
               </a:ext>
             </a:extLst>
           </p:cNvPr>
@@ -13935,7 +13935,7 @@
           <p:cNvPr id="16" name="">
             <a:extLst xmlns:a="http://schemas.openxmlformats.org/drawingml/2006/main">
               <a:ext uri="{FF2B5EF4-FFF2-40B4-BE49-F238E27FC236}">
-                <a16:creationId xmlns:a16="http://schemas.microsoft.com/office/drawing/2014/main" id="{8A8FD49A-9FD2-4367-99A9-1134282377CC}"/>
+                <a16:creationId xmlns:a16="http://schemas.microsoft.com/office/drawing/2014/main" id="{AA367C67-B746-4D21-A501-C1259EAB8D35}"/>
               </a:ext>
             </a:extLst>
           </p:cNvPr>
@@ -14024,7 +14024,7 @@
           <p:cNvPr id="17" name="footer-rule-2">
             <a:extLst xmlns:a="http://schemas.openxmlformats.org/drawingml/2006/main">
               <a:ext uri="{FF2B5EF4-FFF2-40B4-BE49-F238E27FC236}">
-                <a16:creationId xmlns:a16="http://schemas.microsoft.com/office/drawing/2014/main" id="{A3AD2AC2-F21E-4BFC-A997-B5C23F761577}"/>
+                <a16:creationId xmlns:a16="http://schemas.microsoft.com/office/drawing/2014/main" id="{FBC58066-7492-4B03-A47E-84A84A2D9DB1}"/>
               </a:ext>
             </a:extLst>
           </p:cNvPr>
@@ -14055,7 +14055,7 @@
           <p:cNvPr id="18" name="footer-label-2">
             <a:extLst xmlns:a="http://schemas.openxmlformats.org/drawingml/2006/main">
               <a:ext uri="{FF2B5EF4-FFF2-40B4-BE49-F238E27FC236}">
-                <a16:creationId xmlns:a16="http://schemas.microsoft.com/office/drawing/2014/main" id="{13ABA7BA-645F-438F-B80C-59A768986A6B}"/>
+                <a16:creationId xmlns:a16="http://schemas.microsoft.com/office/drawing/2014/main" id="{8C3AC631-3BC6-441F-83FC-1D1BAF5FF067}"/>
               </a:ext>
             </a:extLst>
           </p:cNvPr>
@@ -14117,7 +14117,7 @@
           <p:cNvPr id="19" name="footer-page-2">
             <a:extLst xmlns:a="http://schemas.openxmlformats.org/drawingml/2006/main">
               <a:ext uri="{FF2B5EF4-FFF2-40B4-BE49-F238E27FC236}">
-                <a16:creationId xmlns:a16="http://schemas.microsoft.com/office/drawing/2014/main" id="{9A4D2FFA-6C0B-4D00-9EC3-0C2F4F447070}"/>
+                <a16:creationId xmlns:a16="http://schemas.microsoft.com/office/drawing/2014/main" id="{1ACAE5E0-4835-46C7-8D92-CCA682743547}"/>
               </a:ext>
             </a:extLst>
           </p:cNvPr>
@@ -14177,7 +14177,7 @@
     </p:spTree>
     <p:extLst>
       <p:ext uri="{BB962C8B-B14F-4D97-AF65-F5344CB8AC3E}">
-        <p14:creationId xmlns:p14="http://schemas.microsoft.com/office/powerpoint/2010/main" val="10967585"/>
+        <p14:creationId xmlns:p14="http://schemas.microsoft.com/office/powerpoint/2010/main" val="1076929303"/>
       </p:ext>
     </p:extLst>
   </p:cSld>
@@ -14208,7 +14208,7 @@
           <p:cNvPr id="31" name="side-accent-3">
             <a:extLst xmlns:a="http://schemas.openxmlformats.org/drawingml/2006/main">
               <a:ext uri="{FF2B5EF4-FFF2-40B4-BE49-F238E27FC236}">
-                <a16:creationId xmlns:a16="http://schemas.microsoft.com/office/drawing/2014/main" id="{5BF386A4-30D8-4351-AC0D-12CB5ED173A1}"/>
+                <a16:creationId xmlns:a16="http://schemas.microsoft.com/office/drawing/2014/main" id="{B6E16A85-B711-417F-9EE7-BC0C2050DBAF}"/>
               </a:ext>
             </a:extLst>
           </p:cNvPr>
@@ -14239,7 +14239,7 @@
           <p:cNvPr id="2" name="kicker-3">
             <a:extLst xmlns:a="http://schemas.openxmlformats.org/drawingml/2006/main">
               <a:ext uri="{FF2B5EF4-FFF2-40B4-BE49-F238E27FC236}">
-                <a16:creationId xmlns:a16="http://schemas.microsoft.com/office/drawing/2014/main" id="{8C54917F-C11A-4E71-B7B8-E156E3DA2472}"/>
+                <a16:creationId xmlns:a16="http://schemas.microsoft.com/office/drawing/2014/main" id="{87D7E922-E866-4959-86EA-6E1CCCBFA69E}"/>
               </a:ext>
             </a:extLst>
           </p:cNvPr>
@@ -14301,7 +14301,7 @@
           <p:cNvPr id="3" name="title-3">
             <a:extLst xmlns:a="http://schemas.openxmlformats.org/drawingml/2006/main">
               <a:ext uri="{FF2B5EF4-FFF2-40B4-BE49-F238E27FC236}">
-                <a16:creationId xmlns:a16="http://schemas.microsoft.com/office/drawing/2014/main" id="{0E2656AE-09F8-4A65-8F51-B9DBA1C711F7}"/>
+                <a16:creationId xmlns:a16="http://schemas.microsoft.com/office/drawing/2014/main" id="{16A8A918-2043-4AD8-ABB1-B1AD3D52715E}"/>
               </a:ext>
             </a:extLst>
           </p:cNvPr>
@@ -14363,7 +14363,7 @@
           <p:cNvPr id="4" name="">
             <a:extLst xmlns:a="http://schemas.openxmlformats.org/drawingml/2006/main">
               <a:ext uri="{FF2B5EF4-FFF2-40B4-BE49-F238E27FC236}">
-                <a16:creationId xmlns:a16="http://schemas.microsoft.com/office/drawing/2014/main" id="{A6812D81-4295-497F-9416-4787CEB5F142}"/>
+                <a16:creationId xmlns:a16="http://schemas.microsoft.com/office/drawing/2014/main" id="{8C85A71B-8B0A-405A-B2CF-5EC47BA06184}"/>
               </a:ext>
             </a:extLst>
           </p:cNvPr>
@@ -14425,7 +14425,7 @@
           <p:cNvPr id="5" name="system-function-line">
             <a:extLst xmlns:a="http://schemas.openxmlformats.org/drawingml/2006/main">
               <a:ext uri="{FF2B5EF4-FFF2-40B4-BE49-F238E27FC236}">
-                <a16:creationId xmlns:a16="http://schemas.microsoft.com/office/drawing/2014/main" id="{D5EB675B-CC94-4B43-8CEC-CDC689DD424F}"/>
+                <a16:creationId xmlns:a16="http://schemas.microsoft.com/office/drawing/2014/main" id="{03743DEE-F1B2-4293-B7C6-AE23B6D1F89D}"/>
               </a:ext>
             </a:extLst>
           </p:cNvPr>
@@ -14456,7 +14456,7 @@
           <p:cNvPr id="6" name="">
             <a:extLst xmlns:a="http://schemas.openxmlformats.org/drawingml/2006/main">
               <a:ext uri="{FF2B5EF4-FFF2-40B4-BE49-F238E27FC236}">
-                <a16:creationId xmlns:a16="http://schemas.microsoft.com/office/drawing/2014/main" id="{54421334-5620-4732-B57A-F141782398AD}"/>
+                <a16:creationId xmlns:a16="http://schemas.microsoft.com/office/drawing/2014/main" id="{E4BFF412-7A43-4C6E-B70B-D1BCAA1CBE07}"/>
               </a:ext>
             </a:extLst>
           </p:cNvPr>
@@ -14487,7 +14487,7 @@
           <p:cNvPr id="7" name="">
             <a:extLst xmlns:a="http://schemas.openxmlformats.org/drawingml/2006/main">
               <a:ext uri="{FF2B5EF4-FFF2-40B4-BE49-F238E27FC236}">
-                <a16:creationId xmlns:a16="http://schemas.microsoft.com/office/drawing/2014/main" id="{94F9E7CC-37E5-4C37-878F-627E31B01EB3}"/>
+                <a16:creationId xmlns:a16="http://schemas.microsoft.com/office/drawing/2014/main" id="{76D7BB26-306C-45BB-8226-57AED507A3E2}"/>
               </a:ext>
             </a:extLst>
           </p:cNvPr>
@@ -14549,7 +14549,7 @@
           <p:cNvPr id="8" name="">
             <a:extLst xmlns:a="http://schemas.openxmlformats.org/drawingml/2006/main">
               <a:ext uri="{FF2B5EF4-FFF2-40B4-BE49-F238E27FC236}">
-                <a16:creationId xmlns:a16="http://schemas.microsoft.com/office/drawing/2014/main" id="{BA56FF99-7B6F-4536-BCCB-E919E861AD18}"/>
+                <a16:creationId xmlns:a16="http://schemas.microsoft.com/office/drawing/2014/main" id="{235EAEF6-7AF3-4E22-A8D7-CD9D8B3B7DAE}"/>
               </a:ext>
             </a:extLst>
           </p:cNvPr>
@@ -14611,7 +14611,7 @@
           <p:cNvPr id="9" name="">
             <a:extLst xmlns:a="http://schemas.openxmlformats.org/drawingml/2006/main">
               <a:ext uri="{FF2B5EF4-FFF2-40B4-BE49-F238E27FC236}">
-                <a16:creationId xmlns:a16="http://schemas.microsoft.com/office/drawing/2014/main" id="{6C23662A-88E7-4433-88BB-58AF83D69A5A}"/>
+                <a16:creationId xmlns:a16="http://schemas.microsoft.com/office/drawing/2014/main" id="{019688E4-48E5-404D-91D4-1C7A68C3707F}"/>
               </a:ext>
             </a:extLst>
           </p:cNvPr>
@@ -14673,7 +14673,7 @@
           <p:cNvPr id="10" name="">
             <a:extLst xmlns:a="http://schemas.openxmlformats.org/drawingml/2006/main">
               <a:ext uri="{FF2B5EF4-FFF2-40B4-BE49-F238E27FC236}">
-                <a16:creationId xmlns:a16="http://schemas.microsoft.com/office/drawing/2014/main" id="{83BEBC1C-4A4C-4413-A055-9CB66FE172E6}"/>
+                <a16:creationId xmlns:a16="http://schemas.microsoft.com/office/drawing/2014/main" id="{B072F000-A35C-406D-8CB0-F5213AA78EC4}"/>
               </a:ext>
             </a:extLst>
           </p:cNvPr>
@@ -14704,7 +14704,7 @@
           <p:cNvPr id="11" name="">
             <a:extLst xmlns:a="http://schemas.openxmlformats.org/drawingml/2006/main">
               <a:ext uri="{FF2B5EF4-FFF2-40B4-BE49-F238E27FC236}">
-                <a16:creationId xmlns:a16="http://schemas.microsoft.com/office/drawing/2014/main" id="{2203F167-4FC8-4727-A6DD-5A07CBD3A957}"/>
+                <a16:creationId xmlns:a16="http://schemas.microsoft.com/office/drawing/2014/main" id="{446CEB7A-AA3A-4ABC-BA32-081E8BD56095}"/>
               </a:ext>
             </a:extLst>
           </p:cNvPr>
@@ -14766,7 +14766,7 @@
           <p:cNvPr id="12" name="">
             <a:extLst xmlns:a="http://schemas.openxmlformats.org/drawingml/2006/main">
               <a:ext uri="{FF2B5EF4-FFF2-40B4-BE49-F238E27FC236}">
-                <a16:creationId xmlns:a16="http://schemas.microsoft.com/office/drawing/2014/main" id="{619A51F2-5BBE-4DFD-8C5F-8002B72231C1}"/>
+                <a16:creationId xmlns:a16="http://schemas.microsoft.com/office/drawing/2014/main" id="{894B0A28-334B-4C53-AEE0-F58AE48E258A}"/>
               </a:ext>
             </a:extLst>
           </p:cNvPr>
@@ -14828,7 +14828,7 @@
           <p:cNvPr id="13" name="">
             <a:extLst xmlns:a="http://schemas.openxmlformats.org/drawingml/2006/main">
               <a:ext uri="{FF2B5EF4-FFF2-40B4-BE49-F238E27FC236}">
-                <a16:creationId xmlns:a16="http://schemas.microsoft.com/office/drawing/2014/main" id="{F6B0698F-E8B7-47D5-A098-EA3B70440849}"/>
+                <a16:creationId xmlns:a16="http://schemas.microsoft.com/office/drawing/2014/main" id="{870DB1E7-5A75-406A-A710-4A16D9799786}"/>
               </a:ext>
             </a:extLst>
           </p:cNvPr>
@@ -14890,7 +14890,7 @@
           <p:cNvPr id="14" name="">
             <a:extLst xmlns:a="http://schemas.openxmlformats.org/drawingml/2006/main">
               <a:ext uri="{FF2B5EF4-FFF2-40B4-BE49-F238E27FC236}">
-                <a16:creationId xmlns:a16="http://schemas.microsoft.com/office/drawing/2014/main" id="{DDCCE7CF-59B5-43A0-B0F2-DCDBABD977DD}"/>
+                <a16:creationId xmlns:a16="http://schemas.microsoft.com/office/drawing/2014/main" id="{DCAA1765-ACB5-4028-9997-B6CE23F09F3C}"/>
               </a:ext>
             </a:extLst>
           </p:cNvPr>
@@ -14921,7 +14921,7 @@
           <p:cNvPr id="15" name="">
             <a:extLst xmlns:a="http://schemas.openxmlformats.org/drawingml/2006/main">
               <a:ext uri="{FF2B5EF4-FFF2-40B4-BE49-F238E27FC236}">
-                <a16:creationId xmlns:a16="http://schemas.microsoft.com/office/drawing/2014/main" id="{7C3C391E-4266-4502-9DD3-829228C39D19}"/>
+                <a16:creationId xmlns:a16="http://schemas.microsoft.com/office/drawing/2014/main" id="{4C9588DA-690D-4D19-A441-18DBB4EFF908}"/>
               </a:ext>
             </a:extLst>
           </p:cNvPr>
@@ -14983,7 +14983,7 @@
           <p:cNvPr id="16" name="">
             <a:extLst xmlns:a="http://schemas.openxmlformats.org/drawingml/2006/main">
               <a:ext uri="{FF2B5EF4-FFF2-40B4-BE49-F238E27FC236}">
-                <a16:creationId xmlns:a16="http://schemas.microsoft.com/office/drawing/2014/main" id="{29EE9ADD-05B9-437A-9186-2349241C1353}"/>
+                <a16:creationId xmlns:a16="http://schemas.microsoft.com/office/drawing/2014/main" id="{5B3E96CB-0043-472B-ADAA-962E7F979589}"/>
               </a:ext>
             </a:extLst>
           </p:cNvPr>
@@ -15045,7 +15045,7 @@
           <p:cNvPr id="17" name="">
             <a:extLst xmlns:a="http://schemas.openxmlformats.org/drawingml/2006/main">
               <a:ext uri="{FF2B5EF4-FFF2-40B4-BE49-F238E27FC236}">
-                <a16:creationId xmlns:a16="http://schemas.microsoft.com/office/drawing/2014/main" id="{E793C515-99BD-4081-9B8A-0682C7AE057C}"/>
+                <a16:creationId xmlns:a16="http://schemas.microsoft.com/office/drawing/2014/main" id="{251320BB-309E-4A67-AB5E-31B7C3EDD1DB}"/>
               </a:ext>
             </a:extLst>
           </p:cNvPr>
@@ -15107,7 +15107,7 @@
           <p:cNvPr id="18" name="">
             <a:extLst xmlns:a="http://schemas.openxmlformats.org/drawingml/2006/main">
               <a:ext uri="{FF2B5EF4-FFF2-40B4-BE49-F238E27FC236}">
-                <a16:creationId xmlns:a16="http://schemas.microsoft.com/office/drawing/2014/main" id="{E5388E30-152B-464F-8A51-FA999BE915AD}"/>
+                <a16:creationId xmlns:a16="http://schemas.microsoft.com/office/drawing/2014/main" id="{EED0895E-7795-46D2-B343-54E51F59BE57}"/>
               </a:ext>
             </a:extLst>
           </p:cNvPr>
@@ -15138,7 +15138,7 @@
           <p:cNvPr id="19" name="">
             <a:extLst xmlns:a="http://schemas.openxmlformats.org/drawingml/2006/main">
               <a:ext uri="{FF2B5EF4-FFF2-40B4-BE49-F238E27FC236}">
-                <a16:creationId xmlns:a16="http://schemas.microsoft.com/office/drawing/2014/main" id="{CABB522A-32A4-4001-8A2C-858BD97913CE}"/>
+                <a16:creationId xmlns:a16="http://schemas.microsoft.com/office/drawing/2014/main" id="{04F2216A-BF31-470E-8023-63FBB4E2FA5C}"/>
               </a:ext>
             </a:extLst>
           </p:cNvPr>
@@ -15200,7 +15200,7 @@
           <p:cNvPr id="20" name="">
             <a:extLst xmlns:a="http://schemas.openxmlformats.org/drawingml/2006/main">
               <a:ext uri="{FF2B5EF4-FFF2-40B4-BE49-F238E27FC236}">
-                <a16:creationId xmlns:a16="http://schemas.microsoft.com/office/drawing/2014/main" id="{4E5F1D2E-2A7A-464C-8769-BE349EFF1C9B}"/>
+                <a16:creationId xmlns:a16="http://schemas.microsoft.com/office/drawing/2014/main" id="{9CB14D7C-05A9-48A9-870F-451A9D4A12D1}"/>
               </a:ext>
             </a:extLst>
           </p:cNvPr>
@@ -15262,7 +15262,7 @@
           <p:cNvPr id="21" name="">
             <a:extLst xmlns:a="http://schemas.openxmlformats.org/drawingml/2006/main">
               <a:ext uri="{FF2B5EF4-FFF2-40B4-BE49-F238E27FC236}">
-                <a16:creationId xmlns:a16="http://schemas.microsoft.com/office/drawing/2014/main" id="{DF8CF7BF-ADA2-4BA0-A6CC-A1ECB362AC7C}"/>
+                <a16:creationId xmlns:a16="http://schemas.microsoft.com/office/drawing/2014/main" id="{9834CD60-8794-4C46-8C90-C4FF608ACF77}"/>
               </a:ext>
             </a:extLst>
           </p:cNvPr>
@@ -15324,7 +15324,7 @@
           <p:cNvPr id="22" name="">
             <a:extLst xmlns:a="http://schemas.openxmlformats.org/drawingml/2006/main">
               <a:ext uri="{FF2B5EF4-FFF2-40B4-BE49-F238E27FC236}">
-                <a16:creationId xmlns:a16="http://schemas.microsoft.com/office/drawing/2014/main" id="{E2863959-C304-4CDF-B4B4-27209B8A3102}"/>
+                <a16:creationId xmlns:a16="http://schemas.microsoft.com/office/drawing/2014/main" id="{1CC4DBD4-535B-43E7-A392-39DAE0E1E394}"/>
               </a:ext>
             </a:extLst>
           </p:cNvPr>
@@ -15355,7 +15355,7 @@
           <p:cNvPr id="23" name="">
             <a:extLst xmlns:a="http://schemas.openxmlformats.org/drawingml/2006/main">
               <a:ext uri="{FF2B5EF4-FFF2-40B4-BE49-F238E27FC236}">
-                <a16:creationId xmlns:a16="http://schemas.microsoft.com/office/drawing/2014/main" id="{767306EC-B225-456C-B22B-2CA2810B09AD}"/>
+                <a16:creationId xmlns:a16="http://schemas.microsoft.com/office/drawing/2014/main" id="{54AB5625-F3F1-49A9-8B4F-055953845B7B}"/>
               </a:ext>
             </a:extLst>
           </p:cNvPr>
@@ -15417,7 +15417,7 @@
           <p:cNvPr id="24" name="">
             <a:extLst xmlns:a="http://schemas.openxmlformats.org/drawingml/2006/main">
               <a:ext uri="{FF2B5EF4-FFF2-40B4-BE49-F238E27FC236}">
-                <a16:creationId xmlns:a16="http://schemas.microsoft.com/office/drawing/2014/main" id="{2AE2C188-3E3C-4BF7-8932-C477A246B67E}"/>
+                <a16:creationId xmlns:a16="http://schemas.microsoft.com/office/drawing/2014/main" id="{ED31378E-9E0D-498F-A44B-6A2B5384CE30}"/>
               </a:ext>
             </a:extLst>
           </p:cNvPr>
@@ -15479,7 +15479,7 @@
           <p:cNvPr id="25" name="">
             <a:extLst xmlns:a="http://schemas.openxmlformats.org/drawingml/2006/main">
               <a:ext uri="{FF2B5EF4-FFF2-40B4-BE49-F238E27FC236}">
-                <a16:creationId xmlns:a16="http://schemas.microsoft.com/office/drawing/2014/main" id="{E89C4276-7334-4983-B6EF-EEA1279D2246}"/>
+                <a16:creationId xmlns:a16="http://schemas.microsoft.com/office/drawing/2014/main" id="{48CFF0C0-5D06-47FC-8F88-2E87346EE358}"/>
               </a:ext>
             </a:extLst>
           </p:cNvPr>
@@ -15541,7 +15541,7 @@
           <p:cNvPr id="26" name="">
             <a:extLst xmlns:a="http://schemas.openxmlformats.org/drawingml/2006/main">
               <a:ext uri="{FF2B5EF4-FFF2-40B4-BE49-F238E27FC236}">
-                <a16:creationId xmlns:a16="http://schemas.microsoft.com/office/drawing/2014/main" id="{3BF0B0BA-FC3F-4FA0-A69C-51129FD4F076}"/>
+                <a16:creationId xmlns:a16="http://schemas.microsoft.com/office/drawing/2014/main" id="{C5E30495-B203-4BE0-91F1-AADEA66EB7E4}"/>
               </a:ext>
             </a:extLst>
           </p:cNvPr>
@@ -15574,7 +15574,7 @@
           <p:cNvPr id="27" name="">
             <a:extLst xmlns:a="http://schemas.openxmlformats.org/drawingml/2006/main">
               <a:ext uri="{FF2B5EF4-FFF2-40B4-BE49-F238E27FC236}">
-                <a16:creationId xmlns:a16="http://schemas.microsoft.com/office/drawing/2014/main" id="{FFD95CA1-73D4-4BA1-A21B-0328A6FFE315}"/>
+                <a16:creationId xmlns:a16="http://schemas.microsoft.com/office/drawing/2014/main" id="{7D1F2B51-1E9A-4B99-B39E-6E60E433ED2E}"/>
               </a:ext>
             </a:extLst>
           </p:cNvPr>
@@ -15636,7 +15636,7 @@
           <p:cNvPr id="28" name="footer-rule-3">
             <a:extLst xmlns:a="http://schemas.openxmlformats.org/drawingml/2006/main">
               <a:ext uri="{FF2B5EF4-FFF2-40B4-BE49-F238E27FC236}">
-                <a16:creationId xmlns:a16="http://schemas.microsoft.com/office/drawing/2014/main" id="{8DEC78D2-312A-4C58-B793-2514EE684ABF}"/>
+                <a16:creationId xmlns:a16="http://schemas.microsoft.com/office/drawing/2014/main" id="{882D1DA0-55F0-460E-B522-196A4F5E2903}"/>
               </a:ext>
             </a:extLst>
           </p:cNvPr>
@@ -15667,7 +15667,7 @@
           <p:cNvPr id="29" name="footer-label-3">
             <a:extLst xmlns:a="http://schemas.openxmlformats.org/drawingml/2006/main">
               <a:ext uri="{FF2B5EF4-FFF2-40B4-BE49-F238E27FC236}">
-                <a16:creationId xmlns:a16="http://schemas.microsoft.com/office/drawing/2014/main" id="{1FC51D88-8021-451F-BA54-F650670B7C4D}"/>
+                <a16:creationId xmlns:a16="http://schemas.microsoft.com/office/drawing/2014/main" id="{CE04E8D3-EBE6-4849-9F9C-227325324EA3}"/>
               </a:ext>
             </a:extLst>
           </p:cNvPr>
@@ -15729,7 +15729,7 @@
           <p:cNvPr id="30" name="footer-page-3">
             <a:extLst xmlns:a="http://schemas.openxmlformats.org/drawingml/2006/main">
               <a:ext uri="{FF2B5EF4-FFF2-40B4-BE49-F238E27FC236}">
-                <a16:creationId xmlns:a16="http://schemas.microsoft.com/office/drawing/2014/main" id="{E8472CF9-813F-4D21-A175-784E00CA8BAB}"/>
+                <a16:creationId xmlns:a16="http://schemas.microsoft.com/office/drawing/2014/main" id="{26BC1363-FA26-400F-A2EC-9623E3B8436C}"/>
               </a:ext>
             </a:extLst>
           </p:cNvPr>
@@ -15789,7 +15789,7 @@
     </p:spTree>
     <p:extLst>
       <p:ext uri="{BB962C8B-B14F-4D97-AF65-F5344CB8AC3E}">
-        <p14:creationId xmlns:p14="http://schemas.microsoft.com/office/powerpoint/2010/main" val="1059400256"/>
+        <p14:creationId xmlns:p14="http://schemas.microsoft.com/office/powerpoint/2010/main" val="2075107788"/>
       </p:ext>
     </p:extLst>
   </p:cSld>
@@ -15820,7 +15820,7 @@
           <p:cNvPr id="28" name="side-accent-4">
             <a:extLst xmlns:a="http://schemas.openxmlformats.org/drawingml/2006/main">
               <a:ext uri="{FF2B5EF4-FFF2-40B4-BE49-F238E27FC236}">
-                <a16:creationId xmlns:a16="http://schemas.microsoft.com/office/drawing/2014/main" id="{ED76D571-708E-42B4-AAB3-F4763F666388}"/>
+                <a16:creationId xmlns:a16="http://schemas.microsoft.com/office/drawing/2014/main" id="{C230977E-6D11-459F-98A4-8EB12ED7BDC3}"/>
               </a:ext>
             </a:extLst>
           </p:cNvPr>
@@ -15851,7 +15851,7 @@
           <p:cNvPr id="2" name="kicker-4">
             <a:extLst xmlns:a="http://schemas.openxmlformats.org/drawingml/2006/main">
               <a:ext uri="{FF2B5EF4-FFF2-40B4-BE49-F238E27FC236}">
-                <a16:creationId xmlns:a16="http://schemas.microsoft.com/office/drawing/2014/main" id="{6A962E39-1F5D-4CCA-B490-250FEE77A72D}"/>
+                <a16:creationId xmlns:a16="http://schemas.microsoft.com/office/drawing/2014/main" id="{9989BFA6-6AF8-489D-80EE-A735B4A64EFA}"/>
               </a:ext>
             </a:extLst>
           </p:cNvPr>
@@ -15913,7 +15913,7 @@
           <p:cNvPr id="3" name="title-4">
             <a:extLst xmlns:a="http://schemas.openxmlformats.org/drawingml/2006/main">
               <a:ext uri="{FF2B5EF4-FFF2-40B4-BE49-F238E27FC236}">
-                <a16:creationId xmlns:a16="http://schemas.microsoft.com/office/drawing/2014/main" id="{77741C1B-C737-42C7-A72F-AF63FCF3E96B}"/>
+                <a16:creationId xmlns:a16="http://schemas.microsoft.com/office/drawing/2014/main" id="{81BF8EC9-61F9-4D41-974A-F3569458C3CB}"/>
               </a:ext>
             </a:extLst>
           </p:cNvPr>
@@ -15975,7 +15975,7 @@
           <p:cNvPr id="4" name="">
             <a:extLst xmlns:a="http://schemas.openxmlformats.org/drawingml/2006/main">
               <a:ext uri="{FF2B5EF4-FFF2-40B4-BE49-F238E27FC236}">
-                <a16:creationId xmlns:a16="http://schemas.microsoft.com/office/drawing/2014/main" id="{B73370B3-CA2D-46D4-B9A5-22E9DB4F20AE}"/>
+                <a16:creationId xmlns:a16="http://schemas.microsoft.com/office/drawing/2014/main" id="{86371B4C-583F-4619-AD4F-37E9ABCBEAC1}"/>
               </a:ext>
             </a:extLst>
           </p:cNvPr>
@@ -16037,7 +16037,7 @@
           <p:cNvPr id="5" name="">
             <a:extLst xmlns:a="http://schemas.openxmlformats.org/drawingml/2006/main">
               <a:ext uri="{FF2B5EF4-FFF2-40B4-BE49-F238E27FC236}">
-                <a16:creationId xmlns:a16="http://schemas.microsoft.com/office/drawing/2014/main" id="{14CA03C1-F70B-44B6-B709-F0E39B480FC4}"/>
+                <a16:creationId xmlns:a16="http://schemas.microsoft.com/office/drawing/2014/main" id="{777FCC9B-FFF2-4911-A899-BCAAC7F19BE8}"/>
               </a:ext>
             </a:extLst>
           </p:cNvPr>
@@ -16099,7 +16099,7 @@
           <p:cNvPr id="6" name="">
             <a:extLst xmlns:a="http://schemas.openxmlformats.org/drawingml/2006/main">
               <a:ext uri="{FF2B5EF4-FFF2-40B4-BE49-F238E27FC236}">
-                <a16:creationId xmlns:a16="http://schemas.microsoft.com/office/drawing/2014/main" id="{23D64612-C6E6-4FDD-B1F1-94ED422EE545}"/>
+                <a16:creationId xmlns:a16="http://schemas.microsoft.com/office/drawing/2014/main" id="{13E49561-01FE-4F87-B64B-0E852C6802C0}"/>
               </a:ext>
             </a:extLst>
           </p:cNvPr>
@@ -16161,7 +16161,7 @@
           <p:cNvPr id="7" name="">
             <a:extLst xmlns:a="http://schemas.openxmlformats.org/drawingml/2006/main">
               <a:ext uri="{FF2B5EF4-FFF2-40B4-BE49-F238E27FC236}">
-                <a16:creationId xmlns:a16="http://schemas.microsoft.com/office/drawing/2014/main" id="{C7A55164-917C-4B03-B5CC-F4EC642318FE}"/>
+                <a16:creationId xmlns:a16="http://schemas.microsoft.com/office/drawing/2014/main" id="{A4CFF80E-0B24-4E25-9411-0FE488670D27}"/>
               </a:ext>
             </a:extLst>
           </p:cNvPr>
@@ -16192,7 +16192,7 @@
           <p:cNvPr id="8" name="">
             <a:extLst xmlns:a="http://schemas.openxmlformats.org/drawingml/2006/main">
               <a:ext uri="{FF2B5EF4-FFF2-40B4-BE49-F238E27FC236}">
-                <a16:creationId xmlns:a16="http://schemas.microsoft.com/office/drawing/2014/main" id="{553936E1-78F3-4BBA-AA7A-E2CDF699484A}"/>
+                <a16:creationId xmlns:a16="http://schemas.microsoft.com/office/drawing/2014/main" id="{B7307CD9-CB3D-4481-90C2-38D60C0029B3}"/>
               </a:ext>
             </a:extLst>
           </p:cNvPr>
@@ -16254,7 +16254,7 @@
           <p:cNvPr id="9" name="">
             <a:extLst xmlns:a="http://schemas.openxmlformats.org/drawingml/2006/main">
               <a:ext uri="{FF2B5EF4-FFF2-40B4-BE49-F238E27FC236}">
-                <a16:creationId xmlns:a16="http://schemas.microsoft.com/office/drawing/2014/main" id="{3113463B-552C-4AEC-8495-2D8168BCDFA5}"/>
+                <a16:creationId xmlns:a16="http://schemas.microsoft.com/office/drawing/2014/main" id="{D39D51CB-5182-4BEE-A9BC-74DAFBDED57C}"/>
               </a:ext>
             </a:extLst>
           </p:cNvPr>
@@ -16316,7 +16316,7 @@
           <p:cNvPr id="10" name="">
             <a:extLst xmlns:a="http://schemas.openxmlformats.org/drawingml/2006/main">
               <a:ext uri="{FF2B5EF4-FFF2-40B4-BE49-F238E27FC236}">
-                <a16:creationId xmlns:a16="http://schemas.microsoft.com/office/drawing/2014/main" id="{2073F029-F642-47FC-A841-101E49450725}"/>
+                <a16:creationId xmlns:a16="http://schemas.microsoft.com/office/drawing/2014/main" id="{E556A328-3272-4503-BB64-A1B1A7DC7A6D}"/>
               </a:ext>
             </a:extLst>
           </p:cNvPr>
@@ -16378,7 +16378,7 @@
           <p:cNvPr id="11" name="">
             <a:extLst xmlns:a="http://schemas.openxmlformats.org/drawingml/2006/main">
               <a:ext uri="{FF2B5EF4-FFF2-40B4-BE49-F238E27FC236}">
-                <a16:creationId xmlns:a16="http://schemas.microsoft.com/office/drawing/2014/main" id="{26DBD86D-0936-472A-A6D3-A1F4F1C37A6E}"/>
+                <a16:creationId xmlns:a16="http://schemas.microsoft.com/office/drawing/2014/main" id="{DE38777A-C360-4ECF-80F2-21E26A2960E3}"/>
               </a:ext>
             </a:extLst>
           </p:cNvPr>
@@ -16409,7 +16409,7 @@
           <p:cNvPr id="12" name="">
             <a:extLst xmlns:a="http://schemas.openxmlformats.org/drawingml/2006/main">
               <a:ext uri="{FF2B5EF4-FFF2-40B4-BE49-F238E27FC236}">
-                <a16:creationId xmlns:a16="http://schemas.microsoft.com/office/drawing/2014/main" id="{FB0F3D1B-B311-4831-BECF-039B26AE856D}"/>
+                <a16:creationId xmlns:a16="http://schemas.microsoft.com/office/drawing/2014/main" id="{BF864C6E-F80A-462B-8E5D-E243B37EB4BD}"/>
               </a:ext>
             </a:extLst>
           </p:cNvPr>
@@ -16471,7 +16471,7 @@
           <p:cNvPr id="13" name="">
             <a:extLst xmlns:a="http://schemas.openxmlformats.org/drawingml/2006/main">
               <a:ext uri="{FF2B5EF4-FFF2-40B4-BE49-F238E27FC236}">
-                <a16:creationId xmlns:a16="http://schemas.microsoft.com/office/drawing/2014/main" id="{19D045FD-F063-402F-BFC4-3FF189E88C3D}"/>
+                <a16:creationId xmlns:a16="http://schemas.microsoft.com/office/drawing/2014/main" id="{030F5BD0-4C08-45CB-AA29-5B5B2FFDFDC0}"/>
               </a:ext>
             </a:extLst>
           </p:cNvPr>
@@ -16533,7 +16533,7 @@
           <p:cNvPr id="14" name="">
             <a:extLst xmlns:a="http://schemas.openxmlformats.org/drawingml/2006/main">
               <a:ext uri="{FF2B5EF4-FFF2-40B4-BE49-F238E27FC236}">
-                <a16:creationId xmlns:a16="http://schemas.microsoft.com/office/drawing/2014/main" id="{FD196C84-5C79-434A-A1B6-99386CF28704}"/>
+                <a16:creationId xmlns:a16="http://schemas.microsoft.com/office/drawing/2014/main" id="{10C5DA47-B5D3-45FF-8A03-361CC7247A6C}"/>
               </a:ext>
             </a:extLst>
           </p:cNvPr>
@@ -16595,7 +16595,7 @@
           <p:cNvPr id="15" name="">
             <a:extLst xmlns:a="http://schemas.openxmlformats.org/drawingml/2006/main">
               <a:ext uri="{FF2B5EF4-FFF2-40B4-BE49-F238E27FC236}">
-                <a16:creationId xmlns:a16="http://schemas.microsoft.com/office/drawing/2014/main" id="{BC676BDA-04F6-4438-A860-C1BDA3F0B8B1}"/>
+                <a16:creationId xmlns:a16="http://schemas.microsoft.com/office/drawing/2014/main" id="{D88BEDBD-A047-4DA1-836B-7859411327ED}"/>
               </a:ext>
             </a:extLst>
           </p:cNvPr>
@@ -16626,7 +16626,7 @@
           <p:cNvPr id="16" name="">
             <a:extLst xmlns:a="http://schemas.openxmlformats.org/drawingml/2006/main">
               <a:ext uri="{FF2B5EF4-FFF2-40B4-BE49-F238E27FC236}">
-                <a16:creationId xmlns:a16="http://schemas.microsoft.com/office/drawing/2014/main" id="{CE8CC266-00B8-467E-8367-12849BD811BC}"/>
+                <a16:creationId xmlns:a16="http://schemas.microsoft.com/office/drawing/2014/main" id="{66DC0892-E950-433A-BB23-C3E7F01A0BB9}"/>
               </a:ext>
             </a:extLst>
           </p:cNvPr>
@@ -16688,7 +16688,7 @@
           <p:cNvPr id="17" name="">
             <a:extLst xmlns:a="http://schemas.openxmlformats.org/drawingml/2006/main">
               <a:ext uri="{FF2B5EF4-FFF2-40B4-BE49-F238E27FC236}">
-                <a16:creationId xmlns:a16="http://schemas.microsoft.com/office/drawing/2014/main" id="{71EFF172-25C0-4D36-8B62-65343C6E6028}"/>
+                <a16:creationId xmlns:a16="http://schemas.microsoft.com/office/drawing/2014/main" id="{0CA5D9E3-1516-45A8-97A8-AF75A2AB9759}"/>
               </a:ext>
             </a:extLst>
           </p:cNvPr>
@@ -16750,7 +16750,7 @@
           <p:cNvPr id="18" name="">
             <a:extLst xmlns:a="http://schemas.openxmlformats.org/drawingml/2006/main">
               <a:ext uri="{FF2B5EF4-FFF2-40B4-BE49-F238E27FC236}">
-                <a16:creationId xmlns:a16="http://schemas.microsoft.com/office/drawing/2014/main" id="{A5498F78-F1CF-41D4-92D3-D9EBA2CF82E5}"/>
+                <a16:creationId xmlns:a16="http://schemas.microsoft.com/office/drawing/2014/main" id="{CBD8CC72-711C-40CB-B611-70E2BDE47E24}"/>
               </a:ext>
             </a:extLst>
           </p:cNvPr>
@@ -16812,7 +16812,7 @@
           <p:cNvPr id="19" name="">
             <a:extLst xmlns:a="http://schemas.openxmlformats.org/drawingml/2006/main">
               <a:ext uri="{FF2B5EF4-FFF2-40B4-BE49-F238E27FC236}">
-                <a16:creationId xmlns:a16="http://schemas.microsoft.com/office/drawing/2014/main" id="{424205F4-EA75-4FF1-B2CB-A3EB537981C6}"/>
+                <a16:creationId xmlns:a16="http://schemas.microsoft.com/office/drawing/2014/main" id="{B22DC1B5-279C-4258-8E1D-B3D8E4B03221}"/>
               </a:ext>
             </a:extLst>
           </p:cNvPr>
@@ -16843,7 +16843,7 @@
           <p:cNvPr id="20" name="">
             <a:extLst xmlns:a="http://schemas.openxmlformats.org/drawingml/2006/main">
               <a:ext uri="{FF2B5EF4-FFF2-40B4-BE49-F238E27FC236}">
-                <a16:creationId xmlns:a16="http://schemas.microsoft.com/office/drawing/2014/main" id="{AFD71A8A-DE74-4AC8-BA9E-0FF972DCAD06}"/>
+                <a16:creationId xmlns:a16="http://schemas.microsoft.com/office/drawing/2014/main" id="{29BD0D5C-247C-4229-BBF3-2F31DAF13702}"/>
               </a:ext>
             </a:extLst>
           </p:cNvPr>
@@ -16905,7 +16905,7 @@
           <p:cNvPr id="21" name="">
             <a:extLst xmlns:a="http://schemas.openxmlformats.org/drawingml/2006/main">
               <a:ext uri="{FF2B5EF4-FFF2-40B4-BE49-F238E27FC236}">
-                <a16:creationId xmlns:a16="http://schemas.microsoft.com/office/drawing/2014/main" id="{2DBAA058-EB95-4E52-A149-AEDD598E9648}"/>
+                <a16:creationId xmlns:a16="http://schemas.microsoft.com/office/drawing/2014/main" id="{8F34B9B9-FF87-47FF-91AF-07672660012A}"/>
               </a:ext>
             </a:extLst>
           </p:cNvPr>
@@ -16967,7 +16967,7 @@
           <p:cNvPr id="22" name="">
             <a:extLst xmlns:a="http://schemas.openxmlformats.org/drawingml/2006/main">
               <a:ext uri="{FF2B5EF4-FFF2-40B4-BE49-F238E27FC236}">
-                <a16:creationId xmlns:a16="http://schemas.microsoft.com/office/drawing/2014/main" id="{E9BCAB8B-5E87-4598-A5ED-B0FCC933A946}"/>
+                <a16:creationId xmlns:a16="http://schemas.microsoft.com/office/drawing/2014/main" id="{89C1B65F-ED47-4C2E-A233-052FF9F3927D}"/>
               </a:ext>
             </a:extLst>
           </p:cNvPr>
@@ -17029,7 +17029,7 @@
           <p:cNvPr id="23" name="">
             <a:extLst xmlns:a="http://schemas.openxmlformats.org/drawingml/2006/main">
               <a:ext uri="{FF2B5EF4-FFF2-40B4-BE49-F238E27FC236}">
-                <a16:creationId xmlns:a16="http://schemas.microsoft.com/office/drawing/2014/main" id="{3190D2B1-7208-4549-B577-E524C936455F}"/>
+                <a16:creationId xmlns:a16="http://schemas.microsoft.com/office/drawing/2014/main" id="{B5F8E1A4-1248-4A5B-99A8-95AF5DFD2FCF}"/>
               </a:ext>
             </a:extLst>
           </p:cNvPr>
@@ -17062,7 +17062,7 @@
           <p:cNvPr id="24" name="">
             <a:extLst xmlns:a="http://schemas.openxmlformats.org/drawingml/2006/main">
               <a:ext uri="{FF2B5EF4-FFF2-40B4-BE49-F238E27FC236}">
-                <a16:creationId xmlns:a16="http://schemas.microsoft.com/office/drawing/2014/main" id="{3957166E-3461-4423-BA07-6C7A4A670834}"/>
+                <a16:creationId xmlns:a16="http://schemas.microsoft.com/office/drawing/2014/main" id="{87A9CF93-BB76-4B99-B82A-FB86C27B6B60}"/>
               </a:ext>
             </a:extLst>
           </p:cNvPr>
@@ -17124,7 +17124,7 @@
           <p:cNvPr id="25" name="footer-rule-4">
             <a:extLst xmlns:a="http://schemas.openxmlformats.org/drawingml/2006/main">
               <a:ext uri="{FF2B5EF4-FFF2-40B4-BE49-F238E27FC236}">
-                <a16:creationId xmlns:a16="http://schemas.microsoft.com/office/drawing/2014/main" id="{59996A68-43D9-47B3-922A-2A719B8E0163}"/>
+                <a16:creationId xmlns:a16="http://schemas.microsoft.com/office/drawing/2014/main" id="{E9831BB9-5C38-429B-9A09-0471503F153C}"/>
               </a:ext>
             </a:extLst>
           </p:cNvPr>
@@ -17155,7 +17155,7 @@
           <p:cNvPr id="26" name="footer-label-4">
             <a:extLst xmlns:a="http://schemas.openxmlformats.org/drawingml/2006/main">
               <a:ext uri="{FF2B5EF4-FFF2-40B4-BE49-F238E27FC236}">
-                <a16:creationId xmlns:a16="http://schemas.microsoft.com/office/drawing/2014/main" id="{4DD1C71B-8AF9-4CC0-A8B2-BE8DE4A497D0}"/>
+                <a16:creationId xmlns:a16="http://schemas.microsoft.com/office/drawing/2014/main" id="{00441493-1933-4F07-B79C-F2B5EA80C9E9}"/>
               </a:ext>
             </a:extLst>
           </p:cNvPr>
@@ -17217,7 +17217,7 @@
           <p:cNvPr id="27" name="footer-page-4">
             <a:extLst xmlns:a="http://schemas.openxmlformats.org/drawingml/2006/main">
               <a:ext uri="{FF2B5EF4-FFF2-40B4-BE49-F238E27FC236}">
-                <a16:creationId xmlns:a16="http://schemas.microsoft.com/office/drawing/2014/main" id="{26B2E22E-1B98-4E4A-A72D-7CE23131E29D}"/>
+                <a16:creationId xmlns:a16="http://schemas.microsoft.com/office/drawing/2014/main" id="{023B72EA-8111-433C-8B00-92F504939883}"/>
               </a:ext>
             </a:extLst>
           </p:cNvPr>
@@ -17277,7 +17277,7 @@
     </p:spTree>
     <p:extLst>
       <p:ext uri="{BB962C8B-B14F-4D97-AF65-F5344CB8AC3E}">
-        <p14:creationId xmlns:p14="http://schemas.microsoft.com/office/powerpoint/2010/main" val="595322937"/>
+        <p14:creationId xmlns:p14="http://schemas.microsoft.com/office/powerpoint/2010/main" val="2057125505"/>
       </p:ext>
     </p:extLst>
   </p:cSld>
@@ -17308,7 +17308,7 @@
           <p:cNvPr id="31" name="side-accent-5">
             <a:extLst xmlns:a="http://schemas.openxmlformats.org/drawingml/2006/main">
               <a:ext uri="{FF2B5EF4-FFF2-40B4-BE49-F238E27FC236}">
-                <a16:creationId xmlns:a16="http://schemas.microsoft.com/office/drawing/2014/main" id="{0D52BA65-4CAC-4BA1-BA4C-16C251BC8418}"/>
+                <a16:creationId xmlns:a16="http://schemas.microsoft.com/office/drawing/2014/main" id="{921CB988-1FC6-4F4B-A578-7A5FB83552CF}"/>
               </a:ext>
             </a:extLst>
           </p:cNvPr>
@@ -17339,7 +17339,7 @@
           <p:cNvPr id="2" name="kicker-5">
             <a:extLst xmlns:a="http://schemas.openxmlformats.org/drawingml/2006/main">
               <a:ext uri="{FF2B5EF4-FFF2-40B4-BE49-F238E27FC236}">
-                <a16:creationId xmlns:a16="http://schemas.microsoft.com/office/drawing/2014/main" id="{0319D8C2-1765-473D-A6CC-F1AE752CF995}"/>
+                <a16:creationId xmlns:a16="http://schemas.microsoft.com/office/drawing/2014/main" id="{9CD5A177-48E3-4A64-8882-A7310DD9D5F1}"/>
               </a:ext>
             </a:extLst>
           </p:cNvPr>
@@ -17401,7 +17401,7 @@
           <p:cNvPr id="3" name="title-5">
             <a:extLst xmlns:a="http://schemas.openxmlformats.org/drawingml/2006/main">
               <a:ext uri="{FF2B5EF4-FFF2-40B4-BE49-F238E27FC236}">
-                <a16:creationId xmlns:a16="http://schemas.microsoft.com/office/drawing/2014/main" id="{2F3B11AB-94E0-49BC-9ADE-D6F7D4A74C95}"/>
+                <a16:creationId xmlns:a16="http://schemas.microsoft.com/office/drawing/2014/main" id="{7CCFC263-85C6-4A60-BA76-DFE8C8AA15A1}"/>
               </a:ext>
             </a:extLst>
           </p:cNvPr>
@@ -17463,7 +17463,7 @@
           <p:cNvPr id="4" name="">
             <a:extLst xmlns:a="http://schemas.openxmlformats.org/drawingml/2006/main">
               <a:ext uri="{FF2B5EF4-FFF2-40B4-BE49-F238E27FC236}">
-                <a16:creationId xmlns:a16="http://schemas.microsoft.com/office/drawing/2014/main" id="{4606EEB4-82EB-4124-BBA9-24B2D9F22509}"/>
+                <a16:creationId xmlns:a16="http://schemas.microsoft.com/office/drawing/2014/main" id="{EC0D4EB1-ECB7-40E4-8610-7D4A9BC43CC2}"/>
               </a:ext>
             </a:extLst>
           </p:cNvPr>
@@ -17525,7 +17525,7 @@
           <p:cNvPr id="5" name="workflow-line">
             <a:extLst xmlns:a="http://schemas.openxmlformats.org/drawingml/2006/main">
               <a:ext uri="{FF2B5EF4-FFF2-40B4-BE49-F238E27FC236}">
-                <a16:creationId xmlns:a16="http://schemas.microsoft.com/office/drawing/2014/main" id="{84A85EF3-27AB-4B8F-923B-3D9784C00C61}"/>
+                <a16:creationId xmlns:a16="http://schemas.microsoft.com/office/drawing/2014/main" id="{D734B9CF-C989-409A-81BE-0EFE806DC4AE}"/>
               </a:ext>
             </a:extLst>
           </p:cNvPr>
@@ -17556,7 +17556,7 @@
           <p:cNvPr id="6" name="workflow-arrow">
             <a:extLst xmlns:a="http://schemas.openxmlformats.org/drawingml/2006/main">
               <a:ext uri="{FF2B5EF4-FFF2-40B4-BE49-F238E27FC236}">
-                <a16:creationId xmlns:a16="http://schemas.microsoft.com/office/drawing/2014/main" id="{E0913D09-C9B0-4833-9F31-45072F49B123}"/>
+                <a16:creationId xmlns:a16="http://schemas.microsoft.com/office/drawing/2014/main" id="{F59B918B-3810-47A0-A1C9-3C4E07662EE8}"/>
               </a:ext>
             </a:extLst>
           </p:cNvPr>
@@ -17587,7 +17587,7 @@
           <p:cNvPr id="7" name="">
             <a:extLst xmlns:a="http://schemas.openxmlformats.org/drawingml/2006/main">
               <a:ext uri="{FF2B5EF4-FFF2-40B4-BE49-F238E27FC236}">
-                <a16:creationId xmlns:a16="http://schemas.microsoft.com/office/drawing/2014/main" id="{36FFFCC1-A537-4AD4-9056-4479F54DBD7F}"/>
+                <a16:creationId xmlns:a16="http://schemas.microsoft.com/office/drawing/2014/main" id="{DBA1D456-BFAD-4ABB-B335-83CE3200CC1B}"/>
               </a:ext>
             </a:extLst>
           </p:cNvPr>
@@ -17618,7 +17618,7 @@
           <p:cNvPr id="8" name="">
             <a:extLst xmlns:a="http://schemas.openxmlformats.org/drawingml/2006/main">
               <a:ext uri="{FF2B5EF4-FFF2-40B4-BE49-F238E27FC236}">
-                <a16:creationId xmlns:a16="http://schemas.microsoft.com/office/drawing/2014/main" id="{563A4EB9-C0C2-431C-9151-620391813213}"/>
+                <a16:creationId xmlns:a16="http://schemas.microsoft.com/office/drawing/2014/main" id="{140F87D2-1AB3-4E59-BB0E-C4AF27DE6A6F}"/>
               </a:ext>
             </a:extLst>
           </p:cNvPr>
@@ -17680,7 +17680,7 @@
           <p:cNvPr id="9" name="">
             <a:extLst xmlns:a="http://schemas.openxmlformats.org/drawingml/2006/main">
               <a:ext uri="{FF2B5EF4-FFF2-40B4-BE49-F238E27FC236}">
-                <a16:creationId xmlns:a16="http://schemas.microsoft.com/office/drawing/2014/main" id="{2A3B664F-C6E9-48E8-8708-E0818E41C68A}"/>
+                <a16:creationId xmlns:a16="http://schemas.microsoft.com/office/drawing/2014/main" id="{515CE137-24FA-4D07-8AC0-BB8D15984A02}"/>
               </a:ext>
             </a:extLst>
           </p:cNvPr>
@@ -17742,7 +17742,7 @@
           <p:cNvPr id="10" name="">
             <a:extLst xmlns:a="http://schemas.openxmlformats.org/drawingml/2006/main">
               <a:ext uri="{FF2B5EF4-FFF2-40B4-BE49-F238E27FC236}">
-                <a16:creationId xmlns:a16="http://schemas.microsoft.com/office/drawing/2014/main" id="{91DC5E83-FD57-45FA-B240-0FA60B461102}"/>
+                <a16:creationId xmlns:a16="http://schemas.microsoft.com/office/drawing/2014/main" id="{790F1043-49DF-4C75-95D0-E0A1A47C43E2}"/>
               </a:ext>
             </a:extLst>
           </p:cNvPr>
@@ -17804,7 +17804,7 @@
           <p:cNvPr id="11" name="">
             <a:extLst xmlns:a="http://schemas.openxmlformats.org/drawingml/2006/main">
               <a:ext uri="{FF2B5EF4-FFF2-40B4-BE49-F238E27FC236}">
-                <a16:creationId xmlns:a16="http://schemas.microsoft.com/office/drawing/2014/main" id="{EF683347-5EE0-495A-A5BA-B0F813313AD8}"/>
+                <a16:creationId xmlns:a16="http://schemas.microsoft.com/office/drawing/2014/main" id="{6ADB05C7-035C-4FEB-B87F-9FBAB05C2259}"/>
               </a:ext>
             </a:extLst>
           </p:cNvPr>
@@ -17835,7 +17835,7 @@
           <p:cNvPr id="12" name="">
             <a:extLst xmlns:a="http://schemas.openxmlformats.org/drawingml/2006/main">
               <a:ext uri="{FF2B5EF4-FFF2-40B4-BE49-F238E27FC236}">
-                <a16:creationId xmlns:a16="http://schemas.microsoft.com/office/drawing/2014/main" id="{2DFFE569-D01A-4BFC-99CE-15A7A5A598A4}"/>
+                <a16:creationId xmlns:a16="http://schemas.microsoft.com/office/drawing/2014/main" id="{E44CB954-E89C-47A9-B289-84A278473814}"/>
               </a:ext>
             </a:extLst>
           </p:cNvPr>
@@ -17897,7 +17897,7 @@
           <p:cNvPr id="13" name="">
             <a:extLst xmlns:a="http://schemas.openxmlformats.org/drawingml/2006/main">
               <a:ext uri="{FF2B5EF4-FFF2-40B4-BE49-F238E27FC236}">
-                <a16:creationId xmlns:a16="http://schemas.microsoft.com/office/drawing/2014/main" id="{F79B3E59-8DE9-4029-B2E1-4BA690455289}"/>
+                <a16:creationId xmlns:a16="http://schemas.microsoft.com/office/drawing/2014/main" id="{51DF4ACF-2508-41BD-A015-61827F9663C7}"/>
               </a:ext>
             </a:extLst>
           </p:cNvPr>
@@ -17959,7 +17959,7 @@
           <p:cNvPr id="14" name="">
             <a:extLst xmlns:a="http://schemas.openxmlformats.org/drawingml/2006/main">
               <a:ext uri="{FF2B5EF4-FFF2-40B4-BE49-F238E27FC236}">
-                <a16:creationId xmlns:a16="http://schemas.microsoft.com/office/drawing/2014/main" id="{8ECD5F46-97B2-4052-8570-A626229A15D7}"/>
+                <a16:creationId xmlns:a16="http://schemas.microsoft.com/office/drawing/2014/main" id="{8E57BC16-A808-4047-BF9F-AF322A580E6C}"/>
               </a:ext>
             </a:extLst>
           </p:cNvPr>
@@ -18021,7 +18021,7 @@
           <p:cNvPr id="15" name="">
             <a:extLst xmlns:a="http://schemas.openxmlformats.org/drawingml/2006/main">
               <a:ext uri="{FF2B5EF4-FFF2-40B4-BE49-F238E27FC236}">
-                <a16:creationId xmlns:a16="http://schemas.microsoft.com/office/drawing/2014/main" id="{F3A7CD1B-DBE6-4BDA-9D6F-03BE43F7409B}"/>
+                <a16:creationId xmlns:a16="http://schemas.microsoft.com/office/drawing/2014/main" id="{7216C422-BE28-4B14-9200-D658F090268A}"/>
               </a:ext>
             </a:extLst>
           </p:cNvPr>
@@ -18052,7 +18052,7 @@
           <p:cNvPr id="16" name="">
             <a:extLst xmlns:a="http://schemas.openxmlformats.org/drawingml/2006/main">
               <a:ext uri="{FF2B5EF4-FFF2-40B4-BE49-F238E27FC236}">
-                <a16:creationId xmlns:a16="http://schemas.microsoft.com/office/drawing/2014/main" id="{BC8FDC47-5E4F-4A8F-BE11-8AF6C153705E}"/>
+                <a16:creationId xmlns:a16="http://schemas.microsoft.com/office/drawing/2014/main" id="{47FB15E7-3607-4875-A328-37850668064B}"/>
               </a:ext>
             </a:extLst>
           </p:cNvPr>
@@ -18114,7 +18114,7 @@
           <p:cNvPr id="17" name="">
             <a:extLst xmlns:a="http://schemas.openxmlformats.org/drawingml/2006/main">
               <a:ext uri="{FF2B5EF4-FFF2-40B4-BE49-F238E27FC236}">
-                <a16:creationId xmlns:a16="http://schemas.microsoft.com/office/drawing/2014/main" id="{E23F6038-51CD-4155-987F-36B2CE7DC4C1}"/>
+                <a16:creationId xmlns:a16="http://schemas.microsoft.com/office/drawing/2014/main" id="{8D01156C-FA9F-47CD-9FBC-1E873192D8B8}"/>
               </a:ext>
             </a:extLst>
           </p:cNvPr>
@@ -18176,7 +18176,7 @@
           <p:cNvPr id="18" name="">
             <a:extLst xmlns:a="http://schemas.openxmlformats.org/drawingml/2006/main">
               <a:ext uri="{FF2B5EF4-FFF2-40B4-BE49-F238E27FC236}">
-                <a16:creationId xmlns:a16="http://schemas.microsoft.com/office/drawing/2014/main" id="{D14964F5-B44D-4F04-AF22-973621CD7C11}"/>
+                <a16:creationId xmlns:a16="http://schemas.microsoft.com/office/drawing/2014/main" id="{F0D6C8DC-D135-4F95-BC47-40BA3ED93E5A}"/>
               </a:ext>
             </a:extLst>
           </p:cNvPr>
@@ -18238,7 +18238,7 @@
           <p:cNvPr id="19" name="">
             <a:extLst xmlns:a="http://schemas.openxmlformats.org/drawingml/2006/main">
               <a:ext uri="{FF2B5EF4-FFF2-40B4-BE49-F238E27FC236}">
-                <a16:creationId xmlns:a16="http://schemas.microsoft.com/office/drawing/2014/main" id="{C8CF7886-394A-4EFC-8134-EF67AB9112FF}"/>
+                <a16:creationId xmlns:a16="http://schemas.microsoft.com/office/drawing/2014/main" id="{9A47272F-2D13-4C33-B289-1E9A48060648}"/>
               </a:ext>
             </a:extLst>
           </p:cNvPr>
@@ -18269,7 +18269,7 @@
           <p:cNvPr id="20" name="">
             <a:extLst xmlns:a="http://schemas.openxmlformats.org/drawingml/2006/main">
               <a:ext uri="{FF2B5EF4-FFF2-40B4-BE49-F238E27FC236}">
-                <a16:creationId xmlns:a16="http://schemas.microsoft.com/office/drawing/2014/main" id="{57A7B0CE-4752-43D5-9E7F-CE2D4FEA4817}"/>
+                <a16:creationId xmlns:a16="http://schemas.microsoft.com/office/drawing/2014/main" id="{A1592520-6077-40A1-A6E1-432A07723587}"/>
               </a:ext>
             </a:extLst>
           </p:cNvPr>
@@ -18331,7 +18331,7 @@
           <p:cNvPr id="21" name="">
             <a:extLst xmlns:a="http://schemas.openxmlformats.org/drawingml/2006/main">
               <a:ext uri="{FF2B5EF4-FFF2-40B4-BE49-F238E27FC236}">
-                <a16:creationId xmlns:a16="http://schemas.microsoft.com/office/drawing/2014/main" id="{39DD7D64-98F8-479D-88EE-6854E8088E03}"/>
+                <a16:creationId xmlns:a16="http://schemas.microsoft.com/office/drawing/2014/main" id="{443621F2-C1CB-4C45-AEE8-7621550C1C32}"/>
               </a:ext>
             </a:extLst>
           </p:cNvPr>
@@ -18393,7 +18393,7 @@
           <p:cNvPr id="22" name="">
             <a:extLst xmlns:a="http://schemas.openxmlformats.org/drawingml/2006/main">
               <a:ext uri="{FF2B5EF4-FFF2-40B4-BE49-F238E27FC236}">
-                <a16:creationId xmlns:a16="http://schemas.microsoft.com/office/drawing/2014/main" id="{BCD1117E-445A-4C4E-B510-79EB12191502}"/>
+                <a16:creationId xmlns:a16="http://schemas.microsoft.com/office/drawing/2014/main" id="{60789C40-94E8-469C-AECE-A12B1FDB5C85}"/>
               </a:ext>
             </a:extLst>
           </p:cNvPr>
@@ -18455,7 +18455,7 @@
           <p:cNvPr id="23" name="">
             <a:extLst xmlns:a="http://schemas.openxmlformats.org/drawingml/2006/main">
               <a:ext uri="{FF2B5EF4-FFF2-40B4-BE49-F238E27FC236}">
-                <a16:creationId xmlns:a16="http://schemas.microsoft.com/office/drawing/2014/main" id="{CEB81BA9-4B0C-438F-BBB4-F612FFBDC0F2}"/>
+                <a16:creationId xmlns:a16="http://schemas.microsoft.com/office/drawing/2014/main" id="{4BD53E1A-373B-4481-93A5-7A63CCB15903}"/>
               </a:ext>
             </a:extLst>
           </p:cNvPr>
@@ -18486,7 +18486,7 @@
           <p:cNvPr id="24" name="">
             <a:extLst xmlns:a="http://schemas.openxmlformats.org/drawingml/2006/main">
               <a:ext uri="{FF2B5EF4-FFF2-40B4-BE49-F238E27FC236}">
-                <a16:creationId xmlns:a16="http://schemas.microsoft.com/office/drawing/2014/main" id="{9471A52F-8DAA-4E9A-9349-76B0F63538D2}"/>
+                <a16:creationId xmlns:a16="http://schemas.microsoft.com/office/drawing/2014/main" id="{CDD164FF-832C-4B12-ADC8-72A07CB0992C}"/>
               </a:ext>
             </a:extLst>
           </p:cNvPr>
@@ -18548,7 +18548,7 @@
           <p:cNvPr id="25" name="">
             <a:extLst xmlns:a="http://schemas.openxmlformats.org/drawingml/2006/main">
               <a:ext uri="{FF2B5EF4-FFF2-40B4-BE49-F238E27FC236}">
-                <a16:creationId xmlns:a16="http://schemas.microsoft.com/office/drawing/2014/main" id="{8A4E5322-C1BE-4967-AB1C-32BFBF3162B1}"/>
+                <a16:creationId xmlns:a16="http://schemas.microsoft.com/office/drawing/2014/main" id="{CD672C49-9E5D-490E-8EB8-E409831E1FE2}"/>
               </a:ext>
             </a:extLst>
           </p:cNvPr>
@@ -18610,7 +18610,7 @@
           <p:cNvPr id="26" name="">
             <a:extLst xmlns:a="http://schemas.openxmlformats.org/drawingml/2006/main">
               <a:ext uri="{FF2B5EF4-FFF2-40B4-BE49-F238E27FC236}">
-                <a16:creationId xmlns:a16="http://schemas.microsoft.com/office/drawing/2014/main" id="{F8B08722-AE06-4B19-81A9-728BFB3211F9}"/>
+                <a16:creationId xmlns:a16="http://schemas.microsoft.com/office/drawing/2014/main" id="{0EA78A0C-B702-4E98-840C-6CC0D270799D}"/>
               </a:ext>
             </a:extLst>
           </p:cNvPr>
@@ -18672,7 +18672,7 @@
           <p:cNvPr id="27" name="">
             <a:extLst xmlns:a="http://schemas.openxmlformats.org/drawingml/2006/main">
               <a:ext uri="{FF2B5EF4-FFF2-40B4-BE49-F238E27FC236}">
-                <a16:creationId xmlns:a16="http://schemas.microsoft.com/office/drawing/2014/main" id="{73DCD6C3-7264-4B3E-AE03-E15447872F31}"/>
+                <a16:creationId xmlns:a16="http://schemas.microsoft.com/office/drawing/2014/main" id="{DCC2F799-C488-4032-BFC8-AFB90DAEE186}"/>
               </a:ext>
             </a:extLst>
           </p:cNvPr>
@@ -18734,7 +18734,7 @@
           <p:cNvPr id="28" name="footer-rule-5">
             <a:extLst xmlns:a="http://schemas.openxmlformats.org/drawingml/2006/main">
               <a:ext uri="{FF2B5EF4-FFF2-40B4-BE49-F238E27FC236}">
-                <a16:creationId xmlns:a16="http://schemas.microsoft.com/office/drawing/2014/main" id="{91A90071-56E7-4C17-BBDF-04AC9829B363}"/>
+                <a16:creationId xmlns:a16="http://schemas.microsoft.com/office/drawing/2014/main" id="{A2A6F02D-18E4-43E9-A6F7-44BA79D4D9AB}"/>
               </a:ext>
             </a:extLst>
           </p:cNvPr>
@@ -18765,7 +18765,7 @@
           <p:cNvPr id="29" name="footer-label-5">
             <a:extLst xmlns:a="http://schemas.openxmlformats.org/drawingml/2006/main">
               <a:ext uri="{FF2B5EF4-FFF2-40B4-BE49-F238E27FC236}">
-                <a16:creationId xmlns:a16="http://schemas.microsoft.com/office/drawing/2014/main" id="{9554037A-EB1F-4272-8473-EBEAA21BB3CF}"/>
+                <a16:creationId xmlns:a16="http://schemas.microsoft.com/office/drawing/2014/main" id="{CE701338-1107-4E24-8417-14346DC0C99F}"/>
               </a:ext>
             </a:extLst>
           </p:cNvPr>
@@ -18827,7 +18827,7 @@
           <p:cNvPr id="30" name="footer-page-5">
             <a:extLst xmlns:a="http://schemas.openxmlformats.org/drawingml/2006/main">
               <a:ext uri="{FF2B5EF4-FFF2-40B4-BE49-F238E27FC236}">
-                <a16:creationId xmlns:a16="http://schemas.microsoft.com/office/drawing/2014/main" id="{63B60BD5-F89B-475B-9058-5E56EEF96C13}"/>
+                <a16:creationId xmlns:a16="http://schemas.microsoft.com/office/drawing/2014/main" id="{F2F646BA-B0EB-49EA-857E-24563B632227}"/>
               </a:ext>
             </a:extLst>
           </p:cNvPr>
@@ -18887,7 +18887,7 @@
     </p:spTree>
     <p:extLst>
       <p:ext uri="{BB962C8B-B14F-4D97-AF65-F5344CB8AC3E}">
-        <p14:creationId xmlns:p14="http://schemas.microsoft.com/office/powerpoint/2010/main" val="724852078"/>
+        <p14:creationId xmlns:p14="http://schemas.microsoft.com/office/powerpoint/2010/main" val="2071842291"/>
       </p:ext>
     </p:extLst>
   </p:cSld>
@@ -18918,7 +18918,7 @@
           <p:cNvPr id="22" name="side-accent-6">
             <a:extLst xmlns:a="http://schemas.openxmlformats.org/drawingml/2006/main">
               <a:ext uri="{FF2B5EF4-FFF2-40B4-BE49-F238E27FC236}">
-                <a16:creationId xmlns:a16="http://schemas.microsoft.com/office/drawing/2014/main" id="{18F4B9A1-2B27-4B77-BE01-EC0B7C8139B5}"/>
+                <a16:creationId xmlns:a16="http://schemas.microsoft.com/office/drawing/2014/main" id="{D8E75C79-7FD7-4E8E-9E6C-E4398E91866D}"/>
               </a:ext>
             </a:extLst>
           </p:cNvPr>
@@ -18949,7 +18949,7 @@
           <p:cNvPr id="2" name="kicker-6">
             <a:extLst xmlns:a="http://schemas.openxmlformats.org/drawingml/2006/main">
               <a:ext uri="{FF2B5EF4-FFF2-40B4-BE49-F238E27FC236}">
-                <a16:creationId xmlns:a16="http://schemas.microsoft.com/office/drawing/2014/main" id="{197C43D3-0149-4C21-AC14-34492E7BE5D9}"/>
+                <a16:creationId xmlns:a16="http://schemas.microsoft.com/office/drawing/2014/main" id="{2D19EC02-C174-4CD0-9A82-54A425C05F04}"/>
               </a:ext>
             </a:extLst>
           </p:cNvPr>
@@ -19011,7 +19011,7 @@
           <p:cNvPr id="3" name="title-6">
             <a:extLst xmlns:a="http://schemas.openxmlformats.org/drawingml/2006/main">
               <a:ext uri="{FF2B5EF4-FFF2-40B4-BE49-F238E27FC236}">
-                <a16:creationId xmlns:a16="http://schemas.microsoft.com/office/drawing/2014/main" id="{F928D59E-D84D-40B1-82B3-1B7C5E39793A}"/>
+                <a16:creationId xmlns:a16="http://schemas.microsoft.com/office/drawing/2014/main" id="{F3C8DBCF-BB39-4148-B0FE-359DA4E75146}"/>
               </a:ext>
             </a:extLst>
           </p:cNvPr>
@@ -19073,7 +19073,7 @@
           <p:cNvPr id="4" name="">
             <a:extLst xmlns:a="http://schemas.openxmlformats.org/drawingml/2006/main">
               <a:ext uri="{FF2B5EF4-FFF2-40B4-BE49-F238E27FC236}">
-                <a16:creationId xmlns:a16="http://schemas.microsoft.com/office/drawing/2014/main" id="{32DA745C-E1C0-4757-A93D-ED6AA0575482}"/>
+                <a16:creationId xmlns:a16="http://schemas.microsoft.com/office/drawing/2014/main" id="{19821C28-68CD-4818-A407-9218DC23BBF4}"/>
               </a:ext>
             </a:extLst>
           </p:cNvPr>
@@ -19135,7 +19135,7 @@
           <p:cNvPr id="5" name="">
             <a:extLst xmlns:a="http://schemas.openxmlformats.org/drawingml/2006/main">
               <a:ext uri="{FF2B5EF4-FFF2-40B4-BE49-F238E27FC236}">
-                <a16:creationId xmlns:a16="http://schemas.microsoft.com/office/drawing/2014/main" id="{496B9EBF-F206-491F-9A74-74555BEA720E}"/>
+                <a16:creationId xmlns:a16="http://schemas.microsoft.com/office/drawing/2014/main" id="{EABE962A-B22A-4066-A292-5B073CA8FAF0}"/>
               </a:ext>
             </a:extLst>
           </p:cNvPr>
@@ -19197,7 +19197,7 @@
           <p:cNvPr id="6" name="">
             <a:extLst xmlns:a="http://schemas.openxmlformats.org/drawingml/2006/main">
               <a:ext uri="{FF2B5EF4-FFF2-40B4-BE49-F238E27FC236}">
-                <a16:creationId xmlns:a16="http://schemas.microsoft.com/office/drawing/2014/main" id="{834277A9-417A-41CB-857D-67626A0CA097}"/>
+                <a16:creationId xmlns:a16="http://schemas.microsoft.com/office/drawing/2014/main" id="{5C30325B-4634-4374-83EC-7B6EAEF09334}"/>
               </a:ext>
             </a:extLst>
           </p:cNvPr>
@@ -19259,7 +19259,7 @@
           <p:cNvPr id="7" name="">
             <a:extLst xmlns:a="http://schemas.openxmlformats.org/drawingml/2006/main">
               <a:ext uri="{FF2B5EF4-FFF2-40B4-BE49-F238E27FC236}">
-                <a16:creationId xmlns:a16="http://schemas.microsoft.com/office/drawing/2014/main" id="{244D7517-DFB5-46DF-8953-9D5EAF7BA71F}"/>
+                <a16:creationId xmlns:a16="http://schemas.microsoft.com/office/drawing/2014/main" id="{34134D99-72E3-44FD-A651-4131E530FBCE}"/>
               </a:ext>
             </a:extLst>
           </p:cNvPr>
@@ -19290,7 +19290,7 @@
           <p:cNvPr id="8" name="">
             <a:extLst xmlns:a="http://schemas.openxmlformats.org/drawingml/2006/main">
               <a:ext uri="{FF2B5EF4-FFF2-40B4-BE49-F238E27FC236}">
-                <a16:creationId xmlns:a16="http://schemas.microsoft.com/office/drawing/2014/main" id="{6D63955D-0084-45A9-9A41-45F7F257B713}"/>
+                <a16:creationId xmlns:a16="http://schemas.microsoft.com/office/drawing/2014/main" id="{2F081287-1803-44F3-8B9E-ABC9BD958C63}"/>
               </a:ext>
             </a:extLst>
           </p:cNvPr>
@@ -19379,7 +19379,7 @@
           <p:cNvPr id="9" name="">
             <a:extLst xmlns:a="http://schemas.openxmlformats.org/drawingml/2006/main">
               <a:ext uri="{FF2B5EF4-FFF2-40B4-BE49-F238E27FC236}">
-                <a16:creationId xmlns:a16="http://schemas.microsoft.com/office/drawing/2014/main" id="{4633BD43-F59D-43B0-B919-BE939F215A8E}"/>
+                <a16:creationId xmlns:a16="http://schemas.microsoft.com/office/drawing/2014/main" id="{D5AA582C-BF4B-4399-9B77-B79070764206}"/>
               </a:ext>
             </a:extLst>
           </p:cNvPr>
@@ -19441,7 +19441,7 @@
           <p:cNvPr id="10" name="">
             <a:extLst xmlns:a="http://schemas.openxmlformats.org/drawingml/2006/main">
               <a:ext uri="{FF2B5EF4-FFF2-40B4-BE49-F238E27FC236}">
-                <a16:creationId xmlns:a16="http://schemas.microsoft.com/office/drawing/2014/main" id="{D7B1CF5F-2512-4CCE-BED0-3775477F3281}"/>
+                <a16:creationId xmlns:a16="http://schemas.microsoft.com/office/drawing/2014/main" id="{1196F058-0037-423E-9195-A49ABA4BEE46}"/>
               </a:ext>
             </a:extLst>
           </p:cNvPr>
@@ -19503,7 +19503,7 @@
           <p:cNvPr id="11" name="">
             <a:extLst xmlns:a="http://schemas.openxmlformats.org/drawingml/2006/main">
               <a:ext uri="{FF2B5EF4-FFF2-40B4-BE49-F238E27FC236}">
-                <a16:creationId xmlns:a16="http://schemas.microsoft.com/office/drawing/2014/main" id="{8DC4F462-0DBE-4AA3-9835-98BD31732470}"/>
+                <a16:creationId xmlns:a16="http://schemas.microsoft.com/office/drawing/2014/main" id="{DB5E120A-E053-4921-A02C-A6FBC6440062}"/>
               </a:ext>
             </a:extLst>
           </p:cNvPr>
@@ -19534,7 +19534,7 @@
           <p:cNvPr id="12" name="">
             <a:extLst xmlns:a="http://schemas.openxmlformats.org/drawingml/2006/main">
               <a:ext uri="{FF2B5EF4-FFF2-40B4-BE49-F238E27FC236}">
-                <a16:creationId xmlns:a16="http://schemas.microsoft.com/office/drawing/2014/main" id="{27C532FC-5B04-4DC4-BE01-30DB24D4DA68}"/>
+                <a16:creationId xmlns:a16="http://schemas.microsoft.com/office/drawing/2014/main" id="{EE327027-F9C0-4966-A82F-ADB22521EE42}"/>
               </a:ext>
             </a:extLst>
           </p:cNvPr>
@@ -19623,7 +19623,7 @@
           <p:cNvPr id="13" name="">
             <a:extLst xmlns:a="http://schemas.openxmlformats.org/drawingml/2006/main">
               <a:ext uri="{FF2B5EF4-FFF2-40B4-BE49-F238E27FC236}">
-                <a16:creationId xmlns:a16="http://schemas.microsoft.com/office/drawing/2014/main" id="{04C4EB69-D9E8-4660-9152-B1AD1B31DF9F}"/>
+                <a16:creationId xmlns:a16="http://schemas.microsoft.com/office/drawing/2014/main" id="{908620E3-C41C-4107-B5F1-D0BAA0C3C830}"/>
               </a:ext>
             </a:extLst>
           </p:cNvPr>
@@ -19685,7 +19685,7 @@
           <p:cNvPr id="14" name="">
             <a:extLst xmlns:a="http://schemas.openxmlformats.org/drawingml/2006/main">
               <a:ext uri="{FF2B5EF4-FFF2-40B4-BE49-F238E27FC236}">
-                <a16:creationId xmlns:a16="http://schemas.microsoft.com/office/drawing/2014/main" id="{9E8E6F37-4D56-48EE-A66C-34C1D5594B3C}"/>
+                <a16:creationId xmlns:a16="http://schemas.microsoft.com/office/drawing/2014/main" id="{129F575A-A37A-4BC5-A472-02A424546B7C}"/>
               </a:ext>
             </a:extLst>
           </p:cNvPr>
@@ -19747,7 +19747,7 @@
           <p:cNvPr id="15" name="">
             <a:extLst xmlns:a="http://schemas.openxmlformats.org/drawingml/2006/main">
               <a:ext uri="{FF2B5EF4-FFF2-40B4-BE49-F238E27FC236}">
-                <a16:creationId xmlns:a16="http://schemas.microsoft.com/office/drawing/2014/main" id="{7C81439F-2378-47AC-B9E5-509C6933D6E2}"/>
+                <a16:creationId xmlns:a16="http://schemas.microsoft.com/office/drawing/2014/main" id="{DDDD0A95-D790-4721-B574-AB1FBF3A4AAD}"/>
               </a:ext>
             </a:extLst>
           </p:cNvPr>
@@ -19778,7 +19778,7 @@
           <p:cNvPr id="16" name="">
             <a:extLst xmlns:a="http://schemas.openxmlformats.org/drawingml/2006/main">
               <a:ext uri="{FF2B5EF4-FFF2-40B4-BE49-F238E27FC236}">
-                <a16:creationId xmlns:a16="http://schemas.microsoft.com/office/drawing/2014/main" id="{E6957A43-3CBE-467F-B940-35A73D219791}"/>
+                <a16:creationId xmlns:a16="http://schemas.microsoft.com/office/drawing/2014/main" id="{7BA91A11-36CA-415B-844C-D7E5FE0FBD64}"/>
               </a:ext>
             </a:extLst>
           </p:cNvPr>
@@ -19867,7 +19867,7 @@
           <p:cNvPr id="17" name="">
             <a:extLst xmlns:a="http://schemas.openxmlformats.org/drawingml/2006/main">
               <a:ext uri="{FF2B5EF4-FFF2-40B4-BE49-F238E27FC236}">
-                <a16:creationId xmlns:a16="http://schemas.microsoft.com/office/drawing/2014/main" id="{60F08A5E-F4E5-4105-A5F4-908FBA12677C}"/>
+                <a16:creationId xmlns:a16="http://schemas.microsoft.com/office/drawing/2014/main" id="{7AAF551D-1F26-42D9-A78C-4068BAB6250E}"/>
               </a:ext>
             </a:extLst>
           </p:cNvPr>
@@ -19900,7 +19900,7 @@
           <p:cNvPr id="18" name="">
             <a:extLst xmlns:a="http://schemas.openxmlformats.org/drawingml/2006/main">
               <a:ext uri="{FF2B5EF4-FFF2-40B4-BE49-F238E27FC236}">
-                <a16:creationId xmlns:a16="http://schemas.microsoft.com/office/drawing/2014/main" id="{3E4BF80C-9920-4660-AEC4-AC5DDA274025}"/>
+                <a16:creationId xmlns:a16="http://schemas.microsoft.com/office/drawing/2014/main" id="{AEBF5BE5-AE50-4A79-AEA7-3D4EA4CFD0A6}"/>
               </a:ext>
             </a:extLst>
           </p:cNvPr>
@@ -19989,7 +19989,7 @@
           <p:cNvPr id="19" name="footer-rule-6">
             <a:extLst xmlns:a="http://schemas.openxmlformats.org/drawingml/2006/main">
               <a:ext uri="{FF2B5EF4-FFF2-40B4-BE49-F238E27FC236}">
-                <a16:creationId xmlns:a16="http://schemas.microsoft.com/office/drawing/2014/main" id="{2055AB2C-BB77-4C7D-BE1B-4A6C06D11AE8}"/>
+                <a16:creationId xmlns:a16="http://schemas.microsoft.com/office/drawing/2014/main" id="{B4D29CCF-F5F8-4D69-84E2-2209E593ED28}"/>
               </a:ext>
             </a:extLst>
           </p:cNvPr>
@@ -20020,7 +20020,7 @@
           <p:cNvPr id="20" name="footer-label-6">
             <a:extLst xmlns:a="http://schemas.openxmlformats.org/drawingml/2006/main">
               <a:ext uri="{FF2B5EF4-FFF2-40B4-BE49-F238E27FC236}">
-                <a16:creationId xmlns:a16="http://schemas.microsoft.com/office/drawing/2014/main" id="{B52E955B-CB13-46B0-B320-F212B5065DC4}"/>
+                <a16:creationId xmlns:a16="http://schemas.microsoft.com/office/drawing/2014/main" id="{DC4A6369-1DFE-403E-A0C4-015BF9B2480E}"/>
               </a:ext>
             </a:extLst>
           </p:cNvPr>
@@ -20082,7 +20082,7 @@
           <p:cNvPr id="21" name="footer-page-6">
             <a:extLst xmlns:a="http://schemas.openxmlformats.org/drawingml/2006/main">
               <a:ext uri="{FF2B5EF4-FFF2-40B4-BE49-F238E27FC236}">
-                <a16:creationId xmlns:a16="http://schemas.microsoft.com/office/drawing/2014/main" id="{832915AC-9E36-403E-BDF4-4E89A0DADB12}"/>
+                <a16:creationId xmlns:a16="http://schemas.microsoft.com/office/drawing/2014/main" id="{5C2F7483-A3F3-4D35-978F-41C998856BF8}"/>
               </a:ext>
             </a:extLst>
           </p:cNvPr>
@@ -20142,7 +20142,7 @@
     </p:spTree>
     <p:extLst>
       <p:ext uri="{BB962C8B-B14F-4D97-AF65-F5344CB8AC3E}">
-        <p14:creationId xmlns:p14="http://schemas.microsoft.com/office/powerpoint/2010/main" val="1988457212"/>
+        <p14:creationId xmlns:p14="http://schemas.microsoft.com/office/powerpoint/2010/main" val="1340596123"/>
       </p:ext>
     </p:extLst>
   </p:cSld>
@@ -20173,7 +20173,7 @@
           <p:cNvPr id="28" name="side-accent-7">
             <a:extLst xmlns:a="http://schemas.openxmlformats.org/drawingml/2006/main">
               <a:ext uri="{FF2B5EF4-FFF2-40B4-BE49-F238E27FC236}">
-                <a16:creationId xmlns:a16="http://schemas.microsoft.com/office/drawing/2014/main" id="{F5A3A089-6C2F-4724-B8A2-B93CA7296D5B}"/>
+                <a16:creationId xmlns:a16="http://schemas.microsoft.com/office/drawing/2014/main" id="{D0E2FD4A-8D8B-4A70-AF6D-02CE592913D0}"/>
               </a:ext>
             </a:extLst>
           </p:cNvPr>
@@ -20204,7 +20204,7 @@
           <p:cNvPr id="2" name="kicker-7">
             <a:extLst xmlns:a="http://schemas.openxmlformats.org/drawingml/2006/main">
               <a:ext uri="{FF2B5EF4-FFF2-40B4-BE49-F238E27FC236}">
-                <a16:creationId xmlns:a16="http://schemas.microsoft.com/office/drawing/2014/main" id="{770A8A74-B432-4CE3-B0EF-F517954C8CA6}"/>
+                <a16:creationId xmlns:a16="http://schemas.microsoft.com/office/drawing/2014/main" id="{A8CA575F-A859-4979-BD55-2F9555D94304}"/>
               </a:ext>
             </a:extLst>
           </p:cNvPr>
@@ -20266,7 +20266,7 @@
           <p:cNvPr id="3" name="title-7">
             <a:extLst xmlns:a="http://schemas.openxmlformats.org/drawingml/2006/main">
               <a:ext uri="{FF2B5EF4-FFF2-40B4-BE49-F238E27FC236}">
-                <a16:creationId xmlns:a16="http://schemas.microsoft.com/office/drawing/2014/main" id="{191D104D-929E-46D0-B67D-7A67C22BC20C}"/>
+                <a16:creationId xmlns:a16="http://schemas.microsoft.com/office/drawing/2014/main" id="{51D01A4B-C0ED-474C-9AAB-FA59C3048C4F}"/>
               </a:ext>
             </a:extLst>
           </p:cNvPr>
@@ -20328,7 +20328,7 @@
           <p:cNvPr id="4" name="">
             <a:extLst xmlns:a="http://schemas.openxmlformats.org/drawingml/2006/main">
               <a:ext uri="{FF2B5EF4-FFF2-40B4-BE49-F238E27FC236}">
-                <a16:creationId xmlns:a16="http://schemas.microsoft.com/office/drawing/2014/main" id="{F4160D13-B1F9-42A9-B75E-EEE684198FED}"/>
+                <a16:creationId xmlns:a16="http://schemas.microsoft.com/office/drawing/2014/main" id="{1E4C1D42-B0DF-4DF5-BAA8-921DE095A972}"/>
               </a:ext>
             </a:extLst>
           </p:cNvPr>
@@ -20390,7 +20390,7 @@
           <p:cNvPr id="5" name="">
             <a:extLst xmlns:a="http://schemas.openxmlformats.org/drawingml/2006/main">
               <a:ext uri="{FF2B5EF4-FFF2-40B4-BE49-F238E27FC236}">
-                <a16:creationId xmlns:a16="http://schemas.microsoft.com/office/drawing/2014/main" id="{D8E631CB-918C-4F78-A85A-DB0850163682}"/>
+                <a16:creationId xmlns:a16="http://schemas.microsoft.com/office/drawing/2014/main" id="{F54C663C-066C-4B38-95FD-B9CC3E57CB3A}"/>
               </a:ext>
             </a:extLst>
           </p:cNvPr>
@@ -20421,7 +20421,7 @@
           <p:cNvPr id="6" name="">
             <a:extLst xmlns:a="http://schemas.openxmlformats.org/drawingml/2006/main">
               <a:ext uri="{FF2B5EF4-FFF2-40B4-BE49-F238E27FC236}">
-                <a16:creationId xmlns:a16="http://schemas.microsoft.com/office/drawing/2014/main" id="{FEB3CC76-2C22-4A4D-8B1F-4497F89B6BB6}"/>
+                <a16:creationId xmlns:a16="http://schemas.microsoft.com/office/drawing/2014/main" id="{534B8276-8788-4CFD-A086-531ADC51CA3F}"/>
               </a:ext>
             </a:extLst>
           </p:cNvPr>
@@ -20483,7 +20483,7 @@
           <p:cNvPr id="7" name="">
             <a:extLst xmlns:a="http://schemas.openxmlformats.org/drawingml/2006/main">
               <a:ext uri="{FF2B5EF4-FFF2-40B4-BE49-F238E27FC236}">
-                <a16:creationId xmlns:a16="http://schemas.microsoft.com/office/drawing/2014/main" id="{10243095-96F6-4223-81CC-10CF996085DB}"/>
+                <a16:creationId xmlns:a16="http://schemas.microsoft.com/office/drawing/2014/main" id="{4590EC53-BBEC-45B6-B028-F8436FB2721E}"/>
               </a:ext>
             </a:extLst>
           </p:cNvPr>
@@ -20545,7 +20545,7 @@
           <p:cNvPr id="8" name="">
             <a:extLst xmlns:a="http://schemas.openxmlformats.org/drawingml/2006/main">
               <a:ext uri="{FF2B5EF4-FFF2-40B4-BE49-F238E27FC236}">
-                <a16:creationId xmlns:a16="http://schemas.microsoft.com/office/drawing/2014/main" id="{4D544E06-471A-4350-8B31-70592AA0F73B}"/>
+                <a16:creationId xmlns:a16="http://schemas.microsoft.com/office/drawing/2014/main" id="{D105E92B-99E9-4441-805B-FA4FCB3741EA}"/>
               </a:ext>
             </a:extLst>
           </p:cNvPr>
@@ -20607,7 +20607,7 @@
           <p:cNvPr id="9" name="">
             <a:extLst xmlns:a="http://schemas.openxmlformats.org/drawingml/2006/main">
               <a:ext uri="{FF2B5EF4-FFF2-40B4-BE49-F238E27FC236}">
-                <a16:creationId xmlns:a16="http://schemas.microsoft.com/office/drawing/2014/main" id="{31CF8D05-0B31-4BD9-B47E-25C47E067BE4}"/>
+                <a16:creationId xmlns:a16="http://schemas.microsoft.com/office/drawing/2014/main" id="{A770E233-DFFF-42B4-8083-4E3272013ACC}"/>
               </a:ext>
             </a:extLst>
           </p:cNvPr>
@@ -20638,7 +20638,7 @@
           <p:cNvPr id="10" name="">
             <a:extLst xmlns:a="http://schemas.openxmlformats.org/drawingml/2006/main">
               <a:ext uri="{FF2B5EF4-FFF2-40B4-BE49-F238E27FC236}">
-                <a16:creationId xmlns:a16="http://schemas.microsoft.com/office/drawing/2014/main" id="{B8B82AA3-85FD-4315-8B6D-5C7B6EDDF4A4}"/>
+                <a16:creationId xmlns:a16="http://schemas.microsoft.com/office/drawing/2014/main" id="{4D7A8EC7-4C22-456E-A10B-A9E536419420}"/>
               </a:ext>
             </a:extLst>
           </p:cNvPr>
@@ -20700,7 +20700,7 @@
           <p:cNvPr id="11" name="">
             <a:extLst xmlns:a="http://schemas.openxmlformats.org/drawingml/2006/main">
               <a:ext uri="{FF2B5EF4-FFF2-40B4-BE49-F238E27FC236}">
-                <a16:creationId xmlns:a16="http://schemas.microsoft.com/office/drawing/2014/main" id="{29D6742B-228B-41F6-9BAE-0642AD56757A}"/>
+                <a16:creationId xmlns:a16="http://schemas.microsoft.com/office/drawing/2014/main" id="{1975A05A-1193-49A3-BA98-95D001D78F48}"/>
               </a:ext>
             </a:extLst>
           </p:cNvPr>
@@ -20762,7 +20762,7 @@
           <p:cNvPr id="12" name="">
             <a:extLst xmlns:a="http://schemas.openxmlformats.org/drawingml/2006/main">
               <a:ext uri="{FF2B5EF4-FFF2-40B4-BE49-F238E27FC236}">
-                <a16:creationId xmlns:a16="http://schemas.microsoft.com/office/drawing/2014/main" id="{18894E5C-EC36-427E-9C34-6D5C7ECCC3C4}"/>
+                <a16:creationId xmlns:a16="http://schemas.microsoft.com/office/drawing/2014/main" id="{985EA132-9875-4C03-967A-7732338028BA}"/>
               </a:ext>
             </a:extLst>
           </p:cNvPr>
@@ -20824,7 +20824,7 @@
           <p:cNvPr id="13" name="">
             <a:extLst xmlns:a="http://schemas.openxmlformats.org/drawingml/2006/main">
               <a:ext uri="{FF2B5EF4-FFF2-40B4-BE49-F238E27FC236}">
-                <a16:creationId xmlns:a16="http://schemas.microsoft.com/office/drawing/2014/main" id="{266B06E9-6103-4B38-BA9B-935B8A370EC2}"/>
+                <a16:creationId xmlns:a16="http://schemas.microsoft.com/office/drawing/2014/main" id="{49F4CEA7-B54F-4CC7-8B21-EA6711964AF0}"/>
               </a:ext>
             </a:extLst>
           </p:cNvPr>
@@ -20855,7 +20855,7 @@
           <p:cNvPr id="14" name="">
             <a:extLst xmlns:a="http://schemas.openxmlformats.org/drawingml/2006/main">
               <a:ext uri="{FF2B5EF4-FFF2-40B4-BE49-F238E27FC236}">
-                <a16:creationId xmlns:a16="http://schemas.microsoft.com/office/drawing/2014/main" id="{4CF6EA9C-6C27-46DB-BB85-3332FD6BE151}"/>
+                <a16:creationId xmlns:a16="http://schemas.microsoft.com/office/drawing/2014/main" id="{3D13EBAD-DDF3-400D-A54E-C9253F380497}"/>
               </a:ext>
             </a:extLst>
           </p:cNvPr>
@@ -20917,7 +20917,7 @@
           <p:cNvPr id="15" name="">
             <a:extLst xmlns:a="http://schemas.openxmlformats.org/drawingml/2006/main">
               <a:ext uri="{FF2B5EF4-FFF2-40B4-BE49-F238E27FC236}">
-                <a16:creationId xmlns:a16="http://schemas.microsoft.com/office/drawing/2014/main" id="{82554B5D-A171-48D4-891D-96F962BB2902}"/>
+                <a16:creationId xmlns:a16="http://schemas.microsoft.com/office/drawing/2014/main" id="{BF6B76BD-34ED-4002-9ADF-D809306C6D4D}"/>
               </a:ext>
             </a:extLst>
           </p:cNvPr>
@@ -20979,7 +20979,7 @@
           <p:cNvPr id="16" name="">
             <a:extLst xmlns:a="http://schemas.openxmlformats.org/drawingml/2006/main">
               <a:ext uri="{FF2B5EF4-FFF2-40B4-BE49-F238E27FC236}">
-                <a16:creationId xmlns:a16="http://schemas.microsoft.com/office/drawing/2014/main" id="{91D0B444-69AF-4891-9BD4-6288CA4F02BF}"/>
+                <a16:creationId xmlns:a16="http://schemas.microsoft.com/office/drawing/2014/main" id="{E806CAF0-32ED-4AB9-B65C-26C7624CC467}"/>
               </a:ext>
             </a:extLst>
           </p:cNvPr>
@@ -21041,7 +21041,7 @@
           <p:cNvPr id="17" name="dashboard-preview">
             <a:extLst xmlns:a="http://schemas.openxmlformats.org/drawingml/2006/main">
               <a:ext uri="{FF2B5EF4-FFF2-40B4-BE49-F238E27FC236}">
-                <a16:creationId xmlns:a16="http://schemas.microsoft.com/office/drawing/2014/main" id="{FF21E646-4017-42A6-A521-6A6F234E52E5}"/>
+                <a16:creationId xmlns:a16="http://schemas.microsoft.com/office/drawing/2014/main" id="{998F02F2-F95C-46A1-810C-8040E9C240BB}"/>
               </a:ext>
             </a:extLst>
           </p:cNvPr>
@@ -21076,7 +21076,7 @@
           <p:cNvPr id="18" name="">
             <a:extLst xmlns:a="http://schemas.openxmlformats.org/drawingml/2006/main">
               <a:ext uri="{FF2B5EF4-FFF2-40B4-BE49-F238E27FC236}">
-                <a16:creationId xmlns:a16="http://schemas.microsoft.com/office/drawing/2014/main" id="{3DA4CBB8-7737-41B5-99BB-A2BE8DE865DD}"/>
+                <a16:creationId xmlns:a16="http://schemas.microsoft.com/office/drawing/2014/main" id="{9752FEA3-F3B9-4AB5-960E-F92AD246AB9C}"/>
               </a:ext>
             </a:extLst>
           </p:cNvPr>
@@ -21138,7 +21138,7 @@
           <p:cNvPr id="19" name="">
             <a:extLst xmlns:a="http://schemas.openxmlformats.org/drawingml/2006/main">
               <a:ext uri="{FF2B5EF4-FFF2-40B4-BE49-F238E27FC236}">
-                <a16:creationId xmlns:a16="http://schemas.microsoft.com/office/drawing/2014/main" id="{BF6B0B32-9157-4884-9BD9-2876BA48C8D3}"/>
+                <a16:creationId xmlns:a16="http://schemas.microsoft.com/office/drawing/2014/main" id="{0700E500-EA88-4A63-839D-A17B7AB56F81}"/>
               </a:ext>
             </a:extLst>
           </p:cNvPr>
@@ -21169,7 +21169,7 @@
           <p:cNvPr id="20" name="">
             <a:extLst xmlns:a="http://schemas.openxmlformats.org/drawingml/2006/main">
               <a:ext uri="{FF2B5EF4-FFF2-40B4-BE49-F238E27FC236}">
-                <a16:creationId xmlns:a16="http://schemas.microsoft.com/office/drawing/2014/main" id="{A3DFDCAC-49D9-4C4D-B718-2C535E2C3A48}"/>
+                <a16:creationId xmlns:a16="http://schemas.microsoft.com/office/drawing/2014/main" id="{EA06399A-CC72-43E0-9133-9A83906B7429}"/>
               </a:ext>
             </a:extLst>
           </p:cNvPr>
@@ -21231,7 +21231,7 @@
           <p:cNvPr id="21" name="">
             <a:extLst xmlns:a="http://schemas.openxmlformats.org/drawingml/2006/main">
               <a:ext uri="{FF2B5EF4-FFF2-40B4-BE49-F238E27FC236}">
-                <a16:creationId xmlns:a16="http://schemas.microsoft.com/office/drawing/2014/main" id="{97776FD5-E7B4-4B74-A8E9-38DF204B5423}"/>
+                <a16:creationId xmlns:a16="http://schemas.microsoft.com/office/drawing/2014/main" id="{435CEA08-41F6-4F89-97C2-A40B36517FEC}"/>
               </a:ext>
             </a:extLst>
           </p:cNvPr>
@@ -21262,7 +21262,7 @@
           <p:cNvPr id="22" name="">
             <a:extLst xmlns:a="http://schemas.openxmlformats.org/drawingml/2006/main">
               <a:ext uri="{FF2B5EF4-FFF2-40B4-BE49-F238E27FC236}">
-                <a16:creationId xmlns:a16="http://schemas.microsoft.com/office/drawing/2014/main" id="{4BCE9AF1-D72F-4F0F-ABE5-07759D5230FF}"/>
+                <a16:creationId xmlns:a16="http://schemas.microsoft.com/office/drawing/2014/main" id="{41BC18DD-3FA9-4439-99E8-44C4EA6588A6}"/>
               </a:ext>
             </a:extLst>
           </p:cNvPr>
@@ -21293,7 +21293,7 @@
           <p:cNvPr id="23" name="">
             <a:extLst xmlns:a="http://schemas.openxmlformats.org/drawingml/2006/main">
               <a:ext uri="{FF2B5EF4-FFF2-40B4-BE49-F238E27FC236}">
-                <a16:creationId xmlns:a16="http://schemas.microsoft.com/office/drawing/2014/main" id="{D4C012F7-A1BB-49B1-9EEB-A896E9E62B33}"/>
+                <a16:creationId xmlns:a16="http://schemas.microsoft.com/office/drawing/2014/main" id="{86CB180F-E657-4FB0-A4E8-95C4F767236C}"/>
               </a:ext>
             </a:extLst>
           </p:cNvPr>
@@ -21326,7 +21326,7 @@
           <p:cNvPr id="24" name="">
             <a:extLst xmlns:a="http://schemas.openxmlformats.org/drawingml/2006/main">
               <a:ext uri="{FF2B5EF4-FFF2-40B4-BE49-F238E27FC236}">
-                <a16:creationId xmlns:a16="http://schemas.microsoft.com/office/drawing/2014/main" id="{DD5B3F9C-F487-4625-A645-0809357F9A6B}"/>
+                <a16:creationId xmlns:a16="http://schemas.microsoft.com/office/drawing/2014/main" id="{2C6D5B0A-0BB5-4145-9349-EB129C495829}"/>
               </a:ext>
             </a:extLst>
           </p:cNvPr>
@@ -21388,7 +21388,7 @@
           <p:cNvPr id="25" name="footer-rule-7">
             <a:extLst xmlns:a="http://schemas.openxmlformats.org/drawingml/2006/main">
               <a:ext uri="{FF2B5EF4-FFF2-40B4-BE49-F238E27FC236}">
-                <a16:creationId xmlns:a16="http://schemas.microsoft.com/office/drawing/2014/main" id="{9F44A676-ED76-46D1-9012-86BF8C1160BE}"/>
+                <a16:creationId xmlns:a16="http://schemas.microsoft.com/office/drawing/2014/main" id="{B5D1A3C1-F770-4582-A03F-928203186051}"/>
               </a:ext>
             </a:extLst>
           </p:cNvPr>
@@ -21419,7 +21419,7 @@
           <p:cNvPr id="26" name="footer-label-7">
             <a:extLst xmlns:a="http://schemas.openxmlformats.org/drawingml/2006/main">
               <a:ext uri="{FF2B5EF4-FFF2-40B4-BE49-F238E27FC236}">
-                <a16:creationId xmlns:a16="http://schemas.microsoft.com/office/drawing/2014/main" id="{A2F7E856-CDDB-4CC0-BDD4-CC84C6E57F40}"/>
+                <a16:creationId xmlns:a16="http://schemas.microsoft.com/office/drawing/2014/main" id="{34D362F4-D296-4083-8321-5ADD5E6C606F}"/>
               </a:ext>
             </a:extLst>
           </p:cNvPr>
@@ -21481,7 +21481,7 @@
           <p:cNvPr id="27" name="footer-page-7">
             <a:extLst xmlns:a="http://schemas.openxmlformats.org/drawingml/2006/main">
               <a:ext uri="{FF2B5EF4-FFF2-40B4-BE49-F238E27FC236}">
-                <a16:creationId xmlns:a16="http://schemas.microsoft.com/office/drawing/2014/main" id="{D661F602-555D-4B9C-BB75-8D86CAC907A1}"/>
+                <a16:creationId xmlns:a16="http://schemas.microsoft.com/office/drawing/2014/main" id="{4324E322-6D20-40E2-ADB0-C6D7CFE8ACA7}"/>
               </a:ext>
             </a:extLst>
           </p:cNvPr>
@@ -21541,7 +21541,7 @@
     </p:spTree>
     <p:extLst>
       <p:ext uri="{BB962C8B-B14F-4D97-AF65-F5344CB8AC3E}">
-        <p14:creationId xmlns:p14="http://schemas.microsoft.com/office/powerpoint/2010/main" val="1317103653"/>
+        <p14:creationId xmlns:p14="http://schemas.microsoft.com/office/powerpoint/2010/main" val="128761958"/>
       </p:ext>
     </p:extLst>
   </p:cSld>
@@ -21572,7 +21572,7 @@
           <p:cNvPr id="26" name="side-accent-8">
             <a:extLst xmlns:a="http://schemas.openxmlformats.org/drawingml/2006/main">
               <a:ext uri="{FF2B5EF4-FFF2-40B4-BE49-F238E27FC236}">
-                <a16:creationId xmlns:a16="http://schemas.microsoft.com/office/drawing/2014/main" id="{5E7BFB5E-5D9B-453B-B6F7-0EA4075210B7}"/>
+                <a16:creationId xmlns:a16="http://schemas.microsoft.com/office/drawing/2014/main" id="{D13E93E2-BA99-4BCE-AF8B-5415F3A6CEEA}"/>
               </a:ext>
             </a:extLst>
           </p:cNvPr>
@@ -21603,7 +21603,7 @@
           <p:cNvPr id="2" name="kicker-8">
             <a:extLst xmlns:a="http://schemas.openxmlformats.org/drawingml/2006/main">
               <a:ext uri="{FF2B5EF4-FFF2-40B4-BE49-F238E27FC236}">
-                <a16:creationId xmlns:a16="http://schemas.microsoft.com/office/drawing/2014/main" id="{8C2DCD4B-1E82-436C-ABAB-F0771F6C350A}"/>
+                <a16:creationId xmlns:a16="http://schemas.microsoft.com/office/drawing/2014/main" id="{300496EA-73E1-428D-A4A2-F9AE6F841AAE}"/>
               </a:ext>
             </a:extLst>
           </p:cNvPr>
@@ -21665,7 +21665,7 @@
           <p:cNvPr id="3" name="title-8">
             <a:extLst xmlns:a="http://schemas.openxmlformats.org/drawingml/2006/main">
               <a:ext uri="{FF2B5EF4-FFF2-40B4-BE49-F238E27FC236}">
-                <a16:creationId xmlns:a16="http://schemas.microsoft.com/office/drawing/2014/main" id="{05B2036C-B4BC-4B6D-8F7B-F92A975E2EB7}"/>
+                <a16:creationId xmlns:a16="http://schemas.microsoft.com/office/drawing/2014/main" id="{B1BE26CE-AFD2-4FFA-B775-2E6433ECC952}"/>
               </a:ext>
             </a:extLst>
           </p:cNvPr>
@@ -21727,7 +21727,7 @@
           <p:cNvPr id="4" name="">
             <a:extLst xmlns:a="http://schemas.openxmlformats.org/drawingml/2006/main">
               <a:ext uri="{FF2B5EF4-FFF2-40B4-BE49-F238E27FC236}">
-                <a16:creationId xmlns:a16="http://schemas.microsoft.com/office/drawing/2014/main" id="{F3ADEE66-1341-4371-B68E-48ADB0D3CAF2}"/>
+                <a16:creationId xmlns:a16="http://schemas.microsoft.com/office/drawing/2014/main" id="{0630349D-157D-4E60-A2F4-299A67ADFC22}"/>
               </a:ext>
             </a:extLst>
           </p:cNvPr>
@@ -21789,7 +21789,7 @@
           <p:cNvPr id="5" name="">
             <a:extLst xmlns:a="http://schemas.openxmlformats.org/drawingml/2006/main">
               <a:ext uri="{FF2B5EF4-FFF2-40B4-BE49-F238E27FC236}">
-                <a16:creationId xmlns:a16="http://schemas.microsoft.com/office/drawing/2014/main" id="{236AE2E3-99E6-4C62-B933-E86C82395B02}"/>
+                <a16:creationId xmlns:a16="http://schemas.microsoft.com/office/drawing/2014/main" id="{355379C4-32F1-4650-8C3A-C65A21455A1C}"/>
               </a:ext>
             </a:extLst>
           </p:cNvPr>
@@ -21820,7 +21820,7 @@
           <p:cNvPr id="6" name="">
             <a:extLst xmlns:a="http://schemas.openxmlformats.org/drawingml/2006/main">
               <a:ext uri="{FF2B5EF4-FFF2-40B4-BE49-F238E27FC236}">
-                <a16:creationId xmlns:a16="http://schemas.microsoft.com/office/drawing/2014/main" id="{955A68DF-6484-4DEC-907A-AF50B056C4BF}"/>
+                <a16:creationId xmlns:a16="http://schemas.microsoft.com/office/drawing/2014/main" id="{C156DEBA-B225-4B99-9C79-49F515E4DDE9}"/>
               </a:ext>
             </a:extLst>
           </p:cNvPr>
@@ -21851,7 +21851,7 @@
           <p:cNvPr id="7" name="">
             <a:extLst xmlns:a="http://schemas.openxmlformats.org/drawingml/2006/main">
               <a:ext uri="{FF2B5EF4-FFF2-40B4-BE49-F238E27FC236}">
-                <a16:creationId xmlns:a16="http://schemas.microsoft.com/office/drawing/2014/main" id="{58753073-56BE-4C07-A637-C6B7917ED0B2}"/>
+                <a16:creationId xmlns:a16="http://schemas.microsoft.com/office/drawing/2014/main" id="{9F96D4A5-B995-4486-A049-3A204C2F6315}"/>
               </a:ext>
             </a:extLst>
           </p:cNvPr>
@@ -21913,7 +21913,7 @@
           <p:cNvPr id="8" name="">
             <a:extLst xmlns:a="http://schemas.openxmlformats.org/drawingml/2006/main">
               <a:ext uri="{FF2B5EF4-FFF2-40B4-BE49-F238E27FC236}">
-                <a16:creationId xmlns:a16="http://schemas.microsoft.com/office/drawing/2014/main" id="{6B4949D4-842A-4729-8FDD-995F48D25C64}"/>
+                <a16:creationId xmlns:a16="http://schemas.microsoft.com/office/drawing/2014/main" id="{62650220-C524-46A8-A366-61E7FF112689}"/>
               </a:ext>
             </a:extLst>
           </p:cNvPr>
@@ -21975,7 +21975,7 @@
           <p:cNvPr id="9" name="">
             <a:extLst xmlns:a="http://schemas.openxmlformats.org/drawingml/2006/main">
               <a:ext uri="{FF2B5EF4-FFF2-40B4-BE49-F238E27FC236}">
-                <a16:creationId xmlns:a16="http://schemas.microsoft.com/office/drawing/2014/main" id="{5434DD70-4F46-4719-AC29-725A0B2EB1AC}"/>
+                <a16:creationId xmlns:a16="http://schemas.microsoft.com/office/drawing/2014/main" id="{0B5EB9DC-EFA6-40DB-8A46-C52611C4C928}"/>
               </a:ext>
             </a:extLst>
           </p:cNvPr>
@@ -22037,7 +22037,7 @@
           <p:cNvPr id="10" name="">
             <a:extLst xmlns:a="http://schemas.openxmlformats.org/drawingml/2006/main">
               <a:ext uri="{FF2B5EF4-FFF2-40B4-BE49-F238E27FC236}">
-                <a16:creationId xmlns:a16="http://schemas.microsoft.com/office/drawing/2014/main" id="{5A18EA88-332C-4DE8-8C64-ACFF60C16E95}"/>
+                <a16:creationId xmlns:a16="http://schemas.microsoft.com/office/drawing/2014/main" id="{FCDCFCB1-30C3-4FA6-9842-D0394DB5F485}"/>
               </a:ext>
             </a:extLst>
           </p:cNvPr>
@@ -22068,7 +22068,7 @@
           <p:cNvPr id="11" name="">
             <a:extLst xmlns:a="http://schemas.openxmlformats.org/drawingml/2006/main">
               <a:ext uri="{FF2B5EF4-FFF2-40B4-BE49-F238E27FC236}">
-                <a16:creationId xmlns:a16="http://schemas.microsoft.com/office/drawing/2014/main" id="{EF613A84-2FBD-43AB-81E9-B93E38A1F8FA}"/>
+                <a16:creationId xmlns:a16="http://schemas.microsoft.com/office/drawing/2014/main" id="{95414FD5-CFEA-4772-914F-F2E1328BB571}"/>
               </a:ext>
             </a:extLst>
           </p:cNvPr>
@@ -22130,7 +22130,7 @@
           <p:cNvPr id="12" name="">
             <a:extLst xmlns:a="http://schemas.openxmlformats.org/drawingml/2006/main">
               <a:ext uri="{FF2B5EF4-FFF2-40B4-BE49-F238E27FC236}">
-                <a16:creationId xmlns:a16="http://schemas.microsoft.com/office/drawing/2014/main" id="{539D04D9-DF8B-44B4-A101-3D97839DCA5A}"/>
+                <a16:creationId xmlns:a16="http://schemas.microsoft.com/office/drawing/2014/main" id="{59F82EC9-D370-4BB3-954C-7883375D7ECE}"/>
               </a:ext>
             </a:extLst>
           </p:cNvPr>
@@ -22192,7 +22192,7 @@
           <p:cNvPr id="13" name="">
             <a:extLst xmlns:a="http://schemas.openxmlformats.org/drawingml/2006/main">
               <a:ext uri="{FF2B5EF4-FFF2-40B4-BE49-F238E27FC236}">
-                <a16:creationId xmlns:a16="http://schemas.microsoft.com/office/drawing/2014/main" id="{8FCF9342-897E-4BE3-8333-C4EF4751A504}"/>
+                <a16:creationId xmlns:a16="http://schemas.microsoft.com/office/drawing/2014/main" id="{1FCEE264-D3E6-452E-AAF6-2746D5AF0AD0}"/>
               </a:ext>
             </a:extLst>
           </p:cNvPr>
@@ -22254,7 +22254,7 @@
           <p:cNvPr id="14" name="">
             <a:extLst xmlns:a="http://schemas.openxmlformats.org/drawingml/2006/main">
               <a:ext uri="{FF2B5EF4-FFF2-40B4-BE49-F238E27FC236}">
-                <a16:creationId xmlns:a16="http://schemas.microsoft.com/office/drawing/2014/main" id="{9CD2BB1D-A320-4055-B61F-7F50458FFA76}"/>
+                <a16:creationId xmlns:a16="http://schemas.microsoft.com/office/drawing/2014/main" id="{120831DF-6D0C-499A-AD82-07B15815B455}"/>
               </a:ext>
             </a:extLst>
           </p:cNvPr>
@@ -22285,7 +22285,7 @@
           <p:cNvPr id="15" name="">
             <a:extLst xmlns:a="http://schemas.openxmlformats.org/drawingml/2006/main">
               <a:ext uri="{FF2B5EF4-FFF2-40B4-BE49-F238E27FC236}">
-                <a16:creationId xmlns:a16="http://schemas.microsoft.com/office/drawing/2014/main" id="{C6A4F85D-B910-4043-9732-5750E65660A2}"/>
+                <a16:creationId xmlns:a16="http://schemas.microsoft.com/office/drawing/2014/main" id="{7001784B-B8B0-440D-BA11-1A288828C81F}"/>
               </a:ext>
             </a:extLst>
           </p:cNvPr>
@@ -22347,7 +22347,7 @@
           <p:cNvPr id="16" name="">
             <a:extLst xmlns:a="http://schemas.openxmlformats.org/drawingml/2006/main">
               <a:ext uri="{FF2B5EF4-FFF2-40B4-BE49-F238E27FC236}">
-                <a16:creationId xmlns:a16="http://schemas.microsoft.com/office/drawing/2014/main" id="{23FDB443-4343-43E0-A33D-61E8F5A5F27A}"/>
+                <a16:creationId xmlns:a16="http://schemas.microsoft.com/office/drawing/2014/main" id="{3B553FBA-AE1C-4C6A-8655-D0FB74A0E158}"/>
               </a:ext>
             </a:extLst>
           </p:cNvPr>
@@ -22409,7 +22409,7 @@
           <p:cNvPr id="17" name="">
             <a:extLst xmlns:a="http://schemas.openxmlformats.org/drawingml/2006/main">
               <a:ext uri="{FF2B5EF4-FFF2-40B4-BE49-F238E27FC236}">
-                <a16:creationId xmlns:a16="http://schemas.microsoft.com/office/drawing/2014/main" id="{163A1E93-250E-432C-B9E4-E50554FAFBDC}"/>
+                <a16:creationId xmlns:a16="http://schemas.microsoft.com/office/drawing/2014/main" id="{AA90551F-D3F2-4625-A2DA-EE6E8D1269EC}"/>
               </a:ext>
             </a:extLst>
           </p:cNvPr>
@@ -22471,7 +22471,7 @@
           <p:cNvPr id="18" name="">
             <a:extLst xmlns:a="http://schemas.openxmlformats.org/drawingml/2006/main">
               <a:ext uri="{FF2B5EF4-FFF2-40B4-BE49-F238E27FC236}">
-                <a16:creationId xmlns:a16="http://schemas.microsoft.com/office/drawing/2014/main" id="{8C330155-32A8-4BF6-B077-B174A94E43F6}"/>
+                <a16:creationId xmlns:a16="http://schemas.microsoft.com/office/drawing/2014/main" id="{185C5C45-AF8C-421B-974D-A5DA17E53AB3}"/>
               </a:ext>
             </a:extLst>
           </p:cNvPr>
@@ -22502,7 +22502,7 @@
           <p:cNvPr id="19" name="">
             <a:extLst xmlns:a="http://schemas.openxmlformats.org/drawingml/2006/main">
               <a:ext uri="{FF2B5EF4-FFF2-40B4-BE49-F238E27FC236}">
-                <a16:creationId xmlns:a16="http://schemas.microsoft.com/office/drawing/2014/main" id="{0CD2EF05-7FB4-44D1-8839-0A81A84057EA}"/>
+                <a16:creationId xmlns:a16="http://schemas.microsoft.com/office/drawing/2014/main" id="{13B4DCAA-6930-44E0-88AC-255F40F9ECD0}"/>
               </a:ext>
             </a:extLst>
           </p:cNvPr>
@@ -22564,7 +22564,7 @@
           <p:cNvPr id="20" name="">
             <a:extLst xmlns:a="http://schemas.openxmlformats.org/drawingml/2006/main">
               <a:ext uri="{FF2B5EF4-FFF2-40B4-BE49-F238E27FC236}">
-                <a16:creationId xmlns:a16="http://schemas.microsoft.com/office/drawing/2014/main" id="{0F3369E5-5EB1-4185-A27C-4214C63C5C8E}"/>
+                <a16:creationId xmlns:a16="http://schemas.microsoft.com/office/drawing/2014/main" id="{4EBB2D78-E2C4-4386-9A23-FD9C10843F3E}"/>
               </a:ext>
             </a:extLst>
           </p:cNvPr>
@@ -22626,7 +22626,7 @@
           <p:cNvPr id="21" name="">
             <a:extLst xmlns:a="http://schemas.openxmlformats.org/drawingml/2006/main">
               <a:ext uri="{FF2B5EF4-FFF2-40B4-BE49-F238E27FC236}">
-                <a16:creationId xmlns:a16="http://schemas.microsoft.com/office/drawing/2014/main" id="{60F8B97F-8593-4D37-AFE2-6073DA2CA616}"/>
+                <a16:creationId xmlns:a16="http://schemas.microsoft.com/office/drawing/2014/main" id="{AE9ADFF8-F2EA-47DE-A702-25E254B80528}"/>
               </a:ext>
             </a:extLst>
           </p:cNvPr>
@@ -22688,7 +22688,7 @@
           <p:cNvPr id="22" name="">
             <a:extLst xmlns:a="http://schemas.openxmlformats.org/drawingml/2006/main">
               <a:ext uri="{FF2B5EF4-FFF2-40B4-BE49-F238E27FC236}">
-                <a16:creationId xmlns:a16="http://schemas.microsoft.com/office/drawing/2014/main" id="{E4ED3FA6-63EA-48BB-9FEB-5B32A43114F0}"/>
+                <a16:creationId xmlns:a16="http://schemas.microsoft.com/office/drawing/2014/main" id="{592582E1-0FD8-49C2-BDF5-887E36E01F97}"/>
               </a:ext>
             </a:extLst>
           </p:cNvPr>
@@ -22750,7 +22750,7 @@
           <p:cNvPr id="23" name="footer-rule-8">
             <a:extLst xmlns:a="http://schemas.openxmlformats.org/drawingml/2006/main">
               <a:ext uri="{FF2B5EF4-FFF2-40B4-BE49-F238E27FC236}">
-                <a16:creationId xmlns:a16="http://schemas.microsoft.com/office/drawing/2014/main" id="{E0CCA6DD-9B67-40E0-9963-E2409CCE943A}"/>
+                <a16:creationId xmlns:a16="http://schemas.microsoft.com/office/drawing/2014/main" id="{52498347-C50C-47C4-AD84-91C59D65AFCB}"/>
               </a:ext>
             </a:extLst>
           </p:cNvPr>
@@ -22781,7 +22781,7 @@
           <p:cNvPr id="24" name="footer-label-8">
             <a:extLst xmlns:a="http://schemas.openxmlformats.org/drawingml/2006/main">
               <a:ext uri="{FF2B5EF4-FFF2-40B4-BE49-F238E27FC236}">
-                <a16:creationId xmlns:a16="http://schemas.microsoft.com/office/drawing/2014/main" id="{0FD43EDA-D3CF-4ABA-BC81-F075F894A6E9}"/>
+                <a16:creationId xmlns:a16="http://schemas.microsoft.com/office/drawing/2014/main" id="{67BFDA57-408D-4CF8-ABEB-F322BEC39680}"/>
               </a:ext>
             </a:extLst>
           </p:cNvPr>
@@ -22843,7 +22843,7 @@
           <p:cNvPr id="25" name="footer-page-8">
             <a:extLst xmlns:a="http://schemas.openxmlformats.org/drawingml/2006/main">
               <a:ext uri="{FF2B5EF4-FFF2-40B4-BE49-F238E27FC236}">
-                <a16:creationId xmlns:a16="http://schemas.microsoft.com/office/drawing/2014/main" id="{6E9F8911-8360-4851-B494-A178BCDFC9DD}"/>
+                <a16:creationId xmlns:a16="http://schemas.microsoft.com/office/drawing/2014/main" id="{F570F9E1-DD46-4B00-8938-670A476DAC6A}"/>
               </a:ext>
             </a:extLst>
           </p:cNvPr>
@@ -22903,7 +22903,7 @@
     </p:spTree>
     <p:extLst>
       <p:ext uri="{BB962C8B-B14F-4D97-AF65-F5344CB8AC3E}">
-        <p14:creationId xmlns:p14="http://schemas.microsoft.com/office/powerpoint/2010/main" val="1851241387"/>
+        <p14:creationId xmlns:p14="http://schemas.microsoft.com/office/powerpoint/2010/main" val="1235013635"/>
       </p:ext>
     </p:extLst>
   </p:cSld>
@@ -22934,7 +22934,7 @@
           <p:cNvPr id="21" name="side-accent-9">
             <a:extLst xmlns:a="http://schemas.openxmlformats.org/drawingml/2006/main">
               <a:ext uri="{FF2B5EF4-FFF2-40B4-BE49-F238E27FC236}">
-                <a16:creationId xmlns:a16="http://schemas.microsoft.com/office/drawing/2014/main" id="{1EA6402E-0D7F-45A6-AB20-C2842D5D4AFF}"/>
+                <a16:creationId xmlns:a16="http://schemas.microsoft.com/office/drawing/2014/main" id="{AC0C89D9-DAC5-400C-8062-629ABA6E4A7F}"/>
               </a:ext>
             </a:extLst>
           </p:cNvPr>
@@ -22965,7 +22965,7 @@
           <p:cNvPr id="2" name="kicker-9">
             <a:extLst xmlns:a="http://schemas.openxmlformats.org/drawingml/2006/main">
               <a:ext uri="{FF2B5EF4-FFF2-40B4-BE49-F238E27FC236}">
-                <a16:creationId xmlns:a16="http://schemas.microsoft.com/office/drawing/2014/main" id="{2BF6AF9C-4129-442B-A684-1B6292228FAA}"/>
+                <a16:creationId xmlns:a16="http://schemas.microsoft.com/office/drawing/2014/main" id="{C06A3142-4BF1-4567-B578-747A3552E823}"/>
               </a:ext>
             </a:extLst>
           </p:cNvPr>
@@ -23027,7 +23027,7 @@
           <p:cNvPr id="3" name="title-9">
             <a:extLst xmlns:a="http://schemas.openxmlformats.org/drawingml/2006/main">
               <a:ext uri="{FF2B5EF4-FFF2-40B4-BE49-F238E27FC236}">
-                <a16:creationId xmlns:a16="http://schemas.microsoft.com/office/drawing/2014/main" id="{7092C948-3700-4675-B809-474F9E0C3B82}"/>
+                <a16:creationId xmlns:a16="http://schemas.microsoft.com/office/drawing/2014/main" id="{45C5ABD6-D3AB-4C82-B62B-EAF23E62B018}"/>
               </a:ext>
             </a:extLst>
           </p:cNvPr>
@@ -23089,7 +23089,7 @@
           <p:cNvPr id="4" name="">
             <a:extLst xmlns:a="http://schemas.openxmlformats.org/drawingml/2006/main">
               <a:ext uri="{FF2B5EF4-FFF2-40B4-BE49-F238E27FC236}">
-                <a16:creationId xmlns:a16="http://schemas.microsoft.com/office/drawing/2014/main" id="{80659473-0A7D-4182-B777-DEAE0E8A80AE}"/>
+                <a16:creationId xmlns:a16="http://schemas.microsoft.com/office/drawing/2014/main" id="{23422553-72C4-4715-8158-605A4F2F5E8B}"/>
               </a:ext>
             </a:extLst>
           </p:cNvPr>
@@ -23151,7 +23151,7 @@
           <p:cNvPr id="5" name="">
             <a:extLst xmlns:a="http://schemas.openxmlformats.org/drawingml/2006/main">
               <a:ext uri="{FF2B5EF4-FFF2-40B4-BE49-F238E27FC236}">
-                <a16:creationId xmlns:a16="http://schemas.microsoft.com/office/drawing/2014/main" id="{603052E8-9F4F-4175-895A-65F685C5EC41}"/>
+                <a16:creationId xmlns:a16="http://schemas.microsoft.com/office/drawing/2014/main" id="{B7AC658C-2FBF-4178-924C-1E04844DE3F5}"/>
               </a:ext>
             </a:extLst>
           </p:cNvPr>
@@ -23182,7 +23182,7 @@
           <p:cNvPr id="6" name="">
             <a:extLst xmlns:a="http://schemas.openxmlformats.org/drawingml/2006/main">
               <a:ext uri="{FF2B5EF4-FFF2-40B4-BE49-F238E27FC236}">
-                <a16:creationId xmlns:a16="http://schemas.microsoft.com/office/drawing/2014/main" id="{3CBE0F51-C9F8-4A9C-8CD6-FE983B621092}"/>
+                <a16:creationId xmlns:a16="http://schemas.microsoft.com/office/drawing/2014/main" id="{91898280-C76A-4FAD-8038-BDAEF7A6ACD2}"/>
               </a:ext>
             </a:extLst>
           </p:cNvPr>
@@ -23244,7 +23244,7 @@
           <p:cNvPr id="7" name="">
             <a:extLst xmlns:a="http://schemas.openxmlformats.org/drawingml/2006/main">
               <a:ext uri="{FF2B5EF4-FFF2-40B4-BE49-F238E27FC236}">
-                <a16:creationId xmlns:a16="http://schemas.microsoft.com/office/drawing/2014/main" id="{4FA168AC-E5D7-4B41-A14B-A6B74E48C7BE}"/>
+                <a16:creationId xmlns:a16="http://schemas.microsoft.com/office/drawing/2014/main" id="{09C4FCBE-6AE7-4EC8-9E2A-ED185CAB5907}"/>
               </a:ext>
             </a:extLst>
           </p:cNvPr>
@@ -23306,7 +23306,7 @@
           <p:cNvPr id="8" name="">
             <a:extLst xmlns:a="http://schemas.openxmlformats.org/drawingml/2006/main">
               <a:ext uri="{FF2B5EF4-FFF2-40B4-BE49-F238E27FC236}">
-                <a16:creationId xmlns:a16="http://schemas.microsoft.com/office/drawing/2014/main" id="{ED8F0C54-8F65-460A-B89D-5D756C9D9E27}"/>
+                <a16:creationId xmlns:a16="http://schemas.microsoft.com/office/drawing/2014/main" id="{AE7C59E7-4548-4FEB-A2AA-2628214C2C07}"/>
               </a:ext>
             </a:extLst>
           </p:cNvPr>
@@ -23368,7 +23368,7 @@
           <p:cNvPr id="9" name="">
             <a:extLst xmlns:a="http://schemas.openxmlformats.org/drawingml/2006/main">
               <a:ext uri="{FF2B5EF4-FFF2-40B4-BE49-F238E27FC236}">
-                <a16:creationId xmlns:a16="http://schemas.microsoft.com/office/drawing/2014/main" id="{9CEB1425-A648-440A-9823-E422AADEEC18}"/>
+                <a16:creationId xmlns:a16="http://schemas.microsoft.com/office/drawing/2014/main" id="{75E4DA82-B3F8-44A8-A94E-229D19ED4636}"/>
               </a:ext>
             </a:extLst>
           </p:cNvPr>
@@ -23399,7 +23399,7 @@
           <p:cNvPr id="10" name="">
             <a:extLst xmlns:a="http://schemas.openxmlformats.org/drawingml/2006/main">
               <a:ext uri="{FF2B5EF4-FFF2-40B4-BE49-F238E27FC236}">
-                <a16:creationId xmlns:a16="http://schemas.microsoft.com/office/drawing/2014/main" id="{6B42C676-1A1F-4A58-BD08-74AA3E6B0E67}"/>
+                <a16:creationId xmlns:a16="http://schemas.microsoft.com/office/drawing/2014/main" id="{831EDD76-F197-4D21-AC6E-B7942AEACA2F}"/>
               </a:ext>
             </a:extLst>
           </p:cNvPr>
@@ -23461,7 +23461,7 @@
           <p:cNvPr id="11" name="">
             <a:extLst xmlns:a="http://schemas.openxmlformats.org/drawingml/2006/main">
               <a:ext uri="{FF2B5EF4-FFF2-40B4-BE49-F238E27FC236}">
-                <a16:creationId xmlns:a16="http://schemas.microsoft.com/office/drawing/2014/main" id="{1BCB6C2B-0757-46C7-A378-8E7BD7130A47}"/>
+                <a16:creationId xmlns:a16="http://schemas.microsoft.com/office/drawing/2014/main" id="{7119CEF1-4D22-453D-87B4-EAA29789471C}"/>
               </a:ext>
             </a:extLst>
           </p:cNvPr>
@@ -23523,7 +23523,7 @@
           <p:cNvPr id="12" name="">
             <a:extLst xmlns:a="http://schemas.openxmlformats.org/drawingml/2006/main">
               <a:ext uri="{FF2B5EF4-FFF2-40B4-BE49-F238E27FC236}">
-                <a16:creationId xmlns:a16="http://schemas.microsoft.com/office/drawing/2014/main" id="{53303F38-3FA4-485E-946E-8DC545A25F61}"/>
+                <a16:creationId xmlns:a16="http://schemas.microsoft.com/office/drawing/2014/main" id="{A5C21030-2365-4E4B-9956-70825448E81B}"/>
               </a:ext>
             </a:extLst>
           </p:cNvPr>
@@ -23585,7 +23585,7 @@
           <p:cNvPr id="13" name="">
             <a:extLst xmlns:a="http://schemas.openxmlformats.org/drawingml/2006/main">
               <a:ext uri="{FF2B5EF4-FFF2-40B4-BE49-F238E27FC236}">
-                <a16:creationId xmlns:a16="http://schemas.microsoft.com/office/drawing/2014/main" id="{10F56999-AEBB-4A45-B34D-406D15A4DB1D}"/>
+                <a16:creationId xmlns:a16="http://schemas.microsoft.com/office/drawing/2014/main" id="{CA2EBDAB-BDE9-4E95-A9BA-B5D9E3E93B6C}"/>
               </a:ext>
             </a:extLst>
           </p:cNvPr>
@@ -23616,7 +23616,7 @@
           <p:cNvPr id="14" name="">
             <a:extLst xmlns:a="http://schemas.openxmlformats.org/drawingml/2006/main">
               <a:ext uri="{FF2B5EF4-FFF2-40B4-BE49-F238E27FC236}">
-                <a16:creationId xmlns:a16="http://schemas.microsoft.com/office/drawing/2014/main" id="{9527939E-B69E-4E11-BD67-3D4AC2C0828A}"/>
+                <a16:creationId xmlns:a16="http://schemas.microsoft.com/office/drawing/2014/main" id="{92342C2A-3E11-4704-967F-DD6DE1D5D922}"/>
               </a:ext>
             </a:extLst>
           </p:cNvPr>
@@ -23678,7 +23678,7 @@
           <p:cNvPr id="15" name="">
             <a:extLst xmlns:a="http://schemas.openxmlformats.org/drawingml/2006/main">
               <a:ext uri="{FF2B5EF4-FFF2-40B4-BE49-F238E27FC236}">
-                <a16:creationId xmlns:a16="http://schemas.microsoft.com/office/drawing/2014/main" id="{16B434BB-0208-4381-986D-F2F8E3F79402}"/>
+                <a16:creationId xmlns:a16="http://schemas.microsoft.com/office/drawing/2014/main" id="{56AEE54E-46A3-44FD-A1D6-DAD952F1EA99}"/>
               </a:ext>
             </a:extLst>
           </p:cNvPr>
@@ -23740,7 +23740,7 @@
           <p:cNvPr id="16" name="">
             <a:extLst xmlns:a="http://schemas.openxmlformats.org/drawingml/2006/main">
               <a:ext uri="{FF2B5EF4-FFF2-40B4-BE49-F238E27FC236}">
-                <a16:creationId xmlns:a16="http://schemas.microsoft.com/office/drawing/2014/main" id="{1338AA24-4DF2-459D-A947-97F234583A6B}"/>
+                <a16:creationId xmlns:a16="http://schemas.microsoft.com/office/drawing/2014/main" id="{0589A322-BD02-4104-90D7-675376E57D34}"/>
               </a:ext>
             </a:extLst>
           </p:cNvPr>
@@ -23802,7 +23802,7 @@
           <p:cNvPr id="17" name="">
             <a:extLst xmlns:a="http://schemas.openxmlformats.org/drawingml/2006/main">
               <a:ext uri="{FF2B5EF4-FFF2-40B4-BE49-F238E27FC236}">
-                <a16:creationId xmlns:a16="http://schemas.microsoft.com/office/drawing/2014/main" id="{89F58360-C713-487F-AEB3-0A6ECB97A621}"/>
+                <a16:creationId xmlns:a16="http://schemas.microsoft.com/office/drawing/2014/main" id="{E5F5A6E5-0C75-4DE6-8BD2-658D63064248}"/>
               </a:ext>
             </a:extLst>
           </p:cNvPr>
@@ -23864,7 +23864,7 @@
           <p:cNvPr id="18" name="footer-rule-9">
             <a:extLst xmlns:a="http://schemas.openxmlformats.org/drawingml/2006/main">
               <a:ext uri="{FF2B5EF4-FFF2-40B4-BE49-F238E27FC236}">
-                <a16:creationId xmlns:a16="http://schemas.microsoft.com/office/drawing/2014/main" id="{092AEE9B-CC34-43E7-B295-5EFA553CD48D}"/>
+                <a16:creationId xmlns:a16="http://schemas.microsoft.com/office/drawing/2014/main" id="{CA27EBA5-DC57-4D64-B9FE-6E4E3A9EDF1D}"/>
               </a:ext>
             </a:extLst>
           </p:cNvPr>
@@ -23895,7 +23895,7 @@
           <p:cNvPr id="19" name="footer-label-9">
             <a:extLst xmlns:a="http://schemas.openxmlformats.org/drawingml/2006/main">
               <a:ext uri="{FF2B5EF4-FFF2-40B4-BE49-F238E27FC236}">
-                <a16:creationId xmlns:a16="http://schemas.microsoft.com/office/drawing/2014/main" id="{4796B66B-1CC2-4F76-B49D-E5BF648640C7}"/>
+                <a16:creationId xmlns:a16="http://schemas.microsoft.com/office/drawing/2014/main" id="{8CC059CF-137C-4241-9A4C-6FE3316C9EB1}"/>
               </a:ext>
             </a:extLst>
           </p:cNvPr>
@@ -23957,7 +23957,7 @@
           <p:cNvPr id="20" name="footer-page-9">
             <a:extLst xmlns:a="http://schemas.openxmlformats.org/drawingml/2006/main">
               <a:ext uri="{FF2B5EF4-FFF2-40B4-BE49-F238E27FC236}">
-                <a16:creationId xmlns:a16="http://schemas.microsoft.com/office/drawing/2014/main" id="{2455F6FC-680A-4DD9-BDE2-A8A532572D9D}"/>
+                <a16:creationId xmlns:a16="http://schemas.microsoft.com/office/drawing/2014/main" id="{24347561-ACD0-48F4-8062-D0F940BE6F93}"/>
               </a:ext>
             </a:extLst>
           </p:cNvPr>
@@ -24017,7 +24017,7 @@
     </p:spTree>
     <p:extLst>
       <p:ext uri="{BB962C8B-B14F-4D97-AF65-F5344CB8AC3E}">
-        <p14:creationId xmlns:p14="http://schemas.microsoft.com/office/powerpoint/2010/main" val="713694996"/>
+        <p14:creationId xmlns:p14="http://schemas.microsoft.com/office/powerpoint/2010/main" val="1221596429"/>
       </p:ext>
     </p:extLst>
   </p:cSld>

--- a/docs/MSU-EVA-อบรมสายสนับสนุน-ฉบับวิทยากร.pptx
+++ b/docs/MSU-EVA-อบรมสายสนับสนุน-ฉบับวิทยากร.pptx
@@ -2,30 +2,30 @@
 <file path=ppt/presentation.xml><?xml version="1.0" encoding="utf-8"?>
 <p:presentation xmlns:p="http://schemas.openxmlformats.org/presentationml/2006/main">
   <p:sldMasterIdLst>
-    <p:sldMasterId xmlns:r="http://schemas.openxmlformats.org/officeDocument/2006/relationships" id="2147483648" r:id="Redd03ff9f6994d03"/>
+    <p:sldMasterId xmlns:r="http://schemas.openxmlformats.org/officeDocument/2006/relationships" id="2147483648" r:id="R3e4d28daa68b4541"/>
   </p:sldMasterIdLst>
   <p:notesMasterIdLst>
-    <p:notesMasterId xmlns:r="http://schemas.openxmlformats.org/officeDocument/2006/relationships" r:id="R3e4ef5225cf84f5b"/>
+    <p:notesMasterId xmlns:r="http://schemas.openxmlformats.org/officeDocument/2006/relationships" r:id="R08860f1f19104dcf"/>
   </p:notesMasterIdLst>
   <p:sldIdLst>
-    <p:sldId xmlns:r="http://schemas.openxmlformats.org/officeDocument/2006/relationships" id="256" r:id="R5dd6c0e8636d464e"/>
-    <p:sldId xmlns:r="http://schemas.openxmlformats.org/officeDocument/2006/relationships" id="257" r:id="Rdea1cbc0b9404a10"/>
-    <p:sldId xmlns:r="http://schemas.openxmlformats.org/officeDocument/2006/relationships" id="258" r:id="Rc813cfb4598e4244"/>
-    <p:sldId xmlns:r="http://schemas.openxmlformats.org/officeDocument/2006/relationships" id="259" r:id="Rf7ee6d64163c4574"/>
-    <p:sldId xmlns:r="http://schemas.openxmlformats.org/officeDocument/2006/relationships" id="260" r:id="R4f24c80fb0fe4959"/>
-    <p:sldId xmlns:r="http://schemas.openxmlformats.org/officeDocument/2006/relationships" id="261" r:id="R42b8602b06d748cf"/>
-    <p:sldId xmlns:r="http://schemas.openxmlformats.org/officeDocument/2006/relationships" id="262" r:id="R243d8e490c7e47e0"/>
-    <p:sldId xmlns:r="http://schemas.openxmlformats.org/officeDocument/2006/relationships" id="263" r:id="Rb444e3ed6b3746a9"/>
-    <p:sldId xmlns:r="http://schemas.openxmlformats.org/officeDocument/2006/relationships" id="264" r:id="R6601e93af8dd4d34"/>
-    <p:sldId xmlns:r="http://schemas.openxmlformats.org/officeDocument/2006/relationships" id="265" r:id="Rc65b5f8fd33147e1"/>
-    <p:sldId xmlns:r="http://schemas.openxmlformats.org/officeDocument/2006/relationships" id="266" r:id="R1be78efb24f448d4"/>
-    <p:sldId xmlns:r="http://schemas.openxmlformats.org/officeDocument/2006/relationships" id="267" r:id="Rac1fe3ce6a904acf"/>
-    <p:sldId xmlns:r="http://schemas.openxmlformats.org/officeDocument/2006/relationships" id="268" r:id="R94e66db85db54c68"/>
-    <p:sldId xmlns:r="http://schemas.openxmlformats.org/officeDocument/2006/relationships" id="269" r:id="R29b6ed5608664c2d"/>
-    <p:sldId xmlns:r="http://schemas.openxmlformats.org/officeDocument/2006/relationships" id="270" r:id="Rac723ac9e9834695"/>
-    <p:sldId xmlns:r="http://schemas.openxmlformats.org/officeDocument/2006/relationships" id="271" r:id="Rf78ebbcb4227480b"/>
-    <p:sldId xmlns:r="http://schemas.openxmlformats.org/officeDocument/2006/relationships" id="272" r:id="R0962243c73e7457d"/>
-    <p:sldId xmlns:r="http://schemas.openxmlformats.org/officeDocument/2006/relationships" id="273" r:id="Rd82d7c29d2454f93"/>
+    <p:sldId xmlns:r="http://schemas.openxmlformats.org/officeDocument/2006/relationships" id="256" r:id="R32c4444fe080448e"/>
+    <p:sldId xmlns:r="http://schemas.openxmlformats.org/officeDocument/2006/relationships" id="257" r:id="Re130338252404ac1"/>
+    <p:sldId xmlns:r="http://schemas.openxmlformats.org/officeDocument/2006/relationships" id="258" r:id="R1b65659df2a44a21"/>
+    <p:sldId xmlns:r="http://schemas.openxmlformats.org/officeDocument/2006/relationships" id="259" r:id="R627da5f63fb94af1"/>
+    <p:sldId xmlns:r="http://schemas.openxmlformats.org/officeDocument/2006/relationships" id="260" r:id="R549e549350724ee7"/>
+    <p:sldId xmlns:r="http://schemas.openxmlformats.org/officeDocument/2006/relationships" id="261" r:id="R0a7f2f74331f4efd"/>
+    <p:sldId xmlns:r="http://schemas.openxmlformats.org/officeDocument/2006/relationships" id="262" r:id="R7d3456ab7ddb4042"/>
+    <p:sldId xmlns:r="http://schemas.openxmlformats.org/officeDocument/2006/relationships" id="263" r:id="Rb34313a05c1741a3"/>
+    <p:sldId xmlns:r="http://schemas.openxmlformats.org/officeDocument/2006/relationships" id="264" r:id="Rd11c4ef00f9943e6"/>
+    <p:sldId xmlns:r="http://schemas.openxmlformats.org/officeDocument/2006/relationships" id="265" r:id="R8309b37730f148bb"/>
+    <p:sldId xmlns:r="http://schemas.openxmlformats.org/officeDocument/2006/relationships" id="266" r:id="R011b9bbe255f4908"/>
+    <p:sldId xmlns:r="http://schemas.openxmlformats.org/officeDocument/2006/relationships" id="267" r:id="Rc7fa449752014db1"/>
+    <p:sldId xmlns:r="http://schemas.openxmlformats.org/officeDocument/2006/relationships" id="268" r:id="Rd69ff265ce7946b0"/>
+    <p:sldId xmlns:r="http://schemas.openxmlformats.org/officeDocument/2006/relationships" id="269" r:id="Rce96eb67928f401a"/>
+    <p:sldId xmlns:r="http://schemas.openxmlformats.org/officeDocument/2006/relationships" id="270" r:id="Rfcb4e59003a149f1"/>
+    <p:sldId xmlns:r="http://schemas.openxmlformats.org/officeDocument/2006/relationships" id="271" r:id="R7cbfaa0aa0d7414c"/>
+    <p:sldId xmlns:r="http://schemas.openxmlformats.org/officeDocument/2006/relationships" id="272" r:id="R1181d4b9781f4377"/>
+    <p:sldId xmlns:r="http://schemas.openxmlformats.org/officeDocument/2006/relationships" id="273" r:id="R83e918546a704fe2"/>
   </p:sldIdLst>
   <p:sldSz cx="12192000" cy="6858000"/>
   <p:notesSz cx="6858000" cy="9144000"/>
@@ -1304,7 +1304,7 @@
           <a:lstStyle xmlns:a="http://schemas.openxmlformats.org/drawingml/2006/main"/>
           <a:p xmlns:a="http://schemas.openxmlformats.org/drawingml/2006/main">
             <a:r>
-              <a:t>[พูด] ทีนี้ถึงเวลาลองทำด้วยตัวเองแล้วครับ ให้ทุกท่านเปิดบัญชีที่เตรียมไว้ ผู้ที่เคยทดสอบระบบแล้วลองเน้นตรวจคะแนนและความสัมพันธ์ของหลักฐาน ส่วนผู้ที่เพิ่งเริ่มให้ทำทีละขั้น เลือกกิจกรรม กรอกเป้าหมายและผล ตรวจคะแนน แนบหลักฐาน แล้วบันทึกร่าง ถ้าติดตรงไหนยกมือได้เลยครับ ยังไม่ต้องกดส่งแบบประเมิน เพราะเราจะตรวจความพร้อมร่วมกันก่อน</a:t>
+              <a:t>[พูด] ต่อไปเป็นเวลาทดลองใช้งานครับ ลิงก์ที่แสดงบนหน้าจอใช้สำหรับทดสอบระบบ ให้เปิด http://149.28.142.186/login แล้วเข้าสู่ระบบด้วยบัญชีที่เตรียมไว้ ลิงก์นี้ใช้สำหรับทดสอบระบบ เมื่อทุกท่านตรวจสอบแล้วและไม่มีประเด็นที่ต้องปรับแก้เพิ่มเติม ทีมงานจะนำระบบไปติดตั้งบนเซิร์ฟเวอร์ของคณะทันทีครับ สำหรับการทดลอง ให้เลือกกิจกรรม กรอกเป้าหมายและผล ตรวจคะแนน แนบหลักฐาน แล้วบันทึกร่างครับ ผู้ที่เคยทดสอบแล้วให้ช่วยตรวจคะแนนและหลักฐาน ส่วนผู้ที่เพิ่งเริ่มให้ทำทีละขั้น หากติดขัดให้ยกมือเรียกผมหรือทีมงานได้เลย ยังไม่ต้องกดส่งแบบประเมินนะครับ เราจะตรวจความพร้อมร่วมกันก่อน</a:t>
             </a:r>
           </a:p>
           <a:p xmlns:a="http://schemas.openxmlformats.org/drawingml/2006/main">
@@ -2282,7 +2282,7 @@
   </p:cSld>
   <p:clrMap bg1="lt1" tx1="dk1" bg2="lt2" tx2="dk2" accent1="accent1" accent2="accent2" accent3="accent3" accent4="accent4" accent5="accent5" accent6="accent6" hlink="hlink" folHlink="folHlink"/>
   <p:sldLayoutIdLst>
-    <p:sldLayoutId xmlns:r="http://schemas.openxmlformats.org/officeDocument/2006/relationships" id="2147483649" r:id="R81c77ee164694cdd"/>
+    <p:sldLayoutId xmlns:r="http://schemas.openxmlformats.org/officeDocument/2006/relationships" id="2147483649" r:id="R134d9e2d5b404f02"/>
   </p:sldLayoutIdLst>
   <p:txStyles>
     <p:titleStyle>
@@ -2837,7 +2837,7 @@
           <p:nvPr/>
         </p:nvPicPr>
         <p:blipFill>
-          <a:blip xmlns:r="http://schemas.openxmlformats.org/officeDocument/2006/relationships" xmlns:a="http://schemas.openxmlformats.org/drawingml/2006/main" r:embed="Rc53587b9fb624545"/>
+          <a:blip xmlns:r="http://schemas.openxmlformats.org/officeDocument/2006/relationships" xmlns:a="http://schemas.openxmlformats.org/drawingml/2006/main" r:embed="R5a7e041991344b65"/>
           <a:srcRect xmlns:a="http://schemas.openxmlformats.org/drawingml/2006/main" l="2579" t="0" r="2579" b="0"/>
           <a:stretch xmlns:a="http://schemas.openxmlformats.org/drawingml/2006/main">
             <a:fillRect l="0" t="0" r="0" b="0"/>
@@ -2858,7 +2858,7 @@
           <p:cNvPr id="2" name="cover-panel">
             <a:extLst xmlns:a="http://schemas.openxmlformats.org/drawingml/2006/main">
               <a:ext uri="{FF2B5EF4-FFF2-40B4-BE49-F238E27FC236}">
-                <a16:creationId xmlns:a16="http://schemas.microsoft.com/office/drawing/2014/main" id="{E21DA3D2-E746-4E01-8FD5-54450C66C665}"/>
+                <a16:creationId xmlns:a16="http://schemas.microsoft.com/office/drawing/2014/main" id="{C886FFCE-30C1-411B-98D9-5BF0C7144DB6}"/>
               </a:ext>
             </a:extLst>
           </p:cNvPr>
@@ -2889,7 +2889,7 @@
           <p:cNvPr id="3" name="cover-accent">
             <a:extLst xmlns:a="http://schemas.openxmlformats.org/drawingml/2006/main">
               <a:ext uri="{FF2B5EF4-FFF2-40B4-BE49-F238E27FC236}">
-                <a16:creationId xmlns:a16="http://schemas.microsoft.com/office/drawing/2014/main" id="{E2F6D43C-665B-4A8F-9375-33CE878D0C3B}"/>
+                <a16:creationId xmlns:a16="http://schemas.microsoft.com/office/drawing/2014/main" id="{3DB6192F-8404-4CB8-AED7-52CF6550F029}"/>
               </a:ext>
             </a:extLst>
           </p:cNvPr>
@@ -2924,7 +2924,7 @@
           <p:nvPr/>
         </p:nvPicPr>
         <p:blipFill>
-          <a:blip xmlns:r="http://schemas.openxmlformats.org/officeDocument/2006/relationships" xmlns:a="http://schemas.openxmlformats.org/drawingml/2006/main" r:embed="R4d67ebdfc0bf45d0"/>
+          <a:blip xmlns:r="http://schemas.openxmlformats.org/officeDocument/2006/relationships" xmlns:a="http://schemas.openxmlformats.org/drawingml/2006/main" r:embed="R30d616b56ac94790"/>
           <a:stretch xmlns:a="http://schemas.openxmlformats.org/drawingml/2006/main"/>
         </p:blipFill>
         <p:spPr>
@@ -2942,7 +2942,7 @@
           <p:cNvPr id="5" name="cover-institution">
             <a:extLst xmlns:a="http://schemas.openxmlformats.org/drawingml/2006/main">
               <a:ext uri="{FF2B5EF4-FFF2-40B4-BE49-F238E27FC236}">
-                <a16:creationId xmlns:a16="http://schemas.microsoft.com/office/drawing/2014/main" id="{AB4095D1-F3FB-422F-876B-70520B1F6491}"/>
+                <a16:creationId xmlns:a16="http://schemas.microsoft.com/office/drawing/2014/main" id="{AB9AD569-D731-42E7-B2D6-322C9CD26794}"/>
               </a:ext>
             </a:extLst>
           </p:cNvPr>
@@ -3004,7 +3004,7 @@
           <p:cNvPr id="6" name="cover-session">
             <a:extLst xmlns:a="http://schemas.openxmlformats.org/drawingml/2006/main">
               <a:ext uri="{FF2B5EF4-FFF2-40B4-BE49-F238E27FC236}">
-                <a16:creationId xmlns:a16="http://schemas.microsoft.com/office/drawing/2014/main" id="{58137DA4-9C14-406E-8DE8-44C8B713D282}"/>
+                <a16:creationId xmlns:a16="http://schemas.microsoft.com/office/drawing/2014/main" id="{BE97368B-84C9-4BDA-8F25-5EF3EE207FB9}"/>
               </a:ext>
             </a:extLst>
           </p:cNvPr>
@@ -3066,7 +3066,7 @@
           <p:cNvPr id="7" name="cover-title">
             <a:extLst xmlns:a="http://schemas.openxmlformats.org/drawingml/2006/main">
               <a:ext uri="{FF2B5EF4-FFF2-40B4-BE49-F238E27FC236}">
-                <a16:creationId xmlns:a16="http://schemas.microsoft.com/office/drawing/2014/main" id="{DF12BE92-B6A7-4F0A-B4C5-97381B96FAC5}"/>
+                <a16:creationId xmlns:a16="http://schemas.microsoft.com/office/drawing/2014/main" id="{1D634CD6-65E3-44C0-9368-3DD5AC69796E}"/>
               </a:ext>
             </a:extLst>
           </p:cNvPr>
@@ -3128,7 +3128,7 @@
           <p:cNvPr id="8" name="cover-system-short-name">
             <a:extLst xmlns:a="http://schemas.openxmlformats.org/drawingml/2006/main">
               <a:ext uri="{FF2B5EF4-FFF2-40B4-BE49-F238E27FC236}">
-                <a16:creationId xmlns:a16="http://schemas.microsoft.com/office/drawing/2014/main" id="{CEB49476-97B4-4FF1-91D8-FBDEFE9D0207}"/>
+                <a16:creationId xmlns:a16="http://schemas.microsoft.com/office/drawing/2014/main" id="{B624A514-1409-4B68-9772-C2FCFDC24624}"/>
               </a:ext>
             </a:extLst>
           </p:cNvPr>
@@ -3190,7 +3190,7 @@
           <p:cNvPr id="9" name="cover-gold-rule">
             <a:extLst xmlns:a="http://schemas.openxmlformats.org/drawingml/2006/main">
               <a:ext uri="{FF2B5EF4-FFF2-40B4-BE49-F238E27FC236}">
-                <a16:creationId xmlns:a16="http://schemas.microsoft.com/office/drawing/2014/main" id="{F9A087EC-FA23-4175-A9FA-1BB42D8D753A}"/>
+                <a16:creationId xmlns:a16="http://schemas.microsoft.com/office/drawing/2014/main" id="{C00A61CA-EA99-4F69-88D7-53CC4F017E51}"/>
               </a:ext>
             </a:extLst>
           </p:cNvPr>
@@ -3221,7 +3221,7 @@
           <p:cNvPr id="10" name="cover-promise">
             <a:extLst xmlns:a="http://schemas.openxmlformats.org/drawingml/2006/main">
               <a:ext uri="{FF2B5EF4-FFF2-40B4-BE49-F238E27FC236}">
-                <a16:creationId xmlns:a16="http://schemas.microsoft.com/office/drawing/2014/main" id="{4057040E-6190-43F3-AADF-7CF6409D3812}"/>
+                <a16:creationId xmlns:a16="http://schemas.microsoft.com/office/drawing/2014/main" id="{B02FEA91-1203-4020-B53E-A7008D99712B}"/>
               </a:ext>
             </a:extLst>
           </p:cNvPr>
@@ -3283,7 +3283,7 @@
           <p:cNvPr id="11" name="cover-style">
             <a:extLst xmlns:a="http://schemas.openxmlformats.org/drawingml/2006/main">
               <a:ext uri="{FF2B5EF4-FFF2-40B4-BE49-F238E27FC236}">
-                <a16:creationId xmlns:a16="http://schemas.microsoft.com/office/drawing/2014/main" id="{C274FD41-5720-4A33-ABEC-A94300C4649A}"/>
+                <a16:creationId xmlns:a16="http://schemas.microsoft.com/office/drawing/2014/main" id="{ED9A19D0-6970-4679-8E93-6C17E82B02C2}"/>
               </a:ext>
             </a:extLst>
           </p:cNvPr>
@@ -3349,7 +3349,7 @@
           <p:nvPr/>
         </p:nvPicPr>
         <p:blipFill>
-          <a:blip xmlns:r="http://schemas.openxmlformats.org/officeDocument/2006/relationships" xmlns:a="http://schemas.openxmlformats.org/drawingml/2006/main" r:embed="Raed6bbc97678491f"/>
+          <a:blip xmlns:r="http://schemas.openxmlformats.org/officeDocument/2006/relationships" xmlns:a="http://schemas.openxmlformats.org/drawingml/2006/main" r:embed="Rc2fd24c1943340b5"/>
           <a:stretch xmlns:a="http://schemas.openxmlformats.org/drawingml/2006/main"/>
         </p:blipFill>
         <p:spPr>
@@ -3365,7 +3365,7 @@
     </p:spTree>
     <p:extLst>
       <p:ext uri="{BB962C8B-B14F-4D97-AF65-F5344CB8AC3E}">
-        <p14:creationId xmlns:p14="http://schemas.microsoft.com/office/powerpoint/2010/main" val="1566411266"/>
+        <p14:creationId xmlns:p14="http://schemas.microsoft.com/office/powerpoint/2010/main" val="2007777888"/>
       </p:ext>
     </p:extLst>
   </p:cSld>
@@ -3396,7 +3396,7 @@
           <p:cNvPr id="15" name="side-accent-10">
             <a:extLst xmlns:a="http://schemas.openxmlformats.org/drawingml/2006/main">
               <a:ext uri="{FF2B5EF4-FFF2-40B4-BE49-F238E27FC236}">
-                <a16:creationId xmlns:a16="http://schemas.microsoft.com/office/drawing/2014/main" id="{7FD48FB0-66DF-4AA9-935F-C18B1B6DDFEF}"/>
+                <a16:creationId xmlns:a16="http://schemas.microsoft.com/office/drawing/2014/main" id="{80A7E8E8-9DC3-4AE1-AC49-1017FAB86176}"/>
               </a:ext>
             </a:extLst>
           </p:cNvPr>
@@ -3427,7 +3427,7 @@
           <p:cNvPr id="2" name="kicker-10">
             <a:extLst xmlns:a="http://schemas.openxmlformats.org/drawingml/2006/main">
               <a:ext uri="{FF2B5EF4-FFF2-40B4-BE49-F238E27FC236}">
-                <a16:creationId xmlns:a16="http://schemas.microsoft.com/office/drawing/2014/main" id="{E6767B42-78BF-428E-B946-ACB0FC2354F3}"/>
+                <a16:creationId xmlns:a16="http://schemas.microsoft.com/office/drawing/2014/main" id="{46D0FBA4-6459-42BB-A103-41F123765DA1}"/>
               </a:ext>
             </a:extLst>
           </p:cNvPr>
@@ -3489,7 +3489,7 @@
           <p:cNvPr id="3" name="title-10">
             <a:extLst xmlns:a="http://schemas.openxmlformats.org/drawingml/2006/main">
               <a:ext uri="{FF2B5EF4-FFF2-40B4-BE49-F238E27FC236}">
-                <a16:creationId xmlns:a16="http://schemas.microsoft.com/office/drawing/2014/main" id="{4AAEE529-3334-4A5F-8426-078439DA6A25}"/>
+                <a16:creationId xmlns:a16="http://schemas.microsoft.com/office/drawing/2014/main" id="{CC3E5ECE-6DD4-4834-9ED0-C558FA7BC57B}"/>
               </a:ext>
             </a:extLst>
           </p:cNvPr>
@@ -3551,7 +3551,7 @@
           <p:cNvPr id="4" name="">
             <a:extLst xmlns:a="http://schemas.openxmlformats.org/drawingml/2006/main">
               <a:ext uri="{FF2B5EF4-FFF2-40B4-BE49-F238E27FC236}">
-                <a16:creationId xmlns:a16="http://schemas.microsoft.com/office/drawing/2014/main" id="{6DDD2C16-A1AC-4BEA-A4E5-0D4263BAACE6}"/>
+                <a16:creationId xmlns:a16="http://schemas.microsoft.com/office/drawing/2014/main" id="{CD30C16F-59A1-4C5B-87D8-47758A961486}"/>
               </a:ext>
             </a:extLst>
           </p:cNvPr>
@@ -3613,7 +3613,7 @@
           <p:cNvPr id="5" name="">
             <a:extLst xmlns:a="http://schemas.openxmlformats.org/drawingml/2006/main">
               <a:ext uri="{FF2B5EF4-FFF2-40B4-BE49-F238E27FC236}">
-                <a16:creationId xmlns:a16="http://schemas.microsoft.com/office/drawing/2014/main" id="{06D3F68B-702F-46EE-9489-C46313A534CD}"/>
+                <a16:creationId xmlns:a16="http://schemas.microsoft.com/office/drawing/2014/main" id="{115B636A-5F10-4469-B2BF-19ABBC6F5BF6}"/>
               </a:ext>
             </a:extLst>
           </p:cNvPr>
@@ -3675,7 +3675,7 @@
           <p:cNvPr id="6" name="">
             <a:extLst xmlns:a="http://schemas.openxmlformats.org/drawingml/2006/main">
               <a:ext uri="{FF2B5EF4-FFF2-40B4-BE49-F238E27FC236}">
-                <a16:creationId xmlns:a16="http://schemas.microsoft.com/office/drawing/2014/main" id="{EEC12871-5064-4A4C-A0CD-00C946E39B4F}"/>
+                <a16:creationId xmlns:a16="http://schemas.microsoft.com/office/drawing/2014/main" id="{1FF46C46-99E0-4568-B8A2-60F9126F11F0}"/>
               </a:ext>
             </a:extLst>
           </p:cNvPr>
@@ -3743,7 +3743,7 @@
           <p:cNvPr id="7" name="">
             <a:extLst xmlns:a="http://schemas.openxmlformats.org/drawingml/2006/main">
               <a:ext uri="{FF2B5EF4-FFF2-40B4-BE49-F238E27FC236}">
-                <a16:creationId xmlns:a16="http://schemas.microsoft.com/office/drawing/2014/main" id="{6F47A626-EB29-4B2D-B572-3FFB48C4C1E8}"/>
+                <a16:creationId xmlns:a16="http://schemas.microsoft.com/office/drawing/2014/main" id="{38C04602-85F4-4348-B491-92130615306E}"/>
               </a:ext>
             </a:extLst>
           </p:cNvPr>
@@ -3805,7 +3805,7 @@
           <p:cNvPr id="8" name="">
             <a:extLst xmlns:a="http://schemas.openxmlformats.org/drawingml/2006/main">
               <a:ext uri="{FF2B5EF4-FFF2-40B4-BE49-F238E27FC236}">
-                <a16:creationId xmlns:a16="http://schemas.microsoft.com/office/drawing/2014/main" id="{4E452610-8805-4168-BA41-008637FEBC42}"/>
+                <a16:creationId xmlns:a16="http://schemas.microsoft.com/office/drawing/2014/main" id="{C2B3D2F4-07B0-4B05-87D3-3E910167CC77}"/>
               </a:ext>
             </a:extLst>
           </p:cNvPr>
@@ -3873,7 +3873,7 @@
           <p:cNvPr id="9" name="">
             <a:extLst xmlns:a="http://schemas.openxmlformats.org/drawingml/2006/main">
               <a:ext uri="{FF2B5EF4-FFF2-40B4-BE49-F238E27FC236}">
-                <a16:creationId xmlns:a16="http://schemas.microsoft.com/office/drawing/2014/main" id="{A667BF14-4765-4D61-AC0F-BB9537251C6F}"/>
+                <a16:creationId xmlns:a16="http://schemas.microsoft.com/office/drawing/2014/main" id="{D17EAB99-E354-4472-AEFF-DD0D26DC4A1C}"/>
               </a:ext>
             </a:extLst>
           </p:cNvPr>
@@ -3904,7 +3904,7 @@
           <p:cNvPr id="10" name="">
             <a:extLst xmlns:a="http://schemas.openxmlformats.org/drawingml/2006/main">
               <a:ext uri="{FF2B5EF4-FFF2-40B4-BE49-F238E27FC236}">
-                <a16:creationId xmlns:a16="http://schemas.microsoft.com/office/drawing/2014/main" id="{EF61BC5A-5A3E-498D-BBE0-0CB474C73DC4}"/>
+                <a16:creationId xmlns:a16="http://schemas.microsoft.com/office/drawing/2014/main" id="{B4AB0031-BD6B-4545-B38F-3F6C3D2E8CA0}"/>
               </a:ext>
             </a:extLst>
           </p:cNvPr>
@@ -3966,7 +3966,7 @@
           <p:cNvPr id="11" name="">
             <a:extLst xmlns:a="http://schemas.openxmlformats.org/drawingml/2006/main">
               <a:ext uri="{FF2B5EF4-FFF2-40B4-BE49-F238E27FC236}">
-                <a16:creationId xmlns:a16="http://schemas.microsoft.com/office/drawing/2014/main" id="{F90ACBE2-418B-4AF8-A369-51EBCB66BD4E}"/>
+                <a16:creationId xmlns:a16="http://schemas.microsoft.com/office/drawing/2014/main" id="{B9C437BF-E7A7-4E35-B14D-95AC67A85219}"/>
               </a:ext>
             </a:extLst>
           </p:cNvPr>
@@ -4028,7 +4028,7 @@
           <p:cNvPr id="12" name="footer-rule-10">
             <a:extLst xmlns:a="http://schemas.openxmlformats.org/drawingml/2006/main">
               <a:ext uri="{FF2B5EF4-FFF2-40B4-BE49-F238E27FC236}">
-                <a16:creationId xmlns:a16="http://schemas.microsoft.com/office/drawing/2014/main" id="{40BA8A73-30E9-4D8E-8510-01434B71B75D}"/>
+                <a16:creationId xmlns:a16="http://schemas.microsoft.com/office/drawing/2014/main" id="{AF3C5FE1-97D5-4034-9213-25612450E67F}"/>
               </a:ext>
             </a:extLst>
           </p:cNvPr>
@@ -4059,7 +4059,7 @@
           <p:cNvPr id="13" name="footer-label-10">
             <a:extLst xmlns:a="http://schemas.openxmlformats.org/drawingml/2006/main">
               <a:ext uri="{FF2B5EF4-FFF2-40B4-BE49-F238E27FC236}">
-                <a16:creationId xmlns:a16="http://schemas.microsoft.com/office/drawing/2014/main" id="{29748CC5-2248-45F1-8F8D-0946A9ED1AA5}"/>
+                <a16:creationId xmlns:a16="http://schemas.microsoft.com/office/drawing/2014/main" id="{51CC703F-F07C-4E91-8891-A12599EAC446}"/>
               </a:ext>
             </a:extLst>
           </p:cNvPr>
@@ -4121,7 +4121,7 @@
           <p:cNvPr id="14" name="footer-page-10">
             <a:extLst xmlns:a="http://schemas.openxmlformats.org/drawingml/2006/main">
               <a:ext uri="{FF2B5EF4-FFF2-40B4-BE49-F238E27FC236}">
-                <a16:creationId xmlns:a16="http://schemas.microsoft.com/office/drawing/2014/main" id="{36801014-917A-4CCF-BB26-09BE925CA920}"/>
+                <a16:creationId xmlns:a16="http://schemas.microsoft.com/office/drawing/2014/main" id="{C28B5D5F-36EE-4B50-B948-A9BC39765BAB}"/>
               </a:ext>
             </a:extLst>
           </p:cNvPr>
@@ -4181,7 +4181,7 @@
     </p:spTree>
     <p:extLst>
       <p:ext uri="{BB962C8B-B14F-4D97-AF65-F5344CB8AC3E}">
-        <p14:creationId xmlns:p14="http://schemas.microsoft.com/office/powerpoint/2010/main" val="340205609"/>
+        <p14:creationId xmlns:p14="http://schemas.microsoft.com/office/powerpoint/2010/main" val="1970675471"/>
       </p:ext>
     </p:extLst>
   </p:cSld>
@@ -4212,7 +4212,7 @@
           <p:cNvPr id="17" name="side-accent-11">
             <a:extLst xmlns:a="http://schemas.openxmlformats.org/drawingml/2006/main">
               <a:ext uri="{FF2B5EF4-FFF2-40B4-BE49-F238E27FC236}">
-                <a16:creationId xmlns:a16="http://schemas.microsoft.com/office/drawing/2014/main" id="{8129789E-0F29-4DB6-8D65-0C5C18795518}"/>
+                <a16:creationId xmlns:a16="http://schemas.microsoft.com/office/drawing/2014/main" id="{4CBDF5AB-785D-4363-8159-9C2D1B2B93A9}"/>
               </a:ext>
             </a:extLst>
           </p:cNvPr>
@@ -4243,7 +4243,7 @@
           <p:cNvPr id="2" name="kicker-11">
             <a:extLst xmlns:a="http://schemas.openxmlformats.org/drawingml/2006/main">
               <a:ext uri="{FF2B5EF4-FFF2-40B4-BE49-F238E27FC236}">
-                <a16:creationId xmlns:a16="http://schemas.microsoft.com/office/drawing/2014/main" id="{254C5BDD-18CF-4C62-8BB9-A37D77864615}"/>
+                <a16:creationId xmlns:a16="http://schemas.microsoft.com/office/drawing/2014/main" id="{5E5078DE-8511-4E84-B879-60D076AF3B94}"/>
               </a:ext>
             </a:extLst>
           </p:cNvPr>
@@ -4305,7 +4305,7 @@
           <p:cNvPr id="3" name="title-11">
             <a:extLst xmlns:a="http://schemas.openxmlformats.org/drawingml/2006/main">
               <a:ext uri="{FF2B5EF4-FFF2-40B4-BE49-F238E27FC236}">
-                <a16:creationId xmlns:a16="http://schemas.microsoft.com/office/drawing/2014/main" id="{68CB33C2-4375-4087-BA7F-8B8277C94194}"/>
+                <a16:creationId xmlns:a16="http://schemas.microsoft.com/office/drawing/2014/main" id="{6560E194-78C6-46A1-A2F9-CB812D5B0EE1}"/>
               </a:ext>
             </a:extLst>
           </p:cNvPr>
@@ -4367,7 +4367,7 @@
           <p:cNvPr id="4" name="">
             <a:extLst xmlns:a="http://schemas.openxmlformats.org/drawingml/2006/main">
               <a:ext uri="{FF2B5EF4-FFF2-40B4-BE49-F238E27FC236}">
-                <a16:creationId xmlns:a16="http://schemas.microsoft.com/office/drawing/2014/main" id="{AB6EAB5B-BC26-46A2-9E0D-AC527E9E83A1}"/>
+                <a16:creationId xmlns:a16="http://schemas.microsoft.com/office/drawing/2014/main" id="{8DC2158A-7DC6-4315-AB34-C097B78582ED}"/>
               </a:ext>
             </a:extLst>
           </p:cNvPr>
@@ -4402,7 +4402,7 @@
           <p:cNvPr id="5" name="">
             <a:extLst xmlns:a="http://schemas.openxmlformats.org/drawingml/2006/main">
               <a:ext uri="{FF2B5EF4-FFF2-40B4-BE49-F238E27FC236}">
-                <a16:creationId xmlns:a16="http://schemas.microsoft.com/office/drawing/2014/main" id="{3FB25BE3-6838-4700-9136-68616C3A871A}"/>
+                <a16:creationId xmlns:a16="http://schemas.microsoft.com/office/drawing/2014/main" id="{C667EA34-EE9C-4037-B579-1F66C2C8D9E3}"/>
               </a:ext>
             </a:extLst>
           </p:cNvPr>
@@ -4464,7 +4464,7 @@
           <p:cNvPr id="6" name="">
             <a:extLst xmlns:a="http://schemas.openxmlformats.org/drawingml/2006/main">
               <a:ext uri="{FF2B5EF4-FFF2-40B4-BE49-F238E27FC236}">
-                <a16:creationId xmlns:a16="http://schemas.microsoft.com/office/drawing/2014/main" id="{335132A9-55B9-412E-95A4-38970AC33C41}"/>
+                <a16:creationId xmlns:a16="http://schemas.microsoft.com/office/drawing/2014/main" id="{EA0CB0C7-E364-462B-94AD-85EBFF22941D}"/>
               </a:ext>
             </a:extLst>
           </p:cNvPr>
@@ -4526,7 +4526,7 @@
           <p:cNvPr id="7" name="">
             <a:extLst xmlns:a="http://schemas.openxmlformats.org/drawingml/2006/main">
               <a:ext uri="{FF2B5EF4-FFF2-40B4-BE49-F238E27FC236}">
-                <a16:creationId xmlns:a16="http://schemas.microsoft.com/office/drawing/2014/main" id="{C0C60451-3F72-4620-8C23-192211A874AA}"/>
+                <a16:creationId xmlns:a16="http://schemas.microsoft.com/office/drawing/2014/main" id="{7292B08A-38AA-45FD-987A-7C1E69B976EC}"/>
               </a:ext>
             </a:extLst>
           </p:cNvPr>
@@ -4561,7 +4561,7 @@
           <p:cNvPr id="8" name="">
             <a:extLst xmlns:a="http://schemas.openxmlformats.org/drawingml/2006/main">
               <a:ext uri="{FF2B5EF4-FFF2-40B4-BE49-F238E27FC236}">
-                <a16:creationId xmlns:a16="http://schemas.microsoft.com/office/drawing/2014/main" id="{79595598-2400-414D-96EA-35D3B5DA00F5}"/>
+                <a16:creationId xmlns:a16="http://schemas.microsoft.com/office/drawing/2014/main" id="{B03BEDCF-3681-48F2-9B94-EEB6642AB33C}"/>
               </a:ext>
             </a:extLst>
           </p:cNvPr>
@@ -4623,7 +4623,7 @@
           <p:cNvPr id="9" name="">
             <a:extLst xmlns:a="http://schemas.openxmlformats.org/drawingml/2006/main">
               <a:ext uri="{FF2B5EF4-FFF2-40B4-BE49-F238E27FC236}">
-                <a16:creationId xmlns:a16="http://schemas.microsoft.com/office/drawing/2014/main" id="{7D191DC0-7461-4A23-BE0C-D7E03C08C4D7}"/>
+                <a16:creationId xmlns:a16="http://schemas.microsoft.com/office/drawing/2014/main" id="{4CEFC062-E97A-414F-89BF-058939242EFA}"/>
               </a:ext>
             </a:extLst>
           </p:cNvPr>
@@ -4685,7 +4685,7 @@
           <p:cNvPr id="10" name="">
             <a:extLst xmlns:a="http://schemas.openxmlformats.org/drawingml/2006/main">
               <a:ext uri="{FF2B5EF4-FFF2-40B4-BE49-F238E27FC236}">
-                <a16:creationId xmlns:a16="http://schemas.microsoft.com/office/drawing/2014/main" id="{8F13A86A-C7B6-4588-89BF-EC73D6BC1F4E}"/>
+                <a16:creationId xmlns:a16="http://schemas.microsoft.com/office/drawing/2014/main" id="{049E0298-051C-493F-AB09-1F87D8A80BD6}"/>
               </a:ext>
             </a:extLst>
           </p:cNvPr>
@@ -4720,7 +4720,7 @@
           <p:cNvPr id="11" name="">
             <a:extLst xmlns:a="http://schemas.openxmlformats.org/drawingml/2006/main">
               <a:ext uri="{FF2B5EF4-FFF2-40B4-BE49-F238E27FC236}">
-                <a16:creationId xmlns:a16="http://schemas.microsoft.com/office/drawing/2014/main" id="{198D00E4-1C51-4E6C-B1BF-C0A79E97FB7B}"/>
+                <a16:creationId xmlns:a16="http://schemas.microsoft.com/office/drawing/2014/main" id="{FDAE6D05-8D7B-43F5-B90D-B5366CD8DA01}"/>
               </a:ext>
             </a:extLst>
           </p:cNvPr>
@@ -4782,7 +4782,7 @@
           <p:cNvPr id="12" name="">
             <a:extLst xmlns:a="http://schemas.openxmlformats.org/drawingml/2006/main">
               <a:ext uri="{FF2B5EF4-FFF2-40B4-BE49-F238E27FC236}">
-                <a16:creationId xmlns:a16="http://schemas.microsoft.com/office/drawing/2014/main" id="{2F3E08FD-DF6E-4AE1-9E85-1F84F0D0B7CA}"/>
+                <a16:creationId xmlns:a16="http://schemas.microsoft.com/office/drawing/2014/main" id="{327905FD-B379-482B-AAF6-0FDE0E319632}"/>
               </a:ext>
             </a:extLst>
           </p:cNvPr>
@@ -4844,7 +4844,7 @@
           <p:cNvPr id="13" name="">
             <a:extLst xmlns:a="http://schemas.openxmlformats.org/drawingml/2006/main">
               <a:ext uri="{FF2B5EF4-FFF2-40B4-BE49-F238E27FC236}">
-                <a16:creationId xmlns:a16="http://schemas.microsoft.com/office/drawing/2014/main" id="{427CBC0F-E791-4C0E-B8E4-36DF829FB88D}"/>
+                <a16:creationId xmlns:a16="http://schemas.microsoft.com/office/drawing/2014/main" id="{FC7B32F1-8068-4A90-958D-3440FE770CCA}"/>
               </a:ext>
             </a:extLst>
           </p:cNvPr>
@@ -4906,7 +4906,7 @@
           <p:cNvPr id="14" name="footer-rule-11">
             <a:extLst xmlns:a="http://schemas.openxmlformats.org/drawingml/2006/main">
               <a:ext uri="{FF2B5EF4-FFF2-40B4-BE49-F238E27FC236}">
-                <a16:creationId xmlns:a16="http://schemas.microsoft.com/office/drawing/2014/main" id="{1D978E4F-D044-4D28-B7B4-39094EF17743}"/>
+                <a16:creationId xmlns:a16="http://schemas.microsoft.com/office/drawing/2014/main" id="{F3090729-BAB6-4D8A-A7DA-5114FDCE0BE3}"/>
               </a:ext>
             </a:extLst>
           </p:cNvPr>
@@ -4937,7 +4937,7 @@
           <p:cNvPr id="15" name="footer-label-11">
             <a:extLst xmlns:a="http://schemas.openxmlformats.org/drawingml/2006/main">
               <a:ext uri="{FF2B5EF4-FFF2-40B4-BE49-F238E27FC236}">
-                <a16:creationId xmlns:a16="http://schemas.microsoft.com/office/drawing/2014/main" id="{F987B2AC-F873-4977-A870-B8E3C9EBB196}"/>
+                <a16:creationId xmlns:a16="http://schemas.microsoft.com/office/drawing/2014/main" id="{0473AFC5-F32B-4428-A91C-BC695D75382A}"/>
               </a:ext>
             </a:extLst>
           </p:cNvPr>
@@ -4999,7 +4999,7 @@
           <p:cNvPr id="16" name="footer-page-11">
             <a:extLst xmlns:a="http://schemas.openxmlformats.org/drawingml/2006/main">
               <a:ext uri="{FF2B5EF4-FFF2-40B4-BE49-F238E27FC236}">
-                <a16:creationId xmlns:a16="http://schemas.microsoft.com/office/drawing/2014/main" id="{72A7CD5F-BB85-4FF5-AE38-0D65CEF537BF}"/>
+                <a16:creationId xmlns:a16="http://schemas.microsoft.com/office/drawing/2014/main" id="{B074B0B2-E53B-400E-9128-E26547D5F427}"/>
               </a:ext>
             </a:extLst>
           </p:cNvPr>
@@ -5059,7 +5059,7 @@
     </p:spTree>
     <p:extLst>
       <p:ext uri="{BB962C8B-B14F-4D97-AF65-F5344CB8AC3E}">
-        <p14:creationId xmlns:p14="http://schemas.microsoft.com/office/powerpoint/2010/main" val="986047180"/>
+        <p14:creationId xmlns:p14="http://schemas.microsoft.com/office/powerpoint/2010/main" val="1883062503"/>
       </p:ext>
     </p:extLst>
   </p:cSld>
@@ -5090,7 +5090,7 @@
           <p:cNvPr id="22" name="side-accent-12">
             <a:extLst xmlns:a="http://schemas.openxmlformats.org/drawingml/2006/main">
               <a:ext uri="{FF2B5EF4-FFF2-40B4-BE49-F238E27FC236}">
-                <a16:creationId xmlns:a16="http://schemas.microsoft.com/office/drawing/2014/main" id="{15D45E8A-2501-4406-A7E6-1D6362ACB077}"/>
+                <a16:creationId xmlns:a16="http://schemas.microsoft.com/office/drawing/2014/main" id="{774F588D-718F-4C1A-AB50-D2D7CB31C4F8}"/>
               </a:ext>
             </a:extLst>
           </p:cNvPr>
@@ -5121,7 +5121,7 @@
           <p:cNvPr id="2" name="kicker-12">
             <a:extLst xmlns:a="http://schemas.openxmlformats.org/drawingml/2006/main">
               <a:ext uri="{FF2B5EF4-FFF2-40B4-BE49-F238E27FC236}">
-                <a16:creationId xmlns:a16="http://schemas.microsoft.com/office/drawing/2014/main" id="{8A008F5B-9626-405A-AEE6-1DADE32C0F6B}"/>
+                <a16:creationId xmlns:a16="http://schemas.microsoft.com/office/drawing/2014/main" id="{1C88936A-359D-44CE-9A50-8A833A5D58D7}"/>
               </a:ext>
             </a:extLst>
           </p:cNvPr>
@@ -5183,7 +5183,7 @@
           <p:cNvPr id="3" name="title-12">
             <a:extLst xmlns:a="http://schemas.openxmlformats.org/drawingml/2006/main">
               <a:ext uri="{FF2B5EF4-FFF2-40B4-BE49-F238E27FC236}">
-                <a16:creationId xmlns:a16="http://schemas.microsoft.com/office/drawing/2014/main" id="{B2F5680F-CE96-4E86-B1FC-110456DCA6BA}"/>
+                <a16:creationId xmlns:a16="http://schemas.microsoft.com/office/drawing/2014/main" id="{BF6075AA-C3EB-420F-AF57-15A2F82F147F}"/>
               </a:ext>
             </a:extLst>
           </p:cNvPr>
@@ -5245,7 +5245,7 @@
           <p:cNvPr id="4" name="">
             <a:extLst xmlns:a="http://schemas.openxmlformats.org/drawingml/2006/main">
               <a:ext uri="{FF2B5EF4-FFF2-40B4-BE49-F238E27FC236}">
-                <a16:creationId xmlns:a16="http://schemas.microsoft.com/office/drawing/2014/main" id="{CA7444D8-10F7-463B-8025-C78AE5A777FD}"/>
+                <a16:creationId xmlns:a16="http://schemas.microsoft.com/office/drawing/2014/main" id="{A864FDFF-1270-425E-95CB-EDFB35399F23}"/>
               </a:ext>
             </a:extLst>
           </p:cNvPr>
@@ -5307,7 +5307,7 @@
           <p:cNvPr id="5" name="">
             <a:extLst xmlns:a="http://schemas.openxmlformats.org/drawingml/2006/main">
               <a:ext uri="{FF2B5EF4-FFF2-40B4-BE49-F238E27FC236}">
-                <a16:creationId xmlns:a16="http://schemas.microsoft.com/office/drawing/2014/main" id="{B4D44302-2A4C-432B-B80D-8322295A889D}"/>
+                <a16:creationId xmlns:a16="http://schemas.microsoft.com/office/drawing/2014/main" id="{52A51E6F-28CA-42B5-8A10-1DF6D79767AC}"/>
               </a:ext>
             </a:extLst>
           </p:cNvPr>
@@ -5338,7 +5338,7 @@
           <p:cNvPr id="6" name="">
             <a:extLst xmlns:a="http://schemas.openxmlformats.org/drawingml/2006/main">
               <a:ext uri="{FF2B5EF4-FFF2-40B4-BE49-F238E27FC236}">
-                <a16:creationId xmlns:a16="http://schemas.microsoft.com/office/drawing/2014/main" id="{C31C3C1A-B078-44E2-B864-8BEA8C9CB252}"/>
+                <a16:creationId xmlns:a16="http://schemas.microsoft.com/office/drawing/2014/main" id="{AFA96147-2119-4828-99A6-17991B0238FF}"/>
               </a:ext>
             </a:extLst>
           </p:cNvPr>
@@ -5400,7 +5400,7 @@
           <p:cNvPr id="7" name="">
             <a:extLst xmlns:a="http://schemas.openxmlformats.org/drawingml/2006/main">
               <a:ext uri="{FF2B5EF4-FFF2-40B4-BE49-F238E27FC236}">
-                <a16:creationId xmlns:a16="http://schemas.microsoft.com/office/drawing/2014/main" id="{916AB7CD-0BC9-42CA-B5E4-4DD082280679}"/>
+                <a16:creationId xmlns:a16="http://schemas.microsoft.com/office/drawing/2014/main" id="{06BB885B-8C53-4AAC-9422-0051575F3438}"/>
               </a:ext>
             </a:extLst>
           </p:cNvPr>
@@ -5462,7 +5462,7 @@
           <p:cNvPr id="8" name="">
             <a:extLst xmlns:a="http://schemas.openxmlformats.org/drawingml/2006/main">
               <a:ext uri="{FF2B5EF4-FFF2-40B4-BE49-F238E27FC236}">
-                <a16:creationId xmlns:a16="http://schemas.microsoft.com/office/drawing/2014/main" id="{94D90379-D4A4-4A2E-A1A1-EE8E9E9FB80C}"/>
+                <a16:creationId xmlns:a16="http://schemas.microsoft.com/office/drawing/2014/main" id="{149E139A-35B5-4DA5-8328-76FB39348DEF}"/>
               </a:ext>
             </a:extLst>
           </p:cNvPr>
@@ -5524,7 +5524,7 @@
           <p:cNvPr id="9" name="">
             <a:extLst xmlns:a="http://schemas.openxmlformats.org/drawingml/2006/main">
               <a:ext uri="{FF2B5EF4-FFF2-40B4-BE49-F238E27FC236}">
-                <a16:creationId xmlns:a16="http://schemas.microsoft.com/office/drawing/2014/main" id="{FB52B9F4-E4B2-4D9A-B13A-56BCFC00376B}"/>
+                <a16:creationId xmlns:a16="http://schemas.microsoft.com/office/drawing/2014/main" id="{589F68CF-3804-4E27-8A9F-D3F2777DBF32}"/>
               </a:ext>
             </a:extLst>
           </p:cNvPr>
@@ -5555,7 +5555,7 @@
           <p:cNvPr id="10" name="">
             <a:extLst xmlns:a="http://schemas.openxmlformats.org/drawingml/2006/main">
               <a:ext uri="{FF2B5EF4-FFF2-40B4-BE49-F238E27FC236}">
-                <a16:creationId xmlns:a16="http://schemas.microsoft.com/office/drawing/2014/main" id="{25BB954C-EB7D-4055-92C9-D1F307F49BAC}"/>
+                <a16:creationId xmlns:a16="http://schemas.microsoft.com/office/drawing/2014/main" id="{9144816D-4744-4EF8-967E-54078249A30D}"/>
               </a:ext>
             </a:extLst>
           </p:cNvPr>
@@ -5617,7 +5617,7 @@
           <p:cNvPr id="11" name="">
             <a:extLst xmlns:a="http://schemas.openxmlformats.org/drawingml/2006/main">
               <a:ext uri="{FF2B5EF4-FFF2-40B4-BE49-F238E27FC236}">
-                <a16:creationId xmlns:a16="http://schemas.microsoft.com/office/drawing/2014/main" id="{75B1E72B-BE39-4F1F-B8EC-A518751ECC9F}"/>
+                <a16:creationId xmlns:a16="http://schemas.microsoft.com/office/drawing/2014/main" id="{4E563B69-40C6-4B00-B78F-41CEDE9AB10B}"/>
               </a:ext>
             </a:extLst>
           </p:cNvPr>
@@ -5679,7 +5679,7 @@
           <p:cNvPr id="12" name="">
             <a:extLst xmlns:a="http://schemas.openxmlformats.org/drawingml/2006/main">
               <a:ext uri="{FF2B5EF4-FFF2-40B4-BE49-F238E27FC236}">
-                <a16:creationId xmlns:a16="http://schemas.microsoft.com/office/drawing/2014/main" id="{E9378ED4-B6B6-4C8A-8899-E8952EADADFD}"/>
+                <a16:creationId xmlns:a16="http://schemas.microsoft.com/office/drawing/2014/main" id="{99E92B99-DBC3-476A-82F4-ACB2713061BE}"/>
               </a:ext>
             </a:extLst>
           </p:cNvPr>
@@ -5741,7 +5741,7 @@
           <p:cNvPr id="13" name="">
             <a:extLst xmlns:a="http://schemas.openxmlformats.org/drawingml/2006/main">
               <a:ext uri="{FF2B5EF4-FFF2-40B4-BE49-F238E27FC236}">
-                <a16:creationId xmlns:a16="http://schemas.microsoft.com/office/drawing/2014/main" id="{98C30533-FB93-4DDE-8448-40CDDAC56669}"/>
+                <a16:creationId xmlns:a16="http://schemas.microsoft.com/office/drawing/2014/main" id="{6926CF9D-3BF6-4EFE-8C49-526580778F95}"/>
               </a:ext>
             </a:extLst>
           </p:cNvPr>
@@ -5772,7 +5772,7 @@
           <p:cNvPr id="14" name="">
             <a:extLst xmlns:a="http://schemas.openxmlformats.org/drawingml/2006/main">
               <a:ext uri="{FF2B5EF4-FFF2-40B4-BE49-F238E27FC236}">
-                <a16:creationId xmlns:a16="http://schemas.microsoft.com/office/drawing/2014/main" id="{468D02BE-6F1D-45B3-A1A1-54983873559A}"/>
+                <a16:creationId xmlns:a16="http://schemas.microsoft.com/office/drawing/2014/main" id="{6DAF4EA0-ABC2-4039-AA75-DA330FC497A3}"/>
               </a:ext>
             </a:extLst>
           </p:cNvPr>
@@ -5834,7 +5834,7 @@
           <p:cNvPr id="15" name="">
             <a:extLst xmlns:a="http://schemas.openxmlformats.org/drawingml/2006/main">
               <a:ext uri="{FF2B5EF4-FFF2-40B4-BE49-F238E27FC236}">
-                <a16:creationId xmlns:a16="http://schemas.microsoft.com/office/drawing/2014/main" id="{F9B3E6E9-2DE1-4D7E-97F8-FB33D64F2F64}"/>
+                <a16:creationId xmlns:a16="http://schemas.microsoft.com/office/drawing/2014/main" id="{A43E5397-D2E9-4E86-8869-65CEFE7C7900}"/>
               </a:ext>
             </a:extLst>
           </p:cNvPr>
@@ -5896,7 +5896,7 @@
           <p:cNvPr id="16" name="">
             <a:extLst xmlns:a="http://schemas.openxmlformats.org/drawingml/2006/main">
               <a:ext uri="{FF2B5EF4-FFF2-40B4-BE49-F238E27FC236}">
-                <a16:creationId xmlns:a16="http://schemas.microsoft.com/office/drawing/2014/main" id="{8A026CD0-FEDF-4501-A129-406F826E1D45}"/>
+                <a16:creationId xmlns:a16="http://schemas.microsoft.com/office/drawing/2014/main" id="{8FC2906D-7085-4113-9E4B-AE75B3909D00}"/>
               </a:ext>
             </a:extLst>
           </p:cNvPr>
@@ -5958,7 +5958,7 @@
           <p:cNvPr id="17" name="">
             <a:extLst xmlns:a="http://schemas.openxmlformats.org/drawingml/2006/main">
               <a:ext uri="{FF2B5EF4-FFF2-40B4-BE49-F238E27FC236}">
-                <a16:creationId xmlns:a16="http://schemas.microsoft.com/office/drawing/2014/main" id="{09111116-FC75-4CF7-A852-8B5C96061036}"/>
+                <a16:creationId xmlns:a16="http://schemas.microsoft.com/office/drawing/2014/main" id="{91193292-2BCE-41A8-86F1-44F0D687DE92}"/>
               </a:ext>
             </a:extLst>
           </p:cNvPr>
@@ -5993,7 +5993,7 @@
           <p:cNvPr id="18" name="">
             <a:extLst xmlns:a="http://schemas.openxmlformats.org/drawingml/2006/main">
               <a:ext uri="{FF2B5EF4-FFF2-40B4-BE49-F238E27FC236}">
-                <a16:creationId xmlns:a16="http://schemas.microsoft.com/office/drawing/2014/main" id="{7F61751A-A068-449C-9CB7-A004761DA31B}"/>
+                <a16:creationId xmlns:a16="http://schemas.microsoft.com/office/drawing/2014/main" id="{9EEA1D7A-E6E5-41FD-899C-284F6C4E985C}"/>
               </a:ext>
             </a:extLst>
           </p:cNvPr>
@@ -6082,7 +6082,7 @@
           <p:cNvPr id="19" name="footer-rule-12">
             <a:extLst xmlns:a="http://schemas.openxmlformats.org/drawingml/2006/main">
               <a:ext uri="{FF2B5EF4-FFF2-40B4-BE49-F238E27FC236}">
-                <a16:creationId xmlns:a16="http://schemas.microsoft.com/office/drawing/2014/main" id="{4BE828A5-5413-4159-B2C3-AFD7ABB62DDD}"/>
+                <a16:creationId xmlns:a16="http://schemas.microsoft.com/office/drawing/2014/main" id="{5376FFF0-D9C7-431C-B62B-336F41573867}"/>
               </a:ext>
             </a:extLst>
           </p:cNvPr>
@@ -6113,7 +6113,7 @@
           <p:cNvPr id="20" name="footer-label-12">
             <a:extLst xmlns:a="http://schemas.openxmlformats.org/drawingml/2006/main">
               <a:ext uri="{FF2B5EF4-FFF2-40B4-BE49-F238E27FC236}">
-                <a16:creationId xmlns:a16="http://schemas.microsoft.com/office/drawing/2014/main" id="{A385CA1A-65B2-4384-BF74-B1BA94D1006C}"/>
+                <a16:creationId xmlns:a16="http://schemas.microsoft.com/office/drawing/2014/main" id="{2D314064-F30A-448D-A626-25246ACD7167}"/>
               </a:ext>
             </a:extLst>
           </p:cNvPr>
@@ -6175,7 +6175,7 @@
           <p:cNvPr id="21" name="footer-page-12">
             <a:extLst xmlns:a="http://schemas.openxmlformats.org/drawingml/2006/main">
               <a:ext uri="{FF2B5EF4-FFF2-40B4-BE49-F238E27FC236}">
-                <a16:creationId xmlns:a16="http://schemas.microsoft.com/office/drawing/2014/main" id="{E609D14E-0D3A-4C2B-B917-CC69B7E7AF8D}"/>
+                <a16:creationId xmlns:a16="http://schemas.microsoft.com/office/drawing/2014/main" id="{046C9C1C-0035-471B-B400-26709182DFFB}"/>
               </a:ext>
             </a:extLst>
           </p:cNvPr>
@@ -6235,7 +6235,7 @@
     </p:spTree>
     <p:extLst>
       <p:ext uri="{BB962C8B-B14F-4D97-AF65-F5344CB8AC3E}">
-        <p14:creationId xmlns:p14="http://schemas.microsoft.com/office/powerpoint/2010/main" val="1630445470"/>
+        <p14:creationId xmlns:p14="http://schemas.microsoft.com/office/powerpoint/2010/main" val="995004795"/>
       </p:ext>
     </p:extLst>
   </p:cSld>
@@ -6266,7 +6266,7 @@
           <p:cNvPr id="14" name="side-accent-13">
             <a:extLst xmlns:a="http://schemas.openxmlformats.org/drawingml/2006/main">
               <a:ext uri="{FF2B5EF4-FFF2-40B4-BE49-F238E27FC236}">
-                <a16:creationId xmlns:a16="http://schemas.microsoft.com/office/drawing/2014/main" id="{B303436C-DD82-4538-A31E-1016559597D1}"/>
+                <a16:creationId xmlns:a16="http://schemas.microsoft.com/office/drawing/2014/main" id="{6ACD322E-F7C9-41DA-B0FB-448F4E56AF0C}"/>
               </a:ext>
             </a:extLst>
           </p:cNvPr>
@@ -6297,7 +6297,7 @@
           <p:cNvPr id="2" name="kicker-13">
             <a:extLst xmlns:a="http://schemas.openxmlformats.org/drawingml/2006/main">
               <a:ext uri="{FF2B5EF4-FFF2-40B4-BE49-F238E27FC236}">
-                <a16:creationId xmlns:a16="http://schemas.microsoft.com/office/drawing/2014/main" id="{8071F922-D666-46F1-8FF7-96D204C5E2BF}"/>
+                <a16:creationId xmlns:a16="http://schemas.microsoft.com/office/drawing/2014/main" id="{971CE5D2-5D34-48E9-91FD-55778E728F15}"/>
               </a:ext>
             </a:extLst>
           </p:cNvPr>
@@ -6359,7 +6359,7 @@
           <p:cNvPr id="3" name="title-13">
             <a:extLst xmlns:a="http://schemas.openxmlformats.org/drawingml/2006/main">
               <a:ext uri="{FF2B5EF4-FFF2-40B4-BE49-F238E27FC236}">
-                <a16:creationId xmlns:a16="http://schemas.microsoft.com/office/drawing/2014/main" id="{981D7247-2A11-4014-8226-D0EDB2CD8FD3}"/>
+                <a16:creationId xmlns:a16="http://schemas.microsoft.com/office/drawing/2014/main" id="{C595590A-48AD-4B58-9232-1CA92A53E94D}"/>
               </a:ext>
             </a:extLst>
           </p:cNvPr>
@@ -6421,7 +6421,7 @@
           <p:cNvPr id="4" name="draft-panel">
             <a:extLst xmlns:a="http://schemas.openxmlformats.org/drawingml/2006/main">
               <a:ext uri="{FF2B5EF4-FFF2-40B4-BE49-F238E27FC236}">
-                <a16:creationId xmlns:a16="http://schemas.microsoft.com/office/drawing/2014/main" id="{5ED48E0A-51C6-43D7-B128-A0F0ED9EEBFE}"/>
+                <a16:creationId xmlns:a16="http://schemas.microsoft.com/office/drawing/2014/main" id="{76A02B19-53C1-4072-B31C-237F2C7AD9AC}"/>
               </a:ext>
             </a:extLst>
           </p:cNvPr>
@@ -6456,7 +6456,7 @@
           <p:cNvPr id="5" name="">
             <a:extLst xmlns:a="http://schemas.openxmlformats.org/drawingml/2006/main">
               <a:ext uri="{FF2B5EF4-FFF2-40B4-BE49-F238E27FC236}">
-                <a16:creationId xmlns:a16="http://schemas.microsoft.com/office/drawing/2014/main" id="{3EC187E8-696C-4F9B-91D7-BE1B14C8AB7B}"/>
+                <a16:creationId xmlns:a16="http://schemas.microsoft.com/office/drawing/2014/main" id="{5A32420B-8C85-4670-A311-B77410A5B537}"/>
               </a:ext>
             </a:extLst>
           </p:cNvPr>
@@ -6518,7 +6518,7 @@
           <p:cNvPr id="6" name="">
             <a:extLst xmlns:a="http://schemas.openxmlformats.org/drawingml/2006/main">
               <a:ext uri="{FF2B5EF4-FFF2-40B4-BE49-F238E27FC236}">
-                <a16:creationId xmlns:a16="http://schemas.microsoft.com/office/drawing/2014/main" id="{9FFC9DBC-A89A-4854-A5F6-F8FAB76DB95A}"/>
+                <a16:creationId xmlns:a16="http://schemas.microsoft.com/office/drawing/2014/main" id="{18853BFA-C9FB-44DF-9038-AF4AAC1B75AE}"/>
               </a:ext>
             </a:extLst>
           </p:cNvPr>
@@ -6634,7 +6634,7 @@
           <p:cNvPr id="7" name="submit-panel">
             <a:extLst xmlns:a="http://schemas.openxmlformats.org/drawingml/2006/main">
               <a:ext uri="{FF2B5EF4-FFF2-40B4-BE49-F238E27FC236}">
-                <a16:creationId xmlns:a16="http://schemas.microsoft.com/office/drawing/2014/main" id="{C53FF3CB-ED44-4E15-96AF-B1C603806225}"/>
+                <a16:creationId xmlns:a16="http://schemas.microsoft.com/office/drawing/2014/main" id="{5D3AF40A-B8E5-4182-910C-819FD6845331}"/>
               </a:ext>
             </a:extLst>
           </p:cNvPr>
@@ -6669,7 +6669,7 @@
           <p:cNvPr id="8" name="">
             <a:extLst xmlns:a="http://schemas.openxmlformats.org/drawingml/2006/main">
               <a:ext uri="{FF2B5EF4-FFF2-40B4-BE49-F238E27FC236}">
-                <a16:creationId xmlns:a16="http://schemas.microsoft.com/office/drawing/2014/main" id="{F2930B45-0DE8-430E-9727-B71AF6DC664E}"/>
+                <a16:creationId xmlns:a16="http://schemas.microsoft.com/office/drawing/2014/main" id="{37BB0146-782F-48EA-AB01-5B5733B94EFD}"/>
               </a:ext>
             </a:extLst>
           </p:cNvPr>
@@ -6731,7 +6731,7 @@
           <p:cNvPr id="9" name="">
             <a:extLst xmlns:a="http://schemas.openxmlformats.org/drawingml/2006/main">
               <a:ext uri="{FF2B5EF4-FFF2-40B4-BE49-F238E27FC236}">
-                <a16:creationId xmlns:a16="http://schemas.microsoft.com/office/drawing/2014/main" id="{745913D8-DD23-4F80-8B4C-CFBFE9916FD6}"/>
+                <a16:creationId xmlns:a16="http://schemas.microsoft.com/office/drawing/2014/main" id="{8E54E7BD-024C-4EB7-AF67-70F03B635B0E}"/>
               </a:ext>
             </a:extLst>
           </p:cNvPr>
@@ -6847,7 +6847,7 @@
           <p:cNvPr id="10" name="">
             <a:extLst xmlns:a="http://schemas.openxmlformats.org/drawingml/2006/main">
               <a:ext uri="{FF2B5EF4-FFF2-40B4-BE49-F238E27FC236}">
-                <a16:creationId xmlns:a16="http://schemas.microsoft.com/office/drawing/2014/main" id="{41C64BD5-A410-4703-BA28-65A8AFA5FB3F}"/>
+                <a16:creationId xmlns:a16="http://schemas.microsoft.com/office/drawing/2014/main" id="{7076E246-CCA7-432C-9971-A20210EFB56D}"/>
               </a:ext>
             </a:extLst>
           </p:cNvPr>
@@ -6909,7 +6909,7 @@
           <p:cNvPr id="11" name="footer-rule-13">
             <a:extLst xmlns:a="http://schemas.openxmlformats.org/drawingml/2006/main">
               <a:ext uri="{FF2B5EF4-FFF2-40B4-BE49-F238E27FC236}">
-                <a16:creationId xmlns:a16="http://schemas.microsoft.com/office/drawing/2014/main" id="{EBF8DC0E-A088-4E8E-A3B9-33351C76C091}"/>
+                <a16:creationId xmlns:a16="http://schemas.microsoft.com/office/drawing/2014/main" id="{76E50F84-C5CD-4FBD-8DBA-E287DB0302E5}"/>
               </a:ext>
             </a:extLst>
           </p:cNvPr>
@@ -6940,7 +6940,7 @@
           <p:cNvPr id="12" name="footer-label-13">
             <a:extLst xmlns:a="http://schemas.openxmlformats.org/drawingml/2006/main">
               <a:ext uri="{FF2B5EF4-FFF2-40B4-BE49-F238E27FC236}">
-                <a16:creationId xmlns:a16="http://schemas.microsoft.com/office/drawing/2014/main" id="{EF3AAD65-7342-43B4-8410-6EAABF719D97}"/>
+                <a16:creationId xmlns:a16="http://schemas.microsoft.com/office/drawing/2014/main" id="{B917C159-1B0F-4475-8BFF-441232ADACE2}"/>
               </a:ext>
             </a:extLst>
           </p:cNvPr>
@@ -7002,7 +7002,7 @@
           <p:cNvPr id="13" name="footer-page-13">
             <a:extLst xmlns:a="http://schemas.openxmlformats.org/drawingml/2006/main">
               <a:ext uri="{FF2B5EF4-FFF2-40B4-BE49-F238E27FC236}">
-                <a16:creationId xmlns:a16="http://schemas.microsoft.com/office/drawing/2014/main" id="{5B9D7F3D-A36D-4CC1-86CE-96C3A2D11F71}"/>
+                <a16:creationId xmlns:a16="http://schemas.microsoft.com/office/drawing/2014/main" id="{8BE3112F-0451-4279-B6B2-441362F49586}"/>
               </a:ext>
             </a:extLst>
           </p:cNvPr>
@@ -7062,7 +7062,7 @@
     </p:spTree>
     <p:extLst>
       <p:ext uri="{BB962C8B-B14F-4D97-AF65-F5344CB8AC3E}">
-        <p14:creationId xmlns:p14="http://schemas.microsoft.com/office/powerpoint/2010/main" val="1999503192"/>
+        <p14:creationId xmlns:p14="http://schemas.microsoft.com/office/powerpoint/2010/main" val="311852467"/>
       </p:ext>
     </p:extLst>
   </p:cSld>
@@ -7093,7 +7093,7 @@
           <p:cNvPr id="25" name="side-accent-14">
             <a:extLst xmlns:a="http://schemas.openxmlformats.org/drawingml/2006/main">
               <a:ext uri="{FF2B5EF4-FFF2-40B4-BE49-F238E27FC236}">
-                <a16:creationId xmlns:a16="http://schemas.microsoft.com/office/drawing/2014/main" id="{514D1999-2AC5-4204-9236-BCF6F13FE27A}"/>
+                <a16:creationId xmlns:a16="http://schemas.microsoft.com/office/drawing/2014/main" id="{59797215-5F9E-438C-BF48-0C9E1593C087}"/>
               </a:ext>
             </a:extLst>
           </p:cNvPr>
@@ -7124,7 +7124,7 @@
           <p:cNvPr id="2" name="kicker-14">
             <a:extLst xmlns:a="http://schemas.openxmlformats.org/drawingml/2006/main">
               <a:ext uri="{FF2B5EF4-FFF2-40B4-BE49-F238E27FC236}">
-                <a16:creationId xmlns:a16="http://schemas.microsoft.com/office/drawing/2014/main" id="{965BD65F-216E-4393-9EC3-240CFEB97AEA}"/>
+                <a16:creationId xmlns:a16="http://schemas.microsoft.com/office/drawing/2014/main" id="{45C613D0-59A0-4C86-B7DB-0FAB85CC9862}"/>
               </a:ext>
             </a:extLst>
           </p:cNvPr>
@@ -7186,7 +7186,7 @@
           <p:cNvPr id="3" name="title-14">
             <a:extLst xmlns:a="http://schemas.openxmlformats.org/drawingml/2006/main">
               <a:ext uri="{FF2B5EF4-FFF2-40B4-BE49-F238E27FC236}">
-                <a16:creationId xmlns:a16="http://schemas.microsoft.com/office/drawing/2014/main" id="{E75FCB45-8F61-4D6E-AA02-F4A2C82363E4}"/>
+                <a16:creationId xmlns:a16="http://schemas.microsoft.com/office/drawing/2014/main" id="{183D990D-CD3A-4E6C-B3E5-95DAB3BEB8A5}"/>
               </a:ext>
             </a:extLst>
           </p:cNvPr>
@@ -7248,7 +7248,7 @@
           <p:cNvPr id="4" name="">
             <a:extLst xmlns:a="http://schemas.openxmlformats.org/drawingml/2006/main">
               <a:ext uri="{FF2B5EF4-FFF2-40B4-BE49-F238E27FC236}">
-                <a16:creationId xmlns:a16="http://schemas.microsoft.com/office/drawing/2014/main" id="{1EFEF300-1B2A-44E2-8FF6-A6B382AD2E5E}"/>
+                <a16:creationId xmlns:a16="http://schemas.microsoft.com/office/drawing/2014/main" id="{6258590B-A235-4B32-AE04-62B46C7D5F61}"/>
               </a:ext>
             </a:extLst>
           </p:cNvPr>
@@ -7279,7 +7279,7 @@
           <p:cNvPr id="5" name="">
             <a:extLst xmlns:a="http://schemas.openxmlformats.org/drawingml/2006/main">
               <a:ext uri="{FF2B5EF4-FFF2-40B4-BE49-F238E27FC236}">
-                <a16:creationId xmlns:a16="http://schemas.microsoft.com/office/drawing/2014/main" id="{D966EE29-FBE4-4F17-9624-45CF81453995}"/>
+                <a16:creationId xmlns:a16="http://schemas.microsoft.com/office/drawing/2014/main" id="{E3D19E74-9914-4692-AEEC-DCB7228D7259}"/>
               </a:ext>
             </a:extLst>
           </p:cNvPr>
@@ -7310,7 +7310,7 @@
           <p:cNvPr id="6" name="">
             <a:extLst xmlns:a="http://schemas.openxmlformats.org/drawingml/2006/main">
               <a:ext uri="{FF2B5EF4-FFF2-40B4-BE49-F238E27FC236}">
-                <a16:creationId xmlns:a16="http://schemas.microsoft.com/office/drawing/2014/main" id="{C41BD189-14BA-4EF2-8E88-D797AA5BDD0E}"/>
+                <a16:creationId xmlns:a16="http://schemas.microsoft.com/office/drawing/2014/main" id="{EECCA141-95E8-4805-A089-D035ED66CFC4}"/>
               </a:ext>
             </a:extLst>
           </p:cNvPr>
@@ -7372,7 +7372,7 @@
           <p:cNvPr id="7" name="">
             <a:extLst xmlns:a="http://schemas.openxmlformats.org/drawingml/2006/main">
               <a:ext uri="{FF2B5EF4-FFF2-40B4-BE49-F238E27FC236}">
-                <a16:creationId xmlns:a16="http://schemas.microsoft.com/office/drawing/2014/main" id="{2F94B0E5-6652-48B3-9E3F-D625A2D75EC1}"/>
+                <a16:creationId xmlns:a16="http://schemas.microsoft.com/office/drawing/2014/main" id="{AAA9405A-9EC5-4E17-8217-A2062975CF99}"/>
               </a:ext>
             </a:extLst>
           </p:cNvPr>
@@ -7434,7 +7434,7 @@
           <p:cNvPr id="8" name="">
             <a:extLst xmlns:a="http://schemas.openxmlformats.org/drawingml/2006/main">
               <a:ext uri="{FF2B5EF4-FFF2-40B4-BE49-F238E27FC236}">
-                <a16:creationId xmlns:a16="http://schemas.microsoft.com/office/drawing/2014/main" id="{E6E3F96B-5512-458E-B04C-FAA49FF5902C}"/>
+                <a16:creationId xmlns:a16="http://schemas.microsoft.com/office/drawing/2014/main" id="{131B961B-7752-49A2-A743-7909E54A0F44}"/>
               </a:ext>
             </a:extLst>
           </p:cNvPr>
@@ -7496,7 +7496,7 @@
           <p:cNvPr id="9" name="">
             <a:extLst xmlns:a="http://schemas.openxmlformats.org/drawingml/2006/main">
               <a:ext uri="{FF2B5EF4-FFF2-40B4-BE49-F238E27FC236}">
-                <a16:creationId xmlns:a16="http://schemas.microsoft.com/office/drawing/2014/main" id="{3088EAF8-7721-473C-872E-95CA71A126B9}"/>
+                <a16:creationId xmlns:a16="http://schemas.microsoft.com/office/drawing/2014/main" id="{6E12EFB0-0631-4E77-BDB2-7A9243A70554}"/>
               </a:ext>
             </a:extLst>
           </p:cNvPr>
@@ -7527,7 +7527,7 @@
           <p:cNvPr id="10" name="">
             <a:extLst xmlns:a="http://schemas.openxmlformats.org/drawingml/2006/main">
               <a:ext uri="{FF2B5EF4-FFF2-40B4-BE49-F238E27FC236}">
-                <a16:creationId xmlns:a16="http://schemas.microsoft.com/office/drawing/2014/main" id="{2D3389AD-C2FE-4767-A53D-454637FED440}"/>
+                <a16:creationId xmlns:a16="http://schemas.microsoft.com/office/drawing/2014/main" id="{4D5E82FC-3E90-4734-A5FA-DE129E078AB2}"/>
               </a:ext>
             </a:extLst>
           </p:cNvPr>
@@ -7589,7 +7589,7 @@
           <p:cNvPr id="11" name="">
             <a:extLst xmlns:a="http://schemas.openxmlformats.org/drawingml/2006/main">
               <a:ext uri="{FF2B5EF4-FFF2-40B4-BE49-F238E27FC236}">
-                <a16:creationId xmlns:a16="http://schemas.microsoft.com/office/drawing/2014/main" id="{5F6FFFB9-DA00-4280-B1FA-F39DD44E45EA}"/>
+                <a16:creationId xmlns:a16="http://schemas.microsoft.com/office/drawing/2014/main" id="{54223AD8-A0DF-4B2E-B819-C673B8689B5E}"/>
               </a:ext>
             </a:extLst>
           </p:cNvPr>
@@ -7651,7 +7651,7 @@
           <p:cNvPr id="12" name="">
             <a:extLst xmlns:a="http://schemas.openxmlformats.org/drawingml/2006/main">
               <a:ext uri="{FF2B5EF4-FFF2-40B4-BE49-F238E27FC236}">
-                <a16:creationId xmlns:a16="http://schemas.microsoft.com/office/drawing/2014/main" id="{7FB50698-D17A-4B14-96EA-A2338F1DE268}"/>
+                <a16:creationId xmlns:a16="http://schemas.microsoft.com/office/drawing/2014/main" id="{8AD501FD-D02D-4A88-951E-5BFABCD8507F}"/>
               </a:ext>
             </a:extLst>
           </p:cNvPr>
@@ -7713,7 +7713,7 @@
           <p:cNvPr id="13" name="">
             <a:extLst xmlns:a="http://schemas.openxmlformats.org/drawingml/2006/main">
               <a:ext uri="{FF2B5EF4-FFF2-40B4-BE49-F238E27FC236}">
-                <a16:creationId xmlns:a16="http://schemas.microsoft.com/office/drawing/2014/main" id="{643965EC-1632-4220-BDB3-08D9FF9E8CE1}"/>
+                <a16:creationId xmlns:a16="http://schemas.microsoft.com/office/drawing/2014/main" id="{398182B6-C3F4-45BC-A25C-DD8D16803DCE}"/>
               </a:ext>
             </a:extLst>
           </p:cNvPr>
@@ -7744,7 +7744,7 @@
           <p:cNvPr id="14" name="">
             <a:extLst xmlns:a="http://schemas.openxmlformats.org/drawingml/2006/main">
               <a:ext uri="{FF2B5EF4-FFF2-40B4-BE49-F238E27FC236}">
-                <a16:creationId xmlns:a16="http://schemas.microsoft.com/office/drawing/2014/main" id="{223210D2-2470-4D04-B903-726AB2F347E8}"/>
+                <a16:creationId xmlns:a16="http://schemas.microsoft.com/office/drawing/2014/main" id="{1EA090A8-A785-4D45-9FB8-FB07CB722204}"/>
               </a:ext>
             </a:extLst>
           </p:cNvPr>
@@ -7806,7 +7806,7 @@
           <p:cNvPr id="15" name="">
             <a:extLst xmlns:a="http://schemas.openxmlformats.org/drawingml/2006/main">
               <a:ext uri="{FF2B5EF4-FFF2-40B4-BE49-F238E27FC236}">
-                <a16:creationId xmlns:a16="http://schemas.microsoft.com/office/drawing/2014/main" id="{8A99CC96-9277-44D3-97B3-E92AD506CD5D}"/>
+                <a16:creationId xmlns:a16="http://schemas.microsoft.com/office/drawing/2014/main" id="{CABF5B5B-55BB-4BAB-9560-6EA8FD4B9384}"/>
               </a:ext>
             </a:extLst>
           </p:cNvPr>
@@ -7868,7 +7868,7 @@
           <p:cNvPr id="16" name="">
             <a:extLst xmlns:a="http://schemas.openxmlformats.org/drawingml/2006/main">
               <a:ext uri="{FF2B5EF4-FFF2-40B4-BE49-F238E27FC236}">
-                <a16:creationId xmlns:a16="http://schemas.microsoft.com/office/drawing/2014/main" id="{D691A9A2-5D7C-4E5D-A403-21BCA74E0A08}"/>
+                <a16:creationId xmlns:a16="http://schemas.microsoft.com/office/drawing/2014/main" id="{58BD9AEC-90BB-47F3-B92F-025E27BA1ECC}"/>
               </a:ext>
             </a:extLst>
           </p:cNvPr>
@@ -7930,7 +7930,7 @@
           <p:cNvPr id="17" name="">
             <a:extLst xmlns:a="http://schemas.openxmlformats.org/drawingml/2006/main">
               <a:ext uri="{FF2B5EF4-FFF2-40B4-BE49-F238E27FC236}">
-                <a16:creationId xmlns:a16="http://schemas.microsoft.com/office/drawing/2014/main" id="{D9B7D1CE-373E-43C5-B864-23D615344079}"/>
+                <a16:creationId xmlns:a16="http://schemas.microsoft.com/office/drawing/2014/main" id="{E410C6E8-8967-4ED2-A7FE-4983B62E7002}"/>
               </a:ext>
             </a:extLst>
           </p:cNvPr>
@@ -7961,7 +7961,7 @@
           <p:cNvPr id="18" name="">
             <a:extLst xmlns:a="http://schemas.openxmlformats.org/drawingml/2006/main">
               <a:ext uri="{FF2B5EF4-FFF2-40B4-BE49-F238E27FC236}">
-                <a16:creationId xmlns:a16="http://schemas.microsoft.com/office/drawing/2014/main" id="{CFB387BF-270D-4780-8889-47473AE740DC}"/>
+                <a16:creationId xmlns:a16="http://schemas.microsoft.com/office/drawing/2014/main" id="{00F1486F-6463-403D-BE14-12B3B3680D11}"/>
               </a:ext>
             </a:extLst>
           </p:cNvPr>
@@ -8023,7 +8023,7 @@
           <p:cNvPr id="19" name="">
             <a:extLst xmlns:a="http://schemas.openxmlformats.org/drawingml/2006/main">
               <a:ext uri="{FF2B5EF4-FFF2-40B4-BE49-F238E27FC236}">
-                <a16:creationId xmlns:a16="http://schemas.microsoft.com/office/drawing/2014/main" id="{D216FF06-67D2-45E8-82D5-591F1BDA37C5}"/>
+                <a16:creationId xmlns:a16="http://schemas.microsoft.com/office/drawing/2014/main" id="{310C7556-0A6C-483F-8625-E3F4A0EF2BC7}"/>
               </a:ext>
             </a:extLst>
           </p:cNvPr>
@@ -8085,7 +8085,7 @@
           <p:cNvPr id="20" name="">
             <a:extLst xmlns:a="http://schemas.openxmlformats.org/drawingml/2006/main">
               <a:ext uri="{FF2B5EF4-FFF2-40B4-BE49-F238E27FC236}">
-                <a16:creationId xmlns:a16="http://schemas.microsoft.com/office/drawing/2014/main" id="{85C74093-EF81-40AC-A58A-6913BB1AC0AD}"/>
+                <a16:creationId xmlns:a16="http://schemas.microsoft.com/office/drawing/2014/main" id="{F6E3F863-A2DF-4AAF-B6FA-3B692660D16D}"/>
               </a:ext>
             </a:extLst>
           </p:cNvPr>
@@ -8147,7 +8147,7 @@
           <p:cNvPr id="21" name="">
             <a:extLst xmlns:a="http://schemas.openxmlformats.org/drawingml/2006/main">
               <a:ext uri="{FF2B5EF4-FFF2-40B4-BE49-F238E27FC236}">
-                <a16:creationId xmlns:a16="http://schemas.microsoft.com/office/drawing/2014/main" id="{596DCA1C-7C65-44E1-BAAF-3E0DE4CBCA59}"/>
+                <a16:creationId xmlns:a16="http://schemas.microsoft.com/office/drawing/2014/main" id="{E7C91A25-3529-4AD3-8969-5CB3974050D0}"/>
               </a:ext>
             </a:extLst>
           </p:cNvPr>
@@ -8209,7 +8209,7 @@
           <p:cNvPr id="22" name="footer-rule-14">
             <a:extLst xmlns:a="http://schemas.openxmlformats.org/drawingml/2006/main">
               <a:ext uri="{FF2B5EF4-FFF2-40B4-BE49-F238E27FC236}">
-                <a16:creationId xmlns:a16="http://schemas.microsoft.com/office/drawing/2014/main" id="{86F17661-B8CA-45E0-9B72-C20B948D0E64}"/>
+                <a16:creationId xmlns:a16="http://schemas.microsoft.com/office/drawing/2014/main" id="{A492511B-26DB-47FD-84BC-F64FEF09FB80}"/>
               </a:ext>
             </a:extLst>
           </p:cNvPr>
@@ -8240,7 +8240,7 @@
           <p:cNvPr id="23" name="footer-label-14">
             <a:extLst xmlns:a="http://schemas.openxmlformats.org/drawingml/2006/main">
               <a:ext uri="{FF2B5EF4-FFF2-40B4-BE49-F238E27FC236}">
-                <a16:creationId xmlns:a16="http://schemas.microsoft.com/office/drawing/2014/main" id="{5316F99E-BF64-422B-9E99-92ED1B5B0887}"/>
+                <a16:creationId xmlns:a16="http://schemas.microsoft.com/office/drawing/2014/main" id="{73B0143C-17A1-428B-818D-665EC4D95318}"/>
               </a:ext>
             </a:extLst>
           </p:cNvPr>
@@ -8302,7 +8302,7 @@
           <p:cNvPr id="24" name="footer-page-14">
             <a:extLst xmlns:a="http://schemas.openxmlformats.org/drawingml/2006/main">
               <a:ext uri="{FF2B5EF4-FFF2-40B4-BE49-F238E27FC236}">
-                <a16:creationId xmlns:a16="http://schemas.microsoft.com/office/drawing/2014/main" id="{F42258C3-517E-4873-89E9-6B4E13C733FC}"/>
+                <a16:creationId xmlns:a16="http://schemas.microsoft.com/office/drawing/2014/main" id="{62D2B047-6D5B-4233-8030-997F6EF71670}"/>
               </a:ext>
             </a:extLst>
           </p:cNvPr>
@@ -8362,7 +8362,7 @@
     </p:spTree>
     <p:extLst>
       <p:ext uri="{BB962C8B-B14F-4D97-AF65-F5344CB8AC3E}">
-        <p14:creationId xmlns:p14="http://schemas.microsoft.com/office/powerpoint/2010/main" val="863258442"/>
+        <p14:creationId xmlns:p14="http://schemas.microsoft.com/office/powerpoint/2010/main" val="1419951098"/>
       </p:ext>
     </p:extLst>
   </p:cSld>
@@ -8393,7 +8393,7 @@
           <p:cNvPr id="24" name="side-accent-15">
             <a:extLst xmlns:a="http://schemas.openxmlformats.org/drawingml/2006/main">
               <a:ext uri="{FF2B5EF4-FFF2-40B4-BE49-F238E27FC236}">
-                <a16:creationId xmlns:a16="http://schemas.microsoft.com/office/drawing/2014/main" id="{52D51099-D3A0-4EC8-864A-ECE7AF4DDAA7}"/>
+                <a16:creationId xmlns:a16="http://schemas.microsoft.com/office/drawing/2014/main" id="{3AFDEE22-02F8-4114-91B0-BBDDDD7FCD90}"/>
               </a:ext>
             </a:extLst>
           </p:cNvPr>
@@ -8424,7 +8424,7 @@
           <p:cNvPr id="2" name="kicker-15">
             <a:extLst xmlns:a="http://schemas.openxmlformats.org/drawingml/2006/main">
               <a:ext uri="{FF2B5EF4-FFF2-40B4-BE49-F238E27FC236}">
-                <a16:creationId xmlns:a16="http://schemas.microsoft.com/office/drawing/2014/main" id="{5A6829F8-BCD3-41A6-8FD0-AFF17A8DA568}"/>
+                <a16:creationId xmlns:a16="http://schemas.microsoft.com/office/drawing/2014/main" id="{CB4D85E5-54C5-4377-A175-A6520DC21890}"/>
               </a:ext>
             </a:extLst>
           </p:cNvPr>
@@ -8486,7 +8486,7 @@
           <p:cNvPr id="3" name="title-15">
             <a:extLst xmlns:a="http://schemas.openxmlformats.org/drawingml/2006/main">
               <a:ext uri="{FF2B5EF4-FFF2-40B4-BE49-F238E27FC236}">
-                <a16:creationId xmlns:a16="http://schemas.microsoft.com/office/drawing/2014/main" id="{DB76418F-F629-4331-8698-D34885938CEA}"/>
+                <a16:creationId xmlns:a16="http://schemas.microsoft.com/office/drawing/2014/main" id="{B93ED3F9-EE41-4FF6-984C-6A1C4A6F216D}"/>
               </a:ext>
             </a:extLst>
           </p:cNvPr>
@@ -8548,7 +8548,7 @@
           <p:cNvPr id="4" name="">
             <a:extLst xmlns:a="http://schemas.openxmlformats.org/drawingml/2006/main">
               <a:ext uri="{FF2B5EF4-FFF2-40B4-BE49-F238E27FC236}">
-                <a16:creationId xmlns:a16="http://schemas.microsoft.com/office/drawing/2014/main" id="{54E41881-C3D3-4133-A4BB-C537BF967073}"/>
+                <a16:creationId xmlns:a16="http://schemas.microsoft.com/office/drawing/2014/main" id="{839DC43F-024F-464C-BC9A-3BCC56E581B6}"/>
               </a:ext>
             </a:extLst>
           </p:cNvPr>
@@ -8610,7 +8610,7 @@
           <p:cNvPr id="5" name="">
             <a:extLst xmlns:a="http://schemas.openxmlformats.org/drawingml/2006/main">
               <a:ext uri="{FF2B5EF4-FFF2-40B4-BE49-F238E27FC236}">
-                <a16:creationId xmlns:a16="http://schemas.microsoft.com/office/drawing/2014/main" id="{A623F97E-6FB7-4EC5-AD71-61F5EBE71A02}"/>
+                <a16:creationId xmlns:a16="http://schemas.microsoft.com/office/drawing/2014/main" id="{63693EE7-A07C-45CE-B3FB-BC4D0AAE701E}"/>
               </a:ext>
             </a:extLst>
           </p:cNvPr>
@@ -8672,7 +8672,7 @@
           <p:cNvPr id="6" name="">
             <a:extLst xmlns:a="http://schemas.openxmlformats.org/drawingml/2006/main">
               <a:ext uri="{FF2B5EF4-FFF2-40B4-BE49-F238E27FC236}">
-                <a16:creationId xmlns:a16="http://schemas.microsoft.com/office/drawing/2014/main" id="{D4B3055F-0BCB-45D1-AD6D-59A1A9192B3D}"/>
+                <a16:creationId xmlns:a16="http://schemas.microsoft.com/office/drawing/2014/main" id="{BA9AF034-52CB-4DBC-8A63-80D97B260095}"/>
               </a:ext>
             </a:extLst>
           </p:cNvPr>
@@ -8734,7 +8734,7 @@
           <p:cNvPr id="7" name="">
             <a:extLst xmlns:a="http://schemas.openxmlformats.org/drawingml/2006/main">
               <a:ext uri="{FF2B5EF4-FFF2-40B4-BE49-F238E27FC236}">
-                <a16:creationId xmlns:a16="http://schemas.microsoft.com/office/drawing/2014/main" id="{DC2F1112-12D9-4766-884D-CD8F80E548F4}"/>
+                <a16:creationId xmlns:a16="http://schemas.microsoft.com/office/drawing/2014/main" id="{6840CAAE-2C6D-4533-941F-704DDAA7BEB6}"/>
               </a:ext>
             </a:extLst>
           </p:cNvPr>
@@ -8765,7 +8765,7 @@
           <p:cNvPr id="8" name="">
             <a:extLst xmlns:a="http://schemas.openxmlformats.org/drawingml/2006/main">
               <a:ext uri="{FF2B5EF4-FFF2-40B4-BE49-F238E27FC236}">
-                <a16:creationId xmlns:a16="http://schemas.microsoft.com/office/drawing/2014/main" id="{3EECE8C8-549A-4297-A601-0926A1EFB058}"/>
+                <a16:creationId xmlns:a16="http://schemas.microsoft.com/office/drawing/2014/main" id="{75F397EE-D3F2-4187-860A-F18E87DD0E35}"/>
               </a:ext>
             </a:extLst>
           </p:cNvPr>
@@ -8827,7 +8827,7 @@
           <p:cNvPr id="9" name="">
             <a:extLst xmlns:a="http://schemas.openxmlformats.org/drawingml/2006/main">
               <a:ext uri="{FF2B5EF4-FFF2-40B4-BE49-F238E27FC236}">
-                <a16:creationId xmlns:a16="http://schemas.microsoft.com/office/drawing/2014/main" id="{2622D0D9-F515-4F45-B488-7B0BD98D1622}"/>
+                <a16:creationId xmlns:a16="http://schemas.microsoft.com/office/drawing/2014/main" id="{4A660DF8-E9BF-41DD-8486-F34151105C63}"/>
               </a:ext>
             </a:extLst>
           </p:cNvPr>
@@ -8889,7 +8889,7 @@
           <p:cNvPr id="10" name="">
             <a:extLst xmlns:a="http://schemas.openxmlformats.org/drawingml/2006/main">
               <a:ext uri="{FF2B5EF4-FFF2-40B4-BE49-F238E27FC236}">
-                <a16:creationId xmlns:a16="http://schemas.microsoft.com/office/drawing/2014/main" id="{5D96053C-AE95-416E-A199-A836F6944483}"/>
+                <a16:creationId xmlns:a16="http://schemas.microsoft.com/office/drawing/2014/main" id="{13ADE89A-8D9B-4393-A502-09391570774E}"/>
               </a:ext>
             </a:extLst>
           </p:cNvPr>
@@ -8951,7 +8951,7 @@
           <p:cNvPr id="11" name="">
             <a:extLst xmlns:a="http://schemas.openxmlformats.org/drawingml/2006/main">
               <a:ext uri="{FF2B5EF4-FFF2-40B4-BE49-F238E27FC236}">
-                <a16:creationId xmlns:a16="http://schemas.microsoft.com/office/drawing/2014/main" id="{55686EB3-E01E-4634-92D4-991878E7C2A7}"/>
+                <a16:creationId xmlns:a16="http://schemas.microsoft.com/office/drawing/2014/main" id="{DF616D99-8C84-49AB-932F-A4C08D9FB7AE}"/>
               </a:ext>
             </a:extLst>
           </p:cNvPr>
@@ -8982,7 +8982,7 @@
           <p:cNvPr id="12" name="">
             <a:extLst xmlns:a="http://schemas.openxmlformats.org/drawingml/2006/main">
               <a:ext uri="{FF2B5EF4-FFF2-40B4-BE49-F238E27FC236}">
-                <a16:creationId xmlns:a16="http://schemas.microsoft.com/office/drawing/2014/main" id="{EF3D8C0D-7FBA-42A8-8901-975C7F336161}"/>
+                <a16:creationId xmlns:a16="http://schemas.microsoft.com/office/drawing/2014/main" id="{079C8928-53B9-4654-A8DA-768E506F1870}"/>
               </a:ext>
             </a:extLst>
           </p:cNvPr>
@@ -9044,7 +9044,7 @@
           <p:cNvPr id="13" name="">
             <a:extLst xmlns:a="http://schemas.openxmlformats.org/drawingml/2006/main">
               <a:ext uri="{FF2B5EF4-FFF2-40B4-BE49-F238E27FC236}">
-                <a16:creationId xmlns:a16="http://schemas.microsoft.com/office/drawing/2014/main" id="{A9F46E54-1BB0-498F-916E-4D15CAD81754}"/>
+                <a16:creationId xmlns:a16="http://schemas.microsoft.com/office/drawing/2014/main" id="{58966DE8-B702-4267-91E0-A3170B968467}"/>
               </a:ext>
             </a:extLst>
           </p:cNvPr>
@@ -9106,7 +9106,7 @@
           <p:cNvPr id="14" name="">
             <a:extLst xmlns:a="http://schemas.openxmlformats.org/drawingml/2006/main">
               <a:ext uri="{FF2B5EF4-FFF2-40B4-BE49-F238E27FC236}">
-                <a16:creationId xmlns:a16="http://schemas.microsoft.com/office/drawing/2014/main" id="{50BDCB27-F842-470B-B5B2-50A3565829E9}"/>
+                <a16:creationId xmlns:a16="http://schemas.microsoft.com/office/drawing/2014/main" id="{3577C0F6-5D1A-4258-B106-53B4FB8E4A45}"/>
               </a:ext>
             </a:extLst>
           </p:cNvPr>
@@ -9168,7 +9168,7 @@
           <p:cNvPr id="15" name="">
             <a:extLst xmlns:a="http://schemas.openxmlformats.org/drawingml/2006/main">
               <a:ext uri="{FF2B5EF4-FFF2-40B4-BE49-F238E27FC236}">
-                <a16:creationId xmlns:a16="http://schemas.microsoft.com/office/drawing/2014/main" id="{FB41710A-63D6-4399-BE7B-78501BC914B6}"/>
+                <a16:creationId xmlns:a16="http://schemas.microsoft.com/office/drawing/2014/main" id="{54963189-1FA9-44F5-889D-1E9E6DAB96C7}"/>
               </a:ext>
             </a:extLst>
           </p:cNvPr>
@@ -9199,7 +9199,7 @@
           <p:cNvPr id="16" name="">
             <a:extLst xmlns:a="http://schemas.openxmlformats.org/drawingml/2006/main">
               <a:ext uri="{FF2B5EF4-FFF2-40B4-BE49-F238E27FC236}">
-                <a16:creationId xmlns:a16="http://schemas.microsoft.com/office/drawing/2014/main" id="{BC57C199-E3B8-4838-A8EE-8BAFF9178ED6}"/>
+                <a16:creationId xmlns:a16="http://schemas.microsoft.com/office/drawing/2014/main" id="{565C6CAF-50EB-4C2D-BFEF-684C65DF52CE}"/>
               </a:ext>
             </a:extLst>
           </p:cNvPr>
@@ -9261,7 +9261,7 @@
           <p:cNvPr id="17" name="">
             <a:extLst xmlns:a="http://schemas.openxmlformats.org/drawingml/2006/main">
               <a:ext uri="{FF2B5EF4-FFF2-40B4-BE49-F238E27FC236}">
-                <a16:creationId xmlns:a16="http://schemas.microsoft.com/office/drawing/2014/main" id="{8A0140AA-63E3-4BB1-94DC-9E00158BE81A}"/>
+                <a16:creationId xmlns:a16="http://schemas.microsoft.com/office/drawing/2014/main" id="{4401BB1C-C75E-4681-AFC3-7C4C2D22B126}"/>
               </a:ext>
             </a:extLst>
           </p:cNvPr>
@@ -9323,7 +9323,7 @@
           <p:cNvPr id="18" name="">
             <a:extLst xmlns:a="http://schemas.openxmlformats.org/drawingml/2006/main">
               <a:ext uri="{FF2B5EF4-FFF2-40B4-BE49-F238E27FC236}">
-                <a16:creationId xmlns:a16="http://schemas.microsoft.com/office/drawing/2014/main" id="{CBF9A26F-038D-4532-91A6-8B3715A67C4E}"/>
+                <a16:creationId xmlns:a16="http://schemas.microsoft.com/office/drawing/2014/main" id="{5A434084-37FA-4AB7-97F8-52BA24DBFB4A}"/>
               </a:ext>
             </a:extLst>
           </p:cNvPr>
@@ -9385,7 +9385,7 @@
           <p:cNvPr id="19" name="">
             <a:extLst xmlns:a="http://schemas.openxmlformats.org/drawingml/2006/main">
               <a:ext uri="{FF2B5EF4-FFF2-40B4-BE49-F238E27FC236}">
-                <a16:creationId xmlns:a16="http://schemas.microsoft.com/office/drawing/2014/main" id="{7FA26A6A-B0F9-4274-8919-A66ED152788E}"/>
+                <a16:creationId xmlns:a16="http://schemas.microsoft.com/office/drawing/2014/main" id="{D0D60BC3-A3E8-476E-8947-2D0C1675771E}"/>
               </a:ext>
             </a:extLst>
           </p:cNvPr>
@@ -9418,7 +9418,7 @@
           <p:cNvPr id="20" name="">
             <a:extLst xmlns:a="http://schemas.openxmlformats.org/drawingml/2006/main">
               <a:ext uri="{FF2B5EF4-FFF2-40B4-BE49-F238E27FC236}">
-                <a16:creationId xmlns:a16="http://schemas.microsoft.com/office/drawing/2014/main" id="{46E4CC0F-2532-4EAB-9691-3DC97CE7127F}"/>
+                <a16:creationId xmlns:a16="http://schemas.microsoft.com/office/drawing/2014/main" id="{A04D57F9-3F58-4463-9FB8-C86742724C65}"/>
               </a:ext>
             </a:extLst>
           </p:cNvPr>
@@ -9480,7 +9480,7 @@
           <p:cNvPr id="21" name="footer-rule-15">
             <a:extLst xmlns:a="http://schemas.openxmlformats.org/drawingml/2006/main">
               <a:ext uri="{FF2B5EF4-FFF2-40B4-BE49-F238E27FC236}">
-                <a16:creationId xmlns:a16="http://schemas.microsoft.com/office/drawing/2014/main" id="{E7E8B398-9A92-4E89-8D7A-42DEC01E7D15}"/>
+                <a16:creationId xmlns:a16="http://schemas.microsoft.com/office/drawing/2014/main" id="{4011F784-3731-4910-9378-D044B1584AC3}"/>
               </a:ext>
             </a:extLst>
           </p:cNvPr>
@@ -9511,7 +9511,7 @@
           <p:cNvPr id="22" name="footer-label-15">
             <a:extLst xmlns:a="http://schemas.openxmlformats.org/drawingml/2006/main">
               <a:ext uri="{FF2B5EF4-FFF2-40B4-BE49-F238E27FC236}">
-                <a16:creationId xmlns:a16="http://schemas.microsoft.com/office/drawing/2014/main" id="{8A75E69E-9928-4EC7-8178-20B4A395763C}"/>
+                <a16:creationId xmlns:a16="http://schemas.microsoft.com/office/drawing/2014/main" id="{FD6CCF03-2A99-40A0-903F-E8E823DAC190}"/>
               </a:ext>
             </a:extLst>
           </p:cNvPr>
@@ -9573,7 +9573,7 @@
           <p:cNvPr id="23" name="footer-page-15">
             <a:extLst xmlns:a="http://schemas.openxmlformats.org/drawingml/2006/main">
               <a:ext uri="{FF2B5EF4-FFF2-40B4-BE49-F238E27FC236}">
-                <a16:creationId xmlns:a16="http://schemas.microsoft.com/office/drawing/2014/main" id="{44A6CA42-D3C9-4319-B338-5583CAF25F4A}"/>
+                <a16:creationId xmlns:a16="http://schemas.microsoft.com/office/drawing/2014/main" id="{EB2AB947-ECEA-4249-ACBC-F6B39157F164}"/>
               </a:ext>
             </a:extLst>
           </p:cNvPr>
@@ -9633,7 +9633,7 @@
     </p:spTree>
     <p:extLst>
       <p:ext uri="{BB962C8B-B14F-4D97-AF65-F5344CB8AC3E}">
-        <p14:creationId xmlns:p14="http://schemas.microsoft.com/office/powerpoint/2010/main" val="2093243760"/>
+        <p14:creationId xmlns:p14="http://schemas.microsoft.com/office/powerpoint/2010/main" val="815991276"/>
       </p:ext>
     </p:extLst>
   </p:cSld>
@@ -9664,7 +9664,7 @@
           <p:cNvPr id="21" name="side-accent-16">
             <a:extLst xmlns:a="http://schemas.openxmlformats.org/drawingml/2006/main">
               <a:ext uri="{FF2B5EF4-FFF2-40B4-BE49-F238E27FC236}">
-                <a16:creationId xmlns:a16="http://schemas.microsoft.com/office/drawing/2014/main" id="{EDB97FBD-8920-4113-A936-357260729E5F}"/>
+                <a16:creationId xmlns:a16="http://schemas.microsoft.com/office/drawing/2014/main" id="{A7EB2F72-E6C5-4B89-974D-86420B4ABEB4}"/>
               </a:ext>
             </a:extLst>
           </p:cNvPr>
@@ -9695,7 +9695,7 @@
           <p:cNvPr id="2" name="kicker-16">
             <a:extLst xmlns:a="http://schemas.openxmlformats.org/drawingml/2006/main">
               <a:ext uri="{FF2B5EF4-FFF2-40B4-BE49-F238E27FC236}">
-                <a16:creationId xmlns:a16="http://schemas.microsoft.com/office/drawing/2014/main" id="{3A885B5A-D9A0-4EED-98BA-9D245B45B26F}"/>
+                <a16:creationId xmlns:a16="http://schemas.microsoft.com/office/drawing/2014/main" id="{A2F832BE-6FB0-4679-A890-DEDC88CE6837}"/>
               </a:ext>
             </a:extLst>
           </p:cNvPr>
@@ -9757,7 +9757,7 @@
           <p:cNvPr id="3" name="title-16">
             <a:extLst xmlns:a="http://schemas.openxmlformats.org/drawingml/2006/main">
               <a:ext uri="{FF2B5EF4-FFF2-40B4-BE49-F238E27FC236}">
-                <a16:creationId xmlns:a16="http://schemas.microsoft.com/office/drawing/2014/main" id="{3538AF04-5B46-4E93-A98E-BFA7E464A6F8}"/>
+                <a16:creationId xmlns:a16="http://schemas.microsoft.com/office/drawing/2014/main" id="{36CEA801-846F-40F1-9F8A-F42B9F5B0C2E}"/>
               </a:ext>
             </a:extLst>
           </p:cNvPr>
@@ -9819,7 +9819,7 @@
           <p:cNvPr id="4" name="">
             <a:extLst xmlns:a="http://schemas.openxmlformats.org/drawingml/2006/main">
               <a:ext uri="{FF2B5EF4-FFF2-40B4-BE49-F238E27FC236}">
-                <a16:creationId xmlns:a16="http://schemas.microsoft.com/office/drawing/2014/main" id="{DB86E01F-D6FB-419F-8CA7-14D541ED2FBC}"/>
+                <a16:creationId xmlns:a16="http://schemas.microsoft.com/office/drawing/2014/main" id="{FE0FDF6C-F8A4-45AE-9523-58C280D47B2D}"/>
               </a:ext>
             </a:extLst>
           </p:cNvPr>
@@ -9850,7 +9850,7 @@
           <p:cNvPr id="5" name="">
             <a:extLst xmlns:a="http://schemas.openxmlformats.org/drawingml/2006/main">
               <a:ext uri="{FF2B5EF4-FFF2-40B4-BE49-F238E27FC236}">
-                <a16:creationId xmlns:a16="http://schemas.microsoft.com/office/drawing/2014/main" id="{1A225AEE-A73A-4A21-9F2F-3C5F8949073D}"/>
+                <a16:creationId xmlns:a16="http://schemas.microsoft.com/office/drawing/2014/main" id="{66575DBD-FC49-4906-BDEA-B6F716AC9D8A}"/>
               </a:ext>
             </a:extLst>
           </p:cNvPr>
@@ -9881,7 +9881,7 @@
           <p:cNvPr id="6" name="">
             <a:extLst xmlns:a="http://schemas.openxmlformats.org/drawingml/2006/main">
               <a:ext uri="{FF2B5EF4-FFF2-40B4-BE49-F238E27FC236}">
-                <a16:creationId xmlns:a16="http://schemas.microsoft.com/office/drawing/2014/main" id="{37A64C2B-394B-4D07-80F7-4A874C8A0812}"/>
+                <a16:creationId xmlns:a16="http://schemas.microsoft.com/office/drawing/2014/main" id="{47DDA6E7-92C3-4CA0-B4B9-B1B0AEDBEF3C}"/>
               </a:ext>
             </a:extLst>
           </p:cNvPr>
@@ -9943,7 +9943,7 @@
           <p:cNvPr id="7" name="">
             <a:extLst xmlns:a="http://schemas.openxmlformats.org/drawingml/2006/main">
               <a:ext uri="{FF2B5EF4-FFF2-40B4-BE49-F238E27FC236}">
-                <a16:creationId xmlns:a16="http://schemas.microsoft.com/office/drawing/2014/main" id="{7F241339-A84F-4810-BA71-791819A026BC}"/>
+                <a16:creationId xmlns:a16="http://schemas.microsoft.com/office/drawing/2014/main" id="{85DE6E92-17C7-4221-ADE4-8EDA43AF1621}"/>
               </a:ext>
             </a:extLst>
           </p:cNvPr>
@@ -10005,7 +10005,7 @@
           <p:cNvPr id="8" name="">
             <a:extLst xmlns:a="http://schemas.openxmlformats.org/drawingml/2006/main">
               <a:ext uri="{FF2B5EF4-FFF2-40B4-BE49-F238E27FC236}">
-                <a16:creationId xmlns:a16="http://schemas.microsoft.com/office/drawing/2014/main" id="{F8950A0C-EB6C-4C83-BEA8-CB0383C55B9C}"/>
+                <a16:creationId xmlns:a16="http://schemas.microsoft.com/office/drawing/2014/main" id="{2BCAAD0A-0206-4AF6-9BA2-CBE9543577D8}"/>
               </a:ext>
             </a:extLst>
           </p:cNvPr>
@@ -10067,7 +10067,7 @@
           <p:cNvPr id="9" name="">
             <a:extLst xmlns:a="http://schemas.openxmlformats.org/drawingml/2006/main">
               <a:ext uri="{FF2B5EF4-FFF2-40B4-BE49-F238E27FC236}">
-                <a16:creationId xmlns:a16="http://schemas.microsoft.com/office/drawing/2014/main" id="{56EB08AE-E346-4F39-BE9E-F7A0E7895C52}"/>
+                <a16:creationId xmlns:a16="http://schemas.microsoft.com/office/drawing/2014/main" id="{0C5DE303-B112-4871-BFAA-ED1550EC7FA7}"/>
               </a:ext>
             </a:extLst>
           </p:cNvPr>
@@ -10098,7 +10098,7 @@
           <p:cNvPr id="10" name="">
             <a:extLst xmlns:a="http://schemas.openxmlformats.org/drawingml/2006/main">
               <a:ext uri="{FF2B5EF4-FFF2-40B4-BE49-F238E27FC236}">
-                <a16:creationId xmlns:a16="http://schemas.microsoft.com/office/drawing/2014/main" id="{7BC057C4-288D-49EA-B328-3240D12D6AA5}"/>
+                <a16:creationId xmlns:a16="http://schemas.microsoft.com/office/drawing/2014/main" id="{3F2A239D-B8C1-40B4-9896-B2F3D99903DB}"/>
               </a:ext>
             </a:extLst>
           </p:cNvPr>
@@ -10160,7 +10160,7 @@
           <p:cNvPr id="11" name="">
             <a:extLst xmlns:a="http://schemas.openxmlformats.org/drawingml/2006/main">
               <a:ext uri="{FF2B5EF4-FFF2-40B4-BE49-F238E27FC236}">
-                <a16:creationId xmlns:a16="http://schemas.microsoft.com/office/drawing/2014/main" id="{E3811ECF-76A3-4C72-A239-5699A923F569}"/>
+                <a16:creationId xmlns:a16="http://schemas.microsoft.com/office/drawing/2014/main" id="{F94E4B90-1FFA-4F4D-AB6C-2401E98C942B}"/>
               </a:ext>
             </a:extLst>
           </p:cNvPr>
@@ -10222,7 +10222,7 @@
           <p:cNvPr id="12" name="">
             <a:extLst xmlns:a="http://schemas.openxmlformats.org/drawingml/2006/main">
               <a:ext uri="{FF2B5EF4-FFF2-40B4-BE49-F238E27FC236}">
-                <a16:creationId xmlns:a16="http://schemas.microsoft.com/office/drawing/2014/main" id="{E8EE1183-97AF-45E0-B79C-733508FE07FE}"/>
+                <a16:creationId xmlns:a16="http://schemas.microsoft.com/office/drawing/2014/main" id="{42F02F1C-D8ED-4629-A0D2-65C27D714D17}"/>
               </a:ext>
             </a:extLst>
           </p:cNvPr>
@@ -10284,7 +10284,7 @@
           <p:cNvPr id="13" name="">
             <a:extLst xmlns:a="http://schemas.openxmlformats.org/drawingml/2006/main">
               <a:ext uri="{FF2B5EF4-FFF2-40B4-BE49-F238E27FC236}">
-                <a16:creationId xmlns:a16="http://schemas.microsoft.com/office/drawing/2014/main" id="{F485041B-4D0E-43A9-AF94-1EE892956F20}"/>
+                <a16:creationId xmlns:a16="http://schemas.microsoft.com/office/drawing/2014/main" id="{F3CC2A6A-C26F-43F3-8AF7-6F8C86B78BD4}"/>
               </a:ext>
             </a:extLst>
           </p:cNvPr>
@@ -10315,7 +10315,7 @@
           <p:cNvPr id="14" name="">
             <a:extLst xmlns:a="http://schemas.openxmlformats.org/drawingml/2006/main">
               <a:ext uri="{FF2B5EF4-FFF2-40B4-BE49-F238E27FC236}">
-                <a16:creationId xmlns:a16="http://schemas.microsoft.com/office/drawing/2014/main" id="{7554304F-1927-46B8-9F33-DD795D503B0B}"/>
+                <a16:creationId xmlns:a16="http://schemas.microsoft.com/office/drawing/2014/main" id="{6BB46B38-E1EA-4036-828B-18E3A3128600}"/>
               </a:ext>
             </a:extLst>
           </p:cNvPr>
@@ -10377,7 +10377,7 @@
           <p:cNvPr id="15" name="">
             <a:extLst xmlns:a="http://schemas.openxmlformats.org/drawingml/2006/main">
               <a:ext uri="{FF2B5EF4-FFF2-40B4-BE49-F238E27FC236}">
-                <a16:creationId xmlns:a16="http://schemas.microsoft.com/office/drawing/2014/main" id="{CE6596CC-1C31-4442-BD28-E004993585A8}"/>
+                <a16:creationId xmlns:a16="http://schemas.microsoft.com/office/drawing/2014/main" id="{6FAD5D97-799C-4A62-A1EB-7018DA9E8BCD}"/>
               </a:ext>
             </a:extLst>
           </p:cNvPr>
@@ -10439,7 +10439,7 @@
           <p:cNvPr id="16" name="">
             <a:extLst xmlns:a="http://schemas.openxmlformats.org/drawingml/2006/main">
               <a:ext uri="{FF2B5EF4-FFF2-40B4-BE49-F238E27FC236}">
-                <a16:creationId xmlns:a16="http://schemas.microsoft.com/office/drawing/2014/main" id="{6B949257-4D33-4F83-8DDA-A3A1E130307B}"/>
+                <a16:creationId xmlns:a16="http://schemas.microsoft.com/office/drawing/2014/main" id="{8CD2439C-2BA5-43DE-948A-2B2F39A525F6}"/>
               </a:ext>
             </a:extLst>
           </p:cNvPr>
@@ -10501,7 +10501,7 @@
           <p:cNvPr id="17" name="">
             <a:extLst xmlns:a="http://schemas.openxmlformats.org/drawingml/2006/main">
               <a:ext uri="{FF2B5EF4-FFF2-40B4-BE49-F238E27FC236}">
-                <a16:creationId xmlns:a16="http://schemas.microsoft.com/office/drawing/2014/main" id="{2E4AC31E-1160-4ECC-9EC8-D8DDBFE27A41}"/>
+                <a16:creationId xmlns:a16="http://schemas.microsoft.com/office/drawing/2014/main" id="{0A29BC11-C4AD-49BA-80DD-8BF306A797D8}"/>
               </a:ext>
             </a:extLst>
           </p:cNvPr>
@@ -10563,7 +10563,7 @@
           <p:cNvPr id="18" name="footer-rule-16">
             <a:extLst xmlns:a="http://schemas.openxmlformats.org/drawingml/2006/main">
               <a:ext uri="{FF2B5EF4-FFF2-40B4-BE49-F238E27FC236}">
-                <a16:creationId xmlns:a16="http://schemas.microsoft.com/office/drawing/2014/main" id="{BD445C95-64B1-448A-8C9B-29E8333DA5B0}"/>
+                <a16:creationId xmlns:a16="http://schemas.microsoft.com/office/drawing/2014/main" id="{5471E639-56A2-4FAE-A224-E2B64680951D}"/>
               </a:ext>
             </a:extLst>
           </p:cNvPr>
@@ -10594,7 +10594,7 @@
           <p:cNvPr id="19" name="footer-label-16">
             <a:extLst xmlns:a="http://schemas.openxmlformats.org/drawingml/2006/main">
               <a:ext uri="{FF2B5EF4-FFF2-40B4-BE49-F238E27FC236}">
-                <a16:creationId xmlns:a16="http://schemas.microsoft.com/office/drawing/2014/main" id="{00C0B80C-7123-4593-9816-3233B919DFAB}"/>
+                <a16:creationId xmlns:a16="http://schemas.microsoft.com/office/drawing/2014/main" id="{EC8B61CA-8F0C-4D18-A20A-C87CFD9A34BA}"/>
               </a:ext>
             </a:extLst>
           </p:cNvPr>
@@ -10656,7 +10656,7 @@
           <p:cNvPr id="20" name="footer-page-16">
             <a:extLst xmlns:a="http://schemas.openxmlformats.org/drawingml/2006/main">
               <a:ext uri="{FF2B5EF4-FFF2-40B4-BE49-F238E27FC236}">
-                <a16:creationId xmlns:a16="http://schemas.microsoft.com/office/drawing/2014/main" id="{97CACBBC-6057-4460-9BC0-A72F910820A8}"/>
+                <a16:creationId xmlns:a16="http://schemas.microsoft.com/office/drawing/2014/main" id="{C15F852A-2369-427E-9C14-6EE7FCE2D7FE}"/>
               </a:ext>
             </a:extLst>
           </p:cNvPr>
@@ -10716,7 +10716,7 @@
     </p:spTree>
     <p:extLst>
       <p:ext uri="{BB962C8B-B14F-4D97-AF65-F5344CB8AC3E}">
-        <p14:creationId xmlns:p14="http://schemas.microsoft.com/office/powerpoint/2010/main" val="278889150"/>
+        <p14:creationId xmlns:p14="http://schemas.microsoft.com/office/powerpoint/2010/main" val="711682204"/>
       </p:ext>
     </p:extLst>
   </p:cSld>
@@ -10744,10 +10744,10 @@
       </p:grpSpPr>
       <p:sp>
         <p:nvSpPr>
-          <p:cNvPr id="22" name="side-accent-17">
-            <a:extLst xmlns:a="http://schemas.openxmlformats.org/drawingml/2006/main">
-              <a:ext uri="{FF2B5EF4-FFF2-40B4-BE49-F238E27FC236}">
-                <a16:creationId xmlns:a16="http://schemas.microsoft.com/office/drawing/2014/main" id="{D2FAFB59-0C5A-4F39-B3D9-F3B218EC3465}"/>
+          <p:cNvPr id="23" name="side-accent-17">
+            <a:extLst xmlns:a="http://schemas.openxmlformats.org/drawingml/2006/main">
+              <a:ext uri="{FF2B5EF4-FFF2-40B4-BE49-F238E27FC236}">
+                <a16:creationId xmlns:a16="http://schemas.microsoft.com/office/drawing/2014/main" id="{D86FC767-8C61-44DC-98E3-A293910EF798}"/>
               </a:ext>
             </a:extLst>
           </p:cNvPr>
@@ -10778,7 +10778,7 @@
           <p:cNvPr id="2" name="kicker-17">
             <a:extLst xmlns:a="http://schemas.openxmlformats.org/drawingml/2006/main">
               <a:ext uri="{FF2B5EF4-FFF2-40B4-BE49-F238E27FC236}">
-                <a16:creationId xmlns:a16="http://schemas.microsoft.com/office/drawing/2014/main" id="{7B292E17-06EB-4F4C-BFF8-C5E1D057CDE3}"/>
+                <a16:creationId xmlns:a16="http://schemas.microsoft.com/office/drawing/2014/main" id="{BC71DF0B-FDA5-4ECA-9E08-3B2A0D479E8C}"/>
               </a:ext>
             </a:extLst>
           </p:cNvPr>
@@ -10840,7 +10840,7 @@
           <p:cNvPr id="3" name="title-17">
             <a:extLst xmlns:a="http://schemas.openxmlformats.org/drawingml/2006/main">
               <a:ext uri="{FF2B5EF4-FFF2-40B4-BE49-F238E27FC236}">
-                <a16:creationId xmlns:a16="http://schemas.microsoft.com/office/drawing/2014/main" id="{86EFA55D-546C-4D75-96C6-03C8BA6101C6}"/>
+                <a16:creationId xmlns:a16="http://schemas.microsoft.com/office/drawing/2014/main" id="{7A8E80BD-731A-46B5-AA6B-39F7D9CF503A}"/>
               </a:ext>
             </a:extLst>
           </p:cNvPr>
@@ -10902,19 +10902,19 @@
           <p:cNvPr id="4" name="">
             <a:extLst xmlns:a="http://schemas.openxmlformats.org/drawingml/2006/main">
               <a:ext uri="{FF2B5EF4-FFF2-40B4-BE49-F238E27FC236}">
-                <a16:creationId xmlns:a16="http://schemas.microsoft.com/office/drawing/2014/main" id="{96AB91C3-221C-4C33-A3D1-D06448FFA927}"/>
-              </a:ext>
-            </a:extLst>
-          </p:cNvPr>
-          <p:cNvSpPr>
-            <a:spLocks xmlns:a="http://schemas.openxmlformats.org/drawingml/2006/main" noGrp="1"/>
-          </p:cNvSpPr>
-          <p:nvPr/>
-        </p:nvSpPr>
-        <p:spPr>
-          <a:xfrm xmlns:a="http://schemas.openxmlformats.org/drawingml/2006/main">
-            <a:off x="609600" y="1847850"/>
-            <a:ext cx="8382000" cy="361950"/>
+                <a16:creationId xmlns:a16="http://schemas.microsoft.com/office/drawing/2014/main" id="{5D879CE2-C2DD-44D6-B8F6-EEC28F0F70EE}"/>
+              </a:ext>
+            </a:extLst>
+          </p:cNvPr>
+          <p:cNvSpPr>
+            <a:spLocks xmlns:a="http://schemas.openxmlformats.org/drawingml/2006/main" noGrp="1"/>
+          </p:cNvSpPr>
+          <p:nvPr/>
+        </p:nvSpPr>
+        <p:spPr>
+          <a:xfrm xmlns:a="http://schemas.openxmlformats.org/drawingml/2006/main">
+            <a:off x="609600" y="1695450"/>
+            <a:ext cx="10972800" cy="533400"/>
           </a:xfrm>
           <a:prstGeom xmlns:a="http://schemas.openxmlformats.org/drawingml/2006/main" prst="rect">
             <a:avLst/>
@@ -10936,7 +10936,7 @@
                 <a:spcPct val="100000"/>
               </a:lnSpc>
               <a:buNone/>
-              <a:defRPr sz="1725" b="0">
+              <a:defRPr sz="1575" b="0">
                 <a:solidFill>
                   <a:srgbClr val="61758A"/>
                 </a:solidFill>
@@ -10946,7 +10946,7 @@
               </a:defRPr>
             </a:pPr>
             <a:r>
-              <a:rPr sz="1725" b="0">
+              <a:rPr sz="1575" b="0">
                 <a:solidFill>
                   <a:srgbClr val="61758A"/>
                 </a:solidFill>
@@ -10954,7 +10954,34 @@
                 <a:ea typeface="Tahoma"/>
                 <a:cs typeface="Tahoma"/>
               </a:rPr>
-              <a:t>ทำตามลำดับ แล้วเรียกวิทยากรตรวจเมื่อครบ</a:t>
+              <a:t>ลิงก์นี้ใช้สำหรับทดสอบระบบ เมื่อทุกท่านตรวจสอบแล้วและไม่มีข้อเสนอให้ปรับแก้</a:t>
+            </a:r>
+          </a:p>
+          <a:p xmlns:a="http://schemas.openxmlformats.org/drawingml/2006/main">
+            <a:pPr algn="l">
+              <a:lnSpc>
+                <a:spcPct val="100000"/>
+              </a:lnSpc>
+              <a:buNone/>
+              <a:defRPr sz="1575" b="0">
+                <a:solidFill>
+                  <a:srgbClr val="61758A"/>
+                </a:solidFill>
+                <a:latin typeface="Tahoma"/>
+                <a:ea typeface="Tahoma"/>
+                <a:cs typeface="Tahoma"/>
+              </a:defRPr>
+            </a:pPr>
+            <a:r>
+              <a:rPr sz="1575" b="0">
+                <a:solidFill>
+                  <a:srgbClr val="61758A"/>
+                </a:solidFill>
+                <a:latin typeface="Tahoma"/>
+                <a:ea typeface="Tahoma"/>
+                <a:cs typeface="Tahoma"/>
+              </a:rPr>
+              <a:t>ทีมงานจะนำระบบไปติดตั้งบนเซิร์ฟเวอร์ของคณะทันทีครับ</a:t>
             </a:r>
           </a:p>
         </p:txBody>
@@ -10964,18 +10991,81 @@
           <p:cNvPr id="5" name="">
             <a:extLst xmlns:a="http://schemas.openxmlformats.org/drawingml/2006/main">
               <a:ext uri="{FF2B5EF4-FFF2-40B4-BE49-F238E27FC236}">
-                <a16:creationId xmlns:a16="http://schemas.microsoft.com/office/drawing/2014/main" id="{7A10B5FF-0126-42C0-B472-A4CBCEA1E30A}"/>
-              </a:ext>
-            </a:extLst>
-          </p:cNvPr>
-          <p:cNvSpPr>
-            <a:spLocks xmlns:a="http://schemas.openxmlformats.org/drawingml/2006/main" noGrp="1"/>
-          </p:cNvSpPr>
-          <p:nvPr/>
-        </p:nvSpPr>
-        <p:spPr>
-          <a:xfrm xmlns:a="http://schemas.openxmlformats.org/drawingml/2006/main">
-            <a:off x="609600" y="2724150"/>
+                <a16:creationId xmlns:a16="http://schemas.microsoft.com/office/drawing/2014/main" id="{9651D1F4-AB06-41EC-AD98-16A2C8A08B8F}"/>
+              </a:ext>
+            </a:extLst>
+          </p:cNvPr>
+          <p:cNvSpPr>
+            <a:spLocks xmlns:a="http://schemas.openxmlformats.org/drawingml/2006/main" noGrp="1"/>
+          </p:cNvSpPr>
+          <p:nvPr/>
+        </p:nvSpPr>
+        <p:spPr>
+          <a:xfrm xmlns:a="http://schemas.openxmlformats.org/drawingml/2006/main">
+            <a:off x="609600" y="2247900"/>
+            <a:ext cx="6858000" cy="400050"/>
+          </a:xfrm>
+          <a:prstGeom xmlns:a="http://schemas.openxmlformats.org/drawingml/2006/main" prst="rect">
+            <a:avLst/>
+          </a:prstGeom>
+          <a:noFill xmlns:a="http://schemas.openxmlformats.org/drawingml/2006/main"/>
+          <a:ln xmlns:a="http://schemas.openxmlformats.org/drawingml/2006/main" w="0">
+            <a:noFill/>
+            <a:prstDash val="solid"/>
+          </a:ln>
+        </p:spPr>
+        <p:txBody>
+          <a:bodyPr xmlns:a="http://schemas.openxmlformats.org/drawingml/2006/main" lIns="0" tIns="0" rIns="0" bIns="0" anchor="t">
+            <a:noAutofit/>
+          </a:bodyPr>
+          <a:lstStyle xmlns:a="http://schemas.openxmlformats.org/drawingml/2006/main"/>
+          <a:p xmlns:a="http://schemas.openxmlformats.org/drawingml/2006/main">
+            <a:pPr algn="l">
+              <a:lnSpc>
+                <a:spcPct val="100000"/>
+              </a:lnSpc>
+              <a:buNone/>
+              <a:defRPr sz="2100" b="1" u="sng">
+                <a:solidFill>
+                  <a:srgbClr val="00615E"/>
+                </a:solidFill>
+                <a:latin typeface="Tahoma"/>
+                <a:ea typeface="Tahoma"/>
+                <a:cs typeface="Tahoma"/>
+              </a:defRPr>
+            </a:pPr>
+            <a:r>
+              <a:rPr sz="2100" b="1" u="sng">
+                <a:solidFill>
+                  <a:srgbClr val="00615E"/>
+                </a:solidFill>
+                <a:latin typeface="Tahoma"/>
+                <a:ea typeface="Tahoma"/>
+                <a:cs typeface="Tahoma"/>
+                <a:hlinkClick xmlns:r="http://schemas.openxmlformats.org/officeDocument/2006/relationships" r:id="R8512ee1847234c2b"/>
+              </a:rPr>
+              <a:t>http://149.28.142.186/login</a:t>
+            </a:r>
+          </a:p>
+        </p:txBody>
+      </p:sp>
+      <p:sp>
+        <p:nvSpPr>
+          <p:cNvPr id="6" name="">
+            <a:extLst xmlns:a="http://schemas.openxmlformats.org/drawingml/2006/main">
+              <a:ext uri="{FF2B5EF4-FFF2-40B4-BE49-F238E27FC236}">
+                <a16:creationId xmlns:a16="http://schemas.microsoft.com/office/drawing/2014/main" id="{D35BFDC6-9BB7-4266-B325-BBFCCC08C14A}"/>
+              </a:ext>
+            </a:extLst>
+          </p:cNvPr>
+          <p:cNvSpPr>
+            <a:spLocks xmlns:a="http://schemas.openxmlformats.org/drawingml/2006/main" noGrp="1"/>
+          </p:cNvSpPr>
+          <p:nvPr/>
+        </p:nvSpPr>
+        <p:spPr>
+          <a:xfrm xmlns:a="http://schemas.openxmlformats.org/drawingml/2006/main">
+            <a:off x="609600" y="3067050"/>
             <a:ext cx="514350" cy="514350"/>
           </a:xfrm>
           <a:prstGeom xmlns:a="http://schemas.openxmlformats.org/drawingml/2006/main" prst="ellipse">
@@ -10992,21 +11082,21 @@
       </p:sp>
       <p:sp>
         <p:nvSpPr>
-          <p:cNvPr id="6" name="">
-            <a:extLst xmlns:a="http://schemas.openxmlformats.org/drawingml/2006/main">
-              <a:ext uri="{FF2B5EF4-FFF2-40B4-BE49-F238E27FC236}">
-                <a16:creationId xmlns:a16="http://schemas.microsoft.com/office/drawing/2014/main" id="{2D843794-9E43-4A29-953B-FD8057C25275}"/>
-              </a:ext>
-            </a:extLst>
-          </p:cNvPr>
-          <p:cNvSpPr>
-            <a:spLocks xmlns:a="http://schemas.openxmlformats.org/drawingml/2006/main" noGrp="1"/>
-          </p:cNvSpPr>
-          <p:nvPr/>
-        </p:nvSpPr>
-        <p:spPr>
-          <a:xfrm xmlns:a="http://schemas.openxmlformats.org/drawingml/2006/main">
-            <a:off x="609600" y="2809875"/>
+          <p:cNvPr id="7" name="">
+            <a:extLst xmlns:a="http://schemas.openxmlformats.org/drawingml/2006/main">
+              <a:ext uri="{FF2B5EF4-FFF2-40B4-BE49-F238E27FC236}">
+                <a16:creationId xmlns:a16="http://schemas.microsoft.com/office/drawing/2014/main" id="{8B7CA03C-85ED-4DC4-B347-C48B46563404}"/>
+              </a:ext>
+            </a:extLst>
+          </p:cNvPr>
+          <p:cNvSpPr>
+            <a:spLocks xmlns:a="http://schemas.openxmlformats.org/drawingml/2006/main" noGrp="1"/>
+          </p:cNvSpPr>
+          <p:nvPr/>
+        </p:nvSpPr>
+        <p:spPr>
+          <a:xfrm xmlns:a="http://schemas.openxmlformats.org/drawingml/2006/main">
+            <a:off x="609600" y="3152775"/>
             <a:ext cx="514350" cy="323850"/>
           </a:xfrm>
           <a:prstGeom xmlns:a="http://schemas.openxmlformats.org/drawingml/2006/main" prst="rect">
@@ -11054,21 +11144,21 @@
       </p:sp>
       <p:sp>
         <p:nvSpPr>
-          <p:cNvPr id="7" name="">
-            <a:extLst xmlns:a="http://schemas.openxmlformats.org/drawingml/2006/main">
-              <a:ext uri="{FF2B5EF4-FFF2-40B4-BE49-F238E27FC236}">
-                <a16:creationId xmlns:a16="http://schemas.microsoft.com/office/drawing/2014/main" id="{08E8E9A7-4F28-49A3-AE67-B3F239BA98C2}"/>
-              </a:ext>
-            </a:extLst>
-          </p:cNvPr>
-          <p:cNvSpPr>
-            <a:spLocks xmlns:a="http://schemas.openxmlformats.org/drawingml/2006/main" noGrp="1"/>
-          </p:cNvSpPr>
-          <p:nvPr/>
-        </p:nvSpPr>
-        <p:spPr>
-          <a:xfrm xmlns:a="http://schemas.openxmlformats.org/drawingml/2006/main">
-            <a:off x="1390650" y="2705100"/>
+          <p:cNvPr id="8" name="">
+            <a:extLst xmlns:a="http://schemas.openxmlformats.org/drawingml/2006/main">
+              <a:ext uri="{FF2B5EF4-FFF2-40B4-BE49-F238E27FC236}">
+                <a16:creationId xmlns:a16="http://schemas.microsoft.com/office/drawing/2014/main" id="{A4C8E9E4-4DCD-4C66-94D8-4FBDBFE406E7}"/>
+              </a:ext>
+            </a:extLst>
+          </p:cNvPr>
+          <p:cNvSpPr>
+            <a:spLocks xmlns:a="http://schemas.openxmlformats.org/drawingml/2006/main" noGrp="1"/>
+          </p:cNvSpPr>
+          <p:nvPr/>
+        </p:nvSpPr>
+        <p:spPr>
+          <a:xfrm xmlns:a="http://schemas.openxmlformats.org/drawingml/2006/main">
+            <a:off x="1390650" y="3048000"/>
             <a:ext cx="4191000" cy="609600"/>
           </a:xfrm>
           <a:prstGeom xmlns:a="http://schemas.openxmlformats.org/drawingml/2006/main" prst="rect">
@@ -11116,21 +11206,21 @@
       </p:sp>
       <p:sp>
         <p:nvSpPr>
-          <p:cNvPr id="8" name="">
-            <a:extLst xmlns:a="http://schemas.openxmlformats.org/drawingml/2006/main">
-              <a:ext uri="{FF2B5EF4-FFF2-40B4-BE49-F238E27FC236}">
-                <a16:creationId xmlns:a16="http://schemas.microsoft.com/office/drawing/2014/main" id="{A63197BF-41EA-4F38-AD31-A3F199D262EE}"/>
-              </a:ext>
-            </a:extLst>
-          </p:cNvPr>
-          <p:cNvSpPr>
-            <a:spLocks xmlns:a="http://schemas.openxmlformats.org/drawingml/2006/main" noGrp="1"/>
-          </p:cNvSpPr>
-          <p:nvPr/>
-        </p:nvSpPr>
-        <p:spPr>
-          <a:xfrm xmlns:a="http://schemas.openxmlformats.org/drawingml/2006/main">
-            <a:off x="6096000" y="2724150"/>
+          <p:cNvPr id="9" name="">
+            <a:extLst xmlns:a="http://schemas.openxmlformats.org/drawingml/2006/main">
+              <a:ext uri="{FF2B5EF4-FFF2-40B4-BE49-F238E27FC236}">
+                <a16:creationId xmlns:a16="http://schemas.microsoft.com/office/drawing/2014/main" id="{A3F51E88-C193-4741-A167-475B8D4C13D9}"/>
+              </a:ext>
+            </a:extLst>
+          </p:cNvPr>
+          <p:cNvSpPr>
+            <a:spLocks xmlns:a="http://schemas.openxmlformats.org/drawingml/2006/main" noGrp="1"/>
+          </p:cNvSpPr>
+          <p:nvPr/>
+        </p:nvSpPr>
+        <p:spPr>
+          <a:xfrm xmlns:a="http://schemas.openxmlformats.org/drawingml/2006/main">
+            <a:off x="6096000" y="3067050"/>
             <a:ext cx="514350" cy="514350"/>
           </a:xfrm>
           <a:prstGeom xmlns:a="http://schemas.openxmlformats.org/drawingml/2006/main" prst="ellipse">
@@ -11147,21 +11237,21 @@
       </p:sp>
       <p:sp>
         <p:nvSpPr>
-          <p:cNvPr id="9" name="">
-            <a:extLst xmlns:a="http://schemas.openxmlformats.org/drawingml/2006/main">
-              <a:ext uri="{FF2B5EF4-FFF2-40B4-BE49-F238E27FC236}">
-                <a16:creationId xmlns:a16="http://schemas.microsoft.com/office/drawing/2014/main" id="{03B1E5BE-8CD1-4252-84EA-3DAF77E1D446}"/>
-              </a:ext>
-            </a:extLst>
-          </p:cNvPr>
-          <p:cNvSpPr>
-            <a:spLocks xmlns:a="http://schemas.openxmlformats.org/drawingml/2006/main" noGrp="1"/>
-          </p:cNvSpPr>
-          <p:nvPr/>
-        </p:nvSpPr>
-        <p:spPr>
-          <a:xfrm xmlns:a="http://schemas.openxmlformats.org/drawingml/2006/main">
-            <a:off x="6096000" y="2809875"/>
+          <p:cNvPr id="10" name="">
+            <a:extLst xmlns:a="http://schemas.openxmlformats.org/drawingml/2006/main">
+              <a:ext uri="{FF2B5EF4-FFF2-40B4-BE49-F238E27FC236}">
+                <a16:creationId xmlns:a16="http://schemas.microsoft.com/office/drawing/2014/main" id="{A9CD4564-A037-4CDD-B18A-CAAD2C4EE3D5}"/>
+              </a:ext>
+            </a:extLst>
+          </p:cNvPr>
+          <p:cNvSpPr>
+            <a:spLocks xmlns:a="http://schemas.openxmlformats.org/drawingml/2006/main" noGrp="1"/>
+          </p:cNvSpPr>
+          <p:nvPr/>
+        </p:nvSpPr>
+        <p:spPr>
+          <a:xfrm xmlns:a="http://schemas.openxmlformats.org/drawingml/2006/main">
+            <a:off x="6096000" y="3152775"/>
             <a:ext cx="514350" cy="323850"/>
           </a:xfrm>
           <a:prstGeom xmlns:a="http://schemas.openxmlformats.org/drawingml/2006/main" prst="rect">
@@ -11209,21 +11299,21 @@
       </p:sp>
       <p:sp>
         <p:nvSpPr>
-          <p:cNvPr id="10" name="">
-            <a:extLst xmlns:a="http://schemas.openxmlformats.org/drawingml/2006/main">
-              <a:ext uri="{FF2B5EF4-FFF2-40B4-BE49-F238E27FC236}">
-                <a16:creationId xmlns:a16="http://schemas.microsoft.com/office/drawing/2014/main" id="{FCFD16F7-6B75-4904-81F5-402D86DBD7F6}"/>
-              </a:ext>
-            </a:extLst>
-          </p:cNvPr>
-          <p:cNvSpPr>
-            <a:spLocks xmlns:a="http://schemas.openxmlformats.org/drawingml/2006/main" noGrp="1"/>
-          </p:cNvSpPr>
-          <p:nvPr/>
-        </p:nvSpPr>
-        <p:spPr>
-          <a:xfrm xmlns:a="http://schemas.openxmlformats.org/drawingml/2006/main">
-            <a:off x="6877050" y="2705100"/>
+          <p:cNvPr id="11" name="">
+            <a:extLst xmlns:a="http://schemas.openxmlformats.org/drawingml/2006/main">
+              <a:ext uri="{FF2B5EF4-FFF2-40B4-BE49-F238E27FC236}">
+                <a16:creationId xmlns:a16="http://schemas.microsoft.com/office/drawing/2014/main" id="{2DA09992-8231-426A-9E3F-CB6EE9DAF1F1}"/>
+              </a:ext>
+            </a:extLst>
+          </p:cNvPr>
+          <p:cNvSpPr>
+            <a:spLocks xmlns:a="http://schemas.openxmlformats.org/drawingml/2006/main" noGrp="1"/>
+          </p:cNvSpPr>
+          <p:nvPr/>
+        </p:nvSpPr>
+        <p:spPr>
+          <a:xfrm xmlns:a="http://schemas.openxmlformats.org/drawingml/2006/main">
+            <a:off x="6877050" y="3048000"/>
             <a:ext cx="4191000" cy="609600"/>
           </a:xfrm>
           <a:prstGeom xmlns:a="http://schemas.openxmlformats.org/drawingml/2006/main" prst="rect">
@@ -11271,21 +11361,21 @@
       </p:sp>
       <p:sp>
         <p:nvSpPr>
-          <p:cNvPr id="11" name="">
-            <a:extLst xmlns:a="http://schemas.openxmlformats.org/drawingml/2006/main">
-              <a:ext uri="{FF2B5EF4-FFF2-40B4-BE49-F238E27FC236}">
-                <a16:creationId xmlns:a16="http://schemas.microsoft.com/office/drawing/2014/main" id="{BB4455B2-53A8-45FF-8DE4-DC44FBBF2365}"/>
-              </a:ext>
-            </a:extLst>
-          </p:cNvPr>
-          <p:cNvSpPr>
-            <a:spLocks xmlns:a="http://schemas.openxmlformats.org/drawingml/2006/main" noGrp="1"/>
-          </p:cNvSpPr>
-          <p:nvPr/>
-        </p:nvSpPr>
-        <p:spPr>
-          <a:xfrm xmlns:a="http://schemas.openxmlformats.org/drawingml/2006/main">
-            <a:off x="609600" y="3924300"/>
+          <p:cNvPr id="12" name="">
+            <a:extLst xmlns:a="http://schemas.openxmlformats.org/drawingml/2006/main">
+              <a:ext uri="{FF2B5EF4-FFF2-40B4-BE49-F238E27FC236}">
+                <a16:creationId xmlns:a16="http://schemas.microsoft.com/office/drawing/2014/main" id="{B513AD94-DD6D-40C3-B421-AFA806D5DFA9}"/>
+              </a:ext>
+            </a:extLst>
+          </p:cNvPr>
+          <p:cNvSpPr>
+            <a:spLocks xmlns:a="http://schemas.openxmlformats.org/drawingml/2006/main" noGrp="1"/>
+          </p:cNvSpPr>
+          <p:nvPr/>
+        </p:nvSpPr>
+        <p:spPr>
+          <a:xfrm xmlns:a="http://schemas.openxmlformats.org/drawingml/2006/main">
+            <a:off x="609600" y="4133850"/>
             <a:ext cx="514350" cy="514350"/>
           </a:xfrm>
           <a:prstGeom xmlns:a="http://schemas.openxmlformats.org/drawingml/2006/main" prst="ellipse">
@@ -11302,21 +11392,21 @@
       </p:sp>
       <p:sp>
         <p:nvSpPr>
-          <p:cNvPr id="12" name="">
-            <a:extLst xmlns:a="http://schemas.openxmlformats.org/drawingml/2006/main">
-              <a:ext uri="{FF2B5EF4-FFF2-40B4-BE49-F238E27FC236}">
-                <a16:creationId xmlns:a16="http://schemas.microsoft.com/office/drawing/2014/main" id="{48171CD8-288B-49DA-BA21-D3FF0A8949F0}"/>
-              </a:ext>
-            </a:extLst>
-          </p:cNvPr>
-          <p:cNvSpPr>
-            <a:spLocks xmlns:a="http://schemas.openxmlformats.org/drawingml/2006/main" noGrp="1"/>
-          </p:cNvSpPr>
-          <p:nvPr/>
-        </p:nvSpPr>
-        <p:spPr>
-          <a:xfrm xmlns:a="http://schemas.openxmlformats.org/drawingml/2006/main">
-            <a:off x="609600" y="4010025"/>
+          <p:cNvPr id="13" name="">
+            <a:extLst xmlns:a="http://schemas.openxmlformats.org/drawingml/2006/main">
+              <a:ext uri="{FF2B5EF4-FFF2-40B4-BE49-F238E27FC236}">
+                <a16:creationId xmlns:a16="http://schemas.microsoft.com/office/drawing/2014/main" id="{547E2125-E7F4-4BCD-AF9C-053F9E4CF5F3}"/>
+              </a:ext>
+            </a:extLst>
+          </p:cNvPr>
+          <p:cNvSpPr>
+            <a:spLocks xmlns:a="http://schemas.openxmlformats.org/drawingml/2006/main" noGrp="1"/>
+          </p:cNvSpPr>
+          <p:nvPr/>
+        </p:nvSpPr>
+        <p:spPr>
+          <a:xfrm xmlns:a="http://schemas.openxmlformats.org/drawingml/2006/main">
+            <a:off x="609600" y="4219575"/>
             <a:ext cx="514350" cy="323850"/>
           </a:xfrm>
           <a:prstGeom xmlns:a="http://schemas.openxmlformats.org/drawingml/2006/main" prst="rect">
@@ -11364,21 +11454,21 @@
       </p:sp>
       <p:sp>
         <p:nvSpPr>
-          <p:cNvPr id="13" name="">
-            <a:extLst xmlns:a="http://schemas.openxmlformats.org/drawingml/2006/main">
-              <a:ext uri="{FF2B5EF4-FFF2-40B4-BE49-F238E27FC236}">
-                <a16:creationId xmlns:a16="http://schemas.microsoft.com/office/drawing/2014/main" id="{112CED10-B44F-4A3B-9CC9-A650FF112F26}"/>
-              </a:ext>
-            </a:extLst>
-          </p:cNvPr>
-          <p:cNvSpPr>
-            <a:spLocks xmlns:a="http://schemas.openxmlformats.org/drawingml/2006/main" noGrp="1"/>
-          </p:cNvSpPr>
-          <p:nvPr/>
-        </p:nvSpPr>
-        <p:spPr>
-          <a:xfrm xmlns:a="http://schemas.openxmlformats.org/drawingml/2006/main">
-            <a:off x="1390650" y="3905250"/>
+          <p:cNvPr id="14" name="">
+            <a:extLst xmlns:a="http://schemas.openxmlformats.org/drawingml/2006/main">
+              <a:ext uri="{FF2B5EF4-FFF2-40B4-BE49-F238E27FC236}">
+                <a16:creationId xmlns:a16="http://schemas.microsoft.com/office/drawing/2014/main" id="{4CED7669-BEE1-4049-A101-52FF94952656}"/>
+              </a:ext>
+            </a:extLst>
+          </p:cNvPr>
+          <p:cNvSpPr>
+            <a:spLocks xmlns:a="http://schemas.openxmlformats.org/drawingml/2006/main" noGrp="1"/>
+          </p:cNvSpPr>
+          <p:nvPr/>
+        </p:nvSpPr>
+        <p:spPr>
+          <a:xfrm xmlns:a="http://schemas.openxmlformats.org/drawingml/2006/main">
+            <a:off x="1390650" y="4114800"/>
             <a:ext cx="4191000" cy="609600"/>
           </a:xfrm>
           <a:prstGeom xmlns:a="http://schemas.openxmlformats.org/drawingml/2006/main" prst="rect">
@@ -11426,21 +11516,21 @@
       </p:sp>
       <p:sp>
         <p:nvSpPr>
-          <p:cNvPr id="14" name="">
-            <a:extLst xmlns:a="http://schemas.openxmlformats.org/drawingml/2006/main">
-              <a:ext uri="{FF2B5EF4-FFF2-40B4-BE49-F238E27FC236}">
-                <a16:creationId xmlns:a16="http://schemas.microsoft.com/office/drawing/2014/main" id="{EF36DBFC-F2E1-4093-A1DB-C29C159DD33C}"/>
-              </a:ext>
-            </a:extLst>
-          </p:cNvPr>
-          <p:cNvSpPr>
-            <a:spLocks xmlns:a="http://schemas.openxmlformats.org/drawingml/2006/main" noGrp="1"/>
-          </p:cNvSpPr>
-          <p:nvPr/>
-        </p:nvSpPr>
-        <p:spPr>
-          <a:xfrm xmlns:a="http://schemas.openxmlformats.org/drawingml/2006/main">
-            <a:off x="6096000" y="3924300"/>
+          <p:cNvPr id="15" name="">
+            <a:extLst xmlns:a="http://schemas.openxmlformats.org/drawingml/2006/main">
+              <a:ext uri="{FF2B5EF4-FFF2-40B4-BE49-F238E27FC236}">
+                <a16:creationId xmlns:a16="http://schemas.microsoft.com/office/drawing/2014/main" id="{27F980C8-8660-4B27-A178-CF5292A75861}"/>
+              </a:ext>
+            </a:extLst>
+          </p:cNvPr>
+          <p:cNvSpPr>
+            <a:spLocks xmlns:a="http://schemas.openxmlformats.org/drawingml/2006/main" noGrp="1"/>
+          </p:cNvSpPr>
+          <p:nvPr/>
+        </p:nvSpPr>
+        <p:spPr>
+          <a:xfrm xmlns:a="http://schemas.openxmlformats.org/drawingml/2006/main">
+            <a:off x="6096000" y="4133850"/>
             <a:ext cx="514350" cy="514350"/>
           </a:xfrm>
           <a:prstGeom xmlns:a="http://schemas.openxmlformats.org/drawingml/2006/main" prst="ellipse">
@@ -11457,21 +11547,21 @@
       </p:sp>
       <p:sp>
         <p:nvSpPr>
-          <p:cNvPr id="15" name="">
-            <a:extLst xmlns:a="http://schemas.openxmlformats.org/drawingml/2006/main">
-              <a:ext uri="{FF2B5EF4-FFF2-40B4-BE49-F238E27FC236}">
-                <a16:creationId xmlns:a16="http://schemas.microsoft.com/office/drawing/2014/main" id="{999AF5BC-AF9C-43D4-B728-9914B6CE98E2}"/>
-              </a:ext>
-            </a:extLst>
-          </p:cNvPr>
-          <p:cNvSpPr>
-            <a:spLocks xmlns:a="http://schemas.openxmlformats.org/drawingml/2006/main" noGrp="1"/>
-          </p:cNvSpPr>
-          <p:nvPr/>
-        </p:nvSpPr>
-        <p:spPr>
-          <a:xfrm xmlns:a="http://schemas.openxmlformats.org/drawingml/2006/main">
-            <a:off x="6096000" y="4010025"/>
+          <p:cNvPr id="16" name="">
+            <a:extLst xmlns:a="http://schemas.openxmlformats.org/drawingml/2006/main">
+              <a:ext uri="{FF2B5EF4-FFF2-40B4-BE49-F238E27FC236}">
+                <a16:creationId xmlns:a16="http://schemas.microsoft.com/office/drawing/2014/main" id="{A9541319-F7EA-490F-B0C8-2FF22FFDEC4D}"/>
+              </a:ext>
+            </a:extLst>
+          </p:cNvPr>
+          <p:cNvSpPr>
+            <a:spLocks xmlns:a="http://schemas.openxmlformats.org/drawingml/2006/main" noGrp="1"/>
+          </p:cNvSpPr>
+          <p:nvPr/>
+        </p:nvSpPr>
+        <p:spPr>
+          <a:xfrm xmlns:a="http://schemas.openxmlformats.org/drawingml/2006/main">
+            <a:off x="6096000" y="4219575"/>
             <a:ext cx="514350" cy="323850"/>
           </a:xfrm>
           <a:prstGeom xmlns:a="http://schemas.openxmlformats.org/drawingml/2006/main" prst="rect">
@@ -11519,21 +11609,21 @@
       </p:sp>
       <p:sp>
         <p:nvSpPr>
-          <p:cNvPr id="16" name="">
-            <a:extLst xmlns:a="http://schemas.openxmlformats.org/drawingml/2006/main">
-              <a:ext uri="{FF2B5EF4-FFF2-40B4-BE49-F238E27FC236}">
-                <a16:creationId xmlns:a16="http://schemas.microsoft.com/office/drawing/2014/main" id="{CDEB2977-DE66-4B36-B936-06D4DC2E46C0}"/>
-              </a:ext>
-            </a:extLst>
-          </p:cNvPr>
-          <p:cNvSpPr>
-            <a:spLocks xmlns:a="http://schemas.openxmlformats.org/drawingml/2006/main" noGrp="1"/>
-          </p:cNvSpPr>
-          <p:nvPr/>
-        </p:nvSpPr>
-        <p:spPr>
-          <a:xfrm xmlns:a="http://schemas.openxmlformats.org/drawingml/2006/main">
-            <a:off x="6877050" y="3905250"/>
+          <p:cNvPr id="17" name="">
+            <a:extLst xmlns:a="http://schemas.openxmlformats.org/drawingml/2006/main">
+              <a:ext uri="{FF2B5EF4-FFF2-40B4-BE49-F238E27FC236}">
+                <a16:creationId xmlns:a16="http://schemas.microsoft.com/office/drawing/2014/main" id="{7E6EE057-8D14-4684-939B-77860EDF80F6}"/>
+              </a:ext>
+            </a:extLst>
+          </p:cNvPr>
+          <p:cNvSpPr>
+            <a:spLocks xmlns:a="http://schemas.openxmlformats.org/drawingml/2006/main" noGrp="1"/>
+          </p:cNvSpPr>
+          <p:nvPr/>
+        </p:nvSpPr>
+        <p:spPr>
+          <a:xfrm xmlns:a="http://schemas.openxmlformats.org/drawingml/2006/main">
+            <a:off x="6877050" y="4114800"/>
             <a:ext cx="4191000" cy="609600"/>
           </a:xfrm>
           <a:prstGeom xmlns:a="http://schemas.openxmlformats.org/drawingml/2006/main" prst="rect">
@@ -11581,10 +11671,10 @@
       </p:sp>
       <p:sp>
         <p:nvSpPr>
-          <p:cNvPr id="17" name="">
-            <a:extLst xmlns:a="http://schemas.openxmlformats.org/drawingml/2006/main">
-              <a:ext uri="{FF2B5EF4-FFF2-40B4-BE49-F238E27FC236}">
-                <a16:creationId xmlns:a16="http://schemas.microsoft.com/office/drawing/2014/main" id="{02B439CD-A61B-4A3B-BD27-034CF3608392}"/>
+          <p:cNvPr id="18" name="">
+            <a:extLst xmlns:a="http://schemas.openxmlformats.org/drawingml/2006/main">
+              <a:ext uri="{FF2B5EF4-FFF2-40B4-BE49-F238E27FC236}">
+                <a16:creationId xmlns:a16="http://schemas.microsoft.com/office/drawing/2014/main" id="{5D4A8DFD-93DA-43E4-816A-D75AFDBE8D09}"/>
               </a:ext>
             </a:extLst>
           </p:cNvPr>
@@ -11614,10 +11704,10 @@
       </p:sp>
       <p:sp>
         <p:nvSpPr>
-          <p:cNvPr id="18" name="">
-            <a:extLst xmlns:a="http://schemas.openxmlformats.org/drawingml/2006/main">
-              <a:ext uri="{FF2B5EF4-FFF2-40B4-BE49-F238E27FC236}">
-                <a16:creationId xmlns:a16="http://schemas.microsoft.com/office/drawing/2014/main" id="{6CFB9DEA-CB97-4B97-9D3A-8041FE0BCB1D}"/>
+          <p:cNvPr id="19" name="">
+            <a:extLst xmlns:a="http://schemas.openxmlformats.org/drawingml/2006/main">
+              <a:ext uri="{FF2B5EF4-FFF2-40B4-BE49-F238E27FC236}">
+                <a16:creationId xmlns:a16="http://schemas.microsoft.com/office/drawing/2014/main" id="{FA72A242-7A63-4186-A2F6-6DE7C76A58D7}"/>
               </a:ext>
             </a:extLst>
           </p:cNvPr>
@@ -11676,10 +11766,10 @@
       </p:sp>
       <p:sp>
         <p:nvSpPr>
-          <p:cNvPr id="19" name="footer-rule-17">
-            <a:extLst xmlns:a="http://schemas.openxmlformats.org/drawingml/2006/main">
-              <a:ext uri="{FF2B5EF4-FFF2-40B4-BE49-F238E27FC236}">
-                <a16:creationId xmlns:a16="http://schemas.microsoft.com/office/drawing/2014/main" id="{32A4B9D7-20F0-40C8-B91E-C849E8550FDF}"/>
+          <p:cNvPr id="20" name="footer-rule-17">
+            <a:extLst xmlns:a="http://schemas.openxmlformats.org/drawingml/2006/main">
+              <a:ext uri="{FF2B5EF4-FFF2-40B4-BE49-F238E27FC236}">
+                <a16:creationId xmlns:a16="http://schemas.microsoft.com/office/drawing/2014/main" id="{5FF57804-9594-4E64-AEBE-A31829C9D2BD}"/>
               </a:ext>
             </a:extLst>
           </p:cNvPr>
@@ -11707,10 +11797,10 @@
       </p:sp>
       <p:sp>
         <p:nvSpPr>
-          <p:cNvPr id="20" name="footer-label-17">
-            <a:extLst xmlns:a="http://schemas.openxmlformats.org/drawingml/2006/main">
-              <a:ext uri="{FF2B5EF4-FFF2-40B4-BE49-F238E27FC236}">
-                <a16:creationId xmlns:a16="http://schemas.microsoft.com/office/drawing/2014/main" id="{DD941AA0-D53A-4FBF-89DA-0A709A1F9395}"/>
+          <p:cNvPr id="21" name="footer-label-17">
+            <a:extLst xmlns:a="http://schemas.openxmlformats.org/drawingml/2006/main">
+              <a:ext uri="{FF2B5EF4-FFF2-40B4-BE49-F238E27FC236}">
+                <a16:creationId xmlns:a16="http://schemas.microsoft.com/office/drawing/2014/main" id="{9381FE6E-6DB8-4993-98FB-7C6A71AE7D90}"/>
               </a:ext>
             </a:extLst>
           </p:cNvPr>
@@ -11769,10 +11859,10 @@
       </p:sp>
       <p:sp>
         <p:nvSpPr>
-          <p:cNvPr id="21" name="footer-page-17">
-            <a:extLst xmlns:a="http://schemas.openxmlformats.org/drawingml/2006/main">
-              <a:ext uri="{FF2B5EF4-FFF2-40B4-BE49-F238E27FC236}">
-                <a16:creationId xmlns:a16="http://schemas.microsoft.com/office/drawing/2014/main" id="{BD1F9A57-563B-4982-BE91-03278EF3F34A}"/>
+          <p:cNvPr id="22" name="footer-page-17">
+            <a:extLst xmlns:a="http://schemas.openxmlformats.org/drawingml/2006/main">
+              <a:ext uri="{FF2B5EF4-FFF2-40B4-BE49-F238E27FC236}">
+                <a16:creationId xmlns:a16="http://schemas.microsoft.com/office/drawing/2014/main" id="{C7918D79-50E0-44A8-9E97-9A46E9B7B0AA}"/>
               </a:ext>
             </a:extLst>
           </p:cNvPr>
@@ -11832,7 +11922,7 @@
     </p:spTree>
     <p:extLst>
       <p:ext uri="{BB962C8B-B14F-4D97-AF65-F5344CB8AC3E}">
-        <p14:creationId xmlns:p14="http://schemas.microsoft.com/office/powerpoint/2010/main" val="1651472411"/>
+        <p14:creationId xmlns:p14="http://schemas.microsoft.com/office/powerpoint/2010/main" val="1612964597"/>
       </p:ext>
     </p:extLst>
   </p:cSld>
@@ -11863,7 +11953,7 @@
           <p:cNvPr id="25" name="side-accent-18">
             <a:extLst xmlns:a="http://schemas.openxmlformats.org/drawingml/2006/main">
               <a:ext uri="{FF2B5EF4-FFF2-40B4-BE49-F238E27FC236}">
-                <a16:creationId xmlns:a16="http://schemas.microsoft.com/office/drawing/2014/main" id="{73B03D6E-4E64-41CC-9668-CAB9885F8282}"/>
+                <a16:creationId xmlns:a16="http://schemas.microsoft.com/office/drawing/2014/main" id="{8CF54407-44A9-41B1-929C-8C76081522F5}"/>
               </a:ext>
             </a:extLst>
           </p:cNvPr>
@@ -11894,7 +11984,7 @@
           <p:cNvPr id="2" name="kicker-18">
             <a:extLst xmlns:a="http://schemas.openxmlformats.org/drawingml/2006/main">
               <a:ext uri="{FF2B5EF4-FFF2-40B4-BE49-F238E27FC236}">
-                <a16:creationId xmlns:a16="http://schemas.microsoft.com/office/drawing/2014/main" id="{5000CCAD-C3D1-4585-8920-62FE5C458E47}"/>
+                <a16:creationId xmlns:a16="http://schemas.microsoft.com/office/drawing/2014/main" id="{342E7338-613C-4FB2-BF38-C58FA429F03C}"/>
               </a:ext>
             </a:extLst>
           </p:cNvPr>
@@ -11956,7 +12046,7 @@
           <p:cNvPr id="3" name="title-18">
             <a:extLst xmlns:a="http://schemas.openxmlformats.org/drawingml/2006/main">
               <a:ext uri="{FF2B5EF4-FFF2-40B4-BE49-F238E27FC236}">
-                <a16:creationId xmlns:a16="http://schemas.microsoft.com/office/drawing/2014/main" id="{5BA6E5E2-3DD0-4F62-B802-C45FD4CD5810}"/>
+                <a16:creationId xmlns:a16="http://schemas.microsoft.com/office/drawing/2014/main" id="{236E3134-2C70-4BF9-BFD7-0B36329EB85E}"/>
               </a:ext>
             </a:extLst>
           </p:cNvPr>
@@ -12018,7 +12108,7 @@
           <p:cNvPr id="4" name="">
             <a:extLst xmlns:a="http://schemas.openxmlformats.org/drawingml/2006/main">
               <a:ext uri="{FF2B5EF4-FFF2-40B4-BE49-F238E27FC236}">
-                <a16:creationId xmlns:a16="http://schemas.microsoft.com/office/drawing/2014/main" id="{7216FB96-F464-4524-802C-CEC006E9E8C1}"/>
+                <a16:creationId xmlns:a16="http://schemas.microsoft.com/office/drawing/2014/main" id="{65D21F94-1250-4984-A3C5-42EB398DCC6E}"/>
               </a:ext>
             </a:extLst>
           </p:cNvPr>
@@ -12080,7 +12170,7 @@
           <p:cNvPr id="5" name="">
             <a:extLst xmlns:a="http://schemas.openxmlformats.org/drawingml/2006/main">
               <a:ext uri="{FF2B5EF4-FFF2-40B4-BE49-F238E27FC236}">
-                <a16:creationId xmlns:a16="http://schemas.microsoft.com/office/drawing/2014/main" id="{81609983-DCF5-4C25-8567-77DBE88119B8}"/>
+                <a16:creationId xmlns:a16="http://schemas.microsoft.com/office/drawing/2014/main" id="{099305A7-5C23-4606-9A1C-6BC9F0D2BA89}"/>
               </a:ext>
             </a:extLst>
           </p:cNvPr>
@@ -12142,7 +12232,7 @@
           <p:cNvPr id="6" name="">
             <a:extLst xmlns:a="http://schemas.openxmlformats.org/drawingml/2006/main">
               <a:ext uri="{FF2B5EF4-FFF2-40B4-BE49-F238E27FC236}">
-                <a16:creationId xmlns:a16="http://schemas.microsoft.com/office/drawing/2014/main" id="{C69AC3BE-9B66-474B-8257-39C31F6EBD74}"/>
+                <a16:creationId xmlns:a16="http://schemas.microsoft.com/office/drawing/2014/main" id="{BB6EF07A-F095-4168-A6CE-ACC7FD791C37}"/>
               </a:ext>
             </a:extLst>
           </p:cNvPr>
@@ -12204,7 +12294,7 @@
           <p:cNvPr id="7" name="">
             <a:extLst xmlns:a="http://schemas.openxmlformats.org/drawingml/2006/main">
               <a:ext uri="{FF2B5EF4-FFF2-40B4-BE49-F238E27FC236}">
-                <a16:creationId xmlns:a16="http://schemas.microsoft.com/office/drawing/2014/main" id="{B608DC4C-7B4E-4E14-9B24-AC21055BB63E}"/>
+                <a16:creationId xmlns:a16="http://schemas.microsoft.com/office/drawing/2014/main" id="{F79C1330-7428-472B-854A-F3B8C076C63E}"/>
               </a:ext>
             </a:extLst>
           </p:cNvPr>
@@ -12235,7 +12325,7 @@
           <p:cNvPr id="8" name="">
             <a:extLst xmlns:a="http://schemas.openxmlformats.org/drawingml/2006/main">
               <a:ext uri="{FF2B5EF4-FFF2-40B4-BE49-F238E27FC236}">
-                <a16:creationId xmlns:a16="http://schemas.microsoft.com/office/drawing/2014/main" id="{0FEC5BD7-7694-4F4C-9D23-0D355490D360}"/>
+                <a16:creationId xmlns:a16="http://schemas.microsoft.com/office/drawing/2014/main" id="{396A45F5-86CF-4F90-B5F9-39468959845C}"/>
               </a:ext>
             </a:extLst>
           </p:cNvPr>
@@ -12297,7 +12387,7 @@
           <p:cNvPr id="9" name="">
             <a:extLst xmlns:a="http://schemas.openxmlformats.org/drawingml/2006/main">
               <a:ext uri="{FF2B5EF4-FFF2-40B4-BE49-F238E27FC236}">
-                <a16:creationId xmlns:a16="http://schemas.microsoft.com/office/drawing/2014/main" id="{DF934167-5C1A-4834-8CDF-8B0FCAAC3882}"/>
+                <a16:creationId xmlns:a16="http://schemas.microsoft.com/office/drawing/2014/main" id="{3D72FE7A-DB83-4ABE-AA5B-2B9F44E1A26F}"/>
               </a:ext>
             </a:extLst>
           </p:cNvPr>
@@ -12359,7 +12449,7 @@
           <p:cNvPr id="10" name="">
             <a:extLst xmlns:a="http://schemas.openxmlformats.org/drawingml/2006/main">
               <a:ext uri="{FF2B5EF4-FFF2-40B4-BE49-F238E27FC236}">
-                <a16:creationId xmlns:a16="http://schemas.microsoft.com/office/drawing/2014/main" id="{B92332C7-3423-47BF-B052-A3CB614EEDC2}"/>
+                <a16:creationId xmlns:a16="http://schemas.microsoft.com/office/drawing/2014/main" id="{F986BB9D-0A77-4EC9-86BB-2A7B3C55E98D}"/>
               </a:ext>
             </a:extLst>
           </p:cNvPr>
@@ -12421,7 +12511,7 @@
           <p:cNvPr id="11" name="">
             <a:extLst xmlns:a="http://schemas.openxmlformats.org/drawingml/2006/main">
               <a:ext uri="{FF2B5EF4-FFF2-40B4-BE49-F238E27FC236}">
-                <a16:creationId xmlns:a16="http://schemas.microsoft.com/office/drawing/2014/main" id="{4BB49A20-9FAD-45AC-8F37-EE172D735322}"/>
+                <a16:creationId xmlns:a16="http://schemas.microsoft.com/office/drawing/2014/main" id="{98DD1B84-31A7-4BE9-8E35-8782F6B4151E}"/>
               </a:ext>
             </a:extLst>
           </p:cNvPr>
@@ -12452,7 +12542,7 @@
           <p:cNvPr id="12" name="">
             <a:extLst xmlns:a="http://schemas.openxmlformats.org/drawingml/2006/main">
               <a:ext uri="{FF2B5EF4-FFF2-40B4-BE49-F238E27FC236}">
-                <a16:creationId xmlns:a16="http://schemas.microsoft.com/office/drawing/2014/main" id="{A1A5E342-EC0E-4D9F-95C8-3C0B233A98A0}"/>
+                <a16:creationId xmlns:a16="http://schemas.microsoft.com/office/drawing/2014/main" id="{5D8D5B1F-23A0-4A76-9553-40CF3BB07C0B}"/>
               </a:ext>
             </a:extLst>
           </p:cNvPr>
@@ -12514,7 +12604,7 @@
           <p:cNvPr id="13" name="">
             <a:extLst xmlns:a="http://schemas.openxmlformats.org/drawingml/2006/main">
               <a:ext uri="{FF2B5EF4-FFF2-40B4-BE49-F238E27FC236}">
-                <a16:creationId xmlns:a16="http://schemas.microsoft.com/office/drawing/2014/main" id="{F2AC6657-92BB-4699-88A7-78D6F78EDA06}"/>
+                <a16:creationId xmlns:a16="http://schemas.microsoft.com/office/drawing/2014/main" id="{A906750C-786B-45C5-9D5B-31C0034A3D55}"/>
               </a:ext>
             </a:extLst>
           </p:cNvPr>
@@ -12576,7 +12666,7 @@
           <p:cNvPr id="14" name="">
             <a:extLst xmlns:a="http://schemas.openxmlformats.org/drawingml/2006/main">
               <a:ext uri="{FF2B5EF4-FFF2-40B4-BE49-F238E27FC236}">
-                <a16:creationId xmlns:a16="http://schemas.microsoft.com/office/drawing/2014/main" id="{0BDD96CC-30A3-4362-95A6-BFD422610EA9}"/>
+                <a16:creationId xmlns:a16="http://schemas.microsoft.com/office/drawing/2014/main" id="{C78A5520-2C7D-4829-9BC9-BE047459F8B6}"/>
               </a:ext>
             </a:extLst>
           </p:cNvPr>
@@ -12638,7 +12728,7 @@
           <p:cNvPr id="15" name="">
             <a:extLst xmlns:a="http://schemas.openxmlformats.org/drawingml/2006/main">
               <a:ext uri="{FF2B5EF4-FFF2-40B4-BE49-F238E27FC236}">
-                <a16:creationId xmlns:a16="http://schemas.microsoft.com/office/drawing/2014/main" id="{E7F8A37C-1AC8-4CD5-9086-7FCB785AB2B6}"/>
+                <a16:creationId xmlns:a16="http://schemas.microsoft.com/office/drawing/2014/main" id="{5CC1DC7F-6450-498C-9B86-BFC86CFF8D4B}"/>
               </a:ext>
             </a:extLst>
           </p:cNvPr>
@@ -12669,7 +12759,7 @@
           <p:cNvPr id="16" name="">
             <a:extLst xmlns:a="http://schemas.openxmlformats.org/drawingml/2006/main">
               <a:ext uri="{FF2B5EF4-FFF2-40B4-BE49-F238E27FC236}">
-                <a16:creationId xmlns:a16="http://schemas.microsoft.com/office/drawing/2014/main" id="{E570DA70-EFAE-4255-A9AC-BED6CD0F9F93}"/>
+                <a16:creationId xmlns:a16="http://schemas.microsoft.com/office/drawing/2014/main" id="{2CA73378-DE26-485C-A374-1690CFEE7578}"/>
               </a:ext>
             </a:extLst>
           </p:cNvPr>
@@ -12731,7 +12821,7 @@
           <p:cNvPr id="17" name="">
             <a:extLst xmlns:a="http://schemas.openxmlformats.org/drawingml/2006/main">
               <a:ext uri="{FF2B5EF4-FFF2-40B4-BE49-F238E27FC236}">
-                <a16:creationId xmlns:a16="http://schemas.microsoft.com/office/drawing/2014/main" id="{390DC481-EA56-49B3-A3A2-EEA8B93EC5FB}"/>
+                <a16:creationId xmlns:a16="http://schemas.microsoft.com/office/drawing/2014/main" id="{9D8E5233-CF9F-4389-B96B-80C793F7E666}"/>
               </a:ext>
             </a:extLst>
           </p:cNvPr>
@@ -12793,7 +12883,7 @@
           <p:cNvPr id="18" name="">
             <a:extLst xmlns:a="http://schemas.openxmlformats.org/drawingml/2006/main">
               <a:ext uri="{FF2B5EF4-FFF2-40B4-BE49-F238E27FC236}">
-                <a16:creationId xmlns:a16="http://schemas.microsoft.com/office/drawing/2014/main" id="{64B4349D-9A92-48EB-B347-D305AAB922F5}"/>
+                <a16:creationId xmlns:a16="http://schemas.microsoft.com/office/drawing/2014/main" id="{EA17EBCD-3F37-4640-8D7C-1E89C8CF23D9}"/>
               </a:ext>
             </a:extLst>
           </p:cNvPr>
@@ -12855,7 +12945,7 @@
           <p:cNvPr id="19" name="">
             <a:extLst xmlns:a="http://schemas.openxmlformats.org/drawingml/2006/main">
               <a:ext uri="{FF2B5EF4-FFF2-40B4-BE49-F238E27FC236}">
-                <a16:creationId xmlns:a16="http://schemas.microsoft.com/office/drawing/2014/main" id="{A9EFE471-F0AF-4099-B5A4-597B87CE9F8D}"/>
+                <a16:creationId xmlns:a16="http://schemas.microsoft.com/office/drawing/2014/main" id="{8F435878-8476-4B49-9D19-A959A7572C6D}"/>
               </a:ext>
             </a:extLst>
           </p:cNvPr>
@@ -12888,7 +12978,7 @@
           <p:cNvPr id="20" name="">
             <a:extLst xmlns:a="http://schemas.openxmlformats.org/drawingml/2006/main">
               <a:ext uri="{FF2B5EF4-FFF2-40B4-BE49-F238E27FC236}">
-                <a16:creationId xmlns:a16="http://schemas.microsoft.com/office/drawing/2014/main" id="{C7F972C6-B94A-4F1C-A6C7-51DE4D420237}"/>
+                <a16:creationId xmlns:a16="http://schemas.microsoft.com/office/drawing/2014/main" id="{2BA052CC-FA41-4961-BAC5-13B164A7EE2C}"/>
               </a:ext>
             </a:extLst>
           </p:cNvPr>
@@ -12954,7 +13044,7 @@
           <p:nvPr/>
         </p:nvPicPr>
         <p:blipFill>
-          <a:blip xmlns:r="http://schemas.openxmlformats.org/officeDocument/2006/relationships" xmlns:a="http://schemas.openxmlformats.org/drawingml/2006/main" r:embed="R4165b088ec76461a"/>
+          <a:blip xmlns:r="http://schemas.openxmlformats.org/officeDocument/2006/relationships" xmlns:a="http://schemas.openxmlformats.org/drawingml/2006/main" r:embed="R75da0b16dd4a4c9b"/>
           <a:stretch xmlns:a="http://schemas.openxmlformats.org/drawingml/2006/main"/>
         </p:blipFill>
         <p:spPr>
@@ -12972,7 +13062,7 @@
           <p:cNvPr id="22" name="footer-rule-18">
             <a:extLst xmlns:a="http://schemas.openxmlformats.org/drawingml/2006/main">
               <a:ext uri="{FF2B5EF4-FFF2-40B4-BE49-F238E27FC236}">
-                <a16:creationId xmlns:a16="http://schemas.microsoft.com/office/drawing/2014/main" id="{A574CC08-81A5-4211-9BCF-8ABADBD6E8E1}"/>
+                <a16:creationId xmlns:a16="http://schemas.microsoft.com/office/drawing/2014/main" id="{15DE2811-01B9-4079-B7DC-7482FC0EB40F}"/>
               </a:ext>
             </a:extLst>
           </p:cNvPr>
@@ -13003,7 +13093,7 @@
           <p:cNvPr id="23" name="footer-label-18">
             <a:extLst xmlns:a="http://schemas.openxmlformats.org/drawingml/2006/main">
               <a:ext uri="{FF2B5EF4-FFF2-40B4-BE49-F238E27FC236}">
-                <a16:creationId xmlns:a16="http://schemas.microsoft.com/office/drawing/2014/main" id="{A3F31A77-3C08-4550-8B7E-3021EE467BF5}"/>
+                <a16:creationId xmlns:a16="http://schemas.microsoft.com/office/drawing/2014/main" id="{CC1FFF01-164B-4710-8295-06FF6D12E265}"/>
               </a:ext>
             </a:extLst>
           </p:cNvPr>
@@ -13065,7 +13155,7 @@
           <p:cNvPr id="24" name="footer-page-18">
             <a:extLst xmlns:a="http://schemas.openxmlformats.org/drawingml/2006/main">
               <a:ext uri="{FF2B5EF4-FFF2-40B4-BE49-F238E27FC236}">
-                <a16:creationId xmlns:a16="http://schemas.microsoft.com/office/drawing/2014/main" id="{AD8B8234-E162-434E-9472-BCCB6548225C}"/>
+                <a16:creationId xmlns:a16="http://schemas.microsoft.com/office/drawing/2014/main" id="{16516CE7-D8FA-4131-B496-FA32F708666F}"/>
               </a:ext>
             </a:extLst>
           </p:cNvPr>
@@ -13125,7 +13215,7 @@
     </p:spTree>
     <p:extLst>
       <p:ext uri="{BB962C8B-B14F-4D97-AF65-F5344CB8AC3E}">
-        <p14:creationId xmlns:p14="http://schemas.microsoft.com/office/powerpoint/2010/main" val="400683721"/>
+        <p14:creationId xmlns:p14="http://schemas.microsoft.com/office/powerpoint/2010/main" val="1387986993"/>
       </p:ext>
     </p:extLst>
   </p:cSld>
@@ -13156,7 +13246,7 @@
           <p:cNvPr id="20" name="side-accent-2">
             <a:extLst xmlns:a="http://schemas.openxmlformats.org/drawingml/2006/main">
               <a:ext uri="{FF2B5EF4-FFF2-40B4-BE49-F238E27FC236}">
-                <a16:creationId xmlns:a16="http://schemas.microsoft.com/office/drawing/2014/main" id="{5F39FBC6-F0FC-4823-BE4A-0E19733C5907}"/>
+                <a16:creationId xmlns:a16="http://schemas.microsoft.com/office/drawing/2014/main" id="{90C913AB-D02E-4A81-B8E6-52631815FB1C}"/>
               </a:ext>
             </a:extLst>
           </p:cNvPr>
@@ -13187,7 +13277,7 @@
           <p:cNvPr id="2" name="kicker-2">
             <a:extLst xmlns:a="http://schemas.openxmlformats.org/drawingml/2006/main">
               <a:ext uri="{FF2B5EF4-FFF2-40B4-BE49-F238E27FC236}">
-                <a16:creationId xmlns:a16="http://schemas.microsoft.com/office/drawing/2014/main" id="{7DEF3BDE-3DDC-499D-81CD-416DA8A1429D}"/>
+                <a16:creationId xmlns:a16="http://schemas.microsoft.com/office/drawing/2014/main" id="{79F52DDD-1208-4533-B70A-F63DB1180052}"/>
               </a:ext>
             </a:extLst>
           </p:cNvPr>
@@ -13249,7 +13339,7 @@
           <p:cNvPr id="3" name="title-2">
             <a:extLst xmlns:a="http://schemas.openxmlformats.org/drawingml/2006/main">
               <a:ext uri="{FF2B5EF4-FFF2-40B4-BE49-F238E27FC236}">
-                <a16:creationId xmlns:a16="http://schemas.microsoft.com/office/drawing/2014/main" id="{90374745-30E2-4AF2-882D-6397C57AF251}"/>
+                <a16:creationId xmlns:a16="http://schemas.microsoft.com/office/drawing/2014/main" id="{EB9D5F0C-80F0-49CD-A30B-18A99C16BC5C}"/>
               </a:ext>
             </a:extLst>
           </p:cNvPr>
@@ -13311,7 +13401,7 @@
           <p:cNvPr id="4" name="">
             <a:extLst xmlns:a="http://schemas.openxmlformats.org/drawingml/2006/main">
               <a:ext uri="{FF2B5EF4-FFF2-40B4-BE49-F238E27FC236}">
-                <a16:creationId xmlns:a16="http://schemas.microsoft.com/office/drawing/2014/main" id="{3396C66E-A6DF-45E6-A12D-09507F0D5D32}"/>
+                <a16:creationId xmlns:a16="http://schemas.microsoft.com/office/drawing/2014/main" id="{0B1B3F3E-AB6B-4C3B-88AB-639643E5E012}"/>
               </a:ext>
             </a:extLst>
           </p:cNvPr>
@@ -13373,7 +13463,7 @@
           <p:cNvPr id="5" name="">
             <a:extLst xmlns:a="http://schemas.openxmlformats.org/drawingml/2006/main">
               <a:ext uri="{FF2B5EF4-FFF2-40B4-BE49-F238E27FC236}">
-                <a16:creationId xmlns:a16="http://schemas.microsoft.com/office/drawing/2014/main" id="{EDC79006-CA36-4A20-8E0D-B779C6CDC396}"/>
+                <a16:creationId xmlns:a16="http://schemas.microsoft.com/office/drawing/2014/main" id="{F04D2EE5-964C-41D5-B6F4-3D9FF625C587}"/>
               </a:ext>
             </a:extLst>
           </p:cNvPr>
@@ -13435,7 +13525,7 @@
           <p:cNvPr id="6" name="">
             <a:extLst xmlns:a="http://schemas.openxmlformats.org/drawingml/2006/main">
               <a:ext uri="{FF2B5EF4-FFF2-40B4-BE49-F238E27FC236}">
-                <a16:creationId xmlns:a16="http://schemas.microsoft.com/office/drawing/2014/main" id="{1F116ECE-2DAB-4861-8B53-63DD86646F4C}"/>
+                <a16:creationId xmlns:a16="http://schemas.microsoft.com/office/drawing/2014/main" id="{CE085190-6672-4A24-AAA1-B9AF36DD62EB}"/>
               </a:ext>
             </a:extLst>
           </p:cNvPr>
@@ -13466,7 +13556,7 @@
           <p:cNvPr id="7" name="">
             <a:extLst xmlns:a="http://schemas.openxmlformats.org/drawingml/2006/main">
               <a:ext uri="{FF2B5EF4-FFF2-40B4-BE49-F238E27FC236}">
-                <a16:creationId xmlns:a16="http://schemas.microsoft.com/office/drawing/2014/main" id="{73223B30-748D-4182-B0BD-3277B26924B1}"/>
+                <a16:creationId xmlns:a16="http://schemas.microsoft.com/office/drawing/2014/main" id="{5C7EB11B-1A86-4994-9C3C-D9D0E03B7B3F}"/>
               </a:ext>
             </a:extLst>
           </p:cNvPr>
@@ -13528,7 +13618,7 @@
           <p:cNvPr id="8" name="">
             <a:extLst xmlns:a="http://schemas.openxmlformats.org/drawingml/2006/main">
               <a:ext uri="{FF2B5EF4-FFF2-40B4-BE49-F238E27FC236}">
-                <a16:creationId xmlns:a16="http://schemas.microsoft.com/office/drawing/2014/main" id="{9325DA1A-C65D-4CBA-8728-73AC0544B4F9}"/>
+                <a16:creationId xmlns:a16="http://schemas.microsoft.com/office/drawing/2014/main" id="{C5EB030F-7188-4E4B-91CB-816E72412EEB}"/>
               </a:ext>
             </a:extLst>
           </p:cNvPr>
@@ -13590,7 +13680,7 @@
           <p:cNvPr id="9" name="">
             <a:extLst xmlns:a="http://schemas.openxmlformats.org/drawingml/2006/main">
               <a:ext uri="{FF2B5EF4-FFF2-40B4-BE49-F238E27FC236}">
-                <a16:creationId xmlns:a16="http://schemas.microsoft.com/office/drawing/2014/main" id="{035E9EBA-4C02-494C-8E25-8FCFDAE37861}"/>
+                <a16:creationId xmlns:a16="http://schemas.microsoft.com/office/drawing/2014/main" id="{9AE3EBE2-3A00-4599-8E5C-50A9A99E36F3}"/>
               </a:ext>
             </a:extLst>
           </p:cNvPr>
@@ -13621,7 +13711,7 @@
           <p:cNvPr id="10" name="">
             <a:extLst xmlns:a="http://schemas.openxmlformats.org/drawingml/2006/main">
               <a:ext uri="{FF2B5EF4-FFF2-40B4-BE49-F238E27FC236}">
-                <a16:creationId xmlns:a16="http://schemas.microsoft.com/office/drawing/2014/main" id="{4DE751BB-0BAD-4F71-BBE2-2A30DCEF567C}"/>
+                <a16:creationId xmlns:a16="http://schemas.microsoft.com/office/drawing/2014/main" id="{00EFF9BD-36AE-4F08-90D0-E0290824375E}"/>
               </a:ext>
             </a:extLst>
           </p:cNvPr>
@@ -13683,7 +13773,7 @@
           <p:cNvPr id="11" name="">
             <a:extLst xmlns:a="http://schemas.openxmlformats.org/drawingml/2006/main">
               <a:ext uri="{FF2B5EF4-FFF2-40B4-BE49-F238E27FC236}">
-                <a16:creationId xmlns:a16="http://schemas.microsoft.com/office/drawing/2014/main" id="{6AC8BECF-1EDA-4AC4-84BC-F082EC4B77D2}"/>
+                <a16:creationId xmlns:a16="http://schemas.microsoft.com/office/drawing/2014/main" id="{536139E8-8201-4B44-9177-783F62BD1DFE}"/>
               </a:ext>
             </a:extLst>
           </p:cNvPr>
@@ -13745,7 +13835,7 @@
           <p:cNvPr id="12" name="">
             <a:extLst xmlns:a="http://schemas.openxmlformats.org/drawingml/2006/main">
               <a:ext uri="{FF2B5EF4-FFF2-40B4-BE49-F238E27FC236}">
-                <a16:creationId xmlns:a16="http://schemas.microsoft.com/office/drawing/2014/main" id="{7CC74EC9-99E4-4FE5-AA70-92942AB528B9}"/>
+                <a16:creationId xmlns:a16="http://schemas.microsoft.com/office/drawing/2014/main" id="{F8C90FD1-5290-4A15-B281-347D9765095D}"/>
               </a:ext>
             </a:extLst>
           </p:cNvPr>
@@ -13776,7 +13866,7 @@
           <p:cNvPr id="13" name="">
             <a:extLst xmlns:a="http://schemas.openxmlformats.org/drawingml/2006/main">
               <a:ext uri="{FF2B5EF4-FFF2-40B4-BE49-F238E27FC236}">
-                <a16:creationId xmlns:a16="http://schemas.microsoft.com/office/drawing/2014/main" id="{A7E579B7-4511-44EF-86C5-F68BFFAD802F}"/>
+                <a16:creationId xmlns:a16="http://schemas.microsoft.com/office/drawing/2014/main" id="{5764BFA5-53DC-448E-B40D-49DB3E958782}"/>
               </a:ext>
             </a:extLst>
           </p:cNvPr>
@@ -13838,7 +13928,7 @@
           <p:cNvPr id="14" name="outcome-mark">
             <a:extLst xmlns:a="http://schemas.openxmlformats.org/drawingml/2006/main">
               <a:ext uri="{FF2B5EF4-FFF2-40B4-BE49-F238E27FC236}">
-                <a16:creationId xmlns:a16="http://schemas.microsoft.com/office/drawing/2014/main" id="{2BF0A207-69E3-4A53-AEE7-3497879A0C92}"/>
+                <a16:creationId xmlns:a16="http://schemas.microsoft.com/office/drawing/2014/main" id="{A2EB1299-A122-4124-B9C1-A4EE94D0369E}"/>
               </a:ext>
             </a:extLst>
           </p:cNvPr>
@@ -13873,7 +13963,7 @@
           <p:cNvPr id="15" name="">
             <a:extLst xmlns:a="http://schemas.openxmlformats.org/drawingml/2006/main">
               <a:ext uri="{FF2B5EF4-FFF2-40B4-BE49-F238E27FC236}">
-                <a16:creationId xmlns:a16="http://schemas.microsoft.com/office/drawing/2014/main" id="{7FB6C5AC-4B43-4A28-8AE4-30B6153497C9}"/>
+                <a16:creationId xmlns:a16="http://schemas.microsoft.com/office/drawing/2014/main" id="{B483B69E-5E1D-426F-93D0-1A6D97F28078}"/>
               </a:ext>
             </a:extLst>
           </p:cNvPr>
@@ -13935,7 +14025,7 @@
           <p:cNvPr id="16" name="">
             <a:extLst xmlns:a="http://schemas.openxmlformats.org/drawingml/2006/main">
               <a:ext uri="{FF2B5EF4-FFF2-40B4-BE49-F238E27FC236}">
-                <a16:creationId xmlns:a16="http://schemas.microsoft.com/office/drawing/2014/main" id="{AA367C67-B746-4D21-A501-C1259EAB8D35}"/>
+                <a16:creationId xmlns:a16="http://schemas.microsoft.com/office/drawing/2014/main" id="{951D4458-5D35-436B-89C5-B5EF44CDA8A6}"/>
               </a:ext>
             </a:extLst>
           </p:cNvPr>
@@ -14024,7 +14114,7 @@
           <p:cNvPr id="17" name="footer-rule-2">
             <a:extLst xmlns:a="http://schemas.openxmlformats.org/drawingml/2006/main">
               <a:ext uri="{FF2B5EF4-FFF2-40B4-BE49-F238E27FC236}">
-                <a16:creationId xmlns:a16="http://schemas.microsoft.com/office/drawing/2014/main" id="{FBC58066-7492-4B03-A47E-84A84A2D9DB1}"/>
+                <a16:creationId xmlns:a16="http://schemas.microsoft.com/office/drawing/2014/main" id="{B91F8989-07C4-4E89-9F66-6A26233114CB}"/>
               </a:ext>
             </a:extLst>
           </p:cNvPr>
@@ -14055,7 +14145,7 @@
           <p:cNvPr id="18" name="footer-label-2">
             <a:extLst xmlns:a="http://schemas.openxmlformats.org/drawingml/2006/main">
               <a:ext uri="{FF2B5EF4-FFF2-40B4-BE49-F238E27FC236}">
-                <a16:creationId xmlns:a16="http://schemas.microsoft.com/office/drawing/2014/main" id="{8C3AC631-3BC6-441F-83FC-1D1BAF5FF067}"/>
+                <a16:creationId xmlns:a16="http://schemas.microsoft.com/office/drawing/2014/main" id="{B59D0F33-7C62-447B-A999-AD5434611FAE}"/>
               </a:ext>
             </a:extLst>
           </p:cNvPr>
@@ -14117,7 +14207,7 @@
           <p:cNvPr id="19" name="footer-page-2">
             <a:extLst xmlns:a="http://schemas.openxmlformats.org/drawingml/2006/main">
               <a:ext uri="{FF2B5EF4-FFF2-40B4-BE49-F238E27FC236}">
-                <a16:creationId xmlns:a16="http://schemas.microsoft.com/office/drawing/2014/main" id="{1ACAE5E0-4835-46C7-8D92-CCA682743547}"/>
+                <a16:creationId xmlns:a16="http://schemas.microsoft.com/office/drawing/2014/main" id="{3145BB64-874E-4007-B367-1B02B8FB9536}"/>
               </a:ext>
             </a:extLst>
           </p:cNvPr>
@@ -14177,7 +14267,7 @@
     </p:spTree>
     <p:extLst>
       <p:ext uri="{BB962C8B-B14F-4D97-AF65-F5344CB8AC3E}">
-        <p14:creationId xmlns:p14="http://schemas.microsoft.com/office/powerpoint/2010/main" val="1076929303"/>
+        <p14:creationId xmlns:p14="http://schemas.microsoft.com/office/powerpoint/2010/main" val="1251409292"/>
       </p:ext>
     </p:extLst>
   </p:cSld>
@@ -14208,7 +14298,7 @@
           <p:cNvPr id="31" name="side-accent-3">
             <a:extLst xmlns:a="http://schemas.openxmlformats.org/drawingml/2006/main">
               <a:ext uri="{FF2B5EF4-FFF2-40B4-BE49-F238E27FC236}">
-                <a16:creationId xmlns:a16="http://schemas.microsoft.com/office/drawing/2014/main" id="{B6E16A85-B711-417F-9EE7-BC0C2050DBAF}"/>
+                <a16:creationId xmlns:a16="http://schemas.microsoft.com/office/drawing/2014/main" id="{2CA21708-A7F2-4AC6-AF02-486E7F5D6B19}"/>
               </a:ext>
             </a:extLst>
           </p:cNvPr>
@@ -14239,7 +14329,7 @@
           <p:cNvPr id="2" name="kicker-3">
             <a:extLst xmlns:a="http://schemas.openxmlformats.org/drawingml/2006/main">
               <a:ext uri="{FF2B5EF4-FFF2-40B4-BE49-F238E27FC236}">
-                <a16:creationId xmlns:a16="http://schemas.microsoft.com/office/drawing/2014/main" id="{87D7E922-E866-4959-86EA-6E1CCCBFA69E}"/>
+                <a16:creationId xmlns:a16="http://schemas.microsoft.com/office/drawing/2014/main" id="{C9B4A20E-B8C9-4BB5-ABD0-635A00C8F280}"/>
               </a:ext>
             </a:extLst>
           </p:cNvPr>
@@ -14301,7 +14391,7 @@
           <p:cNvPr id="3" name="title-3">
             <a:extLst xmlns:a="http://schemas.openxmlformats.org/drawingml/2006/main">
               <a:ext uri="{FF2B5EF4-FFF2-40B4-BE49-F238E27FC236}">
-                <a16:creationId xmlns:a16="http://schemas.microsoft.com/office/drawing/2014/main" id="{16A8A918-2043-4AD8-ABB1-B1AD3D52715E}"/>
+                <a16:creationId xmlns:a16="http://schemas.microsoft.com/office/drawing/2014/main" id="{5B3F2F41-C9EE-4ECB-8BEE-FE03BA82A89F}"/>
               </a:ext>
             </a:extLst>
           </p:cNvPr>
@@ -14363,7 +14453,7 @@
           <p:cNvPr id="4" name="">
             <a:extLst xmlns:a="http://schemas.openxmlformats.org/drawingml/2006/main">
               <a:ext uri="{FF2B5EF4-FFF2-40B4-BE49-F238E27FC236}">
-                <a16:creationId xmlns:a16="http://schemas.microsoft.com/office/drawing/2014/main" id="{8C85A71B-8B0A-405A-B2CF-5EC47BA06184}"/>
+                <a16:creationId xmlns:a16="http://schemas.microsoft.com/office/drawing/2014/main" id="{2918F919-5465-4192-AB78-BFF34936CB17}"/>
               </a:ext>
             </a:extLst>
           </p:cNvPr>
@@ -14425,7 +14515,7 @@
           <p:cNvPr id="5" name="system-function-line">
             <a:extLst xmlns:a="http://schemas.openxmlformats.org/drawingml/2006/main">
               <a:ext uri="{FF2B5EF4-FFF2-40B4-BE49-F238E27FC236}">
-                <a16:creationId xmlns:a16="http://schemas.microsoft.com/office/drawing/2014/main" id="{03743DEE-F1B2-4293-B7C6-AE23B6D1F89D}"/>
+                <a16:creationId xmlns:a16="http://schemas.microsoft.com/office/drawing/2014/main" id="{3432AE87-C2EF-4150-86E5-EBEE3B8EF935}"/>
               </a:ext>
             </a:extLst>
           </p:cNvPr>
@@ -14456,7 +14546,7 @@
           <p:cNvPr id="6" name="">
             <a:extLst xmlns:a="http://schemas.openxmlformats.org/drawingml/2006/main">
               <a:ext uri="{FF2B5EF4-FFF2-40B4-BE49-F238E27FC236}">
-                <a16:creationId xmlns:a16="http://schemas.microsoft.com/office/drawing/2014/main" id="{E4BFF412-7A43-4C6E-B70B-D1BCAA1CBE07}"/>
+                <a16:creationId xmlns:a16="http://schemas.microsoft.com/office/drawing/2014/main" id="{130D9423-2D24-478B-87FC-33314258A529}"/>
               </a:ext>
             </a:extLst>
           </p:cNvPr>
@@ -14487,7 +14577,7 @@
           <p:cNvPr id="7" name="">
             <a:extLst xmlns:a="http://schemas.openxmlformats.org/drawingml/2006/main">
               <a:ext uri="{FF2B5EF4-FFF2-40B4-BE49-F238E27FC236}">
-                <a16:creationId xmlns:a16="http://schemas.microsoft.com/office/drawing/2014/main" id="{76D7BB26-306C-45BB-8226-57AED507A3E2}"/>
+                <a16:creationId xmlns:a16="http://schemas.microsoft.com/office/drawing/2014/main" id="{B77EC0CD-AE28-4FC7-B443-EA02DBB59239}"/>
               </a:ext>
             </a:extLst>
           </p:cNvPr>
@@ -14549,7 +14639,7 @@
           <p:cNvPr id="8" name="">
             <a:extLst xmlns:a="http://schemas.openxmlformats.org/drawingml/2006/main">
               <a:ext uri="{FF2B5EF4-FFF2-40B4-BE49-F238E27FC236}">
-                <a16:creationId xmlns:a16="http://schemas.microsoft.com/office/drawing/2014/main" id="{235EAEF6-7AF3-4E22-A8D7-CD9D8B3B7DAE}"/>
+                <a16:creationId xmlns:a16="http://schemas.microsoft.com/office/drawing/2014/main" id="{B00587F6-51FB-4F4B-98B0-46881C001C00}"/>
               </a:ext>
             </a:extLst>
           </p:cNvPr>
@@ -14611,7 +14701,7 @@
           <p:cNvPr id="9" name="">
             <a:extLst xmlns:a="http://schemas.openxmlformats.org/drawingml/2006/main">
               <a:ext uri="{FF2B5EF4-FFF2-40B4-BE49-F238E27FC236}">
-                <a16:creationId xmlns:a16="http://schemas.microsoft.com/office/drawing/2014/main" id="{019688E4-48E5-404D-91D4-1C7A68C3707F}"/>
+                <a16:creationId xmlns:a16="http://schemas.microsoft.com/office/drawing/2014/main" id="{51FD4E91-7596-4A7C-BC41-73E2BAC22CA4}"/>
               </a:ext>
             </a:extLst>
           </p:cNvPr>
@@ -14673,7 +14763,7 @@
           <p:cNvPr id="10" name="">
             <a:extLst xmlns:a="http://schemas.openxmlformats.org/drawingml/2006/main">
               <a:ext uri="{FF2B5EF4-FFF2-40B4-BE49-F238E27FC236}">
-                <a16:creationId xmlns:a16="http://schemas.microsoft.com/office/drawing/2014/main" id="{B072F000-A35C-406D-8CB0-F5213AA78EC4}"/>
+                <a16:creationId xmlns:a16="http://schemas.microsoft.com/office/drawing/2014/main" id="{261C606F-7CD5-4B35-9348-B3293C669510}"/>
               </a:ext>
             </a:extLst>
           </p:cNvPr>
@@ -14704,7 +14794,7 @@
           <p:cNvPr id="11" name="">
             <a:extLst xmlns:a="http://schemas.openxmlformats.org/drawingml/2006/main">
               <a:ext uri="{FF2B5EF4-FFF2-40B4-BE49-F238E27FC236}">
-                <a16:creationId xmlns:a16="http://schemas.microsoft.com/office/drawing/2014/main" id="{446CEB7A-AA3A-4ABC-BA32-081E8BD56095}"/>
+                <a16:creationId xmlns:a16="http://schemas.microsoft.com/office/drawing/2014/main" id="{BDD1A03A-1494-4CCA-B2D4-F439C6F8D174}"/>
               </a:ext>
             </a:extLst>
           </p:cNvPr>
@@ -14766,7 +14856,7 @@
           <p:cNvPr id="12" name="">
             <a:extLst xmlns:a="http://schemas.openxmlformats.org/drawingml/2006/main">
               <a:ext uri="{FF2B5EF4-FFF2-40B4-BE49-F238E27FC236}">
-                <a16:creationId xmlns:a16="http://schemas.microsoft.com/office/drawing/2014/main" id="{894B0A28-334B-4C53-AEE0-F58AE48E258A}"/>
+                <a16:creationId xmlns:a16="http://schemas.microsoft.com/office/drawing/2014/main" id="{A55F4CBA-9B25-4546-919D-A6E72D5B7497}"/>
               </a:ext>
             </a:extLst>
           </p:cNvPr>
@@ -14828,7 +14918,7 @@
           <p:cNvPr id="13" name="">
             <a:extLst xmlns:a="http://schemas.openxmlformats.org/drawingml/2006/main">
               <a:ext uri="{FF2B5EF4-FFF2-40B4-BE49-F238E27FC236}">
-                <a16:creationId xmlns:a16="http://schemas.microsoft.com/office/drawing/2014/main" id="{870DB1E7-5A75-406A-A710-4A16D9799786}"/>
+                <a16:creationId xmlns:a16="http://schemas.microsoft.com/office/drawing/2014/main" id="{175EF50C-5014-4296-805A-DF84DA8058DE}"/>
               </a:ext>
             </a:extLst>
           </p:cNvPr>
@@ -14890,7 +14980,7 @@
           <p:cNvPr id="14" name="">
             <a:extLst xmlns:a="http://schemas.openxmlformats.org/drawingml/2006/main">
               <a:ext uri="{FF2B5EF4-FFF2-40B4-BE49-F238E27FC236}">
-                <a16:creationId xmlns:a16="http://schemas.microsoft.com/office/drawing/2014/main" id="{DCAA1765-ACB5-4028-9997-B6CE23F09F3C}"/>
+                <a16:creationId xmlns:a16="http://schemas.microsoft.com/office/drawing/2014/main" id="{B4D350B7-902E-433B-A5A9-ED02AB9F460E}"/>
               </a:ext>
             </a:extLst>
           </p:cNvPr>
@@ -14921,7 +15011,7 @@
           <p:cNvPr id="15" name="">
             <a:extLst xmlns:a="http://schemas.openxmlformats.org/drawingml/2006/main">
               <a:ext uri="{FF2B5EF4-FFF2-40B4-BE49-F238E27FC236}">
-                <a16:creationId xmlns:a16="http://schemas.microsoft.com/office/drawing/2014/main" id="{4C9588DA-690D-4D19-A441-18DBB4EFF908}"/>
+                <a16:creationId xmlns:a16="http://schemas.microsoft.com/office/drawing/2014/main" id="{65F367C0-A700-4CEF-931C-53A7980B6D78}"/>
               </a:ext>
             </a:extLst>
           </p:cNvPr>
@@ -14983,7 +15073,7 @@
           <p:cNvPr id="16" name="">
             <a:extLst xmlns:a="http://schemas.openxmlformats.org/drawingml/2006/main">
               <a:ext uri="{FF2B5EF4-FFF2-40B4-BE49-F238E27FC236}">
-                <a16:creationId xmlns:a16="http://schemas.microsoft.com/office/drawing/2014/main" id="{5B3E96CB-0043-472B-ADAA-962E7F979589}"/>
+                <a16:creationId xmlns:a16="http://schemas.microsoft.com/office/drawing/2014/main" id="{76C50CB8-EB7B-46B0-B1D6-5E0306D9EA2E}"/>
               </a:ext>
             </a:extLst>
           </p:cNvPr>
@@ -15045,7 +15135,7 @@
           <p:cNvPr id="17" name="">
             <a:extLst xmlns:a="http://schemas.openxmlformats.org/drawingml/2006/main">
               <a:ext uri="{FF2B5EF4-FFF2-40B4-BE49-F238E27FC236}">
-                <a16:creationId xmlns:a16="http://schemas.microsoft.com/office/drawing/2014/main" id="{251320BB-309E-4A67-AB5E-31B7C3EDD1DB}"/>
+                <a16:creationId xmlns:a16="http://schemas.microsoft.com/office/drawing/2014/main" id="{01C8707F-4BA3-4CC3-99E4-579471007C1F}"/>
               </a:ext>
             </a:extLst>
           </p:cNvPr>
@@ -15107,7 +15197,7 @@
           <p:cNvPr id="18" name="">
             <a:extLst xmlns:a="http://schemas.openxmlformats.org/drawingml/2006/main">
               <a:ext uri="{FF2B5EF4-FFF2-40B4-BE49-F238E27FC236}">
-                <a16:creationId xmlns:a16="http://schemas.microsoft.com/office/drawing/2014/main" id="{EED0895E-7795-46D2-B343-54E51F59BE57}"/>
+                <a16:creationId xmlns:a16="http://schemas.microsoft.com/office/drawing/2014/main" id="{648A18F8-999A-4484-9A62-6C6E96C697BB}"/>
               </a:ext>
             </a:extLst>
           </p:cNvPr>
@@ -15138,7 +15228,7 @@
           <p:cNvPr id="19" name="">
             <a:extLst xmlns:a="http://schemas.openxmlformats.org/drawingml/2006/main">
               <a:ext uri="{FF2B5EF4-FFF2-40B4-BE49-F238E27FC236}">
-                <a16:creationId xmlns:a16="http://schemas.microsoft.com/office/drawing/2014/main" id="{04F2216A-BF31-470E-8023-63FBB4E2FA5C}"/>
+                <a16:creationId xmlns:a16="http://schemas.microsoft.com/office/drawing/2014/main" id="{BB740CF4-A738-48F1-B441-BB7AB5654A04}"/>
               </a:ext>
             </a:extLst>
           </p:cNvPr>
@@ -15200,7 +15290,7 @@
           <p:cNvPr id="20" name="">
             <a:extLst xmlns:a="http://schemas.openxmlformats.org/drawingml/2006/main">
               <a:ext uri="{FF2B5EF4-FFF2-40B4-BE49-F238E27FC236}">
-                <a16:creationId xmlns:a16="http://schemas.microsoft.com/office/drawing/2014/main" id="{9CB14D7C-05A9-48A9-870F-451A9D4A12D1}"/>
+                <a16:creationId xmlns:a16="http://schemas.microsoft.com/office/drawing/2014/main" id="{914F63E3-E31C-4E5F-9C95-13A97CCCB471}"/>
               </a:ext>
             </a:extLst>
           </p:cNvPr>
@@ -15262,7 +15352,7 @@
           <p:cNvPr id="21" name="">
             <a:extLst xmlns:a="http://schemas.openxmlformats.org/drawingml/2006/main">
               <a:ext uri="{FF2B5EF4-FFF2-40B4-BE49-F238E27FC236}">
-                <a16:creationId xmlns:a16="http://schemas.microsoft.com/office/drawing/2014/main" id="{9834CD60-8794-4C46-8C90-C4FF608ACF77}"/>
+                <a16:creationId xmlns:a16="http://schemas.microsoft.com/office/drawing/2014/main" id="{A191856D-B741-43A2-8A5C-9CE6AE8E5650}"/>
               </a:ext>
             </a:extLst>
           </p:cNvPr>
@@ -15324,7 +15414,7 @@
           <p:cNvPr id="22" name="">
             <a:extLst xmlns:a="http://schemas.openxmlformats.org/drawingml/2006/main">
               <a:ext uri="{FF2B5EF4-FFF2-40B4-BE49-F238E27FC236}">
-                <a16:creationId xmlns:a16="http://schemas.microsoft.com/office/drawing/2014/main" id="{1CC4DBD4-535B-43E7-A392-39DAE0E1E394}"/>
+                <a16:creationId xmlns:a16="http://schemas.microsoft.com/office/drawing/2014/main" id="{C4CFE5B4-8A74-43AA-AFF0-6B529E1523B4}"/>
               </a:ext>
             </a:extLst>
           </p:cNvPr>
@@ -15355,7 +15445,7 @@
           <p:cNvPr id="23" name="">
             <a:extLst xmlns:a="http://schemas.openxmlformats.org/drawingml/2006/main">
               <a:ext uri="{FF2B5EF4-FFF2-40B4-BE49-F238E27FC236}">
-                <a16:creationId xmlns:a16="http://schemas.microsoft.com/office/drawing/2014/main" id="{54AB5625-F3F1-49A9-8B4F-055953845B7B}"/>
+                <a16:creationId xmlns:a16="http://schemas.microsoft.com/office/drawing/2014/main" id="{25BD9445-4FB8-476E-A7AE-815715F42CDA}"/>
               </a:ext>
             </a:extLst>
           </p:cNvPr>
@@ -15417,7 +15507,7 @@
           <p:cNvPr id="24" name="">
             <a:extLst xmlns:a="http://schemas.openxmlformats.org/drawingml/2006/main">
               <a:ext uri="{FF2B5EF4-FFF2-40B4-BE49-F238E27FC236}">
-                <a16:creationId xmlns:a16="http://schemas.microsoft.com/office/drawing/2014/main" id="{ED31378E-9E0D-498F-A44B-6A2B5384CE30}"/>
+                <a16:creationId xmlns:a16="http://schemas.microsoft.com/office/drawing/2014/main" id="{80C3F508-8C66-467B-B225-89338E2526CE}"/>
               </a:ext>
             </a:extLst>
           </p:cNvPr>
@@ -15479,7 +15569,7 @@
           <p:cNvPr id="25" name="">
             <a:extLst xmlns:a="http://schemas.openxmlformats.org/drawingml/2006/main">
               <a:ext uri="{FF2B5EF4-FFF2-40B4-BE49-F238E27FC236}">
-                <a16:creationId xmlns:a16="http://schemas.microsoft.com/office/drawing/2014/main" id="{48CFF0C0-5D06-47FC-8F88-2E87346EE358}"/>
+                <a16:creationId xmlns:a16="http://schemas.microsoft.com/office/drawing/2014/main" id="{B6AEC43B-3D96-4BAB-8C37-90577AF69AF1}"/>
               </a:ext>
             </a:extLst>
           </p:cNvPr>
@@ -15541,7 +15631,7 @@
           <p:cNvPr id="26" name="">
             <a:extLst xmlns:a="http://schemas.openxmlformats.org/drawingml/2006/main">
               <a:ext uri="{FF2B5EF4-FFF2-40B4-BE49-F238E27FC236}">
-                <a16:creationId xmlns:a16="http://schemas.microsoft.com/office/drawing/2014/main" id="{C5E30495-B203-4BE0-91F1-AADEA66EB7E4}"/>
+                <a16:creationId xmlns:a16="http://schemas.microsoft.com/office/drawing/2014/main" id="{F1FD9F10-FF35-4C24-A388-8CBEFAF40FBE}"/>
               </a:ext>
             </a:extLst>
           </p:cNvPr>
@@ -15574,7 +15664,7 @@
           <p:cNvPr id="27" name="">
             <a:extLst xmlns:a="http://schemas.openxmlformats.org/drawingml/2006/main">
               <a:ext uri="{FF2B5EF4-FFF2-40B4-BE49-F238E27FC236}">
-                <a16:creationId xmlns:a16="http://schemas.microsoft.com/office/drawing/2014/main" id="{7D1F2B51-1E9A-4B99-B39E-6E60E433ED2E}"/>
+                <a16:creationId xmlns:a16="http://schemas.microsoft.com/office/drawing/2014/main" id="{2DF3A1CE-FDF9-45B6-95C3-2DC9959F1B85}"/>
               </a:ext>
             </a:extLst>
           </p:cNvPr>
@@ -15636,7 +15726,7 @@
           <p:cNvPr id="28" name="footer-rule-3">
             <a:extLst xmlns:a="http://schemas.openxmlformats.org/drawingml/2006/main">
               <a:ext uri="{FF2B5EF4-FFF2-40B4-BE49-F238E27FC236}">
-                <a16:creationId xmlns:a16="http://schemas.microsoft.com/office/drawing/2014/main" id="{882D1DA0-55F0-460E-B522-196A4F5E2903}"/>
+                <a16:creationId xmlns:a16="http://schemas.microsoft.com/office/drawing/2014/main" id="{BEF90C3C-A455-4FF1-9DB9-919973D3720E}"/>
               </a:ext>
             </a:extLst>
           </p:cNvPr>
@@ -15667,7 +15757,7 @@
           <p:cNvPr id="29" name="footer-label-3">
             <a:extLst xmlns:a="http://schemas.openxmlformats.org/drawingml/2006/main">
               <a:ext uri="{FF2B5EF4-FFF2-40B4-BE49-F238E27FC236}">
-                <a16:creationId xmlns:a16="http://schemas.microsoft.com/office/drawing/2014/main" id="{CE04E8D3-EBE6-4849-9F9C-227325324EA3}"/>
+                <a16:creationId xmlns:a16="http://schemas.microsoft.com/office/drawing/2014/main" id="{EE5816C2-B1DF-4BC4-AA2C-E48F149F4458}"/>
               </a:ext>
             </a:extLst>
           </p:cNvPr>
@@ -15729,7 +15819,7 @@
           <p:cNvPr id="30" name="footer-page-3">
             <a:extLst xmlns:a="http://schemas.openxmlformats.org/drawingml/2006/main">
               <a:ext uri="{FF2B5EF4-FFF2-40B4-BE49-F238E27FC236}">
-                <a16:creationId xmlns:a16="http://schemas.microsoft.com/office/drawing/2014/main" id="{26BC1363-FA26-400F-A2EC-9623E3B8436C}"/>
+                <a16:creationId xmlns:a16="http://schemas.microsoft.com/office/drawing/2014/main" id="{45337452-9BAC-4539-BA8C-D816AEFF58F6}"/>
               </a:ext>
             </a:extLst>
           </p:cNvPr>
@@ -15789,7 +15879,7 @@
     </p:spTree>
     <p:extLst>
       <p:ext uri="{BB962C8B-B14F-4D97-AF65-F5344CB8AC3E}">
-        <p14:creationId xmlns:p14="http://schemas.microsoft.com/office/powerpoint/2010/main" val="2075107788"/>
+        <p14:creationId xmlns:p14="http://schemas.microsoft.com/office/powerpoint/2010/main" val="1621465530"/>
       </p:ext>
     </p:extLst>
   </p:cSld>
@@ -15820,7 +15910,7 @@
           <p:cNvPr id="28" name="side-accent-4">
             <a:extLst xmlns:a="http://schemas.openxmlformats.org/drawingml/2006/main">
               <a:ext uri="{FF2B5EF4-FFF2-40B4-BE49-F238E27FC236}">
-                <a16:creationId xmlns:a16="http://schemas.microsoft.com/office/drawing/2014/main" id="{C230977E-6D11-459F-98A4-8EB12ED7BDC3}"/>
+                <a16:creationId xmlns:a16="http://schemas.microsoft.com/office/drawing/2014/main" id="{AE78482B-612F-4F8F-B66C-5869C03A3987}"/>
               </a:ext>
             </a:extLst>
           </p:cNvPr>
@@ -15851,7 +15941,7 @@
           <p:cNvPr id="2" name="kicker-4">
             <a:extLst xmlns:a="http://schemas.openxmlformats.org/drawingml/2006/main">
               <a:ext uri="{FF2B5EF4-FFF2-40B4-BE49-F238E27FC236}">
-                <a16:creationId xmlns:a16="http://schemas.microsoft.com/office/drawing/2014/main" id="{9989BFA6-6AF8-489D-80EE-A735B4A64EFA}"/>
+                <a16:creationId xmlns:a16="http://schemas.microsoft.com/office/drawing/2014/main" id="{FFE4E09A-0C41-4055-B527-C3A90B1E480F}"/>
               </a:ext>
             </a:extLst>
           </p:cNvPr>
@@ -15913,7 +16003,7 @@
           <p:cNvPr id="3" name="title-4">
             <a:extLst xmlns:a="http://schemas.openxmlformats.org/drawingml/2006/main">
               <a:ext uri="{FF2B5EF4-FFF2-40B4-BE49-F238E27FC236}">
-                <a16:creationId xmlns:a16="http://schemas.microsoft.com/office/drawing/2014/main" id="{81BF8EC9-61F9-4D41-974A-F3569458C3CB}"/>
+                <a16:creationId xmlns:a16="http://schemas.microsoft.com/office/drawing/2014/main" id="{99A87F67-BD24-4E07-9D11-E9545AFC83A7}"/>
               </a:ext>
             </a:extLst>
           </p:cNvPr>
@@ -15975,7 +16065,7 @@
           <p:cNvPr id="4" name="">
             <a:extLst xmlns:a="http://schemas.openxmlformats.org/drawingml/2006/main">
               <a:ext uri="{FF2B5EF4-FFF2-40B4-BE49-F238E27FC236}">
-                <a16:creationId xmlns:a16="http://schemas.microsoft.com/office/drawing/2014/main" id="{86371B4C-583F-4619-AD4F-37E9ABCBEAC1}"/>
+                <a16:creationId xmlns:a16="http://schemas.microsoft.com/office/drawing/2014/main" id="{B990C9F2-9B15-42B9-B753-02E796EC17C9}"/>
               </a:ext>
             </a:extLst>
           </p:cNvPr>
@@ -16037,7 +16127,7 @@
           <p:cNvPr id="5" name="">
             <a:extLst xmlns:a="http://schemas.openxmlformats.org/drawingml/2006/main">
               <a:ext uri="{FF2B5EF4-FFF2-40B4-BE49-F238E27FC236}">
-                <a16:creationId xmlns:a16="http://schemas.microsoft.com/office/drawing/2014/main" id="{777FCC9B-FFF2-4911-A899-BCAAC7F19BE8}"/>
+                <a16:creationId xmlns:a16="http://schemas.microsoft.com/office/drawing/2014/main" id="{EA43E6E8-FD95-4669-AC5C-2C65CD775085}"/>
               </a:ext>
             </a:extLst>
           </p:cNvPr>
@@ -16099,7 +16189,7 @@
           <p:cNvPr id="6" name="">
             <a:extLst xmlns:a="http://schemas.openxmlformats.org/drawingml/2006/main">
               <a:ext uri="{FF2B5EF4-FFF2-40B4-BE49-F238E27FC236}">
-                <a16:creationId xmlns:a16="http://schemas.microsoft.com/office/drawing/2014/main" id="{13E49561-01FE-4F87-B64B-0E852C6802C0}"/>
+                <a16:creationId xmlns:a16="http://schemas.microsoft.com/office/drawing/2014/main" id="{4E257C1E-202B-4DFB-A254-51AC8F4C9605}"/>
               </a:ext>
             </a:extLst>
           </p:cNvPr>
@@ -16161,7 +16251,7 @@
           <p:cNvPr id="7" name="">
             <a:extLst xmlns:a="http://schemas.openxmlformats.org/drawingml/2006/main">
               <a:ext uri="{FF2B5EF4-FFF2-40B4-BE49-F238E27FC236}">
-                <a16:creationId xmlns:a16="http://schemas.microsoft.com/office/drawing/2014/main" id="{A4CFF80E-0B24-4E25-9411-0FE488670D27}"/>
+                <a16:creationId xmlns:a16="http://schemas.microsoft.com/office/drawing/2014/main" id="{AC15891D-E1CB-4457-A45B-47FD8A61DFC3}"/>
               </a:ext>
             </a:extLst>
           </p:cNvPr>
@@ -16192,7 +16282,7 @@
           <p:cNvPr id="8" name="">
             <a:extLst xmlns:a="http://schemas.openxmlformats.org/drawingml/2006/main">
               <a:ext uri="{FF2B5EF4-FFF2-40B4-BE49-F238E27FC236}">
-                <a16:creationId xmlns:a16="http://schemas.microsoft.com/office/drawing/2014/main" id="{B7307CD9-CB3D-4481-90C2-38D60C0029B3}"/>
+                <a16:creationId xmlns:a16="http://schemas.microsoft.com/office/drawing/2014/main" id="{70A285DE-557E-4F7E-B92F-622BDB3A64FE}"/>
               </a:ext>
             </a:extLst>
           </p:cNvPr>
@@ -16254,7 +16344,7 @@
           <p:cNvPr id="9" name="">
             <a:extLst xmlns:a="http://schemas.openxmlformats.org/drawingml/2006/main">
               <a:ext uri="{FF2B5EF4-FFF2-40B4-BE49-F238E27FC236}">
-                <a16:creationId xmlns:a16="http://schemas.microsoft.com/office/drawing/2014/main" id="{D39D51CB-5182-4BEE-A9BC-74DAFBDED57C}"/>
+                <a16:creationId xmlns:a16="http://schemas.microsoft.com/office/drawing/2014/main" id="{1F159A70-B682-4AA2-BD4D-6DF24EE154F2}"/>
               </a:ext>
             </a:extLst>
           </p:cNvPr>
@@ -16316,7 +16406,7 @@
           <p:cNvPr id="10" name="">
             <a:extLst xmlns:a="http://schemas.openxmlformats.org/drawingml/2006/main">
               <a:ext uri="{FF2B5EF4-FFF2-40B4-BE49-F238E27FC236}">
-                <a16:creationId xmlns:a16="http://schemas.microsoft.com/office/drawing/2014/main" id="{E556A328-3272-4503-BB64-A1B1A7DC7A6D}"/>
+                <a16:creationId xmlns:a16="http://schemas.microsoft.com/office/drawing/2014/main" id="{CDDA271D-3A8B-49F1-AD7B-9773572DB7B6}"/>
               </a:ext>
             </a:extLst>
           </p:cNvPr>
@@ -16378,7 +16468,7 @@
           <p:cNvPr id="11" name="">
             <a:extLst xmlns:a="http://schemas.openxmlformats.org/drawingml/2006/main">
               <a:ext uri="{FF2B5EF4-FFF2-40B4-BE49-F238E27FC236}">
-                <a16:creationId xmlns:a16="http://schemas.microsoft.com/office/drawing/2014/main" id="{DE38777A-C360-4ECF-80F2-21E26A2960E3}"/>
+                <a16:creationId xmlns:a16="http://schemas.microsoft.com/office/drawing/2014/main" id="{2355C673-B68F-42E5-89DD-280C0F83D903}"/>
               </a:ext>
             </a:extLst>
           </p:cNvPr>
@@ -16409,7 +16499,7 @@
           <p:cNvPr id="12" name="">
             <a:extLst xmlns:a="http://schemas.openxmlformats.org/drawingml/2006/main">
               <a:ext uri="{FF2B5EF4-FFF2-40B4-BE49-F238E27FC236}">
-                <a16:creationId xmlns:a16="http://schemas.microsoft.com/office/drawing/2014/main" id="{BF864C6E-F80A-462B-8E5D-E243B37EB4BD}"/>
+                <a16:creationId xmlns:a16="http://schemas.microsoft.com/office/drawing/2014/main" id="{3D4DA36E-690D-4523-9AB5-CED121E07177}"/>
               </a:ext>
             </a:extLst>
           </p:cNvPr>
@@ -16471,7 +16561,7 @@
           <p:cNvPr id="13" name="">
             <a:extLst xmlns:a="http://schemas.openxmlformats.org/drawingml/2006/main">
               <a:ext uri="{FF2B5EF4-FFF2-40B4-BE49-F238E27FC236}">
-                <a16:creationId xmlns:a16="http://schemas.microsoft.com/office/drawing/2014/main" id="{030F5BD0-4C08-45CB-AA29-5B5B2FFDFDC0}"/>
+                <a16:creationId xmlns:a16="http://schemas.microsoft.com/office/drawing/2014/main" id="{16200368-2B20-45BE-B9C5-D130084DADA4}"/>
               </a:ext>
             </a:extLst>
           </p:cNvPr>
@@ -16533,7 +16623,7 @@
           <p:cNvPr id="14" name="">
             <a:extLst xmlns:a="http://schemas.openxmlformats.org/drawingml/2006/main">
               <a:ext uri="{FF2B5EF4-FFF2-40B4-BE49-F238E27FC236}">
-                <a16:creationId xmlns:a16="http://schemas.microsoft.com/office/drawing/2014/main" id="{10C5DA47-B5D3-45FF-8A03-361CC7247A6C}"/>
+                <a16:creationId xmlns:a16="http://schemas.microsoft.com/office/drawing/2014/main" id="{3ABEC7C6-98F2-47E4-8B11-06B21D3EB33D}"/>
               </a:ext>
             </a:extLst>
           </p:cNvPr>
@@ -16595,7 +16685,7 @@
           <p:cNvPr id="15" name="">
             <a:extLst xmlns:a="http://schemas.openxmlformats.org/drawingml/2006/main">
               <a:ext uri="{FF2B5EF4-FFF2-40B4-BE49-F238E27FC236}">
-                <a16:creationId xmlns:a16="http://schemas.microsoft.com/office/drawing/2014/main" id="{D88BEDBD-A047-4DA1-836B-7859411327ED}"/>
+                <a16:creationId xmlns:a16="http://schemas.microsoft.com/office/drawing/2014/main" id="{4209C41B-5A41-4EE9-81C7-D8DDB7A53A5A}"/>
               </a:ext>
             </a:extLst>
           </p:cNvPr>
@@ -16626,7 +16716,7 @@
           <p:cNvPr id="16" name="">
             <a:extLst xmlns:a="http://schemas.openxmlformats.org/drawingml/2006/main">
               <a:ext uri="{FF2B5EF4-FFF2-40B4-BE49-F238E27FC236}">
-                <a16:creationId xmlns:a16="http://schemas.microsoft.com/office/drawing/2014/main" id="{66DC0892-E950-433A-BB23-C3E7F01A0BB9}"/>
+                <a16:creationId xmlns:a16="http://schemas.microsoft.com/office/drawing/2014/main" id="{406130D2-627F-4DA3-9FBC-2AC0A1AE1DB7}"/>
               </a:ext>
             </a:extLst>
           </p:cNvPr>
@@ -16688,7 +16778,7 @@
           <p:cNvPr id="17" name="">
             <a:extLst xmlns:a="http://schemas.openxmlformats.org/drawingml/2006/main">
               <a:ext uri="{FF2B5EF4-FFF2-40B4-BE49-F238E27FC236}">
-                <a16:creationId xmlns:a16="http://schemas.microsoft.com/office/drawing/2014/main" id="{0CA5D9E3-1516-45A8-97A8-AF75A2AB9759}"/>
+                <a16:creationId xmlns:a16="http://schemas.microsoft.com/office/drawing/2014/main" id="{987992D4-51EC-4BA5-B87A-8C8CF604D383}"/>
               </a:ext>
             </a:extLst>
           </p:cNvPr>
@@ -16750,7 +16840,7 @@
           <p:cNvPr id="18" name="">
             <a:extLst xmlns:a="http://schemas.openxmlformats.org/drawingml/2006/main">
               <a:ext uri="{FF2B5EF4-FFF2-40B4-BE49-F238E27FC236}">
-                <a16:creationId xmlns:a16="http://schemas.microsoft.com/office/drawing/2014/main" id="{CBD8CC72-711C-40CB-B611-70E2BDE47E24}"/>
+                <a16:creationId xmlns:a16="http://schemas.microsoft.com/office/drawing/2014/main" id="{DE0F525C-1F3C-4FB9-9286-19A21BF0DB03}"/>
               </a:ext>
             </a:extLst>
           </p:cNvPr>
@@ -16812,7 +16902,7 @@
           <p:cNvPr id="19" name="">
             <a:extLst xmlns:a="http://schemas.openxmlformats.org/drawingml/2006/main">
               <a:ext uri="{FF2B5EF4-FFF2-40B4-BE49-F238E27FC236}">
-                <a16:creationId xmlns:a16="http://schemas.microsoft.com/office/drawing/2014/main" id="{B22DC1B5-279C-4258-8E1D-B3D8E4B03221}"/>
+                <a16:creationId xmlns:a16="http://schemas.microsoft.com/office/drawing/2014/main" id="{86FC7CF1-02BE-49EF-A9E8-FB60FB820D6D}"/>
               </a:ext>
             </a:extLst>
           </p:cNvPr>
@@ -16843,7 +16933,7 @@
           <p:cNvPr id="20" name="">
             <a:extLst xmlns:a="http://schemas.openxmlformats.org/drawingml/2006/main">
               <a:ext uri="{FF2B5EF4-FFF2-40B4-BE49-F238E27FC236}">
-                <a16:creationId xmlns:a16="http://schemas.microsoft.com/office/drawing/2014/main" id="{29BD0D5C-247C-4229-BBF3-2F31DAF13702}"/>
+                <a16:creationId xmlns:a16="http://schemas.microsoft.com/office/drawing/2014/main" id="{82F5D003-0DB1-4AE0-8996-6FCB52096565}"/>
               </a:ext>
             </a:extLst>
           </p:cNvPr>
@@ -16905,7 +16995,7 @@
           <p:cNvPr id="21" name="">
             <a:extLst xmlns:a="http://schemas.openxmlformats.org/drawingml/2006/main">
               <a:ext uri="{FF2B5EF4-FFF2-40B4-BE49-F238E27FC236}">
-                <a16:creationId xmlns:a16="http://schemas.microsoft.com/office/drawing/2014/main" id="{8F34B9B9-FF87-47FF-91AF-07672660012A}"/>
+                <a16:creationId xmlns:a16="http://schemas.microsoft.com/office/drawing/2014/main" id="{7522D8D0-3F3D-4E47-B7B8-1B540E6A5F95}"/>
               </a:ext>
             </a:extLst>
           </p:cNvPr>
@@ -16967,7 +17057,7 @@
           <p:cNvPr id="22" name="">
             <a:extLst xmlns:a="http://schemas.openxmlformats.org/drawingml/2006/main">
               <a:ext uri="{FF2B5EF4-FFF2-40B4-BE49-F238E27FC236}">
-                <a16:creationId xmlns:a16="http://schemas.microsoft.com/office/drawing/2014/main" id="{89C1B65F-ED47-4C2E-A233-052FF9F3927D}"/>
+                <a16:creationId xmlns:a16="http://schemas.microsoft.com/office/drawing/2014/main" id="{E5A37B58-7028-411D-AB72-B6CC4B12FBF6}"/>
               </a:ext>
             </a:extLst>
           </p:cNvPr>
@@ -17029,7 +17119,7 @@
           <p:cNvPr id="23" name="">
             <a:extLst xmlns:a="http://schemas.openxmlformats.org/drawingml/2006/main">
               <a:ext uri="{FF2B5EF4-FFF2-40B4-BE49-F238E27FC236}">
-                <a16:creationId xmlns:a16="http://schemas.microsoft.com/office/drawing/2014/main" id="{B5F8E1A4-1248-4A5B-99A8-95AF5DFD2FCF}"/>
+                <a16:creationId xmlns:a16="http://schemas.microsoft.com/office/drawing/2014/main" id="{96B1B1B4-8003-4E4C-A2C4-ACEE67086B0D}"/>
               </a:ext>
             </a:extLst>
           </p:cNvPr>
@@ -17062,7 +17152,7 @@
           <p:cNvPr id="24" name="">
             <a:extLst xmlns:a="http://schemas.openxmlformats.org/drawingml/2006/main">
               <a:ext uri="{FF2B5EF4-FFF2-40B4-BE49-F238E27FC236}">
-                <a16:creationId xmlns:a16="http://schemas.microsoft.com/office/drawing/2014/main" id="{87A9CF93-BB76-4B99-B82A-FB86C27B6B60}"/>
+                <a16:creationId xmlns:a16="http://schemas.microsoft.com/office/drawing/2014/main" id="{EDD2B9DC-C207-4CFA-B643-4BC1B8018D2B}"/>
               </a:ext>
             </a:extLst>
           </p:cNvPr>
@@ -17124,7 +17214,7 @@
           <p:cNvPr id="25" name="footer-rule-4">
             <a:extLst xmlns:a="http://schemas.openxmlformats.org/drawingml/2006/main">
               <a:ext uri="{FF2B5EF4-FFF2-40B4-BE49-F238E27FC236}">
-                <a16:creationId xmlns:a16="http://schemas.microsoft.com/office/drawing/2014/main" id="{E9831BB9-5C38-429B-9A09-0471503F153C}"/>
+                <a16:creationId xmlns:a16="http://schemas.microsoft.com/office/drawing/2014/main" id="{CDA410ED-7358-4E98-A512-0C29A0A4EB6B}"/>
               </a:ext>
             </a:extLst>
           </p:cNvPr>
@@ -17155,7 +17245,7 @@
           <p:cNvPr id="26" name="footer-label-4">
             <a:extLst xmlns:a="http://schemas.openxmlformats.org/drawingml/2006/main">
               <a:ext uri="{FF2B5EF4-FFF2-40B4-BE49-F238E27FC236}">
-                <a16:creationId xmlns:a16="http://schemas.microsoft.com/office/drawing/2014/main" id="{00441493-1933-4F07-B79C-F2B5EA80C9E9}"/>
+                <a16:creationId xmlns:a16="http://schemas.microsoft.com/office/drawing/2014/main" id="{5C4C41A6-9B19-46CD-ABB1-28B4FA356D2E}"/>
               </a:ext>
             </a:extLst>
           </p:cNvPr>
@@ -17217,7 +17307,7 @@
           <p:cNvPr id="27" name="footer-page-4">
             <a:extLst xmlns:a="http://schemas.openxmlformats.org/drawingml/2006/main">
               <a:ext uri="{FF2B5EF4-FFF2-40B4-BE49-F238E27FC236}">
-                <a16:creationId xmlns:a16="http://schemas.microsoft.com/office/drawing/2014/main" id="{023B72EA-8111-433C-8B00-92F504939883}"/>
+                <a16:creationId xmlns:a16="http://schemas.microsoft.com/office/drawing/2014/main" id="{1E6D820E-C9AE-4F9E-B968-550B4724EF3C}"/>
               </a:ext>
             </a:extLst>
           </p:cNvPr>
@@ -17277,7 +17367,7 @@
     </p:spTree>
     <p:extLst>
       <p:ext uri="{BB962C8B-B14F-4D97-AF65-F5344CB8AC3E}">
-        <p14:creationId xmlns:p14="http://schemas.microsoft.com/office/powerpoint/2010/main" val="2057125505"/>
+        <p14:creationId xmlns:p14="http://schemas.microsoft.com/office/powerpoint/2010/main" val="1169693406"/>
       </p:ext>
     </p:extLst>
   </p:cSld>
@@ -17308,7 +17398,7 @@
           <p:cNvPr id="31" name="side-accent-5">
             <a:extLst xmlns:a="http://schemas.openxmlformats.org/drawingml/2006/main">
               <a:ext uri="{FF2B5EF4-FFF2-40B4-BE49-F238E27FC236}">
-                <a16:creationId xmlns:a16="http://schemas.microsoft.com/office/drawing/2014/main" id="{921CB988-1FC6-4F4B-A578-7A5FB83552CF}"/>
+                <a16:creationId xmlns:a16="http://schemas.microsoft.com/office/drawing/2014/main" id="{AEAA27EA-9FD9-4048-8912-96EC8CC74425}"/>
               </a:ext>
             </a:extLst>
           </p:cNvPr>
@@ -17339,7 +17429,7 @@
           <p:cNvPr id="2" name="kicker-5">
             <a:extLst xmlns:a="http://schemas.openxmlformats.org/drawingml/2006/main">
               <a:ext uri="{FF2B5EF4-FFF2-40B4-BE49-F238E27FC236}">
-                <a16:creationId xmlns:a16="http://schemas.microsoft.com/office/drawing/2014/main" id="{9CD5A177-48E3-4A64-8882-A7310DD9D5F1}"/>
+                <a16:creationId xmlns:a16="http://schemas.microsoft.com/office/drawing/2014/main" id="{C1608434-62F1-4532-81D9-E182CD566E41}"/>
               </a:ext>
             </a:extLst>
           </p:cNvPr>
@@ -17401,7 +17491,7 @@
           <p:cNvPr id="3" name="title-5">
             <a:extLst xmlns:a="http://schemas.openxmlformats.org/drawingml/2006/main">
               <a:ext uri="{FF2B5EF4-FFF2-40B4-BE49-F238E27FC236}">
-                <a16:creationId xmlns:a16="http://schemas.microsoft.com/office/drawing/2014/main" id="{7CCFC263-85C6-4A60-BA76-DFE8C8AA15A1}"/>
+                <a16:creationId xmlns:a16="http://schemas.microsoft.com/office/drawing/2014/main" id="{438A674A-92F6-44D5-B274-0356DABFA7F9}"/>
               </a:ext>
             </a:extLst>
           </p:cNvPr>
@@ -17463,7 +17553,7 @@
           <p:cNvPr id="4" name="">
             <a:extLst xmlns:a="http://schemas.openxmlformats.org/drawingml/2006/main">
               <a:ext uri="{FF2B5EF4-FFF2-40B4-BE49-F238E27FC236}">
-                <a16:creationId xmlns:a16="http://schemas.microsoft.com/office/drawing/2014/main" id="{EC0D4EB1-ECB7-40E4-8610-7D4A9BC43CC2}"/>
+                <a16:creationId xmlns:a16="http://schemas.microsoft.com/office/drawing/2014/main" id="{8031F865-580F-421F-9304-F78359DB4283}"/>
               </a:ext>
             </a:extLst>
           </p:cNvPr>
@@ -17525,7 +17615,7 @@
           <p:cNvPr id="5" name="workflow-line">
             <a:extLst xmlns:a="http://schemas.openxmlformats.org/drawingml/2006/main">
               <a:ext uri="{FF2B5EF4-FFF2-40B4-BE49-F238E27FC236}">
-                <a16:creationId xmlns:a16="http://schemas.microsoft.com/office/drawing/2014/main" id="{D734B9CF-C989-409A-81BE-0EFE806DC4AE}"/>
+                <a16:creationId xmlns:a16="http://schemas.microsoft.com/office/drawing/2014/main" id="{A89D0494-BCBD-4AA5-A28F-66BEF13A9CC3}"/>
               </a:ext>
             </a:extLst>
           </p:cNvPr>
@@ -17556,7 +17646,7 @@
           <p:cNvPr id="6" name="workflow-arrow">
             <a:extLst xmlns:a="http://schemas.openxmlformats.org/drawingml/2006/main">
               <a:ext uri="{FF2B5EF4-FFF2-40B4-BE49-F238E27FC236}">
-                <a16:creationId xmlns:a16="http://schemas.microsoft.com/office/drawing/2014/main" id="{F59B918B-3810-47A0-A1C9-3C4E07662EE8}"/>
+                <a16:creationId xmlns:a16="http://schemas.microsoft.com/office/drawing/2014/main" id="{2E66CF12-5FE1-4934-9AD0-2AE1B495F54C}"/>
               </a:ext>
             </a:extLst>
           </p:cNvPr>
@@ -17587,7 +17677,7 @@
           <p:cNvPr id="7" name="">
             <a:extLst xmlns:a="http://schemas.openxmlformats.org/drawingml/2006/main">
               <a:ext uri="{FF2B5EF4-FFF2-40B4-BE49-F238E27FC236}">
-                <a16:creationId xmlns:a16="http://schemas.microsoft.com/office/drawing/2014/main" id="{DBA1D456-BFAD-4ABB-B335-83CE3200CC1B}"/>
+                <a16:creationId xmlns:a16="http://schemas.microsoft.com/office/drawing/2014/main" id="{B729D7A2-96E1-481E-B3AE-5ABC48ADC0F0}"/>
               </a:ext>
             </a:extLst>
           </p:cNvPr>
@@ -17618,7 +17708,7 @@
           <p:cNvPr id="8" name="">
             <a:extLst xmlns:a="http://schemas.openxmlformats.org/drawingml/2006/main">
               <a:ext uri="{FF2B5EF4-FFF2-40B4-BE49-F238E27FC236}">
-                <a16:creationId xmlns:a16="http://schemas.microsoft.com/office/drawing/2014/main" id="{140F87D2-1AB3-4E59-BB0E-C4AF27DE6A6F}"/>
+                <a16:creationId xmlns:a16="http://schemas.microsoft.com/office/drawing/2014/main" id="{CE27B722-133D-4094-88D1-D9C6A9EF7079}"/>
               </a:ext>
             </a:extLst>
           </p:cNvPr>
@@ -17680,7 +17770,7 @@
           <p:cNvPr id="9" name="">
             <a:extLst xmlns:a="http://schemas.openxmlformats.org/drawingml/2006/main">
               <a:ext uri="{FF2B5EF4-FFF2-40B4-BE49-F238E27FC236}">
-                <a16:creationId xmlns:a16="http://schemas.microsoft.com/office/drawing/2014/main" id="{515CE137-24FA-4D07-8AC0-BB8D15984A02}"/>
+                <a16:creationId xmlns:a16="http://schemas.microsoft.com/office/drawing/2014/main" id="{6EAA4B82-D05B-4D33-A35E-059A31C49247}"/>
               </a:ext>
             </a:extLst>
           </p:cNvPr>
@@ -17742,7 +17832,7 @@
           <p:cNvPr id="10" name="">
             <a:extLst xmlns:a="http://schemas.openxmlformats.org/drawingml/2006/main">
               <a:ext uri="{FF2B5EF4-FFF2-40B4-BE49-F238E27FC236}">
-                <a16:creationId xmlns:a16="http://schemas.microsoft.com/office/drawing/2014/main" id="{790F1043-49DF-4C75-95D0-E0A1A47C43E2}"/>
+                <a16:creationId xmlns:a16="http://schemas.microsoft.com/office/drawing/2014/main" id="{9AC82807-A8EC-448F-91ED-036C0A32F51D}"/>
               </a:ext>
             </a:extLst>
           </p:cNvPr>
@@ -17804,7 +17894,7 @@
           <p:cNvPr id="11" name="">
             <a:extLst xmlns:a="http://schemas.openxmlformats.org/drawingml/2006/main">
               <a:ext uri="{FF2B5EF4-FFF2-40B4-BE49-F238E27FC236}">
-                <a16:creationId xmlns:a16="http://schemas.microsoft.com/office/drawing/2014/main" id="{6ADB05C7-035C-4FEB-B87F-9FBAB05C2259}"/>
+                <a16:creationId xmlns:a16="http://schemas.microsoft.com/office/drawing/2014/main" id="{448D9F96-3FA3-4772-A984-089089E62033}"/>
               </a:ext>
             </a:extLst>
           </p:cNvPr>
@@ -17835,7 +17925,7 @@
           <p:cNvPr id="12" name="">
             <a:extLst xmlns:a="http://schemas.openxmlformats.org/drawingml/2006/main">
               <a:ext uri="{FF2B5EF4-FFF2-40B4-BE49-F238E27FC236}">
-                <a16:creationId xmlns:a16="http://schemas.microsoft.com/office/drawing/2014/main" id="{E44CB954-E89C-47A9-B289-84A278473814}"/>
+                <a16:creationId xmlns:a16="http://schemas.microsoft.com/office/drawing/2014/main" id="{5F04FDE8-725A-413D-A2C3-722D28060FB3}"/>
               </a:ext>
             </a:extLst>
           </p:cNvPr>
@@ -17897,7 +17987,7 @@
           <p:cNvPr id="13" name="">
             <a:extLst xmlns:a="http://schemas.openxmlformats.org/drawingml/2006/main">
               <a:ext uri="{FF2B5EF4-FFF2-40B4-BE49-F238E27FC236}">
-                <a16:creationId xmlns:a16="http://schemas.microsoft.com/office/drawing/2014/main" id="{51DF4ACF-2508-41BD-A015-61827F9663C7}"/>
+                <a16:creationId xmlns:a16="http://schemas.microsoft.com/office/drawing/2014/main" id="{B19C5B5E-2179-4499-8564-B9E7AC7CC2B7}"/>
               </a:ext>
             </a:extLst>
           </p:cNvPr>
@@ -17959,7 +18049,7 @@
           <p:cNvPr id="14" name="">
             <a:extLst xmlns:a="http://schemas.openxmlformats.org/drawingml/2006/main">
               <a:ext uri="{FF2B5EF4-FFF2-40B4-BE49-F238E27FC236}">
-                <a16:creationId xmlns:a16="http://schemas.microsoft.com/office/drawing/2014/main" id="{8E57BC16-A808-4047-BF9F-AF322A580E6C}"/>
+                <a16:creationId xmlns:a16="http://schemas.microsoft.com/office/drawing/2014/main" id="{47ED8D9D-3135-4AEE-874D-2C4E57411A34}"/>
               </a:ext>
             </a:extLst>
           </p:cNvPr>
@@ -18021,7 +18111,7 @@
           <p:cNvPr id="15" name="">
             <a:extLst xmlns:a="http://schemas.openxmlformats.org/drawingml/2006/main">
               <a:ext uri="{FF2B5EF4-FFF2-40B4-BE49-F238E27FC236}">
-                <a16:creationId xmlns:a16="http://schemas.microsoft.com/office/drawing/2014/main" id="{7216C422-BE28-4B14-9200-D658F090268A}"/>
+                <a16:creationId xmlns:a16="http://schemas.microsoft.com/office/drawing/2014/main" id="{19BA21CD-8CAB-407C-A44E-106608287E88}"/>
               </a:ext>
             </a:extLst>
           </p:cNvPr>
@@ -18052,7 +18142,7 @@
           <p:cNvPr id="16" name="">
             <a:extLst xmlns:a="http://schemas.openxmlformats.org/drawingml/2006/main">
               <a:ext uri="{FF2B5EF4-FFF2-40B4-BE49-F238E27FC236}">
-                <a16:creationId xmlns:a16="http://schemas.microsoft.com/office/drawing/2014/main" id="{47FB15E7-3607-4875-A328-37850668064B}"/>
+                <a16:creationId xmlns:a16="http://schemas.microsoft.com/office/drawing/2014/main" id="{96D57A60-7A6D-4E7D-B457-148831D525F3}"/>
               </a:ext>
             </a:extLst>
           </p:cNvPr>
@@ -18114,7 +18204,7 @@
           <p:cNvPr id="17" name="">
             <a:extLst xmlns:a="http://schemas.openxmlformats.org/drawingml/2006/main">
               <a:ext uri="{FF2B5EF4-FFF2-40B4-BE49-F238E27FC236}">
-                <a16:creationId xmlns:a16="http://schemas.microsoft.com/office/drawing/2014/main" id="{8D01156C-FA9F-47CD-9FBC-1E873192D8B8}"/>
+                <a16:creationId xmlns:a16="http://schemas.microsoft.com/office/drawing/2014/main" id="{34B9A98E-5BC0-4B46-9109-79CB1690731A}"/>
               </a:ext>
             </a:extLst>
           </p:cNvPr>
@@ -18176,7 +18266,7 @@
           <p:cNvPr id="18" name="">
             <a:extLst xmlns:a="http://schemas.openxmlformats.org/drawingml/2006/main">
               <a:ext uri="{FF2B5EF4-FFF2-40B4-BE49-F238E27FC236}">
-                <a16:creationId xmlns:a16="http://schemas.microsoft.com/office/drawing/2014/main" id="{F0D6C8DC-D135-4F95-BC47-40BA3ED93E5A}"/>
+                <a16:creationId xmlns:a16="http://schemas.microsoft.com/office/drawing/2014/main" id="{55F7BD84-F694-44F1-B20F-6224F945B803}"/>
               </a:ext>
             </a:extLst>
           </p:cNvPr>
@@ -18238,7 +18328,7 @@
           <p:cNvPr id="19" name="">
             <a:extLst xmlns:a="http://schemas.openxmlformats.org/drawingml/2006/main">
               <a:ext uri="{FF2B5EF4-FFF2-40B4-BE49-F238E27FC236}">
-                <a16:creationId xmlns:a16="http://schemas.microsoft.com/office/drawing/2014/main" id="{9A47272F-2D13-4C33-B289-1E9A48060648}"/>
+                <a16:creationId xmlns:a16="http://schemas.microsoft.com/office/drawing/2014/main" id="{80D7113A-7028-44F6-8271-47A13603935D}"/>
               </a:ext>
             </a:extLst>
           </p:cNvPr>
@@ -18269,7 +18359,7 @@
           <p:cNvPr id="20" name="">
             <a:extLst xmlns:a="http://schemas.openxmlformats.org/drawingml/2006/main">
               <a:ext uri="{FF2B5EF4-FFF2-40B4-BE49-F238E27FC236}">
-                <a16:creationId xmlns:a16="http://schemas.microsoft.com/office/drawing/2014/main" id="{A1592520-6077-40A1-A6E1-432A07723587}"/>
+                <a16:creationId xmlns:a16="http://schemas.microsoft.com/office/drawing/2014/main" id="{F6C1E39C-997D-4EFC-8D45-1E93B317E24A}"/>
               </a:ext>
             </a:extLst>
           </p:cNvPr>
@@ -18331,7 +18421,7 @@
           <p:cNvPr id="21" name="">
             <a:extLst xmlns:a="http://schemas.openxmlformats.org/drawingml/2006/main">
               <a:ext uri="{FF2B5EF4-FFF2-40B4-BE49-F238E27FC236}">
-                <a16:creationId xmlns:a16="http://schemas.microsoft.com/office/drawing/2014/main" id="{443621F2-C1CB-4C45-AEE8-7621550C1C32}"/>
+                <a16:creationId xmlns:a16="http://schemas.microsoft.com/office/drawing/2014/main" id="{B39822ED-C6B5-4990-BB80-9F6480A13195}"/>
               </a:ext>
             </a:extLst>
           </p:cNvPr>
@@ -18393,7 +18483,7 @@
           <p:cNvPr id="22" name="">
             <a:extLst xmlns:a="http://schemas.openxmlformats.org/drawingml/2006/main">
               <a:ext uri="{FF2B5EF4-FFF2-40B4-BE49-F238E27FC236}">
-                <a16:creationId xmlns:a16="http://schemas.microsoft.com/office/drawing/2014/main" id="{60789C40-94E8-469C-AECE-A12B1FDB5C85}"/>
+                <a16:creationId xmlns:a16="http://schemas.microsoft.com/office/drawing/2014/main" id="{164AC212-DBD9-421F-962A-374EAD717E41}"/>
               </a:ext>
             </a:extLst>
           </p:cNvPr>
@@ -18455,7 +18545,7 @@
           <p:cNvPr id="23" name="">
             <a:extLst xmlns:a="http://schemas.openxmlformats.org/drawingml/2006/main">
               <a:ext uri="{FF2B5EF4-FFF2-40B4-BE49-F238E27FC236}">
-                <a16:creationId xmlns:a16="http://schemas.microsoft.com/office/drawing/2014/main" id="{4BD53E1A-373B-4481-93A5-7A63CCB15903}"/>
+                <a16:creationId xmlns:a16="http://schemas.microsoft.com/office/drawing/2014/main" id="{E1A3CBCA-120B-40BD-8B81-77A46DA418F6}"/>
               </a:ext>
             </a:extLst>
           </p:cNvPr>
@@ -18486,7 +18576,7 @@
           <p:cNvPr id="24" name="">
             <a:extLst xmlns:a="http://schemas.openxmlformats.org/drawingml/2006/main">
               <a:ext uri="{FF2B5EF4-FFF2-40B4-BE49-F238E27FC236}">
-                <a16:creationId xmlns:a16="http://schemas.microsoft.com/office/drawing/2014/main" id="{CDD164FF-832C-4B12-ADC8-72A07CB0992C}"/>
+                <a16:creationId xmlns:a16="http://schemas.microsoft.com/office/drawing/2014/main" id="{8EAF1131-EA0A-4896-A56E-89EC3E38A46F}"/>
               </a:ext>
             </a:extLst>
           </p:cNvPr>
@@ -18548,7 +18638,7 @@
           <p:cNvPr id="25" name="">
             <a:extLst xmlns:a="http://schemas.openxmlformats.org/drawingml/2006/main">
               <a:ext uri="{FF2B5EF4-FFF2-40B4-BE49-F238E27FC236}">
-                <a16:creationId xmlns:a16="http://schemas.microsoft.com/office/drawing/2014/main" id="{CD672C49-9E5D-490E-8EB8-E409831E1FE2}"/>
+                <a16:creationId xmlns:a16="http://schemas.microsoft.com/office/drawing/2014/main" id="{58582505-289F-4A0D-8FE5-32B4AB605482}"/>
               </a:ext>
             </a:extLst>
           </p:cNvPr>
@@ -18610,7 +18700,7 @@
           <p:cNvPr id="26" name="">
             <a:extLst xmlns:a="http://schemas.openxmlformats.org/drawingml/2006/main">
               <a:ext uri="{FF2B5EF4-FFF2-40B4-BE49-F238E27FC236}">
-                <a16:creationId xmlns:a16="http://schemas.microsoft.com/office/drawing/2014/main" id="{0EA78A0C-B702-4E98-840C-6CC0D270799D}"/>
+                <a16:creationId xmlns:a16="http://schemas.microsoft.com/office/drawing/2014/main" id="{C5D8D6AC-E1A5-40D8-A344-0EF80A726897}"/>
               </a:ext>
             </a:extLst>
           </p:cNvPr>
@@ -18672,7 +18762,7 @@
           <p:cNvPr id="27" name="">
             <a:extLst xmlns:a="http://schemas.openxmlformats.org/drawingml/2006/main">
               <a:ext uri="{FF2B5EF4-FFF2-40B4-BE49-F238E27FC236}">
-                <a16:creationId xmlns:a16="http://schemas.microsoft.com/office/drawing/2014/main" id="{DCC2F799-C488-4032-BFC8-AFB90DAEE186}"/>
+                <a16:creationId xmlns:a16="http://schemas.microsoft.com/office/drawing/2014/main" id="{0B78139A-A072-416D-B693-6A5BE12999A7}"/>
               </a:ext>
             </a:extLst>
           </p:cNvPr>
@@ -18734,7 +18824,7 @@
           <p:cNvPr id="28" name="footer-rule-5">
             <a:extLst xmlns:a="http://schemas.openxmlformats.org/drawingml/2006/main">
               <a:ext uri="{FF2B5EF4-FFF2-40B4-BE49-F238E27FC236}">
-                <a16:creationId xmlns:a16="http://schemas.microsoft.com/office/drawing/2014/main" id="{A2A6F02D-18E4-43E9-A6F7-44BA79D4D9AB}"/>
+                <a16:creationId xmlns:a16="http://schemas.microsoft.com/office/drawing/2014/main" id="{D40F6282-CB85-4CD7-BB5F-705D1FE930DD}"/>
               </a:ext>
             </a:extLst>
           </p:cNvPr>
@@ -18765,7 +18855,7 @@
           <p:cNvPr id="29" name="footer-label-5">
             <a:extLst xmlns:a="http://schemas.openxmlformats.org/drawingml/2006/main">
               <a:ext uri="{FF2B5EF4-FFF2-40B4-BE49-F238E27FC236}">
-                <a16:creationId xmlns:a16="http://schemas.microsoft.com/office/drawing/2014/main" id="{CE701338-1107-4E24-8417-14346DC0C99F}"/>
+                <a16:creationId xmlns:a16="http://schemas.microsoft.com/office/drawing/2014/main" id="{776F6721-42C2-429A-9804-BD7F6E600165}"/>
               </a:ext>
             </a:extLst>
           </p:cNvPr>
@@ -18827,7 +18917,7 @@
           <p:cNvPr id="30" name="footer-page-5">
             <a:extLst xmlns:a="http://schemas.openxmlformats.org/drawingml/2006/main">
               <a:ext uri="{FF2B5EF4-FFF2-40B4-BE49-F238E27FC236}">
-                <a16:creationId xmlns:a16="http://schemas.microsoft.com/office/drawing/2014/main" id="{F2F646BA-B0EB-49EA-857E-24563B632227}"/>
+                <a16:creationId xmlns:a16="http://schemas.microsoft.com/office/drawing/2014/main" id="{28B6BD5C-C6F4-4F13-BCFF-2C3A56E1BF6A}"/>
               </a:ext>
             </a:extLst>
           </p:cNvPr>
@@ -18887,7 +18977,7 @@
     </p:spTree>
     <p:extLst>
       <p:ext uri="{BB962C8B-B14F-4D97-AF65-F5344CB8AC3E}">
-        <p14:creationId xmlns:p14="http://schemas.microsoft.com/office/powerpoint/2010/main" val="2071842291"/>
+        <p14:creationId xmlns:p14="http://schemas.microsoft.com/office/powerpoint/2010/main" val="481091443"/>
       </p:ext>
     </p:extLst>
   </p:cSld>
@@ -18918,7 +19008,7 @@
           <p:cNvPr id="22" name="side-accent-6">
             <a:extLst xmlns:a="http://schemas.openxmlformats.org/drawingml/2006/main">
               <a:ext uri="{FF2B5EF4-FFF2-40B4-BE49-F238E27FC236}">
-                <a16:creationId xmlns:a16="http://schemas.microsoft.com/office/drawing/2014/main" id="{D8E75C79-7FD7-4E8E-9E6C-E4398E91866D}"/>
+                <a16:creationId xmlns:a16="http://schemas.microsoft.com/office/drawing/2014/main" id="{3AC2F957-B458-4B08-8D83-6DE2AB33366A}"/>
               </a:ext>
             </a:extLst>
           </p:cNvPr>
@@ -18949,7 +19039,7 @@
           <p:cNvPr id="2" name="kicker-6">
             <a:extLst xmlns:a="http://schemas.openxmlformats.org/drawingml/2006/main">
               <a:ext uri="{FF2B5EF4-FFF2-40B4-BE49-F238E27FC236}">
-                <a16:creationId xmlns:a16="http://schemas.microsoft.com/office/drawing/2014/main" id="{2D19EC02-C174-4CD0-9A82-54A425C05F04}"/>
+                <a16:creationId xmlns:a16="http://schemas.microsoft.com/office/drawing/2014/main" id="{CA89F679-8E54-4BAE-9D1C-94942FF44F2C}"/>
               </a:ext>
             </a:extLst>
           </p:cNvPr>
@@ -19011,7 +19101,7 @@
           <p:cNvPr id="3" name="title-6">
             <a:extLst xmlns:a="http://schemas.openxmlformats.org/drawingml/2006/main">
               <a:ext uri="{FF2B5EF4-FFF2-40B4-BE49-F238E27FC236}">
-                <a16:creationId xmlns:a16="http://schemas.microsoft.com/office/drawing/2014/main" id="{F3C8DBCF-BB39-4148-B0FE-359DA4E75146}"/>
+                <a16:creationId xmlns:a16="http://schemas.microsoft.com/office/drawing/2014/main" id="{CF113D73-0B52-4497-96D8-0C862A1D3067}"/>
               </a:ext>
             </a:extLst>
           </p:cNvPr>
@@ -19073,7 +19163,7 @@
           <p:cNvPr id="4" name="">
             <a:extLst xmlns:a="http://schemas.openxmlformats.org/drawingml/2006/main">
               <a:ext uri="{FF2B5EF4-FFF2-40B4-BE49-F238E27FC236}">
-                <a16:creationId xmlns:a16="http://schemas.microsoft.com/office/drawing/2014/main" id="{19821C28-68CD-4818-A407-9218DC23BBF4}"/>
+                <a16:creationId xmlns:a16="http://schemas.microsoft.com/office/drawing/2014/main" id="{E8BE3871-F586-455C-A930-E9D816B9B670}"/>
               </a:ext>
             </a:extLst>
           </p:cNvPr>
@@ -19135,7 +19225,7 @@
           <p:cNvPr id="5" name="">
             <a:extLst xmlns:a="http://schemas.openxmlformats.org/drawingml/2006/main">
               <a:ext uri="{FF2B5EF4-FFF2-40B4-BE49-F238E27FC236}">
-                <a16:creationId xmlns:a16="http://schemas.microsoft.com/office/drawing/2014/main" id="{EABE962A-B22A-4066-A292-5B073CA8FAF0}"/>
+                <a16:creationId xmlns:a16="http://schemas.microsoft.com/office/drawing/2014/main" id="{F0D1A836-FEEF-4405-8F66-9371C5B79281}"/>
               </a:ext>
             </a:extLst>
           </p:cNvPr>
@@ -19197,7 +19287,7 @@
           <p:cNvPr id="6" name="">
             <a:extLst xmlns:a="http://schemas.openxmlformats.org/drawingml/2006/main">
               <a:ext uri="{FF2B5EF4-FFF2-40B4-BE49-F238E27FC236}">
-                <a16:creationId xmlns:a16="http://schemas.microsoft.com/office/drawing/2014/main" id="{5C30325B-4634-4374-83EC-7B6EAEF09334}"/>
+                <a16:creationId xmlns:a16="http://schemas.microsoft.com/office/drawing/2014/main" id="{1B4FC17D-6B8D-4CEF-BFFA-0A9E73DA6262}"/>
               </a:ext>
             </a:extLst>
           </p:cNvPr>
@@ -19259,7 +19349,7 @@
           <p:cNvPr id="7" name="">
             <a:extLst xmlns:a="http://schemas.openxmlformats.org/drawingml/2006/main">
               <a:ext uri="{FF2B5EF4-FFF2-40B4-BE49-F238E27FC236}">
-                <a16:creationId xmlns:a16="http://schemas.microsoft.com/office/drawing/2014/main" id="{34134D99-72E3-44FD-A651-4131E530FBCE}"/>
+                <a16:creationId xmlns:a16="http://schemas.microsoft.com/office/drawing/2014/main" id="{B197532F-CAD2-4BB9-B5A6-8ACBE232D07B}"/>
               </a:ext>
             </a:extLst>
           </p:cNvPr>
@@ -19290,7 +19380,7 @@
           <p:cNvPr id="8" name="">
             <a:extLst xmlns:a="http://schemas.openxmlformats.org/drawingml/2006/main">
               <a:ext uri="{FF2B5EF4-FFF2-40B4-BE49-F238E27FC236}">
-                <a16:creationId xmlns:a16="http://schemas.microsoft.com/office/drawing/2014/main" id="{2F081287-1803-44F3-8B9E-ABC9BD958C63}"/>
+                <a16:creationId xmlns:a16="http://schemas.microsoft.com/office/drawing/2014/main" id="{D790045F-18D1-4569-AE4A-771DEABD0358}"/>
               </a:ext>
             </a:extLst>
           </p:cNvPr>
@@ -19379,7 +19469,7 @@
           <p:cNvPr id="9" name="">
             <a:extLst xmlns:a="http://schemas.openxmlformats.org/drawingml/2006/main">
               <a:ext uri="{FF2B5EF4-FFF2-40B4-BE49-F238E27FC236}">
-                <a16:creationId xmlns:a16="http://schemas.microsoft.com/office/drawing/2014/main" id="{D5AA582C-BF4B-4399-9B77-B79070764206}"/>
+                <a16:creationId xmlns:a16="http://schemas.microsoft.com/office/drawing/2014/main" id="{9703339D-400A-42D6-8D4F-21A7E67C6192}"/>
               </a:ext>
             </a:extLst>
           </p:cNvPr>
@@ -19441,7 +19531,7 @@
           <p:cNvPr id="10" name="">
             <a:extLst xmlns:a="http://schemas.openxmlformats.org/drawingml/2006/main">
               <a:ext uri="{FF2B5EF4-FFF2-40B4-BE49-F238E27FC236}">
-                <a16:creationId xmlns:a16="http://schemas.microsoft.com/office/drawing/2014/main" id="{1196F058-0037-423E-9195-A49ABA4BEE46}"/>
+                <a16:creationId xmlns:a16="http://schemas.microsoft.com/office/drawing/2014/main" id="{88F55289-A7AB-4A3B-BAAF-45934D907B5D}"/>
               </a:ext>
             </a:extLst>
           </p:cNvPr>
@@ -19503,7 +19593,7 @@
           <p:cNvPr id="11" name="">
             <a:extLst xmlns:a="http://schemas.openxmlformats.org/drawingml/2006/main">
               <a:ext uri="{FF2B5EF4-FFF2-40B4-BE49-F238E27FC236}">
-                <a16:creationId xmlns:a16="http://schemas.microsoft.com/office/drawing/2014/main" id="{DB5E120A-E053-4921-A02C-A6FBC6440062}"/>
+                <a16:creationId xmlns:a16="http://schemas.microsoft.com/office/drawing/2014/main" id="{97A01537-3FB7-47AE-9B4E-FCBCBBE0BA3D}"/>
               </a:ext>
             </a:extLst>
           </p:cNvPr>
@@ -19534,7 +19624,7 @@
           <p:cNvPr id="12" name="">
             <a:extLst xmlns:a="http://schemas.openxmlformats.org/drawingml/2006/main">
               <a:ext uri="{FF2B5EF4-FFF2-40B4-BE49-F238E27FC236}">
-                <a16:creationId xmlns:a16="http://schemas.microsoft.com/office/drawing/2014/main" id="{EE327027-F9C0-4966-A82F-ADB22521EE42}"/>
+                <a16:creationId xmlns:a16="http://schemas.microsoft.com/office/drawing/2014/main" id="{421E92F6-3866-42E8-9F43-492CC8D42E37}"/>
               </a:ext>
             </a:extLst>
           </p:cNvPr>
@@ -19623,7 +19713,7 @@
           <p:cNvPr id="13" name="">
             <a:extLst xmlns:a="http://schemas.openxmlformats.org/drawingml/2006/main">
               <a:ext uri="{FF2B5EF4-FFF2-40B4-BE49-F238E27FC236}">
-                <a16:creationId xmlns:a16="http://schemas.microsoft.com/office/drawing/2014/main" id="{908620E3-C41C-4107-B5F1-D0BAA0C3C830}"/>
+                <a16:creationId xmlns:a16="http://schemas.microsoft.com/office/drawing/2014/main" id="{1B85B6D0-0B61-4918-9938-539DE2B79BD3}"/>
               </a:ext>
             </a:extLst>
           </p:cNvPr>
@@ -19685,7 +19775,7 @@
           <p:cNvPr id="14" name="">
             <a:extLst xmlns:a="http://schemas.openxmlformats.org/drawingml/2006/main">
               <a:ext uri="{FF2B5EF4-FFF2-40B4-BE49-F238E27FC236}">
-                <a16:creationId xmlns:a16="http://schemas.microsoft.com/office/drawing/2014/main" id="{129F575A-A37A-4BC5-A472-02A424546B7C}"/>
+                <a16:creationId xmlns:a16="http://schemas.microsoft.com/office/drawing/2014/main" id="{62BDEE8B-8423-4DD9-B98A-CFFBC41A3CE5}"/>
               </a:ext>
             </a:extLst>
           </p:cNvPr>
@@ -19747,7 +19837,7 @@
           <p:cNvPr id="15" name="">
             <a:extLst xmlns:a="http://schemas.openxmlformats.org/drawingml/2006/main">
               <a:ext uri="{FF2B5EF4-FFF2-40B4-BE49-F238E27FC236}">
-                <a16:creationId xmlns:a16="http://schemas.microsoft.com/office/drawing/2014/main" id="{DDDD0A95-D790-4721-B574-AB1FBF3A4AAD}"/>
+                <a16:creationId xmlns:a16="http://schemas.microsoft.com/office/drawing/2014/main" id="{B8FB2814-0903-4F6F-9425-9BAB76890166}"/>
               </a:ext>
             </a:extLst>
           </p:cNvPr>
@@ -19778,7 +19868,7 @@
           <p:cNvPr id="16" name="">
             <a:extLst xmlns:a="http://schemas.openxmlformats.org/drawingml/2006/main">
               <a:ext uri="{FF2B5EF4-FFF2-40B4-BE49-F238E27FC236}">
-                <a16:creationId xmlns:a16="http://schemas.microsoft.com/office/drawing/2014/main" id="{7BA91A11-36CA-415B-844C-D7E5FE0FBD64}"/>
+                <a16:creationId xmlns:a16="http://schemas.microsoft.com/office/drawing/2014/main" id="{E2F9E3EC-5166-4C76-BBC3-8BADA53CF3BB}"/>
               </a:ext>
             </a:extLst>
           </p:cNvPr>
@@ -19867,7 +19957,7 @@
           <p:cNvPr id="17" name="">
             <a:extLst xmlns:a="http://schemas.openxmlformats.org/drawingml/2006/main">
               <a:ext uri="{FF2B5EF4-FFF2-40B4-BE49-F238E27FC236}">
-                <a16:creationId xmlns:a16="http://schemas.microsoft.com/office/drawing/2014/main" id="{7AAF551D-1F26-42D9-A78C-4068BAB6250E}"/>
+                <a16:creationId xmlns:a16="http://schemas.microsoft.com/office/drawing/2014/main" id="{CF38706D-524C-4C62-A140-B1C98FA56874}"/>
               </a:ext>
             </a:extLst>
           </p:cNvPr>
@@ -19900,7 +19990,7 @@
           <p:cNvPr id="18" name="">
             <a:extLst xmlns:a="http://schemas.openxmlformats.org/drawingml/2006/main">
               <a:ext uri="{FF2B5EF4-FFF2-40B4-BE49-F238E27FC236}">
-                <a16:creationId xmlns:a16="http://schemas.microsoft.com/office/drawing/2014/main" id="{AEBF5BE5-AE50-4A79-AEA7-3D4EA4CFD0A6}"/>
+                <a16:creationId xmlns:a16="http://schemas.microsoft.com/office/drawing/2014/main" id="{2A18A077-D3E2-4105-803E-5782FF32B4ED}"/>
               </a:ext>
             </a:extLst>
           </p:cNvPr>
@@ -19989,7 +20079,7 @@
           <p:cNvPr id="19" name="footer-rule-6">
             <a:extLst xmlns:a="http://schemas.openxmlformats.org/drawingml/2006/main">
               <a:ext uri="{FF2B5EF4-FFF2-40B4-BE49-F238E27FC236}">
-                <a16:creationId xmlns:a16="http://schemas.microsoft.com/office/drawing/2014/main" id="{B4D29CCF-F5F8-4D69-84E2-2209E593ED28}"/>
+                <a16:creationId xmlns:a16="http://schemas.microsoft.com/office/drawing/2014/main" id="{E926B618-3A77-4A1E-B045-5F94E32B17C2}"/>
               </a:ext>
             </a:extLst>
           </p:cNvPr>
@@ -20020,7 +20110,7 @@
           <p:cNvPr id="20" name="footer-label-6">
             <a:extLst xmlns:a="http://schemas.openxmlformats.org/drawingml/2006/main">
               <a:ext uri="{FF2B5EF4-FFF2-40B4-BE49-F238E27FC236}">
-                <a16:creationId xmlns:a16="http://schemas.microsoft.com/office/drawing/2014/main" id="{DC4A6369-1DFE-403E-A0C4-015BF9B2480E}"/>
+                <a16:creationId xmlns:a16="http://schemas.microsoft.com/office/drawing/2014/main" id="{A9797985-5142-4E59-8B9C-86D26767CFED}"/>
               </a:ext>
             </a:extLst>
           </p:cNvPr>
@@ -20082,7 +20172,7 @@
           <p:cNvPr id="21" name="footer-page-6">
             <a:extLst xmlns:a="http://schemas.openxmlformats.org/drawingml/2006/main">
               <a:ext uri="{FF2B5EF4-FFF2-40B4-BE49-F238E27FC236}">
-                <a16:creationId xmlns:a16="http://schemas.microsoft.com/office/drawing/2014/main" id="{5C2F7483-A3F3-4D35-978F-41C998856BF8}"/>
+                <a16:creationId xmlns:a16="http://schemas.microsoft.com/office/drawing/2014/main" id="{00D90B63-7854-4EE3-B4A4-C1FE8D93C135}"/>
               </a:ext>
             </a:extLst>
           </p:cNvPr>
@@ -20142,7 +20232,7 @@
     </p:spTree>
     <p:extLst>
       <p:ext uri="{BB962C8B-B14F-4D97-AF65-F5344CB8AC3E}">
-        <p14:creationId xmlns:p14="http://schemas.microsoft.com/office/powerpoint/2010/main" val="1340596123"/>
+        <p14:creationId xmlns:p14="http://schemas.microsoft.com/office/powerpoint/2010/main" val="736190437"/>
       </p:ext>
     </p:extLst>
   </p:cSld>
@@ -20173,7 +20263,7 @@
           <p:cNvPr id="28" name="side-accent-7">
             <a:extLst xmlns:a="http://schemas.openxmlformats.org/drawingml/2006/main">
               <a:ext uri="{FF2B5EF4-FFF2-40B4-BE49-F238E27FC236}">
-                <a16:creationId xmlns:a16="http://schemas.microsoft.com/office/drawing/2014/main" id="{D0E2FD4A-8D8B-4A70-AF6D-02CE592913D0}"/>
+                <a16:creationId xmlns:a16="http://schemas.microsoft.com/office/drawing/2014/main" id="{4BEE93AE-4873-4DCA-B4F0-0DE7A7B7A6E3}"/>
               </a:ext>
             </a:extLst>
           </p:cNvPr>
@@ -20204,7 +20294,7 @@
           <p:cNvPr id="2" name="kicker-7">
             <a:extLst xmlns:a="http://schemas.openxmlformats.org/drawingml/2006/main">
               <a:ext uri="{FF2B5EF4-FFF2-40B4-BE49-F238E27FC236}">
-                <a16:creationId xmlns:a16="http://schemas.microsoft.com/office/drawing/2014/main" id="{A8CA575F-A859-4979-BD55-2F9555D94304}"/>
+                <a16:creationId xmlns:a16="http://schemas.microsoft.com/office/drawing/2014/main" id="{4FECEFBD-BFD3-4BA1-9F98-7B54B95C9807}"/>
               </a:ext>
             </a:extLst>
           </p:cNvPr>
@@ -20266,7 +20356,7 @@
           <p:cNvPr id="3" name="title-7">
             <a:extLst xmlns:a="http://schemas.openxmlformats.org/drawingml/2006/main">
               <a:ext uri="{FF2B5EF4-FFF2-40B4-BE49-F238E27FC236}">
-                <a16:creationId xmlns:a16="http://schemas.microsoft.com/office/drawing/2014/main" id="{51D01A4B-C0ED-474C-9AAB-FA59C3048C4F}"/>
+                <a16:creationId xmlns:a16="http://schemas.microsoft.com/office/drawing/2014/main" id="{96F55B0D-F54F-4DC5-81EA-5EFE60F87A09}"/>
               </a:ext>
             </a:extLst>
           </p:cNvPr>
@@ -20328,7 +20418,7 @@
           <p:cNvPr id="4" name="">
             <a:extLst xmlns:a="http://schemas.openxmlformats.org/drawingml/2006/main">
               <a:ext uri="{FF2B5EF4-FFF2-40B4-BE49-F238E27FC236}">
-                <a16:creationId xmlns:a16="http://schemas.microsoft.com/office/drawing/2014/main" id="{1E4C1D42-B0DF-4DF5-BAA8-921DE095A972}"/>
+                <a16:creationId xmlns:a16="http://schemas.microsoft.com/office/drawing/2014/main" id="{E0C5E6B0-4E5F-4DDC-B4F3-05B24277F925}"/>
               </a:ext>
             </a:extLst>
           </p:cNvPr>
@@ -20390,7 +20480,7 @@
           <p:cNvPr id="5" name="">
             <a:extLst xmlns:a="http://schemas.openxmlformats.org/drawingml/2006/main">
               <a:ext uri="{FF2B5EF4-FFF2-40B4-BE49-F238E27FC236}">
-                <a16:creationId xmlns:a16="http://schemas.microsoft.com/office/drawing/2014/main" id="{F54C663C-066C-4B38-95FD-B9CC3E57CB3A}"/>
+                <a16:creationId xmlns:a16="http://schemas.microsoft.com/office/drawing/2014/main" id="{1E991247-92BE-4723-9BE7-C6F8D55B8FA6}"/>
               </a:ext>
             </a:extLst>
           </p:cNvPr>
@@ -20421,7 +20511,7 @@
           <p:cNvPr id="6" name="">
             <a:extLst xmlns:a="http://schemas.openxmlformats.org/drawingml/2006/main">
               <a:ext uri="{FF2B5EF4-FFF2-40B4-BE49-F238E27FC236}">
-                <a16:creationId xmlns:a16="http://schemas.microsoft.com/office/drawing/2014/main" id="{534B8276-8788-4CFD-A086-531ADC51CA3F}"/>
+                <a16:creationId xmlns:a16="http://schemas.microsoft.com/office/drawing/2014/main" id="{3FE6755A-AA55-4776-91CA-8AF5282A5667}"/>
               </a:ext>
             </a:extLst>
           </p:cNvPr>
@@ -20483,7 +20573,7 @@
           <p:cNvPr id="7" name="">
             <a:extLst xmlns:a="http://schemas.openxmlformats.org/drawingml/2006/main">
               <a:ext uri="{FF2B5EF4-FFF2-40B4-BE49-F238E27FC236}">
-                <a16:creationId xmlns:a16="http://schemas.microsoft.com/office/drawing/2014/main" id="{4590EC53-BBEC-45B6-B028-F8436FB2721E}"/>
+                <a16:creationId xmlns:a16="http://schemas.microsoft.com/office/drawing/2014/main" id="{048DC45A-6CF5-43ED-BC63-E9D836637C98}"/>
               </a:ext>
             </a:extLst>
           </p:cNvPr>
@@ -20545,7 +20635,7 @@
           <p:cNvPr id="8" name="">
             <a:extLst xmlns:a="http://schemas.openxmlformats.org/drawingml/2006/main">
               <a:ext uri="{FF2B5EF4-FFF2-40B4-BE49-F238E27FC236}">
-                <a16:creationId xmlns:a16="http://schemas.microsoft.com/office/drawing/2014/main" id="{D105E92B-99E9-4441-805B-FA4FCB3741EA}"/>
+                <a16:creationId xmlns:a16="http://schemas.microsoft.com/office/drawing/2014/main" id="{2B6CCE28-90F8-46F2-B726-29D9BAE248EB}"/>
               </a:ext>
             </a:extLst>
           </p:cNvPr>
@@ -20607,7 +20697,7 @@
           <p:cNvPr id="9" name="">
             <a:extLst xmlns:a="http://schemas.openxmlformats.org/drawingml/2006/main">
               <a:ext uri="{FF2B5EF4-FFF2-40B4-BE49-F238E27FC236}">
-                <a16:creationId xmlns:a16="http://schemas.microsoft.com/office/drawing/2014/main" id="{A770E233-DFFF-42B4-8083-4E3272013ACC}"/>
+                <a16:creationId xmlns:a16="http://schemas.microsoft.com/office/drawing/2014/main" id="{C37C5687-F098-4E44-87BE-ABA02EB161AB}"/>
               </a:ext>
             </a:extLst>
           </p:cNvPr>
@@ -20638,7 +20728,7 @@
           <p:cNvPr id="10" name="">
             <a:extLst xmlns:a="http://schemas.openxmlformats.org/drawingml/2006/main">
               <a:ext uri="{FF2B5EF4-FFF2-40B4-BE49-F238E27FC236}">
-                <a16:creationId xmlns:a16="http://schemas.microsoft.com/office/drawing/2014/main" id="{4D7A8EC7-4C22-456E-A10B-A9E536419420}"/>
+                <a16:creationId xmlns:a16="http://schemas.microsoft.com/office/drawing/2014/main" id="{95FCB626-28BC-47AB-A91F-2B7CFF7DEB7A}"/>
               </a:ext>
             </a:extLst>
           </p:cNvPr>
@@ -20700,7 +20790,7 @@
           <p:cNvPr id="11" name="">
             <a:extLst xmlns:a="http://schemas.openxmlformats.org/drawingml/2006/main">
               <a:ext uri="{FF2B5EF4-FFF2-40B4-BE49-F238E27FC236}">
-                <a16:creationId xmlns:a16="http://schemas.microsoft.com/office/drawing/2014/main" id="{1975A05A-1193-49A3-BA98-95D001D78F48}"/>
+                <a16:creationId xmlns:a16="http://schemas.microsoft.com/office/drawing/2014/main" id="{12DA69CD-7D4C-4069-984A-32DE2D5BECAC}"/>
               </a:ext>
             </a:extLst>
           </p:cNvPr>
@@ -20762,7 +20852,7 @@
           <p:cNvPr id="12" name="">
             <a:extLst xmlns:a="http://schemas.openxmlformats.org/drawingml/2006/main">
               <a:ext uri="{FF2B5EF4-FFF2-40B4-BE49-F238E27FC236}">
-                <a16:creationId xmlns:a16="http://schemas.microsoft.com/office/drawing/2014/main" id="{985EA132-9875-4C03-967A-7732338028BA}"/>
+                <a16:creationId xmlns:a16="http://schemas.microsoft.com/office/drawing/2014/main" id="{FA7142AB-2625-45B7-9D83-E71939E0AF05}"/>
               </a:ext>
             </a:extLst>
           </p:cNvPr>
@@ -20824,7 +20914,7 @@
           <p:cNvPr id="13" name="">
             <a:extLst xmlns:a="http://schemas.openxmlformats.org/drawingml/2006/main">
               <a:ext uri="{FF2B5EF4-FFF2-40B4-BE49-F238E27FC236}">
-                <a16:creationId xmlns:a16="http://schemas.microsoft.com/office/drawing/2014/main" id="{49F4CEA7-B54F-4CC7-8B21-EA6711964AF0}"/>
+                <a16:creationId xmlns:a16="http://schemas.microsoft.com/office/drawing/2014/main" id="{2719BC3F-6B3C-49E9-9D6B-6FF970DA5A9B}"/>
               </a:ext>
             </a:extLst>
           </p:cNvPr>
@@ -20855,7 +20945,7 @@
           <p:cNvPr id="14" name="">
             <a:extLst xmlns:a="http://schemas.openxmlformats.org/drawingml/2006/main">
               <a:ext uri="{FF2B5EF4-FFF2-40B4-BE49-F238E27FC236}">
-                <a16:creationId xmlns:a16="http://schemas.microsoft.com/office/drawing/2014/main" id="{3D13EBAD-DDF3-400D-A54E-C9253F380497}"/>
+                <a16:creationId xmlns:a16="http://schemas.microsoft.com/office/drawing/2014/main" id="{AD25B1C0-26C9-4186-9955-6D09EEBDB9BA}"/>
               </a:ext>
             </a:extLst>
           </p:cNvPr>
@@ -20917,7 +21007,7 @@
           <p:cNvPr id="15" name="">
             <a:extLst xmlns:a="http://schemas.openxmlformats.org/drawingml/2006/main">
               <a:ext uri="{FF2B5EF4-FFF2-40B4-BE49-F238E27FC236}">
-                <a16:creationId xmlns:a16="http://schemas.microsoft.com/office/drawing/2014/main" id="{BF6B76BD-34ED-4002-9ADF-D809306C6D4D}"/>
+                <a16:creationId xmlns:a16="http://schemas.microsoft.com/office/drawing/2014/main" id="{F5ADFCDB-D53A-4506-9746-F3213073CC57}"/>
               </a:ext>
             </a:extLst>
           </p:cNvPr>
@@ -20979,7 +21069,7 @@
           <p:cNvPr id="16" name="">
             <a:extLst xmlns:a="http://schemas.openxmlformats.org/drawingml/2006/main">
               <a:ext uri="{FF2B5EF4-FFF2-40B4-BE49-F238E27FC236}">
-                <a16:creationId xmlns:a16="http://schemas.microsoft.com/office/drawing/2014/main" id="{E806CAF0-32ED-4AB9-B65C-26C7624CC467}"/>
+                <a16:creationId xmlns:a16="http://schemas.microsoft.com/office/drawing/2014/main" id="{F8C7DE8B-FD81-47B0-8B0F-6008C534EA49}"/>
               </a:ext>
             </a:extLst>
           </p:cNvPr>
@@ -21041,7 +21131,7 @@
           <p:cNvPr id="17" name="dashboard-preview">
             <a:extLst xmlns:a="http://schemas.openxmlformats.org/drawingml/2006/main">
               <a:ext uri="{FF2B5EF4-FFF2-40B4-BE49-F238E27FC236}">
-                <a16:creationId xmlns:a16="http://schemas.microsoft.com/office/drawing/2014/main" id="{998F02F2-F95C-46A1-810C-8040E9C240BB}"/>
+                <a16:creationId xmlns:a16="http://schemas.microsoft.com/office/drawing/2014/main" id="{3F340D44-3551-43B9-9664-E3A64A18DED4}"/>
               </a:ext>
             </a:extLst>
           </p:cNvPr>
@@ -21076,7 +21166,7 @@
           <p:cNvPr id="18" name="">
             <a:extLst xmlns:a="http://schemas.openxmlformats.org/drawingml/2006/main">
               <a:ext uri="{FF2B5EF4-FFF2-40B4-BE49-F238E27FC236}">
-                <a16:creationId xmlns:a16="http://schemas.microsoft.com/office/drawing/2014/main" id="{9752FEA3-F3B9-4AB5-960E-F92AD246AB9C}"/>
+                <a16:creationId xmlns:a16="http://schemas.microsoft.com/office/drawing/2014/main" id="{39AD3749-8A8F-4C0F-89F7-9A99A082F594}"/>
               </a:ext>
             </a:extLst>
           </p:cNvPr>
@@ -21138,7 +21228,7 @@
           <p:cNvPr id="19" name="">
             <a:extLst xmlns:a="http://schemas.openxmlformats.org/drawingml/2006/main">
               <a:ext uri="{FF2B5EF4-FFF2-40B4-BE49-F238E27FC236}">
-                <a16:creationId xmlns:a16="http://schemas.microsoft.com/office/drawing/2014/main" id="{0700E500-EA88-4A63-839D-A17B7AB56F81}"/>
+                <a16:creationId xmlns:a16="http://schemas.microsoft.com/office/drawing/2014/main" id="{1763613B-AEA8-4781-BB38-02D0FCC52E83}"/>
               </a:ext>
             </a:extLst>
           </p:cNvPr>
@@ -21169,7 +21259,7 @@
           <p:cNvPr id="20" name="">
             <a:extLst xmlns:a="http://schemas.openxmlformats.org/drawingml/2006/main">
               <a:ext uri="{FF2B5EF4-FFF2-40B4-BE49-F238E27FC236}">
-                <a16:creationId xmlns:a16="http://schemas.microsoft.com/office/drawing/2014/main" id="{EA06399A-CC72-43E0-9133-9A83906B7429}"/>
+                <a16:creationId xmlns:a16="http://schemas.microsoft.com/office/drawing/2014/main" id="{47536300-14D9-4334-B4AE-A3D9E909CFF5}"/>
               </a:ext>
             </a:extLst>
           </p:cNvPr>
@@ -21231,7 +21321,7 @@
           <p:cNvPr id="21" name="">
             <a:extLst xmlns:a="http://schemas.openxmlformats.org/drawingml/2006/main">
               <a:ext uri="{FF2B5EF4-FFF2-40B4-BE49-F238E27FC236}">
-                <a16:creationId xmlns:a16="http://schemas.microsoft.com/office/drawing/2014/main" id="{435CEA08-41F6-4F89-97C2-A40B36517FEC}"/>
+                <a16:creationId xmlns:a16="http://schemas.microsoft.com/office/drawing/2014/main" id="{58C3157C-A79F-42AC-8088-BA0A009478A7}"/>
               </a:ext>
             </a:extLst>
           </p:cNvPr>
@@ -21262,7 +21352,7 @@
           <p:cNvPr id="22" name="">
             <a:extLst xmlns:a="http://schemas.openxmlformats.org/drawingml/2006/main">
               <a:ext uri="{FF2B5EF4-FFF2-40B4-BE49-F238E27FC236}">
-                <a16:creationId xmlns:a16="http://schemas.microsoft.com/office/drawing/2014/main" id="{41BC18DD-3FA9-4439-99E8-44C4EA6588A6}"/>
+                <a16:creationId xmlns:a16="http://schemas.microsoft.com/office/drawing/2014/main" id="{0B9773EB-1376-43E4-A3A2-94EF3DBB3190}"/>
               </a:ext>
             </a:extLst>
           </p:cNvPr>
@@ -21293,7 +21383,7 @@
           <p:cNvPr id="23" name="">
             <a:extLst xmlns:a="http://schemas.openxmlformats.org/drawingml/2006/main">
               <a:ext uri="{FF2B5EF4-FFF2-40B4-BE49-F238E27FC236}">
-                <a16:creationId xmlns:a16="http://schemas.microsoft.com/office/drawing/2014/main" id="{86CB180F-E657-4FB0-A4E8-95C4F767236C}"/>
+                <a16:creationId xmlns:a16="http://schemas.microsoft.com/office/drawing/2014/main" id="{A19B6A95-40CA-43F1-9EBE-6D908816578E}"/>
               </a:ext>
             </a:extLst>
           </p:cNvPr>
@@ -21326,7 +21416,7 @@
           <p:cNvPr id="24" name="">
             <a:extLst xmlns:a="http://schemas.openxmlformats.org/drawingml/2006/main">
               <a:ext uri="{FF2B5EF4-FFF2-40B4-BE49-F238E27FC236}">
-                <a16:creationId xmlns:a16="http://schemas.microsoft.com/office/drawing/2014/main" id="{2C6D5B0A-0BB5-4145-9349-EB129C495829}"/>
+                <a16:creationId xmlns:a16="http://schemas.microsoft.com/office/drawing/2014/main" id="{EE673389-FCFA-47CB-B3BA-9E50BB407128}"/>
               </a:ext>
             </a:extLst>
           </p:cNvPr>
@@ -21388,7 +21478,7 @@
           <p:cNvPr id="25" name="footer-rule-7">
             <a:extLst xmlns:a="http://schemas.openxmlformats.org/drawingml/2006/main">
               <a:ext uri="{FF2B5EF4-FFF2-40B4-BE49-F238E27FC236}">
-                <a16:creationId xmlns:a16="http://schemas.microsoft.com/office/drawing/2014/main" id="{B5D1A3C1-F770-4582-A03F-928203186051}"/>
+                <a16:creationId xmlns:a16="http://schemas.microsoft.com/office/drawing/2014/main" id="{3DDF69C8-4FB0-43FD-8813-2A29B4A7F368}"/>
               </a:ext>
             </a:extLst>
           </p:cNvPr>
@@ -21419,7 +21509,7 @@
           <p:cNvPr id="26" name="footer-label-7">
             <a:extLst xmlns:a="http://schemas.openxmlformats.org/drawingml/2006/main">
               <a:ext uri="{FF2B5EF4-FFF2-40B4-BE49-F238E27FC236}">
-                <a16:creationId xmlns:a16="http://schemas.microsoft.com/office/drawing/2014/main" id="{34D362F4-D296-4083-8321-5ADD5E6C606F}"/>
+                <a16:creationId xmlns:a16="http://schemas.microsoft.com/office/drawing/2014/main" id="{7B2DDBCD-1110-490A-97C6-D221083CE9E3}"/>
               </a:ext>
             </a:extLst>
           </p:cNvPr>
@@ -21481,7 +21571,7 @@
           <p:cNvPr id="27" name="footer-page-7">
             <a:extLst xmlns:a="http://schemas.openxmlformats.org/drawingml/2006/main">
               <a:ext uri="{FF2B5EF4-FFF2-40B4-BE49-F238E27FC236}">
-                <a16:creationId xmlns:a16="http://schemas.microsoft.com/office/drawing/2014/main" id="{4324E322-6D20-40E2-ADB0-C6D7CFE8ACA7}"/>
+                <a16:creationId xmlns:a16="http://schemas.microsoft.com/office/drawing/2014/main" id="{E685792A-163D-49FA-9C39-73C32ABA1A23}"/>
               </a:ext>
             </a:extLst>
           </p:cNvPr>
@@ -21541,7 +21631,7 @@
     </p:spTree>
     <p:extLst>
       <p:ext uri="{BB962C8B-B14F-4D97-AF65-F5344CB8AC3E}">
-        <p14:creationId xmlns:p14="http://schemas.microsoft.com/office/powerpoint/2010/main" val="128761958"/>
+        <p14:creationId xmlns:p14="http://schemas.microsoft.com/office/powerpoint/2010/main" val="635192868"/>
       </p:ext>
     </p:extLst>
   </p:cSld>
@@ -21572,7 +21662,7 @@
           <p:cNvPr id="26" name="side-accent-8">
             <a:extLst xmlns:a="http://schemas.openxmlformats.org/drawingml/2006/main">
               <a:ext uri="{FF2B5EF4-FFF2-40B4-BE49-F238E27FC236}">
-                <a16:creationId xmlns:a16="http://schemas.microsoft.com/office/drawing/2014/main" id="{D13E93E2-BA99-4BCE-AF8B-5415F3A6CEEA}"/>
+                <a16:creationId xmlns:a16="http://schemas.microsoft.com/office/drawing/2014/main" id="{8E66207F-EEDF-44AD-81BF-F8FFCC1F885B}"/>
               </a:ext>
             </a:extLst>
           </p:cNvPr>
@@ -21603,7 +21693,7 @@
           <p:cNvPr id="2" name="kicker-8">
             <a:extLst xmlns:a="http://schemas.openxmlformats.org/drawingml/2006/main">
               <a:ext uri="{FF2B5EF4-FFF2-40B4-BE49-F238E27FC236}">
-                <a16:creationId xmlns:a16="http://schemas.microsoft.com/office/drawing/2014/main" id="{300496EA-73E1-428D-A4A2-F9AE6F841AAE}"/>
+                <a16:creationId xmlns:a16="http://schemas.microsoft.com/office/drawing/2014/main" id="{4E13B1CF-9BC2-4B41-810C-56293A15525F}"/>
               </a:ext>
             </a:extLst>
           </p:cNvPr>
@@ -21665,7 +21755,7 @@
           <p:cNvPr id="3" name="title-8">
             <a:extLst xmlns:a="http://schemas.openxmlformats.org/drawingml/2006/main">
               <a:ext uri="{FF2B5EF4-FFF2-40B4-BE49-F238E27FC236}">
-                <a16:creationId xmlns:a16="http://schemas.microsoft.com/office/drawing/2014/main" id="{B1BE26CE-AFD2-4FFA-B775-2E6433ECC952}"/>
+                <a16:creationId xmlns:a16="http://schemas.microsoft.com/office/drawing/2014/main" id="{BA9ADC61-6A93-40C3-9592-86D7AD72A3F0}"/>
               </a:ext>
             </a:extLst>
           </p:cNvPr>
@@ -21727,7 +21817,7 @@
           <p:cNvPr id="4" name="">
             <a:extLst xmlns:a="http://schemas.openxmlformats.org/drawingml/2006/main">
               <a:ext uri="{FF2B5EF4-FFF2-40B4-BE49-F238E27FC236}">
-                <a16:creationId xmlns:a16="http://schemas.microsoft.com/office/drawing/2014/main" id="{0630349D-157D-4E60-A2F4-299A67ADFC22}"/>
+                <a16:creationId xmlns:a16="http://schemas.microsoft.com/office/drawing/2014/main" id="{9AD34F7F-776D-40ED-BBA1-5985678F6C9C}"/>
               </a:ext>
             </a:extLst>
           </p:cNvPr>
@@ -21789,7 +21879,7 @@
           <p:cNvPr id="5" name="">
             <a:extLst xmlns:a="http://schemas.openxmlformats.org/drawingml/2006/main">
               <a:ext uri="{FF2B5EF4-FFF2-40B4-BE49-F238E27FC236}">
-                <a16:creationId xmlns:a16="http://schemas.microsoft.com/office/drawing/2014/main" id="{355379C4-32F1-4650-8C3A-C65A21455A1C}"/>
+                <a16:creationId xmlns:a16="http://schemas.microsoft.com/office/drawing/2014/main" id="{ABE26341-0451-40AF-8355-67DF6DA045DA}"/>
               </a:ext>
             </a:extLst>
           </p:cNvPr>
@@ -21820,7 +21910,7 @@
           <p:cNvPr id="6" name="">
             <a:extLst xmlns:a="http://schemas.openxmlformats.org/drawingml/2006/main">
               <a:ext uri="{FF2B5EF4-FFF2-40B4-BE49-F238E27FC236}">
-                <a16:creationId xmlns:a16="http://schemas.microsoft.com/office/drawing/2014/main" id="{C156DEBA-B225-4B99-9C79-49F515E4DDE9}"/>
+                <a16:creationId xmlns:a16="http://schemas.microsoft.com/office/drawing/2014/main" id="{98BD8D41-5E63-4CDF-A08F-2334A1B2F876}"/>
               </a:ext>
             </a:extLst>
           </p:cNvPr>
@@ -21851,7 +21941,7 @@
           <p:cNvPr id="7" name="">
             <a:extLst xmlns:a="http://schemas.openxmlformats.org/drawingml/2006/main">
               <a:ext uri="{FF2B5EF4-FFF2-40B4-BE49-F238E27FC236}">
-                <a16:creationId xmlns:a16="http://schemas.microsoft.com/office/drawing/2014/main" id="{9F96D4A5-B995-4486-A049-3A204C2F6315}"/>
+                <a16:creationId xmlns:a16="http://schemas.microsoft.com/office/drawing/2014/main" id="{8B21F932-D873-40D7-8449-F4848F461C74}"/>
               </a:ext>
             </a:extLst>
           </p:cNvPr>
@@ -21913,7 +22003,7 @@
           <p:cNvPr id="8" name="">
             <a:extLst xmlns:a="http://schemas.openxmlformats.org/drawingml/2006/main">
               <a:ext uri="{FF2B5EF4-FFF2-40B4-BE49-F238E27FC236}">
-                <a16:creationId xmlns:a16="http://schemas.microsoft.com/office/drawing/2014/main" id="{62650220-C524-46A8-A366-61E7FF112689}"/>
+                <a16:creationId xmlns:a16="http://schemas.microsoft.com/office/drawing/2014/main" id="{4D4065F7-6B06-4B39-A719-9DD05F776321}"/>
               </a:ext>
             </a:extLst>
           </p:cNvPr>
@@ -21975,7 +22065,7 @@
           <p:cNvPr id="9" name="">
             <a:extLst xmlns:a="http://schemas.openxmlformats.org/drawingml/2006/main">
               <a:ext uri="{FF2B5EF4-FFF2-40B4-BE49-F238E27FC236}">
-                <a16:creationId xmlns:a16="http://schemas.microsoft.com/office/drawing/2014/main" id="{0B5EB9DC-EFA6-40DB-8A46-C52611C4C928}"/>
+                <a16:creationId xmlns:a16="http://schemas.microsoft.com/office/drawing/2014/main" id="{F2B70890-1822-4B3B-94D1-E0899C0E8A32}"/>
               </a:ext>
             </a:extLst>
           </p:cNvPr>
@@ -22037,7 +22127,7 @@
           <p:cNvPr id="10" name="">
             <a:extLst xmlns:a="http://schemas.openxmlformats.org/drawingml/2006/main">
               <a:ext uri="{FF2B5EF4-FFF2-40B4-BE49-F238E27FC236}">
-                <a16:creationId xmlns:a16="http://schemas.microsoft.com/office/drawing/2014/main" id="{FCDCFCB1-30C3-4FA6-9842-D0394DB5F485}"/>
+                <a16:creationId xmlns:a16="http://schemas.microsoft.com/office/drawing/2014/main" id="{46835E76-8A87-4A4E-830E-7F2ED1D1A535}"/>
               </a:ext>
             </a:extLst>
           </p:cNvPr>
@@ -22068,7 +22158,7 @@
           <p:cNvPr id="11" name="">
             <a:extLst xmlns:a="http://schemas.openxmlformats.org/drawingml/2006/main">
               <a:ext uri="{FF2B5EF4-FFF2-40B4-BE49-F238E27FC236}">
-                <a16:creationId xmlns:a16="http://schemas.microsoft.com/office/drawing/2014/main" id="{95414FD5-CFEA-4772-914F-F2E1328BB571}"/>
+                <a16:creationId xmlns:a16="http://schemas.microsoft.com/office/drawing/2014/main" id="{89937BA6-07B9-4DA5-BD84-A232767A5EBD}"/>
               </a:ext>
             </a:extLst>
           </p:cNvPr>
@@ -22130,7 +22220,7 @@
           <p:cNvPr id="12" name="">
             <a:extLst xmlns:a="http://schemas.openxmlformats.org/drawingml/2006/main">
               <a:ext uri="{FF2B5EF4-FFF2-40B4-BE49-F238E27FC236}">
-                <a16:creationId xmlns:a16="http://schemas.microsoft.com/office/drawing/2014/main" id="{59F82EC9-D370-4BB3-954C-7883375D7ECE}"/>
+                <a16:creationId xmlns:a16="http://schemas.microsoft.com/office/drawing/2014/main" id="{0181EE3C-1C82-4F97-A5F1-68A22F2EC7FA}"/>
               </a:ext>
             </a:extLst>
           </p:cNvPr>
@@ -22192,7 +22282,7 @@
           <p:cNvPr id="13" name="">
             <a:extLst xmlns:a="http://schemas.openxmlformats.org/drawingml/2006/main">
               <a:ext uri="{FF2B5EF4-FFF2-40B4-BE49-F238E27FC236}">
-                <a16:creationId xmlns:a16="http://schemas.microsoft.com/office/drawing/2014/main" id="{1FCEE264-D3E6-452E-AAF6-2746D5AF0AD0}"/>
+                <a16:creationId xmlns:a16="http://schemas.microsoft.com/office/drawing/2014/main" id="{EE3C2F89-C6EC-4991-85D8-097F2665228D}"/>
               </a:ext>
             </a:extLst>
           </p:cNvPr>
@@ -22254,7 +22344,7 @@
           <p:cNvPr id="14" name="">
             <a:extLst xmlns:a="http://schemas.openxmlformats.org/drawingml/2006/main">
               <a:ext uri="{FF2B5EF4-FFF2-40B4-BE49-F238E27FC236}">
-                <a16:creationId xmlns:a16="http://schemas.microsoft.com/office/drawing/2014/main" id="{120831DF-6D0C-499A-AD82-07B15815B455}"/>
+                <a16:creationId xmlns:a16="http://schemas.microsoft.com/office/drawing/2014/main" id="{AED00FBB-6377-43AE-8743-A48E98D60BA8}"/>
               </a:ext>
             </a:extLst>
           </p:cNvPr>
@@ -22285,7 +22375,7 @@
           <p:cNvPr id="15" name="">
             <a:extLst xmlns:a="http://schemas.openxmlformats.org/drawingml/2006/main">
               <a:ext uri="{FF2B5EF4-FFF2-40B4-BE49-F238E27FC236}">
-                <a16:creationId xmlns:a16="http://schemas.microsoft.com/office/drawing/2014/main" id="{7001784B-B8B0-440D-BA11-1A288828C81F}"/>
+                <a16:creationId xmlns:a16="http://schemas.microsoft.com/office/drawing/2014/main" id="{99D548F8-3961-40CE-9A86-C404AE74C913}"/>
               </a:ext>
             </a:extLst>
           </p:cNvPr>
@@ -22347,7 +22437,7 @@
           <p:cNvPr id="16" name="">
             <a:extLst xmlns:a="http://schemas.openxmlformats.org/drawingml/2006/main">
               <a:ext uri="{FF2B5EF4-FFF2-40B4-BE49-F238E27FC236}">
-                <a16:creationId xmlns:a16="http://schemas.microsoft.com/office/drawing/2014/main" id="{3B553FBA-AE1C-4C6A-8655-D0FB74A0E158}"/>
+                <a16:creationId xmlns:a16="http://schemas.microsoft.com/office/drawing/2014/main" id="{6323361B-A969-48DF-A848-E591A01F7F1D}"/>
               </a:ext>
             </a:extLst>
           </p:cNvPr>
@@ -22409,7 +22499,7 @@
           <p:cNvPr id="17" name="">
             <a:extLst xmlns:a="http://schemas.openxmlformats.org/drawingml/2006/main">
               <a:ext uri="{FF2B5EF4-FFF2-40B4-BE49-F238E27FC236}">
-                <a16:creationId xmlns:a16="http://schemas.microsoft.com/office/drawing/2014/main" id="{AA90551F-D3F2-4625-A2DA-EE6E8D1269EC}"/>
+                <a16:creationId xmlns:a16="http://schemas.microsoft.com/office/drawing/2014/main" id="{2B41EE1C-C6BC-4C7D-AAEB-4308B49EFA87}"/>
               </a:ext>
             </a:extLst>
           </p:cNvPr>
@@ -22471,7 +22561,7 @@
           <p:cNvPr id="18" name="">
             <a:extLst xmlns:a="http://schemas.openxmlformats.org/drawingml/2006/main">
               <a:ext uri="{FF2B5EF4-FFF2-40B4-BE49-F238E27FC236}">
-                <a16:creationId xmlns:a16="http://schemas.microsoft.com/office/drawing/2014/main" id="{185C5C45-AF8C-421B-974D-A5DA17E53AB3}"/>
+                <a16:creationId xmlns:a16="http://schemas.microsoft.com/office/drawing/2014/main" id="{F608DE10-119B-445D-95C4-3C11FDC5CBC4}"/>
               </a:ext>
             </a:extLst>
           </p:cNvPr>
@@ -22502,7 +22592,7 @@
           <p:cNvPr id="19" name="">
             <a:extLst xmlns:a="http://schemas.openxmlformats.org/drawingml/2006/main">
               <a:ext uri="{FF2B5EF4-FFF2-40B4-BE49-F238E27FC236}">
-                <a16:creationId xmlns:a16="http://schemas.microsoft.com/office/drawing/2014/main" id="{13B4DCAA-6930-44E0-88AC-255F40F9ECD0}"/>
+                <a16:creationId xmlns:a16="http://schemas.microsoft.com/office/drawing/2014/main" id="{1990FD12-68E1-4B58-A793-745D80E15D9B}"/>
               </a:ext>
             </a:extLst>
           </p:cNvPr>
@@ -22564,7 +22654,7 @@
           <p:cNvPr id="20" name="">
             <a:extLst xmlns:a="http://schemas.openxmlformats.org/drawingml/2006/main">
               <a:ext uri="{FF2B5EF4-FFF2-40B4-BE49-F238E27FC236}">
-                <a16:creationId xmlns:a16="http://schemas.microsoft.com/office/drawing/2014/main" id="{4EBB2D78-E2C4-4386-9A23-FD9C10843F3E}"/>
+                <a16:creationId xmlns:a16="http://schemas.microsoft.com/office/drawing/2014/main" id="{04F1163A-E762-4B74-8D35-58C6586AA896}"/>
               </a:ext>
             </a:extLst>
           </p:cNvPr>
@@ -22626,7 +22716,7 @@
           <p:cNvPr id="21" name="">
             <a:extLst xmlns:a="http://schemas.openxmlformats.org/drawingml/2006/main">
               <a:ext uri="{FF2B5EF4-FFF2-40B4-BE49-F238E27FC236}">
-                <a16:creationId xmlns:a16="http://schemas.microsoft.com/office/drawing/2014/main" id="{AE9ADFF8-F2EA-47DE-A702-25E254B80528}"/>
+                <a16:creationId xmlns:a16="http://schemas.microsoft.com/office/drawing/2014/main" id="{6FF6C588-F09D-4134-BDA9-50838D7200F9}"/>
               </a:ext>
             </a:extLst>
           </p:cNvPr>
@@ -22688,7 +22778,7 @@
           <p:cNvPr id="22" name="">
             <a:extLst xmlns:a="http://schemas.openxmlformats.org/drawingml/2006/main">
               <a:ext uri="{FF2B5EF4-FFF2-40B4-BE49-F238E27FC236}">
-                <a16:creationId xmlns:a16="http://schemas.microsoft.com/office/drawing/2014/main" id="{592582E1-0FD8-49C2-BDF5-887E36E01F97}"/>
+                <a16:creationId xmlns:a16="http://schemas.microsoft.com/office/drawing/2014/main" id="{A326A860-BB6D-440E-A7DC-BEE717B1C34D}"/>
               </a:ext>
             </a:extLst>
           </p:cNvPr>
@@ -22750,7 +22840,7 @@
           <p:cNvPr id="23" name="footer-rule-8">
             <a:extLst xmlns:a="http://schemas.openxmlformats.org/drawingml/2006/main">
               <a:ext uri="{FF2B5EF4-FFF2-40B4-BE49-F238E27FC236}">
-                <a16:creationId xmlns:a16="http://schemas.microsoft.com/office/drawing/2014/main" id="{52498347-C50C-47C4-AD84-91C59D65AFCB}"/>
+                <a16:creationId xmlns:a16="http://schemas.microsoft.com/office/drawing/2014/main" id="{AD61DDED-5184-4FBC-8304-224A7F6D34DA}"/>
               </a:ext>
             </a:extLst>
           </p:cNvPr>
@@ -22781,7 +22871,7 @@
           <p:cNvPr id="24" name="footer-label-8">
             <a:extLst xmlns:a="http://schemas.openxmlformats.org/drawingml/2006/main">
               <a:ext uri="{FF2B5EF4-FFF2-40B4-BE49-F238E27FC236}">
-                <a16:creationId xmlns:a16="http://schemas.microsoft.com/office/drawing/2014/main" id="{67BFDA57-408D-4CF8-ABEB-F322BEC39680}"/>
+                <a16:creationId xmlns:a16="http://schemas.microsoft.com/office/drawing/2014/main" id="{71FC0FDC-0476-428C-8928-7A38580B0B93}"/>
               </a:ext>
             </a:extLst>
           </p:cNvPr>
@@ -22843,7 +22933,7 @@
           <p:cNvPr id="25" name="footer-page-8">
             <a:extLst xmlns:a="http://schemas.openxmlformats.org/drawingml/2006/main">
               <a:ext uri="{FF2B5EF4-FFF2-40B4-BE49-F238E27FC236}">
-                <a16:creationId xmlns:a16="http://schemas.microsoft.com/office/drawing/2014/main" id="{F570F9E1-DD46-4B00-8938-670A476DAC6A}"/>
+                <a16:creationId xmlns:a16="http://schemas.microsoft.com/office/drawing/2014/main" id="{BAFC5AFF-719A-4CA4-B694-FECC382B3BD6}"/>
               </a:ext>
             </a:extLst>
           </p:cNvPr>
@@ -22903,7 +22993,7 @@
     </p:spTree>
     <p:extLst>
       <p:ext uri="{BB962C8B-B14F-4D97-AF65-F5344CB8AC3E}">
-        <p14:creationId xmlns:p14="http://schemas.microsoft.com/office/powerpoint/2010/main" val="1235013635"/>
+        <p14:creationId xmlns:p14="http://schemas.microsoft.com/office/powerpoint/2010/main" val="206391300"/>
       </p:ext>
     </p:extLst>
   </p:cSld>
@@ -22934,7 +23024,7 @@
           <p:cNvPr id="21" name="side-accent-9">
             <a:extLst xmlns:a="http://schemas.openxmlformats.org/drawingml/2006/main">
               <a:ext uri="{FF2B5EF4-FFF2-40B4-BE49-F238E27FC236}">
-                <a16:creationId xmlns:a16="http://schemas.microsoft.com/office/drawing/2014/main" id="{AC0C89D9-DAC5-400C-8062-629ABA6E4A7F}"/>
+                <a16:creationId xmlns:a16="http://schemas.microsoft.com/office/drawing/2014/main" id="{C3ED2AFB-8FA4-44D7-B9EC-61E33B724D76}"/>
               </a:ext>
             </a:extLst>
           </p:cNvPr>
@@ -22965,7 +23055,7 @@
           <p:cNvPr id="2" name="kicker-9">
             <a:extLst xmlns:a="http://schemas.openxmlformats.org/drawingml/2006/main">
               <a:ext uri="{FF2B5EF4-FFF2-40B4-BE49-F238E27FC236}">
-                <a16:creationId xmlns:a16="http://schemas.microsoft.com/office/drawing/2014/main" id="{C06A3142-4BF1-4567-B578-747A3552E823}"/>
+                <a16:creationId xmlns:a16="http://schemas.microsoft.com/office/drawing/2014/main" id="{ECBD3193-20B1-4F34-8554-75BB30ABDCC7}"/>
               </a:ext>
             </a:extLst>
           </p:cNvPr>
@@ -23027,7 +23117,7 @@
           <p:cNvPr id="3" name="title-9">
             <a:extLst xmlns:a="http://schemas.openxmlformats.org/drawingml/2006/main">
               <a:ext uri="{FF2B5EF4-FFF2-40B4-BE49-F238E27FC236}">
-                <a16:creationId xmlns:a16="http://schemas.microsoft.com/office/drawing/2014/main" id="{45C5ABD6-D3AB-4C82-B62B-EAF23E62B018}"/>
+                <a16:creationId xmlns:a16="http://schemas.microsoft.com/office/drawing/2014/main" id="{50E195F7-32B1-40FA-A1A9-BBBCA8CDCD1E}"/>
               </a:ext>
             </a:extLst>
           </p:cNvPr>
@@ -23089,7 +23179,7 @@
           <p:cNvPr id="4" name="">
             <a:extLst xmlns:a="http://schemas.openxmlformats.org/drawingml/2006/main">
               <a:ext uri="{FF2B5EF4-FFF2-40B4-BE49-F238E27FC236}">
-                <a16:creationId xmlns:a16="http://schemas.microsoft.com/office/drawing/2014/main" id="{23422553-72C4-4715-8158-605A4F2F5E8B}"/>
+                <a16:creationId xmlns:a16="http://schemas.microsoft.com/office/drawing/2014/main" id="{5C6B6DEA-C412-44F5-8B3A-9FCF9052AE82}"/>
               </a:ext>
             </a:extLst>
           </p:cNvPr>
@@ -23151,7 +23241,7 @@
           <p:cNvPr id="5" name="">
             <a:extLst xmlns:a="http://schemas.openxmlformats.org/drawingml/2006/main">
               <a:ext uri="{FF2B5EF4-FFF2-40B4-BE49-F238E27FC236}">
-                <a16:creationId xmlns:a16="http://schemas.microsoft.com/office/drawing/2014/main" id="{B7AC658C-2FBF-4178-924C-1E04844DE3F5}"/>
+                <a16:creationId xmlns:a16="http://schemas.microsoft.com/office/drawing/2014/main" id="{63B89627-282F-46D4-A411-E4E83FA88E94}"/>
               </a:ext>
             </a:extLst>
           </p:cNvPr>
@@ -23182,7 +23272,7 @@
           <p:cNvPr id="6" name="">
             <a:extLst xmlns:a="http://schemas.openxmlformats.org/drawingml/2006/main">
               <a:ext uri="{FF2B5EF4-FFF2-40B4-BE49-F238E27FC236}">
-                <a16:creationId xmlns:a16="http://schemas.microsoft.com/office/drawing/2014/main" id="{91898280-C76A-4FAD-8038-BDAEF7A6ACD2}"/>
+                <a16:creationId xmlns:a16="http://schemas.microsoft.com/office/drawing/2014/main" id="{FF18572C-2C4B-49D0-9B8C-DAE574AF7B94}"/>
               </a:ext>
             </a:extLst>
           </p:cNvPr>
@@ -23244,7 +23334,7 @@
           <p:cNvPr id="7" name="">
             <a:extLst xmlns:a="http://schemas.openxmlformats.org/drawingml/2006/main">
               <a:ext uri="{FF2B5EF4-FFF2-40B4-BE49-F238E27FC236}">
-                <a16:creationId xmlns:a16="http://schemas.microsoft.com/office/drawing/2014/main" id="{09C4FCBE-6AE7-4EC8-9E2A-ED185CAB5907}"/>
+                <a16:creationId xmlns:a16="http://schemas.microsoft.com/office/drawing/2014/main" id="{5C2040C6-6FF2-4A48-81AA-F20B28E0BAC3}"/>
               </a:ext>
             </a:extLst>
           </p:cNvPr>
@@ -23306,7 +23396,7 @@
           <p:cNvPr id="8" name="">
             <a:extLst xmlns:a="http://schemas.openxmlformats.org/drawingml/2006/main">
               <a:ext uri="{FF2B5EF4-FFF2-40B4-BE49-F238E27FC236}">
-                <a16:creationId xmlns:a16="http://schemas.microsoft.com/office/drawing/2014/main" id="{AE7C59E7-4548-4FEB-A2AA-2628214C2C07}"/>
+                <a16:creationId xmlns:a16="http://schemas.microsoft.com/office/drawing/2014/main" id="{D39A0AD7-F433-4F8B-BBFF-1493D94FE863}"/>
               </a:ext>
             </a:extLst>
           </p:cNvPr>
@@ -23368,7 +23458,7 @@
           <p:cNvPr id="9" name="">
             <a:extLst xmlns:a="http://schemas.openxmlformats.org/drawingml/2006/main">
               <a:ext uri="{FF2B5EF4-FFF2-40B4-BE49-F238E27FC236}">
-                <a16:creationId xmlns:a16="http://schemas.microsoft.com/office/drawing/2014/main" id="{75E4DA82-B3F8-44A8-A94E-229D19ED4636}"/>
+                <a16:creationId xmlns:a16="http://schemas.microsoft.com/office/drawing/2014/main" id="{039FDEF1-E33B-43F9-BB77-113A79F129BA}"/>
               </a:ext>
             </a:extLst>
           </p:cNvPr>
@@ -23399,7 +23489,7 @@
           <p:cNvPr id="10" name="">
             <a:extLst xmlns:a="http://schemas.openxmlformats.org/drawingml/2006/main">
               <a:ext uri="{FF2B5EF4-FFF2-40B4-BE49-F238E27FC236}">
-                <a16:creationId xmlns:a16="http://schemas.microsoft.com/office/drawing/2014/main" id="{831EDD76-F197-4D21-AC6E-B7942AEACA2F}"/>
+                <a16:creationId xmlns:a16="http://schemas.microsoft.com/office/drawing/2014/main" id="{FC9F9F88-7E02-4E36-9DF8-3DA6EF22ED61}"/>
               </a:ext>
             </a:extLst>
           </p:cNvPr>
@@ -23461,7 +23551,7 @@
           <p:cNvPr id="11" name="">
             <a:extLst xmlns:a="http://schemas.openxmlformats.org/drawingml/2006/main">
               <a:ext uri="{FF2B5EF4-FFF2-40B4-BE49-F238E27FC236}">
-                <a16:creationId xmlns:a16="http://schemas.microsoft.com/office/drawing/2014/main" id="{7119CEF1-4D22-453D-87B4-EAA29789471C}"/>
+                <a16:creationId xmlns:a16="http://schemas.microsoft.com/office/drawing/2014/main" id="{1EEA6CFB-F9E5-4CC6-8943-F043F5949529}"/>
               </a:ext>
             </a:extLst>
           </p:cNvPr>
@@ -23523,7 +23613,7 @@
           <p:cNvPr id="12" name="">
             <a:extLst xmlns:a="http://schemas.openxmlformats.org/drawingml/2006/main">
               <a:ext uri="{FF2B5EF4-FFF2-40B4-BE49-F238E27FC236}">
-                <a16:creationId xmlns:a16="http://schemas.microsoft.com/office/drawing/2014/main" id="{A5C21030-2365-4E4B-9956-70825448E81B}"/>
+                <a16:creationId xmlns:a16="http://schemas.microsoft.com/office/drawing/2014/main" id="{B5D97D75-8A3E-4C99-9F60-B4B8E013AE2A}"/>
               </a:ext>
             </a:extLst>
           </p:cNvPr>
@@ -23585,7 +23675,7 @@
           <p:cNvPr id="13" name="">
             <a:extLst xmlns:a="http://schemas.openxmlformats.org/drawingml/2006/main">
               <a:ext uri="{FF2B5EF4-FFF2-40B4-BE49-F238E27FC236}">
-                <a16:creationId xmlns:a16="http://schemas.microsoft.com/office/drawing/2014/main" id="{CA2EBDAB-BDE9-4E95-A9BA-B5D9E3E93B6C}"/>
+                <a16:creationId xmlns:a16="http://schemas.microsoft.com/office/drawing/2014/main" id="{771E8AF9-B63E-42E3-ABAD-07CFC71EE5C9}"/>
               </a:ext>
             </a:extLst>
           </p:cNvPr>
@@ -23616,7 +23706,7 @@
           <p:cNvPr id="14" name="">
             <a:extLst xmlns:a="http://schemas.openxmlformats.org/drawingml/2006/main">
               <a:ext uri="{FF2B5EF4-FFF2-40B4-BE49-F238E27FC236}">
-                <a16:creationId xmlns:a16="http://schemas.microsoft.com/office/drawing/2014/main" id="{92342C2A-3E11-4704-967F-DD6DE1D5D922}"/>
+                <a16:creationId xmlns:a16="http://schemas.microsoft.com/office/drawing/2014/main" id="{AA3E653F-C371-4AE9-A060-CBEE43D734F3}"/>
               </a:ext>
             </a:extLst>
           </p:cNvPr>
@@ -23678,7 +23768,7 @@
           <p:cNvPr id="15" name="">
             <a:extLst xmlns:a="http://schemas.openxmlformats.org/drawingml/2006/main">
               <a:ext uri="{FF2B5EF4-FFF2-40B4-BE49-F238E27FC236}">
-                <a16:creationId xmlns:a16="http://schemas.microsoft.com/office/drawing/2014/main" id="{56AEE54E-46A3-44FD-A1D6-DAD952F1EA99}"/>
+                <a16:creationId xmlns:a16="http://schemas.microsoft.com/office/drawing/2014/main" id="{667900E2-D344-4FF1-A113-3CBF47CA8E34}"/>
               </a:ext>
             </a:extLst>
           </p:cNvPr>
@@ -23740,7 +23830,7 @@
           <p:cNvPr id="16" name="">
             <a:extLst xmlns:a="http://schemas.openxmlformats.org/drawingml/2006/main">
               <a:ext uri="{FF2B5EF4-FFF2-40B4-BE49-F238E27FC236}">
-                <a16:creationId xmlns:a16="http://schemas.microsoft.com/office/drawing/2014/main" id="{0589A322-BD02-4104-90D7-675376E57D34}"/>
+                <a16:creationId xmlns:a16="http://schemas.microsoft.com/office/drawing/2014/main" id="{D9ED3AEB-F6DA-45FA-B105-7BB58DEB8549}"/>
               </a:ext>
             </a:extLst>
           </p:cNvPr>
@@ -23802,7 +23892,7 @@
           <p:cNvPr id="17" name="">
             <a:extLst xmlns:a="http://schemas.openxmlformats.org/drawingml/2006/main">
               <a:ext uri="{FF2B5EF4-FFF2-40B4-BE49-F238E27FC236}">
-                <a16:creationId xmlns:a16="http://schemas.microsoft.com/office/drawing/2014/main" id="{E5F5A6E5-0C75-4DE6-8BD2-658D63064248}"/>
+                <a16:creationId xmlns:a16="http://schemas.microsoft.com/office/drawing/2014/main" id="{48D02096-53F8-4F90-BEEA-185A101B5A15}"/>
               </a:ext>
             </a:extLst>
           </p:cNvPr>
@@ -23864,7 +23954,7 @@
           <p:cNvPr id="18" name="footer-rule-9">
             <a:extLst xmlns:a="http://schemas.openxmlformats.org/drawingml/2006/main">
               <a:ext uri="{FF2B5EF4-FFF2-40B4-BE49-F238E27FC236}">
-                <a16:creationId xmlns:a16="http://schemas.microsoft.com/office/drawing/2014/main" id="{CA27EBA5-DC57-4D64-B9FE-6E4E3A9EDF1D}"/>
+                <a16:creationId xmlns:a16="http://schemas.microsoft.com/office/drawing/2014/main" id="{F3043D58-D58A-484B-ABD0-A14F488C3495}"/>
               </a:ext>
             </a:extLst>
           </p:cNvPr>
@@ -23895,7 +23985,7 @@
           <p:cNvPr id="19" name="footer-label-9">
             <a:extLst xmlns:a="http://schemas.openxmlformats.org/drawingml/2006/main">
               <a:ext uri="{FF2B5EF4-FFF2-40B4-BE49-F238E27FC236}">
-                <a16:creationId xmlns:a16="http://schemas.microsoft.com/office/drawing/2014/main" id="{8CC059CF-137C-4241-9A4C-6FE3316C9EB1}"/>
+                <a16:creationId xmlns:a16="http://schemas.microsoft.com/office/drawing/2014/main" id="{91E632A4-B2DD-4AF8-8D34-C3938BEEBEA2}"/>
               </a:ext>
             </a:extLst>
           </p:cNvPr>
@@ -23957,7 +24047,7 @@
           <p:cNvPr id="20" name="footer-page-9">
             <a:extLst xmlns:a="http://schemas.openxmlformats.org/drawingml/2006/main">
               <a:ext uri="{FF2B5EF4-FFF2-40B4-BE49-F238E27FC236}">
-                <a16:creationId xmlns:a16="http://schemas.microsoft.com/office/drawing/2014/main" id="{24347561-ACD0-48F4-8062-D0F940BE6F93}"/>
+                <a16:creationId xmlns:a16="http://schemas.microsoft.com/office/drawing/2014/main" id="{D6FE0F49-F300-4A1B-9687-9FD157CD629C}"/>
               </a:ext>
             </a:extLst>
           </p:cNvPr>
@@ -24017,7 +24107,7 @@
     </p:spTree>
     <p:extLst>
       <p:ext uri="{BB962C8B-B14F-4D97-AF65-F5344CB8AC3E}">
-        <p14:creationId xmlns:p14="http://schemas.microsoft.com/office/powerpoint/2010/main" val="1221596429"/>
+        <p14:creationId xmlns:p14="http://schemas.microsoft.com/office/powerpoint/2010/main" val="1903182512"/>
       </p:ext>
     </p:extLst>
   </p:cSld>

--- a/docs/MSU-EVA-อบรมสายสนับสนุน-ฉบับวิทยากร.pptx
+++ b/docs/MSU-EVA-อบรมสายสนับสนุน-ฉบับวิทยากร.pptx
@@ -2,30 +2,30 @@
 <file path=ppt/presentation.xml><?xml version="1.0" encoding="utf-8"?>
 <p:presentation xmlns:p="http://schemas.openxmlformats.org/presentationml/2006/main">
   <p:sldMasterIdLst>
-    <p:sldMasterId xmlns:r="http://schemas.openxmlformats.org/officeDocument/2006/relationships" id="2147483648" r:id="R3e4d28daa68b4541"/>
+    <p:sldMasterId xmlns:r="http://schemas.openxmlformats.org/officeDocument/2006/relationships" id="2147483648" r:id="R542de0dd453f4eb8"/>
   </p:sldMasterIdLst>
   <p:notesMasterIdLst>
-    <p:notesMasterId xmlns:r="http://schemas.openxmlformats.org/officeDocument/2006/relationships" r:id="R08860f1f19104dcf"/>
+    <p:notesMasterId xmlns:r="http://schemas.openxmlformats.org/officeDocument/2006/relationships" r:id="R3446e9d90f3643b6"/>
   </p:notesMasterIdLst>
   <p:sldIdLst>
-    <p:sldId xmlns:r="http://schemas.openxmlformats.org/officeDocument/2006/relationships" id="256" r:id="R32c4444fe080448e"/>
-    <p:sldId xmlns:r="http://schemas.openxmlformats.org/officeDocument/2006/relationships" id="257" r:id="Re130338252404ac1"/>
-    <p:sldId xmlns:r="http://schemas.openxmlformats.org/officeDocument/2006/relationships" id="258" r:id="R1b65659df2a44a21"/>
-    <p:sldId xmlns:r="http://schemas.openxmlformats.org/officeDocument/2006/relationships" id="259" r:id="R627da5f63fb94af1"/>
-    <p:sldId xmlns:r="http://schemas.openxmlformats.org/officeDocument/2006/relationships" id="260" r:id="R549e549350724ee7"/>
-    <p:sldId xmlns:r="http://schemas.openxmlformats.org/officeDocument/2006/relationships" id="261" r:id="R0a7f2f74331f4efd"/>
-    <p:sldId xmlns:r="http://schemas.openxmlformats.org/officeDocument/2006/relationships" id="262" r:id="R7d3456ab7ddb4042"/>
-    <p:sldId xmlns:r="http://schemas.openxmlformats.org/officeDocument/2006/relationships" id="263" r:id="Rb34313a05c1741a3"/>
-    <p:sldId xmlns:r="http://schemas.openxmlformats.org/officeDocument/2006/relationships" id="264" r:id="Rd11c4ef00f9943e6"/>
-    <p:sldId xmlns:r="http://schemas.openxmlformats.org/officeDocument/2006/relationships" id="265" r:id="R8309b37730f148bb"/>
-    <p:sldId xmlns:r="http://schemas.openxmlformats.org/officeDocument/2006/relationships" id="266" r:id="R011b9bbe255f4908"/>
-    <p:sldId xmlns:r="http://schemas.openxmlformats.org/officeDocument/2006/relationships" id="267" r:id="Rc7fa449752014db1"/>
-    <p:sldId xmlns:r="http://schemas.openxmlformats.org/officeDocument/2006/relationships" id="268" r:id="Rd69ff265ce7946b0"/>
-    <p:sldId xmlns:r="http://schemas.openxmlformats.org/officeDocument/2006/relationships" id="269" r:id="Rce96eb67928f401a"/>
-    <p:sldId xmlns:r="http://schemas.openxmlformats.org/officeDocument/2006/relationships" id="270" r:id="Rfcb4e59003a149f1"/>
-    <p:sldId xmlns:r="http://schemas.openxmlformats.org/officeDocument/2006/relationships" id="271" r:id="R7cbfaa0aa0d7414c"/>
-    <p:sldId xmlns:r="http://schemas.openxmlformats.org/officeDocument/2006/relationships" id="272" r:id="R1181d4b9781f4377"/>
-    <p:sldId xmlns:r="http://schemas.openxmlformats.org/officeDocument/2006/relationships" id="273" r:id="R83e918546a704fe2"/>
+    <p:sldId xmlns:r="http://schemas.openxmlformats.org/officeDocument/2006/relationships" id="256" r:id="Rfe5ce997dbe0479a"/>
+    <p:sldId xmlns:r="http://schemas.openxmlformats.org/officeDocument/2006/relationships" id="257" r:id="Rba927820da8e47d5"/>
+    <p:sldId xmlns:r="http://schemas.openxmlformats.org/officeDocument/2006/relationships" id="258" r:id="R69ebc3e23a7d46d4"/>
+    <p:sldId xmlns:r="http://schemas.openxmlformats.org/officeDocument/2006/relationships" id="259" r:id="R0d006ce0a6544878"/>
+    <p:sldId xmlns:r="http://schemas.openxmlformats.org/officeDocument/2006/relationships" id="260" r:id="R35fff00243724362"/>
+    <p:sldId xmlns:r="http://schemas.openxmlformats.org/officeDocument/2006/relationships" id="261" r:id="R3b12ff39b01d4c14"/>
+    <p:sldId xmlns:r="http://schemas.openxmlformats.org/officeDocument/2006/relationships" id="262" r:id="Rb09d20ae41164ba8"/>
+    <p:sldId xmlns:r="http://schemas.openxmlformats.org/officeDocument/2006/relationships" id="263" r:id="Rb58c910f8e134592"/>
+    <p:sldId xmlns:r="http://schemas.openxmlformats.org/officeDocument/2006/relationships" id="264" r:id="Raf4c631bf91643e4"/>
+    <p:sldId xmlns:r="http://schemas.openxmlformats.org/officeDocument/2006/relationships" id="265" r:id="R77bfd812184646c2"/>
+    <p:sldId xmlns:r="http://schemas.openxmlformats.org/officeDocument/2006/relationships" id="266" r:id="Rd32b3e9b1eeb4fd3"/>
+    <p:sldId xmlns:r="http://schemas.openxmlformats.org/officeDocument/2006/relationships" id="267" r:id="Rc66f31365a4b40d3"/>
+    <p:sldId xmlns:r="http://schemas.openxmlformats.org/officeDocument/2006/relationships" id="268" r:id="Rd37bf5b957ba464a"/>
+    <p:sldId xmlns:r="http://schemas.openxmlformats.org/officeDocument/2006/relationships" id="269" r:id="Rd49287a2d8894db8"/>
+    <p:sldId xmlns:r="http://schemas.openxmlformats.org/officeDocument/2006/relationships" id="270" r:id="Re07abf879bfa4356"/>
+    <p:sldId xmlns:r="http://schemas.openxmlformats.org/officeDocument/2006/relationships" id="271" r:id="Rce2623c02893421f"/>
+    <p:sldId xmlns:r="http://schemas.openxmlformats.org/officeDocument/2006/relationships" id="272" r:id="R27a27a06599a42ff"/>
+    <p:sldId xmlns:r="http://schemas.openxmlformats.org/officeDocument/2006/relationships" id="273" r:id="Rade86bfdf394494f"/>
   </p:sldIdLst>
   <p:sldSz cx="12192000" cy="6858000"/>
   <p:notesSz cx="6858000" cy="9144000"/>
@@ -754,7 +754,7 @@
           <a:lstStyle xmlns:a="http://schemas.openxmlformats.org/drawingml/2006/main"/>
           <a:p xmlns:a="http://schemas.openxmlformats.org/drawingml/2006/main">
             <a:r>
-              <a:t>[พูด] ก่อนส่ง ให้ตรวจ 3 เรื่องครับ หนึ่ง คะแนนที่ระบบคำนวณสมเหตุสมผลหรือไม่ สอง ลิงก์หลักฐานเปิดได้จากบัญชีผู้ประเมินหรือไม่ และสาม หลักฐานตรงกับกิจกรรมหรือไม่ ควรตั้งชื่อไฟล์ให้รู้ว่าเป็นหลักฐานของรายการใดครับ</a:t>
+              <a:t>[พูด] ก่อนส่ง ให้ตรวจ 3 เรื่องครับ หนึ่ง คะแนนที่ระบบคำนวณสมเหตุสมผลหรือไม่ สอง ลิงก์หลักฐานเปิดได้จากบัญชีผู้ประเมินหรือไม่ และสาม เมื่อเปิดลิงก์แล้วรู้ว่าเป็นหลักฐานของกิจกรรมใดครับ</a:t>
             </a:r>
           </a:p>
           <a:p xmlns:a="http://schemas.openxmlformats.org/drawingml/2006/main">
@@ -1419,7 +1419,7 @@
           </a:p>
           <a:p xmlns:a="http://schemas.openxmlformats.org/drawingml/2006/main">
             <a:r>
-              <a:t>[พูด] ถ้าไม่มีคำถามเพิ่มเติม ขอให้จำไว้ครับ ตรวจงานให้ถูก กรอกข้อมูลให้ครบ และบันทึกร่างก่อนส่งจริง ขอบคุณทุกท่านครับ</a:t>
+              <a:t>[พูด] หากท่านใดมีคำถามหรือข้อเสนอแนะเพิ่มเติม สามารถแจ้งได้เลยนะครับ ข้อมูลจากทุกท่านจะช่วยให้ทีมงานปรับระบบให้พร้อมใช้งานมากยิ่งขึ้น ขอบพระคุณทุกท่านที่สละเวลาร่วมทดสอบระบบครับ</a:t>
             </a:r>
           </a:p>
           <a:p xmlns:a="http://schemas.openxmlformats.org/drawingml/2006/main">
@@ -2282,7 +2282,7 @@
   </p:cSld>
   <p:clrMap bg1="lt1" tx1="dk1" bg2="lt2" tx2="dk2" accent1="accent1" accent2="accent2" accent3="accent3" accent4="accent4" accent5="accent5" accent6="accent6" hlink="hlink" folHlink="folHlink"/>
   <p:sldLayoutIdLst>
-    <p:sldLayoutId xmlns:r="http://schemas.openxmlformats.org/officeDocument/2006/relationships" id="2147483649" r:id="R134d9e2d5b404f02"/>
+    <p:sldLayoutId xmlns:r="http://schemas.openxmlformats.org/officeDocument/2006/relationships" id="2147483649" r:id="Rbf5dc0516a62478a"/>
   </p:sldLayoutIdLst>
   <p:txStyles>
     <p:titleStyle>
@@ -2837,7 +2837,7 @@
           <p:nvPr/>
         </p:nvPicPr>
         <p:blipFill>
-          <a:blip xmlns:r="http://schemas.openxmlformats.org/officeDocument/2006/relationships" xmlns:a="http://schemas.openxmlformats.org/drawingml/2006/main" r:embed="R5a7e041991344b65"/>
+          <a:blip xmlns:r="http://schemas.openxmlformats.org/officeDocument/2006/relationships" xmlns:a="http://schemas.openxmlformats.org/drawingml/2006/main" r:embed="Rf07f3dfd5b4d4b62"/>
           <a:srcRect xmlns:a="http://schemas.openxmlformats.org/drawingml/2006/main" l="2579" t="0" r="2579" b="0"/>
           <a:stretch xmlns:a="http://schemas.openxmlformats.org/drawingml/2006/main">
             <a:fillRect l="0" t="0" r="0" b="0"/>
@@ -2858,7 +2858,7 @@
           <p:cNvPr id="2" name="cover-panel">
             <a:extLst xmlns:a="http://schemas.openxmlformats.org/drawingml/2006/main">
               <a:ext uri="{FF2B5EF4-FFF2-40B4-BE49-F238E27FC236}">
-                <a16:creationId xmlns:a16="http://schemas.microsoft.com/office/drawing/2014/main" id="{C886FFCE-30C1-411B-98D9-5BF0C7144DB6}"/>
+                <a16:creationId xmlns:a16="http://schemas.microsoft.com/office/drawing/2014/main" id="{28822D9E-1CA2-48BD-B1BC-2D049BF597C9}"/>
               </a:ext>
             </a:extLst>
           </p:cNvPr>
@@ -2889,7 +2889,7 @@
           <p:cNvPr id="3" name="cover-accent">
             <a:extLst xmlns:a="http://schemas.openxmlformats.org/drawingml/2006/main">
               <a:ext uri="{FF2B5EF4-FFF2-40B4-BE49-F238E27FC236}">
-                <a16:creationId xmlns:a16="http://schemas.microsoft.com/office/drawing/2014/main" id="{3DB6192F-8404-4CB8-AED7-52CF6550F029}"/>
+                <a16:creationId xmlns:a16="http://schemas.microsoft.com/office/drawing/2014/main" id="{2B0683E5-5E67-4DC4-A0FE-91E56EFC7B8E}"/>
               </a:ext>
             </a:extLst>
           </p:cNvPr>
@@ -2924,7 +2924,7 @@
           <p:nvPr/>
         </p:nvPicPr>
         <p:blipFill>
-          <a:blip xmlns:r="http://schemas.openxmlformats.org/officeDocument/2006/relationships" xmlns:a="http://schemas.openxmlformats.org/drawingml/2006/main" r:embed="R30d616b56ac94790"/>
+          <a:blip xmlns:r="http://schemas.openxmlformats.org/officeDocument/2006/relationships" xmlns:a="http://schemas.openxmlformats.org/drawingml/2006/main" r:embed="R3edb15a2b1034379"/>
           <a:stretch xmlns:a="http://schemas.openxmlformats.org/drawingml/2006/main"/>
         </p:blipFill>
         <p:spPr>
@@ -2942,7 +2942,7 @@
           <p:cNvPr id="5" name="cover-institution">
             <a:extLst xmlns:a="http://schemas.openxmlformats.org/drawingml/2006/main">
               <a:ext uri="{FF2B5EF4-FFF2-40B4-BE49-F238E27FC236}">
-                <a16:creationId xmlns:a16="http://schemas.microsoft.com/office/drawing/2014/main" id="{AB9AD569-D731-42E7-B2D6-322C9CD26794}"/>
+                <a16:creationId xmlns:a16="http://schemas.microsoft.com/office/drawing/2014/main" id="{B5B50923-91E9-47DE-9191-7F3D3FFD56DA}"/>
               </a:ext>
             </a:extLst>
           </p:cNvPr>
@@ -3004,7 +3004,7 @@
           <p:cNvPr id="6" name="cover-session">
             <a:extLst xmlns:a="http://schemas.openxmlformats.org/drawingml/2006/main">
               <a:ext uri="{FF2B5EF4-FFF2-40B4-BE49-F238E27FC236}">
-                <a16:creationId xmlns:a16="http://schemas.microsoft.com/office/drawing/2014/main" id="{BE97368B-84C9-4BDA-8F25-5EF3EE207FB9}"/>
+                <a16:creationId xmlns:a16="http://schemas.microsoft.com/office/drawing/2014/main" id="{A56EE96C-0603-4EDC-9CD9-8F46FA996AF5}"/>
               </a:ext>
             </a:extLst>
           </p:cNvPr>
@@ -3066,7 +3066,7 @@
           <p:cNvPr id="7" name="cover-title">
             <a:extLst xmlns:a="http://schemas.openxmlformats.org/drawingml/2006/main">
               <a:ext uri="{FF2B5EF4-FFF2-40B4-BE49-F238E27FC236}">
-                <a16:creationId xmlns:a16="http://schemas.microsoft.com/office/drawing/2014/main" id="{1D634CD6-65E3-44C0-9368-3DD5AC69796E}"/>
+                <a16:creationId xmlns:a16="http://schemas.microsoft.com/office/drawing/2014/main" id="{88489A78-30CC-4181-9732-7A2524FB8EBE}"/>
               </a:ext>
             </a:extLst>
           </p:cNvPr>
@@ -3128,7 +3128,7 @@
           <p:cNvPr id="8" name="cover-system-short-name">
             <a:extLst xmlns:a="http://schemas.openxmlformats.org/drawingml/2006/main">
               <a:ext uri="{FF2B5EF4-FFF2-40B4-BE49-F238E27FC236}">
-                <a16:creationId xmlns:a16="http://schemas.microsoft.com/office/drawing/2014/main" id="{B624A514-1409-4B68-9772-C2FCFDC24624}"/>
+                <a16:creationId xmlns:a16="http://schemas.microsoft.com/office/drawing/2014/main" id="{E64252CE-55C1-4872-AE34-816FD9D62705}"/>
               </a:ext>
             </a:extLst>
           </p:cNvPr>
@@ -3190,7 +3190,7 @@
           <p:cNvPr id="9" name="cover-gold-rule">
             <a:extLst xmlns:a="http://schemas.openxmlformats.org/drawingml/2006/main">
               <a:ext uri="{FF2B5EF4-FFF2-40B4-BE49-F238E27FC236}">
-                <a16:creationId xmlns:a16="http://schemas.microsoft.com/office/drawing/2014/main" id="{C00A61CA-EA99-4F69-88D7-53CC4F017E51}"/>
+                <a16:creationId xmlns:a16="http://schemas.microsoft.com/office/drawing/2014/main" id="{DB36B7CF-E7B0-4C22-A6B3-5C9A772FA2A8}"/>
               </a:ext>
             </a:extLst>
           </p:cNvPr>
@@ -3221,7 +3221,7 @@
           <p:cNvPr id="10" name="cover-promise">
             <a:extLst xmlns:a="http://schemas.openxmlformats.org/drawingml/2006/main">
               <a:ext uri="{FF2B5EF4-FFF2-40B4-BE49-F238E27FC236}">
-                <a16:creationId xmlns:a16="http://schemas.microsoft.com/office/drawing/2014/main" id="{B02FEA91-1203-4020-B53E-A7008D99712B}"/>
+                <a16:creationId xmlns:a16="http://schemas.microsoft.com/office/drawing/2014/main" id="{B69719CC-CADF-4CF7-8ABF-C8451F51DBFC}"/>
               </a:ext>
             </a:extLst>
           </p:cNvPr>
@@ -3283,7 +3283,7 @@
           <p:cNvPr id="11" name="cover-style">
             <a:extLst xmlns:a="http://schemas.openxmlformats.org/drawingml/2006/main">
               <a:ext uri="{FF2B5EF4-FFF2-40B4-BE49-F238E27FC236}">
-                <a16:creationId xmlns:a16="http://schemas.microsoft.com/office/drawing/2014/main" id="{ED9A19D0-6970-4679-8E93-6C17E82B02C2}"/>
+                <a16:creationId xmlns:a16="http://schemas.microsoft.com/office/drawing/2014/main" id="{3816AA13-CB9A-4E10-8B1B-928E1A0E8C47}"/>
               </a:ext>
             </a:extLst>
           </p:cNvPr>
@@ -3349,7 +3349,7 @@
           <p:nvPr/>
         </p:nvPicPr>
         <p:blipFill>
-          <a:blip xmlns:r="http://schemas.openxmlformats.org/officeDocument/2006/relationships" xmlns:a="http://schemas.openxmlformats.org/drawingml/2006/main" r:embed="Rc2fd24c1943340b5"/>
+          <a:blip xmlns:r="http://schemas.openxmlformats.org/officeDocument/2006/relationships" xmlns:a="http://schemas.openxmlformats.org/drawingml/2006/main" r:embed="R0ea1446bd37d47a1"/>
           <a:stretch xmlns:a="http://schemas.openxmlformats.org/drawingml/2006/main"/>
         </p:blipFill>
         <p:spPr>
@@ -3365,7 +3365,7 @@
     </p:spTree>
     <p:extLst>
       <p:ext uri="{BB962C8B-B14F-4D97-AF65-F5344CB8AC3E}">
-        <p14:creationId xmlns:p14="http://schemas.microsoft.com/office/powerpoint/2010/main" val="2007777888"/>
+        <p14:creationId xmlns:p14="http://schemas.microsoft.com/office/powerpoint/2010/main" val="266104841"/>
       </p:ext>
     </p:extLst>
   </p:cSld>
@@ -3396,7 +3396,7 @@
           <p:cNvPr id="15" name="side-accent-10">
             <a:extLst xmlns:a="http://schemas.openxmlformats.org/drawingml/2006/main">
               <a:ext uri="{FF2B5EF4-FFF2-40B4-BE49-F238E27FC236}">
-                <a16:creationId xmlns:a16="http://schemas.microsoft.com/office/drawing/2014/main" id="{80A7E8E8-9DC3-4AE1-AC49-1017FAB86176}"/>
+                <a16:creationId xmlns:a16="http://schemas.microsoft.com/office/drawing/2014/main" id="{B994037B-5FA2-4CD7-B041-E281CF4B11C8}"/>
               </a:ext>
             </a:extLst>
           </p:cNvPr>
@@ -3427,7 +3427,7 @@
           <p:cNvPr id="2" name="kicker-10">
             <a:extLst xmlns:a="http://schemas.openxmlformats.org/drawingml/2006/main">
               <a:ext uri="{FF2B5EF4-FFF2-40B4-BE49-F238E27FC236}">
-                <a16:creationId xmlns:a16="http://schemas.microsoft.com/office/drawing/2014/main" id="{46D0FBA4-6459-42BB-A103-41F123765DA1}"/>
+                <a16:creationId xmlns:a16="http://schemas.microsoft.com/office/drawing/2014/main" id="{45C8F0A8-53CA-43A3-83C4-5636D93D4959}"/>
               </a:ext>
             </a:extLst>
           </p:cNvPr>
@@ -3489,7 +3489,7 @@
           <p:cNvPr id="3" name="title-10">
             <a:extLst xmlns:a="http://schemas.openxmlformats.org/drawingml/2006/main">
               <a:ext uri="{FF2B5EF4-FFF2-40B4-BE49-F238E27FC236}">
-                <a16:creationId xmlns:a16="http://schemas.microsoft.com/office/drawing/2014/main" id="{CC3E5ECE-6DD4-4834-9ED0-C558FA7BC57B}"/>
+                <a16:creationId xmlns:a16="http://schemas.microsoft.com/office/drawing/2014/main" id="{9B3ED643-52CF-4AA2-BF4C-BA86F75D6609}"/>
               </a:ext>
             </a:extLst>
           </p:cNvPr>
@@ -3551,7 +3551,7 @@
           <p:cNvPr id="4" name="">
             <a:extLst xmlns:a="http://schemas.openxmlformats.org/drawingml/2006/main">
               <a:ext uri="{FF2B5EF4-FFF2-40B4-BE49-F238E27FC236}">
-                <a16:creationId xmlns:a16="http://schemas.microsoft.com/office/drawing/2014/main" id="{CD30C16F-59A1-4C5B-87D8-47758A961486}"/>
+                <a16:creationId xmlns:a16="http://schemas.microsoft.com/office/drawing/2014/main" id="{E2EAC921-5368-4859-B1E2-1D948737944C}"/>
               </a:ext>
             </a:extLst>
           </p:cNvPr>
@@ -3613,7 +3613,7 @@
           <p:cNvPr id="5" name="">
             <a:extLst xmlns:a="http://schemas.openxmlformats.org/drawingml/2006/main">
               <a:ext uri="{FF2B5EF4-FFF2-40B4-BE49-F238E27FC236}">
-                <a16:creationId xmlns:a16="http://schemas.microsoft.com/office/drawing/2014/main" id="{115B636A-5F10-4469-B2BF-19ABBC6F5BF6}"/>
+                <a16:creationId xmlns:a16="http://schemas.microsoft.com/office/drawing/2014/main" id="{5A078A87-D451-4B1E-B173-5886ACD88A78}"/>
               </a:ext>
             </a:extLst>
           </p:cNvPr>
@@ -3675,7 +3675,7 @@
           <p:cNvPr id="6" name="">
             <a:extLst xmlns:a="http://schemas.openxmlformats.org/drawingml/2006/main">
               <a:ext uri="{FF2B5EF4-FFF2-40B4-BE49-F238E27FC236}">
-                <a16:creationId xmlns:a16="http://schemas.microsoft.com/office/drawing/2014/main" id="{1FF46C46-99E0-4568-B8A2-60F9126F11F0}"/>
+                <a16:creationId xmlns:a16="http://schemas.microsoft.com/office/drawing/2014/main" id="{4855D4F9-6DF3-468D-83E9-419B1F3B3BD5}"/>
               </a:ext>
             </a:extLst>
           </p:cNvPr>
@@ -3743,7 +3743,7 @@
           <p:cNvPr id="7" name="">
             <a:extLst xmlns:a="http://schemas.openxmlformats.org/drawingml/2006/main">
               <a:ext uri="{FF2B5EF4-FFF2-40B4-BE49-F238E27FC236}">
-                <a16:creationId xmlns:a16="http://schemas.microsoft.com/office/drawing/2014/main" id="{38C04602-85F4-4348-B491-92130615306E}"/>
+                <a16:creationId xmlns:a16="http://schemas.microsoft.com/office/drawing/2014/main" id="{4D4B7AED-08CA-42C2-89F6-970CFA619C19}"/>
               </a:ext>
             </a:extLst>
           </p:cNvPr>
@@ -3805,7 +3805,7 @@
           <p:cNvPr id="8" name="">
             <a:extLst xmlns:a="http://schemas.openxmlformats.org/drawingml/2006/main">
               <a:ext uri="{FF2B5EF4-FFF2-40B4-BE49-F238E27FC236}">
-                <a16:creationId xmlns:a16="http://schemas.microsoft.com/office/drawing/2014/main" id="{C2B3D2F4-07B0-4B05-87D3-3E910167CC77}"/>
+                <a16:creationId xmlns:a16="http://schemas.microsoft.com/office/drawing/2014/main" id="{38A3FB20-337D-455A-8305-50DBB4B0C256}"/>
               </a:ext>
             </a:extLst>
           </p:cNvPr>
@@ -3873,7 +3873,7 @@
           <p:cNvPr id="9" name="">
             <a:extLst xmlns:a="http://schemas.openxmlformats.org/drawingml/2006/main">
               <a:ext uri="{FF2B5EF4-FFF2-40B4-BE49-F238E27FC236}">
-                <a16:creationId xmlns:a16="http://schemas.microsoft.com/office/drawing/2014/main" id="{D17EAB99-E354-4472-AEFF-DD0D26DC4A1C}"/>
+                <a16:creationId xmlns:a16="http://schemas.microsoft.com/office/drawing/2014/main" id="{B4F4F875-CCDC-48A0-93CA-C85E1CAB5F5A}"/>
               </a:ext>
             </a:extLst>
           </p:cNvPr>
@@ -3904,7 +3904,7 @@
           <p:cNvPr id="10" name="">
             <a:extLst xmlns:a="http://schemas.openxmlformats.org/drawingml/2006/main">
               <a:ext uri="{FF2B5EF4-FFF2-40B4-BE49-F238E27FC236}">
-                <a16:creationId xmlns:a16="http://schemas.microsoft.com/office/drawing/2014/main" id="{B4AB0031-BD6B-4545-B38F-3F6C3D2E8CA0}"/>
+                <a16:creationId xmlns:a16="http://schemas.microsoft.com/office/drawing/2014/main" id="{ECEC2F38-6D76-4AED-AC4A-62C18408B672}"/>
               </a:ext>
             </a:extLst>
           </p:cNvPr>
@@ -3966,7 +3966,7 @@
           <p:cNvPr id="11" name="">
             <a:extLst xmlns:a="http://schemas.openxmlformats.org/drawingml/2006/main">
               <a:ext uri="{FF2B5EF4-FFF2-40B4-BE49-F238E27FC236}">
-                <a16:creationId xmlns:a16="http://schemas.microsoft.com/office/drawing/2014/main" id="{B9C437BF-E7A7-4E35-B14D-95AC67A85219}"/>
+                <a16:creationId xmlns:a16="http://schemas.microsoft.com/office/drawing/2014/main" id="{86E7744B-77E8-4C12-B8EA-E96ABC898B3D}"/>
               </a:ext>
             </a:extLst>
           </p:cNvPr>
@@ -4028,7 +4028,7 @@
           <p:cNvPr id="12" name="footer-rule-10">
             <a:extLst xmlns:a="http://schemas.openxmlformats.org/drawingml/2006/main">
               <a:ext uri="{FF2B5EF4-FFF2-40B4-BE49-F238E27FC236}">
-                <a16:creationId xmlns:a16="http://schemas.microsoft.com/office/drawing/2014/main" id="{AF3C5FE1-97D5-4034-9213-25612450E67F}"/>
+                <a16:creationId xmlns:a16="http://schemas.microsoft.com/office/drawing/2014/main" id="{36C80AFA-AE5A-4694-AD7F-6B6521D162F7}"/>
               </a:ext>
             </a:extLst>
           </p:cNvPr>
@@ -4059,7 +4059,7 @@
           <p:cNvPr id="13" name="footer-label-10">
             <a:extLst xmlns:a="http://schemas.openxmlformats.org/drawingml/2006/main">
               <a:ext uri="{FF2B5EF4-FFF2-40B4-BE49-F238E27FC236}">
-                <a16:creationId xmlns:a16="http://schemas.microsoft.com/office/drawing/2014/main" id="{51CC703F-F07C-4E91-8891-A12599EAC446}"/>
+                <a16:creationId xmlns:a16="http://schemas.microsoft.com/office/drawing/2014/main" id="{539DA4A6-8370-4F62-A715-D647731B6F9B}"/>
               </a:ext>
             </a:extLst>
           </p:cNvPr>
@@ -4121,7 +4121,7 @@
           <p:cNvPr id="14" name="footer-page-10">
             <a:extLst xmlns:a="http://schemas.openxmlformats.org/drawingml/2006/main">
               <a:ext uri="{FF2B5EF4-FFF2-40B4-BE49-F238E27FC236}">
-                <a16:creationId xmlns:a16="http://schemas.microsoft.com/office/drawing/2014/main" id="{C28B5D5F-36EE-4B50-B948-A9BC39765BAB}"/>
+                <a16:creationId xmlns:a16="http://schemas.microsoft.com/office/drawing/2014/main" id="{D26A8D7D-CB7A-49BA-A468-A795D2DA2CA2}"/>
               </a:ext>
             </a:extLst>
           </p:cNvPr>
@@ -4181,7 +4181,7 @@
     </p:spTree>
     <p:extLst>
       <p:ext uri="{BB962C8B-B14F-4D97-AF65-F5344CB8AC3E}">
-        <p14:creationId xmlns:p14="http://schemas.microsoft.com/office/powerpoint/2010/main" val="1970675471"/>
+        <p14:creationId xmlns:p14="http://schemas.microsoft.com/office/powerpoint/2010/main" val="117964270"/>
       </p:ext>
     </p:extLst>
   </p:cSld>
@@ -4212,7 +4212,7 @@
           <p:cNvPr id="17" name="side-accent-11">
             <a:extLst xmlns:a="http://schemas.openxmlformats.org/drawingml/2006/main">
               <a:ext uri="{FF2B5EF4-FFF2-40B4-BE49-F238E27FC236}">
-                <a16:creationId xmlns:a16="http://schemas.microsoft.com/office/drawing/2014/main" id="{4CBDF5AB-785D-4363-8159-9C2D1B2B93A9}"/>
+                <a16:creationId xmlns:a16="http://schemas.microsoft.com/office/drawing/2014/main" id="{2AB9894F-F33E-446C-92BE-352E55F4FBFB}"/>
               </a:ext>
             </a:extLst>
           </p:cNvPr>
@@ -4243,7 +4243,7 @@
           <p:cNvPr id="2" name="kicker-11">
             <a:extLst xmlns:a="http://schemas.openxmlformats.org/drawingml/2006/main">
               <a:ext uri="{FF2B5EF4-FFF2-40B4-BE49-F238E27FC236}">
-                <a16:creationId xmlns:a16="http://schemas.microsoft.com/office/drawing/2014/main" id="{5E5078DE-8511-4E84-B879-60D076AF3B94}"/>
+                <a16:creationId xmlns:a16="http://schemas.microsoft.com/office/drawing/2014/main" id="{32731524-203E-4FFC-A943-92ED88FA5A61}"/>
               </a:ext>
             </a:extLst>
           </p:cNvPr>
@@ -4305,7 +4305,7 @@
           <p:cNvPr id="3" name="title-11">
             <a:extLst xmlns:a="http://schemas.openxmlformats.org/drawingml/2006/main">
               <a:ext uri="{FF2B5EF4-FFF2-40B4-BE49-F238E27FC236}">
-                <a16:creationId xmlns:a16="http://schemas.microsoft.com/office/drawing/2014/main" id="{6560E194-78C6-46A1-A2F9-CB812D5B0EE1}"/>
+                <a16:creationId xmlns:a16="http://schemas.microsoft.com/office/drawing/2014/main" id="{FCB33C47-09BC-4D2E-8263-DFB5EF53139B}"/>
               </a:ext>
             </a:extLst>
           </p:cNvPr>
@@ -4367,7 +4367,7 @@
           <p:cNvPr id="4" name="">
             <a:extLst xmlns:a="http://schemas.openxmlformats.org/drawingml/2006/main">
               <a:ext uri="{FF2B5EF4-FFF2-40B4-BE49-F238E27FC236}">
-                <a16:creationId xmlns:a16="http://schemas.microsoft.com/office/drawing/2014/main" id="{8DC2158A-7DC6-4315-AB34-C097B78582ED}"/>
+                <a16:creationId xmlns:a16="http://schemas.microsoft.com/office/drawing/2014/main" id="{79569DE0-E22E-4039-B6D8-5B8283E55497}"/>
               </a:ext>
             </a:extLst>
           </p:cNvPr>
@@ -4402,7 +4402,7 @@
           <p:cNvPr id="5" name="">
             <a:extLst xmlns:a="http://schemas.openxmlformats.org/drawingml/2006/main">
               <a:ext uri="{FF2B5EF4-FFF2-40B4-BE49-F238E27FC236}">
-                <a16:creationId xmlns:a16="http://schemas.microsoft.com/office/drawing/2014/main" id="{C667EA34-EE9C-4037-B579-1F66C2C8D9E3}"/>
+                <a16:creationId xmlns:a16="http://schemas.microsoft.com/office/drawing/2014/main" id="{29A06F2A-50CF-4111-8E8E-BB855275D3B5}"/>
               </a:ext>
             </a:extLst>
           </p:cNvPr>
@@ -4464,7 +4464,7 @@
           <p:cNvPr id="6" name="">
             <a:extLst xmlns:a="http://schemas.openxmlformats.org/drawingml/2006/main">
               <a:ext uri="{FF2B5EF4-FFF2-40B4-BE49-F238E27FC236}">
-                <a16:creationId xmlns:a16="http://schemas.microsoft.com/office/drawing/2014/main" id="{EA0CB0C7-E364-462B-94AD-85EBFF22941D}"/>
+                <a16:creationId xmlns:a16="http://schemas.microsoft.com/office/drawing/2014/main" id="{BBD8EBBC-1315-4C82-9C7C-6E1C0D050818}"/>
               </a:ext>
             </a:extLst>
           </p:cNvPr>
@@ -4526,7 +4526,7 @@
           <p:cNvPr id="7" name="">
             <a:extLst xmlns:a="http://schemas.openxmlformats.org/drawingml/2006/main">
               <a:ext uri="{FF2B5EF4-FFF2-40B4-BE49-F238E27FC236}">
-                <a16:creationId xmlns:a16="http://schemas.microsoft.com/office/drawing/2014/main" id="{7292B08A-38AA-45FD-987A-7C1E69B976EC}"/>
+                <a16:creationId xmlns:a16="http://schemas.microsoft.com/office/drawing/2014/main" id="{F3F5E769-420D-4FF4-80BC-B093B9DF5282}"/>
               </a:ext>
             </a:extLst>
           </p:cNvPr>
@@ -4561,7 +4561,7 @@
           <p:cNvPr id="8" name="">
             <a:extLst xmlns:a="http://schemas.openxmlformats.org/drawingml/2006/main">
               <a:ext uri="{FF2B5EF4-FFF2-40B4-BE49-F238E27FC236}">
-                <a16:creationId xmlns:a16="http://schemas.microsoft.com/office/drawing/2014/main" id="{B03BEDCF-3681-48F2-9B94-EEB6642AB33C}"/>
+                <a16:creationId xmlns:a16="http://schemas.microsoft.com/office/drawing/2014/main" id="{9C7B5F38-8355-444A-B9DB-55C1CC1EB6E0}"/>
               </a:ext>
             </a:extLst>
           </p:cNvPr>
@@ -4623,7 +4623,7 @@
           <p:cNvPr id="9" name="">
             <a:extLst xmlns:a="http://schemas.openxmlformats.org/drawingml/2006/main">
               <a:ext uri="{FF2B5EF4-FFF2-40B4-BE49-F238E27FC236}">
-                <a16:creationId xmlns:a16="http://schemas.microsoft.com/office/drawing/2014/main" id="{4CEFC062-E97A-414F-89BF-058939242EFA}"/>
+                <a16:creationId xmlns:a16="http://schemas.microsoft.com/office/drawing/2014/main" id="{10BC24B6-E2B6-4994-A7B3-E61F0C6DE169}"/>
               </a:ext>
             </a:extLst>
           </p:cNvPr>
@@ -4685,7 +4685,7 @@
           <p:cNvPr id="10" name="">
             <a:extLst xmlns:a="http://schemas.openxmlformats.org/drawingml/2006/main">
               <a:ext uri="{FF2B5EF4-FFF2-40B4-BE49-F238E27FC236}">
-                <a16:creationId xmlns:a16="http://schemas.microsoft.com/office/drawing/2014/main" id="{049E0298-051C-493F-AB09-1F87D8A80BD6}"/>
+                <a16:creationId xmlns:a16="http://schemas.microsoft.com/office/drawing/2014/main" id="{0FADDFAC-2E0B-4861-A4F3-CA8BE365D3EA}"/>
               </a:ext>
             </a:extLst>
           </p:cNvPr>
@@ -4720,7 +4720,7 @@
           <p:cNvPr id="11" name="">
             <a:extLst xmlns:a="http://schemas.openxmlformats.org/drawingml/2006/main">
               <a:ext uri="{FF2B5EF4-FFF2-40B4-BE49-F238E27FC236}">
-                <a16:creationId xmlns:a16="http://schemas.microsoft.com/office/drawing/2014/main" id="{FDAE6D05-8D7B-43F5-B90D-B5366CD8DA01}"/>
+                <a16:creationId xmlns:a16="http://schemas.microsoft.com/office/drawing/2014/main" id="{3F329D03-01B1-4908-BC4F-C380EF866B87}"/>
               </a:ext>
             </a:extLst>
           </p:cNvPr>
@@ -4782,7 +4782,7 @@
           <p:cNvPr id="12" name="">
             <a:extLst xmlns:a="http://schemas.openxmlformats.org/drawingml/2006/main">
               <a:ext uri="{FF2B5EF4-FFF2-40B4-BE49-F238E27FC236}">
-                <a16:creationId xmlns:a16="http://schemas.microsoft.com/office/drawing/2014/main" id="{327905FD-B379-482B-AAF6-0FDE0E319632}"/>
+                <a16:creationId xmlns:a16="http://schemas.microsoft.com/office/drawing/2014/main" id="{DECAAC5F-3A64-4B88-85E3-EC6EF1CA4EA2}"/>
               </a:ext>
             </a:extLst>
           </p:cNvPr>
@@ -4844,7 +4844,7 @@
           <p:cNvPr id="13" name="">
             <a:extLst xmlns:a="http://schemas.openxmlformats.org/drawingml/2006/main">
               <a:ext uri="{FF2B5EF4-FFF2-40B4-BE49-F238E27FC236}">
-                <a16:creationId xmlns:a16="http://schemas.microsoft.com/office/drawing/2014/main" id="{FC7B32F1-8068-4A90-958D-3440FE770CCA}"/>
+                <a16:creationId xmlns:a16="http://schemas.microsoft.com/office/drawing/2014/main" id="{1667160A-2B5F-40FF-AB58-27212DD22B72}"/>
               </a:ext>
             </a:extLst>
           </p:cNvPr>
@@ -4906,7 +4906,7 @@
           <p:cNvPr id="14" name="footer-rule-11">
             <a:extLst xmlns:a="http://schemas.openxmlformats.org/drawingml/2006/main">
               <a:ext uri="{FF2B5EF4-FFF2-40B4-BE49-F238E27FC236}">
-                <a16:creationId xmlns:a16="http://schemas.microsoft.com/office/drawing/2014/main" id="{F3090729-BAB6-4D8A-A7DA-5114FDCE0BE3}"/>
+                <a16:creationId xmlns:a16="http://schemas.microsoft.com/office/drawing/2014/main" id="{CE937025-C4A0-4E55-A818-EF61CDA5088E}"/>
               </a:ext>
             </a:extLst>
           </p:cNvPr>
@@ -4937,7 +4937,7 @@
           <p:cNvPr id="15" name="footer-label-11">
             <a:extLst xmlns:a="http://schemas.openxmlformats.org/drawingml/2006/main">
               <a:ext uri="{FF2B5EF4-FFF2-40B4-BE49-F238E27FC236}">
-                <a16:creationId xmlns:a16="http://schemas.microsoft.com/office/drawing/2014/main" id="{0473AFC5-F32B-4428-A91C-BC695D75382A}"/>
+                <a16:creationId xmlns:a16="http://schemas.microsoft.com/office/drawing/2014/main" id="{5E79C020-D56E-4368-B7F4-0528B117B849}"/>
               </a:ext>
             </a:extLst>
           </p:cNvPr>
@@ -4999,7 +4999,7 @@
           <p:cNvPr id="16" name="footer-page-11">
             <a:extLst xmlns:a="http://schemas.openxmlformats.org/drawingml/2006/main">
               <a:ext uri="{FF2B5EF4-FFF2-40B4-BE49-F238E27FC236}">
-                <a16:creationId xmlns:a16="http://schemas.microsoft.com/office/drawing/2014/main" id="{B074B0B2-E53B-400E-9128-E26547D5F427}"/>
+                <a16:creationId xmlns:a16="http://schemas.microsoft.com/office/drawing/2014/main" id="{D2945640-B6EA-4174-811B-CD6373D5FC3C}"/>
               </a:ext>
             </a:extLst>
           </p:cNvPr>
@@ -5059,7 +5059,7 @@
     </p:spTree>
     <p:extLst>
       <p:ext uri="{BB962C8B-B14F-4D97-AF65-F5344CB8AC3E}">
-        <p14:creationId xmlns:p14="http://schemas.microsoft.com/office/powerpoint/2010/main" val="1883062503"/>
+        <p14:creationId xmlns:p14="http://schemas.microsoft.com/office/powerpoint/2010/main" val="1570799564"/>
       </p:ext>
     </p:extLst>
   </p:cSld>
@@ -5090,7 +5090,7 @@
           <p:cNvPr id="22" name="side-accent-12">
             <a:extLst xmlns:a="http://schemas.openxmlformats.org/drawingml/2006/main">
               <a:ext uri="{FF2B5EF4-FFF2-40B4-BE49-F238E27FC236}">
-                <a16:creationId xmlns:a16="http://schemas.microsoft.com/office/drawing/2014/main" id="{774F588D-718F-4C1A-AB50-D2D7CB31C4F8}"/>
+                <a16:creationId xmlns:a16="http://schemas.microsoft.com/office/drawing/2014/main" id="{75907DAE-124A-4747-A6F0-FFB5F7C0888F}"/>
               </a:ext>
             </a:extLst>
           </p:cNvPr>
@@ -5121,7 +5121,7 @@
           <p:cNvPr id="2" name="kicker-12">
             <a:extLst xmlns:a="http://schemas.openxmlformats.org/drawingml/2006/main">
               <a:ext uri="{FF2B5EF4-FFF2-40B4-BE49-F238E27FC236}">
-                <a16:creationId xmlns:a16="http://schemas.microsoft.com/office/drawing/2014/main" id="{1C88936A-359D-44CE-9A50-8A833A5D58D7}"/>
+                <a16:creationId xmlns:a16="http://schemas.microsoft.com/office/drawing/2014/main" id="{3F2A895F-9386-490F-939A-DD1C1CBF2286}"/>
               </a:ext>
             </a:extLst>
           </p:cNvPr>
@@ -5183,7 +5183,7 @@
           <p:cNvPr id="3" name="title-12">
             <a:extLst xmlns:a="http://schemas.openxmlformats.org/drawingml/2006/main">
               <a:ext uri="{FF2B5EF4-FFF2-40B4-BE49-F238E27FC236}">
-                <a16:creationId xmlns:a16="http://schemas.microsoft.com/office/drawing/2014/main" id="{BF6075AA-C3EB-420F-AF57-15A2F82F147F}"/>
+                <a16:creationId xmlns:a16="http://schemas.microsoft.com/office/drawing/2014/main" id="{FDAAF437-BCC0-49FE-96A1-B89A97DABE71}"/>
               </a:ext>
             </a:extLst>
           </p:cNvPr>
@@ -5245,7 +5245,7 @@
           <p:cNvPr id="4" name="">
             <a:extLst xmlns:a="http://schemas.openxmlformats.org/drawingml/2006/main">
               <a:ext uri="{FF2B5EF4-FFF2-40B4-BE49-F238E27FC236}">
-                <a16:creationId xmlns:a16="http://schemas.microsoft.com/office/drawing/2014/main" id="{A864FDFF-1270-425E-95CB-EDFB35399F23}"/>
+                <a16:creationId xmlns:a16="http://schemas.microsoft.com/office/drawing/2014/main" id="{47DAB66A-4536-43B4-978F-05E62B2A3D1F}"/>
               </a:ext>
             </a:extLst>
           </p:cNvPr>
@@ -5307,7 +5307,7 @@
           <p:cNvPr id="5" name="">
             <a:extLst xmlns:a="http://schemas.openxmlformats.org/drawingml/2006/main">
               <a:ext uri="{FF2B5EF4-FFF2-40B4-BE49-F238E27FC236}">
-                <a16:creationId xmlns:a16="http://schemas.microsoft.com/office/drawing/2014/main" id="{52A51E6F-28CA-42B5-8A10-1DF6D79767AC}"/>
+                <a16:creationId xmlns:a16="http://schemas.microsoft.com/office/drawing/2014/main" id="{593185B0-0E4F-41B9-8957-CADD0DE476D3}"/>
               </a:ext>
             </a:extLst>
           </p:cNvPr>
@@ -5338,7 +5338,7 @@
           <p:cNvPr id="6" name="">
             <a:extLst xmlns:a="http://schemas.openxmlformats.org/drawingml/2006/main">
               <a:ext uri="{FF2B5EF4-FFF2-40B4-BE49-F238E27FC236}">
-                <a16:creationId xmlns:a16="http://schemas.microsoft.com/office/drawing/2014/main" id="{AFA96147-2119-4828-99A6-17991B0238FF}"/>
+                <a16:creationId xmlns:a16="http://schemas.microsoft.com/office/drawing/2014/main" id="{E5D43BE8-EAEC-4C17-A98F-AAAB09911918}"/>
               </a:ext>
             </a:extLst>
           </p:cNvPr>
@@ -5400,7 +5400,7 @@
           <p:cNvPr id="7" name="">
             <a:extLst xmlns:a="http://schemas.openxmlformats.org/drawingml/2006/main">
               <a:ext uri="{FF2B5EF4-FFF2-40B4-BE49-F238E27FC236}">
-                <a16:creationId xmlns:a16="http://schemas.microsoft.com/office/drawing/2014/main" id="{06BB885B-8C53-4AAC-9422-0051575F3438}"/>
+                <a16:creationId xmlns:a16="http://schemas.microsoft.com/office/drawing/2014/main" id="{350FFAC0-EE4C-42B9-9DAB-E4B241E90781}"/>
               </a:ext>
             </a:extLst>
           </p:cNvPr>
@@ -5412,7 +5412,7 @@
         <p:spPr>
           <a:xfrm xmlns:a="http://schemas.openxmlformats.org/drawingml/2006/main">
             <a:off x="1390650" y="2762250"/>
-            <a:ext cx="2286000" cy="400050"/>
+            <a:ext cx="2857500" cy="400050"/>
           </a:xfrm>
           <a:prstGeom xmlns:a="http://schemas.openxmlformats.org/drawingml/2006/main" prst="rect">
             <a:avLst/>
@@ -5462,19 +5462,19 @@
           <p:cNvPr id="8" name="">
             <a:extLst xmlns:a="http://schemas.openxmlformats.org/drawingml/2006/main">
               <a:ext uri="{FF2B5EF4-FFF2-40B4-BE49-F238E27FC236}">
-                <a16:creationId xmlns:a16="http://schemas.microsoft.com/office/drawing/2014/main" id="{149E139A-35B5-4DA5-8328-76FB39348DEF}"/>
-              </a:ext>
-            </a:extLst>
-          </p:cNvPr>
-          <p:cNvSpPr>
-            <a:spLocks xmlns:a="http://schemas.openxmlformats.org/drawingml/2006/main" noGrp="1"/>
-          </p:cNvSpPr>
-          <p:nvPr/>
-        </p:nvSpPr>
-        <p:spPr>
-          <a:xfrm xmlns:a="http://schemas.openxmlformats.org/drawingml/2006/main">
-            <a:off x="3905250" y="2781300"/>
-            <a:ext cx="6667500" cy="438150"/>
+                <a16:creationId xmlns:a16="http://schemas.microsoft.com/office/drawing/2014/main" id="{2ED2D55A-00AA-4046-AD68-810821F2C5C9}"/>
+              </a:ext>
+            </a:extLst>
+          </p:cNvPr>
+          <p:cNvSpPr>
+            <a:spLocks xmlns:a="http://schemas.openxmlformats.org/drawingml/2006/main" noGrp="1"/>
+          </p:cNvSpPr>
+          <p:nvPr/>
+        </p:nvSpPr>
+        <p:spPr>
+          <a:xfrm xmlns:a="http://schemas.openxmlformats.org/drawingml/2006/main">
+            <a:off x="4476750" y="2781300"/>
+            <a:ext cx="6572250" cy="438150"/>
           </a:xfrm>
           <a:prstGeom xmlns:a="http://schemas.openxmlformats.org/drawingml/2006/main" prst="rect">
             <a:avLst/>
@@ -5524,7 +5524,7 @@
           <p:cNvPr id="9" name="">
             <a:extLst xmlns:a="http://schemas.openxmlformats.org/drawingml/2006/main">
               <a:ext uri="{FF2B5EF4-FFF2-40B4-BE49-F238E27FC236}">
-                <a16:creationId xmlns:a16="http://schemas.microsoft.com/office/drawing/2014/main" id="{589F68CF-3804-4E27-8A9F-D3F2777DBF32}"/>
+                <a16:creationId xmlns:a16="http://schemas.microsoft.com/office/drawing/2014/main" id="{AD810A33-52DA-41E4-96B1-A39991742CEA}"/>
               </a:ext>
             </a:extLst>
           </p:cNvPr>
@@ -5555,7 +5555,7 @@
           <p:cNvPr id="10" name="">
             <a:extLst xmlns:a="http://schemas.openxmlformats.org/drawingml/2006/main">
               <a:ext uri="{FF2B5EF4-FFF2-40B4-BE49-F238E27FC236}">
-                <a16:creationId xmlns:a16="http://schemas.microsoft.com/office/drawing/2014/main" id="{9144816D-4744-4EF8-967E-54078249A30D}"/>
+                <a16:creationId xmlns:a16="http://schemas.microsoft.com/office/drawing/2014/main" id="{BB5EEB61-3DE9-459E-A376-517AD32B00DA}"/>
               </a:ext>
             </a:extLst>
           </p:cNvPr>
@@ -5617,7 +5617,7 @@
           <p:cNvPr id="11" name="">
             <a:extLst xmlns:a="http://schemas.openxmlformats.org/drawingml/2006/main">
               <a:ext uri="{FF2B5EF4-FFF2-40B4-BE49-F238E27FC236}">
-                <a16:creationId xmlns:a16="http://schemas.microsoft.com/office/drawing/2014/main" id="{4E563B69-40C6-4B00-B78F-41CEDE9AB10B}"/>
+                <a16:creationId xmlns:a16="http://schemas.microsoft.com/office/drawing/2014/main" id="{0CFD0D59-9B54-42F7-8522-BFEFA4F1CACD}"/>
               </a:ext>
             </a:extLst>
           </p:cNvPr>
@@ -5629,7 +5629,7 @@
         <p:spPr>
           <a:xfrm xmlns:a="http://schemas.openxmlformats.org/drawingml/2006/main">
             <a:off x="1390650" y="3695700"/>
-            <a:ext cx="2286000" cy="400050"/>
+            <a:ext cx="2857500" cy="400050"/>
           </a:xfrm>
           <a:prstGeom xmlns:a="http://schemas.openxmlformats.org/drawingml/2006/main" prst="rect">
             <a:avLst/>
@@ -5679,19 +5679,19 @@
           <p:cNvPr id="12" name="">
             <a:extLst xmlns:a="http://schemas.openxmlformats.org/drawingml/2006/main">
               <a:ext uri="{FF2B5EF4-FFF2-40B4-BE49-F238E27FC236}">
-                <a16:creationId xmlns:a16="http://schemas.microsoft.com/office/drawing/2014/main" id="{99E92B99-DBC3-476A-82F4-ACB2713061BE}"/>
-              </a:ext>
-            </a:extLst>
-          </p:cNvPr>
-          <p:cNvSpPr>
-            <a:spLocks xmlns:a="http://schemas.openxmlformats.org/drawingml/2006/main" noGrp="1"/>
-          </p:cNvSpPr>
-          <p:nvPr/>
-        </p:nvSpPr>
-        <p:spPr>
-          <a:xfrm xmlns:a="http://schemas.openxmlformats.org/drawingml/2006/main">
-            <a:off x="3905250" y="3714750"/>
-            <a:ext cx="6667500" cy="438150"/>
+                <a16:creationId xmlns:a16="http://schemas.microsoft.com/office/drawing/2014/main" id="{14B68465-AFE4-49CA-805F-40B78786FE0C}"/>
+              </a:ext>
+            </a:extLst>
+          </p:cNvPr>
+          <p:cNvSpPr>
+            <a:spLocks xmlns:a="http://schemas.openxmlformats.org/drawingml/2006/main" noGrp="1"/>
+          </p:cNvSpPr>
+          <p:nvPr/>
+        </p:nvSpPr>
+        <p:spPr>
+          <a:xfrm xmlns:a="http://schemas.openxmlformats.org/drawingml/2006/main">
+            <a:off x="4476750" y="3714750"/>
+            <a:ext cx="6572250" cy="438150"/>
           </a:xfrm>
           <a:prstGeom xmlns:a="http://schemas.openxmlformats.org/drawingml/2006/main" prst="rect">
             <a:avLst/>
@@ -5741,7 +5741,7 @@
           <p:cNvPr id="13" name="">
             <a:extLst xmlns:a="http://schemas.openxmlformats.org/drawingml/2006/main">
               <a:ext uri="{FF2B5EF4-FFF2-40B4-BE49-F238E27FC236}">
-                <a16:creationId xmlns:a16="http://schemas.microsoft.com/office/drawing/2014/main" id="{6926CF9D-3BF6-4EFE-8C49-526580778F95}"/>
+                <a16:creationId xmlns:a16="http://schemas.microsoft.com/office/drawing/2014/main" id="{BC67C1EC-23B2-49E4-AF9C-8E2C5CBD418A}"/>
               </a:ext>
             </a:extLst>
           </p:cNvPr>
@@ -5772,7 +5772,7 @@
           <p:cNvPr id="14" name="">
             <a:extLst xmlns:a="http://schemas.openxmlformats.org/drawingml/2006/main">
               <a:ext uri="{FF2B5EF4-FFF2-40B4-BE49-F238E27FC236}">
-                <a16:creationId xmlns:a16="http://schemas.microsoft.com/office/drawing/2014/main" id="{6DAF4EA0-ABC2-4039-AA75-DA330FC497A3}"/>
+                <a16:creationId xmlns:a16="http://schemas.microsoft.com/office/drawing/2014/main" id="{57B04A8A-021B-43C4-ABF1-7B2D6A5AAB89}"/>
               </a:ext>
             </a:extLst>
           </p:cNvPr>
@@ -5834,7 +5834,7 @@
           <p:cNvPr id="15" name="">
             <a:extLst xmlns:a="http://schemas.openxmlformats.org/drawingml/2006/main">
               <a:ext uri="{FF2B5EF4-FFF2-40B4-BE49-F238E27FC236}">
-                <a16:creationId xmlns:a16="http://schemas.microsoft.com/office/drawing/2014/main" id="{A43E5397-D2E9-4E86-8869-65CEFE7C7900}"/>
+                <a16:creationId xmlns:a16="http://schemas.microsoft.com/office/drawing/2014/main" id="{E8499D7F-B164-409C-91C9-D0F5F3FC0DF9}"/>
               </a:ext>
             </a:extLst>
           </p:cNvPr>
@@ -5846,7 +5846,7 @@
         <p:spPr>
           <a:xfrm xmlns:a="http://schemas.openxmlformats.org/drawingml/2006/main">
             <a:off x="1390650" y="4629150"/>
-            <a:ext cx="2286000" cy="400050"/>
+            <a:ext cx="2857500" cy="400050"/>
           </a:xfrm>
           <a:prstGeom xmlns:a="http://schemas.openxmlformats.org/drawingml/2006/main" prst="rect">
             <a:avLst/>
@@ -5868,7 +5868,7 @@
                 <a:spcPct val="100000"/>
               </a:lnSpc>
               <a:buNone/>
-              <a:defRPr sz="2100" b="1">
+              <a:defRPr sz="1950" b="1">
                 <a:solidFill>
                   <a:srgbClr val="102A43"/>
                 </a:solidFill>
@@ -5878,7 +5878,7 @@
               </a:defRPr>
             </a:pPr>
             <a:r>
-              <a:rPr sz="2100" b="1">
+              <a:rPr sz="1950" b="1">
                 <a:solidFill>
                   <a:srgbClr val="102A43"/>
                 </a:solidFill>
@@ -5886,7 +5886,7 @@
                 <a:ea typeface="Tahoma"/>
                 <a:cs typeface="Tahoma"/>
               </a:rPr>
-              <a:t>ระบุตัวตนได้</a:t>
+              <a:t>ตรวจสอบได้ชัดเจน</a:t>
             </a:r>
           </a:p>
         </p:txBody>
@@ -5896,19 +5896,19 @@
           <p:cNvPr id="16" name="">
             <a:extLst xmlns:a="http://schemas.openxmlformats.org/drawingml/2006/main">
               <a:ext uri="{FF2B5EF4-FFF2-40B4-BE49-F238E27FC236}">
-                <a16:creationId xmlns:a16="http://schemas.microsoft.com/office/drawing/2014/main" id="{8FC2906D-7085-4113-9E4B-AE75B3909D00}"/>
-              </a:ext>
-            </a:extLst>
-          </p:cNvPr>
-          <p:cNvSpPr>
-            <a:spLocks xmlns:a="http://schemas.openxmlformats.org/drawingml/2006/main" noGrp="1"/>
-          </p:cNvSpPr>
-          <p:nvPr/>
-        </p:nvSpPr>
-        <p:spPr>
-          <a:xfrm xmlns:a="http://schemas.openxmlformats.org/drawingml/2006/main">
-            <a:off x="3905250" y="4648200"/>
-            <a:ext cx="6667500" cy="438150"/>
+                <a16:creationId xmlns:a16="http://schemas.microsoft.com/office/drawing/2014/main" id="{F276F057-AE75-40C6-9737-99EB25BCFF43}"/>
+              </a:ext>
+            </a:extLst>
+          </p:cNvPr>
+          <p:cNvSpPr>
+            <a:spLocks xmlns:a="http://schemas.openxmlformats.org/drawingml/2006/main" noGrp="1"/>
+          </p:cNvSpPr>
+          <p:nvPr/>
+        </p:nvSpPr>
+        <p:spPr>
+          <a:xfrm xmlns:a="http://schemas.openxmlformats.org/drawingml/2006/main">
+            <a:off x="4476750" y="4648200"/>
+            <a:ext cx="6572250" cy="438150"/>
           </a:xfrm>
           <a:prstGeom xmlns:a="http://schemas.openxmlformats.org/drawingml/2006/main" prst="rect">
             <a:avLst/>
@@ -5948,7 +5948,7 @@
                 <a:ea typeface="Tahoma"/>
                 <a:cs typeface="Tahoma"/>
               </a:rPr>
-              <a:t>ตั้งชื่อไฟล์หรือเอกสารให้เข้าใจง่าย</a:t>
+              <a:t>เปิดลิงก์แล้วรู้ว่าเป็นหลักฐานของรายการใด</a:t>
             </a:r>
           </a:p>
         </p:txBody>
@@ -5958,7 +5958,7 @@
           <p:cNvPr id="17" name="">
             <a:extLst xmlns:a="http://schemas.openxmlformats.org/drawingml/2006/main">
               <a:ext uri="{FF2B5EF4-FFF2-40B4-BE49-F238E27FC236}">
-                <a16:creationId xmlns:a16="http://schemas.microsoft.com/office/drawing/2014/main" id="{91193292-2BCE-41A8-86F1-44F0D687DE92}"/>
+                <a16:creationId xmlns:a16="http://schemas.microsoft.com/office/drawing/2014/main" id="{9D149CB9-B8E2-41BE-8909-44CE0D1B3733}"/>
               </a:ext>
             </a:extLst>
           </p:cNvPr>
@@ -5993,7 +5993,7 @@
           <p:cNvPr id="18" name="">
             <a:extLst xmlns:a="http://schemas.openxmlformats.org/drawingml/2006/main">
               <a:ext uri="{FF2B5EF4-FFF2-40B4-BE49-F238E27FC236}">
-                <a16:creationId xmlns:a16="http://schemas.microsoft.com/office/drawing/2014/main" id="{9EEA1D7A-E6E5-41FD-899C-284F6C4E985C}"/>
+                <a16:creationId xmlns:a16="http://schemas.microsoft.com/office/drawing/2014/main" id="{C880B7FA-7F66-478F-8504-B9A7F99AC1E6}"/>
               </a:ext>
             </a:extLst>
           </p:cNvPr>
@@ -6082,7 +6082,7 @@
           <p:cNvPr id="19" name="footer-rule-12">
             <a:extLst xmlns:a="http://schemas.openxmlformats.org/drawingml/2006/main">
               <a:ext uri="{FF2B5EF4-FFF2-40B4-BE49-F238E27FC236}">
-                <a16:creationId xmlns:a16="http://schemas.microsoft.com/office/drawing/2014/main" id="{5376FFF0-D9C7-431C-B62B-336F41573867}"/>
+                <a16:creationId xmlns:a16="http://schemas.microsoft.com/office/drawing/2014/main" id="{3325465F-9B55-4AF2-A2A0-CF6CDEB47CE3}"/>
               </a:ext>
             </a:extLst>
           </p:cNvPr>
@@ -6113,7 +6113,7 @@
           <p:cNvPr id="20" name="footer-label-12">
             <a:extLst xmlns:a="http://schemas.openxmlformats.org/drawingml/2006/main">
               <a:ext uri="{FF2B5EF4-FFF2-40B4-BE49-F238E27FC236}">
-                <a16:creationId xmlns:a16="http://schemas.microsoft.com/office/drawing/2014/main" id="{2D314064-F30A-448D-A626-25246ACD7167}"/>
+                <a16:creationId xmlns:a16="http://schemas.microsoft.com/office/drawing/2014/main" id="{3A396558-19DE-4D32-8384-1324D72781B0}"/>
               </a:ext>
             </a:extLst>
           </p:cNvPr>
@@ -6175,7 +6175,7 @@
           <p:cNvPr id="21" name="footer-page-12">
             <a:extLst xmlns:a="http://schemas.openxmlformats.org/drawingml/2006/main">
               <a:ext uri="{FF2B5EF4-FFF2-40B4-BE49-F238E27FC236}">
-                <a16:creationId xmlns:a16="http://schemas.microsoft.com/office/drawing/2014/main" id="{046C9C1C-0035-471B-B400-26709182DFFB}"/>
+                <a16:creationId xmlns:a16="http://schemas.microsoft.com/office/drawing/2014/main" id="{4CA8337B-39EA-43CD-9B80-CFB6D8676334}"/>
               </a:ext>
             </a:extLst>
           </p:cNvPr>
@@ -6235,7 +6235,7 @@
     </p:spTree>
     <p:extLst>
       <p:ext uri="{BB962C8B-B14F-4D97-AF65-F5344CB8AC3E}">
-        <p14:creationId xmlns:p14="http://schemas.microsoft.com/office/powerpoint/2010/main" val="995004795"/>
+        <p14:creationId xmlns:p14="http://schemas.microsoft.com/office/powerpoint/2010/main" val="245693095"/>
       </p:ext>
     </p:extLst>
   </p:cSld>
@@ -6266,7 +6266,7 @@
           <p:cNvPr id="14" name="side-accent-13">
             <a:extLst xmlns:a="http://schemas.openxmlformats.org/drawingml/2006/main">
               <a:ext uri="{FF2B5EF4-FFF2-40B4-BE49-F238E27FC236}">
-                <a16:creationId xmlns:a16="http://schemas.microsoft.com/office/drawing/2014/main" id="{6ACD322E-F7C9-41DA-B0FB-448F4E56AF0C}"/>
+                <a16:creationId xmlns:a16="http://schemas.microsoft.com/office/drawing/2014/main" id="{70F93210-2701-4023-908A-14386BF9E42E}"/>
               </a:ext>
             </a:extLst>
           </p:cNvPr>
@@ -6297,7 +6297,7 @@
           <p:cNvPr id="2" name="kicker-13">
             <a:extLst xmlns:a="http://schemas.openxmlformats.org/drawingml/2006/main">
               <a:ext uri="{FF2B5EF4-FFF2-40B4-BE49-F238E27FC236}">
-                <a16:creationId xmlns:a16="http://schemas.microsoft.com/office/drawing/2014/main" id="{971CE5D2-5D34-48E9-91FD-55778E728F15}"/>
+                <a16:creationId xmlns:a16="http://schemas.microsoft.com/office/drawing/2014/main" id="{8B18B81F-DE49-4D58-9565-388CF177F76F}"/>
               </a:ext>
             </a:extLst>
           </p:cNvPr>
@@ -6359,7 +6359,7 @@
           <p:cNvPr id="3" name="title-13">
             <a:extLst xmlns:a="http://schemas.openxmlformats.org/drawingml/2006/main">
               <a:ext uri="{FF2B5EF4-FFF2-40B4-BE49-F238E27FC236}">
-                <a16:creationId xmlns:a16="http://schemas.microsoft.com/office/drawing/2014/main" id="{C595590A-48AD-4B58-9232-1CA92A53E94D}"/>
+                <a16:creationId xmlns:a16="http://schemas.microsoft.com/office/drawing/2014/main" id="{7C616283-1D52-4216-B7D7-0CD3867E73B9}"/>
               </a:ext>
             </a:extLst>
           </p:cNvPr>
@@ -6421,7 +6421,7 @@
           <p:cNvPr id="4" name="draft-panel">
             <a:extLst xmlns:a="http://schemas.openxmlformats.org/drawingml/2006/main">
               <a:ext uri="{FF2B5EF4-FFF2-40B4-BE49-F238E27FC236}">
-                <a16:creationId xmlns:a16="http://schemas.microsoft.com/office/drawing/2014/main" id="{76A02B19-53C1-4072-B31C-237F2C7AD9AC}"/>
+                <a16:creationId xmlns:a16="http://schemas.microsoft.com/office/drawing/2014/main" id="{F6246425-8882-4A3D-A98C-7344EEC79F9E}"/>
               </a:ext>
             </a:extLst>
           </p:cNvPr>
@@ -6456,7 +6456,7 @@
           <p:cNvPr id="5" name="">
             <a:extLst xmlns:a="http://schemas.openxmlformats.org/drawingml/2006/main">
               <a:ext uri="{FF2B5EF4-FFF2-40B4-BE49-F238E27FC236}">
-                <a16:creationId xmlns:a16="http://schemas.microsoft.com/office/drawing/2014/main" id="{5A32420B-8C85-4670-A311-B77410A5B537}"/>
+                <a16:creationId xmlns:a16="http://schemas.microsoft.com/office/drawing/2014/main" id="{660A8B80-3256-48B9-A29E-0652BC89C348}"/>
               </a:ext>
             </a:extLst>
           </p:cNvPr>
@@ -6518,7 +6518,7 @@
           <p:cNvPr id="6" name="">
             <a:extLst xmlns:a="http://schemas.openxmlformats.org/drawingml/2006/main">
               <a:ext uri="{FF2B5EF4-FFF2-40B4-BE49-F238E27FC236}">
-                <a16:creationId xmlns:a16="http://schemas.microsoft.com/office/drawing/2014/main" id="{18853BFA-C9FB-44DF-9038-AF4AAC1B75AE}"/>
+                <a16:creationId xmlns:a16="http://schemas.microsoft.com/office/drawing/2014/main" id="{74FFE532-A3B2-400D-A2F7-6F90916B74C6}"/>
               </a:ext>
             </a:extLst>
           </p:cNvPr>
@@ -6634,7 +6634,7 @@
           <p:cNvPr id="7" name="submit-panel">
             <a:extLst xmlns:a="http://schemas.openxmlformats.org/drawingml/2006/main">
               <a:ext uri="{FF2B5EF4-FFF2-40B4-BE49-F238E27FC236}">
-                <a16:creationId xmlns:a16="http://schemas.microsoft.com/office/drawing/2014/main" id="{5D3AF40A-B8E5-4182-910C-819FD6845331}"/>
+                <a16:creationId xmlns:a16="http://schemas.microsoft.com/office/drawing/2014/main" id="{17169B85-057D-49D0-8592-DBAA33D57A3E}"/>
               </a:ext>
             </a:extLst>
           </p:cNvPr>
@@ -6669,7 +6669,7 @@
           <p:cNvPr id="8" name="">
             <a:extLst xmlns:a="http://schemas.openxmlformats.org/drawingml/2006/main">
               <a:ext uri="{FF2B5EF4-FFF2-40B4-BE49-F238E27FC236}">
-                <a16:creationId xmlns:a16="http://schemas.microsoft.com/office/drawing/2014/main" id="{37BB0146-782F-48EA-AB01-5B5733B94EFD}"/>
+                <a16:creationId xmlns:a16="http://schemas.microsoft.com/office/drawing/2014/main" id="{D4A174D3-7B79-47A4-93A2-4B88483CD0F8}"/>
               </a:ext>
             </a:extLst>
           </p:cNvPr>
@@ -6731,7 +6731,7 @@
           <p:cNvPr id="9" name="">
             <a:extLst xmlns:a="http://schemas.openxmlformats.org/drawingml/2006/main">
               <a:ext uri="{FF2B5EF4-FFF2-40B4-BE49-F238E27FC236}">
-                <a16:creationId xmlns:a16="http://schemas.microsoft.com/office/drawing/2014/main" id="{8E54E7BD-024C-4EB7-AF67-70F03B635B0E}"/>
+                <a16:creationId xmlns:a16="http://schemas.microsoft.com/office/drawing/2014/main" id="{0EB71EB2-6383-4D0E-8967-4DD352C72FBD}"/>
               </a:ext>
             </a:extLst>
           </p:cNvPr>
@@ -6847,7 +6847,7 @@
           <p:cNvPr id="10" name="">
             <a:extLst xmlns:a="http://schemas.openxmlformats.org/drawingml/2006/main">
               <a:ext uri="{FF2B5EF4-FFF2-40B4-BE49-F238E27FC236}">
-                <a16:creationId xmlns:a16="http://schemas.microsoft.com/office/drawing/2014/main" id="{7076E246-CCA7-432C-9971-A20210EFB56D}"/>
+                <a16:creationId xmlns:a16="http://schemas.microsoft.com/office/drawing/2014/main" id="{20C378E6-8818-45B4-9F14-2BD16D3D89CF}"/>
               </a:ext>
             </a:extLst>
           </p:cNvPr>
@@ -6909,7 +6909,7 @@
           <p:cNvPr id="11" name="footer-rule-13">
             <a:extLst xmlns:a="http://schemas.openxmlformats.org/drawingml/2006/main">
               <a:ext uri="{FF2B5EF4-FFF2-40B4-BE49-F238E27FC236}">
-                <a16:creationId xmlns:a16="http://schemas.microsoft.com/office/drawing/2014/main" id="{76E50F84-C5CD-4FBD-8DBA-E287DB0302E5}"/>
+                <a16:creationId xmlns:a16="http://schemas.microsoft.com/office/drawing/2014/main" id="{0B0F67A6-7111-4B5C-84C6-D591087E8933}"/>
               </a:ext>
             </a:extLst>
           </p:cNvPr>
@@ -6940,7 +6940,7 @@
           <p:cNvPr id="12" name="footer-label-13">
             <a:extLst xmlns:a="http://schemas.openxmlformats.org/drawingml/2006/main">
               <a:ext uri="{FF2B5EF4-FFF2-40B4-BE49-F238E27FC236}">
-                <a16:creationId xmlns:a16="http://schemas.microsoft.com/office/drawing/2014/main" id="{B917C159-1B0F-4475-8BFF-441232ADACE2}"/>
+                <a16:creationId xmlns:a16="http://schemas.microsoft.com/office/drawing/2014/main" id="{5F280CCF-599C-46D4-A5C9-67CCEFDDAA5F}"/>
               </a:ext>
             </a:extLst>
           </p:cNvPr>
@@ -7002,7 +7002,7 @@
           <p:cNvPr id="13" name="footer-page-13">
             <a:extLst xmlns:a="http://schemas.openxmlformats.org/drawingml/2006/main">
               <a:ext uri="{FF2B5EF4-FFF2-40B4-BE49-F238E27FC236}">
-                <a16:creationId xmlns:a16="http://schemas.microsoft.com/office/drawing/2014/main" id="{8BE3112F-0451-4279-B6B2-441362F49586}"/>
+                <a16:creationId xmlns:a16="http://schemas.microsoft.com/office/drawing/2014/main" id="{7F0CDF5A-EDF2-4114-9785-7C181FD0778E}"/>
               </a:ext>
             </a:extLst>
           </p:cNvPr>
@@ -7062,7 +7062,7 @@
     </p:spTree>
     <p:extLst>
       <p:ext uri="{BB962C8B-B14F-4D97-AF65-F5344CB8AC3E}">
-        <p14:creationId xmlns:p14="http://schemas.microsoft.com/office/powerpoint/2010/main" val="311852467"/>
+        <p14:creationId xmlns:p14="http://schemas.microsoft.com/office/powerpoint/2010/main" val="2062909266"/>
       </p:ext>
     </p:extLst>
   </p:cSld>
@@ -7093,7 +7093,7 @@
           <p:cNvPr id="25" name="side-accent-14">
             <a:extLst xmlns:a="http://schemas.openxmlformats.org/drawingml/2006/main">
               <a:ext uri="{FF2B5EF4-FFF2-40B4-BE49-F238E27FC236}">
-                <a16:creationId xmlns:a16="http://schemas.microsoft.com/office/drawing/2014/main" id="{59797215-5F9E-438C-BF48-0C9E1593C087}"/>
+                <a16:creationId xmlns:a16="http://schemas.microsoft.com/office/drawing/2014/main" id="{32436414-9E50-4CC8-B604-46F1FDD7DA31}"/>
               </a:ext>
             </a:extLst>
           </p:cNvPr>
@@ -7124,7 +7124,7 @@
           <p:cNvPr id="2" name="kicker-14">
             <a:extLst xmlns:a="http://schemas.openxmlformats.org/drawingml/2006/main">
               <a:ext uri="{FF2B5EF4-FFF2-40B4-BE49-F238E27FC236}">
-                <a16:creationId xmlns:a16="http://schemas.microsoft.com/office/drawing/2014/main" id="{45C613D0-59A0-4C86-B7DB-0FAB85CC9862}"/>
+                <a16:creationId xmlns:a16="http://schemas.microsoft.com/office/drawing/2014/main" id="{059CD542-B797-46F5-8554-69FE8E1384CF}"/>
               </a:ext>
             </a:extLst>
           </p:cNvPr>
@@ -7186,7 +7186,7 @@
           <p:cNvPr id="3" name="title-14">
             <a:extLst xmlns:a="http://schemas.openxmlformats.org/drawingml/2006/main">
               <a:ext uri="{FF2B5EF4-FFF2-40B4-BE49-F238E27FC236}">
-                <a16:creationId xmlns:a16="http://schemas.microsoft.com/office/drawing/2014/main" id="{183D990D-CD3A-4E6C-B3E5-95DAB3BEB8A5}"/>
+                <a16:creationId xmlns:a16="http://schemas.microsoft.com/office/drawing/2014/main" id="{82A2AB36-A3C7-4A4D-892E-66BA7DC9BD2E}"/>
               </a:ext>
             </a:extLst>
           </p:cNvPr>
@@ -7248,7 +7248,7 @@
           <p:cNvPr id="4" name="">
             <a:extLst xmlns:a="http://schemas.openxmlformats.org/drawingml/2006/main">
               <a:ext uri="{FF2B5EF4-FFF2-40B4-BE49-F238E27FC236}">
-                <a16:creationId xmlns:a16="http://schemas.microsoft.com/office/drawing/2014/main" id="{6258590B-A235-4B32-AE04-62B46C7D5F61}"/>
+                <a16:creationId xmlns:a16="http://schemas.microsoft.com/office/drawing/2014/main" id="{18964148-7B10-4457-BF70-2D26B3807F8C}"/>
               </a:ext>
             </a:extLst>
           </p:cNvPr>
@@ -7279,7 +7279,7 @@
           <p:cNvPr id="5" name="">
             <a:extLst xmlns:a="http://schemas.openxmlformats.org/drawingml/2006/main">
               <a:ext uri="{FF2B5EF4-FFF2-40B4-BE49-F238E27FC236}">
-                <a16:creationId xmlns:a16="http://schemas.microsoft.com/office/drawing/2014/main" id="{E3D19E74-9914-4692-AEEC-DCB7228D7259}"/>
+                <a16:creationId xmlns:a16="http://schemas.microsoft.com/office/drawing/2014/main" id="{6DA17D10-637A-4518-A64C-4470DB1FDDA5}"/>
               </a:ext>
             </a:extLst>
           </p:cNvPr>
@@ -7310,7 +7310,7 @@
           <p:cNvPr id="6" name="">
             <a:extLst xmlns:a="http://schemas.openxmlformats.org/drawingml/2006/main">
               <a:ext uri="{FF2B5EF4-FFF2-40B4-BE49-F238E27FC236}">
-                <a16:creationId xmlns:a16="http://schemas.microsoft.com/office/drawing/2014/main" id="{EECCA141-95E8-4805-A089-D035ED66CFC4}"/>
+                <a16:creationId xmlns:a16="http://schemas.microsoft.com/office/drawing/2014/main" id="{DF321E17-7D17-413A-8D34-92E007883E46}"/>
               </a:ext>
             </a:extLst>
           </p:cNvPr>
@@ -7372,7 +7372,7 @@
           <p:cNvPr id="7" name="">
             <a:extLst xmlns:a="http://schemas.openxmlformats.org/drawingml/2006/main">
               <a:ext uri="{FF2B5EF4-FFF2-40B4-BE49-F238E27FC236}">
-                <a16:creationId xmlns:a16="http://schemas.microsoft.com/office/drawing/2014/main" id="{AAA9405A-9EC5-4E17-8217-A2062975CF99}"/>
+                <a16:creationId xmlns:a16="http://schemas.microsoft.com/office/drawing/2014/main" id="{F5043E86-07BE-4279-9416-5BC599C69B38}"/>
               </a:ext>
             </a:extLst>
           </p:cNvPr>
@@ -7434,7 +7434,7 @@
           <p:cNvPr id="8" name="">
             <a:extLst xmlns:a="http://schemas.openxmlformats.org/drawingml/2006/main">
               <a:ext uri="{FF2B5EF4-FFF2-40B4-BE49-F238E27FC236}">
-                <a16:creationId xmlns:a16="http://schemas.microsoft.com/office/drawing/2014/main" id="{131B961B-7752-49A2-A743-7909E54A0F44}"/>
+                <a16:creationId xmlns:a16="http://schemas.microsoft.com/office/drawing/2014/main" id="{A27A6D35-C9CB-4E5D-B14B-C143C01F0BD8}"/>
               </a:ext>
             </a:extLst>
           </p:cNvPr>
@@ -7496,7 +7496,7 @@
           <p:cNvPr id="9" name="">
             <a:extLst xmlns:a="http://schemas.openxmlformats.org/drawingml/2006/main">
               <a:ext uri="{FF2B5EF4-FFF2-40B4-BE49-F238E27FC236}">
-                <a16:creationId xmlns:a16="http://schemas.microsoft.com/office/drawing/2014/main" id="{6E12EFB0-0631-4E77-BDB2-7A9243A70554}"/>
+                <a16:creationId xmlns:a16="http://schemas.microsoft.com/office/drawing/2014/main" id="{BDBDE131-CA3E-478C-B139-55A372AF76D2}"/>
               </a:ext>
             </a:extLst>
           </p:cNvPr>
@@ -7527,7 +7527,7 @@
           <p:cNvPr id="10" name="">
             <a:extLst xmlns:a="http://schemas.openxmlformats.org/drawingml/2006/main">
               <a:ext uri="{FF2B5EF4-FFF2-40B4-BE49-F238E27FC236}">
-                <a16:creationId xmlns:a16="http://schemas.microsoft.com/office/drawing/2014/main" id="{4D5E82FC-3E90-4734-A5FA-DE129E078AB2}"/>
+                <a16:creationId xmlns:a16="http://schemas.microsoft.com/office/drawing/2014/main" id="{E0D1D8D5-299E-46A6-9CB2-907BDCB09764}"/>
               </a:ext>
             </a:extLst>
           </p:cNvPr>
@@ -7589,7 +7589,7 @@
           <p:cNvPr id="11" name="">
             <a:extLst xmlns:a="http://schemas.openxmlformats.org/drawingml/2006/main">
               <a:ext uri="{FF2B5EF4-FFF2-40B4-BE49-F238E27FC236}">
-                <a16:creationId xmlns:a16="http://schemas.microsoft.com/office/drawing/2014/main" id="{54223AD8-A0DF-4B2E-B819-C673B8689B5E}"/>
+                <a16:creationId xmlns:a16="http://schemas.microsoft.com/office/drawing/2014/main" id="{796CA85D-83A0-40E4-B891-A886F94F5CD6}"/>
               </a:ext>
             </a:extLst>
           </p:cNvPr>
@@ -7651,7 +7651,7 @@
           <p:cNvPr id="12" name="">
             <a:extLst xmlns:a="http://schemas.openxmlformats.org/drawingml/2006/main">
               <a:ext uri="{FF2B5EF4-FFF2-40B4-BE49-F238E27FC236}">
-                <a16:creationId xmlns:a16="http://schemas.microsoft.com/office/drawing/2014/main" id="{8AD501FD-D02D-4A88-951E-5BFABCD8507F}"/>
+                <a16:creationId xmlns:a16="http://schemas.microsoft.com/office/drawing/2014/main" id="{7EAFA79D-FA50-49EE-8B23-FD7A453AD652}"/>
               </a:ext>
             </a:extLst>
           </p:cNvPr>
@@ -7713,7 +7713,7 @@
           <p:cNvPr id="13" name="">
             <a:extLst xmlns:a="http://schemas.openxmlformats.org/drawingml/2006/main">
               <a:ext uri="{FF2B5EF4-FFF2-40B4-BE49-F238E27FC236}">
-                <a16:creationId xmlns:a16="http://schemas.microsoft.com/office/drawing/2014/main" id="{398182B6-C3F4-45BC-A25C-DD8D16803DCE}"/>
+                <a16:creationId xmlns:a16="http://schemas.microsoft.com/office/drawing/2014/main" id="{A78D5080-120C-47C9-B14E-97DD70A1C129}"/>
               </a:ext>
             </a:extLst>
           </p:cNvPr>
@@ -7744,7 +7744,7 @@
           <p:cNvPr id="14" name="">
             <a:extLst xmlns:a="http://schemas.openxmlformats.org/drawingml/2006/main">
               <a:ext uri="{FF2B5EF4-FFF2-40B4-BE49-F238E27FC236}">
-                <a16:creationId xmlns:a16="http://schemas.microsoft.com/office/drawing/2014/main" id="{1EA090A8-A785-4D45-9FB8-FB07CB722204}"/>
+                <a16:creationId xmlns:a16="http://schemas.microsoft.com/office/drawing/2014/main" id="{5441EDC5-9767-460C-B307-C8F37B8AAA62}"/>
               </a:ext>
             </a:extLst>
           </p:cNvPr>
@@ -7806,7 +7806,7 @@
           <p:cNvPr id="15" name="">
             <a:extLst xmlns:a="http://schemas.openxmlformats.org/drawingml/2006/main">
               <a:ext uri="{FF2B5EF4-FFF2-40B4-BE49-F238E27FC236}">
-                <a16:creationId xmlns:a16="http://schemas.microsoft.com/office/drawing/2014/main" id="{CABF5B5B-55BB-4BAB-9560-6EA8FD4B9384}"/>
+                <a16:creationId xmlns:a16="http://schemas.microsoft.com/office/drawing/2014/main" id="{BD0F7658-9BFE-4252-999A-0F17E45D94C2}"/>
               </a:ext>
             </a:extLst>
           </p:cNvPr>
@@ -7868,7 +7868,7 @@
           <p:cNvPr id="16" name="">
             <a:extLst xmlns:a="http://schemas.openxmlformats.org/drawingml/2006/main">
               <a:ext uri="{FF2B5EF4-FFF2-40B4-BE49-F238E27FC236}">
-                <a16:creationId xmlns:a16="http://schemas.microsoft.com/office/drawing/2014/main" id="{58BD9AEC-90BB-47F3-B92F-025E27BA1ECC}"/>
+                <a16:creationId xmlns:a16="http://schemas.microsoft.com/office/drawing/2014/main" id="{67AD4C98-7B79-48CA-9859-DE516B1EF1AF}"/>
               </a:ext>
             </a:extLst>
           </p:cNvPr>
@@ -7930,7 +7930,7 @@
           <p:cNvPr id="17" name="">
             <a:extLst xmlns:a="http://schemas.openxmlformats.org/drawingml/2006/main">
               <a:ext uri="{FF2B5EF4-FFF2-40B4-BE49-F238E27FC236}">
-                <a16:creationId xmlns:a16="http://schemas.microsoft.com/office/drawing/2014/main" id="{E410C6E8-8967-4ED2-A7FE-4983B62E7002}"/>
+                <a16:creationId xmlns:a16="http://schemas.microsoft.com/office/drawing/2014/main" id="{19C60B28-E4CC-446B-B421-26C0F780F762}"/>
               </a:ext>
             </a:extLst>
           </p:cNvPr>
@@ -7961,7 +7961,7 @@
           <p:cNvPr id="18" name="">
             <a:extLst xmlns:a="http://schemas.openxmlformats.org/drawingml/2006/main">
               <a:ext uri="{FF2B5EF4-FFF2-40B4-BE49-F238E27FC236}">
-                <a16:creationId xmlns:a16="http://schemas.microsoft.com/office/drawing/2014/main" id="{00F1486F-6463-403D-BE14-12B3B3680D11}"/>
+                <a16:creationId xmlns:a16="http://schemas.microsoft.com/office/drawing/2014/main" id="{725B2705-71A3-4588-9748-0C342FC38E69}"/>
               </a:ext>
             </a:extLst>
           </p:cNvPr>
@@ -8023,7 +8023,7 @@
           <p:cNvPr id="19" name="">
             <a:extLst xmlns:a="http://schemas.openxmlformats.org/drawingml/2006/main">
               <a:ext uri="{FF2B5EF4-FFF2-40B4-BE49-F238E27FC236}">
-                <a16:creationId xmlns:a16="http://schemas.microsoft.com/office/drawing/2014/main" id="{310C7556-0A6C-483F-8625-E3F4A0EF2BC7}"/>
+                <a16:creationId xmlns:a16="http://schemas.microsoft.com/office/drawing/2014/main" id="{9CFB0AEF-6EAC-47D0-8E91-7003B61B743C}"/>
               </a:ext>
             </a:extLst>
           </p:cNvPr>
@@ -8085,7 +8085,7 @@
           <p:cNvPr id="20" name="">
             <a:extLst xmlns:a="http://schemas.openxmlformats.org/drawingml/2006/main">
               <a:ext uri="{FF2B5EF4-FFF2-40B4-BE49-F238E27FC236}">
-                <a16:creationId xmlns:a16="http://schemas.microsoft.com/office/drawing/2014/main" id="{F6E3F863-A2DF-4AAF-B6FA-3B692660D16D}"/>
+                <a16:creationId xmlns:a16="http://schemas.microsoft.com/office/drawing/2014/main" id="{162933D1-E186-4247-9535-86F20526F766}"/>
               </a:ext>
             </a:extLst>
           </p:cNvPr>
@@ -8147,7 +8147,7 @@
           <p:cNvPr id="21" name="">
             <a:extLst xmlns:a="http://schemas.openxmlformats.org/drawingml/2006/main">
               <a:ext uri="{FF2B5EF4-FFF2-40B4-BE49-F238E27FC236}">
-                <a16:creationId xmlns:a16="http://schemas.microsoft.com/office/drawing/2014/main" id="{E7C91A25-3529-4AD3-8969-5CB3974050D0}"/>
+                <a16:creationId xmlns:a16="http://schemas.microsoft.com/office/drawing/2014/main" id="{05663AB5-204A-483E-A006-47CAB03E414C}"/>
               </a:ext>
             </a:extLst>
           </p:cNvPr>
@@ -8209,7 +8209,7 @@
           <p:cNvPr id="22" name="footer-rule-14">
             <a:extLst xmlns:a="http://schemas.openxmlformats.org/drawingml/2006/main">
               <a:ext uri="{FF2B5EF4-FFF2-40B4-BE49-F238E27FC236}">
-                <a16:creationId xmlns:a16="http://schemas.microsoft.com/office/drawing/2014/main" id="{A492511B-26DB-47FD-84BC-F64FEF09FB80}"/>
+                <a16:creationId xmlns:a16="http://schemas.microsoft.com/office/drawing/2014/main" id="{BB020E08-81DA-468F-845F-364C4ABEBD8C}"/>
               </a:ext>
             </a:extLst>
           </p:cNvPr>
@@ -8240,7 +8240,7 @@
           <p:cNvPr id="23" name="footer-label-14">
             <a:extLst xmlns:a="http://schemas.openxmlformats.org/drawingml/2006/main">
               <a:ext uri="{FF2B5EF4-FFF2-40B4-BE49-F238E27FC236}">
-                <a16:creationId xmlns:a16="http://schemas.microsoft.com/office/drawing/2014/main" id="{73B0143C-17A1-428B-818D-665EC4D95318}"/>
+                <a16:creationId xmlns:a16="http://schemas.microsoft.com/office/drawing/2014/main" id="{EBF11A4B-318F-41BE-8DF2-397BCA5CEFD9}"/>
               </a:ext>
             </a:extLst>
           </p:cNvPr>
@@ -8302,7 +8302,7 @@
           <p:cNvPr id="24" name="footer-page-14">
             <a:extLst xmlns:a="http://schemas.openxmlformats.org/drawingml/2006/main">
               <a:ext uri="{FF2B5EF4-FFF2-40B4-BE49-F238E27FC236}">
-                <a16:creationId xmlns:a16="http://schemas.microsoft.com/office/drawing/2014/main" id="{62D2B047-6D5B-4233-8030-997F6EF71670}"/>
+                <a16:creationId xmlns:a16="http://schemas.microsoft.com/office/drawing/2014/main" id="{41977195-AF6E-4FDF-A5FD-380E25927B0A}"/>
               </a:ext>
             </a:extLst>
           </p:cNvPr>
@@ -8362,7 +8362,7 @@
     </p:spTree>
     <p:extLst>
       <p:ext uri="{BB962C8B-B14F-4D97-AF65-F5344CB8AC3E}">
-        <p14:creationId xmlns:p14="http://schemas.microsoft.com/office/powerpoint/2010/main" val="1419951098"/>
+        <p14:creationId xmlns:p14="http://schemas.microsoft.com/office/powerpoint/2010/main" val="1796269373"/>
       </p:ext>
     </p:extLst>
   </p:cSld>
@@ -8393,7 +8393,7 @@
           <p:cNvPr id="24" name="side-accent-15">
             <a:extLst xmlns:a="http://schemas.openxmlformats.org/drawingml/2006/main">
               <a:ext uri="{FF2B5EF4-FFF2-40B4-BE49-F238E27FC236}">
-                <a16:creationId xmlns:a16="http://schemas.microsoft.com/office/drawing/2014/main" id="{3AFDEE22-02F8-4114-91B0-BBDDDD7FCD90}"/>
+                <a16:creationId xmlns:a16="http://schemas.microsoft.com/office/drawing/2014/main" id="{9B78E68C-0262-4FE6-9611-F3DCA79060DB}"/>
               </a:ext>
             </a:extLst>
           </p:cNvPr>
@@ -8424,7 +8424,7 @@
           <p:cNvPr id="2" name="kicker-15">
             <a:extLst xmlns:a="http://schemas.openxmlformats.org/drawingml/2006/main">
               <a:ext uri="{FF2B5EF4-FFF2-40B4-BE49-F238E27FC236}">
-                <a16:creationId xmlns:a16="http://schemas.microsoft.com/office/drawing/2014/main" id="{CB4D85E5-54C5-4377-A175-A6520DC21890}"/>
+                <a16:creationId xmlns:a16="http://schemas.microsoft.com/office/drawing/2014/main" id="{82EBD2B0-6623-4CFC-9770-50F1AC9D297B}"/>
               </a:ext>
             </a:extLst>
           </p:cNvPr>
@@ -8486,7 +8486,7 @@
           <p:cNvPr id="3" name="title-15">
             <a:extLst xmlns:a="http://schemas.openxmlformats.org/drawingml/2006/main">
               <a:ext uri="{FF2B5EF4-FFF2-40B4-BE49-F238E27FC236}">
-                <a16:creationId xmlns:a16="http://schemas.microsoft.com/office/drawing/2014/main" id="{B93ED3F9-EE41-4FF6-984C-6A1C4A6F216D}"/>
+                <a16:creationId xmlns:a16="http://schemas.microsoft.com/office/drawing/2014/main" id="{EBF0F00D-38F0-4E97-AA5B-F5F3FB90B21A}"/>
               </a:ext>
             </a:extLst>
           </p:cNvPr>
@@ -8548,7 +8548,7 @@
           <p:cNvPr id="4" name="">
             <a:extLst xmlns:a="http://schemas.openxmlformats.org/drawingml/2006/main">
               <a:ext uri="{FF2B5EF4-FFF2-40B4-BE49-F238E27FC236}">
-                <a16:creationId xmlns:a16="http://schemas.microsoft.com/office/drawing/2014/main" id="{839DC43F-024F-464C-BC9A-3BCC56E581B6}"/>
+                <a16:creationId xmlns:a16="http://schemas.microsoft.com/office/drawing/2014/main" id="{2148CE8C-6D3D-4044-9185-A5A24DB9F366}"/>
               </a:ext>
             </a:extLst>
           </p:cNvPr>
@@ -8610,7 +8610,7 @@
           <p:cNvPr id="5" name="">
             <a:extLst xmlns:a="http://schemas.openxmlformats.org/drawingml/2006/main">
               <a:ext uri="{FF2B5EF4-FFF2-40B4-BE49-F238E27FC236}">
-                <a16:creationId xmlns:a16="http://schemas.microsoft.com/office/drawing/2014/main" id="{63693EE7-A07C-45CE-B3FB-BC4D0AAE701E}"/>
+                <a16:creationId xmlns:a16="http://schemas.microsoft.com/office/drawing/2014/main" id="{0931EFFB-20DA-4CCD-80F5-E2DE536260D4}"/>
               </a:ext>
             </a:extLst>
           </p:cNvPr>
@@ -8672,7 +8672,7 @@
           <p:cNvPr id="6" name="">
             <a:extLst xmlns:a="http://schemas.openxmlformats.org/drawingml/2006/main">
               <a:ext uri="{FF2B5EF4-FFF2-40B4-BE49-F238E27FC236}">
-                <a16:creationId xmlns:a16="http://schemas.microsoft.com/office/drawing/2014/main" id="{BA9AF034-52CB-4DBC-8A63-80D97B260095}"/>
+                <a16:creationId xmlns:a16="http://schemas.microsoft.com/office/drawing/2014/main" id="{D4131049-8BE1-48BD-8A4D-EC11B438B5A9}"/>
               </a:ext>
             </a:extLst>
           </p:cNvPr>
@@ -8734,7 +8734,7 @@
           <p:cNvPr id="7" name="">
             <a:extLst xmlns:a="http://schemas.openxmlformats.org/drawingml/2006/main">
               <a:ext uri="{FF2B5EF4-FFF2-40B4-BE49-F238E27FC236}">
-                <a16:creationId xmlns:a16="http://schemas.microsoft.com/office/drawing/2014/main" id="{6840CAAE-2C6D-4533-941F-704DDAA7BEB6}"/>
+                <a16:creationId xmlns:a16="http://schemas.microsoft.com/office/drawing/2014/main" id="{B27A51CD-0FF5-4857-8C55-B9ABE78ADF51}"/>
               </a:ext>
             </a:extLst>
           </p:cNvPr>
@@ -8765,7 +8765,7 @@
           <p:cNvPr id="8" name="">
             <a:extLst xmlns:a="http://schemas.openxmlformats.org/drawingml/2006/main">
               <a:ext uri="{FF2B5EF4-FFF2-40B4-BE49-F238E27FC236}">
-                <a16:creationId xmlns:a16="http://schemas.microsoft.com/office/drawing/2014/main" id="{75F397EE-D3F2-4187-860A-F18E87DD0E35}"/>
+                <a16:creationId xmlns:a16="http://schemas.microsoft.com/office/drawing/2014/main" id="{B48B4B5D-8E37-4045-8B94-BE21A3B3FAE0}"/>
               </a:ext>
             </a:extLst>
           </p:cNvPr>
@@ -8827,7 +8827,7 @@
           <p:cNvPr id="9" name="">
             <a:extLst xmlns:a="http://schemas.openxmlformats.org/drawingml/2006/main">
               <a:ext uri="{FF2B5EF4-FFF2-40B4-BE49-F238E27FC236}">
-                <a16:creationId xmlns:a16="http://schemas.microsoft.com/office/drawing/2014/main" id="{4A660DF8-E9BF-41DD-8486-F34151105C63}"/>
+                <a16:creationId xmlns:a16="http://schemas.microsoft.com/office/drawing/2014/main" id="{FC4E528C-36AE-4567-B589-22401AB094EF}"/>
               </a:ext>
             </a:extLst>
           </p:cNvPr>
@@ -8889,7 +8889,7 @@
           <p:cNvPr id="10" name="">
             <a:extLst xmlns:a="http://schemas.openxmlformats.org/drawingml/2006/main">
               <a:ext uri="{FF2B5EF4-FFF2-40B4-BE49-F238E27FC236}">
-                <a16:creationId xmlns:a16="http://schemas.microsoft.com/office/drawing/2014/main" id="{13ADE89A-8D9B-4393-A502-09391570774E}"/>
+                <a16:creationId xmlns:a16="http://schemas.microsoft.com/office/drawing/2014/main" id="{5DEB93BA-FB37-4C32-B885-B2B675F9436E}"/>
               </a:ext>
             </a:extLst>
           </p:cNvPr>
@@ -8951,7 +8951,7 @@
           <p:cNvPr id="11" name="">
             <a:extLst xmlns:a="http://schemas.openxmlformats.org/drawingml/2006/main">
               <a:ext uri="{FF2B5EF4-FFF2-40B4-BE49-F238E27FC236}">
-                <a16:creationId xmlns:a16="http://schemas.microsoft.com/office/drawing/2014/main" id="{DF616D99-8C84-49AB-932F-A4C08D9FB7AE}"/>
+                <a16:creationId xmlns:a16="http://schemas.microsoft.com/office/drawing/2014/main" id="{81698907-8303-42E7-826D-9E431DCF3172}"/>
               </a:ext>
             </a:extLst>
           </p:cNvPr>
@@ -8982,7 +8982,7 @@
           <p:cNvPr id="12" name="">
             <a:extLst xmlns:a="http://schemas.openxmlformats.org/drawingml/2006/main">
               <a:ext uri="{FF2B5EF4-FFF2-40B4-BE49-F238E27FC236}">
-                <a16:creationId xmlns:a16="http://schemas.microsoft.com/office/drawing/2014/main" id="{079C8928-53B9-4654-A8DA-768E506F1870}"/>
+                <a16:creationId xmlns:a16="http://schemas.microsoft.com/office/drawing/2014/main" id="{38CDFC5E-BFC1-4A9E-80CA-BDD7C1C9B52C}"/>
               </a:ext>
             </a:extLst>
           </p:cNvPr>
@@ -9044,7 +9044,7 @@
           <p:cNvPr id="13" name="">
             <a:extLst xmlns:a="http://schemas.openxmlformats.org/drawingml/2006/main">
               <a:ext uri="{FF2B5EF4-FFF2-40B4-BE49-F238E27FC236}">
-                <a16:creationId xmlns:a16="http://schemas.microsoft.com/office/drawing/2014/main" id="{58966DE8-B702-4267-91E0-A3170B968467}"/>
+                <a16:creationId xmlns:a16="http://schemas.microsoft.com/office/drawing/2014/main" id="{31569542-1446-4870-95CF-5823919167FC}"/>
               </a:ext>
             </a:extLst>
           </p:cNvPr>
@@ -9106,7 +9106,7 @@
           <p:cNvPr id="14" name="">
             <a:extLst xmlns:a="http://schemas.openxmlformats.org/drawingml/2006/main">
               <a:ext uri="{FF2B5EF4-FFF2-40B4-BE49-F238E27FC236}">
-                <a16:creationId xmlns:a16="http://schemas.microsoft.com/office/drawing/2014/main" id="{3577C0F6-5D1A-4258-B106-53B4FB8E4A45}"/>
+                <a16:creationId xmlns:a16="http://schemas.microsoft.com/office/drawing/2014/main" id="{E946EB7A-2FAB-428F-B4C0-A0A1C772F841}"/>
               </a:ext>
             </a:extLst>
           </p:cNvPr>
@@ -9168,7 +9168,7 @@
           <p:cNvPr id="15" name="">
             <a:extLst xmlns:a="http://schemas.openxmlformats.org/drawingml/2006/main">
               <a:ext uri="{FF2B5EF4-FFF2-40B4-BE49-F238E27FC236}">
-                <a16:creationId xmlns:a16="http://schemas.microsoft.com/office/drawing/2014/main" id="{54963189-1FA9-44F5-889D-1E9E6DAB96C7}"/>
+                <a16:creationId xmlns:a16="http://schemas.microsoft.com/office/drawing/2014/main" id="{EC3BA74C-E743-4B6B-BDFA-BB55F8714CC0}"/>
               </a:ext>
             </a:extLst>
           </p:cNvPr>
@@ -9199,7 +9199,7 @@
           <p:cNvPr id="16" name="">
             <a:extLst xmlns:a="http://schemas.openxmlformats.org/drawingml/2006/main">
               <a:ext uri="{FF2B5EF4-FFF2-40B4-BE49-F238E27FC236}">
-                <a16:creationId xmlns:a16="http://schemas.microsoft.com/office/drawing/2014/main" id="{565C6CAF-50EB-4C2D-BFEF-684C65DF52CE}"/>
+                <a16:creationId xmlns:a16="http://schemas.microsoft.com/office/drawing/2014/main" id="{688F5BB2-2F04-47B8-98CB-A944FC61A8D2}"/>
               </a:ext>
             </a:extLst>
           </p:cNvPr>
@@ -9261,7 +9261,7 @@
           <p:cNvPr id="17" name="">
             <a:extLst xmlns:a="http://schemas.openxmlformats.org/drawingml/2006/main">
               <a:ext uri="{FF2B5EF4-FFF2-40B4-BE49-F238E27FC236}">
-                <a16:creationId xmlns:a16="http://schemas.microsoft.com/office/drawing/2014/main" id="{4401BB1C-C75E-4681-AFC3-7C4C2D22B126}"/>
+                <a16:creationId xmlns:a16="http://schemas.microsoft.com/office/drawing/2014/main" id="{47FEA94D-BEBC-498D-ADAA-E2EFF9CE7CFF}"/>
               </a:ext>
             </a:extLst>
           </p:cNvPr>
@@ -9323,7 +9323,7 @@
           <p:cNvPr id="18" name="">
             <a:extLst xmlns:a="http://schemas.openxmlformats.org/drawingml/2006/main">
               <a:ext uri="{FF2B5EF4-FFF2-40B4-BE49-F238E27FC236}">
-                <a16:creationId xmlns:a16="http://schemas.microsoft.com/office/drawing/2014/main" id="{5A434084-37FA-4AB7-97F8-52BA24DBFB4A}"/>
+                <a16:creationId xmlns:a16="http://schemas.microsoft.com/office/drawing/2014/main" id="{43838EA9-769D-4F40-AE91-AEAF3EB2FBF8}"/>
               </a:ext>
             </a:extLst>
           </p:cNvPr>
@@ -9385,7 +9385,7 @@
           <p:cNvPr id="19" name="">
             <a:extLst xmlns:a="http://schemas.openxmlformats.org/drawingml/2006/main">
               <a:ext uri="{FF2B5EF4-FFF2-40B4-BE49-F238E27FC236}">
-                <a16:creationId xmlns:a16="http://schemas.microsoft.com/office/drawing/2014/main" id="{D0D60BC3-A3E8-476E-8947-2D0C1675771E}"/>
+                <a16:creationId xmlns:a16="http://schemas.microsoft.com/office/drawing/2014/main" id="{5F6A08CA-3559-4450-9B07-39B883F4FA48}"/>
               </a:ext>
             </a:extLst>
           </p:cNvPr>
@@ -9418,7 +9418,7 @@
           <p:cNvPr id="20" name="">
             <a:extLst xmlns:a="http://schemas.openxmlformats.org/drawingml/2006/main">
               <a:ext uri="{FF2B5EF4-FFF2-40B4-BE49-F238E27FC236}">
-                <a16:creationId xmlns:a16="http://schemas.microsoft.com/office/drawing/2014/main" id="{A04D57F9-3F58-4463-9FB8-C86742724C65}"/>
+                <a16:creationId xmlns:a16="http://schemas.microsoft.com/office/drawing/2014/main" id="{398FD054-8854-497B-AD3F-DDD5C6801D97}"/>
               </a:ext>
             </a:extLst>
           </p:cNvPr>
@@ -9480,7 +9480,7 @@
           <p:cNvPr id="21" name="footer-rule-15">
             <a:extLst xmlns:a="http://schemas.openxmlformats.org/drawingml/2006/main">
               <a:ext uri="{FF2B5EF4-FFF2-40B4-BE49-F238E27FC236}">
-                <a16:creationId xmlns:a16="http://schemas.microsoft.com/office/drawing/2014/main" id="{4011F784-3731-4910-9378-D044B1584AC3}"/>
+                <a16:creationId xmlns:a16="http://schemas.microsoft.com/office/drawing/2014/main" id="{6CB6365F-3CA1-4E71-89E5-C38E7BFA261F}"/>
               </a:ext>
             </a:extLst>
           </p:cNvPr>
@@ -9511,7 +9511,7 @@
           <p:cNvPr id="22" name="footer-label-15">
             <a:extLst xmlns:a="http://schemas.openxmlformats.org/drawingml/2006/main">
               <a:ext uri="{FF2B5EF4-FFF2-40B4-BE49-F238E27FC236}">
-                <a16:creationId xmlns:a16="http://schemas.microsoft.com/office/drawing/2014/main" id="{FD6CCF03-2A99-40A0-903F-E8E823DAC190}"/>
+                <a16:creationId xmlns:a16="http://schemas.microsoft.com/office/drawing/2014/main" id="{DD3B1C1C-C7EA-436D-8CF6-36F8C196905A}"/>
               </a:ext>
             </a:extLst>
           </p:cNvPr>
@@ -9573,7 +9573,7 @@
           <p:cNvPr id="23" name="footer-page-15">
             <a:extLst xmlns:a="http://schemas.openxmlformats.org/drawingml/2006/main">
               <a:ext uri="{FF2B5EF4-FFF2-40B4-BE49-F238E27FC236}">
-                <a16:creationId xmlns:a16="http://schemas.microsoft.com/office/drawing/2014/main" id="{EB2AB947-ECEA-4249-ACBC-F6B39157F164}"/>
+                <a16:creationId xmlns:a16="http://schemas.microsoft.com/office/drawing/2014/main" id="{2F6F6F84-F840-4048-8CE7-572D9DF681CF}"/>
               </a:ext>
             </a:extLst>
           </p:cNvPr>
@@ -9633,7 +9633,7 @@
     </p:spTree>
     <p:extLst>
       <p:ext uri="{BB962C8B-B14F-4D97-AF65-F5344CB8AC3E}">
-        <p14:creationId xmlns:p14="http://schemas.microsoft.com/office/powerpoint/2010/main" val="815991276"/>
+        <p14:creationId xmlns:p14="http://schemas.microsoft.com/office/powerpoint/2010/main" val="265774652"/>
       </p:ext>
     </p:extLst>
   </p:cSld>
@@ -9664,7 +9664,7 @@
           <p:cNvPr id="21" name="side-accent-16">
             <a:extLst xmlns:a="http://schemas.openxmlformats.org/drawingml/2006/main">
               <a:ext uri="{FF2B5EF4-FFF2-40B4-BE49-F238E27FC236}">
-                <a16:creationId xmlns:a16="http://schemas.microsoft.com/office/drawing/2014/main" id="{A7EB2F72-E6C5-4B89-974D-86420B4ABEB4}"/>
+                <a16:creationId xmlns:a16="http://schemas.microsoft.com/office/drawing/2014/main" id="{D7D582CF-48E3-4AB1-B6EB-02CC4616E72A}"/>
               </a:ext>
             </a:extLst>
           </p:cNvPr>
@@ -9695,7 +9695,7 @@
           <p:cNvPr id="2" name="kicker-16">
             <a:extLst xmlns:a="http://schemas.openxmlformats.org/drawingml/2006/main">
               <a:ext uri="{FF2B5EF4-FFF2-40B4-BE49-F238E27FC236}">
-                <a16:creationId xmlns:a16="http://schemas.microsoft.com/office/drawing/2014/main" id="{A2F832BE-6FB0-4679-A890-DEDC88CE6837}"/>
+                <a16:creationId xmlns:a16="http://schemas.microsoft.com/office/drawing/2014/main" id="{23872DC0-8F07-42A2-BB97-769484DD9D81}"/>
               </a:ext>
             </a:extLst>
           </p:cNvPr>
@@ -9757,7 +9757,7 @@
           <p:cNvPr id="3" name="title-16">
             <a:extLst xmlns:a="http://schemas.openxmlformats.org/drawingml/2006/main">
               <a:ext uri="{FF2B5EF4-FFF2-40B4-BE49-F238E27FC236}">
-                <a16:creationId xmlns:a16="http://schemas.microsoft.com/office/drawing/2014/main" id="{36CEA801-846F-40F1-9F8A-F42B9F5B0C2E}"/>
+                <a16:creationId xmlns:a16="http://schemas.microsoft.com/office/drawing/2014/main" id="{543301F8-C409-40A5-B9B7-B0B21753A92E}"/>
               </a:ext>
             </a:extLst>
           </p:cNvPr>
@@ -9819,7 +9819,7 @@
           <p:cNvPr id="4" name="">
             <a:extLst xmlns:a="http://schemas.openxmlformats.org/drawingml/2006/main">
               <a:ext uri="{FF2B5EF4-FFF2-40B4-BE49-F238E27FC236}">
-                <a16:creationId xmlns:a16="http://schemas.microsoft.com/office/drawing/2014/main" id="{FE0FDF6C-F8A4-45AE-9523-58C280D47B2D}"/>
+                <a16:creationId xmlns:a16="http://schemas.microsoft.com/office/drawing/2014/main" id="{96827AC4-41F3-4F85-8BAE-743FD9F6FC93}"/>
               </a:ext>
             </a:extLst>
           </p:cNvPr>
@@ -9850,7 +9850,7 @@
           <p:cNvPr id="5" name="">
             <a:extLst xmlns:a="http://schemas.openxmlformats.org/drawingml/2006/main">
               <a:ext uri="{FF2B5EF4-FFF2-40B4-BE49-F238E27FC236}">
-                <a16:creationId xmlns:a16="http://schemas.microsoft.com/office/drawing/2014/main" id="{66575DBD-FC49-4906-BDEA-B6F716AC9D8A}"/>
+                <a16:creationId xmlns:a16="http://schemas.microsoft.com/office/drawing/2014/main" id="{5BCB94CF-0ABB-42F2-B9B6-BB9742E15E24}"/>
               </a:ext>
             </a:extLst>
           </p:cNvPr>
@@ -9881,7 +9881,7 @@
           <p:cNvPr id="6" name="">
             <a:extLst xmlns:a="http://schemas.openxmlformats.org/drawingml/2006/main">
               <a:ext uri="{FF2B5EF4-FFF2-40B4-BE49-F238E27FC236}">
-                <a16:creationId xmlns:a16="http://schemas.microsoft.com/office/drawing/2014/main" id="{47DDA6E7-92C3-4CA0-B4B9-B1B0AEDBEF3C}"/>
+                <a16:creationId xmlns:a16="http://schemas.microsoft.com/office/drawing/2014/main" id="{1BBD3F6F-E08B-437B-BE66-A202BFED45D7}"/>
               </a:ext>
             </a:extLst>
           </p:cNvPr>
@@ -9943,7 +9943,7 @@
           <p:cNvPr id="7" name="">
             <a:extLst xmlns:a="http://schemas.openxmlformats.org/drawingml/2006/main">
               <a:ext uri="{FF2B5EF4-FFF2-40B4-BE49-F238E27FC236}">
-                <a16:creationId xmlns:a16="http://schemas.microsoft.com/office/drawing/2014/main" id="{85DE6E92-17C7-4221-ADE4-8EDA43AF1621}"/>
+                <a16:creationId xmlns:a16="http://schemas.microsoft.com/office/drawing/2014/main" id="{29DF221F-48FD-4F8A-92D3-5733A38AE633}"/>
               </a:ext>
             </a:extLst>
           </p:cNvPr>
@@ -10005,7 +10005,7 @@
           <p:cNvPr id="8" name="">
             <a:extLst xmlns:a="http://schemas.openxmlformats.org/drawingml/2006/main">
               <a:ext uri="{FF2B5EF4-FFF2-40B4-BE49-F238E27FC236}">
-                <a16:creationId xmlns:a16="http://schemas.microsoft.com/office/drawing/2014/main" id="{2BCAAD0A-0206-4AF6-9BA2-CBE9543577D8}"/>
+                <a16:creationId xmlns:a16="http://schemas.microsoft.com/office/drawing/2014/main" id="{EF207242-6803-4F79-8CB9-832E43B304D9}"/>
               </a:ext>
             </a:extLst>
           </p:cNvPr>
@@ -10067,7 +10067,7 @@
           <p:cNvPr id="9" name="">
             <a:extLst xmlns:a="http://schemas.openxmlformats.org/drawingml/2006/main">
               <a:ext uri="{FF2B5EF4-FFF2-40B4-BE49-F238E27FC236}">
-                <a16:creationId xmlns:a16="http://schemas.microsoft.com/office/drawing/2014/main" id="{0C5DE303-B112-4871-BFAA-ED1550EC7FA7}"/>
+                <a16:creationId xmlns:a16="http://schemas.microsoft.com/office/drawing/2014/main" id="{ED0AA48A-1AC5-4397-9910-6D9A9F912D13}"/>
               </a:ext>
             </a:extLst>
           </p:cNvPr>
@@ -10098,7 +10098,7 @@
           <p:cNvPr id="10" name="">
             <a:extLst xmlns:a="http://schemas.openxmlformats.org/drawingml/2006/main">
               <a:ext uri="{FF2B5EF4-FFF2-40B4-BE49-F238E27FC236}">
-                <a16:creationId xmlns:a16="http://schemas.microsoft.com/office/drawing/2014/main" id="{3F2A239D-B8C1-40B4-9896-B2F3D99903DB}"/>
+                <a16:creationId xmlns:a16="http://schemas.microsoft.com/office/drawing/2014/main" id="{D684BD81-1D31-42B0-B973-598775A4ACD1}"/>
               </a:ext>
             </a:extLst>
           </p:cNvPr>
@@ -10160,7 +10160,7 @@
           <p:cNvPr id="11" name="">
             <a:extLst xmlns:a="http://schemas.openxmlformats.org/drawingml/2006/main">
               <a:ext uri="{FF2B5EF4-FFF2-40B4-BE49-F238E27FC236}">
-                <a16:creationId xmlns:a16="http://schemas.microsoft.com/office/drawing/2014/main" id="{F94E4B90-1FFA-4F4D-AB6C-2401E98C942B}"/>
+                <a16:creationId xmlns:a16="http://schemas.microsoft.com/office/drawing/2014/main" id="{BEE70225-2260-44E0-B233-44A0CF61584C}"/>
               </a:ext>
             </a:extLst>
           </p:cNvPr>
@@ -10222,7 +10222,7 @@
           <p:cNvPr id="12" name="">
             <a:extLst xmlns:a="http://schemas.openxmlformats.org/drawingml/2006/main">
               <a:ext uri="{FF2B5EF4-FFF2-40B4-BE49-F238E27FC236}">
-                <a16:creationId xmlns:a16="http://schemas.microsoft.com/office/drawing/2014/main" id="{42F02F1C-D8ED-4629-A0D2-65C27D714D17}"/>
+                <a16:creationId xmlns:a16="http://schemas.microsoft.com/office/drawing/2014/main" id="{8DEA3BDA-9B89-4E59-AB3F-8007A5DC0F87}"/>
               </a:ext>
             </a:extLst>
           </p:cNvPr>
@@ -10284,7 +10284,7 @@
           <p:cNvPr id="13" name="">
             <a:extLst xmlns:a="http://schemas.openxmlformats.org/drawingml/2006/main">
               <a:ext uri="{FF2B5EF4-FFF2-40B4-BE49-F238E27FC236}">
-                <a16:creationId xmlns:a16="http://schemas.microsoft.com/office/drawing/2014/main" id="{F3CC2A6A-C26F-43F3-8AF7-6F8C86B78BD4}"/>
+                <a16:creationId xmlns:a16="http://schemas.microsoft.com/office/drawing/2014/main" id="{79A14505-4072-4971-928C-86E9DEE58279}"/>
               </a:ext>
             </a:extLst>
           </p:cNvPr>
@@ -10315,7 +10315,7 @@
           <p:cNvPr id="14" name="">
             <a:extLst xmlns:a="http://schemas.openxmlformats.org/drawingml/2006/main">
               <a:ext uri="{FF2B5EF4-FFF2-40B4-BE49-F238E27FC236}">
-                <a16:creationId xmlns:a16="http://schemas.microsoft.com/office/drawing/2014/main" id="{6BB46B38-E1EA-4036-828B-18E3A3128600}"/>
+                <a16:creationId xmlns:a16="http://schemas.microsoft.com/office/drawing/2014/main" id="{73B5DAA4-D7F3-45BF-825B-F0BD24A989B3}"/>
               </a:ext>
             </a:extLst>
           </p:cNvPr>
@@ -10377,7 +10377,7 @@
           <p:cNvPr id="15" name="">
             <a:extLst xmlns:a="http://schemas.openxmlformats.org/drawingml/2006/main">
               <a:ext uri="{FF2B5EF4-FFF2-40B4-BE49-F238E27FC236}">
-                <a16:creationId xmlns:a16="http://schemas.microsoft.com/office/drawing/2014/main" id="{6FAD5D97-799C-4A62-A1EB-7018DA9E8BCD}"/>
+                <a16:creationId xmlns:a16="http://schemas.microsoft.com/office/drawing/2014/main" id="{4EF5A59A-5C77-4A3E-84CE-E53A31D6529F}"/>
               </a:ext>
             </a:extLst>
           </p:cNvPr>
@@ -10439,7 +10439,7 @@
           <p:cNvPr id="16" name="">
             <a:extLst xmlns:a="http://schemas.openxmlformats.org/drawingml/2006/main">
               <a:ext uri="{FF2B5EF4-FFF2-40B4-BE49-F238E27FC236}">
-                <a16:creationId xmlns:a16="http://schemas.microsoft.com/office/drawing/2014/main" id="{8CD2439C-2BA5-43DE-948A-2B2F39A525F6}"/>
+                <a16:creationId xmlns:a16="http://schemas.microsoft.com/office/drawing/2014/main" id="{D18A5CBC-D1A2-431F-9045-1E70D6980BAD}"/>
               </a:ext>
             </a:extLst>
           </p:cNvPr>
@@ -10501,7 +10501,7 @@
           <p:cNvPr id="17" name="">
             <a:extLst xmlns:a="http://schemas.openxmlformats.org/drawingml/2006/main">
               <a:ext uri="{FF2B5EF4-FFF2-40B4-BE49-F238E27FC236}">
-                <a16:creationId xmlns:a16="http://schemas.microsoft.com/office/drawing/2014/main" id="{0A29BC11-C4AD-49BA-80DD-8BF306A797D8}"/>
+                <a16:creationId xmlns:a16="http://schemas.microsoft.com/office/drawing/2014/main" id="{5EA546E2-3D35-4C7F-BA2B-4B53C2643DE5}"/>
               </a:ext>
             </a:extLst>
           </p:cNvPr>
@@ -10563,7 +10563,7 @@
           <p:cNvPr id="18" name="footer-rule-16">
             <a:extLst xmlns:a="http://schemas.openxmlformats.org/drawingml/2006/main">
               <a:ext uri="{FF2B5EF4-FFF2-40B4-BE49-F238E27FC236}">
-                <a16:creationId xmlns:a16="http://schemas.microsoft.com/office/drawing/2014/main" id="{5471E639-56A2-4FAE-A224-E2B64680951D}"/>
+                <a16:creationId xmlns:a16="http://schemas.microsoft.com/office/drawing/2014/main" id="{2403366A-B245-4316-AC93-1CC38F34D9EF}"/>
               </a:ext>
             </a:extLst>
           </p:cNvPr>
@@ -10594,7 +10594,7 @@
           <p:cNvPr id="19" name="footer-label-16">
             <a:extLst xmlns:a="http://schemas.openxmlformats.org/drawingml/2006/main">
               <a:ext uri="{FF2B5EF4-FFF2-40B4-BE49-F238E27FC236}">
-                <a16:creationId xmlns:a16="http://schemas.microsoft.com/office/drawing/2014/main" id="{EC8B61CA-8F0C-4D18-A20A-C87CFD9A34BA}"/>
+                <a16:creationId xmlns:a16="http://schemas.microsoft.com/office/drawing/2014/main" id="{3474E3BE-AEC3-4E09-BDC1-9C9072588EDD}"/>
               </a:ext>
             </a:extLst>
           </p:cNvPr>
@@ -10656,7 +10656,7 @@
           <p:cNvPr id="20" name="footer-page-16">
             <a:extLst xmlns:a="http://schemas.openxmlformats.org/drawingml/2006/main">
               <a:ext uri="{FF2B5EF4-FFF2-40B4-BE49-F238E27FC236}">
-                <a16:creationId xmlns:a16="http://schemas.microsoft.com/office/drawing/2014/main" id="{C15F852A-2369-427E-9C14-6EE7FCE2D7FE}"/>
+                <a16:creationId xmlns:a16="http://schemas.microsoft.com/office/drawing/2014/main" id="{866384DD-5837-45E5-87E6-34849861F9F8}"/>
               </a:ext>
             </a:extLst>
           </p:cNvPr>
@@ -10716,7 +10716,7 @@
     </p:spTree>
     <p:extLst>
       <p:ext uri="{BB962C8B-B14F-4D97-AF65-F5344CB8AC3E}">
-        <p14:creationId xmlns:p14="http://schemas.microsoft.com/office/powerpoint/2010/main" val="711682204"/>
+        <p14:creationId xmlns:p14="http://schemas.microsoft.com/office/powerpoint/2010/main" val="1243884381"/>
       </p:ext>
     </p:extLst>
   </p:cSld>
@@ -10747,7 +10747,7 @@
           <p:cNvPr id="23" name="side-accent-17">
             <a:extLst xmlns:a="http://schemas.openxmlformats.org/drawingml/2006/main">
               <a:ext uri="{FF2B5EF4-FFF2-40B4-BE49-F238E27FC236}">
-                <a16:creationId xmlns:a16="http://schemas.microsoft.com/office/drawing/2014/main" id="{D86FC767-8C61-44DC-98E3-A293910EF798}"/>
+                <a16:creationId xmlns:a16="http://schemas.microsoft.com/office/drawing/2014/main" id="{B3B659DA-1735-485D-807F-6F80B97361A9}"/>
               </a:ext>
             </a:extLst>
           </p:cNvPr>
@@ -10778,7 +10778,7 @@
           <p:cNvPr id="2" name="kicker-17">
             <a:extLst xmlns:a="http://schemas.openxmlformats.org/drawingml/2006/main">
               <a:ext uri="{FF2B5EF4-FFF2-40B4-BE49-F238E27FC236}">
-                <a16:creationId xmlns:a16="http://schemas.microsoft.com/office/drawing/2014/main" id="{BC71DF0B-FDA5-4ECA-9E08-3B2A0D479E8C}"/>
+                <a16:creationId xmlns:a16="http://schemas.microsoft.com/office/drawing/2014/main" id="{B9AD7D55-FA35-4745-9320-630A4411F41D}"/>
               </a:ext>
             </a:extLst>
           </p:cNvPr>
@@ -10840,7 +10840,7 @@
           <p:cNvPr id="3" name="title-17">
             <a:extLst xmlns:a="http://schemas.openxmlformats.org/drawingml/2006/main">
               <a:ext uri="{FF2B5EF4-FFF2-40B4-BE49-F238E27FC236}">
-                <a16:creationId xmlns:a16="http://schemas.microsoft.com/office/drawing/2014/main" id="{7A8E80BD-731A-46B5-AA6B-39F7D9CF503A}"/>
+                <a16:creationId xmlns:a16="http://schemas.microsoft.com/office/drawing/2014/main" id="{E8FA97DA-7686-4E7D-B45E-EDD640926880}"/>
               </a:ext>
             </a:extLst>
           </p:cNvPr>
@@ -10902,7 +10902,7 @@
           <p:cNvPr id="4" name="">
             <a:extLst xmlns:a="http://schemas.openxmlformats.org/drawingml/2006/main">
               <a:ext uri="{FF2B5EF4-FFF2-40B4-BE49-F238E27FC236}">
-                <a16:creationId xmlns:a16="http://schemas.microsoft.com/office/drawing/2014/main" id="{5D879CE2-C2DD-44D6-B8F6-EEC28F0F70EE}"/>
+                <a16:creationId xmlns:a16="http://schemas.microsoft.com/office/drawing/2014/main" id="{6EAB3684-C8FD-4B3D-83B6-777DEFC11307}"/>
               </a:ext>
             </a:extLst>
           </p:cNvPr>
@@ -10991,7 +10991,7 @@
           <p:cNvPr id="5" name="">
             <a:extLst xmlns:a="http://schemas.openxmlformats.org/drawingml/2006/main">
               <a:ext uri="{FF2B5EF4-FFF2-40B4-BE49-F238E27FC236}">
-                <a16:creationId xmlns:a16="http://schemas.microsoft.com/office/drawing/2014/main" id="{9651D1F4-AB06-41EC-AD98-16A2C8A08B8F}"/>
+                <a16:creationId xmlns:a16="http://schemas.microsoft.com/office/drawing/2014/main" id="{DC686080-ADAA-4DC7-9F76-1B8390F32F6A}"/>
               </a:ext>
             </a:extLst>
           </p:cNvPr>
@@ -11042,7 +11042,7 @@
                 <a:latin typeface="Tahoma"/>
                 <a:ea typeface="Tahoma"/>
                 <a:cs typeface="Tahoma"/>
-                <a:hlinkClick xmlns:r="http://schemas.openxmlformats.org/officeDocument/2006/relationships" r:id="R8512ee1847234c2b"/>
+                <a:hlinkClick xmlns:r="http://schemas.openxmlformats.org/officeDocument/2006/relationships" r:id="R3dccce789f194e5a"/>
               </a:rPr>
               <a:t>http://149.28.142.186/login</a:t>
             </a:r>
@@ -11054,7 +11054,7 @@
           <p:cNvPr id="6" name="">
             <a:extLst xmlns:a="http://schemas.openxmlformats.org/drawingml/2006/main">
               <a:ext uri="{FF2B5EF4-FFF2-40B4-BE49-F238E27FC236}">
-                <a16:creationId xmlns:a16="http://schemas.microsoft.com/office/drawing/2014/main" id="{D35BFDC6-9BB7-4266-B325-BBFCCC08C14A}"/>
+                <a16:creationId xmlns:a16="http://schemas.microsoft.com/office/drawing/2014/main" id="{715188E1-63A3-4B3F-BD22-AC1398503C87}"/>
               </a:ext>
             </a:extLst>
           </p:cNvPr>
@@ -11085,7 +11085,7 @@
           <p:cNvPr id="7" name="">
             <a:extLst xmlns:a="http://schemas.openxmlformats.org/drawingml/2006/main">
               <a:ext uri="{FF2B5EF4-FFF2-40B4-BE49-F238E27FC236}">
-                <a16:creationId xmlns:a16="http://schemas.microsoft.com/office/drawing/2014/main" id="{8B7CA03C-85ED-4DC4-B347-C48B46563404}"/>
+                <a16:creationId xmlns:a16="http://schemas.microsoft.com/office/drawing/2014/main" id="{BE5A6088-DDF5-468B-8646-88AE452FBC9B}"/>
               </a:ext>
             </a:extLst>
           </p:cNvPr>
@@ -11147,7 +11147,7 @@
           <p:cNvPr id="8" name="">
             <a:extLst xmlns:a="http://schemas.openxmlformats.org/drawingml/2006/main">
               <a:ext uri="{FF2B5EF4-FFF2-40B4-BE49-F238E27FC236}">
-                <a16:creationId xmlns:a16="http://schemas.microsoft.com/office/drawing/2014/main" id="{A4C8E9E4-4DCD-4C66-94D8-4FBDBFE406E7}"/>
+                <a16:creationId xmlns:a16="http://schemas.microsoft.com/office/drawing/2014/main" id="{D7D90324-028A-4368-9073-D74F7807D52B}"/>
               </a:ext>
             </a:extLst>
           </p:cNvPr>
@@ -11209,7 +11209,7 @@
           <p:cNvPr id="9" name="">
             <a:extLst xmlns:a="http://schemas.openxmlformats.org/drawingml/2006/main">
               <a:ext uri="{FF2B5EF4-FFF2-40B4-BE49-F238E27FC236}">
-                <a16:creationId xmlns:a16="http://schemas.microsoft.com/office/drawing/2014/main" id="{A3F51E88-C193-4741-A167-475B8D4C13D9}"/>
+                <a16:creationId xmlns:a16="http://schemas.microsoft.com/office/drawing/2014/main" id="{BE1CD8B0-E2B4-4BB2-9DA4-DB8060DB257C}"/>
               </a:ext>
             </a:extLst>
           </p:cNvPr>
@@ -11240,7 +11240,7 @@
           <p:cNvPr id="10" name="">
             <a:extLst xmlns:a="http://schemas.openxmlformats.org/drawingml/2006/main">
               <a:ext uri="{FF2B5EF4-FFF2-40B4-BE49-F238E27FC236}">
-                <a16:creationId xmlns:a16="http://schemas.microsoft.com/office/drawing/2014/main" id="{A9CD4564-A037-4CDD-B18A-CAAD2C4EE3D5}"/>
+                <a16:creationId xmlns:a16="http://schemas.microsoft.com/office/drawing/2014/main" id="{8FFC1437-0BAE-469B-A5D9-5F20C287E852}"/>
               </a:ext>
             </a:extLst>
           </p:cNvPr>
@@ -11302,7 +11302,7 @@
           <p:cNvPr id="11" name="">
             <a:extLst xmlns:a="http://schemas.openxmlformats.org/drawingml/2006/main">
               <a:ext uri="{FF2B5EF4-FFF2-40B4-BE49-F238E27FC236}">
-                <a16:creationId xmlns:a16="http://schemas.microsoft.com/office/drawing/2014/main" id="{2DA09992-8231-426A-9E3F-CB6EE9DAF1F1}"/>
+                <a16:creationId xmlns:a16="http://schemas.microsoft.com/office/drawing/2014/main" id="{C0224FDD-2091-4DBD-A77E-8729E6C043DB}"/>
               </a:ext>
             </a:extLst>
           </p:cNvPr>
@@ -11364,7 +11364,7 @@
           <p:cNvPr id="12" name="">
             <a:extLst xmlns:a="http://schemas.openxmlformats.org/drawingml/2006/main">
               <a:ext uri="{FF2B5EF4-FFF2-40B4-BE49-F238E27FC236}">
-                <a16:creationId xmlns:a16="http://schemas.microsoft.com/office/drawing/2014/main" id="{B513AD94-DD6D-40C3-B421-AFA806D5DFA9}"/>
+                <a16:creationId xmlns:a16="http://schemas.microsoft.com/office/drawing/2014/main" id="{9612B2F2-4E5B-4ED1-B277-E62BBF01EB9F}"/>
               </a:ext>
             </a:extLst>
           </p:cNvPr>
@@ -11395,7 +11395,7 @@
           <p:cNvPr id="13" name="">
             <a:extLst xmlns:a="http://schemas.openxmlformats.org/drawingml/2006/main">
               <a:ext uri="{FF2B5EF4-FFF2-40B4-BE49-F238E27FC236}">
-                <a16:creationId xmlns:a16="http://schemas.microsoft.com/office/drawing/2014/main" id="{547E2125-E7F4-4BCD-AF9C-053F9E4CF5F3}"/>
+                <a16:creationId xmlns:a16="http://schemas.microsoft.com/office/drawing/2014/main" id="{9BF3D841-9736-4E27-8DBB-31F632490FE1}"/>
               </a:ext>
             </a:extLst>
           </p:cNvPr>
@@ -11457,7 +11457,7 @@
           <p:cNvPr id="14" name="">
             <a:extLst xmlns:a="http://schemas.openxmlformats.org/drawingml/2006/main">
               <a:ext uri="{FF2B5EF4-FFF2-40B4-BE49-F238E27FC236}">
-                <a16:creationId xmlns:a16="http://schemas.microsoft.com/office/drawing/2014/main" id="{4CED7669-BEE1-4049-A101-52FF94952656}"/>
+                <a16:creationId xmlns:a16="http://schemas.microsoft.com/office/drawing/2014/main" id="{6521958E-0E49-4751-848F-9D9597FA9751}"/>
               </a:ext>
             </a:extLst>
           </p:cNvPr>
@@ -11519,7 +11519,7 @@
           <p:cNvPr id="15" name="">
             <a:extLst xmlns:a="http://schemas.openxmlformats.org/drawingml/2006/main">
               <a:ext uri="{FF2B5EF4-FFF2-40B4-BE49-F238E27FC236}">
-                <a16:creationId xmlns:a16="http://schemas.microsoft.com/office/drawing/2014/main" id="{27F980C8-8660-4B27-A178-CF5292A75861}"/>
+                <a16:creationId xmlns:a16="http://schemas.microsoft.com/office/drawing/2014/main" id="{3049D824-09A3-4E44-8E83-47DD176AE686}"/>
               </a:ext>
             </a:extLst>
           </p:cNvPr>
@@ -11550,7 +11550,7 @@
           <p:cNvPr id="16" name="">
             <a:extLst xmlns:a="http://schemas.openxmlformats.org/drawingml/2006/main">
               <a:ext uri="{FF2B5EF4-FFF2-40B4-BE49-F238E27FC236}">
-                <a16:creationId xmlns:a16="http://schemas.microsoft.com/office/drawing/2014/main" id="{A9541319-F7EA-490F-B0C8-2FF22FFDEC4D}"/>
+                <a16:creationId xmlns:a16="http://schemas.microsoft.com/office/drawing/2014/main" id="{AF964D5F-7343-455C-A89B-C3DFCB5CAD44}"/>
               </a:ext>
             </a:extLst>
           </p:cNvPr>
@@ -11612,7 +11612,7 @@
           <p:cNvPr id="17" name="">
             <a:extLst xmlns:a="http://schemas.openxmlformats.org/drawingml/2006/main">
               <a:ext uri="{FF2B5EF4-FFF2-40B4-BE49-F238E27FC236}">
-                <a16:creationId xmlns:a16="http://schemas.microsoft.com/office/drawing/2014/main" id="{7E6EE057-8D14-4684-939B-77860EDF80F6}"/>
+                <a16:creationId xmlns:a16="http://schemas.microsoft.com/office/drawing/2014/main" id="{897EEC5C-D68A-4389-9303-B48ABA059325}"/>
               </a:ext>
             </a:extLst>
           </p:cNvPr>
@@ -11674,7 +11674,7 @@
           <p:cNvPr id="18" name="">
             <a:extLst xmlns:a="http://schemas.openxmlformats.org/drawingml/2006/main">
               <a:ext uri="{FF2B5EF4-FFF2-40B4-BE49-F238E27FC236}">
-                <a16:creationId xmlns:a16="http://schemas.microsoft.com/office/drawing/2014/main" id="{5D4A8DFD-93DA-43E4-816A-D75AFDBE8D09}"/>
+                <a16:creationId xmlns:a16="http://schemas.microsoft.com/office/drawing/2014/main" id="{F86A3124-ED00-4107-8790-7202CAA75D4B}"/>
               </a:ext>
             </a:extLst>
           </p:cNvPr>
@@ -11707,7 +11707,7 @@
           <p:cNvPr id="19" name="">
             <a:extLst xmlns:a="http://schemas.openxmlformats.org/drawingml/2006/main">
               <a:ext uri="{FF2B5EF4-FFF2-40B4-BE49-F238E27FC236}">
-                <a16:creationId xmlns:a16="http://schemas.microsoft.com/office/drawing/2014/main" id="{FA72A242-7A63-4186-A2F6-6DE7C76A58D7}"/>
+                <a16:creationId xmlns:a16="http://schemas.microsoft.com/office/drawing/2014/main" id="{904C4B41-8DA4-40DD-9A4C-7C4A18D433F6}"/>
               </a:ext>
             </a:extLst>
           </p:cNvPr>
@@ -11769,7 +11769,7 @@
           <p:cNvPr id="20" name="footer-rule-17">
             <a:extLst xmlns:a="http://schemas.openxmlformats.org/drawingml/2006/main">
               <a:ext uri="{FF2B5EF4-FFF2-40B4-BE49-F238E27FC236}">
-                <a16:creationId xmlns:a16="http://schemas.microsoft.com/office/drawing/2014/main" id="{5FF57804-9594-4E64-AEBE-A31829C9D2BD}"/>
+                <a16:creationId xmlns:a16="http://schemas.microsoft.com/office/drawing/2014/main" id="{A74752BA-BAB3-4B0F-9FDA-0FAE0D8C28B6}"/>
               </a:ext>
             </a:extLst>
           </p:cNvPr>
@@ -11800,7 +11800,7 @@
           <p:cNvPr id="21" name="footer-label-17">
             <a:extLst xmlns:a="http://schemas.openxmlformats.org/drawingml/2006/main">
               <a:ext uri="{FF2B5EF4-FFF2-40B4-BE49-F238E27FC236}">
-                <a16:creationId xmlns:a16="http://schemas.microsoft.com/office/drawing/2014/main" id="{9381FE6E-6DB8-4993-98FB-7C6A71AE7D90}"/>
+                <a16:creationId xmlns:a16="http://schemas.microsoft.com/office/drawing/2014/main" id="{5F11BF3D-8BDF-45C9-9595-CA4B69C8DD0C}"/>
               </a:ext>
             </a:extLst>
           </p:cNvPr>
@@ -11862,7 +11862,7 @@
           <p:cNvPr id="22" name="footer-page-17">
             <a:extLst xmlns:a="http://schemas.openxmlformats.org/drawingml/2006/main">
               <a:ext uri="{FF2B5EF4-FFF2-40B4-BE49-F238E27FC236}">
-                <a16:creationId xmlns:a16="http://schemas.microsoft.com/office/drawing/2014/main" id="{C7918D79-50E0-44A8-9E97-9A46E9B7B0AA}"/>
+                <a16:creationId xmlns:a16="http://schemas.microsoft.com/office/drawing/2014/main" id="{5B4634AE-F041-4D5B-A2F1-79A9361C94EE}"/>
               </a:ext>
             </a:extLst>
           </p:cNvPr>
@@ -11922,7 +11922,7 @@
     </p:spTree>
     <p:extLst>
       <p:ext uri="{BB962C8B-B14F-4D97-AF65-F5344CB8AC3E}">
-        <p14:creationId xmlns:p14="http://schemas.microsoft.com/office/powerpoint/2010/main" val="1612964597"/>
+        <p14:creationId xmlns:p14="http://schemas.microsoft.com/office/powerpoint/2010/main" val="635504319"/>
       </p:ext>
     </p:extLst>
   </p:cSld>
@@ -11953,7 +11953,7 @@
           <p:cNvPr id="25" name="side-accent-18">
             <a:extLst xmlns:a="http://schemas.openxmlformats.org/drawingml/2006/main">
               <a:ext uri="{FF2B5EF4-FFF2-40B4-BE49-F238E27FC236}">
-                <a16:creationId xmlns:a16="http://schemas.microsoft.com/office/drawing/2014/main" id="{8CF54407-44A9-41B1-929C-8C76081522F5}"/>
+                <a16:creationId xmlns:a16="http://schemas.microsoft.com/office/drawing/2014/main" id="{AC540CF4-D8DE-4A76-BD2A-E6E6B965514F}"/>
               </a:ext>
             </a:extLst>
           </p:cNvPr>
@@ -11984,7 +11984,7 @@
           <p:cNvPr id="2" name="kicker-18">
             <a:extLst xmlns:a="http://schemas.openxmlformats.org/drawingml/2006/main">
               <a:ext uri="{FF2B5EF4-FFF2-40B4-BE49-F238E27FC236}">
-                <a16:creationId xmlns:a16="http://schemas.microsoft.com/office/drawing/2014/main" id="{342E7338-613C-4FB2-BF38-C58FA429F03C}"/>
+                <a16:creationId xmlns:a16="http://schemas.microsoft.com/office/drawing/2014/main" id="{40E6FA46-21BF-4CE7-86CB-A9EBCFC0503C}"/>
               </a:ext>
             </a:extLst>
           </p:cNvPr>
@@ -12046,7 +12046,7 @@
           <p:cNvPr id="3" name="title-18">
             <a:extLst xmlns:a="http://schemas.openxmlformats.org/drawingml/2006/main">
               <a:ext uri="{FF2B5EF4-FFF2-40B4-BE49-F238E27FC236}">
-                <a16:creationId xmlns:a16="http://schemas.microsoft.com/office/drawing/2014/main" id="{236E3134-2C70-4BF9-BFD7-0B36329EB85E}"/>
+                <a16:creationId xmlns:a16="http://schemas.microsoft.com/office/drawing/2014/main" id="{C39CAD0C-777C-4478-964C-B634FD6C5E31}"/>
               </a:ext>
             </a:extLst>
           </p:cNvPr>
@@ -12108,7 +12108,7 @@
           <p:cNvPr id="4" name="">
             <a:extLst xmlns:a="http://schemas.openxmlformats.org/drawingml/2006/main">
               <a:ext uri="{FF2B5EF4-FFF2-40B4-BE49-F238E27FC236}">
-                <a16:creationId xmlns:a16="http://schemas.microsoft.com/office/drawing/2014/main" id="{65D21F94-1250-4984-A3C5-42EB398DCC6E}"/>
+                <a16:creationId xmlns:a16="http://schemas.microsoft.com/office/drawing/2014/main" id="{1BCD491F-B179-4E10-919F-0F2AB0FA41C7}"/>
               </a:ext>
             </a:extLst>
           </p:cNvPr>
@@ -12170,7 +12170,7 @@
           <p:cNvPr id="5" name="">
             <a:extLst xmlns:a="http://schemas.openxmlformats.org/drawingml/2006/main">
               <a:ext uri="{FF2B5EF4-FFF2-40B4-BE49-F238E27FC236}">
-                <a16:creationId xmlns:a16="http://schemas.microsoft.com/office/drawing/2014/main" id="{099305A7-5C23-4606-9A1C-6BC9F0D2BA89}"/>
+                <a16:creationId xmlns:a16="http://schemas.microsoft.com/office/drawing/2014/main" id="{ADB7F406-9208-4932-8662-27E6289E16E3}"/>
               </a:ext>
             </a:extLst>
           </p:cNvPr>
@@ -12232,7 +12232,7 @@
           <p:cNvPr id="6" name="">
             <a:extLst xmlns:a="http://schemas.openxmlformats.org/drawingml/2006/main">
               <a:ext uri="{FF2B5EF4-FFF2-40B4-BE49-F238E27FC236}">
-                <a16:creationId xmlns:a16="http://schemas.microsoft.com/office/drawing/2014/main" id="{BB6EF07A-F095-4168-A6CE-ACC7FD791C37}"/>
+                <a16:creationId xmlns:a16="http://schemas.microsoft.com/office/drawing/2014/main" id="{FBACBAE0-8925-4FAD-8D93-73BC0813D71D}"/>
               </a:ext>
             </a:extLst>
           </p:cNvPr>
@@ -12294,7 +12294,7 @@
           <p:cNvPr id="7" name="">
             <a:extLst xmlns:a="http://schemas.openxmlformats.org/drawingml/2006/main">
               <a:ext uri="{FF2B5EF4-FFF2-40B4-BE49-F238E27FC236}">
-                <a16:creationId xmlns:a16="http://schemas.microsoft.com/office/drawing/2014/main" id="{F79C1330-7428-472B-854A-F3B8C076C63E}"/>
+                <a16:creationId xmlns:a16="http://schemas.microsoft.com/office/drawing/2014/main" id="{1C487C9F-8BB1-4964-A93B-E6D4DB752036}"/>
               </a:ext>
             </a:extLst>
           </p:cNvPr>
@@ -12325,7 +12325,7 @@
           <p:cNvPr id="8" name="">
             <a:extLst xmlns:a="http://schemas.openxmlformats.org/drawingml/2006/main">
               <a:ext uri="{FF2B5EF4-FFF2-40B4-BE49-F238E27FC236}">
-                <a16:creationId xmlns:a16="http://schemas.microsoft.com/office/drawing/2014/main" id="{396A45F5-86CF-4F90-B5F9-39468959845C}"/>
+                <a16:creationId xmlns:a16="http://schemas.microsoft.com/office/drawing/2014/main" id="{A5C6399E-1004-4C18-ABC0-0BE6AC7EF97F}"/>
               </a:ext>
             </a:extLst>
           </p:cNvPr>
@@ -12387,7 +12387,7 @@
           <p:cNvPr id="9" name="">
             <a:extLst xmlns:a="http://schemas.openxmlformats.org/drawingml/2006/main">
               <a:ext uri="{FF2B5EF4-FFF2-40B4-BE49-F238E27FC236}">
-                <a16:creationId xmlns:a16="http://schemas.microsoft.com/office/drawing/2014/main" id="{3D72FE7A-DB83-4ABE-AA5B-2B9F44E1A26F}"/>
+                <a16:creationId xmlns:a16="http://schemas.microsoft.com/office/drawing/2014/main" id="{664C72DD-A8F7-456E-B627-2EA2AE60E0F7}"/>
               </a:ext>
             </a:extLst>
           </p:cNvPr>
@@ -12449,7 +12449,7 @@
           <p:cNvPr id="10" name="">
             <a:extLst xmlns:a="http://schemas.openxmlformats.org/drawingml/2006/main">
               <a:ext uri="{FF2B5EF4-FFF2-40B4-BE49-F238E27FC236}">
-                <a16:creationId xmlns:a16="http://schemas.microsoft.com/office/drawing/2014/main" id="{F986BB9D-0A77-4EC9-86BB-2A7B3C55E98D}"/>
+                <a16:creationId xmlns:a16="http://schemas.microsoft.com/office/drawing/2014/main" id="{CB3B93BD-3F62-4C16-8397-650593367268}"/>
               </a:ext>
             </a:extLst>
           </p:cNvPr>
@@ -12511,7 +12511,7 @@
           <p:cNvPr id="11" name="">
             <a:extLst xmlns:a="http://schemas.openxmlformats.org/drawingml/2006/main">
               <a:ext uri="{FF2B5EF4-FFF2-40B4-BE49-F238E27FC236}">
-                <a16:creationId xmlns:a16="http://schemas.microsoft.com/office/drawing/2014/main" id="{98DD1B84-31A7-4BE9-8E35-8782F6B4151E}"/>
+                <a16:creationId xmlns:a16="http://schemas.microsoft.com/office/drawing/2014/main" id="{363561E2-227A-432E-B204-24ED23F32436}"/>
               </a:ext>
             </a:extLst>
           </p:cNvPr>
@@ -12542,7 +12542,7 @@
           <p:cNvPr id="12" name="">
             <a:extLst xmlns:a="http://schemas.openxmlformats.org/drawingml/2006/main">
               <a:ext uri="{FF2B5EF4-FFF2-40B4-BE49-F238E27FC236}">
-                <a16:creationId xmlns:a16="http://schemas.microsoft.com/office/drawing/2014/main" id="{5D8D5B1F-23A0-4A76-9553-40CF3BB07C0B}"/>
+                <a16:creationId xmlns:a16="http://schemas.microsoft.com/office/drawing/2014/main" id="{EEFED8BF-B8ED-4B32-86F8-FF8B6D493782}"/>
               </a:ext>
             </a:extLst>
           </p:cNvPr>
@@ -12604,7 +12604,7 @@
           <p:cNvPr id="13" name="">
             <a:extLst xmlns:a="http://schemas.openxmlformats.org/drawingml/2006/main">
               <a:ext uri="{FF2B5EF4-FFF2-40B4-BE49-F238E27FC236}">
-                <a16:creationId xmlns:a16="http://schemas.microsoft.com/office/drawing/2014/main" id="{A906750C-786B-45C5-9D5B-31C0034A3D55}"/>
+                <a16:creationId xmlns:a16="http://schemas.microsoft.com/office/drawing/2014/main" id="{5487DA4B-0CC7-47D6-B417-A49373D83580}"/>
               </a:ext>
             </a:extLst>
           </p:cNvPr>
@@ -12666,7 +12666,7 @@
           <p:cNvPr id="14" name="">
             <a:extLst xmlns:a="http://schemas.openxmlformats.org/drawingml/2006/main">
               <a:ext uri="{FF2B5EF4-FFF2-40B4-BE49-F238E27FC236}">
-                <a16:creationId xmlns:a16="http://schemas.microsoft.com/office/drawing/2014/main" id="{C78A5520-2C7D-4829-9BC9-BE047459F8B6}"/>
+                <a16:creationId xmlns:a16="http://schemas.microsoft.com/office/drawing/2014/main" id="{BA2C5908-DE3C-49DA-928F-2D0030D758A1}"/>
               </a:ext>
             </a:extLst>
           </p:cNvPr>
@@ -12728,7 +12728,7 @@
           <p:cNvPr id="15" name="">
             <a:extLst xmlns:a="http://schemas.openxmlformats.org/drawingml/2006/main">
               <a:ext uri="{FF2B5EF4-FFF2-40B4-BE49-F238E27FC236}">
-                <a16:creationId xmlns:a16="http://schemas.microsoft.com/office/drawing/2014/main" id="{5CC1DC7F-6450-498C-9B86-BFC86CFF8D4B}"/>
+                <a16:creationId xmlns:a16="http://schemas.microsoft.com/office/drawing/2014/main" id="{05C8B1B5-5E07-4527-81C0-330F8E8C2ABA}"/>
               </a:ext>
             </a:extLst>
           </p:cNvPr>
@@ -12759,7 +12759,7 @@
           <p:cNvPr id="16" name="">
             <a:extLst xmlns:a="http://schemas.openxmlformats.org/drawingml/2006/main">
               <a:ext uri="{FF2B5EF4-FFF2-40B4-BE49-F238E27FC236}">
-                <a16:creationId xmlns:a16="http://schemas.microsoft.com/office/drawing/2014/main" id="{2CA73378-DE26-485C-A374-1690CFEE7578}"/>
+                <a16:creationId xmlns:a16="http://schemas.microsoft.com/office/drawing/2014/main" id="{F87B6256-57F3-49E1-A945-61F049F98961}"/>
               </a:ext>
             </a:extLst>
           </p:cNvPr>
@@ -12821,7 +12821,7 @@
           <p:cNvPr id="17" name="">
             <a:extLst xmlns:a="http://schemas.openxmlformats.org/drawingml/2006/main">
               <a:ext uri="{FF2B5EF4-FFF2-40B4-BE49-F238E27FC236}">
-                <a16:creationId xmlns:a16="http://schemas.microsoft.com/office/drawing/2014/main" id="{9D8E5233-CF9F-4389-B96B-80C793F7E666}"/>
+                <a16:creationId xmlns:a16="http://schemas.microsoft.com/office/drawing/2014/main" id="{270EFED1-222B-47FD-88D2-7B97D87BAB9D}"/>
               </a:ext>
             </a:extLst>
           </p:cNvPr>
@@ -12883,7 +12883,7 @@
           <p:cNvPr id="18" name="">
             <a:extLst xmlns:a="http://schemas.openxmlformats.org/drawingml/2006/main">
               <a:ext uri="{FF2B5EF4-FFF2-40B4-BE49-F238E27FC236}">
-                <a16:creationId xmlns:a16="http://schemas.microsoft.com/office/drawing/2014/main" id="{EA17EBCD-3F37-4640-8D7C-1E89C8CF23D9}"/>
+                <a16:creationId xmlns:a16="http://schemas.microsoft.com/office/drawing/2014/main" id="{24086DA3-1929-4560-B4AF-03E1962CB92C}"/>
               </a:ext>
             </a:extLst>
           </p:cNvPr>
@@ -12945,7 +12945,7 @@
           <p:cNvPr id="19" name="">
             <a:extLst xmlns:a="http://schemas.openxmlformats.org/drawingml/2006/main">
               <a:ext uri="{FF2B5EF4-FFF2-40B4-BE49-F238E27FC236}">
-                <a16:creationId xmlns:a16="http://schemas.microsoft.com/office/drawing/2014/main" id="{8F435878-8476-4B49-9D19-A959A7572C6D}"/>
+                <a16:creationId xmlns:a16="http://schemas.microsoft.com/office/drawing/2014/main" id="{D4023673-E438-41BC-B127-0111C6DCACD4}"/>
               </a:ext>
             </a:extLst>
           </p:cNvPr>
@@ -12978,7 +12978,7 @@
           <p:cNvPr id="20" name="">
             <a:extLst xmlns:a="http://schemas.openxmlformats.org/drawingml/2006/main">
               <a:ext uri="{FF2B5EF4-FFF2-40B4-BE49-F238E27FC236}">
-                <a16:creationId xmlns:a16="http://schemas.microsoft.com/office/drawing/2014/main" id="{2BA052CC-FA41-4961-BAC5-13B164A7EE2C}"/>
+                <a16:creationId xmlns:a16="http://schemas.microsoft.com/office/drawing/2014/main" id="{A4E7E90E-7E34-4DFA-8C5E-F611EADEA06B}"/>
               </a:ext>
             </a:extLst>
           </p:cNvPr>
@@ -13044,7 +13044,7 @@
           <p:nvPr/>
         </p:nvPicPr>
         <p:blipFill>
-          <a:blip xmlns:r="http://schemas.openxmlformats.org/officeDocument/2006/relationships" xmlns:a="http://schemas.openxmlformats.org/drawingml/2006/main" r:embed="R75da0b16dd4a4c9b"/>
+          <a:blip xmlns:r="http://schemas.openxmlformats.org/officeDocument/2006/relationships" xmlns:a="http://schemas.openxmlformats.org/drawingml/2006/main" r:embed="R8a1b4b4bafc74d0e"/>
           <a:stretch xmlns:a="http://schemas.openxmlformats.org/drawingml/2006/main"/>
         </p:blipFill>
         <p:spPr>
@@ -13062,7 +13062,7 @@
           <p:cNvPr id="22" name="footer-rule-18">
             <a:extLst xmlns:a="http://schemas.openxmlformats.org/drawingml/2006/main">
               <a:ext uri="{FF2B5EF4-FFF2-40B4-BE49-F238E27FC236}">
-                <a16:creationId xmlns:a16="http://schemas.microsoft.com/office/drawing/2014/main" id="{15DE2811-01B9-4079-B7DC-7482FC0EB40F}"/>
+                <a16:creationId xmlns:a16="http://schemas.microsoft.com/office/drawing/2014/main" id="{0A984B3A-A2FB-4301-AF58-2BF51D3A8AC1}"/>
               </a:ext>
             </a:extLst>
           </p:cNvPr>
@@ -13093,7 +13093,7 @@
           <p:cNvPr id="23" name="footer-label-18">
             <a:extLst xmlns:a="http://schemas.openxmlformats.org/drawingml/2006/main">
               <a:ext uri="{FF2B5EF4-FFF2-40B4-BE49-F238E27FC236}">
-                <a16:creationId xmlns:a16="http://schemas.microsoft.com/office/drawing/2014/main" id="{CC1FFF01-164B-4710-8295-06FF6D12E265}"/>
+                <a16:creationId xmlns:a16="http://schemas.microsoft.com/office/drawing/2014/main" id="{F0C84320-2C36-48E2-A578-DF6C7C1DB79D}"/>
               </a:ext>
             </a:extLst>
           </p:cNvPr>
@@ -13155,7 +13155,7 @@
           <p:cNvPr id="24" name="footer-page-18">
             <a:extLst xmlns:a="http://schemas.openxmlformats.org/drawingml/2006/main">
               <a:ext uri="{FF2B5EF4-FFF2-40B4-BE49-F238E27FC236}">
-                <a16:creationId xmlns:a16="http://schemas.microsoft.com/office/drawing/2014/main" id="{16516CE7-D8FA-4131-B496-FA32F708666F}"/>
+                <a16:creationId xmlns:a16="http://schemas.microsoft.com/office/drawing/2014/main" id="{67B531E7-CC45-405D-9746-86F221AE6F1E}"/>
               </a:ext>
             </a:extLst>
           </p:cNvPr>
@@ -13215,7 +13215,7 @@
     </p:spTree>
     <p:extLst>
       <p:ext uri="{BB962C8B-B14F-4D97-AF65-F5344CB8AC3E}">
-        <p14:creationId xmlns:p14="http://schemas.microsoft.com/office/powerpoint/2010/main" val="1387986993"/>
+        <p14:creationId xmlns:p14="http://schemas.microsoft.com/office/powerpoint/2010/main" val="1086682205"/>
       </p:ext>
     </p:extLst>
   </p:cSld>
@@ -13246,7 +13246,7 @@
           <p:cNvPr id="20" name="side-accent-2">
             <a:extLst xmlns:a="http://schemas.openxmlformats.org/drawingml/2006/main">
               <a:ext uri="{FF2B5EF4-FFF2-40B4-BE49-F238E27FC236}">
-                <a16:creationId xmlns:a16="http://schemas.microsoft.com/office/drawing/2014/main" id="{90C913AB-D02E-4A81-B8E6-52631815FB1C}"/>
+                <a16:creationId xmlns:a16="http://schemas.microsoft.com/office/drawing/2014/main" id="{130CBAFA-37E3-419C-86D9-95A4D01DE524}"/>
               </a:ext>
             </a:extLst>
           </p:cNvPr>
@@ -13277,7 +13277,7 @@
           <p:cNvPr id="2" name="kicker-2">
             <a:extLst xmlns:a="http://schemas.openxmlformats.org/drawingml/2006/main">
               <a:ext uri="{FF2B5EF4-FFF2-40B4-BE49-F238E27FC236}">
-                <a16:creationId xmlns:a16="http://schemas.microsoft.com/office/drawing/2014/main" id="{79F52DDD-1208-4533-B70A-F63DB1180052}"/>
+                <a16:creationId xmlns:a16="http://schemas.microsoft.com/office/drawing/2014/main" id="{FA43211B-6B15-409E-BCED-E9477F427CF6}"/>
               </a:ext>
             </a:extLst>
           </p:cNvPr>
@@ -13339,7 +13339,7 @@
           <p:cNvPr id="3" name="title-2">
             <a:extLst xmlns:a="http://schemas.openxmlformats.org/drawingml/2006/main">
               <a:ext uri="{FF2B5EF4-FFF2-40B4-BE49-F238E27FC236}">
-                <a16:creationId xmlns:a16="http://schemas.microsoft.com/office/drawing/2014/main" id="{EB9D5F0C-80F0-49CD-A30B-18A99C16BC5C}"/>
+                <a16:creationId xmlns:a16="http://schemas.microsoft.com/office/drawing/2014/main" id="{A9DB902B-B543-4BBD-8E4E-91DFD38FBB83}"/>
               </a:ext>
             </a:extLst>
           </p:cNvPr>
@@ -13401,7 +13401,7 @@
           <p:cNvPr id="4" name="">
             <a:extLst xmlns:a="http://schemas.openxmlformats.org/drawingml/2006/main">
               <a:ext uri="{FF2B5EF4-FFF2-40B4-BE49-F238E27FC236}">
-                <a16:creationId xmlns:a16="http://schemas.microsoft.com/office/drawing/2014/main" id="{0B1B3F3E-AB6B-4C3B-88AB-639643E5E012}"/>
+                <a16:creationId xmlns:a16="http://schemas.microsoft.com/office/drawing/2014/main" id="{D5D0F1BB-FCEF-4714-842E-1046BEDA1BD6}"/>
               </a:ext>
             </a:extLst>
           </p:cNvPr>
@@ -13463,7 +13463,7 @@
           <p:cNvPr id="5" name="">
             <a:extLst xmlns:a="http://schemas.openxmlformats.org/drawingml/2006/main">
               <a:ext uri="{FF2B5EF4-FFF2-40B4-BE49-F238E27FC236}">
-                <a16:creationId xmlns:a16="http://schemas.microsoft.com/office/drawing/2014/main" id="{F04D2EE5-964C-41D5-B6F4-3D9FF625C587}"/>
+                <a16:creationId xmlns:a16="http://schemas.microsoft.com/office/drawing/2014/main" id="{F8E25BCC-5CDC-472F-A4D8-39D1B00E47CB}"/>
               </a:ext>
             </a:extLst>
           </p:cNvPr>
@@ -13525,7 +13525,7 @@
           <p:cNvPr id="6" name="">
             <a:extLst xmlns:a="http://schemas.openxmlformats.org/drawingml/2006/main">
               <a:ext uri="{FF2B5EF4-FFF2-40B4-BE49-F238E27FC236}">
-                <a16:creationId xmlns:a16="http://schemas.microsoft.com/office/drawing/2014/main" id="{CE085190-6672-4A24-AAA1-B9AF36DD62EB}"/>
+                <a16:creationId xmlns:a16="http://schemas.microsoft.com/office/drawing/2014/main" id="{8227E4AB-CE73-4C98-8397-FEF589A3382B}"/>
               </a:ext>
             </a:extLst>
           </p:cNvPr>
@@ -13556,7 +13556,7 @@
           <p:cNvPr id="7" name="">
             <a:extLst xmlns:a="http://schemas.openxmlformats.org/drawingml/2006/main">
               <a:ext uri="{FF2B5EF4-FFF2-40B4-BE49-F238E27FC236}">
-                <a16:creationId xmlns:a16="http://schemas.microsoft.com/office/drawing/2014/main" id="{5C7EB11B-1A86-4994-9C3C-D9D0E03B7B3F}"/>
+                <a16:creationId xmlns:a16="http://schemas.microsoft.com/office/drawing/2014/main" id="{834689F9-5612-4CAB-A5C1-1D548DBDE26F}"/>
               </a:ext>
             </a:extLst>
           </p:cNvPr>
@@ -13618,7 +13618,7 @@
           <p:cNvPr id="8" name="">
             <a:extLst xmlns:a="http://schemas.openxmlformats.org/drawingml/2006/main">
               <a:ext uri="{FF2B5EF4-FFF2-40B4-BE49-F238E27FC236}">
-                <a16:creationId xmlns:a16="http://schemas.microsoft.com/office/drawing/2014/main" id="{C5EB030F-7188-4E4B-91CB-816E72412EEB}"/>
+                <a16:creationId xmlns:a16="http://schemas.microsoft.com/office/drawing/2014/main" id="{105094D7-CEBF-4441-BF19-7DD116D004E7}"/>
               </a:ext>
             </a:extLst>
           </p:cNvPr>
@@ -13680,7 +13680,7 @@
           <p:cNvPr id="9" name="">
             <a:extLst xmlns:a="http://schemas.openxmlformats.org/drawingml/2006/main">
               <a:ext uri="{FF2B5EF4-FFF2-40B4-BE49-F238E27FC236}">
-                <a16:creationId xmlns:a16="http://schemas.microsoft.com/office/drawing/2014/main" id="{9AE3EBE2-3A00-4599-8E5C-50A9A99E36F3}"/>
+                <a16:creationId xmlns:a16="http://schemas.microsoft.com/office/drawing/2014/main" id="{218A2E71-2BFF-42AA-8BD7-DF7803C3C60B}"/>
               </a:ext>
             </a:extLst>
           </p:cNvPr>
@@ -13711,7 +13711,7 @@
           <p:cNvPr id="10" name="">
             <a:extLst xmlns:a="http://schemas.openxmlformats.org/drawingml/2006/main">
               <a:ext uri="{FF2B5EF4-FFF2-40B4-BE49-F238E27FC236}">
-                <a16:creationId xmlns:a16="http://schemas.microsoft.com/office/drawing/2014/main" id="{00EFF9BD-36AE-4F08-90D0-E0290824375E}"/>
+                <a16:creationId xmlns:a16="http://schemas.microsoft.com/office/drawing/2014/main" id="{68E90AB3-6C5E-466C-B2E4-0247818769DA}"/>
               </a:ext>
             </a:extLst>
           </p:cNvPr>
@@ -13773,7 +13773,7 @@
           <p:cNvPr id="11" name="">
             <a:extLst xmlns:a="http://schemas.openxmlformats.org/drawingml/2006/main">
               <a:ext uri="{FF2B5EF4-FFF2-40B4-BE49-F238E27FC236}">
-                <a16:creationId xmlns:a16="http://schemas.microsoft.com/office/drawing/2014/main" id="{536139E8-8201-4B44-9177-783F62BD1DFE}"/>
+                <a16:creationId xmlns:a16="http://schemas.microsoft.com/office/drawing/2014/main" id="{C4751FD9-6D69-4E91-8A7A-6143096F448D}"/>
               </a:ext>
             </a:extLst>
           </p:cNvPr>
@@ -13835,7 +13835,7 @@
           <p:cNvPr id="12" name="">
             <a:extLst xmlns:a="http://schemas.openxmlformats.org/drawingml/2006/main">
               <a:ext uri="{FF2B5EF4-FFF2-40B4-BE49-F238E27FC236}">
-                <a16:creationId xmlns:a16="http://schemas.microsoft.com/office/drawing/2014/main" id="{F8C90FD1-5290-4A15-B281-347D9765095D}"/>
+                <a16:creationId xmlns:a16="http://schemas.microsoft.com/office/drawing/2014/main" id="{225FDAC4-49CF-477F-B4B0-4F3BABD94653}"/>
               </a:ext>
             </a:extLst>
           </p:cNvPr>
@@ -13866,7 +13866,7 @@
           <p:cNvPr id="13" name="">
             <a:extLst xmlns:a="http://schemas.openxmlformats.org/drawingml/2006/main">
               <a:ext uri="{FF2B5EF4-FFF2-40B4-BE49-F238E27FC236}">
-                <a16:creationId xmlns:a16="http://schemas.microsoft.com/office/drawing/2014/main" id="{5764BFA5-53DC-448E-B40D-49DB3E958782}"/>
+                <a16:creationId xmlns:a16="http://schemas.microsoft.com/office/drawing/2014/main" id="{1CD4C066-92F5-41CE-8205-4B1F56D64BFF}"/>
               </a:ext>
             </a:extLst>
           </p:cNvPr>
@@ -13928,7 +13928,7 @@
           <p:cNvPr id="14" name="outcome-mark">
             <a:extLst xmlns:a="http://schemas.openxmlformats.org/drawingml/2006/main">
               <a:ext uri="{FF2B5EF4-FFF2-40B4-BE49-F238E27FC236}">
-                <a16:creationId xmlns:a16="http://schemas.microsoft.com/office/drawing/2014/main" id="{A2EB1299-A122-4124-B9C1-A4EE94D0369E}"/>
+                <a16:creationId xmlns:a16="http://schemas.microsoft.com/office/drawing/2014/main" id="{FD2E5143-3E8E-4B82-A198-D663BCE7B6C1}"/>
               </a:ext>
             </a:extLst>
           </p:cNvPr>
@@ -13963,7 +13963,7 @@
           <p:cNvPr id="15" name="">
             <a:extLst xmlns:a="http://schemas.openxmlformats.org/drawingml/2006/main">
               <a:ext uri="{FF2B5EF4-FFF2-40B4-BE49-F238E27FC236}">
-                <a16:creationId xmlns:a16="http://schemas.microsoft.com/office/drawing/2014/main" id="{B483B69E-5E1D-426F-93D0-1A6D97F28078}"/>
+                <a16:creationId xmlns:a16="http://schemas.microsoft.com/office/drawing/2014/main" id="{C5F4F40C-ECEF-45FC-8397-2759FAE796E3}"/>
               </a:ext>
             </a:extLst>
           </p:cNvPr>
@@ -14025,7 +14025,7 @@
           <p:cNvPr id="16" name="">
             <a:extLst xmlns:a="http://schemas.openxmlformats.org/drawingml/2006/main">
               <a:ext uri="{FF2B5EF4-FFF2-40B4-BE49-F238E27FC236}">
-                <a16:creationId xmlns:a16="http://schemas.microsoft.com/office/drawing/2014/main" id="{951D4458-5D35-436B-89C5-B5EF44CDA8A6}"/>
+                <a16:creationId xmlns:a16="http://schemas.microsoft.com/office/drawing/2014/main" id="{269155E0-DE5B-4CBD-9838-F3C56FE62C07}"/>
               </a:ext>
             </a:extLst>
           </p:cNvPr>
@@ -14114,7 +14114,7 @@
           <p:cNvPr id="17" name="footer-rule-2">
             <a:extLst xmlns:a="http://schemas.openxmlformats.org/drawingml/2006/main">
               <a:ext uri="{FF2B5EF4-FFF2-40B4-BE49-F238E27FC236}">
-                <a16:creationId xmlns:a16="http://schemas.microsoft.com/office/drawing/2014/main" id="{B91F8989-07C4-4E89-9F66-6A26233114CB}"/>
+                <a16:creationId xmlns:a16="http://schemas.microsoft.com/office/drawing/2014/main" id="{365A3E1B-8CE2-4CC4-89DF-5E9918BD091B}"/>
               </a:ext>
             </a:extLst>
           </p:cNvPr>
@@ -14145,7 +14145,7 @@
           <p:cNvPr id="18" name="footer-label-2">
             <a:extLst xmlns:a="http://schemas.openxmlformats.org/drawingml/2006/main">
               <a:ext uri="{FF2B5EF4-FFF2-40B4-BE49-F238E27FC236}">
-                <a16:creationId xmlns:a16="http://schemas.microsoft.com/office/drawing/2014/main" id="{B59D0F33-7C62-447B-A999-AD5434611FAE}"/>
+                <a16:creationId xmlns:a16="http://schemas.microsoft.com/office/drawing/2014/main" id="{125784CA-A26E-4DDD-90B0-297B5A319DE1}"/>
               </a:ext>
             </a:extLst>
           </p:cNvPr>
@@ -14207,7 +14207,7 @@
           <p:cNvPr id="19" name="footer-page-2">
             <a:extLst xmlns:a="http://schemas.openxmlformats.org/drawingml/2006/main">
               <a:ext uri="{FF2B5EF4-FFF2-40B4-BE49-F238E27FC236}">
-                <a16:creationId xmlns:a16="http://schemas.microsoft.com/office/drawing/2014/main" id="{3145BB64-874E-4007-B367-1B02B8FB9536}"/>
+                <a16:creationId xmlns:a16="http://schemas.microsoft.com/office/drawing/2014/main" id="{E69BF17D-8076-45CB-A7AB-5D577560C575}"/>
               </a:ext>
             </a:extLst>
           </p:cNvPr>
@@ -14267,7 +14267,7 @@
     </p:spTree>
     <p:extLst>
       <p:ext uri="{BB962C8B-B14F-4D97-AF65-F5344CB8AC3E}">
-        <p14:creationId xmlns:p14="http://schemas.microsoft.com/office/powerpoint/2010/main" val="1251409292"/>
+        <p14:creationId xmlns:p14="http://schemas.microsoft.com/office/powerpoint/2010/main" val="139881709"/>
       </p:ext>
     </p:extLst>
   </p:cSld>
@@ -14298,7 +14298,7 @@
           <p:cNvPr id="31" name="side-accent-3">
             <a:extLst xmlns:a="http://schemas.openxmlformats.org/drawingml/2006/main">
               <a:ext uri="{FF2B5EF4-FFF2-40B4-BE49-F238E27FC236}">
-                <a16:creationId xmlns:a16="http://schemas.microsoft.com/office/drawing/2014/main" id="{2CA21708-A7F2-4AC6-AF02-486E7F5D6B19}"/>
+                <a16:creationId xmlns:a16="http://schemas.microsoft.com/office/drawing/2014/main" id="{879A3AC2-5416-40DE-9777-207AE9B06E48}"/>
               </a:ext>
             </a:extLst>
           </p:cNvPr>
@@ -14329,7 +14329,7 @@
           <p:cNvPr id="2" name="kicker-3">
             <a:extLst xmlns:a="http://schemas.openxmlformats.org/drawingml/2006/main">
               <a:ext uri="{FF2B5EF4-FFF2-40B4-BE49-F238E27FC236}">
-                <a16:creationId xmlns:a16="http://schemas.microsoft.com/office/drawing/2014/main" id="{C9B4A20E-B8C9-4BB5-ABD0-635A00C8F280}"/>
+                <a16:creationId xmlns:a16="http://schemas.microsoft.com/office/drawing/2014/main" id="{BB12E9D0-7DC7-4C9D-A3FF-5CA7B54880B7}"/>
               </a:ext>
             </a:extLst>
           </p:cNvPr>
@@ -14391,7 +14391,7 @@
           <p:cNvPr id="3" name="title-3">
             <a:extLst xmlns:a="http://schemas.openxmlformats.org/drawingml/2006/main">
               <a:ext uri="{FF2B5EF4-FFF2-40B4-BE49-F238E27FC236}">
-                <a16:creationId xmlns:a16="http://schemas.microsoft.com/office/drawing/2014/main" id="{5B3F2F41-C9EE-4ECB-8BEE-FE03BA82A89F}"/>
+                <a16:creationId xmlns:a16="http://schemas.microsoft.com/office/drawing/2014/main" id="{C93ACEA1-FF77-4F75-95DE-9866C744566D}"/>
               </a:ext>
             </a:extLst>
           </p:cNvPr>
@@ -14453,7 +14453,7 @@
           <p:cNvPr id="4" name="">
             <a:extLst xmlns:a="http://schemas.openxmlformats.org/drawingml/2006/main">
               <a:ext uri="{FF2B5EF4-FFF2-40B4-BE49-F238E27FC236}">
-                <a16:creationId xmlns:a16="http://schemas.microsoft.com/office/drawing/2014/main" id="{2918F919-5465-4192-AB78-BFF34936CB17}"/>
+                <a16:creationId xmlns:a16="http://schemas.microsoft.com/office/drawing/2014/main" id="{EACE6C3B-2E32-4F42-B24B-F5ECD319EEC0}"/>
               </a:ext>
             </a:extLst>
           </p:cNvPr>
@@ -14515,7 +14515,7 @@
           <p:cNvPr id="5" name="system-function-line">
             <a:extLst xmlns:a="http://schemas.openxmlformats.org/drawingml/2006/main">
               <a:ext uri="{FF2B5EF4-FFF2-40B4-BE49-F238E27FC236}">
-                <a16:creationId xmlns:a16="http://schemas.microsoft.com/office/drawing/2014/main" id="{3432AE87-C2EF-4150-86E5-EBEE3B8EF935}"/>
+                <a16:creationId xmlns:a16="http://schemas.microsoft.com/office/drawing/2014/main" id="{D511EE68-6FF1-4B57-9DFF-949D004A0221}"/>
               </a:ext>
             </a:extLst>
           </p:cNvPr>
@@ -14546,7 +14546,7 @@
           <p:cNvPr id="6" name="">
             <a:extLst xmlns:a="http://schemas.openxmlformats.org/drawingml/2006/main">
               <a:ext uri="{FF2B5EF4-FFF2-40B4-BE49-F238E27FC236}">
-                <a16:creationId xmlns:a16="http://schemas.microsoft.com/office/drawing/2014/main" id="{130D9423-2D24-478B-87FC-33314258A529}"/>
+                <a16:creationId xmlns:a16="http://schemas.microsoft.com/office/drawing/2014/main" id="{570ED103-5627-4A7A-96ED-94249A0D0D50}"/>
               </a:ext>
             </a:extLst>
           </p:cNvPr>
@@ -14577,7 +14577,7 @@
           <p:cNvPr id="7" name="">
             <a:extLst xmlns:a="http://schemas.openxmlformats.org/drawingml/2006/main">
               <a:ext uri="{FF2B5EF4-FFF2-40B4-BE49-F238E27FC236}">
-                <a16:creationId xmlns:a16="http://schemas.microsoft.com/office/drawing/2014/main" id="{B77EC0CD-AE28-4FC7-B443-EA02DBB59239}"/>
+                <a16:creationId xmlns:a16="http://schemas.microsoft.com/office/drawing/2014/main" id="{4B938AC4-651A-4FAF-9E90-6C71E0C015A6}"/>
               </a:ext>
             </a:extLst>
           </p:cNvPr>
@@ -14639,7 +14639,7 @@
           <p:cNvPr id="8" name="">
             <a:extLst xmlns:a="http://schemas.openxmlformats.org/drawingml/2006/main">
               <a:ext uri="{FF2B5EF4-FFF2-40B4-BE49-F238E27FC236}">
-                <a16:creationId xmlns:a16="http://schemas.microsoft.com/office/drawing/2014/main" id="{B00587F6-51FB-4F4B-98B0-46881C001C00}"/>
+                <a16:creationId xmlns:a16="http://schemas.microsoft.com/office/drawing/2014/main" id="{7165F13A-AD94-44D8-9078-D6F99AB172B5}"/>
               </a:ext>
             </a:extLst>
           </p:cNvPr>
@@ -14701,7 +14701,7 @@
           <p:cNvPr id="9" name="">
             <a:extLst xmlns:a="http://schemas.openxmlformats.org/drawingml/2006/main">
               <a:ext uri="{FF2B5EF4-FFF2-40B4-BE49-F238E27FC236}">
-                <a16:creationId xmlns:a16="http://schemas.microsoft.com/office/drawing/2014/main" id="{51FD4E91-7596-4A7C-BC41-73E2BAC22CA4}"/>
+                <a16:creationId xmlns:a16="http://schemas.microsoft.com/office/drawing/2014/main" id="{F05F5161-A72E-4E69-8118-FDCA4528FAA2}"/>
               </a:ext>
             </a:extLst>
           </p:cNvPr>
@@ -14763,7 +14763,7 @@
           <p:cNvPr id="10" name="">
             <a:extLst xmlns:a="http://schemas.openxmlformats.org/drawingml/2006/main">
               <a:ext uri="{FF2B5EF4-FFF2-40B4-BE49-F238E27FC236}">
-                <a16:creationId xmlns:a16="http://schemas.microsoft.com/office/drawing/2014/main" id="{261C606F-7CD5-4B35-9348-B3293C669510}"/>
+                <a16:creationId xmlns:a16="http://schemas.microsoft.com/office/drawing/2014/main" id="{A46935D9-A143-40F4-9100-3768DF2F35CA}"/>
               </a:ext>
             </a:extLst>
           </p:cNvPr>
@@ -14794,7 +14794,7 @@
           <p:cNvPr id="11" name="">
             <a:extLst xmlns:a="http://schemas.openxmlformats.org/drawingml/2006/main">
               <a:ext uri="{FF2B5EF4-FFF2-40B4-BE49-F238E27FC236}">
-                <a16:creationId xmlns:a16="http://schemas.microsoft.com/office/drawing/2014/main" id="{BDD1A03A-1494-4CCA-B2D4-F439C6F8D174}"/>
+                <a16:creationId xmlns:a16="http://schemas.microsoft.com/office/drawing/2014/main" id="{487D5D61-4DE4-48B3-90C0-7241720F23D7}"/>
               </a:ext>
             </a:extLst>
           </p:cNvPr>
@@ -14856,7 +14856,7 @@
           <p:cNvPr id="12" name="">
             <a:extLst xmlns:a="http://schemas.openxmlformats.org/drawingml/2006/main">
               <a:ext uri="{FF2B5EF4-FFF2-40B4-BE49-F238E27FC236}">
-                <a16:creationId xmlns:a16="http://schemas.microsoft.com/office/drawing/2014/main" id="{A55F4CBA-9B25-4546-919D-A6E72D5B7497}"/>
+                <a16:creationId xmlns:a16="http://schemas.microsoft.com/office/drawing/2014/main" id="{83C8992A-4745-4C9F-B48A-514B7C200DD8}"/>
               </a:ext>
             </a:extLst>
           </p:cNvPr>
@@ -14918,7 +14918,7 @@
           <p:cNvPr id="13" name="">
             <a:extLst xmlns:a="http://schemas.openxmlformats.org/drawingml/2006/main">
               <a:ext uri="{FF2B5EF4-FFF2-40B4-BE49-F238E27FC236}">
-                <a16:creationId xmlns:a16="http://schemas.microsoft.com/office/drawing/2014/main" id="{175EF50C-5014-4296-805A-DF84DA8058DE}"/>
+                <a16:creationId xmlns:a16="http://schemas.microsoft.com/office/drawing/2014/main" id="{FEA900CC-866D-4A40-8B76-F00FAB01E24F}"/>
               </a:ext>
             </a:extLst>
           </p:cNvPr>
@@ -14980,7 +14980,7 @@
           <p:cNvPr id="14" name="">
             <a:extLst xmlns:a="http://schemas.openxmlformats.org/drawingml/2006/main">
               <a:ext uri="{FF2B5EF4-FFF2-40B4-BE49-F238E27FC236}">
-                <a16:creationId xmlns:a16="http://schemas.microsoft.com/office/drawing/2014/main" id="{B4D350B7-902E-433B-A5A9-ED02AB9F460E}"/>
+                <a16:creationId xmlns:a16="http://schemas.microsoft.com/office/drawing/2014/main" id="{A68FE53C-DABB-4994-B9AA-E600EE7AD9A0}"/>
               </a:ext>
             </a:extLst>
           </p:cNvPr>
@@ -15011,7 +15011,7 @@
           <p:cNvPr id="15" name="">
             <a:extLst xmlns:a="http://schemas.openxmlformats.org/drawingml/2006/main">
               <a:ext uri="{FF2B5EF4-FFF2-40B4-BE49-F238E27FC236}">
-                <a16:creationId xmlns:a16="http://schemas.microsoft.com/office/drawing/2014/main" id="{65F367C0-A700-4CEF-931C-53A7980B6D78}"/>
+                <a16:creationId xmlns:a16="http://schemas.microsoft.com/office/drawing/2014/main" id="{1EC99259-ECB2-4DAD-AB61-5135B8257B9C}"/>
               </a:ext>
             </a:extLst>
           </p:cNvPr>
@@ -15073,7 +15073,7 @@
           <p:cNvPr id="16" name="">
             <a:extLst xmlns:a="http://schemas.openxmlformats.org/drawingml/2006/main">
               <a:ext uri="{FF2B5EF4-FFF2-40B4-BE49-F238E27FC236}">
-                <a16:creationId xmlns:a16="http://schemas.microsoft.com/office/drawing/2014/main" id="{76C50CB8-EB7B-46B0-B1D6-5E0306D9EA2E}"/>
+                <a16:creationId xmlns:a16="http://schemas.microsoft.com/office/drawing/2014/main" id="{A610CB24-163B-4D2E-A570-31E1A0FF2279}"/>
               </a:ext>
             </a:extLst>
           </p:cNvPr>
@@ -15135,7 +15135,7 @@
           <p:cNvPr id="17" name="">
             <a:extLst xmlns:a="http://schemas.openxmlformats.org/drawingml/2006/main">
               <a:ext uri="{FF2B5EF4-FFF2-40B4-BE49-F238E27FC236}">
-                <a16:creationId xmlns:a16="http://schemas.microsoft.com/office/drawing/2014/main" id="{01C8707F-4BA3-4CC3-99E4-579471007C1F}"/>
+                <a16:creationId xmlns:a16="http://schemas.microsoft.com/office/drawing/2014/main" id="{B605F00B-437C-41BC-B8C4-6464F5016B0E}"/>
               </a:ext>
             </a:extLst>
           </p:cNvPr>
@@ -15197,7 +15197,7 @@
           <p:cNvPr id="18" name="">
             <a:extLst xmlns:a="http://schemas.openxmlformats.org/drawingml/2006/main">
               <a:ext uri="{FF2B5EF4-FFF2-40B4-BE49-F238E27FC236}">
-                <a16:creationId xmlns:a16="http://schemas.microsoft.com/office/drawing/2014/main" id="{648A18F8-999A-4484-9A62-6C6E96C697BB}"/>
+                <a16:creationId xmlns:a16="http://schemas.microsoft.com/office/drawing/2014/main" id="{D8859923-883F-4DC9-945F-7DA869E0CD95}"/>
               </a:ext>
             </a:extLst>
           </p:cNvPr>
@@ -15228,7 +15228,7 @@
           <p:cNvPr id="19" name="">
             <a:extLst xmlns:a="http://schemas.openxmlformats.org/drawingml/2006/main">
               <a:ext uri="{FF2B5EF4-FFF2-40B4-BE49-F238E27FC236}">
-                <a16:creationId xmlns:a16="http://schemas.microsoft.com/office/drawing/2014/main" id="{BB740CF4-A738-48F1-B441-BB7AB5654A04}"/>
+                <a16:creationId xmlns:a16="http://schemas.microsoft.com/office/drawing/2014/main" id="{E99B3756-27AC-4482-869C-3FA20A06301F}"/>
               </a:ext>
             </a:extLst>
           </p:cNvPr>
@@ -15290,7 +15290,7 @@
           <p:cNvPr id="20" name="">
             <a:extLst xmlns:a="http://schemas.openxmlformats.org/drawingml/2006/main">
               <a:ext uri="{FF2B5EF4-FFF2-40B4-BE49-F238E27FC236}">
-                <a16:creationId xmlns:a16="http://schemas.microsoft.com/office/drawing/2014/main" id="{914F63E3-E31C-4E5F-9C95-13A97CCCB471}"/>
+                <a16:creationId xmlns:a16="http://schemas.microsoft.com/office/drawing/2014/main" id="{391A81DA-CDC2-4809-8C71-061A535674BC}"/>
               </a:ext>
             </a:extLst>
           </p:cNvPr>
@@ -15352,7 +15352,7 @@
           <p:cNvPr id="21" name="">
             <a:extLst xmlns:a="http://schemas.openxmlformats.org/drawingml/2006/main">
               <a:ext uri="{FF2B5EF4-FFF2-40B4-BE49-F238E27FC236}">
-                <a16:creationId xmlns:a16="http://schemas.microsoft.com/office/drawing/2014/main" id="{A191856D-B741-43A2-8A5C-9CE6AE8E5650}"/>
+                <a16:creationId xmlns:a16="http://schemas.microsoft.com/office/drawing/2014/main" id="{1135537C-47CE-4D27-8838-23192A55B73C}"/>
               </a:ext>
             </a:extLst>
           </p:cNvPr>
@@ -15414,7 +15414,7 @@
           <p:cNvPr id="22" name="">
             <a:extLst xmlns:a="http://schemas.openxmlformats.org/drawingml/2006/main">
               <a:ext uri="{FF2B5EF4-FFF2-40B4-BE49-F238E27FC236}">
-                <a16:creationId xmlns:a16="http://schemas.microsoft.com/office/drawing/2014/main" id="{C4CFE5B4-8A74-43AA-AFF0-6B529E1523B4}"/>
+                <a16:creationId xmlns:a16="http://schemas.microsoft.com/office/drawing/2014/main" id="{E7F46413-B5B5-439F-912E-D7106C47AABF}"/>
               </a:ext>
             </a:extLst>
           </p:cNvPr>
@@ -15445,7 +15445,7 @@
           <p:cNvPr id="23" name="">
             <a:extLst xmlns:a="http://schemas.openxmlformats.org/drawingml/2006/main">
               <a:ext uri="{FF2B5EF4-FFF2-40B4-BE49-F238E27FC236}">
-                <a16:creationId xmlns:a16="http://schemas.microsoft.com/office/drawing/2014/main" id="{25BD9445-4FB8-476E-A7AE-815715F42CDA}"/>
+                <a16:creationId xmlns:a16="http://schemas.microsoft.com/office/drawing/2014/main" id="{F495FDE6-9190-42FF-9C2D-696187C9A123}"/>
               </a:ext>
             </a:extLst>
           </p:cNvPr>
@@ -15507,7 +15507,7 @@
           <p:cNvPr id="24" name="">
             <a:extLst xmlns:a="http://schemas.openxmlformats.org/drawingml/2006/main">
               <a:ext uri="{FF2B5EF4-FFF2-40B4-BE49-F238E27FC236}">
-                <a16:creationId xmlns:a16="http://schemas.microsoft.com/office/drawing/2014/main" id="{80C3F508-8C66-467B-B225-89338E2526CE}"/>
+                <a16:creationId xmlns:a16="http://schemas.microsoft.com/office/drawing/2014/main" id="{7E96908B-1ED2-48CA-B62C-F64E3EE86950}"/>
               </a:ext>
             </a:extLst>
           </p:cNvPr>
@@ -15569,7 +15569,7 @@
           <p:cNvPr id="25" name="">
             <a:extLst xmlns:a="http://schemas.openxmlformats.org/drawingml/2006/main">
               <a:ext uri="{FF2B5EF4-FFF2-40B4-BE49-F238E27FC236}">
-                <a16:creationId xmlns:a16="http://schemas.microsoft.com/office/drawing/2014/main" id="{B6AEC43B-3D96-4BAB-8C37-90577AF69AF1}"/>
+                <a16:creationId xmlns:a16="http://schemas.microsoft.com/office/drawing/2014/main" id="{0640546E-6FFD-4F12-9DD2-1953C4259EDD}"/>
               </a:ext>
             </a:extLst>
           </p:cNvPr>
@@ -15631,7 +15631,7 @@
           <p:cNvPr id="26" name="">
             <a:extLst xmlns:a="http://schemas.openxmlformats.org/drawingml/2006/main">
               <a:ext uri="{FF2B5EF4-FFF2-40B4-BE49-F238E27FC236}">
-                <a16:creationId xmlns:a16="http://schemas.microsoft.com/office/drawing/2014/main" id="{F1FD9F10-FF35-4C24-A388-8CBEFAF40FBE}"/>
+                <a16:creationId xmlns:a16="http://schemas.microsoft.com/office/drawing/2014/main" id="{89282347-EDF4-4EF0-8787-DF0DDFB0108F}"/>
               </a:ext>
             </a:extLst>
           </p:cNvPr>
@@ -15664,7 +15664,7 @@
           <p:cNvPr id="27" name="">
             <a:extLst xmlns:a="http://schemas.openxmlformats.org/drawingml/2006/main">
               <a:ext uri="{FF2B5EF4-FFF2-40B4-BE49-F238E27FC236}">
-                <a16:creationId xmlns:a16="http://schemas.microsoft.com/office/drawing/2014/main" id="{2DF3A1CE-FDF9-45B6-95C3-2DC9959F1B85}"/>
+                <a16:creationId xmlns:a16="http://schemas.microsoft.com/office/drawing/2014/main" id="{83722EF0-E408-4754-A86F-CB18FF66EDA2}"/>
               </a:ext>
             </a:extLst>
           </p:cNvPr>
@@ -15726,7 +15726,7 @@
           <p:cNvPr id="28" name="footer-rule-3">
             <a:extLst xmlns:a="http://schemas.openxmlformats.org/drawingml/2006/main">
               <a:ext uri="{FF2B5EF4-FFF2-40B4-BE49-F238E27FC236}">
-                <a16:creationId xmlns:a16="http://schemas.microsoft.com/office/drawing/2014/main" id="{BEF90C3C-A455-4FF1-9DB9-919973D3720E}"/>
+                <a16:creationId xmlns:a16="http://schemas.microsoft.com/office/drawing/2014/main" id="{8E4F7241-A439-4205-B4F9-BC6B658474C4}"/>
               </a:ext>
             </a:extLst>
           </p:cNvPr>
@@ -15757,7 +15757,7 @@
           <p:cNvPr id="29" name="footer-label-3">
             <a:extLst xmlns:a="http://schemas.openxmlformats.org/drawingml/2006/main">
               <a:ext uri="{FF2B5EF4-FFF2-40B4-BE49-F238E27FC236}">
-                <a16:creationId xmlns:a16="http://schemas.microsoft.com/office/drawing/2014/main" id="{EE5816C2-B1DF-4BC4-AA2C-E48F149F4458}"/>
+                <a16:creationId xmlns:a16="http://schemas.microsoft.com/office/drawing/2014/main" id="{C2CB95EA-56F3-4EE3-9665-DBE9138C57FF}"/>
               </a:ext>
             </a:extLst>
           </p:cNvPr>
@@ -15819,7 +15819,7 @@
           <p:cNvPr id="30" name="footer-page-3">
             <a:extLst xmlns:a="http://schemas.openxmlformats.org/drawingml/2006/main">
               <a:ext uri="{FF2B5EF4-FFF2-40B4-BE49-F238E27FC236}">
-                <a16:creationId xmlns:a16="http://schemas.microsoft.com/office/drawing/2014/main" id="{45337452-9BAC-4539-BA8C-D816AEFF58F6}"/>
+                <a16:creationId xmlns:a16="http://schemas.microsoft.com/office/drawing/2014/main" id="{93D19D77-659B-47FA-B442-FE8A46401814}"/>
               </a:ext>
             </a:extLst>
           </p:cNvPr>
@@ -15879,7 +15879,7 @@
     </p:spTree>
     <p:extLst>
       <p:ext uri="{BB962C8B-B14F-4D97-AF65-F5344CB8AC3E}">
-        <p14:creationId xmlns:p14="http://schemas.microsoft.com/office/powerpoint/2010/main" val="1621465530"/>
+        <p14:creationId xmlns:p14="http://schemas.microsoft.com/office/powerpoint/2010/main" val="194747672"/>
       </p:ext>
     </p:extLst>
   </p:cSld>
@@ -15910,7 +15910,7 @@
           <p:cNvPr id="28" name="side-accent-4">
             <a:extLst xmlns:a="http://schemas.openxmlformats.org/drawingml/2006/main">
               <a:ext uri="{FF2B5EF4-FFF2-40B4-BE49-F238E27FC236}">
-                <a16:creationId xmlns:a16="http://schemas.microsoft.com/office/drawing/2014/main" id="{AE78482B-612F-4F8F-B66C-5869C03A3987}"/>
+                <a16:creationId xmlns:a16="http://schemas.microsoft.com/office/drawing/2014/main" id="{7F7BE749-2D44-4D6E-BAA1-36FDF450FE60}"/>
               </a:ext>
             </a:extLst>
           </p:cNvPr>
@@ -15941,7 +15941,7 @@
           <p:cNvPr id="2" name="kicker-4">
             <a:extLst xmlns:a="http://schemas.openxmlformats.org/drawingml/2006/main">
               <a:ext uri="{FF2B5EF4-FFF2-40B4-BE49-F238E27FC236}">
-                <a16:creationId xmlns:a16="http://schemas.microsoft.com/office/drawing/2014/main" id="{FFE4E09A-0C41-4055-B527-C3A90B1E480F}"/>
+                <a16:creationId xmlns:a16="http://schemas.microsoft.com/office/drawing/2014/main" id="{75CB800C-DC2E-4A02-B404-C5963F4C9B78}"/>
               </a:ext>
             </a:extLst>
           </p:cNvPr>
@@ -16003,7 +16003,7 @@
           <p:cNvPr id="3" name="title-4">
             <a:extLst xmlns:a="http://schemas.openxmlformats.org/drawingml/2006/main">
               <a:ext uri="{FF2B5EF4-FFF2-40B4-BE49-F238E27FC236}">
-                <a16:creationId xmlns:a16="http://schemas.microsoft.com/office/drawing/2014/main" id="{99A87F67-BD24-4E07-9D11-E9545AFC83A7}"/>
+                <a16:creationId xmlns:a16="http://schemas.microsoft.com/office/drawing/2014/main" id="{A1AFF7DF-E4A1-4D6D-A15A-8E2712A39579}"/>
               </a:ext>
             </a:extLst>
           </p:cNvPr>
@@ -16065,7 +16065,7 @@
           <p:cNvPr id="4" name="">
             <a:extLst xmlns:a="http://schemas.openxmlformats.org/drawingml/2006/main">
               <a:ext uri="{FF2B5EF4-FFF2-40B4-BE49-F238E27FC236}">
-                <a16:creationId xmlns:a16="http://schemas.microsoft.com/office/drawing/2014/main" id="{B990C9F2-9B15-42B9-B753-02E796EC17C9}"/>
+                <a16:creationId xmlns:a16="http://schemas.microsoft.com/office/drawing/2014/main" id="{58ED49FA-BFB7-4963-836A-87BC0C61FFF9}"/>
               </a:ext>
             </a:extLst>
           </p:cNvPr>
@@ -16127,7 +16127,7 @@
           <p:cNvPr id="5" name="">
             <a:extLst xmlns:a="http://schemas.openxmlformats.org/drawingml/2006/main">
               <a:ext uri="{FF2B5EF4-FFF2-40B4-BE49-F238E27FC236}">
-                <a16:creationId xmlns:a16="http://schemas.microsoft.com/office/drawing/2014/main" id="{EA43E6E8-FD95-4669-AC5C-2C65CD775085}"/>
+                <a16:creationId xmlns:a16="http://schemas.microsoft.com/office/drawing/2014/main" id="{D43FC5F2-6125-49A9-8AEC-D539213FD20B}"/>
               </a:ext>
             </a:extLst>
           </p:cNvPr>
@@ -16189,7 +16189,7 @@
           <p:cNvPr id="6" name="">
             <a:extLst xmlns:a="http://schemas.openxmlformats.org/drawingml/2006/main">
               <a:ext uri="{FF2B5EF4-FFF2-40B4-BE49-F238E27FC236}">
-                <a16:creationId xmlns:a16="http://schemas.microsoft.com/office/drawing/2014/main" id="{4E257C1E-202B-4DFB-A254-51AC8F4C9605}"/>
+                <a16:creationId xmlns:a16="http://schemas.microsoft.com/office/drawing/2014/main" id="{7F50AD0A-D662-4613-8DD1-7E54D97391EC}"/>
               </a:ext>
             </a:extLst>
           </p:cNvPr>
@@ -16251,7 +16251,7 @@
           <p:cNvPr id="7" name="">
             <a:extLst xmlns:a="http://schemas.openxmlformats.org/drawingml/2006/main">
               <a:ext uri="{FF2B5EF4-FFF2-40B4-BE49-F238E27FC236}">
-                <a16:creationId xmlns:a16="http://schemas.microsoft.com/office/drawing/2014/main" id="{AC15891D-E1CB-4457-A45B-47FD8A61DFC3}"/>
+                <a16:creationId xmlns:a16="http://schemas.microsoft.com/office/drawing/2014/main" id="{632DE3BC-2F98-4892-A11B-21C3FDE6BE6E}"/>
               </a:ext>
             </a:extLst>
           </p:cNvPr>
@@ -16282,7 +16282,7 @@
           <p:cNvPr id="8" name="">
             <a:extLst xmlns:a="http://schemas.openxmlformats.org/drawingml/2006/main">
               <a:ext uri="{FF2B5EF4-FFF2-40B4-BE49-F238E27FC236}">
-                <a16:creationId xmlns:a16="http://schemas.microsoft.com/office/drawing/2014/main" id="{70A285DE-557E-4F7E-B92F-622BDB3A64FE}"/>
+                <a16:creationId xmlns:a16="http://schemas.microsoft.com/office/drawing/2014/main" id="{32E3117C-8E4A-4CDE-9A74-DE469F72650C}"/>
               </a:ext>
             </a:extLst>
           </p:cNvPr>
@@ -16344,7 +16344,7 @@
           <p:cNvPr id="9" name="">
             <a:extLst xmlns:a="http://schemas.openxmlformats.org/drawingml/2006/main">
               <a:ext uri="{FF2B5EF4-FFF2-40B4-BE49-F238E27FC236}">
-                <a16:creationId xmlns:a16="http://schemas.microsoft.com/office/drawing/2014/main" id="{1F159A70-B682-4AA2-BD4D-6DF24EE154F2}"/>
+                <a16:creationId xmlns:a16="http://schemas.microsoft.com/office/drawing/2014/main" id="{B55366EA-DE78-46FE-9FB3-799776FB0332}"/>
               </a:ext>
             </a:extLst>
           </p:cNvPr>
@@ -16406,7 +16406,7 @@
           <p:cNvPr id="10" name="">
             <a:extLst xmlns:a="http://schemas.openxmlformats.org/drawingml/2006/main">
               <a:ext uri="{FF2B5EF4-FFF2-40B4-BE49-F238E27FC236}">
-                <a16:creationId xmlns:a16="http://schemas.microsoft.com/office/drawing/2014/main" id="{CDDA271D-3A8B-49F1-AD7B-9773572DB7B6}"/>
+                <a16:creationId xmlns:a16="http://schemas.microsoft.com/office/drawing/2014/main" id="{450DC168-C6B7-4597-A91A-B94B0B6DF8FB}"/>
               </a:ext>
             </a:extLst>
           </p:cNvPr>
@@ -16468,7 +16468,7 @@
           <p:cNvPr id="11" name="">
             <a:extLst xmlns:a="http://schemas.openxmlformats.org/drawingml/2006/main">
               <a:ext uri="{FF2B5EF4-FFF2-40B4-BE49-F238E27FC236}">
-                <a16:creationId xmlns:a16="http://schemas.microsoft.com/office/drawing/2014/main" id="{2355C673-B68F-42E5-89DD-280C0F83D903}"/>
+                <a16:creationId xmlns:a16="http://schemas.microsoft.com/office/drawing/2014/main" id="{D319A91B-A206-42E5-91DF-6DFEA64A5DB3}"/>
               </a:ext>
             </a:extLst>
           </p:cNvPr>
@@ -16499,7 +16499,7 @@
           <p:cNvPr id="12" name="">
             <a:extLst xmlns:a="http://schemas.openxmlformats.org/drawingml/2006/main">
               <a:ext uri="{FF2B5EF4-FFF2-40B4-BE49-F238E27FC236}">
-                <a16:creationId xmlns:a16="http://schemas.microsoft.com/office/drawing/2014/main" id="{3D4DA36E-690D-4523-9AB5-CED121E07177}"/>
+                <a16:creationId xmlns:a16="http://schemas.microsoft.com/office/drawing/2014/main" id="{CF95CB8B-F437-4125-B4E0-2DB37B2B291A}"/>
               </a:ext>
             </a:extLst>
           </p:cNvPr>
@@ -16561,7 +16561,7 @@
           <p:cNvPr id="13" name="">
             <a:extLst xmlns:a="http://schemas.openxmlformats.org/drawingml/2006/main">
               <a:ext uri="{FF2B5EF4-FFF2-40B4-BE49-F238E27FC236}">
-                <a16:creationId xmlns:a16="http://schemas.microsoft.com/office/drawing/2014/main" id="{16200368-2B20-45BE-B9C5-D130084DADA4}"/>
+                <a16:creationId xmlns:a16="http://schemas.microsoft.com/office/drawing/2014/main" id="{EF52EA03-C3D2-4D4F-AE48-7A0B8CD57422}"/>
               </a:ext>
             </a:extLst>
           </p:cNvPr>
@@ -16623,7 +16623,7 @@
           <p:cNvPr id="14" name="">
             <a:extLst xmlns:a="http://schemas.openxmlformats.org/drawingml/2006/main">
               <a:ext uri="{FF2B5EF4-FFF2-40B4-BE49-F238E27FC236}">
-                <a16:creationId xmlns:a16="http://schemas.microsoft.com/office/drawing/2014/main" id="{3ABEC7C6-98F2-47E4-8B11-06B21D3EB33D}"/>
+                <a16:creationId xmlns:a16="http://schemas.microsoft.com/office/drawing/2014/main" id="{2BE658BA-F3B0-4130-9255-34905E068DAD}"/>
               </a:ext>
             </a:extLst>
           </p:cNvPr>
@@ -16685,7 +16685,7 @@
           <p:cNvPr id="15" name="">
             <a:extLst xmlns:a="http://schemas.openxmlformats.org/drawingml/2006/main">
               <a:ext uri="{FF2B5EF4-FFF2-40B4-BE49-F238E27FC236}">
-                <a16:creationId xmlns:a16="http://schemas.microsoft.com/office/drawing/2014/main" id="{4209C41B-5A41-4EE9-81C7-D8DDB7A53A5A}"/>
+                <a16:creationId xmlns:a16="http://schemas.microsoft.com/office/drawing/2014/main" id="{C1FFBD40-0CFB-43AD-947D-1B6A5E62396F}"/>
               </a:ext>
             </a:extLst>
           </p:cNvPr>
@@ -16716,7 +16716,7 @@
           <p:cNvPr id="16" name="">
             <a:extLst xmlns:a="http://schemas.openxmlformats.org/drawingml/2006/main">
               <a:ext uri="{FF2B5EF4-FFF2-40B4-BE49-F238E27FC236}">
-                <a16:creationId xmlns:a16="http://schemas.microsoft.com/office/drawing/2014/main" id="{406130D2-627F-4DA3-9FBC-2AC0A1AE1DB7}"/>
+                <a16:creationId xmlns:a16="http://schemas.microsoft.com/office/drawing/2014/main" id="{77CF2850-9FC1-45BA-A46B-800BD1ACCBB9}"/>
               </a:ext>
             </a:extLst>
           </p:cNvPr>
@@ -16778,7 +16778,7 @@
           <p:cNvPr id="17" name="">
             <a:extLst xmlns:a="http://schemas.openxmlformats.org/drawingml/2006/main">
               <a:ext uri="{FF2B5EF4-FFF2-40B4-BE49-F238E27FC236}">
-                <a16:creationId xmlns:a16="http://schemas.microsoft.com/office/drawing/2014/main" id="{987992D4-51EC-4BA5-B87A-8C8CF604D383}"/>
+                <a16:creationId xmlns:a16="http://schemas.microsoft.com/office/drawing/2014/main" id="{71292250-62D0-470A-9269-0CF0F3A2D554}"/>
               </a:ext>
             </a:extLst>
           </p:cNvPr>
@@ -16840,7 +16840,7 @@
           <p:cNvPr id="18" name="">
             <a:extLst xmlns:a="http://schemas.openxmlformats.org/drawingml/2006/main">
               <a:ext uri="{FF2B5EF4-FFF2-40B4-BE49-F238E27FC236}">
-                <a16:creationId xmlns:a16="http://schemas.microsoft.com/office/drawing/2014/main" id="{DE0F525C-1F3C-4FB9-9286-19A21BF0DB03}"/>
+                <a16:creationId xmlns:a16="http://schemas.microsoft.com/office/drawing/2014/main" id="{1C00AA25-1A6A-46D3-9B3B-9E36DB64925D}"/>
               </a:ext>
             </a:extLst>
           </p:cNvPr>
@@ -16902,7 +16902,7 @@
           <p:cNvPr id="19" name="">
             <a:extLst xmlns:a="http://schemas.openxmlformats.org/drawingml/2006/main">
               <a:ext uri="{FF2B5EF4-FFF2-40B4-BE49-F238E27FC236}">
-                <a16:creationId xmlns:a16="http://schemas.microsoft.com/office/drawing/2014/main" id="{86FC7CF1-02BE-49EF-A9E8-FB60FB820D6D}"/>
+                <a16:creationId xmlns:a16="http://schemas.microsoft.com/office/drawing/2014/main" id="{FF1D3133-2E99-489B-8172-44E80A92C05F}"/>
               </a:ext>
             </a:extLst>
           </p:cNvPr>
@@ -16933,7 +16933,7 @@
           <p:cNvPr id="20" name="">
             <a:extLst xmlns:a="http://schemas.openxmlformats.org/drawingml/2006/main">
               <a:ext uri="{FF2B5EF4-FFF2-40B4-BE49-F238E27FC236}">
-                <a16:creationId xmlns:a16="http://schemas.microsoft.com/office/drawing/2014/main" id="{82F5D003-0DB1-4AE0-8996-6FCB52096565}"/>
+                <a16:creationId xmlns:a16="http://schemas.microsoft.com/office/drawing/2014/main" id="{79181FF1-DD8E-4941-8E31-3CEADF8BBD34}"/>
               </a:ext>
             </a:extLst>
           </p:cNvPr>
@@ -16995,7 +16995,7 @@
           <p:cNvPr id="21" name="">
             <a:extLst xmlns:a="http://schemas.openxmlformats.org/drawingml/2006/main">
               <a:ext uri="{FF2B5EF4-FFF2-40B4-BE49-F238E27FC236}">
-                <a16:creationId xmlns:a16="http://schemas.microsoft.com/office/drawing/2014/main" id="{7522D8D0-3F3D-4E47-B7B8-1B540E6A5F95}"/>
+                <a16:creationId xmlns:a16="http://schemas.microsoft.com/office/drawing/2014/main" id="{38744905-6E6B-4238-881D-BA8D715E0E1E}"/>
               </a:ext>
             </a:extLst>
           </p:cNvPr>
@@ -17057,7 +17057,7 @@
           <p:cNvPr id="22" name="">
             <a:extLst xmlns:a="http://schemas.openxmlformats.org/drawingml/2006/main">
               <a:ext uri="{FF2B5EF4-FFF2-40B4-BE49-F238E27FC236}">
-                <a16:creationId xmlns:a16="http://schemas.microsoft.com/office/drawing/2014/main" id="{E5A37B58-7028-411D-AB72-B6CC4B12FBF6}"/>
+                <a16:creationId xmlns:a16="http://schemas.microsoft.com/office/drawing/2014/main" id="{F88977F9-E598-4287-B268-4D56FFF9245C}"/>
               </a:ext>
             </a:extLst>
           </p:cNvPr>
@@ -17119,7 +17119,7 @@
           <p:cNvPr id="23" name="">
             <a:extLst xmlns:a="http://schemas.openxmlformats.org/drawingml/2006/main">
               <a:ext uri="{FF2B5EF4-FFF2-40B4-BE49-F238E27FC236}">
-                <a16:creationId xmlns:a16="http://schemas.microsoft.com/office/drawing/2014/main" id="{96B1B1B4-8003-4E4C-A2C4-ACEE67086B0D}"/>
+                <a16:creationId xmlns:a16="http://schemas.microsoft.com/office/drawing/2014/main" id="{3800FE8E-D69C-4FB7-B35E-9E3642155A9F}"/>
               </a:ext>
             </a:extLst>
           </p:cNvPr>
@@ -17152,7 +17152,7 @@
           <p:cNvPr id="24" name="">
             <a:extLst xmlns:a="http://schemas.openxmlformats.org/drawingml/2006/main">
               <a:ext uri="{FF2B5EF4-FFF2-40B4-BE49-F238E27FC236}">
-                <a16:creationId xmlns:a16="http://schemas.microsoft.com/office/drawing/2014/main" id="{EDD2B9DC-C207-4CFA-B643-4BC1B8018D2B}"/>
+                <a16:creationId xmlns:a16="http://schemas.microsoft.com/office/drawing/2014/main" id="{71D43903-2EEF-4F10-9D4C-B372354A791B}"/>
               </a:ext>
             </a:extLst>
           </p:cNvPr>
@@ -17214,7 +17214,7 @@
           <p:cNvPr id="25" name="footer-rule-4">
             <a:extLst xmlns:a="http://schemas.openxmlformats.org/drawingml/2006/main">
               <a:ext uri="{FF2B5EF4-FFF2-40B4-BE49-F238E27FC236}">
-                <a16:creationId xmlns:a16="http://schemas.microsoft.com/office/drawing/2014/main" id="{CDA410ED-7358-4E98-A512-0C29A0A4EB6B}"/>
+                <a16:creationId xmlns:a16="http://schemas.microsoft.com/office/drawing/2014/main" id="{32EFA679-8945-4138-A113-D840A3405BAB}"/>
               </a:ext>
             </a:extLst>
           </p:cNvPr>
@@ -17245,7 +17245,7 @@
           <p:cNvPr id="26" name="footer-label-4">
             <a:extLst xmlns:a="http://schemas.openxmlformats.org/drawingml/2006/main">
               <a:ext uri="{FF2B5EF4-FFF2-40B4-BE49-F238E27FC236}">
-                <a16:creationId xmlns:a16="http://schemas.microsoft.com/office/drawing/2014/main" id="{5C4C41A6-9B19-46CD-ABB1-28B4FA356D2E}"/>
+                <a16:creationId xmlns:a16="http://schemas.microsoft.com/office/drawing/2014/main" id="{320337B6-5609-4879-A39D-AC2BEAF346A7}"/>
               </a:ext>
             </a:extLst>
           </p:cNvPr>
@@ -17307,7 +17307,7 @@
           <p:cNvPr id="27" name="footer-page-4">
             <a:extLst xmlns:a="http://schemas.openxmlformats.org/drawingml/2006/main">
               <a:ext uri="{FF2B5EF4-FFF2-40B4-BE49-F238E27FC236}">
-                <a16:creationId xmlns:a16="http://schemas.microsoft.com/office/drawing/2014/main" id="{1E6D820E-C9AE-4F9E-B968-550B4724EF3C}"/>
+                <a16:creationId xmlns:a16="http://schemas.microsoft.com/office/drawing/2014/main" id="{EC83691A-9B79-4C3D-8B83-9B6D7B03E3B3}"/>
               </a:ext>
             </a:extLst>
           </p:cNvPr>
@@ -17367,7 +17367,7 @@
     </p:spTree>
     <p:extLst>
       <p:ext uri="{BB962C8B-B14F-4D97-AF65-F5344CB8AC3E}">
-        <p14:creationId xmlns:p14="http://schemas.microsoft.com/office/powerpoint/2010/main" val="1169693406"/>
+        <p14:creationId xmlns:p14="http://schemas.microsoft.com/office/powerpoint/2010/main" val="2146363127"/>
       </p:ext>
     </p:extLst>
   </p:cSld>
@@ -17398,7 +17398,7 @@
           <p:cNvPr id="31" name="side-accent-5">
             <a:extLst xmlns:a="http://schemas.openxmlformats.org/drawingml/2006/main">
               <a:ext uri="{FF2B5EF4-FFF2-40B4-BE49-F238E27FC236}">
-                <a16:creationId xmlns:a16="http://schemas.microsoft.com/office/drawing/2014/main" id="{AEAA27EA-9FD9-4048-8912-96EC8CC74425}"/>
+                <a16:creationId xmlns:a16="http://schemas.microsoft.com/office/drawing/2014/main" id="{0DC0F2AC-B49E-4091-9364-6784DA67D215}"/>
               </a:ext>
             </a:extLst>
           </p:cNvPr>
@@ -17429,7 +17429,7 @@
           <p:cNvPr id="2" name="kicker-5">
             <a:extLst xmlns:a="http://schemas.openxmlformats.org/drawingml/2006/main">
               <a:ext uri="{FF2B5EF4-FFF2-40B4-BE49-F238E27FC236}">
-                <a16:creationId xmlns:a16="http://schemas.microsoft.com/office/drawing/2014/main" id="{C1608434-62F1-4532-81D9-E182CD566E41}"/>
+                <a16:creationId xmlns:a16="http://schemas.microsoft.com/office/drawing/2014/main" id="{B16357F6-DF9E-46A1-BEED-39BAB2E65873}"/>
               </a:ext>
             </a:extLst>
           </p:cNvPr>
@@ -17491,7 +17491,7 @@
           <p:cNvPr id="3" name="title-5">
             <a:extLst xmlns:a="http://schemas.openxmlformats.org/drawingml/2006/main">
               <a:ext uri="{FF2B5EF4-FFF2-40B4-BE49-F238E27FC236}">
-                <a16:creationId xmlns:a16="http://schemas.microsoft.com/office/drawing/2014/main" id="{438A674A-92F6-44D5-B274-0356DABFA7F9}"/>
+                <a16:creationId xmlns:a16="http://schemas.microsoft.com/office/drawing/2014/main" id="{56354841-5F2B-4F4A-BBD9-1DBE03F894C0}"/>
               </a:ext>
             </a:extLst>
           </p:cNvPr>
@@ -17553,7 +17553,7 @@
           <p:cNvPr id="4" name="">
             <a:extLst xmlns:a="http://schemas.openxmlformats.org/drawingml/2006/main">
               <a:ext uri="{FF2B5EF4-FFF2-40B4-BE49-F238E27FC236}">
-                <a16:creationId xmlns:a16="http://schemas.microsoft.com/office/drawing/2014/main" id="{8031F865-580F-421F-9304-F78359DB4283}"/>
+                <a16:creationId xmlns:a16="http://schemas.microsoft.com/office/drawing/2014/main" id="{7F94C44C-F143-4337-B1B4-3165A819C172}"/>
               </a:ext>
             </a:extLst>
           </p:cNvPr>
@@ -17615,7 +17615,7 @@
           <p:cNvPr id="5" name="workflow-line">
             <a:extLst xmlns:a="http://schemas.openxmlformats.org/drawingml/2006/main">
               <a:ext uri="{FF2B5EF4-FFF2-40B4-BE49-F238E27FC236}">
-                <a16:creationId xmlns:a16="http://schemas.microsoft.com/office/drawing/2014/main" id="{A89D0494-BCBD-4AA5-A28F-66BEF13A9CC3}"/>
+                <a16:creationId xmlns:a16="http://schemas.microsoft.com/office/drawing/2014/main" id="{B77422B2-12BF-4B57-8C89-69AE0E314E79}"/>
               </a:ext>
             </a:extLst>
           </p:cNvPr>
@@ -17646,7 +17646,7 @@
           <p:cNvPr id="6" name="workflow-arrow">
             <a:extLst xmlns:a="http://schemas.openxmlformats.org/drawingml/2006/main">
               <a:ext uri="{FF2B5EF4-FFF2-40B4-BE49-F238E27FC236}">
-                <a16:creationId xmlns:a16="http://schemas.microsoft.com/office/drawing/2014/main" id="{2E66CF12-5FE1-4934-9AD0-2AE1B495F54C}"/>
+                <a16:creationId xmlns:a16="http://schemas.microsoft.com/office/drawing/2014/main" id="{7AA95D19-25FC-4A01-960F-FB4EF4E5F994}"/>
               </a:ext>
             </a:extLst>
           </p:cNvPr>
@@ -17677,7 +17677,7 @@
           <p:cNvPr id="7" name="">
             <a:extLst xmlns:a="http://schemas.openxmlformats.org/drawingml/2006/main">
               <a:ext uri="{FF2B5EF4-FFF2-40B4-BE49-F238E27FC236}">
-                <a16:creationId xmlns:a16="http://schemas.microsoft.com/office/drawing/2014/main" id="{B729D7A2-96E1-481E-B3AE-5ABC48ADC0F0}"/>
+                <a16:creationId xmlns:a16="http://schemas.microsoft.com/office/drawing/2014/main" id="{1F0BF001-38D6-463B-8A2D-3051EE9E9FFF}"/>
               </a:ext>
             </a:extLst>
           </p:cNvPr>
@@ -17708,7 +17708,7 @@
           <p:cNvPr id="8" name="">
             <a:extLst xmlns:a="http://schemas.openxmlformats.org/drawingml/2006/main">
               <a:ext uri="{FF2B5EF4-FFF2-40B4-BE49-F238E27FC236}">
-                <a16:creationId xmlns:a16="http://schemas.microsoft.com/office/drawing/2014/main" id="{CE27B722-133D-4094-88D1-D9C6A9EF7079}"/>
+                <a16:creationId xmlns:a16="http://schemas.microsoft.com/office/drawing/2014/main" id="{AF383574-C93D-4F12-8D07-A36E34A08050}"/>
               </a:ext>
             </a:extLst>
           </p:cNvPr>
@@ -17770,7 +17770,7 @@
           <p:cNvPr id="9" name="">
             <a:extLst xmlns:a="http://schemas.openxmlformats.org/drawingml/2006/main">
               <a:ext uri="{FF2B5EF4-FFF2-40B4-BE49-F238E27FC236}">
-                <a16:creationId xmlns:a16="http://schemas.microsoft.com/office/drawing/2014/main" id="{6EAA4B82-D05B-4D33-A35E-059A31C49247}"/>
+                <a16:creationId xmlns:a16="http://schemas.microsoft.com/office/drawing/2014/main" id="{4B50D694-1622-4E8D-A792-49E22018A29D}"/>
               </a:ext>
             </a:extLst>
           </p:cNvPr>
@@ -17832,7 +17832,7 @@
           <p:cNvPr id="10" name="">
             <a:extLst xmlns:a="http://schemas.openxmlformats.org/drawingml/2006/main">
               <a:ext uri="{FF2B5EF4-FFF2-40B4-BE49-F238E27FC236}">
-                <a16:creationId xmlns:a16="http://schemas.microsoft.com/office/drawing/2014/main" id="{9AC82807-A8EC-448F-91ED-036C0A32F51D}"/>
+                <a16:creationId xmlns:a16="http://schemas.microsoft.com/office/drawing/2014/main" id="{4377B0BD-FB10-414C-B7D7-E0A9EC929553}"/>
               </a:ext>
             </a:extLst>
           </p:cNvPr>
@@ -17894,7 +17894,7 @@
           <p:cNvPr id="11" name="">
             <a:extLst xmlns:a="http://schemas.openxmlformats.org/drawingml/2006/main">
               <a:ext uri="{FF2B5EF4-FFF2-40B4-BE49-F238E27FC236}">
-                <a16:creationId xmlns:a16="http://schemas.microsoft.com/office/drawing/2014/main" id="{448D9F96-3FA3-4772-A984-089089E62033}"/>
+                <a16:creationId xmlns:a16="http://schemas.microsoft.com/office/drawing/2014/main" id="{BA8CD116-192D-44D9-84F9-DFDFEF251047}"/>
               </a:ext>
             </a:extLst>
           </p:cNvPr>
@@ -17925,7 +17925,7 @@
           <p:cNvPr id="12" name="">
             <a:extLst xmlns:a="http://schemas.openxmlformats.org/drawingml/2006/main">
               <a:ext uri="{FF2B5EF4-FFF2-40B4-BE49-F238E27FC236}">
-                <a16:creationId xmlns:a16="http://schemas.microsoft.com/office/drawing/2014/main" id="{5F04FDE8-725A-413D-A2C3-722D28060FB3}"/>
+                <a16:creationId xmlns:a16="http://schemas.microsoft.com/office/drawing/2014/main" id="{871CD9F7-1CAE-4054-9C50-68AAD8A55691}"/>
               </a:ext>
             </a:extLst>
           </p:cNvPr>
@@ -17987,7 +17987,7 @@
           <p:cNvPr id="13" name="">
             <a:extLst xmlns:a="http://schemas.openxmlformats.org/drawingml/2006/main">
               <a:ext uri="{FF2B5EF4-FFF2-40B4-BE49-F238E27FC236}">
-                <a16:creationId xmlns:a16="http://schemas.microsoft.com/office/drawing/2014/main" id="{B19C5B5E-2179-4499-8564-B9E7AC7CC2B7}"/>
+                <a16:creationId xmlns:a16="http://schemas.microsoft.com/office/drawing/2014/main" id="{A36B6056-EDAB-4D4A-9D66-D6814C27DD9A}"/>
               </a:ext>
             </a:extLst>
           </p:cNvPr>
@@ -18049,7 +18049,7 @@
           <p:cNvPr id="14" name="">
             <a:extLst xmlns:a="http://schemas.openxmlformats.org/drawingml/2006/main">
               <a:ext uri="{FF2B5EF4-FFF2-40B4-BE49-F238E27FC236}">
-                <a16:creationId xmlns:a16="http://schemas.microsoft.com/office/drawing/2014/main" id="{47ED8D9D-3135-4AEE-874D-2C4E57411A34}"/>
+                <a16:creationId xmlns:a16="http://schemas.microsoft.com/office/drawing/2014/main" id="{4DE548C3-ABFB-4CF3-BEEF-8EC6CB75A3B0}"/>
               </a:ext>
             </a:extLst>
           </p:cNvPr>
@@ -18111,7 +18111,7 @@
           <p:cNvPr id="15" name="">
             <a:extLst xmlns:a="http://schemas.openxmlformats.org/drawingml/2006/main">
               <a:ext uri="{FF2B5EF4-FFF2-40B4-BE49-F238E27FC236}">
-                <a16:creationId xmlns:a16="http://schemas.microsoft.com/office/drawing/2014/main" id="{19BA21CD-8CAB-407C-A44E-106608287E88}"/>
+                <a16:creationId xmlns:a16="http://schemas.microsoft.com/office/drawing/2014/main" id="{9BFA305E-2FCA-46A8-81CD-04E5797E4253}"/>
               </a:ext>
             </a:extLst>
           </p:cNvPr>
@@ -18142,7 +18142,7 @@
           <p:cNvPr id="16" name="">
             <a:extLst xmlns:a="http://schemas.openxmlformats.org/drawingml/2006/main">
               <a:ext uri="{FF2B5EF4-FFF2-40B4-BE49-F238E27FC236}">
-                <a16:creationId xmlns:a16="http://schemas.microsoft.com/office/drawing/2014/main" id="{96D57A60-7A6D-4E7D-B457-148831D525F3}"/>
+                <a16:creationId xmlns:a16="http://schemas.microsoft.com/office/drawing/2014/main" id="{8DEABDC4-C272-4D66-B3D6-ABB3365475F3}"/>
               </a:ext>
             </a:extLst>
           </p:cNvPr>
@@ -18204,7 +18204,7 @@
           <p:cNvPr id="17" name="">
             <a:extLst xmlns:a="http://schemas.openxmlformats.org/drawingml/2006/main">
               <a:ext uri="{FF2B5EF4-FFF2-40B4-BE49-F238E27FC236}">
-                <a16:creationId xmlns:a16="http://schemas.microsoft.com/office/drawing/2014/main" id="{34B9A98E-5BC0-4B46-9109-79CB1690731A}"/>
+                <a16:creationId xmlns:a16="http://schemas.microsoft.com/office/drawing/2014/main" id="{E2DF87F0-BB34-4B75-85E2-0F28724B493C}"/>
               </a:ext>
             </a:extLst>
           </p:cNvPr>
@@ -18266,7 +18266,7 @@
           <p:cNvPr id="18" name="">
             <a:extLst xmlns:a="http://schemas.openxmlformats.org/drawingml/2006/main">
               <a:ext uri="{FF2B5EF4-FFF2-40B4-BE49-F238E27FC236}">
-                <a16:creationId xmlns:a16="http://schemas.microsoft.com/office/drawing/2014/main" id="{55F7BD84-F694-44F1-B20F-6224F945B803}"/>
+                <a16:creationId xmlns:a16="http://schemas.microsoft.com/office/drawing/2014/main" id="{4599B5C9-85A0-4EBE-859C-A190D5054758}"/>
               </a:ext>
             </a:extLst>
           </p:cNvPr>
@@ -18328,7 +18328,7 @@
           <p:cNvPr id="19" name="">
             <a:extLst xmlns:a="http://schemas.openxmlformats.org/drawingml/2006/main">
               <a:ext uri="{FF2B5EF4-FFF2-40B4-BE49-F238E27FC236}">
-                <a16:creationId xmlns:a16="http://schemas.microsoft.com/office/drawing/2014/main" id="{80D7113A-7028-44F6-8271-47A13603935D}"/>
+                <a16:creationId xmlns:a16="http://schemas.microsoft.com/office/drawing/2014/main" id="{5A17FD8F-A0B7-46B6-B890-9B8A0FD49298}"/>
               </a:ext>
             </a:extLst>
           </p:cNvPr>
@@ -18359,7 +18359,7 @@
           <p:cNvPr id="20" name="">
             <a:extLst xmlns:a="http://schemas.openxmlformats.org/drawingml/2006/main">
               <a:ext uri="{FF2B5EF4-FFF2-40B4-BE49-F238E27FC236}">
-                <a16:creationId xmlns:a16="http://schemas.microsoft.com/office/drawing/2014/main" id="{F6C1E39C-997D-4EFC-8D45-1E93B317E24A}"/>
+                <a16:creationId xmlns:a16="http://schemas.microsoft.com/office/drawing/2014/main" id="{4B59B87C-FF2B-485D-BC62-8AC694AAB682}"/>
               </a:ext>
             </a:extLst>
           </p:cNvPr>
@@ -18421,7 +18421,7 @@
           <p:cNvPr id="21" name="">
             <a:extLst xmlns:a="http://schemas.openxmlformats.org/drawingml/2006/main">
               <a:ext uri="{FF2B5EF4-FFF2-40B4-BE49-F238E27FC236}">
-                <a16:creationId xmlns:a16="http://schemas.microsoft.com/office/drawing/2014/main" id="{B39822ED-C6B5-4990-BB80-9F6480A13195}"/>
+                <a16:creationId xmlns:a16="http://schemas.microsoft.com/office/drawing/2014/main" id="{313B78CD-DCFB-4CF8-A57C-3D03A3478AC0}"/>
               </a:ext>
             </a:extLst>
           </p:cNvPr>
@@ -18483,7 +18483,7 @@
           <p:cNvPr id="22" name="">
             <a:extLst xmlns:a="http://schemas.openxmlformats.org/drawingml/2006/main">
               <a:ext uri="{FF2B5EF4-FFF2-40B4-BE49-F238E27FC236}">
-                <a16:creationId xmlns:a16="http://schemas.microsoft.com/office/drawing/2014/main" id="{164AC212-DBD9-421F-962A-374EAD717E41}"/>
+                <a16:creationId xmlns:a16="http://schemas.microsoft.com/office/drawing/2014/main" id="{A3B4EB39-AA9E-4458-900A-258013F98605}"/>
               </a:ext>
             </a:extLst>
           </p:cNvPr>
@@ -18545,7 +18545,7 @@
           <p:cNvPr id="23" name="">
             <a:extLst xmlns:a="http://schemas.openxmlformats.org/drawingml/2006/main">
               <a:ext uri="{FF2B5EF4-FFF2-40B4-BE49-F238E27FC236}">
-                <a16:creationId xmlns:a16="http://schemas.microsoft.com/office/drawing/2014/main" id="{E1A3CBCA-120B-40BD-8B81-77A46DA418F6}"/>
+                <a16:creationId xmlns:a16="http://schemas.microsoft.com/office/drawing/2014/main" id="{D423794A-821D-4765-B2C0-F74A24ED0D37}"/>
               </a:ext>
             </a:extLst>
           </p:cNvPr>
@@ -18576,7 +18576,7 @@
           <p:cNvPr id="24" name="">
             <a:extLst xmlns:a="http://schemas.openxmlformats.org/drawingml/2006/main">
               <a:ext uri="{FF2B5EF4-FFF2-40B4-BE49-F238E27FC236}">
-                <a16:creationId xmlns:a16="http://schemas.microsoft.com/office/drawing/2014/main" id="{8EAF1131-EA0A-4896-A56E-89EC3E38A46F}"/>
+                <a16:creationId xmlns:a16="http://schemas.microsoft.com/office/drawing/2014/main" id="{82AB6395-2426-4597-A953-76AE8FAECDC3}"/>
               </a:ext>
             </a:extLst>
           </p:cNvPr>
@@ -18638,7 +18638,7 @@
           <p:cNvPr id="25" name="">
             <a:extLst xmlns:a="http://schemas.openxmlformats.org/drawingml/2006/main">
               <a:ext uri="{FF2B5EF4-FFF2-40B4-BE49-F238E27FC236}">
-                <a16:creationId xmlns:a16="http://schemas.microsoft.com/office/drawing/2014/main" id="{58582505-289F-4A0D-8FE5-32B4AB605482}"/>
+                <a16:creationId xmlns:a16="http://schemas.microsoft.com/office/drawing/2014/main" id="{4C3FF9DC-B6F8-48C4-AA9E-3DD8C112C7A1}"/>
               </a:ext>
             </a:extLst>
           </p:cNvPr>
@@ -18700,7 +18700,7 @@
           <p:cNvPr id="26" name="">
             <a:extLst xmlns:a="http://schemas.openxmlformats.org/drawingml/2006/main">
               <a:ext uri="{FF2B5EF4-FFF2-40B4-BE49-F238E27FC236}">
-                <a16:creationId xmlns:a16="http://schemas.microsoft.com/office/drawing/2014/main" id="{C5D8D6AC-E1A5-40D8-A344-0EF80A726897}"/>
+                <a16:creationId xmlns:a16="http://schemas.microsoft.com/office/drawing/2014/main" id="{2CF8611D-2E28-4D89-9C54-6A329DBB9DE7}"/>
               </a:ext>
             </a:extLst>
           </p:cNvPr>
@@ -18762,7 +18762,7 @@
           <p:cNvPr id="27" name="">
             <a:extLst xmlns:a="http://schemas.openxmlformats.org/drawingml/2006/main">
               <a:ext uri="{FF2B5EF4-FFF2-40B4-BE49-F238E27FC236}">
-                <a16:creationId xmlns:a16="http://schemas.microsoft.com/office/drawing/2014/main" id="{0B78139A-A072-416D-B693-6A5BE12999A7}"/>
+                <a16:creationId xmlns:a16="http://schemas.microsoft.com/office/drawing/2014/main" id="{92D08F8E-DD16-45A0-B1C2-B9D3BEB1D5E5}"/>
               </a:ext>
             </a:extLst>
           </p:cNvPr>
@@ -18824,7 +18824,7 @@
           <p:cNvPr id="28" name="footer-rule-5">
             <a:extLst xmlns:a="http://schemas.openxmlformats.org/drawingml/2006/main">
               <a:ext uri="{FF2B5EF4-FFF2-40B4-BE49-F238E27FC236}">
-                <a16:creationId xmlns:a16="http://schemas.microsoft.com/office/drawing/2014/main" id="{D40F6282-CB85-4CD7-BB5F-705D1FE930DD}"/>
+                <a16:creationId xmlns:a16="http://schemas.microsoft.com/office/drawing/2014/main" id="{C0FD3E7C-BDE6-45F2-8B23-E0FFBCA0F13E}"/>
               </a:ext>
             </a:extLst>
           </p:cNvPr>
@@ -18855,7 +18855,7 @@
           <p:cNvPr id="29" name="footer-label-5">
             <a:extLst xmlns:a="http://schemas.openxmlformats.org/drawingml/2006/main">
               <a:ext uri="{FF2B5EF4-FFF2-40B4-BE49-F238E27FC236}">
-                <a16:creationId xmlns:a16="http://schemas.microsoft.com/office/drawing/2014/main" id="{776F6721-42C2-429A-9804-BD7F6E600165}"/>
+                <a16:creationId xmlns:a16="http://schemas.microsoft.com/office/drawing/2014/main" id="{594E23B4-DCEB-4B28-AB83-49394F59327E}"/>
               </a:ext>
             </a:extLst>
           </p:cNvPr>
@@ -18917,7 +18917,7 @@
           <p:cNvPr id="30" name="footer-page-5">
             <a:extLst xmlns:a="http://schemas.openxmlformats.org/drawingml/2006/main">
               <a:ext uri="{FF2B5EF4-FFF2-40B4-BE49-F238E27FC236}">
-                <a16:creationId xmlns:a16="http://schemas.microsoft.com/office/drawing/2014/main" id="{28B6BD5C-C6F4-4F13-BCFF-2C3A56E1BF6A}"/>
+                <a16:creationId xmlns:a16="http://schemas.microsoft.com/office/drawing/2014/main" id="{07186762-AC81-4BF6-B7FD-B358471F331D}"/>
               </a:ext>
             </a:extLst>
           </p:cNvPr>
@@ -18977,7 +18977,7 @@
     </p:spTree>
     <p:extLst>
       <p:ext uri="{BB962C8B-B14F-4D97-AF65-F5344CB8AC3E}">
-        <p14:creationId xmlns:p14="http://schemas.microsoft.com/office/powerpoint/2010/main" val="481091443"/>
+        <p14:creationId xmlns:p14="http://schemas.microsoft.com/office/powerpoint/2010/main" val="937662598"/>
       </p:ext>
     </p:extLst>
   </p:cSld>
@@ -19008,7 +19008,7 @@
           <p:cNvPr id="22" name="side-accent-6">
             <a:extLst xmlns:a="http://schemas.openxmlformats.org/drawingml/2006/main">
               <a:ext uri="{FF2B5EF4-FFF2-40B4-BE49-F238E27FC236}">
-                <a16:creationId xmlns:a16="http://schemas.microsoft.com/office/drawing/2014/main" id="{3AC2F957-B458-4B08-8D83-6DE2AB33366A}"/>
+                <a16:creationId xmlns:a16="http://schemas.microsoft.com/office/drawing/2014/main" id="{A1AE036C-ACA9-4CAD-8284-8FDDFEE5D601}"/>
               </a:ext>
             </a:extLst>
           </p:cNvPr>
@@ -19039,7 +19039,7 @@
           <p:cNvPr id="2" name="kicker-6">
             <a:extLst xmlns:a="http://schemas.openxmlformats.org/drawingml/2006/main">
               <a:ext uri="{FF2B5EF4-FFF2-40B4-BE49-F238E27FC236}">
-                <a16:creationId xmlns:a16="http://schemas.microsoft.com/office/drawing/2014/main" id="{CA89F679-8E54-4BAE-9D1C-94942FF44F2C}"/>
+                <a16:creationId xmlns:a16="http://schemas.microsoft.com/office/drawing/2014/main" id="{8304809A-CD02-47A6-846F-9ECEB23CA70E}"/>
               </a:ext>
             </a:extLst>
           </p:cNvPr>
@@ -19101,7 +19101,7 @@
           <p:cNvPr id="3" name="title-6">
             <a:extLst xmlns:a="http://schemas.openxmlformats.org/drawingml/2006/main">
               <a:ext uri="{FF2B5EF4-FFF2-40B4-BE49-F238E27FC236}">
-                <a16:creationId xmlns:a16="http://schemas.microsoft.com/office/drawing/2014/main" id="{CF113D73-0B52-4497-96D8-0C862A1D3067}"/>
+                <a16:creationId xmlns:a16="http://schemas.microsoft.com/office/drawing/2014/main" id="{3C9D46E1-8BEC-4FDA-8BFC-C0D78B0AFF97}"/>
               </a:ext>
             </a:extLst>
           </p:cNvPr>
@@ -19163,7 +19163,7 @@
           <p:cNvPr id="4" name="">
             <a:extLst xmlns:a="http://schemas.openxmlformats.org/drawingml/2006/main">
               <a:ext uri="{FF2B5EF4-FFF2-40B4-BE49-F238E27FC236}">
-                <a16:creationId xmlns:a16="http://schemas.microsoft.com/office/drawing/2014/main" id="{E8BE3871-F586-455C-A930-E9D816B9B670}"/>
+                <a16:creationId xmlns:a16="http://schemas.microsoft.com/office/drawing/2014/main" id="{AE0BE184-3967-42AA-9731-42CFB7DD2F84}"/>
               </a:ext>
             </a:extLst>
           </p:cNvPr>
@@ -19225,7 +19225,7 @@
           <p:cNvPr id="5" name="">
             <a:extLst xmlns:a="http://schemas.openxmlformats.org/drawingml/2006/main">
               <a:ext uri="{FF2B5EF4-FFF2-40B4-BE49-F238E27FC236}">
-                <a16:creationId xmlns:a16="http://schemas.microsoft.com/office/drawing/2014/main" id="{F0D1A836-FEEF-4405-8F66-9371C5B79281}"/>
+                <a16:creationId xmlns:a16="http://schemas.microsoft.com/office/drawing/2014/main" id="{203926E8-CCDF-4DF9-B2F6-1C283306EE03}"/>
               </a:ext>
             </a:extLst>
           </p:cNvPr>
@@ -19287,7 +19287,7 @@
           <p:cNvPr id="6" name="">
             <a:extLst xmlns:a="http://schemas.openxmlformats.org/drawingml/2006/main">
               <a:ext uri="{FF2B5EF4-FFF2-40B4-BE49-F238E27FC236}">
-                <a16:creationId xmlns:a16="http://schemas.microsoft.com/office/drawing/2014/main" id="{1B4FC17D-6B8D-4CEF-BFFA-0A9E73DA6262}"/>
+                <a16:creationId xmlns:a16="http://schemas.microsoft.com/office/drawing/2014/main" id="{1D12A7AC-107C-48FD-AF41-3C880F29D570}"/>
               </a:ext>
             </a:extLst>
           </p:cNvPr>
@@ -19349,7 +19349,7 @@
           <p:cNvPr id="7" name="">
             <a:extLst xmlns:a="http://schemas.openxmlformats.org/drawingml/2006/main">
               <a:ext uri="{FF2B5EF4-FFF2-40B4-BE49-F238E27FC236}">
-                <a16:creationId xmlns:a16="http://schemas.microsoft.com/office/drawing/2014/main" id="{B197532F-CAD2-4BB9-B5A6-8ACBE232D07B}"/>
+                <a16:creationId xmlns:a16="http://schemas.microsoft.com/office/drawing/2014/main" id="{BD018E42-BA20-4EE4-B7A9-26944D33733A}"/>
               </a:ext>
             </a:extLst>
           </p:cNvPr>
@@ -19380,7 +19380,7 @@
           <p:cNvPr id="8" name="">
             <a:extLst xmlns:a="http://schemas.openxmlformats.org/drawingml/2006/main">
               <a:ext uri="{FF2B5EF4-FFF2-40B4-BE49-F238E27FC236}">
-                <a16:creationId xmlns:a16="http://schemas.microsoft.com/office/drawing/2014/main" id="{D790045F-18D1-4569-AE4A-771DEABD0358}"/>
+                <a16:creationId xmlns:a16="http://schemas.microsoft.com/office/drawing/2014/main" id="{99963F66-D187-49FE-AE98-C6C7E504A732}"/>
               </a:ext>
             </a:extLst>
           </p:cNvPr>
@@ -19469,7 +19469,7 @@
           <p:cNvPr id="9" name="">
             <a:extLst xmlns:a="http://schemas.openxmlformats.org/drawingml/2006/main">
               <a:ext uri="{FF2B5EF4-FFF2-40B4-BE49-F238E27FC236}">
-                <a16:creationId xmlns:a16="http://schemas.microsoft.com/office/drawing/2014/main" id="{9703339D-400A-42D6-8D4F-21A7E67C6192}"/>
+                <a16:creationId xmlns:a16="http://schemas.microsoft.com/office/drawing/2014/main" id="{ED0BAA85-A82A-4F3C-854F-3F4A7A620B8E}"/>
               </a:ext>
             </a:extLst>
           </p:cNvPr>
@@ -19531,7 +19531,7 @@
           <p:cNvPr id="10" name="">
             <a:extLst xmlns:a="http://schemas.openxmlformats.org/drawingml/2006/main">
               <a:ext uri="{FF2B5EF4-FFF2-40B4-BE49-F238E27FC236}">
-                <a16:creationId xmlns:a16="http://schemas.microsoft.com/office/drawing/2014/main" id="{88F55289-A7AB-4A3B-BAAF-45934D907B5D}"/>
+                <a16:creationId xmlns:a16="http://schemas.microsoft.com/office/drawing/2014/main" id="{DF78B61E-61B4-4A62-8FDF-FCD04A8F5D50}"/>
               </a:ext>
             </a:extLst>
           </p:cNvPr>
@@ -19593,7 +19593,7 @@
           <p:cNvPr id="11" name="">
             <a:extLst xmlns:a="http://schemas.openxmlformats.org/drawingml/2006/main">
               <a:ext uri="{FF2B5EF4-FFF2-40B4-BE49-F238E27FC236}">
-                <a16:creationId xmlns:a16="http://schemas.microsoft.com/office/drawing/2014/main" id="{97A01537-3FB7-47AE-9B4E-FCBCBBE0BA3D}"/>
+                <a16:creationId xmlns:a16="http://schemas.microsoft.com/office/drawing/2014/main" id="{9785D6AB-09CD-4B07-ADAC-866BAF7E29AB}"/>
               </a:ext>
             </a:extLst>
           </p:cNvPr>
@@ -19624,7 +19624,7 @@
           <p:cNvPr id="12" name="">
             <a:extLst xmlns:a="http://schemas.openxmlformats.org/drawingml/2006/main">
               <a:ext uri="{FF2B5EF4-FFF2-40B4-BE49-F238E27FC236}">
-                <a16:creationId xmlns:a16="http://schemas.microsoft.com/office/drawing/2014/main" id="{421E92F6-3866-42E8-9F43-492CC8D42E37}"/>
+                <a16:creationId xmlns:a16="http://schemas.microsoft.com/office/drawing/2014/main" id="{45BECEF3-C714-4FC5-930C-64C437374C70}"/>
               </a:ext>
             </a:extLst>
           </p:cNvPr>
@@ -19713,7 +19713,7 @@
           <p:cNvPr id="13" name="">
             <a:extLst xmlns:a="http://schemas.openxmlformats.org/drawingml/2006/main">
               <a:ext uri="{FF2B5EF4-FFF2-40B4-BE49-F238E27FC236}">
-                <a16:creationId xmlns:a16="http://schemas.microsoft.com/office/drawing/2014/main" id="{1B85B6D0-0B61-4918-9938-539DE2B79BD3}"/>
+                <a16:creationId xmlns:a16="http://schemas.microsoft.com/office/drawing/2014/main" id="{1A306169-3B94-4950-911E-FA641361A020}"/>
               </a:ext>
             </a:extLst>
           </p:cNvPr>
@@ -19775,7 +19775,7 @@
           <p:cNvPr id="14" name="">
             <a:extLst xmlns:a="http://schemas.openxmlformats.org/drawingml/2006/main">
               <a:ext uri="{FF2B5EF4-FFF2-40B4-BE49-F238E27FC236}">
-                <a16:creationId xmlns:a16="http://schemas.microsoft.com/office/drawing/2014/main" id="{62BDEE8B-8423-4DD9-B98A-CFFBC41A3CE5}"/>
+                <a16:creationId xmlns:a16="http://schemas.microsoft.com/office/drawing/2014/main" id="{426A822B-3F1A-4D48-9C9D-FEB85F715FEE}"/>
               </a:ext>
             </a:extLst>
           </p:cNvPr>
@@ -19837,7 +19837,7 @@
           <p:cNvPr id="15" name="">
             <a:extLst xmlns:a="http://schemas.openxmlformats.org/drawingml/2006/main">
               <a:ext uri="{FF2B5EF4-FFF2-40B4-BE49-F238E27FC236}">
-                <a16:creationId xmlns:a16="http://schemas.microsoft.com/office/drawing/2014/main" id="{B8FB2814-0903-4F6F-9425-9BAB76890166}"/>
+                <a16:creationId xmlns:a16="http://schemas.microsoft.com/office/drawing/2014/main" id="{CE0B9CB5-A658-46E0-838B-C17BC5500757}"/>
               </a:ext>
             </a:extLst>
           </p:cNvPr>
@@ -19868,7 +19868,7 @@
           <p:cNvPr id="16" name="">
             <a:extLst xmlns:a="http://schemas.openxmlformats.org/drawingml/2006/main">
               <a:ext uri="{FF2B5EF4-FFF2-40B4-BE49-F238E27FC236}">
-                <a16:creationId xmlns:a16="http://schemas.microsoft.com/office/drawing/2014/main" id="{E2F9E3EC-5166-4C76-BBC3-8BADA53CF3BB}"/>
+                <a16:creationId xmlns:a16="http://schemas.microsoft.com/office/drawing/2014/main" id="{8C819424-4CFC-451F-B586-F60352A0C9FD}"/>
               </a:ext>
             </a:extLst>
           </p:cNvPr>
@@ -19957,7 +19957,7 @@
           <p:cNvPr id="17" name="">
             <a:extLst xmlns:a="http://schemas.openxmlformats.org/drawingml/2006/main">
               <a:ext uri="{FF2B5EF4-FFF2-40B4-BE49-F238E27FC236}">
-                <a16:creationId xmlns:a16="http://schemas.microsoft.com/office/drawing/2014/main" id="{CF38706D-524C-4C62-A140-B1C98FA56874}"/>
+                <a16:creationId xmlns:a16="http://schemas.microsoft.com/office/drawing/2014/main" id="{D2DCC319-9D15-43BB-97E4-C1B3876C76B6}"/>
               </a:ext>
             </a:extLst>
           </p:cNvPr>
@@ -19990,7 +19990,7 @@
           <p:cNvPr id="18" name="">
             <a:extLst xmlns:a="http://schemas.openxmlformats.org/drawingml/2006/main">
               <a:ext uri="{FF2B5EF4-FFF2-40B4-BE49-F238E27FC236}">
-                <a16:creationId xmlns:a16="http://schemas.microsoft.com/office/drawing/2014/main" id="{2A18A077-D3E2-4105-803E-5782FF32B4ED}"/>
+                <a16:creationId xmlns:a16="http://schemas.microsoft.com/office/drawing/2014/main" id="{D5BBE6A8-E276-47EC-9A87-8DFCC2650F16}"/>
               </a:ext>
             </a:extLst>
           </p:cNvPr>
@@ -20079,7 +20079,7 @@
           <p:cNvPr id="19" name="footer-rule-6">
             <a:extLst xmlns:a="http://schemas.openxmlformats.org/drawingml/2006/main">
               <a:ext uri="{FF2B5EF4-FFF2-40B4-BE49-F238E27FC236}">
-                <a16:creationId xmlns:a16="http://schemas.microsoft.com/office/drawing/2014/main" id="{E926B618-3A77-4A1E-B045-5F94E32B17C2}"/>
+                <a16:creationId xmlns:a16="http://schemas.microsoft.com/office/drawing/2014/main" id="{B01FAF1D-91C3-42B9-8CCE-60C42C852E54}"/>
               </a:ext>
             </a:extLst>
           </p:cNvPr>
@@ -20110,7 +20110,7 @@
           <p:cNvPr id="20" name="footer-label-6">
             <a:extLst xmlns:a="http://schemas.openxmlformats.org/drawingml/2006/main">
               <a:ext uri="{FF2B5EF4-FFF2-40B4-BE49-F238E27FC236}">
-                <a16:creationId xmlns:a16="http://schemas.microsoft.com/office/drawing/2014/main" id="{A9797985-5142-4E59-8B9C-86D26767CFED}"/>
+                <a16:creationId xmlns:a16="http://schemas.microsoft.com/office/drawing/2014/main" id="{98579BD4-61A6-4A5E-95F4-7696702544FC}"/>
               </a:ext>
             </a:extLst>
           </p:cNvPr>
@@ -20172,7 +20172,7 @@
           <p:cNvPr id="21" name="footer-page-6">
             <a:extLst xmlns:a="http://schemas.openxmlformats.org/drawingml/2006/main">
               <a:ext uri="{FF2B5EF4-FFF2-40B4-BE49-F238E27FC236}">
-                <a16:creationId xmlns:a16="http://schemas.microsoft.com/office/drawing/2014/main" id="{00D90B63-7854-4EE3-B4A4-C1FE8D93C135}"/>
+                <a16:creationId xmlns:a16="http://schemas.microsoft.com/office/drawing/2014/main" id="{AFFA684A-FF2B-44BB-9418-62C313CEB55F}"/>
               </a:ext>
             </a:extLst>
           </p:cNvPr>
@@ -20232,7 +20232,7 @@
     </p:spTree>
     <p:extLst>
       <p:ext uri="{BB962C8B-B14F-4D97-AF65-F5344CB8AC3E}">
-        <p14:creationId xmlns:p14="http://schemas.microsoft.com/office/powerpoint/2010/main" val="736190437"/>
+        <p14:creationId xmlns:p14="http://schemas.microsoft.com/office/powerpoint/2010/main" val="676576192"/>
       </p:ext>
     </p:extLst>
   </p:cSld>
@@ -20263,7 +20263,7 @@
           <p:cNvPr id="28" name="side-accent-7">
             <a:extLst xmlns:a="http://schemas.openxmlformats.org/drawingml/2006/main">
               <a:ext uri="{FF2B5EF4-FFF2-40B4-BE49-F238E27FC236}">
-                <a16:creationId xmlns:a16="http://schemas.microsoft.com/office/drawing/2014/main" id="{4BEE93AE-4873-4DCA-B4F0-0DE7A7B7A6E3}"/>
+                <a16:creationId xmlns:a16="http://schemas.microsoft.com/office/drawing/2014/main" id="{52BC6031-174B-4454-9CCA-B973FEEF29FE}"/>
               </a:ext>
             </a:extLst>
           </p:cNvPr>
@@ -20294,7 +20294,7 @@
           <p:cNvPr id="2" name="kicker-7">
             <a:extLst xmlns:a="http://schemas.openxmlformats.org/drawingml/2006/main">
               <a:ext uri="{FF2B5EF4-FFF2-40B4-BE49-F238E27FC236}">
-                <a16:creationId xmlns:a16="http://schemas.microsoft.com/office/drawing/2014/main" id="{4FECEFBD-BFD3-4BA1-9F98-7B54B95C9807}"/>
+                <a16:creationId xmlns:a16="http://schemas.microsoft.com/office/drawing/2014/main" id="{24848742-C3C7-4104-98D3-04B9EE73E982}"/>
               </a:ext>
             </a:extLst>
           </p:cNvPr>
@@ -20356,7 +20356,7 @@
           <p:cNvPr id="3" name="title-7">
             <a:extLst xmlns:a="http://schemas.openxmlformats.org/drawingml/2006/main">
               <a:ext uri="{FF2B5EF4-FFF2-40B4-BE49-F238E27FC236}">
-                <a16:creationId xmlns:a16="http://schemas.microsoft.com/office/drawing/2014/main" id="{96F55B0D-F54F-4DC5-81EA-5EFE60F87A09}"/>
+                <a16:creationId xmlns:a16="http://schemas.microsoft.com/office/drawing/2014/main" id="{714AB7E9-7B7C-4705-8E59-7A821B045F5A}"/>
               </a:ext>
             </a:extLst>
           </p:cNvPr>
@@ -20418,7 +20418,7 @@
           <p:cNvPr id="4" name="">
             <a:extLst xmlns:a="http://schemas.openxmlformats.org/drawingml/2006/main">
               <a:ext uri="{FF2B5EF4-FFF2-40B4-BE49-F238E27FC236}">
-                <a16:creationId xmlns:a16="http://schemas.microsoft.com/office/drawing/2014/main" id="{E0C5E6B0-4E5F-4DDC-B4F3-05B24277F925}"/>
+                <a16:creationId xmlns:a16="http://schemas.microsoft.com/office/drawing/2014/main" id="{45D2B11E-B7EF-4CDE-8F0B-7A71A1CB615A}"/>
               </a:ext>
             </a:extLst>
           </p:cNvPr>
@@ -20480,7 +20480,7 @@
           <p:cNvPr id="5" name="">
             <a:extLst xmlns:a="http://schemas.openxmlformats.org/drawingml/2006/main">
               <a:ext uri="{FF2B5EF4-FFF2-40B4-BE49-F238E27FC236}">
-                <a16:creationId xmlns:a16="http://schemas.microsoft.com/office/drawing/2014/main" id="{1E991247-92BE-4723-9BE7-C6F8D55B8FA6}"/>
+                <a16:creationId xmlns:a16="http://schemas.microsoft.com/office/drawing/2014/main" id="{363A165D-6A74-43C0-B0A6-0F5A661D9705}"/>
               </a:ext>
             </a:extLst>
           </p:cNvPr>
@@ -20511,7 +20511,7 @@
           <p:cNvPr id="6" name="">
             <a:extLst xmlns:a="http://schemas.openxmlformats.org/drawingml/2006/main">
               <a:ext uri="{FF2B5EF4-FFF2-40B4-BE49-F238E27FC236}">
-                <a16:creationId xmlns:a16="http://schemas.microsoft.com/office/drawing/2014/main" id="{3FE6755A-AA55-4776-91CA-8AF5282A5667}"/>
+                <a16:creationId xmlns:a16="http://schemas.microsoft.com/office/drawing/2014/main" id="{AD9E4B1A-D54B-490E-866A-02DD538627C9}"/>
               </a:ext>
             </a:extLst>
           </p:cNvPr>
@@ -20573,7 +20573,7 @@
           <p:cNvPr id="7" name="">
             <a:extLst xmlns:a="http://schemas.openxmlformats.org/drawingml/2006/main">
               <a:ext uri="{FF2B5EF4-FFF2-40B4-BE49-F238E27FC236}">
-                <a16:creationId xmlns:a16="http://schemas.microsoft.com/office/drawing/2014/main" id="{048DC45A-6CF5-43ED-BC63-E9D836637C98}"/>
+                <a16:creationId xmlns:a16="http://schemas.microsoft.com/office/drawing/2014/main" id="{0736F2B8-4522-4F09-A482-10C8A80739B5}"/>
               </a:ext>
             </a:extLst>
           </p:cNvPr>
@@ -20635,7 +20635,7 @@
           <p:cNvPr id="8" name="">
             <a:extLst xmlns:a="http://schemas.openxmlformats.org/drawingml/2006/main">
               <a:ext uri="{FF2B5EF4-FFF2-40B4-BE49-F238E27FC236}">
-                <a16:creationId xmlns:a16="http://schemas.microsoft.com/office/drawing/2014/main" id="{2B6CCE28-90F8-46F2-B726-29D9BAE248EB}"/>
+                <a16:creationId xmlns:a16="http://schemas.microsoft.com/office/drawing/2014/main" id="{A3D34E56-BEFB-44C6-9C76-087B3BE3E287}"/>
               </a:ext>
             </a:extLst>
           </p:cNvPr>
@@ -20697,7 +20697,7 @@
           <p:cNvPr id="9" name="">
             <a:extLst xmlns:a="http://schemas.openxmlformats.org/drawingml/2006/main">
               <a:ext uri="{FF2B5EF4-FFF2-40B4-BE49-F238E27FC236}">
-                <a16:creationId xmlns:a16="http://schemas.microsoft.com/office/drawing/2014/main" id="{C37C5687-F098-4E44-87BE-ABA02EB161AB}"/>
+                <a16:creationId xmlns:a16="http://schemas.microsoft.com/office/drawing/2014/main" id="{8C4AB2D2-90AA-42B4-900F-BB21A86D5D50}"/>
               </a:ext>
             </a:extLst>
           </p:cNvPr>
@@ -20728,7 +20728,7 @@
           <p:cNvPr id="10" name="">
             <a:extLst xmlns:a="http://schemas.openxmlformats.org/drawingml/2006/main">
               <a:ext uri="{FF2B5EF4-FFF2-40B4-BE49-F238E27FC236}">
-                <a16:creationId xmlns:a16="http://schemas.microsoft.com/office/drawing/2014/main" id="{95FCB626-28BC-47AB-A91F-2B7CFF7DEB7A}"/>
+                <a16:creationId xmlns:a16="http://schemas.microsoft.com/office/drawing/2014/main" id="{6DAEAB2C-F74E-4C22-A646-038D6587045C}"/>
               </a:ext>
             </a:extLst>
           </p:cNvPr>
@@ -20790,7 +20790,7 @@
           <p:cNvPr id="11" name="">
             <a:extLst xmlns:a="http://schemas.openxmlformats.org/drawingml/2006/main">
               <a:ext uri="{FF2B5EF4-FFF2-40B4-BE49-F238E27FC236}">
-                <a16:creationId xmlns:a16="http://schemas.microsoft.com/office/drawing/2014/main" id="{12DA69CD-7D4C-4069-984A-32DE2D5BECAC}"/>
+                <a16:creationId xmlns:a16="http://schemas.microsoft.com/office/drawing/2014/main" id="{7DA7FAE9-0BD9-4BC7-B90A-EC0DB3543CAB}"/>
               </a:ext>
             </a:extLst>
           </p:cNvPr>
@@ -20852,7 +20852,7 @@
           <p:cNvPr id="12" name="">
             <a:extLst xmlns:a="http://schemas.openxmlformats.org/drawingml/2006/main">
               <a:ext uri="{FF2B5EF4-FFF2-40B4-BE49-F238E27FC236}">
-                <a16:creationId xmlns:a16="http://schemas.microsoft.com/office/drawing/2014/main" id="{FA7142AB-2625-45B7-9D83-E71939E0AF05}"/>
+                <a16:creationId xmlns:a16="http://schemas.microsoft.com/office/drawing/2014/main" id="{A39776FD-948F-4127-8641-F73E3C156B73}"/>
               </a:ext>
             </a:extLst>
           </p:cNvPr>
@@ -20914,7 +20914,7 @@
           <p:cNvPr id="13" name="">
             <a:extLst xmlns:a="http://schemas.openxmlformats.org/drawingml/2006/main">
               <a:ext uri="{FF2B5EF4-FFF2-40B4-BE49-F238E27FC236}">
-                <a16:creationId xmlns:a16="http://schemas.microsoft.com/office/drawing/2014/main" id="{2719BC3F-6B3C-49E9-9D6B-6FF970DA5A9B}"/>
+                <a16:creationId xmlns:a16="http://schemas.microsoft.com/office/drawing/2014/main" id="{B8F48984-D49C-4705-8A48-EDD663A559D7}"/>
               </a:ext>
             </a:extLst>
           </p:cNvPr>
@@ -20945,7 +20945,7 @@
           <p:cNvPr id="14" name="">
             <a:extLst xmlns:a="http://schemas.openxmlformats.org/drawingml/2006/main">
               <a:ext uri="{FF2B5EF4-FFF2-40B4-BE49-F238E27FC236}">
-                <a16:creationId xmlns:a16="http://schemas.microsoft.com/office/drawing/2014/main" id="{AD25B1C0-26C9-4186-9955-6D09EEBDB9BA}"/>
+                <a16:creationId xmlns:a16="http://schemas.microsoft.com/office/drawing/2014/main" id="{8A351BE5-F01D-4B3D-8F95-E566A8321DA0}"/>
               </a:ext>
             </a:extLst>
           </p:cNvPr>
@@ -21007,7 +21007,7 @@
           <p:cNvPr id="15" name="">
             <a:extLst xmlns:a="http://schemas.openxmlformats.org/drawingml/2006/main">
               <a:ext uri="{FF2B5EF4-FFF2-40B4-BE49-F238E27FC236}">
-                <a16:creationId xmlns:a16="http://schemas.microsoft.com/office/drawing/2014/main" id="{F5ADFCDB-D53A-4506-9746-F3213073CC57}"/>
+                <a16:creationId xmlns:a16="http://schemas.microsoft.com/office/drawing/2014/main" id="{5AAACF0D-DE27-4048-90CF-4A6BB80456A8}"/>
               </a:ext>
             </a:extLst>
           </p:cNvPr>
@@ -21069,7 +21069,7 @@
           <p:cNvPr id="16" name="">
             <a:extLst xmlns:a="http://schemas.openxmlformats.org/drawingml/2006/main">
               <a:ext uri="{FF2B5EF4-FFF2-40B4-BE49-F238E27FC236}">
-                <a16:creationId xmlns:a16="http://schemas.microsoft.com/office/drawing/2014/main" id="{F8C7DE8B-FD81-47B0-8B0F-6008C534EA49}"/>
+                <a16:creationId xmlns:a16="http://schemas.microsoft.com/office/drawing/2014/main" id="{71DE457F-4F7A-46B7-A23B-1F64108FF6F1}"/>
               </a:ext>
             </a:extLst>
           </p:cNvPr>
@@ -21131,7 +21131,7 @@
           <p:cNvPr id="17" name="dashboard-preview">
             <a:extLst xmlns:a="http://schemas.openxmlformats.org/drawingml/2006/main">
               <a:ext uri="{FF2B5EF4-FFF2-40B4-BE49-F238E27FC236}">
-                <a16:creationId xmlns:a16="http://schemas.microsoft.com/office/drawing/2014/main" id="{3F340D44-3551-43B9-9664-E3A64A18DED4}"/>
+                <a16:creationId xmlns:a16="http://schemas.microsoft.com/office/drawing/2014/main" id="{8F5B1AF5-236D-4E58-96FA-718BCB9F2780}"/>
               </a:ext>
             </a:extLst>
           </p:cNvPr>
@@ -21166,7 +21166,7 @@
           <p:cNvPr id="18" name="">
             <a:extLst xmlns:a="http://schemas.openxmlformats.org/drawingml/2006/main">
               <a:ext uri="{FF2B5EF4-FFF2-40B4-BE49-F238E27FC236}">
-                <a16:creationId xmlns:a16="http://schemas.microsoft.com/office/drawing/2014/main" id="{39AD3749-8A8F-4C0F-89F7-9A99A082F594}"/>
+                <a16:creationId xmlns:a16="http://schemas.microsoft.com/office/drawing/2014/main" id="{7EB6D5F9-2842-49EE-A729-C39C28DFBAEC}"/>
               </a:ext>
             </a:extLst>
           </p:cNvPr>
@@ -21228,7 +21228,7 @@
           <p:cNvPr id="19" name="">
             <a:extLst xmlns:a="http://schemas.openxmlformats.org/drawingml/2006/main">
               <a:ext uri="{FF2B5EF4-FFF2-40B4-BE49-F238E27FC236}">
-                <a16:creationId xmlns:a16="http://schemas.microsoft.com/office/drawing/2014/main" id="{1763613B-AEA8-4781-BB38-02D0FCC52E83}"/>
+                <a16:creationId xmlns:a16="http://schemas.microsoft.com/office/drawing/2014/main" id="{670C9B6E-4F67-400A-97F1-C0C95E3A27A6}"/>
               </a:ext>
             </a:extLst>
           </p:cNvPr>
@@ -21259,7 +21259,7 @@
           <p:cNvPr id="20" name="">
             <a:extLst xmlns:a="http://schemas.openxmlformats.org/drawingml/2006/main">
               <a:ext uri="{FF2B5EF4-FFF2-40B4-BE49-F238E27FC236}">
-                <a16:creationId xmlns:a16="http://schemas.microsoft.com/office/drawing/2014/main" id="{47536300-14D9-4334-B4AE-A3D9E909CFF5}"/>
+                <a16:creationId xmlns:a16="http://schemas.microsoft.com/office/drawing/2014/main" id="{4012DE3A-B2DB-4787-BF85-21950A888418}"/>
               </a:ext>
             </a:extLst>
           </p:cNvPr>
@@ -21321,7 +21321,7 @@
           <p:cNvPr id="21" name="">
             <a:extLst xmlns:a="http://schemas.openxmlformats.org/drawingml/2006/main">
               <a:ext uri="{FF2B5EF4-FFF2-40B4-BE49-F238E27FC236}">
-                <a16:creationId xmlns:a16="http://schemas.microsoft.com/office/drawing/2014/main" id="{58C3157C-A79F-42AC-8088-BA0A009478A7}"/>
+                <a16:creationId xmlns:a16="http://schemas.microsoft.com/office/drawing/2014/main" id="{33DCAB48-54DD-4E27-8C0F-2948934B7BA1}"/>
               </a:ext>
             </a:extLst>
           </p:cNvPr>
@@ -21352,7 +21352,7 @@
           <p:cNvPr id="22" name="">
             <a:extLst xmlns:a="http://schemas.openxmlformats.org/drawingml/2006/main">
               <a:ext uri="{FF2B5EF4-FFF2-40B4-BE49-F238E27FC236}">
-                <a16:creationId xmlns:a16="http://schemas.microsoft.com/office/drawing/2014/main" id="{0B9773EB-1376-43E4-A3A2-94EF3DBB3190}"/>
+                <a16:creationId xmlns:a16="http://schemas.microsoft.com/office/drawing/2014/main" id="{604D06D6-4548-4C67-B783-B096BB7B9D9B}"/>
               </a:ext>
             </a:extLst>
           </p:cNvPr>
@@ -21383,7 +21383,7 @@
           <p:cNvPr id="23" name="">
             <a:extLst xmlns:a="http://schemas.openxmlformats.org/drawingml/2006/main">
               <a:ext uri="{FF2B5EF4-FFF2-40B4-BE49-F238E27FC236}">
-                <a16:creationId xmlns:a16="http://schemas.microsoft.com/office/drawing/2014/main" id="{A19B6A95-40CA-43F1-9EBE-6D908816578E}"/>
+                <a16:creationId xmlns:a16="http://schemas.microsoft.com/office/drawing/2014/main" id="{E3625DDF-2C78-4A9D-9A27-6FCBCA89A27E}"/>
               </a:ext>
             </a:extLst>
           </p:cNvPr>
@@ -21416,7 +21416,7 @@
           <p:cNvPr id="24" name="">
             <a:extLst xmlns:a="http://schemas.openxmlformats.org/drawingml/2006/main">
               <a:ext uri="{FF2B5EF4-FFF2-40B4-BE49-F238E27FC236}">
-                <a16:creationId xmlns:a16="http://schemas.microsoft.com/office/drawing/2014/main" id="{EE673389-FCFA-47CB-B3BA-9E50BB407128}"/>
+                <a16:creationId xmlns:a16="http://schemas.microsoft.com/office/drawing/2014/main" id="{C1CBA14E-E871-43AD-B276-A393D162C869}"/>
               </a:ext>
             </a:extLst>
           </p:cNvPr>
@@ -21478,7 +21478,7 @@
           <p:cNvPr id="25" name="footer-rule-7">
             <a:extLst xmlns:a="http://schemas.openxmlformats.org/drawingml/2006/main">
               <a:ext uri="{FF2B5EF4-FFF2-40B4-BE49-F238E27FC236}">
-                <a16:creationId xmlns:a16="http://schemas.microsoft.com/office/drawing/2014/main" id="{3DDF69C8-4FB0-43FD-8813-2A29B4A7F368}"/>
+                <a16:creationId xmlns:a16="http://schemas.microsoft.com/office/drawing/2014/main" id="{C49CC83C-4889-4B50-8D67-237DE67C10D6}"/>
               </a:ext>
             </a:extLst>
           </p:cNvPr>
@@ -21509,7 +21509,7 @@
           <p:cNvPr id="26" name="footer-label-7">
             <a:extLst xmlns:a="http://schemas.openxmlformats.org/drawingml/2006/main">
               <a:ext uri="{FF2B5EF4-FFF2-40B4-BE49-F238E27FC236}">
-                <a16:creationId xmlns:a16="http://schemas.microsoft.com/office/drawing/2014/main" id="{7B2DDBCD-1110-490A-97C6-D221083CE9E3}"/>
+                <a16:creationId xmlns:a16="http://schemas.microsoft.com/office/drawing/2014/main" id="{15278ACB-91FB-42AA-BDB9-A3630B9263CC}"/>
               </a:ext>
             </a:extLst>
           </p:cNvPr>
@@ -21571,7 +21571,7 @@
           <p:cNvPr id="27" name="footer-page-7">
             <a:extLst xmlns:a="http://schemas.openxmlformats.org/drawingml/2006/main">
               <a:ext uri="{FF2B5EF4-FFF2-40B4-BE49-F238E27FC236}">
-                <a16:creationId xmlns:a16="http://schemas.microsoft.com/office/drawing/2014/main" id="{E685792A-163D-49FA-9C39-73C32ABA1A23}"/>
+                <a16:creationId xmlns:a16="http://schemas.microsoft.com/office/drawing/2014/main" id="{16CF1C9A-2E8D-4F11-A9D6-9DFC6B77F84E}"/>
               </a:ext>
             </a:extLst>
           </p:cNvPr>
@@ -21631,7 +21631,7 @@
     </p:spTree>
     <p:extLst>
       <p:ext uri="{BB962C8B-B14F-4D97-AF65-F5344CB8AC3E}">
-        <p14:creationId xmlns:p14="http://schemas.microsoft.com/office/powerpoint/2010/main" val="635192868"/>
+        <p14:creationId xmlns:p14="http://schemas.microsoft.com/office/powerpoint/2010/main" val="543164031"/>
       </p:ext>
     </p:extLst>
   </p:cSld>
@@ -21662,7 +21662,7 @@
           <p:cNvPr id="26" name="side-accent-8">
             <a:extLst xmlns:a="http://schemas.openxmlformats.org/drawingml/2006/main">
               <a:ext uri="{FF2B5EF4-FFF2-40B4-BE49-F238E27FC236}">
-                <a16:creationId xmlns:a16="http://schemas.microsoft.com/office/drawing/2014/main" id="{8E66207F-EEDF-44AD-81BF-F8FFCC1F885B}"/>
+                <a16:creationId xmlns:a16="http://schemas.microsoft.com/office/drawing/2014/main" id="{C45A2B73-7757-46CA-B23F-2F3D6F7FCD7B}"/>
               </a:ext>
             </a:extLst>
           </p:cNvPr>
@@ -21693,7 +21693,7 @@
           <p:cNvPr id="2" name="kicker-8">
             <a:extLst xmlns:a="http://schemas.openxmlformats.org/drawingml/2006/main">
               <a:ext uri="{FF2B5EF4-FFF2-40B4-BE49-F238E27FC236}">
-                <a16:creationId xmlns:a16="http://schemas.microsoft.com/office/drawing/2014/main" id="{4E13B1CF-9BC2-4B41-810C-56293A15525F}"/>
+                <a16:creationId xmlns:a16="http://schemas.microsoft.com/office/drawing/2014/main" id="{475CB63E-DED2-4E55-8608-900C7C403E23}"/>
               </a:ext>
             </a:extLst>
           </p:cNvPr>
@@ -21755,7 +21755,7 @@
           <p:cNvPr id="3" name="title-8">
             <a:extLst xmlns:a="http://schemas.openxmlformats.org/drawingml/2006/main">
               <a:ext uri="{FF2B5EF4-FFF2-40B4-BE49-F238E27FC236}">
-                <a16:creationId xmlns:a16="http://schemas.microsoft.com/office/drawing/2014/main" id="{BA9ADC61-6A93-40C3-9592-86D7AD72A3F0}"/>
+                <a16:creationId xmlns:a16="http://schemas.microsoft.com/office/drawing/2014/main" id="{95E5763B-20AD-4B2B-AF30-923F28743C98}"/>
               </a:ext>
             </a:extLst>
           </p:cNvPr>
@@ -21817,7 +21817,7 @@
           <p:cNvPr id="4" name="">
             <a:extLst xmlns:a="http://schemas.openxmlformats.org/drawingml/2006/main">
               <a:ext uri="{FF2B5EF4-FFF2-40B4-BE49-F238E27FC236}">
-                <a16:creationId xmlns:a16="http://schemas.microsoft.com/office/drawing/2014/main" id="{9AD34F7F-776D-40ED-BBA1-5985678F6C9C}"/>
+                <a16:creationId xmlns:a16="http://schemas.microsoft.com/office/drawing/2014/main" id="{AA62E4CB-E141-4217-AE8D-7E0996632CC6}"/>
               </a:ext>
             </a:extLst>
           </p:cNvPr>
@@ -21879,7 +21879,7 @@
           <p:cNvPr id="5" name="">
             <a:extLst xmlns:a="http://schemas.openxmlformats.org/drawingml/2006/main">
               <a:ext uri="{FF2B5EF4-FFF2-40B4-BE49-F238E27FC236}">
-                <a16:creationId xmlns:a16="http://schemas.microsoft.com/office/drawing/2014/main" id="{ABE26341-0451-40AF-8355-67DF6DA045DA}"/>
+                <a16:creationId xmlns:a16="http://schemas.microsoft.com/office/drawing/2014/main" id="{1738D66E-7FA6-4210-88CB-D0DE28AC2B9E}"/>
               </a:ext>
             </a:extLst>
           </p:cNvPr>
@@ -21910,7 +21910,7 @@
           <p:cNvPr id="6" name="">
             <a:extLst xmlns:a="http://schemas.openxmlformats.org/drawingml/2006/main">
               <a:ext uri="{FF2B5EF4-FFF2-40B4-BE49-F238E27FC236}">
-                <a16:creationId xmlns:a16="http://schemas.microsoft.com/office/drawing/2014/main" id="{98BD8D41-5E63-4CDF-A08F-2334A1B2F876}"/>
+                <a16:creationId xmlns:a16="http://schemas.microsoft.com/office/drawing/2014/main" id="{C794B427-DB16-4D22-A086-6A2F248DBCB7}"/>
               </a:ext>
             </a:extLst>
           </p:cNvPr>
@@ -21941,7 +21941,7 @@
           <p:cNvPr id="7" name="">
             <a:extLst xmlns:a="http://schemas.openxmlformats.org/drawingml/2006/main">
               <a:ext uri="{FF2B5EF4-FFF2-40B4-BE49-F238E27FC236}">
-                <a16:creationId xmlns:a16="http://schemas.microsoft.com/office/drawing/2014/main" id="{8B21F932-D873-40D7-8449-F4848F461C74}"/>
+                <a16:creationId xmlns:a16="http://schemas.microsoft.com/office/drawing/2014/main" id="{C9187DF2-3521-4B75-A8C1-89995C14C625}"/>
               </a:ext>
             </a:extLst>
           </p:cNvPr>
@@ -22003,7 +22003,7 @@
           <p:cNvPr id="8" name="">
             <a:extLst xmlns:a="http://schemas.openxmlformats.org/drawingml/2006/main">
               <a:ext uri="{FF2B5EF4-FFF2-40B4-BE49-F238E27FC236}">
-                <a16:creationId xmlns:a16="http://schemas.microsoft.com/office/drawing/2014/main" id="{4D4065F7-6B06-4B39-A719-9DD05F776321}"/>
+                <a16:creationId xmlns:a16="http://schemas.microsoft.com/office/drawing/2014/main" id="{CA9473E8-7092-4E11-B508-FD5380419735}"/>
               </a:ext>
             </a:extLst>
           </p:cNvPr>
@@ -22065,7 +22065,7 @@
           <p:cNvPr id="9" name="">
             <a:extLst xmlns:a="http://schemas.openxmlformats.org/drawingml/2006/main">
               <a:ext uri="{FF2B5EF4-FFF2-40B4-BE49-F238E27FC236}">
-                <a16:creationId xmlns:a16="http://schemas.microsoft.com/office/drawing/2014/main" id="{F2B70890-1822-4B3B-94D1-E0899C0E8A32}"/>
+                <a16:creationId xmlns:a16="http://schemas.microsoft.com/office/drawing/2014/main" id="{AFBE3196-8E64-448E-8009-067A8B474564}"/>
               </a:ext>
             </a:extLst>
           </p:cNvPr>
@@ -22127,7 +22127,7 @@
           <p:cNvPr id="10" name="">
             <a:extLst xmlns:a="http://schemas.openxmlformats.org/drawingml/2006/main">
               <a:ext uri="{FF2B5EF4-FFF2-40B4-BE49-F238E27FC236}">
-                <a16:creationId xmlns:a16="http://schemas.microsoft.com/office/drawing/2014/main" id="{46835E76-8A87-4A4E-830E-7F2ED1D1A535}"/>
+                <a16:creationId xmlns:a16="http://schemas.microsoft.com/office/drawing/2014/main" id="{8E94E997-96DB-4F19-9287-B297DDBFF272}"/>
               </a:ext>
             </a:extLst>
           </p:cNvPr>
@@ -22158,7 +22158,7 @@
           <p:cNvPr id="11" name="">
             <a:extLst xmlns:a="http://schemas.openxmlformats.org/drawingml/2006/main">
               <a:ext uri="{FF2B5EF4-FFF2-40B4-BE49-F238E27FC236}">
-                <a16:creationId xmlns:a16="http://schemas.microsoft.com/office/drawing/2014/main" id="{89937BA6-07B9-4DA5-BD84-A232767A5EBD}"/>
+                <a16:creationId xmlns:a16="http://schemas.microsoft.com/office/drawing/2014/main" id="{F31A0785-7E19-4C3D-BAAB-6E90B2E08D32}"/>
               </a:ext>
             </a:extLst>
           </p:cNvPr>
@@ -22220,7 +22220,7 @@
           <p:cNvPr id="12" name="">
             <a:extLst xmlns:a="http://schemas.openxmlformats.org/drawingml/2006/main">
               <a:ext uri="{FF2B5EF4-FFF2-40B4-BE49-F238E27FC236}">
-                <a16:creationId xmlns:a16="http://schemas.microsoft.com/office/drawing/2014/main" id="{0181EE3C-1C82-4F97-A5F1-68A22F2EC7FA}"/>
+                <a16:creationId xmlns:a16="http://schemas.microsoft.com/office/drawing/2014/main" id="{0A4824C3-9FD2-4A63-9396-49BD7FF9F9C9}"/>
               </a:ext>
             </a:extLst>
           </p:cNvPr>
@@ -22282,7 +22282,7 @@
           <p:cNvPr id="13" name="">
             <a:extLst xmlns:a="http://schemas.openxmlformats.org/drawingml/2006/main">
               <a:ext uri="{FF2B5EF4-FFF2-40B4-BE49-F238E27FC236}">
-                <a16:creationId xmlns:a16="http://schemas.microsoft.com/office/drawing/2014/main" id="{EE3C2F89-C6EC-4991-85D8-097F2665228D}"/>
+                <a16:creationId xmlns:a16="http://schemas.microsoft.com/office/drawing/2014/main" id="{74D162F1-F821-4F51-8D0F-1EEE4FC26D75}"/>
               </a:ext>
             </a:extLst>
           </p:cNvPr>
@@ -22344,7 +22344,7 @@
           <p:cNvPr id="14" name="">
             <a:extLst xmlns:a="http://schemas.openxmlformats.org/drawingml/2006/main">
               <a:ext uri="{FF2B5EF4-FFF2-40B4-BE49-F238E27FC236}">
-                <a16:creationId xmlns:a16="http://schemas.microsoft.com/office/drawing/2014/main" id="{AED00FBB-6377-43AE-8743-A48E98D60BA8}"/>
+                <a16:creationId xmlns:a16="http://schemas.microsoft.com/office/drawing/2014/main" id="{796DF0FA-4B0E-4B3C-89D9-350B8A87D72C}"/>
               </a:ext>
             </a:extLst>
           </p:cNvPr>
@@ -22375,7 +22375,7 @@
           <p:cNvPr id="15" name="">
             <a:extLst xmlns:a="http://schemas.openxmlformats.org/drawingml/2006/main">
               <a:ext uri="{FF2B5EF4-FFF2-40B4-BE49-F238E27FC236}">
-                <a16:creationId xmlns:a16="http://schemas.microsoft.com/office/drawing/2014/main" id="{99D548F8-3961-40CE-9A86-C404AE74C913}"/>
+                <a16:creationId xmlns:a16="http://schemas.microsoft.com/office/drawing/2014/main" id="{4E1CA40E-320C-44C7-AA21-27424B8FFFF0}"/>
               </a:ext>
             </a:extLst>
           </p:cNvPr>
@@ -22437,7 +22437,7 @@
           <p:cNvPr id="16" name="">
             <a:extLst xmlns:a="http://schemas.openxmlformats.org/drawingml/2006/main">
               <a:ext uri="{FF2B5EF4-FFF2-40B4-BE49-F238E27FC236}">
-                <a16:creationId xmlns:a16="http://schemas.microsoft.com/office/drawing/2014/main" id="{6323361B-A969-48DF-A848-E591A01F7F1D}"/>
+                <a16:creationId xmlns:a16="http://schemas.microsoft.com/office/drawing/2014/main" id="{384210A4-29BB-45D3-B5FB-261D71D45FA3}"/>
               </a:ext>
             </a:extLst>
           </p:cNvPr>
@@ -22499,7 +22499,7 @@
           <p:cNvPr id="17" name="">
             <a:extLst xmlns:a="http://schemas.openxmlformats.org/drawingml/2006/main">
               <a:ext uri="{FF2B5EF4-FFF2-40B4-BE49-F238E27FC236}">
-                <a16:creationId xmlns:a16="http://schemas.microsoft.com/office/drawing/2014/main" id="{2B41EE1C-C6BC-4C7D-AAEB-4308B49EFA87}"/>
+                <a16:creationId xmlns:a16="http://schemas.microsoft.com/office/drawing/2014/main" id="{F30D33E3-4FC4-4191-8538-C2A311388EB5}"/>
               </a:ext>
             </a:extLst>
           </p:cNvPr>
@@ -22561,7 +22561,7 @@
           <p:cNvPr id="18" name="">
             <a:extLst xmlns:a="http://schemas.openxmlformats.org/drawingml/2006/main">
               <a:ext uri="{FF2B5EF4-FFF2-40B4-BE49-F238E27FC236}">
-                <a16:creationId xmlns:a16="http://schemas.microsoft.com/office/drawing/2014/main" id="{F608DE10-119B-445D-95C4-3C11FDC5CBC4}"/>
+                <a16:creationId xmlns:a16="http://schemas.microsoft.com/office/drawing/2014/main" id="{224D8BC8-5BB7-4151-B64E-E98431223EB1}"/>
               </a:ext>
             </a:extLst>
           </p:cNvPr>
@@ -22592,7 +22592,7 @@
           <p:cNvPr id="19" name="">
             <a:extLst xmlns:a="http://schemas.openxmlformats.org/drawingml/2006/main">
               <a:ext uri="{FF2B5EF4-FFF2-40B4-BE49-F238E27FC236}">
-                <a16:creationId xmlns:a16="http://schemas.microsoft.com/office/drawing/2014/main" id="{1990FD12-68E1-4B58-A793-745D80E15D9B}"/>
+                <a16:creationId xmlns:a16="http://schemas.microsoft.com/office/drawing/2014/main" id="{381768EE-7664-43E6-BA06-4ABC04367843}"/>
               </a:ext>
             </a:extLst>
           </p:cNvPr>
@@ -22654,7 +22654,7 @@
           <p:cNvPr id="20" name="">
             <a:extLst xmlns:a="http://schemas.openxmlformats.org/drawingml/2006/main">
               <a:ext uri="{FF2B5EF4-FFF2-40B4-BE49-F238E27FC236}">
-                <a16:creationId xmlns:a16="http://schemas.microsoft.com/office/drawing/2014/main" id="{04F1163A-E762-4B74-8D35-58C6586AA896}"/>
+                <a16:creationId xmlns:a16="http://schemas.microsoft.com/office/drawing/2014/main" id="{1D294605-A98E-43AC-A2A2-B22ECE2FED80}"/>
               </a:ext>
             </a:extLst>
           </p:cNvPr>
@@ -22716,7 +22716,7 @@
           <p:cNvPr id="21" name="">
             <a:extLst xmlns:a="http://schemas.openxmlformats.org/drawingml/2006/main">
               <a:ext uri="{FF2B5EF4-FFF2-40B4-BE49-F238E27FC236}">
-                <a16:creationId xmlns:a16="http://schemas.microsoft.com/office/drawing/2014/main" id="{6FF6C588-F09D-4134-BDA9-50838D7200F9}"/>
+                <a16:creationId xmlns:a16="http://schemas.microsoft.com/office/drawing/2014/main" id="{E34BFF4E-E83A-47D2-831B-3736E848045B}"/>
               </a:ext>
             </a:extLst>
           </p:cNvPr>
@@ -22778,7 +22778,7 @@
           <p:cNvPr id="22" name="">
             <a:extLst xmlns:a="http://schemas.openxmlformats.org/drawingml/2006/main">
               <a:ext uri="{FF2B5EF4-FFF2-40B4-BE49-F238E27FC236}">
-                <a16:creationId xmlns:a16="http://schemas.microsoft.com/office/drawing/2014/main" id="{A326A860-BB6D-440E-A7DC-BEE717B1C34D}"/>
+                <a16:creationId xmlns:a16="http://schemas.microsoft.com/office/drawing/2014/main" id="{DC8DADB9-32B9-44D9-9372-E3865B1C7C87}"/>
               </a:ext>
             </a:extLst>
           </p:cNvPr>
@@ -22840,7 +22840,7 @@
           <p:cNvPr id="23" name="footer-rule-8">
             <a:extLst xmlns:a="http://schemas.openxmlformats.org/drawingml/2006/main">
               <a:ext uri="{FF2B5EF4-FFF2-40B4-BE49-F238E27FC236}">
-                <a16:creationId xmlns:a16="http://schemas.microsoft.com/office/drawing/2014/main" id="{AD61DDED-5184-4FBC-8304-224A7F6D34DA}"/>
+                <a16:creationId xmlns:a16="http://schemas.microsoft.com/office/drawing/2014/main" id="{4D5E70E4-A7B4-47AD-ADF6-7661704FE307}"/>
               </a:ext>
             </a:extLst>
           </p:cNvPr>
@@ -22871,7 +22871,7 @@
           <p:cNvPr id="24" name="footer-label-8">
             <a:extLst xmlns:a="http://schemas.openxmlformats.org/drawingml/2006/main">
               <a:ext uri="{FF2B5EF4-FFF2-40B4-BE49-F238E27FC236}">
-                <a16:creationId xmlns:a16="http://schemas.microsoft.com/office/drawing/2014/main" id="{71FC0FDC-0476-428C-8928-7A38580B0B93}"/>
+                <a16:creationId xmlns:a16="http://schemas.microsoft.com/office/drawing/2014/main" id="{E2BFF958-A2E7-4663-ACF9-EEFA725FAA9A}"/>
               </a:ext>
             </a:extLst>
           </p:cNvPr>
@@ -22933,7 +22933,7 @@
           <p:cNvPr id="25" name="footer-page-8">
             <a:extLst xmlns:a="http://schemas.openxmlformats.org/drawingml/2006/main">
               <a:ext uri="{FF2B5EF4-FFF2-40B4-BE49-F238E27FC236}">
-                <a16:creationId xmlns:a16="http://schemas.microsoft.com/office/drawing/2014/main" id="{BAFC5AFF-719A-4CA4-B694-FECC382B3BD6}"/>
+                <a16:creationId xmlns:a16="http://schemas.microsoft.com/office/drawing/2014/main" id="{CBF4551B-97B3-4674-82DE-43F4E5185750}"/>
               </a:ext>
             </a:extLst>
           </p:cNvPr>
@@ -22993,7 +22993,7 @@
     </p:spTree>
     <p:extLst>
       <p:ext uri="{BB962C8B-B14F-4D97-AF65-F5344CB8AC3E}">
-        <p14:creationId xmlns:p14="http://schemas.microsoft.com/office/powerpoint/2010/main" val="206391300"/>
+        <p14:creationId xmlns:p14="http://schemas.microsoft.com/office/powerpoint/2010/main" val="1289066889"/>
       </p:ext>
     </p:extLst>
   </p:cSld>
@@ -23024,7 +23024,7 @@
           <p:cNvPr id="21" name="side-accent-9">
             <a:extLst xmlns:a="http://schemas.openxmlformats.org/drawingml/2006/main">
               <a:ext uri="{FF2B5EF4-FFF2-40B4-BE49-F238E27FC236}">
-                <a16:creationId xmlns:a16="http://schemas.microsoft.com/office/drawing/2014/main" id="{C3ED2AFB-8FA4-44D7-B9EC-61E33B724D76}"/>
+                <a16:creationId xmlns:a16="http://schemas.microsoft.com/office/drawing/2014/main" id="{35776BEE-3C4F-4B86-94D6-6EE2025B26E6}"/>
               </a:ext>
             </a:extLst>
           </p:cNvPr>
@@ -23055,7 +23055,7 @@
           <p:cNvPr id="2" name="kicker-9">
             <a:extLst xmlns:a="http://schemas.openxmlformats.org/drawingml/2006/main">
               <a:ext uri="{FF2B5EF4-FFF2-40B4-BE49-F238E27FC236}">
-                <a16:creationId xmlns:a16="http://schemas.microsoft.com/office/drawing/2014/main" id="{ECBD3193-20B1-4F34-8554-75BB30ABDCC7}"/>
+                <a16:creationId xmlns:a16="http://schemas.microsoft.com/office/drawing/2014/main" id="{93A4440B-0D41-4EF4-84A3-9573AFB3C191}"/>
               </a:ext>
             </a:extLst>
           </p:cNvPr>
@@ -23117,7 +23117,7 @@
           <p:cNvPr id="3" name="title-9">
             <a:extLst xmlns:a="http://schemas.openxmlformats.org/drawingml/2006/main">
               <a:ext uri="{FF2B5EF4-FFF2-40B4-BE49-F238E27FC236}">
-                <a16:creationId xmlns:a16="http://schemas.microsoft.com/office/drawing/2014/main" id="{50E195F7-32B1-40FA-A1A9-BBBCA8CDCD1E}"/>
+                <a16:creationId xmlns:a16="http://schemas.microsoft.com/office/drawing/2014/main" id="{85A6F457-E8B1-4E71-A79B-1F1428DC9CC8}"/>
               </a:ext>
             </a:extLst>
           </p:cNvPr>
@@ -23179,7 +23179,7 @@
           <p:cNvPr id="4" name="">
             <a:extLst xmlns:a="http://schemas.openxmlformats.org/drawingml/2006/main">
               <a:ext uri="{FF2B5EF4-FFF2-40B4-BE49-F238E27FC236}">
-                <a16:creationId xmlns:a16="http://schemas.microsoft.com/office/drawing/2014/main" id="{5C6B6DEA-C412-44F5-8B3A-9FCF9052AE82}"/>
+                <a16:creationId xmlns:a16="http://schemas.microsoft.com/office/drawing/2014/main" id="{B744DE88-ABF5-4512-A9C5-FD8CC8823D7B}"/>
               </a:ext>
             </a:extLst>
           </p:cNvPr>
@@ -23241,7 +23241,7 @@
           <p:cNvPr id="5" name="">
             <a:extLst xmlns:a="http://schemas.openxmlformats.org/drawingml/2006/main">
               <a:ext uri="{FF2B5EF4-FFF2-40B4-BE49-F238E27FC236}">
-                <a16:creationId xmlns:a16="http://schemas.microsoft.com/office/drawing/2014/main" id="{63B89627-282F-46D4-A411-E4E83FA88E94}"/>
+                <a16:creationId xmlns:a16="http://schemas.microsoft.com/office/drawing/2014/main" id="{74892562-6674-4573-AC60-426A93B90A4F}"/>
               </a:ext>
             </a:extLst>
           </p:cNvPr>
@@ -23272,7 +23272,7 @@
           <p:cNvPr id="6" name="">
             <a:extLst xmlns:a="http://schemas.openxmlformats.org/drawingml/2006/main">
               <a:ext uri="{FF2B5EF4-FFF2-40B4-BE49-F238E27FC236}">
-                <a16:creationId xmlns:a16="http://schemas.microsoft.com/office/drawing/2014/main" id="{FF18572C-2C4B-49D0-9B8C-DAE574AF7B94}"/>
+                <a16:creationId xmlns:a16="http://schemas.microsoft.com/office/drawing/2014/main" id="{E8020635-C867-4150-BD16-833C7FDB2781}"/>
               </a:ext>
             </a:extLst>
           </p:cNvPr>
@@ -23334,7 +23334,7 @@
           <p:cNvPr id="7" name="">
             <a:extLst xmlns:a="http://schemas.openxmlformats.org/drawingml/2006/main">
               <a:ext uri="{FF2B5EF4-FFF2-40B4-BE49-F238E27FC236}">
-                <a16:creationId xmlns:a16="http://schemas.microsoft.com/office/drawing/2014/main" id="{5C2040C6-6FF2-4A48-81AA-F20B28E0BAC3}"/>
+                <a16:creationId xmlns:a16="http://schemas.microsoft.com/office/drawing/2014/main" id="{7033517E-40D5-4391-8EF1-CEC8931871B5}"/>
               </a:ext>
             </a:extLst>
           </p:cNvPr>
@@ -23396,7 +23396,7 @@
           <p:cNvPr id="8" name="">
             <a:extLst xmlns:a="http://schemas.openxmlformats.org/drawingml/2006/main">
               <a:ext uri="{FF2B5EF4-FFF2-40B4-BE49-F238E27FC236}">
-                <a16:creationId xmlns:a16="http://schemas.microsoft.com/office/drawing/2014/main" id="{D39A0AD7-F433-4F8B-BBFF-1493D94FE863}"/>
+                <a16:creationId xmlns:a16="http://schemas.microsoft.com/office/drawing/2014/main" id="{A0CA175A-3829-4F64-984F-A59C41632518}"/>
               </a:ext>
             </a:extLst>
           </p:cNvPr>
@@ -23458,7 +23458,7 @@
           <p:cNvPr id="9" name="">
             <a:extLst xmlns:a="http://schemas.openxmlformats.org/drawingml/2006/main">
               <a:ext uri="{FF2B5EF4-FFF2-40B4-BE49-F238E27FC236}">
-                <a16:creationId xmlns:a16="http://schemas.microsoft.com/office/drawing/2014/main" id="{039FDEF1-E33B-43F9-BB77-113A79F129BA}"/>
+                <a16:creationId xmlns:a16="http://schemas.microsoft.com/office/drawing/2014/main" id="{452C76CC-2959-462B-A059-CF19A94F31DE}"/>
               </a:ext>
             </a:extLst>
           </p:cNvPr>
@@ -23489,7 +23489,7 @@
           <p:cNvPr id="10" name="">
             <a:extLst xmlns:a="http://schemas.openxmlformats.org/drawingml/2006/main">
               <a:ext uri="{FF2B5EF4-FFF2-40B4-BE49-F238E27FC236}">
-                <a16:creationId xmlns:a16="http://schemas.microsoft.com/office/drawing/2014/main" id="{FC9F9F88-7E02-4E36-9DF8-3DA6EF22ED61}"/>
+                <a16:creationId xmlns:a16="http://schemas.microsoft.com/office/drawing/2014/main" id="{0FDC6F18-5833-48E1-B7F2-EBFD98C30CF7}"/>
               </a:ext>
             </a:extLst>
           </p:cNvPr>
@@ -23551,7 +23551,7 @@
           <p:cNvPr id="11" name="">
             <a:extLst xmlns:a="http://schemas.openxmlformats.org/drawingml/2006/main">
               <a:ext uri="{FF2B5EF4-FFF2-40B4-BE49-F238E27FC236}">
-                <a16:creationId xmlns:a16="http://schemas.microsoft.com/office/drawing/2014/main" id="{1EEA6CFB-F9E5-4CC6-8943-F043F5949529}"/>
+                <a16:creationId xmlns:a16="http://schemas.microsoft.com/office/drawing/2014/main" id="{DA3397E1-AF8F-4956-B864-B848509DA7A4}"/>
               </a:ext>
             </a:extLst>
           </p:cNvPr>
@@ -23613,7 +23613,7 @@
           <p:cNvPr id="12" name="">
             <a:extLst xmlns:a="http://schemas.openxmlformats.org/drawingml/2006/main">
               <a:ext uri="{FF2B5EF4-FFF2-40B4-BE49-F238E27FC236}">
-                <a16:creationId xmlns:a16="http://schemas.microsoft.com/office/drawing/2014/main" id="{B5D97D75-8A3E-4C99-9F60-B4B8E013AE2A}"/>
+                <a16:creationId xmlns:a16="http://schemas.microsoft.com/office/drawing/2014/main" id="{D112C404-4E10-44DC-82C2-9630ECB64B98}"/>
               </a:ext>
             </a:extLst>
           </p:cNvPr>
@@ -23675,7 +23675,7 @@
           <p:cNvPr id="13" name="">
             <a:extLst xmlns:a="http://schemas.openxmlformats.org/drawingml/2006/main">
               <a:ext uri="{FF2B5EF4-FFF2-40B4-BE49-F238E27FC236}">
-                <a16:creationId xmlns:a16="http://schemas.microsoft.com/office/drawing/2014/main" id="{771E8AF9-B63E-42E3-ABAD-07CFC71EE5C9}"/>
+                <a16:creationId xmlns:a16="http://schemas.microsoft.com/office/drawing/2014/main" id="{1F4435BA-3482-4FB0-84E7-0038BD07E94F}"/>
               </a:ext>
             </a:extLst>
           </p:cNvPr>
@@ -23706,7 +23706,7 @@
           <p:cNvPr id="14" name="">
             <a:extLst xmlns:a="http://schemas.openxmlformats.org/drawingml/2006/main">
               <a:ext uri="{FF2B5EF4-FFF2-40B4-BE49-F238E27FC236}">
-                <a16:creationId xmlns:a16="http://schemas.microsoft.com/office/drawing/2014/main" id="{AA3E653F-C371-4AE9-A060-CBEE43D734F3}"/>
+                <a16:creationId xmlns:a16="http://schemas.microsoft.com/office/drawing/2014/main" id="{A4517D6D-C3BD-4577-AD86-3BF8035C52CA}"/>
               </a:ext>
             </a:extLst>
           </p:cNvPr>
@@ -23768,7 +23768,7 @@
           <p:cNvPr id="15" name="">
             <a:extLst xmlns:a="http://schemas.openxmlformats.org/drawingml/2006/main">
               <a:ext uri="{FF2B5EF4-FFF2-40B4-BE49-F238E27FC236}">
-                <a16:creationId xmlns:a16="http://schemas.microsoft.com/office/drawing/2014/main" id="{667900E2-D344-4FF1-A113-3CBF47CA8E34}"/>
+                <a16:creationId xmlns:a16="http://schemas.microsoft.com/office/drawing/2014/main" id="{0612EA81-EC5A-46E7-9685-78BDE609746B}"/>
               </a:ext>
             </a:extLst>
           </p:cNvPr>
@@ -23830,7 +23830,7 @@
           <p:cNvPr id="16" name="">
             <a:extLst xmlns:a="http://schemas.openxmlformats.org/drawingml/2006/main">
               <a:ext uri="{FF2B5EF4-FFF2-40B4-BE49-F238E27FC236}">
-                <a16:creationId xmlns:a16="http://schemas.microsoft.com/office/drawing/2014/main" id="{D9ED3AEB-F6DA-45FA-B105-7BB58DEB8549}"/>
+                <a16:creationId xmlns:a16="http://schemas.microsoft.com/office/drawing/2014/main" id="{7AAC4884-97AB-4279-A728-E0F5F0025C6D}"/>
               </a:ext>
             </a:extLst>
           </p:cNvPr>
@@ -23892,7 +23892,7 @@
           <p:cNvPr id="17" name="">
             <a:extLst xmlns:a="http://schemas.openxmlformats.org/drawingml/2006/main">
               <a:ext uri="{FF2B5EF4-FFF2-40B4-BE49-F238E27FC236}">
-                <a16:creationId xmlns:a16="http://schemas.microsoft.com/office/drawing/2014/main" id="{48D02096-53F8-4F90-BEEA-185A101B5A15}"/>
+                <a16:creationId xmlns:a16="http://schemas.microsoft.com/office/drawing/2014/main" id="{83134EE7-A01A-48E3-8A28-828533BEEB64}"/>
               </a:ext>
             </a:extLst>
           </p:cNvPr>
@@ -23954,7 +23954,7 @@
           <p:cNvPr id="18" name="footer-rule-9">
             <a:extLst xmlns:a="http://schemas.openxmlformats.org/drawingml/2006/main">
               <a:ext uri="{FF2B5EF4-FFF2-40B4-BE49-F238E27FC236}">
-                <a16:creationId xmlns:a16="http://schemas.microsoft.com/office/drawing/2014/main" id="{F3043D58-D58A-484B-ABD0-A14F488C3495}"/>
+                <a16:creationId xmlns:a16="http://schemas.microsoft.com/office/drawing/2014/main" id="{9E706026-367B-4796-B795-D046C0DC903C}"/>
               </a:ext>
             </a:extLst>
           </p:cNvPr>
@@ -23985,7 +23985,7 @@
           <p:cNvPr id="19" name="footer-label-9">
             <a:extLst xmlns:a="http://schemas.openxmlformats.org/drawingml/2006/main">
               <a:ext uri="{FF2B5EF4-FFF2-40B4-BE49-F238E27FC236}">
-                <a16:creationId xmlns:a16="http://schemas.microsoft.com/office/drawing/2014/main" id="{91E632A4-B2DD-4AF8-8D34-C3938BEEBEA2}"/>
+                <a16:creationId xmlns:a16="http://schemas.microsoft.com/office/drawing/2014/main" id="{CD7518B4-0CF1-4E79-BF2E-BF01CB9CDE83}"/>
               </a:ext>
             </a:extLst>
           </p:cNvPr>
@@ -24047,7 +24047,7 @@
           <p:cNvPr id="20" name="footer-page-9">
             <a:extLst xmlns:a="http://schemas.openxmlformats.org/drawingml/2006/main">
               <a:ext uri="{FF2B5EF4-FFF2-40B4-BE49-F238E27FC236}">
-                <a16:creationId xmlns:a16="http://schemas.microsoft.com/office/drawing/2014/main" id="{D6FE0F49-F300-4A1B-9687-9FD157CD629C}"/>
+                <a16:creationId xmlns:a16="http://schemas.microsoft.com/office/drawing/2014/main" id="{DB7B14EE-F81E-46E6-9488-8C8CC223EF9C}"/>
               </a:ext>
             </a:extLst>
           </p:cNvPr>
@@ -24107,7 +24107,7 @@
     </p:spTree>
     <p:extLst>
       <p:ext uri="{BB962C8B-B14F-4D97-AF65-F5344CB8AC3E}">
-        <p14:creationId xmlns:p14="http://schemas.microsoft.com/office/powerpoint/2010/main" val="1903182512"/>
+        <p14:creationId xmlns:p14="http://schemas.microsoft.com/office/powerpoint/2010/main" val="1019871136"/>
       </p:ext>
     </p:extLst>
   </p:cSld>
